--- a/outputs/vertex-palace-build-week-demo.pptx
+++ b/outputs/vertex-palace-build-week-demo.pptx
@@ -2,20 +2,20 @@
 <file path=ppt/presentation.xml><?xml version="1.0" encoding="utf-8"?>
 <p:presentation xmlns:p="http://schemas.openxmlformats.org/presentationml/2006/main">
   <p:sldMasterIdLst>
-    <p:sldMasterId xmlns:r="http://schemas.openxmlformats.org/officeDocument/2006/relationships" id="2147483648" r:id="R912c9a5baca9456e"/>
+    <p:sldMasterId xmlns:r="http://schemas.openxmlformats.org/officeDocument/2006/relationships" id="2147483648" r:id="Ree44bf9335644666"/>
   </p:sldMasterIdLst>
   <p:notesMasterIdLst>
-    <p:notesMasterId xmlns:r="http://schemas.openxmlformats.org/officeDocument/2006/relationships" r:id="R9823172bfb3b4dd3"/>
+    <p:notesMasterId xmlns:r="http://schemas.openxmlformats.org/officeDocument/2006/relationships" r:id="Rc98aa339755b45d2"/>
   </p:notesMasterIdLst>
   <p:sldIdLst>
-    <p:sldId xmlns:r="http://schemas.openxmlformats.org/officeDocument/2006/relationships" id="256" r:id="R7a6a1aad2d4b4843"/>
-    <p:sldId xmlns:r="http://schemas.openxmlformats.org/officeDocument/2006/relationships" id="257" r:id="R005125e0c92040e5"/>
-    <p:sldId xmlns:r="http://schemas.openxmlformats.org/officeDocument/2006/relationships" id="258" r:id="Re2c08d55d21d49b6"/>
-    <p:sldId xmlns:r="http://schemas.openxmlformats.org/officeDocument/2006/relationships" id="259" r:id="Ra9b4943a0e0546b9"/>
-    <p:sldId xmlns:r="http://schemas.openxmlformats.org/officeDocument/2006/relationships" id="260" r:id="R07cebb8b9a344ec9"/>
-    <p:sldId xmlns:r="http://schemas.openxmlformats.org/officeDocument/2006/relationships" id="261" r:id="R3a3ac93bbf0b439b"/>
-    <p:sldId xmlns:r="http://schemas.openxmlformats.org/officeDocument/2006/relationships" id="262" r:id="Ra50b6d9c070e45ae"/>
-    <p:sldId xmlns:r="http://schemas.openxmlformats.org/officeDocument/2006/relationships" id="263" r:id="R8bdfaaf9d0b4401f"/>
+    <p:sldId xmlns:r="http://schemas.openxmlformats.org/officeDocument/2006/relationships" id="256" r:id="R131d1e2aa3984a09"/>
+    <p:sldId xmlns:r="http://schemas.openxmlformats.org/officeDocument/2006/relationships" id="257" r:id="R0e224fd3b0ea4cd5"/>
+    <p:sldId xmlns:r="http://schemas.openxmlformats.org/officeDocument/2006/relationships" id="258" r:id="R1b859cddd684407b"/>
+    <p:sldId xmlns:r="http://schemas.openxmlformats.org/officeDocument/2006/relationships" id="259" r:id="Rc5188e4aadc34b76"/>
+    <p:sldId xmlns:r="http://schemas.openxmlformats.org/officeDocument/2006/relationships" id="260" r:id="R02eaf360ec414d5e"/>
+    <p:sldId xmlns:r="http://schemas.openxmlformats.org/officeDocument/2006/relationships" id="261" r:id="R8d53dc85e8714916"/>
+    <p:sldId xmlns:r="http://schemas.openxmlformats.org/officeDocument/2006/relationships" id="262" r:id="R56009698a3ed4950"/>
+    <p:sldId xmlns:r="http://schemas.openxmlformats.org/officeDocument/2006/relationships" id="263" r:id="Rd7b6dbc3d9d34784"/>
   </p:sldIdLst>
   <p:sldSz cx="12192000" cy="6858000"/>
   <p:notesSz cx="6858000" cy="9144000"/>
@@ -619,12 +619,12 @@
           <a:lstStyle xmlns:a="http://schemas.openxmlformats.org/drawingml/2006/main"/>
           <a:p xmlns:a="http://schemas.openxmlformats.org/drawingml/2006/main">
             <a:r>
-              <a:t>Explain the problem in plain language. Large repositories make the agent search widely, reread context, and forget earlier decisions or deployment pitfalls.</a:t>
-            </a:r>
-          </a:p>
-          <a:p xmlns:a="http://schemas.openxmlformats.org/drawingml/2006/main">
-            <a:r>
-              <a:t>Do not claim that all broad inspection is waste. The point is that the agent needs a task-specific entry path.</a:t>
+              <a:t>Speak in the first person. Vertex Palace began with a recurring problem in my own large projects: a single issue could take more than an hour, while token usage climbed as the agent rediscovered files, relationships, and earlier decisions.</a:t>
+            </a:r>
+          </a:p>
+          <a:p xmlns:a="http://schemas.openxmlformats.org/drawingml/2006/main">
+            <a:r>
+              <a:t>This was the point where I stopped treating the context cost as an inconvenience and decided to build a task-specific entry path. Do not present this personal experience as a universal benchmark result.</a:t>
             </a:r>
           </a:p>
         </p:txBody>
@@ -694,7 +694,12 @@
           <a:lstStyle xmlns:a="http://schemas.openxmlformats.org/drawingml/2006/main"/>
           <a:p xmlns:a="http://schemas.openxmlformats.org/drawingml/2006/main">
             <a:r>
-              <a:t>Walk left to right: index the repository structure, select an adaptive mode, pack only primary and supporting context, execute the task, then preserve relevant decisions and pitfalls.</a:t>
+              <a:t>The inspiration came from the human memory-palace technique: assign knowledge to places, then follow a route to retrieve it. Vertex Palace maps repository domains to floors, features to rooms, and files and symbols to smaller storage layers.</a:t>
+            </a:r>
+          </a:p>
+          <a:p xmlns:a="http://schemas.openxmlformats.org/drawingml/2006/main">
+            <a:r>
+              <a:t>Walk left to right: index the repository structure, select an adaptive mode, pack only primary and supporting context, execute the task, then preserve relevant decisions and pitfalls at the entrance for the next task.</a:t>
             </a:r>
           </a:p>
           <a:p xmlns:a="http://schemas.openxmlformats.org/drawingml/2006/main">
@@ -1147,7 +1152,7 @@
   </p:cSld>
   <p:clrMap bg1="lt1" tx1="dk1" bg2="lt2" tx2="dk2" accent1="accent1" accent2="accent2" accent3="accent3" accent4="accent4" accent5="accent5" accent6="accent6" hlink="hlink" folHlink="folHlink"/>
   <p:sldLayoutIdLst>
-    <p:sldLayoutId xmlns:r="http://schemas.openxmlformats.org/officeDocument/2006/relationships" id="2147483649" r:id="R08ab4793d8b949a7"/>
+    <p:sldLayoutId xmlns:r="http://schemas.openxmlformats.org/officeDocument/2006/relationships" id="2147483649" r:id="R0902ee43faeb40ea"/>
   </p:sldLayoutIdLst>
   <p:txStyles>
     <p:titleStyle>
@@ -2039,7 +2044,7 @@
           <p:cNvPr id="7" name="s1-eyebrow">
             <a:extLst xmlns:a="http://schemas.openxmlformats.org/drawingml/2006/main">
               <a:ext uri="{FF2B5EF4-FFF2-40B4-BE49-F238E27FC236}">
-                <a16:creationId xmlns:a16="http://schemas.microsoft.com/office/drawing/2014/main" id="{03938B8F-9401-4D99-9F04-3FF351557AAA}"/>
+                <a16:creationId xmlns:a16="http://schemas.microsoft.com/office/drawing/2014/main" id="{C9BAD10D-D100-46F6-B29C-35EEBEA7F4C4}"/>
               </a:ext>
             </a:extLst>
           </p:cNvPr>
@@ -2084,7 +2089,7 @@
           <p:cNvPr id="2" name="s1-title">
             <a:extLst xmlns:a="http://schemas.openxmlformats.org/drawingml/2006/main">
               <a:ext uri="{FF2B5EF4-FFF2-40B4-BE49-F238E27FC236}">
-                <a16:creationId xmlns:a16="http://schemas.microsoft.com/office/drawing/2014/main" id="{C6964373-B123-4D5B-B8BB-4C65FFD92FB3}"/>
+                <a16:creationId xmlns:a16="http://schemas.microsoft.com/office/drawing/2014/main" id="{65668104-24CF-4A09-85F4-456208D4F40A}"/>
               </a:ext>
             </a:extLst>
           </p:cNvPr>
@@ -2152,7 +2157,7 @@
           <p:cNvPr id="4" name="s1-subtitle">
             <a:extLst xmlns:a="http://schemas.openxmlformats.org/drawingml/2006/main">
               <a:ext uri="{FF2B5EF4-FFF2-40B4-BE49-F238E27FC236}">
-                <a16:creationId xmlns:a16="http://schemas.microsoft.com/office/drawing/2014/main" id="{9EAD236D-6F0A-46A1-B2C2-6C427BDEE33C}"/>
+                <a16:creationId xmlns:a16="http://schemas.microsoft.com/office/drawing/2014/main" id="{307ADBE3-367C-427C-B41C-28D8304A314B}"/>
               </a:ext>
             </a:extLst>
           </p:cNvPr>
@@ -2197,7 +2202,7 @@
           <p:cNvPr id="5" name="s1-version">
             <a:extLst xmlns:a="http://schemas.openxmlformats.org/drawingml/2006/main">
               <a:ext uri="{FF2B5EF4-FFF2-40B4-BE49-F238E27FC236}">
-                <a16:creationId xmlns:a16="http://schemas.microsoft.com/office/drawing/2014/main" id="{BBB4C90D-B0D0-4D3A-9845-A25193521DDE}"/>
+                <a16:creationId xmlns:a16="http://schemas.microsoft.com/office/drawing/2014/main" id="{70875ACA-49B9-43F0-A67F-7BD6D6DAA45D}"/>
               </a:ext>
             </a:extLst>
           </p:cNvPr>
@@ -2246,7 +2251,7 @@
           <p:nvPr/>
         </p:nvPicPr>
         <p:blipFill>
-          <a:blip xmlns:r="http://schemas.openxmlformats.org/officeDocument/2006/relationships" xmlns:a="http://schemas.openxmlformats.org/drawingml/2006/main" r:embed="R45b29ed6f1c84063"/>
+          <a:blip xmlns:r="http://schemas.openxmlformats.org/officeDocument/2006/relationships" xmlns:a="http://schemas.openxmlformats.org/drawingml/2006/main" r:embed="Rac4445891b354050"/>
           <a:stretch xmlns:a="http://schemas.openxmlformats.org/drawingml/2006/main"/>
         </p:blipFill>
         <p:spPr>
@@ -2262,7 +2267,7 @@
     </p:spTree>
     <p:extLst>
       <p:ext uri="{BB962C8B-B14F-4D97-AF65-F5344CB8AC3E}">
-        <p14:creationId xmlns:p14="http://schemas.microsoft.com/office/powerpoint/2010/main" val="212124495"/>
+        <p14:creationId xmlns:p14="http://schemas.microsoft.com/office/powerpoint/2010/main" val="1199054850"/>
       </p:ext>
     </p:extLst>
   </p:cSld>
@@ -2293,7 +2298,7 @@
           <p:cNvPr id="33" name="s2-title">
             <a:extLst xmlns:a="http://schemas.openxmlformats.org/drawingml/2006/main">
               <a:ext uri="{FF2B5EF4-FFF2-40B4-BE49-F238E27FC236}">
-                <a16:creationId xmlns:a16="http://schemas.microsoft.com/office/drawing/2014/main" id="{BB77534F-F9AA-4132-910A-DB96851312C1}"/>
+                <a16:creationId xmlns:a16="http://schemas.microsoft.com/office/drawing/2014/main" id="{652C5319-8479-4A01-A996-AF2A32B16EDE}"/>
               </a:ext>
             </a:extLst>
           </p:cNvPr>
@@ -2328,7 +2333,7 @@
               </a:defRPr>
             </a:pPr>
             <a:r>
-              <a:t>A repository is structured. Agent context often is not.</a:t>
+              <a:t>As my projects grew, one issue could take over an hour.</a:t>
             </a:r>
           </a:p>
         </p:txBody>
@@ -2338,7 +2343,7 @@
           <p:cNvPr id="2" name="s2-subtitle">
             <a:extLst xmlns:a="http://schemas.openxmlformats.org/drawingml/2006/main">
               <a:ext uri="{FF2B5EF4-FFF2-40B4-BE49-F238E27FC236}">
-                <a16:creationId xmlns:a16="http://schemas.microsoft.com/office/drawing/2014/main" id="{8F755787-EACB-4CD2-85B9-539CBAE09396}"/>
+                <a16:creationId xmlns:a16="http://schemas.microsoft.com/office/drawing/2014/main" id="{F23EEC23-A893-47E9-81E0-363EA7CCE6D6}"/>
               </a:ext>
             </a:extLst>
           </p:cNvPr>
@@ -2350,7 +2355,7 @@
         <p:spPr>
           <a:xfrm xmlns:a="http://schemas.openxmlformats.org/drawingml/2006/main">
             <a:off x="400050" y="1066800"/>
-            <a:ext cx="7715250" cy="381000"/>
+            <a:ext cx="11391900" cy="381000"/>
           </a:xfrm>
           <a:prstGeom xmlns:a="http://schemas.openxmlformats.org/drawingml/2006/main" prst="rect">
             <a:avLst/>
@@ -2373,7 +2378,7 @@
               </a:defRPr>
             </a:pPr>
             <a:r>
-              <a:t>Without a route, the agent repeatedly fans out across files and history.</a:t>
+              <a:t>Token use became just as unreasonable as the agent repeatedly rediscovered the same repository.</a:t>
             </a:r>
           </a:p>
         </p:txBody>
@@ -2493,7 +2498,7 @@
           <p:cNvPr id="8" name="s2-agent">
             <a:extLst xmlns:a="http://schemas.openxmlformats.org/drawingml/2006/main">
               <a:ext uri="{FF2B5EF4-FFF2-40B4-BE49-F238E27FC236}">
-                <a16:creationId xmlns:a16="http://schemas.microsoft.com/office/drawing/2014/main" id="{84A070B6-0251-4CDA-8F0D-ABE6A4ACF9AD}"/>
+                <a16:creationId xmlns:a16="http://schemas.microsoft.com/office/drawing/2014/main" id="{952457D8-E0AD-42F1-B51A-87BF700BB257}"/>
               </a:ext>
             </a:extLst>
           </p:cNvPr>
@@ -2526,7 +2531,7 @@
           <p:cNvPr id="9" name="s2-agent-label">
             <a:extLst xmlns:a="http://schemas.openxmlformats.org/drawingml/2006/main">
               <a:ext uri="{FF2B5EF4-FFF2-40B4-BE49-F238E27FC236}">
-                <a16:creationId xmlns:a16="http://schemas.microsoft.com/office/drawing/2014/main" id="{6CF39E17-8373-440C-B2F0-D6AE2D150E4F}"/>
+                <a16:creationId xmlns:a16="http://schemas.microsoft.com/office/drawing/2014/main" id="{F77C85EF-E588-4129-9299-BCA943D51270}"/>
               </a:ext>
             </a:extLst>
           </p:cNvPr>
@@ -2571,7 +2576,7 @@
           <p:cNvPr id="10" name="s2-file-a">
             <a:extLst xmlns:a="http://schemas.openxmlformats.org/drawingml/2006/main">
               <a:ext uri="{FF2B5EF4-FFF2-40B4-BE49-F238E27FC236}">
-                <a16:creationId xmlns:a16="http://schemas.microsoft.com/office/drawing/2014/main" id="{474F3837-C022-4015-BDF4-6426BB161B32}"/>
+                <a16:creationId xmlns:a16="http://schemas.microsoft.com/office/drawing/2014/main" id="{E25DE2F3-5816-465E-B5D8-85F5EA5B7B04}"/>
               </a:ext>
             </a:extLst>
           </p:cNvPr>
@@ -2604,7 +2609,7 @@
           <p:cNvPr id="11" name="s2-file-b">
             <a:extLst xmlns:a="http://schemas.openxmlformats.org/drawingml/2006/main">
               <a:ext uri="{FF2B5EF4-FFF2-40B4-BE49-F238E27FC236}">
-                <a16:creationId xmlns:a16="http://schemas.microsoft.com/office/drawing/2014/main" id="{1F9D2184-C282-423E-ADA8-41ACF4852C06}"/>
+                <a16:creationId xmlns:a16="http://schemas.microsoft.com/office/drawing/2014/main" id="{BDB7543C-1AF2-4437-B019-E3AE12963C32}"/>
               </a:ext>
             </a:extLst>
           </p:cNvPr>
@@ -2637,7 +2642,7 @@
           <p:cNvPr id="12" name="s2-file-c">
             <a:extLst xmlns:a="http://schemas.openxmlformats.org/drawingml/2006/main">
               <a:ext uri="{FF2B5EF4-FFF2-40B4-BE49-F238E27FC236}">
-                <a16:creationId xmlns:a16="http://schemas.microsoft.com/office/drawing/2014/main" id="{B1B70562-D81A-4886-87E8-A3D80BA646BC}"/>
+                <a16:creationId xmlns:a16="http://schemas.microsoft.com/office/drawing/2014/main" id="{CE506F9F-AC1C-4B4A-95B1-350D04A85CF9}"/>
               </a:ext>
             </a:extLst>
           </p:cNvPr>
@@ -2670,7 +2675,7 @@
           <p:cNvPr id="13" name="s2-file-d">
             <a:extLst xmlns:a="http://schemas.openxmlformats.org/drawingml/2006/main">
               <a:ext uri="{FF2B5EF4-FFF2-40B4-BE49-F238E27FC236}">
-                <a16:creationId xmlns:a16="http://schemas.microsoft.com/office/drawing/2014/main" id="{7592179F-30DA-4397-A78C-CA17A2F6BC34}"/>
+                <a16:creationId xmlns:a16="http://schemas.microsoft.com/office/drawing/2014/main" id="{D645ECDD-670D-4934-B048-87EAB7D19EB8}"/>
               </a:ext>
             </a:extLst>
           </p:cNvPr>
@@ -2703,7 +2708,7 @@
           <p:cNvPr id="14" name="s2-file-e">
             <a:extLst xmlns:a="http://schemas.openxmlformats.org/drawingml/2006/main">
               <a:ext uri="{FF2B5EF4-FFF2-40B4-BE49-F238E27FC236}">
-                <a16:creationId xmlns:a16="http://schemas.microsoft.com/office/drawing/2014/main" id="{DBBF86A9-80E5-4593-A0FB-378DE345A095}"/>
+                <a16:creationId xmlns:a16="http://schemas.microsoft.com/office/drawing/2014/main" id="{AB99B7B3-9C63-4FBF-9470-48EFF288786B}"/>
               </a:ext>
             </a:extLst>
           </p:cNvPr>
@@ -2736,7 +2741,7 @@
           <p:cNvPr id="15" name="s2-file-a-label">
             <a:extLst xmlns:a="http://schemas.openxmlformats.org/drawingml/2006/main">
               <a:ext uri="{FF2B5EF4-FFF2-40B4-BE49-F238E27FC236}">
-                <a16:creationId xmlns:a16="http://schemas.microsoft.com/office/drawing/2014/main" id="{52C289BA-ED16-45F6-BAEC-209AF30A9194}"/>
+                <a16:creationId xmlns:a16="http://schemas.microsoft.com/office/drawing/2014/main" id="{009650EF-6DC2-4FD3-8230-57AEC17762E7}"/>
               </a:ext>
             </a:extLst>
           </p:cNvPr>
@@ -2781,7 +2786,7 @@
           <p:cNvPr id="16" name="s2-file-b-label">
             <a:extLst xmlns:a="http://schemas.openxmlformats.org/drawingml/2006/main">
               <a:ext uri="{FF2B5EF4-FFF2-40B4-BE49-F238E27FC236}">
-                <a16:creationId xmlns:a16="http://schemas.microsoft.com/office/drawing/2014/main" id="{371A28E6-3656-4CE0-9306-575838710869}"/>
+                <a16:creationId xmlns:a16="http://schemas.microsoft.com/office/drawing/2014/main" id="{206287A0-0D71-417D-9323-BD356B9E1F30}"/>
               </a:ext>
             </a:extLst>
           </p:cNvPr>
@@ -2826,7 +2831,7 @@
           <p:cNvPr id="17" name="s2-file-c-label">
             <a:extLst xmlns:a="http://schemas.openxmlformats.org/drawingml/2006/main">
               <a:ext uri="{FF2B5EF4-FFF2-40B4-BE49-F238E27FC236}">
-                <a16:creationId xmlns:a16="http://schemas.microsoft.com/office/drawing/2014/main" id="{4D232135-AA59-4957-83E7-00A6160E59DD}"/>
+                <a16:creationId xmlns:a16="http://schemas.microsoft.com/office/drawing/2014/main" id="{9EFF31B8-0D5E-4438-9973-3F302892D7E7}"/>
               </a:ext>
             </a:extLst>
           </p:cNvPr>
@@ -2871,7 +2876,7 @@
           <p:cNvPr id="18" name="s2-file-d-label">
             <a:extLst xmlns:a="http://schemas.openxmlformats.org/drawingml/2006/main">
               <a:ext uri="{FF2B5EF4-FFF2-40B4-BE49-F238E27FC236}">
-                <a16:creationId xmlns:a16="http://schemas.microsoft.com/office/drawing/2014/main" id="{E0A6DB81-F61D-4F8B-B007-73371BA7B74A}"/>
+                <a16:creationId xmlns:a16="http://schemas.microsoft.com/office/drawing/2014/main" id="{CD0096AC-2AFE-4B0A-B4A5-7F28E314F0CF}"/>
               </a:ext>
             </a:extLst>
           </p:cNvPr>
@@ -2916,7 +2921,7 @@
           <p:cNvPr id="19" name="s2-file-e-label">
             <a:extLst xmlns:a="http://schemas.openxmlformats.org/drawingml/2006/main">
               <a:ext uri="{FF2B5EF4-FFF2-40B4-BE49-F238E27FC236}">
-                <a16:creationId xmlns:a16="http://schemas.microsoft.com/office/drawing/2014/main" id="{907BF0B7-D9A2-4176-824C-04AD2E5B0E6C}"/>
+                <a16:creationId xmlns:a16="http://schemas.microsoft.com/office/drawing/2014/main" id="{D1A04DEF-CED8-482C-80F0-603EDB5572BD}"/>
               </a:ext>
             </a:extLst>
           </p:cNvPr>
@@ -2961,7 +2966,7 @@
           <p:cNvPr id="20" name="s2-n1">
             <a:extLst xmlns:a="http://schemas.openxmlformats.org/drawingml/2006/main">
               <a:ext uri="{FF2B5EF4-FFF2-40B4-BE49-F238E27FC236}">
-                <a16:creationId xmlns:a16="http://schemas.microsoft.com/office/drawing/2014/main" id="{F2A33600-DC10-43DA-9051-472E5629BEDE}"/>
+                <a16:creationId xmlns:a16="http://schemas.microsoft.com/office/drawing/2014/main" id="{54B0AA2E-152C-4877-86BD-E4A7AC425BED}"/>
               </a:ext>
             </a:extLst>
           </p:cNvPr>
@@ -2994,7 +2999,7 @@
           <p:cNvPr id="21" name="s2-n1-label">
             <a:extLst xmlns:a="http://schemas.openxmlformats.org/drawingml/2006/main">
               <a:ext uri="{FF2B5EF4-FFF2-40B4-BE49-F238E27FC236}">
-                <a16:creationId xmlns:a16="http://schemas.microsoft.com/office/drawing/2014/main" id="{D0E9395D-C7D9-4376-B7B3-59C4D49DEFB0}"/>
+                <a16:creationId xmlns:a16="http://schemas.microsoft.com/office/drawing/2014/main" id="{A4F29DD1-F602-43E6-903F-81710190A760}"/>
               </a:ext>
             </a:extLst>
           </p:cNvPr>
@@ -3039,7 +3044,7 @@
           <p:cNvPr id="22" name="s2-p1">
             <a:extLst xmlns:a="http://schemas.openxmlformats.org/drawingml/2006/main">
               <a:ext uri="{FF2B5EF4-FFF2-40B4-BE49-F238E27FC236}">
-                <a16:creationId xmlns:a16="http://schemas.microsoft.com/office/drawing/2014/main" id="{7DEC690F-18E6-4923-8BA3-3279E863381C}"/>
+                <a16:creationId xmlns:a16="http://schemas.microsoft.com/office/drawing/2014/main" id="{25298350-FBC0-4CA0-9F3C-39230D5BC29D}"/>
               </a:ext>
             </a:extLst>
           </p:cNvPr>
@@ -3084,7 +3089,7 @@
           <p:cNvPr id="23" name="s2-n2">
             <a:extLst xmlns:a="http://schemas.openxmlformats.org/drawingml/2006/main">
               <a:ext uri="{FF2B5EF4-FFF2-40B4-BE49-F238E27FC236}">
-                <a16:creationId xmlns:a16="http://schemas.microsoft.com/office/drawing/2014/main" id="{BEF91318-4C46-42D8-B543-666201F7ECF5}"/>
+                <a16:creationId xmlns:a16="http://schemas.microsoft.com/office/drawing/2014/main" id="{E6531A41-12DF-4413-9622-33CCCB7DD2B3}"/>
               </a:ext>
             </a:extLst>
           </p:cNvPr>
@@ -3117,7 +3122,7 @@
           <p:cNvPr id="24" name="s2-n2-label">
             <a:extLst xmlns:a="http://schemas.openxmlformats.org/drawingml/2006/main">
               <a:ext uri="{FF2B5EF4-FFF2-40B4-BE49-F238E27FC236}">
-                <a16:creationId xmlns:a16="http://schemas.microsoft.com/office/drawing/2014/main" id="{AD7C54C5-F54F-4405-A9EF-3A9C34F3641C}"/>
+                <a16:creationId xmlns:a16="http://schemas.microsoft.com/office/drawing/2014/main" id="{6234723A-5B6E-4197-83AA-5C04AAEB4714}"/>
               </a:ext>
             </a:extLst>
           </p:cNvPr>
@@ -3162,7 +3167,7 @@
           <p:cNvPr id="25" name="s2-p2">
             <a:extLst xmlns:a="http://schemas.openxmlformats.org/drawingml/2006/main">
               <a:ext uri="{FF2B5EF4-FFF2-40B4-BE49-F238E27FC236}">
-                <a16:creationId xmlns:a16="http://schemas.microsoft.com/office/drawing/2014/main" id="{CEE263DF-BE37-4EC7-B255-167F415251B0}"/>
+                <a16:creationId xmlns:a16="http://schemas.microsoft.com/office/drawing/2014/main" id="{729C3FF9-5232-45C7-B73F-F6FA4121E56B}"/>
               </a:ext>
             </a:extLst>
           </p:cNvPr>
@@ -3207,7 +3212,7 @@
           <p:cNvPr id="26" name="s2-n3">
             <a:extLst xmlns:a="http://schemas.openxmlformats.org/drawingml/2006/main">
               <a:ext uri="{FF2B5EF4-FFF2-40B4-BE49-F238E27FC236}">
-                <a16:creationId xmlns:a16="http://schemas.microsoft.com/office/drawing/2014/main" id="{98BCC457-4F97-45AA-AABD-4803AB7D686F}"/>
+                <a16:creationId xmlns:a16="http://schemas.microsoft.com/office/drawing/2014/main" id="{1AFAC487-D452-4854-BFE1-52FA51238224}"/>
               </a:ext>
             </a:extLst>
           </p:cNvPr>
@@ -3240,7 +3245,7 @@
           <p:cNvPr id="27" name="s2-n3-label">
             <a:extLst xmlns:a="http://schemas.openxmlformats.org/drawingml/2006/main">
               <a:ext uri="{FF2B5EF4-FFF2-40B4-BE49-F238E27FC236}">
-                <a16:creationId xmlns:a16="http://schemas.microsoft.com/office/drawing/2014/main" id="{7D86C3A0-F65E-4CCE-97AC-9083B16CC46F}"/>
+                <a16:creationId xmlns:a16="http://schemas.microsoft.com/office/drawing/2014/main" id="{00FB4118-EAB5-4692-BCCC-3EFEFD754756}"/>
               </a:ext>
             </a:extLst>
           </p:cNvPr>
@@ -3285,7 +3290,7 @@
           <p:cNvPr id="28" name="s2-p3">
             <a:extLst xmlns:a="http://schemas.openxmlformats.org/drawingml/2006/main">
               <a:ext uri="{FF2B5EF4-FFF2-40B4-BE49-F238E27FC236}">
-                <a16:creationId xmlns:a16="http://schemas.microsoft.com/office/drawing/2014/main" id="{43A3EFAC-692A-48E2-85F5-A4D49CB34D65}"/>
+                <a16:creationId xmlns:a16="http://schemas.microsoft.com/office/drawing/2014/main" id="{529BF1A9-8EFB-498C-B00F-9DDB260AB287}"/>
               </a:ext>
             </a:extLst>
           </p:cNvPr>
@@ -3330,7 +3335,7 @@
           <p:cNvPr id="29" name="s2-takeaway">
             <a:extLst xmlns:a="http://schemas.openxmlformats.org/drawingml/2006/main">
               <a:ext uri="{FF2B5EF4-FFF2-40B4-BE49-F238E27FC236}">
-                <a16:creationId xmlns:a16="http://schemas.microsoft.com/office/drawing/2014/main" id="{5A1579B9-D99E-44DA-B6F1-56B71FB7E614}"/>
+                <a16:creationId xmlns:a16="http://schemas.microsoft.com/office/drawing/2014/main" id="{D0ACB8BD-EE21-4326-B986-8FC8AC8317B6}"/>
               </a:ext>
             </a:extLst>
           </p:cNvPr>
@@ -3365,7 +3370,7 @@
               </a:defRPr>
             </a:pPr>
             <a:r>
-              <a:t>The cost is not only tokens. It is attention spent proving what is irrelevant.</a:t>
+              <a:t>That frustration became the reason I built Vertex Palace.</a:t>
             </a:r>
           </a:p>
         </p:txBody>
@@ -3397,7 +3402,7 @@
           <p:cNvPr id="31" name="footer-source-2">
             <a:extLst xmlns:a="http://schemas.openxmlformats.org/drawingml/2006/main">
               <a:ext uri="{FF2B5EF4-FFF2-40B4-BE49-F238E27FC236}">
-                <a16:creationId xmlns:a16="http://schemas.microsoft.com/office/drawing/2014/main" id="{38D4D3A4-4CC7-429F-B22D-8A41006163BF}"/>
+                <a16:creationId xmlns:a16="http://schemas.microsoft.com/office/drawing/2014/main" id="{F5D6DA4A-4F56-493A-9566-C2D522D6727C}"/>
               </a:ext>
             </a:extLst>
           </p:cNvPr>
@@ -3442,7 +3447,7 @@
           <p:cNvPr id="32" name="footer-number-2">
             <a:extLst xmlns:a="http://schemas.openxmlformats.org/drawingml/2006/main">
               <a:ext uri="{FF2B5EF4-FFF2-40B4-BE49-F238E27FC236}">
-                <a16:creationId xmlns:a16="http://schemas.microsoft.com/office/drawing/2014/main" id="{A9292CFD-30D4-4A57-A124-44445084F5A0}"/>
+                <a16:creationId xmlns:a16="http://schemas.microsoft.com/office/drawing/2014/main" id="{57A1E16F-B221-4BC2-9FD6-36B9A9BC135D}"/>
               </a:ext>
             </a:extLst>
           </p:cNvPr>
@@ -3485,7 +3490,7 @@
     </p:spTree>
     <p:extLst>
       <p:ext uri="{BB962C8B-B14F-4D97-AF65-F5344CB8AC3E}">
-        <p14:creationId xmlns:p14="http://schemas.microsoft.com/office/powerpoint/2010/main" val="426176209"/>
+        <p14:creationId xmlns:p14="http://schemas.microsoft.com/office/powerpoint/2010/main" val="1232146288"/>
       </p:ext>
     </p:extLst>
   </p:cSld>
@@ -3516,7 +3521,7 @@
           <p:cNvPr id="29" name="s3-title">
             <a:extLst xmlns:a="http://schemas.openxmlformats.org/drawingml/2006/main">
               <a:ext uri="{FF2B5EF4-FFF2-40B4-BE49-F238E27FC236}">
-                <a16:creationId xmlns:a16="http://schemas.microsoft.com/office/drawing/2014/main" id="{2D75350B-04D8-4216-9B8C-093B9D682A10}"/>
+                <a16:creationId xmlns:a16="http://schemas.microsoft.com/office/drawing/2014/main" id="{D92F9CBF-9B75-48D7-9978-568567EF54DC}"/>
               </a:ext>
             </a:extLst>
           </p:cNvPr>
@@ -3551,7 +3556,7 @@
               </a:defRPr>
             </a:pPr>
             <a:r>
-              <a:t>One request becomes a bounded, explainable route.</a:t>
+              <a:t>A human memory palace became a map for code.</a:t>
             </a:r>
           </a:p>
         </p:txBody>
@@ -3561,7 +3566,7 @@
           <p:cNvPr id="2" name="s3-subtitle">
             <a:extLst xmlns:a="http://schemas.openxmlformats.org/drawingml/2006/main">
               <a:ext uri="{FF2B5EF4-FFF2-40B4-BE49-F238E27FC236}">
-                <a16:creationId xmlns:a16="http://schemas.microsoft.com/office/drawing/2014/main" id="{1226F62E-28D2-4DB2-9108-54E65698DA59}"/>
+                <a16:creationId xmlns:a16="http://schemas.microsoft.com/office/drawing/2014/main" id="{5C55AC4E-DEDD-46CF-9F11-0449E0E187CD}"/>
               </a:ext>
             </a:extLst>
           </p:cNvPr>
@@ -3573,7 +3578,7 @@
         <p:spPr>
           <a:xfrm xmlns:a="http://schemas.openxmlformats.org/drawingml/2006/main">
             <a:off x="400050" y="1066800"/>
-            <a:ext cx="9239250" cy="381000"/>
+            <a:ext cx="11391900" cy="381000"/>
           </a:xfrm>
           <a:prstGeom xmlns:a="http://schemas.openxmlformats.org/drawingml/2006/main" prst="rect">
             <a:avLst/>
@@ -3596,7 +3601,7 @@
               </a:defRPr>
             </a:pPr>
             <a:r>
-              <a:t>Vertex Palace combines structural indexing, adaptive context, and scoped project memory.</a:t>
+              <a:t>Floors organize domains. Rooms hold features. Routes retrieve context. Pitfalls wait at the entrance.</a:t>
             </a:r>
           </a:p>
         </p:txBody>
@@ -3716,7 +3721,7 @@
           <p:cNvPr id="8" name="s3-repo">
             <a:extLst xmlns:a="http://schemas.openxmlformats.org/drawingml/2006/main">
               <a:ext uri="{FF2B5EF4-FFF2-40B4-BE49-F238E27FC236}">
-                <a16:creationId xmlns:a16="http://schemas.microsoft.com/office/drawing/2014/main" id="{7C3EAB46-D15D-486F-95F6-15FD0941BFE7}"/>
+                <a16:creationId xmlns:a16="http://schemas.microsoft.com/office/drawing/2014/main" id="{2D2EF53F-31C5-4978-ABAA-D68449E00DA8}"/>
               </a:ext>
             </a:extLst>
           </p:cNvPr>
@@ -3751,7 +3756,7 @@
           <p:cNvPr id="9" name="s3-index">
             <a:extLst xmlns:a="http://schemas.openxmlformats.org/drawingml/2006/main">
               <a:ext uri="{FF2B5EF4-FFF2-40B4-BE49-F238E27FC236}">
-                <a16:creationId xmlns:a16="http://schemas.microsoft.com/office/drawing/2014/main" id="{02AF8924-9907-4398-B154-EA9EE1C017E5}"/>
+                <a16:creationId xmlns:a16="http://schemas.microsoft.com/office/drawing/2014/main" id="{1A9AA8D4-1388-42DB-93F7-1519B29C9353}"/>
               </a:ext>
             </a:extLst>
           </p:cNvPr>
@@ -3786,7 +3791,7 @@
           <p:cNvPr id="10" name="s3-mode">
             <a:extLst xmlns:a="http://schemas.openxmlformats.org/drawingml/2006/main">
               <a:ext uri="{FF2B5EF4-FFF2-40B4-BE49-F238E27FC236}">
-                <a16:creationId xmlns:a16="http://schemas.microsoft.com/office/drawing/2014/main" id="{FB9C79DB-8FF6-482C-828B-6293C2AB3B56}"/>
+                <a16:creationId xmlns:a16="http://schemas.microsoft.com/office/drawing/2014/main" id="{0A5361B6-FE8E-4CF3-8B46-BF5CA1F4F179}"/>
               </a:ext>
             </a:extLst>
           </p:cNvPr>
@@ -3821,7 +3826,7 @@
           <p:cNvPr id="11" name="s3-pack">
             <a:extLst xmlns:a="http://schemas.openxmlformats.org/drawingml/2006/main">
               <a:ext uri="{FF2B5EF4-FFF2-40B4-BE49-F238E27FC236}">
-                <a16:creationId xmlns:a16="http://schemas.microsoft.com/office/drawing/2014/main" id="{C42356E4-92A2-46D3-A225-04ED582CAEFE}"/>
+                <a16:creationId xmlns:a16="http://schemas.microsoft.com/office/drawing/2014/main" id="{2A5089C0-ED1A-46E9-AD71-7A84B1788F77}"/>
               </a:ext>
             </a:extLst>
           </p:cNvPr>
@@ -3856,7 +3861,7 @@
           <p:cNvPr id="12" name="s3-task">
             <a:extLst xmlns:a="http://schemas.openxmlformats.org/drawingml/2006/main">
               <a:ext uri="{FF2B5EF4-FFF2-40B4-BE49-F238E27FC236}">
-                <a16:creationId xmlns:a16="http://schemas.microsoft.com/office/drawing/2014/main" id="{649CB1A1-49D3-4EF0-8BCC-4787FF0A78D9}"/>
+                <a16:creationId xmlns:a16="http://schemas.microsoft.com/office/drawing/2014/main" id="{3372EEC0-BB6A-42B0-94B0-B4A2F814F491}"/>
               </a:ext>
             </a:extLst>
           </p:cNvPr>
@@ -3891,7 +3896,7 @@
           <p:cNvPr id="13" name="s3-repo-label">
             <a:extLst xmlns:a="http://schemas.openxmlformats.org/drawingml/2006/main">
               <a:ext uri="{FF2B5EF4-FFF2-40B4-BE49-F238E27FC236}">
-                <a16:creationId xmlns:a16="http://schemas.microsoft.com/office/drawing/2014/main" id="{629BDD9B-C459-4F17-885F-3893511AA8AA}"/>
+                <a16:creationId xmlns:a16="http://schemas.microsoft.com/office/drawing/2014/main" id="{C3D2DF5B-EFC5-494F-A605-521DDE9E1A4B}"/>
               </a:ext>
             </a:extLst>
           </p:cNvPr>
@@ -3936,7 +3941,7 @@
           <p:cNvPr id="14" name="s3-repo-main">
             <a:extLst xmlns:a="http://schemas.openxmlformats.org/drawingml/2006/main">
               <a:ext uri="{FF2B5EF4-FFF2-40B4-BE49-F238E27FC236}">
-                <a16:creationId xmlns:a16="http://schemas.microsoft.com/office/drawing/2014/main" id="{F033DB1B-F1F2-448C-877B-0F0F331BE849}"/>
+                <a16:creationId xmlns:a16="http://schemas.microsoft.com/office/drawing/2014/main" id="{D08BBECF-F87F-404F-B7C6-EFAF4ECC6D17}"/>
               </a:ext>
             </a:extLst>
           </p:cNvPr>
@@ -3981,7 +3986,7 @@
           <p:cNvPr id="15" name="s3-index-label">
             <a:extLst xmlns:a="http://schemas.openxmlformats.org/drawingml/2006/main">
               <a:ext uri="{FF2B5EF4-FFF2-40B4-BE49-F238E27FC236}">
-                <a16:creationId xmlns:a16="http://schemas.microsoft.com/office/drawing/2014/main" id="{A4607E84-91D3-4340-960C-4926E2528823}"/>
+                <a16:creationId xmlns:a16="http://schemas.microsoft.com/office/drawing/2014/main" id="{9CEE3B39-E5AB-43E8-9410-409B433E192D}"/>
               </a:ext>
             </a:extLst>
           </p:cNvPr>
@@ -4026,7 +4031,7 @@
           <p:cNvPr id="16" name="s3-index-main">
             <a:extLst xmlns:a="http://schemas.openxmlformats.org/drawingml/2006/main">
               <a:ext uri="{FF2B5EF4-FFF2-40B4-BE49-F238E27FC236}">
-                <a16:creationId xmlns:a16="http://schemas.microsoft.com/office/drawing/2014/main" id="{94FF517D-11BF-4F2A-94D9-69BB28568F3B}"/>
+                <a16:creationId xmlns:a16="http://schemas.microsoft.com/office/drawing/2014/main" id="{5DE3F261-5714-4F5B-9ED1-5FD182A2F133}"/>
               </a:ext>
             </a:extLst>
           </p:cNvPr>
@@ -4071,7 +4076,7 @@
           <p:cNvPr id="17" name="s3-mode-label">
             <a:extLst xmlns:a="http://schemas.openxmlformats.org/drawingml/2006/main">
               <a:ext uri="{FF2B5EF4-FFF2-40B4-BE49-F238E27FC236}">
-                <a16:creationId xmlns:a16="http://schemas.microsoft.com/office/drawing/2014/main" id="{507034A9-0FE3-4EB2-8138-FB6AFAE351AD}"/>
+                <a16:creationId xmlns:a16="http://schemas.microsoft.com/office/drawing/2014/main" id="{4139FC64-999A-45F7-8770-136EAE227679}"/>
               </a:ext>
             </a:extLst>
           </p:cNvPr>
@@ -4116,7 +4121,7 @@
           <p:cNvPr id="18" name="s3-mode-main">
             <a:extLst xmlns:a="http://schemas.openxmlformats.org/drawingml/2006/main">
               <a:ext uri="{FF2B5EF4-FFF2-40B4-BE49-F238E27FC236}">
-                <a16:creationId xmlns:a16="http://schemas.microsoft.com/office/drawing/2014/main" id="{1B42CB96-CBE5-4028-BA7B-C3C98098F835}"/>
+                <a16:creationId xmlns:a16="http://schemas.microsoft.com/office/drawing/2014/main" id="{39C7742F-62C2-4E76-AC74-8C9448293D94}"/>
               </a:ext>
             </a:extLst>
           </p:cNvPr>
@@ -4161,7 +4166,7 @@
           <p:cNvPr id="19" name="s3-pack-label">
             <a:extLst xmlns:a="http://schemas.openxmlformats.org/drawingml/2006/main">
               <a:ext uri="{FF2B5EF4-FFF2-40B4-BE49-F238E27FC236}">
-                <a16:creationId xmlns:a16="http://schemas.microsoft.com/office/drawing/2014/main" id="{B7529E3F-6E85-4FCA-ACE0-1C675F05DE08}"/>
+                <a16:creationId xmlns:a16="http://schemas.microsoft.com/office/drawing/2014/main" id="{2B5D58DB-5CFC-45B3-9422-23C1CC531681}"/>
               </a:ext>
             </a:extLst>
           </p:cNvPr>
@@ -4206,7 +4211,7 @@
           <p:cNvPr id="20" name="s3-pack-main">
             <a:extLst xmlns:a="http://schemas.openxmlformats.org/drawingml/2006/main">
               <a:ext uri="{FF2B5EF4-FFF2-40B4-BE49-F238E27FC236}">
-                <a16:creationId xmlns:a16="http://schemas.microsoft.com/office/drawing/2014/main" id="{DB4DA38F-68CD-41B2-89BF-1C641C1CDF74}"/>
+                <a16:creationId xmlns:a16="http://schemas.microsoft.com/office/drawing/2014/main" id="{4E32E37A-1023-4D21-B597-282845AFFF57}"/>
               </a:ext>
             </a:extLst>
           </p:cNvPr>
@@ -4251,7 +4256,7 @@
           <p:cNvPr id="21" name="s3-task-label">
             <a:extLst xmlns:a="http://schemas.openxmlformats.org/drawingml/2006/main">
               <a:ext uri="{FF2B5EF4-FFF2-40B4-BE49-F238E27FC236}">
-                <a16:creationId xmlns:a16="http://schemas.microsoft.com/office/drawing/2014/main" id="{98D605FC-4211-4229-B6BF-CFDE55854D9F}"/>
+                <a16:creationId xmlns:a16="http://schemas.microsoft.com/office/drawing/2014/main" id="{C8F5B856-286B-4FF9-A925-B6A5417AB582}"/>
               </a:ext>
             </a:extLst>
           </p:cNvPr>
@@ -4296,7 +4301,7 @@
           <p:cNvPr id="22" name="s3-task-main">
             <a:extLst xmlns:a="http://schemas.openxmlformats.org/drawingml/2006/main">
               <a:ext uri="{FF2B5EF4-FFF2-40B4-BE49-F238E27FC236}">
-                <a16:creationId xmlns:a16="http://schemas.microsoft.com/office/drawing/2014/main" id="{DDEC3D53-8E69-489E-9286-FEEB770D9D45}"/>
+                <a16:creationId xmlns:a16="http://schemas.microsoft.com/office/drawing/2014/main" id="{695CFAC2-62EC-417E-B040-37E950FD429C}"/>
               </a:ext>
             </a:extLst>
           </p:cNvPr>
@@ -4341,7 +4346,7 @@
           <p:cNvPr id="23" name="s3-memory">
             <a:extLst xmlns:a="http://schemas.openxmlformats.org/drawingml/2006/main">
               <a:ext uri="{FF2B5EF4-FFF2-40B4-BE49-F238E27FC236}">
-                <a16:creationId xmlns:a16="http://schemas.microsoft.com/office/drawing/2014/main" id="{50F66902-D3D4-4D63-8A19-E9992C972D6A}"/>
+                <a16:creationId xmlns:a16="http://schemas.microsoft.com/office/drawing/2014/main" id="{66EF50F3-8ABC-450E-B25B-A7FDB7B839F9}"/>
               </a:ext>
             </a:extLst>
           </p:cNvPr>
@@ -4376,7 +4381,7 @@
           <p:cNvPr id="24" name="s3-memory-label">
             <a:extLst xmlns:a="http://schemas.openxmlformats.org/drawingml/2006/main">
               <a:ext uri="{FF2B5EF4-FFF2-40B4-BE49-F238E27FC236}">
-                <a16:creationId xmlns:a16="http://schemas.microsoft.com/office/drawing/2014/main" id="{F97EAA58-99D6-4058-86A5-1567651A6159}"/>
+                <a16:creationId xmlns:a16="http://schemas.microsoft.com/office/drawing/2014/main" id="{11CDE2CB-061F-4DA6-8B4C-B074F0F745CA}"/>
               </a:ext>
             </a:extLst>
           </p:cNvPr>
@@ -4421,7 +4426,7 @@
           <p:cNvPr id="25" name="s3-memory-main">
             <a:extLst xmlns:a="http://schemas.openxmlformats.org/drawingml/2006/main">
               <a:ext uri="{FF2B5EF4-FFF2-40B4-BE49-F238E27FC236}">
-                <a16:creationId xmlns:a16="http://schemas.microsoft.com/office/drawing/2014/main" id="{13687926-CB40-4FDA-9BDC-31A7E973E204}"/>
+                <a16:creationId xmlns:a16="http://schemas.microsoft.com/office/drawing/2014/main" id="{8CA8B7A1-668E-4D96-9618-9520F20C402F}"/>
               </a:ext>
             </a:extLst>
           </p:cNvPr>
@@ -4489,7 +4494,7 @@
           <p:cNvPr id="27" name="footer-source-3">
             <a:extLst xmlns:a="http://schemas.openxmlformats.org/drawingml/2006/main">
               <a:ext uri="{FF2B5EF4-FFF2-40B4-BE49-F238E27FC236}">
-                <a16:creationId xmlns:a16="http://schemas.microsoft.com/office/drawing/2014/main" id="{C8B0C1CF-FEC0-4645-8F8B-566956B0D8EB}"/>
+                <a16:creationId xmlns:a16="http://schemas.microsoft.com/office/drawing/2014/main" id="{B62A79BE-149B-4286-8522-827B65ED8C76}"/>
               </a:ext>
             </a:extLst>
           </p:cNvPr>
@@ -4534,7 +4539,7 @@
           <p:cNvPr id="28" name="footer-number-3">
             <a:extLst xmlns:a="http://schemas.openxmlformats.org/drawingml/2006/main">
               <a:ext uri="{FF2B5EF4-FFF2-40B4-BE49-F238E27FC236}">
-                <a16:creationId xmlns:a16="http://schemas.microsoft.com/office/drawing/2014/main" id="{6B3080F1-48BB-4099-83DF-D16867730071}"/>
+                <a16:creationId xmlns:a16="http://schemas.microsoft.com/office/drawing/2014/main" id="{FDCCC621-878A-40B5-AD45-DFE111C01B65}"/>
               </a:ext>
             </a:extLst>
           </p:cNvPr>
@@ -4577,7 +4582,7 @@
     </p:spTree>
     <p:extLst>
       <p:ext uri="{BB962C8B-B14F-4D97-AF65-F5344CB8AC3E}">
-        <p14:creationId xmlns:p14="http://schemas.microsoft.com/office/powerpoint/2010/main" val="1450612614"/>
+        <p14:creationId xmlns:p14="http://schemas.microsoft.com/office/powerpoint/2010/main" val="1625512413"/>
       </p:ext>
     </p:extLst>
   </p:cSld>
@@ -4608,7 +4613,7 @@
           <p:cNvPr id="26" name="s4-title">
             <a:extLst xmlns:a="http://schemas.openxmlformats.org/drawingml/2006/main">
               <a:ext uri="{FF2B5EF4-FFF2-40B4-BE49-F238E27FC236}">
-                <a16:creationId xmlns:a16="http://schemas.microsoft.com/office/drawing/2014/main" id="{8B8C0188-82E7-4AD9-A8F9-2AF9DC6FF329}"/>
+                <a16:creationId xmlns:a16="http://schemas.microsoft.com/office/drawing/2014/main" id="{74BDA43C-BFDB-43EC-AF4C-0DCE8F9B7618}"/>
               </a:ext>
             </a:extLst>
           </p:cNvPr>
@@ -4653,7 +4658,7 @@
           <p:cNvPr id="2" name="s4-subtitle">
             <a:extLst xmlns:a="http://schemas.openxmlformats.org/drawingml/2006/main">
               <a:ext uri="{FF2B5EF4-FFF2-40B4-BE49-F238E27FC236}">
-                <a16:creationId xmlns:a16="http://schemas.microsoft.com/office/drawing/2014/main" id="{1FA8C591-B717-41F7-85EC-E7BF1EE2E6F2}"/>
+                <a16:creationId xmlns:a16="http://schemas.microsoft.com/office/drawing/2014/main" id="{7418B20B-4660-4729-B812-1C8E72866175}"/>
               </a:ext>
             </a:extLst>
           </p:cNvPr>
@@ -4698,7 +4703,7 @@
           <p:cNvPr id="3" name="s4-terminal">
             <a:extLst xmlns:a="http://schemas.openxmlformats.org/drawingml/2006/main">
               <a:ext uri="{FF2B5EF4-FFF2-40B4-BE49-F238E27FC236}">
-                <a16:creationId xmlns:a16="http://schemas.microsoft.com/office/drawing/2014/main" id="{50E2F904-C757-4D4D-8C5A-813F5AFF1B9E}"/>
+                <a16:creationId xmlns:a16="http://schemas.microsoft.com/office/drawing/2014/main" id="{AEA1B5C2-FBA6-40FD-9AFF-73B8BDE69E5F}"/>
               </a:ext>
             </a:extLst>
           </p:cNvPr>
@@ -4755,7 +4760,7 @@
           <p:cNvPr id="5" name="s4-dot1">
             <a:extLst xmlns:a="http://schemas.openxmlformats.org/drawingml/2006/main">
               <a:ext uri="{FF2B5EF4-FFF2-40B4-BE49-F238E27FC236}">
-                <a16:creationId xmlns:a16="http://schemas.microsoft.com/office/drawing/2014/main" id="{3BB6B074-9212-4971-8044-C5F95D62015E}"/>
+                <a16:creationId xmlns:a16="http://schemas.microsoft.com/office/drawing/2014/main" id="{B2DDEE5B-8847-4D78-9FC8-C3CA87313A5B}"/>
               </a:ext>
             </a:extLst>
           </p:cNvPr>
@@ -4788,7 +4793,7 @@
           <p:cNvPr id="6" name="s4-dot2">
             <a:extLst xmlns:a="http://schemas.openxmlformats.org/drawingml/2006/main">
               <a:ext uri="{FF2B5EF4-FFF2-40B4-BE49-F238E27FC236}">
-                <a16:creationId xmlns:a16="http://schemas.microsoft.com/office/drawing/2014/main" id="{2661CE75-B472-451B-8E7B-F049BE48FF84}"/>
+                <a16:creationId xmlns:a16="http://schemas.microsoft.com/office/drawing/2014/main" id="{A4120322-37E7-4602-806E-41D8EFFB6BD2}"/>
               </a:ext>
             </a:extLst>
           </p:cNvPr>
@@ -4821,7 +4826,7 @@
           <p:cNvPr id="7" name="s4-dot3">
             <a:extLst xmlns:a="http://schemas.openxmlformats.org/drawingml/2006/main">
               <a:ext uri="{FF2B5EF4-FFF2-40B4-BE49-F238E27FC236}">
-                <a16:creationId xmlns:a16="http://schemas.microsoft.com/office/drawing/2014/main" id="{9D0B8205-7F1B-4057-B6AB-13000945E104}"/>
+                <a16:creationId xmlns:a16="http://schemas.microsoft.com/office/drawing/2014/main" id="{FBB6EC7D-42BA-4247-A36C-6FBFEB459E22}"/>
               </a:ext>
             </a:extLst>
           </p:cNvPr>
@@ -4854,7 +4859,7 @@
           <p:cNvPr id="8" name="s4-command-label">
             <a:extLst xmlns:a="http://schemas.openxmlformats.org/drawingml/2006/main">
               <a:ext uri="{FF2B5EF4-FFF2-40B4-BE49-F238E27FC236}">
-                <a16:creationId xmlns:a16="http://schemas.microsoft.com/office/drawing/2014/main" id="{3C980936-3782-4BFF-B638-ED8BD2340ED5}"/>
+                <a16:creationId xmlns:a16="http://schemas.microsoft.com/office/drawing/2014/main" id="{BA374669-918A-48C4-AB7E-F32EE3FA9198}"/>
               </a:ext>
             </a:extLst>
           </p:cNvPr>
@@ -4899,7 +4904,7 @@
           <p:cNvPr id="9" name="s4-command">
             <a:extLst xmlns:a="http://schemas.openxmlformats.org/drawingml/2006/main">
               <a:ext uri="{FF2B5EF4-FFF2-40B4-BE49-F238E27FC236}">
-                <a16:creationId xmlns:a16="http://schemas.microsoft.com/office/drawing/2014/main" id="{D72A38F0-99A7-447E-AB26-6DA7891488A2}"/>
+                <a16:creationId xmlns:a16="http://schemas.microsoft.com/office/drawing/2014/main" id="{9BE86474-632D-43EA-9C9E-89468A5B90E7}"/>
               </a:ext>
             </a:extLst>
           </p:cNvPr>
@@ -4948,7 +4953,7 @@
           <p:cNvPr id="10" name="s4-command-note">
             <a:extLst xmlns:a="http://schemas.openxmlformats.org/drawingml/2006/main">
               <a:ext uri="{FF2B5EF4-FFF2-40B4-BE49-F238E27FC236}">
-                <a16:creationId xmlns:a16="http://schemas.microsoft.com/office/drawing/2014/main" id="{A0B12E46-67A6-4916-A68D-FBA2DED2D2E4}"/>
+                <a16:creationId xmlns:a16="http://schemas.microsoft.com/office/drawing/2014/main" id="{27D11303-38FE-411A-B586-4587331DBDAD}"/>
               </a:ext>
             </a:extLst>
           </p:cNvPr>
@@ -4993,7 +4998,7 @@
           <p:cNvPr id="11" name="s4-output-label">
             <a:extLst xmlns:a="http://schemas.openxmlformats.org/drawingml/2006/main">
               <a:ext uri="{FF2B5EF4-FFF2-40B4-BE49-F238E27FC236}">
-                <a16:creationId xmlns:a16="http://schemas.microsoft.com/office/drawing/2014/main" id="{F4C0B86C-2BAE-4FFB-9698-DDCDA48253AB}"/>
+                <a16:creationId xmlns:a16="http://schemas.microsoft.com/office/drawing/2014/main" id="{F06940CE-1C30-47DD-9F3F-634D6640923D}"/>
               </a:ext>
             </a:extLst>
           </p:cNvPr>
@@ -5038,7 +5043,7 @@
           <p:cNvPr id="12" name="s4-o1a">
             <a:extLst xmlns:a="http://schemas.openxmlformats.org/drawingml/2006/main">
               <a:ext uri="{FF2B5EF4-FFF2-40B4-BE49-F238E27FC236}">
-                <a16:creationId xmlns:a16="http://schemas.microsoft.com/office/drawing/2014/main" id="{324D1561-13E1-4C09-9662-F2EB996BF9C0}"/>
+                <a16:creationId xmlns:a16="http://schemas.microsoft.com/office/drawing/2014/main" id="{E954E9FD-4ABC-49A8-98B8-7CB739A7867E}"/>
               </a:ext>
             </a:extLst>
           </p:cNvPr>
@@ -5083,7 +5088,7 @@
           <p:cNvPr id="13" name="s4-o1b">
             <a:extLst xmlns:a="http://schemas.openxmlformats.org/drawingml/2006/main">
               <a:ext uri="{FF2B5EF4-FFF2-40B4-BE49-F238E27FC236}">
-                <a16:creationId xmlns:a16="http://schemas.microsoft.com/office/drawing/2014/main" id="{A6699324-BD9F-4517-A068-53C0A8C998E4}"/>
+                <a16:creationId xmlns:a16="http://schemas.microsoft.com/office/drawing/2014/main" id="{FF81212A-580A-4793-B355-F7016ECC6B47}"/>
               </a:ext>
             </a:extLst>
           </p:cNvPr>
@@ -5128,7 +5133,7 @@
           <p:cNvPr id="14" name="s4-o2a">
             <a:extLst xmlns:a="http://schemas.openxmlformats.org/drawingml/2006/main">
               <a:ext uri="{FF2B5EF4-FFF2-40B4-BE49-F238E27FC236}">
-                <a16:creationId xmlns:a16="http://schemas.microsoft.com/office/drawing/2014/main" id="{D20F5E0C-41B9-418B-A01E-4A2414082F23}"/>
+                <a16:creationId xmlns:a16="http://schemas.microsoft.com/office/drawing/2014/main" id="{8124CF30-039C-43EF-9CE1-B1D7F6E73F59}"/>
               </a:ext>
             </a:extLst>
           </p:cNvPr>
@@ -5173,7 +5178,7 @@
           <p:cNvPr id="15" name="s4-o2b">
             <a:extLst xmlns:a="http://schemas.openxmlformats.org/drawingml/2006/main">
               <a:ext uri="{FF2B5EF4-FFF2-40B4-BE49-F238E27FC236}">
-                <a16:creationId xmlns:a16="http://schemas.microsoft.com/office/drawing/2014/main" id="{1426ECC5-6A3B-4BDE-A9B5-B121BBC26F9B}"/>
+                <a16:creationId xmlns:a16="http://schemas.microsoft.com/office/drawing/2014/main" id="{445EFAC5-8441-473A-805E-6255B05A93F1}"/>
               </a:ext>
             </a:extLst>
           </p:cNvPr>
@@ -5218,7 +5223,7 @@
           <p:cNvPr id="16" name="s4-o3a">
             <a:extLst xmlns:a="http://schemas.openxmlformats.org/drawingml/2006/main">
               <a:ext uri="{FF2B5EF4-FFF2-40B4-BE49-F238E27FC236}">
-                <a16:creationId xmlns:a16="http://schemas.microsoft.com/office/drawing/2014/main" id="{332D7B6D-D5F3-466C-B8EE-79F700C3C114}"/>
+                <a16:creationId xmlns:a16="http://schemas.microsoft.com/office/drawing/2014/main" id="{FE8313A0-DBD2-4D3C-8432-DB6839E176A8}"/>
               </a:ext>
             </a:extLst>
           </p:cNvPr>
@@ -5263,7 +5268,7 @@
           <p:cNvPr id="17" name="s4-o3b">
             <a:extLst xmlns:a="http://schemas.openxmlformats.org/drawingml/2006/main">
               <a:ext uri="{FF2B5EF4-FFF2-40B4-BE49-F238E27FC236}">
-                <a16:creationId xmlns:a16="http://schemas.microsoft.com/office/drawing/2014/main" id="{2B450276-144B-4529-BC74-0F240292E476}"/>
+                <a16:creationId xmlns:a16="http://schemas.microsoft.com/office/drawing/2014/main" id="{78569779-1F75-4CD9-992E-3A04F7664A3B}"/>
               </a:ext>
             </a:extLst>
           </p:cNvPr>
@@ -5308,7 +5313,7 @@
           <p:cNvPr id="18" name="s4-o4a">
             <a:extLst xmlns:a="http://schemas.openxmlformats.org/drawingml/2006/main">
               <a:ext uri="{FF2B5EF4-FFF2-40B4-BE49-F238E27FC236}">
-                <a16:creationId xmlns:a16="http://schemas.microsoft.com/office/drawing/2014/main" id="{95C9CF3D-AE33-46F7-9075-558E5C1931EF}"/>
+                <a16:creationId xmlns:a16="http://schemas.microsoft.com/office/drawing/2014/main" id="{5A134E6B-A5C0-4DDD-9529-0892C1365D9B}"/>
               </a:ext>
             </a:extLst>
           </p:cNvPr>
@@ -5353,7 +5358,7 @@
           <p:cNvPr id="19" name="s4-o4b">
             <a:extLst xmlns:a="http://schemas.openxmlformats.org/drawingml/2006/main">
               <a:ext uri="{FF2B5EF4-FFF2-40B4-BE49-F238E27FC236}">
-                <a16:creationId xmlns:a16="http://schemas.microsoft.com/office/drawing/2014/main" id="{B870409A-D6B6-449E-8CF3-8DC3EEDC2A64}"/>
+                <a16:creationId xmlns:a16="http://schemas.microsoft.com/office/drawing/2014/main" id="{2DB88EB1-A797-4AEA-A6DA-91C3A2A6E5C2}"/>
               </a:ext>
             </a:extLst>
           </p:cNvPr>
@@ -5399,7 +5404,7 @@
           <p:cNvPr id="20" name="s4-o5a">
             <a:extLst xmlns:a="http://schemas.openxmlformats.org/drawingml/2006/main">
               <a:ext uri="{FF2B5EF4-FFF2-40B4-BE49-F238E27FC236}">
-                <a16:creationId xmlns:a16="http://schemas.microsoft.com/office/drawing/2014/main" id="{43329430-1FCE-4D17-A8BA-F1DC2393205A}"/>
+                <a16:creationId xmlns:a16="http://schemas.microsoft.com/office/drawing/2014/main" id="{490F1FE3-EB67-4C8C-A5E6-170C395824C6}"/>
               </a:ext>
             </a:extLst>
           </p:cNvPr>
@@ -5444,7 +5449,7 @@
           <p:cNvPr id="21" name="s4-o5b">
             <a:extLst xmlns:a="http://schemas.openxmlformats.org/drawingml/2006/main">
               <a:ext uri="{FF2B5EF4-FFF2-40B4-BE49-F238E27FC236}">
-                <a16:creationId xmlns:a16="http://schemas.microsoft.com/office/drawing/2014/main" id="{7DEE24E1-44BE-4E9B-A7E1-8486054A2593}"/>
+                <a16:creationId xmlns:a16="http://schemas.microsoft.com/office/drawing/2014/main" id="{8C85233A-30D2-4019-B87A-045BB9910A17}"/>
               </a:ext>
             </a:extLst>
           </p:cNvPr>
@@ -5489,7 +5494,7 @@
           <p:cNvPr id="22" name="s4-output-note">
             <a:extLst xmlns:a="http://schemas.openxmlformats.org/drawingml/2006/main">
               <a:ext uri="{FF2B5EF4-FFF2-40B4-BE49-F238E27FC236}">
-                <a16:creationId xmlns:a16="http://schemas.microsoft.com/office/drawing/2014/main" id="{9C6435BD-35FD-4B9C-ABC6-FDA92B96F7C7}"/>
+                <a16:creationId xmlns:a16="http://schemas.microsoft.com/office/drawing/2014/main" id="{F75EC3B4-5808-4810-8BF0-3B8BECDCD7AB}"/>
               </a:ext>
             </a:extLst>
           </p:cNvPr>
@@ -5556,7 +5561,7 @@
           <p:cNvPr id="24" name="footer-source-4">
             <a:extLst xmlns:a="http://schemas.openxmlformats.org/drawingml/2006/main">
               <a:ext uri="{FF2B5EF4-FFF2-40B4-BE49-F238E27FC236}">
-                <a16:creationId xmlns:a16="http://schemas.microsoft.com/office/drawing/2014/main" id="{1F87CA40-A6D8-47BE-96E7-EBC389D929D7}"/>
+                <a16:creationId xmlns:a16="http://schemas.microsoft.com/office/drawing/2014/main" id="{0F0D8938-A89A-4493-9D6F-C0E839966556}"/>
               </a:ext>
             </a:extLst>
           </p:cNvPr>
@@ -5601,7 +5606,7 @@
           <p:cNvPr id="25" name="footer-number-4">
             <a:extLst xmlns:a="http://schemas.openxmlformats.org/drawingml/2006/main">
               <a:ext uri="{FF2B5EF4-FFF2-40B4-BE49-F238E27FC236}">
-                <a16:creationId xmlns:a16="http://schemas.microsoft.com/office/drawing/2014/main" id="{AF4523AB-8F25-4B90-9938-025B3FEE879F}"/>
+                <a16:creationId xmlns:a16="http://schemas.microsoft.com/office/drawing/2014/main" id="{54A5B34E-C247-47E2-A958-1B925C4003D4}"/>
               </a:ext>
             </a:extLst>
           </p:cNvPr>
@@ -5644,7 +5649,7 @@
     </p:spTree>
     <p:extLst>
       <p:ext uri="{BB962C8B-B14F-4D97-AF65-F5344CB8AC3E}">
-        <p14:creationId xmlns:p14="http://schemas.microsoft.com/office/powerpoint/2010/main" val="803423681"/>
+        <p14:creationId xmlns:p14="http://schemas.microsoft.com/office/powerpoint/2010/main" val="1252619973"/>
       </p:ext>
     </p:extLst>
   </p:cSld>
@@ -5675,7 +5680,7 @@
           <p:cNvPr id="17" name="s5-title">
             <a:extLst xmlns:a="http://schemas.openxmlformats.org/drawingml/2006/main">
               <a:ext uri="{FF2B5EF4-FFF2-40B4-BE49-F238E27FC236}">
-                <a16:creationId xmlns:a16="http://schemas.microsoft.com/office/drawing/2014/main" id="{76E52DD2-A0C9-4656-92A8-F4E0988AFABE}"/>
+                <a16:creationId xmlns:a16="http://schemas.microsoft.com/office/drawing/2014/main" id="{D35F4426-6DDA-41A9-A765-9D36A49EDA8D}"/>
               </a:ext>
             </a:extLst>
           </p:cNvPr>
@@ -5720,7 +5725,7 @@
           <p:cNvPr id="2" name="s5-subtitle">
             <a:extLst xmlns:a="http://schemas.openxmlformats.org/drawingml/2006/main">
               <a:ext uri="{FF2B5EF4-FFF2-40B4-BE49-F238E27FC236}">
-                <a16:creationId xmlns:a16="http://schemas.microsoft.com/office/drawing/2014/main" id="{1813B990-C9CA-4746-A818-EA77B804CF2C}"/>
+                <a16:creationId xmlns:a16="http://schemas.microsoft.com/office/drawing/2014/main" id="{5B81A1D7-33A5-403F-940A-AB9321BE373B}"/>
               </a:ext>
             </a:extLst>
           </p:cNvPr>
@@ -5765,7 +5770,7 @@
           <p:cNvPr id="3" name="s5-chart-label-pack">
             <a:extLst xmlns:a="http://schemas.openxmlformats.org/drawingml/2006/main">
               <a:ext uri="{FF2B5EF4-FFF2-40B4-BE49-F238E27FC236}">
-                <a16:creationId xmlns:a16="http://schemas.microsoft.com/office/drawing/2014/main" id="{C46B7979-995C-429D-986F-01DF6996E13D}"/>
+                <a16:creationId xmlns:a16="http://schemas.microsoft.com/office/drawing/2014/main" id="{15374AF6-392A-40A3-A784-6090F6E8572D}"/>
               </a:ext>
             </a:extLst>
           </p:cNvPr>
@@ -5810,7 +5815,7 @@
           <p:cNvPr id="4" name="s5-chart-label-repo">
             <a:extLst xmlns:a="http://schemas.openxmlformats.org/drawingml/2006/main">
               <a:ext uri="{FF2B5EF4-FFF2-40B4-BE49-F238E27FC236}">
-                <a16:creationId xmlns:a16="http://schemas.microsoft.com/office/drawing/2014/main" id="{31052C75-8E41-4E01-BE28-706892D54C78}"/>
+                <a16:creationId xmlns:a16="http://schemas.microsoft.com/office/drawing/2014/main" id="{857CE099-7D3C-4806-9B0E-A935E09ACE42}"/>
               </a:ext>
             </a:extLst>
           </p:cNvPr>
@@ -5855,7 +5860,7 @@
           <p:cNvPr id="5" name="s5-stat1">
             <a:extLst xmlns:a="http://schemas.openxmlformats.org/drawingml/2006/main">
               <a:ext uri="{FF2B5EF4-FFF2-40B4-BE49-F238E27FC236}">
-                <a16:creationId xmlns:a16="http://schemas.microsoft.com/office/drawing/2014/main" id="{A1CA9DEA-A48C-43E1-86DA-83F491DD7513}"/>
+                <a16:creationId xmlns:a16="http://schemas.microsoft.com/office/drawing/2014/main" id="{510BE700-F9C1-4618-8AB5-E0F514AB8467}"/>
               </a:ext>
             </a:extLst>
           </p:cNvPr>
@@ -5900,7 +5905,7 @@
           <p:cNvPr id="6" name="s5-stat1-label">
             <a:extLst xmlns:a="http://schemas.openxmlformats.org/drawingml/2006/main">
               <a:ext uri="{FF2B5EF4-FFF2-40B4-BE49-F238E27FC236}">
-                <a16:creationId xmlns:a16="http://schemas.microsoft.com/office/drawing/2014/main" id="{16203803-29F8-4903-B4BF-00FA3911468F}"/>
+                <a16:creationId xmlns:a16="http://schemas.microsoft.com/office/drawing/2014/main" id="{3C9856A0-5542-4072-8570-5336FE307974}"/>
               </a:ext>
             </a:extLst>
           </p:cNvPr>
@@ -5967,7 +5972,7 @@
           <p:cNvPr id="8" name="s5-stat2">
             <a:extLst xmlns:a="http://schemas.openxmlformats.org/drawingml/2006/main">
               <a:ext uri="{FF2B5EF4-FFF2-40B4-BE49-F238E27FC236}">
-                <a16:creationId xmlns:a16="http://schemas.microsoft.com/office/drawing/2014/main" id="{D285DE64-11D9-4B58-8AB8-73FD0AD3FC35}"/>
+                <a16:creationId xmlns:a16="http://schemas.microsoft.com/office/drawing/2014/main" id="{C3969D29-751F-465A-8D81-0ED66641AD20}"/>
               </a:ext>
             </a:extLst>
           </p:cNvPr>
@@ -6012,7 +6017,7 @@
           <p:cNvPr id="9" name="s5-stat2-label">
             <a:extLst xmlns:a="http://schemas.openxmlformats.org/drawingml/2006/main">
               <a:ext uri="{FF2B5EF4-FFF2-40B4-BE49-F238E27FC236}">
-                <a16:creationId xmlns:a16="http://schemas.microsoft.com/office/drawing/2014/main" id="{B7E363B3-08A2-4447-B692-2D6F110F7FDC}"/>
+                <a16:creationId xmlns:a16="http://schemas.microsoft.com/office/drawing/2014/main" id="{8E5BB0A4-1645-4780-A8D1-3316715CF8C6}"/>
               </a:ext>
             </a:extLst>
           </p:cNvPr>
@@ -6057,7 +6062,7 @@
           <p:cNvPr id="10" name="s5-stat3">
             <a:extLst xmlns:a="http://schemas.openxmlformats.org/drawingml/2006/main">
               <a:ext uri="{FF2B5EF4-FFF2-40B4-BE49-F238E27FC236}">
-                <a16:creationId xmlns:a16="http://schemas.microsoft.com/office/drawing/2014/main" id="{1752231E-611E-445E-B4E1-A54C54B4FDD2}"/>
+                <a16:creationId xmlns:a16="http://schemas.microsoft.com/office/drawing/2014/main" id="{41EAC7CB-18E0-40B8-83CB-EEC902F5B11A}"/>
               </a:ext>
             </a:extLst>
           </p:cNvPr>
@@ -6102,7 +6107,7 @@
           <p:cNvPr id="11" name="s5-stat3-label">
             <a:extLst xmlns:a="http://schemas.openxmlformats.org/drawingml/2006/main">
               <a:ext uri="{FF2B5EF4-FFF2-40B4-BE49-F238E27FC236}">
-                <a16:creationId xmlns:a16="http://schemas.microsoft.com/office/drawing/2014/main" id="{0C9C64DF-9217-4490-AEA7-3A139C87F7EB}"/>
+                <a16:creationId xmlns:a16="http://schemas.microsoft.com/office/drawing/2014/main" id="{8CACC0FA-D6CD-49C4-BC77-1D7FC51BF615}"/>
               </a:ext>
             </a:extLst>
           </p:cNvPr>
@@ -6147,7 +6152,7 @@
           <p:cNvPr id="12" name="s5-explain">
             <a:extLst xmlns:a="http://schemas.openxmlformats.org/drawingml/2006/main">
               <a:ext uri="{FF2B5EF4-FFF2-40B4-BE49-F238E27FC236}">
-                <a16:creationId xmlns:a16="http://schemas.microsoft.com/office/drawing/2014/main" id="{F8E691CA-7234-488D-A4C4-C29DCCBF7B4C}"/>
+                <a16:creationId xmlns:a16="http://schemas.microsoft.com/office/drawing/2014/main" id="{E537750A-8D2D-4833-B7C1-CC328B600570}"/>
               </a:ext>
             </a:extLst>
           </p:cNvPr>
@@ -6214,7 +6219,7 @@
           <p:cNvPr id="14" name="footer-source-5">
             <a:extLst xmlns:a="http://schemas.openxmlformats.org/drawingml/2006/main">
               <a:ext uri="{FF2B5EF4-FFF2-40B4-BE49-F238E27FC236}">
-                <a16:creationId xmlns:a16="http://schemas.microsoft.com/office/drawing/2014/main" id="{08D00938-8CE1-4AB6-8B56-5D412A04CF25}"/>
+                <a16:creationId xmlns:a16="http://schemas.microsoft.com/office/drawing/2014/main" id="{9D323E44-8B38-4A30-8173-39057CAE28E7}"/>
               </a:ext>
             </a:extLst>
           </p:cNvPr>
@@ -6259,7 +6264,7 @@
           <p:cNvPr id="15" name="footer-number-5">
             <a:extLst xmlns:a="http://schemas.openxmlformats.org/drawingml/2006/main">
               <a:ext uri="{FF2B5EF4-FFF2-40B4-BE49-F238E27FC236}">
-                <a16:creationId xmlns:a16="http://schemas.microsoft.com/office/drawing/2014/main" id="{831FFF51-2794-4601-9CD6-B9594BFFCE95}"/>
+                <a16:creationId xmlns:a16="http://schemas.microsoft.com/office/drawing/2014/main" id="{C6D0FAFD-AA84-47FE-9BF1-D56BC4FE3AE5}"/>
               </a:ext>
             </a:extLst>
           </p:cNvPr>
@@ -6311,14 +6316,14 @@
         </p:xfrm>
         <a:graphic xmlns:a="http://schemas.openxmlformats.org/drawingml/2006/main">
           <a:graphicData uri="http://schemas.openxmlformats.org/drawingml/2006/chart">
-            <c:chart xmlns:r="http://schemas.openxmlformats.org/officeDocument/2006/relationships" xmlns:c="http://schemas.openxmlformats.org/drawingml/2006/chart" r:id="R2d0c0a3a26044da2"/>
+            <c:chart xmlns:r="http://schemas.openxmlformats.org/officeDocument/2006/relationships" xmlns:c="http://schemas.openxmlformats.org/drawingml/2006/chart" r:id="Re4e83c61b9544540"/>
           </a:graphicData>
         </a:graphic>
       </p:graphicFrame>
     </p:spTree>
     <p:extLst>
       <p:ext uri="{BB962C8B-B14F-4D97-AF65-F5344CB8AC3E}">
-        <p14:creationId xmlns:p14="http://schemas.microsoft.com/office/powerpoint/2010/main" val="1814809642"/>
+        <p14:creationId xmlns:p14="http://schemas.microsoft.com/office/powerpoint/2010/main" val="1396701938"/>
       </p:ext>
     </p:extLst>
   </p:cSld>
@@ -6349,7 +6354,7 @@
           <p:cNvPr id="16" name="s6-title">
             <a:extLst xmlns:a="http://schemas.openxmlformats.org/drawingml/2006/main">
               <a:ext uri="{FF2B5EF4-FFF2-40B4-BE49-F238E27FC236}">
-                <a16:creationId xmlns:a16="http://schemas.microsoft.com/office/drawing/2014/main" id="{ED7ACF8D-9A97-45E7-BDB0-415D135B78FF}"/>
+                <a16:creationId xmlns:a16="http://schemas.microsoft.com/office/drawing/2014/main" id="{ACF77855-613B-41FD-8957-492B422DE8AC}"/>
               </a:ext>
             </a:extLst>
           </p:cNvPr>
@@ -6394,7 +6399,7 @@
           <p:cNvPr id="2" name="s6-subtitle">
             <a:extLst xmlns:a="http://schemas.openxmlformats.org/drawingml/2006/main">
               <a:ext uri="{FF2B5EF4-FFF2-40B4-BE49-F238E27FC236}">
-                <a16:creationId xmlns:a16="http://schemas.microsoft.com/office/drawing/2014/main" id="{B7FE93F4-B421-4AFD-9983-A482F00FD6FB}"/>
+                <a16:creationId xmlns:a16="http://schemas.microsoft.com/office/drawing/2014/main" id="{E1CC9539-625A-42A9-B9E8-9D351A509BA6}"/>
               </a:ext>
             </a:extLst>
           </p:cNvPr>
@@ -6439,7 +6444,7 @@
           <p:cNvPr id="3" name="s6-chart-label-control">
             <a:extLst xmlns:a="http://schemas.openxmlformats.org/drawingml/2006/main">
               <a:ext uri="{FF2B5EF4-FFF2-40B4-BE49-F238E27FC236}">
-                <a16:creationId xmlns:a16="http://schemas.microsoft.com/office/drawing/2014/main" id="{A11A4637-B098-48E0-B7A1-B6C40639F480}"/>
+                <a16:creationId xmlns:a16="http://schemas.microsoft.com/office/drawing/2014/main" id="{81658054-77FC-4B26-8910-8A2193215FB4}"/>
               </a:ext>
             </a:extLst>
           </p:cNvPr>
@@ -6484,7 +6489,7 @@
           <p:cNvPr id="4" name="s6-chart-label-full">
             <a:extLst xmlns:a="http://schemas.openxmlformats.org/drawingml/2006/main">
               <a:ext uri="{FF2B5EF4-FFF2-40B4-BE49-F238E27FC236}">
-                <a16:creationId xmlns:a16="http://schemas.microsoft.com/office/drawing/2014/main" id="{8DCE5DD6-341D-4FD8-917B-7765B1C7DC04}"/>
+                <a16:creationId xmlns:a16="http://schemas.microsoft.com/office/drawing/2014/main" id="{3ADDE3A8-8517-4EB9-AF42-D813F0E84717}"/>
               </a:ext>
             </a:extLst>
           </p:cNvPr>
@@ -6529,7 +6534,7 @@
           <p:cNvPr id="5" name="s6-stat">
             <a:extLst xmlns:a="http://schemas.openxmlformats.org/drawingml/2006/main">
               <a:ext uri="{FF2B5EF4-FFF2-40B4-BE49-F238E27FC236}">
-                <a16:creationId xmlns:a16="http://schemas.microsoft.com/office/drawing/2014/main" id="{FC7C3E79-4475-43F4-A73F-7034EF71464D}"/>
+                <a16:creationId xmlns:a16="http://schemas.microsoft.com/office/drawing/2014/main" id="{CDE68CE2-9F33-41A7-A9C6-C5F02DEA669A}"/>
               </a:ext>
             </a:extLst>
           </p:cNvPr>
@@ -6574,7 +6579,7 @@
           <p:cNvPr id="6" name="s6-stat-label">
             <a:extLst xmlns:a="http://schemas.openxmlformats.org/drawingml/2006/main">
               <a:ext uri="{FF2B5EF4-FFF2-40B4-BE49-F238E27FC236}">
-                <a16:creationId xmlns:a16="http://schemas.microsoft.com/office/drawing/2014/main" id="{18A100F7-F96A-4D8D-8182-EE38E8FBFAA3}"/>
+                <a16:creationId xmlns:a16="http://schemas.microsoft.com/office/drawing/2014/main" id="{D817698C-7A3D-4405-9872-DF3F6885F2F9}"/>
               </a:ext>
             </a:extLst>
           </p:cNvPr>
@@ -6642,7 +6647,7 @@
           <p:cNvPr id="8" name="s6-supported">
             <a:extLst xmlns:a="http://schemas.openxmlformats.org/drawingml/2006/main">
               <a:ext uri="{FF2B5EF4-FFF2-40B4-BE49-F238E27FC236}">
-                <a16:creationId xmlns:a16="http://schemas.microsoft.com/office/drawing/2014/main" id="{4340F155-C1CF-4163-8363-A89633A9EE77}"/>
+                <a16:creationId xmlns:a16="http://schemas.microsoft.com/office/drawing/2014/main" id="{FE922A09-0B03-404E-91F1-E10E30097F27}"/>
               </a:ext>
             </a:extLst>
           </p:cNvPr>
@@ -6687,7 +6692,7 @@
           <p:cNvPr id="9" name="s6-supported-body">
             <a:extLst xmlns:a="http://schemas.openxmlformats.org/drawingml/2006/main">
               <a:ext uri="{FF2B5EF4-FFF2-40B4-BE49-F238E27FC236}">
-                <a16:creationId xmlns:a16="http://schemas.microsoft.com/office/drawing/2014/main" id="{6D69E72D-8FA2-40AC-9262-45689A4997C4}"/>
+                <a16:creationId xmlns:a16="http://schemas.microsoft.com/office/drawing/2014/main" id="{3C177898-B0AF-4F83-89E4-C792BEEC6441}"/>
               </a:ext>
             </a:extLst>
           </p:cNvPr>
@@ -6732,7 +6737,7 @@
           <p:cNvPr id="10" name="s6-unsupported">
             <a:extLst xmlns:a="http://schemas.openxmlformats.org/drawingml/2006/main">
               <a:ext uri="{FF2B5EF4-FFF2-40B4-BE49-F238E27FC236}">
-                <a16:creationId xmlns:a16="http://schemas.microsoft.com/office/drawing/2014/main" id="{C6EDFF66-B66F-47BB-A6B1-0D0453AD3F0D}"/>
+                <a16:creationId xmlns:a16="http://schemas.microsoft.com/office/drawing/2014/main" id="{18324A18-340B-4EAB-BE12-C928503E5BE2}"/>
               </a:ext>
             </a:extLst>
           </p:cNvPr>
@@ -6777,7 +6782,7 @@
           <p:cNvPr id="11" name="s6-unsupported-body">
             <a:extLst xmlns:a="http://schemas.openxmlformats.org/drawingml/2006/main">
               <a:ext uri="{FF2B5EF4-FFF2-40B4-BE49-F238E27FC236}">
-                <a16:creationId xmlns:a16="http://schemas.microsoft.com/office/drawing/2014/main" id="{A7CCA6D1-0FBB-4D8F-8ACA-3EE5F10DCC94}"/>
+                <a16:creationId xmlns:a16="http://schemas.microsoft.com/office/drawing/2014/main" id="{AD856CD7-9EE2-48D0-A902-79E56003B16D}"/>
               </a:ext>
             </a:extLst>
           </p:cNvPr>
@@ -6844,7 +6849,7 @@
           <p:cNvPr id="13" name="footer-source-6">
             <a:extLst xmlns:a="http://schemas.openxmlformats.org/drawingml/2006/main">
               <a:ext uri="{FF2B5EF4-FFF2-40B4-BE49-F238E27FC236}">
-                <a16:creationId xmlns:a16="http://schemas.microsoft.com/office/drawing/2014/main" id="{A8B15FB6-0A23-400E-9FED-EEF02DB1B7D8}"/>
+                <a16:creationId xmlns:a16="http://schemas.microsoft.com/office/drawing/2014/main" id="{A1B22078-607D-47F4-86C5-E3A17323700A}"/>
               </a:ext>
             </a:extLst>
           </p:cNvPr>
@@ -6889,7 +6894,7 @@
           <p:cNvPr id="14" name="footer-number-6">
             <a:extLst xmlns:a="http://schemas.openxmlformats.org/drawingml/2006/main">
               <a:ext uri="{FF2B5EF4-FFF2-40B4-BE49-F238E27FC236}">
-                <a16:creationId xmlns:a16="http://schemas.microsoft.com/office/drawing/2014/main" id="{70529FC6-A27F-493F-976F-403BB738AA00}"/>
+                <a16:creationId xmlns:a16="http://schemas.microsoft.com/office/drawing/2014/main" id="{592928E7-D616-4B17-9567-2EEE4D8564A4}"/>
               </a:ext>
             </a:extLst>
           </p:cNvPr>
@@ -6941,14 +6946,14 @@
         </p:xfrm>
         <a:graphic xmlns:a="http://schemas.openxmlformats.org/drawingml/2006/main">
           <a:graphicData uri="http://schemas.openxmlformats.org/drawingml/2006/chart">
-            <c:chart xmlns:r="http://schemas.openxmlformats.org/officeDocument/2006/relationships" xmlns:c="http://schemas.openxmlformats.org/drawingml/2006/chart" r:id="Ra7c4e6c0cbe94e69"/>
+            <c:chart xmlns:r="http://schemas.openxmlformats.org/officeDocument/2006/relationships" xmlns:c="http://schemas.openxmlformats.org/drawingml/2006/chart" r:id="R8d5fdcea74d24596"/>
           </a:graphicData>
         </a:graphic>
       </p:graphicFrame>
     </p:spTree>
     <p:extLst>
       <p:ext uri="{BB962C8B-B14F-4D97-AF65-F5344CB8AC3E}">
-        <p14:creationId xmlns:p14="http://schemas.microsoft.com/office/powerpoint/2010/main" val="1611279686"/>
+        <p14:creationId xmlns:p14="http://schemas.microsoft.com/office/powerpoint/2010/main" val="333664532"/>
       </p:ext>
     </p:extLst>
   </p:cSld>
@@ -6979,7 +6984,7 @@
           <p:cNvPr id="26" name="s7-title">
             <a:extLst xmlns:a="http://schemas.openxmlformats.org/drawingml/2006/main">
               <a:ext uri="{FF2B5EF4-FFF2-40B4-BE49-F238E27FC236}">
-                <a16:creationId xmlns:a16="http://schemas.microsoft.com/office/drawing/2014/main" id="{03B7C1E8-467A-4FB7-A335-9F11C2D1A29A}"/>
+                <a16:creationId xmlns:a16="http://schemas.microsoft.com/office/drawing/2014/main" id="{27FC7876-5211-4706-9520-259EF0DA52B1}"/>
               </a:ext>
             </a:extLst>
           </p:cNvPr>
@@ -7024,7 +7029,7 @@
           <p:cNvPr id="2" name="s7-subtitle">
             <a:extLst xmlns:a="http://schemas.openxmlformats.org/drawingml/2006/main">
               <a:ext uri="{FF2B5EF4-FFF2-40B4-BE49-F238E27FC236}">
-                <a16:creationId xmlns:a16="http://schemas.microsoft.com/office/drawing/2014/main" id="{D83508C6-579F-489E-B53E-F6ABE4E9D241}"/>
+                <a16:creationId xmlns:a16="http://schemas.microsoft.com/office/drawing/2014/main" id="{FDC73038-17AD-412F-BFB6-FC86DBDA35B1}"/>
               </a:ext>
             </a:extLst>
           </p:cNvPr>
@@ -7157,7 +7162,7 @@
           <p:cNvPr id="7" name="s7-card1">
             <a:extLst xmlns:a="http://schemas.openxmlformats.org/drawingml/2006/main">
               <a:ext uri="{FF2B5EF4-FFF2-40B4-BE49-F238E27FC236}">
-                <a16:creationId xmlns:a16="http://schemas.microsoft.com/office/drawing/2014/main" id="{21247143-F275-40E1-99F2-48BB27D62FA8}"/>
+                <a16:creationId xmlns:a16="http://schemas.microsoft.com/office/drawing/2014/main" id="{80B10633-CC49-4528-951B-FAC4295D2A7E}"/>
               </a:ext>
             </a:extLst>
           </p:cNvPr>
@@ -7192,7 +7197,7 @@
           <p:cNvPr id="8" name="s7-card2">
             <a:extLst xmlns:a="http://schemas.openxmlformats.org/drawingml/2006/main">
               <a:ext uri="{FF2B5EF4-FFF2-40B4-BE49-F238E27FC236}">
-                <a16:creationId xmlns:a16="http://schemas.microsoft.com/office/drawing/2014/main" id="{CB5EB1B5-9F0B-4526-9413-2F7E507F356A}"/>
+                <a16:creationId xmlns:a16="http://schemas.microsoft.com/office/drawing/2014/main" id="{BB708C9D-ADCA-4DAD-B976-2ED33C172687}"/>
               </a:ext>
             </a:extLst>
           </p:cNvPr>
@@ -7227,7 +7232,7 @@
           <p:cNvPr id="9" name="s7-card3">
             <a:extLst xmlns:a="http://schemas.openxmlformats.org/drawingml/2006/main">
               <a:ext uri="{FF2B5EF4-FFF2-40B4-BE49-F238E27FC236}">
-                <a16:creationId xmlns:a16="http://schemas.microsoft.com/office/drawing/2014/main" id="{3F3C764D-703D-4E0B-93B9-F192494D106C}"/>
+                <a16:creationId xmlns:a16="http://schemas.microsoft.com/office/drawing/2014/main" id="{1D3EBFCE-B074-4FE8-A1C1-38BFECEC9269}"/>
               </a:ext>
             </a:extLst>
           </p:cNvPr>
@@ -7262,7 +7267,7 @@
           <p:cNvPr id="10" name="s7-dot1">
             <a:extLst xmlns:a="http://schemas.openxmlformats.org/drawingml/2006/main">
               <a:ext uri="{FF2B5EF4-FFF2-40B4-BE49-F238E27FC236}">
-                <a16:creationId xmlns:a16="http://schemas.microsoft.com/office/drawing/2014/main" id="{112E9A34-9440-4627-A59B-03B488D71122}"/>
+                <a16:creationId xmlns:a16="http://schemas.microsoft.com/office/drawing/2014/main" id="{D39059FC-DD61-41DB-9F5C-D940E87DADE9}"/>
               </a:ext>
             </a:extLst>
           </p:cNvPr>
@@ -7295,7 +7300,7 @@
           <p:cNvPr id="11" name="s7-dot2">
             <a:extLst xmlns:a="http://schemas.openxmlformats.org/drawingml/2006/main">
               <a:ext uri="{FF2B5EF4-FFF2-40B4-BE49-F238E27FC236}">
-                <a16:creationId xmlns:a16="http://schemas.microsoft.com/office/drawing/2014/main" id="{8FD38703-4F01-4ED0-AFFA-3AC5BFE4275A}"/>
+                <a16:creationId xmlns:a16="http://schemas.microsoft.com/office/drawing/2014/main" id="{6B251CA2-EDBD-4997-B4C7-A2333B4646A3}"/>
               </a:ext>
             </a:extLst>
           </p:cNvPr>
@@ -7328,7 +7333,7 @@
           <p:cNvPr id="12" name="s7-dot3">
             <a:extLst xmlns:a="http://schemas.openxmlformats.org/drawingml/2006/main">
               <a:ext uri="{FF2B5EF4-FFF2-40B4-BE49-F238E27FC236}">
-                <a16:creationId xmlns:a16="http://schemas.microsoft.com/office/drawing/2014/main" id="{378290FE-912F-4B2C-8282-C5EF63A6B354}"/>
+                <a16:creationId xmlns:a16="http://schemas.microsoft.com/office/drawing/2014/main" id="{40ABDC04-DA54-4AA2-A42E-FFA11751101E}"/>
               </a:ext>
             </a:extLst>
           </p:cNvPr>
@@ -7361,7 +7366,7 @@
           <p:cNvPr id="13" name="s7-k1">
             <a:extLst xmlns:a="http://schemas.openxmlformats.org/drawingml/2006/main">
               <a:ext uri="{FF2B5EF4-FFF2-40B4-BE49-F238E27FC236}">
-                <a16:creationId xmlns:a16="http://schemas.microsoft.com/office/drawing/2014/main" id="{A8C7007A-C652-4111-A9DC-22DCC2C92161}"/>
+                <a16:creationId xmlns:a16="http://schemas.microsoft.com/office/drawing/2014/main" id="{A80966A8-8666-43C8-B9C8-416F1C1B3994}"/>
               </a:ext>
             </a:extLst>
           </p:cNvPr>
@@ -7406,7 +7411,7 @@
           <p:cNvPr id="14" name="s7-b1">
             <a:extLst xmlns:a="http://schemas.openxmlformats.org/drawingml/2006/main">
               <a:ext uri="{FF2B5EF4-FFF2-40B4-BE49-F238E27FC236}">
-                <a16:creationId xmlns:a16="http://schemas.microsoft.com/office/drawing/2014/main" id="{6F20B9D8-A2F4-43A8-8A11-C5CC861DE2C1}"/>
+                <a16:creationId xmlns:a16="http://schemas.microsoft.com/office/drawing/2014/main" id="{EC746CCD-3B0C-4E8E-A60F-20FB8D55F3EC}"/>
               </a:ext>
             </a:extLst>
           </p:cNvPr>
@@ -7451,7 +7456,7 @@
           <p:cNvPr id="15" name="s7-v1">
             <a:extLst xmlns:a="http://schemas.openxmlformats.org/drawingml/2006/main">
               <a:ext uri="{FF2B5EF4-FFF2-40B4-BE49-F238E27FC236}">
-                <a16:creationId xmlns:a16="http://schemas.microsoft.com/office/drawing/2014/main" id="{4AEFE631-5819-4709-9C27-488199A72531}"/>
+                <a16:creationId xmlns:a16="http://schemas.microsoft.com/office/drawing/2014/main" id="{31733DC4-9C55-49BC-BC79-25517120BD9A}"/>
               </a:ext>
             </a:extLst>
           </p:cNvPr>
@@ -7496,7 +7501,7 @@
           <p:cNvPr id="16" name="s7-k2">
             <a:extLst xmlns:a="http://schemas.openxmlformats.org/drawingml/2006/main">
               <a:ext uri="{FF2B5EF4-FFF2-40B4-BE49-F238E27FC236}">
-                <a16:creationId xmlns:a16="http://schemas.microsoft.com/office/drawing/2014/main" id="{EA586754-56B6-4F53-B736-7F69C31EF9B4}"/>
+                <a16:creationId xmlns:a16="http://schemas.microsoft.com/office/drawing/2014/main" id="{0B325EC1-46EC-40BD-9791-635E24C4B102}"/>
               </a:ext>
             </a:extLst>
           </p:cNvPr>
@@ -7541,7 +7546,7 @@
           <p:cNvPr id="17" name="s7-b2">
             <a:extLst xmlns:a="http://schemas.openxmlformats.org/drawingml/2006/main">
               <a:ext uri="{FF2B5EF4-FFF2-40B4-BE49-F238E27FC236}">
-                <a16:creationId xmlns:a16="http://schemas.microsoft.com/office/drawing/2014/main" id="{B5112A16-7B65-4B5A-A067-AE5F1109D378}"/>
+                <a16:creationId xmlns:a16="http://schemas.microsoft.com/office/drawing/2014/main" id="{D008F08F-E162-455C-A1D4-1C984901159C}"/>
               </a:ext>
             </a:extLst>
           </p:cNvPr>
@@ -7586,7 +7591,7 @@
           <p:cNvPr id="18" name="s7-v2">
             <a:extLst xmlns:a="http://schemas.openxmlformats.org/drawingml/2006/main">
               <a:ext uri="{FF2B5EF4-FFF2-40B4-BE49-F238E27FC236}">
-                <a16:creationId xmlns:a16="http://schemas.microsoft.com/office/drawing/2014/main" id="{F60FAED7-DF7A-43D0-9915-EF8647B401C1}"/>
+                <a16:creationId xmlns:a16="http://schemas.microsoft.com/office/drawing/2014/main" id="{69E6F07F-7221-4FA9-9EA4-6296F4F83CBC}"/>
               </a:ext>
             </a:extLst>
           </p:cNvPr>
@@ -7631,7 +7636,7 @@
           <p:cNvPr id="19" name="s7-k3">
             <a:extLst xmlns:a="http://schemas.openxmlformats.org/drawingml/2006/main">
               <a:ext uri="{FF2B5EF4-FFF2-40B4-BE49-F238E27FC236}">
-                <a16:creationId xmlns:a16="http://schemas.microsoft.com/office/drawing/2014/main" id="{B0CFCDA9-FB2D-4DB7-9E19-64C1BEE6FFF9}"/>
+                <a16:creationId xmlns:a16="http://schemas.microsoft.com/office/drawing/2014/main" id="{98A41F99-3E19-4ED7-A94E-5CC6CFD5160C}"/>
               </a:ext>
             </a:extLst>
           </p:cNvPr>
@@ -7676,7 +7681,7 @@
           <p:cNvPr id="20" name="s7-b3">
             <a:extLst xmlns:a="http://schemas.openxmlformats.org/drawingml/2006/main">
               <a:ext uri="{FF2B5EF4-FFF2-40B4-BE49-F238E27FC236}">
-                <a16:creationId xmlns:a16="http://schemas.microsoft.com/office/drawing/2014/main" id="{673231AC-28AD-4369-9015-55410F3F6493}"/>
+                <a16:creationId xmlns:a16="http://schemas.microsoft.com/office/drawing/2014/main" id="{69BEFD4D-B40C-4EB6-B114-6450069E145D}"/>
               </a:ext>
             </a:extLst>
           </p:cNvPr>
@@ -7721,7 +7726,7 @@
           <p:cNvPr id="21" name="s7-v3">
             <a:extLst xmlns:a="http://schemas.openxmlformats.org/drawingml/2006/main">
               <a:ext uri="{FF2B5EF4-FFF2-40B4-BE49-F238E27FC236}">
-                <a16:creationId xmlns:a16="http://schemas.microsoft.com/office/drawing/2014/main" id="{7B717499-FEEA-4A74-A9C3-D052F59437CB}"/>
+                <a16:creationId xmlns:a16="http://schemas.microsoft.com/office/drawing/2014/main" id="{A792DA74-DA87-40C2-AD7A-AF4972DA80D6}"/>
               </a:ext>
             </a:extLst>
           </p:cNvPr>
@@ -7766,7 +7771,7 @@
           <p:cNvPr id="22" name="s7-human">
             <a:extLst xmlns:a="http://schemas.openxmlformats.org/drawingml/2006/main">
               <a:ext uri="{FF2B5EF4-FFF2-40B4-BE49-F238E27FC236}">
-                <a16:creationId xmlns:a16="http://schemas.microsoft.com/office/drawing/2014/main" id="{8AA98AF3-2A0E-4641-8F12-FD23DD71C233}"/>
+                <a16:creationId xmlns:a16="http://schemas.microsoft.com/office/drawing/2014/main" id="{A39BF957-E6BC-4853-AE03-0D7466923FDF}"/>
               </a:ext>
             </a:extLst>
           </p:cNvPr>
@@ -7833,7 +7838,7 @@
           <p:cNvPr id="24" name="footer-source-7">
             <a:extLst xmlns:a="http://schemas.openxmlformats.org/drawingml/2006/main">
               <a:ext uri="{FF2B5EF4-FFF2-40B4-BE49-F238E27FC236}">
-                <a16:creationId xmlns:a16="http://schemas.microsoft.com/office/drawing/2014/main" id="{D9C37DDF-E9FF-4A42-982F-DC1FA15E1C50}"/>
+                <a16:creationId xmlns:a16="http://schemas.microsoft.com/office/drawing/2014/main" id="{F3490E14-E7CD-4B1B-8F16-4FBBF4AA0D29}"/>
               </a:ext>
             </a:extLst>
           </p:cNvPr>
@@ -7878,7 +7883,7 @@
           <p:cNvPr id="25" name="footer-number-7">
             <a:extLst xmlns:a="http://schemas.openxmlformats.org/drawingml/2006/main">
               <a:ext uri="{FF2B5EF4-FFF2-40B4-BE49-F238E27FC236}">
-                <a16:creationId xmlns:a16="http://schemas.microsoft.com/office/drawing/2014/main" id="{F62FBA15-FEF3-4D4C-9098-D55086DFA0A1}"/>
+                <a16:creationId xmlns:a16="http://schemas.microsoft.com/office/drawing/2014/main" id="{1508B504-CD81-4E39-A825-38D6D6C9B325}"/>
               </a:ext>
             </a:extLst>
           </p:cNvPr>
@@ -7921,7 +7926,7 @@
     </p:spTree>
     <p:extLst>
       <p:ext uri="{BB962C8B-B14F-4D97-AF65-F5344CB8AC3E}">
-        <p14:creationId xmlns:p14="http://schemas.microsoft.com/office/powerpoint/2010/main" val="336452656"/>
+        <p14:creationId xmlns:p14="http://schemas.microsoft.com/office/powerpoint/2010/main" val="283734944"/>
       </p:ext>
     </p:extLst>
   </p:cSld>
@@ -7952,7 +7957,7 @@
           <p:cNvPr id="19" name="s8-eyebrow">
             <a:extLst xmlns:a="http://schemas.openxmlformats.org/drawingml/2006/main">
               <a:ext uri="{FF2B5EF4-FFF2-40B4-BE49-F238E27FC236}">
-                <a16:creationId xmlns:a16="http://schemas.microsoft.com/office/drawing/2014/main" id="{A1164D58-772E-4CC7-8977-6C367666CBF6}"/>
+                <a16:creationId xmlns:a16="http://schemas.microsoft.com/office/drawing/2014/main" id="{E65E9B11-4AAA-4A35-9E53-B9898B75F6CB}"/>
               </a:ext>
             </a:extLst>
           </p:cNvPr>
@@ -7997,7 +8002,7 @@
           <p:cNvPr id="2" name="s8-title">
             <a:extLst xmlns:a="http://schemas.openxmlformats.org/drawingml/2006/main">
               <a:ext uri="{FF2B5EF4-FFF2-40B4-BE49-F238E27FC236}">
-                <a16:creationId xmlns:a16="http://schemas.microsoft.com/office/drawing/2014/main" id="{4F225D14-19EF-4F7A-B8E4-DE0E650AC216}"/>
+                <a16:creationId xmlns:a16="http://schemas.microsoft.com/office/drawing/2014/main" id="{25BCDD51-7836-4F24-87C2-AC7EEF0EA503}"/>
               </a:ext>
             </a:extLst>
           </p:cNvPr>
@@ -8066,7 +8071,7 @@
           <p:cNvPr id="4" name="s8-close">
             <a:extLst xmlns:a="http://schemas.openxmlformats.org/drawingml/2006/main">
               <a:ext uri="{FF2B5EF4-FFF2-40B4-BE49-F238E27FC236}">
-                <a16:creationId xmlns:a16="http://schemas.microsoft.com/office/drawing/2014/main" id="{25881C26-2EDC-4629-9175-8B03FB5A6229}"/>
+                <a16:creationId xmlns:a16="http://schemas.microsoft.com/office/drawing/2014/main" id="{3DA98D3F-6812-446D-A866-C0E86E67A4A2}"/>
               </a:ext>
             </a:extLst>
           </p:cNvPr>
@@ -8111,7 +8116,7 @@
           <p:cNvPr id="5" name="s8-command-box">
             <a:extLst xmlns:a="http://schemas.openxmlformats.org/drawingml/2006/main">
               <a:ext uri="{FF2B5EF4-FFF2-40B4-BE49-F238E27FC236}">
-                <a16:creationId xmlns:a16="http://schemas.microsoft.com/office/drawing/2014/main" id="{102B6943-1C89-4322-9BA2-38DBF95E81B0}"/>
+                <a16:creationId xmlns:a16="http://schemas.microsoft.com/office/drawing/2014/main" id="{6F30E500-4C89-414A-8B10-A80AA3A3B02C}"/>
               </a:ext>
             </a:extLst>
           </p:cNvPr>
@@ -8146,7 +8151,7 @@
           <p:cNvPr id="6" name="s8-command">
             <a:extLst xmlns:a="http://schemas.openxmlformats.org/drawingml/2006/main">
               <a:ext uri="{FF2B5EF4-FFF2-40B4-BE49-F238E27FC236}">
-                <a16:creationId xmlns:a16="http://schemas.microsoft.com/office/drawing/2014/main" id="{C41EA649-6BD4-46B8-B8BA-712C81298B90}"/>
+                <a16:creationId xmlns:a16="http://schemas.microsoft.com/office/drawing/2014/main" id="{54E3D959-D7D2-4F52-BF13-7DD089E98585}"/>
               </a:ext>
             </a:extLst>
           </p:cNvPr>
@@ -8192,7 +8197,7 @@
           <p:cNvPr id="7" name="s8-github">
             <a:extLst xmlns:a="http://schemas.openxmlformats.org/drawingml/2006/main">
               <a:ext uri="{FF2B5EF4-FFF2-40B4-BE49-F238E27FC236}">
-                <a16:creationId xmlns:a16="http://schemas.microsoft.com/office/drawing/2014/main" id="{EFDA97DB-97DE-4762-9F6F-46060F900E91}"/>
+                <a16:creationId xmlns:a16="http://schemas.microsoft.com/office/drawing/2014/main" id="{9D581FBD-7225-4AA5-84C1-813C8E3EF574}"/>
               </a:ext>
             </a:extLst>
           </p:cNvPr>
@@ -8237,7 +8242,7 @@
           <p:cNvPr id="8" name="s8-npm">
             <a:extLst xmlns:a="http://schemas.openxmlformats.org/drawingml/2006/main">
               <a:ext uri="{FF2B5EF4-FFF2-40B4-BE49-F238E27FC236}">
-                <a16:creationId xmlns:a16="http://schemas.microsoft.com/office/drawing/2014/main" id="{AE89145D-5F3B-41F7-BEBC-48C64F93BFA5}"/>
+                <a16:creationId xmlns:a16="http://schemas.microsoft.com/office/drawing/2014/main" id="{D060CE72-FBE5-4677-9DC7-211735AAB2DF}"/>
               </a:ext>
             </a:extLst>
           </p:cNvPr>
@@ -8282,7 +8287,7 @@
           <p:cNvPr id="9" name="s8-d1">
             <a:extLst xmlns:a="http://schemas.openxmlformats.org/drawingml/2006/main">
               <a:ext uri="{FF2B5EF4-FFF2-40B4-BE49-F238E27FC236}">
-                <a16:creationId xmlns:a16="http://schemas.microsoft.com/office/drawing/2014/main" id="{9B81D749-F4F4-42CF-BEB4-1E5C0BC1EF18}"/>
+                <a16:creationId xmlns:a16="http://schemas.microsoft.com/office/drawing/2014/main" id="{D46123D2-78D2-404D-BE78-BE31FD1B5357}"/>
               </a:ext>
             </a:extLst>
           </p:cNvPr>
@@ -8315,7 +8320,7 @@
           <p:cNvPr id="10" name="s8-l1">
             <a:extLst xmlns:a="http://schemas.openxmlformats.org/drawingml/2006/main">
               <a:ext uri="{FF2B5EF4-FFF2-40B4-BE49-F238E27FC236}">
-                <a16:creationId xmlns:a16="http://schemas.microsoft.com/office/drawing/2014/main" id="{1BF375C9-5B3C-4D25-9E28-FD7DA4205BB9}"/>
+                <a16:creationId xmlns:a16="http://schemas.microsoft.com/office/drawing/2014/main" id="{6CD18A7C-A265-44FB-B991-E39D4459B52C}"/>
               </a:ext>
             </a:extLst>
           </p:cNvPr>
@@ -8360,7 +8365,7 @@
           <p:cNvPr id="11" name="s8-d2">
             <a:extLst xmlns:a="http://schemas.openxmlformats.org/drawingml/2006/main">
               <a:ext uri="{FF2B5EF4-FFF2-40B4-BE49-F238E27FC236}">
-                <a16:creationId xmlns:a16="http://schemas.microsoft.com/office/drawing/2014/main" id="{DE39F716-AE9E-4450-9296-35AD08AE228F}"/>
+                <a16:creationId xmlns:a16="http://schemas.microsoft.com/office/drawing/2014/main" id="{246562C9-B70A-42CB-B2DC-7DBED1CD1E97}"/>
               </a:ext>
             </a:extLst>
           </p:cNvPr>
@@ -8393,7 +8398,7 @@
           <p:cNvPr id="12" name="s8-l2">
             <a:extLst xmlns:a="http://schemas.openxmlformats.org/drawingml/2006/main">
               <a:ext uri="{FF2B5EF4-FFF2-40B4-BE49-F238E27FC236}">
-                <a16:creationId xmlns:a16="http://schemas.microsoft.com/office/drawing/2014/main" id="{BF547D23-5F61-4104-96C8-55A0136CECAD}"/>
+                <a16:creationId xmlns:a16="http://schemas.microsoft.com/office/drawing/2014/main" id="{FE49A203-DE64-47A4-8F4C-9228D59E082B}"/>
               </a:ext>
             </a:extLst>
           </p:cNvPr>
@@ -8438,7 +8443,7 @@
           <p:cNvPr id="13" name="s8-d3">
             <a:extLst xmlns:a="http://schemas.openxmlformats.org/drawingml/2006/main">
               <a:ext uri="{FF2B5EF4-FFF2-40B4-BE49-F238E27FC236}">
-                <a16:creationId xmlns:a16="http://schemas.microsoft.com/office/drawing/2014/main" id="{302B440F-0A6E-4F63-AC28-93B3711DA66D}"/>
+                <a16:creationId xmlns:a16="http://schemas.microsoft.com/office/drawing/2014/main" id="{FC0ED1D1-CC2C-48B0-93E0-8B658E3B9333}"/>
               </a:ext>
             </a:extLst>
           </p:cNvPr>
@@ -8471,7 +8476,7 @@
           <p:cNvPr id="14" name="s8-l3">
             <a:extLst xmlns:a="http://schemas.openxmlformats.org/drawingml/2006/main">
               <a:ext uri="{FF2B5EF4-FFF2-40B4-BE49-F238E27FC236}">
-                <a16:creationId xmlns:a16="http://schemas.microsoft.com/office/drawing/2014/main" id="{89866269-C75F-424B-987A-91225CE0E954}"/>
+                <a16:creationId xmlns:a16="http://schemas.microsoft.com/office/drawing/2014/main" id="{2919F2EF-2478-48DE-9EDB-92828A09622C}"/>
               </a:ext>
             </a:extLst>
           </p:cNvPr>
@@ -8516,7 +8521,7 @@
           <p:cNvPr id="15" name="s8-platforms">
             <a:extLst xmlns:a="http://schemas.openxmlformats.org/drawingml/2006/main">
               <a:ext uri="{FF2B5EF4-FFF2-40B4-BE49-F238E27FC236}">
-                <a16:creationId xmlns:a16="http://schemas.microsoft.com/office/drawing/2014/main" id="{5590FA77-B0AB-48F3-A33F-B318B423844D}"/>
+                <a16:creationId xmlns:a16="http://schemas.microsoft.com/office/drawing/2014/main" id="{2E5456D7-0A3C-4095-B1DE-CBD341D50F21}"/>
               </a:ext>
             </a:extLst>
           </p:cNvPr>
@@ -8583,7 +8588,7 @@
           <p:cNvPr id="17" name="footer-source-8">
             <a:extLst xmlns:a="http://schemas.openxmlformats.org/drawingml/2006/main">
               <a:ext uri="{FF2B5EF4-FFF2-40B4-BE49-F238E27FC236}">
-                <a16:creationId xmlns:a16="http://schemas.microsoft.com/office/drawing/2014/main" id="{CC04D024-2E07-4A39-9EDE-3CBF7679D31A}"/>
+                <a16:creationId xmlns:a16="http://schemas.microsoft.com/office/drawing/2014/main" id="{763819D6-142E-4027-9992-42159980982E}"/>
               </a:ext>
             </a:extLst>
           </p:cNvPr>
@@ -8628,7 +8633,7 @@
           <p:cNvPr id="18" name="footer-number-8">
             <a:extLst xmlns:a="http://schemas.openxmlformats.org/drawingml/2006/main">
               <a:ext uri="{FF2B5EF4-FFF2-40B4-BE49-F238E27FC236}">
-                <a16:creationId xmlns:a16="http://schemas.microsoft.com/office/drawing/2014/main" id="{0F932832-8320-4E80-9359-862E281E750C}"/>
+                <a16:creationId xmlns:a16="http://schemas.microsoft.com/office/drawing/2014/main" id="{6529AE35-2D0E-403F-B31D-7FD915E3586B}"/>
               </a:ext>
             </a:extLst>
           </p:cNvPr>
@@ -8671,7 +8676,7 @@
     </p:spTree>
     <p:extLst>
       <p:ext uri="{BB962C8B-B14F-4D97-AF65-F5344CB8AC3E}">
-        <p14:creationId xmlns:p14="http://schemas.microsoft.com/office/powerpoint/2010/main" val="736178879"/>
+        <p14:creationId xmlns:p14="http://schemas.microsoft.com/office/powerpoint/2010/main" val="2134665719"/>
       </p:ext>
     </p:extLst>
   </p:cSld>

--- a/outputs/vertex-palace-build-week-demo.pptx
+++ b/outputs/vertex-palace-build-week-demo.pptx
@@ -2,20 +2,20 @@
 <file path=ppt/presentation.xml><?xml version="1.0" encoding="utf-8"?>
 <p:presentation xmlns:p="http://schemas.openxmlformats.org/presentationml/2006/main">
   <p:sldMasterIdLst>
-    <p:sldMasterId xmlns:r="http://schemas.openxmlformats.org/officeDocument/2006/relationships" id="2147483648" r:id="Ree44bf9335644666"/>
+    <p:sldMasterId xmlns:r="http://schemas.openxmlformats.org/officeDocument/2006/relationships" id="2147483648" r:id="R2abdefaf395e490e"/>
   </p:sldMasterIdLst>
   <p:notesMasterIdLst>
-    <p:notesMasterId xmlns:r="http://schemas.openxmlformats.org/officeDocument/2006/relationships" r:id="Rc98aa339755b45d2"/>
+    <p:notesMasterId xmlns:r="http://schemas.openxmlformats.org/officeDocument/2006/relationships" r:id="Rc34b74eb9f5142bc"/>
   </p:notesMasterIdLst>
   <p:sldIdLst>
-    <p:sldId xmlns:r="http://schemas.openxmlformats.org/officeDocument/2006/relationships" id="256" r:id="R131d1e2aa3984a09"/>
-    <p:sldId xmlns:r="http://schemas.openxmlformats.org/officeDocument/2006/relationships" id="257" r:id="R0e224fd3b0ea4cd5"/>
-    <p:sldId xmlns:r="http://schemas.openxmlformats.org/officeDocument/2006/relationships" id="258" r:id="R1b859cddd684407b"/>
-    <p:sldId xmlns:r="http://schemas.openxmlformats.org/officeDocument/2006/relationships" id="259" r:id="Rc5188e4aadc34b76"/>
-    <p:sldId xmlns:r="http://schemas.openxmlformats.org/officeDocument/2006/relationships" id="260" r:id="R02eaf360ec414d5e"/>
-    <p:sldId xmlns:r="http://schemas.openxmlformats.org/officeDocument/2006/relationships" id="261" r:id="R8d53dc85e8714916"/>
-    <p:sldId xmlns:r="http://schemas.openxmlformats.org/officeDocument/2006/relationships" id="262" r:id="R56009698a3ed4950"/>
-    <p:sldId xmlns:r="http://schemas.openxmlformats.org/officeDocument/2006/relationships" id="263" r:id="Rd7b6dbc3d9d34784"/>
+    <p:sldId xmlns:r="http://schemas.openxmlformats.org/officeDocument/2006/relationships" id="256" r:id="R39f7a98369034cca"/>
+    <p:sldId xmlns:r="http://schemas.openxmlformats.org/officeDocument/2006/relationships" id="257" r:id="R8b76a65345ab4a79"/>
+    <p:sldId xmlns:r="http://schemas.openxmlformats.org/officeDocument/2006/relationships" id="258" r:id="R4a9d51c5d6d2426f"/>
+    <p:sldId xmlns:r="http://schemas.openxmlformats.org/officeDocument/2006/relationships" id="259" r:id="R9d509893f2314f34"/>
+    <p:sldId xmlns:r="http://schemas.openxmlformats.org/officeDocument/2006/relationships" id="260" r:id="Ree36d4941d4348ac"/>
+    <p:sldId xmlns:r="http://schemas.openxmlformats.org/officeDocument/2006/relationships" id="261" r:id="R46364cad20e14537"/>
+    <p:sldId xmlns:r="http://schemas.openxmlformats.org/officeDocument/2006/relationships" id="262" r:id="R954f177c827342ca"/>
+    <p:sldId xmlns:r="http://schemas.openxmlformats.org/officeDocument/2006/relationships" id="263" r:id="R88ca8e012d334404"/>
   </p:sldIdLst>
   <p:sldSz cx="12192000" cy="6858000"/>
   <p:notesSz cx="6858000" cy="9144000"/>
@@ -694,7 +694,12 @@
           <a:lstStyle xmlns:a="http://schemas.openxmlformats.org/drawingml/2006/main"/>
           <a:p xmlns:a="http://schemas.openxmlformats.org/drawingml/2006/main">
             <a:r>
-              <a:t>The inspiration came from the human memory-palace technique: assign knowledge to places, then follow a route to retrieve it. Vertex Palace maps repository domains to floors, features to rooms, and files and symbols to smaller storage layers.</a:t>
+              <a:t>The original idea began with a spatial question: could a flat, two-dimensional repository tree become a three-dimensional place? A building became the natural model, with domains as floors, features as rooms, and files and symbols as cabinets and drawers.</a:t>
+            </a:r>
+          </a:p>
+          <a:p xmlns:a="http://schemas.openxmlformats.org/drawingml/2006/main">
+            <a:r>
+              <a:t>The connection to the human memory-palace technique came next. Once the repository had places, a task could follow a route through them and relevant past mistakes could wait at the entrance.</a:t>
             </a:r>
           </a:p>
           <a:p xmlns:a="http://schemas.openxmlformats.org/drawingml/2006/main">
@@ -1152,7 +1157,7 @@
   </p:cSld>
   <p:clrMap bg1="lt1" tx1="dk1" bg2="lt2" tx2="dk2" accent1="accent1" accent2="accent2" accent3="accent3" accent4="accent4" accent5="accent5" accent6="accent6" hlink="hlink" folHlink="folHlink"/>
   <p:sldLayoutIdLst>
-    <p:sldLayoutId xmlns:r="http://schemas.openxmlformats.org/officeDocument/2006/relationships" id="2147483649" r:id="R0902ee43faeb40ea"/>
+    <p:sldLayoutId xmlns:r="http://schemas.openxmlformats.org/officeDocument/2006/relationships" id="2147483649" r:id="Rfeaf7f294e654a66"/>
   </p:sldLayoutIdLst>
   <p:txStyles>
     <p:titleStyle>
@@ -2044,7 +2049,7 @@
           <p:cNvPr id="7" name="s1-eyebrow">
             <a:extLst xmlns:a="http://schemas.openxmlformats.org/drawingml/2006/main">
               <a:ext uri="{FF2B5EF4-FFF2-40B4-BE49-F238E27FC236}">
-                <a16:creationId xmlns:a16="http://schemas.microsoft.com/office/drawing/2014/main" id="{C9BAD10D-D100-46F6-B29C-35EEBEA7F4C4}"/>
+                <a16:creationId xmlns:a16="http://schemas.microsoft.com/office/drawing/2014/main" id="{B7B1FA98-806C-40C5-A554-1071E0862DBB}"/>
               </a:ext>
             </a:extLst>
           </p:cNvPr>
@@ -2089,7 +2094,7 @@
           <p:cNvPr id="2" name="s1-title">
             <a:extLst xmlns:a="http://schemas.openxmlformats.org/drawingml/2006/main">
               <a:ext uri="{FF2B5EF4-FFF2-40B4-BE49-F238E27FC236}">
-                <a16:creationId xmlns:a16="http://schemas.microsoft.com/office/drawing/2014/main" id="{65668104-24CF-4A09-85F4-456208D4F40A}"/>
+                <a16:creationId xmlns:a16="http://schemas.microsoft.com/office/drawing/2014/main" id="{C1889C3F-BF41-4D7C-8A0A-ED3374146D69}"/>
               </a:ext>
             </a:extLst>
           </p:cNvPr>
@@ -2157,7 +2162,7 @@
           <p:cNvPr id="4" name="s1-subtitle">
             <a:extLst xmlns:a="http://schemas.openxmlformats.org/drawingml/2006/main">
               <a:ext uri="{FF2B5EF4-FFF2-40B4-BE49-F238E27FC236}">
-                <a16:creationId xmlns:a16="http://schemas.microsoft.com/office/drawing/2014/main" id="{307ADBE3-367C-427C-B41C-28D8304A314B}"/>
+                <a16:creationId xmlns:a16="http://schemas.microsoft.com/office/drawing/2014/main" id="{4669666D-118B-4D03-ACA6-8F67931BCE11}"/>
               </a:ext>
             </a:extLst>
           </p:cNvPr>
@@ -2202,7 +2207,7 @@
           <p:cNvPr id="5" name="s1-version">
             <a:extLst xmlns:a="http://schemas.openxmlformats.org/drawingml/2006/main">
               <a:ext uri="{FF2B5EF4-FFF2-40B4-BE49-F238E27FC236}">
-                <a16:creationId xmlns:a16="http://schemas.microsoft.com/office/drawing/2014/main" id="{70875ACA-49B9-43F0-A67F-7BD6D6DAA45D}"/>
+                <a16:creationId xmlns:a16="http://schemas.microsoft.com/office/drawing/2014/main" id="{6DDE248A-DE7A-44C3-BBD9-7FC9B0CEB408}"/>
               </a:ext>
             </a:extLst>
           </p:cNvPr>
@@ -2251,7 +2256,7 @@
           <p:nvPr/>
         </p:nvPicPr>
         <p:blipFill>
-          <a:blip xmlns:r="http://schemas.openxmlformats.org/officeDocument/2006/relationships" xmlns:a="http://schemas.openxmlformats.org/drawingml/2006/main" r:embed="Rac4445891b354050"/>
+          <a:blip xmlns:r="http://schemas.openxmlformats.org/officeDocument/2006/relationships" xmlns:a="http://schemas.openxmlformats.org/drawingml/2006/main" r:embed="Rb0f2c6423231481c"/>
           <a:stretch xmlns:a="http://schemas.openxmlformats.org/drawingml/2006/main"/>
         </p:blipFill>
         <p:spPr>
@@ -2267,7 +2272,7 @@
     </p:spTree>
     <p:extLst>
       <p:ext uri="{BB962C8B-B14F-4D97-AF65-F5344CB8AC3E}">
-        <p14:creationId xmlns:p14="http://schemas.microsoft.com/office/powerpoint/2010/main" val="1199054850"/>
+        <p14:creationId xmlns:p14="http://schemas.microsoft.com/office/powerpoint/2010/main" val="1270227419"/>
       </p:ext>
     </p:extLst>
   </p:cSld>
@@ -2298,7 +2303,7 @@
           <p:cNvPr id="33" name="s2-title">
             <a:extLst xmlns:a="http://schemas.openxmlformats.org/drawingml/2006/main">
               <a:ext uri="{FF2B5EF4-FFF2-40B4-BE49-F238E27FC236}">
-                <a16:creationId xmlns:a16="http://schemas.microsoft.com/office/drawing/2014/main" id="{652C5319-8479-4A01-A996-AF2A32B16EDE}"/>
+                <a16:creationId xmlns:a16="http://schemas.microsoft.com/office/drawing/2014/main" id="{C5FC4020-68D7-4811-ADE7-A817D4BC3B36}"/>
               </a:ext>
             </a:extLst>
           </p:cNvPr>
@@ -2343,7 +2348,7 @@
           <p:cNvPr id="2" name="s2-subtitle">
             <a:extLst xmlns:a="http://schemas.openxmlformats.org/drawingml/2006/main">
               <a:ext uri="{FF2B5EF4-FFF2-40B4-BE49-F238E27FC236}">
-                <a16:creationId xmlns:a16="http://schemas.microsoft.com/office/drawing/2014/main" id="{F23EEC23-A893-47E9-81E0-363EA7CCE6D6}"/>
+                <a16:creationId xmlns:a16="http://schemas.microsoft.com/office/drawing/2014/main" id="{4940A15F-891F-4344-A13A-B1C339B0A557}"/>
               </a:ext>
             </a:extLst>
           </p:cNvPr>
@@ -2498,7 +2503,7 @@
           <p:cNvPr id="8" name="s2-agent">
             <a:extLst xmlns:a="http://schemas.openxmlformats.org/drawingml/2006/main">
               <a:ext uri="{FF2B5EF4-FFF2-40B4-BE49-F238E27FC236}">
-                <a16:creationId xmlns:a16="http://schemas.microsoft.com/office/drawing/2014/main" id="{952457D8-E0AD-42F1-B51A-87BF700BB257}"/>
+                <a16:creationId xmlns:a16="http://schemas.microsoft.com/office/drawing/2014/main" id="{A01F559D-912B-4B3C-965D-04A0BBECBFA2}"/>
               </a:ext>
             </a:extLst>
           </p:cNvPr>
@@ -2531,7 +2536,7 @@
           <p:cNvPr id="9" name="s2-agent-label">
             <a:extLst xmlns:a="http://schemas.openxmlformats.org/drawingml/2006/main">
               <a:ext uri="{FF2B5EF4-FFF2-40B4-BE49-F238E27FC236}">
-                <a16:creationId xmlns:a16="http://schemas.microsoft.com/office/drawing/2014/main" id="{F77C85EF-E588-4129-9299-BCA943D51270}"/>
+                <a16:creationId xmlns:a16="http://schemas.microsoft.com/office/drawing/2014/main" id="{A44C0778-51D2-4D50-9E6C-D44F690E9A45}"/>
               </a:ext>
             </a:extLst>
           </p:cNvPr>
@@ -2576,7 +2581,7 @@
           <p:cNvPr id="10" name="s2-file-a">
             <a:extLst xmlns:a="http://schemas.openxmlformats.org/drawingml/2006/main">
               <a:ext uri="{FF2B5EF4-FFF2-40B4-BE49-F238E27FC236}">
-                <a16:creationId xmlns:a16="http://schemas.microsoft.com/office/drawing/2014/main" id="{E25DE2F3-5816-465E-B5D8-85F5EA5B7B04}"/>
+                <a16:creationId xmlns:a16="http://schemas.microsoft.com/office/drawing/2014/main" id="{7DD03FA1-A93C-481A-A316-AB9D11260DBC}"/>
               </a:ext>
             </a:extLst>
           </p:cNvPr>
@@ -2609,7 +2614,7 @@
           <p:cNvPr id="11" name="s2-file-b">
             <a:extLst xmlns:a="http://schemas.openxmlformats.org/drawingml/2006/main">
               <a:ext uri="{FF2B5EF4-FFF2-40B4-BE49-F238E27FC236}">
-                <a16:creationId xmlns:a16="http://schemas.microsoft.com/office/drawing/2014/main" id="{BDB7543C-1AF2-4437-B019-E3AE12963C32}"/>
+                <a16:creationId xmlns:a16="http://schemas.microsoft.com/office/drawing/2014/main" id="{200592A9-79DC-475F-981B-0164FB535A27}"/>
               </a:ext>
             </a:extLst>
           </p:cNvPr>
@@ -2642,7 +2647,7 @@
           <p:cNvPr id="12" name="s2-file-c">
             <a:extLst xmlns:a="http://schemas.openxmlformats.org/drawingml/2006/main">
               <a:ext uri="{FF2B5EF4-FFF2-40B4-BE49-F238E27FC236}">
-                <a16:creationId xmlns:a16="http://schemas.microsoft.com/office/drawing/2014/main" id="{CE506F9F-AC1C-4B4A-95B1-350D04A85CF9}"/>
+                <a16:creationId xmlns:a16="http://schemas.microsoft.com/office/drawing/2014/main" id="{F024A584-4103-45D1-8D3E-DEF1CB2EFDB7}"/>
               </a:ext>
             </a:extLst>
           </p:cNvPr>
@@ -2675,7 +2680,7 @@
           <p:cNvPr id="13" name="s2-file-d">
             <a:extLst xmlns:a="http://schemas.openxmlformats.org/drawingml/2006/main">
               <a:ext uri="{FF2B5EF4-FFF2-40B4-BE49-F238E27FC236}">
-                <a16:creationId xmlns:a16="http://schemas.microsoft.com/office/drawing/2014/main" id="{D645ECDD-670D-4934-B048-87EAB7D19EB8}"/>
+                <a16:creationId xmlns:a16="http://schemas.microsoft.com/office/drawing/2014/main" id="{8DDC61FB-59DB-4BE7-BF2A-2316C278718D}"/>
               </a:ext>
             </a:extLst>
           </p:cNvPr>
@@ -2708,7 +2713,7 @@
           <p:cNvPr id="14" name="s2-file-e">
             <a:extLst xmlns:a="http://schemas.openxmlformats.org/drawingml/2006/main">
               <a:ext uri="{FF2B5EF4-FFF2-40B4-BE49-F238E27FC236}">
-                <a16:creationId xmlns:a16="http://schemas.microsoft.com/office/drawing/2014/main" id="{AB99B7B3-9C63-4FBF-9470-48EFF288786B}"/>
+                <a16:creationId xmlns:a16="http://schemas.microsoft.com/office/drawing/2014/main" id="{B33BFD1E-4A8B-4F32-AB43-EB36FA455BA0}"/>
               </a:ext>
             </a:extLst>
           </p:cNvPr>
@@ -2741,7 +2746,7 @@
           <p:cNvPr id="15" name="s2-file-a-label">
             <a:extLst xmlns:a="http://schemas.openxmlformats.org/drawingml/2006/main">
               <a:ext uri="{FF2B5EF4-FFF2-40B4-BE49-F238E27FC236}">
-                <a16:creationId xmlns:a16="http://schemas.microsoft.com/office/drawing/2014/main" id="{009650EF-6DC2-4FD3-8230-57AEC17762E7}"/>
+                <a16:creationId xmlns:a16="http://schemas.microsoft.com/office/drawing/2014/main" id="{32BF2F3A-D65D-4DF4-A83D-4A0FB33B9AB6}"/>
               </a:ext>
             </a:extLst>
           </p:cNvPr>
@@ -2786,7 +2791,7 @@
           <p:cNvPr id="16" name="s2-file-b-label">
             <a:extLst xmlns:a="http://schemas.openxmlformats.org/drawingml/2006/main">
               <a:ext uri="{FF2B5EF4-FFF2-40B4-BE49-F238E27FC236}">
-                <a16:creationId xmlns:a16="http://schemas.microsoft.com/office/drawing/2014/main" id="{206287A0-0D71-417D-9323-BD356B9E1F30}"/>
+                <a16:creationId xmlns:a16="http://schemas.microsoft.com/office/drawing/2014/main" id="{4587D486-932F-4FB6-B402-137073E34186}"/>
               </a:ext>
             </a:extLst>
           </p:cNvPr>
@@ -2831,7 +2836,7 @@
           <p:cNvPr id="17" name="s2-file-c-label">
             <a:extLst xmlns:a="http://schemas.openxmlformats.org/drawingml/2006/main">
               <a:ext uri="{FF2B5EF4-FFF2-40B4-BE49-F238E27FC236}">
-                <a16:creationId xmlns:a16="http://schemas.microsoft.com/office/drawing/2014/main" id="{9EFF31B8-0D5E-4438-9973-3F302892D7E7}"/>
+                <a16:creationId xmlns:a16="http://schemas.microsoft.com/office/drawing/2014/main" id="{56E77D73-AFAD-438B-9DA9-99357F7C4419}"/>
               </a:ext>
             </a:extLst>
           </p:cNvPr>
@@ -2876,7 +2881,7 @@
           <p:cNvPr id="18" name="s2-file-d-label">
             <a:extLst xmlns:a="http://schemas.openxmlformats.org/drawingml/2006/main">
               <a:ext uri="{FF2B5EF4-FFF2-40B4-BE49-F238E27FC236}">
-                <a16:creationId xmlns:a16="http://schemas.microsoft.com/office/drawing/2014/main" id="{CD0096AC-2AFE-4B0A-B4A5-7F28E314F0CF}"/>
+                <a16:creationId xmlns:a16="http://schemas.microsoft.com/office/drawing/2014/main" id="{F306541C-8593-40AC-A877-CC3DE563777C}"/>
               </a:ext>
             </a:extLst>
           </p:cNvPr>
@@ -2921,7 +2926,7 @@
           <p:cNvPr id="19" name="s2-file-e-label">
             <a:extLst xmlns:a="http://schemas.openxmlformats.org/drawingml/2006/main">
               <a:ext uri="{FF2B5EF4-FFF2-40B4-BE49-F238E27FC236}">
-                <a16:creationId xmlns:a16="http://schemas.microsoft.com/office/drawing/2014/main" id="{D1A04DEF-CED8-482C-80F0-603EDB5572BD}"/>
+                <a16:creationId xmlns:a16="http://schemas.microsoft.com/office/drawing/2014/main" id="{8D3B657F-C97B-47DA-AE05-3EB3F1CD849F}"/>
               </a:ext>
             </a:extLst>
           </p:cNvPr>
@@ -2966,7 +2971,7 @@
           <p:cNvPr id="20" name="s2-n1">
             <a:extLst xmlns:a="http://schemas.openxmlformats.org/drawingml/2006/main">
               <a:ext uri="{FF2B5EF4-FFF2-40B4-BE49-F238E27FC236}">
-                <a16:creationId xmlns:a16="http://schemas.microsoft.com/office/drawing/2014/main" id="{54B0AA2E-152C-4877-86BD-E4A7AC425BED}"/>
+                <a16:creationId xmlns:a16="http://schemas.microsoft.com/office/drawing/2014/main" id="{D8FEB7E8-7602-4187-B600-F0EA3B74AE52}"/>
               </a:ext>
             </a:extLst>
           </p:cNvPr>
@@ -2999,7 +3004,7 @@
           <p:cNvPr id="21" name="s2-n1-label">
             <a:extLst xmlns:a="http://schemas.openxmlformats.org/drawingml/2006/main">
               <a:ext uri="{FF2B5EF4-FFF2-40B4-BE49-F238E27FC236}">
-                <a16:creationId xmlns:a16="http://schemas.microsoft.com/office/drawing/2014/main" id="{A4F29DD1-F602-43E6-903F-81710190A760}"/>
+                <a16:creationId xmlns:a16="http://schemas.microsoft.com/office/drawing/2014/main" id="{62768408-9234-4E1A-86BD-3089003B8B33}"/>
               </a:ext>
             </a:extLst>
           </p:cNvPr>
@@ -3044,7 +3049,7 @@
           <p:cNvPr id="22" name="s2-p1">
             <a:extLst xmlns:a="http://schemas.openxmlformats.org/drawingml/2006/main">
               <a:ext uri="{FF2B5EF4-FFF2-40B4-BE49-F238E27FC236}">
-                <a16:creationId xmlns:a16="http://schemas.microsoft.com/office/drawing/2014/main" id="{25298350-FBC0-4CA0-9F3C-39230D5BC29D}"/>
+                <a16:creationId xmlns:a16="http://schemas.microsoft.com/office/drawing/2014/main" id="{F5162042-A516-4172-987A-DEC9A5623A64}"/>
               </a:ext>
             </a:extLst>
           </p:cNvPr>
@@ -3089,7 +3094,7 @@
           <p:cNvPr id="23" name="s2-n2">
             <a:extLst xmlns:a="http://schemas.openxmlformats.org/drawingml/2006/main">
               <a:ext uri="{FF2B5EF4-FFF2-40B4-BE49-F238E27FC236}">
-                <a16:creationId xmlns:a16="http://schemas.microsoft.com/office/drawing/2014/main" id="{E6531A41-12DF-4413-9622-33CCCB7DD2B3}"/>
+                <a16:creationId xmlns:a16="http://schemas.microsoft.com/office/drawing/2014/main" id="{B4BD2993-05F2-4960-93EC-545FE3A79B48}"/>
               </a:ext>
             </a:extLst>
           </p:cNvPr>
@@ -3122,7 +3127,7 @@
           <p:cNvPr id="24" name="s2-n2-label">
             <a:extLst xmlns:a="http://schemas.openxmlformats.org/drawingml/2006/main">
               <a:ext uri="{FF2B5EF4-FFF2-40B4-BE49-F238E27FC236}">
-                <a16:creationId xmlns:a16="http://schemas.microsoft.com/office/drawing/2014/main" id="{6234723A-5B6E-4197-83AA-5C04AAEB4714}"/>
+                <a16:creationId xmlns:a16="http://schemas.microsoft.com/office/drawing/2014/main" id="{758B1B5C-4A3A-4E43-9223-B0F64104B272}"/>
               </a:ext>
             </a:extLst>
           </p:cNvPr>
@@ -3167,7 +3172,7 @@
           <p:cNvPr id="25" name="s2-p2">
             <a:extLst xmlns:a="http://schemas.openxmlformats.org/drawingml/2006/main">
               <a:ext uri="{FF2B5EF4-FFF2-40B4-BE49-F238E27FC236}">
-                <a16:creationId xmlns:a16="http://schemas.microsoft.com/office/drawing/2014/main" id="{729C3FF9-5232-45C7-B73F-F6FA4121E56B}"/>
+                <a16:creationId xmlns:a16="http://schemas.microsoft.com/office/drawing/2014/main" id="{216F0699-0303-427C-A104-396B5BFAEB4D}"/>
               </a:ext>
             </a:extLst>
           </p:cNvPr>
@@ -3212,7 +3217,7 @@
           <p:cNvPr id="26" name="s2-n3">
             <a:extLst xmlns:a="http://schemas.openxmlformats.org/drawingml/2006/main">
               <a:ext uri="{FF2B5EF4-FFF2-40B4-BE49-F238E27FC236}">
-                <a16:creationId xmlns:a16="http://schemas.microsoft.com/office/drawing/2014/main" id="{1AFAC487-D452-4854-BFE1-52FA51238224}"/>
+                <a16:creationId xmlns:a16="http://schemas.microsoft.com/office/drawing/2014/main" id="{953A21F2-A6AD-4166-9B57-9F79639EE525}"/>
               </a:ext>
             </a:extLst>
           </p:cNvPr>
@@ -3245,7 +3250,7 @@
           <p:cNvPr id="27" name="s2-n3-label">
             <a:extLst xmlns:a="http://schemas.openxmlformats.org/drawingml/2006/main">
               <a:ext uri="{FF2B5EF4-FFF2-40B4-BE49-F238E27FC236}">
-                <a16:creationId xmlns:a16="http://schemas.microsoft.com/office/drawing/2014/main" id="{00FB4118-EAB5-4692-BCCC-3EFEFD754756}"/>
+                <a16:creationId xmlns:a16="http://schemas.microsoft.com/office/drawing/2014/main" id="{67E3757C-7BC9-473D-BD3D-0A16007A14C9}"/>
               </a:ext>
             </a:extLst>
           </p:cNvPr>
@@ -3290,7 +3295,7 @@
           <p:cNvPr id="28" name="s2-p3">
             <a:extLst xmlns:a="http://schemas.openxmlformats.org/drawingml/2006/main">
               <a:ext uri="{FF2B5EF4-FFF2-40B4-BE49-F238E27FC236}">
-                <a16:creationId xmlns:a16="http://schemas.microsoft.com/office/drawing/2014/main" id="{529BF1A9-8EFB-498C-B00F-9DDB260AB287}"/>
+                <a16:creationId xmlns:a16="http://schemas.microsoft.com/office/drawing/2014/main" id="{769800D5-994F-4BB1-AD39-635972011F2D}"/>
               </a:ext>
             </a:extLst>
           </p:cNvPr>
@@ -3335,7 +3340,7 @@
           <p:cNvPr id="29" name="s2-takeaway">
             <a:extLst xmlns:a="http://schemas.openxmlformats.org/drawingml/2006/main">
               <a:ext uri="{FF2B5EF4-FFF2-40B4-BE49-F238E27FC236}">
-                <a16:creationId xmlns:a16="http://schemas.microsoft.com/office/drawing/2014/main" id="{D0ACB8BD-EE21-4326-B986-8FC8AC8317B6}"/>
+                <a16:creationId xmlns:a16="http://schemas.microsoft.com/office/drawing/2014/main" id="{F96DB957-1493-4D0D-8297-7670DA2B63B2}"/>
               </a:ext>
             </a:extLst>
           </p:cNvPr>
@@ -3402,7 +3407,7 @@
           <p:cNvPr id="31" name="footer-source-2">
             <a:extLst xmlns:a="http://schemas.openxmlformats.org/drawingml/2006/main">
               <a:ext uri="{FF2B5EF4-FFF2-40B4-BE49-F238E27FC236}">
-                <a16:creationId xmlns:a16="http://schemas.microsoft.com/office/drawing/2014/main" id="{F5D6DA4A-4F56-493A-9566-C2D522D6727C}"/>
+                <a16:creationId xmlns:a16="http://schemas.microsoft.com/office/drawing/2014/main" id="{73CFBAD0-5848-46F1-AA68-4BF1E8A140F0}"/>
               </a:ext>
             </a:extLst>
           </p:cNvPr>
@@ -3447,7 +3452,7 @@
           <p:cNvPr id="32" name="footer-number-2">
             <a:extLst xmlns:a="http://schemas.openxmlformats.org/drawingml/2006/main">
               <a:ext uri="{FF2B5EF4-FFF2-40B4-BE49-F238E27FC236}">
-                <a16:creationId xmlns:a16="http://schemas.microsoft.com/office/drawing/2014/main" id="{57A1E16F-B221-4BC2-9FD6-36B9A9BC135D}"/>
+                <a16:creationId xmlns:a16="http://schemas.microsoft.com/office/drawing/2014/main" id="{C40432CF-26AF-4DE0-B190-F8AE9AB03723}"/>
               </a:ext>
             </a:extLst>
           </p:cNvPr>
@@ -3490,7 +3495,7 @@
     </p:spTree>
     <p:extLst>
       <p:ext uri="{BB962C8B-B14F-4D97-AF65-F5344CB8AC3E}">
-        <p14:creationId xmlns:p14="http://schemas.microsoft.com/office/powerpoint/2010/main" val="1232146288"/>
+        <p14:creationId xmlns:p14="http://schemas.microsoft.com/office/powerpoint/2010/main" val="1442236352"/>
       </p:ext>
     </p:extLst>
   </p:cSld>
@@ -3521,7 +3526,7 @@
           <p:cNvPr id="29" name="s3-title">
             <a:extLst xmlns:a="http://schemas.openxmlformats.org/drawingml/2006/main">
               <a:ext uri="{FF2B5EF4-FFF2-40B4-BE49-F238E27FC236}">
-                <a16:creationId xmlns:a16="http://schemas.microsoft.com/office/drawing/2014/main" id="{D92F9CBF-9B75-48D7-9978-568567EF54DC}"/>
+                <a16:creationId xmlns:a16="http://schemas.microsoft.com/office/drawing/2014/main" id="{E27733F7-45C4-4741-BECA-AB6F8949F354}"/>
               </a:ext>
             </a:extLst>
           </p:cNvPr>
@@ -3556,7 +3561,7 @@
               </a:defRPr>
             </a:pPr>
             <a:r>
-              <a:t>A human memory palace became a map for code.</a:t>
+              <a:t>I wanted to turn a 2D repository into a 3D building.</a:t>
             </a:r>
           </a:p>
         </p:txBody>
@@ -3566,7 +3571,7 @@
           <p:cNvPr id="2" name="s3-subtitle">
             <a:extLst xmlns:a="http://schemas.openxmlformats.org/drawingml/2006/main">
               <a:ext uri="{FF2B5EF4-FFF2-40B4-BE49-F238E27FC236}">
-                <a16:creationId xmlns:a16="http://schemas.microsoft.com/office/drawing/2014/main" id="{5C55AC4E-DEDD-46CF-9F11-0449E0E187CD}"/>
+                <a16:creationId xmlns:a16="http://schemas.microsoft.com/office/drawing/2014/main" id="{D8B89513-F66C-4268-806F-44E2DF33041A}"/>
               </a:ext>
             </a:extLst>
           </p:cNvPr>
@@ -3601,7 +3606,7 @@
               </a:defRPr>
             </a:pPr>
             <a:r>
-              <a:t>Floors organize domains. Rooms hold features. Routes retrieve context. Pitfalls wait at the entrance.</a:t>
+              <a:t>Domains became floors. Features became rooms. Files and symbols became cabinets and drawers.</a:t>
             </a:r>
           </a:p>
         </p:txBody>
@@ -3721,7 +3726,7 @@
           <p:cNvPr id="8" name="s3-repo">
             <a:extLst xmlns:a="http://schemas.openxmlformats.org/drawingml/2006/main">
               <a:ext uri="{FF2B5EF4-FFF2-40B4-BE49-F238E27FC236}">
-                <a16:creationId xmlns:a16="http://schemas.microsoft.com/office/drawing/2014/main" id="{2D2EF53F-31C5-4978-ABAA-D68449E00DA8}"/>
+                <a16:creationId xmlns:a16="http://schemas.microsoft.com/office/drawing/2014/main" id="{F84B093C-FEA3-4914-8E41-2D9A530BAA25}"/>
               </a:ext>
             </a:extLst>
           </p:cNvPr>
@@ -3756,7 +3761,7 @@
           <p:cNvPr id="9" name="s3-index">
             <a:extLst xmlns:a="http://schemas.openxmlformats.org/drawingml/2006/main">
               <a:ext uri="{FF2B5EF4-FFF2-40B4-BE49-F238E27FC236}">
-                <a16:creationId xmlns:a16="http://schemas.microsoft.com/office/drawing/2014/main" id="{1A9AA8D4-1388-42DB-93F7-1519B29C9353}"/>
+                <a16:creationId xmlns:a16="http://schemas.microsoft.com/office/drawing/2014/main" id="{89846913-9258-41E6-A885-56F6F473227D}"/>
               </a:ext>
             </a:extLst>
           </p:cNvPr>
@@ -3791,7 +3796,7 @@
           <p:cNvPr id="10" name="s3-mode">
             <a:extLst xmlns:a="http://schemas.openxmlformats.org/drawingml/2006/main">
               <a:ext uri="{FF2B5EF4-FFF2-40B4-BE49-F238E27FC236}">
-                <a16:creationId xmlns:a16="http://schemas.microsoft.com/office/drawing/2014/main" id="{0A5361B6-FE8E-4CF3-8B46-BF5CA1F4F179}"/>
+                <a16:creationId xmlns:a16="http://schemas.microsoft.com/office/drawing/2014/main" id="{C55F47EA-5C65-456D-B485-4D330B21B66C}"/>
               </a:ext>
             </a:extLst>
           </p:cNvPr>
@@ -3826,7 +3831,7 @@
           <p:cNvPr id="11" name="s3-pack">
             <a:extLst xmlns:a="http://schemas.openxmlformats.org/drawingml/2006/main">
               <a:ext uri="{FF2B5EF4-FFF2-40B4-BE49-F238E27FC236}">
-                <a16:creationId xmlns:a16="http://schemas.microsoft.com/office/drawing/2014/main" id="{2A5089C0-ED1A-46E9-AD71-7A84B1788F77}"/>
+                <a16:creationId xmlns:a16="http://schemas.microsoft.com/office/drawing/2014/main" id="{253B49D7-D4B8-44CF-8038-1EC8F11B9418}"/>
               </a:ext>
             </a:extLst>
           </p:cNvPr>
@@ -3861,7 +3866,7 @@
           <p:cNvPr id="12" name="s3-task">
             <a:extLst xmlns:a="http://schemas.openxmlformats.org/drawingml/2006/main">
               <a:ext uri="{FF2B5EF4-FFF2-40B4-BE49-F238E27FC236}">
-                <a16:creationId xmlns:a16="http://schemas.microsoft.com/office/drawing/2014/main" id="{3372EEC0-BB6A-42B0-94B0-B4A2F814F491}"/>
+                <a16:creationId xmlns:a16="http://schemas.microsoft.com/office/drawing/2014/main" id="{8D16ACD7-C8C3-4977-8C92-5CC73FFE564B}"/>
               </a:ext>
             </a:extLst>
           </p:cNvPr>
@@ -3896,19 +3901,19 @@
           <p:cNvPr id="13" name="s3-repo-label">
             <a:extLst xmlns:a="http://schemas.openxmlformats.org/drawingml/2006/main">
               <a:ext uri="{FF2B5EF4-FFF2-40B4-BE49-F238E27FC236}">
-                <a16:creationId xmlns:a16="http://schemas.microsoft.com/office/drawing/2014/main" id="{C3D2DF5B-EFC5-494F-A605-521DDE9E1A4B}"/>
-              </a:ext>
-            </a:extLst>
-          </p:cNvPr>
-          <p:cNvSpPr>
-            <a:spLocks xmlns:a="http://schemas.openxmlformats.org/drawingml/2006/main" noGrp="1"/>
-          </p:cNvSpPr>
-          <p:nvPr/>
-        </p:nvSpPr>
-        <p:spPr>
-          <a:xfrm xmlns:a="http://schemas.openxmlformats.org/drawingml/2006/main">
-            <a:off x="752475" y="2447925"/>
-            <a:ext cx="1295400" cy="285750"/>
+                <a16:creationId xmlns:a16="http://schemas.microsoft.com/office/drawing/2014/main" id="{DE66DED8-C4E0-495F-9EA6-E16BAEC49390}"/>
+              </a:ext>
+            </a:extLst>
+          </p:cNvPr>
+          <p:cNvSpPr>
+            <a:spLocks xmlns:a="http://schemas.openxmlformats.org/drawingml/2006/main" noGrp="1"/>
+          </p:cNvSpPr>
+          <p:nvPr/>
+        </p:nvSpPr>
+        <p:spPr>
+          <a:xfrm xmlns:a="http://schemas.openxmlformats.org/drawingml/2006/main">
+            <a:off x="666750" y="2447925"/>
+            <a:ext cx="1466850" cy="285750"/>
           </a:xfrm>
           <a:prstGeom xmlns:a="http://schemas.openxmlformats.org/drawingml/2006/main" prst="rect">
             <a:avLst/>
@@ -3921,7 +3926,7 @@
           <a:lstStyle xmlns:a="http://schemas.openxmlformats.org/drawingml/2006/main"/>
           <a:p xmlns:a="http://schemas.openxmlformats.org/drawingml/2006/main">
             <a:pPr algn="ctr">
-              <a:defRPr sz="1275" b="1">
+              <a:defRPr sz="1200" b="1">
                 <a:solidFill>
                   <a:srgbClr val="526071"/>
                 </a:solidFill>
@@ -3931,7 +3936,7 @@
               </a:defRPr>
             </a:pPr>
             <a:r>
-              <a:t>REPOSITORY</a:t>
+              <a:t>2D REPOSITORY</a:t>
             </a:r>
           </a:p>
         </p:txBody>
@@ -3941,7 +3946,7 @@
           <p:cNvPr id="14" name="s3-repo-main">
             <a:extLst xmlns:a="http://schemas.openxmlformats.org/drawingml/2006/main">
               <a:ext uri="{FF2B5EF4-FFF2-40B4-BE49-F238E27FC236}">
-                <a16:creationId xmlns:a16="http://schemas.microsoft.com/office/drawing/2014/main" id="{D08BBECF-F87F-404F-B7C6-EFAF4ECC6D17}"/>
+                <a16:creationId xmlns:a16="http://schemas.microsoft.com/office/drawing/2014/main" id="{68158F59-AA4A-4B63-BB04-EEB6328FF700}"/>
               </a:ext>
             </a:extLst>
           </p:cNvPr>
@@ -3986,7 +3991,7 @@
           <p:cNvPr id="15" name="s3-index-label">
             <a:extLst xmlns:a="http://schemas.openxmlformats.org/drawingml/2006/main">
               <a:ext uri="{FF2B5EF4-FFF2-40B4-BE49-F238E27FC236}">
-                <a16:creationId xmlns:a16="http://schemas.microsoft.com/office/drawing/2014/main" id="{9CEE3B39-E5AB-43E8-9410-409B433E192D}"/>
+                <a16:creationId xmlns:a16="http://schemas.microsoft.com/office/drawing/2014/main" id="{61C61F4D-AB50-4C8A-A245-D365FFB10584}"/>
               </a:ext>
             </a:extLst>
           </p:cNvPr>
@@ -4021,7 +4026,7 @@
               </a:defRPr>
             </a:pPr>
             <a:r>
-              <a:t>INDEX</a:t>
+              <a:t>3D MAP</a:t>
             </a:r>
           </a:p>
         </p:txBody>
@@ -4031,7 +4036,7 @@
           <p:cNvPr id="16" name="s3-index-main">
             <a:extLst xmlns:a="http://schemas.openxmlformats.org/drawingml/2006/main">
               <a:ext uri="{FF2B5EF4-FFF2-40B4-BE49-F238E27FC236}">
-                <a16:creationId xmlns:a16="http://schemas.microsoft.com/office/drawing/2014/main" id="{5DE3F261-5714-4F5B-9ED1-5FD182A2F133}"/>
+                <a16:creationId xmlns:a16="http://schemas.microsoft.com/office/drawing/2014/main" id="{80ED80A2-8106-4FBE-B141-772AB77F4A5D}"/>
               </a:ext>
             </a:extLst>
           </p:cNvPr>
@@ -4066,7 +4071,7 @@
               </a:defRPr>
             </a:pPr>
             <a:r>
-              <a:t>Rooms + edges</a:t>
+              <a:t>Floors + rooms</a:t>
             </a:r>
           </a:p>
         </p:txBody>
@@ -4076,7 +4081,7 @@
           <p:cNvPr id="17" name="s3-mode-label">
             <a:extLst xmlns:a="http://schemas.openxmlformats.org/drawingml/2006/main">
               <a:ext uri="{FF2B5EF4-FFF2-40B4-BE49-F238E27FC236}">
-                <a16:creationId xmlns:a16="http://schemas.microsoft.com/office/drawing/2014/main" id="{4139FC64-999A-45F7-8770-136EAE227679}"/>
+                <a16:creationId xmlns:a16="http://schemas.microsoft.com/office/drawing/2014/main" id="{50EC9758-2A1F-4CCC-AFCC-3FE14473EB71}"/>
               </a:ext>
             </a:extLst>
           </p:cNvPr>
@@ -4121,7 +4126,7 @@
           <p:cNvPr id="18" name="s3-mode-main">
             <a:extLst xmlns:a="http://schemas.openxmlformats.org/drawingml/2006/main">
               <a:ext uri="{FF2B5EF4-FFF2-40B4-BE49-F238E27FC236}">
-                <a16:creationId xmlns:a16="http://schemas.microsoft.com/office/drawing/2014/main" id="{39C7742F-62C2-4E76-AC74-8C9448293D94}"/>
+                <a16:creationId xmlns:a16="http://schemas.microsoft.com/office/drawing/2014/main" id="{1141A154-71D2-4D75-BBBC-811FF386FA02}"/>
               </a:ext>
             </a:extLst>
           </p:cNvPr>
@@ -4166,7 +4171,7 @@
           <p:cNvPr id="19" name="s3-pack-label">
             <a:extLst xmlns:a="http://schemas.openxmlformats.org/drawingml/2006/main">
               <a:ext uri="{FF2B5EF4-FFF2-40B4-BE49-F238E27FC236}">
-                <a16:creationId xmlns:a16="http://schemas.microsoft.com/office/drawing/2014/main" id="{2B5D58DB-5CFC-45B3-9422-23C1CC531681}"/>
+                <a16:creationId xmlns:a16="http://schemas.microsoft.com/office/drawing/2014/main" id="{CC3A3F32-7EEA-4FEA-ABB0-35FC9A1F0B23}"/>
               </a:ext>
             </a:extLst>
           </p:cNvPr>
@@ -4211,7 +4216,7 @@
           <p:cNvPr id="20" name="s3-pack-main">
             <a:extLst xmlns:a="http://schemas.openxmlformats.org/drawingml/2006/main">
               <a:ext uri="{FF2B5EF4-FFF2-40B4-BE49-F238E27FC236}">
-                <a16:creationId xmlns:a16="http://schemas.microsoft.com/office/drawing/2014/main" id="{4E32E37A-1023-4D21-B597-282845AFFF57}"/>
+                <a16:creationId xmlns:a16="http://schemas.microsoft.com/office/drawing/2014/main" id="{514BDFEB-EBD4-4270-A5E1-9EC8CDB44BAB}"/>
               </a:ext>
             </a:extLst>
           </p:cNvPr>
@@ -4256,7 +4261,7 @@
           <p:cNvPr id="21" name="s3-task-label">
             <a:extLst xmlns:a="http://schemas.openxmlformats.org/drawingml/2006/main">
               <a:ext uri="{FF2B5EF4-FFF2-40B4-BE49-F238E27FC236}">
-                <a16:creationId xmlns:a16="http://schemas.microsoft.com/office/drawing/2014/main" id="{C8F5B856-286B-4FF9-A925-B6A5417AB582}"/>
+                <a16:creationId xmlns:a16="http://schemas.microsoft.com/office/drawing/2014/main" id="{9BA4AB6D-90C4-4A8D-B33E-DF0776097333}"/>
               </a:ext>
             </a:extLst>
           </p:cNvPr>
@@ -4301,7 +4306,7 @@
           <p:cNvPr id="22" name="s3-task-main">
             <a:extLst xmlns:a="http://schemas.openxmlformats.org/drawingml/2006/main">
               <a:ext uri="{FF2B5EF4-FFF2-40B4-BE49-F238E27FC236}">
-                <a16:creationId xmlns:a16="http://schemas.microsoft.com/office/drawing/2014/main" id="{695CFAC2-62EC-417E-B040-37E950FD429C}"/>
+                <a16:creationId xmlns:a16="http://schemas.microsoft.com/office/drawing/2014/main" id="{ACB93DFB-A28F-45E4-A94B-BAB1B6B6DD2E}"/>
               </a:ext>
             </a:extLst>
           </p:cNvPr>
@@ -4346,7 +4351,7 @@
           <p:cNvPr id="23" name="s3-memory">
             <a:extLst xmlns:a="http://schemas.openxmlformats.org/drawingml/2006/main">
               <a:ext uri="{FF2B5EF4-FFF2-40B4-BE49-F238E27FC236}">
-                <a16:creationId xmlns:a16="http://schemas.microsoft.com/office/drawing/2014/main" id="{66EF50F3-8ABC-450E-B25B-A7FDB7B839F9}"/>
+                <a16:creationId xmlns:a16="http://schemas.microsoft.com/office/drawing/2014/main" id="{22661A92-B252-4608-BE68-42477823B58A}"/>
               </a:ext>
             </a:extLst>
           </p:cNvPr>
@@ -4381,7 +4386,7 @@
           <p:cNvPr id="24" name="s3-memory-label">
             <a:extLst xmlns:a="http://schemas.openxmlformats.org/drawingml/2006/main">
               <a:ext uri="{FF2B5EF4-FFF2-40B4-BE49-F238E27FC236}">
-                <a16:creationId xmlns:a16="http://schemas.microsoft.com/office/drawing/2014/main" id="{11CDE2CB-061F-4DA6-8B4C-B074F0F745CA}"/>
+                <a16:creationId xmlns:a16="http://schemas.microsoft.com/office/drawing/2014/main" id="{38A2F781-4E22-45E9-A836-99B70AAF960C}"/>
               </a:ext>
             </a:extLst>
           </p:cNvPr>
@@ -4426,7 +4431,7 @@
           <p:cNvPr id="25" name="s3-memory-main">
             <a:extLst xmlns:a="http://schemas.openxmlformats.org/drawingml/2006/main">
               <a:ext uri="{FF2B5EF4-FFF2-40B4-BE49-F238E27FC236}">
-                <a16:creationId xmlns:a16="http://schemas.microsoft.com/office/drawing/2014/main" id="{8CA8B7A1-668E-4D96-9618-9520F20C402F}"/>
+                <a16:creationId xmlns:a16="http://schemas.microsoft.com/office/drawing/2014/main" id="{9176910D-FF8F-47BD-9D19-D6FF55856235}"/>
               </a:ext>
             </a:extLst>
           </p:cNvPr>
@@ -4494,7 +4499,7 @@
           <p:cNvPr id="27" name="footer-source-3">
             <a:extLst xmlns:a="http://schemas.openxmlformats.org/drawingml/2006/main">
               <a:ext uri="{FF2B5EF4-FFF2-40B4-BE49-F238E27FC236}">
-                <a16:creationId xmlns:a16="http://schemas.microsoft.com/office/drawing/2014/main" id="{B62A79BE-149B-4286-8522-827B65ED8C76}"/>
+                <a16:creationId xmlns:a16="http://schemas.microsoft.com/office/drawing/2014/main" id="{D36EEE0C-5739-45FB-998D-4F61E564678D}"/>
               </a:ext>
             </a:extLst>
           </p:cNvPr>
@@ -4539,7 +4544,7 @@
           <p:cNvPr id="28" name="footer-number-3">
             <a:extLst xmlns:a="http://schemas.openxmlformats.org/drawingml/2006/main">
               <a:ext uri="{FF2B5EF4-FFF2-40B4-BE49-F238E27FC236}">
-                <a16:creationId xmlns:a16="http://schemas.microsoft.com/office/drawing/2014/main" id="{FDCCC621-878A-40B5-AD45-DFE111C01B65}"/>
+                <a16:creationId xmlns:a16="http://schemas.microsoft.com/office/drawing/2014/main" id="{FF2E9AEF-FEBB-42E0-B537-B71C9B502CB6}"/>
               </a:ext>
             </a:extLst>
           </p:cNvPr>
@@ -4582,7 +4587,7 @@
     </p:spTree>
     <p:extLst>
       <p:ext uri="{BB962C8B-B14F-4D97-AF65-F5344CB8AC3E}">
-        <p14:creationId xmlns:p14="http://schemas.microsoft.com/office/powerpoint/2010/main" val="1625512413"/>
+        <p14:creationId xmlns:p14="http://schemas.microsoft.com/office/powerpoint/2010/main" val="1758424556"/>
       </p:ext>
     </p:extLst>
   </p:cSld>
@@ -4613,7 +4618,7 @@
           <p:cNvPr id="26" name="s4-title">
             <a:extLst xmlns:a="http://schemas.openxmlformats.org/drawingml/2006/main">
               <a:ext uri="{FF2B5EF4-FFF2-40B4-BE49-F238E27FC236}">
-                <a16:creationId xmlns:a16="http://schemas.microsoft.com/office/drawing/2014/main" id="{74BDA43C-BFDB-43EC-AF4C-0DCE8F9B7618}"/>
+                <a16:creationId xmlns:a16="http://schemas.microsoft.com/office/drawing/2014/main" id="{ECA5D961-2EE9-4A5E-B81F-8A9688892170}"/>
               </a:ext>
             </a:extLst>
           </p:cNvPr>
@@ -4658,7 +4663,7 @@
           <p:cNvPr id="2" name="s4-subtitle">
             <a:extLst xmlns:a="http://schemas.openxmlformats.org/drawingml/2006/main">
               <a:ext uri="{FF2B5EF4-FFF2-40B4-BE49-F238E27FC236}">
-                <a16:creationId xmlns:a16="http://schemas.microsoft.com/office/drawing/2014/main" id="{7418B20B-4660-4729-B812-1C8E72866175}"/>
+                <a16:creationId xmlns:a16="http://schemas.microsoft.com/office/drawing/2014/main" id="{321E7CAC-0FC2-46A7-9274-8A907B2D1403}"/>
               </a:ext>
             </a:extLst>
           </p:cNvPr>
@@ -4703,7 +4708,7 @@
           <p:cNvPr id="3" name="s4-terminal">
             <a:extLst xmlns:a="http://schemas.openxmlformats.org/drawingml/2006/main">
               <a:ext uri="{FF2B5EF4-FFF2-40B4-BE49-F238E27FC236}">
-                <a16:creationId xmlns:a16="http://schemas.microsoft.com/office/drawing/2014/main" id="{AEA1B5C2-FBA6-40FD-9AFF-73B8BDE69E5F}"/>
+                <a16:creationId xmlns:a16="http://schemas.microsoft.com/office/drawing/2014/main" id="{DFE91957-DDAD-4185-BD6E-A67F17BD252D}"/>
               </a:ext>
             </a:extLst>
           </p:cNvPr>
@@ -4760,7 +4765,7 @@
           <p:cNvPr id="5" name="s4-dot1">
             <a:extLst xmlns:a="http://schemas.openxmlformats.org/drawingml/2006/main">
               <a:ext uri="{FF2B5EF4-FFF2-40B4-BE49-F238E27FC236}">
-                <a16:creationId xmlns:a16="http://schemas.microsoft.com/office/drawing/2014/main" id="{B2DDEE5B-8847-4D78-9FC8-C3CA87313A5B}"/>
+                <a16:creationId xmlns:a16="http://schemas.microsoft.com/office/drawing/2014/main" id="{DCF94B8F-E198-417E-90D2-D57B6656DB45}"/>
               </a:ext>
             </a:extLst>
           </p:cNvPr>
@@ -4793,7 +4798,7 @@
           <p:cNvPr id="6" name="s4-dot2">
             <a:extLst xmlns:a="http://schemas.openxmlformats.org/drawingml/2006/main">
               <a:ext uri="{FF2B5EF4-FFF2-40B4-BE49-F238E27FC236}">
-                <a16:creationId xmlns:a16="http://schemas.microsoft.com/office/drawing/2014/main" id="{A4120322-37E7-4602-806E-41D8EFFB6BD2}"/>
+                <a16:creationId xmlns:a16="http://schemas.microsoft.com/office/drawing/2014/main" id="{580B3C56-7D5F-472B-BC43-74DBD9CC4587}"/>
               </a:ext>
             </a:extLst>
           </p:cNvPr>
@@ -4826,7 +4831,7 @@
           <p:cNvPr id="7" name="s4-dot3">
             <a:extLst xmlns:a="http://schemas.openxmlformats.org/drawingml/2006/main">
               <a:ext uri="{FF2B5EF4-FFF2-40B4-BE49-F238E27FC236}">
-                <a16:creationId xmlns:a16="http://schemas.microsoft.com/office/drawing/2014/main" id="{FBB6EC7D-42BA-4247-A36C-6FBFEB459E22}"/>
+                <a16:creationId xmlns:a16="http://schemas.microsoft.com/office/drawing/2014/main" id="{94D12B48-C7BB-495D-87D3-42E1E09F494D}"/>
               </a:ext>
             </a:extLst>
           </p:cNvPr>
@@ -4859,7 +4864,7 @@
           <p:cNvPr id="8" name="s4-command-label">
             <a:extLst xmlns:a="http://schemas.openxmlformats.org/drawingml/2006/main">
               <a:ext uri="{FF2B5EF4-FFF2-40B4-BE49-F238E27FC236}">
-                <a16:creationId xmlns:a16="http://schemas.microsoft.com/office/drawing/2014/main" id="{BA374669-918A-48C4-AB7E-F32EE3FA9198}"/>
+                <a16:creationId xmlns:a16="http://schemas.microsoft.com/office/drawing/2014/main" id="{6BFAD678-1E01-48C1-9FEB-A1066E6262DA}"/>
               </a:ext>
             </a:extLst>
           </p:cNvPr>
@@ -4904,7 +4909,7 @@
           <p:cNvPr id="9" name="s4-command">
             <a:extLst xmlns:a="http://schemas.openxmlformats.org/drawingml/2006/main">
               <a:ext uri="{FF2B5EF4-FFF2-40B4-BE49-F238E27FC236}">
-                <a16:creationId xmlns:a16="http://schemas.microsoft.com/office/drawing/2014/main" id="{9BE86474-632D-43EA-9C9E-89468A5B90E7}"/>
+                <a16:creationId xmlns:a16="http://schemas.microsoft.com/office/drawing/2014/main" id="{BC067BAD-F1B8-430C-A94A-24FD66FB9623}"/>
               </a:ext>
             </a:extLst>
           </p:cNvPr>
@@ -4953,7 +4958,7 @@
           <p:cNvPr id="10" name="s4-command-note">
             <a:extLst xmlns:a="http://schemas.openxmlformats.org/drawingml/2006/main">
               <a:ext uri="{FF2B5EF4-FFF2-40B4-BE49-F238E27FC236}">
-                <a16:creationId xmlns:a16="http://schemas.microsoft.com/office/drawing/2014/main" id="{27D11303-38FE-411A-B586-4587331DBDAD}"/>
+                <a16:creationId xmlns:a16="http://schemas.microsoft.com/office/drawing/2014/main" id="{B2E2F647-B92F-471E-BE3A-2804F7CE3BA4}"/>
               </a:ext>
             </a:extLst>
           </p:cNvPr>
@@ -4998,7 +5003,7 @@
           <p:cNvPr id="11" name="s4-output-label">
             <a:extLst xmlns:a="http://schemas.openxmlformats.org/drawingml/2006/main">
               <a:ext uri="{FF2B5EF4-FFF2-40B4-BE49-F238E27FC236}">
-                <a16:creationId xmlns:a16="http://schemas.microsoft.com/office/drawing/2014/main" id="{F06940CE-1C30-47DD-9F3F-634D6640923D}"/>
+                <a16:creationId xmlns:a16="http://schemas.microsoft.com/office/drawing/2014/main" id="{B5358BA2-183D-49E8-89FC-E121568F0B55}"/>
               </a:ext>
             </a:extLst>
           </p:cNvPr>
@@ -5043,7 +5048,7 @@
           <p:cNvPr id="12" name="s4-o1a">
             <a:extLst xmlns:a="http://schemas.openxmlformats.org/drawingml/2006/main">
               <a:ext uri="{FF2B5EF4-FFF2-40B4-BE49-F238E27FC236}">
-                <a16:creationId xmlns:a16="http://schemas.microsoft.com/office/drawing/2014/main" id="{E954E9FD-4ABC-49A8-98B8-7CB739A7867E}"/>
+                <a16:creationId xmlns:a16="http://schemas.microsoft.com/office/drawing/2014/main" id="{3F3A315A-A832-4508-B97E-057AC5D7B79D}"/>
               </a:ext>
             </a:extLst>
           </p:cNvPr>
@@ -5088,7 +5093,7 @@
           <p:cNvPr id="13" name="s4-o1b">
             <a:extLst xmlns:a="http://schemas.openxmlformats.org/drawingml/2006/main">
               <a:ext uri="{FF2B5EF4-FFF2-40B4-BE49-F238E27FC236}">
-                <a16:creationId xmlns:a16="http://schemas.microsoft.com/office/drawing/2014/main" id="{FF81212A-580A-4793-B355-F7016ECC6B47}"/>
+                <a16:creationId xmlns:a16="http://schemas.microsoft.com/office/drawing/2014/main" id="{415326A1-EA95-438B-A5A9-078EB0DF7A70}"/>
               </a:ext>
             </a:extLst>
           </p:cNvPr>
@@ -5133,7 +5138,7 @@
           <p:cNvPr id="14" name="s4-o2a">
             <a:extLst xmlns:a="http://schemas.openxmlformats.org/drawingml/2006/main">
               <a:ext uri="{FF2B5EF4-FFF2-40B4-BE49-F238E27FC236}">
-                <a16:creationId xmlns:a16="http://schemas.microsoft.com/office/drawing/2014/main" id="{8124CF30-039C-43EF-9CE1-B1D7F6E73F59}"/>
+                <a16:creationId xmlns:a16="http://schemas.microsoft.com/office/drawing/2014/main" id="{C150D3AC-C6E0-4280-AB80-17F3590A3FA9}"/>
               </a:ext>
             </a:extLst>
           </p:cNvPr>
@@ -5178,7 +5183,7 @@
           <p:cNvPr id="15" name="s4-o2b">
             <a:extLst xmlns:a="http://schemas.openxmlformats.org/drawingml/2006/main">
               <a:ext uri="{FF2B5EF4-FFF2-40B4-BE49-F238E27FC236}">
-                <a16:creationId xmlns:a16="http://schemas.microsoft.com/office/drawing/2014/main" id="{445EFAC5-8441-473A-805E-6255B05A93F1}"/>
+                <a16:creationId xmlns:a16="http://schemas.microsoft.com/office/drawing/2014/main" id="{9D684430-950D-41C8-A2D1-D44F19D82E41}"/>
               </a:ext>
             </a:extLst>
           </p:cNvPr>
@@ -5223,7 +5228,7 @@
           <p:cNvPr id="16" name="s4-o3a">
             <a:extLst xmlns:a="http://schemas.openxmlformats.org/drawingml/2006/main">
               <a:ext uri="{FF2B5EF4-FFF2-40B4-BE49-F238E27FC236}">
-                <a16:creationId xmlns:a16="http://schemas.microsoft.com/office/drawing/2014/main" id="{FE8313A0-DBD2-4D3C-8432-DB6839E176A8}"/>
+                <a16:creationId xmlns:a16="http://schemas.microsoft.com/office/drawing/2014/main" id="{7C63FBB0-FD02-4013-A128-D24B97FAA85B}"/>
               </a:ext>
             </a:extLst>
           </p:cNvPr>
@@ -5268,7 +5273,7 @@
           <p:cNvPr id="17" name="s4-o3b">
             <a:extLst xmlns:a="http://schemas.openxmlformats.org/drawingml/2006/main">
               <a:ext uri="{FF2B5EF4-FFF2-40B4-BE49-F238E27FC236}">
-                <a16:creationId xmlns:a16="http://schemas.microsoft.com/office/drawing/2014/main" id="{78569779-1F75-4CD9-992E-3A04F7664A3B}"/>
+                <a16:creationId xmlns:a16="http://schemas.microsoft.com/office/drawing/2014/main" id="{174A7B0C-D948-4F71-9367-164A398FB2B9}"/>
               </a:ext>
             </a:extLst>
           </p:cNvPr>
@@ -5313,7 +5318,7 @@
           <p:cNvPr id="18" name="s4-o4a">
             <a:extLst xmlns:a="http://schemas.openxmlformats.org/drawingml/2006/main">
               <a:ext uri="{FF2B5EF4-FFF2-40B4-BE49-F238E27FC236}">
-                <a16:creationId xmlns:a16="http://schemas.microsoft.com/office/drawing/2014/main" id="{5A134E6B-A5C0-4DDD-9529-0892C1365D9B}"/>
+                <a16:creationId xmlns:a16="http://schemas.microsoft.com/office/drawing/2014/main" id="{6AE3775C-738C-413E-9136-2502F8B11B51}"/>
               </a:ext>
             </a:extLst>
           </p:cNvPr>
@@ -5358,7 +5363,7 @@
           <p:cNvPr id="19" name="s4-o4b">
             <a:extLst xmlns:a="http://schemas.openxmlformats.org/drawingml/2006/main">
               <a:ext uri="{FF2B5EF4-FFF2-40B4-BE49-F238E27FC236}">
-                <a16:creationId xmlns:a16="http://schemas.microsoft.com/office/drawing/2014/main" id="{2DB88EB1-A797-4AEA-A6DA-91C3A2A6E5C2}"/>
+                <a16:creationId xmlns:a16="http://schemas.microsoft.com/office/drawing/2014/main" id="{75695E33-5176-479E-B4B9-FE1001AA7B83}"/>
               </a:ext>
             </a:extLst>
           </p:cNvPr>
@@ -5404,7 +5409,7 @@
           <p:cNvPr id="20" name="s4-o5a">
             <a:extLst xmlns:a="http://schemas.openxmlformats.org/drawingml/2006/main">
               <a:ext uri="{FF2B5EF4-FFF2-40B4-BE49-F238E27FC236}">
-                <a16:creationId xmlns:a16="http://schemas.microsoft.com/office/drawing/2014/main" id="{490F1FE3-EB67-4C8C-A5E6-170C395824C6}"/>
+                <a16:creationId xmlns:a16="http://schemas.microsoft.com/office/drawing/2014/main" id="{70530514-10EB-4369-BE2E-6D6ABE0C273F}"/>
               </a:ext>
             </a:extLst>
           </p:cNvPr>
@@ -5449,7 +5454,7 @@
           <p:cNvPr id="21" name="s4-o5b">
             <a:extLst xmlns:a="http://schemas.openxmlformats.org/drawingml/2006/main">
               <a:ext uri="{FF2B5EF4-FFF2-40B4-BE49-F238E27FC236}">
-                <a16:creationId xmlns:a16="http://schemas.microsoft.com/office/drawing/2014/main" id="{8C85233A-30D2-4019-B87A-045BB9910A17}"/>
+                <a16:creationId xmlns:a16="http://schemas.microsoft.com/office/drawing/2014/main" id="{1AB4CD06-0FF7-4127-BC5B-79E885B2C3AB}"/>
               </a:ext>
             </a:extLst>
           </p:cNvPr>
@@ -5494,7 +5499,7 @@
           <p:cNvPr id="22" name="s4-output-note">
             <a:extLst xmlns:a="http://schemas.openxmlformats.org/drawingml/2006/main">
               <a:ext uri="{FF2B5EF4-FFF2-40B4-BE49-F238E27FC236}">
-                <a16:creationId xmlns:a16="http://schemas.microsoft.com/office/drawing/2014/main" id="{F75EC3B4-5808-4810-8BF0-3B8BECDCD7AB}"/>
+                <a16:creationId xmlns:a16="http://schemas.microsoft.com/office/drawing/2014/main" id="{1FAC71B4-C94A-4FBA-94A6-E7E5C2E3C991}"/>
               </a:ext>
             </a:extLst>
           </p:cNvPr>
@@ -5561,7 +5566,7 @@
           <p:cNvPr id="24" name="footer-source-4">
             <a:extLst xmlns:a="http://schemas.openxmlformats.org/drawingml/2006/main">
               <a:ext uri="{FF2B5EF4-FFF2-40B4-BE49-F238E27FC236}">
-                <a16:creationId xmlns:a16="http://schemas.microsoft.com/office/drawing/2014/main" id="{0F0D8938-A89A-4493-9D6F-C0E839966556}"/>
+                <a16:creationId xmlns:a16="http://schemas.microsoft.com/office/drawing/2014/main" id="{F63D8B2C-3A87-4263-9A45-5C444E223E8A}"/>
               </a:ext>
             </a:extLst>
           </p:cNvPr>
@@ -5606,7 +5611,7 @@
           <p:cNvPr id="25" name="footer-number-4">
             <a:extLst xmlns:a="http://schemas.openxmlformats.org/drawingml/2006/main">
               <a:ext uri="{FF2B5EF4-FFF2-40B4-BE49-F238E27FC236}">
-                <a16:creationId xmlns:a16="http://schemas.microsoft.com/office/drawing/2014/main" id="{54A5B34E-C247-47E2-A958-1B925C4003D4}"/>
+                <a16:creationId xmlns:a16="http://schemas.microsoft.com/office/drawing/2014/main" id="{A9B14503-75BC-4257-BC86-E0D03F6C9783}"/>
               </a:ext>
             </a:extLst>
           </p:cNvPr>
@@ -5649,7 +5654,7 @@
     </p:spTree>
     <p:extLst>
       <p:ext uri="{BB962C8B-B14F-4D97-AF65-F5344CB8AC3E}">
-        <p14:creationId xmlns:p14="http://schemas.microsoft.com/office/powerpoint/2010/main" val="1252619973"/>
+        <p14:creationId xmlns:p14="http://schemas.microsoft.com/office/powerpoint/2010/main" val="611825970"/>
       </p:ext>
     </p:extLst>
   </p:cSld>
@@ -5680,7 +5685,7 @@
           <p:cNvPr id="17" name="s5-title">
             <a:extLst xmlns:a="http://schemas.openxmlformats.org/drawingml/2006/main">
               <a:ext uri="{FF2B5EF4-FFF2-40B4-BE49-F238E27FC236}">
-                <a16:creationId xmlns:a16="http://schemas.microsoft.com/office/drawing/2014/main" id="{D35F4426-6DDA-41A9-A765-9D36A49EDA8D}"/>
+                <a16:creationId xmlns:a16="http://schemas.microsoft.com/office/drawing/2014/main" id="{9960B5BD-357D-46AC-9292-A4FEF9254D35}"/>
               </a:ext>
             </a:extLst>
           </p:cNvPr>
@@ -5725,7 +5730,7 @@
           <p:cNvPr id="2" name="s5-subtitle">
             <a:extLst xmlns:a="http://schemas.openxmlformats.org/drawingml/2006/main">
               <a:ext uri="{FF2B5EF4-FFF2-40B4-BE49-F238E27FC236}">
-                <a16:creationId xmlns:a16="http://schemas.microsoft.com/office/drawing/2014/main" id="{5B81A1D7-33A5-403F-940A-AB9321BE373B}"/>
+                <a16:creationId xmlns:a16="http://schemas.microsoft.com/office/drawing/2014/main" id="{D4B1788C-1D9B-40A2-9F2B-5E4B3A8449E8}"/>
               </a:ext>
             </a:extLst>
           </p:cNvPr>
@@ -5770,7 +5775,7 @@
           <p:cNvPr id="3" name="s5-chart-label-pack">
             <a:extLst xmlns:a="http://schemas.openxmlformats.org/drawingml/2006/main">
               <a:ext uri="{FF2B5EF4-FFF2-40B4-BE49-F238E27FC236}">
-                <a16:creationId xmlns:a16="http://schemas.microsoft.com/office/drawing/2014/main" id="{15374AF6-392A-40A3-A784-6090F6E8572D}"/>
+                <a16:creationId xmlns:a16="http://schemas.microsoft.com/office/drawing/2014/main" id="{B302D2F5-7B48-496C-8A30-671D8C512E83}"/>
               </a:ext>
             </a:extLst>
           </p:cNvPr>
@@ -5815,7 +5820,7 @@
           <p:cNvPr id="4" name="s5-chart-label-repo">
             <a:extLst xmlns:a="http://schemas.openxmlformats.org/drawingml/2006/main">
               <a:ext uri="{FF2B5EF4-FFF2-40B4-BE49-F238E27FC236}">
-                <a16:creationId xmlns:a16="http://schemas.microsoft.com/office/drawing/2014/main" id="{857CE099-7D3C-4806-9B0E-A935E09ACE42}"/>
+                <a16:creationId xmlns:a16="http://schemas.microsoft.com/office/drawing/2014/main" id="{0873D7B7-95FB-41E8-A9FF-10CD59A40501}"/>
               </a:ext>
             </a:extLst>
           </p:cNvPr>
@@ -5860,7 +5865,7 @@
           <p:cNvPr id="5" name="s5-stat1">
             <a:extLst xmlns:a="http://schemas.openxmlformats.org/drawingml/2006/main">
               <a:ext uri="{FF2B5EF4-FFF2-40B4-BE49-F238E27FC236}">
-                <a16:creationId xmlns:a16="http://schemas.microsoft.com/office/drawing/2014/main" id="{510BE700-F9C1-4618-8AB5-E0F514AB8467}"/>
+                <a16:creationId xmlns:a16="http://schemas.microsoft.com/office/drawing/2014/main" id="{CFABFDA4-1947-4A45-9087-E5CA71C23EE6}"/>
               </a:ext>
             </a:extLst>
           </p:cNvPr>
@@ -5905,7 +5910,7 @@
           <p:cNvPr id="6" name="s5-stat1-label">
             <a:extLst xmlns:a="http://schemas.openxmlformats.org/drawingml/2006/main">
               <a:ext uri="{FF2B5EF4-FFF2-40B4-BE49-F238E27FC236}">
-                <a16:creationId xmlns:a16="http://schemas.microsoft.com/office/drawing/2014/main" id="{3C9856A0-5542-4072-8570-5336FE307974}"/>
+                <a16:creationId xmlns:a16="http://schemas.microsoft.com/office/drawing/2014/main" id="{89784536-19BF-4B39-9A6C-DB166297047B}"/>
               </a:ext>
             </a:extLst>
           </p:cNvPr>
@@ -5972,7 +5977,7 @@
           <p:cNvPr id="8" name="s5-stat2">
             <a:extLst xmlns:a="http://schemas.openxmlformats.org/drawingml/2006/main">
               <a:ext uri="{FF2B5EF4-FFF2-40B4-BE49-F238E27FC236}">
-                <a16:creationId xmlns:a16="http://schemas.microsoft.com/office/drawing/2014/main" id="{C3969D29-751F-465A-8D81-0ED66641AD20}"/>
+                <a16:creationId xmlns:a16="http://schemas.microsoft.com/office/drawing/2014/main" id="{6BF0995E-B27D-412A-85ED-C7385FE383EC}"/>
               </a:ext>
             </a:extLst>
           </p:cNvPr>
@@ -6017,7 +6022,7 @@
           <p:cNvPr id="9" name="s5-stat2-label">
             <a:extLst xmlns:a="http://schemas.openxmlformats.org/drawingml/2006/main">
               <a:ext uri="{FF2B5EF4-FFF2-40B4-BE49-F238E27FC236}">
-                <a16:creationId xmlns:a16="http://schemas.microsoft.com/office/drawing/2014/main" id="{8E5BB0A4-1645-4780-A8D1-3316715CF8C6}"/>
+                <a16:creationId xmlns:a16="http://schemas.microsoft.com/office/drawing/2014/main" id="{CDBE5ED7-B628-4456-A1F8-6E0A939C27CF}"/>
               </a:ext>
             </a:extLst>
           </p:cNvPr>
@@ -6062,7 +6067,7 @@
           <p:cNvPr id="10" name="s5-stat3">
             <a:extLst xmlns:a="http://schemas.openxmlformats.org/drawingml/2006/main">
               <a:ext uri="{FF2B5EF4-FFF2-40B4-BE49-F238E27FC236}">
-                <a16:creationId xmlns:a16="http://schemas.microsoft.com/office/drawing/2014/main" id="{41EAC7CB-18E0-40B8-83CB-EEC902F5B11A}"/>
+                <a16:creationId xmlns:a16="http://schemas.microsoft.com/office/drawing/2014/main" id="{B89465DC-908F-48F5-A652-8F0C3FF59B25}"/>
               </a:ext>
             </a:extLst>
           </p:cNvPr>
@@ -6107,7 +6112,7 @@
           <p:cNvPr id="11" name="s5-stat3-label">
             <a:extLst xmlns:a="http://schemas.openxmlformats.org/drawingml/2006/main">
               <a:ext uri="{FF2B5EF4-FFF2-40B4-BE49-F238E27FC236}">
-                <a16:creationId xmlns:a16="http://schemas.microsoft.com/office/drawing/2014/main" id="{8CACC0FA-D6CD-49C4-BC77-1D7FC51BF615}"/>
+                <a16:creationId xmlns:a16="http://schemas.microsoft.com/office/drawing/2014/main" id="{D387EA68-54E2-41A5-98F2-1033EC89CDD9}"/>
               </a:ext>
             </a:extLst>
           </p:cNvPr>
@@ -6152,7 +6157,7 @@
           <p:cNvPr id="12" name="s5-explain">
             <a:extLst xmlns:a="http://schemas.openxmlformats.org/drawingml/2006/main">
               <a:ext uri="{FF2B5EF4-FFF2-40B4-BE49-F238E27FC236}">
-                <a16:creationId xmlns:a16="http://schemas.microsoft.com/office/drawing/2014/main" id="{E537750A-8D2D-4833-B7C1-CC328B600570}"/>
+                <a16:creationId xmlns:a16="http://schemas.microsoft.com/office/drawing/2014/main" id="{DF8A17DB-F518-4892-B58A-892C81ACE86D}"/>
               </a:ext>
             </a:extLst>
           </p:cNvPr>
@@ -6219,7 +6224,7 @@
           <p:cNvPr id="14" name="footer-source-5">
             <a:extLst xmlns:a="http://schemas.openxmlformats.org/drawingml/2006/main">
               <a:ext uri="{FF2B5EF4-FFF2-40B4-BE49-F238E27FC236}">
-                <a16:creationId xmlns:a16="http://schemas.microsoft.com/office/drawing/2014/main" id="{9D323E44-8B38-4A30-8173-39057CAE28E7}"/>
+                <a16:creationId xmlns:a16="http://schemas.microsoft.com/office/drawing/2014/main" id="{1381C75E-9B0D-4D19-8364-9EFF93B73F6F}"/>
               </a:ext>
             </a:extLst>
           </p:cNvPr>
@@ -6264,7 +6269,7 @@
           <p:cNvPr id="15" name="footer-number-5">
             <a:extLst xmlns:a="http://schemas.openxmlformats.org/drawingml/2006/main">
               <a:ext uri="{FF2B5EF4-FFF2-40B4-BE49-F238E27FC236}">
-                <a16:creationId xmlns:a16="http://schemas.microsoft.com/office/drawing/2014/main" id="{C6D0FAFD-AA84-47FE-9BF1-D56BC4FE3AE5}"/>
+                <a16:creationId xmlns:a16="http://schemas.microsoft.com/office/drawing/2014/main" id="{98F320C5-9CE7-40CA-9357-4765D3222782}"/>
               </a:ext>
             </a:extLst>
           </p:cNvPr>
@@ -6316,14 +6321,14 @@
         </p:xfrm>
         <a:graphic xmlns:a="http://schemas.openxmlformats.org/drawingml/2006/main">
           <a:graphicData uri="http://schemas.openxmlformats.org/drawingml/2006/chart">
-            <c:chart xmlns:r="http://schemas.openxmlformats.org/officeDocument/2006/relationships" xmlns:c="http://schemas.openxmlformats.org/drawingml/2006/chart" r:id="Re4e83c61b9544540"/>
+            <c:chart xmlns:r="http://schemas.openxmlformats.org/officeDocument/2006/relationships" xmlns:c="http://schemas.openxmlformats.org/drawingml/2006/chart" r:id="R47ea2b50f6794f4e"/>
           </a:graphicData>
         </a:graphic>
       </p:graphicFrame>
     </p:spTree>
     <p:extLst>
       <p:ext uri="{BB962C8B-B14F-4D97-AF65-F5344CB8AC3E}">
-        <p14:creationId xmlns:p14="http://schemas.microsoft.com/office/powerpoint/2010/main" val="1396701938"/>
+        <p14:creationId xmlns:p14="http://schemas.microsoft.com/office/powerpoint/2010/main" val="1800457806"/>
       </p:ext>
     </p:extLst>
   </p:cSld>
@@ -6354,7 +6359,7 @@
           <p:cNvPr id="16" name="s6-title">
             <a:extLst xmlns:a="http://schemas.openxmlformats.org/drawingml/2006/main">
               <a:ext uri="{FF2B5EF4-FFF2-40B4-BE49-F238E27FC236}">
-                <a16:creationId xmlns:a16="http://schemas.microsoft.com/office/drawing/2014/main" id="{ACF77855-613B-41FD-8957-492B422DE8AC}"/>
+                <a16:creationId xmlns:a16="http://schemas.microsoft.com/office/drawing/2014/main" id="{0C2D433A-0A5F-4750-A545-B4BBADD062D5}"/>
               </a:ext>
             </a:extLst>
           </p:cNvPr>
@@ -6399,7 +6404,7 @@
           <p:cNvPr id="2" name="s6-subtitle">
             <a:extLst xmlns:a="http://schemas.openxmlformats.org/drawingml/2006/main">
               <a:ext uri="{FF2B5EF4-FFF2-40B4-BE49-F238E27FC236}">
-                <a16:creationId xmlns:a16="http://schemas.microsoft.com/office/drawing/2014/main" id="{E1CC9539-625A-42A9-B9E8-9D351A509BA6}"/>
+                <a16:creationId xmlns:a16="http://schemas.microsoft.com/office/drawing/2014/main" id="{EE4BFD3C-F413-4E75-8CA7-AEE80452EA2C}"/>
               </a:ext>
             </a:extLst>
           </p:cNvPr>
@@ -6444,7 +6449,7 @@
           <p:cNvPr id="3" name="s6-chart-label-control">
             <a:extLst xmlns:a="http://schemas.openxmlformats.org/drawingml/2006/main">
               <a:ext uri="{FF2B5EF4-FFF2-40B4-BE49-F238E27FC236}">
-                <a16:creationId xmlns:a16="http://schemas.microsoft.com/office/drawing/2014/main" id="{81658054-77FC-4B26-8910-8A2193215FB4}"/>
+                <a16:creationId xmlns:a16="http://schemas.microsoft.com/office/drawing/2014/main" id="{5466175F-C1E1-40DE-ACAC-C3FCC407F2AD}"/>
               </a:ext>
             </a:extLst>
           </p:cNvPr>
@@ -6489,7 +6494,7 @@
           <p:cNvPr id="4" name="s6-chart-label-full">
             <a:extLst xmlns:a="http://schemas.openxmlformats.org/drawingml/2006/main">
               <a:ext uri="{FF2B5EF4-FFF2-40B4-BE49-F238E27FC236}">
-                <a16:creationId xmlns:a16="http://schemas.microsoft.com/office/drawing/2014/main" id="{3ADDE3A8-8517-4EB9-AF42-D813F0E84717}"/>
+                <a16:creationId xmlns:a16="http://schemas.microsoft.com/office/drawing/2014/main" id="{DED135FB-2FD2-4960-98DF-81D70C0B7343}"/>
               </a:ext>
             </a:extLst>
           </p:cNvPr>
@@ -6534,7 +6539,7 @@
           <p:cNvPr id="5" name="s6-stat">
             <a:extLst xmlns:a="http://schemas.openxmlformats.org/drawingml/2006/main">
               <a:ext uri="{FF2B5EF4-FFF2-40B4-BE49-F238E27FC236}">
-                <a16:creationId xmlns:a16="http://schemas.microsoft.com/office/drawing/2014/main" id="{CDE68CE2-9F33-41A7-A9C6-C5F02DEA669A}"/>
+                <a16:creationId xmlns:a16="http://schemas.microsoft.com/office/drawing/2014/main" id="{768D07AB-4D1A-474B-95EF-569164FA9146}"/>
               </a:ext>
             </a:extLst>
           </p:cNvPr>
@@ -6579,7 +6584,7 @@
           <p:cNvPr id="6" name="s6-stat-label">
             <a:extLst xmlns:a="http://schemas.openxmlformats.org/drawingml/2006/main">
               <a:ext uri="{FF2B5EF4-FFF2-40B4-BE49-F238E27FC236}">
-                <a16:creationId xmlns:a16="http://schemas.microsoft.com/office/drawing/2014/main" id="{D817698C-7A3D-4405-9872-DF3F6885F2F9}"/>
+                <a16:creationId xmlns:a16="http://schemas.microsoft.com/office/drawing/2014/main" id="{CA80A2BD-C7B1-4FC9-ACE0-97F54DB43668}"/>
               </a:ext>
             </a:extLst>
           </p:cNvPr>
@@ -6647,7 +6652,7 @@
           <p:cNvPr id="8" name="s6-supported">
             <a:extLst xmlns:a="http://schemas.openxmlformats.org/drawingml/2006/main">
               <a:ext uri="{FF2B5EF4-FFF2-40B4-BE49-F238E27FC236}">
-                <a16:creationId xmlns:a16="http://schemas.microsoft.com/office/drawing/2014/main" id="{FE922A09-0B03-404E-91F1-E10E30097F27}"/>
+                <a16:creationId xmlns:a16="http://schemas.microsoft.com/office/drawing/2014/main" id="{D0A0DAFF-993E-4627-AFDA-3E7F1ED72EBE}"/>
               </a:ext>
             </a:extLst>
           </p:cNvPr>
@@ -6692,7 +6697,7 @@
           <p:cNvPr id="9" name="s6-supported-body">
             <a:extLst xmlns:a="http://schemas.openxmlformats.org/drawingml/2006/main">
               <a:ext uri="{FF2B5EF4-FFF2-40B4-BE49-F238E27FC236}">
-                <a16:creationId xmlns:a16="http://schemas.microsoft.com/office/drawing/2014/main" id="{3C177898-B0AF-4F83-89E4-C792BEEC6441}"/>
+                <a16:creationId xmlns:a16="http://schemas.microsoft.com/office/drawing/2014/main" id="{70FABB36-C603-47F5-B3B7-CC579B84336D}"/>
               </a:ext>
             </a:extLst>
           </p:cNvPr>
@@ -6737,7 +6742,7 @@
           <p:cNvPr id="10" name="s6-unsupported">
             <a:extLst xmlns:a="http://schemas.openxmlformats.org/drawingml/2006/main">
               <a:ext uri="{FF2B5EF4-FFF2-40B4-BE49-F238E27FC236}">
-                <a16:creationId xmlns:a16="http://schemas.microsoft.com/office/drawing/2014/main" id="{18324A18-340B-4EAB-BE12-C928503E5BE2}"/>
+                <a16:creationId xmlns:a16="http://schemas.microsoft.com/office/drawing/2014/main" id="{657E45F9-7E83-44B6-8BB0-27AE799FE80E}"/>
               </a:ext>
             </a:extLst>
           </p:cNvPr>
@@ -6782,7 +6787,7 @@
           <p:cNvPr id="11" name="s6-unsupported-body">
             <a:extLst xmlns:a="http://schemas.openxmlformats.org/drawingml/2006/main">
               <a:ext uri="{FF2B5EF4-FFF2-40B4-BE49-F238E27FC236}">
-                <a16:creationId xmlns:a16="http://schemas.microsoft.com/office/drawing/2014/main" id="{AD856CD7-9EE2-48D0-A902-79E56003B16D}"/>
+                <a16:creationId xmlns:a16="http://schemas.microsoft.com/office/drawing/2014/main" id="{3197535D-34AD-4118-A1DC-E0D9BB3954A3}"/>
               </a:ext>
             </a:extLst>
           </p:cNvPr>
@@ -6849,7 +6854,7 @@
           <p:cNvPr id="13" name="footer-source-6">
             <a:extLst xmlns:a="http://schemas.openxmlformats.org/drawingml/2006/main">
               <a:ext uri="{FF2B5EF4-FFF2-40B4-BE49-F238E27FC236}">
-                <a16:creationId xmlns:a16="http://schemas.microsoft.com/office/drawing/2014/main" id="{A1B22078-607D-47F4-86C5-E3A17323700A}"/>
+                <a16:creationId xmlns:a16="http://schemas.microsoft.com/office/drawing/2014/main" id="{73332EA1-1677-4881-8B67-C3684940470E}"/>
               </a:ext>
             </a:extLst>
           </p:cNvPr>
@@ -6894,7 +6899,7 @@
           <p:cNvPr id="14" name="footer-number-6">
             <a:extLst xmlns:a="http://schemas.openxmlformats.org/drawingml/2006/main">
               <a:ext uri="{FF2B5EF4-FFF2-40B4-BE49-F238E27FC236}">
-                <a16:creationId xmlns:a16="http://schemas.microsoft.com/office/drawing/2014/main" id="{592928E7-D616-4B17-9567-2EEE4D8564A4}"/>
+                <a16:creationId xmlns:a16="http://schemas.microsoft.com/office/drawing/2014/main" id="{6F2BDA4C-3ED2-43E4-8C63-9F21706169EE}"/>
               </a:ext>
             </a:extLst>
           </p:cNvPr>
@@ -6946,14 +6951,14 @@
         </p:xfrm>
         <a:graphic xmlns:a="http://schemas.openxmlformats.org/drawingml/2006/main">
           <a:graphicData uri="http://schemas.openxmlformats.org/drawingml/2006/chart">
-            <c:chart xmlns:r="http://schemas.openxmlformats.org/officeDocument/2006/relationships" xmlns:c="http://schemas.openxmlformats.org/drawingml/2006/chart" r:id="R8d5fdcea74d24596"/>
+            <c:chart xmlns:r="http://schemas.openxmlformats.org/officeDocument/2006/relationships" xmlns:c="http://schemas.openxmlformats.org/drawingml/2006/chart" r:id="R15084b7a54204e72"/>
           </a:graphicData>
         </a:graphic>
       </p:graphicFrame>
     </p:spTree>
     <p:extLst>
       <p:ext uri="{BB962C8B-B14F-4D97-AF65-F5344CB8AC3E}">
-        <p14:creationId xmlns:p14="http://schemas.microsoft.com/office/powerpoint/2010/main" val="333664532"/>
+        <p14:creationId xmlns:p14="http://schemas.microsoft.com/office/powerpoint/2010/main" val="2035459435"/>
       </p:ext>
     </p:extLst>
   </p:cSld>
@@ -6984,7 +6989,7 @@
           <p:cNvPr id="26" name="s7-title">
             <a:extLst xmlns:a="http://schemas.openxmlformats.org/drawingml/2006/main">
               <a:ext uri="{FF2B5EF4-FFF2-40B4-BE49-F238E27FC236}">
-                <a16:creationId xmlns:a16="http://schemas.microsoft.com/office/drawing/2014/main" id="{27FC7876-5211-4706-9520-259EF0DA52B1}"/>
+                <a16:creationId xmlns:a16="http://schemas.microsoft.com/office/drawing/2014/main" id="{62307740-79C4-45E5-B354-B214B79B46E9}"/>
               </a:ext>
             </a:extLst>
           </p:cNvPr>
@@ -7029,7 +7034,7 @@
           <p:cNvPr id="2" name="s7-subtitle">
             <a:extLst xmlns:a="http://schemas.openxmlformats.org/drawingml/2006/main">
               <a:ext uri="{FF2B5EF4-FFF2-40B4-BE49-F238E27FC236}">
-                <a16:creationId xmlns:a16="http://schemas.microsoft.com/office/drawing/2014/main" id="{FDC73038-17AD-412F-BFB6-FC86DBDA35B1}"/>
+                <a16:creationId xmlns:a16="http://schemas.microsoft.com/office/drawing/2014/main" id="{6BC49522-2AF5-485D-A1E4-5D5DC0DB3369}"/>
               </a:ext>
             </a:extLst>
           </p:cNvPr>
@@ -7162,7 +7167,7 @@
           <p:cNvPr id="7" name="s7-card1">
             <a:extLst xmlns:a="http://schemas.openxmlformats.org/drawingml/2006/main">
               <a:ext uri="{FF2B5EF4-FFF2-40B4-BE49-F238E27FC236}">
-                <a16:creationId xmlns:a16="http://schemas.microsoft.com/office/drawing/2014/main" id="{80B10633-CC49-4528-951B-FAC4295D2A7E}"/>
+                <a16:creationId xmlns:a16="http://schemas.microsoft.com/office/drawing/2014/main" id="{7D7C20F4-85BD-450E-B486-4D4FF9169430}"/>
               </a:ext>
             </a:extLst>
           </p:cNvPr>
@@ -7197,7 +7202,7 @@
           <p:cNvPr id="8" name="s7-card2">
             <a:extLst xmlns:a="http://schemas.openxmlformats.org/drawingml/2006/main">
               <a:ext uri="{FF2B5EF4-FFF2-40B4-BE49-F238E27FC236}">
-                <a16:creationId xmlns:a16="http://schemas.microsoft.com/office/drawing/2014/main" id="{BB708C9D-ADCA-4DAD-B976-2ED33C172687}"/>
+                <a16:creationId xmlns:a16="http://schemas.microsoft.com/office/drawing/2014/main" id="{1CF1ADA0-1C81-4FFC-8E1D-A5B7BFE53FBA}"/>
               </a:ext>
             </a:extLst>
           </p:cNvPr>
@@ -7232,7 +7237,7 @@
           <p:cNvPr id="9" name="s7-card3">
             <a:extLst xmlns:a="http://schemas.openxmlformats.org/drawingml/2006/main">
               <a:ext uri="{FF2B5EF4-FFF2-40B4-BE49-F238E27FC236}">
-                <a16:creationId xmlns:a16="http://schemas.microsoft.com/office/drawing/2014/main" id="{1D3EBFCE-B074-4FE8-A1C1-38BFECEC9269}"/>
+                <a16:creationId xmlns:a16="http://schemas.microsoft.com/office/drawing/2014/main" id="{EC2E9828-528B-4CC5-ABDA-345FCA599887}"/>
               </a:ext>
             </a:extLst>
           </p:cNvPr>
@@ -7267,7 +7272,7 @@
           <p:cNvPr id="10" name="s7-dot1">
             <a:extLst xmlns:a="http://schemas.openxmlformats.org/drawingml/2006/main">
               <a:ext uri="{FF2B5EF4-FFF2-40B4-BE49-F238E27FC236}">
-                <a16:creationId xmlns:a16="http://schemas.microsoft.com/office/drawing/2014/main" id="{D39059FC-DD61-41DB-9F5C-D940E87DADE9}"/>
+                <a16:creationId xmlns:a16="http://schemas.microsoft.com/office/drawing/2014/main" id="{DB69A42A-1C50-434E-8916-B18955905E3E}"/>
               </a:ext>
             </a:extLst>
           </p:cNvPr>
@@ -7300,7 +7305,7 @@
           <p:cNvPr id="11" name="s7-dot2">
             <a:extLst xmlns:a="http://schemas.openxmlformats.org/drawingml/2006/main">
               <a:ext uri="{FF2B5EF4-FFF2-40B4-BE49-F238E27FC236}">
-                <a16:creationId xmlns:a16="http://schemas.microsoft.com/office/drawing/2014/main" id="{6B251CA2-EDBD-4997-B4C7-A2333B4646A3}"/>
+                <a16:creationId xmlns:a16="http://schemas.microsoft.com/office/drawing/2014/main" id="{099A993C-DB73-478B-8AA3-5359D13359B6}"/>
               </a:ext>
             </a:extLst>
           </p:cNvPr>
@@ -7333,7 +7338,7 @@
           <p:cNvPr id="12" name="s7-dot3">
             <a:extLst xmlns:a="http://schemas.openxmlformats.org/drawingml/2006/main">
               <a:ext uri="{FF2B5EF4-FFF2-40B4-BE49-F238E27FC236}">
-                <a16:creationId xmlns:a16="http://schemas.microsoft.com/office/drawing/2014/main" id="{40ABDC04-DA54-4AA2-A42E-FFA11751101E}"/>
+                <a16:creationId xmlns:a16="http://schemas.microsoft.com/office/drawing/2014/main" id="{0FF17C76-E67E-40BD-8193-C19D1F53174F}"/>
               </a:ext>
             </a:extLst>
           </p:cNvPr>
@@ -7366,7 +7371,7 @@
           <p:cNvPr id="13" name="s7-k1">
             <a:extLst xmlns:a="http://schemas.openxmlformats.org/drawingml/2006/main">
               <a:ext uri="{FF2B5EF4-FFF2-40B4-BE49-F238E27FC236}">
-                <a16:creationId xmlns:a16="http://schemas.microsoft.com/office/drawing/2014/main" id="{A80966A8-8666-43C8-B9C8-416F1C1B3994}"/>
+                <a16:creationId xmlns:a16="http://schemas.microsoft.com/office/drawing/2014/main" id="{E003B36B-D895-4A69-AF86-E865C0F65527}"/>
               </a:ext>
             </a:extLst>
           </p:cNvPr>
@@ -7411,7 +7416,7 @@
           <p:cNvPr id="14" name="s7-b1">
             <a:extLst xmlns:a="http://schemas.openxmlformats.org/drawingml/2006/main">
               <a:ext uri="{FF2B5EF4-FFF2-40B4-BE49-F238E27FC236}">
-                <a16:creationId xmlns:a16="http://schemas.microsoft.com/office/drawing/2014/main" id="{EC746CCD-3B0C-4E8E-A60F-20FB8D55F3EC}"/>
+                <a16:creationId xmlns:a16="http://schemas.microsoft.com/office/drawing/2014/main" id="{1F0365B3-BFDD-4DC1-BCFC-1F3FB89260A1}"/>
               </a:ext>
             </a:extLst>
           </p:cNvPr>
@@ -7456,7 +7461,7 @@
           <p:cNvPr id="15" name="s7-v1">
             <a:extLst xmlns:a="http://schemas.openxmlformats.org/drawingml/2006/main">
               <a:ext uri="{FF2B5EF4-FFF2-40B4-BE49-F238E27FC236}">
-                <a16:creationId xmlns:a16="http://schemas.microsoft.com/office/drawing/2014/main" id="{31733DC4-9C55-49BC-BC79-25517120BD9A}"/>
+                <a16:creationId xmlns:a16="http://schemas.microsoft.com/office/drawing/2014/main" id="{FBE9EF65-4136-486E-BE12-E0468B1EF79D}"/>
               </a:ext>
             </a:extLst>
           </p:cNvPr>
@@ -7501,7 +7506,7 @@
           <p:cNvPr id="16" name="s7-k2">
             <a:extLst xmlns:a="http://schemas.openxmlformats.org/drawingml/2006/main">
               <a:ext uri="{FF2B5EF4-FFF2-40B4-BE49-F238E27FC236}">
-                <a16:creationId xmlns:a16="http://schemas.microsoft.com/office/drawing/2014/main" id="{0B325EC1-46EC-40BD-9791-635E24C4B102}"/>
+                <a16:creationId xmlns:a16="http://schemas.microsoft.com/office/drawing/2014/main" id="{20E20B9E-D1DD-4ECD-AE19-C63C11984AD3}"/>
               </a:ext>
             </a:extLst>
           </p:cNvPr>
@@ -7546,7 +7551,7 @@
           <p:cNvPr id="17" name="s7-b2">
             <a:extLst xmlns:a="http://schemas.openxmlformats.org/drawingml/2006/main">
               <a:ext uri="{FF2B5EF4-FFF2-40B4-BE49-F238E27FC236}">
-                <a16:creationId xmlns:a16="http://schemas.microsoft.com/office/drawing/2014/main" id="{D008F08F-E162-455C-A1D4-1C984901159C}"/>
+                <a16:creationId xmlns:a16="http://schemas.microsoft.com/office/drawing/2014/main" id="{576DBC82-DCA6-4348-9207-B83374DA9CAB}"/>
               </a:ext>
             </a:extLst>
           </p:cNvPr>
@@ -7591,7 +7596,7 @@
           <p:cNvPr id="18" name="s7-v2">
             <a:extLst xmlns:a="http://schemas.openxmlformats.org/drawingml/2006/main">
               <a:ext uri="{FF2B5EF4-FFF2-40B4-BE49-F238E27FC236}">
-                <a16:creationId xmlns:a16="http://schemas.microsoft.com/office/drawing/2014/main" id="{69E6F07F-7221-4FA9-9EA4-6296F4F83CBC}"/>
+                <a16:creationId xmlns:a16="http://schemas.microsoft.com/office/drawing/2014/main" id="{66E86001-6B3D-40E3-9828-1C9CF27D291F}"/>
               </a:ext>
             </a:extLst>
           </p:cNvPr>
@@ -7636,7 +7641,7 @@
           <p:cNvPr id="19" name="s7-k3">
             <a:extLst xmlns:a="http://schemas.openxmlformats.org/drawingml/2006/main">
               <a:ext uri="{FF2B5EF4-FFF2-40B4-BE49-F238E27FC236}">
-                <a16:creationId xmlns:a16="http://schemas.microsoft.com/office/drawing/2014/main" id="{98A41F99-3E19-4ED7-A94E-5CC6CFD5160C}"/>
+                <a16:creationId xmlns:a16="http://schemas.microsoft.com/office/drawing/2014/main" id="{8F05AB0E-788D-4EED-9BAB-B94073A87D10}"/>
               </a:ext>
             </a:extLst>
           </p:cNvPr>
@@ -7681,7 +7686,7 @@
           <p:cNvPr id="20" name="s7-b3">
             <a:extLst xmlns:a="http://schemas.openxmlformats.org/drawingml/2006/main">
               <a:ext uri="{FF2B5EF4-FFF2-40B4-BE49-F238E27FC236}">
-                <a16:creationId xmlns:a16="http://schemas.microsoft.com/office/drawing/2014/main" id="{69BEFD4D-B40C-4EB6-B114-6450069E145D}"/>
+                <a16:creationId xmlns:a16="http://schemas.microsoft.com/office/drawing/2014/main" id="{605B9B9E-C4D1-4650-AFB3-77F2F043CF61}"/>
               </a:ext>
             </a:extLst>
           </p:cNvPr>
@@ -7726,7 +7731,7 @@
           <p:cNvPr id="21" name="s7-v3">
             <a:extLst xmlns:a="http://schemas.openxmlformats.org/drawingml/2006/main">
               <a:ext uri="{FF2B5EF4-FFF2-40B4-BE49-F238E27FC236}">
-                <a16:creationId xmlns:a16="http://schemas.microsoft.com/office/drawing/2014/main" id="{A792DA74-DA87-40C2-AD7A-AF4972DA80D6}"/>
+                <a16:creationId xmlns:a16="http://schemas.microsoft.com/office/drawing/2014/main" id="{D63B3F2D-1A06-4909-9C0E-B0D6FFAAFEE5}"/>
               </a:ext>
             </a:extLst>
           </p:cNvPr>
@@ -7771,7 +7776,7 @@
           <p:cNvPr id="22" name="s7-human">
             <a:extLst xmlns:a="http://schemas.openxmlformats.org/drawingml/2006/main">
               <a:ext uri="{FF2B5EF4-FFF2-40B4-BE49-F238E27FC236}">
-                <a16:creationId xmlns:a16="http://schemas.microsoft.com/office/drawing/2014/main" id="{A39BF957-E6BC-4853-AE03-0D7466923FDF}"/>
+                <a16:creationId xmlns:a16="http://schemas.microsoft.com/office/drawing/2014/main" id="{F3EC9779-C014-4A0D-8FD0-E6E2FABEBCA6}"/>
               </a:ext>
             </a:extLst>
           </p:cNvPr>
@@ -7838,7 +7843,7 @@
           <p:cNvPr id="24" name="footer-source-7">
             <a:extLst xmlns:a="http://schemas.openxmlformats.org/drawingml/2006/main">
               <a:ext uri="{FF2B5EF4-FFF2-40B4-BE49-F238E27FC236}">
-                <a16:creationId xmlns:a16="http://schemas.microsoft.com/office/drawing/2014/main" id="{F3490E14-E7CD-4B1B-8F16-4FBBF4AA0D29}"/>
+                <a16:creationId xmlns:a16="http://schemas.microsoft.com/office/drawing/2014/main" id="{DB55EB28-2BFD-4C16-8A1D-162669AB4496}"/>
               </a:ext>
             </a:extLst>
           </p:cNvPr>
@@ -7883,7 +7888,7 @@
           <p:cNvPr id="25" name="footer-number-7">
             <a:extLst xmlns:a="http://schemas.openxmlformats.org/drawingml/2006/main">
               <a:ext uri="{FF2B5EF4-FFF2-40B4-BE49-F238E27FC236}">
-                <a16:creationId xmlns:a16="http://schemas.microsoft.com/office/drawing/2014/main" id="{1508B504-CD81-4E39-A825-38D6D6C9B325}"/>
+                <a16:creationId xmlns:a16="http://schemas.microsoft.com/office/drawing/2014/main" id="{FEC4E551-9CD6-4DCF-A25E-83D7096000EB}"/>
               </a:ext>
             </a:extLst>
           </p:cNvPr>
@@ -7926,7 +7931,7 @@
     </p:spTree>
     <p:extLst>
       <p:ext uri="{BB962C8B-B14F-4D97-AF65-F5344CB8AC3E}">
-        <p14:creationId xmlns:p14="http://schemas.microsoft.com/office/powerpoint/2010/main" val="283734944"/>
+        <p14:creationId xmlns:p14="http://schemas.microsoft.com/office/powerpoint/2010/main" val="2144432346"/>
       </p:ext>
     </p:extLst>
   </p:cSld>
@@ -7957,7 +7962,7 @@
           <p:cNvPr id="19" name="s8-eyebrow">
             <a:extLst xmlns:a="http://schemas.openxmlformats.org/drawingml/2006/main">
               <a:ext uri="{FF2B5EF4-FFF2-40B4-BE49-F238E27FC236}">
-                <a16:creationId xmlns:a16="http://schemas.microsoft.com/office/drawing/2014/main" id="{E65E9B11-4AAA-4A35-9E53-B9898B75F6CB}"/>
+                <a16:creationId xmlns:a16="http://schemas.microsoft.com/office/drawing/2014/main" id="{D7A16CD0-B306-4ACB-AE6E-0629C612EE67}"/>
               </a:ext>
             </a:extLst>
           </p:cNvPr>
@@ -8002,7 +8007,7 @@
           <p:cNvPr id="2" name="s8-title">
             <a:extLst xmlns:a="http://schemas.openxmlformats.org/drawingml/2006/main">
               <a:ext uri="{FF2B5EF4-FFF2-40B4-BE49-F238E27FC236}">
-                <a16:creationId xmlns:a16="http://schemas.microsoft.com/office/drawing/2014/main" id="{25BCDD51-7836-4F24-87C2-AC7EEF0EA503}"/>
+                <a16:creationId xmlns:a16="http://schemas.microsoft.com/office/drawing/2014/main" id="{ABBA4495-E05B-46A6-B02F-D61846528968}"/>
               </a:ext>
             </a:extLst>
           </p:cNvPr>
@@ -8071,7 +8076,7 @@
           <p:cNvPr id="4" name="s8-close">
             <a:extLst xmlns:a="http://schemas.openxmlformats.org/drawingml/2006/main">
               <a:ext uri="{FF2B5EF4-FFF2-40B4-BE49-F238E27FC236}">
-                <a16:creationId xmlns:a16="http://schemas.microsoft.com/office/drawing/2014/main" id="{3DA98D3F-6812-446D-A866-C0E86E67A4A2}"/>
+                <a16:creationId xmlns:a16="http://schemas.microsoft.com/office/drawing/2014/main" id="{74B32A34-E346-4563-8FB7-E78BCEB67710}"/>
               </a:ext>
             </a:extLst>
           </p:cNvPr>
@@ -8116,7 +8121,7 @@
           <p:cNvPr id="5" name="s8-command-box">
             <a:extLst xmlns:a="http://schemas.openxmlformats.org/drawingml/2006/main">
               <a:ext uri="{FF2B5EF4-FFF2-40B4-BE49-F238E27FC236}">
-                <a16:creationId xmlns:a16="http://schemas.microsoft.com/office/drawing/2014/main" id="{6F30E500-4C89-414A-8B10-A80AA3A3B02C}"/>
+                <a16:creationId xmlns:a16="http://schemas.microsoft.com/office/drawing/2014/main" id="{8939BC3B-C64F-4496-8C4E-469BA1F49407}"/>
               </a:ext>
             </a:extLst>
           </p:cNvPr>
@@ -8151,7 +8156,7 @@
           <p:cNvPr id="6" name="s8-command">
             <a:extLst xmlns:a="http://schemas.openxmlformats.org/drawingml/2006/main">
               <a:ext uri="{FF2B5EF4-FFF2-40B4-BE49-F238E27FC236}">
-                <a16:creationId xmlns:a16="http://schemas.microsoft.com/office/drawing/2014/main" id="{54E3D959-D7D2-4F52-BF13-7DD089E98585}"/>
+                <a16:creationId xmlns:a16="http://schemas.microsoft.com/office/drawing/2014/main" id="{2741DBFD-99D2-4EEA-867E-7CC67701E272}"/>
               </a:ext>
             </a:extLst>
           </p:cNvPr>
@@ -8197,7 +8202,7 @@
           <p:cNvPr id="7" name="s8-github">
             <a:extLst xmlns:a="http://schemas.openxmlformats.org/drawingml/2006/main">
               <a:ext uri="{FF2B5EF4-FFF2-40B4-BE49-F238E27FC236}">
-                <a16:creationId xmlns:a16="http://schemas.microsoft.com/office/drawing/2014/main" id="{9D581FBD-7225-4AA5-84C1-813C8E3EF574}"/>
+                <a16:creationId xmlns:a16="http://schemas.microsoft.com/office/drawing/2014/main" id="{BFE149C0-BDB7-4F64-AD11-15F053E4D2CF}"/>
               </a:ext>
             </a:extLst>
           </p:cNvPr>
@@ -8242,7 +8247,7 @@
           <p:cNvPr id="8" name="s8-npm">
             <a:extLst xmlns:a="http://schemas.openxmlformats.org/drawingml/2006/main">
               <a:ext uri="{FF2B5EF4-FFF2-40B4-BE49-F238E27FC236}">
-                <a16:creationId xmlns:a16="http://schemas.microsoft.com/office/drawing/2014/main" id="{D060CE72-FBE5-4677-9DC7-211735AAB2DF}"/>
+                <a16:creationId xmlns:a16="http://schemas.microsoft.com/office/drawing/2014/main" id="{F7F6D1C7-5851-4975-90C6-4D666912BA74}"/>
               </a:ext>
             </a:extLst>
           </p:cNvPr>
@@ -8287,7 +8292,7 @@
           <p:cNvPr id="9" name="s8-d1">
             <a:extLst xmlns:a="http://schemas.openxmlformats.org/drawingml/2006/main">
               <a:ext uri="{FF2B5EF4-FFF2-40B4-BE49-F238E27FC236}">
-                <a16:creationId xmlns:a16="http://schemas.microsoft.com/office/drawing/2014/main" id="{D46123D2-78D2-404D-BE78-BE31FD1B5357}"/>
+                <a16:creationId xmlns:a16="http://schemas.microsoft.com/office/drawing/2014/main" id="{91DDB8B8-A07A-4FC4-8CAD-37D30C3B7F67}"/>
               </a:ext>
             </a:extLst>
           </p:cNvPr>
@@ -8320,7 +8325,7 @@
           <p:cNvPr id="10" name="s8-l1">
             <a:extLst xmlns:a="http://schemas.openxmlformats.org/drawingml/2006/main">
               <a:ext uri="{FF2B5EF4-FFF2-40B4-BE49-F238E27FC236}">
-                <a16:creationId xmlns:a16="http://schemas.microsoft.com/office/drawing/2014/main" id="{6CD18A7C-A265-44FB-B991-E39D4459B52C}"/>
+                <a16:creationId xmlns:a16="http://schemas.microsoft.com/office/drawing/2014/main" id="{C4805384-80DD-439A-9F3B-748EBDBA746A}"/>
               </a:ext>
             </a:extLst>
           </p:cNvPr>
@@ -8365,7 +8370,7 @@
           <p:cNvPr id="11" name="s8-d2">
             <a:extLst xmlns:a="http://schemas.openxmlformats.org/drawingml/2006/main">
               <a:ext uri="{FF2B5EF4-FFF2-40B4-BE49-F238E27FC236}">
-                <a16:creationId xmlns:a16="http://schemas.microsoft.com/office/drawing/2014/main" id="{246562C9-B70A-42CB-B2DC-7DBED1CD1E97}"/>
+                <a16:creationId xmlns:a16="http://schemas.microsoft.com/office/drawing/2014/main" id="{7A57D747-4406-4A9B-899E-213958211E91}"/>
               </a:ext>
             </a:extLst>
           </p:cNvPr>
@@ -8398,7 +8403,7 @@
           <p:cNvPr id="12" name="s8-l2">
             <a:extLst xmlns:a="http://schemas.openxmlformats.org/drawingml/2006/main">
               <a:ext uri="{FF2B5EF4-FFF2-40B4-BE49-F238E27FC236}">
-                <a16:creationId xmlns:a16="http://schemas.microsoft.com/office/drawing/2014/main" id="{FE49A203-DE64-47A4-8F4C-9228D59E082B}"/>
+                <a16:creationId xmlns:a16="http://schemas.microsoft.com/office/drawing/2014/main" id="{6C2106C5-A204-4920-8066-806344907E14}"/>
               </a:ext>
             </a:extLst>
           </p:cNvPr>
@@ -8443,7 +8448,7 @@
           <p:cNvPr id="13" name="s8-d3">
             <a:extLst xmlns:a="http://schemas.openxmlformats.org/drawingml/2006/main">
               <a:ext uri="{FF2B5EF4-FFF2-40B4-BE49-F238E27FC236}">
-                <a16:creationId xmlns:a16="http://schemas.microsoft.com/office/drawing/2014/main" id="{FC0ED1D1-CC2C-48B0-93E0-8B658E3B9333}"/>
+                <a16:creationId xmlns:a16="http://schemas.microsoft.com/office/drawing/2014/main" id="{EA0B3F80-C9A0-4924-A30A-361F11D6AEDE}"/>
               </a:ext>
             </a:extLst>
           </p:cNvPr>
@@ -8476,7 +8481,7 @@
           <p:cNvPr id="14" name="s8-l3">
             <a:extLst xmlns:a="http://schemas.openxmlformats.org/drawingml/2006/main">
               <a:ext uri="{FF2B5EF4-FFF2-40B4-BE49-F238E27FC236}">
-                <a16:creationId xmlns:a16="http://schemas.microsoft.com/office/drawing/2014/main" id="{2919F2EF-2478-48DE-9EDB-92828A09622C}"/>
+                <a16:creationId xmlns:a16="http://schemas.microsoft.com/office/drawing/2014/main" id="{7EEF8C95-F7D6-4C9C-A2C6-AAD268664D3C}"/>
               </a:ext>
             </a:extLst>
           </p:cNvPr>
@@ -8521,7 +8526,7 @@
           <p:cNvPr id="15" name="s8-platforms">
             <a:extLst xmlns:a="http://schemas.openxmlformats.org/drawingml/2006/main">
               <a:ext uri="{FF2B5EF4-FFF2-40B4-BE49-F238E27FC236}">
-                <a16:creationId xmlns:a16="http://schemas.microsoft.com/office/drawing/2014/main" id="{2E5456D7-0A3C-4095-B1DE-CBD341D50F21}"/>
+                <a16:creationId xmlns:a16="http://schemas.microsoft.com/office/drawing/2014/main" id="{7DAD2529-C304-4C68-A7AE-81A7C31E709B}"/>
               </a:ext>
             </a:extLst>
           </p:cNvPr>
@@ -8588,7 +8593,7 @@
           <p:cNvPr id="17" name="footer-source-8">
             <a:extLst xmlns:a="http://schemas.openxmlformats.org/drawingml/2006/main">
               <a:ext uri="{FF2B5EF4-FFF2-40B4-BE49-F238E27FC236}">
-                <a16:creationId xmlns:a16="http://schemas.microsoft.com/office/drawing/2014/main" id="{763819D6-142E-4027-9992-42159980982E}"/>
+                <a16:creationId xmlns:a16="http://schemas.microsoft.com/office/drawing/2014/main" id="{7B79A44B-BBE1-49AD-98B9-18B5D3499FCF}"/>
               </a:ext>
             </a:extLst>
           </p:cNvPr>
@@ -8633,7 +8638,7 @@
           <p:cNvPr id="18" name="footer-number-8">
             <a:extLst xmlns:a="http://schemas.openxmlformats.org/drawingml/2006/main">
               <a:ext uri="{FF2B5EF4-FFF2-40B4-BE49-F238E27FC236}">
-                <a16:creationId xmlns:a16="http://schemas.microsoft.com/office/drawing/2014/main" id="{6529AE35-2D0E-403F-B31D-7FD915E3586B}"/>
+                <a16:creationId xmlns:a16="http://schemas.microsoft.com/office/drawing/2014/main" id="{06D2C7E8-428D-49E7-BE60-DD3EECA2C140}"/>
               </a:ext>
             </a:extLst>
           </p:cNvPr>
@@ -8676,7 +8681,7 @@
     </p:spTree>
     <p:extLst>
       <p:ext uri="{BB962C8B-B14F-4D97-AF65-F5344CB8AC3E}">
-        <p14:creationId xmlns:p14="http://schemas.microsoft.com/office/powerpoint/2010/main" val="2134665719"/>
+        <p14:creationId xmlns:p14="http://schemas.microsoft.com/office/powerpoint/2010/main" val="1784538584"/>
       </p:ext>
     </p:extLst>
   </p:cSld>

--- a/outputs/vertex-palace-build-week-demo.pptx
+++ b/outputs/vertex-palace-build-week-demo.pptx
@@ -2,20 +2,20 @@
 <file path=ppt/presentation.xml><?xml version="1.0" encoding="utf-8"?>
 <p:presentation xmlns:p="http://schemas.openxmlformats.org/presentationml/2006/main">
   <p:sldMasterIdLst>
-    <p:sldMasterId xmlns:r="http://schemas.openxmlformats.org/officeDocument/2006/relationships" id="2147483648" r:id="R2abdefaf395e490e"/>
+    <p:sldMasterId xmlns:r="http://schemas.openxmlformats.org/officeDocument/2006/relationships" id="2147483648" r:id="R3f463e87c024421e"/>
   </p:sldMasterIdLst>
   <p:notesMasterIdLst>
-    <p:notesMasterId xmlns:r="http://schemas.openxmlformats.org/officeDocument/2006/relationships" r:id="Rc34b74eb9f5142bc"/>
+    <p:notesMasterId xmlns:r="http://schemas.openxmlformats.org/officeDocument/2006/relationships" r:id="R4de69a31150e49a2"/>
   </p:notesMasterIdLst>
   <p:sldIdLst>
-    <p:sldId xmlns:r="http://schemas.openxmlformats.org/officeDocument/2006/relationships" id="256" r:id="R39f7a98369034cca"/>
-    <p:sldId xmlns:r="http://schemas.openxmlformats.org/officeDocument/2006/relationships" id="257" r:id="R8b76a65345ab4a79"/>
-    <p:sldId xmlns:r="http://schemas.openxmlformats.org/officeDocument/2006/relationships" id="258" r:id="R4a9d51c5d6d2426f"/>
-    <p:sldId xmlns:r="http://schemas.openxmlformats.org/officeDocument/2006/relationships" id="259" r:id="R9d509893f2314f34"/>
-    <p:sldId xmlns:r="http://schemas.openxmlformats.org/officeDocument/2006/relationships" id="260" r:id="Ree36d4941d4348ac"/>
-    <p:sldId xmlns:r="http://schemas.openxmlformats.org/officeDocument/2006/relationships" id="261" r:id="R46364cad20e14537"/>
-    <p:sldId xmlns:r="http://schemas.openxmlformats.org/officeDocument/2006/relationships" id="262" r:id="R954f177c827342ca"/>
-    <p:sldId xmlns:r="http://schemas.openxmlformats.org/officeDocument/2006/relationships" id="263" r:id="R88ca8e012d334404"/>
+    <p:sldId xmlns:r="http://schemas.openxmlformats.org/officeDocument/2006/relationships" id="256" r:id="R7f3627edb4d242b2"/>
+    <p:sldId xmlns:r="http://schemas.openxmlformats.org/officeDocument/2006/relationships" id="257" r:id="R5f826e2058554739"/>
+    <p:sldId xmlns:r="http://schemas.openxmlformats.org/officeDocument/2006/relationships" id="258" r:id="R2e5e818dfe134e6c"/>
+    <p:sldId xmlns:r="http://schemas.openxmlformats.org/officeDocument/2006/relationships" id="259" r:id="R0a6761302045405c"/>
+    <p:sldId xmlns:r="http://schemas.openxmlformats.org/officeDocument/2006/relationships" id="260" r:id="Rbe7db10c67f042cf"/>
+    <p:sldId xmlns:r="http://schemas.openxmlformats.org/officeDocument/2006/relationships" id="261" r:id="R52708aea921d4872"/>
+    <p:sldId xmlns:r="http://schemas.openxmlformats.org/officeDocument/2006/relationships" id="262" r:id="Refedc8ec5cb14507"/>
+    <p:sldId xmlns:r="http://schemas.openxmlformats.org/officeDocument/2006/relationships" id="263" r:id="Raec27861df8a4f93"/>
   </p:sldIdLst>
   <p:sldSz cx="12192000" cy="6858000"/>
   <p:notesSz cx="6858000" cy="9144000"/>
@@ -694,22 +694,22 @@
           <a:lstStyle xmlns:a="http://schemas.openxmlformats.org/drawingml/2006/main"/>
           <a:p xmlns:a="http://schemas.openxmlformats.org/drawingml/2006/main">
             <a:r>
-              <a:t>The original idea began with a spatial question: could a flat, two-dimensional repository tree become a three-dimensional place? A building became the natural model, with domains as floors, features as rooms, and files and symbols as cabinets and drawers.</a:t>
-            </a:r>
-          </a:p>
-          <a:p xmlns:a="http://schemas.openxmlformats.org/drawingml/2006/main">
-            <a:r>
-              <a:t>The connection to the human memory-palace technique came next. Once the repository had places, a task could follow a route through them and relevant past mistakes could wait at the entrance.</a:t>
-            </a:r>
-          </a:p>
-          <a:p xmlns:a="http://schemas.openxmlformats.org/drawingml/2006/main">
-            <a:r>
-              <a:t>Walk left to right: index the repository structure, select an adaptive mode, pack only primary and supporting context, execute the task, then preserve relevant decisions and pitfalls at the entrance for the next task.</a:t>
-            </a:r>
-          </a:p>
-          <a:p xmlns:a="http://schemas.openxmlformats.org/drawingml/2006/main">
-            <a:r>
-              <a:t>Emphasize that current code and tests outrank memory. The memory layer is a guardrail, not a source of truth.</a:t>
+              <a:t>The 2D-to-3D idea only becomes useful when each axis has a stable meaning. X is the horizontal functional area or module, such as auth, checkout, or blog.</a:t>
+            </a:r>
+          </a:p>
+          <a:p xmlns:a="http://schemas.openxmlformats.org/drawingml/2006/main">
+            <a:r>
+              <a:t>Y is the vertical architectural floor, such as interface, implementation, data, verification, or runtime. Z is inspection depth: room overview, file cabinet, symbol drawer, then the smallest useful snippet.</a:t>
+            </a:r>
+          </a:p>
+          <a:p xmlns:a="http://schemas.openxmlformats.org/drawingml/2006/main">
+            <a:r>
+              <a:t>For example, checkout / implementation / shippingQuote() is one address. A task route is a path between addresses; memory, evidence, confidence, and the Pitfall Board attach to places instead of becoming extra axes.</a:t>
+            </a:r>
+          </a:p>
+          <a:p xmlns:a="http://schemas.openxmlformats.org/drawingml/2006/main">
+            <a:r>
+              <a:t>This keeps the building stable as the repository changes. Current code and tests still outrank remembered guidance.</a:t>
             </a:r>
           </a:p>
         </p:txBody>
@@ -1157,7 +1157,7 @@
   </p:cSld>
   <p:clrMap bg1="lt1" tx1="dk1" bg2="lt2" tx2="dk2" accent1="accent1" accent2="accent2" accent3="accent3" accent4="accent4" accent5="accent5" accent6="accent6" hlink="hlink" folHlink="folHlink"/>
   <p:sldLayoutIdLst>
-    <p:sldLayoutId xmlns:r="http://schemas.openxmlformats.org/officeDocument/2006/relationships" id="2147483649" r:id="Rfeaf7f294e654a66"/>
+    <p:sldLayoutId xmlns:r="http://schemas.openxmlformats.org/officeDocument/2006/relationships" id="2147483649" r:id="R4cfe5f496f634ff8"/>
   </p:sldLayoutIdLst>
   <p:txStyles>
     <p:titleStyle>
@@ -2049,7 +2049,7 @@
           <p:cNvPr id="7" name="s1-eyebrow">
             <a:extLst xmlns:a="http://schemas.openxmlformats.org/drawingml/2006/main">
               <a:ext uri="{FF2B5EF4-FFF2-40B4-BE49-F238E27FC236}">
-                <a16:creationId xmlns:a16="http://schemas.microsoft.com/office/drawing/2014/main" id="{B7B1FA98-806C-40C5-A554-1071E0862DBB}"/>
+                <a16:creationId xmlns:a16="http://schemas.microsoft.com/office/drawing/2014/main" id="{BA4A2A4C-2C67-46E2-9EBA-7D4F37C0A397}"/>
               </a:ext>
             </a:extLst>
           </p:cNvPr>
@@ -2094,7 +2094,7 @@
           <p:cNvPr id="2" name="s1-title">
             <a:extLst xmlns:a="http://schemas.openxmlformats.org/drawingml/2006/main">
               <a:ext uri="{FF2B5EF4-FFF2-40B4-BE49-F238E27FC236}">
-                <a16:creationId xmlns:a16="http://schemas.microsoft.com/office/drawing/2014/main" id="{C1889C3F-BF41-4D7C-8A0A-ED3374146D69}"/>
+                <a16:creationId xmlns:a16="http://schemas.microsoft.com/office/drawing/2014/main" id="{FDE79580-A097-46F0-9627-A59A4B319954}"/>
               </a:ext>
             </a:extLst>
           </p:cNvPr>
@@ -2162,7 +2162,7 @@
           <p:cNvPr id="4" name="s1-subtitle">
             <a:extLst xmlns:a="http://schemas.openxmlformats.org/drawingml/2006/main">
               <a:ext uri="{FF2B5EF4-FFF2-40B4-BE49-F238E27FC236}">
-                <a16:creationId xmlns:a16="http://schemas.microsoft.com/office/drawing/2014/main" id="{4669666D-118B-4D03-ACA6-8F67931BCE11}"/>
+                <a16:creationId xmlns:a16="http://schemas.microsoft.com/office/drawing/2014/main" id="{614FD7A3-576F-4740-A719-5CC5B0ADFAB7}"/>
               </a:ext>
             </a:extLst>
           </p:cNvPr>
@@ -2207,7 +2207,7 @@
           <p:cNvPr id="5" name="s1-version">
             <a:extLst xmlns:a="http://schemas.openxmlformats.org/drawingml/2006/main">
               <a:ext uri="{FF2B5EF4-FFF2-40B4-BE49-F238E27FC236}">
-                <a16:creationId xmlns:a16="http://schemas.microsoft.com/office/drawing/2014/main" id="{6DDE248A-DE7A-44C3-BBD9-7FC9B0CEB408}"/>
+                <a16:creationId xmlns:a16="http://schemas.microsoft.com/office/drawing/2014/main" id="{3525B2D3-BA2F-4189-9DEA-8150F4D72115}"/>
               </a:ext>
             </a:extLst>
           </p:cNvPr>
@@ -2256,7 +2256,7 @@
           <p:nvPr/>
         </p:nvPicPr>
         <p:blipFill>
-          <a:blip xmlns:r="http://schemas.openxmlformats.org/officeDocument/2006/relationships" xmlns:a="http://schemas.openxmlformats.org/drawingml/2006/main" r:embed="Rb0f2c6423231481c"/>
+          <a:blip xmlns:r="http://schemas.openxmlformats.org/officeDocument/2006/relationships" xmlns:a="http://schemas.openxmlformats.org/drawingml/2006/main" r:embed="R79c1d2b0254f4d99"/>
           <a:stretch xmlns:a="http://schemas.openxmlformats.org/drawingml/2006/main"/>
         </p:blipFill>
         <p:spPr>
@@ -2272,7 +2272,7 @@
     </p:spTree>
     <p:extLst>
       <p:ext uri="{BB962C8B-B14F-4D97-AF65-F5344CB8AC3E}">
-        <p14:creationId xmlns:p14="http://schemas.microsoft.com/office/powerpoint/2010/main" val="1270227419"/>
+        <p14:creationId xmlns:p14="http://schemas.microsoft.com/office/powerpoint/2010/main" val="1340954457"/>
       </p:ext>
     </p:extLst>
   </p:cSld>
@@ -2303,7 +2303,7 @@
           <p:cNvPr id="33" name="s2-title">
             <a:extLst xmlns:a="http://schemas.openxmlformats.org/drawingml/2006/main">
               <a:ext uri="{FF2B5EF4-FFF2-40B4-BE49-F238E27FC236}">
-                <a16:creationId xmlns:a16="http://schemas.microsoft.com/office/drawing/2014/main" id="{C5FC4020-68D7-4811-ADE7-A817D4BC3B36}"/>
+                <a16:creationId xmlns:a16="http://schemas.microsoft.com/office/drawing/2014/main" id="{CE01E587-EA77-4DCF-BC45-15C0EDA23EAE}"/>
               </a:ext>
             </a:extLst>
           </p:cNvPr>
@@ -2348,7 +2348,7 @@
           <p:cNvPr id="2" name="s2-subtitle">
             <a:extLst xmlns:a="http://schemas.openxmlformats.org/drawingml/2006/main">
               <a:ext uri="{FF2B5EF4-FFF2-40B4-BE49-F238E27FC236}">
-                <a16:creationId xmlns:a16="http://schemas.microsoft.com/office/drawing/2014/main" id="{4940A15F-891F-4344-A13A-B1C339B0A557}"/>
+                <a16:creationId xmlns:a16="http://schemas.microsoft.com/office/drawing/2014/main" id="{37763A1F-21DD-4ED8-95FE-6CC5595977BB}"/>
               </a:ext>
             </a:extLst>
           </p:cNvPr>
@@ -2503,7 +2503,7 @@
           <p:cNvPr id="8" name="s2-agent">
             <a:extLst xmlns:a="http://schemas.openxmlformats.org/drawingml/2006/main">
               <a:ext uri="{FF2B5EF4-FFF2-40B4-BE49-F238E27FC236}">
-                <a16:creationId xmlns:a16="http://schemas.microsoft.com/office/drawing/2014/main" id="{A01F559D-912B-4B3C-965D-04A0BBECBFA2}"/>
+                <a16:creationId xmlns:a16="http://schemas.microsoft.com/office/drawing/2014/main" id="{B54C204E-3868-469B-A58F-530A830304FA}"/>
               </a:ext>
             </a:extLst>
           </p:cNvPr>
@@ -2536,7 +2536,7 @@
           <p:cNvPr id="9" name="s2-agent-label">
             <a:extLst xmlns:a="http://schemas.openxmlformats.org/drawingml/2006/main">
               <a:ext uri="{FF2B5EF4-FFF2-40B4-BE49-F238E27FC236}">
-                <a16:creationId xmlns:a16="http://schemas.microsoft.com/office/drawing/2014/main" id="{A44C0778-51D2-4D50-9E6C-D44F690E9A45}"/>
+                <a16:creationId xmlns:a16="http://schemas.microsoft.com/office/drawing/2014/main" id="{E5F4D873-882C-4DE3-9A01-D8A63F219B61}"/>
               </a:ext>
             </a:extLst>
           </p:cNvPr>
@@ -2581,7 +2581,7 @@
           <p:cNvPr id="10" name="s2-file-a">
             <a:extLst xmlns:a="http://schemas.openxmlformats.org/drawingml/2006/main">
               <a:ext uri="{FF2B5EF4-FFF2-40B4-BE49-F238E27FC236}">
-                <a16:creationId xmlns:a16="http://schemas.microsoft.com/office/drawing/2014/main" id="{7DD03FA1-A93C-481A-A316-AB9D11260DBC}"/>
+                <a16:creationId xmlns:a16="http://schemas.microsoft.com/office/drawing/2014/main" id="{EDFB5032-CC38-4425-BC7B-0A93AF329F55}"/>
               </a:ext>
             </a:extLst>
           </p:cNvPr>
@@ -2614,7 +2614,7 @@
           <p:cNvPr id="11" name="s2-file-b">
             <a:extLst xmlns:a="http://schemas.openxmlformats.org/drawingml/2006/main">
               <a:ext uri="{FF2B5EF4-FFF2-40B4-BE49-F238E27FC236}">
-                <a16:creationId xmlns:a16="http://schemas.microsoft.com/office/drawing/2014/main" id="{200592A9-79DC-475F-981B-0164FB535A27}"/>
+                <a16:creationId xmlns:a16="http://schemas.microsoft.com/office/drawing/2014/main" id="{5D8AA49E-5348-43A7-99D4-0F6E7DDB6D18}"/>
               </a:ext>
             </a:extLst>
           </p:cNvPr>
@@ -2647,7 +2647,7 @@
           <p:cNvPr id="12" name="s2-file-c">
             <a:extLst xmlns:a="http://schemas.openxmlformats.org/drawingml/2006/main">
               <a:ext uri="{FF2B5EF4-FFF2-40B4-BE49-F238E27FC236}">
-                <a16:creationId xmlns:a16="http://schemas.microsoft.com/office/drawing/2014/main" id="{F024A584-4103-45D1-8D3E-DEF1CB2EFDB7}"/>
+                <a16:creationId xmlns:a16="http://schemas.microsoft.com/office/drawing/2014/main" id="{955CDD8F-920A-4F86-BBDF-8CB217B1AA6A}"/>
               </a:ext>
             </a:extLst>
           </p:cNvPr>
@@ -2680,7 +2680,7 @@
           <p:cNvPr id="13" name="s2-file-d">
             <a:extLst xmlns:a="http://schemas.openxmlformats.org/drawingml/2006/main">
               <a:ext uri="{FF2B5EF4-FFF2-40B4-BE49-F238E27FC236}">
-                <a16:creationId xmlns:a16="http://schemas.microsoft.com/office/drawing/2014/main" id="{8DDC61FB-59DB-4BE7-BF2A-2316C278718D}"/>
+                <a16:creationId xmlns:a16="http://schemas.microsoft.com/office/drawing/2014/main" id="{E4712813-2BEF-4B2B-BC37-68C0A6981F41}"/>
               </a:ext>
             </a:extLst>
           </p:cNvPr>
@@ -2713,7 +2713,7 @@
           <p:cNvPr id="14" name="s2-file-e">
             <a:extLst xmlns:a="http://schemas.openxmlformats.org/drawingml/2006/main">
               <a:ext uri="{FF2B5EF4-FFF2-40B4-BE49-F238E27FC236}">
-                <a16:creationId xmlns:a16="http://schemas.microsoft.com/office/drawing/2014/main" id="{B33BFD1E-4A8B-4F32-AB43-EB36FA455BA0}"/>
+                <a16:creationId xmlns:a16="http://schemas.microsoft.com/office/drawing/2014/main" id="{BFEB7E66-1CF9-4FDB-9968-95CC281021B8}"/>
               </a:ext>
             </a:extLst>
           </p:cNvPr>
@@ -2746,7 +2746,7 @@
           <p:cNvPr id="15" name="s2-file-a-label">
             <a:extLst xmlns:a="http://schemas.openxmlformats.org/drawingml/2006/main">
               <a:ext uri="{FF2B5EF4-FFF2-40B4-BE49-F238E27FC236}">
-                <a16:creationId xmlns:a16="http://schemas.microsoft.com/office/drawing/2014/main" id="{32BF2F3A-D65D-4DF4-A83D-4A0FB33B9AB6}"/>
+                <a16:creationId xmlns:a16="http://schemas.microsoft.com/office/drawing/2014/main" id="{752A3A93-5DB7-4D8A-85EB-2F85B4A37338}"/>
               </a:ext>
             </a:extLst>
           </p:cNvPr>
@@ -2791,7 +2791,7 @@
           <p:cNvPr id="16" name="s2-file-b-label">
             <a:extLst xmlns:a="http://schemas.openxmlformats.org/drawingml/2006/main">
               <a:ext uri="{FF2B5EF4-FFF2-40B4-BE49-F238E27FC236}">
-                <a16:creationId xmlns:a16="http://schemas.microsoft.com/office/drawing/2014/main" id="{4587D486-932F-4FB6-B402-137073E34186}"/>
+                <a16:creationId xmlns:a16="http://schemas.microsoft.com/office/drawing/2014/main" id="{83476026-6F86-4310-81AD-0EB70161AB73}"/>
               </a:ext>
             </a:extLst>
           </p:cNvPr>
@@ -2836,7 +2836,7 @@
           <p:cNvPr id="17" name="s2-file-c-label">
             <a:extLst xmlns:a="http://schemas.openxmlformats.org/drawingml/2006/main">
               <a:ext uri="{FF2B5EF4-FFF2-40B4-BE49-F238E27FC236}">
-                <a16:creationId xmlns:a16="http://schemas.microsoft.com/office/drawing/2014/main" id="{56E77D73-AFAD-438B-9DA9-99357F7C4419}"/>
+                <a16:creationId xmlns:a16="http://schemas.microsoft.com/office/drawing/2014/main" id="{2D5D81C8-3062-4C2F-8F52-07141AFB48DE}"/>
               </a:ext>
             </a:extLst>
           </p:cNvPr>
@@ -2881,7 +2881,7 @@
           <p:cNvPr id="18" name="s2-file-d-label">
             <a:extLst xmlns:a="http://schemas.openxmlformats.org/drawingml/2006/main">
               <a:ext uri="{FF2B5EF4-FFF2-40B4-BE49-F238E27FC236}">
-                <a16:creationId xmlns:a16="http://schemas.microsoft.com/office/drawing/2014/main" id="{F306541C-8593-40AC-A877-CC3DE563777C}"/>
+                <a16:creationId xmlns:a16="http://schemas.microsoft.com/office/drawing/2014/main" id="{688B4AE7-6A7D-433F-8FBC-CCC60779B83D}"/>
               </a:ext>
             </a:extLst>
           </p:cNvPr>
@@ -2926,7 +2926,7 @@
           <p:cNvPr id="19" name="s2-file-e-label">
             <a:extLst xmlns:a="http://schemas.openxmlformats.org/drawingml/2006/main">
               <a:ext uri="{FF2B5EF4-FFF2-40B4-BE49-F238E27FC236}">
-                <a16:creationId xmlns:a16="http://schemas.microsoft.com/office/drawing/2014/main" id="{8D3B657F-C97B-47DA-AE05-3EB3F1CD849F}"/>
+                <a16:creationId xmlns:a16="http://schemas.microsoft.com/office/drawing/2014/main" id="{B8123406-4926-4A2B-8900-6518003D50B3}"/>
               </a:ext>
             </a:extLst>
           </p:cNvPr>
@@ -2971,7 +2971,7 @@
           <p:cNvPr id="20" name="s2-n1">
             <a:extLst xmlns:a="http://schemas.openxmlformats.org/drawingml/2006/main">
               <a:ext uri="{FF2B5EF4-FFF2-40B4-BE49-F238E27FC236}">
-                <a16:creationId xmlns:a16="http://schemas.microsoft.com/office/drawing/2014/main" id="{D8FEB7E8-7602-4187-B600-F0EA3B74AE52}"/>
+                <a16:creationId xmlns:a16="http://schemas.microsoft.com/office/drawing/2014/main" id="{CF21291D-1275-49CA-B125-C708D0B07357}"/>
               </a:ext>
             </a:extLst>
           </p:cNvPr>
@@ -3004,7 +3004,7 @@
           <p:cNvPr id="21" name="s2-n1-label">
             <a:extLst xmlns:a="http://schemas.openxmlformats.org/drawingml/2006/main">
               <a:ext uri="{FF2B5EF4-FFF2-40B4-BE49-F238E27FC236}">
-                <a16:creationId xmlns:a16="http://schemas.microsoft.com/office/drawing/2014/main" id="{62768408-9234-4E1A-86BD-3089003B8B33}"/>
+                <a16:creationId xmlns:a16="http://schemas.microsoft.com/office/drawing/2014/main" id="{50212A83-479A-4F6A-902A-5B2215B7A5A7}"/>
               </a:ext>
             </a:extLst>
           </p:cNvPr>
@@ -3049,7 +3049,7 @@
           <p:cNvPr id="22" name="s2-p1">
             <a:extLst xmlns:a="http://schemas.openxmlformats.org/drawingml/2006/main">
               <a:ext uri="{FF2B5EF4-FFF2-40B4-BE49-F238E27FC236}">
-                <a16:creationId xmlns:a16="http://schemas.microsoft.com/office/drawing/2014/main" id="{F5162042-A516-4172-987A-DEC9A5623A64}"/>
+                <a16:creationId xmlns:a16="http://schemas.microsoft.com/office/drawing/2014/main" id="{8947F4D5-7B54-4AFB-B6A8-CD20E237802C}"/>
               </a:ext>
             </a:extLst>
           </p:cNvPr>
@@ -3094,7 +3094,7 @@
           <p:cNvPr id="23" name="s2-n2">
             <a:extLst xmlns:a="http://schemas.openxmlformats.org/drawingml/2006/main">
               <a:ext uri="{FF2B5EF4-FFF2-40B4-BE49-F238E27FC236}">
-                <a16:creationId xmlns:a16="http://schemas.microsoft.com/office/drawing/2014/main" id="{B4BD2993-05F2-4960-93EC-545FE3A79B48}"/>
+                <a16:creationId xmlns:a16="http://schemas.microsoft.com/office/drawing/2014/main" id="{1D5C127C-79CE-408F-B566-7FF99AC94476}"/>
               </a:ext>
             </a:extLst>
           </p:cNvPr>
@@ -3127,7 +3127,7 @@
           <p:cNvPr id="24" name="s2-n2-label">
             <a:extLst xmlns:a="http://schemas.openxmlformats.org/drawingml/2006/main">
               <a:ext uri="{FF2B5EF4-FFF2-40B4-BE49-F238E27FC236}">
-                <a16:creationId xmlns:a16="http://schemas.microsoft.com/office/drawing/2014/main" id="{758B1B5C-4A3A-4E43-9223-B0F64104B272}"/>
+                <a16:creationId xmlns:a16="http://schemas.microsoft.com/office/drawing/2014/main" id="{8EF3DFF5-43D6-4951-A2FB-FB5480C72702}"/>
               </a:ext>
             </a:extLst>
           </p:cNvPr>
@@ -3172,7 +3172,7 @@
           <p:cNvPr id="25" name="s2-p2">
             <a:extLst xmlns:a="http://schemas.openxmlformats.org/drawingml/2006/main">
               <a:ext uri="{FF2B5EF4-FFF2-40B4-BE49-F238E27FC236}">
-                <a16:creationId xmlns:a16="http://schemas.microsoft.com/office/drawing/2014/main" id="{216F0699-0303-427C-A104-396B5BFAEB4D}"/>
+                <a16:creationId xmlns:a16="http://schemas.microsoft.com/office/drawing/2014/main" id="{B0EEB293-3063-4266-9D21-B260197D1B69}"/>
               </a:ext>
             </a:extLst>
           </p:cNvPr>
@@ -3217,7 +3217,7 @@
           <p:cNvPr id="26" name="s2-n3">
             <a:extLst xmlns:a="http://schemas.openxmlformats.org/drawingml/2006/main">
               <a:ext uri="{FF2B5EF4-FFF2-40B4-BE49-F238E27FC236}">
-                <a16:creationId xmlns:a16="http://schemas.microsoft.com/office/drawing/2014/main" id="{953A21F2-A6AD-4166-9B57-9F79639EE525}"/>
+                <a16:creationId xmlns:a16="http://schemas.microsoft.com/office/drawing/2014/main" id="{8807360B-1D31-4C4D-9D60-50F655519668}"/>
               </a:ext>
             </a:extLst>
           </p:cNvPr>
@@ -3250,7 +3250,7 @@
           <p:cNvPr id="27" name="s2-n3-label">
             <a:extLst xmlns:a="http://schemas.openxmlformats.org/drawingml/2006/main">
               <a:ext uri="{FF2B5EF4-FFF2-40B4-BE49-F238E27FC236}">
-                <a16:creationId xmlns:a16="http://schemas.microsoft.com/office/drawing/2014/main" id="{67E3757C-7BC9-473D-BD3D-0A16007A14C9}"/>
+                <a16:creationId xmlns:a16="http://schemas.microsoft.com/office/drawing/2014/main" id="{ECF7D8E2-753B-4544-8C14-A25F659CFCC2}"/>
               </a:ext>
             </a:extLst>
           </p:cNvPr>
@@ -3295,7 +3295,7 @@
           <p:cNvPr id="28" name="s2-p3">
             <a:extLst xmlns:a="http://schemas.openxmlformats.org/drawingml/2006/main">
               <a:ext uri="{FF2B5EF4-FFF2-40B4-BE49-F238E27FC236}">
-                <a16:creationId xmlns:a16="http://schemas.microsoft.com/office/drawing/2014/main" id="{769800D5-994F-4BB1-AD39-635972011F2D}"/>
+                <a16:creationId xmlns:a16="http://schemas.microsoft.com/office/drawing/2014/main" id="{F53A45E9-915F-4D65-9CE0-DA52330C9231}"/>
               </a:ext>
             </a:extLst>
           </p:cNvPr>
@@ -3340,7 +3340,7 @@
           <p:cNvPr id="29" name="s2-takeaway">
             <a:extLst xmlns:a="http://schemas.openxmlformats.org/drawingml/2006/main">
               <a:ext uri="{FF2B5EF4-FFF2-40B4-BE49-F238E27FC236}">
-                <a16:creationId xmlns:a16="http://schemas.microsoft.com/office/drawing/2014/main" id="{F96DB957-1493-4D0D-8297-7670DA2B63B2}"/>
+                <a16:creationId xmlns:a16="http://schemas.microsoft.com/office/drawing/2014/main" id="{68D5A9DF-DEAC-4378-A635-97BF67A0A3F3}"/>
               </a:ext>
             </a:extLst>
           </p:cNvPr>
@@ -3407,7 +3407,7 @@
           <p:cNvPr id="31" name="footer-source-2">
             <a:extLst xmlns:a="http://schemas.openxmlformats.org/drawingml/2006/main">
               <a:ext uri="{FF2B5EF4-FFF2-40B4-BE49-F238E27FC236}">
-                <a16:creationId xmlns:a16="http://schemas.microsoft.com/office/drawing/2014/main" id="{73CFBAD0-5848-46F1-AA68-4BF1E8A140F0}"/>
+                <a16:creationId xmlns:a16="http://schemas.microsoft.com/office/drawing/2014/main" id="{B57DC3D6-4F55-4D36-B1EE-B3FD2A699B9D}"/>
               </a:ext>
             </a:extLst>
           </p:cNvPr>
@@ -3452,7 +3452,7 @@
           <p:cNvPr id="32" name="footer-number-2">
             <a:extLst xmlns:a="http://schemas.openxmlformats.org/drawingml/2006/main">
               <a:ext uri="{FF2B5EF4-FFF2-40B4-BE49-F238E27FC236}">
-                <a16:creationId xmlns:a16="http://schemas.microsoft.com/office/drawing/2014/main" id="{C40432CF-26AF-4DE0-B190-F8AE9AB03723}"/>
+                <a16:creationId xmlns:a16="http://schemas.microsoft.com/office/drawing/2014/main" id="{16D6A9C6-293C-4E0A-B71D-1A73C2AB6736}"/>
               </a:ext>
             </a:extLst>
           </p:cNvPr>
@@ -3495,7 +3495,7 @@
     </p:spTree>
     <p:extLst>
       <p:ext uri="{BB962C8B-B14F-4D97-AF65-F5344CB8AC3E}">
-        <p14:creationId xmlns:p14="http://schemas.microsoft.com/office/powerpoint/2010/main" val="1442236352"/>
+        <p14:creationId xmlns:p14="http://schemas.microsoft.com/office/powerpoint/2010/main" val="1608650757"/>
       </p:ext>
     </p:extLst>
   </p:cSld>
@@ -3523,10 +3523,10 @@
       </p:grpSpPr>
       <p:sp>
         <p:nvSpPr>
-          <p:cNvPr id="29" name="s3-title">
-            <a:extLst xmlns:a="http://schemas.openxmlformats.org/drawingml/2006/main">
-              <a:ext uri="{FF2B5EF4-FFF2-40B4-BE49-F238E27FC236}">
-                <a16:creationId xmlns:a16="http://schemas.microsoft.com/office/drawing/2014/main" id="{E27733F7-45C4-4741-BECA-AB6F8949F354}"/>
+          <p:cNvPr id="38" name="s3-title">
+            <a:extLst xmlns:a="http://schemas.openxmlformats.org/drawingml/2006/main">
+              <a:ext uri="{FF2B5EF4-FFF2-40B4-BE49-F238E27FC236}">
+                <a16:creationId xmlns:a16="http://schemas.microsoft.com/office/drawing/2014/main" id="{D1D4BB7D-6882-4D9D-8940-3BC3CE7586C1}"/>
               </a:ext>
             </a:extLst>
           </p:cNvPr>
@@ -3561,7 +3561,7 @@
               </a:defRPr>
             </a:pPr>
             <a:r>
-              <a:t>I wanted to turn a 2D repository into a 3D building.</a:t>
+              <a:t>The 3D building gives every context item an address.</a:t>
             </a:r>
           </a:p>
         </p:txBody>
@@ -3571,7 +3571,7 @@
           <p:cNvPr id="2" name="s3-subtitle">
             <a:extLst xmlns:a="http://schemas.openxmlformats.org/drawingml/2006/main">
               <a:ext uri="{FF2B5EF4-FFF2-40B4-BE49-F238E27FC236}">
-                <a16:creationId xmlns:a16="http://schemas.microsoft.com/office/drawing/2014/main" id="{D8B89513-F66C-4268-806F-44E2DF33041A}"/>
+                <a16:creationId xmlns:a16="http://schemas.microsoft.com/office/drawing/2014/main" id="{7BF1BF28-A736-4B07-9CE0-DA6C052B85EB}"/>
               </a:ext>
             </a:extLst>
           </p:cNvPr>
@@ -3606,882 +3606,21 @@
               </a:defRPr>
             </a:pPr>
             <a:r>
-              <a:t>Domains became floors. Features became rooms. Files and symbols became cabinets and drawers.</a:t>
+              <a:t>X locates the domain. Y selects the architectural floor. Z controls inspection depth.</a:t>
             </a:r>
           </a:p>
         </p:txBody>
       </p:sp>
       <p:cxnSp>
         <p:nvCxnSpPr>
-          <p:cNvPr id="31" name="s3-c1"/>
+          <p:cNvPr id="40" name="s3-rule-x"/>
           <p:cNvCxnSpPr/>
           <p:nvPr/>
         </p:nvCxnSpPr>
         <p:spPr>
           <a:xfrm xmlns:a="http://schemas.openxmlformats.org/drawingml/2006/main">
-            <a:off x="2209800" y="2933700"/>
-            <a:ext cx="762000" cy="953"/>
-          </a:xfrm>
-          <a:prstGeom xmlns:a="http://schemas.openxmlformats.org/drawingml/2006/main" prst="straightConnector1">
-            <a:avLst/>
-          </a:prstGeom>
-          <a:ln xmlns:a="http://schemas.openxmlformats.org/drawingml/2006/main" w="28575">
-            <a:solidFill>
-              <a:srgbClr val="13B7D5"/>
-            </a:solidFill>
-            <a:prstDash val="solid"/>
-          </a:ln>
-        </p:spPr>
-      </p:cxnSp>
-      <p:cxnSp>
-        <p:nvCxnSpPr>
-          <p:cNvPr id="32" name="s3-c2"/>
-          <p:cNvCxnSpPr/>
-          <p:nvPr/>
-        </p:nvCxnSpPr>
-        <p:spPr>
-          <a:xfrm xmlns:a="http://schemas.openxmlformats.org/drawingml/2006/main">
-            <a:off x="4400550" y="2933700"/>
-            <a:ext cx="762000" cy="953"/>
-          </a:xfrm>
-          <a:prstGeom xmlns:a="http://schemas.openxmlformats.org/drawingml/2006/main" prst="straightConnector1">
-            <a:avLst/>
-          </a:prstGeom>
-          <a:ln xmlns:a="http://schemas.openxmlformats.org/drawingml/2006/main" w="28575">
-            <a:solidFill>
-              <a:srgbClr val="1677FF"/>
-            </a:solidFill>
-            <a:prstDash val="solid"/>
-          </a:ln>
-        </p:spPr>
-      </p:cxnSp>
-      <p:cxnSp>
-        <p:nvCxnSpPr>
-          <p:cNvPr id="33" name="s3-c3"/>
-          <p:cNvCxnSpPr/>
-          <p:nvPr/>
-        </p:nvCxnSpPr>
-        <p:spPr>
-          <a:xfrm xmlns:a="http://schemas.openxmlformats.org/drawingml/2006/main">
-            <a:off x="6591300" y="2933700"/>
-            <a:ext cx="762000" cy="953"/>
-          </a:xfrm>
-          <a:prstGeom xmlns:a="http://schemas.openxmlformats.org/drawingml/2006/main" prst="straightConnector1">
-            <a:avLst/>
-          </a:prstGeom>
-          <a:ln xmlns:a="http://schemas.openxmlformats.org/drawingml/2006/main" w="28575">
-            <a:solidFill>
-              <a:srgbClr val="7438F5"/>
-            </a:solidFill>
-            <a:prstDash val="solid"/>
-          </a:ln>
-        </p:spPr>
-      </p:cxnSp>
-      <p:cxnSp>
-        <p:nvCxnSpPr>
-          <p:cNvPr id="34" name="s3-c4"/>
-          <p:cNvCxnSpPr/>
-          <p:nvPr/>
-        </p:nvCxnSpPr>
-        <p:spPr>
-          <a:xfrm xmlns:a="http://schemas.openxmlformats.org/drawingml/2006/main">
-            <a:off x="8782050" y="2933700"/>
-            <a:ext cx="762000" cy="953"/>
-          </a:xfrm>
-          <a:prstGeom xmlns:a="http://schemas.openxmlformats.org/drawingml/2006/main" prst="straightConnector1">
-            <a:avLst/>
-          </a:prstGeom>
-          <a:ln xmlns:a="http://schemas.openxmlformats.org/drawingml/2006/main" w="28575">
-            <a:solidFill>
-              <a:srgbClr val="15A777"/>
-            </a:solidFill>
-            <a:prstDash val="solid"/>
-          </a:ln>
-        </p:spPr>
-      </p:cxnSp>
-      <p:cxnSp>
-        <p:nvCxnSpPr>
-          <p:cNvPr id="35" name="s3-memory-link"/>
-          <p:cNvCxnSpPr/>
-          <p:nvPr/>
-        </p:nvCxnSpPr>
-        <p:spPr>
-          <a:xfrm xmlns:a="http://schemas.openxmlformats.org/drawingml/2006/main">
-            <a:off x="7848600" y="3752850"/>
-            <a:ext cx="2381250" cy="838200"/>
-          </a:xfrm>
-          <a:prstGeom xmlns:a="http://schemas.openxmlformats.org/drawingml/2006/main" prst="straightConnector1">
-            <a:avLst/>
-          </a:prstGeom>
-          <a:ln xmlns:a="http://schemas.openxmlformats.org/drawingml/2006/main" w="19050">
-            <a:solidFill>
-              <a:srgbClr val="B8BCC4"/>
-            </a:solidFill>
-            <a:prstDash val="solid"/>
-          </a:ln>
-        </p:spPr>
-      </p:cxnSp>
-      <p:sp>
-        <p:nvSpPr>
-          <p:cNvPr id="8" name="s3-repo">
-            <a:extLst xmlns:a="http://schemas.openxmlformats.org/drawingml/2006/main">
-              <a:ext uri="{FF2B5EF4-FFF2-40B4-BE49-F238E27FC236}">
-                <a16:creationId xmlns:a16="http://schemas.microsoft.com/office/drawing/2014/main" id="{F84B093C-FEA3-4914-8E41-2D9A530BAA25}"/>
-              </a:ext>
-            </a:extLst>
-          </p:cNvPr>
-          <p:cNvSpPr>
-            <a:spLocks xmlns:a="http://schemas.openxmlformats.org/drawingml/2006/main" noGrp="1"/>
-          </p:cNvSpPr>
-          <p:nvPr/>
-        </p:nvSpPr>
-        <p:spPr>
-          <a:xfrm xmlns:a="http://schemas.openxmlformats.org/drawingml/2006/main">
-            <a:off x="590550" y="2143125"/>
-            <a:ext cx="1619250" cy="1600200"/>
-          </a:xfrm>
-          <a:prstGeom xmlns:a="http://schemas.openxmlformats.org/drawingml/2006/main" prst="roundRect">
-            <a:avLst>
-              <a:gd name="adj" fmla="val 4762"/>
-            </a:avLst>
-          </a:prstGeom>
-          <a:solidFill xmlns:a="http://schemas.openxmlformats.org/drawingml/2006/main">
-            <a:srgbClr val="EDEFF3"/>
-          </a:solidFill>
-          <a:ln xmlns:a="http://schemas.openxmlformats.org/drawingml/2006/main" w="0">
-            <a:solidFill>
-              <a:srgbClr val="EDEFF3"/>
-            </a:solidFill>
-            <a:prstDash val="solid"/>
-          </a:ln>
-        </p:spPr>
-      </p:sp>
-      <p:sp>
-        <p:nvSpPr>
-          <p:cNvPr id="9" name="s3-index">
-            <a:extLst xmlns:a="http://schemas.openxmlformats.org/drawingml/2006/main">
-              <a:ext uri="{FF2B5EF4-FFF2-40B4-BE49-F238E27FC236}">
-                <a16:creationId xmlns:a16="http://schemas.microsoft.com/office/drawing/2014/main" id="{89846913-9258-41E6-A885-56F6F473227D}"/>
-              </a:ext>
-            </a:extLst>
-          </p:cNvPr>
-          <p:cNvSpPr>
-            <a:spLocks xmlns:a="http://schemas.openxmlformats.org/drawingml/2006/main" noGrp="1"/>
-          </p:cNvSpPr>
-          <p:nvPr/>
-        </p:nvSpPr>
-        <p:spPr>
-          <a:xfrm xmlns:a="http://schemas.openxmlformats.org/drawingml/2006/main">
-            <a:off x="2971800" y="2143125"/>
-            <a:ext cx="1428750" cy="1600200"/>
-          </a:xfrm>
-          <a:prstGeom xmlns:a="http://schemas.openxmlformats.org/drawingml/2006/main" prst="roundRect">
-            <a:avLst>
-              <a:gd name="adj" fmla="val 5333"/>
-            </a:avLst>
-          </a:prstGeom>
-          <a:solidFill xmlns:a="http://schemas.openxmlformats.org/drawingml/2006/main">
-            <a:srgbClr val="E8F7FB"/>
-          </a:solidFill>
-          <a:ln xmlns:a="http://schemas.openxmlformats.org/drawingml/2006/main" w="0">
-            <a:solidFill>
-              <a:srgbClr val="E8F7FB"/>
-            </a:solidFill>
-            <a:prstDash val="solid"/>
-          </a:ln>
-        </p:spPr>
-      </p:sp>
-      <p:sp>
-        <p:nvSpPr>
-          <p:cNvPr id="10" name="s3-mode">
-            <a:extLst xmlns:a="http://schemas.openxmlformats.org/drawingml/2006/main">
-              <a:ext uri="{FF2B5EF4-FFF2-40B4-BE49-F238E27FC236}">
-                <a16:creationId xmlns:a16="http://schemas.microsoft.com/office/drawing/2014/main" id="{C55F47EA-5C65-456D-B485-4D330B21B66C}"/>
-              </a:ext>
-            </a:extLst>
-          </p:cNvPr>
-          <p:cNvSpPr>
-            <a:spLocks xmlns:a="http://schemas.openxmlformats.org/drawingml/2006/main" noGrp="1"/>
-          </p:cNvSpPr>
-          <p:nvPr/>
-        </p:nvSpPr>
-        <p:spPr>
-          <a:xfrm xmlns:a="http://schemas.openxmlformats.org/drawingml/2006/main">
-            <a:off x="5162550" y="2143125"/>
-            <a:ext cx="1428750" cy="1600200"/>
-          </a:xfrm>
-          <a:prstGeom xmlns:a="http://schemas.openxmlformats.org/drawingml/2006/main" prst="roundRect">
-            <a:avLst>
-              <a:gd name="adj" fmla="val 5333"/>
-            </a:avLst>
-          </a:prstGeom>
-          <a:solidFill xmlns:a="http://schemas.openxmlformats.org/drawingml/2006/main">
-            <a:srgbClr val="EAF1FF"/>
-          </a:solidFill>
-          <a:ln xmlns:a="http://schemas.openxmlformats.org/drawingml/2006/main" w="0">
-            <a:solidFill>
-              <a:srgbClr val="EAF1FF"/>
-            </a:solidFill>
-            <a:prstDash val="solid"/>
-          </a:ln>
-        </p:spPr>
-      </p:sp>
-      <p:sp>
-        <p:nvSpPr>
-          <p:cNvPr id="11" name="s3-pack">
-            <a:extLst xmlns:a="http://schemas.openxmlformats.org/drawingml/2006/main">
-              <a:ext uri="{FF2B5EF4-FFF2-40B4-BE49-F238E27FC236}">
-                <a16:creationId xmlns:a16="http://schemas.microsoft.com/office/drawing/2014/main" id="{253B49D7-D4B8-44CF-8038-1EC8F11B9418}"/>
-              </a:ext>
-            </a:extLst>
-          </p:cNvPr>
-          <p:cNvSpPr>
-            <a:spLocks xmlns:a="http://schemas.openxmlformats.org/drawingml/2006/main" noGrp="1"/>
-          </p:cNvSpPr>
-          <p:nvPr/>
-        </p:nvSpPr>
-        <p:spPr>
-          <a:xfrm xmlns:a="http://schemas.openxmlformats.org/drawingml/2006/main">
-            <a:off x="7353300" y="2143125"/>
-            <a:ext cx="1428750" cy="1600200"/>
-          </a:xfrm>
-          <a:prstGeom xmlns:a="http://schemas.openxmlformats.org/drawingml/2006/main" prst="roundRect">
-            <a:avLst>
-              <a:gd name="adj" fmla="val 5333"/>
-            </a:avLst>
-          </a:prstGeom>
-          <a:solidFill xmlns:a="http://schemas.openxmlformats.org/drawingml/2006/main">
-            <a:srgbClr val="F1EBFF"/>
-          </a:solidFill>
-          <a:ln xmlns:a="http://schemas.openxmlformats.org/drawingml/2006/main" w="0">
-            <a:solidFill>
-              <a:srgbClr val="F1EBFF"/>
-            </a:solidFill>
-            <a:prstDash val="solid"/>
-          </a:ln>
-        </p:spPr>
-      </p:sp>
-      <p:sp>
-        <p:nvSpPr>
-          <p:cNvPr id="12" name="s3-task">
-            <a:extLst xmlns:a="http://schemas.openxmlformats.org/drawingml/2006/main">
-              <a:ext uri="{FF2B5EF4-FFF2-40B4-BE49-F238E27FC236}">
-                <a16:creationId xmlns:a16="http://schemas.microsoft.com/office/drawing/2014/main" id="{8D16ACD7-C8C3-4977-8C92-5CC73FFE564B}"/>
-              </a:ext>
-            </a:extLst>
-          </p:cNvPr>
-          <p:cNvSpPr>
-            <a:spLocks xmlns:a="http://schemas.openxmlformats.org/drawingml/2006/main" noGrp="1"/>
-          </p:cNvSpPr>
-          <p:nvPr/>
-        </p:nvSpPr>
-        <p:spPr>
-          <a:xfrm xmlns:a="http://schemas.openxmlformats.org/drawingml/2006/main">
-            <a:off x="9544050" y="2143125"/>
-            <a:ext cx="1809750" cy="1600200"/>
-          </a:xfrm>
-          <a:prstGeom xmlns:a="http://schemas.openxmlformats.org/drawingml/2006/main" prst="roundRect">
-            <a:avLst>
-              <a:gd name="adj" fmla="val 4762"/>
-            </a:avLst>
-          </a:prstGeom>
-          <a:solidFill xmlns:a="http://schemas.openxmlformats.org/drawingml/2006/main">
-            <a:srgbClr val="E9F7F2"/>
-          </a:solidFill>
-          <a:ln xmlns:a="http://schemas.openxmlformats.org/drawingml/2006/main" w="0">
-            <a:solidFill>
-              <a:srgbClr val="E9F7F2"/>
-            </a:solidFill>
-            <a:prstDash val="solid"/>
-          </a:ln>
-        </p:spPr>
-      </p:sp>
-      <p:sp>
-        <p:nvSpPr>
-          <p:cNvPr id="13" name="s3-repo-label">
-            <a:extLst xmlns:a="http://schemas.openxmlformats.org/drawingml/2006/main">
-              <a:ext uri="{FF2B5EF4-FFF2-40B4-BE49-F238E27FC236}">
-                <a16:creationId xmlns:a16="http://schemas.microsoft.com/office/drawing/2014/main" id="{DE66DED8-C4E0-495F-9EA6-E16BAEC49390}"/>
-              </a:ext>
-            </a:extLst>
-          </p:cNvPr>
-          <p:cNvSpPr>
-            <a:spLocks xmlns:a="http://schemas.openxmlformats.org/drawingml/2006/main" noGrp="1"/>
-          </p:cNvSpPr>
-          <p:nvPr/>
-        </p:nvSpPr>
-        <p:spPr>
-          <a:xfrm xmlns:a="http://schemas.openxmlformats.org/drawingml/2006/main">
-            <a:off x="666750" y="2447925"/>
-            <a:ext cx="1466850" cy="285750"/>
-          </a:xfrm>
-          <a:prstGeom xmlns:a="http://schemas.openxmlformats.org/drawingml/2006/main" prst="rect">
-            <a:avLst/>
-          </a:prstGeom>
-        </p:spPr>
-        <p:txBody>
-          <a:bodyPr xmlns:a="http://schemas.openxmlformats.org/drawingml/2006/main" wrap="square" lIns="0" tIns="0" rIns="0" bIns="0" anchor="t">
-            <a:noAutofit/>
-          </a:bodyPr>
-          <a:lstStyle xmlns:a="http://schemas.openxmlformats.org/drawingml/2006/main"/>
-          <a:p xmlns:a="http://schemas.openxmlformats.org/drawingml/2006/main">
-            <a:pPr algn="ctr">
-              <a:defRPr sz="1200" b="1">
-                <a:solidFill>
-                  <a:srgbClr val="526071"/>
-                </a:solidFill>
-                <a:latin typeface="Arial"/>
-                <a:ea typeface="Arial"/>
-                <a:cs typeface="Arial"/>
-              </a:defRPr>
-            </a:pPr>
-            <a:r>
-              <a:t>2D REPOSITORY</a:t>
-            </a:r>
-          </a:p>
-        </p:txBody>
-      </p:sp>
-      <p:sp>
-        <p:nvSpPr>
-          <p:cNvPr id="14" name="s3-repo-main">
-            <a:extLst xmlns:a="http://schemas.openxmlformats.org/drawingml/2006/main">
-              <a:ext uri="{FF2B5EF4-FFF2-40B4-BE49-F238E27FC236}">
-                <a16:creationId xmlns:a16="http://schemas.microsoft.com/office/drawing/2014/main" id="{68158F59-AA4A-4B63-BB04-EEB6328FF700}"/>
-              </a:ext>
-            </a:extLst>
-          </p:cNvPr>
-          <p:cNvSpPr>
-            <a:spLocks xmlns:a="http://schemas.openxmlformats.org/drawingml/2006/main" noGrp="1"/>
-          </p:cNvSpPr>
-          <p:nvPr/>
-        </p:nvSpPr>
-        <p:spPr>
-          <a:xfrm xmlns:a="http://schemas.openxmlformats.org/drawingml/2006/main">
-            <a:off x="723900" y="2943225"/>
-            <a:ext cx="1352550" cy="457200"/>
-          </a:xfrm>
-          <a:prstGeom xmlns:a="http://schemas.openxmlformats.org/drawingml/2006/main" prst="rect">
-            <a:avLst/>
-          </a:prstGeom>
-        </p:spPr>
-        <p:txBody>
-          <a:bodyPr xmlns:a="http://schemas.openxmlformats.org/drawingml/2006/main" wrap="square" lIns="0" tIns="0" rIns="0" bIns="0" anchor="t">
-            <a:noAutofit/>
-          </a:bodyPr>
-          <a:lstStyle xmlns:a="http://schemas.openxmlformats.org/drawingml/2006/main"/>
-          <a:p xmlns:a="http://schemas.openxmlformats.org/drawingml/2006/main">
-            <a:pPr algn="ctr">
-              <a:defRPr sz="1725" b="1">
-                <a:solidFill>
-                  <a:srgbClr val="0A1224"/>
-                </a:solidFill>
-                <a:latin typeface="Arial"/>
-                <a:ea typeface="Arial"/>
-                <a:cs typeface="Arial"/>
-              </a:defRPr>
-            </a:pPr>
-            <a:r>
-              <a:t>Files + symbols</a:t>
-            </a:r>
-          </a:p>
-        </p:txBody>
-      </p:sp>
-      <p:sp>
-        <p:nvSpPr>
-          <p:cNvPr id="15" name="s3-index-label">
-            <a:extLst xmlns:a="http://schemas.openxmlformats.org/drawingml/2006/main">
-              <a:ext uri="{FF2B5EF4-FFF2-40B4-BE49-F238E27FC236}">
-                <a16:creationId xmlns:a16="http://schemas.microsoft.com/office/drawing/2014/main" id="{61C61F4D-AB50-4C8A-A245-D365FFB10584}"/>
-              </a:ext>
-            </a:extLst>
-          </p:cNvPr>
-          <p:cNvSpPr>
-            <a:spLocks xmlns:a="http://schemas.openxmlformats.org/drawingml/2006/main" noGrp="1"/>
-          </p:cNvSpPr>
-          <p:nvPr/>
-        </p:nvSpPr>
-        <p:spPr>
-          <a:xfrm xmlns:a="http://schemas.openxmlformats.org/drawingml/2006/main">
-            <a:off x="3143250" y="2447925"/>
-            <a:ext cx="1085850" cy="285750"/>
-          </a:xfrm>
-          <a:prstGeom xmlns:a="http://schemas.openxmlformats.org/drawingml/2006/main" prst="rect">
-            <a:avLst/>
-          </a:prstGeom>
-        </p:spPr>
-        <p:txBody>
-          <a:bodyPr xmlns:a="http://schemas.openxmlformats.org/drawingml/2006/main" wrap="square" lIns="0" tIns="0" rIns="0" bIns="0" anchor="t">
-            <a:noAutofit/>
-          </a:bodyPr>
-          <a:lstStyle xmlns:a="http://schemas.openxmlformats.org/drawingml/2006/main"/>
-          <a:p xmlns:a="http://schemas.openxmlformats.org/drawingml/2006/main">
-            <a:pPr algn="ctr">
-              <a:defRPr sz="1275" b="1">
-                <a:solidFill>
-                  <a:srgbClr val="13B7D5"/>
-                </a:solidFill>
-                <a:latin typeface="Arial"/>
-                <a:ea typeface="Arial"/>
-                <a:cs typeface="Arial"/>
-              </a:defRPr>
-            </a:pPr>
-            <a:r>
-              <a:t>3D MAP</a:t>
-            </a:r>
-          </a:p>
-        </p:txBody>
-      </p:sp>
-      <p:sp>
-        <p:nvSpPr>
-          <p:cNvPr id="16" name="s3-index-main">
-            <a:extLst xmlns:a="http://schemas.openxmlformats.org/drawingml/2006/main">
-              <a:ext uri="{FF2B5EF4-FFF2-40B4-BE49-F238E27FC236}">
-                <a16:creationId xmlns:a16="http://schemas.microsoft.com/office/drawing/2014/main" id="{80ED80A2-8106-4FBE-B141-772AB77F4A5D}"/>
-              </a:ext>
-            </a:extLst>
-          </p:cNvPr>
-          <p:cNvSpPr>
-            <a:spLocks xmlns:a="http://schemas.openxmlformats.org/drawingml/2006/main" noGrp="1"/>
-          </p:cNvSpPr>
-          <p:nvPr/>
-        </p:nvSpPr>
-        <p:spPr>
-          <a:xfrm xmlns:a="http://schemas.openxmlformats.org/drawingml/2006/main">
-            <a:off x="3105150" y="2943225"/>
-            <a:ext cx="1162050" cy="457200"/>
-          </a:xfrm>
-          <a:prstGeom xmlns:a="http://schemas.openxmlformats.org/drawingml/2006/main" prst="rect">
-            <a:avLst/>
-          </a:prstGeom>
-        </p:spPr>
-        <p:txBody>
-          <a:bodyPr xmlns:a="http://schemas.openxmlformats.org/drawingml/2006/main" wrap="square" lIns="0" tIns="0" rIns="0" bIns="0" anchor="t">
-            <a:noAutofit/>
-          </a:bodyPr>
-          <a:lstStyle xmlns:a="http://schemas.openxmlformats.org/drawingml/2006/main"/>
-          <a:p xmlns:a="http://schemas.openxmlformats.org/drawingml/2006/main">
-            <a:pPr algn="ctr">
-              <a:defRPr sz="1725" b="1">
-                <a:solidFill>
-                  <a:srgbClr val="0A1224"/>
-                </a:solidFill>
-                <a:latin typeface="Arial"/>
-                <a:ea typeface="Arial"/>
-                <a:cs typeface="Arial"/>
-              </a:defRPr>
-            </a:pPr>
-            <a:r>
-              <a:t>Floors + rooms</a:t>
-            </a:r>
-          </a:p>
-        </p:txBody>
-      </p:sp>
-      <p:sp>
-        <p:nvSpPr>
-          <p:cNvPr id="17" name="s3-mode-label">
-            <a:extLst xmlns:a="http://schemas.openxmlformats.org/drawingml/2006/main">
-              <a:ext uri="{FF2B5EF4-FFF2-40B4-BE49-F238E27FC236}">
-                <a16:creationId xmlns:a16="http://schemas.microsoft.com/office/drawing/2014/main" id="{50EC9758-2A1F-4CCC-AFCC-3FE14473EB71}"/>
-              </a:ext>
-            </a:extLst>
-          </p:cNvPr>
-          <p:cNvSpPr>
-            <a:spLocks xmlns:a="http://schemas.openxmlformats.org/drawingml/2006/main" noGrp="1"/>
-          </p:cNvSpPr>
-          <p:nvPr/>
-        </p:nvSpPr>
-        <p:spPr>
-          <a:xfrm xmlns:a="http://schemas.openxmlformats.org/drawingml/2006/main">
-            <a:off x="5334000" y="2447925"/>
-            <a:ext cx="1085850" cy="285750"/>
-          </a:xfrm>
-          <a:prstGeom xmlns:a="http://schemas.openxmlformats.org/drawingml/2006/main" prst="rect">
-            <a:avLst/>
-          </a:prstGeom>
-        </p:spPr>
-        <p:txBody>
-          <a:bodyPr xmlns:a="http://schemas.openxmlformats.org/drawingml/2006/main" wrap="square" lIns="0" tIns="0" rIns="0" bIns="0" anchor="t">
-            <a:noAutofit/>
-          </a:bodyPr>
-          <a:lstStyle xmlns:a="http://schemas.openxmlformats.org/drawingml/2006/main"/>
-          <a:p xmlns:a="http://schemas.openxmlformats.org/drawingml/2006/main">
-            <a:pPr algn="ctr">
-              <a:defRPr sz="1275" b="1">
-                <a:solidFill>
-                  <a:srgbClr val="1677FF"/>
-                </a:solidFill>
-                <a:latin typeface="Arial"/>
-                <a:ea typeface="Arial"/>
-                <a:cs typeface="Arial"/>
-              </a:defRPr>
-            </a:pPr>
-            <a:r>
-              <a:t>ADAPT</a:t>
-            </a:r>
-          </a:p>
-        </p:txBody>
-      </p:sp>
-      <p:sp>
-        <p:nvSpPr>
-          <p:cNvPr id="18" name="s3-mode-main">
-            <a:extLst xmlns:a="http://schemas.openxmlformats.org/drawingml/2006/main">
-              <a:ext uri="{FF2B5EF4-FFF2-40B4-BE49-F238E27FC236}">
-                <a16:creationId xmlns:a16="http://schemas.microsoft.com/office/drawing/2014/main" id="{1141A154-71D2-4D75-BBBC-811FF386FA02}"/>
-              </a:ext>
-            </a:extLst>
-          </p:cNvPr>
-          <p:cNvSpPr>
-            <a:spLocks xmlns:a="http://schemas.openxmlformats.org/drawingml/2006/main" noGrp="1"/>
-          </p:cNvSpPr>
-          <p:nvPr/>
-        </p:nvSpPr>
-        <p:spPr>
-          <a:xfrm xmlns:a="http://schemas.openxmlformats.org/drawingml/2006/main">
-            <a:off x="5295900" y="2943225"/>
-            <a:ext cx="1162050" cy="457200"/>
-          </a:xfrm>
-          <a:prstGeom xmlns:a="http://schemas.openxmlformats.org/drawingml/2006/main" prst="rect">
-            <a:avLst/>
-          </a:prstGeom>
-        </p:spPr>
-        <p:txBody>
-          <a:bodyPr xmlns:a="http://schemas.openxmlformats.org/drawingml/2006/main" wrap="square" lIns="0" tIns="0" rIns="0" bIns="0" anchor="t">
-            <a:noAutofit/>
-          </a:bodyPr>
-          <a:lstStyle xmlns:a="http://schemas.openxmlformats.org/drawingml/2006/main"/>
-          <a:p xmlns:a="http://schemas.openxmlformats.org/drawingml/2006/main">
-            <a:pPr algn="ctr">
-              <a:defRPr sz="1725" b="1">
-                <a:solidFill>
-                  <a:srgbClr val="0A1224"/>
-                </a:solidFill>
-                <a:latin typeface="Arial"/>
-                <a:ea typeface="Arial"/>
-                <a:cs typeface="Arial"/>
-              </a:defRPr>
-            </a:pPr>
-            <a:r>
-              <a:t>Choose mode</a:t>
-            </a:r>
-          </a:p>
-        </p:txBody>
-      </p:sp>
-      <p:sp>
-        <p:nvSpPr>
-          <p:cNvPr id="19" name="s3-pack-label">
-            <a:extLst xmlns:a="http://schemas.openxmlformats.org/drawingml/2006/main">
-              <a:ext uri="{FF2B5EF4-FFF2-40B4-BE49-F238E27FC236}">
-                <a16:creationId xmlns:a16="http://schemas.microsoft.com/office/drawing/2014/main" id="{CC3A3F32-7EEA-4FEA-ABB0-35FC9A1F0B23}"/>
-              </a:ext>
-            </a:extLst>
-          </p:cNvPr>
-          <p:cNvSpPr>
-            <a:spLocks xmlns:a="http://schemas.openxmlformats.org/drawingml/2006/main" noGrp="1"/>
-          </p:cNvSpPr>
-          <p:nvPr/>
-        </p:nvSpPr>
-        <p:spPr>
-          <a:xfrm xmlns:a="http://schemas.openxmlformats.org/drawingml/2006/main">
-            <a:off x="7524750" y="2447925"/>
-            <a:ext cx="1085850" cy="285750"/>
-          </a:xfrm>
-          <a:prstGeom xmlns:a="http://schemas.openxmlformats.org/drawingml/2006/main" prst="rect">
-            <a:avLst/>
-          </a:prstGeom>
-        </p:spPr>
-        <p:txBody>
-          <a:bodyPr xmlns:a="http://schemas.openxmlformats.org/drawingml/2006/main" wrap="square" lIns="0" tIns="0" rIns="0" bIns="0" anchor="t">
-            <a:noAutofit/>
-          </a:bodyPr>
-          <a:lstStyle xmlns:a="http://schemas.openxmlformats.org/drawingml/2006/main"/>
-          <a:p xmlns:a="http://schemas.openxmlformats.org/drawingml/2006/main">
-            <a:pPr algn="ctr">
-              <a:defRPr sz="1275" b="1">
-                <a:solidFill>
-                  <a:srgbClr val="7438F5"/>
-                </a:solidFill>
-                <a:latin typeface="Arial"/>
-                <a:ea typeface="Arial"/>
-                <a:cs typeface="Arial"/>
-              </a:defRPr>
-            </a:pPr>
-            <a:r>
-              <a:t>PACK</a:t>
-            </a:r>
-          </a:p>
-        </p:txBody>
-      </p:sp>
-      <p:sp>
-        <p:nvSpPr>
-          <p:cNvPr id="20" name="s3-pack-main">
-            <a:extLst xmlns:a="http://schemas.openxmlformats.org/drawingml/2006/main">
-              <a:ext uri="{FF2B5EF4-FFF2-40B4-BE49-F238E27FC236}">
-                <a16:creationId xmlns:a16="http://schemas.microsoft.com/office/drawing/2014/main" id="{514BDFEB-EBD4-4270-A5E1-9EC8CDB44BAB}"/>
-              </a:ext>
-            </a:extLst>
-          </p:cNvPr>
-          <p:cNvSpPr>
-            <a:spLocks xmlns:a="http://schemas.openxmlformats.org/drawingml/2006/main" noGrp="1"/>
-          </p:cNvSpPr>
-          <p:nvPr/>
-        </p:nvSpPr>
-        <p:spPr>
-          <a:xfrm xmlns:a="http://schemas.openxmlformats.org/drawingml/2006/main">
-            <a:off x="7477125" y="2857500"/>
-            <a:ext cx="1181100" cy="628650"/>
-          </a:xfrm>
-          <a:prstGeom xmlns:a="http://schemas.openxmlformats.org/drawingml/2006/main" prst="rect">
-            <a:avLst/>
-          </a:prstGeom>
-        </p:spPr>
-        <p:txBody>
-          <a:bodyPr xmlns:a="http://schemas.openxmlformats.org/drawingml/2006/main" wrap="square" lIns="0" tIns="0" rIns="0" bIns="0" anchor="t">
-            <a:noAutofit/>
-          </a:bodyPr>
-          <a:lstStyle xmlns:a="http://schemas.openxmlformats.org/drawingml/2006/main"/>
-          <a:p xmlns:a="http://schemas.openxmlformats.org/drawingml/2006/main">
-            <a:pPr algn="ctr">
-              <a:defRPr sz="1650" b="1">
-                <a:solidFill>
-                  <a:srgbClr val="0A1224"/>
-                </a:solidFill>
-                <a:latin typeface="Arial"/>
-                <a:ea typeface="Arial"/>
-                <a:cs typeface="Arial"/>
-              </a:defRPr>
-            </a:pPr>
-            <a:r>
-              <a:t>Primary + support</a:t>
-            </a:r>
-          </a:p>
-        </p:txBody>
-      </p:sp>
-      <p:sp>
-        <p:nvSpPr>
-          <p:cNvPr id="21" name="s3-task-label">
-            <a:extLst xmlns:a="http://schemas.openxmlformats.org/drawingml/2006/main">
-              <a:ext uri="{FF2B5EF4-FFF2-40B4-BE49-F238E27FC236}">
-                <a16:creationId xmlns:a16="http://schemas.microsoft.com/office/drawing/2014/main" id="{9BA4AB6D-90C4-4A8D-B33E-DF0776097333}"/>
-              </a:ext>
-            </a:extLst>
-          </p:cNvPr>
-          <p:cNvSpPr>
-            <a:spLocks xmlns:a="http://schemas.openxmlformats.org/drawingml/2006/main" noGrp="1"/>
-          </p:cNvSpPr>
-          <p:nvPr/>
-        </p:nvSpPr>
-        <p:spPr>
-          <a:xfrm xmlns:a="http://schemas.openxmlformats.org/drawingml/2006/main">
-            <a:off x="9725025" y="2447925"/>
-            <a:ext cx="1447800" cy="285750"/>
-          </a:xfrm>
-          <a:prstGeom xmlns:a="http://schemas.openxmlformats.org/drawingml/2006/main" prst="rect">
-            <a:avLst/>
-          </a:prstGeom>
-        </p:spPr>
-        <p:txBody>
-          <a:bodyPr xmlns:a="http://schemas.openxmlformats.org/drawingml/2006/main" wrap="square" lIns="0" tIns="0" rIns="0" bIns="0" anchor="t">
-            <a:noAutofit/>
-          </a:bodyPr>
-          <a:lstStyle xmlns:a="http://schemas.openxmlformats.org/drawingml/2006/main"/>
-          <a:p xmlns:a="http://schemas.openxmlformats.org/drawingml/2006/main">
-            <a:pPr algn="ctr">
-              <a:defRPr sz="1275" b="1">
-                <a:solidFill>
-                  <a:srgbClr val="15A777"/>
-                </a:solidFill>
-                <a:latin typeface="Arial"/>
-                <a:ea typeface="Arial"/>
-                <a:cs typeface="Arial"/>
-              </a:defRPr>
-            </a:pPr>
-            <a:r>
-              <a:t>EXECUTE</a:t>
-            </a:r>
-          </a:p>
-        </p:txBody>
-      </p:sp>
-      <p:sp>
-        <p:nvSpPr>
-          <p:cNvPr id="22" name="s3-task-main">
-            <a:extLst xmlns:a="http://schemas.openxmlformats.org/drawingml/2006/main">
-              <a:ext uri="{FF2B5EF4-FFF2-40B4-BE49-F238E27FC236}">
-                <a16:creationId xmlns:a16="http://schemas.microsoft.com/office/drawing/2014/main" id="{ACB93DFB-A28F-45E4-A94B-BAB1B6B6DD2E}"/>
-              </a:ext>
-            </a:extLst>
-          </p:cNvPr>
-          <p:cNvSpPr>
-            <a:spLocks xmlns:a="http://schemas.openxmlformats.org/drawingml/2006/main" noGrp="1"/>
-          </p:cNvSpPr>
-          <p:nvPr/>
-        </p:nvSpPr>
-        <p:spPr>
-          <a:xfrm xmlns:a="http://schemas.openxmlformats.org/drawingml/2006/main">
-            <a:off x="9725025" y="2943225"/>
-            <a:ext cx="1447800" cy="457200"/>
-          </a:xfrm>
-          <a:prstGeom xmlns:a="http://schemas.openxmlformats.org/drawingml/2006/main" prst="rect">
-            <a:avLst/>
-          </a:prstGeom>
-        </p:spPr>
-        <p:txBody>
-          <a:bodyPr xmlns:a="http://schemas.openxmlformats.org/drawingml/2006/main" wrap="square" lIns="0" tIns="0" rIns="0" bIns="0" anchor="t">
-            <a:noAutofit/>
-          </a:bodyPr>
-          <a:lstStyle xmlns:a="http://schemas.openxmlformats.org/drawingml/2006/main"/>
-          <a:p xmlns:a="http://schemas.openxmlformats.org/drawingml/2006/main">
-            <a:pPr algn="ctr">
-              <a:defRPr sz="1725" b="1">
-                <a:solidFill>
-                  <a:srgbClr val="0A1224"/>
-                </a:solidFill>
-                <a:latin typeface="Arial"/>
-                <a:ea typeface="Arial"/>
-                <a:cs typeface="Arial"/>
-              </a:defRPr>
-            </a:pPr>
-            <a:r>
-              <a:t>Focused task</a:t>
-            </a:r>
-          </a:p>
-        </p:txBody>
-      </p:sp>
-      <p:sp>
-        <p:nvSpPr>
-          <p:cNvPr id="23" name="s3-memory">
-            <a:extLst xmlns:a="http://schemas.openxmlformats.org/drawingml/2006/main">
-              <a:ext uri="{FF2B5EF4-FFF2-40B4-BE49-F238E27FC236}">
-                <a16:creationId xmlns:a16="http://schemas.microsoft.com/office/drawing/2014/main" id="{22661A92-B252-4608-BE68-42477823B58A}"/>
-              </a:ext>
-            </a:extLst>
-          </p:cNvPr>
-          <p:cNvSpPr>
-            <a:spLocks xmlns:a="http://schemas.openxmlformats.org/drawingml/2006/main" noGrp="1"/>
-          </p:cNvSpPr>
-          <p:nvPr/>
-        </p:nvSpPr>
-        <p:spPr>
-          <a:xfrm xmlns:a="http://schemas.openxmlformats.org/drawingml/2006/main">
-            <a:off x="6019800" y="4591050"/>
-            <a:ext cx="3714750" cy="1143000"/>
-          </a:xfrm>
-          <a:prstGeom xmlns:a="http://schemas.openxmlformats.org/drawingml/2006/main" prst="roundRect">
-            <a:avLst>
-              <a:gd name="adj" fmla="val 6667"/>
-            </a:avLst>
-          </a:prstGeom>
-          <a:solidFill xmlns:a="http://schemas.openxmlformats.org/drawingml/2006/main">
-            <a:srgbClr val="061B3D"/>
-          </a:solidFill>
-          <a:ln xmlns:a="http://schemas.openxmlformats.org/drawingml/2006/main" w="0">
-            <a:solidFill>
-              <a:srgbClr val="061B3D"/>
-            </a:solidFill>
-            <a:prstDash val="solid"/>
-          </a:ln>
-        </p:spPr>
-      </p:sp>
-      <p:sp>
-        <p:nvSpPr>
-          <p:cNvPr id="24" name="s3-memory-label">
-            <a:extLst xmlns:a="http://schemas.openxmlformats.org/drawingml/2006/main">
-              <a:ext uri="{FF2B5EF4-FFF2-40B4-BE49-F238E27FC236}">
-                <a16:creationId xmlns:a16="http://schemas.microsoft.com/office/drawing/2014/main" id="{38A2F781-4E22-45E9-A836-99B70AAF960C}"/>
-              </a:ext>
-            </a:extLst>
-          </p:cNvPr>
-          <p:cNvSpPr>
-            <a:spLocks xmlns:a="http://schemas.openxmlformats.org/drawingml/2006/main" noGrp="1"/>
-          </p:cNvSpPr>
-          <p:nvPr/>
-        </p:nvSpPr>
-        <p:spPr>
-          <a:xfrm xmlns:a="http://schemas.openxmlformats.org/drawingml/2006/main">
-            <a:off x="6267450" y="4762500"/>
-            <a:ext cx="3219450" cy="247650"/>
-          </a:xfrm>
-          <a:prstGeom xmlns:a="http://schemas.openxmlformats.org/drawingml/2006/main" prst="rect">
-            <a:avLst/>
-          </a:prstGeom>
-        </p:spPr>
-        <p:txBody>
-          <a:bodyPr xmlns:a="http://schemas.openxmlformats.org/drawingml/2006/main" wrap="square" lIns="0" tIns="0" rIns="0" bIns="0" anchor="t">
-            <a:noAutofit/>
-          </a:bodyPr>
-          <a:lstStyle xmlns:a="http://schemas.openxmlformats.org/drawingml/2006/main"/>
-          <a:p xmlns:a="http://schemas.openxmlformats.org/drawingml/2006/main">
-            <a:pPr algn="ctr">
-              <a:defRPr sz="1200" b="1">
-                <a:solidFill>
-                  <a:srgbClr val="13B7D5"/>
-                </a:solidFill>
-                <a:latin typeface="Arial"/>
-                <a:ea typeface="Arial"/>
-                <a:cs typeface="Arial"/>
-              </a:defRPr>
-            </a:pPr>
-            <a:r>
-              <a:t>PITFALL BOARD</a:t>
-            </a:r>
-          </a:p>
-        </p:txBody>
-      </p:sp>
-      <p:sp>
-        <p:nvSpPr>
-          <p:cNvPr id="25" name="s3-memory-main">
-            <a:extLst xmlns:a="http://schemas.openxmlformats.org/drawingml/2006/main">
-              <a:ext uri="{FF2B5EF4-FFF2-40B4-BE49-F238E27FC236}">
-                <a16:creationId xmlns:a16="http://schemas.microsoft.com/office/drawing/2014/main" id="{9176910D-FF8F-47BD-9D19-D6FF55856235}"/>
-              </a:ext>
-            </a:extLst>
-          </p:cNvPr>
-          <p:cNvSpPr>
-            <a:spLocks xmlns:a="http://schemas.openxmlformats.org/drawingml/2006/main" noGrp="1"/>
-          </p:cNvSpPr>
-          <p:nvPr/>
-        </p:nvSpPr>
-        <p:spPr>
-          <a:xfrm xmlns:a="http://schemas.openxmlformats.org/drawingml/2006/main">
-            <a:off x="6267450" y="5143500"/>
-            <a:ext cx="3219450" cy="495300"/>
-          </a:xfrm>
-          <a:prstGeom xmlns:a="http://schemas.openxmlformats.org/drawingml/2006/main" prst="rect">
-            <a:avLst/>
-          </a:prstGeom>
-        </p:spPr>
-        <p:txBody>
-          <a:bodyPr xmlns:a="http://schemas.openxmlformats.org/drawingml/2006/main" wrap="square" lIns="0" tIns="0" rIns="0" bIns="0" anchor="t">
-            <a:noAutofit/>
-          </a:bodyPr>
-          <a:lstStyle xmlns:a="http://schemas.openxmlformats.org/drawingml/2006/main"/>
-          <a:p xmlns:a="http://schemas.openxmlformats.org/drawingml/2006/main">
-            <a:pPr algn="ctr">
-              <a:defRPr sz="1425" b="0">
-                <a:solidFill>
-                  <a:srgbClr val="FFFFFF"/>
-                </a:solidFill>
-                <a:latin typeface="Arial"/>
-                <a:ea typeface="Arial"/>
-                <a:cs typeface="Arial"/>
-              </a:defRPr>
-            </a:pPr>
-            <a:r>
-              <a:t>Relevant mistakes appear at the
-entrance next time.</a:t>
-            </a:r>
-          </a:p>
-        </p:txBody>
-      </p:sp>
-      <p:cxnSp>
-        <p:nvCxnSpPr>
-          <p:cNvPr id="54" name="footer-rule-3"/>
-          <p:cNvCxnSpPr/>
-          <p:nvPr/>
-        </p:nvCxnSpPr>
-        <p:spPr>
-          <a:xfrm xmlns:a="http://schemas.openxmlformats.org/drawingml/2006/main">
-            <a:off x="400050" y="6162675"/>
-            <a:ext cx="11391900" cy="953"/>
+            <a:off x="1428750" y="2886075"/>
+            <a:ext cx="4762500" cy="953"/>
           </a:xfrm>
           <a:prstGeom xmlns:a="http://schemas.openxmlformats.org/drawingml/2006/main" prst="straightConnector1">
             <a:avLst/>
@@ -4494,39 +3633,173 @@
           </a:ln>
         </p:spPr>
       </p:cxnSp>
-      <p:sp>
-        <p:nvSpPr>
-          <p:cNvPr id="27" name="footer-source-3">
-            <a:extLst xmlns:a="http://schemas.openxmlformats.org/drawingml/2006/main">
-              <a:ext uri="{FF2B5EF4-FFF2-40B4-BE49-F238E27FC236}">
-                <a16:creationId xmlns:a16="http://schemas.microsoft.com/office/drawing/2014/main" id="{D36EEE0C-5739-45FB-998D-4F61E564678D}"/>
-              </a:ext>
-            </a:extLst>
-          </p:cNvPr>
-          <p:cNvSpPr>
-            <a:spLocks xmlns:a="http://schemas.openxmlformats.org/drawingml/2006/main" noGrp="1"/>
-          </p:cNvSpPr>
-          <p:nvPr/>
-        </p:nvSpPr>
-        <p:spPr>
-          <a:xfrm xmlns:a="http://schemas.openxmlformats.org/drawingml/2006/main">
-            <a:off x="400050" y="6238875"/>
-            <a:ext cx="10001250" cy="228600"/>
-          </a:xfrm>
-          <a:prstGeom xmlns:a="http://schemas.openxmlformats.org/drawingml/2006/main" prst="rect">
-            <a:avLst/>
-          </a:prstGeom>
-        </p:spPr>
-        <p:txBody>
-          <a:bodyPr xmlns:a="http://schemas.openxmlformats.org/drawingml/2006/main" wrap="square" lIns="0" tIns="0" rIns="0" bIns="0" anchor="t">
-            <a:noAutofit/>
-          </a:bodyPr>
-          <a:lstStyle xmlns:a="http://schemas.openxmlformats.org/drawingml/2006/main"/>
-          <a:p xmlns:a="http://schemas.openxmlformats.org/drawingml/2006/main">
-            <a:pPr algn="l">
-              <a:defRPr sz="863" b="0">
-                <a:solidFill>
-                  <a:srgbClr val="526071"/>
+      <p:cxnSp>
+        <p:nvCxnSpPr>
+          <p:cNvPr id="41" name="s3-rule-y"/>
+          <p:cNvCxnSpPr/>
+          <p:nvPr/>
+        </p:nvCxnSpPr>
+        <p:spPr>
+          <a:xfrm xmlns:a="http://schemas.openxmlformats.org/drawingml/2006/main">
+            <a:off x="1428750" y="4076700"/>
+            <a:ext cx="4762500" cy="953"/>
+          </a:xfrm>
+          <a:prstGeom xmlns:a="http://schemas.openxmlformats.org/drawingml/2006/main" prst="straightConnector1">
+            <a:avLst/>
+          </a:prstGeom>
+          <a:ln xmlns:a="http://schemas.openxmlformats.org/drawingml/2006/main" w="9525">
+            <a:solidFill>
+              <a:srgbClr val="B8BCC4"/>
+            </a:solidFill>
+            <a:prstDash val="solid"/>
+          </a:ln>
+        </p:spPr>
+      </p:cxnSp>
+      <p:sp>
+        <p:nvSpPr>
+          <p:cNvPr id="5" name="s3-address-panel">
+            <a:extLst xmlns:a="http://schemas.openxmlformats.org/drawingml/2006/main">
+              <a:ext uri="{FF2B5EF4-FFF2-40B4-BE49-F238E27FC236}">
+                <a16:creationId xmlns:a16="http://schemas.microsoft.com/office/drawing/2014/main" id="{05A16BC2-9449-4688-BBB9-EA4E3E286293}"/>
+              </a:ext>
+            </a:extLst>
+          </p:cNvPr>
+          <p:cNvSpPr>
+            <a:spLocks xmlns:a="http://schemas.openxmlformats.org/drawingml/2006/main" noGrp="1"/>
+          </p:cNvSpPr>
+          <p:nvPr/>
+        </p:nvSpPr>
+        <p:spPr>
+          <a:xfrm xmlns:a="http://schemas.openxmlformats.org/drawingml/2006/main">
+            <a:off x="6858000" y="1809750"/>
+            <a:ext cx="4762500" cy="3238500"/>
+          </a:xfrm>
+          <a:prstGeom xmlns:a="http://schemas.openxmlformats.org/drawingml/2006/main" prst="roundRect">
+            <a:avLst>
+              <a:gd name="adj" fmla="val 2353"/>
+            </a:avLst>
+          </a:prstGeom>
+          <a:solidFill xmlns:a="http://schemas.openxmlformats.org/drawingml/2006/main">
+            <a:srgbClr val="061B3D"/>
+          </a:solidFill>
+          <a:ln xmlns:a="http://schemas.openxmlformats.org/drawingml/2006/main" w="9525">
+            <a:solidFill>
+              <a:srgbClr val="0B2B56"/>
+            </a:solidFill>
+            <a:prstDash val="solid"/>
+          </a:ln>
+        </p:spPr>
+      </p:sp>
+      <p:cxnSp>
+        <p:nvCxnSpPr>
+          <p:cNvPr id="43" name="s3-address-rule-1"/>
+          <p:cNvCxnSpPr/>
+          <p:nvPr/>
+        </p:nvCxnSpPr>
+        <p:spPr>
+          <a:xfrm xmlns:a="http://schemas.openxmlformats.org/drawingml/2006/main">
+            <a:off x="7219950" y="2476500"/>
+            <a:ext cx="4038600" cy="953"/>
+          </a:xfrm>
+          <a:prstGeom xmlns:a="http://schemas.openxmlformats.org/drawingml/2006/main" prst="straightConnector1">
+            <a:avLst/>
+          </a:prstGeom>
+          <a:ln xmlns:a="http://schemas.openxmlformats.org/drawingml/2006/main" w="9525">
+            <a:solidFill>
+              <a:srgbClr val="24466F"/>
+            </a:solidFill>
+            <a:prstDash val="solid"/>
+          </a:ln>
+        </p:spPr>
+      </p:cxnSp>
+      <p:cxnSp>
+        <p:nvCxnSpPr>
+          <p:cNvPr id="44" name="s3-address-rule-2"/>
+          <p:cNvCxnSpPr/>
+          <p:nvPr/>
+        </p:nvCxnSpPr>
+        <p:spPr>
+          <a:xfrm xmlns:a="http://schemas.openxmlformats.org/drawingml/2006/main">
+            <a:off x="7219950" y="4267200"/>
+            <a:ext cx="4038600" cy="953"/>
+          </a:xfrm>
+          <a:prstGeom xmlns:a="http://schemas.openxmlformats.org/drawingml/2006/main" prst="straightConnector1">
+            <a:avLst/>
+          </a:prstGeom>
+          <a:ln xmlns:a="http://schemas.openxmlformats.org/drawingml/2006/main" w="9525">
+            <a:solidFill>
+              <a:srgbClr val="24466F"/>
+            </a:solidFill>
+            <a:prstDash val="solid"/>
+          </a:ln>
+        </p:spPr>
+      </p:cxnSp>
+      <p:sp>
+        <p:nvSpPr>
+          <p:cNvPr id="8" name="s3-x">
+            <a:extLst xmlns:a="http://schemas.openxmlformats.org/drawingml/2006/main">
+              <a:ext uri="{FF2B5EF4-FFF2-40B4-BE49-F238E27FC236}">
+                <a16:creationId xmlns:a16="http://schemas.microsoft.com/office/drawing/2014/main" id="{CDB9D831-FEBE-4300-A416-5EE874F0BFA9}"/>
+              </a:ext>
+            </a:extLst>
+          </p:cNvPr>
+          <p:cNvSpPr>
+            <a:spLocks xmlns:a="http://schemas.openxmlformats.org/drawingml/2006/main" noGrp="1"/>
+          </p:cNvSpPr>
+          <p:nvPr/>
+        </p:nvSpPr>
+        <p:spPr>
+          <a:xfrm xmlns:a="http://schemas.openxmlformats.org/drawingml/2006/main">
+            <a:off x="666750" y="2000250"/>
+            <a:ext cx="533400" cy="533400"/>
+          </a:xfrm>
+          <a:prstGeom xmlns:a="http://schemas.openxmlformats.org/drawingml/2006/main" prst="ellipse">
+            <a:avLst/>
+          </a:prstGeom>
+          <a:solidFill xmlns:a="http://schemas.openxmlformats.org/drawingml/2006/main">
+            <a:srgbClr val="13B7D5"/>
+          </a:solidFill>
+          <a:ln xmlns:a="http://schemas.openxmlformats.org/drawingml/2006/main" w="0">
+            <a:solidFill>
+              <a:srgbClr val="13B7D5"/>
+            </a:solidFill>
+            <a:prstDash val="solid"/>
+          </a:ln>
+        </p:spPr>
+      </p:sp>
+      <p:sp>
+        <p:nvSpPr>
+          <p:cNvPr id="9" name="s3-x-letter">
+            <a:extLst xmlns:a="http://schemas.openxmlformats.org/drawingml/2006/main">
+              <a:ext uri="{FF2B5EF4-FFF2-40B4-BE49-F238E27FC236}">
+                <a16:creationId xmlns:a16="http://schemas.microsoft.com/office/drawing/2014/main" id="{FA717173-24A2-4E68-97D0-609C23492D67}"/>
+              </a:ext>
+            </a:extLst>
+          </p:cNvPr>
+          <p:cNvSpPr>
+            <a:spLocks xmlns:a="http://schemas.openxmlformats.org/drawingml/2006/main" noGrp="1"/>
+          </p:cNvSpPr>
+          <p:nvPr/>
+        </p:nvSpPr>
+        <p:spPr>
+          <a:xfrm xmlns:a="http://schemas.openxmlformats.org/drawingml/2006/main">
+            <a:off x="666750" y="2114550"/>
+            <a:ext cx="533400" cy="304800"/>
+          </a:xfrm>
+          <a:prstGeom xmlns:a="http://schemas.openxmlformats.org/drawingml/2006/main" prst="rect">
+            <a:avLst/>
+          </a:prstGeom>
+        </p:spPr>
+        <p:txBody>
+          <a:bodyPr xmlns:a="http://schemas.openxmlformats.org/drawingml/2006/main" wrap="square" lIns="0" tIns="0" rIns="0" bIns="0" anchor="t">
+            <a:noAutofit/>
+          </a:bodyPr>
+          <a:lstStyle xmlns:a="http://schemas.openxmlformats.org/drawingml/2006/main"/>
+          <a:p xmlns:a="http://schemas.openxmlformats.org/drawingml/2006/main">
+            <a:pPr algn="ctr">
+              <a:defRPr sz="1875" b="1">
+                <a:solidFill>
+                  <a:srgbClr val="FFFFFF"/>
                 </a:solidFill>
                 <a:latin typeface="Arial"/>
                 <a:ea typeface="Arial"/>
@@ -4534,44 +3807,44 @@
               </a:defRPr>
             </a:pPr>
             <a:r>
-              <a:t/>
-            </a:r>
-          </a:p>
-        </p:txBody>
-      </p:sp>
-      <p:sp>
-        <p:nvSpPr>
-          <p:cNvPr id="28" name="footer-number-3">
-            <a:extLst xmlns:a="http://schemas.openxmlformats.org/drawingml/2006/main">
-              <a:ext uri="{FF2B5EF4-FFF2-40B4-BE49-F238E27FC236}">
-                <a16:creationId xmlns:a16="http://schemas.microsoft.com/office/drawing/2014/main" id="{FF2E9AEF-FEBB-42E0-B537-B71C9B502CB6}"/>
-              </a:ext>
-            </a:extLst>
-          </p:cNvPr>
-          <p:cNvSpPr>
-            <a:spLocks xmlns:a="http://schemas.openxmlformats.org/drawingml/2006/main" noGrp="1"/>
-          </p:cNvSpPr>
-          <p:nvPr/>
-        </p:nvSpPr>
-        <p:spPr>
-          <a:xfrm xmlns:a="http://schemas.openxmlformats.org/drawingml/2006/main">
-            <a:off x="11258550" y="6238875"/>
-            <a:ext cx="533400" cy="228600"/>
-          </a:xfrm>
-          <a:prstGeom xmlns:a="http://schemas.openxmlformats.org/drawingml/2006/main" prst="rect">
-            <a:avLst/>
-          </a:prstGeom>
-        </p:spPr>
-        <p:txBody>
-          <a:bodyPr xmlns:a="http://schemas.openxmlformats.org/drawingml/2006/main" wrap="square" lIns="0" tIns="0" rIns="0" bIns="0" anchor="t">
-            <a:noAutofit/>
-          </a:bodyPr>
-          <a:lstStyle xmlns:a="http://schemas.openxmlformats.org/drawingml/2006/main"/>
-          <a:p xmlns:a="http://schemas.openxmlformats.org/drawingml/2006/main">
-            <a:pPr algn="r">
-              <a:defRPr sz="900" b="0">
-                <a:solidFill>
-                  <a:srgbClr val="526071"/>
+              <a:t>X</a:t>
+            </a:r>
+          </a:p>
+        </p:txBody>
+      </p:sp>
+      <p:sp>
+        <p:nvSpPr>
+          <p:cNvPr id="10" name="s3-x-label">
+            <a:extLst xmlns:a="http://schemas.openxmlformats.org/drawingml/2006/main">
+              <a:ext uri="{FF2B5EF4-FFF2-40B4-BE49-F238E27FC236}">
+                <a16:creationId xmlns:a16="http://schemas.microsoft.com/office/drawing/2014/main" id="{E9B76430-4E2E-473E-AE4B-EB7DBF0BAF07}"/>
+              </a:ext>
+            </a:extLst>
+          </p:cNvPr>
+          <p:cNvSpPr>
+            <a:spLocks xmlns:a="http://schemas.openxmlformats.org/drawingml/2006/main" noGrp="1"/>
+          </p:cNvSpPr>
+          <p:nvPr/>
+        </p:nvSpPr>
+        <p:spPr>
+          <a:xfrm xmlns:a="http://schemas.openxmlformats.org/drawingml/2006/main">
+            <a:off x="1428750" y="1933575"/>
+            <a:ext cx="4762500" cy="247650"/>
+          </a:xfrm>
+          <a:prstGeom xmlns:a="http://schemas.openxmlformats.org/drawingml/2006/main" prst="rect">
+            <a:avLst/>
+          </a:prstGeom>
+        </p:spPr>
+        <p:txBody>
+          <a:bodyPr xmlns:a="http://schemas.openxmlformats.org/drawingml/2006/main" wrap="square" lIns="0" tIns="0" rIns="0" bIns="0" anchor="t">
+            <a:noAutofit/>
+          </a:bodyPr>
+          <a:lstStyle xmlns:a="http://schemas.openxmlformats.org/drawingml/2006/main"/>
+          <a:p xmlns:a="http://schemas.openxmlformats.org/drawingml/2006/main">
+            <a:pPr algn="l">
+              <a:defRPr sz="1275" b="1">
+                <a:solidFill>
+                  <a:srgbClr val="13B7D5"/>
                 </a:solidFill>
                 <a:latin typeface="Arial"/>
                 <a:ea typeface="Arial"/>
@@ -4579,6 +3852,1174 @@
               </a:defRPr>
             </a:pPr>
             <a:r>
+              <a:t>X / DOMAIN OR MODULE</a:t>
+            </a:r>
+          </a:p>
+        </p:txBody>
+      </p:sp>
+      <p:sp>
+        <p:nvSpPr>
+          <p:cNvPr id="11" name="s3-x-main">
+            <a:extLst xmlns:a="http://schemas.openxmlformats.org/drawingml/2006/main">
+              <a:ext uri="{FF2B5EF4-FFF2-40B4-BE49-F238E27FC236}">
+                <a16:creationId xmlns:a16="http://schemas.microsoft.com/office/drawing/2014/main" id="{5DA85545-8411-46C7-8B84-19E542478B24}"/>
+              </a:ext>
+            </a:extLst>
+          </p:cNvPr>
+          <p:cNvSpPr>
+            <a:spLocks xmlns:a="http://schemas.openxmlformats.org/drawingml/2006/main" noGrp="1"/>
+          </p:cNvSpPr>
+          <p:nvPr/>
+        </p:nvSpPr>
+        <p:spPr>
+          <a:xfrm xmlns:a="http://schemas.openxmlformats.org/drawingml/2006/main">
+            <a:off x="1428750" y="2238375"/>
+            <a:ext cx="4762500" cy="342900"/>
+          </a:xfrm>
+          <a:prstGeom xmlns:a="http://schemas.openxmlformats.org/drawingml/2006/main" prst="rect">
+            <a:avLst/>
+          </a:prstGeom>
+        </p:spPr>
+        <p:txBody>
+          <a:bodyPr xmlns:a="http://schemas.openxmlformats.org/drawingml/2006/main" wrap="square" lIns="0" tIns="0" rIns="0" bIns="0" anchor="t">
+            <a:noAutofit/>
+          </a:bodyPr>
+          <a:lstStyle xmlns:a="http://schemas.openxmlformats.org/drawingml/2006/main"/>
+          <a:p xmlns:a="http://schemas.openxmlformats.org/drawingml/2006/main">
+            <a:pPr algn="l">
+              <a:defRPr sz="1875" b="1">
+                <a:solidFill>
+                  <a:srgbClr val="0A1224"/>
+                </a:solidFill>
+                <a:latin typeface="Consolas"/>
+                <a:ea typeface="Consolas"/>
+                <a:cs typeface="Consolas"/>
+              </a:defRPr>
+            </a:pPr>
+            <a:r>
+              <a:t>auth  /  checkout  /  blog</a:t>
+            </a:r>
+          </a:p>
+        </p:txBody>
+      </p:sp>
+      <p:sp>
+        <p:nvSpPr>
+          <p:cNvPr id="12" name="s3-x-question">
+            <a:extLst xmlns:a="http://schemas.openxmlformats.org/drawingml/2006/main">
+              <a:ext uri="{FF2B5EF4-FFF2-40B4-BE49-F238E27FC236}">
+                <a16:creationId xmlns:a16="http://schemas.microsoft.com/office/drawing/2014/main" id="{7F610FBC-1AA5-4D68-B967-97F444729BF2}"/>
+              </a:ext>
+            </a:extLst>
+          </p:cNvPr>
+          <p:cNvSpPr>
+            <a:spLocks xmlns:a="http://schemas.openxmlformats.org/drawingml/2006/main" noGrp="1"/>
+          </p:cNvSpPr>
+          <p:nvPr/>
+        </p:nvSpPr>
+        <p:spPr>
+          <a:xfrm xmlns:a="http://schemas.openxmlformats.org/drawingml/2006/main">
+            <a:off x="1428750" y="2609850"/>
+            <a:ext cx="4762500" cy="228600"/>
+          </a:xfrm>
+          <a:prstGeom xmlns:a="http://schemas.openxmlformats.org/drawingml/2006/main" prst="rect">
+            <a:avLst/>
+          </a:prstGeom>
+        </p:spPr>
+        <p:txBody>
+          <a:bodyPr xmlns:a="http://schemas.openxmlformats.org/drawingml/2006/main" wrap="square" lIns="0" tIns="0" rIns="0" bIns="0" anchor="t">
+            <a:noAutofit/>
+          </a:bodyPr>
+          <a:lstStyle xmlns:a="http://schemas.openxmlformats.org/drawingml/2006/main"/>
+          <a:p xmlns:a="http://schemas.openxmlformats.org/drawingml/2006/main">
+            <a:pPr algn="l">
+              <a:defRPr sz="1200" b="0">
+                <a:solidFill>
+                  <a:srgbClr val="526071"/>
+                </a:solidFill>
+                <a:latin typeface="Arial"/>
+                <a:ea typeface="Arial"/>
+                <a:cs typeface="Arial"/>
+              </a:defRPr>
+            </a:pPr>
+            <a:r>
+              <a:t>Which product area?</a:t>
+            </a:r>
+          </a:p>
+        </p:txBody>
+      </p:sp>
+      <p:sp>
+        <p:nvSpPr>
+          <p:cNvPr id="13" name="s3-y">
+            <a:extLst xmlns:a="http://schemas.openxmlformats.org/drawingml/2006/main">
+              <a:ext uri="{FF2B5EF4-FFF2-40B4-BE49-F238E27FC236}">
+                <a16:creationId xmlns:a16="http://schemas.microsoft.com/office/drawing/2014/main" id="{E26DE3E6-E5F1-45F3-A426-636174F88DF8}"/>
+              </a:ext>
+            </a:extLst>
+          </p:cNvPr>
+          <p:cNvSpPr>
+            <a:spLocks xmlns:a="http://schemas.openxmlformats.org/drawingml/2006/main" noGrp="1"/>
+          </p:cNvSpPr>
+          <p:nvPr/>
+        </p:nvSpPr>
+        <p:spPr>
+          <a:xfrm xmlns:a="http://schemas.openxmlformats.org/drawingml/2006/main">
+            <a:off x="666750" y="3190875"/>
+            <a:ext cx="533400" cy="533400"/>
+          </a:xfrm>
+          <a:prstGeom xmlns:a="http://schemas.openxmlformats.org/drawingml/2006/main" prst="ellipse">
+            <a:avLst/>
+          </a:prstGeom>
+          <a:solidFill xmlns:a="http://schemas.openxmlformats.org/drawingml/2006/main">
+            <a:srgbClr val="1677FF"/>
+          </a:solidFill>
+          <a:ln xmlns:a="http://schemas.openxmlformats.org/drawingml/2006/main" w="0">
+            <a:solidFill>
+              <a:srgbClr val="1677FF"/>
+            </a:solidFill>
+            <a:prstDash val="solid"/>
+          </a:ln>
+        </p:spPr>
+      </p:sp>
+      <p:sp>
+        <p:nvSpPr>
+          <p:cNvPr id="14" name="s3-y-letter">
+            <a:extLst xmlns:a="http://schemas.openxmlformats.org/drawingml/2006/main">
+              <a:ext uri="{FF2B5EF4-FFF2-40B4-BE49-F238E27FC236}">
+                <a16:creationId xmlns:a16="http://schemas.microsoft.com/office/drawing/2014/main" id="{C70A5603-7E90-49F2-BAB3-AF67E7613771}"/>
+              </a:ext>
+            </a:extLst>
+          </p:cNvPr>
+          <p:cNvSpPr>
+            <a:spLocks xmlns:a="http://schemas.openxmlformats.org/drawingml/2006/main" noGrp="1"/>
+          </p:cNvSpPr>
+          <p:nvPr/>
+        </p:nvSpPr>
+        <p:spPr>
+          <a:xfrm xmlns:a="http://schemas.openxmlformats.org/drawingml/2006/main">
+            <a:off x="666750" y="3305175"/>
+            <a:ext cx="533400" cy="304800"/>
+          </a:xfrm>
+          <a:prstGeom xmlns:a="http://schemas.openxmlformats.org/drawingml/2006/main" prst="rect">
+            <a:avLst/>
+          </a:prstGeom>
+        </p:spPr>
+        <p:txBody>
+          <a:bodyPr xmlns:a="http://schemas.openxmlformats.org/drawingml/2006/main" wrap="square" lIns="0" tIns="0" rIns="0" bIns="0" anchor="t">
+            <a:noAutofit/>
+          </a:bodyPr>
+          <a:lstStyle xmlns:a="http://schemas.openxmlformats.org/drawingml/2006/main"/>
+          <a:p xmlns:a="http://schemas.openxmlformats.org/drawingml/2006/main">
+            <a:pPr algn="ctr">
+              <a:defRPr sz="1875" b="1">
+                <a:solidFill>
+                  <a:srgbClr val="FFFFFF"/>
+                </a:solidFill>
+                <a:latin typeface="Arial"/>
+                <a:ea typeface="Arial"/>
+                <a:cs typeface="Arial"/>
+              </a:defRPr>
+            </a:pPr>
+            <a:r>
+              <a:t>Y</a:t>
+            </a:r>
+          </a:p>
+        </p:txBody>
+      </p:sp>
+      <p:sp>
+        <p:nvSpPr>
+          <p:cNvPr id="15" name="s3-y-label">
+            <a:extLst xmlns:a="http://schemas.openxmlformats.org/drawingml/2006/main">
+              <a:ext uri="{FF2B5EF4-FFF2-40B4-BE49-F238E27FC236}">
+                <a16:creationId xmlns:a16="http://schemas.microsoft.com/office/drawing/2014/main" id="{00C3F9E7-92D9-42F7-BA11-E8DE82838A76}"/>
+              </a:ext>
+            </a:extLst>
+          </p:cNvPr>
+          <p:cNvSpPr>
+            <a:spLocks xmlns:a="http://schemas.openxmlformats.org/drawingml/2006/main" noGrp="1"/>
+          </p:cNvSpPr>
+          <p:nvPr/>
+        </p:nvSpPr>
+        <p:spPr>
+          <a:xfrm xmlns:a="http://schemas.openxmlformats.org/drawingml/2006/main">
+            <a:off x="1428750" y="3124200"/>
+            <a:ext cx="4762500" cy="247650"/>
+          </a:xfrm>
+          <a:prstGeom xmlns:a="http://schemas.openxmlformats.org/drawingml/2006/main" prst="rect">
+            <a:avLst/>
+          </a:prstGeom>
+        </p:spPr>
+        <p:txBody>
+          <a:bodyPr xmlns:a="http://schemas.openxmlformats.org/drawingml/2006/main" wrap="square" lIns="0" tIns="0" rIns="0" bIns="0" anchor="t">
+            <a:noAutofit/>
+          </a:bodyPr>
+          <a:lstStyle xmlns:a="http://schemas.openxmlformats.org/drawingml/2006/main"/>
+          <a:p xmlns:a="http://schemas.openxmlformats.org/drawingml/2006/main">
+            <a:pPr algn="l">
+              <a:defRPr sz="1275" b="1">
+                <a:solidFill>
+                  <a:srgbClr val="1677FF"/>
+                </a:solidFill>
+                <a:latin typeface="Arial"/>
+                <a:ea typeface="Arial"/>
+                <a:cs typeface="Arial"/>
+              </a:defRPr>
+            </a:pPr>
+            <a:r>
+              <a:t>Y / ARCHITECTURE FLOOR</a:t>
+            </a:r>
+          </a:p>
+        </p:txBody>
+      </p:sp>
+      <p:sp>
+        <p:nvSpPr>
+          <p:cNvPr id="16" name="s3-y-main">
+            <a:extLst xmlns:a="http://schemas.openxmlformats.org/drawingml/2006/main">
+              <a:ext uri="{FF2B5EF4-FFF2-40B4-BE49-F238E27FC236}">
+                <a16:creationId xmlns:a16="http://schemas.microsoft.com/office/drawing/2014/main" id="{59B3D219-1F76-45B8-94EB-83CB2DDE2744}"/>
+              </a:ext>
+            </a:extLst>
+          </p:cNvPr>
+          <p:cNvSpPr>
+            <a:spLocks xmlns:a="http://schemas.openxmlformats.org/drawingml/2006/main" noGrp="1"/>
+          </p:cNvSpPr>
+          <p:nvPr/>
+        </p:nvSpPr>
+        <p:spPr>
+          <a:xfrm xmlns:a="http://schemas.openxmlformats.org/drawingml/2006/main">
+            <a:off x="1428750" y="3429000"/>
+            <a:ext cx="4762500" cy="323850"/>
+          </a:xfrm>
+          <a:prstGeom xmlns:a="http://schemas.openxmlformats.org/drawingml/2006/main" prst="rect">
+            <a:avLst/>
+          </a:prstGeom>
+        </p:spPr>
+        <p:txBody>
+          <a:bodyPr xmlns:a="http://schemas.openxmlformats.org/drawingml/2006/main" wrap="square" lIns="0" tIns="0" rIns="0" bIns="0" anchor="t">
+            <a:noAutofit/>
+          </a:bodyPr>
+          <a:lstStyle xmlns:a="http://schemas.openxmlformats.org/drawingml/2006/main"/>
+          <a:p xmlns:a="http://schemas.openxmlformats.org/drawingml/2006/main">
+            <a:pPr algn="l">
+              <a:defRPr sz="1575" b="1">
+                <a:solidFill>
+                  <a:srgbClr val="0A1224"/>
+                </a:solidFill>
+                <a:latin typeface="Consolas"/>
+                <a:ea typeface="Consolas"/>
+                <a:cs typeface="Consolas"/>
+              </a:defRPr>
+            </a:pPr>
+            <a:r>
+              <a:t>interface  /  implementation  /  data</a:t>
+            </a:r>
+          </a:p>
+        </p:txBody>
+      </p:sp>
+      <p:sp>
+        <p:nvSpPr>
+          <p:cNvPr id="17" name="s3-y-question">
+            <a:extLst xmlns:a="http://schemas.openxmlformats.org/drawingml/2006/main">
+              <a:ext uri="{FF2B5EF4-FFF2-40B4-BE49-F238E27FC236}">
+                <a16:creationId xmlns:a16="http://schemas.microsoft.com/office/drawing/2014/main" id="{206957FA-86D2-491C-B7E3-0B8C16307D59}"/>
+              </a:ext>
+            </a:extLst>
+          </p:cNvPr>
+          <p:cNvSpPr>
+            <a:spLocks xmlns:a="http://schemas.openxmlformats.org/drawingml/2006/main" noGrp="1"/>
+          </p:cNvSpPr>
+          <p:nvPr/>
+        </p:nvSpPr>
+        <p:spPr>
+          <a:xfrm xmlns:a="http://schemas.openxmlformats.org/drawingml/2006/main">
+            <a:off x="1428750" y="3800475"/>
+            <a:ext cx="4762500" cy="228600"/>
+          </a:xfrm>
+          <a:prstGeom xmlns:a="http://schemas.openxmlformats.org/drawingml/2006/main" prst="rect">
+            <a:avLst/>
+          </a:prstGeom>
+        </p:spPr>
+        <p:txBody>
+          <a:bodyPr xmlns:a="http://schemas.openxmlformats.org/drawingml/2006/main" wrap="square" lIns="0" tIns="0" rIns="0" bIns="0" anchor="t">
+            <a:noAutofit/>
+          </a:bodyPr>
+          <a:lstStyle xmlns:a="http://schemas.openxmlformats.org/drawingml/2006/main"/>
+          <a:p xmlns:a="http://schemas.openxmlformats.org/drawingml/2006/main">
+            <a:pPr algn="l">
+              <a:defRPr sz="1200" b="0">
+                <a:solidFill>
+                  <a:srgbClr val="526071"/>
+                </a:solidFill>
+                <a:latin typeface="Arial"/>
+                <a:ea typeface="Arial"/>
+                <a:cs typeface="Arial"/>
+              </a:defRPr>
+            </a:pPr>
+            <a:r>
+              <a:t>Which responsibility layer?</a:t>
+            </a:r>
+          </a:p>
+        </p:txBody>
+      </p:sp>
+      <p:sp>
+        <p:nvSpPr>
+          <p:cNvPr id="18" name="s3-z">
+            <a:extLst xmlns:a="http://schemas.openxmlformats.org/drawingml/2006/main">
+              <a:ext uri="{FF2B5EF4-FFF2-40B4-BE49-F238E27FC236}">
+                <a16:creationId xmlns:a16="http://schemas.microsoft.com/office/drawing/2014/main" id="{9AAF1B90-6BE1-4582-8168-A31444E516F0}"/>
+              </a:ext>
+            </a:extLst>
+          </p:cNvPr>
+          <p:cNvSpPr>
+            <a:spLocks xmlns:a="http://schemas.openxmlformats.org/drawingml/2006/main" noGrp="1"/>
+          </p:cNvSpPr>
+          <p:nvPr/>
+        </p:nvSpPr>
+        <p:spPr>
+          <a:xfrm xmlns:a="http://schemas.openxmlformats.org/drawingml/2006/main">
+            <a:off x="666750" y="4381500"/>
+            <a:ext cx="533400" cy="533400"/>
+          </a:xfrm>
+          <a:prstGeom xmlns:a="http://schemas.openxmlformats.org/drawingml/2006/main" prst="ellipse">
+            <a:avLst/>
+          </a:prstGeom>
+          <a:solidFill xmlns:a="http://schemas.openxmlformats.org/drawingml/2006/main">
+            <a:srgbClr val="7438F5"/>
+          </a:solidFill>
+          <a:ln xmlns:a="http://schemas.openxmlformats.org/drawingml/2006/main" w="0">
+            <a:solidFill>
+              <a:srgbClr val="7438F5"/>
+            </a:solidFill>
+            <a:prstDash val="solid"/>
+          </a:ln>
+        </p:spPr>
+      </p:sp>
+      <p:sp>
+        <p:nvSpPr>
+          <p:cNvPr id="19" name="s3-z-letter">
+            <a:extLst xmlns:a="http://schemas.openxmlformats.org/drawingml/2006/main">
+              <a:ext uri="{FF2B5EF4-FFF2-40B4-BE49-F238E27FC236}">
+                <a16:creationId xmlns:a16="http://schemas.microsoft.com/office/drawing/2014/main" id="{C9AF575A-471D-4091-8622-1767B8A1B51E}"/>
+              </a:ext>
+            </a:extLst>
+          </p:cNvPr>
+          <p:cNvSpPr>
+            <a:spLocks xmlns:a="http://schemas.openxmlformats.org/drawingml/2006/main" noGrp="1"/>
+          </p:cNvSpPr>
+          <p:nvPr/>
+        </p:nvSpPr>
+        <p:spPr>
+          <a:xfrm xmlns:a="http://schemas.openxmlformats.org/drawingml/2006/main">
+            <a:off x="666750" y="4495800"/>
+            <a:ext cx="533400" cy="304800"/>
+          </a:xfrm>
+          <a:prstGeom xmlns:a="http://schemas.openxmlformats.org/drawingml/2006/main" prst="rect">
+            <a:avLst/>
+          </a:prstGeom>
+        </p:spPr>
+        <p:txBody>
+          <a:bodyPr xmlns:a="http://schemas.openxmlformats.org/drawingml/2006/main" wrap="square" lIns="0" tIns="0" rIns="0" bIns="0" anchor="t">
+            <a:noAutofit/>
+          </a:bodyPr>
+          <a:lstStyle xmlns:a="http://schemas.openxmlformats.org/drawingml/2006/main"/>
+          <a:p xmlns:a="http://schemas.openxmlformats.org/drawingml/2006/main">
+            <a:pPr algn="ctr">
+              <a:defRPr sz="1875" b="1">
+                <a:solidFill>
+                  <a:srgbClr val="FFFFFF"/>
+                </a:solidFill>
+                <a:latin typeface="Arial"/>
+                <a:ea typeface="Arial"/>
+                <a:cs typeface="Arial"/>
+              </a:defRPr>
+            </a:pPr>
+            <a:r>
+              <a:t>Z</a:t>
+            </a:r>
+          </a:p>
+        </p:txBody>
+      </p:sp>
+      <p:sp>
+        <p:nvSpPr>
+          <p:cNvPr id="20" name="s3-z-label">
+            <a:extLst xmlns:a="http://schemas.openxmlformats.org/drawingml/2006/main">
+              <a:ext uri="{FF2B5EF4-FFF2-40B4-BE49-F238E27FC236}">
+                <a16:creationId xmlns:a16="http://schemas.microsoft.com/office/drawing/2014/main" id="{37C1AF48-C7AA-4752-AE7D-66D80FA4C792}"/>
+              </a:ext>
+            </a:extLst>
+          </p:cNvPr>
+          <p:cNvSpPr>
+            <a:spLocks xmlns:a="http://schemas.openxmlformats.org/drawingml/2006/main" noGrp="1"/>
+          </p:cNvSpPr>
+          <p:nvPr/>
+        </p:nvSpPr>
+        <p:spPr>
+          <a:xfrm xmlns:a="http://schemas.openxmlformats.org/drawingml/2006/main">
+            <a:off x="1428750" y="4314825"/>
+            <a:ext cx="4762500" cy="247650"/>
+          </a:xfrm>
+          <a:prstGeom xmlns:a="http://schemas.openxmlformats.org/drawingml/2006/main" prst="rect">
+            <a:avLst/>
+          </a:prstGeom>
+        </p:spPr>
+        <p:txBody>
+          <a:bodyPr xmlns:a="http://schemas.openxmlformats.org/drawingml/2006/main" wrap="square" lIns="0" tIns="0" rIns="0" bIns="0" anchor="t">
+            <a:noAutofit/>
+          </a:bodyPr>
+          <a:lstStyle xmlns:a="http://schemas.openxmlformats.org/drawingml/2006/main"/>
+          <a:p xmlns:a="http://schemas.openxmlformats.org/drawingml/2006/main">
+            <a:pPr algn="l">
+              <a:defRPr sz="1275" b="1">
+                <a:solidFill>
+                  <a:srgbClr val="7438F5"/>
+                </a:solidFill>
+                <a:latin typeface="Arial"/>
+                <a:ea typeface="Arial"/>
+                <a:cs typeface="Arial"/>
+              </a:defRPr>
+            </a:pPr>
+            <a:r>
+              <a:t>Z / INSPECTION DEPTH</a:t>
+            </a:r>
+          </a:p>
+        </p:txBody>
+      </p:sp>
+      <p:sp>
+        <p:nvSpPr>
+          <p:cNvPr id="21" name="s3-z-main">
+            <a:extLst xmlns:a="http://schemas.openxmlformats.org/drawingml/2006/main">
+              <a:ext uri="{FF2B5EF4-FFF2-40B4-BE49-F238E27FC236}">
+                <a16:creationId xmlns:a16="http://schemas.microsoft.com/office/drawing/2014/main" id="{50EDBA67-BA95-4261-B2F8-BB667D4C96D4}"/>
+              </a:ext>
+            </a:extLst>
+          </p:cNvPr>
+          <p:cNvSpPr>
+            <a:spLocks xmlns:a="http://schemas.openxmlformats.org/drawingml/2006/main" noGrp="1"/>
+          </p:cNvSpPr>
+          <p:nvPr/>
+        </p:nvSpPr>
+        <p:spPr>
+          <a:xfrm xmlns:a="http://schemas.openxmlformats.org/drawingml/2006/main">
+            <a:off x="1428750" y="4619625"/>
+            <a:ext cx="4762500" cy="323850"/>
+          </a:xfrm>
+          <a:prstGeom xmlns:a="http://schemas.openxmlformats.org/drawingml/2006/main" prst="rect">
+            <a:avLst/>
+          </a:prstGeom>
+        </p:spPr>
+        <p:txBody>
+          <a:bodyPr xmlns:a="http://schemas.openxmlformats.org/drawingml/2006/main" wrap="square" lIns="0" tIns="0" rIns="0" bIns="0" anchor="t">
+            <a:noAutofit/>
+          </a:bodyPr>
+          <a:lstStyle xmlns:a="http://schemas.openxmlformats.org/drawingml/2006/main"/>
+          <a:p xmlns:a="http://schemas.openxmlformats.org/drawingml/2006/main">
+            <a:pPr algn="l">
+              <a:defRPr sz="1575" b="1">
+                <a:solidFill>
+                  <a:srgbClr val="0A1224"/>
+                </a:solidFill>
+                <a:latin typeface="Consolas"/>
+                <a:ea typeface="Consolas"/>
+                <a:cs typeface="Consolas"/>
+              </a:defRPr>
+            </a:pPr>
+            <a:r>
+              <a:t>room  -&gt;  file  -&gt;  symbol  -&gt;  snippet</a:t>
+            </a:r>
+          </a:p>
+        </p:txBody>
+      </p:sp>
+      <p:sp>
+        <p:nvSpPr>
+          <p:cNvPr id="22" name="s3-z-question">
+            <a:extLst xmlns:a="http://schemas.openxmlformats.org/drawingml/2006/main">
+              <a:ext uri="{FF2B5EF4-FFF2-40B4-BE49-F238E27FC236}">
+                <a16:creationId xmlns:a16="http://schemas.microsoft.com/office/drawing/2014/main" id="{68AF6718-973A-49F5-8400-6B306BE536AA}"/>
+              </a:ext>
+            </a:extLst>
+          </p:cNvPr>
+          <p:cNvSpPr>
+            <a:spLocks xmlns:a="http://schemas.openxmlformats.org/drawingml/2006/main" noGrp="1"/>
+          </p:cNvSpPr>
+          <p:nvPr/>
+        </p:nvSpPr>
+        <p:spPr>
+          <a:xfrm xmlns:a="http://schemas.openxmlformats.org/drawingml/2006/main">
+            <a:off x="1428750" y="4991100"/>
+            <a:ext cx="4762500" cy="228600"/>
+          </a:xfrm>
+          <a:prstGeom xmlns:a="http://schemas.openxmlformats.org/drawingml/2006/main" prst="rect">
+            <a:avLst/>
+          </a:prstGeom>
+        </p:spPr>
+        <p:txBody>
+          <a:bodyPr xmlns:a="http://schemas.openxmlformats.org/drawingml/2006/main" wrap="square" lIns="0" tIns="0" rIns="0" bIns="0" anchor="t">
+            <a:noAutofit/>
+          </a:bodyPr>
+          <a:lstStyle xmlns:a="http://schemas.openxmlformats.org/drawingml/2006/main"/>
+          <a:p xmlns:a="http://schemas.openxmlformats.org/drawingml/2006/main">
+            <a:pPr algn="l">
+              <a:defRPr sz="1200" b="0">
+                <a:solidFill>
+                  <a:srgbClr val="526071"/>
+                </a:solidFill>
+                <a:latin typeface="Arial"/>
+                <a:ea typeface="Arial"/>
+                <a:cs typeface="Arial"/>
+              </a:defRPr>
+            </a:pPr>
+            <a:r>
+              <a:t>How much context is needed?</a:t>
+            </a:r>
+          </a:p>
+        </p:txBody>
+      </p:sp>
+      <p:sp>
+        <p:nvSpPr>
+          <p:cNvPr id="23" name="s3-address-label">
+            <a:extLst xmlns:a="http://schemas.openxmlformats.org/drawingml/2006/main">
+              <a:ext uri="{FF2B5EF4-FFF2-40B4-BE49-F238E27FC236}">
+                <a16:creationId xmlns:a16="http://schemas.microsoft.com/office/drawing/2014/main" id="{56C49C60-F960-4024-B649-BBECCB4D8BAE}"/>
+              </a:ext>
+            </a:extLst>
+          </p:cNvPr>
+          <p:cNvSpPr>
+            <a:spLocks xmlns:a="http://schemas.openxmlformats.org/drawingml/2006/main" noGrp="1"/>
+          </p:cNvSpPr>
+          <p:nvPr/>
+        </p:nvSpPr>
+        <p:spPr>
+          <a:xfrm xmlns:a="http://schemas.openxmlformats.org/drawingml/2006/main">
+            <a:off x="7219950" y="2095500"/>
+            <a:ext cx="4038600" cy="228600"/>
+          </a:xfrm>
+          <a:prstGeom xmlns:a="http://schemas.openxmlformats.org/drawingml/2006/main" prst="rect">
+            <a:avLst/>
+          </a:prstGeom>
+        </p:spPr>
+        <p:txBody>
+          <a:bodyPr xmlns:a="http://schemas.openxmlformats.org/drawingml/2006/main" wrap="square" lIns="0" tIns="0" rIns="0" bIns="0" anchor="t">
+            <a:noAutofit/>
+          </a:bodyPr>
+          <a:lstStyle xmlns:a="http://schemas.openxmlformats.org/drawingml/2006/main"/>
+          <a:p xmlns:a="http://schemas.openxmlformats.org/drawingml/2006/main">
+            <a:pPr algn="l">
+              <a:defRPr sz="1200" b="1">
+                <a:solidFill>
+                  <a:srgbClr val="13B7D5"/>
+                </a:solidFill>
+                <a:latin typeface="Arial"/>
+                <a:ea typeface="Arial"/>
+                <a:cs typeface="Arial"/>
+              </a:defRPr>
+            </a:pPr>
+            <a:r>
+              <a:t>ONE ADDRESS</a:t>
+            </a:r>
+          </a:p>
+        </p:txBody>
+      </p:sp>
+      <p:sp>
+        <p:nvSpPr>
+          <p:cNvPr id="24" name="s3-address-x">
+            <a:extLst xmlns:a="http://schemas.openxmlformats.org/drawingml/2006/main">
+              <a:ext uri="{FF2B5EF4-FFF2-40B4-BE49-F238E27FC236}">
+                <a16:creationId xmlns:a16="http://schemas.microsoft.com/office/drawing/2014/main" id="{5D4E6A4E-4672-48D8-A777-D4732DE0CB03}"/>
+              </a:ext>
+            </a:extLst>
+          </p:cNvPr>
+          <p:cNvSpPr>
+            <a:spLocks xmlns:a="http://schemas.openxmlformats.org/drawingml/2006/main" noGrp="1"/>
+          </p:cNvSpPr>
+          <p:nvPr/>
+        </p:nvSpPr>
+        <p:spPr>
+          <a:xfrm xmlns:a="http://schemas.openxmlformats.org/drawingml/2006/main">
+            <a:off x="7219950" y="2724150"/>
+            <a:ext cx="323850" cy="285750"/>
+          </a:xfrm>
+          <a:prstGeom xmlns:a="http://schemas.openxmlformats.org/drawingml/2006/main" prst="rect">
+            <a:avLst/>
+          </a:prstGeom>
+        </p:spPr>
+        <p:txBody>
+          <a:bodyPr xmlns:a="http://schemas.openxmlformats.org/drawingml/2006/main" wrap="square" lIns="0" tIns="0" rIns="0" bIns="0" anchor="t">
+            <a:noAutofit/>
+          </a:bodyPr>
+          <a:lstStyle xmlns:a="http://schemas.openxmlformats.org/drawingml/2006/main"/>
+          <a:p xmlns:a="http://schemas.openxmlformats.org/drawingml/2006/main">
+            <a:pPr algn="l">
+              <a:defRPr sz="1575" b="1">
+                <a:solidFill>
+                  <a:srgbClr val="13B7D5"/>
+                </a:solidFill>
+                <a:latin typeface="Arial"/>
+                <a:ea typeface="Arial"/>
+                <a:cs typeface="Arial"/>
+              </a:defRPr>
+            </a:pPr>
+            <a:r>
+              <a:t>X</a:t>
+            </a:r>
+          </a:p>
+        </p:txBody>
+      </p:sp>
+      <p:sp>
+        <p:nvSpPr>
+          <p:cNvPr id="25" name="s3-address-x-value">
+            <a:extLst xmlns:a="http://schemas.openxmlformats.org/drawingml/2006/main">
+              <a:ext uri="{FF2B5EF4-FFF2-40B4-BE49-F238E27FC236}">
+                <a16:creationId xmlns:a16="http://schemas.microsoft.com/office/drawing/2014/main" id="{FA1A2287-AF2D-4062-B309-4E7B6A0CF5A3}"/>
+              </a:ext>
+            </a:extLst>
+          </p:cNvPr>
+          <p:cNvSpPr>
+            <a:spLocks xmlns:a="http://schemas.openxmlformats.org/drawingml/2006/main" noGrp="1"/>
+          </p:cNvSpPr>
+          <p:nvPr/>
+        </p:nvSpPr>
+        <p:spPr>
+          <a:xfrm xmlns:a="http://schemas.openxmlformats.org/drawingml/2006/main">
+            <a:off x="7734300" y="2705100"/>
+            <a:ext cx="3333750" cy="304800"/>
+          </a:xfrm>
+          <a:prstGeom xmlns:a="http://schemas.openxmlformats.org/drawingml/2006/main" prst="rect">
+            <a:avLst/>
+          </a:prstGeom>
+        </p:spPr>
+        <p:txBody>
+          <a:bodyPr xmlns:a="http://schemas.openxmlformats.org/drawingml/2006/main" wrap="square" lIns="0" tIns="0" rIns="0" bIns="0" anchor="t">
+            <a:noAutofit/>
+          </a:bodyPr>
+          <a:lstStyle xmlns:a="http://schemas.openxmlformats.org/drawingml/2006/main"/>
+          <a:p xmlns:a="http://schemas.openxmlformats.org/drawingml/2006/main">
+            <a:pPr algn="l">
+              <a:defRPr sz="1800" b="1">
+                <a:solidFill>
+                  <a:srgbClr val="FFFFFF"/>
+                </a:solidFill>
+                <a:latin typeface="Consolas"/>
+                <a:ea typeface="Consolas"/>
+                <a:cs typeface="Consolas"/>
+              </a:defRPr>
+            </a:pPr>
+            <a:r>
+              <a:t>checkout</a:t>
+            </a:r>
+          </a:p>
+        </p:txBody>
+      </p:sp>
+      <p:sp>
+        <p:nvSpPr>
+          <p:cNvPr id="26" name="s3-address-y">
+            <a:extLst xmlns:a="http://schemas.openxmlformats.org/drawingml/2006/main">
+              <a:ext uri="{FF2B5EF4-FFF2-40B4-BE49-F238E27FC236}">
+                <a16:creationId xmlns:a16="http://schemas.microsoft.com/office/drawing/2014/main" id="{1C64F50B-ABC3-4A7D-916E-655145729645}"/>
+              </a:ext>
+            </a:extLst>
+          </p:cNvPr>
+          <p:cNvSpPr>
+            <a:spLocks xmlns:a="http://schemas.openxmlformats.org/drawingml/2006/main" noGrp="1"/>
+          </p:cNvSpPr>
+          <p:nvPr/>
+        </p:nvSpPr>
+        <p:spPr>
+          <a:xfrm xmlns:a="http://schemas.openxmlformats.org/drawingml/2006/main">
+            <a:off x="7219950" y="3257550"/>
+            <a:ext cx="323850" cy="285750"/>
+          </a:xfrm>
+          <a:prstGeom xmlns:a="http://schemas.openxmlformats.org/drawingml/2006/main" prst="rect">
+            <a:avLst/>
+          </a:prstGeom>
+        </p:spPr>
+        <p:txBody>
+          <a:bodyPr xmlns:a="http://schemas.openxmlformats.org/drawingml/2006/main" wrap="square" lIns="0" tIns="0" rIns="0" bIns="0" anchor="t">
+            <a:noAutofit/>
+          </a:bodyPr>
+          <a:lstStyle xmlns:a="http://schemas.openxmlformats.org/drawingml/2006/main"/>
+          <a:p xmlns:a="http://schemas.openxmlformats.org/drawingml/2006/main">
+            <a:pPr algn="l">
+              <a:defRPr sz="1575" b="1">
+                <a:solidFill>
+                  <a:srgbClr val="1677FF"/>
+                </a:solidFill>
+                <a:latin typeface="Arial"/>
+                <a:ea typeface="Arial"/>
+                <a:cs typeface="Arial"/>
+              </a:defRPr>
+            </a:pPr>
+            <a:r>
+              <a:t>Y</a:t>
+            </a:r>
+          </a:p>
+        </p:txBody>
+      </p:sp>
+      <p:sp>
+        <p:nvSpPr>
+          <p:cNvPr id="27" name="s3-address-y-value">
+            <a:extLst xmlns:a="http://schemas.openxmlformats.org/drawingml/2006/main">
+              <a:ext uri="{FF2B5EF4-FFF2-40B4-BE49-F238E27FC236}">
+                <a16:creationId xmlns:a16="http://schemas.microsoft.com/office/drawing/2014/main" id="{00430B53-3183-484D-A26F-8D1D790939B4}"/>
+              </a:ext>
+            </a:extLst>
+          </p:cNvPr>
+          <p:cNvSpPr>
+            <a:spLocks xmlns:a="http://schemas.openxmlformats.org/drawingml/2006/main" noGrp="1"/>
+          </p:cNvSpPr>
+          <p:nvPr/>
+        </p:nvSpPr>
+        <p:spPr>
+          <a:xfrm xmlns:a="http://schemas.openxmlformats.org/drawingml/2006/main">
+            <a:off x="7734300" y="3238500"/>
+            <a:ext cx="3333750" cy="304800"/>
+          </a:xfrm>
+          <a:prstGeom xmlns:a="http://schemas.openxmlformats.org/drawingml/2006/main" prst="rect">
+            <a:avLst/>
+          </a:prstGeom>
+        </p:spPr>
+        <p:txBody>
+          <a:bodyPr xmlns:a="http://schemas.openxmlformats.org/drawingml/2006/main" wrap="square" lIns="0" tIns="0" rIns="0" bIns="0" anchor="t">
+            <a:noAutofit/>
+          </a:bodyPr>
+          <a:lstStyle xmlns:a="http://schemas.openxmlformats.org/drawingml/2006/main"/>
+          <a:p xmlns:a="http://schemas.openxmlformats.org/drawingml/2006/main">
+            <a:pPr algn="l">
+              <a:defRPr sz="1800" b="1">
+                <a:solidFill>
+                  <a:srgbClr val="FFFFFF"/>
+                </a:solidFill>
+                <a:latin typeface="Consolas"/>
+                <a:ea typeface="Consolas"/>
+                <a:cs typeface="Consolas"/>
+              </a:defRPr>
+            </a:pPr>
+            <a:r>
+              <a:t>implementation</a:t>
+            </a:r>
+          </a:p>
+        </p:txBody>
+      </p:sp>
+      <p:sp>
+        <p:nvSpPr>
+          <p:cNvPr id="28" name="s3-address-z">
+            <a:extLst xmlns:a="http://schemas.openxmlformats.org/drawingml/2006/main">
+              <a:ext uri="{FF2B5EF4-FFF2-40B4-BE49-F238E27FC236}">
+                <a16:creationId xmlns:a16="http://schemas.microsoft.com/office/drawing/2014/main" id="{B9B4EA29-BD3A-4D45-ACA1-90CB0078B621}"/>
+              </a:ext>
+            </a:extLst>
+          </p:cNvPr>
+          <p:cNvSpPr>
+            <a:spLocks xmlns:a="http://schemas.openxmlformats.org/drawingml/2006/main" noGrp="1"/>
+          </p:cNvSpPr>
+          <p:nvPr/>
+        </p:nvSpPr>
+        <p:spPr>
+          <a:xfrm xmlns:a="http://schemas.openxmlformats.org/drawingml/2006/main">
+            <a:off x="7219950" y="3790950"/>
+            <a:ext cx="323850" cy="285750"/>
+          </a:xfrm>
+          <a:prstGeom xmlns:a="http://schemas.openxmlformats.org/drawingml/2006/main" prst="rect">
+            <a:avLst/>
+          </a:prstGeom>
+        </p:spPr>
+        <p:txBody>
+          <a:bodyPr xmlns:a="http://schemas.openxmlformats.org/drawingml/2006/main" wrap="square" lIns="0" tIns="0" rIns="0" bIns="0" anchor="t">
+            <a:noAutofit/>
+          </a:bodyPr>
+          <a:lstStyle xmlns:a="http://schemas.openxmlformats.org/drawingml/2006/main"/>
+          <a:p xmlns:a="http://schemas.openxmlformats.org/drawingml/2006/main">
+            <a:pPr algn="l">
+              <a:defRPr sz="1575" b="1">
+                <a:solidFill>
+                  <a:srgbClr val="7438F5"/>
+                </a:solidFill>
+                <a:latin typeface="Arial"/>
+                <a:ea typeface="Arial"/>
+                <a:cs typeface="Arial"/>
+              </a:defRPr>
+            </a:pPr>
+            <a:r>
+              <a:t>Z</a:t>
+            </a:r>
+          </a:p>
+        </p:txBody>
+      </p:sp>
+      <p:sp>
+        <p:nvSpPr>
+          <p:cNvPr id="29" name="s3-address-z-value">
+            <a:extLst xmlns:a="http://schemas.openxmlformats.org/drawingml/2006/main">
+              <a:ext uri="{FF2B5EF4-FFF2-40B4-BE49-F238E27FC236}">
+                <a16:creationId xmlns:a16="http://schemas.microsoft.com/office/drawing/2014/main" id="{7D5C5B7B-DC57-4802-97DE-FD5C0729FD15}"/>
+              </a:ext>
+            </a:extLst>
+          </p:cNvPr>
+          <p:cNvSpPr>
+            <a:spLocks xmlns:a="http://schemas.openxmlformats.org/drawingml/2006/main" noGrp="1"/>
+          </p:cNvSpPr>
+          <p:nvPr/>
+        </p:nvSpPr>
+        <p:spPr>
+          <a:xfrm xmlns:a="http://schemas.openxmlformats.org/drawingml/2006/main">
+            <a:off x="7734300" y="3771900"/>
+            <a:ext cx="3333750" cy="304800"/>
+          </a:xfrm>
+          <a:prstGeom xmlns:a="http://schemas.openxmlformats.org/drawingml/2006/main" prst="rect">
+            <a:avLst/>
+          </a:prstGeom>
+        </p:spPr>
+        <p:txBody>
+          <a:bodyPr xmlns:a="http://schemas.openxmlformats.org/drawingml/2006/main" wrap="square" lIns="0" tIns="0" rIns="0" bIns="0" anchor="t">
+            <a:noAutofit/>
+          </a:bodyPr>
+          <a:lstStyle xmlns:a="http://schemas.openxmlformats.org/drawingml/2006/main"/>
+          <a:p xmlns:a="http://schemas.openxmlformats.org/drawingml/2006/main">
+            <a:pPr algn="l">
+              <a:defRPr sz="1800" b="1">
+                <a:solidFill>
+                  <a:srgbClr val="FFFFFF"/>
+                </a:solidFill>
+                <a:latin typeface="Consolas"/>
+                <a:ea typeface="Consolas"/>
+                <a:cs typeface="Consolas"/>
+              </a:defRPr>
+            </a:pPr>
+            <a:r>
+              <a:t>shippingQuote()</a:t>
+            </a:r>
+          </a:p>
+        </p:txBody>
+      </p:sp>
+      <p:sp>
+        <p:nvSpPr>
+          <p:cNvPr id="30" name="s3-address-note">
+            <a:extLst xmlns:a="http://schemas.openxmlformats.org/drawingml/2006/main">
+              <a:ext uri="{FF2B5EF4-FFF2-40B4-BE49-F238E27FC236}">
+                <a16:creationId xmlns:a16="http://schemas.microsoft.com/office/drawing/2014/main" id="{421D33AB-5D71-4F46-A6AC-7F25D9920FC1}"/>
+              </a:ext>
+            </a:extLst>
+          </p:cNvPr>
+          <p:cNvSpPr>
+            <a:spLocks xmlns:a="http://schemas.openxmlformats.org/drawingml/2006/main" noGrp="1"/>
+          </p:cNvSpPr>
+          <p:nvPr/>
+        </p:nvSpPr>
+        <p:spPr>
+          <a:xfrm xmlns:a="http://schemas.openxmlformats.org/drawingml/2006/main">
+            <a:off x="7219950" y="4476750"/>
+            <a:ext cx="4038600" cy="323850"/>
+          </a:xfrm>
+          <a:prstGeom xmlns:a="http://schemas.openxmlformats.org/drawingml/2006/main" prst="rect">
+            <a:avLst/>
+          </a:prstGeom>
+        </p:spPr>
+        <p:txBody>
+          <a:bodyPr xmlns:a="http://schemas.openxmlformats.org/drawingml/2006/main" wrap="square" lIns="0" tIns="0" rIns="0" bIns="0" anchor="t">
+            <a:noAutofit/>
+          </a:bodyPr>
+          <a:lstStyle xmlns:a="http://schemas.openxmlformats.org/drawingml/2006/main"/>
+          <a:p xmlns:a="http://schemas.openxmlformats.org/drawingml/2006/main">
+            <a:pPr algn="l">
+              <a:defRPr sz="1500" b="0">
+                <a:solidFill>
+                  <a:srgbClr val="9CC8FF"/>
+                </a:solidFill>
+                <a:latin typeface="Arial"/>
+                <a:ea typeface="Arial"/>
+                <a:cs typeface="Arial"/>
+              </a:defRPr>
+            </a:pPr>
+            <a:r>
+              <a:t>One bounded entry point.</a:t>
+            </a:r>
+          </a:p>
+        </p:txBody>
+      </p:sp>
+      <p:sp>
+        <p:nvSpPr>
+          <p:cNvPr id="31" name="s3-route-label">
+            <a:extLst xmlns:a="http://schemas.openxmlformats.org/drawingml/2006/main">
+              <a:ext uri="{FF2B5EF4-FFF2-40B4-BE49-F238E27FC236}">
+                <a16:creationId xmlns:a16="http://schemas.microsoft.com/office/drawing/2014/main" id="{EF313E81-650E-4030-BF44-92E9BB016C9F}"/>
+              </a:ext>
+            </a:extLst>
+          </p:cNvPr>
+          <p:cNvSpPr>
+            <a:spLocks xmlns:a="http://schemas.openxmlformats.org/drawingml/2006/main" noGrp="1"/>
+          </p:cNvSpPr>
+          <p:nvPr/>
+        </p:nvSpPr>
+        <p:spPr>
+          <a:xfrm xmlns:a="http://schemas.openxmlformats.org/drawingml/2006/main">
+            <a:off x="6858000" y="5276850"/>
+            <a:ext cx="742950" cy="228600"/>
+          </a:xfrm>
+          <a:prstGeom xmlns:a="http://schemas.openxmlformats.org/drawingml/2006/main" prst="rect">
+            <a:avLst/>
+          </a:prstGeom>
+        </p:spPr>
+        <p:txBody>
+          <a:bodyPr xmlns:a="http://schemas.openxmlformats.org/drawingml/2006/main" wrap="square" lIns="0" tIns="0" rIns="0" bIns="0" anchor="t">
+            <a:noAutofit/>
+          </a:bodyPr>
+          <a:lstStyle xmlns:a="http://schemas.openxmlformats.org/drawingml/2006/main"/>
+          <a:p xmlns:a="http://schemas.openxmlformats.org/drawingml/2006/main">
+            <a:pPr algn="l">
+              <a:defRPr sz="1200" b="1">
+                <a:solidFill>
+                  <a:srgbClr val="15A777"/>
+                </a:solidFill>
+                <a:latin typeface="Arial"/>
+                <a:ea typeface="Arial"/>
+                <a:cs typeface="Arial"/>
+              </a:defRPr>
+            </a:pPr>
+            <a:r>
+              <a:t>ROUTE</a:t>
+            </a:r>
+          </a:p>
+        </p:txBody>
+      </p:sp>
+      <p:sp>
+        <p:nvSpPr>
+          <p:cNvPr id="32" name="s3-route-main">
+            <a:extLst xmlns:a="http://schemas.openxmlformats.org/drawingml/2006/main">
+              <a:ext uri="{FF2B5EF4-FFF2-40B4-BE49-F238E27FC236}">
+                <a16:creationId xmlns:a16="http://schemas.microsoft.com/office/drawing/2014/main" id="{2C909F8F-4FE0-471F-850E-769B320FA499}"/>
+              </a:ext>
+            </a:extLst>
+          </p:cNvPr>
+          <p:cNvSpPr>
+            <a:spLocks xmlns:a="http://schemas.openxmlformats.org/drawingml/2006/main" noGrp="1"/>
+          </p:cNvSpPr>
+          <p:nvPr/>
+        </p:nvSpPr>
+        <p:spPr>
+          <a:xfrm xmlns:a="http://schemas.openxmlformats.org/drawingml/2006/main">
+            <a:off x="7639050" y="5276850"/>
+            <a:ext cx="3981450" cy="228600"/>
+          </a:xfrm>
+          <a:prstGeom xmlns:a="http://schemas.openxmlformats.org/drawingml/2006/main" prst="rect">
+            <a:avLst/>
+          </a:prstGeom>
+        </p:spPr>
+        <p:txBody>
+          <a:bodyPr xmlns:a="http://schemas.openxmlformats.org/drawingml/2006/main" wrap="square" lIns="0" tIns="0" rIns="0" bIns="0" anchor="t">
+            <a:noAutofit/>
+          </a:bodyPr>
+          <a:lstStyle xmlns:a="http://schemas.openxmlformats.org/drawingml/2006/main"/>
+          <a:p xmlns:a="http://schemas.openxmlformats.org/drawingml/2006/main">
+            <a:pPr algn="l">
+              <a:defRPr sz="1200" b="0">
+                <a:solidFill>
+                  <a:srgbClr val="526071"/>
+                </a:solidFill>
+                <a:latin typeface="Arial"/>
+                <a:ea typeface="Arial"/>
+                <a:cs typeface="Arial"/>
+              </a:defRPr>
+            </a:pPr>
+            <a:r>
+              <a:t>task-specific path between addresses</a:t>
+            </a:r>
+          </a:p>
+        </p:txBody>
+      </p:sp>
+      <p:sp>
+        <p:nvSpPr>
+          <p:cNvPr id="33" name="s3-memory-label">
+            <a:extLst xmlns:a="http://schemas.openxmlformats.org/drawingml/2006/main">
+              <a:ext uri="{FF2B5EF4-FFF2-40B4-BE49-F238E27FC236}">
+                <a16:creationId xmlns:a16="http://schemas.microsoft.com/office/drawing/2014/main" id="{C0174A6C-1C5E-42CF-8B90-7FCD8A11AE0F}"/>
+              </a:ext>
+            </a:extLst>
+          </p:cNvPr>
+          <p:cNvSpPr>
+            <a:spLocks xmlns:a="http://schemas.openxmlformats.org/drawingml/2006/main" noGrp="1"/>
+          </p:cNvSpPr>
+          <p:nvPr/>
+        </p:nvSpPr>
+        <p:spPr>
+          <a:xfrm xmlns:a="http://schemas.openxmlformats.org/drawingml/2006/main">
+            <a:off x="6858000" y="5581650"/>
+            <a:ext cx="800100" cy="228600"/>
+          </a:xfrm>
+          <a:prstGeom xmlns:a="http://schemas.openxmlformats.org/drawingml/2006/main" prst="rect">
+            <a:avLst/>
+          </a:prstGeom>
+        </p:spPr>
+        <p:txBody>
+          <a:bodyPr xmlns:a="http://schemas.openxmlformats.org/drawingml/2006/main" wrap="square" lIns="0" tIns="0" rIns="0" bIns="0" anchor="t">
+            <a:noAutofit/>
+          </a:bodyPr>
+          <a:lstStyle xmlns:a="http://schemas.openxmlformats.org/drawingml/2006/main"/>
+          <a:p xmlns:a="http://schemas.openxmlformats.org/drawingml/2006/main">
+            <a:pPr algn="l">
+              <a:defRPr sz="1200" b="1">
+                <a:solidFill>
+                  <a:srgbClr val="13B7D5"/>
+                </a:solidFill>
+                <a:latin typeface="Arial"/>
+                <a:ea typeface="Arial"/>
+                <a:cs typeface="Arial"/>
+              </a:defRPr>
+            </a:pPr>
+            <a:r>
+              <a:t>MEMORY</a:t>
+            </a:r>
+          </a:p>
+        </p:txBody>
+      </p:sp>
+      <p:sp>
+        <p:nvSpPr>
+          <p:cNvPr id="34" name="s3-memory-main">
+            <a:extLst xmlns:a="http://schemas.openxmlformats.org/drawingml/2006/main">
+              <a:ext uri="{FF2B5EF4-FFF2-40B4-BE49-F238E27FC236}">
+                <a16:creationId xmlns:a16="http://schemas.microsoft.com/office/drawing/2014/main" id="{56AEA01B-111F-4829-832D-40F634B4AE52}"/>
+              </a:ext>
+            </a:extLst>
+          </p:cNvPr>
+          <p:cNvSpPr>
+            <a:spLocks xmlns:a="http://schemas.openxmlformats.org/drawingml/2006/main" noGrp="1"/>
+          </p:cNvSpPr>
+          <p:nvPr/>
+        </p:nvSpPr>
+        <p:spPr>
+          <a:xfrm xmlns:a="http://schemas.openxmlformats.org/drawingml/2006/main">
+            <a:off x="7696200" y="5581650"/>
+            <a:ext cx="3924300" cy="381000"/>
+          </a:xfrm>
+          <a:prstGeom xmlns:a="http://schemas.openxmlformats.org/drawingml/2006/main" prst="rect">
+            <a:avLst/>
+          </a:prstGeom>
+        </p:spPr>
+        <p:txBody>
+          <a:bodyPr xmlns:a="http://schemas.openxmlformats.org/drawingml/2006/main" wrap="square" lIns="0" tIns="0" rIns="0" bIns="0" anchor="t">
+            <a:noAutofit/>
+          </a:bodyPr>
+          <a:lstStyle xmlns:a="http://schemas.openxmlformats.org/drawingml/2006/main"/>
+          <a:p xmlns:a="http://schemas.openxmlformats.org/drawingml/2006/main">
+            <a:pPr algn="l">
+              <a:defRPr sz="1200" b="0">
+                <a:solidFill>
+                  <a:srgbClr val="526071"/>
+                </a:solidFill>
+                <a:latin typeface="Arial"/>
+                <a:ea typeface="Arial"/>
+                <a:cs typeface="Arial"/>
+              </a:defRPr>
+            </a:pPr>
+            <a:r>
+              <a:t>evidence + pitfalls attached to places, not another axis</a:t>
+            </a:r>
+          </a:p>
+        </p:txBody>
+      </p:sp>
+      <p:cxnSp>
+        <p:nvCxnSpPr>
+          <p:cNvPr id="72" name="footer-rule-3"/>
+          <p:cNvCxnSpPr/>
+          <p:nvPr/>
+        </p:nvCxnSpPr>
+        <p:spPr>
+          <a:xfrm xmlns:a="http://schemas.openxmlformats.org/drawingml/2006/main">
+            <a:off x="400050" y="6162675"/>
+            <a:ext cx="11391900" cy="953"/>
+          </a:xfrm>
+          <a:prstGeom xmlns:a="http://schemas.openxmlformats.org/drawingml/2006/main" prst="straightConnector1">
+            <a:avLst/>
+          </a:prstGeom>
+          <a:ln xmlns:a="http://schemas.openxmlformats.org/drawingml/2006/main" w="9525">
+            <a:solidFill>
+              <a:srgbClr val="B8BCC4"/>
+            </a:solidFill>
+            <a:prstDash val="solid"/>
+          </a:ln>
+        </p:spPr>
+      </p:cxnSp>
+      <p:sp>
+        <p:nvSpPr>
+          <p:cNvPr id="36" name="footer-source-3">
+            <a:extLst xmlns:a="http://schemas.openxmlformats.org/drawingml/2006/main">
+              <a:ext uri="{FF2B5EF4-FFF2-40B4-BE49-F238E27FC236}">
+                <a16:creationId xmlns:a16="http://schemas.microsoft.com/office/drawing/2014/main" id="{D10B03C9-48D9-4057-9B40-17585A3E129D}"/>
+              </a:ext>
+            </a:extLst>
+          </p:cNvPr>
+          <p:cNvSpPr>
+            <a:spLocks xmlns:a="http://schemas.openxmlformats.org/drawingml/2006/main" noGrp="1"/>
+          </p:cNvSpPr>
+          <p:nvPr/>
+        </p:nvSpPr>
+        <p:spPr>
+          <a:xfrm xmlns:a="http://schemas.openxmlformats.org/drawingml/2006/main">
+            <a:off x="400050" y="6238875"/>
+            <a:ext cx="10001250" cy="228600"/>
+          </a:xfrm>
+          <a:prstGeom xmlns:a="http://schemas.openxmlformats.org/drawingml/2006/main" prst="rect">
+            <a:avLst/>
+          </a:prstGeom>
+        </p:spPr>
+        <p:txBody>
+          <a:bodyPr xmlns:a="http://schemas.openxmlformats.org/drawingml/2006/main" wrap="square" lIns="0" tIns="0" rIns="0" bIns="0" anchor="t">
+            <a:noAutofit/>
+          </a:bodyPr>
+          <a:lstStyle xmlns:a="http://schemas.openxmlformats.org/drawingml/2006/main"/>
+          <a:p xmlns:a="http://schemas.openxmlformats.org/drawingml/2006/main">
+            <a:pPr algn="l">
+              <a:defRPr sz="863" b="0">
+                <a:solidFill>
+                  <a:srgbClr val="526071"/>
+                </a:solidFill>
+                <a:latin typeface="Arial"/>
+                <a:ea typeface="Arial"/>
+                <a:cs typeface="Arial"/>
+              </a:defRPr>
+            </a:pPr>
+            <a:r>
+              <a:t/>
+            </a:r>
+          </a:p>
+        </p:txBody>
+      </p:sp>
+      <p:sp>
+        <p:nvSpPr>
+          <p:cNvPr id="37" name="footer-number-3">
+            <a:extLst xmlns:a="http://schemas.openxmlformats.org/drawingml/2006/main">
+              <a:ext uri="{FF2B5EF4-FFF2-40B4-BE49-F238E27FC236}">
+                <a16:creationId xmlns:a16="http://schemas.microsoft.com/office/drawing/2014/main" id="{31774030-2F81-49CB-97FA-5B99F41CE831}"/>
+              </a:ext>
+            </a:extLst>
+          </p:cNvPr>
+          <p:cNvSpPr>
+            <a:spLocks xmlns:a="http://schemas.openxmlformats.org/drawingml/2006/main" noGrp="1"/>
+          </p:cNvSpPr>
+          <p:nvPr/>
+        </p:nvSpPr>
+        <p:spPr>
+          <a:xfrm xmlns:a="http://schemas.openxmlformats.org/drawingml/2006/main">
+            <a:off x="11258550" y="6238875"/>
+            <a:ext cx="533400" cy="228600"/>
+          </a:xfrm>
+          <a:prstGeom xmlns:a="http://schemas.openxmlformats.org/drawingml/2006/main" prst="rect">
+            <a:avLst/>
+          </a:prstGeom>
+        </p:spPr>
+        <p:txBody>
+          <a:bodyPr xmlns:a="http://schemas.openxmlformats.org/drawingml/2006/main" wrap="square" lIns="0" tIns="0" rIns="0" bIns="0" anchor="t">
+            <a:noAutofit/>
+          </a:bodyPr>
+          <a:lstStyle xmlns:a="http://schemas.openxmlformats.org/drawingml/2006/main"/>
+          <a:p xmlns:a="http://schemas.openxmlformats.org/drawingml/2006/main">
+            <a:pPr algn="r">
+              <a:defRPr sz="900" b="0">
+                <a:solidFill>
+                  <a:srgbClr val="526071"/>
+                </a:solidFill>
+                <a:latin typeface="Arial"/>
+                <a:ea typeface="Arial"/>
+                <a:cs typeface="Arial"/>
+              </a:defRPr>
+            </a:pPr>
+            <a:r>
               <a:t>3</a:t>
             </a:r>
           </a:p>
@@ -4587,7 +5028,7 @@
     </p:spTree>
     <p:extLst>
       <p:ext uri="{BB962C8B-B14F-4D97-AF65-F5344CB8AC3E}">
-        <p14:creationId xmlns:p14="http://schemas.microsoft.com/office/powerpoint/2010/main" val="1758424556"/>
+        <p14:creationId xmlns:p14="http://schemas.microsoft.com/office/powerpoint/2010/main" val="299079171"/>
       </p:ext>
     </p:extLst>
   </p:cSld>
@@ -4618,7 +5059,7 @@
           <p:cNvPr id="26" name="s4-title">
             <a:extLst xmlns:a="http://schemas.openxmlformats.org/drawingml/2006/main">
               <a:ext uri="{FF2B5EF4-FFF2-40B4-BE49-F238E27FC236}">
-                <a16:creationId xmlns:a16="http://schemas.microsoft.com/office/drawing/2014/main" id="{ECA5D961-2EE9-4A5E-B81F-8A9688892170}"/>
+                <a16:creationId xmlns:a16="http://schemas.microsoft.com/office/drawing/2014/main" id="{00A86969-2DF3-4078-B402-F7AAD8552E4E}"/>
               </a:ext>
             </a:extLst>
           </p:cNvPr>
@@ -4663,7 +5104,7 @@
           <p:cNvPr id="2" name="s4-subtitle">
             <a:extLst xmlns:a="http://schemas.openxmlformats.org/drawingml/2006/main">
               <a:ext uri="{FF2B5EF4-FFF2-40B4-BE49-F238E27FC236}">
-                <a16:creationId xmlns:a16="http://schemas.microsoft.com/office/drawing/2014/main" id="{321E7CAC-0FC2-46A7-9274-8A907B2D1403}"/>
+                <a16:creationId xmlns:a16="http://schemas.microsoft.com/office/drawing/2014/main" id="{8DE6C813-311D-4525-8230-6719017C69B7}"/>
               </a:ext>
             </a:extLst>
           </p:cNvPr>
@@ -4708,7 +5149,7 @@
           <p:cNvPr id="3" name="s4-terminal">
             <a:extLst xmlns:a="http://schemas.openxmlformats.org/drawingml/2006/main">
               <a:ext uri="{FF2B5EF4-FFF2-40B4-BE49-F238E27FC236}">
-                <a16:creationId xmlns:a16="http://schemas.microsoft.com/office/drawing/2014/main" id="{DFE91957-DDAD-4185-BD6E-A67F17BD252D}"/>
+                <a16:creationId xmlns:a16="http://schemas.microsoft.com/office/drawing/2014/main" id="{623D79A5-0CD7-49F1-89AB-E36100952572}"/>
               </a:ext>
             </a:extLst>
           </p:cNvPr>
@@ -4765,7 +5206,7 @@
           <p:cNvPr id="5" name="s4-dot1">
             <a:extLst xmlns:a="http://schemas.openxmlformats.org/drawingml/2006/main">
               <a:ext uri="{FF2B5EF4-FFF2-40B4-BE49-F238E27FC236}">
-                <a16:creationId xmlns:a16="http://schemas.microsoft.com/office/drawing/2014/main" id="{DCF94B8F-E198-417E-90D2-D57B6656DB45}"/>
+                <a16:creationId xmlns:a16="http://schemas.microsoft.com/office/drawing/2014/main" id="{144B4091-2CE7-486A-AB5D-1FC014E02C79}"/>
               </a:ext>
             </a:extLst>
           </p:cNvPr>
@@ -4798,7 +5239,7 @@
           <p:cNvPr id="6" name="s4-dot2">
             <a:extLst xmlns:a="http://schemas.openxmlformats.org/drawingml/2006/main">
               <a:ext uri="{FF2B5EF4-FFF2-40B4-BE49-F238E27FC236}">
-                <a16:creationId xmlns:a16="http://schemas.microsoft.com/office/drawing/2014/main" id="{580B3C56-7D5F-472B-BC43-74DBD9CC4587}"/>
+                <a16:creationId xmlns:a16="http://schemas.microsoft.com/office/drawing/2014/main" id="{4EA41AA9-1B9E-4B89-814C-476276CB13E5}"/>
               </a:ext>
             </a:extLst>
           </p:cNvPr>
@@ -4831,7 +5272,7 @@
           <p:cNvPr id="7" name="s4-dot3">
             <a:extLst xmlns:a="http://schemas.openxmlformats.org/drawingml/2006/main">
               <a:ext uri="{FF2B5EF4-FFF2-40B4-BE49-F238E27FC236}">
-                <a16:creationId xmlns:a16="http://schemas.microsoft.com/office/drawing/2014/main" id="{94D12B48-C7BB-495D-87D3-42E1E09F494D}"/>
+                <a16:creationId xmlns:a16="http://schemas.microsoft.com/office/drawing/2014/main" id="{D6447499-3E02-4ADC-8BA9-C1C4ED38FAF0}"/>
               </a:ext>
             </a:extLst>
           </p:cNvPr>
@@ -4864,7 +5305,7 @@
           <p:cNvPr id="8" name="s4-command-label">
             <a:extLst xmlns:a="http://schemas.openxmlformats.org/drawingml/2006/main">
               <a:ext uri="{FF2B5EF4-FFF2-40B4-BE49-F238E27FC236}">
-                <a16:creationId xmlns:a16="http://schemas.microsoft.com/office/drawing/2014/main" id="{6BFAD678-1E01-48C1-9FEB-A1066E6262DA}"/>
+                <a16:creationId xmlns:a16="http://schemas.microsoft.com/office/drawing/2014/main" id="{9820C9DA-EB71-4E0B-97A0-4A86B0E23296}"/>
               </a:ext>
             </a:extLst>
           </p:cNvPr>
@@ -4909,7 +5350,7 @@
           <p:cNvPr id="9" name="s4-command">
             <a:extLst xmlns:a="http://schemas.openxmlformats.org/drawingml/2006/main">
               <a:ext uri="{FF2B5EF4-FFF2-40B4-BE49-F238E27FC236}">
-                <a16:creationId xmlns:a16="http://schemas.microsoft.com/office/drawing/2014/main" id="{BC067BAD-F1B8-430C-A94A-24FD66FB9623}"/>
+                <a16:creationId xmlns:a16="http://schemas.microsoft.com/office/drawing/2014/main" id="{FDE44250-1019-4CB1-B959-5D7046F3E2D4}"/>
               </a:ext>
             </a:extLst>
           </p:cNvPr>
@@ -4958,7 +5399,7 @@
           <p:cNvPr id="10" name="s4-command-note">
             <a:extLst xmlns:a="http://schemas.openxmlformats.org/drawingml/2006/main">
               <a:ext uri="{FF2B5EF4-FFF2-40B4-BE49-F238E27FC236}">
-                <a16:creationId xmlns:a16="http://schemas.microsoft.com/office/drawing/2014/main" id="{B2E2F647-B92F-471E-BE3A-2804F7CE3BA4}"/>
+                <a16:creationId xmlns:a16="http://schemas.microsoft.com/office/drawing/2014/main" id="{1A5E0206-8638-49B0-81E7-631C01FD29F4}"/>
               </a:ext>
             </a:extLst>
           </p:cNvPr>
@@ -5003,7 +5444,7 @@
           <p:cNvPr id="11" name="s4-output-label">
             <a:extLst xmlns:a="http://schemas.openxmlformats.org/drawingml/2006/main">
               <a:ext uri="{FF2B5EF4-FFF2-40B4-BE49-F238E27FC236}">
-                <a16:creationId xmlns:a16="http://schemas.microsoft.com/office/drawing/2014/main" id="{B5358BA2-183D-49E8-89FC-E121568F0B55}"/>
+                <a16:creationId xmlns:a16="http://schemas.microsoft.com/office/drawing/2014/main" id="{929FF591-E607-4BCA-B7A0-76583FDABBCF}"/>
               </a:ext>
             </a:extLst>
           </p:cNvPr>
@@ -5048,7 +5489,7 @@
           <p:cNvPr id="12" name="s4-o1a">
             <a:extLst xmlns:a="http://schemas.openxmlformats.org/drawingml/2006/main">
               <a:ext uri="{FF2B5EF4-FFF2-40B4-BE49-F238E27FC236}">
-                <a16:creationId xmlns:a16="http://schemas.microsoft.com/office/drawing/2014/main" id="{3F3A315A-A832-4508-B97E-057AC5D7B79D}"/>
+                <a16:creationId xmlns:a16="http://schemas.microsoft.com/office/drawing/2014/main" id="{70073B08-FD54-47C7-842B-F62389DA8E6F}"/>
               </a:ext>
             </a:extLst>
           </p:cNvPr>
@@ -5093,7 +5534,7 @@
           <p:cNvPr id="13" name="s4-o1b">
             <a:extLst xmlns:a="http://schemas.openxmlformats.org/drawingml/2006/main">
               <a:ext uri="{FF2B5EF4-FFF2-40B4-BE49-F238E27FC236}">
-                <a16:creationId xmlns:a16="http://schemas.microsoft.com/office/drawing/2014/main" id="{415326A1-EA95-438B-A5A9-078EB0DF7A70}"/>
+                <a16:creationId xmlns:a16="http://schemas.microsoft.com/office/drawing/2014/main" id="{18522825-0F41-47AF-AB09-B27C39F28213}"/>
               </a:ext>
             </a:extLst>
           </p:cNvPr>
@@ -5138,7 +5579,7 @@
           <p:cNvPr id="14" name="s4-o2a">
             <a:extLst xmlns:a="http://schemas.openxmlformats.org/drawingml/2006/main">
               <a:ext uri="{FF2B5EF4-FFF2-40B4-BE49-F238E27FC236}">
-                <a16:creationId xmlns:a16="http://schemas.microsoft.com/office/drawing/2014/main" id="{C150D3AC-C6E0-4280-AB80-17F3590A3FA9}"/>
+                <a16:creationId xmlns:a16="http://schemas.microsoft.com/office/drawing/2014/main" id="{B0C5889C-FCCD-4937-B9E2-87397E2B0363}"/>
               </a:ext>
             </a:extLst>
           </p:cNvPr>
@@ -5183,7 +5624,7 @@
           <p:cNvPr id="15" name="s4-o2b">
             <a:extLst xmlns:a="http://schemas.openxmlformats.org/drawingml/2006/main">
               <a:ext uri="{FF2B5EF4-FFF2-40B4-BE49-F238E27FC236}">
-                <a16:creationId xmlns:a16="http://schemas.microsoft.com/office/drawing/2014/main" id="{9D684430-950D-41C8-A2D1-D44F19D82E41}"/>
+                <a16:creationId xmlns:a16="http://schemas.microsoft.com/office/drawing/2014/main" id="{F0A70C6D-30A9-474C-A86D-A1D898061B2F}"/>
               </a:ext>
             </a:extLst>
           </p:cNvPr>
@@ -5228,7 +5669,7 @@
           <p:cNvPr id="16" name="s4-o3a">
             <a:extLst xmlns:a="http://schemas.openxmlformats.org/drawingml/2006/main">
               <a:ext uri="{FF2B5EF4-FFF2-40B4-BE49-F238E27FC236}">
-                <a16:creationId xmlns:a16="http://schemas.microsoft.com/office/drawing/2014/main" id="{7C63FBB0-FD02-4013-A128-D24B97FAA85B}"/>
+                <a16:creationId xmlns:a16="http://schemas.microsoft.com/office/drawing/2014/main" id="{2799C415-561B-4770-B41F-D8C1ED384CE1}"/>
               </a:ext>
             </a:extLst>
           </p:cNvPr>
@@ -5273,7 +5714,7 @@
           <p:cNvPr id="17" name="s4-o3b">
             <a:extLst xmlns:a="http://schemas.openxmlformats.org/drawingml/2006/main">
               <a:ext uri="{FF2B5EF4-FFF2-40B4-BE49-F238E27FC236}">
-                <a16:creationId xmlns:a16="http://schemas.microsoft.com/office/drawing/2014/main" id="{174A7B0C-D948-4F71-9367-164A398FB2B9}"/>
+                <a16:creationId xmlns:a16="http://schemas.microsoft.com/office/drawing/2014/main" id="{DCBAA2D0-7B07-42B2-A370-0FD5DFDAE56E}"/>
               </a:ext>
             </a:extLst>
           </p:cNvPr>
@@ -5318,7 +5759,7 @@
           <p:cNvPr id="18" name="s4-o4a">
             <a:extLst xmlns:a="http://schemas.openxmlformats.org/drawingml/2006/main">
               <a:ext uri="{FF2B5EF4-FFF2-40B4-BE49-F238E27FC236}">
-                <a16:creationId xmlns:a16="http://schemas.microsoft.com/office/drawing/2014/main" id="{6AE3775C-738C-413E-9136-2502F8B11B51}"/>
+                <a16:creationId xmlns:a16="http://schemas.microsoft.com/office/drawing/2014/main" id="{81C07A28-0C4D-4193-A5DE-0813EC601278}"/>
               </a:ext>
             </a:extLst>
           </p:cNvPr>
@@ -5363,7 +5804,7 @@
           <p:cNvPr id="19" name="s4-o4b">
             <a:extLst xmlns:a="http://schemas.openxmlformats.org/drawingml/2006/main">
               <a:ext uri="{FF2B5EF4-FFF2-40B4-BE49-F238E27FC236}">
-                <a16:creationId xmlns:a16="http://schemas.microsoft.com/office/drawing/2014/main" id="{75695E33-5176-479E-B4B9-FE1001AA7B83}"/>
+                <a16:creationId xmlns:a16="http://schemas.microsoft.com/office/drawing/2014/main" id="{9B4755B3-D1BA-43BE-AAF7-3D4D7798A392}"/>
               </a:ext>
             </a:extLst>
           </p:cNvPr>
@@ -5409,7 +5850,7 @@
           <p:cNvPr id="20" name="s4-o5a">
             <a:extLst xmlns:a="http://schemas.openxmlformats.org/drawingml/2006/main">
               <a:ext uri="{FF2B5EF4-FFF2-40B4-BE49-F238E27FC236}">
-                <a16:creationId xmlns:a16="http://schemas.microsoft.com/office/drawing/2014/main" id="{70530514-10EB-4369-BE2E-6D6ABE0C273F}"/>
+                <a16:creationId xmlns:a16="http://schemas.microsoft.com/office/drawing/2014/main" id="{F407A083-D9A9-4F0D-B199-030688D71EDA}"/>
               </a:ext>
             </a:extLst>
           </p:cNvPr>
@@ -5454,7 +5895,7 @@
           <p:cNvPr id="21" name="s4-o5b">
             <a:extLst xmlns:a="http://schemas.openxmlformats.org/drawingml/2006/main">
               <a:ext uri="{FF2B5EF4-FFF2-40B4-BE49-F238E27FC236}">
-                <a16:creationId xmlns:a16="http://schemas.microsoft.com/office/drawing/2014/main" id="{1AB4CD06-0FF7-4127-BC5B-79E885B2C3AB}"/>
+                <a16:creationId xmlns:a16="http://schemas.microsoft.com/office/drawing/2014/main" id="{4267C68A-E521-4B98-A5F6-9FFAF762B2CB}"/>
               </a:ext>
             </a:extLst>
           </p:cNvPr>
@@ -5499,7 +5940,7 @@
           <p:cNvPr id="22" name="s4-output-note">
             <a:extLst xmlns:a="http://schemas.openxmlformats.org/drawingml/2006/main">
               <a:ext uri="{FF2B5EF4-FFF2-40B4-BE49-F238E27FC236}">
-                <a16:creationId xmlns:a16="http://schemas.microsoft.com/office/drawing/2014/main" id="{1FAC71B4-C94A-4FBA-94A6-E7E5C2E3C991}"/>
+                <a16:creationId xmlns:a16="http://schemas.microsoft.com/office/drawing/2014/main" id="{45EF5AAE-14D3-4D6F-B6FF-90DB08F6C13F}"/>
               </a:ext>
             </a:extLst>
           </p:cNvPr>
@@ -5566,7 +6007,7 @@
           <p:cNvPr id="24" name="footer-source-4">
             <a:extLst xmlns:a="http://schemas.openxmlformats.org/drawingml/2006/main">
               <a:ext uri="{FF2B5EF4-FFF2-40B4-BE49-F238E27FC236}">
-                <a16:creationId xmlns:a16="http://schemas.microsoft.com/office/drawing/2014/main" id="{F63D8B2C-3A87-4263-9A45-5C444E223E8A}"/>
+                <a16:creationId xmlns:a16="http://schemas.microsoft.com/office/drawing/2014/main" id="{7C0053B7-2ADC-41E7-8F74-7B958F8D6CE2}"/>
               </a:ext>
             </a:extLst>
           </p:cNvPr>
@@ -5611,7 +6052,7 @@
           <p:cNvPr id="25" name="footer-number-4">
             <a:extLst xmlns:a="http://schemas.openxmlformats.org/drawingml/2006/main">
               <a:ext uri="{FF2B5EF4-FFF2-40B4-BE49-F238E27FC236}">
-                <a16:creationId xmlns:a16="http://schemas.microsoft.com/office/drawing/2014/main" id="{A9B14503-75BC-4257-BC86-E0D03F6C9783}"/>
+                <a16:creationId xmlns:a16="http://schemas.microsoft.com/office/drawing/2014/main" id="{C85A1841-8AD6-4E68-AAC5-7148F54E1EC4}"/>
               </a:ext>
             </a:extLst>
           </p:cNvPr>
@@ -5654,7 +6095,7 @@
     </p:spTree>
     <p:extLst>
       <p:ext uri="{BB962C8B-B14F-4D97-AF65-F5344CB8AC3E}">
-        <p14:creationId xmlns:p14="http://schemas.microsoft.com/office/powerpoint/2010/main" val="611825970"/>
+        <p14:creationId xmlns:p14="http://schemas.microsoft.com/office/powerpoint/2010/main" val="842626295"/>
       </p:ext>
     </p:extLst>
   </p:cSld>
@@ -5685,7 +6126,7 @@
           <p:cNvPr id="17" name="s5-title">
             <a:extLst xmlns:a="http://schemas.openxmlformats.org/drawingml/2006/main">
               <a:ext uri="{FF2B5EF4-FFF2-40B4-BE49-F238E27FC236}">
-                <a16:creationId xmlns:a16="http://schemas.microsoft.com/office/drawing/2014/main" id="{9960B5BD-357D-46AC-9292-A4FEF9254D35}"/>
+                <a16:creationId xmlns:a16="http://schemas.microsoft.com/office/drawing/2014/main" id="{CE056469-356C-4CF7-A68E-9B8DE354B7A3}"/>
               </a:ext>
             </a:extLst>
           </p:cNvPr>
@@ -5730,7 +6171,7 @@
           <p:cNvPr id="2" name="s5-subtitle">
             <a:extLst xmlns:a="http://schemas.openxmlformats.org/drawingml/2006/main">
               <a:ext uri="{FF2B5EF4-FFF2-40B4-BE49-F238E27FC236}">
-                <a16:creationId xmlns:a16="http://schemas.microsoft.com/office/drawing/2014/main" id="{D4B1788C-1D9B-40A2-9F2B-5E4B3A8449E8}"/>
+                <a16:creationId xmlns:a16="http://schemas.microsoft.com/office/drawing/2014/main" id="{2E97FCA5-3759-4473-98B7-445B6E392B9A}"/>
               </a:ext>
             </a:extLst>
           </p:cNvPr>
@@ -5775,7 +6216,7 @@
           <p:cNvPr id="3" name="s5-chart-label-pack">
             <a:extLst xmlns:a="http://schemas.openxmlformats.org/drawingml/2006/main">
               <a:ext uri="{FF2B5EF4-FFF2-40B4-BE49-F238E27FC236}">
-                <a16:creationId xmlns:a16="http://schemas.microsoft.com/office/drawing/2014/main" id="{B302D2F5-7B48-496C-8A30-671D8C512E83}"/>
+                <a16:creationId xmlns:a16="http://schemas.microsoft.com/office/drawing/2014/main" id="{5EF5C323-7392-476F-9E31-37AB59A1A3B2}"/>
               </a:ext>
             </a:extLst>
           </p:cNvPr>
@@ -5820,7 +6261,7 @@
           <p:cNvPr id="4" name="s5-chart-label-repo">
             <a:extLst xmlns:a="http://schemas.openxmlformats.org/drawingml/2006/main">
               <a:ext uri="{FF2B5EF4-FFF2-40B4-BE49-F238E27FC236}">
-                <a16:creationId xmlns:a16="http://schemas.microsoft.com/office/drawing/2014/main" id="{0873D7B7-95FB-41E8-A9FF-10CD59A40501}"/>
+                <a16:creationId xmlns:a16="http://schemas.microsoft.com/office/drawing/2014/main" id="{9C50DF07-D51A-4C44-A58D-40CBC8349326}"/>
               </a:ext>
             </a:extLst>
           </p:cNvPr>
@@ -5865,7 +6306,7 @@
           <p:cNvPr id="5" name="s5-stat1">
             <a:extLst xmlns:a="http://schemas.openxmlformats.org/drawingml/2006/main">
               <a:ext uri="{FF2B5EF4-FFF2-40B4-BE49-F238E27FC236}">
-                <a16:creationId xmlns:a16="http://schemas.microsoft.com/office/drawing/2014/main" id="{CFABFDA4-1947-4A45-9087-E5CA71C23EE6}"/>
+                <a16:creationId xmlns:a16="http://schemas.microsoft.com/office/drawing/2014/main" id="{3F311FF6-116B-450D-AE8B-1442FD7F22F3}"/>
               </a:ext>
             </a:extLst>
           </p:cNvPr>
@@ -5910,7 +6351,7 @@
           <p:cNvPr id="6" name="s5-stat1-label">
             <a:extLst xmlns:a="http://schemas.openxmlformats.org/drawingml/2006/main">
               <a:ext uri="{FF2B5EF4-FFF2-40B4-BE49-F238E27FC236}">
-                <a16:creationId xmlns:a16="http://schemas.microsoft.com/office/drawing/2014/main" id="{89784536-19BF-4B39-9A6C-DB166297047B}"/>
+                <a16:creationId xmlns:a16="http://schemas.microsoft.com/office/drawing/2014/main" id="{BBF1766A-A563-4805-BB9A-0BDA99E720BC}"/>
               </a:ext>
             </a:extLst>
           </p:cNvPr>
@@ -5977,7 +6418,7 @@
           <p:cNvPr id="8" name="s5-stat2">
             <a:extLst xmlns:a="http://schemas.openxmlformats.org/drawingml/2006/main">
               <a:ext uri="{FF2B5EF4-FFF2-40B4-BE49-F238E27FC236}">
-                <a16:creationId xmlns:a16="http://schemas.microsoft.com/office/drawing/2014/main" id="{6BF0995E-B27D-412A-85ED-C7385FE383EC}"/>
+                <a16:creationId xmlns:a16="http://schemas.microsoft.com/office/drawing/2014/main" id="{41059287-E99F-4EB1-9E71-CE3976773FD7}"/>
               </a:ext>
             </a:extLst>
           </p:cNvPr>
@@ -6022,7 +6463,7 @@
           <p:cNvPr id="9" name="s5-stat2-label">
             <a:extLst xmlns:a="http://schemas.openxmlformats.org/drawingml/2006/main">
               <a:ext uri="{FF2B5EF4-FFF2-40B4-BE49-F238E27FC236}">
-                <a16:creationId xmlns:a16="http://schemas.microsoft.com/office/drawing/2014/main" id="{CDBE5ED7-B628-4456-A1F8-6E0A939C27CF}"/>
+                <a16:creationId xmlns:a16="http://schemas.microsoft.com/office/drawing/2014/main" id="{8508F888-BDF8-44F2-B2A8-BCCD387A2BB9}"/>
               </a:ext>
             </a:extLst>
           </p:cNvPr>
@@ -6067,7 +6508,7 @@
           <p:cNvPr id="10" name="s5-stat3">
             <a:extLst xmlns:a="http://schemas.openxmlformats.org/drawingml/2006/main">
               <a:ext uri="{FF2B5EF4-FFF2-40B4-BE49-F238E27FC236}">
-                <a16:creationId xmlns:a16="http://schemas.microsoft.com/office/drawing/2014/main" id="{B89465DC-908F-48F5-A652-8F0C3FF59B25}"/>
+                <a16:creationId xmlns:a16="http://schemas.microsoft.com/office/drawing/2014/main" id="{2B9CF1C5-0C4F-4E16-9A19-201C16D2F009}"/>
               </a:ext>
             </a:extLst>
           </p:cNvPr>
@@ -6112,7 +6553,7 @@
           <p:cNvPr id="11" name="s5-stat3-label">
             <a:extLst xmlns:a="http://schemas.openxmlformats.org/drawingml/2006/main">
               <a:ext uri="{FF2B5EF4-FFF2-40B4-BE49-F238E27FC236}">
-                <a16:creationId xmlns:a16="http://schemas.microsoft.com/office/drawing/2014/main" id="{D387EA68-54E2-41A5-98F2-1033EC89CDD9}"/>
+                <a16:creationId xmlns:a16="http://schemas.microsoft.com/office/drawing/2014/main" id="{904FD2F1-0013-4F73-853F-6681E0BC5C8F}"/>
               </a:ext>
             </a:extLst>
           </p:cNvPr>
@@ -6157,7 +6598,7 @@
           <p:cNvPr id="12" name="s5-explain">
             <a:extLst xmlns:a="http://schemas.openxmlformats.org/drawingml/2006/main">
               <a:ext uri="{FF2B5EF4-FFF2-40B4-BE49-F238E27FC236}">
-                <a16:creationId xmlns:a16="http://schemas.microsoft.com/office/drawing/2014/main" id="{DF8A17DB-F518-4892-B58A-892C81ACE86D}"/>
+                <a16:creationId xmlns:a16="http://schemas.microsoft.com/office/drawing/2014/main" id="{E6DEEA2D-50F5-46F8-B0A7-81431B4F850D}"/>
               </a:ext>
             </a:extLst>
           </p:cNvPr>
@@ -6224,7 +6665,7 @@
           <p:cNvPr id="14" name="footer-source-5">
             <a:extLst xmlns:a="http://schemas.openxmlformats.org/drawingml/2006/main">
               <a:ext uri="{FF2B5EF4-FFF2-40B4-BE49-F238E27FC236}">
-                <a16:creationId xmlns:a16="http://schemas.microsoft.com/office/drawing/2014/main" id="{1381C75E-9B0D-4D19-8364-9EFF93B73F6F}"/>
+                <a16:creationId xmlns:a16="http://schemas.microsoft.com/office/drawing/2014/main" id="{BC448489-CCC7-4B83-8CFD-FB9F1653C439}"/>
               </a:ext>
             </a:extLst>
           </p:cNvPr>
@@ -6269,7 +6710,7 @@
           <p:cNvPr id="15" name="footer-number-5">
             <a:extLst xmlns:a="http://schemas.openxmlformats.org/drawingml/2006/main">
               <a:ext uri="{FF2B5EF4-FFF2-40B4-BE49-F238E27FC236}">
-                <a16:creationId xmlns:a16="http://schemas.microsoft.com/office/drawing/2014/main" id="{98F320C5-9CE7-40CA-9357-4765D3222782}"/>
+                <a16:creationId xmlns:a16="http://schemas.microsoft.com/office/drawing/2014/main" id="{D7409FD4-D66E-4D45-A857-E92D5538D525}"/>
               </a:ext>
             </a:extLst>
           </p:cNvPr>
@@ -6321,14 +6762,14 @@
         </p:xfrm>
         <a:graphic xmlns:a="http://schemas.openxmlformats.org/drawingml/2006/main">
           <a:graphicData uri="http://schemas.openxmlformats.org/drawingml/2006/chart">
-            <c:chart xmlns:r="http://schemas.openxmlformats.org/officeDocument/2006/relationships" xmlns:c="http://schemas.openxmlformats.org/drawingml/2006/chart" r:id="R47ea2b50f6794f4e"/>
+            <c:chart xmlns:r="http://schemas.openxmlformats.org/officeDocument/2006/relationships" xmlns:c="http://schemas.openxmlformats.org/drawingml/2006/chart" r:id="R7723a296227f4ecc"/>
           </a:graphicData>
         </a:graphic>
       </p:graphicFrame>
     </p:spTree>
     <p:extLst>
       <p:ext uri="{BB962C8B-B14F-4D97-AF65-F5344CB8AC3E}">
-        <p14:creationId xmlns:p14="http://schemas.microsoft.com/office/powerpoint/2010/main" val="1800457806"/>
+        <p14:creationId xmlns:p14="http://schemas.microsoft.com/office/powerpoint/2010/main" val="1909060003"/>
       </p:ext>
     </p:extLst>
   </p:cSld>
@@ -6359,7 +6800,7 @@
           <p:cNvPr id="16" name="s6-title">
             <a:extLst xmlns:a="http://schemas.openxmlformats.org/drawingml/2006/main">
               <a:ext uri="{FF2B5EF4-FFF2-40B4-BE49-F238E27FC236}">
-                <a16:creationId xmlns:a16="http://schemas.microsoft.com/office/drawing/2014/main" id="{0C2D433A-0A5F-4750-A545-B4BBADD062D5}"/>
+                <a16:creationId xmlns:a16="http://schemas.microsoft.com/office/drawing/2014/main" id="{487359B8-978F-4A12-9574-E8F4BADF5823}"/>
               </a:ext>
             </a:extLst>
           </p:cNvPr>
@@ -6404,7 +6845,7 @@
           <p:cNvPr id="2" name="s6-subtitle">
             <a:extLst xmlns:a="http://schemas.openxmlformats.org/drawingml/2006/main">
               <a:ext uri="{FF2B5EF4-FFF2-40B4-BE49-F238E27FC236}">
-                <a16:creationId xmlns:a16="http://schemas.microsoft.com/office/drawing/2014/main" id="{EE4BFD3C-F413-4E75-8CA7-AEE80452EA2C}"/>
+                <a16:creationId xmlns:a16="http://schemas.microsoft.com/office/drawing/2014/main" id="{2318C7CF-539D-4275-BE7D-CF5E8AC9DFA4}"/>
               </a:ext>
             </a:extLst>
           </p:cNvPr>
@@ -6449,7 +6890,7 @@
           <p:cNvPr id="3" name="s6-chart-label-control">
             <a:extLst xmlns:a="http://schemas.openxmlformats.org/drawingml/2006/main">
               <a:ext uri="{FF2B5EF4-FFF2-40B4-BE49-F238E27FC236}">
-                <a16:creationId xmlns:a16="http://schemas.microsoft.com/office/drawing/2014/main" id="{5466175F-C1E1-40DE-ACAC-C3FCC407F2AD}"/>
+                <a16:creationId xmlns:a16="http://schemas.microsoft.com/office/drawing/2014/main" id="{50356403-4DA9-4582-B4CF-22F5D3B5E281}"/>
               </a:ext>
             </a:extLst>
           </p:cNvPr>
@@ -6494,7 +6935,7 @@
           <p:cNvPr id="4" name="s6-chart-label-full">
             <a:extLst xmlns:a="http://schemas.openxmlformats.org/drawingml/2006/main">
               <a:ext uri="{FF2B5EF4-FFF2-40B4-BE49-F238E27FC236}">
-                <a16:creationId xmlns:a16="http://schemas.microsoft.com/office/drawing/2014/main" id="{DED135FB-2FD2-4960-98DF-81D70C0B7343}"/>
+                <a16:creationId xmlns:a16="http://schemas.microsoft.com/office/drawing/2014/main" id="{EFA8917E-B0A2-436D-B3F8-30221B03FD8D}"/>
               </a:ext>
             </a:extLst>
           </p:cNvPr>
@@ -6539,7 +6980,7 @@
           <p:cNvPr id="5" name="s6-stat">
             <a:extLst xmlns:a="http://schemas.openxmlformats.org/drawingml/2006/main">
               <a:ext uri="{FF2B5EF4-FFF2-40B4-BE49-F238E27FC236}">
-                <a16:creationId xmlns:a16="http://schemas.microsoft.com/office/drawing/2014/main" id="{768D07AB-4D1A-474B-95EF-569164FA9146}"/>
+                <a16:creationId xmlns:a16="http://schemas.microsoft.com/office/drawing/2014/main" id="{4C0C8A57-3B85-4380-88E5-5E7927A79B79}"/>
               </a:ext>
             </a:extLst>
           </p:cNvPr>
@@ -6584,7 +7025,7 @@
           <p:cNvPr id="6" name="s6-stat-label">
             <a:extLst xmlns:a="http://schemas.openxmlformats.org/drawingml/2006/main">
               <a:ext uri="{FF2B5EF4-FFF2-40B4-BE49-F238E27FC236}">
-                <a16:creationId xmlns:a16="http://schemas.microsoft.com/office/drawing/2014/main" id="{CA80A2BD-C7B1-4FC9-ACE0-97F54DB43668}"/>
+                <a16:creationId xmlns:a16="http://schemas.microsoft.com/office/drawing/2014/main" id="{DF62B7DA-CD60-48C6-8047-C2C9DD5A2DA0}"/>
               </a:ext>
             </a:extLst>
           </p:cNvPr>
@@ -6652,7 +7093,7 @@
           <p:cNvPr id="8" name="s6-supported">
             <a:extLst xmlns:a="http://schemas.openxmlformats.org/drawingml/2006/main">
               <a:ext uri="{FF2B5EF4-FFF2-40B4-BE49-F238E27FC236}">
-                <a16:creationId xmlns:a16="http://schemas.microsoft.com/office/drawing/2014/main" id="{D0A0DAFF-993E-4627-AFDA-3E7F1ED72EBE}"/>
+                <a16:creationId xmlns:a16="http://schemas.microsoft.com/office/drawing/2014/main" id="{E803D258-5E49-40A9-B842-D07D91C702B4}"/>
               </a:ext>
             </a:extLst>
           </p:cNvPr>
@@ -6697,7 +7138,7 @@
           <p:cNvPr id="9" name="s6-supported-body">
             <a:extLst xmlns:a="http://schemas.openxmlformats.org/drawingml/2006/main">
               <a:ext uri="{FF2B5EF4-FFF2-40B4-BE49-F238E27FC236}">
-                <a16:creationId xmlns:a16="http://schemas.microsoft.com/office/drawing/2014/main" id="{70FABB36-C603-47F5-B3B7-CC579B84336D}"/>
+                <a16:creationId xmlns:a16="http://schemas.microsoft.com/office/drawing/2014/main" id="{022D91F2-7BEA-4D51-847D-F56BDD78BD3B}"/>
               </a:ext>
             </a:extLst>
           </p:cNvPr>
@@ -6742,7 +7183,7 @@
           <p:cNvPr id="10" name="s6-unsupported">
             <a:extLst xmlns:a="http://schemas.openxmlformats.org/drawingml/2006/main">
               <a:ext uri="{FF2B5EF4-FFF2-40B4-BE49-F238E27FC236}">
-                <a16:creationId xmlns:a16="http://schemas.microsoft.com/office/drawing/2014/main" id="{657E45F9-7E83-44B6-8BB0-27AE799FE80E}"/>
+                <a16:creationId xmlns:a16="http://schemas.microsoft.com/office/drawing/2014/main" id="{BA3B2723-CB93-48CD-B8E5-DA584A12F095}"/>
               </a:ext>
             </a:extLst>
           </p:cNvPr>
@@ -6787,7 +7228,7 @@
           <p:cNvPr id="11" name="s6-unsupported-body">
             <a:extLst xmlns:a="http://schemas.openxmlformats.org/drawingml/2006/main">
               <a:ext uri="{FF2B5EF4-FFF2-40B4-BE49-F238E27FC236}">
-                <a16:creationId xmlns:a16="http://schemas.microsoft.com/office/drawing/2014/main" id="{3197535D-34AD-4118-A1DC-E0D9BB3954A3}"/>
+                <a16:creationId xmlns:a16="http://schemas.microsoft.com/office/drawing/2014/main" id="{9AB02B32-5353-4EAC-8FFD-1A004B207A2D}"/>
               </a:ext>
             </a:extLst>
           </p:cNvPr>
@@ -6854,7 +7295,7 @@
           <p:cNvPr id="13" name="footer-source-6">
             <a:extLst xmlns:a="http://schemas.openxmlformats.org/drawingml/2006/main">
               <a:ext uri="{FF2B5EF4-FFF2-40B4-BE49-F238E27FC236}">
-                <a16:creationId xmlns:a16="http://schemas.microsoft.com/office/drawing/2014/main" id="{73332EA1-1677-4881-8B67-C3684940470E}"/>
+                <a16:creationId xmlns:a16="http://schemas.microsoft.com/office/drawing/2014/main" id="{F7978778-3991-4DE3-A088-A93CE651A785}"/>
               </a:ext>
             </a:extLst>
           </p:cNvPr>
@@ -6899,7 +7340,7 @@
           <p:cNvPr id="14" name="footer-number-6">
             <a:extLst xmlns:a="http://schemas.openxmlformats.org/drawingml/2006/main">
               <a:ext uri="{FF2B5EF4-FFF2-40B4-BE49-F238E27FC236}">
-                <a16:creationId xmlns:a16="http://schemas.microsoft.com/office/drawing/2014/main" id="{6F2BDA4C-3ED2-43E4-8C63-9F21706169EE}"/>
+                <a16:creationId xmlns:a16="http://schemas.microsoft.com/office/drawing/2014/main" id="{15881A3C-A8DD-4EEA-BD29-DB167674AB80}"/>
               </a:ext>
             </a:extLst>
           </p:cNvPr>
@@ -6951,14 +7392,14 @@
         </p:xfrm>
         <a:graphic xmlns:a="http://schemas.openxmlformats.org/drawingml/2006/main">
           <a:graphicData uri="http://schemas.openxmlformats.org/drawingml/2006/chart">
-            <c:chart xmlns:r="http://schemas.openxmlformats.org/officeDocument/2006/relationships" xmlns:c="http://schemas.openxmlformats.org/drawingml/2006/chart" r:id="R15084b7a54204e72"/>
+            <c:chart xmlns:r="http://schemas.openxmlformats.org/officeDocument/2006/relationships" xmlns:c="http://schemas.openxmlformats.org/drawingml/2006/chart" r:id="R441623c8d6f14263"/>
           </a:graphicData>
         </a:graphic>
       </p:graphicFrame>
     </p:spTree>
     <p:extLst>
       <p:ext uri="{BB962C8B-B14F-4D97-AF65-F5344CB8AC3E}">
-        <p14:creationId xmlns:p14="http://schemas.microsoft.com/office/powerpoint/2010/main" val="2035459435"/>
+        <p14:creationId xmlns:p14="http://schemas.microsoft.com/office/powerpoint/2010/main" val="681927638"/>
       </p:ext>
     </p:extLst>
   </p:cSld>
@@ -6989,7 +7430,7 @@
           <p:cNvPr id="26" name="s7-title">
             <a:extLst xmlns:a="http://schemas.openxmlformats.org/drawingml/2006/main">
               <a:ext uri="{FF2B5EF4-FFF2-40B4-BE49-F238E27FC236}">
-                <a16:creationId xmlns:a16="http://schemas.microsoft.com/office/drawing/2014/main" id="{62307740-79C4-45E5-B354-B214B79B46E9}"/>
+                <a16:creationId xmlns:a16="http://schemas.microsoft.com/office/drawing/2014/main" id="{929197BB-C9E3-41FC-BD9B-343A5925640F}"/>
               </a:ext>
             </a:extLst>
           </p:cNvPr>
@@ -7034,7 +7475,7 @@
           <p:cNvPr id="2" name="s7-subtitle">
             <a:extLst xmlns:a="http://schemas.openxmlformats.org/drawingml/2006/main">
               <a:ext uri="{FF2B5EF4-FFF2-40B4-BE49-F238E27FC236}">
-                <a16:creationId xmlns:a16="http://schemas.microsoft.com/office/drawing/2014/main" id="{6BC49522-2AF5-485D-A1E4-5D5DC0DB3369}"/>
+                <a16:creationId xmlns:a16="http://schemas.microsoft.com/office/drawing/2014/main" id="{95FD0001-4D7E-48CE-965C-6145AAEC86D1}"/>
               </a:ext>
             </a:extLst>
           </p:cNvPr>
@@ -7167,7 +7608,7 @@
           <p:cNvPr id="7" name="s7-card1">
             <a:extLst xmlns:a="http://schemas.openxmlformats.org/drawingml/2006/main">
               <a:ext uri="{FF2B5EF4-FFF2-40B4-BE49-F238E27FC236}">
-                <a16:creationId xmlns:a16="http://schemas.microsoft.com/office/drawing/2014/main" id="{7D7C20F4-85BD-450E-B486-4D4FF9169430}"/>
+                <a16:creationId xmlns:a16="http://schemas.microsoft.com/office/drawing/2014/main" id="{747762F8-4186-4728-9DA0-B979B2064A24}"/>
               </a:ext>
             </a:extLst>
           </p:cNvPr>
@@ -7202,7 +7643,7 @@
           <p:cNvPr id="8" name="s7-card2">
             <a:extLst xmlns:a="http://schemas.openxmlformats.org/drawingml/2006/main">
               <a:ext uri="{FF2B5EF4-FFF2-40B4-BE49-F238E27FC236}">
-                <a16:creationId xmlns:a16="http://schemas.microsoft.com/office/drawing/2014/main" id="{1CF1ADA0-1C81-4FFC-8E1D-A5B7BFE53FBA}"/>
+                <a16:creationId xmlns:a16="http://schemas.microsoft.com/office/drawing/2014/main" id="{76164CE1-4552-4E6C-B2A2-9DDEFAF930BB}"/>
               </a:ext>
             </a:extLst>
           </p:cNvPr>
@@ -7237,7 +7678,7 @@
           <p:cNvPr id="9" name="s7-card3">
             <a:extLst xmlns:a="http://schemas.openxmlformats.org/drawingml/2006/main">
               <a:ext uri="{FF2B5EF4-FFF2-40B4-BE49-F238E27FC236}">
-                <a16:creationId xmlns:a16="http://schemas.microsoft.com/office/drawing/2014/main" id="{EC2E9828-528B-4CC5-ABDA-345FCA599887}"/>
+                <a16:creationId xmlns:a16="http://schemas.microsoft.com/office/drawing/2014/main" id="{2AED20BD-33BE-4EED-8286-5A0E73709D23}"/>
               </a:ext>
             </a:extLst>
           </p:cNvPr>
@@ -7272,7 +7713,7 @@
           <p:cNvPr id="10" name="s7-dot1">
             <a:extLst xmlns:a="http://schemas.openxmlformats.org/drawingml/2006/main">
               <a:ext uri="{FF2B5EF4-FFF2-40B4-BE49-F238E27FC236}">
-                <a16:creationId xmlns:a16="http://schemas.microsoft.com/office/drawing/2014/main" id="{DB69A42A-1C50-434E-8916-B18955905E3E}"/>
+                <a16:creationId xmlns:a16="http://schemas.microsoft.com/office/drawing/2014/main" id="{25E8F013-CFC7-449B-AE69-3762175092D9}"/>
               </a:ext>
             </a:extLst>
           </p:cNvPr>
@@ -7305,7 +7746,7 @@
           <p:cNvPr id="11" name="s7-dot2">
             <a:extLst xmlns:a="http://schemas.openxmlformats.org/drawingml/2006/main">
               <a:ext uri="{FF2B5EF4-FFF2-40B4-BE49-F238E27FC236}">
-                <a16:creationId xmlns:a16="http://schemas.microsoft.com/office/drawing/2014/main" id="{099A993C-DB73-478B-8AA3-5359D13359B6}"/>
+                <a16:creationId xmlns:a16="http://schemas.microsoft.com/office/drawing/2014/main" id="{526E9602-9EF4-45AA-8CCD-520BA5E05638}"/>
               </a:ext>
             </a:extLst>
           </p:cNvPr>
@@ -7338,7 +7779,7 @@
           <p:cNvPr id="12" name="s7-dot3">
             <a:extLst xmlns:a="http://schemas.openxmlformats.org/drawingml/2006/main">
               <a:ext uri="{FF2B5EF4-FFF2-40B4-BE49-F238E27FC236}">
-                <a16:creationId xmlns:a16="http://schemas.microsoft.com/office/drawing/2014/main" id="{0FF17C76-E67E-40BD-8193-C19D1F53174F}"/>
+                <a16:creationId xmlns:a16="http://schemas.microsoft.com/office/drawing/2014/main" id="{4C148250-AA68-49CC-BD40-03473359EE98}"/>
               </a:ext>
             </a:extLst>
           </p:cNvPr>
@@ -7371,7 +7812,7 @@
           <p:cNvPr id="13" name="s7-k1">
             <a:extLst xmlns:a="http://schemas.openxmlformats.org/drawingml/2006/main">
               <a:ext uri="{FF2B5EF4-FFF2-40B4-BE49-F238E27FC236}">
-                <a16:creationId xmlns:a16="http://schemas.microsoft.com/office/drawing/2014/main" id="{E003B36B-D895-4A69-AF86-E865C0F65527}"/>
+                <a16:creationId xmlns:a16="http://schemas.microsoft.com/office/drawing/2014/main" id="{0734BDBD-EA2E-4C0C-8978-61BDC9AC1F4A}"/>
               </a:ext>
             </a:extLst>
           </p:cNvPr>
@@ -7416,7 +7857,7 @@
           <p:cNvPr id="14" name="s7-b1">
             <a:extLst xmlns:a="http://schemas.openxmlformats.org/drawingml/2006/main">
               <a:ext uri="{FF2B5EF4-FFF2-40B4-BE49-F238E27FC236}">
-                <a16:creationId xmlns:a16="http://schemas.microsoft.com/office/drawing/2014/main" id="{1F0365B3-BFDD-4DC1-BCFC-1F3FB89260A1}"/>
+                <a16:creationId xmlns:a16="http://schemas.microsoft.com/office/drawing/2014/main" id="{DA24AC9C-38E1-4BA4-AF5A-0784E1126829}"/>
               </a:ext>
             </a:extLst>
           </p:cNvPr>
@@ -7461,7 +7902,7 @@
           <p:cNvPr id="15" name="s7-v1">
             <a:extLst xmlns:a="http://schemas.openxmlformats.org/drawingml/2006/main">
               <a:ext uri="{FF2B5EF4-FFF2-40B4-BE49-F238E27FC236}">
-                <a16:creationId xmlns:a16="http://schemas.microsoft.com/office/drawing/2014/main" id="{FBE9EF65-4136-486E-BE12-E0468B1EF79D}"/>
+                <a16:creationId xmlns:a16="http://schemas.microsoft.com/office/drawing/2014/main" id="{F95EDEE1-DF4F-4239-A1E9-03AC6DE3BA10}"/>
               </a:ext>
             </a:extLst>
           </p:cNvPr>
@@ -7506,7 +7947,7 @@
           <p:cNvPr id="16" name="s7-k2">
             <a:extLst xmlns:a="http://schemas.openxmlformats.org/drawingml/2006/main">
               <a:ext uri="{FF2B5EF4-FFF2-40B4-BE49-F238E27FC236}">
-                <a16:creationId xmlns:a16="http://schemas.microsoft.com/office/drawing/2014/main" id="{20E20B9E-D1DD-4ECD-AE19-C63C11984AD3}"/>
+                <a16:creationId xmlns:a16="http://schemas.microsoft.com/office/drawing/2014/main" id="{804655D3-B186-40D9-9F32-67596F0498D3}"/>
               </a:ext>
             </a:extLst>
           </p:cNvPr>
@@ -7551,7 +7992,7 @@
           <p:cNvPr id="17" name="s7-b2">
             <a:extLst xmlns:a="http://schemas.openxmlformats.org/drawingml/2006/main">
               <a:ext uri="{FF2B5EF4-FFF2-40B4-BE49-F238E27FC236}">
-                <a16:creationId xmlns:a16="http://schemas.microsoft.com/office/drawing/2014/main" id="{576DBC82-DCA6-4348-9207-B83374DA9CAB}"/>
+                <a16:creationId xmlns:a16="http://schemas.microsoft.com/office/drawing/2014/main" id="{C0874439-16BF-4EAC-96A6-C54EC030D658}"/>
               </a:ext>
             </a:extLst>
           </p:cNvPr>
@@ -7596,7 +8037,7 @@
           <p:cNvPr id="18" name="s7-v2">
             <a:extLst xmlns:a="http://schemas.openxmlformats.org/drawingml/2006/main">
               <a:ext uri="{FF2B5EF4-FFF2-40B4-BE49-F238E27FC236}">
-                <a16:creationId xmlns:a16="http://schemas.microsoft.com/office/drawing/2014/main" id="{66E86001-6B3D-40E3-9828-1C9CF27D291F}"/>
+                <a16:creationId xmlns:a16="http://schemas.microsoft.com/office/drawing/2014/main" id="{937D3E81-0C02-4F1E-B186-D85220CC2E25}"/>
               </a:ext>
             </a:extLst>
           </p:cNvPr>
@@ -7641,7 +8082,7 @@
           <p:cNvPr id="19" name="s7-k3">
             <a:extLst xmlns:a="http://schemas.openxmlformats.org/drawingml/2006/main">
               <a:ext uri="{FF2B5EF4-FFF2-40B4-BE49-F238E27FC236}">
-                <a16:creationId xmlns:a16="http://schemas.microsoft.com/office/drawing/2014/main" id="{8F05AB0E-788D-4EED-9BAB-B94073A87D10}"/>
+                <a16:creationId xmlns:a16="http://schemas.microsoft.com/office/drawing/2014/main" id="{0741E171-8028-433E-9C96-DEBBBECD28FB}"/>
               </a:ext>
             </a:extLst>
           </p:cNvPr>
@@ -7686,7 +8127,7 @@
           <p:cNvPr id="20" name="s7-b3">
             <a:extLst xmlns:a="http://schemas.openxmlformats.org/drawingml/2006/main">
               <a:ext uri="{FF2B5EF4-FFF2-40B4-BE49-F238E27FC236}">
-                <a16:creationId xmlns:a16="http://schemas.microsoft.com/office/drawing/2014/main" id="{605B9B9E-C4D1-4650-AFB3-77F2F043CF61}"/>
+                <a16:creationId xmlns:a16="http://schemas.microsoft.com/office/drawing/2014/main" id="{DA0FF87D-9C3B-475C-A287-A5C637B178B0}"/>
               </a:ext>
             </a:extLst>
           </p:cNvPr>
@@ -7731,7 +8172,7 @@
           <p:cNvPr id="21" name="s7-v3">
             <a:extLst xmlns:a="http://schemas.openxmlformats.org/drawingml/2006/main">
               <a:ext uri="{FF2B5EF4-FFF2-40B4-BE49-F238E27FC236}">
-                <a16:creationId xmlns:a16="http://schemas.microsoft.com/office/drawing/2014/main" id="{D63B3F2D-1A06-4909-9C0E-B0D6FFAAFEE5}"/>
+                <a16:creationId xmlns:a16="http://schemas.microsoft.com/office/drawing/2014/main" id="{2FE82206-12A8-4445-9107-63AE87F93460}"/>
               </a:ext>
             </a:extLst>
           </p:cNvPr>
@@ -7776,7 +8217,7 @@
           <p:cNvPr id="22" name="s7-human">
             <a:extLst xmlns:a="http://schemas.openxmlformats.org/drawingml/2006/main">
               <a:ext uri="{FF2B5EF4-FFF2-40B4-BE49-F238E27FC236}">
-                <a16:creationId xmlns:a16="http://schemas.microsoft.com/office/drawing/2014/main" id="{F3EC9779-C014-4A0D-8FD0-E6E2FABEBCA6}"/>
+                <a16:creationId xmlns:a16="http://schemas.microsoft.com/office/drawing/2014/main" id="{A2445D32-5A4A-455B-B496-BE0978E9931F}"/>
               </a:ext>
             </a:extLst>
           </p:cNvPr>
@@ -7843,7 +8284,7 @@
           <p:cNvPr id="24" name="footer-source-7">
             <a:extLst xmlns:a="http://schemas.openxmlformats.org/drawingml/2006/main">
               <a:ext uri="{FF2B5EF4-FFF2-40B4-BE49-F238E27FC236}">
-                <a16:creationId xmlns:a16="http://schemas.microsoft.com/office/drawing/2014/main" id="{DB55EB28-2BFD-4C16-8A1D-162669AB4496}"/>
+                <a16:creationId xmlns:a16="http://schemas.microsoft.com/office/drawing/2014/main" id="{58F0A127-F807-46BA-A562-C15960D1D54E}"/>
               </a:ext>
             </a:extLst>
           </p:cNvPr>
@@ -7888,7 +8329,7 @@
           <p:cNvPr id="25" name="footer-number-7">
             <a:extLst xmlns:a="http://schemas.openxmlformats.org/drawingml/2006/main">
               <a:ext uri="{FF2B5EF4-FFF2-40B4-BE49-F238E27FC236}">
-                <a16:creationId xmlns:a16="http://schemas.microsoft.com/office/drawing/2014/main" id="{FEC4E551-9CD6-4DCF-A25E-83D7096000EB}"/>
+                <a16:creationId xmlns:a16="http://schemas.microsoft.com/office/drawing/2014/main" id="{CFCE8DB4-3B60-44BA-822B-0AC6063C7019}"/>
               </a:ext>
             </a:extLst>
           </p:cNvPr>
@@ -7931,7 +8372,7 @@
     </p:spTree>
     <p:extLst>
       <p:ext uri="{BB962C8B-B14F-4D97-AF65-F5344CB8AC3E}">
-        <p14:creationId xmlns:p14="http://schemas.microsoft.com/office/powerpoint/2010/main" val="2144432346"/>
+        <p14:creationId xmlns:p14="http://schemas.microsoft.com/office/powerpoint/2010/main" val="878683353"/>
       </p:ext>
     </p:extLst>
   </p:cSld>
@@ -7962,7 +8403,7 @@
           <p:cNvPr id="19" name="s8-eyebrow">
             <a:extLst xmlns:a="http://schemas.openxmlformats.org/drawingml/2006/main">
               <a:ext uri="{FF2B5EF4-FFF2-40B4-BE49-F238E27FC236}">
-                <a16:creationId xmlns:a16="http://schemas.microsoft.com/office/drawing/2014/main" id="{D7A16CD0-B306-4ACB-AE6E-0629C612EE67}"/>
+                <a16:creationId xmlns:a16="http://schemas.microsoft.com/office/drawing/2014/main" id="{350716B8-D243-4CC7-8A2E-CCD72D7D968C}"/>
               </a:ext>
             </a:extLst>
           </p:cNvPr>
@@ -8007,7 +8448,7 @@
           <p:cNvPr id="2" name="s8-title">
             <a:extLst xmlns:a="http://schemas.openxmlformats.org/drawingml/2006/main">
               <a:ext uri="{FF2B5EF4-FFF2-40B4-BE49-F238E27FC236}">
-                <a16:creationId xmlns:a16="http://schemas.microsoft.com/office/drawing/2014/main" id="{ABBA4495-E05B-46A6-B02F-D61846528968}"/>
+                <a16:creationId xmlns:a16="http://schemas.microsoft.com/office/drawing/2014/main" id="{F8808116-DD7E-4AE9-9EB6-B4A12D869F13}"/>
               </a:ext>
             </a:extLst>
           </p:cNvPr>
@@ -8076,7 +8517,7 @@
           <p:cNvPr id="4" name="s8-close">
             <a:extLst xmlns:a="http://schemas.openxmlformats.org/drawingml/2006/main">
               <a:ext uri="{FF2B5EF4-FFF2-40B4-BE49-F238E27FC236}">
-                <a16:creationId xmlns:a16="http://schemas.microsoft.com/office/drawing/2014/main" id="{74B32A34-E346-4563-8FB7-E78BCEB67710}"/>
+                <a16:creationId xmlns:a16="http://schemas.microsoft.com/office/drawing/2014/main" id="{21E7F17E-D3DA-4C1B-8129-C08F1C119B22}"/>
               </a:ext>
             </a:extLst>
           </p:cNvPr>
@@ -8121,7 +8562,7 @@
           <p:cNvPr id="5" name="s8-command-box">
             <a:extLst xmlns:a="http://schemas.openxmlformats.org/drawingml/2006/main">
               <a:ext uri="{FF2B5EF4-FFF2-40B4-BE49-F238E27FC236}">
-                <a16:creationId xmlns:a16="http://schemas.microsoft.com/office/drawing/2014/main" id="{8939BC3B-C64F-4496-8C4E-469BA1F49407}"/>
+                <a16:creationId xmlns:a16="http://schemas.microsoft.com/office/drawing/2014/main" id="{10C70A31-BAAC-41A0-93C7-BC206762DFAF}"/>
               </a:ext>
             </a:extLst>
           </p:cNvPr>
@@ -8156,7 +8597,7 @@
           <p:cNvPr id="6" name="s8-command">
             <a:extLst xmlns:a="http://schemas.openxmlformats.org/drawingml/2006/main">
               <a:ext uri="{FF2B5EF4-FFF2-40B4-BE49-F238E27FC236}">
-                <a16:creationId xmlns:a16="http://schemas.microsoft.com/office/drawing/2014/main" id="{2741DBFD-99D2-4EEA-867E-7CC67701E272}"/>
+                <a16:creationId xmlns:a16="http://schemas.microsoft.com/office/drawing/2014/main" id="{91CC4267-8446-4469-A4C9-6F3FF7A158DA}"/>
               </a:ext>
             </a:extLst>
           </p:cNvPr>
@@ -8202,7 +8643,7 @@
           <p:cNvPr id="7" name="s8-github">
             <a:extLst xmlns:a="http://schemas.openxmlformats.org/drawingml/2006/main">
               <a:ext uri="{FF2B5EF4-FFF2-40B4-BE49-F238E27FC236}">
-                <a16:creationId xmlns:a16="http://schemas.microsoft.com/office/drawing/2014/main" id="{BFE149C0-BDB7-4F64-AD11-15F053E4D2CF}"/>
+                <a16:creationId xmlns:a16="http://schemas.microsoft.com/office/drawing/2014/main" id="{AF8896AC-44C9-4763-A6B1-A5C90CA10E39}"/>
               </a:ext>
             </a:extLst>
           </p:cNvPr>
@@ -8247,7 +8688,7 @@
           <p:cNvPr id="8" name="s8-npm">
             <a:extLst xmlns:a="http://schemas.openxmlformats.org/drawingml/2006/main">
               <a:ext uri="{FF2B5EF4-FFF2-40B4-BE49-F238E27FC236}">
-                <a16:creationId xmlns:a16="http://schemas.microsoft.com/office/drawing/2014/main" id="{F7F6D1C7-5851-4975-90C6-4D666912BA74}"/>
+                <a16:creationId xmlns:a16="http://schemas.microsoft.com/office/drawing/2014/main" id="{09E5B382-4510-455B-BFF9-5F0EB8EBC3A4}"/>
               </a:ext>
             </a:extLst>
           </p:cNvPr>
@@ -8292,7 +8733,7 @@
           <p:cNvPr id="9" name="s8-d1">
             <a:extLst xmlns:a="http://schemas.openxmlformats.org/drawingml/2006/main">
               <a:ext uri="{FF2B5EF4-FFF2-40B4-BE49-F238E27FC236}">
-                <a16:creationId xmlns:a16="http://schemas.microsoft.com/office/drawing/2014/main" id="{91DDB8B8-A07A-4FC4-8CAD-37D30C3B7F67}"/>
+                <a16:creationId xmlns:a16="http://schemas.microsoft.com/office/drawing/2014/main" id="{169F9059-2B1A-4A97-83D1-39D9E1EEB772}"/>
               </a:ext>
             </a:extLst>
           </p:cNvPr>
@@ -8325,7 +8766,7 @@
           <p:cNvPr id="10" name="s8-l1">
             <a:extLst xmlns:a="http://schemas.openxmlformats.org/drawingml/2006/main">
               <a:ext uri="{FF2B5EF4-FFF2-40B4-BE49-F238E27FC236}">
-                <a16:creationId xmlns:a16="http://schemas.microsoft.com/office/drawing/2014/main" id="{C4805384-80DD-439A-9F3B-748EBDBA746A}"/>
+                <a16:creationId xmlns:a16="http://schemas.microsoft.com/office/drawing/2014/main" id="{0E80CB7C-4061-48DD-B7F1-F534F5E9B2D3}"/>
               </a:ext>
             </a:extLst>
           </p:cNvPr>
@@ -8370,7 +8811,7 @@
           <p:cNvPr id="11" name="s8-d2">
             <a:extLst xmlns:a="http://schemas.openxmlformats.org/drawingml/2006/main">
               <a:ext uri="{FF2B5EF4-FFF2-40B4-BE49-F238E27FC236}">
-                <a16:creationId xmlns:a16="http://schemas.microsoft.com/office/drawing/2014/main" id="{7A57D747-4406-4A9B-899E-213958211E91}"/>
+                <a16:creationId xmlns:a16="http://schemas.microsoft.com/office/drawing/2014/main" id="{2F1535AE-FC9B-4E9E-8E45-EC5E4A97799F}"/>
               </a:ext>
             </a:extLst>
           </p:cNvPr>
@@ -8403,7 +8844,7 @@
           <p:cNvPr id="12" name="s8-l2">
             <a:extLst xmlns:a="http://schemas.openxmlformats.org/drawingml/2006/main">
               <a:ext uri="{FF2B5EF4-FFF2-40B4-BE49-F238E27FC236}">
-                <a16:creationId xmlns:a16="http://schemas.microsoft.com/office/drawing/2014/main" id="{6C2106C5-A204-4920-8066-806344907E14}"/>
+                <a16:creationId xmlns:a16="http://schemas.microsoft.com/office/drawing/2014/main" id="{7B7A5867-8B20-46E2-95CF-05E12176F1E8}"/>
               </a:ext>
             </a:extLst>
           </p:cNvPr>
@@ -8448,7 +8889,7 @@
           <p:cNvPr id="13" name="s8-d3">
             <a:extLst xmlns:a="http://schemas.openxmlformats.org/drawingml/2006/main">
               <a:ext uri="{FF2B5EF4-FFF2-40B4-BE49-F238E27FC236}">
-                <a16:creationId xmlns:a16="http://schemas.microsoft.com/office/drawing/2014/main" id="{EA0B3F80-C9A0-4924-A30A-361F11D6AEDE}"/>
+                <a16:creationId xmlns:a16="http://schemas.microsoft.com/office/drawing/2014/main" id="{4DCD492D-97B7-4F51-91CC-6F534E64CD1C}"/>
               </a:ext>
             </a:extLst>
           </p:cNvPr>
@@ -8481,7 +8922,7 @@
           <p:cNvPr id="14" name="s8-l3">
             <a:extLst xmlns:a="http://schemas.openxmlformats.org/drawingml/2006/main">
               <a:ext uri="{FF2B5EF4-FFF2-40B4-BE49-F238E27FC236}">
-                <a16:creationId xmlns:a16="http://schemas.microsoft.com/office/drawing/2014/main" id="{7EEF8C95-F7D6-4C9C-A2C6-AAD268664D3C}"/>
+                <a16:creationId xmlns:a16="http://schemas.microsoft.com/office/drawing/2014/main" id="{6F88E6FF-50BD-4DC3-AD40-8982CFF6D71C}"/>
               </a:ext>
             </a:extLst>
           </p:cNvPr>
@@ -8526,7 +8967,7 @@
           <p:cNvPr id="15" name="s8-platforms">
             <a:extLst xmlns:a="http://schemas.openxmlformats.org/drawingml/2006/main">
               <a:ext uri="{FF2B5EF4-FFF2-40B4-BE49-F238E27FC236}">
-                <a16:creationId xmlns:a16="http://schemas.microsoft.com/office/drawing/2014/main" id="{7DAD2529-C304-4C68-A7AE-81A7C31E709B}"/>
+                <a16:creationId xmlns:a16="http://schemas.microsoft.com/office/drawing/2014/main" id="{E0C0EB5A-1288-488C-8ED3-B7491E97A0C4}"/>
               </a:ext>
             </a:extLst>
           </p:cNvPr>
@@ -8593,7 +9034,7 @@
           <p:cNvPr id="17" name="footer-source-8">
             <a:extLst xmlns:a="http://schemas.openxmlformats.org/drawingml/2006/main">
               <a:ext uri="{FF2B5EF4-FFF2-40B4-BE49-F238E27FC236}">
-                <a16:creationId xmlns:a16="http://schemas.microsoft.com/office/drawing/2014/main" id="{7B79A44B-BBE1-49AD-98B9-18B5D3499FCF}"/>
+                <a16:creationId xmlns:a16="http://schemas.microsoft.com/office/drawing/2014/main" id="{A2830800-C494-4C98-B0BC-4B419D500DC6}"/>
               </a:ext>
             </a:extLst>
           </p:cNvPr>
@@ -8638,7 +9079,7 @@
           <p:cNvPr id="18" name="footer-number-8">
             <a:extLst xmlns:a="http://schemas.openxmlformats.org/drawingml/2006/main">
               <a:ext uri="{FF2B5EF4-FFF2-40B4-BE49-F238E27FC236}">
-                <a16:creationId xmlns:a16="http://schemas.microsoft.com/office/drawing/2014/main" id="{06D2C7E8-428D-49E7-BE60-DD3EECA2C140}"/>
+                <a16:creationId xmlns:a16="http://schemas.microsoft.com/office/drawing/2014/main" id="{3692B7C0-C78E-46EC-8470-7D7A4D12425F}"/>
               </a:ext>
             </a:extLst>
           </p:cNvPr>
@@ -8681,7 +9122,7 @@
     </p:spTree>
     <p:extLst>
       <p:ext uri="{BB962C8B-B14F-4D97-AF65-F5344CB8AC3E}">
-        <p14:creationId xmlns:p14="http://schemas.microsoft.com/office/powerpoint/2010/main" val="1784538584"/>
+        <p14:creationId xmlns:p14="http://schemas.microsoft.com/office/powerpoint/2010/main" val="1171177393"/>
       </p:ext>
     </p:extLst>
   </p:cSld>

--- a/outputs/vertex-palace-build-week-demo.pptx
+++ b/outputs/vertex-palace-build-week-demo.pptx
@@ -2,24 +2,24 @@
 <file path=ppt/presentation.xml><?xml version="1.0" encoding="utf-8"?>
 <p:presentation xmlns:p="http://schemas.openxmlformats.org/presentationml/2006/main">
   <p:sldMasterIdLst>
-    <p:sldMasterId xmlns:r="http://schemas.openxmlformats.org/officeDocument/2006/relationships" id="2147483648" r:id="R4447eac610094cd2"/>
+    <p:sldMasterId xmlns:r="http://schemas.openxmlformats.org/officeDocument/2006/relationships" id="2147483648" r:id="Rfa7efd61061c429f"/>
   </p:sldMasterIdLst>
   <p:notesMasterIdLst>
-    <p:notesMasterId xmlns:r="http://schemas.openxmlformats.org/officeDocument/2006/relationships" r:id="R854e11561415443b"/>
+    <p:notesMasterId xmlns:r="http://schemas.openxmlformats.org/officeDocument/2006/relationships" r:id="Rdc5b3f1b06fa4e75"/>
   </p:notesMasterIdLst>
   <p:sldIdLst>
-    <p:sldId xmlns:r="http://schemas.openxmlformats.org/officeDocument/2006/relationships" id="256" r:id="Rd6648c84d79a4cc6"/>
-    <p:sldId xmlns:r="http://schemas.openxmlformats.org/officeDocument/2006/relationships" id="257" r:id="Rb5bebca330ad4ca3"/>
-    <p:sldId xmlns:r="http://schemas.openxmlformats.org/officeDocument/2006/relationships" id="258" r:id="R422a9556e1a84118"/>
-    <p:sldId xmlns:r="http://schemas.openxmlformats.org/officeDocument/2006/relationships" id="259" r:id="Rca56058f22ab48cc"/>
-    <p:sldId xmlns:r="http://schemas.openxmlformats.org/officeDocument/2006/relationships" id="260" r:id="Rb28946adaa4c4fad"/>
-    <p:sldId xmlns:r="http://schemas.openxmlformats.org/officeDocument/2006/relationships" id="261" r:id="R79b7fcd52fbd4b6c"/>
-    <p:sldId xmlns:r="http://schemas.openxmlformats.org/officeDocument/2006/relationships" id="262" r:id="Rac92e3d97df443fd"/>
-    <p:sldId xmlns:r="http://schemas.openxmlformats.org/officeDocument/2006/relationships" id="263" r:id="R89e0c61a14b24818"/>
-    <p:sldId xmlns:r="http://schemas.openxmlformats.org/officeDocument/2006/relationships" id="264" r:id="R5dd3fb8bca224e50"/>
-    <p:sldId xmlns:r="http://schemas.openxmlformats.org/officeDocument/2006/relationships" id="265" r:id="Rc663756d433d404a"/>
-    <p:sldId xmlns:r="http://schemas.openxmlformats.org/officeDocument/2006/relationships" id="266" r:id="R5e32d7167e644809"/>
-    <p:sldId xmlns:r="http://schemas.openxmlformats.org/officeDocument/2006/relationships" id="267" r:id="R612f46d1491a4f45"/>
+    <p:sldId xmlns:r="http://schemas.openxmlformats.org/officeDocument/2006/relationships" id="256" r:id="R8f8f2530d2df4f6c"/>
+    <p:sldId xmlns:r="http://schemas.openxmlformats.org/officeDocument/2006/relationships" id="257" r:id="Ra553d0c38f834a20"/>
+    <p:sldId xmlns:r="http://schemas.openxmlformats.org/officeDocument/2006/relationships" id="258" r:id="R88478c72c5244abf"/>
+    <p:sldId xmlns:r="http://schemas.openxmlformats.org/officeDocument/2006/relationships" id="259" r:id="Rfa3e39caf32949f1"/>
+    <p:sldId xmlns:r="http://schemas.openxmlformats.org/officeDocument/2006/relationships" id="260" r:id="R0a4c72b3dcb444a0"/>
+    <p:sldId xmlns:r="http://schemas.openxmlformats.org/officeDocument/2006/relationships" id="261" r:id="Raa743e28550944a7"/>
+    <p:sldId xmlns:r="http://schemas.openxmlformats.org/officeDocument/2006/relationships" id="262" r:id="R305d7fe5ea074677"/>
+    <p:sldId xmlns:r="http://schemas.openxmlformats.org/officeDocument/2006/relationships" id="263" r:id="R4c741d9685b2475d"/>
+    <p:sldId xmlns:r="http://schemas.openxmlformats.org/officeDocument/2006/relationships" id="264" r:id="Reac28eb7789c4297"/>
+    <p:sldId xmlns:r="http://schemas.openxmlformats.org/officeDocument/2006/relationships" id="265" r:id="R7ceae9fe556b4351"/>
+    <p:sldId xmlns:r="http://schemas.openxmlformats.org/officeDocument/2006/relationships" id="266" r:id="Rcf74c570646a4b09"/>
+    <p:sldId xmlns:r="http://schemas.openxmlformats.org/officeDocument/2006/relationships" id="267" r:id="Rd3ef8fe7668c4a6c"/>
   </p:sldIdLst>
   <p:sldSz cx="12192000" cy="6858000"/>
   <p:notesSz cx="6858000" cy="9144000"/>
@@ -1248,12 +1248,17 @@
           <a:lstStyle xmlns:a="http://schemas.openxmlformats.org/drawingml/2006/main"/>
           <a:p xmlns:a="http://schemas.openxmlformats.org/drawingml/2006/main">
             <a:r>
-              <a:t>Against the no-Palace Control, Adaptive required 4.5 additional tool calls at the paired median, and the interval remained above zero. That is measurable routing overhead.</a:t>
-            </a:r>
-          </a:p>
-          <a:p xmlns:a="http://schemas.openxmlformats.org/drawingml/2006/main">
-            <a:r>
-              <a:t>Reported tokens and wall time also had positive central estimates, but both intervals crossed zero. They are inconclusive, not proof that Adaptive is universally slower or more expensive.</a:t>
+              <a:t>Say the uncomfortable result plainly: if Vertex Palace were forced on for every task, this benchmark would argue that it was unnecessary for these deterministic synthetic fixtures. Adaptive added 4.5 tool calls, while reported Token and time central estimates were higher but inconclusive.</a:t>
+            </a:r>
+          </a:p>
+          <a:p xmlns:a="http://schemas.openxmlformats.org/drawingml/2006/main">
+            <a:r>
+              <a:t>The product response is not to hide the result. Current v0.2.3 can bypass packed context for one explicit file, use route-lite for bounded work, and reserve Full or Guarded mode for cross-stack, contract, and memory risk. Bypass still costs one Palace decision call.</a:t>
+            </a:r>
+          </a:p>
+          <a:p xmlns:a="http://schemas.openxmlformats.org/drawingml/2006/main">
+            <a:r>
+              <a:t>This policy change is not confirmatory performance proof. The next study still needs larger real repositories, hidden memory-dependent traps, and repetitions across models, machines, and long-lived sessions.</a:t>
             </a:r>
           </a:p>
         </p:txBody>
@@ -1471,7 +1476,7 @@
   </p:cSld>
   <p:clrMap bg1="lt1" tx1="dk1" bg2="lt2" tx2="dk2" accent1="accent1" accent2="accent2" accent3="accent3" accent4="accent4" accent5="accent5" accent6="accent6" hlink="hlink" folHlink="folHlink"/>
   <p:sldLayoutIdLst>
-    <p:sldLayoutId xmlns:r="http://schemas.openxmlformats.org/officeDocument/2006/relationships" id="2147483649" r:id="Rb9293d2b83714cf9"/>
+    <p:sldLayoutId xmlns:r="http://schemas.openxmlformats.org/officeDocument/2006/relationships" id="2147483649" r:id="R850c1df3decc421f"/>
   </p:sldLayoutIdLst>
   <p:txStyles>
     <p:titleStyle>
@@ -2192,7 +2197,7 @@
           <p:cNvPr id="7" name="s1-eyebrow">
             <a:extLst xmlns:a="http://schemas.openxmlformats.org/drawingml/2006/main">
               <a:ext uri="{FF2B5EF4-FFF2-40B4-BE49-F238E27FC236}">
-                <a16:creationId xmlns:a16="http://schemas.microsoft.com/office/drawing/2014/main" id="{E6EC4DBB-9567-4A1E-A9F9-4FD2D794A06A}"/>
+                <a16:creationId xmlns:a16="http://schemas.microsoft.com/office/drawing/2014/main" id="{41C192AE-BED5-4A4F-943E-64B34B26425D}"/>
               </a:ext>
             </a:extLst>
           </p:cNvPr>
@@ -2237,7 +2242,7 @@
           <p:cNvPr id="2" name="s1-title">
             <a:extLst xmlns:a="http://schemas.openxmlformats.org/drawingml/2006/main">
               <a:ext uri="{FF2B5EF4-FFF2-40B4-BE49-F238E27FC236}">
-                <a16:creationId xmlns:a16="http://schemas.microsoft.com/office/drawing/2014/main" id="{8EF3326F-FA76-4082-9C22-1182E1A3F092}"/>
+                <a16:creationId xmlns:a16="http://schemas.microsoft.com/office/drawing/2014/main" id="{E8116F1E-3E9F-4042-8978-8FAFFD912EE8}"/>
               </a:ext>
             </a:extLst>
           </p:cNvPr>
@@ -2305,7 +2310,7 @@
           <p:cNvPr id="4" name="s1-subtitle">
             <a:extLst xmlns:a="http://schemas.openxmlformats.org/drawingml/2006/main">
               <a:ext uri="{FF2B5EF4-FFF2-40B4-BE49-F238E27FC236}">
-                <a16:creationId xmlns:a16="http://schemas.microsoft.com/office/drawing/2014/main" id="{59F5405F-282D-4D8F-8C05-27B61F071B88}"/>
+                <a16:creationId xmlns:a16="http://schemas.microsoft.com/office/drawing/2014/main" id="{574F8BF2-2299-40E0-BE13-7D0B6EAF6549}"/>
               </a:ext>
             </a:extLst>
           </p:cNvPr>
@@ -2350,7 +2355,7 @@
           <p:cNvPr id="5" name="s1-version">
             <a:extLst xmlns:a="http://schemas.openxmlformats.org/drawingml/2006/main">
               <a:ext uri="{FF2B5EF4-FFF2-40B4-BE49-F238E27FC236}">
-                <a16:creationId xmlns:a16="http://schemas.microsoft.com/office/drawing/2014/main" id="{C29018CA-63DC-47A9-BE6B-D9B927A878B8}"/>
+                <a16:creationId xmlns:a16="http://schemas.microsoft.com/office/drawing/2014/main" id="{A8EB010A-B1A3-4B88-BE4E-F08BBAE27F7B}"/>
               </a:ext>
             </a:extLst>
           </p:cNvPr>
@@ -2399,7 +2404,7 @@
           <p:nvPr/>
         </p:nvPicPr>
         <p:blipFill>
-          <a:blip xmlns:r="http://schemas.openxmlformats.org/officeDocument/2006/relationships" xmlns:a="http://schemas.openxmlformats.org/drawingml/2006/main" r:embed="R7d18fcba070448a2"/>
+          <a:blip xmlns:r="http://schemas.openxmlformats.org/officeDocument/2006/relationships" xmlns:a="http://schemas.openxmlformats.org/drawingml/2006/main" r:embed="R09ce5c00e97644fc"/>
           <a:stretch xmlns:a="http://schemas.openxmlformats.org/drawingml/2006/main"/>
         </p:blipFill>
         <p:spPr>
@@ -2415,7 +2420,7 @@
     </p:spTree>
     <p:extLst>
       <p:ext uri="{BB962C8B-B14F-4D97-AF65-F5344CB8AC3E}">
-        <p14:creationId xmlns:p14="http://schemas.microsoft.com/office/powerpoint/2010/main" val="1574527647"/>
+        <p14:creationId xmlns:p14="http://schemas.microsoft.com/office/powerpoint/2010/main" val="1017580000"/>
       </p:ext>
     </p:extLst>
   </p:cSld>
@@ -2446,7 +2451,7 @@
           <p:cNvPr id="39" name="s10-title">
             <a:extLst xmlns:a="http://schemas.openxmlformats.org/drawingml/2006/main">
               <a:ext uri="{FF2B5EF4-FFF2-40B4-BE49-F238E27FC236}">
-                <a16:creationId xmlns:a16="http://schemas.microsoft.com/office/drawing/2014/main" id="{2B19BB49-B872-4A3C-81BD-9F1C7F02EDCC}"/>
+                <a16:creationId xmlns:a16="http://schemas.microsoft.com/office/drawing/2014/main" id="{F27BC063-6326-45FC-8EAC-A4A8127E509F}"/>
               </a:ext>
             </a:extLst>
           </p:cNvPr>
@@ -2491,7 +2496,7 @@
           <p:cNvPr id="2" name="s10-subtitle">
             <a:extLst xmlns:a="http://schemas.openxmlformats.org/drawingml/2006/main">
               <a:ext uri="{FF2B5EF4-FFF2-40B4-BE49-F238E27FC236}">
-                <a16:creationId xmlns:a16="http://schemas.microsoft.com/office/drawing/2014/main" id="{08082FD6-647E-41C6-9149-80D11731BA35}"/>
+                <a16:creationId xmlns:a16="http://schemas.microsoft.com/office/drawing/2014/main" id="{261E399F-678D-49F0-BD84-ABD438374628}"/>
               </a:ext>
             </a:extLst>
           </p:cNvPr>
@@ -2536,7 +2541,7 @@
           <p:cNvPr id="3" name="s10-tests">
             <a:extLst xmlns:a="http://schemas.openxmlformats.org/drawingml/2006/main">
               <a:ext uri="{FF2B5EF4-FFF2-40B4-BE49-F238E27FC236}">
-                <a16:creationId xmlns:a16="http://schemas.microsoft.com/office/drawing/2014/main" id="{0B6BC7D9-D0CF-4A5D-B4CB-3F1FF8639DFA}"/>
+                <a16:creationId xmlns:a16="http://schemas.microsoft.com/office/drawing/2014/main" id="{3D87FFCD-113C-48BA-9D84-BC8A1202D7F4}"/>
               </a:ext>
             </a:extLst>
           </p:cNvPr>
@@ -2571,7 +2576,7 @@
           <p:cNvPr id="4" name="s10-tests-k">
             <a:extLst xmlns:a="http://schemas.openxmlformats.org/drawingml/2006/main">
               <a:ext uri="{FF2B5EF4-FFF2-40B4-BE49-F238E27FC236}">
-                <a16:creationId xmlns:a16="http://schemas.microsoft.com/office/drawing/2014/main" id="{8B5A2E26-3E53-4CE5-B7BC-9724535E754B}"/>
+                <a16:creationId xmlns:a16="http://schemas.microsoft.com/office/drawing/2014/main" id="{0F410417-F4FA-45EB-BCBA-3C31897B56B3}"/>
               </a:ext>
             </a:extLst>
           </p:cNvPr>
@@ -2616,7 +2621,7 @@
           <p:cNvPr id="5" name="s10-tests-stat">
             <a:extLst xmlns:a="http://schemas.openxmlformats.org/drawingml/2006/main">
               <a:ext uri="{FF2B5EF4-FFF2-40B4-BE49-F238E27FC236}">
-                <a16:creationId xmlns:a16="http://schemas.microsoft.com/office/drawing/2014/main" id="{09A41087-8F61-4632-8EE9-60DD6893FFA1}"/>
+                <a16:creationId xmlns:a16="http://schemas.microsoft.com/office/drawing/2014/main" id="{4613D372-ABD3-4D0E-906B-D5937B93F5DA}"/>
               </a:ext>
             </a:extLst>
           </p:cNvPr>
@@ -2661,7 +2666,7 @@
           <p:cNvPr id="6" name="s10-tests-label">
             <a:extLst xmlns:a="http://schemas.openxmlformats.org/drawingml/2006/main">
               <a:ext uri="{FF2B5EF4-FFF2-40B4-BE49-F238E27FC236}">
-                <a16:creationId xmlns:a16="http://schemas.microsoft.com/office/drawing/2014/main" id="{4EB3CC9A-89E2-436A-9029-84E3CBC2D6AA}"/>
+                <a16:creationId xmlns:a16="http://schemas.microsoft.com/office/drawing/2014/main" id="{CE65B99E-2D66-4A16-A5A3-B55E1863E4A0}"/>
               </a:ext>
             </a:extLst>
           </p:cNvPr>
@@ -2728,7 +2733,7 @@
           <p:cNvPr id="8" name="s10-tests-body">
             <a:extLst xmlns:a="http://schemas.openxmlformats.org/drawingml/2006/main">
               <a:ext uri="{FF2B5EF4-FFF2-40B4-BE49-F238E27FC236}">
-                <a16:creationId xmlns:a16="http://schemas.microsoft.com/office/drawing/2014/main" id="{91BF19E5-2BF9-4EA8-BFA7-36C9D66E9AC3}"/>
+                <a16:creationId xmlns:a16="http://schemas.microsoft.com/office/drawing/2014/main" id="{9FAF8158-1E05-4353-9CEB-7D9C322D4258}"/>
               </a:ext>
             </a:extLst>
           </p:cNvPr>
@@ -2775,7 +2780,7 @@
           <p:cNvPr id="9" name="s10-test-d1">
             <a:extLst xmlns:a="http://schemas.openxmlformats.org/drawingml/2006/main">
               <a:ext uri="{FF2B5EF4-FFF2-40B4-BE49-F238E27FC236}">
-                <a16:creationId xmlns:a16="http://schemas.microsoft.com/office/drawing/2014/main" id="{BBF8D70B-401C-4486-94FB-2BDE0F5FCD46}"/>
+                <a16:creationId xmlns:a16="http://schemas.microsoft.com/office/drawing/2014/main" id="{CE83ECAA-A54B-4E6A-893B-60F056E2BE44}"/>
               </a:ext>
             </a:extLst>
           </p:cNvPr>
@@ -2808,7 +2813,7 @@
           <p:cNvPr id="10" name="s10-test-d2">
             <a:extLst xmlns:a="http://schemas.openxmlformats.org/drawingml/2006/main">
               <a:ext uri="{FF2B5EF4-FFF2-40B4-BE49-F238E27FC236}">
-                <a16:creationId xmlns:a16="http://schemas.microsoft.com/office/drawing/2014/main" id="{B6BC1805-9D93-4171-883F-37EAC94309EC}"/>
+                <a16:creationId xmlns:a16="http://schemas.microsoft.com/office/drawing/2014/main" id="{510DF344-BD2D-4BAD-91C4-6FC19945F0B5}"/>
               </a:ext>
             </a:extLst>
           </p:cNvPr>
@@ -2841,7 +2846,7 @@
           <p:cNvPr id="11" name="s10-test-d3">
             <a:extLst xmlns:a="http://schemas.openxmlformats.org/drawingml/2006/main">
               <a:ext uri="{FF2B5EF4-FFF2-40B4-BE49-F238E27FC236}">
-                <a16:creationId xmlns:a16="http://schemas.microsoft.com/office/drawing/2014/main" id="{76B541F8-E2EA-4090-92BA-F4110F0D14CD}"/>
+                <a16:creationId xmlns:a16="http://schemas.microsoft.com/office/drawing/2014/main" id="{B896DA41-F61A-454E-86A9-9523EFE7205C}"/>
               </a:ext>
             </a:extLst>
           </p:cNvPr>
@@ -2874,7 +2879,7 @@
           <p:cNvPr id="12" name="s10-test-g1">
             <a:extLst xmlns:a="http://schemas.openxmlformats.org/drawingml/2006/main">
               <a:ext uri="{FF2B5EF4-FFF2-40B4-BE49-F238E27FC236}">
-                <a16:creationId xmlns:a16="http://schemas.microsoft.com/office/drawing/2014/main" id="{E49D02A2-BB0A-479F-9B3F-B0BED55C33B1}"/>
+                <a16:creationId xmlns:a16="http://schemas.microsoft.com/office/drawing/2014/main" id="{153024CE-DECD-4ED6-A625-3B34D78E77CB}"/>
               </a:ext>
             </a:extLst>
           </p:cNvPr>
@@ -2919,7 +2924,7 @@
           <p:cNvPr id="13" name="s10-test-g2">
             <a:extLst xmlns:a="http://schemas.openxmlformats.org/drawingml/2006/main">
               <a:ext uri="{FF2B5EF4-FFF2-40B4-BE49-F238E27FC236}">
-                <a16:creationId xmlns:a16="http://schemas.microsoft.com/office/drawing/2014/main" id="{DD31B2EB-6E55-4E4D-B7E9-08F275829E3C}"/>
+                <a16:creationId xmlns:a16="http://schemas.microsoft.com/office/drawing/2014/main" id="{B30B41DB-C769-41E2-A1D5-B049C3F4FFB0}"/>
               </a:ext>
             </a:extLst>
           </p:cNvPr>
@@ -2964,7 +2969,7 @@
           <p:cNvPr id="14" name="s10-test-g3">
             <a:extLst xmlns:a="http://schemas.openxmlformats.org/drawingml/2006/main">
               <a:ext uri="{FF2B5EF4-FFF2-40B4-BE49-F238E27FC236}">
-                <a16:creationId xmlns:a16="http://schemas.microsoft.com/office/drawing/2014/main" id="{247405FF-4D63-4EFA-9A78-6865CD34DA6F}"/>
+                <a16:creationId xmlns:a16="http://schemas.microsoft.com/office/drawing/2014/main" id="{00614CD4-2195-46E2-9306-663231605B7D}"/>
               </a:ext>
             </a:extLst>
           </p:cNvPr>
@@ -3009,7 +3014,7 @@
           <p:cNvPr id="15" name="s10-tests-foot">
             <a:extLst xmlns:a="http://schemas.openxmlformats.org/drawingml/2006/main">
               <a:ext uri="{FF2B5EF4-FFF2-40B4-BE49-F238E27FC236}">
-                <a16:creationId xmlns:a16="http://schemas.microsoft.com/office/drawing/2014/main" id="{B33B7FC0-4FAD-4DDA-A74B-3476B1279405}"/>
+                <a16:creationId xmlns:a16="http://schemas.microsoft.com/office/drawing/2014/main" id="{97839723-FD15-43E3-80C1-6BCFB83C93A9}"/>
               </a:ext>
             </a:extLst>
           </p:cNvPr>
@@ -3054,7 +3059,7 @@
           <p:cNvPr id="16" name="s10-ci">
             <a:extLst xmlns:a="http://schemas.openxmlformats.org/drawingml/2006/main">
               <a:ext uri="{FF2B5EF4-FFF2-40B4-BE49-F238E27FC236}">
-                <a16:creationId xmlns:a16="http://schemas.microsoft.com/office/drawing/2014/main" id="{96EC8E23-0BF7-4459-BC41-31A611EEE2D1}"/>
+                <a16:creationId xmlns:a16="http://schemas.microsoft.com/office/drawing/2014/main" id="{CED290D0-6EA4-4D5B-B8BE-4FBC33965613}"/>
               </a:ext>
             </a:extLst>
           </p:cNvPr>
@@ -3089,7 +3094,7 @@
           <p:cNvPr id="17" name="s10-ci-k">
             <a:extLst xmlns:a="http://schemas.openxmlformats.org/drawingml/2006/main">
               <a:ext uri="{FF2B5EF4-FFF2-40B4-BE49-F238E27FC236}">
-                <a16:creationId xmlns:a16="http://schemas.microsoft.com/office/drawing/2014/main" id="{B683DF47-E1D5-48B7-802E-BA8644036A63}"/>
+                <a16:creationId xmlns:a16="http://schemas.microsoft.com/office/drawing/2014/main" id="{EAC8066A-455A-48A2-9F5A-2A46062960FC}"/>
               </a:ext>
             </a:extLst>
           </p:cNvPr>
@@ -3134,7 +3139,7 @@
           <p:cNvPr id="18" name="s10-ci-stat">
             <a:extLst xmlns:a="http://schemas.openxmlformats.org/drawingml/2006/main">
               <a:ext uri="{FF2B5EF4-FFF2-40B4-BE49-F238E27FC236}">
-                <a16:creationId xmlns:a16="http://schemas.microsoft.com/office/drawing/2014/main" id="{CCEFCB07-2DBC-4455-9EDD-860B1BFE8D9B}"/>
+                <a16:creationId xmlns:a16="http://schemas.microsoft.com/office/drawing/2014/main" id="{35B74422-4ACD-4FBB-B8EB-B9FC9097A648}"/>
               </a:ext>
             </a:extLst>
           </p:cNvPr>
@@ -3179,7 +3184,7 @@
           <p:cNvPr id="19" name="s10-ci-label">
             <a:extLst xmlns:a="http://schemas.openxmlformats.org/drawingml/2006/main">
               <a:ext uri="{FF2B5EF4-FFF2-40B4-BE49-F238E27FC236}">
-                <a16:creationId xmlns:a16="http://schemas.microsoft.com/office/drawing/2014/main" id="{9E56D01D-28AE-4087-993B-1ACE2A33799D}"/>
+                <a16:creationId xmlns:a16="http://schemas.microsoft.com/office/drawing/2014/main" id="{19F1228C-8E16-460F-B51E-70D35365E519}"/>
               </a:ext>
             </a:extLst>
           </p:cNvPr>
@@ -3246,7 +3251,7 @@
           <p:cNvPr id="21" name="s10-ci-d1">
             <a:extLst xmlns:a="http://schemas.openxmlformats.org/drawingml/2006/main">
               <a:ext uri="{FF2B5EF4-FFF2-40B4-BE49-F238E27FC236}">
-                <a16:creationId xmlns:a16="http://schemas.microsoft.com/office/drawing/2014/main" id="{A038A1A5-9983-4756-BEC2-72896BCD511B}"/>
+                <a16:creationId xmlns:a16="http://schemas.microsoft.com/office/drawing/2014/main" id="{191EB898-FCB0-430B-A272-838CC0B43B56}"/>
               </a:ext>
             </a:extLst>
           </p:cNvPr>
@@ -3279,7 +3284,7 @@
           <p:cNvPr id="22" name="s10-ci-d2">
             <a:extLst xmlns:a="http://schemas.openxmlformats.org/drawingml/2006/main">
               <a:ext uri="{FF2B5EF4-FFF2-40B4-BE49-F238E27FC236}">
-                <a16:creationId xmlns:a16="http://schemas.microsoft.com/office/drawing/2014/main" id="{A80A47BB-3B30-427E-91F1-35266B447053}"/>
+                <a16:creationId xmlns:a16="http://schemas.microsoft.com/office/drawing/2014/main" id="{C5A7C34F-A155-4400-B87B-B9DB89012FFC}"/>
               </a:ext>
             </a:extLst>
           </p:cNvPr>
@@ -3312,7 +3317,7 @@
           <p:cNvPr id="23" name="s10-ci-d3">
             <a:extLst xmlns:a="http://schemas.openxmlformats.org/drawingml/2006/main">
               <a:ext uri="{FF2B5EF4-FFF2-40B4-BE49-F238E27FC236}">
-                <a16:creationId xmlns:a16="http://schemas.microsoft.com/office/drawing/2014/main" id="{B78CA782-84A1-4F44-B20A-C77814A1626C}"/>
+                <a16:creationId xmlns:a16="http://schemas.microsoft.com/office/drawing/2014/main" id="{984C8550-C944-4978-ABAF-FEB461089B71}"/>
               </a:ext>
             </a:extLst>
           </p:cNvPr>
@@ -3345,7 +3350,7 @@
           <p:cNvPr id="24" name="s10-ci-d4">
             <a:extLst xmlns:a="http://schemas.openxmlformats.org/drawingml/2006/main">
               <a:ext uri="{FF2B5EF4-FFF2-40B4-BE49-F238E27FC236}">
-                <a16:creationId xmlns:a16="http://schemas.microsoft.com/office/drawing/2014/main" id="{0904AB8B-7D15-4E8C-82E2-52328CB1B939}"/>
+                <a16:creationId xmlns:a16="http://schemas.microsoft.com/office/drawing/2014/main" id="{721DF192-FAB8-4658-8C67-C32437BF43AC}"/>
               </a:ext>
             </a:extLst>
           </p:cNvPr>
@@ -3378,7 +3383,7 @@
           <p:cNvPr id="25" name="s10-ci-d5">
             <a:extLst xmlns:a="http://schemas.openxmlformats.org/drawingml/2006/main">
               <a:ext uri="{FF2B5EF4-FFF2-40B4-BE49-F238E27FC236}">
-                <a16:creationId xmlns:a16="http://schemas.microsoft.com/office/drawing/2014/main" id="{58E1CAAE-B30C-46F3-AA31-F8B1CE334502}"/>
+                <a16:creationId xmlns:a16="http://schemas.microsoft.com/office/drawing/2014/main" id="{B5707517-A80D-41ED-94E1-D0DFBF2FD7B9}"/>
               </a:ext>
             </a:extLst>
           </p:cNvPr>
@@ -3411,7 +3416,7 @@
           <p:cNvPr id="26" name="s10-ci-r1">
             <a:extLst xmlns:a="http://schemas.openxmlformats.org/drawingml/2006/main">
               <a:ext uri="{FF2B5EF4-FFF2-40B4-BE49-F238E27FC236}">
-                <a16:creationId xmlns:a16="http://schemas.microsoft.com/office/drawing/2014/main" id="{A842FFAF-EB6C-4261-9276-6956BD16AA01}"/>
+                <a16:creationId xmlns:a16="http://schemas.microsoft.com/office/drawing/2014/main" id="{998C2722-49B7-471F-BC2C-BC940225F0D5}"/>
               </a:ext>
             </a:extLst>
           </p:cNvPr>
@@ -3456,7 +3461,7 @@
           <p:cNvPr id="27" name="s10-ci-r2">
             <a:extLst xmlns:a="http://schemas.openxmlformats.org/drawingml/2006/main">
               <a:ext uri="{FF2B5EF4-FFF2-40B4-BE49-F238E27FC236}">
-                <a16:creationId xmlns:a16="http://schemas.microsoft.com/office/drawing/2014/main" id="{AEBC5C10-515A-4CA7-B33D-EA920A173A1E}"/>
+                <a16:creationId xmlns:a16="http://schemas.microsoft.com/office/drawing/2014/main" id="{9FFA5A5E-2615-4B2F-8E19-2BFDA40822B8}"/>
               </a:ext>
             </a:extLst>
           </p:cNvPr>
@@ -3501,7 +3506,7 @@
           <p:cNvPr id="28" name="s10-ci-r3">
             <a:extLst xmlns:a="http://schemas.openxmlformats.org/drawingml/2006/main">
               <a:ext uri="{FF2B5EF4-FFF2-40B4-BE49-F238E27FC236}">
-                <a16:creationId xmlns:a16="http://schemas.microsoft.com/office/drawing/2014/main" id="{BE16071B-B7AE-423B-85FE-C74E4CFD343C}"/>
+                <a16:creationId xmlns:a16="http://schemas.microsoft.com/office/drawing/2014/main" id="{3A030282-3494-4B98-9E15-C1CB6525A3F4}"/>
               </a:ext>
             </a:extLst>
           </p:cNvPr>
@@ -3546,7 +3551,7 @@
           <p:cNvPr id="29" name="s10-ci-r4">
             <a:extLst xmlns:a="http://schemas.openxmlformats.org/drawingml/2006/main">
               <a:ext uri="{FF2B5EF4-FFF2-40B4-BE49-F238E27FC236}">
-                <a16:creationId xmlns:a16="http://schemas.microsoft.com/office/drawing/2014/main" id="{E8982F91-D267-49EE-A308-DE76A389D64D}"/>
+                <a16:creationId xmlns:a16="http://schemas.microsoft.com/office/drawing/2014/main" id="{35A11E4D-D72B-4195-BF69-316E2881C14C}"/>
               </a:ext>
             </a:extLst>
           </p:cNvPr>
@@ -3591,7 +3596,7 @@
           <p:cNvPr id="30" name="s10-ci-r5">
             <a:extLst xmlns:a="http://schemas.openxmlformats.org/drawingml/2006/main">
               <a:ext uri="{FF2B5EF4-FFF2-40B4-BE49-F238E27FC236}">
-                <a16:creationId xmlns:a16="http://schemas.microsoft.com/office/drawing/2014/main" id="{30477F40-BFB1-4B5C-8935-EB27EFB76C10}"/>
+                <a16:creationId xmlns:a16="http://schemas.microsoft.com/office/drawing/2014/main" id="{C5AD33EC-4700-4393-9570-372451C3951F}"/>
               </a:ext>
             </a:extLst>
           </p:cNvPr>
@@ -3636,7 +3641,7 @@
           <p:cNvPr id="31" name="s10-release">
             <a:extLst xmlns:a="http://schemas.openxmlformats.org/drawingml/2006/main">
               <a:ext uri="{FF2B5EF4-FFF2-40B4-BE49-F238E27FC236}">
-                <a16:creationId xmlns:a16="http://schemas.microsoft.com/office/drawing/2014/main" id="{3717DB5D-23C9-4F1D-88EB-08C950563E47}"/>
+                <a16:creationId xmlns:a16="http://schemas.microsoft.com/office/drawing/2014/main" id="{60FB1B5A-304F-42B3-A2EE-B16843F7A189}"/>
               </a:ext>
             </a:extLst>
           </p:cNvPr>
@@ -3671,7 +3676,7 @@
           <p:cNvPr id="32" name="s10-release-k">
             <a:extLst xmlns:a="http://schemas.openxmlformats.org/drawingml/2006/main">
               <a:ext uri="{FF2B5EF4-FFF2-40B4-BE49-F238E27FC236}">
-                <a16:creationId xmlns:a16="http://schemas.microsoft.com/office/drawing/2014/main" id="{B344BD29-B342-49F2-908E-EA69FF1A3343}"/>
+                <a16:creationId xmlns:a16="http://schemas.microsoft.com/office/drawing/2014/main" id="{74AEE07C-788D-43E7-A8CC-A1C2A73F29A4}"/>
               </a:ext>
             </a:extLst>
           </p:cNvPr>
@@ -3716,7 +3721,7 @@
           <p:cNvPr id="33" name="s10-release-stat">
             <a:extLst xmlns:a="http://schemas.openxmlformats.org/drawingml/2006/main">
               <a:ext uri="{FF2B5EF4-FFF2-40B4-BE49-F238E27FC236}">
-                <a16:creationId xmlns:a16="http://schemas.microsoft.com/office/drawing/2014/main" id="{C273C704-6A57-4E8B-AEB2-F6A010601940}"/>
+                <a16:creationId xmlns:a16="http://schemas.microsoft.com/office/drawing/2014/main" id="{D0326E64-05E0-4617-B8A6-BA3344F6805C}"/>
               </a:ext>
             </a:extLst>
           </p:cNvPr>
@@ -3761,7 +3766,7 @@
           <p:cNvPr id="34" name="s10-release-list">
             <a:extLst xmlns:a="http://schemas.openxmlformats.org/drawingml/2006/main">
               <a:ext uri="{FF2B5EF4-FFF2-40B4-BE49-F238E27FC236}">
-                <a16:creationId xmlns:a16="http://schemas.microsoft.com/office/drawing/2014/main" id="{A033C1FA-3E90-4356-B215-E55F0CD47D4C}"/>
+                <a16:creationId xmlns:a16="http://schemas.microsoft.com/office/drawing/2014/main" id="{6BBE62F5-0485-4189-8CFD-009908C2EDA4}"/>
               </a:ext>
             </a:extLst>
           </p:cNvPr>
@@ -3811,7 +3816,7 @@
           <p:cNvPr id="35" name="s10-release-platforms">
             <a:extLst xmlns:a="http://schemas.openxmlformats.org/drawingml/2006/main">
               <a:ext uri="{FF2B5EF4-FFF2-40B4-BE49-F238E27FC236}">
-                <a16:creationId xmlns:a16="http://schemas.microsoft.com/office/drawing/2014/main" id="{5D3A9DBD-8BAF-4AC8-811A-27E15FAB2805}"/>
+                <a16:creationId xmlns:a16="http://schemas.microsoft.com/office/drawing/2014/main" id="{C72D513A-07BF-4880-BB2A-6AB81F731928}"/>
               </a:ext>
             </a:extLst>
           </p:cNvPr>
@@ -3878,7 +3883,7 @@
           <p:cNvPr id="37" name="footer-source-10">
             <a:extLst xmlns:a="http://schemas.openxmlformats.org/drawingml/2006/main">
               <a:ext uri="{FF2B5EF4-FFF2-40B4-BE49-F238E27FC236}">
-                <a16:creationId xmlns:a16="http://schemas.microsoft.com/office/drawing/2014/main" id="{BB30C4DE-3BB7-4B8C-BEAD-023566B82D62}"/>
+                <a16:creationId xmlns:a16="http://schemas.microsoft.com/office/drawing/2014/main" id="{7E1C986C-192E-4A03-BC4A-AD2F48BB5ECC}"/>
               </a:ext>
             </a:extLst>
           </p:cNvPr>
@@ -3923,7 +3928,7 @@
           <p:cNvPr id="38" name="footer-number-10">
             <a:extLst xmlns:a="http://schemas.openxmlformats.org/drawingml/2006/main">
               <a:ext uri="{FF2B5EF4-FFF2-40B4-BE49-F238E27FC236}">
-                <a16:creationId xmlns:a16="http://schemas.microsoft.com/office/drawing/2014/main" id="{30C3CD10-8A05-4A99-B02E-FD9EB27C0B63}"/>
+                <a16:creationId xmlns:a16="http://schemas.microsoft.com/office/drawing/2014/main" id="{2265554B-04D8-44EE-850E-ADF252825A0E}"/>
               </a:ext>
             </a:extLst>
           </p:cNvPr>
@@ -3966,7 +3971,7 @@
     </p:spTree>
     <p:extLst>
       <p:ext uri="{BB962C8B-B14F-4D97-AF65-F5344CB8AC3E}">
-        <p14:creationId xmlns:p14="http://schemas.microsoft.com/office/powerpoint/2010/main" val="1346793835"/>
+        <p14:creationId xmlns:p14="http://schemas.microsoft.com/office/powerpoint/2010/main" val="1542810664"/>
       </p:ext>
     </p:extLst>
   </p:cSld>
@@ -3997,7 +4002,7 @@
           <p:cNvPr id="27" name="s11-title">
             <a:extLst xmlns:a="http://schemas.openxmlformats.org/drawingml/2006/main">
               <a:ext uri="{FF2B5EF4-FFF2-40B4-BE49-F238E27FC236}">
-                <a16:creationId xmlns:a16="http://schemas.microsoft.com/office/drawing/2014/main" id="{BF05553F-9022-46DD-A08E-526A73AC454E}"/>
+                <a16:creationId xmlns:a16="http://schemas.microsoft.com/office/drawing/2014/main" id="{B88885FA-C7F9-4D22-AC38-9759BB0CB7DC}"/>
               </a:ext>
             </a:extLst>
           </p:cNvPr>
@@ -4042,7 +4047,7 @@
           <p:cNvPr id="2" name="s11-subtitle">
             <a:extLst xmlns:a="http://schemas.openxmlformats.org/drawingml/2006/main">
               <a:ext uri="{FF2B5EF4-FFF2-40B4-BE49-F238E27FC236}">
-                <a16:creationId xmlns:a16="http://schemas.microsoft.com/office/drawing/2014/main" id="{7641537A-1443-4F76-9A7F-E3F7846C40F4}"/>
+                <a16:creationId xmlns:a16="http://schemas.microsoft.com/office/drawing/2014/main" id="{56DF3C25-5C1E-40EF-9ABD-0DE0A17C4FAE}"/>
               </a:ext>
             </a:extLst>
           </p:cNvPr>
@@ -4131,7 +4136,7 @@
           <p:cNvPr id="5" name="s11-arrow1">
             <a:extLst xmlns:a="http://schemas.openxmlformats.org/drawingml/2006/main">
               <a:ext uri="{FF2B5EF4-FFF2-40B4-BE49-F238E27FC236}">
-                <a16:creationId xmlns:a16="http://schemas.microsoft.com/office/drawing/2014/main" id="{66F49B34-F27A-4B49-BAA1-E3AA4B62A85B}"/>
+                <a16:creationId xmlns:a16="http://schemas.microsoft.com/office/drawing/2014/main" id="{2AFE2DBA-7DCA-49A4-B355-2BCD972A0475}"/>
               </a:ext>
             </a:extLst>
           </p:cNvPr>
@@ -4176,7 +4181,7 @@
           <p:cNvPr id="6" name="s11-arrow2">
             <a:extLst xmlns:a="http://schemas.openxmlformats.org/drawingml/2006/main">
               <a:ext uri="{FF2B5EF4-FFF2-40B4-BE49-F238E27FC236}">
-                <a16:creationId xmlns:a16="http://schemas.microsoft.com/office/drawing/2014/main" id="{03AE7F56-8D34-42AD-845E-82407F2AECFA}"/>
+                <a16:creationId xmlns:a16="http://schemas.microsoft.com/office/drawing/2014/main" id="{FFFE4074-3AEB-4937-8C6F-56E06C6B47E5}"/>
               </a:ext>
             </a:extLst>
           </p:cNvPr>
@@ -4221,7 +4226,7 @@
           <p:cNvPr id="7" name="s11-v021">
             <a:extLst xmlns:a="http://schemas.openxmlformats.org/drawingml/2006/main">
               <a:ext uri="{FF2B5EF4-FFF2-40B4-BE49-F238E27FC236}">
-                <a16:creationId xmlns:a16="http://schemas.microsoft.com/office/drawing/2014/main" id="{EF6E2582-ECE7-4EB1-BE84-26A8057E27D4}"/>
+                <a16:creationId xmlns:a16="http://schemas.microsoft.com/office/drawing/2014/main" id="{D7339D09-7816-4C05-BF73-C8A28B56E259}"/>
               </a:ext>
             </a:extLst>
           </p:cNvPr>
@@ -4256,7 +4261,7 @@
           <p:cNvPr id="8" name="s11-v021-version">
             <a:extLst xmlns:a="http://schemas.openxmlformats.org/drawingml/2006/main">
               <a:ext uri="{FF2B5EF4-FFF2-40B4-BE49-F238E27FC236}">
-                <a16:creationId xmlns:a16="http://schemas.microsoft.com/office/drawing/2014/main" id="{7F6822EB-0D66-4472-AFA2-0ED8AC509B90}"/>
+                <a16:creationId xmlns:a16="http://schemas.microsoft.com/office/drawing/2014/main" id="{C0645A0E-766F-4F7B-9C7B-B76F55B72F86}"/>
               </a:ext>
             </a:extLst>
           </p:cNvPr>
@@ -4301,7 +4306,7 @@
           <p:cNvPr id="9" name="s11-v021-k">
             <a:extLst xmlns:a="http://schemas.openxmlformats.org/drawingml/2006/main">
               <a:ext uri="{FF2B5EF4-FFF2-40B4-BE49-F238E27FC236}">
-                <a16:creationId xmlns:a16="http://schemas.microsoft.com/office/drawing/2014/main" id="{A72DBCF5-3328-47C4-8EB6-CFDC383C039B}"/>
+                <a16:creationId xmlns:a16="http://schemas.microsoft.com/office/drawing/2014/main" id="{C88E47FD-BEC9-4EC0-A087-0268A53F8E69}"/>
               </a:ext>
             </a:extLst>
           </p:cNvPr>
@@ -4346,7 +4351,7 @@
           <p:cNvPr id="10" name="s11-v021-v">
             <a:extLst xmlns:a="http://schemas.openxmlformats.org/drawingml/2006/main">
               <a:ext uri="{FF2B5EF4-FFF2-40B4-BE49-F238E27FC236}">
-                <a16:creationId xmlns:a16="http://schemas.microsoft.com/office/drawing/2014/main" id="{82C67DF4-F8B1-40AF-956D-F21D028F394E}"/>
+                <a16:creationId xmlns:a16="http://schemas.microsoft.com/office/drawing/2014/main" id="{87FBFD28-1BF7-42C5-852D-E305681A9C1F}"/>
               </a:ext>
             </a:extLst>
           </p:cNvPr>
@@ -4391,7 +4396,7 @@
           <p:cNvPr id="11" name="s11-v021-foot">
             <a:extLst xmlns:a="http://schemas.openxmlformats.org/drawingml/2006/main">
               <a:ext uri="{FF2B5EF4-FFF2-40B4-BE49-F238E27FC236}">
-                <a16:creationId xmlns:a16="http://schemas.microsoft.com/office/drawing/2014/main" id="{C70771C2-44EF-4C1F-9122-EE9C2B0865BE}"/>
+                <a16:creationId xmlns:a16="http://schemas.microsoft.com/office/drawing/2014/main" id="{C3046B0D-96DC-4DB8-8447-33896CFC01B5}"/>
               </a:ext>
             </a:extLst>
           </p:cNvPr>
@@ -4436,7 +4441,7 @@
           <p:cNvPr id="12" name="s11-v022">
             <a:extLst xmlns:a="http://schemas.openxmlformats.org/drawingml/2006/main">
               <a:ext uri="{FF2B5EF4-FFF2-40B4-BE49-F238E27FC236}">
-                <a16:creationId xmlns:a16="http://schemas.microsoft.com/office/drawing/2014/main" id="{EB18E501-509E-49E0-9DB9-0CE9855416A4}"/>
+                <a16:creationId xmlns:a16="http://schemas.microsoft.com/office/drawing/2014/main" id="{224B769D-C6A6-4DFB-ACED-3D9EED9BC135}"/>
               </a:ext>
             </a:extLst>
           </p:cNvPr>
@@ -4471,7 +4476,7 @@
           <p:cNvPr id="13" name="s11-v022-version">
             <a:extLst xmlns:a="http://schemas.openxmlformats.org/drawingml/2006/main">
               <a:ext uri="{FF2B5EF4-FFF2-40B4-BE49-F238E27FC236}">
-                <a16:creationId xmlns:a16="http://schemas.microsoft.com/office/drawing/2014/main" id="{D3C54E2F-D1F0-4C30-B611-265A2B862E3D}"/>
+                <a16:creationId xmlns:a16="http://schemas.microsoft.com/office/drawing/2014/main" id="{736EF2A3-093D-46EF-A766-746A30ADE831}"/>
               </a:ext>
             </a:extLst>
           </p:cNvPr>
@@ -4516,7 +4521,7 @@
           <p:cNvPr id="14" name="s11-v022-k">
             <a:extLst xmlns:a="http://schemas.openxmlformats.org/drawingml/2006/main">
               <a:ext uri="{FF2B5EF4-FFF2-40B4-BE49-F238E27FC236}">
-                <a16:creationId xmlns:a16="http://schemas.microsoft.com/office/drawing/2014/main" id="{020C1725-1767-45D8-BD39-4D379906D331}"/>
+                <a16:creationId xmlns:a16="http://schemas.microsoft.com/office/drawing/2014/main" id="{516D3DEE-650D-4FD5-9D8F-654B8BABE00B}"/>
               </a:ext>
             </a:extLst>
           </p:cNvPr>
@@ -4561,7 +4566,7 @@
           <p:cNvPr id="15" name="s11-v022-v">
             <a:extLst xmlns:a="http://schemas.openxmlformats.org/drawingml/2006/main">
               <a:ext uri="{FF2B5EF4-FFF2-40B4-BE49-F238E27FC236}">
-                <a16:creationId xmlns:a16="http://schemas.microsoft.com/office/drawing/2014/main" id="{FB6A3ECB-B79E-4C28-BC46-C398251D312E}"/>
+                <a16:creationId xmlns:a16="http://schemas.microsoft.com/office/drawing/2014/main" id="{7A83E86C-0BCF-48B8-8639-CC7E3B479C0E}"/>
               </a:ext>
             </a:extLst>
           </p:cNvPr>
@@ -4606,7 +4611,7 @@
           <p:cNvPr id="16" name="s11-v022-foot">
             <a:extLst xmlns:a="http://schemas.openxmlformats.org/drawingml/2006/main">
               <a:ext uri="{FF2B5EF4-FFF2-40B4-BE49-F238E27FC236}">
-                <a16:creationId xmlns:a16="http://schemas.microsoft.com/office/drawing/2014/main" id="{9B949631-CF4B-4BFD-B26C-CD6D523F18DD}"/>
+                <a16:creationId xmlns:a16="http://schemas.microsoft.com/office/drawing/2014/main" id="{EBA0B7DA-BFB7-4A7C-892E-F12005CF07CD}"/>
               </a:ext>
             </a:extLst>
           </p:cNvPr>
@@ -4651,7 +4656,7 @@
           <p:cNvPr id="17" name="s11-v023">
             <a:extLst xmlns:a="http://schemas.openxmlformats.org/drawingml/2006/main">
               <a:ext uri="{FF2B5EF4-FFF2-40B4-BE49-F238E27FC236}">
-                <a16:creationId xmlns:a16="http://schemas.microsoft.com/office/drawing/2014/main" id="{CB8E2D80-8606-4F9B-B0DF-F5B55A202128}"/>
+                <a16:creationId xmlns:a16="http://schemas.microsoft.com/office/drawing/2014/main" id="{93676E56-517B-4813-A342-1D44DB1D4A64}"/>
               </a:ext>
             </a:extLst>
           </p:cNvPr>
@@ -4686,7 +4691,7 @@
           <p:cNvPr id="18" name="s11-v023-version">
             <a:extLst xmlns:a="http://schemas.openxmlformats.org/drawingml/2006/main">
               <a:ext uri="{FF2B5EF4-FFF2-40B4-BE49-F238E27FC236}">
-                <a16:creationId xmlns:a16="http://schemas.microsoft.com/office/drawing/2014/main" id="{55D89C7A-EB0D-4038-85AE-60E0069EC32D}"/>
+                <a16:creationId xmlns:a16="http://schemas.microsoft.com/office/drawing/2014/main" id="{7EFCAD78-A838-4E79-9088-839052DB4ABD}"/>
               </a:ext>
             </a:extLst>
           </p:cNvPr>
@@ -4731,7 +4736,7 @@
           <p:cNvPr id="19" name="s11-v023-k">
             <a:extLst xmlns:a="http://schemas.openxmlformats.org/drawingml/2006/main">
               <a:ext uri="{FF2B5EF4-FFF2-40B4-BE49-F238E27FC236}">
-                <a16:creationId xmlns:a16="http://schemas.microsoft.com/office/drawing/2014/main" id="{0726051B-F1A6-4DD4-BD4A-77B94B78EF87}"/>
+                <a16:creationId xmlns:a16="http://schemas.microsoft.com/office/drawing/2014/main" id="{417C79D9-8885-4864-A7B3-D50F7E0D53E2}"/>
               </a:ext>
             </a:extLst>
           </p:cNvPr>
@@ -4776,7 +4781,7 @@
           <p:cNvPr id="20" name="s11-v023-v">
             <a:extLst xmlns:a="http://schemas.openxmlformats.org/drawingml/2006/main">
               <a:ext uri="{FF2B5EF4-FFF2-40B4-BE49-F238E27FC236}">
-                <a16:creationId xmlns:a16="http://schemas.microsoft.com/office/drawing/2014/main" id="{598C9F79-64A6-4EFA-A6E9-420E0B226126}"/>
+                <a16:creationId xmlns:a16="http://schemas.microsoft.com/office/drawing/2014/main" id="{F9D95D13-85ED-49FC-9955-5EE9C23D90ED}"/>
               </a:ext>
             </a:extLst>
           </p:cNvPr>
@@ -4821,7 +4826,7 @@
           <p:cNvPr id="21" name="s11-v023-foot">
             <a:extLst xmlns:a="http://schemas.openxmlformats.org/drawingml/2006/main">
               <a:ext uri="{FF2B5EF4-FFF2-40B4-BE49-F238E27FC236}">
-                <a16:creationId xmlns:a16="http://schemas.microsoft.com/office/drawing/2014/main" id="{CA43FFCB-4AB8-44EF-943B-B8DA9754E5CD}"/>
+                <a16:creationId xmlns:a16="http://schemas.microsoft.com/office/drawing/2014/main" id="{07E36275-9B69-413F-93AF-7F0266699BA4}"/>
               </a:ext>
             </a:extLst>
           </p:cNvPr>
@@ -4866,7 +4871,7 @@
           <p:cNvPr id="22" name="s11-takeaway">
             <a:extLst xmlns:a="http://schemas.openxmlformats.org/drawingml/2006/main">
               <a:ext uri="{FF2B5EF4-FFF2-40B4-BE49-F238E27FC236}">
-                <a16:creationId xmlns:a16="http://schemas.microsoft.com/office/drawing/2014/main" id="{C0CDEC2D-7D1B-4AFD-9B4C-F8C4CFE9D6AA}"/>
+                <a16:creationId xmlns:a16="http://schemas.microsoft.com/office/drawing/2014/main" id="{77D522C4-7CA9-41A9-B18C-9C9E98523823}"/>
               </a:ext>
             </a:extLst>
           </p:cNvPr>
@@ -4901,7 +4906,7 @@
           <p:cNvPr id="23" name="s11-takeaway-v">
             <a:extLst xmlns:a="http://schemas.openxmlformats.org/drawingml/2006/main">
               <a:ext uri="{FF2B5EF4-FFF2-40B4-BE49-F238E27FC236}">
-                <a16:creationId xmlns:a16="http://schemas.microsoft.com/office/drawing/2014/main" id="{00C1C39E-029C-45F8-9136-35E59F7214DA}"/>
+                <a16:creationId xmlns:a16="http://schemas.microsoft.com/office/drawing/2014/main" id="{0800FE5A-59EF-4389-896D-70A56166D526}"/>
               </a:ext>
             </a:extLst>
           </p:cNvPr>
@@ -4968,7 +4973,7 @@
           <p:cNvPr id="25" name="footer-source-11">
             <a:extLst xmlns:a="http://schemas.openxmlformats.org/drawingml/2006/main">
               <a:ext uri="{FF2B5EF4-FFF2-40B4-BE49-F238E27FC236}">
-                <a16:creationId xmlns:a16="http://schemas.microsoft.com/office/drawing/2014/main" id="{30B9DD80-B521-4018-AF6A-7B69AB640F21}"/>
+                <a16:creationId xmlns:a16="http://schemas.microsoft.com/office/drawing/2014/main" id="{72E33532-B7A3-4670-8627-62D9BCC99CDF}"/>
               </a:ext>
             </a:extLst>
           </p:cNvPr>
@@ -5013,7 +5018,7 @@
           <p:cNvPr id="26" name="footer-number-11">
             <a:extLst xmlns:a="http://schemas.openxmlformats.org/drawingml/2006/main">
               <a:ext uri="{FF2B5EF4-FFF2-40B4-BE49-F238E27FC236}">
-                <a16:creationId xmlns:a16="http://schemas.microsoft.com/office/drawing/2014/main" id="{69205881-9F8D-4B27-B73F-AA3AADAB7FC2}"/>
+                <a16:creationId xmlns:a16="http://schemas.microsoft.com/office/drawing/2014/main" id="{4FB2D785-5BDA-4FE7-BF3E-8A206A21E83D}"/>
               </a:ext>
             </a:extLst>
           </p:cNvPr>
@@ -5056,7 +5061,7 @@
     </p:spTree>
     <p:extLst>
       <p:ext uri="{BB962C8B-B14F-4D97-AF65-F5344CB8AC3E}">
-        <p14:creationId xmlns:p14="http://schemas.microsoft.com/office/powerpoint/2010/main" val="461596881"/>
+        <p14:creationId xmlns:p14="http://schemas.microsoft.com/office/powerpoint/2010/main" val="1507675935"/>
       </p:ext>
     </p:extLst>
   </p:cSld>
@@ -5087,7 +5092,7 @@
           <p:cNvPr id="19" name="s12-eyebrow">
             <a:extLst xmlns:a="http://schemas.openxmlformats.org/drawingml/2006/main">
               <a:ext uri="{FF2B5EF4-FFF2-40B4-BE49-F238E27FC236}">
-                <a16:creationId xmlns:a16="http://schemas.microsoft.com/office/drawing/2014/main" id="{E94BB10C-FA29-4194-988C-A82A1FD9572E}"/>
+                <a16:creationId xmlns:a16="http://schemas.microsoft.com/office/drawing/2014/main" id="{B26EE5D9-331C-46B9-8A17-70B8B29581BE}"/>
               </a:ext>
             </a:extLst>
           </p:cNvPr>
@@ -5132,7 +5137,7 @@
           <p:cNvPr id="2" name="s12-title">
             <a:extLst xmlns:a="http://schemas.openxmlformats.org/drawingml/2006/main">
               <a:ext uri="{FF2B5EF4-FFF2-40B4-BE49-F238E27FC236}">
-                <a16:creationId xmlns:a16="http://schemas.microsoft.com/office/drawing/2014/main" id="{70B53F75-651F-48B8-9848-D93D2F94E5FC}"/>
+                <a16:creationId xmlns:a16="http://schemas.microsoft.com/office/drawing/2014/main" id="{FC0598FE-5934-4156-9111-EADA524C3B38}"/>
               </a:ext>
             </a:extLst>
           </p:cNvPr>
@@ -5201,7 +5206,7 @@
           <p:cNvPr id="4" name="s12-close">
             <a:extLst xmlns:a="http://schemas.openxmlformats.org/drawingml/2006/main">
               <a:ext uri="{FF2B5EF4-FFF2-40B4-BE49-F238E27FC236}">
-                <a16:creationId xmlns:a16="http://schemas.microsoft.com/office/drawing/2014/main" id="{7E605E24-DA7A-40D1-891E-282294D9A596}"/>
+                <a16:creationId xmlns:a16="http://schemas.microsoft.com/office/drawing/2014/main" id="{4C4DCF78-D1CB-4A22-825F-9FCBA090C768}"/>
               </a:ext>
             </a:extLst>
           </p:cNvPr>
@@ -5246,7 +5251,7 @@
           <p:cNvPr id="5" name="s12-command-box">
             <a:extLst xmlns:a="http://schemas.openxmlformats.org/drawingml/2006/main">
               <a:ext uri="{FF2B5EF4-FFF2-40B4-BE49-F238E27FC236}">
-                <a16:creationId xmlns:a16="http://schemas.microsoft.com/office/drawing/2014/main" id="{30457F6F-4AD9-42C0-9DDC-114456350EF2}"/>
+                <a16:creationId xmlns:a16="http://schemas.microsoft.com/office/drawing/2014/main" id="{D4B06752-48F6-476C-8EC7-DF4AEDDC0EBE}"/>
               </a:ext>
             </a:extLst>
           </p:cNvPr>
@@ -5281,7 +5286,7 @@
           <p:cNvPr id="6" name="s12-command">
             <a:extLst xmlns:a="http://schemas.openxmlformats.org/drawingml/2006/main">
               <a:ext uri="{FF2B5EF4-FFF2-40B4-BE49-F238E27FC236}">
-                <a16:creationId xmlns:a16="http://schemas.microsoft.com/office/drawing/2014/main" id="{02E38BD1-3433-4424-8802-8379F3809E9B}"/>
+                <a16:creationId xmlns:a16="http://schemas.microsoft.com/office/drawing/2014/main" id="{069802BD-E1D7-4C26-9DAF-BC9F3769CE17}"/>
               </a:ext>
             </a:extLst>
           </p:cNvPr>
@@ -5327,7 +5332,7 @@
           <p:cNvPr id="7" name="s12-github">
             <a:extLst xmlns:a="http://schemas.openxmlformats.org/drawingml/2006/main">
               <a:ext uri="{FF2B5EF4-FFF2-40B4-BE49-F238E27FC236}">
-                <a16:creationId xmlns:a16="http://schemas.microsoft.com/office/drawing/2014/main" id="{5E8E41CF-C03D-4BDA-829E-441F0A161BC1}"/>
+                <a16:creationId xmlns:a16="http://schemas.microsoft.com/office/drawing/2014/main" id="{B216AC18-2B33-46B2-9B5A-657C425E7978}"/>
               </a:ext>
             </a:extLst>
           </p:cNvPr>
@@ -5372,7 +5377,7 @@
           <p:cNvPr id="8" name="s12-npm">
             <a:extLst xmlns:a="http://schemas.openxmlformats.org/drawingml/2006/main">
               <a:ext uri="{FF2B5EF4-FFF2-40B4-BE49-F238E27FC236}">
-                <a16:creationId xmlns:a16="http://schemas.microsoft.com/office/drawing/2014/main" id="{E678AC50-F0FA-42B8-89DE-04671C6B7ADF}"/>
+                <a16:creationId xmlns:a16="http://schemas.microsoft.com/office/drawing/2014/main" id="{4BBF6B50-3F2B-49CE-AFEA-1D85265BD334}"/>
               </a:ext>
             </a:extLst>
           </p:cNvPr>
@@ -5417,7 +5422,7 @@
           <p:cNvPr id="9" name="s12-d1">
             <a:extLst xmlns:a="http://schemas.openxmlformats.org/drawingml/2006/main">
               <a:ext uri="{FF2B5EF4-FFF2-40B4-BE49-F238E27FC236}">
-                <a16:creationId xmlns:a16="http://schemas.microsoft.com/office/drawing/2014/main" id="{529552F1-C6B3-4370-85AE-427FEECE3E53}"/>
+                <a16:creationId xmlns:a16="http://schemas.microsoft.com/office/drawing/2014/main" id="{B3B25E61-6DDF-4879-8965-97C53775D3A9}"/>
               </a:ext>
             </a:extLst>
           </p:cNvPr>
@@ -5450,7 +5455,7 @@
           <p:cNvPr id="10" name="s12-l1">
             <a:extLst xmlns:a="http://schemas.openxmlformats.org/drawingml/2006/main">
               <a:ext uri="{FF2B5EF4-FFF2-40B4-BE49-F238E27FC236}">
-                <a16:creationId xmlns:a16="http://schemas.microsoft.com/office/drawing/2014/main" id="{F7B6B5A8-6EB9-4558-99E8-C08F4131B34A}"/>
+                <a16:creationId xmlns:a16="http://schemas.microsoft.com/office/drawing/2014/main" id="{B656556F-3903-4E84-B2EE-CA7166FCCF6D}"/>
               </a:ext>
             </a:extLst>
           </p:cNvPr>
@@ -5495,7 +5500,7 @@
           <p:cNvPr id="11" name="s12-d2">
             <a:extLst xmlns:a="http://schemas.openxmlformats.org/drawingml/2006/main">
               <a:ext uri="{FF2B5EF4-FFF2-40B4-BE49-F238E27FC236}">
-                <a16:creationId xmlns:a16="http://schemas.microsoft.com/office/drawing/2014/main" id="{9922C01D-9630-4FB7-8116-C00DF2FE9F7F}"/>
+                <a16:creationId xmlns:a16="http://schemas.microsoft.com/office/drawing/2014/main" id="{1AF05E55-D24C-4CFC-9139-2F6C7B99A11F}"/>
               </a:ext>
             </a:extLst>
           </p:cNvPr>
@@ -5528,7 +5533,7 @@
           <p:cNvPr id="12" name="s12-l2">
             <a:extLst xmlns:a="http://schemas.openxmlformats.org/drawingml/2006/main">
               <a:ext uri="{FF2B5EF4-FFF2-40B4-BE49-F238E27FC236}">
-                <a16:creationId xmlns:a16="http://schemas.microsoft.com/office/drawing/2014/main" id="{0308318A-869F-4F68-9079-CE0A9671799C}"/>
+                <a16:creationId xmlns:a16="http://schemas.microsoft.com/office/drawing/2014/main" id="{0B033A61-2C37-41E1-8953-89C2700EAB04}"/>
               </a:ext>
             </a:extLst>
           </p:cNvPr>
@@ -5573,7 +5578,7 @@
           <p:cNvPr id="13" name="s12-d3">
             <a:extLst xmlns:a="http://schemas.openxmlformats.org/drawingml/2006/main">
               <a:ext uri="{FF2B5EF4-FFF2-40B4-BE49-F238E27FC236}">
-                <a16:creationId xmlns:a16="http://schemas.microsoft.com/office/drawing/2014/main" id="{EE2074FB-CB4D-4A4E-9165-05108DC55DB1}"/>
+                <a16:creationId xmlns:a16="http://schemas.microsoft.com/office/drawing/2014/main" id="{9CDC4976-A93B-47F9-930C-AF0C4432AE6E}"/>
               </a:ext>
             </a:extLst>
           </p:cNvPr>
@@ -5606,7 +5611,7 @@
           <p:cNvPr id="14" name="s12-l3">
             <a:extLst xmlns:a="http://schemas.openxmlformats.org/drawingml/2006/main">
               <a:ext uri="{FF2B5EF4-FFF2-40B4-BE49-F238E27FC236}">
-                <a16:creationId xmlns:a16="http://schemas.microsoft.com/office/drawing/2014/main" id="{2DFE42CC-020D-4F0C-A1B0-8AFB9D20700E}"/>
+                <a16:creationId xmlns:a16="http://schemas.microsoft.com/office/drawing/2014/main" id="{8D41EC01-ABF0-4549-8D41-703F592AB321}"/>
               </a:ext>
             </a:extLst>
           </p:cNvPr>
@@ -5651,7 +5656,7 @@
           <p:cNvPr id="15" name="s12-platforms">
             <a:extLst xmlns:a="http://schemas.openxmlformats.org/drawingml/2006/main">
               <a:ext uri="{FF2B5EF4-FFF2-40B4-BE49-F238E27FC236}">
-                <a16:creationId xmlns:a16="http://schemas.microsoft.com/office/drawing/2014/main" id="{6B598722-E521-4905-8CA2-832A8AAC66D4}"/>
+                <a16:creationId xmlns:a16="http://schemas.microsoft.com/office/drawing/2014/main" id="{FFE4BC4A-4106-45CF-83F2-3E422BC8DC2A}"/>
               </a:ext>
             </a:extLst>
           </p:cNvPr>
@@ -5718,7 +5723,7 @@
           <p:cNvPr id="17" name="footer-source-12">
             <a:extLst xmlns:a="http://schemas.openxmlformats.org/drawingml/2006/main">
               <a:ext uri="{FF2B5EF4-FFF2-40B4-BE49-F238E27FC236}">
-                <a16:creationId xmlns:a16="http://schemas.microsoft.com/office/drawing/2014/main" id="{EF0E9F5B-06CD-4D50-A1B5-F6B0AB00464F}"/>
+                <a16:creationId xmlns:a16="http://schemas.microsoft.com/office/drawing/2014/main" id="{C069F0C0-645C-4BF6-B273-34B4A2F3AD9A}"/>
               </a:ext>
             </a:extLst>
           </p:cNvPr>
@@ -5763,7 +5768,7 @@
           <p:cNvPr id="18" name="footer-number-12">
             <a:extLst xmlns:a="http://schemas.openxmlformats.org/drawingml/2006/main">
               <a:ext uri="{FF2B5EF4-FFF2-40B4-BE49-F238E27FC236}">
-                <a16:creationId xmlns:a16="http://schemas.microsoft.com/office/drawing/2014/main" id="{A7C5047A-33EA-4873-BD24-EDD9A6C338C2}"/>
+                <a16:creationId xmlns:a16="http://schemas.microsoft.com/office/drawing/2014/main" id="{5DD12322-F830-4A90-9054-AB33254C8704}"/>
               </a:ext>
             </a:extLst>
           </p:cNvPr>
@@ -5806,7 +5811,7 @@
     </p:spTree>
     <p:extLst>
       <p:ext uri="{BB962C8B-B14F-4D97-AF65-F5344CB8AC3E}">
-        <p14:creationId xmlns:p14="http://schemas.microsoft.com/office/powerpoint/2010/main" val="357556412"/>
+        <p14:creationId xmlns:p14="http://schemas.microsoft.com/office/powerpoint/2010/main" val="916940136"/>
       </p:ext>
     </p:extLst>
   </p:cSld>
@@ -5837,7 +5842,7 @@
           <p:cNvPr id="33" name="s2-title">
             <a:extLst xmlns:a="http://schemas.openxmlformats.org/drawingml/2006/main">
               <a:ext uri="{FF2B5EF4-FFF2-40B4-BE49-F238E27FC236}">
-                <a16:creationId xmlns:a16="http://schemas.microsoft.com/office/drawing/2014/main" id="{B724FA3C-E486-474E-8BB3-32EF5639C4A5}"/>
+                <a16:creationId xmlns:a16="http://schemas.microsoft.com/office/drawing/2014/main" id="{D4217F34-942D-44AC-B9F5-3CBB5861F309}"/>
               </a:ext>
             </a:extLst>
           </p:cNvPr>
@@ -5882,7 +5887,7 @@
           <p:cNvPr id="2" name="s2-subtitle">
             <a:extLst xmlns:a="http://schemas.openxmlformats.org/drawingml/2006/main">
               <a:ext uri="{FF2B5EF4-FFF2-40B4-BE49-F238E27FC236}">
-                <a16:creationId xmlns:a16="http://schemas.microsoft.com/office/drawing/2014/main" id="{F94BD1FF-B82D-4CCC-996A-57B57E32F5EF}"/>
+                <a16:creationId xmlns:a16="http://schemas.microsoft.com/office/drawing/2014/main" id="{A3C65415-11E0-42D3-B208-7F06D07B409B}"/>
               </a:ext>
             </a:extLst>
           </p:cNvPr>
@@ -6037,7 +6042,7 @@
           <p:cNvPr id="8" name="s2-agent">
             <a:extLst xmlns:a="http://schemas.openxmlformats.org/drawingml/2006/main">
               <a:ext uri="{FF2B5EF4-FFF2-40B4-BE49-F238E27FC236}">
-                <a16:creationId xmlns:a16="http://schemas.microsoft.com/office/drawing/2014/main" id="{A3B814A0-F4FA-4CA5-942F-AD309BE267F1}"/>
+                <a16:creationId xmlns:a16="http://schemas.microsoft.com/office/drawing/2014/main" id="{4A66E9DF-E3D7-4C60-A342-770FDC1548E1}"/>
               </a:ext>
             </a:extLst>
           </p:cNvPr>
@@ -6070,7 +6075,7 @@
           <p:cNvPr id="9" name="s2-agent-label">
             <a:extLst xmlns:a="http://schemas.openxmlformats.org/drawingml/2006/main">
               <a:ext uri="{FF2B5EF4-FFF2-40B4-BE49-F238E27FC236}">
-                <a16:creationId xmlns:a16="http://schemas.microsoft.com/office/drawing/2014/main" id="{C91B6454-DE0B-4E97-8772-DDE954E2BD85}"/>
+                <a16:creationId xmlns:a16="http://schemas.microsoft.com/office/drawing/2014/main" id="{C9435926-405F-4235-A003-F4847ABBC510}"/>
               </a:ext>
             </a:extLst>
           </p:cNvPr>
@@ -6115,7 +6120,7 @@
           <p:cNvPr id="10" name="s2-file-a">
             <a:extLst xmlns:a="http://schemas.openxmlformats.org/drawingml/2006/main">
               <a:ext uri="{FF2B5EF4-FFF2-40B4-BE49-F238E27FC236}">
-                <a16:creationId xmlns:a16="http://schemas.microsoft.com/office/drawing/2014/main" id="{BFB10F04-7758-4387-9BED-7329B1C53405}"/>
+                <a16:creationId xmlns:a16="http://schemas.microsoft.com/office/drawing/2014/main" id="{D24AF75A-FFE9-4933-9BB2-C0D45480D322}"/>
               </a:ext>
             </a:extLst>
           </p:cNvPr>
@@ -6148,7 +6153,7 @@
           <p:cNvPr id="11" name="s2-file-b">
             <a:extLst xmlns:a="http://schemas.openxmlformats.org/drawingml/2006/main">
               <a:ext uri="{FF2B5EF4-FFF2-40B4-BE49-F238E27FC236}">
-                <a16:creationId xmlns:a16="http://schemas.microsoft.com/office/drawing/2014/main" id="{770F259B-64B7-45ED-ABB1-2FBA5576F9F6}"/>
+                <a16:creationId xmlns:a16="http://schemas.microsoft.com/office/drawing/2014/main" id="{A4B71D6A-4D1C-4B81-812C-9EE6A1CD41E6}"/>
               </a:ext>
             </a:extLst>
           </p:cNvPr>
@@ -6181,7 +6186,7 @@
           <p:cNvPr id="12" name="s2-file-c">
             <a:extLst xmlns:a="http://schemas.openxmlformats.org/drawingml/2006/main">
               <a:ext uri="{FF2B5EF4-FFF2-40B4-BE49-F238E27FC236}">
-                <a16:creationId xmlns:a16="http://schemas.microsoft.com/office/drawing/2014/main" id="{4CD1D96E-F3E1-4D8F-B53B-185577B695E5}"/>
+                <a16:creationId xmlns:a16="http://schemas.microsoft.com/office/drawing/2014/main" id="{C4894B43-A2D4-43CD-A175-6EC33B022700}"/>
               </a:ext>
             </a:extLst>
           </p:cNvPr>
@@ -6214,7 +6219,7 @@
           <p:cNvPr id="13" name="s2-file-d">
             <a:extLst xmlns:a="http://schemas.openxmlformats.org/drawingml/2006/main">
               <a:ext uri="{FF2B5EF4-FFF2-40B4-BE49-F238E27FC236}">
-                <a16:creationId xmlns:a16="http://schemas.microsoft.com/office/drawing/2014/main" id="{56D8B9D9-9DFA-42BD-B769-98081948B429}"/>
+                <a16:creationId xmlns:a16="http://schemas.microsoft.com/office/drawing/2014/main" id="{344C97E6-4F03-4BDA-965D-970786B50785}"/>
               </a:ext>
             </a:extLst>
           </p:cNvPr>
@@ -6247,7 +6252,7 @@
           <p:cNvPr id="14" name="s2-file-e">
             <a:extLst xmlns:a="http://schemas.openxmlformats.org/drawingml/2006/main">
               <a:ext uri="{FF2B5EF4-FFF2-40B4-BE49-F238E27FC236}">
-                <a16:creationId xmlns:a16="http://schemas.microsoft.com/office/drawing/2014/main" id="{D986A909-1404-4A59-9B13-ABC80020C997}"/>
+                <a16:creationId xmlns:a16="http://schemas.microsoft.com/office/drawing/2014/main" id="{7AA431F2-B0BE-46BF-847C-BF44F95F8FC1}"/>
               </a:ext>
             </a:extLst>
           </p:cNvPr>
@@ -6280,7 +6285,7 @@
           <p:cNvPr id="15" name="s2-file-a-label">
             <a:extLst xmlns:a="http://schemas.openxmlformats.org/drawingml/2006/main">
               <a:ext uri="{FF2B5EF4-FFF2-40B4-BE49-F238E27FC236}">
-                <a16:creationId xmlns:a16="http://schemas.microsoft.com/office/drawing/2014/main" id="{3DDD6EBA-2BE9-4D8C-817B-4290D73155E0}"/>
+                <a16:creationId xmlns:a16="http://schemas.microsoft.com/office/drawing/2014/main" id="{5034AA7B-A186-4426-A322-B7352398D8FC}"/>
               </a:ext>
             </a:extLst>
           </p:cNvPr>
@@ -6325,7 +6330,7 @@
           <p:cNvPr id="16" name="s2-file-b-label">
             <a:extLst xmlns:a="http://schemas.openxmlformats.org/drawingml/2006/main">
               <a:ext uri="{FF2B5EF4-FFF2-40B4-BE49-F238E27FC236}">
-                <a16:creationId xmlns:a16="http://schemas.microsoft.com/office/drawing/2014/main" id="{68D3186A-576A-40D5-9C3E-D3F68805ABFB}"/>
+                <a16:creationId xmlns:a16="http://schemas.microsoft.com/office/drawing/2014/main" id="{6AB0B5BE-18B4-402C-BDEF-1F999CF10361}"/>
               </a:ext>
             </a:extLst>
           </p:cNvPr>
@@ -6370,7 +6375,7 @@
           <p:cNvPr id="17" name="s2-file-c-label">
             <a:extLst xmlns:a="http://schemas.openxmlformats.org/drawingml/2006/main">
               <a:ext uri="{FF2B5EF4-FFF2-40B4-BE49-F238E27FC236}">
-                <a16:creationId xmlns:a16="http://schemas.microsoft.com/office/drawing/2014/main" id="{3E2AC4CB-D8DB-4E47-8A49-8D4D4B22BEC3}"/>
+                <a16:creationId xmlns:a16="http://schemas.microsoft.com/office/drawing/2014/main" id="{47204CF0-30D5-4D4C-998E-AF8E604F2398}"/>
               </a:ext>
             </a:extLst>
           </p:cNvPr>
@@ -6415,7 +6420,7 @@
           <p:cNvPr id="18" name="s2-file-d-label">
             <a:extLst xmlns:a="http://schemas.openxmlformats.org/drawingml/2006/main">
               <a:ext uri="{FF2B5EF4-FFF2-40B4-BE49-F238E27FC236}">
-                <a16:creationId xmlns:a16="http://schemas.microsoft.com/office/drawing/2014/main" id="{6D42FCB9-0ABD-449E-ADD6-52FDE04255E6}"/>
+                <a16:creationId xmlns:a16="http://schemas.microsoft.com/office/drawing/2014/main" id="{7D121530-0933-4A3B-A533-86E54302F464}"/>
               </a:ext>
             </a:extLst>
           </p:cNvPr>
@@ -6460,7 +6465,7 @@
           <p:cNvPr id="19" name="s2-file-e-label">
             <a:extLst xmlns:a="http://schemas.openxmlformats.org/drawingml/2006/main">
               <a:ext uri="{FF2B5EF4-FFF2-40B4-BE49-F238E27FC236}">
-                <a16:creationId xmlns:a16="http://schemas.microsoft.com/office/drawing/2014/main" id="{D2DD324C-5247-4841-B195-6D77212AD9C8}"/>
+                <a16:creationId xmlns:a16="http://schemas.microsoft.com/office/drawing/2014/main" id="{B31332A7-AA25-4AF2-ABCC-3F00BC66EF77}"/>
               </a:ext>
             </a:extLst>
           </p:cNvPr>
@@ -6505,7 +6510,7 @@
           <p:cNvPr id="20" name="s2-n1">
             <a:extLst xmlns:a="http://schemas.openxmlformats.org/drawingml/2006/main">
               <a:ext uri="{FF2B5EF4-FFF2-40B4-BE49-F238E27FC236}">
-                <a16:creationId xmlns:a16="http://schemas.microsoft.com/office/drawing/2014/main" id="{D37AE78B-4684-42AF-BC14-F1E5FB7C4FD0}"/>
+                <a16:creationId xmlns:a16="http://schemas.microsoft.com/office/drawing/2014/main" id="{FB0AF871-16EE-45D8-8B1B-A548953ACF9E}"/>
               </a:ext>
             </a:extLst>
           </p:cNvPr>
@@ -6538,7 +6543,7 @@
           <p:cNvPr id="21" name="s2-n1-label">
             <a:extLst xmlns:a="http://schemas.openxmlformats.org/drawingml/2006/main">
               <a:ext uri="{FF2B5EF4-FFF2-40B4-BE49-F238E27FC236}">
-                <a16:creationId xmlns:a16="http://schemas.microsoft.com/office/drawing/2014/main" id="{6F513C2A-44D9-4518-98A1-99496A090BB2}"/>
+                <a16:creationId xmlns:a16="http://schemas.microsoft.com/office/drawing/2014/main" id="{57869D4F-53EB-4C23-99EA-88763AEFCD21}"/>
               </a:ext>
             </a:extLst>
           </p:cNvPr>
@@ -6583,7 +6588,7 @@
           <p:cNvPr id="22" name="s2-p1">
             <a:extLst xmlns:a="http://schemas.openxmlformats.org/drawingml/2006/main">
               <a:ext uri="{FF2B5EF4-FFF2-40B4-BE49-F238E27FC236}">
-                <a16:creationId xmlns:a16="http://schemas.microsoft.com/office/drawing/2014/main" id="{46262A52-56C0-4F86-A060-1CF28A6BA8BE}"/>
+                <a16:creationId xmlns:a16="http://schemas.microsoft.com/office/drawing/2014/main" id="{A96FAC6A-2F04-473B-9F12-CC75CD1844CB}"/>
               </a:ext>
             </a:extLst>
           </p:cNvPr>
@@ -6628,7 +6633,7 @@
           <p:cNvPr id="23" name="s2-n2">
             <a:extLst xmlns:a="http://schemas.openxmlformats.org/drawingml/2006/main">
               <a:ext uri="{FF2B5EF4-FFF2-40B4-BE49-F238E27FC236}">
-                <a16:creationId xmlns:a16="http://schemas.microsoft.com/office/drawing/2014/main" id="{CFB29E41-75F6-4787-9E5A-C78699DD8334}"/>
+                <a16:creationId xmlns:a16="http://schemas.microsoft.com/office/drawing/2014/main" id="{B94514C9-B05A-4EFE-B07D-975C619477E8}"/>
               </a:ext>
             </a:extLst>
           </p:cNvPr>
@@ -6661,7 +6666,7 @@
           <p:cNvPr id="24" name="s2-n2-label">
             <a:extLst xmlns:a="http://schemas.openxmlformats.org/drawingml/2006/main">
               <a:ext uri="{FF2B5EF4-FFF2-40B4-BE49-F238E27FC236}">
-                <a16:creationId xmlns:a16="http://schemas.microsoft.com/office/drawing/2014/main" id="{62014138-255E-4A6B-8151-FF1703E3DE73}"/>
+                <a16:creationId xmlns:a16="http://schemas.microsoft.com/office/drawing/2014/main" id="{BFFCE878-872D-4097-B957-8F49DD999C05}"/>
               </a:ext>
             </a:extLst>
           </p:cNvPr>
@@ -6706,7 +6711,7 @@
           <p:cNvPr id="25" name="s2-p2">
             <a:extLst xmlns:a="http://schemas.openxmlformats.org/drawingml/2006/main">
               <a:ext uri="{FF2B5EF4-FFF2-40B4-BE49-F238E27FC236}">
-                <a16:creationId xmlns:a16="http://schemas.microsoft.com/office/drawing/2014/main" id="{59A465A7-1E65-43A2-A4BA-574667EEA2EC}"/>
+                <a16:creationId xmlns:a16="http://schemas.microsoft.com/office/drawing/2014/main" id="{0F674F13-18FD-459B-A95E-D4BD5869322B}"/>
               </a:ext>
             </a:extLst>
           </p:cNvPr>
@@ -6751,7 +6756,7 @@
           <p:cNvPr id="26" name="s2-n3">
             <a:extLst xmlns:a="http://schemas.openxmlformats.org/drawingml/2006/main">
               <a:ext uri="{FF2B5EF4-FFF2-40B4-BE49-F238E27FC236}">
-                <a16:creationId xmlns:a16="http://schemas.microsoft.com/office/drawing/2014/main" id="{1B642C5B-B382-4FDF-B4E6-A5598741AF92}"/>
+                <a16:creationId xmlns:a16="http://schemas.microsoft.com/office/drawing/2014/main" id="{B59033F0-4A80-4203-9F17-187664502D06}"/>
               </a:ext>
             </a:extLst>
           </p:cNvPr>
@@ -6784,7 +6789,7 @@
           <p:cNvPr id="27" name="s2-n3-label">
             <a:extLst xmlns:a="http://schemas.openxmlformats.org/drawingml/2006/main">
               <a:ext uri="{FF2B5EF4-FFF2-40B4-BE49-F238E27FC236}">
-                <a16:creationId xmlns:a16="http://schemas.microsoft.com/office/drawing/2014/main" id="{A8B96A09-F93B-4E01-83D6-3653665AE2B8}"/>
+                <a16:creationId xmlns:a16="http://schemas.microsoft.com/office/drawing/2014/main" id="{7D736D9D-557F-4B99-A22D-D48C82A19D3C}"/>
               </a:ext>
             </a:extLst>
           </p:cNvPr>
@@ -6829,7 +6834,7 @@
           <p:cNvPr id="28" name="s2-p3">
             <a:extLst xmlns:a="http://schemas.openxmlformats.org/drawingml/2006/main">
               <a:ext uri="{FF2B5EF4-FFF2-40B4-BE49-F238E27FC236}">
-                <a16:creationId xmlns:a16="http://schemas.microsoft.com/office/drawing/2014/main" id="{63C757BA-20A9-47C5-AFF0-132248975256}"/>
+                <a16:creationId xmlns:a16="http://schemas.microsoft.com/office/drawing/2014/main" id="{91DE6FA7-E672-4D5C-A33E-E4C51DE231D2}"/>
               </a:ext>
             </a:extLst>
           </p:cNvPr>
@@ -6874,7 +6879,7 @@
           <p:cNvPr id="29" name="s2-takeaway">
             <a:extLst xmlns:a="http://schemas.openxmlformats.org/drawingml/2006/main">
               <a:ext uri="{FF2B5EF4-FFF2-40B4-BE49-F238E27FC236}">
-                <a16:creationId xmlns:a16="http://schemas.microsoft.com/office/drawing/2014/main" id="{820E38E6-4E7B-4293-85E5-A08622D04323}"/>
+                <a16:creationId xmlns:a16="http://schemas.microsoft.com/office/drawing/2014/main" id="{8F5823AC-E459-4DA7-AFDD-3916BD97E5E7}"/>
               </a:ext>
             </a:extLst>
           </p:cNvPr>
@@ -6941,7 +6946,7 @@
           <p:cNvPr id="31" name="footer-source-2">
             <a:extLst xmlns:a="http://schemas.openxmlformats.org/drawingml/2006/main">
               <a:ext uri="{FF2B5EF4-FFF2-40B4-BE49-F238E27FC236}">
-                <a16:creationId xmlns:a16="http://schemas.microsoft.com/office/drawing/2014/main" id="{1E645E48-E998-4886-84BB-F3FA84D494B5}"/>
+                <a16:creationId xmlns:a16="http://schemas.microsoft.com/office/drawing/2014/main" id="{053667B1-D1E6-4AF0-BE2C-77B46C022AF2}"/>
               </a:ext>
             </a:extLst>
           </p:cNvPr>
@@ -6986,7 +6991,7 @@
           <p:cNvPr id="32" name="footer-number-2">
             <a:extLst xmlns:a="http://schemas.openxmlformats.org/drawingml/2006/main">
               <a:ext uri="{FF2B5EF4-FFF2-40B4-BE49-F238E27FC236}">
-                <a16:creationId xmlns:a16="http://schemas.microsoft.com/office/drawing/2014/main" id="{A0DEAFD9-9479-4D2B-B353-878EADA371D1}"/>
+                <a16:creationId xmlns:a16="http://schemas.microsoft.com/office/drawing/2014/main" id="{FD03E0DA-8C35-4FE6-B15B-A45DA2327FF7}"/>
               </a:ext>
             </a:extLst>
           </p:cNvPr>
@@ -7029,7 +7034,7 @@
     </p:spTree>
     <p:extLst>
       <p:ext uri="{BB962C8B-B14F-4D97-AF65-F5344CB8AC3E}">
-        <p14:creationId xmlns:p14="http://schemas.microsoft.com/office/powerpoint/2010/main" val="1787103084"/>
+        <p14:creationId xmlns:p14="http://schemas.microsoft.com/office/powerpoint/2010/main" val="1347448899"/>
       </p:ext>
     </p:extLst>
   </p:cSld>
@@ -7060,7 +7065,7 @@
           <p:cNvPr id="38" name="s3-title">
             <a:extLst xmlns:a="http://schemas.openxmlformats.org/drawingml/2006/main">
               <a:ext uri="{FF2B5EF4-FFF2-40B4-BE49-F238E27FC236}">
-                <a16:creationId xmlns:a16="http://schemas.microsoft.com/office/drawing/2014/main" id="{CEA04B9C-7BAD-4314-8FF9-3CFB4E709E26}"/>
+                <a16:creationId xmlns:a16="http://schemas.microsoft.com/office/drawing/2014/main" id="{1AA5167D-8585-4D61-80DF-1055F52DF77E}"/>
               </a:ext>
             </a:extLst>
           </p:cNvPr>
@@ -7105,7 +7110,7 @@
           <p:cNvPr id="2" name="s3-subtitle">
             <a:extLst xmlns:a="http://schemas.openxmlformats.org/drawingml/2006/main">
               <a:ext uri="{FF2B5EF4-FFF2-40B4-BE49-F238E27FC236}">
-                <a16:creationId xmlns:a16="http://schemas.microsoft.com/office/drawing/2014/main" id="{E1828E41-7A71-4438-91E1-1B1BD91F569C}"/>
+                <a16:creationId xmlns:a16="http://schemas.microsoft.com/office/drawing/2014/main" id="{5B692289-CD0A-42CB-9B3E-DE3CFDA25683}"/>
               </a:ext>
             </a:extLst>
           </p:cNvPr>
@@ -7194,7 +7199,7 @@
           <p:cNvPr id="5" name="s3-address-panel">
             <a:extLst xmlns:a="http://schemas.openxmlformats.org/drawingml/2006/main">
               <a:ext uri="{FF2B5EF4-FFF2-40B4-BE49-F238E27FC236}">
-                <a16:creationId xmlns:a16="http://schemas.microsoft.com/office/drawing/2014/main" id="{8EF30DB5-D783-438D-8D68-1F7DDB6FBB08}"/>
+                <a16:creationId xmlns:a16="http://schemas.microsoft.com/office/drawing/2014/main" id="{B86D3D54-FE14-4903-98D9-CA9D154914CE}"/>
               </a:ext>
             </a:extLst>
           </p:cNvPr>
@@ -7273,7 +7278,7 @@
           <p:cNvPr id="8" name="s3-x">
             <a:extLst xmlns:a="http://schemas.openxmlformats.org/drawingml/2006/main">
               <a:ext uri="{FF2B5EF4-FFF2-40B4-BE49-F238E27FC236}">
-                <a16:creationId xmlns:a16="http://schemas.microsoft.com/office/drawing/2014/main" id="{44A97AE4-C315-4774-AD4E-46F548AF571E}"/>
+                <a16:creationId xmlns:a16="http://schemas.microsoft.com/office/drawing/2014/main" id="{A30D06ED-94BF-4994-82EB-74729C949082}"/>
               </a:ext>
             </a:extLst>
           </p:cNvPr>
@@ -7306,7 +7311,7 @@
           <p:cNvPr id="9" name="s3-x-letter">
             <a:extLst xmlns:a="http://schemas.openxmlformats.org/drawingml/2006/main">
               <a:ext uri="{FF2B5EF4-FFF2-40B4-BE49-F238E27FC236}">
-                <a16:creationId xmlns:a16="http://schemas.microsoft.com/office/drawing/2014/main" id="{7E5D51F7-2DDB-47AA-BF75-F5A48902DF9C}"/>
+                <a16:creationId xmlns:a16="http://schemas.microsoft.com/office/drawing/2014/main" id="{F0D697D9-DEE0-420A-96C9-566ECE493345}"/>
               </a:ext>
             </a:extLst>
           </p:cNvPr>
@@ -7351,7 +7356,7 @@
           <p:cNvPr id="10" name="s3-x-label">
             <a:extLst xmlns:a="http://schemas.openxmlformats.org/drawingml/2006/main">
               <a:ext uri="{FF2B5EF4-FFF2-40B4-BE49-F238E27FC236}">
-                <a16:creationId xmlns:a16="http://schemas.microsoft.com/office/drawing/2014/main" id="{36214A7B-6872-4C85-8C1A-D34EF54ACCF6}"/>
+                <a16:creationId xmlns:a16="http://schemas.microsoft.com/office/drawing/2014/main" id="{8BE6172B-40FB-4186-8601-D5F9960BD064}"/>
               </a:ext>
             </a:extLst>
           </p:cNvPr>
@@ -7396,7 +7401,7 @@
           <p:cNvPr id="11" name="s3-x-main">
             <a:extLst xmlns:a="http://schemas.openxmlformats.org/drawingml/2006/main">
               <a:ext uri="{FF2B5EF4-FFF2-40B4-BE49-F238E27FC236}">
-                <a16:creationId xmlns:a16="http://schemas.microsoft.com/office/drawing/2014/main" id="{98531155-0DB4-4A88-9E91-80D593F7FCE4}"/>
+                <a16:creationId xmlns:a16="http://schemas.microsoft.com/office/drawing/2014/main" id="{77F53F81-98F0-40EF-B92C-4756ED8DD125}"/>
               </a:ext>
             </a:extLst>
           </p:cNvPr>
@@ -7441,7 +7446,7 @@
           <p:cNvPr id="12" name="s3-x-question">
             <a:extLst xmlns:a="http://schemas.openxmlformats.org/drawingml/2006/main">
               <a:ext uri="{FF2B5EF4-FFF2-40B4-BE49-F238E27FC236}">
-                <a16:creationId xmlns:a16="http://schemas.microsoft.com/office/drawing/2014/main" id="{70389658-B79E-4B40-9DE0-5E3EAD8C6B0D}"/>
+                <a16:creationId xmlns:a16="http://schemas.microsoft.com/office/drawing/2014/main" id="{5DC9BAA3-0B1A-45FB-A8D5-8EB8CEEB9FF8}"/>
               </a:ext>
             </a:extLst>
           </p:cNvPr>
@@ -7486,7 +7491,7 @@
           <p:cNvPr id="13" name="s3-y">
             <a:extLst xmlns:a="http://schemas.openxmlformats.org/drawingml/2006/main">
               <a:ext uri="{FF2B5EF4-FFF2-40B4-BE49-F238E27FC236}">
-                <a16:creationId xmlns:a16="http://schemas.microsoft.com/office/drawing/2014/main" id="{B0F8CC37-F7D8-459F-947E-128D6F0FACF7}"/>
+                <a16:creationId xmlns:a16="http://schemas.microsoft.com/office/drawing/2014/main" id="{26E50144-EA2E-4B4A-9977-1BAEEE60CEF3}"/>
               </a:ext>
             </a:extLst>
           </p:cNvPr>
@@ -7519,7 +7524,7 @@
           <p:cNvPr id="14" name="s3-y-letter">
             <a:extLst xmlns:a="http://schemas.openxmlformats.org/drawingml/2006/main">
               <a:ext uri="{FF2B5EF4-FFF2-40B4-BE49-F238E27FC236}">
-                <a16:creationId xmlns:a16="http://schemas.microsoft.com/office/drawing/2014/main" id="{BE97A1AD-F76E-47E8-BF30-1708F5232CB9}"/>
+                <a16:creationId xmlns:a16="http://schemas.microsoft.com/office/drawing/2014/main" id="{6C9F8289-FB14-46FB-B69F-36CCA350268F}"/>
               </a:ext>
             </a:extLst>
           </p:cNvPr>
@@ -7564,7 +7569,7 @@
           <p:cNvPr id="15" name="s3-y-label">
             <a:extLst xmlns:a="http://schemas.openxmlformats.org/drawingml/2006/main">
               <a:ext uri="{FF2B5EF4-FFF2-40B4-BE49-F238E27FC236}">
-                <a16:creationId xmlns:a16="http://schemas.microsoft.com/office/drawing/2014/main" id="{5C905DDF-CA6F-4BCF-9239-D11FD5471C34}"/>
+                <a16:creationId xmlns:a16="http://schemas.microsoft.com/office/drawing/2014/main" id="{84B69546-30FC-4C3A-B0AF-38DCA6ED8727}"/>
               </a:ext>
             </a:extLst>
           </p:cNvPr>
@@ -7609,7 +7614,7 @@
           <p:cNvPr id="16" name="s3-y-main">
             <a:extLst xmlns:a="http://schemas.openxmlformats.org/drawingml/2006/main">
               <a:ext uri="{FF2B5EF4-FFF2-40B4-BE49-F238E27FC236}">
-                <a16:creationId xmlns:a16="http://schemas.microsoft.com/office/drawing/2014/main" id="{BF51EE79-EDBF-4C4D-A7AB-383ABD502D25}"/>
+                <a16:creationId xmlns:a16="http://schemas.microsoft.com/office/drawing/2014/main" id="{9B414944-4228-4BFA-9CED-C0A1F4556A8C}"/>
               </a:ext>
             </a:extLst>
           </p:cNvPr>
@@ -7654,7 +7659,7 @@
           <p:cNvPr id="17" name="s3-y-question">
             <a:extLst xmlns:a="http://schemas.openxmlformats.org/drawingml/2006/main">
               <a:ext uri="{FF2B5EF4-FFF2-40B4-BE49-F238E27FC236}">
-                <a16:creationId xmlns:a16="http://schemas.microsoft.com/office/drawing/2014/main" id="{8E40AC2A-A209-462D-8AD7-21DBED921808}"/>
+                <a16:creationId xmlns:a16="http://schemas.microsoft.com/office/drawing/2014/main" id="{EFE28FA1-750E-47B5-8787-D62D17B0BFDB}"/>
               </a:ext>
             </a:extLst>
           </p:cNvPr>
@@ -7699,7 +7704,7 @@
           <p:cNvPr id="18" name="s3-z">
             <a:extLst xmlns:a="http://schemas.openxmlformats.org/drawingml/2006/main">
               <a:ext uri="{FF2B5EF4-FFF2-40B4-BE49-F238E27FC236}">
-                <a16:creationId xmlns:a16="http://schemas.microsoft.com/office/drawing/2014/main" id="{779F800E-2854-4D7D-B7F1-3C3429FC19A7}"/>
+                <a16:creationId xmlns:a16="http://schemas.microsoft.com/office/drawing/2014/main" id="{65920A7D-09ED-4038-846A-97A5D870DC28}"/>
               </a:ext>
             </a:extLst>
           </p:cNvPr>
@@ -7732,7 +7737,7 @@
           <p:cNvPr id="19" name="s3-z-letter">
             <a:extLst xmlns:a="http://schemas.openxmlformats.org/drawingml/2006/main">
               <a:ext uri="{FF2B5EF4-FFF2-40B4-BE49-F238E27FC236}">
-                <a16:creationId xmlns:a16="http://schemas.microsoft.com/office/drawing/2014/main" id="{86B930AA-120F-4E30-AC00-BC671103F7F3}"/>
+                <a16:creationId xmlns:a16="http://schemas.microsoft.com/office/drawing/2014/main" id="{5FE4107F-3322-415A-9588-40AFCECF606E}"/>
               </a:ext>
             </a:extLst>
           </p:cNvPr>
@@ -7777,7 +7782,7 @@
           <p:cNvPr id="20" name="s3-z-label">
             <a:extLst xmlns:a="http://schemas.openxmlformats.org/drawingml/2006/main">
               <a:ext uri="{FF2B5EF4-FFF2-40B4-BE49-F238E27FC236}">
-                <a16:creationId xmlns:a16="http://schemas.microsoft.com/office/drawing/2014/main" id="{9741B4B9-D2DE-403C-A06A-821FAC2F922C}"/>
+                <a16:creationId xmlns:a16="http://schemas.microsoft.com/office/drawing/2014/main" id="{E0555D1A-7FDE-4F44-A3DD-A99592BC8707}"/>
               </a:ext>
             </a:extLst>
           </p:cNvPr>
@@ -7822,7 +7827,7 @@
           <p:cNvPr id="21" name="s3-z-main">
             <a:extLst xmlns:a="http://schemas.openxmlformats.org/drawingml/2006/main">
               <a:ext uri="{FF2B5EF4-FFF2-40B4-BE49-F238E27FC236}">
-                <a16:creationId xmlns:a16="http://schemas.microsoft.com/office/drawing/2014/main" id="{60ACCFF2-D547-4988-A0D9-85AA886AABF8}"/>
+                <a16:creationId xmlns:a16="http://schemas.microsoft.com/office/drawing/2014/main" id="{16D70E96-1884-438E-8F9E-35033947F7AF}"/>
               </a:ext>
             </a:extLst>
           </p:cNvPr>
@@ -7867,7 +7872,7 @@
           <p:cNvPr id="22" name="s3-z-question">
             <a:extLst xmlns:a="http://schemas.openxmlformats.org/drawingml/2006/main">
               <a:ext uri="{FF2B5EF4-FFF2-40B4-BE49-F238E27FC236}">
-                <a16:creationId xmlns:a16="http://schemas.microsoft.com/office/drawing/2014/main" id="{8459E5BB-6CBA-47DC-9247-63D506DCDD64}"/>
+                <a16:creationId xmlns:a16="http://schemas.microsoft.com/office/drawing/2014/main" id="{BAB8A95C-37D3-45C6-B307-11841E2C7FDD}"/>
               </a:ext>
             </a:extLst>
           </p:cNvPr>
@@ -7912,7 +7917,7 @@
           <p:cNvPr id="23" name="s3-address-label">
             <a:extLst xmlns:a="http://schemas.openxmlformats.org/drawingml/2006/main">
               <a:ext uri="{FF2B5EF4-FFF2-40B4-BE49-F238E27FC236}">
-                <a16:creationId xmlns:a16="http://schemas.microsoft.com/office/drawing/2014/main" id="{47180982-8C9E-491C-B062-32601B462D4A}"/>
+                <a16:creationId xmlns:a16="http://schemas.microsoft.com/office/drawing/2014/main" id="{8CE274BD-7C85-45EF-9B02-FCCB694E022F}"/>
               </a:ext>
             </a:extLst>
           </p:cNvPr>
@@ -7957,7 +7962,7 @@
           <p:cNvPr id="24" name="s3-address-x">
             <a:extLst xmlns:a="http://schemas.openxmlformats.org/drawingml/2006/main">
               <a:ext uri="{FF2B5EF4-FFF2-40B4-BE49-F238E27FC236}">
-                <a16:creationId xmlns:a16="http://schemas.microsoft.com/office/drawing/2014/main" id="{223E7AE6-C5FE-47C2-8A9F-1AEC0A608676}"/>
+                <a16:creationId xmlns:a16="http://schemas.microsoft.com/office/drawing/2014/main" id="{66FAE4F1-A16E-47FD-9C75-6A4CD95FAB2E}"/>
               </a:ext>
             </a:extLst>
           </p:cNvPr>
@@ -8002,7 +8007,7 @@
           <p:cNvPr id="25" name="s3-address-x-value">
             <a:extLst xmlns:a="http://schemas.openxmlformats.org/drawingml/2006/main">
               <a:ext uri="{FF2B5EF4-FFF2-40B4-BE49-F238E27FC236}">
-                <a16:creationId xmlns:a16="http://schemas.microsoft.com/office/drawing/2014/main" id="{0D8C8E67-4345-49E1-886F-FFBC8B191461}"/>
+                <a16:creationId xmlns:a16="http://schemas.microsoft.com/office/drawing/2014/main" id="{24D254DE-2F72-4B88-AEB9-E369A5E1D239}"/>
               </a:ext>
             </a:extLst>
           </p:cNvPr>
@@ -8047,7 +8052,7 @@
           <p:cNvPr id="26" name="s3-address-y">
             <a:extLst xmlns:a="http://schemas.openxmlformats.org/drawingml/2006/main">
               <a:ext uri="{FF2B5EF4-FFF2-40B4-BE49-F238E27FC236}">
-                <a16:creationId xmlns:a16="http://schemas.microsoft.com/office/drawing/2014/main" id="{DF1B7673-0331-4A51-847A-5D03E7DC5F99}"/>
+                <a16:creationId xmlns:a16="http://schemas.microsoft.com/office/drawing/2014/main" id="{663B16E4-999C-4D78-8D27-59CB7E0A504A}"/>
               </a:ext>
             </a:extLst>
           </p:cNvPr>
@@ -8092,7 +8097,7 @@
           <p:cNvPr id="27" name="s3-address-y-value">
             <a:extLst xmlns:a="http://schemas.openxmlformats.org/drawingml/2006/main">
               <a:ext uri="{FF2B5EF4-FFF2-40B4-BE49-F238E27FC236}">
-                <a16:creationId xmlns:a16="http://schemas.microsoft.com/office/drawing/2014/main" id="{031F41BE-5C0E-4FB4-B20B-6F2851352202}"/>
+                <a16:creationId xmlns:a16="http://schemas.microsoft.com/office/drawing/2014/main" id="{093CE907-53D1-4441-B27C-319C5A2DD6AE}"/>
               </a:ext>
             </a:extLst>
           </p:cNvPr>
@@ -8137,7 +8142,7 @@
           <p:cNvPr id="28" name="s3-address-z">
             <a:extLst xmlns:a="http://schemas.openxmlformats.org/drawingml/2006/main">
               <a:ext uri="{FF2B5EF4-FFF2-40B4-BE49-F238E27FC236}">
-                <a16:creationId xmlns:a16="http://schemas.microsoft.com/office/drawing/2014/main" id="{6BE7958A-CC26-40B0-90D1-92F918C3F6B2}"/>
+                <a16:creationId xmlns:a16="http://schemas.microsoft.com/office/drawing/2014/main" id="{69387AC3-10C5-474D-8A54-A95C5036C855}"/>
               </a:ext>
             </a:extLst>
           </p:cNvPr>
@@ -8182,7 +8187,7 @@
           <p:cNvPr id="29" name="s3-address-z-value">
             <a:extLst xmlns:a="http://schemas.openxmlformats.org/drawingml/2006/main">
               <a:ext uri="{FF2B5EF4-FFF2-40B4-BE49-F238E27FC236}">
-                <a16:creationId xmlns:a16="http://schemas.microsoft.com/office/drawing/2014/main" id="{636A5F44-A036-4E80-9311-0D56A00F82B6}"/>
+                <a16:creationId xmlns:a16="http://schemas.microsoft.com/office/drawing/2014/main" id="{3C45EDE7-8AA7-435B-96EB-45120B09832B}"/>
               </a:ext>
             </a:extLst>
           </p:cNvPr>
@@ -8227,7 +8232,7 @@
           <p:cNvPr id="30" name="s3-address-note">
             <a:extLst xmlns:a="http://schemas.openxmlformats.org/drawingml/2006/main">
               <a:ext uri="{FF2B5EF4-FFF2-40B4-BE49-F238E27FC236}">
-                <a16:creationId xmlns:a16="http://schemas.microsoft.com/office/drawing/2014/main" id="{6C370B82-5177-4D44-B670-47EC8092DBC1}"/>
+                <a16:creationId xmlns:a16="http://schemas.microsoft.com/office/drawing/2014/main" id="{88BEF165-F0C9-47AC-85ED-5A0BE9F1F040}"/>
               </a:ext>
             </a:extLst>
           </p:cNvPr>
@@ -8272,7 +8277,7 @@
           <p:cNvPr id="31" name="s3-route-label">
             <a:extLst xmlns:a="http://schemas.openxmlformats.org/drawingml/2006/main">
               <a:ext uri="{FF2B5EF4-FFF2-40B4-BE49-F238E27FC236}">
-                <a16:creationId xmlns:a16="http://schemas.microsoft.com/office/drawing/2014/main" id="{29B53A14-8C17-4B80-BAB2-08134D90FCE0}"/>
+                <a16:creationId xmlns:a16="http://schemas.microsoft.com/office/drawing/2014/main" id="{F66DE204-DCED-4365-99E9-131D1817EF89}"/>
               </a:ext>
             </a:extLst>
           </p:cNvPr>
@@ -8317,7 +8322,7 @@
           <p:cNvPr id="32" name="s3-route-main">
             <a:extLst xmlns:a="http://schemas.openxmlformats.org/drawingml/2006/main">
               <a:ext uri="{FF2B5EF4-FFF2-40B4-BE49-F238E27FC236}">
-                <a16:creationId xmlns:a16="http://schemas.microsoft.com/office/drawing/2014/main" id="{CC9FBADF-9076-4056-AA65-59170B280417}"/>
+                <a16:creationId xmlns:a16="http://schemas.microsoft.com/office/drawing/2014/main" id="{4EA3DD46-43BE-452B-9961-205C5485D58A}"/>
               </a:ext>
             </a:extLst>
           </p:cNvPr>
@@ -8362,7 +8367,7 @@
           <p:cNvPr id="33" name="s3-memory-label">
             <a:extLst xmlns:a="http://schemas.openxmlformats.org/drawingml/2006/main">
               <a:ext uri="{FF2B5EF4-FFF2-40B4-BE49-F238E27FC236}">
-                <a16:creationId xmlns:a16="http://schemas.microsoft.com/office/drawing/2014/main" id="{C10290B9-3BCA-44C2-82E4-A19CD682CFA6}"/>
+                <a16:creationId xmlns:a16="http://schemas.microsoft.com/office/drawing/2014/main" id="{62A5391B-43A8-4B53-B7A3-29773BAF062D}"/>
               </a:ext>
             </a:extLst>
           </p:cNvPr>
@@ -8407,7 +8412,7 @@
           <p:cNvPr id="34" name="s3-memory-main">
             <a:extLst xmlns:a="http://schemas.openxmlformats.org/drawingml/2006/main">
               <a:ext uri="{FF2B5EF4-FFF2-40B4-BE49-F238E27FC236}">
-                <a16:creationId xmlns:a16="http://schemas.microsoft.com/office/drawing/2014/main" id="{D3A29570-A2F2-43C9-9E0C-2AD8FEB7A953}"/>
+                <a16:creationId xmlns:a16="http://schemas.microsoft.com/office/drawing/2014/main" id="{1B78DEA4-B5BD-4C61-8797-71054E068288}"/>
               </a:ext>
             </a:extLst>
           </p:cNvPr>
@@ -8474,7 +8479,7 @@
           <p:cNvPr id="36" name="footer-source-3">
             <a:extLst xmlns:a="http://schemas.openxmlformats.org/drawingml/2006/main">
               <a:ext uri="{FF2B5EF4-FFF2-40B4-BE49-F238E27FC236}">
-                <a16:creationId xmlns:a16="http://schemas.microsoft.com/office/drawing/2014/main" id="{3D98B7E4-4903-4D5D-A05D-952D253B2578}"/>
+                <a16:creationId xmlns:a16="http://schemas.microsoft.com/office/drawing/2014/main" id="{2204F213-185C-4C85-A88E-E62E73AFCA97}"/>
               </a:ext>
             </a:extLst>
           </p:cNvPr>
@@ -8519,7 +8524,7 @@
           <p:cNvPr id="37" name="footer-number-3">
             <a:extLst xmlns:a="http://schemas.openxmlformats.org/drawingml/2006/main">
               <a:ext uri="{FF2B5EF4-FFF2-40B4-BE49-F238E27FC236}">
-                <a16:creationId xmlns:a16="http://schemas.microsoft.com/office/drawing/2014/main" id="{933C779A-3E56-4F59-A22F-34567869585D}"/>
+                <a16:creationId xmlns:a16="http://schemas.microsoft.com/office/drawing/2014/main" id="{AE267F97-2FB0-45B8-9662-73BE554017CC}"/>
               </a:ext>
             </a:extLst>
           </p:cNvPr>
@@ -8562,7 +8567,7 @@
     </p:spTree>
     <p:extLst>
       <p:ext uri="{BB962C8B-B14F-4D97-AF65-F5344CB8AC3E}">
-        <p14:creationId xmlns:p14="http://schemas.microsoft.com/office/powerpoint/2010/main" val="1804799160"/>
+        <p14:creationId xmlns:p14="http://schemas.microsoft.com/office/powerpoint/2010/main" val="258359751"/>
       </p:ext>
     </p:extLst>
   </p:cSld>
@@ -8593,7 +8598,7 @@
           <p:cNvPr id="26" name="s4-title">
             <a:extLst xmlns:a="http://schemas.openxmlformats.org/drawingml/2006/main">
               <a:ext uri="{FF2B5EF4-FFF2-40B4-BE49-F238E27FC236}">
-                <a16:creationId xmlns:a16="http://schemas.microsoft.com/office/drawing/2014/main" id="{1F1822E5-A009-44D1-9B2D-D8FEB62966A8}"/>
+                <a16:creationId xmlns:a16="http://schemas.microsoft.com/office/drawing/2014/main" id="{B8534018-2C61-45E0-9079-62251C560226}"/>
               </a:ext>
             </a:extLst>
           </p:cNvPr>
@@ -8638,7 +8643,7 @@
           <p:cNvPr id="2" name="s4-subtitle">
             <a:extLst xmlns:a="http://schemas.openxmlformats.org/drawingml/2006/main">
               <a:ext uri="{FF2B5EF4-FFF2-40B4-BE49-F238E27FC236}">
-                <a16:creationId xmlns:a16="http://schemas.microsoft.com/office/drawing/2014/main" id="{87850909-543A-4898-83F2-C4A46B8037F6}"/>
+                <a16:creationId xmlns:a16="http://schemas.microsoft.com/office/drawing/2014/main" id="{A7964411-9CAC-44DB-BB39-CB0F2B0DCB15}"/>
               </a:ext>
             </a:extLst>
           </p:cNvPr>
@@ -8683,7 +8688,7 @@
           <p:cNvPr id="3" name="s4-terminal">
             <a:extLst xmlns:a="http://schemas.openxmlformats.org/drawingml/2006/main">
               <a:ext uri="{FF2B5EF4-FFF2-40B4-BE49-F238E27FC236}">
-                <a16:creationId xmlns:a16="http://schemas.microsoft.com/office/drawing/2014/main" id="{CC9D9BAD-FC20-4568-A488-992B5E21E166}"/>
+                <a16:creationId xmlns:a16="http://schemas.microsoft.com/office/drawing/2014/main" id="{374592C3-ABE8-41C9-91DC-5A3399C15983}"/>
               </a:ext>
             </a:extLst>
           </p:cNvPr>
@@ -8740,7 +8745,7 @@
           <p:cNvPr id="5" name="s4-dot1">
             <a:extLst xmlns:a="http://schemas.openxmlformats.org/drawingml/2006/main">
               <a:ext uri="{FF2B5EF4-FFF2-40B4-BE49-F238E27FC236}">
-                <a16:creationId xmlns:a16="http://schemas.microsoft.com/office/drawing/2014/main" id="{82D4736A-2F0A-459D-A8FE-D8D7D982AF8B}"/>
+                <a16:creationId xmlns:a16="http://schemas.microsoft.com/office/drawing/2014/main" id="{B6465859-204C-4A4A-A8B6-C101101C9256}"/>
               </a:ext>
             </a:extLst>
           </p:cNvPr>
@@ -8773,7 +8778,7 @@
           <p:cNvPr id="6" name="s4-dot2">
             <a:extLst xmlns:a="http://schemas.openxmlformats.org/drawingml/2006/main">
               <a:ext uri="{FF2B5EF4-FFF2-40B4-BE49-F238E27FC236}">
-                <a16:creationId xmlns:a16="http://schemas.microsoft.com/office/drawing/2014/main" id="{FEC7B7D4-2D60-4A32-8D7A-26D6BD3B8C2C}"/>
+                <a16:creationId xmlns:a16="http://schemas.microsoft.com/office/drawing/2014/main" id="{C42EDEFC-549A-4381-BC95-8C6BEF2CB020}"/>
               </a:ext>
             </a:extLst>
           </p:cNvPr>
@@ -8806,7 +8811,7 @@
           <p:cNvPr id="7" name="s4-dot3">
             <a:extLst xmlns:a="http://schemas.openxmlformats.org/drawingml/2006/main">
               <a:ext uri="{FF2B5EF4-FFF2-40B4-BE49-F238E27FC236}">
-                <a16:creationId xmlns:a16="http://schemas.microsoft.com/office/drawing/2014/main" id="{9078674F-CC8C-4712-9834-0C765E5EBB14}"/>
+                <a16:creationId xmlns:a16="http://schemas.microsoft.com/office/drawing/2014/main" id="{F6215524-12D9-4B09-B615-2CB72FD8652B}"/>
               </a:ext>
             </a:extLst>
           </p:cNvPr>
@@ -8839,7 +8844,7 @@
           <p:cNvPr id="8" name="s4-command-label">
             <a:extLst xmlns:a="http://schemas.openxmlformats.org/drawingml/2006/main">
               <a:ext uri="{FF2B5EF4-FFF2-40B4-BE49-F238E27FC236}">
-                <a16:creationId xmlns:a16="http://schemas.microsoft.com/office/drawing/2014/main" id="{D3E171B7-4EB5-4BD1-A321-DE3EBFE8AC34}"/>
+                <a16:creationId xmlns:a16="http://schemas.microsoft.com/office/drawing/2014/main" id="{6B5621D3-E86B-4C89-8F21-6C10A9187453}"/>
               </a:ext>
             </a:extLst>
           </p:cNvPr>
@@ -8884,7 +8889,7 @@
           <p:cNvPr id="9" name="s4-command">
             <a:extLst xmlns:a="http://schemas.openxmlformats.org/drawingml/2006/main">
               <a:ext uri="{FF2B5EF4-FFF2-40B4-BE49-F238E27FC236}">
-                <a16:creationId xmlns:a16="http://schemas.microsoft.com/office/drawing/2014/main" id="{450D3FA1-C521-441D-80FA-E07BAD3593A3}"/>
+                <a16:creationId xmlns:a16="http://schemas.microsoft.com/office/drawing/2014/main" id="{96E25078-C8BD-4041-9B59-5BBDAF6B45C6}"/>
               </a:ext>
             </a:extLst>
           </p:cNvPr>
@@ -8933,7 +8938,7 @@
           <p:cNvPr id="10" name="s4-command-note">
             <a:extLst xmlns:a="http://schemas.openxmlformats.org/drawingml/2006/main">
               <a:ext uri="{FF2B5EF4-FFF2-40B4-BE49-F238E27FC236}">
-                <a16:creationId xmlns:a16="http://schemas.microsoft.com/office/drawing/2014/main" id="{A23F8C4C-B5A6-4091-91B1-5E556212AD5F}"/>
+                <a16:creationId xmlns:a16="http://schemas.microsoft.com/office/drawing/2014/main" id="{F1E1ADCA-16E6-4D75-8E6B-34372BA70BFE}"/>
               </a:ext>
             </a:extLst>
           </p:cNvPr>
@@ -8978,7 +8983,7 @@
           <p:cNvPr id="11" name="s4-output-label">
             <a:extLst xmlns:a="http://schemas.openxmlformats.org/drawingml/2006/main">
               <a:ext uri="{FF2B5EF4-FFF2-40B4-BE49-F238E27FC236}">
-                <a16:creationId xmlns:a16="http://schemas.microsoft.com/office/drawing/2014/main" id="{F87CC368-A832-44F0-B104-D481F3BC8D20}"/>
+                <a16:creationId xmlns:a16="http://schemas.microsoft.com/office/drawing/2014/main" id="{6DE21CE4-3262-41EC-B8EE-B9D169795E63}"/>
               </a:ext>
             </a:extLst>
           </p:cNvPr>
@@ -9023,7 +9028,7 @@
           <p:cNvPr id="12" name="s4-o1a">
             <a:extLst xmlns:a="http://schemas.openxmlformats.org/drawingml/2006/main">
               <a:ext uri="{FF2B5EF4-FFF2-40B4-BE49-F238E27FC236}">
-                <a16:creationId xmlns:a16="http://schemas.microsoft.com/office/drawing/2014/main" id="{DFB57135-26E3-4BB1-AADB-1FC2FBF68F36}"/>
+                <a16:creationId xmlns:a16="http://schemas.microsoft.com/office/drawing/2014/main" id="{55CBCF61-0045-432B-9560-CBB9B4F96D48}"/>
               </a:ext>
             </a:extLst>
           </p:cNvPr>
@@ -9068,7 +9073,7 @@
           <p:cNvPr id="13" name="s4-o1b">
             <a:extLst xmlns:a="http://schemas.openxmlformats.org/drawingml/2006/main">
               <a:ext uri="{FF2B5EF4-FFF2-40B4-BE49-F238E27FC236}">
-                <a16:creationId xmlns:a16="http://schemas.microsoft.com/office/drawing/2014/main" id="{40EFEC33-B479-4222-920B-B899A25A99EE}"/>
+                <a16:creationId xmlns:a16="http://schemas.microsoft.com/office/drawing/2014/main" id="{263401F0-FC22-4C0C-A1A8-73B123EA56AF}"/>
               </a:ext>
             </a:extLst>
           </p:cNvPr>
@@ -9113,7 +9118,7 @@
           <p:cNvPr id="14" name="s4-o2a">
             <a:extLst xmlns:a="http://schemas.openxmlformats.org/drawingml/2006/main">
               <a:ext uri="{FF2B5EF4-FFF2-40B4-BE49-F238E27FC236}">
-                <a16:creationId xmlns:a16="http://schemas.microsoft.com/office/drawing/2014/main" id="{B3754A18-D6DD-44EA-8ADB-29CCA99D2D74}"/>
+                <a16:creationId xmlns:a16="http://schemas.microsoft.com/office/drawing/2014/main" id="{04EF874B-2E71-4C72-A1E2-738DA8DFA539}"/>
               </a:ext>
             </a:extLst>
           </p:cNvPr>
@@ -9158,7 +9163,7 @@
           <p:cNvPr id="15" name="s4-o2b">
             <a:extLst xmlns:a="http://schemas.openxmlformats.org/drawingml/2006/main">
               <a:ext uri="{FF2B5EF4-FFF2-40B4-BE49-F238E27FC236}">
-                <a16:creationId xmlns:a16="http://schemas.microsoft.com/office/drawing/2014/main" id="{E7BB2CA4-7F76-456D-BD22-E6B27F3119CB}"/>
+                <a16:creationId xmlns:a16="http://schemas.microsoft.com/office/drawing/2014/main" id="{AD2C15D4-77D7-4592-8261-D59DC9487869}"/>
               </a:ext>
             </a:extLst>
           </p:cNvPr>
@@ -9203,7 +9208,7 @@
           <p:cNvPr id="16" name="s4-o3a">
             <a:extLst xmlns:a="http://schemas.openxmlformats.org/drawingml/2006/main">
               <a:ext uri="{FF2B5EF4-FFF2-40B4-BE49-F238E27FC236}">
-                <a16:creationId xmlns:a16="http://schemas.microsoft.com/office/drawing/2014/main" id="{C54081A3-464D-46B0-A10C-B8F736511A51}"/>
+                <a16:creationId xmlns:a16="http://schemas.microsoft.com/office/drawing/2014/main" id="{94B56EFC-0A4A-4A4F-8BBF-733AECDB1E80}"/>
               </a:ext>
             </a:extLst>
           </p:cNvPr>
@@ -9248,7 +9253,7 @@
           <p:cNvPr id="17" name="s4-o3b">
             <a:extLst xmlns:a="http://schemas.openxmlformats.org/drawingml/2006/main">
               <a:ext uri="{FF2B5EF4-FFF2-40B4-BE49-F238E27FC236}">
-                <a16:creationId xmlns:a16="http://schemas.microsoft.com/office/drawing/2014/main" id="{974A5744-D11E-41FD-8F01-BFC5749C5940}"/>
+                <a16:creationId xmlns:a16="http://schemas.microsoft.com/office/drawing/2014/main" id="{310DF74A-6BCC-41D7-AD43-74F5FD5AB3A5}"/>
               </a:ext>
             </a:extLst>
           </p:cNvPr>
@@ -9293,7 +9298,7 @@
           <p:cNvPr id="18" name="s4-o4a">
             <a:extLst xmlns:a="http://schemas.openxmlformats.org/drawingml/2006/main">
               <a:ext uri="{FF2B5EF4-FFF2-40B4-BE49-F238E27FC236}">
-                <a16:creationId xmlns:a16="http://schemas.microsoft.com/office/drawing/2014/main" id="{4AE44421-6926-43D4-97C7-3C27B8240D27}"/>
+                <a16:creationId xmlns:a16="http://schemas.microsoft.com/office/drawing/2014/main" id="{8FFABE4F-ACA9-407D-834F-F375E79F37E6}"/>
               </a:ext>
             </a:extLst>
           </p:cNvPr>
@@ -9338,7 +9343,7 @@
           <p:cNvPr id="19" name="s4-o4b">
             <a:extLst xmlns:a="http://schemas.openxmlformats.org/drawingml/2006/main">
               <a:ext uri="{FF2B5EF4-FFF2-40B4-BE49-F238E27FC236}">
-                <a16:creationId xmlns:a16="http://schemas.microsoft.com/office/drawing/2014/main" id="{542F43B6-13DE-4C56-8484-24956058D8AB}"/>
+                <a16:creationId xmlns:a16="http://schemas.microsoft.com/office/drawing/2014/main" id="{16CF5A6B-3D7F-4333-BBCE-69A32093F17D}"/>
               </a:ext>
             </a:extLst>
           </p:cNvPr>
@@ -9384,7 +9389,7 @@
           <p:cNvPr id="20" name="s4-o5a">
             <a:extLst xmlns:a="http://schemas.openxmlformats.org/drawingml/2006/main">
               <a:ext uri="{FF2B5EF4-FFF2-40B4-BE49-F238E27FC236}">
-                <a16:creationId xmlns:a16="http://schemas.microsoft.com/office/drawing/2014/main" id="{520F93D7-D42B-47A5-BD24-7D4ACA076EF2}"/>
+                <a16:creationId xmlns:a16="http://schemas.microsoft.com/office/drawing/2014/main" id="{C366C86B-0CEB-4537-9050-D6522D98E795}"/>
               </a:ext>
             </a:extLst>
           </p:cNvPr>
@@ -9429,7 +9434,7 @@
           <p:cNvPr id="21" name="s4-o5b">
             <a:extLst xmlns:a="http://schemas.openxmlformats.org/drawingml/2006/main">
               <a:ext uri="{FF2B5EF4-FFF2-40B4-BE49-F238E27FC236}">
-                <a16:creationId xmlns:a16="http://schemas.microsoft.com/office/drawing/2014/main" id="{7181661F-D94E-4635-98EF-B24FEB9F001B}"/>
+                <a16:creationId xmlns:a16="http://schemas.microsoft.com/office/drawing/2014/main" id="{A68220AC-DB30-4F38-8B07-2A8A8CE7A703}"/>
               </a:ext>
             </a:extLst>
           </p:cNvPr>
@@ -9474,7 +9479,7 @@
           <p:cNvPr id="22" name="s4-output-note">
             <a:extLst xmlns:a="http://schemas.openxmlformats.org/drawingml/2006/main">
               <a:ext uri="{FF2B5EF4-FFF2-40B4-BE49-F238E27FC236}">
-                <a16:creationId xmlns:a16="http://schemas.microsoft.com/office/drawing/2014/main" id="{442DA4AF-BCBF-451A-A5E6-78E0436EC60C}"/>
+                <a16:creationId xmlns:a16="http://schemas.microsoft.com/office/drawing/2014/main" id="{CA7DA214-33EE-467E-862C-265C0BD54042}"/>
               </a:ext>
             </a:extLst>
           </p:cNvPr>
@@ -9541,7 +9546,7 @@
           <p:cNvPr id="24" name="footer-source-4">
             <a:extLst xmlns:a="http://schemas.openxmlformats.org/drawingml/2006/main">
               <a:ext uri="{FF2B5EF4-FFF2-40B4-BE49-F238E27FC236}">
-                <a16:creationId xmlns:a16="http://schemas.microsoft.com/office/drawing/2014/main" id="{638F70E4-4EB7-4ECE-B8A2-8CB42501F734}"/>
+                <a16:creationId xmlns:a16="http://schemas.microsoft.com/office/drawing/2014/main" id="{25F69B25-3CA0-4FC0-B547-AF351C0CC33A}"/>
               </a:ext>
             </a:extLst>
           </p:cNvPr>
@@ -9586,7 +9591,7 @@
           <p:cNvPr id="25" name="footer-number-4">
             <a:extLst xmlns:a="http://schemas.openxmlformats.org/drawingml/2006/main">
               <a:ext uri="{FF2B5EF4-FFF2-40B4-BE49-F238E27FC236}">
-                <a16:creationId xmlns:a16="http://schemas.microsoft.com/office/drawing/2014/main" id="{1F8F845D-7AB1-4BB9-BB2A-8179C50F2A8B}"/>
+                <a16:creationId xmlns:a16="http://schemas.microsoft.com/office/drawing/2014/main" id="{B41098A5-02E2-4250-AB80-DF673F6B8D5B}"/>
               </a:ext>
             </a:extLst>
           </p:cNvPr>
@@ -9629,7 +9634,7 @@
     </p:spTree>
     <p:extLst>
       <p:ext uri="{BB962C8B-B14F-4D97-AF65-F5344CB8AC3E}">
-        <p14:creationId xmlns:p14="http://schemas.microsoft.com/office/powerpoint/2010/main" val="29920001"/>
+        <p14:creationId xmlns:p14="http://schemas.microsoft.com/office/powerpoint/2010/main" val="1364054556"/>
       </p:ext>
     </p:extLst>
   </p:cSld>
@@ -9660,7 +9665,7 @@
           <p:cNvPr id="17" name="s5-title">
             <a:extLst xmlns:a="http://schemas.openxmlformats.org/drawingml/2006/main">
               <a:ext uri="{FF2B5EF4-FFF2-40B4-BE49-F238E27FC236}">
-                <a16:creationId xmlns:a16="http://schemas.microsoft.com/office/drawing/2014/main" id="{7BABA3A5-5DF5-4674-A237-A752C09C68CA}"/>
+                <a16:creationId xmlns:a16="http://schemas.microsoft.com/office/drawing/2014/main" id="{74DA6ED6-06FE-4224-85E7-0A91E7CFEE25}"/>
               </a:ext>
             </a:extLst>
           </p:cNvPr>
@@ -9705,7 +9710,7 @@
           <p:cNvPr id="2" name="s5-subtitle">
             <a:extLst xmlns:a="http://schemas.openxmlformats.org/drawingml/2006/main">
               <a:ext uri="{FF2B5EF4-FFF2-40B4-BE49-F238E27FC236}">
-                <a16:creationId xmlns:a16="http://schemas.microsoft.com/office/drawing/2014/main" id="{5AFA2E40-9B87-4663-9973-720A793D1BB7}"/>
+                <a16:creationId xmlns:a16="http://schemas.microsoft.com/office/drawing/2014/main" id="{568803E9-E27E-48B5-BBFE-C5A43901D13E}"/>
               </a:ext>
             </a:extLst>
           </p:cNvPr>
@@ -9750,7 +9755,7 @@
           <p:cNvPr id="3" name="s5-chart-label-pack">
             <a:extLst xmlns:a="http://schemas.openxmlformats.org/drawingml/2006/main">
               <a:ext uri="{FF2B5EF4-FFF2-40B4-BE49-F238E27FC236}">
-                <a16:creationId xmlns:a16="http://schemas.microsoft.com/office/drawing/2014/main" id="{8D31626F-8571-4FDF-9B66-E45486FDC93A}"/>
+                <a16:creationId xmlns:a16="http://schemas.microsoft.com/office/drawing/2014/main" id="{A7CEEAB7-7DB4-410E-81DD-966190CC8685}"/>
               </a:ext>
             </a:extLst>
           </p:cNvPr>
@@ -9795,7 +9800,7 @@
           <p:cNvPr id="4" name="s5-chart-label-repo">
             <a:extLst xmlns:a="http://schemas.openxmlformats.org/drawingml/2006/main">
               <a:ext uri="{FF2B5EF4-FFF2-40B4-BE49-F238E27FC236}">
-                <a16:creationId xmlns:a16="http://schemas.microsoft.com/office/drawing/2014/main" id="{454CB6D6-DD20-44F5-AB9E-A8F2E81DFA10}"/>
+                <a16:creationId xmlns:a16="http://schemas.microsoft.com/office/drawing/2014/main" id="{EF9F52B7-0006-4D85-89A7-A5D976FE12EA}"/>
               </a:ext>
             </a:extLst>
           </p:cNvPr>
@@ -9840,7 +9845,7 @@
           <p:cNvPr id="5" name="s5-stat1">
             <a:extLst xmlns:a="http://schemas.openxmlformats.org/drawingml/2006/main">
               <a:ext uri="{FF2B5EF4-FFF2-40B4-BE49-F238E27FC236}">
-                <a16:creationId xmlns:a16="http://schemas.microsoft.com/office/drawing/2014/main" id="{9B3DE423-EEF9-41C5-BD3B-49E4A6751D58}"/>
+                <a16:creationId xmlns:a16="http://schemas.microsoft.com/office/drawing/2014/main" id="{46FCD730-E35F-4463-8F14-0165DCA2CD57}"/>
               </a:ext>
             </a:extLst>
           </p:cNvPr>
@@ -9885,7 +9890,7 @@
           <p:cNvPr id="6" name="s5-stat1-label">
             <a:extLst xmlns:a="http://schemas.openxmlformats.org/drawingml/2006/main">
               <a:ext uri="{FF2B5EF4-FFF2-40B4-BE49-F238E27FC236}">
-                <a16:creationId xmlns:a16="http://schemas.microsoft.com/office/drawing/2014/main" id="{39C0D433-84F9-40A0-B57E-B25E0C462379}"/>
+                <a16:creationId xmlns:a16="http://schemas.microsoft.com/office/drawing/2014/main" id="{A309F327-8DD3-4DC5-BFFA-A2DCCFC34C74}"/>
               </a:ext>
             </a:extLst>
           </p:cNvPr>
@@ -9952,7 +9957,7 @@
           <p:cNvPr id="8" name="s5-stat2">
             <a:extLst xmlns:a="http://schemas.openxmlformats.org/drawingml/2006/main">
               <a:ext uri="{FF2B5EF4-FFF2-40B4-BE49-F238E27FC236}">
-                <a16:creationId xmlns:a16="http://schemas.microsoft.com/office/drawing/2014/main" id="{24EE0280-376A-41C4-86F6-A350BCB5FA01}"/>
+                <a16:creationId xmlns:a16="http://schemas.microsoft.com/office/drawing/2014/main" id="{FCD22507-BDC5-4D38-B57C-9C4D22171D53}"/>
               </a:ext>
             </a:extLst>
           </p:cNvPr>
@@ -9997,7 +10002,7 @@
           <p:cNvPr id="9" name="s5-stat2-label">
             <a:extLst xmlns:a="http://schemas.openxmlformats.org/drawingml/2006/main">
               <a:ext uri="{FF2B5EF4-FFF2-40B4-BE49-F238E27FC236}">
-                <a16:creationId xmlns:a16="http://schemas.microsoft.com/office/drawing/2014/main" id="{267DB522-42A9-49E6-81F5-A212A4BCE9FA}"/>
+                <a16:creationId xmlns:a16="http://schemas.microsoft.com/office/drawing/2014/main" id="{ACE7F8FC-D809-4277-818A-59B403ABD74F}"/>
               </a:ext>
             </a:extLst>
           </p:cNvPr>
@@ -10042,7 +10047,7 @@
           <p:cNvPr id="10" name="s5-stat3">
             <a:extLst xmlns:a="http://schemas.openxmlformats.org/drawingml/2006/main">
               <a:ext uri="{FF2B5EF4-FFF2-40B4-BE49-F238E27FC236}">
-                <a16:creationId xmlns:a16="http://schemas.microsoft.com/office/drawing/2014/main" id="{C01064CD-F179-474B-BB62-BDDB19B83FE7}"/>
+                <a16:creationId xmlns:a16="http://schemas.microsoft.com/office/drawing/2014/main" id="{8207CA7A-8A6A-4056-9E54-A69ACECB7A63}"/>
               </a:ext>
             </a:extLst>
           </p:cNvPr>
@@ -10087,7 +10092,7 @@
           <p:cNvPr id="11" name="s5-stat3-label">
             <a:extLst xmlns:a="http://schemas.openxmlformats.org/drawingml/2006/main">
               <a:ext uri="{FF2B5EF4-FFF2-40B4-BE49-F238E27FC236}">
-                <a16:creationId xmlns:a16="http://schemas.microsoft.com/office/drawing/2014/main" id="{820717B1-9D81-40A0-8999-350B20947C6E}"/>
+                <a16:creationId xmlns:a16="http://schemas.microsoft.com/office/drawing/2014/main" id="{66BBAA00-A630-4E58-BF85-D44F5ED01336}"/>
               </a:ext>
             </a:extLst>
           </p:cNvPr>
@@ -10132,7 +10137,7 @@
           <p:cNvPr id="12" name="s5-explain">
             <a:extLst xmlns:a="http://schemas.openxmlformats.org/drawingml/2006/main">
               <a:ext uri="{FF2B5EF4-FFF2-40B4-BE49-F238E27FC236}">
-                <a16:creationId xmlns:a16="http://schemas.microsoft.com/office/drawing/2014/main" id="{F02DCB0F-6B5A-4033-8D86-1E526A3835E1}"/>
+                <a16:creationId xmlns:a16="http://schemas.microsoft.com/office/drawing/2014/main" id="{FD580B01-E853-44F2-867E-A4F0A1C8A795}"/>
               </a:ext>
             </a:extLst>
           </p:cNvPr>
@@ -10199,7 +10204,7 @@
           <p:cNvPr id="14" name="footer-source-5">
             <a:extLst xmlns:a="http://schemas.openxmlformats.org/drawingml/2006/main">
               <a:ext uri="{FF2B5EF4-FFF2-40B4-BE49-F238E27FC236}">
-                <a16:creationId xmlns:a16="http://schemas.microsoft.com/office/drawing/2014/main" id="{86CA414C-8535-4B58-8322-FA7FEBB127A9}"/>
+                <a16:creationId xmlns:a16="http://schemas.microsoft.com/office/drawing/2014/main" id="{B535BF3A-4BDE-4B29-B465-FD233ADA2A9E}"/>
               </a:ext>
             </a:extLst>
           </p:cNvPr>
@@ -10244,7 +10249,7 @@
           <p:cNvPr id="15" name="footer-number-5">
             <a:extLst xmlns:a="http://schemas.openxmlformats.org/drawingml/2006/main">
               <a:ext uri="{FF2B5EF4-FFF2-40B4-BE49-F238E27FC236}">
-                <a16:creationId xmlns:a16="http://schemas.microsoft.com/office/drawing/2014/main" id="{FFADFBFD-76A9-4A32-8EBD-8085A89B570C}"/>
+                <a16:creationId xmlns:a16="http://schemas.microsoft.com/office/drawing/2014/main" id="{58166096-9D5D-4CC5-AC8A-3B2A5DA10F2E}"/>
               </a:ext>
             </a:extLst>
           </p:cNvPr>
@@ -10296,14 +10301,14 @@
         </p:xfrm>
         <a:graphic xmlns:a="http://schemas.openxmlformats.org/drawingml/2006/main">
           <a:graphicData uri="http://schemas.openxmlformats.org/drawingml/2006/chart">
-            <c:chart xmlns:r="http://schemas.openxmlformats.org/officeDocument/2006/relationships" xmlns:c="http://schemas.openxmlformats.org/drawingml/2006/chart" r:id="R5f2ef3cc3a5d4bad"/>
+            <c:chart xmlns:r="http://schemas.openxmlformats.org/officeDocument/2006/relationships" xmlns:c="http://schemas.openxmlformats.org/drawingml/2006/chart" r:id="R9776da1c92664094"/>
           </a:graphicData>
         </a:graphic>
       </p:graphicFrame>
     </p:spTree>
     <p:extLst>
       <p:ext uri="{BB962C8B-B14F-4D97-AF65-F5344CB8AC3E}">
-        <p14:creationId xmlns:p14="http://schemas.microsoft.com/office/powerpoint/2010/main" val="1676243986"/>
+        <p14:creationId xmlns:p14="http://schemas.microsoft.com/office/powerpoint/2010/main" val="1555059204"/>
       </p:ext>
     </p:extLst>
   </p:cSld>
@@ -10334,7 +10339,7 @@
           <p:cNvPr id="40" name="s6-title-new">
             <a:extLst xmlns:a="http://schemas.openxmlformats.org/drawingml/2006/main">
               <a:ext uri="{FF2B5EF4-FFF2-40B4-BE49-F238E27FC236}">
-                <a16:creationId xmlns:a16="http://schemas.microsoft.com/office/drawing/2014/main" id="{951EC12F-4E7F-400C-AF50-A1641A7FE419}"/>
+                <a16:creationId xmlns:a16="http://schemas.microsoft.com/office/drawing/2014/main" id="{0B9BBC54-A7AB-4B90-A4D8-6234D4802806}"/>
               </a:ext>
             </a:extLst>
           </p:cNvPr>
@@ -10379,7 +10384,7 @@
           <p:cNvPr id="2" name="s6-subtitle-new">
             <a:extLst xmlns:a="http://schemas.openxmlformats.org/drawingml/2006/main">
               <a:ext uri="{FF2B5EF4-FFF2-40B4-BE49-F238E27FC236}">
-                <a16:creationId xmlns:a16="http://schemas.microsoft.com/office/drawing/2014/main" id="{D0507149-8438-455B-8F84-05B4BB600EC1}"/>
+                <a16:creationId xmlns:a16="http://schemas.microsoft.com/office/drawing/2014/main" id="{70D56032-7548-4B98-B0FA-67D3FFD8C400}"/>
               </a:ext>
             </a:extLst>
           </p:cNvPr>
@@ -10424,7 +10429,7 @@
           <p:cNvPr id="3" name="s6-task-new">
             <a:extLst xmlns:a="http://schemas.openxmlformats.org/drawingml/2006/main">
               <a:ext uri="{FF2B5EF4-FFF2-40B4-BE49-F238E27FC236}">
-                <a16:creationId xmlns:a16="http://schemas.microsoft.com/office/drawing/2014/main" id="{A068EC85-4E02-41ED-BB00-456FC18D2D27}"/>
+                <a16:creationId xmlns:a16="http://schemas.microsoft.com/office/drawing/2014/main" id="{8441CCA0-6B81-45EE-BB83-6D4181FC3202}"/>
               </a:ext>
             </a:extLst>
           </p:cNvPr>
@@ -10459,7 +10464,7 @@
           <p:cNvPr id="4" name="s6-task-k-new">
             <a:extLst xmlns:a="http://schemas.openxmlformats.org/drawingml/2006/main">
               <a:ext uri="{FF2B5EF4-FFF2-40B4-BE49-F238E27FC236}">
-                <a16:creationId xmlns:a16="http://schemas.microsoft.com/office/drawing/2014/main" id="{80B81FF1-0E6D-4F15-A817-70F8037B0641}"/>
+                <a16:creationId xmlns:a16="http://schemas.microsoft.com/office/drawing/2014/main" id="{3FE37912-8D90-4D2E-9271-BF6BFF432EF9}"/>
               </a:ext>
             </a:extLst>
           </p:cNvPr>
@@ -10504,7 +10509,7 @@
           <p:cNvPr id="5" name="s6-task-v-new">
             <a:extLst xmlns:a="http://schemas.openxmlformats.org/drawingml/2006/main">
               <a:ext uri="{FF2B5EF4-FFF2-40B4-BE49-F238E27FC236}">
-                <a16:creationId xmlns:a16="http://schemas.microsoft.com/office/drawing/2014/main" id="{DD2303B1-AB91-49E1-9FDE-A3288234E6D9}"/>
+                <a16:creationId xmlns:a16="http://schemas.microsoft.com/office/drawing/2014/main" id="{7EFE2C06-CE23-4F5D-8448-4C0D3185605B}"/>
               </a:ext>
             </a:extLst>
           </p:cNvPr>
@@ -10681,7 +10686,7 @@
           <p:cNvPr id="12" name="s6-control-new">
             <a:extLst xmlns:a="http://schemas.openxmlformats.org/drawingml/2006/main">
               <a:ext uri="{FF2B5EF4-FFF2-40B4-BE49-F238E27FC236}">
-                <a16:creationId xmlns:a16="http://schemas.microsoft.com/office/drawing/2014/main" id="{1B8E7784-8D13-4925-865F-DE66C666B698}"/>
+                <a16:creationId xmlns:a16="http://schemas.microsoft.com/office/drawing/2014/main" id="{894D8701-6AF8-4E7C-8169-D97600CB7C7E}"/>
               </a:ext>
             </a:extLst>
           </p:cNvPr>
@@ -10716,7 +10721,7 @@
           <p:cNvPr id="13" name="s6-route-new">
             <a:extLst xmlns:a="http://schemas.openxmlformats.org/drawingml/2006/main">
               <a:ext uri="{FF2B5EF4-FFF2-40B4-BE49-F238E27FC236}">
-                <a16:creationId xmlns:a16="http://schemas.microsoft.com/office/drawing/2014/main" id="{07B8546E-C17F-4FF3-89F1-C8CB7554DDFA}"/>
+                <a16:creationId xmlns:a16="http://schemas.microsoft.com/office/drawing/2014/main" id="{0277C880-7391-43B7-9908-E53C81436B26}"/>
               </a:ext>
             </a:extLst>
           </p:cNvPr>
@@ -10751,7 +10756,7 @@
           <p:cNvPr id="14" name="s6-full-new">
             <a:extLst xmlns:a="http://schemas.openxmlformats.org/drawingml/2006/main">
               <a:ext uri="{FF2B5EF4-FFF2-40B4-BE49-F238E27FC236}">
-                <a16:creationId xmlns:a16="http://schemas.microsoft.com/office/drawing/2014/main" id="{5124F67C-D02C-400E-BA02-1BD0A85D3656}"/>
+                <a16:creationId xmlns:a16="http://schemas.microsoft.com/office/drawing/2014/main" id="{4F6E2568-19E8-414D-AAEE-B31C15BA3ECC}"/>
               </a:ext>
             </a:extLst>
           </p:cNvPr>
@@ -10786,7 +10791,7 @@
           <p:cNvPr id="15" name="s6-adaptive-new">
             <a:extLst xmlns:a="http://schemas.openxmlformats.org/drawingml/2006/main">
               <a:ext uri="{FF2B5EF4-FFF2-40B4-BE49-F238E27FC236}">
-                <a16:creationId xmlns:a16="http://schemas.microsoft.com/office/drawing/2014/main" id="{1D2E022C-763F-4387-9294-48257D282C07}"/>
+                <a16:creationId xmlns:a16="http://schemas.microsoft.com/office/drawing/2014/main" id="{44DC2282-3244-4427-A43C-C48F89D888FE}"/>
               </a:ext>
             </a:extLst>
           </p:cNvPr>
@@ -10821,7 +10826,7 @@
           <p:cNvPr id="16" name="s6-control-k-new">
             <a:extLst xmlns:a="http://schemas.openxmlformats.org/drawingml/2006/main">
               <a:ext uri="{FF2B5EF4-FFF2-40B4-BE49-F238E27FC236}">
-                <a16:creationId xmlns:a16="http://schemas.microsoft.com/office/drawing/2014/main" id="{8DBEE188-7BD6-4F1A-B7CB-5F454BBD0954}"/>
+                <a16:creationId xmlns:a16="http://schemas.microsoft.com/office/drawing/2014/main" id="{5749294E-9621-40C8-97E2-C4BA940EE341}"/>
               </a:ext>
             </a:extLst>
           </p:cNvPr>
@@ -10866,7 +10871,7 @@
           <p:cNvPr id="17" name="s6-control-v-new">
             <a:extLst xmlns:a="http://schemas.openxmlformats.org/drawingml/2006/main">
               <a:ext uri="{FF2B5EF4-FFF2-40B4-BE49-F238E27FC236}">
-                <a16:creationId xmlns:a16="http://schemas.microsoft.com/office/drawing/2014/main" id="{22B53FBF-093C-42D9-AA3A-5B383F3F95BD}"/>
+                <a16:creationId xmlns:a16="http://schemas.microsoft.com/office/drawing/2014/main" id="{334ED904-0E3A-4E8E-BE0E-FC7F7E444DA0}"/>
               </a:ext>
             </a:extLst>
           </p:cNvPr>
@@ -10911,7 +10916,7 @@
           <p:cNvPr id="18" name="s6-control-d-new">
             <a:extLst xmlns:a="http://schemas.openxmlformats.org/drawingml/2006/main">
               <a:ext uri="{FF2B5EF4-FFF2-40B4-BE49-F238E27FC236}">
-                <a16:creationId xmlns:a16="http://schemas.microsoft.com/office/drawing/2014/main" id="{55F888DC-E8CC-423B-832E-1B5DC2F2F6AF}"/>
+                <a16:creationId xmlns:a16="http://schemas.microsoft.com/office/drawing/2014/main" id="{3122B578-937F-455D-9503-52B57124F0A6}"/>
               </a:ext>
             </a:extLst>
           </p:cNvPr>
@@ -10956,7 +10961,7 @@
           <p:cNvPr id="19" name="s6-route-k-new">
             <a:extLst xmlns:a="http://schemas.openxmlformats.org/drawingml/2006/main">
               <a:ext uri="{FF2B5EF4-FFF2-40B4-BE49-F238E27FC236}">
-                <a16:creationId xmlns:a16="http://schemas.microsoft.com/office/drawing/2014/main" id="{1162FC6C-3A87-4FA3-8EF5-E0E88BE65F4D}"/>
+                <a16:creationId xmlns:a16="http://schemas.microsoft.com/office/drawing/2014/main" id="{F7601BAD-5315-4DAE-AFA8-FB6BD18573B2}"/>
               </a:ext>
             </a:extLst>
           </p:cNvPr>
@@ -11001,7 +11006,7 @@
           <p:cNvPr id="20" name="s6-route-v-new">
             <a:extLst xmlns:a="http://schemas.openxmlformats.org/drawingml/2006/main">
               <a:ext uri="{FF2B5EF4-FFF2-40B4-BE49-F238E27FC236}">
-                <a16:creationId xmlns:a16="http://schemas.microsoft.com/office/drawing/2014/main" id="{F9CFF0A9-7084-4244-B901-C8412BF175B5}"/>
+                <a16:creationId xmlns:a16="http://schemas.microsoft.com/office/drawing/2014/main" id="{20BAE44E-9119-4980-9B5F-1E5E9571F841}"/>
               </a:ext>
             </a:extLst>
           </p:cNvPr>
@@ -11046,7 +11051,7 @@
           <p:cNvPr id="21" name="s6-route-d-new">
             <a:extLst xmlns:a="http://schemas.openxmlformats.org/drawingml/2006/main">
               <a:ext uri="{FF2B5EF4-FFF2-40B4-BE49-F238E27FC236}">
-                <a16:creationId xmlns:a16="http://schemas.microsoft.com/office/drawing/2014/main" id="{FBB71C1A-9EA2-4189-B4A1-65956D4E18E8}"/>
+                <a16:creationId xmlns:a16="http://schemas.microsoft.com/office/drawing/2014/main" id="{7152C733-766A-41CE-AFF6-DB743BBC0C26}"/>
               </a:ext>
             </a:extLst>
           </p:cNvPr>
@@ -11091,7 +11096,7 @@
           <p:cNvPr id="22" name="s6-full-k-new">
             <a:extLst xmlns:a="http://schemas.openxmlformats.org/drawingml/2006/main">
               <a:ext uri="{FF2B5EF4-FFF2-40B4-BE49-F238E27FC236}">
-                <a16:creationId xmlns:a16="http://schemas.microsoft.com/office/drawing/2014/main" id="{2A8D02EB-C5FE-49E8-AE35-867C7F804C0F}"/>
+                <a16:creationId xmlns:a16="http://schemas.microsoft.com/office/drawing/2014/main" id="{09055A7B-3E1B-4AEE-BF7B-3E3E90467E37}"/>
               </a:ext>
             </a:extLst>
           </p:cNvPr>
@@ -11136,7 +11141,7 @@
           <p:cNvPr id="23" name="s6-full-v-new">
             <a:extLst xmlns:a="http://schemas.openxmlformats.org/drawingml/2006/main">
               <a:ext uri="{FF2B5EF4-FFF2-40B4-BE49-F238E27FC236}">
-                <a16:creationId xmlns:a16="http://schemas.microsoft.com/office/drawing/2014/main" id="{92AD44ED-BBAA-43FD-A984-A0BEF7E921D9}"/>
+                <a16:creationId xmlns:a16="http://schemas.microsoft.com/office/drawing/2014/main" id="{CC9E5698-0BC1-4F14-B691-9209696D0C61}"/>
               </a:ext>
             </a:extLst>
           </p:cNvPr>
@@ -11181,7 +11186,7 @@
           <p:cNvPr id="24" name="s6-full-d-new">
             <a:extLst xmlns:a="http://schemas.openxmlformats.org/drawingml/2006/main">
               <a:ext uri="{FF2B5EF4-FFF2-40B4-BE49-F238E27FC236}">
-                <a16:creationId xmlns:a16="http://schemas.microsoft.com/office/drawing/2014/main" id="{633159E4-7696-4B71-B55C-2B2DF9F7CBD3}"/>
+                <a16:creationId xmlns:a16="http://schemas.microsoft.com/office/drawing/2014/main" id="{48626841-C427-4953-A03A-6AA7924D1B49}"/>
               </a:ext>
             </a:extLst>
           </p:cNvPr>
@@ -11226,7 +11231,7 @@
           <p:cNvPr id="25" name="s6-adaptive-k-new">
             <a:extLst xmlns:a="http://schemas.openxmlformats.org/drawingml/2006/main">
               <a:ext uri="{FF2B5EF4-FFF2-40B4-BE49-F238E27FC236}">
-                <a16:creationId xmlns:a16="http://schemas.microsoft.com/office/drawing/2014/main" id="{D9002348-9794-48AC-B803-D9DCF2D2B892}"/>
+                <a16:creationId xmlns:a16="http://schemas.microsoft.com/office/drawing/2014/main" id="{1AD2B7C2-59B5-4EAD-B962-CDB47D1DF9B1}"/>
               </a:ext>
             </a:extLst>
           </p:cNvPr>
@@ -11271,7 +11276,7 @@
           <p:cNvPr id="26" name="s6-adaptive-v-new">
             <a:extLst xmlns:a="http://schemas.openxmlformats.org/drawingml/2006/main">
               <a:ext uri="{FF2B5EF4-FFF2-40B4-BE49-F238E27FC236}">
-                <a16:creationId xmlns:a16="http://schemas.microsoft.com/office/drawing/2014/main" id="{D3E3BCB2-054E-4003-932E-4422B419F9BD}"/>
+                <a16:creationId xmlns:a16="http://schemas.microsoft.com/office/drawing/2014/main" id="{1AB7BD95-8CCD-4EA3-8E7C-D4527ECFA417}"/>
               </a:ext>
             </a:extLst>
           </p:cNvPr>
@@ -11316,7 +11321,7 @@
           <p:cNvPr id="27" name="s6-adaptive-d-new">
             <a:extLst xmlns:a="http://schemas.openxmlformats.org/drawingml/2006/main">
               <a:ext uri="{FF2B5EF4-FFF2-40B4-BE49-F238E27FC236}">
-                <a16:creationId xmlns:a16="http://schemas.microsoft.com/office/drawing/2014/main" id="{928D6204-FE54-4AD4-92E8-CD15D4018B71}"/>
+                <a16:creationId xmlns:a16="http://schemas.microsoft.com/office/drawing/2014/main" id="{AC558179-DE3A-45E2-930D-6FA0B104A911}"/>
               </a:ext>
             </a:extLst>
           </p:cNvPr>
@@ -11361,7 +11366,7 @@
           <p:cNvPr id="28" name="s6-summary-new">
             <a:extLst xmlns:a="http://schemas.openxmlformats.org/drawingml/2006/main">
               <a:ext uri="{FF2B5EF4-FFF2-40B4-BE49-F238E27FC236}">
-                <a16:creationId xmlns:a16="http://schemas.microsoft.com/office/drawing/2014/main" id="{6CE59F60-7BAE-487C-9741-1EA304D48649}"/>
+                <a16:creationId xmlns:a16="http://schemas.microsoft.com/office/drawing/2014/main" id="{9B63C733-90F3-4E4F-8177-22F4DA6485D9}"/>
               </a:ext>
             </a:extLst>
           </p:cNvPr>
@@ -11396,7 +11401,7 @@
           <p:cNvPr id="29" name="s6-n-trials-new">
             <a:extLst xmlns:a="http://schemas.openxmlformats.org/drawingml/2006/main">
               <a:ext uri="{FF2B5EF4-FFF2-40B4-BE49-F238E27FC236}">
-                <a16:creationId xmlns:a16="http://schemas.microsoft.com/office/drawing/2014/main" id="{20E5FBD8-8CC5-47AE-B96F-FB6094BC57F5}"/>
+                <a16:creationId xmlns:a16="http://schemas.microsoft.com/office/drawing/2014/main" id="{961D1829-7ACB-44CE-B8F7-395BC4F7C274}"/>
               </a:ext>
             </a:extLst>
           </p:cNvPr>
@@ -11441,7 +11446,7 @@
           <p:cNvPr id="30" name="s6-l-trials-new">
             <a:extLst xmlns:a="http://schemas.openxmlformats.org/drawingml/2006/main">
               <a:ext uri="{FF2B5EF4-FFF2-40B4-BE49-F238E27FC236}">
-                <a16:creationId xmlns:a16="http://schemas.microsoft.com/office/drawing/2014/main" id="{C0C43C66-0581-4CFF-96D7-3830B7C393B4}"/>
+                <a16:creationId xmlns:a16="http://schemas.microsoft.com/office/drawing/2014/main" id="{D9F9403A-3AAE-44F1-8D88-4631E3F1A5F8}"/>
               </a:ext>
             </a:extLst>
           </p:cNvPr>
@@ -11486,7 +11491,7 @@
           <p:cNvPr id="31" name="s6-n-arms-new">
             <a:extLst xmlns:a="http://schemas.openxmlformats.org/drawingml/2006/main">
               <a:ext uri="{FF2B5EF4-FFF2-40B4-BE49-F238E27FC236}">
-                <a16:creationId xmlns:a16="http://schemas.microsoft.com/office/drawing/2014/main" id="{F364B712-0B3B-45C4-B208-95983C54B9F9}"/>
+                <a16:creationId xmlns:a16="http://schemas.microsoft.com/office/drawing/2014/main" id="{9580CB2C-71AD-434F-9A4F-F6FEC8CD4FC8}"/>
               </a:ext>
             </a:extLst>
           </p:cNvPr>
@@ -11531,7 +11536,7 @@
           <p:cNvPr id="32" name="s6-l-arms-new">
             <a:extLst xmlns:a="http://schemas.openxmlformats.org/drawingml/2006/main">
               <a:ext uri="{FF2B5EF4-FFF2-40B4-BE49-F238E27FC236}">
-                <a16:creationId xmlns:a16="http://schemas.microsoft.com/office/drawing/2014/main" id="{12DE3170-1743-4635-8D74-4D399B5E760D}"/>
+                <a16:creationId xmlns:a16="http://schemas.microsoft.com/office/drawing/2014/main" id="{C922E93C-EB09-429F-998D-03E04BE75E6A}"/>
               </a:ext>
             </a:extLst>
           </p:cNvPr>
@@ -11576,7 +11581,7 @@
           <p:cNvPr id="33" name="s6-n-fixed-new">
             <a:extLst xmlns:a="http://schemas.openxmlformats.org/drawingml/2006/main">
               <a:ext uri="{FF2B5EF4-FFF2-40B4-BE49-F238E27FC236}">
-                <a16:creationId xmlns:a16="http://schemas.microsoft.com/office/drawing/2014/main" id="{82DB611F-2791-4E67-8E2C-34BCE41E0C18}"/>
+                <a16:creationId xmlns:a16="http://schemas.microsoft.com/office/drawing/2014/main" id="{19B1CEA3-0773-4161-B65E-7EDC43569515}"/>
               </a:ext>
             </a:extLst>
           </p:cNvPr>
@@ -11621,7 +11626,7 @@
           <p:cNvPr id="34" name="s6-l-fixed-new">
             <a:extLst xmlns:a="http://schemas.openxmlformats.org/drawingml/2006/main">
               <a:ext uri="{FF2B5EF4-FFF2-40B4-BE49-F238E27FC236}">
-                <a16:creationId xmlns:a16="http://schemas.microsoft.com/office/drawing/2014/main" id="{11B00093-EBDD-4F6C-8702-ECF4854D5A6E}"/>
+                <a16:creationId xmlns:a16="http://schemas.microsoft.com/office/drawing/2014/main" id="{CA181A73-8185-4EF0-AD72-997F785EB5DC}"/>
               </a:ext>
             </a:extLst>
           </p:cNvPr>
@@ -11666,7 +11671,7 @@
           <p:cNvPr id="35" name="s6-n-variable-new">
             <a:extLst xmlns:a="http://schemas.openxmlformats.org/drawingml/2006/main">
               <a:ext uri="{FF2B5EF4-FFF2-40B4-BE49-F238E27FC236}">
-                <a16:creationId xmlns:a16="http://schemas.microsoft.com/office/drawing/2014/main" id="{8258B593-02B9-4148-9AA6-1B60D2C1DE9E}"/>
+                <a16:creationId xmlns:a16="http://schemas.microsoft.com/office/drawing/2014/main" id="{765B2D8E-36E8-48FF-B693-273BD5E7256F}"/>
               </a:ext>
             </a:extLst>
           </p:cNvPr>
@@ -11711,7 +11716,7 @@
           <p:cNvPr id="36" name="s6-l-variable-new">
             <a:extLst xmlns:a="http://schemas.openxmlformats.org/drawingml/2006/main">
               <a:ext uri="{FF2B5EF4-FFF2-40B4-BE49-F238E27FC236}">
-                <a16:creationId xmlns:a16="http://schemas.microsoft.com/office/drawing/2014/main" id="{86105765-1A76-4FBB-BB4F-258B339802C7}"/>
+                <a16:creationId xmlns:a16="http://schemas.microsoft.com/office/drawing/2014/main" id="{7ADB15E6-FDB9-403D-9747-42B5B37CF00E}"/>
               </a:ext>
             </a:extLst>
           </p:cNvPr>
@@ -11778,7 +11783,7 @@
           <p:cNvPr id="38" name="footer-source-6">
             <a:extLst xmlns:a="http://schemas.openxmlformats.org/drawingml/2006/main">
               <a:ext uri="{FF2B5EF4-FFF2-40B4-BE49-F238E27FC236}">
-                <a16:creationId xmlns:a16="http://schemas.microsoft.com/office/drawing/2014/main" id="{5178B16C-F255-49B5-8115-003DF0502142}"/>
+                <a16:creationId xmlns:a16="http://schemas.microsoft.com/office/drawing/2014/main" id="{CE369D1D-1E0A-4FBC-BD7E-6E930E0DA0F4}"/>
               </a:ext>
             </a:extLst>
           </p:cNvPr>
@@ -11823,7 +11828,7 @@
           <p:cNvPr id="39" name="footer-number-6">
             <a:extLst xmlns:a="http://schemas.openxmlformats.org/drawingml/2006/main">
               <a:ext uri="{FF2B5EF4-FFF2-40B4-BE49-F238E27FC236}">
-                <a16:creationId xmlns:a16="http://schemas.microsoft.com/office/drawing/2014/main" id="{B245CD4D-2FCF-42A7-9982-1AEE30D63A4B}"/>
+                <a16:creationId xmlns:a16="http://schemas.microsoft.com/office/drawing/2014/main" id="{BE2E0534-2BD3-4CE4-9789-07781AD0D9EC}"/>
               </a:ext>
             </a:extLst>
           </p:cNvPr>
@@ -11866,7 +11871,7 @@
     </p:spTree>
     <p:extLst>
       <p:ext uri="{BB962C8B-B14F-4D97-AF65-F5344CB8AC3E}">
-        <p14:creationId xmlns:p14="http://schemas.microsoft.com/office/powerpoint/2010/main" val="398713067"/>
+        <p14:creationId xmlns:p14="http://schemas.microsoft.com/office/powerpoint/2010/main" val="1067160164"/>
       </p:ext>
     </p:extLst>
   </p:cSld>
@@ -11894,10 +11899,10 @@
       </p:grpSpPr>
       <p:sp>
         <p:nvSpPr>
-          <p:cNvPr id="48" name="s7-title-new">
-            <a:extLst xmlns:a="http://schemas.openxmlformats.org/drawingml/2006/main">
-              <a:ext uri="{FF2B5EF4-FFF2-40B4-BE49-F238E27FC236}">
-                <a16:creationId xmlns:a16="http://schemas.microsoft.com/office/drawing/2014/main" id="{71F3A7AA-B052-435B-A361-84C94D4446ED}"/>
+          <p:cNvPr id="37" name="s7-title-new">
+            <a:extLst xmlns:a="http://schemas.openxmlformats.org/drawingml/2006/main">
+              <a:ext uri="{FF2B5EF4-FFF2-40B4-BE49-F238E27FC236}">
+                <a16:creationId xmlns:a16="http://schemas.microsoft.com/office/drawing/2014/main" id="{21508189-EE61-4059-B792-EA2D7757F45B}"/>
               </a:ext>
             </a:extLst>
           </p:cNvPr>
@@ -11922,7 +11927,7 @@
           <a:lstStyle xmlns:a="http://schemas.openxmlformats.org/drawingml/2006/main"/>
           <a:p xmlns:a="http://schemas.openxmlformats.org/drawingml/2006/main">
             <a:pPr algn="l">
-              <a:defRPr sz="2925" b="1">
+              <a:defRPr sz="3000" b="1">
                 <a:solidFill>
                   <a:srgbClr val="0A1224"/>
                 </a:solidFill>
@@ -11932,7 +11937,7 @@
               </a:defRPr>
             </a:pPr>
             <a:r>
-              <a:t>Adaptive vs Control: routing added measurable work.</a:t>
+              <a:t>The benchmark rejected an always-on Palace.</a:t>
             </a:r>
           </a:p>
         </p:txBody>
@@ -11942,7 +11947,7 @@
           <p:cNvPr id="2" name="s7-subtitle-new">
             <a:extLst xmlns:a="http://schemas.openxmlformats.org/drawingml/2006/main">
               <a:ext uri="{FF2B5EF4-FFF2-40B4-BE49-F238E27FC236}">
-                <a16:creationId xmlns:a16="http://schemas.microsoft.com/office/drawing/2014/main" id="{EF5D8528-050E-453C-B697-B9A1DEE4F2B8}"/>
+                <a16:creationId xmlns:a16="http://schemas.microsoft.com/office/drawing/2014/main" id="{7E4D47A7-8282-4BD0-BCE1-1A969B5FF591}"/>
               </a:ext>
             </a:extLst>
           </p:cNvPr>
@@ -11954,7 +11959,7 @@
         <p:spPr>
           <a:xfrm xmlns:a="http://schemas.openxmlformats.org/drawingml/2006/main">
             <a:off x="400050" y="1066800"/>
-            <a:ext cx="10668000" cy="381000"/>
+            <a:ext cx="11391900" cy="381000"/>
           </a:xfrm>
           <a:prstGeom xmlns:a="http://schemas.openxmlformats.org/drawingml/2006/main" prst="rect">
             <a:avLst/>
@@ -11977,172 +11982,589 @@
               </a:defRPr>
             </a:pPr>
             <a:r>
-              <a:t>Control used no Palace. Positive differences mean Adaptive used more.</a:t>
-            </a:r>
-          </a:p>
-        </p:txBody>
-      </p:sp>
-      <p:sp>
-        <p:nvSpPr>
-          <p:cNvPr id="3" name="s7-negative-new">
-            <a:extLst xmlns:a="http://schemas.openxmlformats.org/drawingml/2006/main">
-              <a:ext uri="{FF2B5EF4-FFF2-40B4-BE49-F238E27FC236}">
-                <a16:creationId xmlns:a16="http://schemas.microsoft.com/office/drawing/2014/main" id="{ADD6BA5E-7CF4-4C11-BC59-E874CDCD964D}"/>
-              </a:ext>
-            </a:extLst>
-          </p:cNvPr>
-          <p:cNvSpPr>
-            <a:spLocks xmlns:a="http://schemas.openxmlformats.org/drawingml/2006/main" noGrp="1"/>
-          </p:cNvSpPr>
-          <p:nvPr/>
-        </p:nvSpPr>
-        <p:spPr>
-          <a:xfrm xmlns:a="http://schemas.openxmlformats.org/drawingml/2006/main">
-            <a:off x="4953000" y="1600200"/>
-            <a:ext cx="1238250" cy="209550"/>
-          </a:xfrm>
-          <a:prstGeom xmlns:a="http://schemas.openxmlformats.org/drawingml/2006/main" prst="rect">
-            <a:avLst/>
-          </a:prstGeom>
-        </p:spPr>
-        <p:txBody>
-          <a:bodyPr xmlns:a="http://schemas.openxmlformats.org/drawingml/2006/main" wrap="square" lIns="0" tIns="0" rIns="0" bIns="0" anchor="t">
-            <a:noAutofit/>
-          </a:bodyPr>
-          <a:lstStyle xmlns:a="http://schemas.openxmlformats.org/drawingml/2006/main"/>
-          <a:p xmlns:a="http://schemas.openxmlformats.org/drawingml/2006/main">
-            <a:pPr algn="l">
-              <a:defRPr sz="975" b="0">
-                <a:solidFill>
-                  <a:srgbClr val="526071"/>
-                </a:solidFill>
-                <a:latin typeface="Arial"/>
-                <a:ea typeface="Arial"/>
-                <a:cs typeface="Arial"/>
-              </a:defRPr>
-            </a:pPr>
-            <a:r>
-              <a:t>NEGATIVE</a:t>
-            </a:r>
-          </a:p>
-        </p:txBody>
-      </p:sp>
-      <p:sp>
-        <p:nvSpPr>
-          <p:cNvPr id="4" name="s7-zero-new">
-            <a:extLst xmlns:a="http://schemas.openxmlformats.org/drawingml/2006/main">
-              <a:ext uri="{FF2B5EF4-FFF2-40B4-BE49-F238E27FC236}">
-                <a16:creationId xmlns:a16="http://schemas.microsoft.com/office/drawing/2014/main" id="{59741986-C88E-49EC-AE8C-755726BFFF21}"/>
-              </a:ext>
-            </a:extLst>
-          </p:cNvPr>
-          <p:cNvSpPr>
-            <a:spLocks xmlns:a="http://schemas.openxmlformats.org/drawingml/2006/main" noGrp="1"/>
-          </p:cNvSpPr>
-          <p:nvPr/>
-        </p:nvSpPr>
-        <p:spPr>
-          <a:xfrm xmlns:a="http://schemas.openxmlformats.org/drawingml/2006/main">
-            <a:off x="6934200" y="1600200"/>
-            <a:ext cx="609600" cy="209550"/>
-          </a:xfrm>
-          <a:prstGeom xmlns:a="http://schemas.openxmlformats.org/drawingml/2006/main" prst="rect">
-            <a:avLst/>
-          </a:prstGeom>
-        </p:spPr>
-        <p:txBody>
-          <a:bodyPr xmlns:a="http://schemas.openxmlformats.org/drawingml/2006/main" wrap="square" lIns="0" tIns="0" rIns="0" bIns="0" anchor="t">
-            <a:noAutofit/>
-          </a:bodyPr>
-          <a:lstStyle xmlns:a="http://schemas.openxmlformats.org/drawingml/2006/main"/>
-          <a:p xmlns:a="http://schemas.openxmlformats.org/drawingml/2006/main">
-            <a:pPr algn="ctr">
-              <a:defRPr sz="975" b="1">
-                <a:solidFill>
-                  <a:srgbClr val="0A1224"/>
-                </a:solidFill>
-                <a:latin typeface="Arial"/>
-                <a:ea typeface="Arial"/>
-                <a:cs typeface="Arial"/>
-              </a:defRPr>
-            </a:pPr>
-            <a:r>
-              <a:t>ZERO</a:t>
-            </a:r>
-          </a:p>
-        </p:txBody>
-      </p:sp>
-      <p:sp>
-        <p:nvSpPr>
-          <p:cNvPr id="5" name="s7-positive-new">
-            <a:extLst xmlns:a="http://schemas.openxmlformats.org/drawingml/2006/main">
-              <a:ext uri="{FF2B5EF4-FFF2-40B4-BE49-F238E27FC236}">
-                <a16:creationId xmlns:a16="http://schemas.microsoft.com/office/drawing/2014/main" id="{ED0E96E8-91AF-4583-AC57-818B3AE01659}"/>
-              </a:ext>
-            </a:extLst>
-          </p:cNvPr>
-          <p:cNvSpPr>
-            <a:spLocks xmlns:a="http://schemas.openxmlformats.org/drawingml/2006/main" noGrp="1"/>
-          </p:cNvSpPr>
-          <p:nvPr/>
-        </p:nvSpPr>
-        <p:spPr>
-          <a:xfrm xmlns:a="http://schemas.openxmlformats.org/drawingml/2006/main">
-            <a:off x="8477250" y="1600200"/>
-            <a:ext cx="1238250" cy="209550"/>
-          </a:xfrm>
-          <a:prstGeom xmlns:a="http://schemas.openxmlformats.org/drawingml/2006/main" prst="rect">
-            <a:avLst/>
-          </a:prstGeom>
-        </p:spPr>
-        <p:txBody>
-          <a:bodyPr xmlns:a="http://schemas.openxmlformats.org/drawingml/2006/main" wrap="square" lIns="0" tIns="0" rIns="0" bIns="0" anchor="t">
-            <a:noAutofit/>
-          </a:bodyPr>
-          <a:lstStyle xmlns:a="http://schemas.openxmlformats.org/drawingml/2006/main"/>
-          <a:p xmlns:a="http://schemas.openxmlformats.org/drawingml/2006/main">
-            <a:pPr algn="r">
-              <a:defRPr sz="975" b="0">
-                <a:solidFill>
-                  <a:srgbClr val="526071"/>
-                </a:solidFill>
-                <a:latin typeface="Arial"/>
-                <a:ea typeface="Arial"/>
-                <a:cs typeface="Arial"/>
-              </a:defRPr>
-            </a:pPr>
-            <a:r>
-              <a:t>POSITIVE</a:t>
-            </a:r>
-          </a:p>
-        </p:txBody>
-      </p:sp>
-      <p:sp>
-        <p:nvSpPr>
-          <p:cNvPr id="6" name="s7-tools-new-panel">
-            <a:extLst xmlns:a="http://schemas.openxmlformats.org/drawingml/2006/main">
-              <a:ext uri="{FF2B5EF4-FFF2-40B4-BE49-F238E27FC236}">
-                <a16:creationId xmlns:a16="http://schemas.microsoft.com/office/drawing/2014/main" id="{721B8595-4E65-442C-A85F-B04070ADD12C}"/>
-              </a:ext>
-            </a:extLst>
-          </p:cNvPr>
-          <p:cNvSpPr>
-            <a:spLocks xmlns:a="http://schemas.openxmlformats.org/drawingml/2006/main" noGrp="1"/>
-          </p:cNvSpPr>
-          <p:nvPr/>
-        </p:nvSpPr>
-        <p:spPr>
-          <a:xfrm xmlns:a="http://schemas.openxmlformats.org/drawingml/2006/main">
-            <a:off x="552450" y="1924050"/>
-            <a:ext cx="11087100" cy="1066800"/>
+              <a:t>On deterministic synthetic tasks, routing added calls; v0.2.3 responds with selective context modes.</a:t>
+            </a:r>
+          </a:p>
+        </p:txBody>
+      </p:sp>
+      <p:sp>
+        <p:nvSpPr>
+          <p:cNvPr id="3" name="s7-result-panel">
+            <a:extLst xmlns:a="http://schemas.openxmlformats.org/drawingml/2006/main">
+              <a:ext uri="{FF2B5EF4-FFF2-40B4-BE49-F238E27FC236}">
+                <a16:creationId xmlns:a16="http://schemas.microsoft.com/office/drawing/2014/main" id="{413F853A-C01F-4D48-A703-A1B8B495CD55}"/>
+              </a:ext>
+            </a:extLst>
+          </p:cNvPr>
+          <p:cNvSpPr>
+            <a:spLocks xmlns:a="http://schemas.openxmlformats.org/drawingml/2006/main" noGrp="1"/>
+          </p:cNvSpPr>
+          <p:nvPr/>
+        </p:nvSpPr>
+        <p:spPr>
+          <a:xfrm xmlns:a="http://schemas.openxmlformats.org/drawingml/2006/main">
+            <a:off x="552450" y="1752600"/>
+            <a:ext cx="4248150" cy="3562350"/>
           </a:xfrm>
           <a:prstGeom xmlns:a="http://schemas.openxmlformats.org/drawingml/2006/main" prst="roundRect">
             <a:avLst>
-              <a:gd name="adj" fmla="val 7143"/>
+              <a:gd name="adj" fmla="val 2139"/>
             </a:avLst>
           </a:prstGeom>
           <a:solidFill xmlns:a="http://schemas.openxmlformats.org/drawingml/2006/main">
-            <a:srgbClr val="FFFFFF"/>
+            <a:srgbClr val="FFF1F3"/>
+          </a:solidFill>
+          <a:ln xmlns:a="http://schemas.openxmlformats.org/drawingml/2006/main" w="0">
+            <a:solidFill>
+              <a:srgbClr val="FFF1F3"/>
+            </a:solidFill>
+            <a:prstDash val="solid"/>
+          </a:ln>
+        </p:spPr>
+      </p:sp>
+      <p:sp>
+        <p:nvSpPr>
+          <p:cNvPr id="4" name="s7-result-k">
+            <a:extLst xmlns:a="http://schemas.openxmlformats.org/drawingml/2006/main">
+              <a:ext uri="{FF2B5EF4-FFF2-40B4-BE49-F238E27FC236}">
+                <a16:creationId xmlns:a16="http://schemas.microsoft.com/office/drawing/2014/main" id="{3BD0AD4F-06A9-42A3-9982-AB9684E5F117}"/>
+              </a:ext>
+            </a:extLst>
+          </p:cNvPr>
+          <p:cNvSpPr>
+            <a:spLocks xmlns:a="http://schemas.openxmlformats.org/drawingml/2006/main" noGrp="1"/>
+          </p:cNvSpPr>
+          <p:nvPr/>
+        </p:nvSpPr>
+        <p:spPr>
+          <a:xfrm xmlns:a="http://schemas.openxmlformats.org/drawingml/2006/main">
+            <a:off x="819150" y="2019300"/>
+            <a:ext cx="3524250" cy="228600"/>
+          </a:xfrm>
+          <a:prstGeom xmlns:a="http://schemas.openxmlformats.org/drawingml/2006/main" prst="rect">
+            <a:avLst/>
+          </a:prstGeom>
+        </p:spPr>
+        <p:txBody>
+          <a:bodyPr xmlns:a="http://schemas.openxmlformats.org/drawingml/2006/main" wrap="square" lIns="0" tIns="0" rIns="0" bIns="0" anchor="t">
+            <a:noAutofit/>
+          </a:bodyPr>
+          <a:lstStyle xmlns:a="http://schemas.openxmlformats.org/drawingml/2006/main"/>
+          <a:p xmlns:a="http://schemas.openxmlformats.org/drawingml/2006/main">
+            <a:pPr algn="l">
+              <a:defRPr sz="1125" b="1">
+                <a:solidFill>
+                  <a:srgbClr val="D4515D"/>
+                </a:solidFill>
+                <a:latin typeface="Arial"/>
+                <a:ea typeface="Arial"/>
+                <a:cs typeface="Arial"/>
+              </a:defRPr>
+            </a:pPr>
+            <a:r>
+              <a:t>FROZEN v0.2.1 RESULT</a:t>
+            </a:r>
+          </a:p>
+        </p:txBody>
+      </p:sp>
+      <p:sp>
+        <p:nvSpPr>
+          <p:cNvPr id="5" name="s7-tools-stat">
+            <a:extLst xmlns:a="http://schemas.openxmlformats.org/drawingml/2006/main">
+              <a:ext uri="{FF2B5EF4-FFF2-40B4-BE49-F238E27FC236}">
+                <a16:creationId xmlns:a16="http://schemas.microsoft.com/office/drawing/2014/main" id="{BFD0AB1F-B840-4D99-A184-28804F0F6152}"/>
+              </a:ext>
+            </a:extLst>
+          </p:cNvPr>
+          <p:cNvSpPr>
+            <a:spLocks xmlns:a="http://schemas.openxmlformats.org/drawingml/2006/main" noGrp="1"/>
+          </p:cNvSpPr>
+          <p:nvPr/>
+        </p:nvSpPr>
+        <p:spPr>
+          <a:xfrm xmlns:a="http://schemas.openxmlformats.org/drawingml/2006/main">
+            <a:off x="819150" y="2400300"/>
+            <a:ext cx="1619250" cy="609600"/>
+          </a:xfrm>
+          <a:prstGeom xmlns:a="http://schemas.openxmlformats.org/drawingml/2006/main" prst="rect">
+            <a:avLst/>
+          </a:prstGeom>
+        </p:spPr>
+        <p:txBody>
+          <a:bodyPr xmlns:a="http://schemas.openxmlformats.org/drawingml/2006/main" wrap="square" lIns="0" tIns="0" rIns="0" bIns="0" anchor="t">
+            <a:noAutofit/>
+          </a:bodyPr>
+          <a:lstStyle xmlns:a="http://schemas.openxmlformats.org/drawingml/2006/main"/>
+          <a:p xmlns:a="http://schemas.openxmlformats.org/drawingml/2006/main">
+            <a:pPr algn="l">
+              <a:defRPr sz="3600" b="1">
+                <a:solidFill>
+                  <a:srgbClr val="D4515D"/>
+                </a:solidFill>
+                <a:latin typeface="Arial"/>
+                <a:ea typeface="Arial"/>
+                <a:cs typeface="Arial"/>
+              </a:defRPr>
+            </a:pPr>
+            <a:r>
+              <a:t>+4.5</a:t>
+            </a:r>
+          </a:p>
+        </p:txBody>
+      </p:sp>
+      <p:sp>
+        <p:nvSpPr>
+          <p:cNvPr id="6" name="s7-tools-label">
+            <a:extLst xmlns:a="http://schemas.openxmlformats.org/drawingml/2006/main">
+              <a:ext uri="{FF2B5EF4-FFF2-40B4-BE49-F238E27FC236}">
+                <a16:creationId xmlns:a16="http://schemas.microsoft.com/office/drawing/2014/main" id="{4BA4E474-98A7-4AD2-9799-16DD3CDAF312}"/>
+              </a:ext>
+            </a:extLst>
+          </p:cNvPr>
+          <p:cNvSpPr>
+            <a:spLocks xmlns:a="http://schemas.openxmlformats.org/drawingml/2006/main" noGrp="1"/>
+          </p:cNvSpPr>
+          <p:nvPr/>
+        </p:nvSpPr>
+        <p:spPr>
+          <a:xfrm xmlns:a="http://schemas.openxmlformats.org/drawingml/2006/main">
+            <a:off x="2095500" y="2600325"/>
+            <a:ext cx="1714500" cy="304800"/>
+          </a:xfrm>
+          <a:prstGeom xmlns:a="http://schemas.openxmlformats.org/drawingml/2006/main" prst="rect">
+            <a:avLst/>
+          </a:prstGeom>
+        </p:spPr>
+        <p:txBody>
+          <a:bodyPr xmlns:a="http://schemas.openxmlformats.org/drawingml/2006/main" wrap="square" lIns="0" tIns="0" rIns="0" bIns="0" anchor="t">
+            <a:noAutofit/>
+          </a:bodyPr>
+          <a:lstStyle xmlns:a="http://schemas.openxmlformats.org/drawingml/2006/main"/>
+          <a:p xmlns:a="http://schemas.openxmlformats.org/drawingml/2006/main">
+            <a:pPr algn="l">
+              <a:defRPr sz="1500" b="1">
+                <a:solidFill>
+                  <a:srgbClr val="0A1224"/>
+                </a:solidFill>
+                <a:latin typeface="Arial"/>
+                <a:ea typeface="Arial"/>
+                <a:cs typeface="Arial"/>
+              </a:defRPr>
+            </a:pPr>
+            <a:r>
+              <a:t>tool calls</a:t>
+            </a:r>
+          </a:p>
+        </p:txBody>
+      </p:sp>
+      <p:sp>
+        <p:nvSpPr>
+          <p:cNvPr id="7" name="s7-tools-ci">
+            <a:extLst xmlns:a="http://schemas.openxmlformats.org/drawingml/2006/main">
+              <a:ext uri="{FF2B5EF4-FFF2-40B4-BE49-F238E27FC236}">
+                <a16:creationId xmlns:a16="http://schemas.microsoft.com/office/drawing/2014/main" id="{54F65D05-45F0-42E9-97FF-D23260D7397E}"/>
+              </a:ext>
+            </a:extLst>
+          </p:cNvPr>
+          <p:cNvSpPr>
+            <a:spLocks xmlns:a="http://schemas.openxmlformats.org/drawingml/2006/main" noGrp="1"/>
+          </p:cNvSpPr>
+          <p:nvPr/>
+        </p:nvSpPr>
+        <p:spPr>
+          <a:xfrm xmlns:a="http://schemas.openxmlformats.org/drawingml/2006/main">
+            <a:off x="819150" y="3028950"/>
+            <a:ext cx="3143250" cy="228600"/>
+          </a:xfrm>
+          <a:prstGeom xmlns:a="http://schemas.openxmlformats.org/drawingml/2006/main" prst="rect">
+            <a:avLst/>
+          </a:prstGeom>
+        </p:spPr>
+        <p:txBody>
+          <a:bodyPr xmlns:a="http://schemas.openxmlformats.org/drawingml/2006/main" wrap="square" lIns="0" tIns="0" rIns="0" bIns="0" anchor="t">
+            <a:noAutofit/>
+          </a:bodyPr>
+          <a:lstStyle xmlns:a="http://schemas.openxmlformats.org/drawingml/2006/main"/>
+          <a:p xmlns:a="http://schemas.openxmlformats.org/drawingml/2006/main">
+            <a:pPr algn="l">
+              <a:defRPr sz="1200" b="0">
+                <a:solidFill>
+                  <a:srgbClr val="526071"/>
+                </a:solidFill>
+                <a:latin typeface="Arial"/>
+                <a:ea typeface="Arial"/>
+                <a:cs typeface="Arial"/>
+              </a:defRPr>
+            </a:pPr>
+            <a:r>
+              <a:t>95% CI: +2.5 to +6.5</a:t>
+            </a:r>
+          </a:p>
+        </p:txBody>
+      </p:sp>
+      <p:cxnSp>
+        <p:nvCxnSpPr>
+          <p:cNvPr id="44" name="s7-result-rule"/>
+          <p:cNvCxnSpPr/>
+          <p:nvPr/>
+        </p:nvCxnSpPr>
+        <p:spPr>
+          <a:xfrm xmlns:a="http://schemas.openxmlformats.org/drawingml/2006/main">
+            <a:off x="819150" y="3409950"/>
+            <a:ext cx="3524250" cy="953"/>
+          </a:xfrm>
+          <a:prstGeom xmlns:a="http://schemas.openxmlformats.org/drawingml/2006/main" prst="straightConnector1">
+            <a:avLst/>
+          </a:prstGeom>
+          <a:ln xmlns:a="http://schemas.openxmlformats.org/drawingml/2006/main" w="9525">
+            <a:solidFill>
+              <a:srgbClr val="E8BCC2"/>
+            </a:solidFill>
+            <a:prstDash val="solid"/>
+          </a:ln>
+        </p:spPr>
+      </p:cxnSp>
+      <p:sp>
+        <p:nvSpPr>
+          <p:cNvPr id="9" name="s7-token-stat">
+            <a:extLst xmlns:a="http://schemas.openxmlformats.org/drawingml/2006/main">
+              <a:ext uri="{FF2B5EF4-FFF2-40B4-BE49-F238E27FC236}">
+                <a16:creationId xmlns:a16="http://schemas.microsoft.com/office/drawing/2014/main" id="{686062B4-E426-41D6-8944-87A0CEC64E3F}"/>
+              </a:ext>
+            </a:extLst>
+          </p:cNvPr>
+          <p:cNvSpPr>
+            <a:spLocks xmlns:a="http://schemas.openxmlformats.org/drawingml/2006/main" noGrp="1"/>
+          </p:cNvSpPr>
+          <p:nvPr/>
+        </p:nvSpPr>
+        <p:spPr>
+          <a:xfrm xmlns:a="http://schemas.openxmlformats.org/drawingml/2006/main">
+            <a:off x="819150" y="3638550"/>
+            <a:ext cx="1619250" cy="361950"/>
+          </a:xfrm>
+          <a:prstGeom xmlns:a="http://schemas.openxmlformats.org/drawingml/2006/main" prst="rect">
+            <a:avLst/>
+          </a:prstGeom>
+        </p:spPr>
+        <p:txBody>
+          <a:bodyPr xmlns:a="http://schemas.openxmlformats.org/drawingml/2006/main" wrap="square" lIns="0" tIns="0" rIns="0" bIns="0" anchor="t">
+            <a:noAutofit/>
+          </a:bodyPr>
+          <a:lstStyle xmlns:a="http://schemas.openxmlformats.org/drawingml/2006/main"/>
+          <a:p xmlns:a="http://schemas.openxmlformats.org/drawingml/2006/main">
+            <a:pPr algn="l">
+              <a:defRPr sz="2100" b="1">
+                <a:solidFill>
+                  <a:srgbClr val="B87712"/>
+                </a:solidFill>
+                <a:latin typeface="Arial"/>
+                <a:ea typeface="Arial"/>
+                <a:cs typeface="Arial"/>
+              </a:defRPr>
+            </a:pPr>
+            <a:r>
+              <a:t>+30,147</a:t>
+            </a:r>
+          </a:p>
+        </p:txBody>
+      </p:sp>
+      <p:sp>
+        <p:nvSpPr>
+          <p:cNvPr id="10" name="s7-token-label">
+            <a:extLst xmlns:a="http://schemas.openxmlformats.org/drawingml/2006/main">
+              <a:ext uri="{FF2B5EF4-FFF2-40B4-BE49-F238E27FC236}">
+                <a16:creationId xmlns:a16="http://schemas.microsoft.com/office/drawing/2014/main" id="{306FEAE0-3CD3-4C10-8F5F-2F4AB37A87D2}"/>
+              </a:ext>
+            </a:extLst>
+          </p:cNvPr>
+          <p:cNvSpPr>
+            <a:spLocks xmlns:a="http://schemas.openxmlformats.org/drawingml/2006/main" noGrp="1"/>
+          </p:cNvSpPr>
+          <p:nvPr/>
+        </p:nvSpPr>
+        <p:spPr>
+          <a:xfrm xmlns:a="http://schemas.openxmlformats.org/drawingml/2006/main">
+            <a:off x="2381250" y="3676650"/>
+            <a:ext cx="1714500" cy="228600"/>
+          </a:xfrm>
+          <a:prstGeom xmlns:a="http://schemas.openxmlformats.org/drawingml/2006/main" prst="rect">
+            <a:avLst/>
+          </a:prstGeom>
+        </p:spPr>
+        <p:txBody>
+          <a:bodyPr xmlns:a="http://schemas.openxmlformats.org/drawingml/2006/main" wrap="square" lIns="0" tIns="0" rIns="0" bIns="0" anchor="t">
+            <a:noAutofit/>
+          </a:bodyPr>
+          <a:lstStyle xmlns:a="http://schemas.openxmlformats.org/drawingml/2006/main"/>
+          <a:p xmlns:a="http://schemas.openxmlformats.org/drawingml/2006/main">
+            <a:pPr algn="l">
+              <a:defRPr sz="1275" b="1">
+                <a:solidFill>
+                  <a:srgbClr val="0A1224"/>
+                </a:solidFill>
+                <a:latin typeface="Arial"/>
+                <a:ea typeface="Arial"/>
+                <a:cs typeface="Arial"/>
+              </a:defRPr>
+            </a:pPr>
+            <a:r>
+              <a:t>reported tokens</a:t>
+            </a:r>
+          </a:p>
+        </p:txBody>
+      </p:sp>
+      <p:sp>
+        <p:nvSpPr>
+          <p:cNvPr id="11" name="s7-token-note">
+            <a:extLst xmlns:a="http://schemas.openxmlformats.org/drawingml/2006/main">
+              <a:ext uri="{FF2B5EF4-FFF2-40B4-BE49-F238E27FC236}">
+                <a16:creationId xmlns:a16="http://schemas.microsoft.com/office/drawing/2014/main" id="{B42B31DC-9F78-41B0-A639-D3EFCAB76CC3}"/>
+              </a:ext>
+            </a:extLst>
+          </p:cNvPr>
+          <p:cNvSpPr>
+            <a:spLocks xmlns:a="http://schemas.openxmlformats.org/drawingml/2006/main" noGrp="1"/>
+          </p:cNvSpPr>
+          <p:nvPr/>
+        </p:nvSpPr>
+        <p:spPr>
+          <a:xfrm xmlns:a="http://schemas.openxmlformats.org/drawingml/2006/main">
+            <a:off x="2381250" y="3943350"/>
+            <a:ext cx="1714500" cy="190500"/>
+          </a:xfrm>
+          <a:prstGeom xmlns:a="http://schemas.openxmlformats.org/drawingml/2006/main" prst="rect">
+            <a:avLst/>
+          </a:prstGeom>
+        </p:spPr>
+        <p:txBody>
+          <a:bodyPr xmlns:a="http://schemas.openxmlformats.org/drawingml/2006/main" wrap="square" lIns="0" tIns="0" rIns="0" bIns="0" anchor="t">
+            <a:noAutofit/>
+          </a:bodyPr>
+          <a:lstStyle xmlns:a="http://schemas.openxmlformats.org/drawingml/2006/main"/>
+          <a:p xmlns:a="http://schemas.openxmlformats.org/drawingml/2006/main">
+            <a:pPr algn="l">
+              <a:defRPr sz="1050" b="1">
+                <a:solidFill>
+                  <a:srgbClr val="B87712"/>
+                </a:solidFill>
+                <a:latin typeface="Arial"/>
+                <a:ea typeface="Arial"/>
+                <a:cs typeface="Arial"/>
+              </a:defRPr>
+            </a:pPr>
+            <a:r>
+              <a:t>interval crosses zero</a:t>
+            </a:r>
+          </a:p>
+        </p:txBody>
+      </p:sp>
+      <p:sp>
+        <p:nvSpPr>
+          <p:cNvPr id="12" name="s7-time-stat">
+            <a:extLst xmlns:a="http://schemas.openxmlformats.org/drawingml/2006/main">
+              <a:ext uri="{FF2B5EF4-FFF2-40B4-BE49-F238E27FC236}">
+                <a16:creationId xmlns:a16="http://schemas.microsoft.com/office/drawing/2014/main" id="{5AECB523-CA05-47D3-B1DE-73ECBFB661FB}"/>
+              </a:ext>
+            </a:extLst>
+          </p:cNvPr>
+          <p:cNvSpPr>
+            <a:spLocks xmlns:a="http://schemas.openxmlformats.org/drawingml/2006/main" noGrp="1"/>
+          </p:cNvSpPr>
+          <p:nvPr/>
+        </p:nvSpPr>
+        <p:spPr>
+          <a:xfrm xmlns:a="http://schemas.openxmlformats.org/drawingml/2006/main">
+            <a:off x="819150" y="4305300"/>
+            <a:ext cx="1619250" cy="361950"/>
+          </a:xfrm>
+          <a:prstGeom xmlns:a="http://schemas.openxmlformats.org/drawingml/2006/main" prst="rect">
+            <a:avLst/>
+          </a:prstGeom>
+        </p:spPr>
+        <p:txBody>
+          <a:bodyPr xmlns:a="http://schemas.openxmlformats.org/drawingml/2006/main" wrap="square" lIns="0" tIns="0" rIns="0" bIns="0" anchor="t">
+            <a:noAutofit/>
+          </a:bodyPr>
+          <a:lstStyle xmlns:a="http://schemas.openxmlformats.org/drawingml/2006/main"/>
+          <a:p xmlns:a="http://schemas.openxmlformats.org/drawingml/2006/main">
+            <a:pPr algn="l">
+              <a:defRPr sz="2100" b="1">
+                <a:solidFill>
+                  <a:srgbClr val="B87712"/>
+                </a:solidFill>
+                <a:latin typeface="Arial"/>
+                <a:ea typeface="Arial"/>
+                <a:cs typeface="Arial"/>
+              </a:defRPr>
+            </a:pPr>
+            <a:r>
+              <a:t>+10.919s</a:t>
+            </a:r>
+          </a:p>
+        </p:txBody>
+      </p:sp>
+      <p:sp>
+        <p:nvSpPr>
+          <p:cNvPr id="13" name="s7-time-label">
+            <a:extLst xmlns:a="http://schemas.openxmlformats.org/drawingml/2006/main">
+              <a:ext uri="{FF2B5EF4-FFF2-40B4-BE49-F238E27FC236}">
+                <a16:creationId xmlns:a16="http://schemas.microsoft.com/office/drawing/2014/main" id="{1D5F6219-EF82-40BC-92D6-B05A5450E38A}"/>
+              </a:ext>
+            </a:extLst>
+          </p:cNvPr>
+          <p:cNvSpPr>
+            <a:spLocks xmlns:a="http://schemas.openxmlformats.org/drawingml/2006/main" noGrp="1"/>
+          </p:cNvSpPr>
+          <p:nvPr/>
+        </p:nvSpPr>
+        <p:spPr>
+          <a:xfrm xmlns:a="http://schemas.openxmlformats.org/drawingml/2006/main">
+            <a:off x="2381250" y="4343400"/>
+            <a:ext cx="1714500" cy="228600"/>
+          </a:xfrm>
+          <a:prstGeom xmlns:a="http://schemas.openxmlformats.org/drawingml/2006/main" prst="rect">
+            <a:avLst/>
+          </a:prstGeom>
+        </p:spPr>
+        <p:txBody>
+          <a:bodyPr xmlns:a="http://schemas.openxmlformats.org/drawingml/2006/main" wrap="square" lIns="0" tIns="0" rIns="0" bIns="0" anchor="t">
+            <a:noAutofit/>
+          </a:bodyPr>
+          <a:lstStyle xmlns:a="http://schemas.openxmlformats.org/drawingml/2006/main"/>
+          <a:p xmlns:a="http://schemas.openxmlformats.org/drawingml/2006/main">
+            <a:pPr algn="l">
+              <a:defRPr sz="1275" b="1">
+                <a:solidFill>
+                  <a:srgbClr val="0A1224"/>
+                </a:solidFill>
+                <a:latin typeface="Arial"/>
+                <a:ea typeface="Arial"/>
+                <a:cs typeface="Arial"/>
+              </a:defRPr>
+            </a:pPr>
+            <a:r>
+              <a:t>wall time</a:t>
+            </a:r>
+          </a:p>
+        </p:txBody>
+      </p:sp>
+      <p:sp>
+        <p:nvSpPr>
+          <p:cNvPr id="14" name="s7-time-note">
+            <a:extLst xmlns:a="http://schemas.openxmlformats.org/drawingml/2006/main">
+              <a:ext uri="{FF2B5EF4-FFF2-40B4-BE49-F238E27FC236}">
+                <a16:creationId xmlns:a16="http://schemas.microsoft.com/office/drawing/2014/main" id="{73C389EF-0204-4E36-8FC4-575E2EC9993E}"/>
+              </a:ext>
+            </a:extLst>
+          </p:cNvPr>
+          <p:cNvSpPr>
+            <a:spLocks xmlns:a="http://schemas.openxmlformats.org/drawingml/2006/main" noGrp="1"/>
+          </p:cNvSpPr>
+          <p:nvPr/>
+        </p:nvSpPr>
+        <p:spPr>
+          <a:xfrm xmlns:a="http://schemas.openxmlformats.org/drawingml/2006/main">
+            <a:off x="2381250" y="4610100"/>
+            <a:ext cx="1714500" cy="190500"/>
+          </a:xfrm>
+          <a:prstGeom xmlns:a="http://schemas.openxmlformats.org/drawingml/2006/main" prst="rect">
+            <a:avLst/>
+          </a:prstGeom>
+        </p:spPr>
+        <p:txBody>
+          <a:bodyPr xmlns:a="http://schemas.openxmlformats.org/drawingml/2006/main" wrap="square" lIns="0" tIns="0" rIns="0" bIns="0" anchor="t">
+            <a:noAutofit/>
+          </a:bodyPr>
+          <a:lstStyle xmlns:a="http://schemas.openxmlformats.org/drawingml/2006/main"/>
+          <a:p xmlns:a="http://schemas.openxmlformats.org/drawingml/2006/main">
+            <a:pPr algn="l">
+              <a:defRPr sz="1050" b="1">
+                <a:solidFill>
+                  <a:srgbClr val="B87712"/>
+                </a:solidFill>
+                <a:latin typeface="Arial"/>
+                <a:ea typeface="Arial"/>
+                <a:cs typeface="Arial"/>
+              </a:defRPr>
+            </a:pPr>
+            <a:r>
+              <a:t>interval crosses zero</a:t>
+            </a:r>
+          </a:p>
+        </p:txBody>
+      </p:sp>
+      <p:sp>
+        <p:nvSpPr>
+          <p:cNvPr id="15" name="s7-correct">
+            <a:extLst xmlns:a="http://schemas.openxmlformats.org/drawingml/2006/main">
+              <a:ext uri="{FF2B5EF4-FFF2-40B4-BE49-F238E27FC236}">
+                <a16:creationId xmlns:a16="http://schemas.microsoft.com/office/drawing/2014/main" id="{EEDE1458-9D13-4DEA-A3C5-DFF0B6B74E06}"/>
+              </a:ext>
+            </a:extLst>
+          </p:cNvPr>
+          <p:cNvSpPr>
+            <a:spLocks xmlns:a="http://schemas.openxmlformats.org/drawingml/2006/main" noGrp="1"/>
+          </p:cNvSpPr>
+          <p:nvPr/>
+        </p:nvSpPr>
+        <p:spPr>
+          <a:xfrm xmlns:a="http://schemas.openxmlformats.org/drawingml/2006/main">
+            <a:off x="819150" y="4991100"/>
+            <a:ext cx="3524250" cy="228600"/>
+          </a:xfrm>
+          <a:prstGeom xmlns:a="http://schemas.openxmlformats.org/drawingml/2006/main" prst="rect">
+            <a:avLst/>
+          </a:prstGeom>
+        </p:spPr>
+        <p:txBody>
+          <a:bodyPr xmlns:a="http://schemas.openxmlformats.org/drawingml/2006/main" wrap="square" lIns="0" tIns="0" rIns="0" bIns="0" anchor="t">
+            <a:noAutofit/>
+          </a:bodyPr>
+          <a:lstStyle xmlns:a="http://schemas.openxmlformats.org/drawingml/2006/main"/>
+          <a:p xmlns:a="http://schemas.openxmlformats.org/drawingml/2006/main">
+            <a:pPr algn="l">
+              <a:defRPr sz="1200" b="1">
+                <a:solidFill>
+                  <a:srgbClr val="15A777"/>
+                </a:solidFill>
+                <a:latin typeface="Arial"/>
+                <a:ea typeface="Arial"/>
+                <a:cs typeface="Arial"/>
+              </a:defRPr>
+            </a:pPr>
+            <a:r>
+              <a:t>64/64 correct | no correctness winner</a:t>
+            </a:r>
+          </a:p>
+        </p:txBody>
+      </p:sp>
+      <p:sp>
+        <p:nvSpPr>
+          <p:cNvPr id="16" name="s7-policy-panel">
+            <a:extLst xmlns:a="http://schemas.openxmlformats.org/drawingml/2006/main">
+              <a:ext uri="{FF2B5EF4-FFF2-40B4-BE49-F238E27FC236}">
+                <a16:creationId xmlns:a16="http://schemas.microsoft.com/office/drawing/2014/main" id="{EECDA71F-36E6-43EF-A43D-6A0957BB0A0A}"/>
+              </a:ext>
+            </a:extLst>
+          </p:cNvPr>
+          <p:cNvSpPr>
+            <a:spLocks xmlns:a="http://schemas.openxmlformats.org/drawingml/2006/main" noGrp="1"/>
+          </p:cNvSpPr>
+          <p:nvPr/>
+        </p:nvSpPr>
+        <p:spPr>
+          <a:xfrm xmlns:a="http://schemas.openxmlformats.org/drawingml/2006/main">
+            <a:off x="5143500" y="1752600"/>
+            <a:ext cx="6496050" cy="3562350"/>
+          </a:xfrm>
+          <a:prstGeom xmlns:a="http://schemas.openxmlformats.org/drawingml/2006/main" prst="roundRect">
+            <a:avLst>
+              <a:gd name="adj" fmla="val 2139"/>
+            </a:avLst>
+          </a:prstGeom>
+          <a:solidFill xmlns:a="http://schemas.openxmlformats.org/drawingml/2006/main">
+            <a:srgbClr val="F7F9FC"/>
           </a:solidFill>
           <a:ln xmlns:a="http://schemas.openxmlformats.org/drawingml/2006/main" w="9525">
             <a:solidFill>
@@ -12154,22 +12576,22 @@
       </p:sp>
       <p:sp>
         <p:nvSpPr>
-          <p:cNvPr id="7" name="s7-tools-new-label">
-            <a:extLst xmlns:a="http://schemas.openxmlformats.org/drawingml/2006/main">
-              <a:ext uri="{FF2B5EF4-FFF2-40B4-BE49-F238E27FC236}">
-                <a16:creationId xmlns:a16="http://schemas.microsoft.com/office/drawing/2014/main" id="{E78CF100-4E31-42C2-A197-AA138DAF0DA4}"/>
-              </a:ext>
-            </a:extLst>
-          </p:cNvPr>
-          <p:cNvSpPr>
-            <a:spLocks xmlns:a="http://schemas.openxmlformats.org/drawingml/2006/main" noGrp="1"/>
-          </p:cNvSpPr>
-          <p:nvPr/>
-        </p:nvSpPr>
-        <p:spPr>
-          <a:xfrm xmlns:a="http://schemas.openxmlformats.org/drawingml/2006/main">
-            <a:off x="781050" y="2076450"/>
-            <a:ext cx="2095500" cy="209550"/>
+          <p:cNvPr id="17" name="s7-policy-k">
+            <a:extLst xmlns:a="http://schemas.openxmlformats.org/drawingml/2006/main">
+              <a:ext uri="{FF2B5EF4-FFF2-40B4-BE49-F238E27FC236}">
+                <a16:creationId xmlns:a16="http://schemas.microsoft.com/office/drawing/2014/main" id="{9926438A-FA07-4755-A7DC-771024483001}"/>
+              </a:ext>
+            </a:extLst>
+          </p:cNvPr>
+          <p:cNvSpPr>
+            <a:spLocks xmlns:a="http://schemas.openxmlformats.org/drawingml/2006/main" noGrp="1"/>
+          </p:cNvSpPr>
+          <p:nvPr/>
+        </p:nvSpPr>
+        <p:spPr>
+          <a:xfrm xmlns:a="http://schemas.openxmlformats.org/drawingml/2006/main">
+            <a:off x="5429250" y="2019300"/>
+            <a:ext cx="5715000" cy="228600"/>
           </a:xfrm>
           <a:prstGeom xmlns:a="http://schemas.openxmlformats.org/drawingml/2006/main" prst="rect">
             <a:avLst/>
@@ -12184,184 +12606,390 @@
             <a:pPr algn="l">
               <a:defRPr sz="1125" b="1">
                 <a:solidFill>
-                  <a:srgbClr val="526071"/>
-                </a:solidFill>
-                <a:latin typeface="Arial"/>
-                <a:ea typeface="Arial"/>
-                <a:cs typeface="Arial"/>
-              </a:defRPr>
-            </a:pPr>
-            <a:r>
-              <a:t>TOOL CALLS</a:t>
-            </a:r>
-          </a:p>
-        </p:txBody>
-      </p:sp>
-      <p:sp>
-        <p:nvSpPr>
-          <p:cNvPr id="8" name="s7-tools-new-value">
-            <a:extLst xmlns:a="http://schemas.openxmlformats.org/drawingml/2006/main">
-              <a:ext uri="{FF2B5EF4-FFF2-40B4-BE49-F238E27FC236}">
-                <a16:creationId xmlns:a16="http://schemas.microsoft.com/office/drawing/2014/main" id="{F9BEDB53-5B8B-4FA1-94EA-9991940E74EC}"/>
-              </a:ext>
-            </a:extLst>
-          </p:cNvPr>
-          <p:cNvSpPr>
-            <a:spLocks xmlns:a="http://schemas.openxmlformats.org/drawingml/2006/main" noGrp="1"/>
-          </p:cNvSpPr>
-          <p:nvPr/>
-        </p:nvSpPr>
-        <p:spPr>
-          <a:xfrm xmlns:a="http://schemas.openxmlformats.org/drawingml/2006/main">
-            <a:off x="781050" y="2343150"/>
-            <a:ext cx="2095500" cy="381000"/>
-          </a:xfrm>
-          <a:prstGeom xmlns:a="http://schemas.openxmlformats.org/drawingml/2006/main" prst="rect">
-            <a:avLst/>
-          </a:prstGeom>
-        </p:spPr>
-        <p:txBody>
-          <a:bodyPr xmlns:a="http://schemas.openxmlformats.org/drawingml/2006/main" wrap="square" lIns="0" tIns="0" rIns="0" bIns="0" anchor="t">
-            <a:noAutofit/>
-          </a:bodyPr>
-          <a:lstStyle xmlns:a="http://schemas.openxmlformats.org/drawingml/2006/main"/>
-          <a:p xmlns:a="http://schemas.openxmlformats.org/drawingml/2006/main">
-            <a:pPr algn="l">
-              <a:defRPr sz="2250" b="1">
-                <a:solidFill>
-                  <a:srgbClr val="D4515D"/>
-                </a:solidFill>
-                <a:latin typeface="Arial"/>
-                <a:ea typeface="Arial"/>
-                <a:cs typeface="Arial"/>
-              </a:defRPr>
-            </a:pPr>
-            <a:r>
-              <a:t>+4.5</a:t>
-            </a:r>
-          </a:p>
-        </p:txBody>
-      </p:sp>
-      <p:sp>
-        <p:nvSpPr>
-          <p:cNvPr id="9" name="s7-tools-new-ci">
-            <a:extLst xmlns:a="http://schemas.openxmlformats.org/drawingml/2006/main">
-              <a:ext uri="{FF2B5EF4-FFF2-40B4-BE49-F238E27FC236}">
-                <a16:creationId xmlns:a16="http://schemas.microsoft.com/office/drawing/2014/main" id="{1F98D830-B3C7-4AF8-B6CE-105EC440C763}"/>
-              </a:ext>
-            </a:extLst>
-          </p:cNvPr>
-          <p:cNvSpPr>
-            <a:spLocks xmlns:a="http://schemas.openxmlformats.org/drawingml/2006/main" noGrp="1"/>
-          </p:cNvSpPr>
-          <p:nvPr/>
-        </p:nvSpPr>
-        <p:spPr>
-          <a:xfrm xmlns:a="http://schemas.openxmlformats.org/drawingml/2006/main">
-            <a:off x="2857500" y="2409825"/>
-            <a:ext cx="2000250" cy="228600"/>
-          </a:xfrm>
-          <a:prstGeom xmlns:a="http://schemas.openxmlformats.org/drawingml/2006/main" prst="rect">
-            <a:avLst/>
-          </a:prstGeom>
-        </p:spPr>
-        <p:txBody>
-          <a:bodyPr xmlns:a="http://schemas.openxmlformats.org/drawingml/2006/main" wrap="square" lIns="0" tIns="0" rIns="0" bIns="0" anchor="t">
-            <a:noAutofit/>
-          </a:bodyPr>
-          <a:lstStyle xmlns:a="http://schemas.openxmlformats.org/drawingml/2006/main"/>
-          <a:p xmlns:a="http://schemas.openxmlformats.org/drawingml/2006/main">
-            <a:pPr algn="l">
-              <a:defRPr sz="1200" b="0">
-                <a:solidFill>
-                  <a:srgbClr val="526071"/>
-                </a:solidFill>
-                <a:latin typeface="Arial"/>
-                <a:ea typeface="Arial"/>
-                <a:cs typeface="Arial"/>
-              </a:defRPr>
-            </a:pPr>
-            <a:r>
-              <a:t>95% CI: +2.5 to +6.5</a:t>
-            </a:r>
-          </a:p>
-        </p:txBody>
-      </p:sp>
-      <p:cxnSp>
-        <p:nvCxnSpPr>
-          <p:cNvPr id="57" name="s7-tools-new-axis"/>
-          <p:cNvCxnSpPr/>
-          <p:nvPr/>
-        </p:nvCxnSpPr>
-        <p:spPr>
-          <a:xfrm xmlns:a="http://schemas.openxmlformats.org/drawingml/2006/main">
-            <a:off x="4953000" y="2571750"/>
-            <a:ext cx="4762500" cy="953"/>
-          </a:xfrm>
-          <a:prstGeom xmlns:a="http://schemas.openxmlformats.org/drawingml/2006/main" prst="straightConnector1">
-            <a:avLst/>
-          </a:prstGeom>
-          <a:ln xmlns:a="http://schemas.openxmlformats.org/drawingml/2006/main" w="19050">
+                  <a:srgbClr val="1677FF"/>
+                </a:solidFill>
+                <a:latin typeface="Arial"/>
+                <a:ea typeface="Arial"/>
+                <a:cs typeface="Arial"/>
+              </a:defRPr>
+            </a:pPr>
+            <a:r>
+              <a:t>CURRENT v0.2.3 MODE POLICY</a:t>
+            </a:r>
+          </a:p>
+        </p:txBody>
+      </p:sp>
+      <p:sp>
+        <p:nvSpPr>
+          <p:cNvPr id="18" name="s7-policy-v">
+            <a:extLst xmlns:a="http://schemas.openxmlformats.org/drawingml/2006/main">
+              <a:ext uri="{FF2B5EF4-FFF2-40B4-BE49-F238E27FC236}">
+                <a16:creationId xmlns:a16="http://schemas.microsoft.com/office/drawing/2014/main" id="{A70A6B99-F2C2-42A6-96D6-BB30AD398042}"/>
+              </a:ext>
+            </a:extLst>
+          </p:cNvPr>
+          <p:cNvSpPr>
+            <a:spLocks xmlns:a="http://schemas.openxmlformats.org/drawingml/2006/main" noGrp="1"/>
+          </p:cNvSpPr>
+          <p:nvPr/>
+        </p:nvSpPr>
+        <p:spPr>
+          <a:xfrm xmlns:a="http://schemas.openxmlformats.org/drawingml/2006/main">
+            <a:off x="5429250" y="2324100"/>
+            <a:ext cx="5715000" cy="285750"/>
+          </a:xfrm>
+          <a:prstGeom xmlns:a="http://schemas.openxmlformats.org/drawingml/2006/main" prst="rect">
+            <a:avLst/>
+          </a:prstGeom>
+        </p:spPr>
+        <p:txBody>
+          <a:bodyPr xmlns:a="http://schemas.openxmlformats.org/drawingml/2006/main" wrap="square" lIns="0" tIns="0" rIns="0" bIns="0" anchor="t">
+            <a:noAutofit/>
+          </a:bodyPr>
+          <a:lstStyle xmlns:a="http://schemas.openxmlformats.org/drawingml/2006/main"/>
+          <a:p xmlns:a="http://schemas.openxmlformats.org/drawingml/2006/main">
+            <a:pPr algn="l">
+              <a:defRPr sz="1575" b="1">
+                <a:solidFill>
+                  <a:srgbClr val="0A1224"/>
+                </a:solidFill>
+                <a:latin typeface="Arial"/>
+                <a:ea typeface="Arial"/>
+                <a:cs typeface="Arial"/>
+              </a:defRPr>
+            </a:pPr>
+            <a:r>
+              <a:t>Use less Palace unless risk justifies more.</a:t>
+            </a:r>
+          </a:p>
+        </p:txBody>
+      </p:sp>
+      <p:sp>
+        <p:nvSpPr>
+          <p:cNvPr id="19" name="s7-bypass">
+            <a:extLst xmlns:a="http://schemas.openxmlformats.org/drawingml/2006/main">
+              <a:ext uri="{FF2B5EF4-FFF2-40B4-BE49-F238E27FC236}">
+                <a16:creationId xmlns:a16="http://schemas.microsoft.com/office/drawing/2014/main" id="{377D3285-C9E2-49CD-8C50-518BEA500CB2}"/>
+              </a:ext>
+            </a:extLst>
+          </p:cNvPr>
+          <p:cNvSpPr>
+            <a:spLocks xmlns:a="http://schemas.openxmlformats.org/drawingml/2006/main" noGrp="1"/>
+          </p:cNvSpPr>
+          <p:nvPr/>
+        </p:nvSpPr>
+        <p:spPr>
+          <a:xfrm xmlns:a="http://schemas.openxmlformats.org/drawingml/2006/main">
+            <a:off x="5429250" y="2743200"/>
+            <a:ext cx="5924550" cy="666750"/>
+          </a:xfrm>
+          <a:prstGeom xmlns:a="http://schemas.openxmlformats.org/drawingml/2006/main" prst="roundRect">
+            <a:avLst>
+              <a:gd name="adj" fmla="val 11429"/>
+            </a:avLst>
+          </a:prstGeom>
+          <a:solidFill xmlns:a="http://schemas.openxmlformats.org/drawingml/2006/main">
+            <a:srgbClr val="EDEFF3"/>
+          </a:solidFill>
+          <a:ln xmlns:a="http://schemas.openxmlformats.org/drawingml/2006/main" w="0">
             <a:solidFill>
-              <a:srgbClr val="B8BCC4"/>
+              <a:srgbClr val="EDEFF3"/>
             </a:solidFill>
             <a:prstDash val="solid"/>
           </a:ln>
         </p:spPr>
-      </p:cxnSp>
-      <p:cxnSp>
-        <p:nvCxnSpPr>
-          <p:cNvPr id="58" name="s7-tools-new-zero"/>
-          <p:cNvCxnSpPr/>
-          <p:nvPr/>
-        </p:nvCxnSpPr>
-        <p:spPr>
-          <a:xfrm xmlns:a="http://schemas.openxmlformats.org/drawingml/2006/main">
-            <a:off x="7334250" y="2343150"/>
-            <a:ext cx="953" cy="457200"/>
-          </a:xfrm>
-          <a:prstGeom xmlns:a="http://schemas.openxmlformats.org/drawingml/2006/main" prst="straightConnector1">
-            <a:avLst/>
-          </a:prstGeom>
-          <a:ln xmlns:a="http://schemas.openxmlformats.org/drawingml/2006/main" w="19050">
+      </p:sp>
+      <p:sp>
+        <p:nvSpPr>
+          <p:cNvPr id="20" name="s7-bypass-k">
+            <a:extLst xmlns:a="http://schemas.openxmlformats.org/drawingml/2006/main">
+              <a:ext uri="{FF2B5EF4-FFF2-40B4-BE49-F238E27FC236}">
+                <a16:creationId xmlns:a16="http://schemas.microsoft.com/office/drawing/2014/main" id="{1AB891D2-BF18-4B6C-8B67-940EDD451A88}"/>
+              </a:ext>
+            </a:extLst>
+          </p:cNvPr>
+          <p:cNvSpPr>
+            <a:spLocks xmlns:a="http://schemas.openxmlformats.org/drawingml/2006/main" noGrp="1"/>
+          </p:cNvSpPr>
+          <p:nvPr/>
+        </p:nvSpPr>
+        <p:spPr>
+          <a:xfrm xmlns:a="http://schemas.openxmlformats.org/drawingml/2006/main">
+            <a:off x="5619750" y="2895600"/>
+            <a:ext cx="1162050" cy="209550"/>
+          </a:xfrm>
+          <a:prstGeom xmlns:a="http://schemas.openxmlformats.org/drawingml/2006/main" prst="rect">
+            <a:avLst/>
+          </a:prstGeom>
+        </p:spPr>
+        <p:txBody>
+          <a:bodyPr xmlns:a="http://schemas.openxmlformats.org/drawingml/2006/main" wrap="square" lIns="0" tIns="0" rIns="0" bIns="0" anchor="t">
+            <a:noAutofit/>
+          </a:bodyPr>
+          <a:lstStyle xmlns:a="http://schemas.openxmlformats.org/drawingml/2006/main"/>
+          <a:p xmlns:a="http://schemas.openxmlformats.org/drawingml/2006/main">
+            <a:pPr algn="l">
+              <a:defRPr sz="1125" b="1">
+                <a:solidFill>
+                  <a:srgbClr val="526071"/>
+                </a:solidFill>
+                <a:latin typeface="Arial"/>
+                <a:ea typeface="Arial"/>
+                <a:cs typeface="Arial"/>
+              </a:defRPr>
+            </a:pPr>
+            <a:r>
+              <a:t>BYPASS</a:t>
+            </a:r>
+          </a:p>
+        </p:txBody>
+      </p:sp>
+      <p:sp>
+        <p:nvSpPr>
+          <p:cNvPr id="21" name="s7-bypass-v">
+            <a:extLst xmlns:a="http://schemas.openxmlformats.org/drawingml/2006/main">
+              <a:ext uri="{FF2B5EF4-FFF2-40B4-BE49-F238E27FC236}">
+                <a16:creationId xmlns:a16="http://schemas.microsoft.com/office/drawing/2014/main" id="{7BACDBA1-F4BD-4D6E-8753-D50772CC550D}"/>
+              </a:ext>
+            </a:extLst>
+          </p:cNvPr>
+          <p:cNvSpPr>
+            <a:spLocks xmlns:a="http://schemas.openxmlformats.org/drawingml/2006/main" noGrp="1"/>
+          </p:cNvSpPr>
+          <p:nvPr/>
+        </p:nvSpPr>
+        <p:spPr>
+          <a:xfrm xmlns:a="http://schemas.openxmlformats.org/drawingml/2006/main">
+            <a:off x="6858000" y="2857500"/>
+            <a:ext cx="4171950" cy="228600"/>
+          </a:xfrm>
+          <a:prstGeom xmlns:a="http://schemas.openxmlformats.org/drawingml/2006/main" prst="rect">
+            <a:avLst/>
+          </a:prstGeom>
+        </p:spPr>
+        <p:txBody>
+          <a:bodyPr xmlns:a="http://schemas.openxmlformats.org/drawingml/2006/main" wrap="square" lIns="0" tIns="0" rIns="0" bIns="0" anchor="t">
+            <a:noAutofit/>
+          </a:bodyPr>
+          <a:lstStyle xmlns:a="http://schemas.openxmlformats.org/drawingml/2006/main"/>
+          <a:p xmlns:a="http://schemas.openxmlformats.org/drawingml/2006/main">
+            <a:pPr algn="l">
+              <a:defRPr sz="1350" b="1">
+                <a:solidFill>
+                  <a:srgbClr val="0A1224"/>
+                </a:solidFill>
+                <a:latin typeface="Arial"/>
+                <a:ea typeface="Arial"/>
+                <a:cs typeface="Arial"/>
+              </a:defRPr>
+            </a:pPr>
+            <a:r>
+              <a:t>one explicit file in a small repo</a:t>
+            </a:r>
+          </a:p>
+        </p:txBody>
+      </p:sp>
+      <p:sp>
+        <p:nvSpPr>
+          <p:cNvPr id="22" name="s7-bypass-d">
+            <a:extLst xmlns:a="http://schemas.openxmlformats.org/drawingml/2006/main">
+              <a:ext uri="{FF2B5EF4-FFF2-40B4-BE49-F238E27FC236}">
+                <a16:creationId xmlns:a16="http://schemas.microsoft.com/office/drawing/2014/main" id="{3E694FC0-CD0B-4941-8E6A-84603A512E74}"/>
+              </a:ext>
+            </a:extLst>
+          </p:cNvPr>
+          <p:cNvSpPr>
+            <a:spLocks xmlns:a="http://schemas.openxmlformats.org/drawingml/2006/main" noGrp="1"/>
+          </p:cNvSpPr>
+          <p:nvPr/>
+        </p:nvSpPr>
+        <p:spPr>
+          <a:xfrm xmlns:a="http://schemas.openxmlformats.org/drawingml/2006/main">
+            <a:off x="6858000" y="3133725"/>
+            <a:ext cx="4171950" cy="190500"/>
+          </a:xfrm>
+          <a:prstGeom xmlns:a="http://schemas.openxmlformats.org/drawingml/2006/main" prst="rect">
+            <a:avLst/>
+          </a:prstGeom>
+        </p:spPr>
+        <p:txBody>
+          <a:bodyPr xmlns:a="http://schemas.openxmlformats.org/drawingml/2006/main" wrap="square" lIns="0" tIns="0" rIns="0" bIns="0" anchor="t">
+            <a:noAutofit/>
+          </a:bodyPr>
+          <a:lstStyle xmlns:a="http://schemas.openxmlformats.org/drawingml/2006/main"/>
+          <a:p xmlns:a="http://schemas.openxmlformats.org/drawingml/2006/main">
+            <a:pPr algn="l">
+              <a:defRPr sz="1050" b="0">
+                <a:solidFill>
+                  <a:srgbClr val="526071"/>
+                </a:solidFill>
+                <a:latin typeface="Arial"/>
+                <a:ea typeface="Arial"/>
+                <a:cs typeface="Arial"/>
+              </a:defRPr>
+            </a:pPr>
+            <a:r>
+              <a:t>no packed source; one decision call remains</a:t>
+            </a:r>
+          </a:p>
+        </p:txBody>
+      </p:sp>
+      <p:sp>
+        <p:nvSpPr>
+          <p:cNvPr id="23" name="s7-lite">
+            <a:extLst xmlns:a="http://schemas.openxmlformats.org/drawingml/2006/main">
+              <a:ext uri="{FF2B5EF4-FFF2-40B4-BE49-F238E27FC236}">
+                <a16:creationId xmlns:a16="http://schemas.microsoft.com/office/drawing/2014/main" id="{D0B31634-BA94-4520-A610-8E81B222A18B}"/>
+              </a:ext>
+            </a:extLst>
+          </p:cNvPr>
+          <p:cNvSpPr>
+            <a:spLocks xmlns:a="http://schemas.openxmlformats.org/drawingml/2006/main" noGrp="1"/>
+          </p:cNvSpPr>
+          <p:nvPr/>
+        </p:nvSpPr>
+        <p:spPr>
+          <a:xfrm xmlns:a="http://schemas.openxmlformats.org/drawingml/2006/main">
+            <a:off x="5429250" y="3505200"/>
+            <a:ext cx="5924550" cy="666750"/>
+          </a:xfrm>
+          <a:prstGeom xmlns:a="http://schemas.openxmlformats.org/drawingml/2006/main" prst="roundRect">
+            <a:avLst>
+              <a:gd name="adj" fmla="val 11429"/>
+            </a:avLst>
+          </a:prstGeom>
+          <a:solidFill xmlns:a="http://schemas.openxmlformats.org/drawingml/2006/main">
+            <a:srgbClr val="E8F7FB"/>
+          </a:solidFill>
+          <a:ln xmlns:a="http://schemas.openxmlformats.org/drawingml/2006/main" w="0">
             <a:solidFill>
-              <a:srgbClr val="0A1224"/>
+              <a:srgbClr val="E8F7FB"/>
             </a:solidFill>
             <a:prstDash val="solid"/>
           </a:ln>
         </p:spPr>
-      </p:cxnSp>
-      <p:sp>
-        <p:nvSpPr>
-          <p:cNvPr id="12" name="s7-tools-new-zero-label">
-            <a:extLst xmlns:a="http://schemas.openxmlformats.org/drawingml/2006/main">
-              <a:ext uri="{FF2B5EF4-FFF2-40B4-BE49-F238E27FC236}">
-                <a16:creationId xmlns:a16="http://schemas.microsoft.com/office/drawing/2014/main" id="{62AD4863-BA9E-4733-B2B9-9A075256863F}"/>
-              </a:ext>
-            </a:extLst>
-          </p:cNvPr>
-          <p:cNvSpPr>
-            <a:spLocks xmlns:a="http://schemas.openxmlformats.org/drawingml/2006/main" noGrp="1"/>
-          </p:cNvSpPr>
-          <p:nvPr/>
-        </p:nvSpPr>
-        <p:spPr>
-          <a:xfrm xmlns:a="http://schemas.openxmlformats.org/drawingml/2006/main">
-            <a:off x="7239000" y="2705100"/>
-            <a:ext cx="190500" cy="171450"/>
-          </a:xfrm>
-          <a:prstGeom xmlns:a="http://schemas.openxmlformats.org/drawingml/2006/main" prst="rect">
-            <a:avLst/>
-          </a:prstGeom>
-        </p:spPr>
-        <p:txBody>
-          <a:bodyPr xmlns:a="http://schemas.openxmlformats.org/drawingml/2006/main" wrap="square" lIns="0" tIns="0" rIns="0" bIns="0" anchor="t">
-            <a:noAutofit/>
-          </a:bodyPr>
-          <a:lstStyle xmlns:a="http://schemas.openxmlformats.org/drawingml/2006/main"/>
-          <a:p xmlns:a="http://schemas.openxmlformats.org/drawingml/2006/main">
-            <a:pPr algn="ctr">
-              <a:defRPr sz="900" b="0">
+      </p:sp>
+      <p:sp>
+        <p:nvSpPr>
+          <p:cNvPr id="24" name="s7-lite-k">
+            <a:extLst xmlns:a="http://schemas.openxmlformats.org/drawingml/2006/main">
+              <a:ext uri="{FF2B5EF4-FFF2-40B4-BE49-F238E27FC236}">
+                <a16:creationId xmlns:a16="http://schemas.microsoft.com/office/drawing/2014/main" id="{25DC19EC-01D6-4BC5-8C16-4746138D7DF5}"/>
+              </a:ext>
+            </a:extLst>
+          </p:cNvPr>
+          <p:cNvSpPr>
+            <a:spLocks xmlns:a="http://schemas.openxmlformats.org/drawingml/2006/main" noGrp="1"/>
+          </p:cNvSpPr>
+          <p:nvPr/>
+        </p:nvSpPr>
+        <p:spPr>
+          <a:xfrm xmlns:a="http://schemas.openxmlformats.org/drawingml/2006/main">
+            <a:off x="5619750" y="3657600"/>
+            <a:ext cx="1162050" cy="209550"/>
+          </a:xfrm>
+          <a:prstGeom xmlns:a="http://schemas.openxmlformats.org/drawingml/2006/main" prst="rect">
+            <a:avLst/>
+          </a:prstGeom>
+        </p:spPr>
+        <p:txBody>
+          <a:bodyPr xmlns:a="http://schemas.openxmlformats.org/drawingml/2006/main" wrap="square" lIns="0" tIns="0" rIns="0" bIns="0" anchor="t">
+            <a:noAutofit/>
+          </a:bodyPr>
+          <a:lstStyle xmlns:a="http://schemas.openxmlformats.org/drawingml/2006/main"/>
+          <a:p xmlns:a="http://schemas.openxmlformats.org/drawingml/2006/main">
+            <a:pPr algn="l">
+              <a:defRPr sz="1125" b="1">
+                <a:solidFill>
+                  <a:srgbClr val="13B7D5"/>
+                </a:solidFill>
+                <a:latin typeface="Arial"/>
+                <a:ea typeface="Arial"/>
+                <a:cs typeface="Arial"/>
+              </a:defRPr>
+            </a:pPr>
+            <a:r>
+              <a:t>ROUTE-LITE</a:t>
+            </a:r>
+          </a:p>
+        </p:txBody>
+      </p:sp>
+      <p:sp>
+        <p:nvSpPr>
+          <p:cNvPr id="25" name="s7-lite-v">
+            <a:extLst xmlns:a="http://schemas.openxmlformats.org/drawingml/2006/main">
+              <a:ext uri="{FF2B5EF4-FFF2-40B4-BE49-F238E27FC236}">
+                <a16:creationId xmlns:a16="http://schemas.microsoft.com/office/drawing/2014/main" id="{034531F7-1AA4-48B3-BD6D-5CC0C4D13DB9}"/>
+              </a:ext>
+            </a:extLst>
+          </p:cNvPr>
+          <p:cNvSpPr>
+            <a:spLocks xmlns:a="http://schemas.openxmlformats.org/drawingml/2006/main" noGrp="1"/>
+          </p:cNvSpPr>
+          <p:nvPr/>
+        </p:nvSpPr>
+        <p:spPr>
+          <a:xfrm xmlns:a="http://schemas.openxmlformats.org/drawingml/2006/main">
+            <a:off x="6858000" y="3619500"/>
+            <a:ext cx="4171950" cy="228600"/>
+          </a:xfrm>
+          <a:prstGeom xmlns:a="http://schemas.openxmlformats.org/drawingml/2006/main" prst="rect">
+            <a:avLst/>
+          </a:prstGeom>
+        </p:spPr>
+        <p:txBody>
+          <a:bodyPr xmlns:a="http://schemas.openxmlformats.org/drawingml/2006/main" wrap="square" lIns="0" tIns="0" rIns="0" bIns="0" anchor="t">
+            <a:noAutofit/>
+          </a:bodyPr>
+          <a:lstStyle xmlns:a="http://schemas.openxmlformats.org/drawingml/2006/main"/>
+          <a:p xmlns:a="http://schemas.openxmlformats.org/drawingml/2006/main">
+            <a:pPr algn="l">
+              <a:defRPr sz="1350" b="1">
+                <a:solidFill>
+                  <a:srgbClr val="0A1224"/>
+                </a:solidFill>
+                <a:latin typeface="Arial"/>
+                <a:ea typeface="Arial"/>
+                <a:cs typeface="Arial"/>
+              </a:defRPr>
+            </a:pPr>
+            <a:r>
+              <a:t>bounded task + focused route</a:t>
+            </a:r>
+          </a:p>
+        </p:txBody>
+      </p:sp>
+      <p:sp>
+        <p:nvSpPr>
+          <p:cNvPr id="26" name="s7-lite-d">
+            <a:extLst xmlns:a="http://schemas.openxmlformats.org/drawingml/2006/main">
+              <a:ext uri="{FF2B5EF4-FFF2-40B4-BE49-F238E27FC236}">
+                <a16:creationId xmlns:a16="http://schemas.microsoft.com/office/drawing/2014/main" id="{94A9DA78-6F8B-46E8-9B80-F1913FCAC36F}"/>
+              </a:ext>
+            </a:extLst>
+          </p:cNvPr>
+          <p:cNvSpPr>
+            <a:spLocks xmlns:a="http://schemas.openxmlformats.org/drawingml/2006/main" noGrp="1"/>
+          </p:cNvSpPr>
+          <p:nvPr/>
+        </p:nvSpPr>
+        <p:spPr>
+          <a:xfrm xmlns:a="http://schemas.openxmlformats.org/drawingml/2006/main">
+            <a:off x="6858000" y="3895725"/>
+            <a:ext cx="4171950" cy="190500"/>
+          </a:xfrm>
+          <a:prstGeom xmlns:a="http://schemas.openxmlformats.org/drawingml/2006/main" prst="rect">
+            <a:avLst/>
+          </a:prstGeom>
+        </p:spPr>
+        <p:txBody>
+          <a:bodyPr xmlns:a="http://schemas.openxmlformats.org/drawingml/2006/main" wrap="square" lIns="0" tIns="0" rIns="0" bIns="0" anchor="t">
+            <a:noAutofit/>
+          </a:bodyPr>
+          <a:lstStyle xmlns:a="http://schemas.openxmlformats.org/drawingml/2006/main"/>
+          <a:p xmlns:a="http://schemas.openxmlformats.org/drawingml/2006/main">
+            <a:pPr algn="l">
+              <a:defRPr sz="1050" b="0">
                 <a:solidFill>
                   <a:srgbClr val="526071"/>
                 </a:solidFill>
@@ -12371,227 +12999,320 @@
               </a:defRPr>
             </a:pPr>
             <a:r>
-              <a:t>0</a:t>
-            </a:r>
-          </a:p>
-        </p:txBody>
-      </p:sp>
-      <p:cxnSp>
-        <p:nvCxnSpPr>
-          <p:cNvPr id="60" name="s7-tools-new-interval"/>
-          <p:cNvCxnSpPr/>
-          <p:nvPr/>
-        </p:nvCxnSpPr>
-        <p:spPr>
-          <a:xfrm xmlns:a="http://schemas.openxmlformats.org/drawingml/2006/main">
-            <a:off x="8184696" y="2571750"/>
-            <a:ext cx="1360714" cy="953"/>
-          </a:xfrm>
-          <a:prstGeom xmlns:a="http://schemas.openxmlformats.org/drawingml/2006/main" prst="straightConnector1">
-            <a:avLst/>
-          </a:prstGeom>
-          <a:ln xmlns:a="http://schemas.openxmlformats.org/drawingml/2006/main" w="57150">
+              <a:t>primary route only</a:t>
+            </a:r>
+          </a:p>
+        </p:txBody>
+      </p:sp>
+      <p:sp>
+        <p:nvSpPr>
+          <p:cNvPr id="27" name="s7-full">
+            <a:extLst xmlns:a="http://schemas.openxmlformats.org/drawingml/2006/main">
+              <a:ext uri="{FF2B5EF4-FFF2-40B4-BE49-F238E27FC236}">
+                <a16:creationId xmlns:a16="http://schemas.microsoft.com/office/drawing/2014/main" id="{7E9F3C5B-D207-488E-B4F6-D228CC207DB7}"/>
+              </a:ext>
+            </a:extLst>
+          </p:cNvPr>
+          <p:cNvSpPr>
+            <a:spLocks xmlns:a="http://schemas.openxmlformats.org/drawingml/2006/main" noGrp="1"/>
+          </p:cNvSpPr>
+          <p:nvPr/>
+        </p:nvSpPr>
+        <p:spPr>
+          <a:xfrm xmlns:a="http://schemas.openxmlformats.org/drawingml/2006/main">
+            <a:off x="5429250" y="4267200"/>
+            <a:ext cx="5924550" cy="838200"/>
+          </a:xfrm>
+          <a:prstGeom xmlns:a="http://schemas.openxmlformats.org/drawingml/2006/main" prst="roundRect">
+            <a:avLst>
+              <a:gd name="adj" fmla="val 9091"/>
+            </a:avLst>
+          </a:prstGeom>
+          <a:solidFill xmlns:a="http://schemas.openxmlformats.org/drawingml/2006/main">
+            <a:srgbClr val="E9F7F2"/>
+          </a:solidFill>
+          <a:ln xmlns:a="http://schemas.openxmlformats.org/drawingml/2006/main" w="0">
             <a:solidFill>
-              <a:srgbClr val="D4515D"/>
+              <a:srgbClr val="E9F7F2"/>
             </a:solidFill>
             <a:prstDash val="solid"/>
           </a:ln>
         </p:spPr>
-      </p:cxnSp>
-      <p:cxnSp>
-        <p:nvCxnSpPr>
-          <p:cNvPr id="61" name="s7-tools-new-low-cap"/>
-          <p:cNvCxnSpPr/>
-          <p:nvPr/>
-        </p:nvCxnSpPr>
-        <p:spPr>
-          <a:xfrm xmlns:a="http://schemas.openxmlformats.org/drawingml/2006/main">
-            <a:off x="8184696" y="2486025"/>
-            <a:ext cx="953" cy="171450"/>
-          </a:xfrm>
-          <a:prstGeom xmlns:a="http://schemas.openxmlformats.org/drawingml/2006/main" prst="straightConnector1">
-            <a:avLst/>
-          </a:prstGeom>
-          <a:ln xmlns:a="http://schemas.openxmlformats.org/drawingml/2006/main" w="28575">
+      </p:sp>
+      <p:sp>
+        <p:nvSpPr>
+          <p:cNvPr id="28" name="s7-full-k">
+            <a:extLst xmlns:a="http://schemas.openxmlformats.org/drawingml/2006/main">
+              <a:ext uri="{FF2B5EF4-FFF2-40B4-BE49-F238E27FC236}">
+                <a16:creationId xmlns:a16="http://schemas.microsoft.com/office/drawing/2014/main" id="{BED98981-BFBA-40AA-AD3C-898B704BE16F}"/>
+              </a:ext>
+            </a:extLst>
+          </p:cNvPr>
+          <p:cNvSpPr>
+            <a:spLocks xmlns:a="http://schemas.openxmlformats.org/drawingml/2006/main" noGrp="1"/>
+          </p:cNvSpPr>
+          <p:nvPr/>
+        </p:nvSpPr>
+        <p:spPr>
+          <a:xfrm xmlns:a="http://schemas.openxmlformats.org/drawingml/2006/main">
+            <a:off x="5619750" y="4438650"/>
+            <a:ext cx="1333500" cy="209550"/>
+          </a:xfrm>
+          <a:prstGeom xmlns:a="http://schemas.openxmlformats.org/drawingml/2006/main" prst="rect">
+            <a:avLst/>
+          </a:prstGeom>
+        </p:spPr>
+        <p:txBody>
+          <a:bodyPr xmlns:a="http://schemas.openxmlformats.org/drawingml/2006/main" wrap="square" lIns="0" tIns="0" rIns="0" bIns="0" anchor="t">
+            <a:noAutofit/>
+          </a:bodyPr>
+          <a:lstStyle xmlns:a="http://schemas.openxmlformats.org/drawingml/2006/main"/>
+          <a:p xmlns:a="http://schemas.openxmlformats.org/drawingml/2006/main">
+            <a:pPr algn="l">
+              <a:defRPr sz="1125" b="1">
+                <a:solidFill>
+                  <a:srgbClr val="15A777"/>
+                </a:solidFill>
+                <a:latin typeface="Arial"/>
+                <a:ea typeface="Arial"/>
+                <a:cs typeface="Arial"/>
+              </a:defRPr>
+            </a:pPr>
+            <a:r>
+              <a:t>FULL / GUARDED</a:t>
+            </a:r>
+          </a:p>
+        </p:txBody>
+      </p:sp>
+      <p:sp>
+        <p:nvSpPr>
+          <p:cNvPr id="29" name="s7-full-v">
+            <a:extLst xmlns:a="http://schemas.openxmlformats.org/drawingml/2006/main">
+              <a:ext uri="{FF2B5EF4-FFF2-40B4-BE49-F238E27FC236}">
+                <a16:creationId xmlns:a16="http://schemas.microsoft.com/office/drawing/2014/main" id="{BE5C2050-9879-45A7-8871-445AF12E4D03}"/>
+              </a:ext>
+            </a:extLst>
+          </p:cNvPr>
+          <p:cNvSpPr>
+            <a:spLocks xmlns:a="http://schemas.openxmlformats.org/drawingml/2006/main" noGrp="1"/>
+          </p:cNvSpPr>
+          <p:nvPr/>
+        </p:nvSpPr>
+        <p:spPr>
+          <a:xfrm xmlns:a="http://schemas.openxmlformats.org/drawingml/2006/main">
+            <a:off x="7048500" y="4400550"/>
+            <a:ext cx="3981450" cy="228600"/>
+          </a:xfrm>
+          <a:prstGeom xmlns:a="http://schemas.openxmlformats.org/drawingml/2006/main" prst="rect">
+            <a:avLst/>
+          </a:prstGeom>
+        </p:spPr>
+        <p:txBody>
+          <a:bodyPr xmlns:a="http://schemas.openxmlformats.org/drawingml/2006/main" wrap="square" lIns="0" tIns="0" rIns="0" bIns="0" anchor="t">
+            <a:noAutofit/>
+          </a:bodyPr>
+          <a:lstStyle xmlns:a="http://schemas.openxmlformats.org/drawingml/2006/main"/>
+          <a:p xmlns:a="http://schemas.openxmlformats.org/drawingml/2006/main">
+            <a:pPr algn="l">
+              <a:defRPr sz="1350" b="1">
+                <a:solidFill>
+                  <a:srgbClr val="0A1224"/>
+                </a:solidFill>
+                <a:latin typeface="Arial"/>
+                <a:ea typeface="Arial"/>
+                <a:cs typeface="Arial"/>
+              </a:defRPr>
+            </a:pPr>
+            <a:r>
+              <a:t>cross-stack, contract, or memory risk</a:t>
+            </a:r>
+          </a:p>
+        </p:txBody>
+      </p:sp>
+      <p:sp>
+        <p:nvSpPr>
+          <p:cNvPr id="30" name="s7-full-d">
+            <a:extLst xmlns:a="http://schemas.openxmlformats.org/drawingml/2006/main">
+              <a:ext uri="{FF2B5EF4-FFF2-40B4-BE49-F238E27FC236}">
+                <a16:creationId xmlns:a16="http://schemas.microsoft.com/office/drawing/2014/main" id="{D7635D5A-5271-41CB-9BC7-9BBC5976C72F}"/>
+              </a:ext>
+            </a:extLst>
+          </p:cNvPr>
+          <p:cNvSpPr>
+            <a:spLocks xmlns:a="http://schemas.openxmlformats.org/drawingml/2006/main" noGrp="1"/>
+          </p:cNvSpPr>
+          <p:nvPr/>
+        </p:nvSpPr>
+        <p:spPr>
+          <a:xfrm xmlns:a="http://schemas.openxmlformats.org/drawingml/2006/main">
+            <a:off x="7048500" y="4695825"/>
+            <a:ext cx="3981450" cy="209550"/>
+          </a:xfrm>
+          <a:prstGeom xmlns:a="http://schemas.openxmlformats.org/drawingml/2006/main" prst="rect">
+            <a:avLst/>
+          </a:prstGeom>
+        </p:spPr>
+        <p:txBody>
+          <a:bodyPr xmlns:a="http://schemas.openxmlformats.org/drawingml/2006/main" wrap="square" lIns="0" tIns="0" rIns="0" bIns="0" anchor="t">
+            <a:noAutofit/>
+          </a:bodyPr>
+          <a:lstStyle xmlns:a="http://schemas.openxmlformats.org/drawingml/2006/main"/>
+          <a:p xmlns:a="http://schemas.openxmlformats.org/drawingml/2006/main">
+            <a:pPr algn="l">
+              <a:defRPr sz="1050" b="0">
+                <a:solidFill>
+                  <a:srgbClr val="526071"/>
+                </a:solidFill>
+                <a:latin typeface="Arial"/>
+                <a:ea typeface="Arial"/>
+                <a:cs typeface="Arial"/>
+              </a:defRPr>
+            </a:pPr>
+            <a:r>
+              <a:t>source + scoped memory + guardrails</a:t>
+            </a:r>
+          </a:p>
+        </p:txBody>
+      </p:sp>
+      <p:sp>
+        <p:nvSpPr>
+          <p:cNvPr id="31" name="s7-next">
+            <a:extLst xmlns:a="http://schemas.openxmlformats.org/drawingml/2006/main">
+              <a:ext uri="{FF2B5EF4-FFF2-40B4-BE49-F238E27FC236}">
+                <a16:creationId xmlns:a16="http://schemas.microsoft.com/office/drawing/2014/main" id="{51A3D722-6235-4A8C-8FC7-6DF7B2643FF6}"/>
+              </a:ext>
+            </a:extLst>
+          </p:cNvPr>
+          <p:cNvSpPr>
+            <a:spLocks xmlns:a="http://schemas.openxmlformats.org/drawingml/2006/main" noGrp="1"/>
+          </p:cNvSpPr>
+          <p:nvPr/>
+        </p:nvSpPr>
+        <p:spPr>
+          <a:xfrm xmlns:a="http://schemas.openxmlformats.org/drawingml/2006/main">
+            <a:off x="552450" y="5524500"/>
+            <a:ext cx="11087100" cy="533400"/>
+          </a:xfrm>
+          <a:prstGeom xmlns:a="http://schemas.openxmlformats.org/drawingml/2006/main" prst="roundRect">
+            <a:avLst>
+              <a:gd name="adj" fmla="val 14286"/>
+            </a:avLst>
+          </a:prstGeom>
+          <a:solidFill xmlns:a="http://schemas.openxmlformats.org/drawingml/2006/main">
+            <a:srgbClr val="061B3D"/>
+          </a:solidFill>
+          <a:ln xmlns:a="http://schemas.openxmlformats.org/drawingml/2006/main" w="0">
             <a:solidFill>
-              <a:srgbClr val="D4515D"/>
+              <a:srgbClr val="061B3D"/>
             </a:solidFill>
             <a:prstDash val="solid"/>
           </a:ln>
         </p:spPr>
-      </p:cxnSp>
+      </p:sp>
+      <p:sp>
+        <p:nvSpPr>
+          <p:cNvPr id="32" name="s7-next-k">
+            <a:extLst xmlns:a="http://schemas.openxmlformats.org/drawingml/2006/main">
+              <a:ext uri="{FF2B5EF4-FFF2-40B4-BE49-F238E27FC236}">
+                <a16:creationId xmlns:a16="http://schemas.microsoft.com/office/drawing/2014/main" id="{27774AB2-3B90-48A1-8061-3C3632A8A3CE}"/>
+              </a:ext>
+            </a:extLst>
+          </p:cNvPr>
+          <p:cNvSpPr>
+            <a:spLocks xmlns:a="http://schemas.openxmlformats.org/drawingml/2006/main" noGrp="1"/>
+          </p:cNvSpPr>
+          <p:nvPr/>
+        </p:nvSpPr>
+        <p:spPr>
+          <a:xfrm xmlns:a="http://schemas.openxmlformats.org/drawingml/2006/main">
+            <a:off x="781050" y="5676900"/>
+            <a:ext cx="2095500" cy="209550"/>
+          </a:xfrm>
+          <a:prstGeom xmlns:a="http://schemas.openxmlformats.org/drawingml/2006/main" prst="rect">
+            <a:avLst/>
+          </a:prstGeom>
+        </p:spPr>
+        <p:txBody>
+          <a:bodyPr xmlns:a="http://schemas.openxmlformats.org/drawingml/2006/main" wrap="square" lIns="0" tIns="0" rIns="0" bIns="0" anchor="t">
+            <a:noAutofit/>
+          </a:bodyPr>
+          <a:lstStyle xmlns:a="http://schemas.openxmlformats.org/drawingml/2006/main"/>
+          <a:p xmlns:a="http://schemas.openxmlformats.org/drawingml/2006/main">
+            <a:pPr algn="l">
+              <a:defRPr sz="975" b="1">
+                <a:solidFill>
+                  <a:srgbClr val="13B7D5"/>
+                </a:solidFill>
+                <a:latin typeface="Arial"/>
+                <a:ea typeface="Arial"/>
+                <a:cs typeface="Arial"/>
+              </a:defRPr>
+            </a:pPr>
+            <a:r>
+              <a:t>NEXT v0.2.3 TEST</a:t>
+            </a:r>
+          </a:p>
+        </p:txBody>
+      </p:sp>
+      <p:sp>
+        <p:nvSpPr>
+          <p:cNvPr id="33" name="s7-next-v">
+            <a:extLst xmlns:a="http://schemas.openxmlformats.org/drawingml/2006/main">
+              <a:ext uri="{FF2B5EF4-FFF2-40B4-BE49-F238E27FC236}">
+                <a16:creationId xmlns:a16="http://schemas.microsoft.com/office/drawing/2014/main" id="{F096F8B7-8A40-4CAC-9CE2-8349396438D1}"/>
+              </a:ext>
+            </a:extLst>
+          </p:cNvPr>
+          <p:cNvSpPr>
+            <a:spLocks xmlns:a="http://schemas.openxmlformats.org/drawingml/2006/main" noGrp="1"/>
+          </p:cNvSpPr>
+          <p:nvPr/>
+        </p:nvSpPr>
+        <p:spPr>
+          <a:xfrm xmlns:a="http://schemas.openxmlformats.org/drawingml/2006/main">
+            <a:off x="2857500" y="5657850"/>
+            <a:ext cx="8477250" cy="247650"/>
+          </a:xfrm>
+          <a:prstGeom xmlns:a="http://schemas.openxmlformats.org/drawingml/2006/main" prst="rect">
+            <a:avLst/>
+          </a:prstGeom>
+        </p:spPr>
+        <p:txBody>
+          <a:bodyPr xmlns:a="http://schemas.openxmlformats.org/drawingml/2006/main" wrap="square" lIns="0" tIns="0" rIns="0" bIns="0" anchor="t">
+            <a:noAutofit/>
+          </a:bodyPr>
+          <a:lstStyle xmlns:a="http://schemas.openxmlformats.org/drawingml/2006/main"/>
+          <a:p xmlns:a="http://schemas.openxmlformats.org/drawingml/2006/main">
+            <a:pPr algn="l">
+              <a:defRPr sz="1200" b="0">
+                <a:solidFill>
+                  <a:srgbClr val="FFFFFF"/>
+                </a:solidFill>
+                <a:latin typeface="Arial"/>
+                <a:ea typeface="Arial"/>
+                <a:cs typeface="Arial"/>
+              </a:defRPr>
+            </a:pPr>
+            <a:r>
+              <a:t>larger real repos | hidden memory-dependent traps | repeated models, machines, and long-lived sessions</a:t>
+            </a:r>
+          </a:p>
+        </p:txBody>
+      </p:sp>
       <p:cxnSp>
         <p:nvCxnSpPr>
-          <p:cNvPr id="62" name="s7-tools-new-high-cap"/>
+          <p:cNvPr id="70" name="footer-rule-7"/>
           <p:cNvCxnSpPr/>
           <p:nvPr/>
         </p:nvCxnSpPr>
         <p:spPr>
           <a:xfrm xmlns:a="http://schemas.openxmlformats.org/drawingml/2006/main">
-            <a:off x="9545411" y="2486025"/>
-            <a:ext cx="953" cy="171450"/>
+            <a:off x="400050" y="6162675"/>
+            <a:ext cx="11391900" cy="953"/>
           </a:xfrm>
           <a:prstGeom xmlns:a="http://schemas.openxmlformats.org/drawingml/2006/main" prst="straightConnector1">
             <a:avLst/>
           </a:prstGeom>
-          <a:ln xmlns:a="http://schemas.openxmlformats.org/drawingml/2006/main" w="28575">
-            <a:solidFill>
-              <a:srgbClr val="D4515D"/>
-            </a:solidFill>
-            <a:prstDash val="solid"/>
-          </a:ln>
-        </p:spPr>
-      </p:cxnSp>
-      <p:sp>
-        <p:nvSpPr>
-          <p:cNvPr id="16" name="s7-tools-new-median">
-            <a:extLst xmlns:a="http://schemas.openxmlformats.org/drawingml/2006/main">
-              <a:ext uri="{FF2B5EF4-FFF2-40B4-BE49-F238E27FC236}">
-                <a16:creationId xmlns:a16="http://schemas.microsoft.com/office/drawing/2014/main" id="{64355327-ABDB-4E4D-B0BC-6DE2A285D841}"/>
-              </a:ext>
-            </a:extLst>
-          </p:cNvPr>
-          <p:cNvSpPr>
-            <a:spLocks xmlns:a="http://schemas.openxmlformats.org/drawingml/2006/main" noGrp="1"/>
-          </p:cNvSpPr>
-          <p:nvPr/>
-        </p:nvSpPr>
-        <p:spPr>
-          <a:xfrm xmlns:a="http://schemas.openxmlformats.org/drawingml/2006/main">
-            <a:off x="8798379" y="2505075"/>
-            <a:ext cx="133350" cy="133350"/>
-          </a:xfrm>
-          <a:prstGeom xmlns:a="http://schemas.openxmlformats.org/drawingml/2006/main" prst="ellipse">
-            <a:avLst/>
-          </a:prstGeom>
-          <a:solidFill xmlns:a="http://schemas.openxmlformats.org/drawingml/2006/main">
-            <a:srgbClr val="D4515D"/>
-          </a:solidFill>
-          <a:ln xmlns:a="http://schemas.openxmlformats.org/drawingml/2006/main" w="0">
-            <a:solidFill>
-              <a:srgbClr val="D4515D"/>
-            </a:solidFill>
-            <a:prstDash val="solid"/>
-          </a:ln>
-        </p:spPr>
-      </p:sp>
-      <p:sp>
-        <p:nvSpPr>
-          <p:cNvPr id="17" name="s7-tools-new-status">
-            <a:extLst xmlns:a="http://schemas.openxmlformats.org/drawingml/2006/main">
-              <a:ext uri="{FF2B5EF4-FFF2-40B4-BE49-F238E27FC236}">
-                <a16:creationId xmlns:a16="http://schemas.microsoft.com/office/drawing/2014/main" id="{C31CB4F8-2FCC-4C37-A0B2-F46F27282D25}"/>
-              </a:ext>
-            </a:extLst>
-          </p:cNvPr>
-          <p:cNvSpPr>
-            <a:spLocks xmlns:a="http://schemas.openxmlformats.org/drawingml/2006/main" noGrp="1"/>
-          </p:cNvSpPr>
-          <p:nvPr/>
-        </p:nvSpPr>
-        <p:spPr>
-          <a:xfrm xmlns:a="http://schemas.openxmlformats.org/drawingml/2006/main">
-            <a:off x="9906000" y="2105025"/>
-            <a:ext cx="1466850" cy="209550"/>
-          </a:xfrm>
-          <a:prstGeom xmlns:a="http://schemas.openxmlformats.org/drawingml/2006/main" prst="rect">
-            <a:avLst/>
-          </a:prstGeom>
-        </p:spPr>
-        <p:txBody>
-          <a:bodyPr xmlns:a="http://schemas.openxmlformats.org/drawingml/2006/main" wrap="square" lIns="0" tIns="0" rIns="0" bIns="0" anchor="t">
-            <a:noAutofit/>
-          </a:bodyPr>
-          <a:lstStyle xmlns:a="http://schemas.openxmlformats.org/drawingml/2006/main"/>
-          <a:p xmlns:a="http://schemas.openxmlformats.org/drawingml/2006/main">
-            <a:pPr algn="r">
-              <a:defRPr sz="1050" b="1">
-                <a:solidFill>
-                  <a:srgbClr val="D4515D"/>
-                </a:solidFill>
-                <a:latin typeface="Arial"/>
-                <a:ea typeface="Arial"/>
-                <a:cs typeface="Arial"/>
-              </a:defRPr>
-            </a:pPr>
-            <a:r>
-              <a:t>SUPPORTED</a:t>
-            </a:r>
-          </a:p>
-        </p:txBody>
-      </p:sp>
-      <p:sp>
-        <p:nvSpPr>
-          <p:cNvPr id="18" name="s7-tools-new-interpretation">
-            <a:extLst xmlns:a="http://schemas.openxmlformats.org/drawingml/2006/main">
-              <a:ext uri="{FF2B5EF4-FFF2-40B4-BE49-F238E27FC236}">
-                <a16:creationId xmlns:a16="http://schemas.microsoft.com/office/drawing/2014/main" id="{42C489A4-E713-41A1-8206-1091450F4F42}"/>
-              </a:ext>
-            </a:extLst>
-          </p:cNvPr>
-          <p:cNvSpPr>
-            <a:spLocks xmlns:a="http://schemas.openxmlformats.org/drawingml/2006/main" noGrp="1"/>
-          </p:cNvSpPr>
-          <p:nvPr/>
-        </p:nvSpPr>
-        <p:spPr>
-          <a:xfrm xmlns:a="http://schemas.openxmlformats.org/drawingml/2006/main">
-            <a:off x="9906000" y="2371725"/>
-            <a:ext cx="1466850" cy="400050"/>
-          </a:xfrm>
-          <a:prstGeom xmlns:a="http://schemas.openxmlformats.org/drawingml/2006/main" prst="rect">
-            <a:avLst/>
-          </a:prstGeom>
-        </p:spPr>
-        <p:txBody>
-          <a:bodyPr xmlns:a="http://schemas.openxmlformats.org/drawingml/2006/main" wrap="square" lIns="0" tIns="0" rIns="0" bIns="0" anchor="t">
-            <a:noAutofit/>
-          </a:bodyPr>
-          <a:lstStyle xmlns:a="http://schemas.openxmlformats.org/drawingml/2006/main"/>
-          <a:p xmlns:a="http://schemas.openxmlformats.org/drawingml/2006/main">
-            <a:pPr algn="r">
-              <a:defRPr sz="1125" b="0">
-                <a:solidFill>
-                  <a:srgbClr val="526071"/>
-                </a:solidFill>
-                <a:latin typeface="Arial"/>
-                <a:ea typeface="Arial"/>
-                <a:cs typeface="Arial"/>
-              </a:defRPr>
-            </a:pPr>
-            <a:r>
-              <a:t>routing overhead</a:t>
-            </a:r>
-          </a:p>
-        </p:txBody>
-      </p:sp>
-      <p:sp>
-        <p:nvSpPr>
-          <p:cNvPr id="19" name="s7-tokens-new-panel">
-            <a:extLst xmlns:a="http://schemas.openxmlformats.org/drawingml/2006/main">
-              <a:ext uri="{FF2B5EF4-FFF2-40B4-BE49-F238E27FC236}">
-                <a16:creationId xmlns:a16="http://schemas.microsoft.com/office/drawing/2014/main" id="{B8594362-12AC-439A-97D0-22EE881C1BEF}"/>
-              </a:ext>
-            </a:extLst>
-          </p:cNvPr>
-          <p:cNvSpPr>
-            <a:spLocks xmlns:a="http://schemas.openxmlformats.org/drawingml/2006/main" noGrp="1"/>
-          </p:cNvSpPr>
-          <p:nvPr/>
-        </p:nvSpPr>
-        <p:spPr>
-          <a:xfrm xmlns:a="http://schemas.openxmlformats.org/drawingml/2006/main">
-            <a:off x="552450" y="3143250"/>
-            <a:ext cx="11087100" cy="1066800"/>
-          </a:xfrm>
-          <a:prstGeom xmlns:a="http://schemas.openxmlformats.org/drawingml/2006/main" prst="roundRect">
-            <a:avLst>
-              <a:gd name="adj" fmla="val 7143"/>
-            </a:avLst>
-          </a:prstGeom>
-          <a:solidFill xmlns:a="http://schemas.openxmlformats.org/drawingml/2006/main">
-            <a:srgbClr val="FFFFFF"/>
-          </a:solidFill>
           <a:ln xmlns:a="http://schemas.openxmlformats.org/drawingml/2006/main" w="9525">
             <a:solidFill>
               <a:srgbClr val="B8BCC4"/>
@@ -12599,896 +13320,13 @@
             <a:prstDash val="solid"/>
           </a:ln>
         </p:spPr>
-      </p:sp>
-      <p:sp>
-        <p:nvSpPr>
-          <p:cNvPr id="20" name="s7-tokens-new-label">
-            <a:extLst xmlns:a="http://schemas.openxmlformats.org/drawingml/2006/main">
-              <a:ext uri="{FF2B5EF4-FFF2-40B4-BE49-F238E27FC236}">
-                <a16:creationId xmlns:a16="http://schemas.microsoft.com/office/drawing/2014/main" id="{7F3F118D-1F24-42E2-B6BC-372EA6F3EAB8}"/>
-              </a:ext>
-            </a:extLst>
-          </p:cNvPr>
-          <p:cNvSpPr>
-            <a:spLocks xmlns:a="http://schemas.openxmlformats.org/drawingml/2006/main" noGrp="1"/>
-          </p:cNvSpPr>
-          <p:nvPr/>
-        </p:nvSpPr>
-        <p:spPr>
-          <a:xfrm xmlns:a="http://schemas.openxmlformats.org/drawingml/2006/main">
-            <a:off x="781050" y="3295650"/>
-            <a:ext cx="2095500" cy="209550"/>
-          </a:xfrm>
-          <a:prstGeom xmlns:a="http://schemas.openxmlformats.org/drawingml/2006/main" prst="rect">
-            <a:avLst/>
-          </a:prstGeom>
-        </p:spPr>
-        <p:txBody>
-          <a:bodyPr xmlns:a="http://schemas.openxmlformats.org/drawingml/2006/main" wrap="square" lIns="0" tIns="0" rIns="0" bIns="0" anchor="t">
-            <a:noAutofit/>
-          </a:bodyPr>
-          <a:lstStyle xmlns:a="http://schemas.openxmlformats.org/drawingml/2006/main"/>
-          <a:p xmlns:a="http://schemas.openxmlformats.org/drawingml/2006/main">
-            <a:pPr algn="l">
-              <a:defRPr sz="1125" b="1">
-                <a:solidFill>
-                  <a:srgbClr val="526071"/>
-                </a:solidFill>
-                <a:latin typeface="Arial"/>
-                <a:ea typeface="Arial"/>
-                <a:cs typeface="Arial"/>
-              </a:defRPr>
-            </a:pPr>
-            <a:r>
-              <a:t>REPORTED TOKENS</a:t>
-            </a:r>
-          </a:p>
-        </p:txBody>
-      </p:sp>
-      <p:sp>
-        <p:nvSpPr>
-          <p:cNvPr id="21" name="s7-tokens-new-value">
-            <a:extLst xmlns:a="http://schemas.openxmlformats.org/drawingml/2006/main">
-              <a:ext uri="{FF2B5EF4-FFF2-40B4-BE49-F238E27FC236}">
-                <a16:creationId xmlns:a16="http://schemas.microsoft.com/office/drawing/2014/main" id="{D470D462-AA5B-4E4E-B63E-E58202688621}"/>
-              </a:ext>
-            </a:extLst>
-          </p:cNvPr>
-          <p:cNvSpPr>
-            <a:spLocks xmlns:a="http://schemas.openxmlformats.org/drawingml/2006/main" noGrp="1"/>
-          </p:cNvSpPr>
-          <p:nvPr/>
-        </p:nvSpPr>
-        <p:spPr>
-          <a:xfrm xmlns:a="http://schemas.openxmlformats.org/drawingml/2006/main">
-            <a:off x="781050" y="3562350"/>
-            <a:ext cx="2095500" cy="381000"/>
-          </a:xfrm>
-          <a:prstGeom xmlns:a="http://schemas.openxmlformats.org/drawingml/2006/main" prst="rect">
-            <a:avLst/>
-          </a:prstGeom>
-        </p:spPr>
-        <p:txBody>
-          <a:bodyPr xmlns:a="http://schemas.openxmlformats.org/drawingml/2006/main" wrap="square" lIns="0" tIns="0" rIns="0" bIns="0" anchor="t">
-            <a:noAutofit/>
-          </a:bodyPr>
-          <a:lstStyle xmlns:a="http://schemas.openxmlformats.org/drawingml/2006/main"/>
-          <a:p xmlns:a="http://schemas.openxmlformats.org/drawingml/2006/main">
-            <a:pPr algn="l">
-              <a:defRPr sz="2250" b="1">
-                <a:solidFill>
-                  <a:srgbClr val="B87712"/>
-                </a:solidFill>
-                <a:latin typeface="Arial"/>
-                <a:ea typeface="Arial"/>
-                <a:cs typeface="Arial"/>
-              </a:defRPr>
-            </a:pPr>
-            <a:r>
-              <a:t>+30,147</a:t>
-            </a:r>
-          </a:p>
-        </p:txBody>
-      </p:sp>
-      <p:sp>
-        <p:nvSpPr>
-          <p:cNvPr id="22" name="s7-tokens-new-ci">
-            <a:extLst xmlns:a="http://schemas.openxmlformats.org/drawingml/2006/main">
-              <a:ext uri="{FF2B5EF4-FFF2-40B4-BE49-F238E27FC236}">
-                <a16:creationId xmlns:a16="http://schemas.microsoft.com/office/drawing/2014/main" id="{081B3005-8627-4913-B3EF-0896D670A207}"/>
-              </a:ext>
-            </a:extLst>
-          </p:cNvPr>
-          <p:cNvSpPr>
-            <a:spLocks xmlns:a="http://schemas.openxmlformats.org/drawingml/2006/main" noGrp="1"/>
-          </p:cNvSpPr>
-          <p:nvPr/>
-        </p:nvSpPr>
-        <p:spPr>
-          <a:xfrm xmlns:a="http://schemas.openxmlformats.org/drawingml/2006/main">
-            <a:off x="2857500" y="3629025"/>
-            <a:ext cx="2000250" cy="228600"/>
-          </a:xfrm>
-          <a:prstGeom xmlns:a="http://schemas.openxmlformats.org/drawingml/2006/main" prst="rect">
-            <a:avLst/>
-          </a:prstGeom>
-        </p:spPr>
-        <p:txBody>
-          <a:bodyPr xmlns:a="http://schemas.openxmlformats.org/drawingml/2006/main" wrap="square" lIns="0" tIns="0" rIns="0" bIns="0" anchor="t">
-            <a:noAutofit/>
-          </a:bodyPr>
-          <a:lstStyle xmlns:a="http://schemas.openxmlformats.org/drawingml/2006/main"/>
-          <a:p xmlns:a="http://schemas.openxmlformats.org/drawingml/2006/main">
-            <a:pPr algn="l">
-              <a:defRPr sz="1200" b="0">
-                <a:solidFill>
-                  <a:srgbClr val="526071"/>
-                </a:solidFill>
-                <a:latin typeface="Arial"/>
-                <a:ea typeface="Arial"/>
-                <a:cs typeface="Arial"/>
-              </a:defRPr>
-            </a:pPr>
-            <a:r>
-              <a:t>95% CI: -1,518.5 to +39,219</a:t>
-            </a:r>
-          </a:p>
-        </p:txBody>
-      </p:sp>
-      <p:cxnSp>
-        <p:nvCxnSpPr>
-          <p:cNvPr id="70" name="s7-tokens-new-axis"/>
-          <p:cNvCxnSpPr/>
-          <p:nvPr/>
-        </p:nvCxnSpPr>
-        <p:spPr>
-          <a:xfrm xmlns:a="http://schemas.openxmlformats.org/drawingml/2006/main">
-            <a:off x="4953000" y="3790950"/>
-            <a:ext cx="4762500" cy="953"/>
-          </a:xfrm>
-          <a:prstGeom xmlns:a="http://schemas.openxmlformats.org/drawingml/2006/main" prst="straightConnector1">
-            <a:avLst/>
-          </a:prstGeom>
-          <a:ln xmlns:a="http://schemas.openxmlformats.org/drawingml/2006/main" w="19050">
-            <a:solidFill>
-              <a:srgbClr val="B8BCC4"/>
-            </a:solidFill>
-            <a:prstDash val="solid"/>
-          </a:ln>
-        </p:spPr>
       </p:cxnSp>
-      <p:cxnSp>
-        <p:nvCxnSpPr>
-          <p:cNvPr id="71" name="s7-tokens-new-zero"/>
-          <p:cNvCxnSpPr/>
-          <p:nvPr/>
-        </p:nvCxnSpPr>
-        <p:spPr>
-          <a:xfrm xmlns:a="http://schemas.openxmlformats.org/drawingml/2006/main">
-            <a:off x="7334250" y="3562350"/>
-            <a:ext cx="953" cy="457200"/>
-          </a:xfrm>
-          <a:prstGeom xmlns:a="http://schemas.openxmlformats.org/drawingml/2006/main" prst="straightConnector1">
-            <a:avLst/>
-          </a:prstGeom>
-          <a:ln xmlns:a="http://schemas.openxmlformats.org/drawingml/2006/main" w="19050">
-            <a:solidFill>
-              <a:srgbClr val="0A1224"/>
-            </a:solidFill>
-            <a:prstDash val="solid"/>
-          </a:ln>
-        </p:spPr>
-      </p:cxnSp>
-      <p:sp>
-        <p:nvSpPr>
-          <p:cNvPr id="25" name="s7-tokens-new-zero-label">
-            <a:extLst xmlns:a="http://schemas.openxmlformats.org/drawingml/2006/main">
-              <a:ext uri="{FF2B5EF4-FFF2-40B4-BE49-F238E27FC236}">
-                <a16:creationId xmlns:a16="http://schemas.microsoft.com/office/drawing/2014/main" id="{EC33C1A8-B379-4ABF-944D-4BE215256E66}"/>
-              </a:ext>
-            </a:extLst>
-          </p:cNvPr>
-          <p:cNvSpPr>
-            <a:spLocks xmlns:a="http://schemas.openxmlformats.org/drawingml/2006/main" noGrp="1"/>
-          </p:cNvSpPr>
-          <p:nvPr/>
-        </p:nvSpPr>
-        <p:spPr>
-          <a:xfrm xmlns:a="http://schemas.openxmlformats.org/drawingml/2006/main">
-            <a:off x="7239000" y="3924300"/>
-            <a:ext cx="190500" cy="171450"/>
-          </a:xfrm>
-          <a:prstGeom xmlns:a="http://schemas.openxmlformats.org/drawingml/2006/main" prst="rect">
-            <a:avLst/>
-          </a:prstGeom>
-        </p:spPr>
-        <p:txBody>
-          <a:bodyPr xmlns:a="http://schemas.openxmlformats.org/drawingml/2006/main" wrap="square" lIns="0" tIns="0" rIns="0" bIns="0" anchor="t">
-            <a:noAutofit/>
-          </a:bodyPr>
-          <a:lstStyle xmlns:a="http://schemas.openxmlformats.org/drawingml/2006/main"/>
-          <a:p xmlns:a="http://schemas.openxmlformats.org/drawingml/2006/main">
-            <a:pPr algn="ctr">
-              <a:defRPr sz="900" b="0">
-                <a:solidFill>
-                  <a:srgbClr val="526071"/>
-                </a:solidFill>
-                <a:latin typeface="Arial"/>
-                <a:ea typeface="Arial"/>
-                <a:cs typeface="Arial"/>
-              </a:defRPr>
-            </a:pPr>
-            <a:r>
-              <a:t>0</a:t>
-            </a:r>
-          </a:p>
-        </p:txBody>
-      </p:sp>
-      <p:cxnSp>
-        <p:nvCxnSpPr>
-          <p:cNvPr id="73" name="s7-tokens-new-interval"/>
-          <p:cNvCxnSpPr/>
-          <p:nvPr/>
-        </p:nvCxnSpPr>
-        <p:spPr>
-          <a:xfrm xmlns:a="http://schemas.openxmlformats.org/drawingml/2006/main">
-            <a:off x="7253896" y="3790950"/>
-            <a:ext cx="2155693" cy="953"/>
-          </a:xfrm>
-          <a:prstGeom xmlns:a="http://schemas.openxmlformats.org/drawingml/2006/main" prst="straightConnector1">
-            <a:avLst/>
-          </a:prstGeom>
-          <a:ln xmlns:a="http://schemas.openxmlformats.org/drawingml/2006/main" w="57150">
-            <a:solidFill>
-              <a:srgbClr val="B87712"/>
-            </a:solidFill>
-            <a:prstDash val="solid"/>
-          </a:ln>
-        </p:spPr>
-      </p:cxnSp>
-      <p:cxnSp>
-        <p:nvCxnSpPr>
-          <p:cNvPr id="74" name="s7-tokens-new-low-cap"/>
-          <p:cNvCxnSpPr/>
-          <p:nvPr/>
-        </p:nvCxnSpPr>
-        <p:spPr>
-          <a:xfrm xmlns:a="http://schemas.openxmlformats.org/drawingml/2006/main">
-            <a:off x="7253896" y="3705225"/>
-            <a:ext cx="953" cy="171450"/>
-          </a:xfrm>
-          <a:prstGeom xmlns:a="http://schemas.openxmlformats.org/drawingml/2006/main" prst="straightConnector1">
-            <a:avLst/>
-          </a:prstGeom>
-          <a:ln xmlns:a="http://schemas.openxmlformats.org/drawingml/2006/main" w="28575">
-            <a:solidFill>
-              <a:srgbClr val="B87712"/>
-            </a:solidFill>
-            <a:prstDash val="solid"/>
-          </a:ln>
-        </p:spPr>
-      </p:cxnSp>
-      <p:cxnSp>
-        <p:nvCxnSpPr>
-          <p:cNvPr id="75" name="s7-tokens-new-high-cap"/>
-          <p:cNvCxnSpPr/>
-          <p:nvPr/>
-        </p:nvCxnSpPr>
-        <p:spPr>
-          <a:xfrm xmlns:a="http://schemas.openxmlformats.org/drawingml/2006/main">
-            <a:off x="9409589" y="3705225"/>
-            <a:ext cx="953" cy="171450"/>
-          </a:xfrm>
-          <a:prstGeom xmlns:a="http://schemas.openxmlformats.org/drawingml/2006/main" prst="straightConnector1">
-            <a:avLst/>
-          </a:prstGeom>
-          <a:ln xmlns:a="http://schemas.openxmlformats.org/drawingml/2006/main" w="28575">
-            <a:solidFill>
-              <a:srgbClr val="B87712"/>
-            </a:solidFill>
-            <a:prstDash val="solid"/>
-          </a:ln>
-        </p:spPr>
-      </p:cxnSp>
-      <p:sp>
-        <p:nvSpPr>
-          <p:cNvPr id="29" name="s7-tokens-new-median">
-            <a:extLst xmlns:a="http://schemas.openxmlformats.org/drawingml/2006/main">
-              <a:ext uri="{FF2B5EF4-FFF2-40B4-BE49-F238E27FC236}">
-                <a16:creationId xmlns:a16="http://schemas.microsoft.com/office/drawing/2014/main" id="{BE95D5D0-A17F-432F-A118-A814381F36B0}"/>
-              </a:ext>
-            </a:extLst>
-          </p:cNvPr>
-          <p:cNvSpPr>
-            <a:spLocks xmlns:a="http://schemas.openxmlformats.org/drawingml/2006/main" noGrp="1"/>
-          </p:cNvSpPr>
-          <p:nvPr/>
-        </p:nvSpPr>
-        <p:spPr>
-          <a:xfrm xmlns:a="http://schemas.openxmlformats.org/drawingml/2006/main">
-            <a:off x="8862854" y="3724275"/>
-            <a:ext cx="133350" cy="133350"/>
-          </a:xfrm>
-          <a:prstGeom xmlns:a="http://schemas.openxmlformats.org/drawingml/2006/main" prst="ellipse">
-            <a:avLst/>
-          </a:prstGeom>
-          <a:solidFill xmlns:a="http://schemas.openxmlformats.org/drawingml/2006/main">
-            <a:srgbClr val="B87712"/>
-          </a:solidFill>
-          <a:ln xmlns:a="http://schemas.openxmlformats.org/drawingml/2006/main" w="0">
-            <a:solidFill>
-              <a:srgbClr val="B87712"/>
-            </a:solidFill>
-            <a:prstDash val="solid"/>
-          </a:ln>
-        </p:spPr>
-      </p:sp>
-      <p:sp>
-        <p:nvSpPr>
-          <p:cNvPr id="30" name="s7-tokens-new-status">
-            <a:extLst xmlns:a="http://schemas.openxmlformats.org/drawingml/2006/main">
-              <a:ext uri="{FF2B5EF4-FFF2-40B4-BE49-F238E27FC236}">
-                <a16:creationId xmlns:a16="http://schemas.microsoft.com/office/drawing/2014/main" id="{9B2AE70F-3066-4FDC-8070-5559C99D0DB5}"/>
-              </a:ext>
-            </a:extLst>
-          </p:cNvPr>
-          <p:cNvSpPr>
-            <a:spLocks xmlns:a="http://schemas.openxmlformats.org/drawingml/2006/main" noGrp="1"/>
-          </p:cNvSpPr>
-          <p:nvPr/>
-        </p:nvSpPr>
-        <p:spPr>
-          <a:xfrm xmlns:a="http://schemas.openxmlformats.org/drawingml/2006/main">
-            <a:off x="9906000" y="3324225"/>
-            <a:ext cx="1466850" cy="209550"/>
-          </a:xfrm>
-          <a:prstGeom xmlns:a="http://schemas.openxmlformats.org/drawingml/2006/main" prst="rect">
-            <a:avLst/>
-          </a:prstGeom>
-        </p:spPr>
-        <p:txBody>
-          <a:bodyPr xmlns:a="http://schemas.openxmlformats.org/drawingml/2006/main" wrap="square" lIns="0" tIns="0" rIns="0" bIns="0" anchor="t">
-            <a:noAutofit/>
-          </a:bodyPr>
-          <a:lstStyle xmlns:a="http://schemas.openxmlformats.org/drawingml/2006/main"/>
-          <a:p xmlns:a="http://schemas.openxmlformats.org/drawingml/2006/main">
-            <a:pPr algn="r">
-              <a:defRPr sz="1050" b="1">
-                <a:solidFill>
-                  <a:srgbClr val="B87712"/>
-                </a:solidFill>
-                <a:latin typeface="Arial"/>
-                <a:ea typeface="Arial"/>
-                <a:cs typeface="Arial"/>
-              </a:defRPr>
-            </a:pPr>
-            <a:r>
-              <a:t>CROSSES 0</a:t>
-            </a:r>
-          </a:p>
-        </p:txBody>
-      </p:sp>
-      <p:sp>
-        <p:nvSpPr>
-          <p:cNvPr id="31" name="s7-tokens-new-interpretation">
-            <a:extLst xmlns:a="http://schemas.openxmlformats.org/drawingml/2006/main">
-              <a:ext uri="{FF2B5EF4-FFF2-40B4-BE49-F238E27FC236}">
-                <a16:creationId xmlns:a16="http://schemas.microsoft.com/office/drawing/2014/main" id="{5F433EAF-B228-4CE6-8A46-BF66B5CB3005}"/>
-              </a:ext>
-            </a:extLst>
-          </p:cNvPr>
-          <p:cNvSpPr>
-            <a:spLocks xmlns:a="http://schemas.openxmlformats.org/drawingml/2006/main" noGrp="1"/>
-          </p:cNvSpPr>
-          <p:nvPr/>
-        </p:nvSpPr>
-        <p:spPr>
-          <a:xfrm xmlns:a="http://schemas.openxmlformats.org/drawingml/2006/main">
-            <a:off x="9906000" y="3590925"/>
-            <a:ext cx="1466850" cy="400050"/>
-          </a:xfrm>
-          <a:prstGeom xmlns:a="http://schemas.openxmlformats.org/drawingml/2006/main" prst="rect">
-            <a:avLst/>
-          </a:prstGeom>
-        </p:spPr>
-        <p:txBody>
-          <a:bodyPr xmlns:a="http://schemas.openxmlformats.org/drawingml/2006/main" wrap="square" lIns="0" tIns="0" rIns="0" bIns="0" anchor="t">
-            <a:noAutofit/>
-          </a:bodyPr>
-          <a:lstStyle xmlns:a="http://schemas.openxmlformats.org/drawingml/2006/main"/>
-          <a:p xmlns:a="http://schemas.openxmlformats.org/drawingml/2006/main">
-            <a:pPr algn="r">
-              <a:defRPr sz="1125" b="0">
-                <a:solidFill>
-                  <a:srgbClr val="526071"/>
-                </a:solidFill>
-                <a:latin typeface="Arial"/>
-                <a:ea typeface="Arial"/>
-                <a:cs typeface="Arial"/>
-              </a:defRPr>
-            </a:pPr>
-            <a:r>
-              <a:t>inconclusive</a:t>
-            </a:r>
-          </a:p>
-        </p:txBody>
-      </p:sp>
-      <p:sp>
-        <p:nvSpPr>
-          <p:cNvPr id="32" name="s7-time-new-panel">
-            <a:extLst xmlns:a="http://schemas.openxmlformats.org/drawingml/2006/main">
-              <a:ext uri="{FF2B5EF4-FFF2-40B4-BE49-F238E27FC236}">
-                <a16:creationId xmlns:a16="http://schemas.microsoft.com/office/drawing/2014/main" id="{C45D1F21-DDE5-4665-8331-8901B930D382}"/>
-              </a:ext>
-            </a:extLst>
-          </p:cNvPr>
-          <p:cNvSpPr>
-            <a:spLocks xmlns:a="http://schemas.openxmlformats.org/drawingml/2006/main" noGrp="1"/>
-          </p:cNvSpPr>
-          <p:nvPr/>
-        </p:nvSpPr>
-        <p:spPr>
-          <a:xfrm xmlns:a="http://schemas.openxmlformats.org/drawingml/2006/main">
-            <a:off x="552450" y="4362450"/>
-            <a:ext cx="11087100" cy="1066800"/>
-          </a:xfrm>
-          <a:prstGeom xmlns:a="http://schemas.openxmlformats.org/drawingml/2006/main" prst="roundRect">
-            <a:avLst>
-              <a:gd name="adj" fmla="val 7143"/>
-            </a:avLst>
-          </a:prstGeom>
-          <a:solidFill xmlns:a="http://schemas.openxmlformats.org/drawingml/2006/main">
-            <a:srgbClr val="FFFFFF"/>
-          </a:solidFill>
-          <a:ln xmlns:a="http://schemas.openxmlformats.org/drawingml/2006/main" w="9525">
-            <a:solidFill>
-              <a:srgbClr val="B8BCC4"/>
-            </a:solidFill>
-            <a:prstDash val="solid"/>
-          </a:ln>
-        </p:spPr>
-      </p:sp>
-      <p:sp>
-        <p:nvSpPr>
-          <p:cNvPr id="33" name="s7-time-new-label">
-            <a:extLst xmlns:a="http://schemas.openxmlformats.org/drawingml/2006/main">
-              <a:ext uri="{FF2B5EF4-FFF2-40B4-BE49-F238E27FC236}">
-                <a16:creationId xmlns:a16="http://schemas.microsoft.com/office/drawing/2014/main" id="{E9E62B4B-75A2-4202-9990-FBEF28E15536}"/>
-              </a:ext>
-            </a:extLst>
-          </p:cNvPr>
-          <p:cNvSpPr>
-            <a:spLocks xmlns:a="http://schemas.openxmlformats.org/drawingml/2006/main" noGrp="1"/>
-          </p:cNvSpPr>
-          <p:nvPr/>
-        </p:nvSpPr>
-        <p:spPr>
-          <a:xfrm xmlns:a="http://schemas.openxmlformats.org/drawingml/2006/main">
-            <a:off x="781050" y="4514850"/>
-            <a:ext cx="2095500" cy="209550"/>
-          </a:xfrm>
-          <a:prstGeom xmlns:a="http://schemas.openxmlformats.org/drawingml/2006/main" prst="rect">
-            <a:avLst/>
-          </a:prstGeom>
-        </p:spPr>
-        <p:txBody>
-          <a:bodyPr xmlns:a="http://schemas.openxmlformats.org/drawingml/2006/main" wrap="square" lIns="0" tIns="0" rIns="0" bIns="0" anchor="t">
-            <a:noAutofit/>
-          </a:bodyPr>
-          <a:lstStyle xmlns:a="http://schemas.openxmlformats.org/drawingml/2006/main"/>
-          <a:p xmlns:a="http://schemas.openxmlformats.org/drawingml/2006/main">
-            <a:pPr algn="l">
-              <a:defRPr sz="1125" b="1">
-                <a:solidFill>
-                  <a:srgbClr val="526071"/>
-                </a:solidFill>
-                <a:latin typeface="Arial"/>
-                <a:ea typeface="Arial"/>
-                <a:cs typeface="Arial"/>
-              </a:defRPr>
-            </a:pPr>
-            <a:r>
-              <a:t>WALL TIME</a:t>
-            </a:r>
-          </a:p>
-        </p:txBody>
-      </p:sp>
-      <p:sp>
-        <p:nvSpPr>
-          <p:cNvPr id="34" name="s7-time-new-value">
-            <a:extLst xmlns:a="http://schemas.openxmlformats.org/drawingml/2006/main">
-              <a:ext uri="{FF2B5EF4-FFF2-40B4-BE49-F238E27FC236}">
-                <a16:creationId xmlns:a16="http://schemas.microsoft.com/office/drawing/2014/main" id="{DC1EE5BE-20EF-4FB5-BF46-DF371FD1E1C9}"/>
-              </a:ext>
-            </a:extLst>
-          </p:cNvPr>
-          <p:cNvSpPr>
-            <a:spLocks xmlns:a="http://schemas.openxmlformats.org/drawingml/2006/main" noGrp="1"/>
-          </p:cNvSpPr>
-          <p:nvPr/>
-        </p:nvSpPr>
-        <p:spPr>
-          <a:xfrm xmlns:a="http://schemas.openxmlformats.org/drawingml/2006/main">
-            <a:off x="781050" y="4781550"/>
-            <a:ext cx="2095500" cy="381000"/>
-          </a:xfrm>
-          <a:prstGeom xmlns:a="http://schemas.openxmlformats.org/drawingml/2006/main" prst="rect">
-            <a:avLst/>
-          </a:prstGeom>
-        </p:spPr>
-        <p:txBody>
-          <a:bodyPr xmlns:a="http://schemas.openxmlformats.org/drawingml/2006/main" wrap="square" lIns="0" tIns="0" rIns="0" bIns="0" anchor="t">
-            <a:noAutofit/>
-          </a:bodyPr>
-          <a:lstStyle xmlns:a="http://schemas.openxmlformats.org/drawingml/2006/main"/>
-          <a:p xmlns:a="http://schemas.openxmlformats.org/drawingml/2006/main">
-            <a:pPr algn="l">
-              <a:defRPr sz="2250" b="1">
-                <a:solidFill>
-                  <a:srgbClr val="B87712"/>
-                </a:solidFill>
-                <a:latin typeface="Arial"/>
-                <a:ea typeface="Arial"/>
-                <a:cs typeface="Arial"/>
-              </a:defRPr>
-            </a:pPr>
-            <a:r>
-              <a:t>+10.919s</a:t>
-            </a:r>
-          </a:p>
-        </p:txBody>
-      </p:sp>
-      <p:sp>
-        <p:nvSpPr>
-          <p:cNvPr id="35" name="s7-time-new-ci">
-            <a:extLst xmlns:a="http://schemas.openxmlformats.org/drawingml/2006/main">
-              <a:ext uri="{FF2B5EF4-FFF2-40B4-BE49-F238E27FC236}">
-                <a16:creationId xmlns:a16="http://schemas.microsoft.com/office/drawing/2014/main" id="{C8C9BCB1-759D-4A0D-BBFE-F8D36F9657D4}"/>
-              </a:ext>
-            </a:extLst>
-          </p:cNvPr>
-          <p:cNvSpPr>
-            <a:spLocks xmlns:a="http://schemas.openxmlformats.org/drawingml/2006/main" noGrp="1"/>
-          </p:cNvSpPr>
-          <p:nvPr/>
-        </p:nvSpPr>
-        <p:spPr>
-          <a:xfrm xmlns:a="http://schemas.openxmlformats.org/drawingml/2006/main">
-            <a:off x="2857500" y="4848225"/>
-            <a:ext cx="2000250" cy="228600"/>
-          </a:xfrm>
-          <a:prstGeom xmlns:a="http://schemas.openxmlformats.org/drawingml/2006/main" prst="rect">
-            <a:avLst/>
-          </a:prstGeom>
-        </p:spPr>
-        <p:txBody>
-          <a:bodyPr xmlns:a="http://schemas.openxmlformats.org/drawingml/2006/main" wrap="square" lIns="0" tIns="0" rIns="0" bIns="0" anchor="t">
-            <a:noAutofit/>
-          </a:bodyPr>
-          <a:lstStyle xmlns:a="http://schemas.openxmlformats.org/drawingml/2006/main"/>
-          <a:p xmlns:a="http://schemas.openxmlformats.org/drawingml/2006/main">
-            <a:pPr algn="l">
-              <a:defRPr sz="1200" b="0">
-                <a:solidFill>
-                  <a:srgbClr val="526071"/>
-                </a:solidFill>
-                <a:latin typeface="Arial"/>
-                <a:ea typeface="Arial"/>
-                <a:cs typeface="Arial"/>
-              </a:defRPr>
-            </a:pPr>
-            <a:r>
-              <a:t>95% CI: -1.433s to +31.043s</a:t>
-            </a:r>
-          </a:p>
-        </p:txBody>
-      </p:sp>
-      <p:cxnSp>
-        <p:nvCxnSpPr>
-          <p:cNvPr id="83" name="s7-time-new-axis"/>
-          <p:cNvCxnSpPr/>
-          <p:nvPr/>
-        </p:nvCxnSpPr>
-        <p:spPr>
-          <a:xfrm xmlns:a="http://schemas.openxmlformats.org/drawingml/2006/main">
-            <a:off x="4953000" y="5010150"/>
-            <a:ext cx="4762500" cy="953"/>
-          </a:xfrm>
-          <a:prstGeom xmlns:a="http://schemas.openxmlformats.org/drawingml/2006/main" prst="straightConnector1">
-            <a:avLst/>
-          </a:prstGeom>
-          <a:ln xmlns:a="http://schemas.openxmlformats.org/drawingml/2006/main" w="19050">
-            <a:solidFill>
-              <a:srgbClr val="B8BCC4"/>
-            </a:solidFill>
-            <a:prstDash val="solid"/>
-          </a:ln>
-        </p:spPr>
-      </p:cxnSp>
-      <p:cxnSp>
-        <p:nvCxnSpPr>
-          <p:cNvPr id="84" name="s7-time-new-zero"/>
-          <p:cNvCxnSpPr/>
-          <p:nvPr/>
-        </p:nvCxnSpPr>
-        <p:spPr>
-          <a:xfrm xmlns:a="http://schemas.openxmlformats.org/drawingml/2006/main">
-            <a:off x="7334250" y="4781550"/>
-            <a:ext cx="953" cy="457200"/>
-          </a:xfrm>
-          <a:prstGeom xmlns:a="http://schemas.openxmlformats.org/drawingml/2006/main" prst="straightConnector1">
-            <a:avLst/>
-          </a:prstGeom>
-          <a:ln xmlns:a="http://schemas.openxmlformats.org/drawingml/2006/main" w="19050">
-            <a:solidFill>
-              <a:srgbClr val="0A1224"/>
-            </a:solidFill>
-            <a:prstDash val="solid"/>
-          </a:ln>
-        </p:spPr>
-      </p:cxnSp>
-      <p:sp>
-        <p:nvSpPr>
-          <p:cNvPr id="38" name="s7-time-new-zero-label">
-            <a:extLst xmlns:a="http://schemas.openxmlformats.org/drawingml/2006/main">
-              <a:ext uri="{FF2B5EF4-FFF2-40B4-BE49-F238E27FC236}">
-                <a16:creationId xmlns:a16="http://schemas.microsoft.com/office/drawing/2014/main" id="{C27088C6-2C18-4EBE-8ED8-70F24CA41817}"/>
-              </a:ext>
-            </a:extLst>
-          </p:cNvPr>
-          <p:cNvSpPr>
-            <a:spLocks xmlns:a="http://schemas.openxmlformats.org/drawingml/2006/main" noGrp="1"/>
-          </p:cNvSpPr>
-          <p:nvPr/>
-        </p:nvSpPr>
-        <p:spPr>
-          <a:xfrm xmlns:a="http://schemas.openxmlformats.org/drawingml/2006/main">
-            <a:off x="7239000" y="5143500"/>
-            <a:ext cx="190500" cy="171450"/>
-          </a:xfrm>
-          <a:prstGeom xmlns:a="http://schemas.openxmlformats.org/drawingml/2006/main" prst="rect">
-            <a:avLst/>
-          </a:prstGeom>
-        </p:spPr>
-        <p:txBody>
-          <a:bodyPr xmlns:a="http://schemas.openxmlformats.org/drawingml/2006/main" wrap="square" lIns="0" tIns="0" rIns="0" bIns="0" anchor="t">
-            <a:noAutofit/>
-          </a:bodyPr>
-          <a:lstStyle xmlns:a="http://schemas.openxmlformats.org/drawingml/2006/main"/>
-          <a:p xmlns:a="http://schemas.openxmlformats.org/drawingml/2006/main">
-            <a:pPr algn="ctr">
-              <a:defRPr sz="900" b="0">
-                <a:solidFill>
-                  <a:srgbClr val="526071"/>
-                </a:solidFill>
-                <a:latin typeface="Arial"/>
-                <a:ea typeface="Arial"/>
-                <a:cs typeface="Arial"/>
-              </a:defRPr>
-            </a:pPr>
-            <a:r>
-              <a:t>0</a:t>
-            </a:r>
-          </a:p>
-        </p:txBody>
-      </p:sp>
-      <p:cxnSp>
-        <p:nvCxnSpPr>
-          <p:cNvPr id="86" name="s7-time-new-interval"/>
-          <p:cNvCxnSpPr/>
-          <p:nvPr/>
-        </p:nvCxnSpPr>
-        <p:spPr>
-          <a:xfrm xmlns:a="http://schemas.openxmlformats.org/drawingml/2006/main">
-            <a:off x="7236755" y="5010150"/>
-            <a:ext cx="2209528" cy="953"/>
-          </a:xfrm>
-          <a:prstGeom xmlns:a="http://schemas.openxmlformats.org/drawingml/2006/main" prst="straightConnector1">
-            <a:avLst/>
-          </a:prstGeom>
-          <a:ln xmlns:a="http://schemas.openxmlformats.org/drawingml/2006/main" w="57150">
-            <a:solidFill>
-              <a:srgbClr val="B87712"/>
-            </a:solidFill>
-            <a:prstDash val="solid"/>
-          </a:ln>
-        </p:spPr>
-      </p:cxnSp>
-      <p:cxnSp>
-        <p:nvCxnSpPr>
-          <p:cNvPr id="87" name="s7-time-new-low-cap"/>
-          <p:cNvCxnSpPr/>
-          <p:nvPr/>
-        </p:nvCxnSpPr>
-        <p:spPr>
-          <a:xfrm xmlns:a="http://schemas.openxmlformats.org/drawingml/2006/main">
-            <a:off x="7236755" y="4924425"/>
-            <a:ext cx="953" cy="171450"/>
-          </a:xfrm>
-          <a:prstGeom xmlns:a="http://schemas.openxmlformats.org/drawingml/2006/main" prst="straightConnector1">
-            <a:avLst/>
-          </a:prstGeom>
-          <a:ln xmlns:a="http://schemas.openxmlformats.org/drawingml/2006/main" w="28575">
-            <a:solidFill>
-              <a:srgbClr val="B87712"/>
-            </a:solidFill>
-            <a:prstDash val="solid"/>
-          </a:ln>
-        </p:spPr>
-      </p:cxnSp>
-      <p:cxnSp>
-        <p:nvCxnSpPr>
-          <p:cNvPr id="88" name="s7-time-new-high-cap"/>
-          <p:cNvCxnSpPr/>
-          <p:nvPr/>
-        </p:nvCxnSpPr>
-        <p:spPr>
-          <a:xfrm xmlns:a="http://schemas.openxmlformats.org/drawingml/2006/main">
-            <a:off x="9446283" y="4924425"/>
-            <a:ext cx="953" cy="171450"/>
-          </a:xfrm>
-          <a:prstGeom xmlns:a="http://schemas.openxmlformats.org/drawingml/2006/main" prst="straightConnector1">
-            <a:avLst/>
-          </a:prstGeom>
-          <a:ln xmlns:a="http://schemas.openxmlformats.org/drawingml/2006/main" w="28575">
-            <a:solidFill>
-              <a:srgbClr val="B87712"/>
-            </a:solidFill>
-            <a:prstDash val="solid"/>
-          </a:ln>
-        </p:spPr>
-      </p:cxnSp>
-      <p:sp>
-        <p:nvSpPr>
-          <p:cNvPr id="42" name="s7-time-new-median">
-            <a:extLst xmlns:a="http://schemas.openxmlformats.org/drawingml/2006/main">
-              <a:ext uri="{FF2B5EF4-FFF2-40B4-BE49-F238E27FC236}">
-                <a16:creationId xmlns:a16="http://schemas.microsoft.com/office/drawing/2014/main" id="{82E907DE-EDA7-4C27-B899-97AA75E4104F}"/>
-              </a:ext>
-            </a:extLst>
-          </p:cNvPr>
-          <p:cNvSpPr>
-            <a:spLocks xmlns:a="http://schemas.openxmlformats.org/drawingml/2006/main" noGrp="1"/>
-          </p:cNvSpPr>
-          <p:nvPr/>
-        </p:nvSpPr>
-        <p:spPr>
-          <a:xfrm xmlns:a="http://schemas.openxmlformats.org/drawingml/2006/main">
-            <a:off x="8010457" y="4943475"/>
-            <a:ext cx="133350" cy="133350"/>
-          </a:xfrm>
-          <a:prstGeom xmlns:a="http://schemas.openxmlformats.org/drawingml/2006/main" prst="ellipse">
-            <a:avLst/>
-          </a:prstGeom>
-          <a:solidFill xmlns:a="http://schemas.openxmlformats.org/drawingml/2006/main">
-            <a:srgbClr val="B87712"/>
-          </a:solidFill>
-          <a:ln xmlns:a="http://schemas.openxmlformats.org/drawingml/2006/main" w="0">
-            <a:solidFill>
-              <a:srgbClr val="B87712"/>
-            </a:solidFill>
-            <a:prstDash val="solid"/>
-          </a:ln>
-        </p:spPr>
-      </p:sp>
-      <p:sp>
-        <p:nvSpPr>
-          <p:cNvPr id="43" name="s7-time-new-status">
-            <a:extLst xmlns:a="http://schemas.openxmlformats.org/drawingml/2006/main">
-              <a:ext uri="{FF2B5EF4-FFF2-40B4-BE49-F238E27FC236}">
-                <a16:creationId xmlns:a16="http://schemas.microsoft.com/office/drawing/2014/main" id="{EE0950F7-159B-4650-8B4C-6B406F457DD0}"/>
-              </a:ext>
-            </a:extLst>
-          </p:cNvPr>
-          <p:cNvSpPr>
-            <a:spLocks xmlns:a="http://schemas.openxmlformats.org/drawingml/2006/main" noGrp="1"/>
-          </p:cNvSpPr>
-          <p:nvPr/>
-        </p:nvSpPr>
-        <p:spPr>
-          <a:xfrm xmlns:a="http://schemas.openxmlformats.org/drawingml/2006/main">
-            <a:off x="9906000" y="4543425"/>
-            <a:ext cx="1466850" cy="209550"/>
-          </a:xfrm>
-          <a:prstGeom xmlns:a="http://schemas.openxmlformats.org/drawingml/2006/main" prst="rect">
-            <a:avLst/>
-          </a:prstGeom>
-        </p:spPr>
-        <p:txBody>
-          <a:bodyPr xmlns:a="http://schemas.openxmlformats.org/drawingml/2006/main" wrap="square" lIns="0" tIns="0" rIns="0" bIns="0" anchor="t">
-            <a:noAutofit/>
-          </a:bodyPr>
-          <a:lstStyle xmlns:a="http://schemas.openxmlformats.org/drawingml/2006/main"/>
-          <a:p xmlns:a="http://schemas.openxmlformats.org/drawingml/2006/main">
-            <a:pPr algn="r">
-              <a:defRPr sz="1050" b="1">
-                <a:solidFill>
-                  <a:srgbClr val="B87712"/>
-                </a:solidFill>
-                <a:latin typeface="Arial"/>
-                <a:ea typeface="Arial"/>
-                <a:cs typeface="Arial"/>
-              </a:defRPr>
-            </a:pPr>
-            <a:r>
-              <a:t>CROSSES 0</a:t>
-            </a:r>
-          </a:p>
-        </p:txBody>
-      </p:sp>
-      <p:sp>
-        <p:nvSpPr>
-          <p:cNvPr id="44" name="s7-time-new-interpretation">
-            <a:extLst xmlns:a="http://schemas.openxmlformats.org/drawingml/2006/main">
-              <a:ext uri="{FF2B5EF4-FFF2-40B4-BE49-F238E27FC236}">
-                <a16:creationId xmlns:a16="http://schemas.microsoft.com/office/drawing/2014/main" id="{50AB27D9-E258-4C4F-8C9C-8665C157DDE3}"/>
-              </a:ext>
-            </a:extLst>
-          </p:cNvPr>
-          <p:cNvSpPr>
-            <a:spLocks xmlns:a="http://schemas.openxmlformats.org/drawingml/2006/main" noGrp="1"/>
-          </p:cNvSpPr>
-          <p:nvPr/>
-        </p:nvSpPr>
-        <p:spPr>
-          <a:xfrm xmlns:a="http://schemas.openxmlformats.org/drawingml/2006/main">
-            <a:off x="9906000" y="4810125"/>
-            <a:ext cx="1466850" cy="400050"/>
-          </a:xfrm>
-          <a:prstGeom xmlns:a="http://schemas.openxmlformats.org/drawingml/2006/main" prst="rect">
-            <a:avLst/>
-          </a:prstGeom>
-        </p:spPr>
-        <p:txBody>
-          <a:bodyPr xmlns:a="http://schemas.openxmlformats.org/drawingml/2006/main" wrap="square" lIns="0" tIns="0" rIns="0" bIns="0" anchor="t">
-            <a:noAutofit/>
-          </a:bodyPr>
-          <a:lstStyle xmlns:a="http://schemas.openxmlformats.org/drawingml/2006/main"/>
-          <a:p xmlns:a="http://schemas.openxmlformats.org/drawingml/2006/main">
-            <a:pPr algn="r">
-              <a:defRPr sz="1125" b="0">
-                <a:solidFill>
-                  <a:srgbClr val="526071"/>
-                </a:solidFill>
-                <a:latin typeface="Arial"/>
-                <a:ea typeface="Arial"/>
-                <a:cs typeface="Arial"/>
-              </a:defRPr>
-            </a:pPr>
-            <a:r>
-              <a:t>inconclusive</a:t>
-            </a:r>
-          </a:p>
-        </p:txBody>
-      </p:sp>
-      <p:cxnSp>
-        <p:nvCxnSpPr>
-          <p:cNvPr id="92" name="footer-rule-7"/>
-          <p:cNvCxnSpPr/>
-          <p:nvPr/>
-        </p:nvCxnSpPr>
-        <p:spPr>
-          <a:xfrm xmlns:a="http://schemas.openxmlformats.org/drawingml/2006/main">
-            <a:off x="400050" y="6162675"/>
-            <a:ext cx="11391900" cy="953"/>
-          </a:xfrm>
-          <a:prstGeom xmlns:a="http://schemas.openxmlformats.org/drawingml/2006/main" prst="straightConnector1">
-            <a:avLst/>
-          </a:prstGeom>
-          <a:ln xmlns:a="http://schemas.openxmlformats.org/drawingml/2006/main" w="9525">
-            <a:solidFill>
-              <a:srgbClr val="B8BCC4"/>
-            </a:solidFill>
-            <a:prstDash val="solid"/>
-          </a:ln>
-        </p:spPr>
-      </p:cxnSp>
-      <p:sp>
-        <p:nvSpPr>
-          <p:cNvPr id="46" name="footer-source-7">
-            <a:extLst xmlns:a="http://schemas.openxmlformats.org/drawingml/2006/main">
-              <a:ext uri="{FF2B5EF4-FFF2-40B4-BE49-F238E27FC236}">
-                <a16:creationId xmlns:a16="http://schemas.microsoft.com/office/drawing/2014/main" id="{42F81915-800D-4864-BD14-0F69ED768CFE}"/>
+      <p:sp>
+        <p:nvSpPr>
+          <p:cNvPr id="35" name="footer-source-7">
+            <a:extLst xmlns:a="http://schemas.openxmlformats.org/drawingml/2006/main">
+              <a:ext uri="{FF2B5EF4-FFF2-40B4-BE49-F238E27FC236}">
+                <a16:creationId xmlns:a16="http://schemas.microsoft.com/office/drawing/2014/main" id="{869D515A-5D1D-454F-9335-8DD8DFFCC068}"/>
               </a:ext>
             </a:extLst>
           </p:cNvPr>
@@ -13523,17 +13361,17 @@
               </a:defRPr>
             </a:pPr>
             <a:r>
-              <a:t>Adaptive - Control paired medians and paired 95% bootstrap intervals | exploratory v2.2</a:t>
-            </a:r>
-          </a:p>
-        </p:txBody>
-      </p:sp>
-      <p:sp>
-        <p:nvSpPr>
-          <p:cNvPr id="47" name="footer-number-7">
-            <a:extLst xmlns:a="http://schemas.openxmlformats.org/drawingml/2006/main">
-              <a:ext uri="{FF2B5EF4-FFF2-40B4-BE49-F238E27FC236}">
-                <a16:creationId xmlns:a16="http://schemas.microsoft.com/office/drawing/2014/main" id="{8BDBA03A-D3C4-41E2-A32D-06F356F9B973}"/>
+              <a:t>Control result: supported tool-call overhead; Token and time intervals crossed zero | benchmark used synthetic repositories</a:t>
+            </a:r>
+          </a:p>
+        </p:txBody>
+      </p:sp>
+      <p:sp>
+        <p:nvSpPr>
+          <p:cNvPr id="36" name="footer-number-7">
+            <a:extLst xmlns:a="http://schemas.openxmlformats.org/drawingml/2006/main">
+              <a:ext uri="{FF2B5EF4-FFF2-40B4-BE49-F238E27FC236}">
+                <a16:creationId xmlns:a16="http://schemas.microsoft.com/office/drawing/2014/main" id="{FCEC97E2-7B7B-40B5-B344-FDACF536EA16}"/>
               </a:ext>
             </a:extLst>
           </p:cNvPr>
@@ -13576,7 +13414,7 @@
     </p:spTree>
     <p:extLst>
       <p:ext uri="{BB962C8B-B14F-4D97-AF65-F5344CB8AC3E}">
-        <p14:creationId xmlns:p14="http://schemas.microsoft.com/office/powerpoint/2010/main" val="900202626"/>
+        <p14:creationId xmlns:p14="http://schemas.microsoft.com/office/powerpoint/2010/main" val="1643005700"/>
       </p:ext>
     </p:extLst>
   </p:cSld>
@@ -13607,7 +13445,7 @@
           <p:cNvPr id="48" name="s8-title-new">
             <a:extLst xmlns:a="http://schemas.openxmlformats.org/drawingml/2006/main">
               <a:ext uri="{FF2B5EF4-FFF2-40B4-BE49-F238E27FC236}">
-                <a16:creationId xmlns:a16="http://schemas.microsoft.com/office/drawing/2014/main" id="{D56025BA-C081-4E41-93BC-FFDE82F4FE8D}"/>
+                <a16:creationId xmlns:a16="http://schemas.microsoft.com/office/drawing/2014/main" id="{3802844C-F306-4B2E-8477-1515D8611E7A}"/>
               </a:ext>
             </a:extLst>
           </p:cNvPr>
@@ -13652,7 +13490,7 @@
           <p:cNvPr id="2" name="s8-subtitle-new">
             <a:extLst xmlns:a="http://schemas.openxmlformats.org/drawingml/2006/main">
               <a:ext uri="{FF2B5EF4-FFF2-40B4-BE49-F238E27FC236}">
-                <a16:creationId xmlns:a16="http://schemas.microsoft.com/office/drawing/2014/main" id="{3EC68A23-0C6F-4CF2-953D-EEA095CE8F03}"/>
+                <a16:creationId xmlns:a16="http://schemas.microsoft.com/office/drawing/2014/main" id="{44B5B586-AEA3-43E3-B3C9-24A7BD1B1C3E}"/>
               </a:ext>
             </a:extLst>
           </p:cNvPr>
@@ -13697,7 +13535,7 @@
           <p:cNvPr id="3" name="s8-negative-new">
             <a:extLst xmlns:a="http://schemas.openxmlformats.org/drawingml/2006/main">
               <a:ext uri="{FF2B5EF4-FFF2-40B4-BE49-F238E27FC236}">
-                <a16:creationId xmlns:a16="http://schemas.microsoft.com/office/drawing/2014/main" id="{E386AC4F-B74E-4C07-A1E6-FBDEA8C7DAC7}"/>
+                <a16:creationId xmlns:a16="http://schemas.microsoft.com/office/drawing/2014/main" id="{3E5F40D5-9B41-4A69-B990-C13BA643696B}"/>
               </a:ext>
             </a:extLst>
           </p:cNvPr>
@@ -13742,7 +13580,7 @@
           <p:cNvPr id="4" name="s8-zero-new">
             <a:extLst xmlns:a="http://schemas.openxmlformats.org/drawingml/2006/main">
               <a:ext uri="{FF2B5EF4-FFF2-40B4-BE49-F238E27FC236}">
-                <a16:creationId xmlns:a16="http://schemas.microsoft.com/office/drawing/2014/main" id="{10FE3227-15A3-4559-BF35-8820F2BD6380}"/>
+                <a16:creationId xmlns:a16="http://schemas.microsoft.com/office/drawing/2014/main" id="{E0CF7841-6F7A-493E-8EF0-14CCA6651759}"/>
               </a:ext>
             </a:extLst>
           </p:cNvPr>
@@ -13787,7 +13625,7 @@
           <p:cNvPr id="5" name="s8-positive-new">
             <a:extLst xmlns:a="http://schemas.openxmlformats.org/drawingml/2006/main">
               <a:ext uri="{FF2B5EF4-FFF2-40B4-BE49-F238E27FC236}">
-                <a16:creationId xmlns:a16="http://schemas.microsoft.com/office/drawing/2014/main" id="{5C5DDBB6-EEF0-4541-9D68-306518AC7E3B}"/>
+                <a16:creationId xmlns:a16="http://schemas.microsoft.com/office/drawing/2014/main" id="{06F1D704-DD20-483B-B7B5-468A1620942B}"/>
               </a:ext>
             </a:extLst>
           </p:cNvPr>
@@ -13832,7 +13670,7 @@
           <p:cNvPr id="6" name="s8-bytes-new-panel">
             <a:extLst xmlns:a="http://schemas.openxmlformats.org/drawingml/2006/main">
               <a:ext uri="{FF2B5EF4-FFF2-40B4-BE49-F238E27FC236}">
-                <a16:creationId xmlns:a16="http://schemas.microsoft.com/office/drawing/2014/main" id="{C3ECD640-7274-4BB7-A267-7658D554B473}"/>
+                <a16:creationId xmlns:a16="http://schemas.microsoft.com/office/drawing/2014/main" id="{DFE4ED78-7995-4E1A-9488-E8CD3E4A0585}"/>
               </a:ext>
             </a:extLst>
           </p:cNvPr>
@@ -13867,7 +13705,7 @@
           <p:cNvPr id="7" name="s8-bytes-new-label">
             <a:extLst xmlns:a="http://schemas.openxmlformats.org/drawingml/2006/main">
               <a:ext uri="{FF2B5EF4-FFF2-40B4-BE49-F238E27FC236}">
-                <a16:creationId xmlns:a16="http://schemas.microsoft.com/office/drawing/2014/main" id="{C8C43355-F01C-4591-9A7C-FD579FB25455}"/>
+                <a16:creationId xmlns:a16="http://schemas.microsoft.com/office/drawing/2014/main" id="{8A76280D-E9A1-4188-9C47-36D7A6D790BD}"/>
               </a:ext>
             </a:extLst>
           </p:cNvPr>
@@ -13912,7 +13750,7 @@
           <p:cNvPr id="8" name="s8-bytes-new-value">
             <a:extLst xmlns:a="http://schemas.openxmlformats.org/drawingml/2006/main">
               <a:ext uri="{FF2B5EF4-FFF2-40B4-BE49-F238E27FC236}">
-                <a16:creationId xmlns:a16="http://schemas.microsoft.com/office/drawing/2014/main" id="{F1002BEA-E914-4011-9BCB-519B6FFE833D}"/>
+                <a16:creationId xmlns:a16="http://schemas.microsoft.com/office/drawing/2014/main" id="{2A185273-38D1-4A25-AE14-73F7FF8866E2}"/>
               </a:ext>
             </a:extLst>
           </p:cNvPr>
@@ -13957,7 +13795,7 @@
           <p:cNvPr id="9" name="s8-bytes-new-ci">
             <a:extLst xmlns:a="http://schemas.openxmlformats.org/drawingml/2006/main">
               <a:ext uri="{FF2B5EF4-FFF2-40B4-BE49-F238E27FC236}">
-                <a16:creationId xmlns:a16="http://schemas.microsoft.com/office/drawing/2014/main" id="{A6629C64-57B5-4E04-B83F-F4E4923D8024}"/>
+                <a16:creationId xmlns:a16="http://schemas.microsoft.com/office/drawing/2014/main" id="{D3E6BD3C-AB0F-4E0F-B805-DEDE3FD6B379}"/>
               </a:ext>
             </a:extLst>
           </p:cNvPr>
@@ -14046,7 +13884,7 @@
           <p:cNvPr id="12" name="s8-bytes-new-zero-label">
             <a:extLst xmlns:a="http://schemas.openxmlformats.org/drawingml/2006/main">
               <a:ext uri="{FF2B5EF4-FFF2-40B4-BE49-F238E27FC236}">
-                <a16:creationId xmlns:a16="http://schemas.microsoft.com/office/drawing/2014/main" id="{359F0BDC-0DE0-412B-BB50-AC26150466A9}"/>
+                <a16:creationId xmlns:a16="http://schemas.microsoft.com/office/drawing/2014/main" id="{E0876B21-A2B7-41B3-992E-59634FAE1AB9}"/>
               </a:ext>
             </a:extLst>
           </p:cNvPr>
@@ -14157,7 +13995,7 @@
           <p:cNvPr id="16" name="s8-bytes-new-median">
             <a:extLst xmlns:a="http://schemas.openxmlformats.org/drawingml/2006/main">
               <a:ext uri="{FF2B5EF4-FFF2-40B4-BE49-F238E27FC236}">
-                <a16:creationId xmlns:a16="http://schemas.microsoft.com/office/drawing/2014/main" id="{C8511F0B-3158-4036-941B-B67711D5870F}"/>
+                <a16:creationId xmlns:a16="http://schemas.microsoft.com/office/drawing/2014/main" id="{96683643-F349-4AEC-9772-119C685E4EBD}"/>
               </a:ext>
             </a:extLst>
           </p:cNvPr>
@@ -14190,7 +14028,7 @@
           <p:cNvPr id="17" name="s8-bytes-new-status">
             <a:extLst xmlns:a="http://schemas.openxmlformats.org/drawingml/2006/main">
               <a:ext uri="{FF2B5EF4-FFF2-40B4-BE49-F238E27FC236}">
-                <a16:creationId xmlns:a16="http://schemas.microsoft.com/office/drawing/2014/main" id="{61FE6D49-5BD8-4A65-92D9-40AF8EE69EBA}"/>
+                <a16:creationId xmlns:a16="http://schemas.microsoft.com/office/drawing/2014/main" id="{84ED7540-95AA-4774-8356-34851149F8B6}"/>
               </a:ext>
             </a:extLst>
           </p:cNvPr>
@@ -14235,7 +14073,7 @@
           <p:cNvPr id="18" name="s8-bytes-new-interpretation">
             <a:extLst xmlns:a="http://schemas.openxmlformats.org/drawingml/2006/main">
               <a:ext uri="{FF2B5EF4-FFF2-40B4-BE49-F238E27FC236}">
-                <a16:creationId xmlns:a16="http://schemas.microsoft.com/office/drawing/2014/main" id="{FCD980AA-15F8-442C-B817-7935C69B0A65}"/>
+                <a16:creationId xmlns:a16="http://schemas.microsoft.com/office/drawing/2014/main" id="{BA44842E-ACE6-4482-9CE8-3F6385FA013A}"/>
               </a:ext>
             </a:extLst>
           </p:cNvPr>
@@ -14280,7 +14118,7 @@
           <p:cNvPr id="19" name="s8-tokens-new-panel">
             <a:extLst xmlns:a="http://schemas.openxmlformats.org/drawingml/2006/main">
               <a:ext uri="{FF2B5EF4-FFF2-40B4-BE49-F238E27FC236}">
-                <a16:creationId xmlns:a16="http://schemas.microsoft.com/office/drawing/2014/main" id="{752B6B91-CE50-4A94-876A-908A7552E2BD}"/>
+                <a16:creationId xmlns:a16="http://schemas.microsoft.com/office/drawing/2014/main" id="{D996115E-A2E9-4C8E-A0BD-5AE4362EA43B}"/>
               </a:ext>
             </a:extLst>
           </p:cNvPr>
@@ -14315,7 +14153,7 @@
           <p:cNvPr id="20" name="s8-tokens-new-label">
             <a:extLst xmlns:a="http://schemas.openxmlformats.org/drawingml/2006/main">
               <a:ext uri="{FF2B5EF4-FFF2-40B4-BE49-F238E27FC236}">
-                <a16:creationId xmlns:a16="http://schemas.microsoft.com/office/drawing/2014/main" id="{6B67395E-B1BC-418D-99D1-BC7754EFC166}"/>
+                <a16:creationId xmlns:a16="http://schemas.microsoft.com/office/drawing/2014/main" id="{0EFF5D4E-E430-4AAA-9A7C-069D2A29BAC8}"/>
               </a:ext>
             </a:extLst>
           </p:cNvPr>
@@ -14360,7 +14198,7 @@
           <p:cNvPr id="21" name="s8-tokens-new-value">
             <a:extLst xmlns:a="http://schemas.openxmlformats.org/drawingml/2006/main">
               <a:ext uri="{FF2B5EF4-FFF2-40B4-BE49-F238E27FC236}">
-                <a16:creationId xmlns:a16="http://schemas.microsoft.com/office/drawing/2014/main" id="{1840A6A0-262B-48C8-8BFE-16F89C351570}"/>
+                <a16:creationId xmlns:a16="http://schemas.microsoft.com/office/drawing/2014/main" id="{B4CF726D-C82C-4E01-9179-5D6E0285C6D8}"/>
               </a:ext>
             </a:extLst>
           </p:cNvPr>
@@ -14405,7 +14243,7 @@
           <p:cNvPr id="22" name="s8-tokens-new-ci">
             <a:extLst xmlns:a="http://schemas.openxmlformats.org/drawingml/2006/main">
               <a:ext uri="{FF2B5EF4-FFF2-40B4-BE49-F238E27FC236}">
-                <a16:creationId xmlns:a16="http://schemas.microsoft.com/office/drawing/2014/main" id="{2A64989C-649C-404F-805D-EAA5BB781E8C}"/>
+                <a16:creationId xmlns:a16="http://schemas.microsoft.com/office/drawing/2014/main" id="{5CE62B2A-6285-4AE8-AF9E-0EA15A836888}"/>
               </a:ext>
             </a:extLst>
           </p:cNvPr>
@@ -14494,7 +14332,7 @@
           <p:cNvPr id="25" name="s8-tokens-new-zero-label">
             <a:extLst xmlns:a="http://schemas.openxmlformats.org/drawingml/2006/main">
               <a:ext uri="{FF2B5EF4-FFF2-40B4-BE49-F238E27FC236}">
-                <a16:creationId xmlns:a16="http://schemas.microsoft.com/office/drawing/2014/main" id="{2AAC8B11-7BE9-4650-ACAA-256022B0991A}"/>
+                <a16:creationId xmlns:a16="http://schemas.microsoft.com/office/drawing/2014/main" id="{E0279A17-5B32-496E-B6BB-44BAA3BDFEC1}"/>
               </a:ext>
             </a:extLst>
           </p:cNvPr>
@@ -14605,7 +14443,7 @@
           <p:cNvPr id="29" name="s8-tokens-new-median">
             <a:extLst xmlns:a="http://schemas.openxmlformats.org/drawingml/2006/main">
               <a:ext uri="{FF2B5EF4-FFF2-40B4-BE49-F238E27FC236}">
-                <a16:creationId xmlns:a16="http://schemas.microsoft.com/office/drawing/2014/main" id="{462611A2-D6B4-47CF-90ED-E6CD7717C8B3}"/>
+                <a16:creationId xmlns:a16="http://schemas.microsoft.com/office/drawing/2014/main" id="{3E0785BF-BBE3-4770-8912-526D0C92D35E}"/>
               </a:ext>
             </a:extLst>
           </p:cNvPr>
@@ -14638,7 +14476,7 @@
           <p:cNvPr id="30" name="s8-tokens-new-status">
             <a:extLst xmlns:a="http://schemas.openxmlformats.org/drawingml/2006/main">
               <a:ext uri="{FF2B5EF4-FFF2-40B4-BE49-F238E27FC236}">
-                <a16:creationId xmlns:a16="http://schemas.microsoft.com/office/drawing/2014/main" id="{2CB851C8-EB25-4D17-909D-C4D74D27D3FF}"/>
+                <a16:creationId xmlns:a16="http://schemas.microsoft.com/office/drawing/2014/main" id="{2E152CCD-71EF-4639-9DED-39E519847F95}"/>
               </a:ext>
             </a:extLst>
           </p:cNvPr>
@@ -14683,7 +14521,7 @@
           <p:cNvPr id="31" name="s8-tokens-new-interpretation">
             <a:extLst xmlns:a="http://schemas.openxmlformats.org/drawingml/2006/main">
               <a:ext uri="{FF2B5EF4-FFF2-40B4-BE49-F238E27FC236}">
-                <a16:creationId xmlns:a16="http://schemas.microsoft.com/office/drawing/2014/main" id="{08EA0FC9-192C-4F71-878F-B412BC3C6075}"/>
+                <a16:creationId xmlns:a16="http://schemas.microsoft.com/office/drawing/2014/main" id="{8C7860D7-F64B-4D54-A0F4-66376472B222}"/>
               </a:ext>
             </a:extLst>
           </p:cNvPr>
@@ -14728,7 +14566,7 @@
           <p:cNvPr id="32" name="s8-time-new-panel">
             <a:extLst xmlns:a="http://schemas.openxmlformats.org/drawingml/2006/main">
               <a:ext uri="{FF2B5EF4-FFF2-40B4-BE49-F238E27FC236}">
-                <a16:creationId xmlns:a16="http://schemas.microsoft.com/office/drawing/2014/main" id="{DF826EEE-38A6-4115-AB7F-B1D75111DC53}"/>
+                <a16:creationId xmlns:a16="http://schemas.microsoft.com/office/drawing/2014/main" id="{AC08FD9B-1DFC-433C-B804-BA1411893A89}"/>
               </a:ext>
             </a:extLst>
           </p:cNvPr>
@@ -14763,7 +14601,7 @@
           <p:cNvPr id="33" name="s8-time-new-label">
             <a:extLst xmlns:a="http://schemas.openxmlformats.org/drawingml/2006/main">
               <a:ext uri="{FF2B5EF4-FFF2-40B4-BE49-F238E27FC236}">
-                <a16:creationId xmlns:a16="http://schemas.microsoft.com/office/drawing/2014/main" id="{BF798226-4FD3-4C7C-85AB-3D8485C7B64E}"/>
+                <a16:creationId xmlns:a16="http://schemas.microsoft.com/office/drawing/2014/main" id="{E37D0F54-0F7A-459D-9896-86A4F92D6A76}"/>
               </a:ext>
             </a:extLst>
           </p:cNvPr>
@@ -14808,7 +14646,7 @@
           <p:cNvPr id="34" name="s8-time-new-value">
             <a:extLst xmlns:a="http://schemas.openxmlformats.org/drawingml/2006/main">
               <a:ext uri="{FF2B5EF4-FFF2-40B4-BE49-F238E27FC236}">
-                <a16:creationId xmlns:a16="http://schemas.microsoft.com/office/drawing/2014/main" id="{D7073E59-F9E2-48D0-8214-11A7332A85E8}"/>
+                <a16:creationId xmlns:a16="http://schemas.microsoft.com/office/drawing/2014/main" id="{5C14187E-0B92-4A01-B033-62FAE4DD9CBF}"/>
               </a:ext>
             </a:extLst>
           </p:cNvPr>
@@ -14853,7 +14691,7 @@
           <p:cNvPr id="35" name="s8-time-new-ci">
             <a:extLst xmlns:a="http://schemas.openxmlformats.org/drawingml/2006/main">
               <a:ext uri="{FF2B5EF4-FFF2-40B4-BE49-F238E27FC236}">
-                <a16:creationId xmlns:a16="http://schemas.microsoft.com/office/drawing/2014/main" id="{F09ABB44-527A-4E7C-8281-E8F93BE09B9C}"/>
+                <a16:creationId xmlns:a16="http://schemas.microsoft.com/office/drawing/2014/main" id="{BD97211B-3DC8-4AD0-A551-6B490A017680}"/>
               </a:ext>
             </a:extLst>
           </p:cNvPr>
@@ -14942,7 +14780,7 @@
           <p:cNvPr id="38" name="s8-time-new-zero-label">
             <a:extLst xmlns:a="http://schemas.openxmlformats.org/drawingml/2006/main">
               <a:ext uri="{FF2B5EF4-FFF2-40B4-BE49-F238E27FC236}">
-                <a16:creationId xmlns:a16="http://schemas.microsoft.com/office/drawing/2014/main" id="{EFCD6FB2-7683-4C5C-A450-1225EA157B33}"/>
+                <a16:creationId xmlns:a16="http://schemas.microsoft.com/office/drawing/2014/main" id="{1C4DF709-0475-47C7-BCA3-C4D1D995B25B}"/>
               </a:ext>
             </a:extLst>
           </p:cNvPr>
@@ -15053,7 +14891,7 @@
           <p:cNvPr id="42" name="s8-time-new-median">
             <a:extLst xmlns:a="http://schemas.openxmlformats.org/drawingml/2006/main">
               <a:ext uri="{FF2B5EF4-FFF2-40B4-BE49-F238E27FC236}">
-                <a16:creationId xmlns:a16="http://schemas.microsoft.com/office/drawing/2014/main" id="{423C2911-B079-40B7-8A54-91947C6AFA83}"/>
+                <a16:creationId xmlns:a16="http://schemas.microsoft.com/office/drawing/2014/main" id="{BC239EC9-9BD1-4756-A083-C8823CCEBE4D}"/>
               </a:ext>
             </a:extLst>
           </p:cNvPr>
@@ -15086,7 +14924,7 @@
           <p:cNvPr id="43" name="s8-time-new-status">
             <a:extLst xmlns:a="http://schemas.openxmlformats.org/drawingml/2006/main">
               <a:ext uri="{FF2B5EF4-FFF2-40B4-BE49-F238E27FC236}">
-                <a16:creationId xmlns:a16="http://schemas.microsoft.com/office/drawing/2014/main" id="{5D4AE608-D245-4D70-8C7B-0B3D4A9FCF2F}"/>
+                <a16:creationId xmlns:a16="http://schemas.microsoft.com/office/drawing/2014/main" id="{44467451-1748-45E2-A5C9-E0DACD96D83D}"/>
               </a:ext>
             </a:extLst>
           </p:cNvPr>
@@ -15131,7 +14969,7 @@
           <p:cNvPr id="44" name="s8-time-new-interpretation">
             <a:extLst xmlns:a="http://schemas.openxmlformats.org/drawingml/2006/main">
               <a:ext uri="{FF2B5EF4-FFF2-40B4-BE49-F238E27FC236}">
-                <a16:creationId xmlns:a16="http://schemas.microsoft.com/office/drawing/2014/main" id="{964CF36C-3BDD-45AD-921B-B4C433A8433A}"/>
+                <a16:creationId xmlns:a16="http://schemas.microsoft.com/office/drawing/2014/main" id="{12F0BFE2-F003-4533-9B36-F3D7EC4AF8B8}"/>
               </a:ext>
             </a:extLst>
           </p:cNvPr>
@@ -15198,7 +15036,7 @@
           <p:cNvPr id="46" name="footer-source-8">
             <a:extLst xmlns:a="http://schemas.openxmlformats.org/drawingml/2006/main">
               <a:ext uri="{FF2B5EF4-FFF2-40B4-BE49-F238E27FC236}">
-                <a16:creationId xmlns:a16="http://schemas.microsoft.com/office/drawing/2014/main" id="{800C46D1-001E-43BF-B9A2-C94B7A9C2BB0}"/>
+                <a16:creationId xmlns:a16="http://schemas.microsoft.com/office/drawing/2014/main" id="{285FFE47-0766-4299-9254-B39F6541F250}"/>
               </a:ext>
             </a:extLst>
           </p:cNvPr>
@@ -15243,7 +15081,7 @@
           <p:cNvPr id="47" name="footer-number-8">
             <a:extLst xmlns:a="http://schemas.openxmlformats.org/drawingml/2006/main">
               <a:ext uri="{FF2B5EF4-FFF2-40B4-BE49-F238E27FC236}">
-                <a16:creationId xmlns:a16="http://schemas.microsoft.com/office/drawing/2014/main" id="{CD8116DC-07E3-465F-991D-075580B409A2}"/>
+                <a16:creationId xmlns:a16="http://schemas.microsoft.com/office/drawing/2014/main" id="{5C550171-F99C-4908-887B-A35E541AD5AE}"/>
               </a:ext>
             </a:extLst>
           </p:cNvPr>
@@ -15286,7 +15124,7 @@
     </p:spTree>
     <p:extLst>
       <p:ext uri="{BB962C8B-B14F-4D97-AF65-F5344CB8AC3E}">
-        <p14:creationId xmlns:p14="http://schemas.microsoft.com/office/powerpoint/2010/main" val="1158022606"/>
+        <p14:creationId xmlns:p14="http://schemas.microsoft.com/office/powerpoint/2010/main" val="1119215672"/>
       </p:ext>
     </p:extLst>
   </p:cSld>
@@ -15317,7 +15155,7 @@
           <p:cNvPr id="33" name="s9-title">
             <a:extLst xmlns:a="http://schemas.openxmlformats.org/drawingml/2006/main">
               <a:ext uri="{FF2B5EF4-FFF2-40B4-BE49-F238E27FC236}">
-                <a16:creationId xmlns:a16="http://schemas.microsoft.com/office/drawing/2014/main" id="{1C2D6C44-A572-4B38-8353-974F2CDB326A}"/>
+                <a16:creationId xmlns:a16="http://schemas.microsoft.com/office/drawing/2014/main" id="{8507B362-E400-4F53-BDFD-96469BC15E1D}"/>
               </a:ext>
             </a:extLst>
           </p:cNvPr>
@@ -15362,7 +15200,7 @@
           <p:cNvPr id="2" name="s9-subtitle">
             <a:extLst xmlns:a="http://schemas.openxmlformats.org/drawingml/2006/main">
               <a:ext uri="{FF2B5EF4-FFF2-40B4-BE49-F238E27FC236}">
-                <a16:creationId xmlns:a16="http://schemas.microsoft.com/office/drawing/2014/main" id="{F671668A-7E5A-4988-B712-FA6922A8B285}"/>
+                <a16:creationId xmlns:a16="http://schemas.microsoft.com/office/drawing/2014/main" id="{DC68917B-BCA6-4BF1-A0A0-994AFDC340DA}"/>
               </a:ext>
             </a:extLst>
           </p:cNvPr>
@@ -15407,7 +15245,7 @@
           <p:cNvPr id="3" name="s9-gate-h">
             <a:extLst xmlns:a="http://schemas.openxmlformats.org/drawingml/2006/main">
               <a:ext uri="{FF2B5EF4-FFF2-40B4-BE49-F238E27FC236}">
-                <a16:creationId xmlns:a16="http://schemas.microsoft.com/office/drawing/2014/main" id="{DC8C5553-22FA-4539-9CC3-9DEE67CAECD3}"/>
+                <a16:creationId xmlns:a16="http://schemas.microsoft.com/office/drawing/2014/main" id="{87EB7870-1C1E-4226-99D8-B949524662AF}"/>
               </a:ext>
             </a:extLst>
           </p:cNvPr>
@@ -15452,7 +15290,7 @@
           <p:cNvPr id="4" name="s9-result-h">
             <a:extLst xmlns:a="http://schemas.openxmlformats.org/drawingml/2006/main">
               <a:ext uri="{FF2B5EF4-FFF2-40B4-BE49-F238E27FC236}">
-                <a16:creationId xmlns:a16="http://schemas.microsoft.com/office/drawing/2014/main" id="{AEED5511-236C-4571-B3A2-0B5296BF0122}"/>
+                <a16:creationId xmlns:a16="http://schemas.microsoft.com/office/drawing/2014/main" id="{E7F0CC50-27A8-45C7-9FF2-C0243D0C757A}"/>
               </a:ext>
             </a:extLst>
           </p:cNvPr>
@@ -15497,7 +15335,7 @@
           <p:cNvPr id="5" name="s9-row1">
             <a:extLst xmlns:a="http://schemas.openxmlformats.org/drawingml/2006/main">
               <a:ext uri="{FF2B5EF4-FFF2-40B4-BE49-F238E27FC236}">
-                <a16:creationId xmlns:a16="http://schemas.microsoft.com/office/drawing/2014/main" id="{0BDB5C74-C2AE-464B-BA50-185299F9FC6C}"/>
+                <a16:creationId xmlns:a16="http://schemas.microsoft.com/office/drawing/2014/main" id="{BB7CA60E-7A7D-48DA-875C-A6D3040EE74A}"/>
               </a:ext>
             </a:extLst>
           </p:cNvPr>
@@ -15532,7 +15370,7 @@
           <p:cNvPr id="6" name="s9-row2">
             <a:extLst xmlns:a="http://schemas.openxmlformats.org/drawingml/2006/main">
               <a:ext uri="{FF2B5EF4-FFF2-40B4-BE49-F238E27FC236}">
-                <a16:creationId xmlns:a16="http://schemas.microsoft.com/office/drawing/2014/main" id="{8AE069FE-7884-46F8-B7B4-5155F364234F}"/>
+                <a16:creationId xmlns:a16="http://schemas.microsoft.com/office/drawing/2014/main" id="{1A3C9F18-DFCB-44B9-B4BE-5933DC3EDB53}"/>
               </a:ext>
             </a:extLst>
           </p:cNvPr>
@@ -15567,7 +15405,7 @@
           <p:cNvPr id="7" name="s9-row3">
             <a:extLst xmlns:a="http://schemas.openxmlformats.org/drawingml/2006/main">
               <a:ext uri="{FF2B5EF4-FFF2-40B4-BE49-F238E27FC236}">
-                <a16:creationId xmlns:a16="http://schemas.microsoft.com/office/drawing/2014/main" id="{FCBA6BDA-1F5B-4A34-9CE6-E77C0B807478}"/>
+                <a16:creationId xmlns:a16="http://schemas.microsoft.com/office/drawing/2014/main" id="{4D4A9B8B-87AC-41FE-94A7-3CE97C277B02}"/>
               </a:ext>
             </a:extLst>
           </p:cNvPr>
@@ -15602,7 +15440,7 @@
           <p:cNvPr id="8" name="s9-row4">
             <a:extLst xmlns:a="http://schemas.openxmlformats.org/drawingml/2006/main">
               <a:ext uri="{FF2B5EF4-FFF2-40B4-BE49-F238E27FC236}">
-                <a16:creationId xmlns:a16="http://schemas.microsoft.com/office/drawing/2014/main" id="{72139E31-5EED-4F16-AFEC-10A67A43ABFF}"/>
+                <a16:creationId xmlns:a16="http://schemas.microsoft.com/office/drawing/2014/main" id="{A8A5F3D7-9BC5-4866-8118-7E5DA63BF74B}"/>
               </a:ext>
             </a:extLst>
           </p:cNvPr>
@@ -15637,7 +15475,7 @@
           <p:cNvPr id="9" name="s9-row5">
             <a:extLst xmlns:a="http://schemas.openxmlformats.org/drawingml/2006/main">
               <a:ext uri="{FF2B5EF4-FFF2-40B4-BE49-F238E27FC236}">
-                <a16:creationId xmlns:a16="http://schemas.microsoft.com/office/drawing/2014/main" id="{4A8BA753-ED05-4002-8B8D-37084D832200}"/>
+                <a16:creationId xmlns:a16="http://schemas.microsoft.com/office/drawing/2014/main" id="{4C4A5A5D-3B52-4BB9-AE11-73AF8F319857}"/>
               </a:ext>
             </a:extLst>
           </p:cNvPr>
@@ -15672,7 +15510,7 @@
           <p:cNvPr id="10" name="s9-row1-k">
             <a:extLst xmlns:a="http://schemas.openxmlformats.org/drawingml/2006/main">
               <a:ext uri="{FF2B5EF4-FFF2-40B4-BE49-F238E27FC236}">
-                <a16:creationId xmlns:a16="http://schemas.microsoft.com/office/drawing/2014/main" id="{099EEDEE-01BA-4E89-AE8A-2E1BB9251D29}"/>
+                <a16:creationId xmlns:a16="http://schemas.microsoft.com/office/drawing/2014/main" id="{6CC3C8CD-A1F6-4FA6-8B80-48FD6B24FF19}"/>
               </a:ext>
             </a:extLst>
           </p:cNvPr>
@@ -15717,7 +15555,7 @@
           <p:cNvPr id="11" name="s9-row1-v">
             <a:extLst xmlns:a="http://schemas.openxmlformats.org/drawingml/2006/main">
               <a:ext uri="{FF2B5EF4-FFF2-40B4-BE49-F238E27FC236}">
-                <a16:creationId xmlns:a16="http://schemas.microsoft.com/office/drawing/2014/main" id="{C95656F5-102C-4298-B9E2-DBAF536499D1}"/>
+                <a16:creationId xmlns:a16="http://schemas.microsoft.com/office/drawing/2014/main" id="{6780D2EA-25AB-4691-A31A-6B7611818B11}"/>
               </a:ext>
             </a:extLst>
           </p:cNvPr>
@@ -15762,7 +15600,7 @@
           <p:cNvPr id="12" name="s9-row2-k">
             <a:extLst xmlns:a="http://schemas.openxmlformats.org/drawingml/2006/main">
               <a:ext uri="{FF2B5EF4-FFF2-40B4-BE49-F238E27FC236}">
-                <a16:creationId xmlns:a16="http://schemas.microsoft.com/office/drawing/2014/main" id="{EF44564C-CE4B-4A51-94F2-FC6A69513422}"/>
+                <a16:creationId xmlns:a16="http://schemas.microsoft.com/office/drawing/2014/main" id="{04900EFB-217D-43EA-9EDC-932B20DFFB3F}"/>
               </a:ext>
             </a:extLst>
           </p:cNvPr>
@@ -15807,7 +15645,7 @@
           <p:cNvPr id="13" name="s9-row2-v">
             <a:extLst xmlns:a="http://schemas.openxmlformats.org/drawingml/2006/main">
               <a:ext uri="{FF2B5EF4-FFF2-40B4-BE49-F238E27FC236}">
-                <a16:creationId xmlns:a16="http://schemas.microsoft.com/office/drawing/2014/main" id="{F06A17EC-CB78-4571-8119-9B04FEE2B38F}"/>
+                <a16:creationId xmlns:a16="http://schemas.microsoft.com/office/drawing/2014/main" id="{63A4F8A9-E596-4D61-815F-E3DF62964E92}"/>
               </a:ext>
             </a:extLst>
           </p:cNvPr>
@@ -15852,7 +15690,7 @@
           <p:cNvPr id="14" name="s9-row3-k">
             <a:extLst xmlns:a="http://schemas.openxmlformats.org/drawingml/2006/main">
               <a:ext uri="{FF2B5EF4-FFF2-40B4-BE49-F238E27FC236}">
-                <a16:creationId xmlns:a16="http://schemas.microsoft.com/office/drawing/2014/main" id="{AED4CE7A-3AC9-4310-B4B5-15CC50208529}"/>
+                <a16:creationId xmlns:a16="http://schemas.microsoft.com/office/drawing/2014/main" id="{2398B0AF-BC1F-4DD9-B6F0-1C9116524A59}"/>
               </a:ext>
             </a:extLst>
           </p:cNvPr>
@@ -15897,7 +15735,7 @@
           <p:cNvPr id="15" name="s9-row3-v">
             <a:extLst xmlns:a="http://schemas.openxmlformats.org/drawingml/2006/main">
               <a:ext uri="{FF2B5EF4-FFF2-40B4-BE49-F238E27FC236}">
-                <a16:creationId xmlns:a16="http://schemas.microsoft.com/office/drawing/2014/main" id="{6244F132-30D9-44EA-9219-C83FF2260CF2}"/>
+                <a16:creationId xmlns:a16="http://schemas.microsoft.com/office/drawing/2014/main" id="{C77CA989-CEDC-4BC0-B054-0381DA8FE446}"/>
               </a:ext>
             </a:extLst>
           </p:cNvPr>
@@ -15942,7 +15780,7 @@
           <p:cNvPr id="16" name="s9-row4-k">
             <a:extLst xmlns:a="http://schemas.openxmlformats.org/drawingml/2006/main">
               <a:ext uri="{FF2B5EF4-FFF2-40B4-BE49-F238E27FC236}">
-                <a16:creationId xmlns:a16="http://schemas.microsoft.com/office/drawing/2014/main" id="{87BAAF29-3584-477A-B972-71D418456FA3}"/>
+                <a16:creationId xmlns:a16="http://schemas.microsoft.com/office/drawing/2014/main" id="{B59ADD52-2BD4-48CB-98FC-CC9663C79FBE}"/>
               </a:ext>
             </a:extLst>
           </p:cNvPr>
@@ -15987,7 +15825,7 @@
           <p:cNvPr id="17" name="s9-row4-v">
             <a:extLst xmlns:a="http://schemas.openxmlformats.org/drawingml/2006/main">
               <a:ext uri="{FF2B5EF4-FFF2-40B4-BE49-F238E27FC236}">
-                <a16:creationId xmlns:a16="http://schemas.microsoft.com/office/drawing/2014/main" id="{62BECA40-37AF-4801-B05C-B3F4A53205A0}"/>
+                <a16:creationId xmlns:a16="http://schemas.microsoft.com/office/drawing/2014/main" id="{70C2E06F-3F88-4156-837F-623A0987E780}"/>
               </a:ext>
             </a:extLst>
           </p:cNvPr>
@@ -16032,7 +15870,7 @@
           <p:cNvPr id="18" name="s9-row5-k">
             <a:extLst xmlns:a="http://schemas.openxmlformats.org/drawingml/2006/main">
               <a:ext uri="{FF2B5EF4-FFF2-40B4-BE49-F238E27FC236}">
-                <a16:creationId xmlns:a16="http://schemas.microsoft.com/office/drawing/2014/main" id="{BDF30EC8-014E-4369-B167-6A00D4837DC9}"/>
+                <a16:creationId xmlns:a16="http://schemas.microsoft.com/office/drawing/2014/main" id="{D9C8C48B-6DEA-4B89-A45C-C2BCCA9A6F41}"/>
               </a:ext>
             </a:extLst>
           </p:cNvPr>
@@ -16077,7 +15915,7 @@
           <p:cNvPr id="19" name="s9-row5-v">
             <a:extLst xmlns:a="http://schemas.openxmlformats.org/drawingml/2006/main">
               <a:ext uri="{FF2B5EF4-FFF2-40B4-BE49-F238E27FC236}">
-                <a16:creationId xmlns:a16="http://schemas.microsoft.com/office/drawing/2014/main" id="{FB4D8195-6891-4A34-82B8-1F5079DC96ED}"/>
+                <a16:creationId xmlns:a16="http://schemas.microsoft.com/office/drawing/2014/main" id="{B3381B8B-A695-487C-9C73-9BCF183D7629}"/>
               </a:ext>
             </a:extLst>
           </p:cNvPr>
@@ -16122,7 +15960,7 @@
           <p:cNvPr id="20" name="s9-boundary">
             <a:extLst xmlns:a="http://schemas.openxmlformats.org/drawingml/2006/main">
               <a:ext uri="{FF2B5EF4-FFF2-40B4-BE49-F238E27FC236}">
-                <a16:creationId xmlns:a16="http://schemas.microsoft.com/office/drawing/2014/main" id="{6A8CB2D1-54B1-4ECC-98D7-189D7C101D22}"/>
+                <a16:creationId xmlns:a16="http://schemas.microsoft.com/office/drawing/2014/main" id="{7B11D2F0-2395-48D9-8761-BE95232265BF}"/>
               </a:ext>
             </a:extLst>
           </p:cNvPr>
@@ -16157,7 +15995,7 @@
           <p:cNvPr id="21" name="s9-boundary-k">
             <a:extLst xmlns:a="http://schemas.openxmlformats.org/drawingml/2006/main">
               <a:ext uri="{FF2B5EF4-FFF2-40B4-BE49-F238E27FC236}">
-                <a16:creationId xmlns:a16="http://schemas.microsoft.com/office/drawing/2014/main" id="{2BCBC5BA-3729-42A2-B3ED-F16A318155BA}"/>
+                <a16:creationId xmlns:a16="http://schemas.microsoft.com/office/drawing/2014/main" id="{E8C62ADF-5456-42DB-88E8-530CAF50136F}"/>
               </a:ext>
             </a:extLst>
           </p:cNvPr>
@@ -16202,7 +16040,7 @@
           <p:cNvPr id="22" name="s9-boundary-stat">
             <a:extLst xmlns:a="http://schemas.openxmlformats.org/drawingml/2006/main">
               <a:ext uri="{FF2B5EF4-FFF2-40B4-BE49-F238E27FC236}">
-                <a16:creationId xmlns:a16="http://schemas.microsoft.com/office/drawing/2014/main" id="{98B12DE3-B51E-40D2-BE36-73A5CD8A4A98}"/>
+                <a16:creationId xmlns:a16="http://schemas.microsoft.com/office/drawing/2014/main" id="{44E4B0CC-CCEF-4B97-A3AB-6E4C30E376C6}"/>
               </a:ext>
             </a:extLst>
           </p:cNvPr>
@@ -16247,7 +16085,7 @@
           <p:cNvPr id="23" name="s9-boundary-label">
             <a:extLst xmlns:a="http://schemas.openxmlformats.org/drawingml/2006/main">
               <a:ext uri="{FF2B5EF4-FFF2-40B4-BE49-F238E27FC236}">
-                <a16:creationId xmlns:a16="http://schemas.microsoft.com/office/drawing/2014/main" id="{DA8D8FC0-9B39-4D96-9D62-35805DEA10F7}"/>
+                <a16:creationId xmlns:a16="http://schemas.microsoft.com/office/drawing/2014/main" id="{67EC59DF-C884-41AC-BD45-6A51CA96ACAA}"/>
               </a:ext>
             </a:extLst>
           </p:cNvPr>
@@ -16314,7 +16152,7 @@
           <p:cNvPr id="25" name="s9-supported-k">
             <a:extLst xmlns:a="http://schemas.openxmlformats.org/drawingml/2006/main">
               <a:ext uri="{FF2B5EF4-FFF2-40B4-BE49-F238E27FC236}">
-                <a16:creationId xmlns:a16="http://schemas.microsoft.com/office/drawing/2014/main" id="{27117471-300F-41F4-A545-005A360CACCE}"/>
+                <a16:creationId xmlns:a16="http://schemas.microsoft.com/office/drawing/2014/main" id="{AD62BDE3-91D4-4EBB-B124-581F5AA8DDFA}"/>
               </a:ext>
             </a:extLst>
           </p:cNvPr>
@@ -16359,7 +16197,7 @@
           <p:cNvPr id="26" name="s9-supported-v">
             <a:extLst xmlns:a="http://schemas.openxmlformats.org/drawingml/2006/main">
               <a:ext uri="{FF2B5EF4-FFF2-40B4-BE49-F238E27FC236}">
-                <a16:creationId xmlns:a16="http://schemas.microsoft.com/office/drawing/2014/main" id="{5D3733BE-C17D-4FB7-96AD-7F6BABDD06EB}"/>
+                <a16:creationId xmlns:a16="http://schemas.microsoft.com/office/drawing/2014/main" id="{C98DC62F-32D3-4A88-9834-AC1A3A7314C2}"/>
               </a:ext>
             </a:extLst>
           </p:cNvPr>
@@ -16404,7 +16242,7 @@
           <p:cNvPr id="27" name="s9-limit-k">
             <a:extLst xmlns:a="http://schemas.openxmlformats.org/drawingml/2006/main">
               <a:ext uri="{FF2B5EF4-FFF2-40B4-BE49-F238E27FC236}">
-                <a16:creationId xmlns:a16="http://schemas.microsoft.com/office/drawing/2014/main" id="{CAA4463A-7054-40FF-AE1F-D9C88CC3AEB3}"/>
+                <a16:creationId xmlns:a16="http://schemas.microsoft.com/office/drawing/2014/main" id="{4B12E671-17F5-40E6-8C38-52C22D68B9D2}"/>
               </a:ext>
             </a:extLst>
           </p:cNvPr>
@@ -16449,7 +16287,7 @@
           <p:cNvPr id="28" name="s9-limit-v">
             <a:extLst xmlns:a="http://schemas.openxmlformats.org/drawingml/2006/main">
               <a:ext uri="{FF2B5EF4-FFF2-40B4-BE49-F238E27FC236}">
-                <a16:creationId xmlns:a16="http://schemas.microsoft.com/office/drawing/2014/main" id="{669FC884-D7DA-4FFC-A137-510ADAA92477}"/>
+                <a16:creationId xmlns:a16="http://schemas.microsoft.com/office/drawing/2014/main" id="{4D336384-66DF-48FA-91AE-9C0574501B11}"/>
               </a:ext>
             </a:extLst>
           </p:cNvPr>
@@ -16494,7 +16332,7 @@
           <p:cNvPr id="29" name="s9-study-note">
             <a:extLst xmlns:a="http://schemas.openxmlformats.org/drawingml/2006/main">
               <a:ext uri="{FF2B5EF4-FFF2-40B4-BE49-F238E27FC236}">
-                <a16:creationId xmlns:a16="http://schemas.microsoft.com/office/drawing/2014/main" id="{D6B11A0B-94DF-470A-BC44-F62DA6473A0E}"/>
+                <a16:creationId xmlns:a16="http://schemas.microsoft.com/office/drawing/2014/main" id="{786E952B-BD57-4773-A00C-659E0D494221}"/>
               </a:ext>
             </a:extLst>
           </p:cNvPr>
@@ -16561,7 +16399,7 @@
           <p:cNvPr id="31" name="footer-source-9">
             <a:extLst xmlns:a="http://schemas.openxmlformats.org/drawingml/2006/main">
               <a:ext uri="{FF2B5EF4-FFF2-40B4-BE49-F238E27FC236}">
-                <a16:creationId xmlns:a16="http://schemas.microsoft.com/office/drawing/2014/main" id="{096A0322-2AEE-4346-B5F3-7A00499E92BD}"/>
+                <a16:creationId xmlns:a16="http://schemas.microsoft.com/office/drawing/2014/main" id="{66E9ACD7-278A-4D97-9420-FFF767743D50}"/>
               </a:ext>
             </a:extLst>
           </p:cNvPr>
@@ -16606,7 +16444,7 @@
           <p:cNvPr id="32" name="footer-number-9">
             <a:extLst xmlns:a="http://schemas.openxmlformats.org/drawingml/2006/main">
               <a:ext uri="{FF2B5EF4-FFF2-40B4-BE49-F238E27FC236}">
-                <a16:creationId xmlns:a16="http://schemas.microsoft.com/office/drawing/2014/main" id="{DADC395E-A392-454F-97D2-0FB82ED49181}"/>
+                <a16:creationId xmlns:a16="http://schemas.microsoft.com/office/drawing/2014/main" id="{4E0DC274-D9C9-412D-BDFB-8D9B2F1F3FFB}"/>
               </a:ext>
             </a:extLst>
           </p:cNvPr>
@@ -16649,7 +16487,7 @@
     </p:spTree>
     <p:extLst>
       <p:ext uri="{BB962C8B-B14F-4D97-AF65-F5344CB8AC3E}">
-        <p14:creationId xmlns:p14="http://schemas.microsoft.com/office/powerpoint/2010/main" val="594593191"/>
+        <p14:creationId xmlns:p14="http://schemas.microsoft.com/office/powerpoint/2010/main" val="231114333"/>
       </p:ext>
     </p:extLst>
   </p:cSld>

--- a/outputs/vertex-palace-build-week-demo.pptx
+++ b/outputs/vertex-palace-build-week-demo.pptx
@@ -2,24 +2,24 @@
 <file path=ppt/presentation.xml><?xml version="1.0" encoding="utf-8"?>
 <p:presentation xmlns:p="http://schemas.openxmlformats.org/presentationml/2006/main">
   <p:sldMasterIdLst>
-    <p:sldMasterId xmlns:r="http://schemas.openxmlformats.org/officeDocument/2006/relationships" id="2147483648" r:id="Rfa7efd61061c429f"/>
+    <p:sldMasterId xmlns:r="http://schemas.openxmlformats.org/officeDocument/2006/relationships" id="2147483648" r:id="R9a1527e3f664493a"/>
   </p:sldMasterIdLst>
   <p:notesMasterIdLst>
-    <p:notesMasterId xmlns:r="http://schemas.openxmlformats.org/officeDocument/2006/relationships" r:id="Rdc5b3f1b06fa4e75"/>
+    <p:notesMasterId xmlns:r="http://schemas.openxmlformats.org/officeDocument/2006/relationships" r:id="R26b3130091ff41e9"/>
   </p:notesMasterIdLst>
   <p:sldIdLst>
-    <p:sldId xmlns:r="http://schemas.openxmlformats.org/officeDocument/2006/relationships" id="256" r:id="R8f8f2530d2df4f6c"/>
-    <p:sldId xmlns:r="http://schemas.openxmlformats.org/officeDocument/2006/relationships" id="257" r:id="Ra553d0c38f834a20"/>
-    <p:sldId xmlns:r="http://schemas.openxmlformats.org/officeDocument/2006/relationships" id="258" r:id="R88478c72c5244abf"/>
-    <p:sldId xmlns:r="http://schemas.openxmlformats.org/officeDocument/2006/relationships" id="259" r:id="Rfa3e39caf32949f1"/>
-    <p:sldId xmlns:r="http://schemas.openxmlformats.org/officeDocument/2006/relationships" id="260" r:id="R0a4c72b3dcb444a0"/>
-    <p:sldId xmlns:r="http://schemas.openxmlformats.org/officeDocument/2006/relationships" id="261" r:id="Raa743e28550944a7"/>
-    <p:sldId xmlns:r="http://schemas.openxmlformats.org/officeDocument/2006/relationships" id="262" r:id="R305d7fe5ea074677"/>
-    <p:sldId xmlns:r="http://schemas.openxmlformats.org/officeDocument/2006/relationships" id="263" r:id="R4c741d9685b2475d"/>
-    <p:sldId xmlns:r="http://schemas.openxmlformats.org/officeDocument/2006/relationships" id="264" r:id="Reac28eb7789c4297"/>
-    <p:sldId xmlns:r="http://schemas.openxmlformats.org/officeDocument/2006/relationships" id="265" r:id="R7ceae9fe556b4351"/>
-    <p:sldId xmlns:r="http://schemas.openxmlformats.org/officeDocument/2006/relationships" id="266" r:id="Rcf74c570646a4b09"/>
-    <p:sldId xmlns:r="http://schemas.openxmlformats.org/officeDocument/2006/relationships" id="267" r:id="Rd3ef8fe7668c4a6c"/>
+    <p:sldId xmlns:r="http://schemas.openxmlformats.org/officeDocument/2006/relationships" id="256" r:id="R046a9563a86f4f7d"/>
+    <p:sldId xmlns:r="http://schemas.openxmlformats.org/officeDocument/2006/relationships" id="257" r:id="R925c9c8d69e8439a"/>
+    <p:sldId xmlns:r="http://schemas.openxmlformats.org/officeDocument/2006/relationships" id="258" r:id="R3f4f772aa47c40e5"/>
+    <p:sldId xmlns:r="http://schemas.openxmlformats.org/officeDocument/2006/relationships" id="259" r:id="Rd609fa70d57943d2"/>
+    <p:sldId xmlns:r="http://schemas.openxmlformats.org/officeDocument/2006/relationships" id="260" r:id="Re6cc03ad701b47dd"/>
+    <p:sldId xmlns:r="http://schemas.openxmlformats.org/officeDocument/2006/relationships" id="261" r:id="Rfc802f44aafa4d18"/>
+    <p:sldId xmlns:r="http://schemas.openxmlformats.org/officeDocument/2006/relationships" id="262" r:id="R45c047a3952c4090"/>
+    <p:sldId xmlns:r="http://schemas.openxmlformats.org/officeDocument/2006/relationships" id="263" r:id="R78ce1b5f112d4c5a"/>
+    <p:sldId xmlns:r="http://schemas.openxmlformats.org/officeDocument/2006/relationships" id="264" r:id="Rcd339ced721a44f2"/>
+    <p:sldId xmlns:r="http://schemas.openxmlformats.org/officeDocument/2006/relationships" id="265" r:id="R3ef1b87c345c4d33"/>
+    <p:sldId xmlns:r="http://schemas.openxmlformats.org/officeDocument/2006/relationships" id="266" r:id="R846745ac91574482"/>
+    <p:sldId xmlns:r="http://schemas.openxmlformats.org/officeDocument/2006/relationships" id="267" r:id="Rcc99a644f15b426c"/>
   </p:sldIdLst>
   <p:sldSz cx="12192000" cy="6858000"/>
   <p:notesSz cx="6858000" cy="9144000"/>
@@ -1173,7 +1173,7 @@
           <a:lstStyle xmlns:a="http://schemas.openxmlformats.org/drawingml/2006/main"/>
           <a:p xmlns:a="http://schemas.openxmlformats.org/drawingml/2006/main">
             <a:r>
-              <a:t>Start with experimental control. Sixteen tasks were each run four ways: no Palace, route metadata only, always-on Full Palace, and Adaptive mode selection.</a:t>
+              <a:t>Start by defining the baseline. Codex alone is the no-Palace Control: the same Codex searches the repository directly. Sixteen tasks were each run four ways: Codex alone, route metadata only, always-on Full Palace, and Adaptive mode selection.</a:t>
             </a:r>
           </a:p>
           <a:p xmlns:a="http://schemas.openxmlformats.org/drawingml/2006/main">
@@ -1246,6 +1246,11 @@
         <p:txBody>
           <a:bodyPr xmlns:a="http://schemas.openxmlformats.org/drawingml/2006/main"/>
           <a:lstStyle xmlns:a="http://schemas.openxmlformats.org/drawingml/2006/main"/>
+          <a:p xmlns:a="http://schemas.openxmlformats.org/drawingml/2006/main">
+            <a:r>
+              <a:t>Define the comparison before reading the result: Codex alone is the no-Palace Control, not another model or agent. Everything else was held fixed. The displayed numbers are paired Adaptive-minus-Codex-alone differences.</a:t>
+            </a:r>
+          </a:p>
           <a:p xmlns:a="http://schemas.openxmlformats.org/drawingml/2006/main">
             <a:r>
               <a:t>Say the uncomfortable result plainly: if Vertex Palace were forced on for every task, this benchmark would argue that it was unnecessary for these deterministic synthetic fixtures. Adaptive added 4.5 tool calls, while reported Token and time central estimates were higher but inconclusive.</a:t>
@@ -1476,7 +1481,7 @@
   </p:cSld>
   <p:clrMap bg1="lt1" tx1="dk1" bg2="lt2" tx2="dk2" accent1="accent1" accent2="accent2" accent3="accent3" accent4="accent4" accent5="accent5" accent6="accent6" hlink="hlink" folHlink="folHlink"/>
   <p:sldLayoutIdLst>
-    <p:sldLayoutId xmlns:r="http://schemas.openxmlformats.org/officeDocument/2006/relationships" id="2147483649" r:id="R850c1df3decc421f"/>
+    <p:sldLayoutId xmlns:r="http://schemas.openxmlformats.org/officeDocument/2006/relationships" id="2147483649" r:id="Rd3091bcf134c4561"/>
   </p:sldLayoutIdLst>
   <p:txStyles>
     <p:titleStyle>
@@ -2197,7 +2202,7 @@
           <p:cNvPr id="7" name="s1-eyebrow">
             <a:extLst xmlns:a="http://schemas.openxmlformats.org/drawingml/2006/main">
               <a:ext uri="{FF2B5EF4-FFF2-40B4-BE49-F238E27FC236}">
-                <a16:creationId xmlns:a16="http://schemas.microsoft.com/office/drawing/2014/main" id="{41C192AE-BED5-4A4F-943E-64B34B26425D}"/>
+                <a16:creationId xmlns:a16="http://schemas.microsoft.com/office/drawing/2014/main" id="{201B327C-6A4A-4221-90C4-CCFD0914DE4A}"/>
               </a:ext>
             </a:extLst>
           </p:cNvPr>
@@ -2242,7 +2247,7 @@
           <p:cNvPr id="2" name="s1-title">
             <a:extLst xmlns:a="http://schemas.openxmlformats.org/drawingml/2006/main">
               <a:ext uri="{FF2B5EF4-FFF2-40B4-BE49-F238E27FC236}">
-                <a16:creationId xmlns:a16="http://schemas.microsoft.com/office/drawing/2014/main" id="{E8116F1E-3E9F-4042-8978-8FAFFD912EE8}"/>
+                <a16:creationId xmlns:a16="http://schemas.microsoft.com/office/drawing/2014/main" id="{BE248E8D-F991-4EA1-930E-63226690D67B}"/>
               </a:ext>
             </a:extLst>
           </p:cNvPr>
@@ -2310,7 +2315,7 @@
           <p:cNvPr id="4" name="s1-subtitle">
             <a:extLst xmlns:a="http://schemas.openxmlformats.org/drawingml/2006/main">
               <a:ext uri="{FF2B5EF4-FFF2-40B4-BE49-F238E27FC236}">
-                <a16:creationId xmlns:a16="http://schemas.microsoft.com/office/drawing/2014/main" id="{574F8BF2-2299-40E0-BE13-7D0B6EAF6549}"/>
+                <a16:creationId xmlns:a16="http://schemas.microsoft.com/office/drawing/2014/main" id="{2B0FA419-93BB-44C6-B18E-97BE047A40B4}"/>
               </a:ext>
             </a:extLst>
           </p:cNvPr>
@@ -2355,7 +2360,7 @@
           <p:cNvPr id="5" name="s1-version">
             <a:extLst xmlns:a="http://schemas.openxmlformats.org/drawingml/2006/main">
               <a:ext uri="{FF2B5EF4-FFF2-40B4-BE49-F238E27FC236}">
-                <a16:creationId xmlns:a16="http://schemas.microsoft.com/office/drawing/2014/main" id="{A8EB010A-B1A3-4B88-BE4E-F08BBAE27F7B}"/>
+                <a16:creationId xmlns:a16="http://schemas.microsoft.com/office/drawing/2014/main" id="{1C24CAB5-4138-48F1-BC59-A5EC31151FF4}"/>
               </a:ext>
             </a:extLst>
           </p:cNvPr>
@@ -2404,7 +2409,7 @@
           <p:nvPr/>
         </p:nvPicPr>
         <p:blipFill>
-          <a:blip xmlns:r="http://schemas.openxmlformats.org/officeDocument/2006/relationships" xmlns:a="http://schemas.openxmlformats.org/drawingml/2006/main" r:embed="R09ce5c00e97644fc"/>
+          <a:blip xmlns:r="http://schemas.openxmlformats.org/officeDocument/2006/relationships" xmlns:a="http://schemas.openxmlformats.org/drawingml/2006/main" r:embed="Rd8095c8b1b5e44a2"/>
           <a:stretch xmlns:a="http://schemas.openxmlformats.org/drawingml/2006/main"/>
         </p:blipFill>
         <p:spPr>
@@ -2420,7 +2425,7 @@
     </p:spTree>
     <p:extLst>
       <p:ext uri="{BB962C8B-B14F-4D97-AF65-F5344CB8AC3E}">
-        <p14:creationId xmlns:p14="http://schemas.microsoft.com/office/powerpoint/2010/main" val="1017580000"/>
+        <p14:creationId xmlns:p14="http://schemas.microsoft.com/office/powerpoint/2010/main" val="337108345"/>
       </p:ext>
     </p:extLst>
   </p:cSld>
@@ -2451,7 +2456,7 @@
           <p:cNvPr id="39" name="s10-title">
             <a:extLst xmlns:a="http://schemas.openxmlformats.org/drawingml/2006/main">
               <a:ext uri="{FF2B5EF4-FFF2-40B4-BE49-F238E27FC236}">
-                <a16:creationId xmlns:a16="http://schemas.microsoft.com/office/drawing/2014/main" id="{F27BC063-6326-45FC-8EAC-A4A8127E509F}"/>
+                <a16:creationId xmlns:a16="http://schemas.microsoft.com/office/drawing/2014/main" id="{809D7507-4C0D-4EF4-9B14-B15B29DD0189}"/>
               </a:ext>
             </a:extLst>
           </p:cNvPr>
@@ -2496,7 +2501,7 @@
           <p:cNvPr id="2" name="s10-subtitle">
             <a:extLst xmlns:a="http://schemas.openxmlformats.org/drawingml/2006/main">
               <a:ext uri="{FF2B5EF4-FFF2-40B4-BE49-F238E27FC236}">
-                <a16:creationId xmlns:a16="http://schemas.microsoft.com/office/drawing/2014/main" id="{261E399F-678D-49F0-BD84-ABD438374628}"/>
+                <a16:creationId xmlns:a16="http://schemas.microsoft.com/office/drawing/2014/main" id="{46D1C3E3-02A4-4023-994C-2E032FCD08C3}"/>
               </a:ext>
             </a:extLst>
           </p:cNvPr>
@@ -2541,7 +2546,7 @@
           <p:cNvPr id="3" name="s10-tests">
             <a:extLst xmlns:a="http://schemas.openxmlformats.org/drawingml/2006/main">
               <a:ext uri="{FF2B5EF4-FFF2-40B4-BE49-F238E27FC236}">
-                <a16:creationId xmlns:a16="http://schemas.microsoft.com/office/drawing/2014/main" id="{3D87FFCD-113C-48BA-9D84-BC8A1202D7F4}"/>
+                <a16:creationId xmlns:a16="http://schemas.microsoft.com/office/drawing/2014/main" id="{C4E4B177-1A5B-4AA4-A9C7-20ECB3706466}"/>
               </a:ext>
             </a:extLst>
           </p:cNvPr>
@@ -2576,7 +2581,7 @@
           <p:cNvPr id="4" name="s10-tests-k">
             <a:extLst xmlns:a="http://schemas.openxmlformats.org/drawingml/2006/main">
               <a:ext uri="{FF2B5EF4-FFF2-40B4-BE49-F238E27FC236}">
-                <a16:creationId xmlns:a16="http://schemas.microsoft.com/office/drawing/2014/main" id="{0F410417-F4FA-45EB-BCBA-3C31897B56B3}"/>
+                <a16:creationId xmlns:a16="http://schemas.microsoft.com/office/drawing/2014/main" id="{DEA62B3B-325A-419D-9CEA-1E2BFDFCC43A}"/>
               </a:ext>
             </a:extLst>
           </p:cNvPr>
@@ -2621,7 +2626,7 @@
           <p:cNvPr id="5" name="s10-tests-stat">
             <a:extLst xmlns:a="http://schemas.openxmlformats.org/drawingml/2006/main">
               <a:ext uri="{FF2B5EF4-FFF2-40B4-BE49-F238E27FC236}">
-                <a16:creationId xmlns:a16="http://schemas.microsoft.com/office/drawing/2014/main" id="{4613D372-ABD3-4D0E-906B-D5937B93F5DA}"/>
+                <a16:creationId xmlns:a16="http://schemas.microsoft.com/office/drawing/2014/main" id="{ED7F1BD6-A103-42DF-A19E-C373FB6E3597}"/>
               </a:ext>
             </a:extLst>
           </p:cNvPr>
@@ -2666,7 +2671,7 @@
           <p:cNvPr id="6" name="s10-tests-label">
             <a:extLst xmlns:a="http://schemas.openxmlformats.org/drawingml/2006/main">
               <a:ext uri="{FF2B5EF4-FFF2-40B4-BE49-F238E27FC236}">
-                <a16:creationId xmlns:a16="http://schemas.microsoft.com/office/drawing/2014/main" id="{CE65B99E-2D66-4A16-A5A3-B55E1863E4A0}"/>
+                <a16:creationId xmlns:a16="http://schemas.microsoft.com/office/drawing/2014/main" id="{8E7C6F6F-8F37-4C9E-B1A4-CF7119750EEA}"/>
               </a:ext>
             </a:extLst>
           </p:cNvPr>
@@ -2733,7 +2738,7 @@
           <p:cNvPr id="8" name="s10-tests-body">
             <a:extLst xmlns:a="http://schemas.openxmlformats.org/drawingml/2006/main">
               <a:ext uri="{FF2B5EF4-FFF2-40B4-BE49-F238E27FC236}">
-                <a16:creationId xmlns:a16="http://schemas.microsoft.com/office/drawing/2014/main" id="{9FAF8158-1E05-4353-9CEB-7D9C322D4258}"/>
+                <a16:creationId xmlns:a16="http://schemas.microsoft.com/office/drawing/2014/main" id="{81814738-AB05-4AD0-BE69-6F3895C69BF2}"/>
               </a:ext>
             </a:extLst>
           </p:cNvPr>
@@ -2780,7 +2785,7 @@
           <p:cNvPr id="9" name="s10-test-d1">
             <a:extLst xmlns:a="http://schemas.openxmlformats.org/drawingml/2006/main">
               <a:ext uri="{FF2B5EF4-FFF2-40B4-BE49-F238E27FC236}">
-                <a16:creationId xmlns:a16="http://schemas.microsoft.com/office/drawing/2014/main" id="{CE83ECAA-A54B-4E6A-893B-60F056E2BE44}"/>
+                <a16:creationId xmlns:a16="http://schemas.microsoft.com/office/drawing/2014/main" id="{FEB28929-6F93-4532-8A1A-F29BA5AC54D6}"/>
               </a:ext>
             </a:extLst>
           </p:cNvPr>
@@ -2813,7 +2818,7 @@
           <p:cNvPr id="10" name="s10-test-d2">
             <a:extLst xmlns:a="http://schemas.openxmlformats.org/drawingml/2006/main">
               <a:ext uri="{FF2B5EF4-FFF2-40B4-BE49-F238E27FC236}">
-                <a16:creationId xmlns:a16="http://schemas.microsoft.com/office/drawing/2014/main" id="{510DF344-BD2D-4BAD-91C4-6FC19945F0B5}"/>
+                <a16:creationId xmlns:a16="http://schemas.microsoft.com/office/drawing/2014/main" id="{4E6C1326-3B44-43A6-B03B-115D4CDE0DEF}"/>
               </a:ext>
             </a:extLst>
           </p:cNvPr>
@@ -2846,7 +2851,7 @@
           <p:cNvPr id="11" name="s10-test-d3">
             <a:extLst xmlns:a="http://schemas.openxmlformats.org/drawingml/2006/main">
               <a:ext uri="{FF2B5EF4-FFF2-40B4-BE49-F238E27FC236}">
-                <a16:creationId xmlns:a16="http://schemas.microsoft.com/office/drawing/2014/main" id="{B896DA41-F61A-454E-86A9-9523EFE7205C}"/>
+                <a16:creationId xmlns:a16="http://schemas.microsoft.com/office/drawing/2014/main" id="{F5D5D915-C0EE-4EEE-B72F-503161137258}"/>
               </a:ext>
             </a:extLst>
           </p:cNvPr>
@@ -2879,7 +2884,7 @@
           <p:cNvPr id="12" name="s10-test-g1">
             <a:extLst xmlns:a="http://schemas.openxmlformats.org/drawingml/2006/main">
               <a:ext uri="{FF2B5EF4-FFF2-40B4-BE49-F238E27FC236}">
-                <a16:creationId xmlns:a16="http://schemas.microsoft.com/office/drawing/2014/main" id="{153024CE-DECD-4ED6-A625-3B34D78E77CB}"/>
+                <a16:creationId xmlns:a16="http://schemas.microsoft.com/office/drawing/2014/main" id="{E9160AD9-08A3-496F-91A0-6652CF5C6D2D}"/>
               </a:ext>
             </a:extLst>
           </p:cNvPr>
@@ -2924,7 +2929,7 @@
           <p:cNvPr id="13" name="s10-test-g2">
             <a:extLst xmlns:a="http://schemas.openxmlformats.org/drawingml/2006/main">
               <a:ext uri="{FF2B5EF4-FFF2-40B4-BE49-F238E27FC236}">
-                <a16:creationId xmlns:a16="http://schemas.microsoft.com/office/drawing/2014/main" id="{B30B41DB-C769-41E2-A1D5-B049C3F4FFB0}"/>
+                <a16:creationId xmlns:a16="http://schemas.microsoft.com/office/drawing/2014/main" id="{1BAC6A13-C2C6-435D-B924-80F4A565298E}"/>
               </a:ext>
             </a:extLst>
           </p:cNvPr>
@@ -2969,7 +2974,7 @@
           <p:cNvPr id="14" name="s10-test-g3">
             <a:extLst xmlns:a="http://schemas.openxmlformats.org/drawingml/2006/main">
               <a:ext uri="{FF2B5EF4-FFF2-40B4-BE49-F238E27FC236}">
-                <a16:creationId xmlns:a16="http://schemas.microsoft.com/office/drawing/2014/main" id="{00614CD4-2195-46E2-9306-663231605B7D}"/>
+                <a16:creationId xmlns:a16="http://schemas.microsoft.com/office/drawing/2014/main" id="{D5DCAE87-CE77-4CEC-B380-71EDC548152B}"/>
               </a:ext>
             </a:extLst>
           </p:cNvPr>
@@ -3014,7 +3019,7 @@
           <p:cNvPr id="15" name="s10-tests-foot">
             <a:extLst xmlns:a="http://schemas.openxmlformats.org/drawingml/2006/main">
               <a:ext uri="{FF2B5EF4-FFF2-40B4-BE49-F238E27FC236}">
-                <a16:creationId xmlns:a16="http://schemas.microsoft.com/office/drawing/2014/main" id="{97839723-FD15-43E3-80C1-6BCFB83C93A9}"/>
+                <a16:creationId xmlns:a16="http://schemas.microsoft.com/office/drawing/2014/main" id="{B9835101-6EA7-4CE5-AB16-4CDBA10337EB}"/>
               </a:ext>
             </a:extLst>
           </p:cNvPr>
@@ -3059,7 +3064,7 @@
           <p:cNvPr id="16" name="s10-ci">
             <a:extLst xmlns:a="http://schemas.openxmlformats.org/drawingml/2006/main">
               <a:ext uri="{FF2B5EF4-FFF2-40B4-BE49-F238E27FC236}">
-                <a16:creationId xmlns:a16="http://schemas.microsoft.com/office/drawing/2014/main" id="{CED290D0-6EA4-4D5B-B8BE-4FBC33965613}"/>
+                <a16:creationId xmlns:a16="http://schemas.microsoft.com/office/drawing/2014/main" id="{8147F822-471D-495A-A84D-09159181CB41}"/>
               </a:ext>
             </a:extLst>
           </p:cNvPr>
@@ -3094,7 +3099,7 @@
           <p:cNvPr id="17" name="s10-ci-k">
             <a:extLst xmlns:a="http://schemas.openxmlformats.org/drawingml/2006/main">
               <a:ext uri="{FF2B5EF4-FFF2-40B4-BE49-F238E27FC236}">
-                <a16:creationId xmlns:a16="http://schemas.microsoft.com/office/drawing/2014/main" id="{EAC8066A-455A-48A2-9F5A-2A46062960FC}"/>
+                <a16:creationId xmlns:a16="http://schemas.microsoft.com/office/drawing/2014/main" id="{C4A1BB3E-3D5E-445F-AF1B-A5ACF18B4B3E}"/>
               </a:ext>
             </a:extLst>
           </p:cNvPr>
@@ -3139,7 +3144,7 @@
           <p:cNvPr id="18" name="s10-ci-stat">
             <a:extLst xmlns:a="http://schemas.openxmlformats.org/drawingml/2006/main">
               <a:ext uri="{FF2B5EF4-FFF2-40B4-BE49-F238E27FC236}">
-                <a16:creationId xmlns:a16="http://schemas.microsoft.com/office/drawing/2014/main" id="{35B74422-4ACD-4FBB-B8EB-B9FC9097A648}"/>
+                <a16:creationId xmlns:a16="http://schemas.microsoft.com/office/drawing/2014/main" id="{A3F0902E-57B7-4FC4-9AEC-0B456A446916}"/>
               </a:ext>
             </a:extLst>
           </p:cNvPr>
@@ -3184,7 +3189,7 @@
           <p:cNvPr id="19" name="s10-ci-label">
             <a:extLst xmlns:a="http://schemas.openxmlformats.org/drawingml/2006/main">
               <a:ext uri="{FF2B5EF4-FFF2-40B4-BE49-F238E27FC236}">
-                <a16:creationId xmlns:a16="http://schemas.microsoft.com/office/drawing/2014/main" id="{19F1228C-8E16-460F-B51E-70D35365E519}"/>
+                <a16:creationId xmlns:a16="http://schemas.microsoft.com/office/drawing/2014/main" id="{9B906DF6-B103-460F-9116-102650862C63}"/>
               </a:ext>
             </a:extLst>
           </p:cNvPr>
@@ -3251,7 +3256,7 @@
           <p:cNvPr id="21" name="s10-ci-d1">
             <a:extLst xmlns:a="http://schemas.openxmlformats.org/drawingml/2006/main">
               <a:ext uri="{FF2B5EF4-FFF2-40B4-BE49-F238E27FC236}">
-                <a16:creationId xmlns:a16="http://schemas.microsoft.com/office/drawing/2014/main" id="{191EB898-FCB0-430B-A272-838CC0B43B56}"/>
+                <a16:creationId xmlns:a16="http://schemas.microsoft.com/office/drawing/2014/main" id="{13DF9BB2-6ACD-4A72-8672-8F2546224523}"/>
               </a:ext>
             </a:extLst>
           </p:cNvPr>
@@ -3284,7 +3289,7 @@
           <p:cNvPr id="22" name="s10-ci-d2">
             <a:extLst xmlns:a="http://schemas.openxmlformats.org/drawingml/2006/main">
               <a:ext uri="{FF2B5EF4-FFF2-40B4-BE49-F238E27FC236}">
-                <a16:creationId xmlns:a16="http://schemas.microsoft.com/office/drawing/2014/main" id="{C5A7C34F-A155-4400-B87B-B9DB89012FFC}"/>
+                <a16:creationId xmlns:a16="http://schemas.microsoft.com/office/drawing/2014/main" id="{B0FEDDA0-C908-4E68-84D6-AA747E1D1BE1}"/>
               </a:ext>
             </a:extLst>
           </p:cNvPr>
@@ -3317,7 +3322,7 @@
           <p:cNvPr id="23" name="s10-ci-d3">
             <a:extLst xmlns:a="http://schemas.openxmlformats.org/drawingml/2006/main">
               <a:ext uri="{FF2B5EF4-FFF2-40B4-BE49-F238E27FC236}">
-                <a16:creationId xmlns:a16="http://schemas.microsoft.com/office/drawing/2014/main" id="{984C8550-C944-4978-ABAF-FEB461089B71}"/>
+                <a16:creationId xmlns:a16="http://schemas.microsoft.com/office/drawing/2014/main" id="{5556716E-156B-4E0F-85BE-4708A214C155}"/>
               </a:ext>
             </a:extLst>
           </p:cNvPr>
@@ -3350,7 +3355,7 @@
           <p:cNvPr id="24" name="s10-ci-d4">
             <a:extLst xmlns:a="http://schemas.openxmlformats.org/drawingml/2006/main">
               <a:ext uri="{FF2B5EF4-FFF2-40B4-BE49-F238E27FC236}">
-                <a16:creationId xmlns:a16="http://schemas.microsoft.com/office/drawing/2014/main" id="{721DF192-FAB8-4658-8C67-C32437BF43AC}"/>
+                <a16:creationId xmlns:a16="http://schemas.microsoft.com/office/drawing/2014/main" id="{498B89AB-F8A2-461B-8157-FB2724180765}"/>
               </a:ext>
             </a:extLst>
           </p:cNvPr>
@@ -3383,7 +3388,7 @@
           <p:cNvPr id="25" name="s10-ci-d5">
             <a:extLst xmlns:a="http://schemas.openxmlformats.org/drawingml/2006/main">
               <a:ext uri="{FF2B5EF4-FFF2-40B4-BE49-F238E27FC236}">
-                <a16:creationId xmlns:a16="http://schemas.microsoft.com/office/drawing/2014/main" id="{B5707517-A80D-41ED-94E1-D0DFBF2FD7B9}"/>
+                <a16:creationId xmlns:a16="http://schemas.microsoft.com/office/drawing/2014/main" id="{4478B55B-9F5C-4F6C-B788-8E3CE032A4CD}"/>
               </a:ext>
             </a:extLst>
           </p:cNvPr>
@@ -3416,7 +3421,7 @@
           <p:cNvPr id="26" name="s10-ci-r1">
             <a:extLst xmlns:a="http://schemas.openxmlformats.org/drawingml/2006/main">
               <a:ext uri="{FF2B5EF4-FFF2-40B4-BE49-F238E27FC236}">
-                <a16:creationId xmlns:a16="http://schemas.microsoft.com/office/drawing/2014/main" id="{998C2722-49B7-471F-BC2C-BC940225F0D5}"/>
+                <a16:creationId xmlns:a16="http://schemas.microsoft.com/office/drawing/2014/main" id="{43D6478E-DC7F-4579-B154-5DDEAED5C4EB}"/>
               </a:ext>
             </a:extLst>
           </p:cNvPr>
@@ -3461,7 +3466,7 @@
           <p:cNvPr id="27" name="s10-ci-r2">
             <a:extLst xmlns:a="http://schemas.openxmlformats.org/drawingml/2006/main">
               <a:ext uri="{FF2B5EF4-FFF2-40B4-BE49-F238E27FC236}">
-                <a16:creationId xmlns:a16="http://schemas.microsoft.com/office/drawing/2014/main" id="{9FFA5A5E-2615-4B2F-8E19-2BFDA40822B8}"/>
+                <a16:creationId xmlns:a16="http://schemas.microsoft.com/office/drawing/2014/main" id="{84CC1E37-0CED-4F08-B683-2BF9144CD734}"/>
               </a:ext>
             </a:extLst>
           </p:cNvPr>
@@ -3506,7 +3511,7 @@
           <p:cNvPr id="28" name="s10-ci-r3">
             <a:extLst xmlns:a="http://schemas.openxmlformats.org/drawingml/2006/main">
               <a:ext uri="{FF2B5EF4-FFF2-40B4-BE49-F238E27FC236}">
-                <a16:creationId xmlns:a16="http://schemas.microsoft.com/office/drawing/2014/main" id="{3A030282-3494-4B98-9E15-C1CB6525A3F4}"/>
+                <a16:creationId xmlns:a16="http://schemas.microsoft.com/office/drawing/2014/main" id="{6D786245-A39F-446C-9547-73474E71729F}"/>
               </a:ext>
             </a:extLst>
           </p:cNvPr>
@@ -3551,7 +3556,7 @@
           <p:cNvPr id="29" name="s10-ci-r4">
             <a:extLst xmlns:a="http://schemas.openxmlformats.org/drawingml/2006/main">
               <a:ext uri="{FF2B5EF4-FFF2-40B4-BE49-F238E27FC236}">
-                <a16:creationId xmlns:a16="http://schemas.microsoft.com/office/drawing/2014/main" id="{35A11E4D-D72B-4195-BF69-316E2881C14C}"/>
+                <a16:creationId xmlns:a16="http://schemas.microsoft.com/office/drawing/2014/main" id="{341426AF-9D33-45ED-8BBC-03DC9B29941E}"/>
               </a:ext>
             </a:extLst>
           </p:cNvPr>
@@ -3596,7 +3601,7 @@
           <p:cNvPr id="30" name="s10-ci-r5">
             <a:extLst xmlns:a="http://schemas.openxmlformats.org/drawingml/2006/main">
               <a:ext uri="{FF2B5EF4-FFF2-40B4-BE49-F238E27FC236}">
-                <a16:creationId xmlns:a16="http://schemas.microsoft.com/office/drawing/2014/main" id="{C5AD33EC-4700-4393-9570-372451C3951F}"/>
+                <a16:creationId xmlns:a16="http://schemas.microsoft.com/office/drawing/2014/main" id="{316DDD90-D6F3-4095-B1C1-F40DEA085A8E}"/>
               </a:ext>
             </a:extLst>
           </p:cNvPr>
@@ -3641,7 +3646,7 @@
           <p:cNvPr id="31" name="s10-release">
             <a:extLst xmlns:a="http://schemas.openxmlformats.org/drawingml/2006/main">
               <a:ext uri="{FF2B5EF4-FFF2-40B4-BE49-F238E27FC236}">
-                <a16:creationId xmlns:a16="http://schemas.microsoft.com/office/drawing/2014/main" id="{60FB1B5A-304F-42B3-A2EE-B16843F7A189}"/>
+                <a16:creationId xmlns:a16="http://schemas.microsoft.com/office/drawing/2014/main" id="{1635ADD2-F230-45ED-B19D-F652F6C99292}"/>
               </a:ext>
             </a:extLst>
           </p:cNvPr>
@@ -3676,7 +3681,7 @@
           <p:cNvPr id="32" name="s10-release-k">
             <a:extLst xmlns:a="http://schemas.openxmlformats.org/drawingml/2006/main">
               <a:ext uri="{FF2B5EF4-FFF2-40B4-BE49-F238E27FC236}">
-                <a16:creationId xmlns:a16="http://schemas.microsoft.com/office/drawing/2014/main" id="{74AEE07C-788D-43E7-A8CC-A1C2A73F29A4}"/>
+                <a16:creationId xmlns:a16="http://schemas.microsoft.com/office/drawing/2014/main" id="{F64F7C70-E63D-40C9-B3C1-78FEC0AB0253}"/>
               </a:ext>
             </a:extLst>
           </p:cNvPr>
@@ -3721,7 +3726,7 @@
           <p:cNvPr id="33" name="s10-release-stat">
             <a:extLst xmlns:a="http://schemas.openxmlformats.org/drawingml/2006/main">
               <a:ext uri="{FF2B5EF4-FFF2-40B4-BE49-F238E27FC236}">
-                <a16:creationId xmlns:a16="http://schemas.microsoft.com/office/drawing/2014/main" id="{D0326E64-05E0-4617-B8A6-BA3344F6805C}"/>
+                <a16:creationId xmlns:a16="http://schemas.microsoft.com/office/drawing/2014/main" id="{AB915AE8-C297-44DF-86B2-2A5BD87D3EC0}"/>
               </a:ext>
             </a:extLst>
           </p:cNvPr>
@@ -3766,7 +3771,7 @@
           <p:cNvPr id="34" name="s10-release-list">
             <a:extLst xmlns:a="http://schemas.openxmlformats.org/drawingml/2006/main">
               <a:ext uri="{FF2B5EF4-FFF2-40B4-BE49-F238E27FC236}">
-                <a16:creationId xmlns:a16="http://schemas.microsoft.com/office/drawing/2014/main" id="{6BBE62F5-0485-4189-8CFD-009908C2EDA4}"/>
+                <a16:creationId xmlns:a16="http://schemas.microsoft.com/office/drawing/2014/main" id="{BF621953-A50D-4D25-9CAB-C0B38080C59B}"/>
               </a:ext>
             </a:extLst>
           </p:cNvPr>
@@ -3816,7 +3821,7 @@
           <p:cNvPr id="35" name="s10-release-platforms">
             <a:extLst xmlns:a="http://schemas.openxmlformats.org/drawingml/2006/main">
               <a:ext uri="{FF2B5EF4-FFF2-40B4-BE49-F238E27FC236}">
-                <a16:creationId xmlns:a16="http://schemas.microsoft.com/office/drawing/2014/main" id="{C72D513A-07BF-4880-BB2A-6AB81F731928}"/>
+                <a16:creationId xmlns:a16="http://schemas.microsoft.com/office/drawing/2014/main" id="{2AF913EE-C00A-4517-A7C8-A29419C54D45}"/>
               </a:ext>
             </a:extLst>
           </p:cNvPr>
@@ -3883,7 +3888,7 @@
           <p:cNvPr id="37" name="footer-source-10">
             <a:extLst xmlns:a="http://schemas.openxmlformats.org/drawingml/2006/main">
               <a:ext uri="{FF2B5EF4-FFF2-40B4-BE49-F238E27FC236}">
-                <a16:creationId xmlns:a16="http://schemas.microsoft.com/office/drawing/2014/main" id="{7E1C986C-192E-4A03-BC4A-AD2F48BB5ECC}"/>
+                <a16:creationId xmlns:a16="http://schemas.microsoft.com/office/drawing/2014/main" id="{3E94C869-94AA-437B-8D28-8FF90D4DA72D}"/>
               </a:ext>
             </a:extLst>
           </p:cNvPr>
@@ -3928,7 +3933,7 @@
           <p:cNvPr id="38" name="footer-number-10">
             <a:extLst xmlns:a="http://schemas.openxmlformats.org/drawingml/2006/main">
               <a:ext uri="{FF2B5EF4-FFF2-40B4-BE49-F238E27FC236}">
-                <a16:creationId xmlns:a16="http://schemas.microsoft.com/office/drawing/2014/main" id="{2265554B-04D8-44EE-850E-ADF252825A0E}"/>
+                <a16:creationId xmlns:a16="http://schemas.microsoft.com/office/drawing/2014/main" id="{8127F37C-3956-404A-930D-0AEB325AE4D7}"/>
               </a:ext>
             </a:extLst>
           </p:cNvPr>
@@ -3971,7 +3976,7 @@
     </p:spTree>
     <p:extLst>
       <p:ext uri="{BB962C8B-B14F-4D97-AF65-F5344CB8AC3E}">
-        <p14:creationId xmlns:p14="http://schemas.microsoft.com/office/powerpoint/2010/main" val="1542810664"/>
+        <p14:creationId xmlns:p14="http://schemas.microsoft.com/office/powerpoint/2010/main" val="754048349"/>
       </p:ext>
     </p:extLst>
   </p:cSld>
@@ -4002,7 +4007,7 @@
           <p:cNvPr id="27" name="s11-title">
             <a:extLst xmlns:a="http://schemas.openxmlformats.org/drawingml/2006/main">
               <a:ext uri="{FF2B5EF4-FFF2-40B4-BE49-F238E27FC236}">
-                <a16:creationId xmlns:a16="http://schemas.microsoft.com/office/drawing/2014/main" id="{B88885FA-C7F9-4D22-AC38-9759BB0CB7DC}"/>
+                <a16:creationId xmlns:a16="http://schemas.microsoft.com/office/drawing/2014/main" id="{310B7194-FCE1-419C-8774-F97B54EF8CD7}"/>
               </a:ext>
             </a:extLst>
           </p:cNvPr>
@@ -4047,7 +4052,7 @@
           <p:cNvPr id="2" name="s11-subtitle">
             <a:extLst xmlns:a="http://schemas.openxmlformats.org/drawingml/2006/main">
               <a:ext uri="{FF2B5EF4-FFF2-40B4-BE49-F238E27FC236}">
-                <a16:creationId xmlns:a16="http://schemas.microsoft.com/office/drawing/2014/main" id="{56DF3C25-5C1E-40EF-9ABD-0DE0A17C4FAE}"/>
+                <a16:creationId xmlns:a16="http://schemas.microsoft.com/office/drawing/2014/main" id="{5AAD7392-9B4B-4476-A323-56EFBE02EC83}"/>
               </a:ext>
             </a:extLst>
           </p:cNvPr>
@@ -4136,7 +4141,7 @@
           <p:cNvPr id="5" name="s11-arrow1">
             <a:extLst xmlns:a="http://schemas.openxmlformats.org/drawingml/2006/main">
               <a:ext uri="{FF2B5EF4-FFF2-40B4-BE49-F238E27FC236}">
-                <a16:creationId xmlns:a16="http://schemas.microsoft.com/office/drawing/2014/main" id="{2AFE2DBA-7DCA-49A4-B355-2BCD972A0475}"/>
+                <a16:creationId xmlns:a16="http://schemas.microsoft.com/office/drawing/2014/main" id="{827DF129-7BC3-4F2B-9DE9-8B9AB1BCCD26}"/>
               </a:ext>
             </a:extLst>
           </p:cNvPr>
@@ -4181,7 +4186,7 @@
           <p:cNvPr id="6" name="s11-arrow2">
             <a:extLst xmlns:a="http://schemas.openxmlformats.org/drawingml/2006/main">
               <a:ext uri="{FF2B5EF4-FFF2-40B4-BE49-F238E27FC236}">
-                <a16:creationId xmlns:a16="http://schemas.microsoft.com/office/drawing/2014/main" id="{FFFE4074-3AEB-4937-8C6F-56E06C6B47E5}"/>
+                <a16:creationId xmlns:a16="http://schemas.microsoft.com/office/drawing/2014/main" id="{A2FCA3CE-91BD-4588-8A1B-02B26034A07A}"/>
               </a:ext>
             </a:extLst>
           </p:cNvPr>
@@ -4226,7 +4231,7 @@
           <p:cNvPr id="7" name="s11-v021">
             <a:extLst xmlns:a="http://schemas.openxmlformats.org/drawingml/2006/main">
               <a:ext uri="{FF2B5EF4-FFF2-40B4-BE49-F238E27FC236}">
-                <a16:creationId xmlns:a16="http://schemas.microsoft.com/office/drawing/2014/main" id="{D7339D09-7816-4C05-BF73-C8A28B56E259}"/>
+                <a16:creationId xmlns:a16="http://schemas.microsoft.com/office/drawing/2014/main" id="{3AF62F2C-DF75-4BBD-8EA4-A62749D485C8}"/>
               </a:ext>
             </a:extLst>
           </p:cNvPr>
@@ -4261,7 +4266,7 @@
           <p:cNvPr id="8" name="s11-v021-version">
             <a:extLst xmlns:a="http://schemas.openxmlformats.org/drawingml/2006/main">
               <a:ext uri="{FF2B5EF4-FFF2-40B4-BE49-F238E27FC236}">
-                <a16:creationId xmlns:a16="http://schemas.microsoft.com/office/drawing/2014/main" id="{C0645A0E-766F-4F7B-9C7B-B76F55B72F86}"/>
+                <a16:creationId xmlns:a16="http://schemas.microsoft.com/office/drawing/2014/main" id="{07942954-31FA-4003-B660-9CA2C1AC2CF2}"/>
               </a:ext>
             </a:extLst>
           </p:cNvPr>
@@ -4306,7 +4311,7 @@
           <p:cNvPr id="9" name="s11-v021-k">
             <a:extLst xmlns:a="http://schemas.openxmlformats.org/drawingml/2006/main">
               <a:ext uri="{FF2B5EF4-FFF2-40B4-BE49-F238E27FC236}">
-                <a16:creationId xmlns:a16="http://schemas.microsoft.com/office/drawing/2014/main" id="{C88E47FD-BEC9-4EC0-A087-0268A53F8E69}"/>
+                <a16:creationId xmlns:a16="http://schemas.microsoft.com/office/drawing/2014/main" id="{D275748F-2E68-434B-B45A-F2645A306910}"/>
               </a:ext>
             </a:extLst>
           </p:cNvPr>
@@ -4351,7 +4356,7 @@
           <p:cNvPr id="10" name="s11-v021-v">
             <a:extLst xmlns:a="http://schemas.openxmlformats.org/drawingml/2006/main">
               <a:ext uri="{FF2B5EF4-FFF2-40B4-BE49-F238E27FC236}">
-                <a16:creationId xmlns:a16="http://schemas.microsoft.com/office/drawing/2014/main" id="{87FBFD28-1BF7-42C5-852D-E305681A9C1F}"/>
+                <a16:creationId xmlns:a16="http://schemas.microsoft.com/office/drawing/2014/main" id="{D55CADB7-3FB3-4907-980F-4C2D8461365E}"/>
               </a:ext>
             </a:extLst>
           </p:cNvPr>
@@ -4396,7 +4401,7 @@
           <p:cNvPr id="11" name="s11-v021-foot">
             <a:extLst xmlns:a="http://schemas.openxmlformats.org/drawingml/2006/main">
               <a:ext uri="{FF2B5EF4-FFF2-40B4-BE49-F238E27FC236}">
-                <a16:creationId xmlns:a16="http://schemas.microsoft.com/office/drawing/2014/main" id="{C3046B0D-96DC-4DB8-8447-33896CFC01B5}"/>
+                <a16:creationId xmlns:a16="http://schemas.microsoft.com/office/drawing/2014/main" id="{8CC8917F-9835-46DB-A59E-F4F60AF6CE95}"/>
               </a:ext>
             </a:extLst>
           </p:cNvPr>
@@ -4441,7 +4446,7 @@
           <p:cNvPr id="12" name="s11-v022">
             <a:extLst xmlns:a="http://schemas.openxmlformats.org/drawingml/2006/main">
               <a:ext uri="{FF2B5EF4-FFF2-40B4-BE49-F238E27FC236}">
-                <a16:creationId xmlns:a16="http://schemas.microsoft.com/office/drawing/2014/main" id="{224B769D-C6A6-4DFB-ACED-3D9EED9BC135}"/>
+                <a16:creationId xmlns:a16="http://schemas.microsoft.com/office/drawing/2014/main" id="{BD891712-FADA-4C5D-8474-6AE7001834A1}"/>
               </a:ext>
             </a:extLst>
           </p:cNvPr>
@@ -4476,7 +4481,7 @@
           <p:cNvPr id="13" name="s11-v022-version">
             <a:extLst xmlns:a="http://schemas.openxmlformats.org/drawingml/2006/main">
               <a:ext uri="{FF2B5EF4-FFF2-40B4-BE49-F238E27FC236}">
-                <a16:creationId xmlns:a16="http://schemas.microsoft.com/office/drawing/2014/main" id="{736EF2A3-093D-46EF-A766-746A30ADE831}"/>
+                <a16:creationId xmlns:a16="http://schemas.microsoft.com/office/drawing/2014/main" id="{854545AE-BFB3-4C3B-A2AE-0C066C0C9055}"/>
               </a:ext>
             </a:extLst>
           </p:cNvPr>
@@ -4521,7 +4526,7 @@
           <p:cNvPr id="14" name="s11-v022-k">
             <a:extLst xmlns:a="http://schemas.openxmlformats.org/drawingml/2006/main">
               <a:ext uri="{FF2B5EF4-FFF2-40B4-BE49-F238E27FC236}">
-                <a16:creationId xmlns:a16="http://schemas.microsoft.com/office/drawing/2014/main" id="{516D3DEE-650D-4FD5-9D8F-654B8BABE00B}"/>
+                <a16:creationId xmlns:a16="http://schemas.microsoft.com/office/drawing/2014/main" id="{EFC4EF56-AA0A-4A2D-8B6D-3D9A1BD7B0F8}"/>
               </a:ext>
             </a:extLst>
           </p:cNvPr>
@@ -4566,7 +4571,7 @@
           <p:cNvPr id="15" name="s11-v022-v">
             <a:extLst xmlns:a="http://schemas.openxmlformats.org/drawingml/2006/main">
               <a:ext uri="{FF2B5EF4-FFF2-40B4-BE49-F238E27FC236}">
-                <a16:creationId xmlns:a16="http://schemas.microsoft.com/office/drawing/2014/main" id="{7A83E86C-0BCF-48B8-8639-CC7E3B479C0E}"/>
+                <a16:creationId xmlns:a16="http://schemas.microsoft.com/office/drawing/2014/main" id="{6DA7722A-6A95-4A31-BFA7-1AE4201D4622}"/>
               </a:ext>
             </a:extLst>
           </p:cNvPr>
@@ -4611,7 +4616,7 @@
           <p:cNvPr id="16" name="s11-v022-foot">
             <a:extLst xmlns:a="http://schemas.openxmlformats.org/drawingml/2006/main">
               <a:ext uri="{FF2B5EF4-FFF2-40B4-BE49-F238E27FC236}">
-                <a16:creationId xmlns:a16="http://schemas.microsoft.com/office/drawing/2014/main" id="{EBA0B7DA-BFB7-4A7C-892E-F12005CF07CD}"/>
+                <a16:creationId xmlns:a16="http://schemas.microsoft.com/office/drawing/2014/main" id="{CBBD98ED-4E39-44B8-9580-E2D5D62AB45E}"/>
               </a:ext>
             </a:extLst>
           </p:cNvPr>
@@ -4656,7 +4661,7 @@
           <p:cNvPr id="17" name="s11-v023">
             <a:extLst xmlns:a="http://schemas.openxmlformats.org/drawingml/2006/main">
               <a:ext uri="{FF2B5EF4-FFF2-40B4-BE49-F238E27FC236}">
-                <a16:creationId xmlns:a16="http://schemas.microsoft.com/office/drawing/2014/main" id="{93676E56-517B-4813-A342-1D44DB1D4A64}"/>
+                <a16:creationId xmlns:a16="http://schemas.microsoft.com/office/drawing/2014/main" id="{BAA8A162-DAFC-4847-B914-A671CD51A820}"/>
               </a:ext>
             </a:extLst>
           </p:cNvPr>
@@ -4691,7 +4696,7 @@
           <p:cNvPr id="18" name="s11-v023-version">
             <a:extLst xmlns:a="http://schemas.openxmlformats.org/drawingml/2006/main">
               <a:ext uri="{FF2B5EF4-FFF2-40B4-BE49-F238E27FC236}">
-                <a16:creationId xmlns:a16="http://schemas.microsoft.com/office/drawing/2014/main" id="{7EFCAD78-A838-4E79-9088-839052DB4ABD}"/>
+                <a16:creationId xmlns:a16="http://schemas.microsoft.com/office/drawing/2014/main" id="{D9D28751-C303-4A53-AFB2-4D18C5DEF83B}"/>
               </a:ext>
             </a:extLst>
           </p:cNvPr>
@@ -4736,7 +4741,7 @@
           <p:cNvPr id="19" name="s11-v023-k">
             <a:extLst xmlns:a="http://schemas.openxmlformats.org/drawingml/2006/main">
               <a:ext uri="{FF2B5EF4-FFF2-40B4-BE49-F238E27FC236}">
-                <a16:creationId xmlns:a16="http://schemas.microsoft.com/office/drawing/2014/main" id="{417C79D9-8885-4864-A7B3-D50F7E0D53E2}"/>
+                <a16:creationId xmlns:a16="http://schemas.microsoft.com/office/drawing/2014/main" id="{7E6CA211-8C29-484E-A06A-FB2CFD1EAF5D}"/>
               </a:ext>
             </a:extLst>
           </p:cNvPr>
@@ -4781,7 +4786,7 @@
           <p:cNvPr id="20" name="s11-v023-v">
             <a:extLst xmlns:a="http://schemas.openxmlformats.org/drawingml/2006/main">
               <a:ext uri="{FF2B5EF4-FFF2-40B4-BE49-F238E27FC236}">
-                <a16:creationId xmlns:a16="http://schemas.microsoft.com/office/drawing/2014/main" id="{F9D95D13-85ED-49FC-9955-5EE9C23D90ED}"/>
+                <a16:creationId xmlns:a16="http://schemas.microsoft.com/office/drawing/2014/main" id="{1C02CB7D-FEA6-4A37-9FC4-DEB7C3015ABC}"/>
               </a:ext>
             </a:extLst>
           </p:cNvPr>
@@ -4826,7 +4831,7 @@
           <p:cNvPr id="21" name="s11-v023-foot">
             <a:extLst xmlns:a="http://schemas.openxmlformats.org/drawingml/2006/main">
               <a:ext uri="{FF2B5EF4-FFF2-40B4-BE49-F238E27FC236}">
-                <a16:creationId xmlns:a16="http://schemas.microsoft.com/office/drawing/2014/main" id="{07E36275-9B69-413F-93AF-7F0266699BA4}"/>
+                <a16:creationId xmlns:a16="http://schemas.microsoft.com/office/drawing/2014/main" id="{356BBA22-3227-4892-850F-F153B3A1DD7D}"/>
               </a:ext>
             </a:extLst>
           </p:cNvPr>
@@ -4871,7 +4876,7 @@
           <p:cNvPr id="22" name="s11-takeaway">
             <a:extLst xmlns:a="http://schemas.openxmlformats.org/drawingml/2006/main">
               <a:ext uri="{FF2B5EF4-FFF2-40B4-BE49-F238E27FC236}">
-                <a16:creationId xmlns:a16="http://schemas.microsoft.com/office/drawing/2014/main" id="{77D522C4-7CA9-41A9-B18C-9C9E98523823}"/>
+                <a16:creationId xmlns:a16="http://schemas.microsoft.com/office/drawing/2014/main" id="{A8F3C9EF-9909-45F0-9B03-D14A517E57B3}"/>
               </a:ext>
             </a:extLst>
           </p:cNvPr>
@@ -4906,7 +4911,7 @@
           <p:cNvPr id="23" name="s11-takeaway-v">
             <a:extLst xmlns:a="http://schemas.openxmlformats.org/drawingml/2006/main">
               <a:ext uri="{FF2B5EF4-FFF2-40B4-BE49-F238E27FC236}">
-                <a16:creationId xmlns:a16="http://schemas.microsoft.com/office/drawing/2014/main" id="{0800FE5A-59EF-4389-896D-70A56166D526}"/>
+                <a16:creationId xmlns:a16="http://schemas.microsoft.com/office/drawing/2014/main" id="{72A8C497-CBB8-4C03-B137-9FB700DB12E5}"/>
               </a:ext>
             </a:extLst>
           </p:cNvPr>
@@ -4973,7 +4978,7 @@
           <p:cNvPr id="25" name="footer-source-11">
             <a:extLst xmlns:a="http://schemas.openxmlformats.org/drawingml/2006/main">
               <a:ext uri="{FF2B5EF4-FFF2-40B4-BE49-F238E27FC236}">
-                <a16:creationId xmlns:a16="http://schemas.microsoft.com/office/drawing/2014/main" id="{72E33532-B7A3-4670-8627-62D9BCC99CDF}"/>
+                <a16:creationId xmlns:a16="http://schemas.microsoft.com/office/drawing/2014/main" id="{0BA49C22-7D16-4CED-9FDF-37AB6A64B157}"/>
               </a:ext>
             </a:extLst>
           </p:cNvPr>
@@ -5018,7 +5023,7 @@
           <p:cNvPr id="26" name="footer-number-11">
             <a:extLst xmlns:a="http://schemas.openxmlformats.org/drawingml/2006/main">
               <a:ext uri="{FF2B5EF4-FFF2-40B4-BE49-F238E27FC236}">
-                <a16:creationId xmlns:a16="http://schemas.microsoft.com/office/drawing/2014/main" id="{4FB2D785-5BDA-4FE7-BF3E-8A206A21E83D}"/>
+                <a16:creationId xmlns:a16="http://schemas.microsoft.com/office/drawing/2014/main" id="{2D05B543-400A-436B-894D-8069FF257A38}"/>
               </a:ext>
             </a:extLst>
           </p:cNvPr>
@@ -5061,7 +5066,7 @@
     </p:spTree>
     <p:extLst>
       <p:ext uri="{BB962C8B-B14F-4D97-AF65-F5344CB8AC3E}">
-        <p14:creationId xmlns:p14="http://schemas.microsoft.com/office/powerpoint/2010/main" val="1507675935"/>
+        <p14:creationId xmlns:p14="http://schemas.microsoft.com/office/powerpoint/2010/main" val="930949057"/>
       </p:ext>
     </p:extLst>
   </p:cSld>
@@ -5092,7 +5097,7 @@
           <p:cNvPr id="19" name="s12-eyebrow">
             <a:extLst xmlns:a="http://schemas.openxmlformats.org/drawingml/2006/main">
               <a:ext uri="{FF2B5EF4-FFF2-40B4-BE49-F238E27FC236}">
-                <a16:creationId xmlns:a16="http://schemas.microsoft.com/office/drawing/2014/main" id="{B26EE5D9-331C-46B9-8A17-70B8B29581BE}"/>
+                <a16:creationId xmlns:a16="http://schemas.microsoft.com/office/drawing/2014/main" id="{05AFF4B1-03E1-4F7F-9851-A3756D7676EC}"/>
               </a:ext>
             </a:extLst>
           </p:cNvPr>
@@ -5137,7 +5142,7 @@
           <p:cNvPr id="2" name="s12-title">
             <a:extLst xmlns:a="http://schemas.openxmlformats.org/drawingml/2006/main">
               <a:ext uri="{FF2B5EF4-FFF2-40B4-BE49-F238E27FC236}">
-                <a16:creationId xmlns:a16="http://schemas.microsoft.com/office/drawing/2014/main" id="{FC0598FE-5934-4156-9111-EADA524C3B38}"/>
+                <a16:creationId xmlns:a16="http://schemas.microsoft.com/office/drawing/2014/main" id="{D1534BCD-88FB-45A5-904E-BB27EF0D778E}"/>
               </a:ext>
             </a:extLst>
           </p:cNvPr>
@@ -5206,7 +5211,7 @@
           <p:cNvPr id="4" name="s12-close">
             <a:extLst xmlns:a="http://schemas.openxmlformats.org/drawingml/2006/main">
               <a:ext uri="{FF2B5EF4-FFF2-40B4-BE49-F238E27FC236}">
-                <a16:creationId xmlns:a16="http://schemas.microsoft.com/office/drawing/2014/main" id="{4C4DCF78-D1CB-4A22-825F-9FCBA090C768}"/>
+                <a16:creationId xmlns:a16="http://schemas.microsoft.com/office/drawing/2014/main" id="{82BDF553-CC3A-4D95-8A65-5279F868CDEA}"/>
               </a:ext>
             </a:extLst>
           </p:cNvPr>
@@ -5251,7 +5256,7 @@
           <p:cNvPr id="5" name="s12-command-box">
             <a:extLst xmlns:a="http://schemas.openxmlformats.org/drawingml/2006/main">
               <a:ext uri="{FF2B5EF4-FFF2-40B4-BE49-F238E27FC236}">
-                <a16:creationId xmlns:a16="http://schemas.microsoft.com/office/drawing/2014/main" id="{D4B06752-48F6-476C-8EC7-DF4AEDDC0EBE}"/>
+                <a16:creationId xmlns:a16="http://schemas.microsoft.com/office/drawing/2014/main" id="{78279851-2975-4C3D-8786-D34607CB580D}"/>
               </a:ext>
             </a:extLst>
           </p:cNvPr>
@@ -5286,7 +5291,7 @@
           <p:cNvPr id="6" name="s12-command">
             <a:extLst xmlns:a="http://schemas.openxmlformats.org/drawingml/2006/main">
               <a:ext uri="{FF2B5EF4-FFF2-40B4-BE49-F238E27FC236}">
-                <a16:creationId xmlns:a16="http://schemas.microsoft.com/office/drawing/2014/main" id="{069802BD-E1D7-4C26-9DAF-BC9F3769CE17}"/>
+                <a16:creationId xmlns:a16="http://schemas.microsoft.com/office/drawing/2014/main" id="{889DE4A9-01F0-4EFF-919D-98E62167DA65}"/>
               </a:ext>
             </a:extLst>
           </p:cNvPr>
@@ -5332,7 +5337,7 @@
           <p:cNvPr id="7" name="s12-github">
             <a:extLst xmlns:a="http://schemas.openxmlformats.org/drawingml/2006/main">
               <a:ext uri="{FF2B5EF4-FFF2-40B4-BE49-F238E27FC236}">
-                <a16:creationId xmlns:a16="http://schemas.microsoft.com/office/drawing/2014/main" id="{B216AC18-2B33-46B2-9B5A-657C425E7978}"/>
+                <a16:creationId xmlns:a16="http://schemas.microsoft.com/office/drawing/2014/main" id="{CE91FD8C-9291-450A-9432-30443031B623}"/>
               </a:ext>
             </a:extLst>
           </p:cNvPr>
@@ -5377,7 +5382,7 @@
           <p:cNvPr id="8" name="s12-npm">
             <a:extLst xmlns:a="http://schemas.openxmlformats.org/drawingml/2006/main">
               <a:ext uri="{FF2B5EF4-FFF2-40B4-BE49-F238E27FC236}">
-                <a16:creationId xmlns:a16="http://schemas.microsoft.com/office/drawing/2014/main" id="{4BBF6B50-3F2B-49CE-AFEA-1D85265BD334}"/>
+                <a16:creationId xmlns:a16="http://schemas.microsoft.com/office/drawing/2014/main" id="{8D97ECC4-4CB1-4FE0-839A-54974A11B900}"/>
               </a:ext>
             </a:extLst>
           </p:cNvPr>
@@ -5422,7 +5427,7 @@
           <p:cNvPr id="9" name="s12-d1">
             <a:extLst xmlns:a="http://schemas.openxmlformats.org/drawingml/2006/main">
               <a:ext uri="{FF2B5EF4-FFF2-40B4-BE49-F238E27FC236}">
-                <a16:creationId xmlns:a16="http://schemas.microsoft.com/office/drawing/2014/main" id="{B3B25E61-6DDF-4879-8965-97C53775D3A9}"/>
+                <a16:creationId xmlns:a16="http://schemas.microsoft.com/office/drawing/2014/main" id="{B485CE4F-E36F-489F-BA11-4E85B84F896F}"/>
               </a:ext>
             </a:extLst>
           </p:cNvPr>
@@ -5455,7 +5460,7 @@
           <p:cNvPr id="10" name="s12-l1">
             <a:extLst xmlns:a="http://schemas.openxmlformats.org/drawingml/2006/main">
               <a:ext uri="{FF2B5EF4-FFF2-40B4-BE49-F238E27FC236}">
-                <a16:creationId xmlns:a16="http://schemas.microsoft.com/office/drawing/2014/main" id="{B656556F-3903-4E84-B2EE-CA7166FCCF6D}"/>
+                <a16:creationId xmlns:a16="http://schemas.microsoft.com/office/drawing/2014/main" id="{BB2E4B60-6CB6-4991-9C1B-2E55E008E0C4}"/>
               </a:ext>
             </a:extLst>
           </p:cNvPr>
@@ -5500,7 +5505,7 @@
           <p:cNvPr id="11" name="s12-d2">
             <a:extLst xmlns:a="http://schemas.openxmlformats.org/drawingml/2006/main">
               <a:ext uri="{FF2B5EF4-FFF2-40B4-BE49-F238E27FC236}">
-                <a16:creationId xmlns:a16="http://schemas.microsoft.com/office/drawing/2014/main" id="{1AF05E55-D24C-4CFC-9139-2F6C7B99A11F}"/>
+                <a16:creationId xmlns:a16="http://schemas.microsoft.com/office/drawing/2014/main" id="{88B504A8-08F4-4031-A147-ACE37173D53F}"/>
               </a:ext>
             </a:extLst>
           </p:cNvPr>
@@ -5533,7 +5538,7 @@
           <p:cNvPr id="12" name="s12-l2">
             <a:extLst xmlns:a="http://schemas.openxmlformats.org/drawingml/2006/main">
               <a:ext uri="{FF2B5EF4-FFF2-40B4-BE49-F238E27FC236}">
-                <a16:creationId xmlns:a16="http://schemas.microsoft.com/office/drawing/2014/main" id="{0B033A61-2C37-41E1-8953-89C2700EAB04}"/>
+                <a16:creationId xmlns:a16="http://schemas.microsoft.com/office/drawing/2014/main" id="{4927472C-2628-40A6-9679-B4A8553B7E60}"/>
               </a:ext>
             </a:extLst>
           </p:cNvPr>
@@ -5578,7 +5583,7 @@
           <p:cNvPr id="13" name="s12-d3">
             <a:extLst xmlns:a="http://schemas.openxmlformats.org/drawingml/2006/main">
               <a:ext uri="{FF2B5EF4-FFF2-40B4-BE49-F238E27FC236}">
-                <a16:creationId xmlns:a16="http://schemas.microsoft.com/office/drawing/2014/main" id="{9CDC4976-A93B-47F9-930C-AF0C4432AE6E}"/>
+                <a16:creationId xmlns:a16="http://schemas.microsoft.com/office/drawing/2014/main" id="{136B6EE9-39AF-4328-AE90-D501D56A10D8}"/>
               </a:ext>
             </a:extLst>
           </p:cNvPr>
@@ -5611,7 +5616,7 @@
           <p:cNvPr id="14" name="s12-l3">
             <a:extLst xmlns:a="http://schemas.openxmlformats.org/drawingml/2006/main">
               <a:ext uri="{FF2B5EF4-FFF2-40B4-BE49-F238E27FC236}">
-                <a16:creationId xmlns:a16="http://schemas.microsoft.com/office/drawing/2014/main" id="{8D41EC01-ABF0-4549-8D41-703F592AB321}"/>
+                <a16:creationId xmlns:a16="http://schemas.microsoft.com/office/drawing/2014/main" id="{1396DC50-2D5D-457E-9961-C0095F095BE7}"/>
               </a:ext>
             </a:extLst>
           </p:cNvPr>
@@ -5656,7 +5661,7 @@
           <p:cNvPr id="15" name="s12-platforms">
             <a:extLst xmlns:a="http://schemas.openxmlformats.org/drawingml/2006/main">
               <a:ext uri="{FF2B5EF4-FFF2-40B4-BE49-F238E27FC236}">
-                <a16:creationId xmlns:a16="http://schemas.microsoft.com/office/drawing/2014/main" id="{FFE4BC4A-4106-45CF-83F2-3E422BC8DC2A}"/>
+                <a16:creationId xmlns:a16="http://schemas.microsoft.com/office/drawing/2014/main" id="{110E9BD2-9594-4F7B-81E6-419AD915A2C3}"/>
               </a:ext>
             </a:extLst>
           </p:cNvPr>
@@ -5723,7 +5728,7 @@
           <p:cNvPr id="17" name="footer-source-12">
             <a:extLst xmlns:a="http://schemas.openxmlformats.org/drawingml/2006/main">
               <a:ext uri="{FF2B5EF4-FFF2-40B4-BE49-F238E27FC236}">
-                <a16:creationId xmlns:a16="http://schemas.microsoft.com/office/drawing/2014/main" id="{C069F0C0-645C-4BF6-B273-34B4A2F3AD9A}"/>
+                <a16:creationId xmlns:a16="http://schemas.microsoft.com/office/drawing/2014/main" id="{FD429DF0-28AE-4844-9E80-C1F0BE7C180D}"/>
               </a:ext>
             </a:extLst>
           </p:cNvPr>
@@ -5768,7 +5773,7 @@
           <p:cNvPr id="18" name="footer-number-12">
             <a:extLst xmlns:a="http://schemas.openxmlformats.org/drawingml/2006/main">
               <a:ext uri="{FF2B5EF4-FFF2-40B4-BE49-F238E27FC236}">
-                <a16:creationId xmlns:a16="http://schemas.microsoft.com/office/drawing/2014/main" id="{5DD12322-F830-4A90-9054-AB33254C8704}"/>
+                <a16:creationId xmlns:a16="http://schemas.microsoft.com/office/drawing/2014/main" id="{C14C4B1E-DC96-4CC1-B275-EEF5744B0849}"/>
               </a:ext>
             </a:extLst>
           </p:cNvPr>
@@ -5811,7 +5816,7 @@
     </p:spTree>
     <p:extLst>
       <p:ext uri="{BB962C8B-B14F-4D97-AF65-F5344CB8AC3E}">
-        <p14:creationId xmlns:p14="http://schemas.microsoft.com/office/powerpoint/2010/main" val="916940136"/>
+        <p14:creationId xmlns:p14="http://schemas.microsoft.com/office/powerpoint/2010/main" val="548470902"/>
       </p:ext>
     </p:extLst>
   </p:cSld>
@@ -5842,7 +5847,7 @@
           <p:cNvPr id="33" name="s2-title">
             <a:extLst xmlns:a="http://schemas.openxmlformats.org/drawingml/2006/main">
               <a:ext uri="{FF2B5EF4-FFF2-40B4-BE49-F238E27FC236}">
-                <a16:creationId xmlns:a16="http://schemas.microsoft.com/office/drawing/2014/main" id="{D4217F34-942D-44AC-B9F5-3CBB5861F309}"/>
+                <a16:creationId xmlns:a16="http://schemas.microsoft.com/office/drawing/2014/main" id="{0D579AC8-5583-4984-8E94-3754ED7C7944}"/>
               </a:ext>
             </a:extLst>
           </p:cNvPr>
@@ -5887,7 +5892,7 @@
           <p:cNvPr id="2" name="s2-subtitle">
             <a:extLst xmlns:a="http://schemas.openxmlformats.org/drawingml/2006/main">
               <a:ext uri="{FF2B5EF4-FFF2-40B4-BE49-F238E27FC236}">
-                <a16:creationId xmlns:a16="http://schemas.microsoft.com/office/drawing/2014/main" id="{A3C65415-11E0-42D3-B208-7F06D07B409B}"/>
+                <a16:creationId xmlns:a16="http://schemas.microsoft.com/office/drawing/2014/main" id="{665CBE63-4DA3-434A-8B6C-0FDB5DF7E2E9}"/>
               </a:ext>
             </a:extLst>
           </p:cNvPr>
@@ -6042,7 +6047,7 @@
           <p:cNvPr id="8" name="s2-agent">
             <a:extLst xmlns:a="http://schemas.openxmlformats.org/drawingml/2006/main">
               <a:ext uri="{FF2B5EF4-FFF2-40B4-BE49-F238E27FC236}">
-                <a16:creationId xmlns:a16="http://schemas.microsoft.com/office/drawing/2014/main" id="{4A66E9DF-E3D7-4C60-A342-770FDC1548E1}"/>
+                <a16:creationId xmlns:a16="http://schemas.microsoft.com/office/drawing/2014/main" id="{2D81A6FB-D4A8-478C-A701-7A2628B07088}"/>
               </a:ext>
             </a:extLst>
           </p:cNvPr>
@@ -6075,7 +6080,7 @@
           <p:cNvPr id="9" name="s2-agent-label">
             <a:extLst xmlns:a="http://schemas.openxmlformats.org/drawingml/2006/main">
               <a:ext uri="{FF2B5EF4-FFF2-40B4-BE49-F238E27FC236}">
-                <a16:creationId xmlns:a16="http://schemas.microsoft.com/office/drawing/2014/main" id="{C9435926-405F-4235-A003-F4847ABBC510}"/>
+                <a16:creationId xmlns:a16="http://schemas.microsoft.com/office/drawing/2014/main" id="{3B443F16-D913-4BC1-A78B-BB449299C1E2}"/>
               </a:ext>
             </a:extLst>
           </p:cNvPr>
@@ -6120,7 +6125,7 @@
           <p:cNvPr id="10" name="s2-file-a">
             <a:extLst xmlns:a="http://schemas.openxmlformats.org/drawingml/2006/main">
               <a:ext uri="{FF2B5EF4-FFF2-40B4-BE49-F238E27FC236}">
-                <a16:creationId xmlns:a16="http://schemas.microsoft.com/office/drawing/2014/main" id="{D24AF75A-FFE9-4933-9BB2-C0D45480D322}"/>
+                <a16:creationId xmlns:a16="http://schemas.microsoft.com/office/drawing/2014/main" id="{D75ECA4C-35A7-4F99-8F92-E892302B79AB}"/>
               </a:ext>
             </a:extLst>
           </p:cNvPr>
@@ -6153,7 +6158,7 @@
           <p:cNvPr id="11" name="s2-file-b">
             <a:extLst xmlns:a="http://schemas.openxmlformats.org/drawingml/2006/main">
               <a:ext uri="{FF2B5EF4-FFF2-40B4-BE49-F238E27FC236}">
-                <a16:creationId xmlns:a16="http://schemas.microsoft.com/office/drawing/2014/main" id="{A4B71D6A-4D1C-4B81-812C-9EE6A1CD41E6}"/>
+                <a16:creationId xmlns:a16="http://schemas.microsoft.com/office/drawing/2014/main" id="{76676E01-8050-4B3A-AC64-0D322E3BA22D}"/>
               </a:ext>
             </a:extLst>
           </p:cNvPr>
@@ -6186,7 +6191,7 @@
           <p:cNvPr id="12" name="s2-file-c">
             <a:extLst xmlns:a="http://schemas.openxmlformats.org/drawingml/2006/main">
               <a:ext uri="{FF2B5EF4-FFF2-40B4-BE49-F238E27FC236}">
-                <a16:creationId xmlns:a16="http://schemas.microsoft.com/office/drawing/2014/main" id="{C4894B43-A2D4-43CD-A175-6EC33B022700}"/>
+                <a16:creationId xmlns:a16="http://schemas.microsoft.com/office/drawing/2014/main" id="{CEC73809-9FF0-40CB-B57B-E0EA13925669}"/>
               </a:ext>
             </a:extLst>
           </p:cNvPr>
@@ -6219,7 +6224,7 @@
           <p:cNvPr id="13" name="s2-file-d">
             <a:extLst xmlns:a="http://schemas.openxmlformats.org/drawingml/2006/main">
               <a:ext uri="{FF2B5EF4-FFF2-40B4-BE49-F238E27FC236}">
-                <a16:creationId xmlns:a16="http://schemas.microsoft.com/office/drawing/2014/main" id="{344C97E6-4F03-4BDA-965D-970786B50785}"/>
+                <a16:creationId xmlns:a16="http://schemas.microsoft.com/office/drawing/2014/main" id="{735042F7-FA80-4EF7-8051-B0E4DA443577}"/>
               </a:ext>
             </a:extLst>
           </p:cNvPr>
@@ -6252,7 +6257,7 @@
           <p:cNvPr id="14" name="s2-file-e">
             <a:extLst xmlns:a="http://schemas.openxmlformats.org/drawingml/2006/main">
               <a:ext uri="{FF2B5EF4-FFF2-40B4-BE49-F238E27FC236}">
-                <a16:creationId xmlns:a16="http://schemas.microsoft.com/office/drawing/2014/main" id="{7AA431F2-B0BE-46BF-847C-BF44F95F8FC1}"/>
+                <a16:creationId xmlns:a16="http://schemas.microsoft.com/office/drawing/2014/main" id="{DD8C8351-EA5B-4BA8-A2C8-EF24F2C0B1D6}"/>
               </a:ext>
             </a:extLst>
           </p:cNvPr>
@@ -6285,7 +6290,7 @@
           <p:cNvPr id="15" name="s2-file-a-label">
             <a:extLst xmlns:a="http://schemas.openxmlformats.org/drawingml/2006/main">
               <a:ext uri="{FF2B5EF4-FFF2-40B4-BE49-F238E27FC236}">
-                <a16:creationId xmlns:a16="http://schemas.microsoft.com/office/drawing/2014/main" id="{5034AA7B-A186-4426-A322-B7352398D8FC}"/>
+                <a16:creationId xmlns:a16="http://schemas.microsoft.com/office/drawing/2014/main" id="{937604E1-2EC4-4C35-9D0B-2690E0B04209}"/>
               </a:ext>
             </a:extLst>
           </p:cNvPr>
@@ -6330,7 +6335,7 @@
           <p:cNvPr id="16" name="s2-file-b-label">
             <a:extLst xmlns:a="http://schemas.openxmlformats.org/drawingml/2006/main">
               <a:ext uri="{FF2B5EF4-FFF2-40B4-BE49-F238E27FC236}">
-                <a16:creationId xmlns:a16="http://schemas.microsoft.com/office/drawing/2014/main" id="{6AB0B5BE-18B4-402C-BDEF-1F999CF10361}"/>
+                <a16:creationId xmlns:a16="http://schemas.microsoft.com/office/drawing/2014/main" id="{78CFE8E6-4A7C-46ED-9875-CF2AC0D3EF81}"/>
               </a:ext>
             </a:extLst>
           </p:cNvPr>
@@ -6375,7 +6380,7 @@
           <p:cNvPr id="17" name="s2-file-c-label">
             <a:extLst xmlns:a="http://schemas.openxmlformats.org/drawingml/2006/main">
               <a:ext uri="{FF2B5EF4-FFF2-40B4-BE49-F238E27FC236}">
-                <a16:creationId xmlns:a16="http://schemas.microsoft.com/office/drawing/2014/main" id="{47204CF0-30D5-4D4C-998E-AF8E604F2398}"/>
+                <a16:creationId xmlns:a16="http://schemas.microsoft.com/office/drawing/2014/main" id="{A2D1D843-BDAE-4187-B47D-1E55D27D8747}"/>
               </a:ext>
             </a:extLst>
           </p:cNvPr>
@@ -6420,7 +6425,7 @@
           <p:cNvPr id="18" name="s2-file-d-label">
             <a:extLst xmlns:a="http://schemas.openxmlformats.org/drawingml/2006/main">
               <a:ext uri="{FF2B5EF4-FFF2-40B4-BE49-F238E27FC236}">
-                <a16:creationId xmlns:a16="http://schemas.microsoft.com/office/drawing/2014/main" id="{7D121530-0933-4A3B-A533-86E54302F464}"/>
+                <a16:creationId xmlns:a16="http://schemas.microsoft.com/office/drawing/2014/main" id="{9CA23953-9B88-4574-9986-3D9DB659128B}"/>
               </a:ext>
             </a:extLst>
           </p:cNvPr>
@@ -6465,7 +6470,7 @@
           <p:cNvPr id="19" name="s2-file-e-label">
             <a:extLst xmlns:a="http://schemas.openxmlformats.org/drawingml/2006/main">
               <a:ext uri="{FF2B5EF4-FFF2-40B4-BE49-F238E27FC236}">
-                <a16:creationId xmlns:a16="http://schemas.microsoft.com/office/drawing/2014/main" id="{B31332A7-AA25-4AF2-ABCC-3F00BC66EF77}"/>
+                <a16:creationId xmlns:a16="http://schemas.microsoft.com/office/drawing/2014/main" id="{44AB05B2-0C5A-49F9-B789-21587EC76FB1}"/>
               </a:ext>
             </a:extLst>
           </p:cNvPr>
@@ -6510,7 +6515,7 @@
           <p:cNvPr id="20" name="s2-n1">
             <a:extLst xmlns:a="http://schemas.openxmlformats.org/drawingml/2006/main">
               <a:ext uri="{FF2B5EF4-FFF2-40B4-BE49-F238E27FC236}">
-                <a16:creationId xmlns:a16="http://schemas.microsoft.com/office/drawing/2014/main" id="{FB0AF871-16EE-45D8-8B1B-A548953ACF9E}"/>
+                <a16:creationId xmlns:a16="http://schemas.microsoft.com/office/drawing/2014/main" id="{37CC9AC9-FA90-495A-AC41-3AC10A146441}"/>
               </a:ext>
             </a:extLst>
           </p:cNvPr>
@@ -6543,7 +6548,7 @@
           <p:cNvPr id="21" name="s2-n1-label">
             <a:extLst xmlns:a="http://schemas.openxmlformats.org/drawingml/2006/main">
               <a:ext uri="{FF2B5EF4-FFF2-40B4-BE49-F238E27FC236}">
-                <a16:creationId xmlns:a16="http://schemas.microsoft.com/office/drawing/2014/main" id="{57869D4F-53EB-4C23-99EA-88763AEFCD21}"/>
+                <a16:creationId xmlns:a16="http://schemas.microsoft.com/office/drawing/2014/main" id="{190823B6-5663-4373-8629-15A20D8291BA}"/>
               </a:ext>
             </a:extLst>
           </p:cNvPr>
@@ -6588,7 +6593,7 @@
           <p:cNvPr id="22" name="s2-p1">
             <a:extLst xmlns:a="http://schemas.openxmlformats.org/drawingml/2006/main">
               <a:ext uri="{FF2B5EF4-FFF2-40B4-BE49-F238E27FC236}">
-                <a16:creationId xmlns:a16="http://schemas.microsoft.com/office/drawing/2014/main" id="{A96FAC6A-2F04-473B-9F12-CC75CD1844CB}"/>
+                <a16:creationId xmlns:a16="http://schemas.microsoft.com/office/drawing/2014/main" id="{79810E1B-924C-4ADC-9860-6B354734F743}"/>
               </a:ext>
             </a:extLst>
           </p:cNvPr>
@@ -6633,7 +6638,7 @@
           <p:cNvPr id="23" name="s2-n2">
             <a:extLst xmlns:a="http://schemas.openxmlformats.org/drawingml/2006/main">
               <a:ext uri="{FF2B5EF4-FFF2-40B4-BE49-F238E27FC236}">
-                <a16:creationId xmlns:a16="http://schemas.microsoft.com/office/drawing/2014/main" id="{B94514C9-B05A-4EFE-B07D-975C619477E8}"/>
+                <a16:creationId xmlns:a16="http://schemas.microsoft.com/office/drawing/2014/main" id="{50DC14B7-3041-4E7E-98D2-89FDE7AEB300}"/>
               </a:ext>
             </a:extLst>
           </p:cNvPr>
@@ -6666,7 +6671,7 @@
           <p:cNvPr id="24" name="s2-n2-label">
             <a:extLst xmlns:a="http://schemas.openxmlformats.org/drawingml/2006/main">
               <a:ext uri="{FF2B5EF4-FFF2-40B4-BE49-F238E27FC236}">
-                <a16:creationId xmlns:a16="http://schemas.microsoft.com/office/drawing/2014/main" id="{BFFCE878-872D-4097-B957-8F49DD999C05}"/>
+                <a16:creationId xmlns:a16="http://schemas.microsoft.com/office/drawing/2014/main" id="{A8D7F77D-4B43-4A67-AE3B-B48872879295}"/>
               </a:ext>
             </a:extLst>
           </p:cNvPr>
@@ -6711,7 +6716,7 @@
           <p:cNvPr id="25" name="s2-p2">
             <a:extLst xmlns:a="http://schemas.openxmlformats.org/drawingml/2006/main">
               <a:ext uri="{FF2B5EF4-FFF2-40B4-BE49-F238E27FC236}">
-                <a16:creationId xmlns:a16="http://schemas.microsoft.com/office/drawing/2014/main" id="{0F674F13-18FD-459B-A95E-D4BD5869322B}"/>
+                <a16:creationId xmlns:a16="http://schemas.microsoft.com/office/drawing/2014/main" id="{28B6BB48-A250-4372-8C99-D3C9B0FB56D8}"/>
               </a:ext>
             </a:extLst>
           </p:cNvPr>
@@ -6756,7 +6761,7 @@
           <p:cNvPr id="26" name="s2-n3">
             <a:extLst xmlns:a="http://schemas.openxmlformats.org/drawingml/2006/main">
               <a:ext uri="{FF2B5EF4-FFF2-40B4-BE49-F238E27FC236}">
-                <a16:creationId xmlns:a16="http://schemas.microsoft.com/office/drawing/2014/main" id="{B59033F0-4A80-4203-9F17-187664502D06}"/>
+                <a16:creationId xmlns:a16="http://schemas.microsoft.com/office/drawing/2014/main" id="{2BBABD7A-4585-444E-A9F1-6CAC5C22F736}"/>
               </a:ext>
             </a:extLst>
           </p:cNvPr>
@@ -6789,7 +6794,7 @@
           <p:cNvPr id="27" name="s2-n3-label">
             <a:extLst xmlns:a="http://schemas.openxmlformats.org/drawingml/2006/main">
               <a:ext uri="{FF2B5EF4-FFF2-40B4-BE49-F238E27FC236}">
-                <a16:creationId xmlns:a16="http://schemas.microsoft.com/office/drawing/2014/main" id="{7D736D9D-557F-4B99-A22D-D48C82A19D3C}"/>
+                <a16:creationId xmlns:a16="http://schemas.microsoft.com/office/drawing/2014/main" id="{2030DE4D-1B57-4EC4-A568-13B0BE1E45B8}"/>
               </a:ext>
             </a:extLst>
           </p:cNvPr>
@@ -6834,7 +6839,7 @@
           <p:cNvPr id="28" name="s2-p3">
             <a:extLst xmlns:a="http://schemas.openxmlformats.org/drawingml/2006/main">
               <a:ext uri="{FF2B5EF4-FFF2-40B4-BE49-F238E27FC236}">
-                <a16:creationId xmlns:a16="http://schemas.microsoft.com/office/drawing/2014/main" id="{91DE6FA7-E672-4D5C-A33E-E4C51DE231D2}"/>
+                <a16:creationId xmlns:a16="http://schemas.microsoft.com/office/drawing/2014/main" id="{93A9E5A6-C249-491F-991A-D340B2B654C4}"/>
               </a:ext>
             </a:extLst>
           </p:cNvPr>
@@ -6879,7 +6884,7 @@
           <p:cNvPr id="29" name="s2-takeaway">
             <a:extLst xmlns:a="http://schemas.openxmlformats.org/drawingml/2006/main">
               <a:ext uri="{FF2B5EF4-FFF2-40B4-BE49-F238E27FC236}">
-                <a16:creationId xmlns:a16="http://schemas.microsoft.com/office/drawing/2014/main" id="{8F5823AC-E459-4DA7-AFDD-3916BD97E5E7}"/>
+                <a16:creationId xmlns:a16="http://schemas.microsoft.com/office/drawing/2014/main" id="{096B0D61-A379-4ECD-A889-6CFFA75A7B36}"/>
               </a:ext>
             </a:extLst>
           </p:cNvPr>
@@ -6946,7 +6951,7 @@
           <p:cNvPr id="31" name="footer-source-2">
             <a:extLst xmlns:a="http://schemas.openxmlformats.org/drawingml/2006/main">
               <a:ext uri="{FF2B5EF4-FFF2-40B4-BE49-F238E27FC236}">
-                <a16:creationId xmlns:a16="http://schemas.microsoft.com/office/drawing/2014/main" id="{053667B1-D1E6-4AF0-BE2C-77B46C022AF2}"/>
+                <a16:creationId xmlns:a16="http://schemas.microsoft.com/office/drawing/2014/main" id="{04C3F60E-F37E-424C-AFF7-1743CE960E22}"/>
               </a:ext>
             </a:extLst>
           </p:cNvPr>
@@ -6991,7 +6996,7 @@
           <p:cNvPr id="32" name="footer-number-2">
             <a:extLst xmlns:a="http://schemas.openxmlformats.org/drawingml/2006/main">
               <a:ext uri="{FF2B5EF4-FFF2-40B4-BE49-F238E27FC236}">
-                <a16:creationId xmlns:a16="http://schemas.microsoft.com/office/drawing/2014/main" id="{FD03E0DA-8C35-4FE6-B15B-A45DA2327FF7}"/>
+                <a16:creationId xmlns:a16="http://schemas.microsoft.com/office/drawing/2014/main" id="{424B1FE4-777A-43BD-9F78-B10A63DCFAB4}"/>
               </a:ext>
             </a:extLst>
           </p:cNvPr>
@@ -7034,7 +7039,7 @@
     </p:spTree>
     <p:extLst>
       <p:ext uri="{BB962C8B-B14F-4D97-AF65-F5344CB8AC3E}">
-        <p14:creationId xmlns:p14="http://schemas.microsoft.com/office/powerpoint/2010/main" val="1347448899"/>
+        <p14:creationId xmlns:p14="http://schemas.microsoft.com/office/powerpoint/2010/main" val="1110572424"/>
       </p:ext>
     </p:extLst>
   </p:cSld>
@@ -7065,7 +7070,7 @@
           <p:cNvPr id="38" name="s3-title">
             <a:extLst xmlns:a="http://schemas.openxmlformats.org/drawingml/2006/main">
               <a:ext uri="{FF2B5EF4-FFF2-40B4-BE49-F238E27FC236}">
-                <a16:creationId xmlns:a16="http://schemas.microsoft.com/office/drawing/2014/main" id="{1AA5167D-8585-4D61-80DF-1055F52DF77E}"/>
+                <a16:creationId xmlns:a16="http://schemas.microsoft.com/office/drawing/2014/main" id="{16A130AA-73ED-4004-9524-EECB5261FFDF}"/>
               </a:ext>
             </a:extLst>
           </p:cNvPr>
@@ -7110,7 +7115,7 @@
           <p:cNvPr id="2" name="s3-subtitle">
             <a:extLst xmlns:a="http://schemas.openxmlformats.org/drawingml/2006/main">
               <a:ext uri="{FF2B5EF4-FFF2-40B4-BE49-F238E27FC236}">
-                <a16:creationId xmlns:a16="http://schemas.microsoft.com/office/drawing/2014/main" id="{5B692289-CD0A-42CB-9B3E-DE3CFDA25683}"/>
+                <a16:creationId xmlns:a16="http://schemas.microsoft.com/office/drawing/2014/main" id="{37AA996A-D7BF-4998-BEE4-E31AAB0E23C5}"/>
               </a:ext>
             </a:extLst>
           </p:cNvPr>
@@ -7199,7 +7204,7 @@
           <p:cNvPr id="5" name="s3-address-panel">
             <a:extLst xmlns:a="http://schemas.openxmlformats.org/drawingml/2006/main">
               <a:ext uri="{FF2B5EF4-FFF2-40B4-BE49-F238E27FC236}">
-                <a16:creationId xmlns:a16="http://schemas.microsoft.com/office/drawing/2014/main" id="{B86D3D54-FE14-4903-98D9-CA9D154914CE}"/>
+                <a16:creationId xmlns:a16="http://schemas.microsoft.com/office/drawing/2014/main" id="{B6450E92-C9CB-4D51-B901-6C2EADD3C05F}"/>
               </a:ext>
             </a:extLst>
           </p:cNvPr>
@@ -7278,7 +7283,7 @@
           <p:cNvPr id="8" name="s3-x">
             <a:extLst xmlns:a="http://schemas.openxmlformats.org/drawingml/2006/main">
               <a:ext uri="{FF2B5EF4-FFF2-40B4-BE49-F238E27FC236}">
-                <a16:creationId xmlns:a16="http://schemas.microsoft.com/office/drawing/2014/main" id="{A30D06ED-94BF-4994-82EB-74729C949082}"/>
+                <a16:creationId xmlns:a16="http://schemas.microsoft.com/office/drawing/2014/main" id="{6FE8210D-2547-4832-861E-9D0C5BA6B789}"/>
               </a:ext>
             </a:extLst>
           </p:cNvPr>
@@ -7311,7 +7316,7 @@
           <p:cNvPr id="9" name="s3-x-letter">
             <a:extLst xmlns:a="http://schemas.openxmlformats.org/drawingml/2006/main">
               <a:ext uri="{FF2B5EF4-FFF2-40B4-BE49-F238E27FC236}">
-                <a16:creationId xmlns:a16="http://schemas.microsoft.com/office/drawing/2014/main" id="{F0D697D9-DEE0-420A-96C9-566ECE493345}"/>
+                <a16:creationId xmlns:a16="http://schemas.microsoft.com/office/drawing/2014/main" id="{10FF87E8-620F-4A5F-96D7-E39BBC345435}"/>
               </a:ext>
             </a:extLst>
           </p:cNvPr>
@@ -7356,7 +7361,7 @@
           <p:cNvPr id="10" name="s3-x-label">
             <a:extLst xmlns:a="http://schemas.openxmlformats.org/drawingml/2006/main">
               <a:ext uri="{FF2B5EF4-FFF2-40B4-BE49-F238E27FC236}">
-                <a16:creationId xmlns:a16="http://schemas.microsoft.com/office/drawing/2014/main" id="{8BE6172B-40FB-4186-8601-D5F9960BD064}"/>
+                <a16:creationId xmlns:a16="http://schemas.microsoft.com/office/drawing/2014/main" id="{2DB67C25-EA75-40A8-AB42-7929F8D217CB}"/>
               </a:ext>
             </a:extLst>
           </p:cNvPr>
@@ -7401,7 +7406,7 @@
           <p:cNvPr id="11" name="s3-x-main">
             <a:extLst xmlns:a="http://schemas.openxmlformats.org/drawingml/2006/main">
               <a:ext uri="{FF2B5EF4-FFF2-40B4-BE49-F238E27FC236}">
-                <a16:creationId xmlns:a16="http://schemas.microsoft.com/office/drawing/2014/main" id="{77F53F81-98F0-40EF-B92C-4756ED8DD125}"/>
+                <a16:creationId xmlns:a16="http://schemas.microsoft.com/office/drawing/2014/main" id="{E731AB05-0E1E-44DE-8025-9CBC433A1D41}"/>
               </a:ext>
             </a:extLst>
           </p:cNvPr>
@@ -7446,7 +7451,7 @@
           <p:cNvPr id="12" name="s3-x-question">
             <a:extLst xmlns:a="http://schemas.openxmlformats.org/drawingml/2006/main">
               <a:ext uri="{FF2B5EF4-FFF2-40B4-BE49-F238E27FC236}">
-                <a16:creationId xmlns:a16="http://schemas.microsoft.com/office/drawing/2014/main" id="{5DC9BAA3-0B1A-45FB-A8D5-8EB8CEEB9FF8}"/>
+                <a16:creationId xmlns:a16="http://schemas.microsoft.com/office/drawing/2014/main" id="{BF12E5A1-25E6-4741-A41F-03A993864B09}"/>
               </a:ext>
             </a:extLst>
           </p:cNvPr>
@@ -7491,7 +7496,7 @@
           <p:cNvPr id="13" name="s3-y">
             <a:extLst xmlns:a="http://schemas.openxmlformats.org/drawingml/2006/main">
               <a:ext uri="{FF2B5EF4-FFF2-40B4-BE49-F238E27FC236}">
-                <a16:creationId xmlns:a16="http://schemas.microsoft.com/office/drawing/2014/main" id="{26E50144-EA2E-4B4A-9977-1BAEEE60CEF3}"/>
+                <a16:creationId xmlns:a16="http://schemas.microsoft.com/office/drawing/2014/main" id="{3B429CDA-AFD9-467B-83CB-5725ED91AB9F}"/>
               </a:ext>
             </a:extLst>
           </p:cNvPr>
@@ -7524,7 +7529,7 @@
           <p:cNvPr id="14" name="s3-y-letter">
             <a:extLst xmlns:a="http://schemas.openxmlformats.org/drawingml/2006/main">
               <a:ext uri="{FF2B5EF4-FFF2-40B4-BE49-F238E27FC236}">
-                <a16:creationId xmlns:a16="http://schemas.microsoft.com/office/drawing/2014/main" id="{6C9F8289-FB14-46FB-B69F-36CCA350268F}"/>
+                <a16:creationId xmlns:a16="http://schemas.microsoft.com/office/drawing/2014/main" id="{F7FBDA51-D19E-4812-BF2F-47181F016D89}"/>
               </a:ext>
             </a:extLst>
           </p:cNvPr>
@@ -7569,7 +7574,7 @@
           <p:cNvPr id="15" name="s3-y-label">
             <a:extLst xmlns:a="http://schemas.openxmlformats.org/drawingml/2006/main">
               <a:ext uri="{FF2B5EF4-FFF2-40B4-BE49-F238E27FC236}">
-                <a16:creationId xmlns:a16="http://schemas.microsoft.com/office/drawing/2014/main" id="{84B69546-30FC-4C3A-B0AF-38DCA6ED8727}"/>
+                <a16:creationId xmlns:a16="http://schemas.microsoft.com/office/drawing/2014/main" id="{CB4AF1EC-F97D-4303-82FE-E5F77AE40180}"/>
               </a:ext>
             </a:extLst>
           </p:cNvPr>
@@ -7614,7 +7619,7 @@
           <p:cNvPr id="16" name="s3-y-main">
             <a:extLst xmlns:a="http://schemas.openxmlformats.org/drawingml/2006/main">
               <a:ext uri="{FF2B5EF4-FFF2-40B4-BE49-F238E27FC236}">
-                <a16:creationId xmlns:a16="http://schemas.microsoft.com/office/drawing/2014/main" id="{9B414944-4228-4BFA-9CED-C0A1F4556A8C}"/>
+                <a16:creationId xmlns:a16="http://schemas.microsoft.com/office/drawing/2014/main" id="{176C8DC6-4CA0-449A-8560-147634EB36AA}"/>
               </a:ext>
             </a:extLst>
           </p:cNvPr>
@@ -7659,7 +7664,7 @@
           <p:cNvPr id="17" name="s3-y-question">
             <a:extLst xmlns:a="http://schemas.openxmlformats.org/drawingml/2006/main">
               <a:ext uri="{FF2B5EF4-FFF2-40B4-BE49-F238E27FC236}">
-                <a16:creationId xmlns:a16="http://schemas.microsoft.com/office/drawing/2014/main" id="{EFE28FA1-750E-47B5-8787-D62D17B0BFDB}"/>
+                <a16:creationId xmlns:a16="http://schemas.microsoft.com/office/drawing/2014/main" id="{C16A447D-36EC-473E-9652-EDCB5AA1BFB1}"/>
               </a:ext>
             </a:extLst>
           </p:cNvPr>
@@ -7704,7 +7709,7 @@
           <p:cNvPr id="18" name="s3-z">
             <a:extLst xmlns:a="http://schemas.openxmlformats.org/drawingml/2006/main">
               <a:ext uri="{FF2B5EF4-FFF2-40B4-BE49-F238E27FC236}">
-                <a16:creationId xmlns:a16="http://schemas.microsoft.com/office/drawing/2014/main" id="{65920A7D-09ED-4038-846A-97A5D870DC28}"/>
+                <a16:creationId xmlns:a16="http://schemas.microsoft.com/office/drawing/2014/main" id="{C4B6AB9A-5D13-436A-87B9-2A268EFAE405}"/>
               </a:ext>
             </a:extLst>
           </p:cNvPr>
@@ -7737,7 +7742,7 @@
           <p:cNvPr id="19" name="s3-z-letter">
             <a:extLst xmlns:a="http://schemas.openxmlformats.org/drawingml/2006/main">
               <a:ext uri="{FF2B5EF4-FFF2-40B4-BE49-F238E27FC236}">
-                <a16:creationId xmlns:a16="http://schemas.microsoft.com/office/drawing/2014/main" id="{5FE4107F-3322-415A-9588-40AFCECF606E}"/>
+                <a16:creationId xmlns:a16="http://schemas.microsoft.com/office/drawing/2014/main" id="{993907FD-BF41-4B1B-A249-9FD554D692EC}"/>
               </a:ext>
             </a:extLst>
           </p:cNvPr>
@@ -7782,7 +7787,7 @@
           <p:cNvPr id="20" name="s3-z-label">
             <a:extLst xmlns:a="http://schemas.openxmlformats.org/drawingml/2006/main">
               <a:ext uri="{FF2B5EF4-FFF2-40B4-BE49-F238E27FC236}">
-                <a16:creationId xmlns:a16="http://schemas.microsoft.com/office/drawing/2014/main" id="{E0555D1A-7FDE-4F44-A3DD-A99592BC8707}"/>
+                <a16:creationId xmlns:a16="http://schemas.microsoft.com/office/drawing/2014/main" id="{068A9C8C-5791-41F9-AAC2-8532A1C32756}"/>
               </a:ext>
             </a:extLst>
           </p:cNvPr>
@@ -7827,7 +7832,7 @@
           <p:cNvPr id="21" name="s3-z-main">
             <a:extLst xmlns:a="http://schemas.openxmlformats.org/drawingml/2006/main">
               <a:ext uri="{FF2B5EF4-FFF2-40B4-BE49-F238E27FC236}">
-                <a16:creationId xmlns:a16="http://schemas.microsoft.com/office/drawing/2014/main" id="{16D70E96-1884-438E-8F9E-35033947F7AF}"/>
+                <a16:creationId xmlns:a16="http://schemas.microsoft.com/office/drawing/2014/main" id="{D90311D5-105A-4280-B1A9-380B2A63DECD}"/>
               </a:ext>
             </a:extLst>
           </p:cNvPr>
@@ -7872,7 +7877,7 @@
           <p:cNvPr id="22" name="s3-z-question">
             <a:extLst xmlns:a="http://schemas.openxmlformats.org/drawingml/2006/main">
               <a:ext uri="{FF2B5EF4-FFF2-40B4-BE49-F238E27FC236}">
-                <a16:creationId xmlns:a16="http://schemas.microsoft.com/office/drawing/2014/main" id="{BAB8A95C-37D3-45C6-B307-11841E2C7FDD}"/>
+                <a16:creationId xmlns:a16="http://schemas.microsoft.com/office/drawing/2014/main" id="{5D1F97C1-4B3C-4179-8B90-8742AA82571B}"/>
               </a:ext>
             </a:extLst>
           </p:cNvPr>
@@ -7917,7 +7922,7 @@
           <p:cNvPr id="23" name="s3-address-label">
             <a:extLst xmlns:a="http://schemas.openxmlformats.org/drawingml/2006/main">
               <a:ext uri="{FF2B5EF4-FFF2-40B4-BE49-F238E27FC236}">
-                <a16:creationId xmlns:a16="http://schemas.microsoft.com/office/drawing/2014/main" id="{8CE274BD-7C85-45EF-9B02-FCCB694E022F}"/>
+                <a16:creationId xmlns:a16="http://schemas.microsoft.com/office/drawing/2014/main" id="{822B52BE-1741-4B81-ACB8-878C3829AFCF}"/>
               </a:ext>
             </a:extLst>
           </p:cNvPr>
@@ -7962,7 +7967,7 @@
           <p:cNvPr id="24" name="s3-address-x">
             <a:extLst xmlns:a="http://schemas.openxmlformats.org/drawingml/2006/main">
               <a:ext uri="{FF2B5EF4-FFF2-40B4-BE49-F238E27FC236}">
-                <a16:creationId xmlns:a16="http://schemas.microsoft.com/office/drawing/2014/main" id="{66FAE4F1-A16E-47FD-9C75-6A4CD95FAB2E}"/>
+                <a16:creationId xmlns:a16="http://schemas.microsoft.com/office/drawing/2014/main" id="{A5E57E08-6FDF-4E58-BAD0-9A5195DD6AF9}"/>
               </a:ext>
             </a:extLst>
           </p:cNvPr>
@@ -8007,7 +8012,7 @@
           <p:cNvPr id="25" name="s3-address-x-value">
             <a:extLst xmlns:a="http://schemas.openxmlformats.org/drawingml/2006/main">
               <a:ext uri="{FF2B5EF4-FFF2-40B4-BE49-F238E27FC236}">
-                <a16:creationId xmlns:a16="http://schemas.microsoft.com/office/drawing/2014/main" id="{24D254DE-2F72-4B88-AEB9-E369A5E1D239}"/>
+                <a16:creationId xmlns:a16="http://schemas.microsoft.com/office/drawing/2014/main" id="{F1D6EFE7-B115-4D9E-A7B2-DBD576B93E22}"/>
               </a:ext>
             </a:extLst>
           </p:cNvPr>
@@ -8052,7 +8057,7 @@
           <p:cNvPr id="26" name="s3-address-y">
             <a:extLst xmlns:a="http://schemas.openxmlformats.org/drawingml/2006/main">
               <a:ext uri="{FF2B5EF4-FFF2-40B4-BE49-F238E27FC236}">
-                <a16:creationId xmlns:a16="http://schemas.microsoft.com/office/drawing/2014/main" id="{663B16E4-999C-4D78-8D27-59CB7E0A504A}"/>
+                <a16:creationId xmlns:a16="http://schemas.microsoft.com/office/drawing/2014/main" id="{C665195B-BC42-4252-8BA8-D27C74B0EDA7}"/>
               </a:ext>
             </a:extLst>
           </p:cNvPr>
@@ -8097,7 +8102,7 @@
           <p:cNvPr id="27" name="s3-address-y-value">
             <a:extLst xmlns:a="http://schemas.openxmlformats.org/drawingml/2006/main">
               <a:ext uri="{FF2B5EF4-FFF2-40B4-BE49-F238E27FC236}">
-                <a16:creationId xmlns:a16="http://schemas.microsoft.com/office/drawing/2014/main" id="{093CE907-53D1-4441-B27C-319C5A2DD6AE}"/>
+                <a16:creationId xmlns:a16="http://schemas.microsoft.com/office/drawing/2014/main" id="{534FAAFA-DE95-4DD0-878F-68CFB910D88C}"/>
               </a:ext>
             </a:extLst>
           </p:cNvPr>
@@ -8142,7 +8147,7 @@
           <p:cNvPr id="28" name="s3-address-z">
             <a:extLst xmlns:a="http://schemas.openxmlformats.org/drawingml/2006/main">
               <a:ext uri="{FF2B5EF4-FFF2-40B4-BE49-F238E27FC236}">
-                <a16:creationId xmlns:a16="http://schemas.microsoft.com/office/drawing/2014/main" id="{69387AC3-10C5-474D-8A54-A95C5036C855}"/>
+                <a16:creationId xmlns:a16="http://schemas.microsoft.com/office/drawing/2014/main" id="{60379254-984D-466A-B2E4-02500A2CC546}"/>
               </a:ext>
             </a:extLst>
           </p:cNvPr>
@@ -8187,7 +8192,7 @@
           <p:cNvPr id="29" name="s3-address-z-value">
             <a:extLst xmlns:a="http://schemas.openxmlformats.org/drawingml/2006/main">
               <a:ext uri="{FF2B5EF4-FFF2-40B4-BE49-F238E27FC236}">
-                <a16:creationId xmlns:a16="http://schemas.microsoft.com/office/drawing/2014/main" id="{3C45EDE7-8AA7-435B-96EB-45120B09832B}"/>
+                <a16:creationId xmlns:a16="http://schemas.microsoft.com/office/drawing/2014/main" id="{2F940990-8BC6-4375-A308-4FACC826AF95}"/>
               </a:ext>
             </a:extLst>
           </p:cNvPr>
@@ -8232,7 +8237,7 @@
           <p:cNvPr id="30" name="s3-address-note">
             <a:extLst xmlns:a="http://schemas.openxmlformats.org/drawingml/2006/main">
               <a:ext uri="{FF2B5EF4-FFF2-40B4-BE49-F238E27FC236}">
-                <a16:creationId xmlns:a16="http://schemas.microsoft.com/office/drawing/2014/main" id="{88BEF165-F0C9-47AC-85ED-5A0BE9F1F040}"/>
+                <a16:creationId xmlns:a16="http://schemas.microsoft.com/office/drawing/2014/main" id="{42969237-F0BE-4636-A645-EBBC250FAE48}"/>
               </a:ext>
             </a:extLst>
           </p:cNvPr>
@@ -8277,7 +8282,7 @@
           <p:cNvPr id="31" name="s3-route-label">
             <a:extLst xmlns:a="http://schemas.openxmlformats.org/drawingml/2006/main">
               <a:ext uri="{FF2B5EF4-FFF2-40B4-BE49-F238E27FC236}">
-                <a16:creationId xmlns:a16="http://schemas.microsoft.com/office/drawing/2014/main" id="{F66DE204-DCED-4365-99E9-131D1817EF89}"/>
+                <a16:creationId xmlns:a16="http://schemas.microsoft.com/office/drawing/2014/main" id="{96F48788-BE8F-40AB-85EE-06147F3519E7}"/>
               </a:ext>
             </a:extLst>
           </p:cNvPr>
@@ -8322,7 +8327,7 @@
           <p:cNvPr id="32" name="s3-route-main">
             <a:extLst xmlns:a="http://schemas.openxmlformats.org/drawingml/2006/main">
               <a:ext uri="{FF2B5EF4-FFF2-40B4-BE49-F238E27FC236}">
-                <a16:creationId xmlns:a16="http://schemas.microsoft.com/office/drawing/2014/main" id="{4EA3DD46-43BE-452B-9961-205C5485D58A}"/>
+                <a16:creationId xmlns:a16="http://schemas.microsoft.com/office/drawing/2014/main" id="{8393FD55-7617-4A7A-B052-C2FB65644731}"/>
               </a:ext>
             </a:extLst>
           </p:cNvPr>
@@ -8367,7 +8372,7 @@
           <p:cNvPr id="33" name="s3-memory-label">
             <a:extLst xmlns:a="http://schemas.openxmlformats.org/drawingml/2006/main">
               <a:ext uri="{FF2B5EF4-FFF2-40B4-BE49-F238E27FC236}">
-                <a16:creationId xmlns:a16="http://schemas.microsoft.com/office/drawing/2014/main" id="{62A5391B-43A8-4B53-B7A3-29773BAF062D}"/>
+                <a16:creationId xmlns:a16="http://schemas.microsoft.com/office/drawing/2014/main" id="{792231F3-D6FC-49BA-8EBA-90C356A71304}"/>
               </a:ext>
             </a:extLst>
           </p:cNvPr>
@@ -8412,7 +8417,7 @@
           <p:cNvPr id="34" name="s3-memory-main">
             <a:extLst xmlns:a="http://schemas.openxmlformats.org/drawingml/2006/main">
               <a:ext uri="{FF2B5EF4-FFF2-40B4-BE49-F238E27FC236}">
-                <a16:creationId xmlns:a16="http://schemas.microsoft.com/office/drawing/2014/main" id="{1B78DEA4-B5BD-4C61-8797-71054E068288}"/>
+                <a16:creationId xmlns:a16="http://schemas.microsoft.com/office/drawing/2014/main" id="{72E36173-92CC-4BBE-B7AE-8008F1FD9E79}"/>
               </a:ext>
             </a:extLst>
           </p:cNvPr>
@@ -8479,7 +8484,7 @@
           <p:cNvPr id="36" name="footer-source-3">
             <a:extLst xmlns:a="http://schemas.openxmlformats.org/drawingml/2006/main">
               <a:ext uri="{FF2B5EF4-FFF2-40B4-BE49-F238E27FC236}">
-                <a16:creationId xmlns:a16="http://schemas.microsoft.com/office/drawing/2014/main" id="{2204F213-185C-4C85-A88E-E62E73AFCA97}"/>
+                <a16:creationId xmlns:a16="http://schemas.microsoft.com/office/drawing/2014/main" id="{300163E3-EAF0-47E1-AA25-3126C4B7C631}"/>
               </a:ext>
             </a:extLst>
           </p:cNvPr>
@@ -8524,7 +8529,7 @@
           <p:cNvPr id="37" name="footer-number-3">
             <a:extLst xmlns:a="http://schemas.openxmlformats.org/drawingml/2006/main">
               <a:ext uri="{FF2B5EF4-FFF2-40B4-BE49-F238E27FC236}">
-                <a16:creationId xmlns:a16="http://schemas.microsoft.com/office/drawing/2014/main" id="{AE267F97-2FB0-45B8-9662-73BE554017CC}"/>
+                <a16:creationId xmlns:a16="http://schemas.microsoft.com/office/drawing/2014/main" id="{DA386582-6D24-43A0-B1F8-8A236CD4B448}"/>
               </a:ext>
             </a:extLst>
           </p:cNvPr>
@@ -8567,7 +8572,7 @@
     </p:spTree>
     <p:extLst>
       <p:ext uri="{BB962C8B-B14F-4D97-AF65-F5344CB8AC3E}">
-        <p14:creationId xmlns:p14="http://schemas.microsoft.com/office/powerpoint/2010/main" val="258359751"/>
+        <p14:creationId xmlns:p14="http://schemas.microsoft.com/office/powerpoint/2010/main" val="1511769111"/>
       </p:ext>
     </p:extLst>
   </p:cSld>
@@ -8598,7 +8603,7 @@
           <p:cNvPr id="26" name="s4-title">
             <a:extLst xmlns:a="http://schemas.openxmlformats.org/drawingml/2006/main">
               <a:ext uri="{FF2B5EF4-FFF2-40B4-BE49-F238E27FC236}">
-                <a16:creationId xmlns:a16="http://schemas.microsoft.com/office/drawing/2014/main" id="{B8534018-2C61-45E0-9079-62251C560226}"/>
+                <a16:creationId xmlns:a16="http://schemas.microsoft.com/office/drawing/2014/main" id="{395B62F6-87F0-46A3-A5DD-9B169F249AA3}"/>
               </a:ext>
             </a:extLst>
           </p:cNvPr>
@@ -8643,7 +8648,7 @@
           <p:cNvPr id="2" name="s4-subtitle">
             <a:extLst xmlns:a="http://schemas.openxmlformats.org/drawingml/2006/main">
               <a:ext uri="{FF2B5EF4-FFF2-40B4-BE49-F238E27FC236}">
-                <a16:creationId xmlns:a16="http://schemas.microsoft.com/office/drawing/2014/main" id="{A7964411-9CAC-44DB-BB39-CB0F2B0DCB15}"/>
+                <a16:creationId xmlns:a16="http://schemas.microsoft.com/office/drawing/2014/main" id="{41FA8DB0-9DD1-4B6B-8D16-66D56FA39DE4}"/>
               </a:ext>
             </a:extLst>
           </p:cNvPr>
@@ -8688,7 +8693,7 @@
           <p:cNvPr id="3" name="s4-terminal">
             <a:extLst xmlns:a="http://schemas.openxmlformats.org/drawingml/2006/main">
               <a:ext uri="{FF2B5EF4-FFF2-40B4-BE49-F238E27FC236}">
-                <a16:creationId xmlns:a16="http://schemas.microsoft.com/office/drawing/2014/main" id="{374592C3-ABE8-41C9-91DC-5A3399C15983}"/>
+                <a16:creationId xmlns:a16="http://schemas.microsoft.com/office/drawing/2014/main" id="{6E565CD7-1029-4A6F-94A2-3A5D982E466B}"/>
               </a:ext>
             </a:extLst>
           </p:cNvPr>
@@ -8745,7 +8750,7 @@
           <p:cNvPr id="5" name="s4-dot1">
             <a:extLst xmlns:a="http://schemas.openxmlformats.org/drawingml/2006/main">
               <a:ext uri="{FF2B5EF4-FFF2-40B4-BE49-F238E27FC236}">
-                <a16:creationId xmlns:a16="http://schemas.microsoft.com/office/drawing/2014/main" id="{B6465859-204C-4A4A-A8B6-C101101C9256}"/>
+                <a16:creationId xmlns:a16="http://schemas.microsoft.com/office/drawing/2014/main" id="{F5212518-CCF5-460D-98CC-D35A78BA8CD2}"/>
               </a:ext>
             </a:extLst>
           </p:cNvPr>
@@ -8778,7 +8783,7 @@
           <p:cNvPr id="6" name="s4-dot2">
             <a:extLst xmlns:a="http://schemas.openxmlformats.org/drawingml/2006/main">
               <a:ext uri="{FF2B5EF4-FFF2-40B4-BE49-F238E27FC236}">
-                <a16:creationId xmlns:a16="http://schemas.microsoft.com/office/drawing/2014/main" id="{C42EDEFC-549A-4381-BC95-8C6BEF2CB020}"/>
+                <a16:creationId xmlns:a16="http://schemas.microsoft.com/office/drawing/2014/main" id="{51697863-1408-4107-B2F6-C516AA5A820A}"/>
               </a:ext>
             </a:extLst>
           </p:cNvPr>
@@ -8811,7 +8816,7 @@
           <p:cNvPr id="7" name="s4-dot3">
             <a:extLst xmlns:a="http://schemas.openxmlformats.org/drawingml/2006/main">
               <a:ext uri="{FF2B5EF4-FFF2-40B4-BE49-F238E27FC236}">
-                <a16:creationId xmlns:a16="http://schemas.microsoft.com/office/drawing/2014/main" id="{F6215524-12D9-4B09-B615-2CB72FD8652B}"/>
+                <a16:creationId xmlns:a16="http://schemas.microsoft.com/office/drawing/2014/main" id="{375D56F5-C1EE-4CCC-87B2-79C7D6EE64F5}"/>
               </a:ext>
             </a:extLst>
           </p:cNvPr>
@@ -8844,7 +8849,7 @@
           <p:cNvPr id="8" name="s4-command-label">
             <a:extLst xmlns:a="http://schemas.openxmlformats.org/drawingml/2006/main">
               <a:ext uri="{FF2B5EF4-FFF2-40B4-BE49-F238E27FC236}">
-                <a16:creationId xmlns:a16="http://schemas.microsoft.com/office/drawing/2014/main" id="{6B5621D3-E86B-4C89-8F21-6C10A9187453}"/>
+                <a16:creationId xmlns:a16="http://schemas.microsoft.com/office/drawing/2014/main" id="{E09B3ABB-79BB-434B-BA74-9B273901CB5C}"/>
               </a:ext>
             </a:extLst>
           </p:cNvPr>
@@ -8889,7 +8894,7 @@
           <p:cNvPr id="9" name="s4-command">
             <a:extLst xmlns:a="http://schemas.openxmlformats.org/drawingml/2006/main">
               <a:ext uri="{FF2B5EF4-FFF2-40B4-BE49-F238E27FC236}">
-                <a16:creationId xmlns:a16="http://schemas.microsoft.com/office/drawing/2014/main" id="{96E25078-C8BD-4041-9B59-5BBDAF6B45C6}"/>
+                <a16:creationId xmlns:a16="http://schemas.microsoft.com/office/drawing/2014/main" id="{43A85C94-FFDF-4F75-8BEA-9A236B1FDBFC}"/>
               </a:ext>
             </a:extLst>
           </p:cNvPr>
@@ -8938,7 +8943,7 @@
           <p:cNvPr id="10" name="s4-command-note">
             <a:extLst xmlns:a="http://schemas.openxmlformats.org/drawingml/2006/main">
               <a:ext uri="{FF2B5EF4-FFF2-40B4-BE49-F238E27FC236}">
-                <a16:creationId xmlns:a16="http://schemas.microsoft.com/office/drawing/2014/main" id="{F1E1ADCA-16E6-4D75-8E6B-34372BA70BFE}"/>
+                <a16:creationId xmlns:a16="http://schemas.microsoft.com/office/drawing/2014/main" id="{46C1BF6E-06BC-4845-9AFC-249BE5CD3C5A}"/>
               </a:ext>
             </a:extLst>
           </p:cNvPr>
@@ -8983,7 +8988,7 @@
           <p:cNvPr id="11" name="s4-output-label">
             <a:extLst xmlns:a="http://schemas.openxmlformats.org/drawingml/2006/main">
               <a:ext uri="{FF2B5EF4-FFF2-40B4-BE49-F238E27FC236}">
-                <a16:creationId xmlns:a16="http://schemas.microsoft.com/office/drawing/2014/main" id="{6DE21CE4-3262-41EC-B8EE-B9D169795E63}"/>
+                <a16:creationId xmlns:a16="http://schemas.microsoft.com/office/drawing/2014/main" id="{EE87986A-94A4-43E8-9291-487DBACF8939}"/>
               </a:ext>
             </a:extLst>
           </p:cNvPr>
@@ -9028,7 +9033,7 @@
           <p:cNvPr id="12" name="s4-o1a">
             <a:extLst xmlns:a="http://schemas.openxmlformats.org/drawingml/2006/main">
               <a:ext uri="{FF2B5EF4-FFF2-40B4-BE49-F238E27FC236}">
-                <a16:creationId xmlns:a16="http://schemas.microsoft.com/office/drawing/2014/main" id="{55CBCF61-0045-432B-9560-CBB9B4F96D48}"/>
+                <a16:creationId xmlns:a16="http://schemas.microsoft.com/office/drawing/2014/main" id="{294E832D-A940-4B2E-B2F5-4FED573B4994}"/>
               </a:ext>
             </a:extLst>
           </p:cNvPr>
@@ -9073,7 +9078,7 @@
           <p:cNvPr id="13" name="s4-o1b">
             <a:extLst xmlns:a="http://schemas.openxmlformats.org/drawingml/2006/main">
               <a:ext uri="{FF2B5EF4-FFF2-40B4-BE49-F238E27FC236}">
-                <a16:creationId xmlns:a16="http://schemas.microsoft.com/office/drawing/2014/main" id="{263401F0-FC22-4C0C-A1A8-73B123EA56AF}"/>
+                <a16:creationId xmlns:a16="http://schemas.microsoft.com/office/drawing/2014/main" id="{C9F4F732-5B6C-48F8-ACEA-D4CDF4BFFD6E}"/>
               </a:ext>
             </a:extLst>
           </p:cNvPr>
@@ -9118,7 +9123,7 @@
           <p:cNvPr id="14" name="s4-o2a">
             <a:extLst xmlns:a="http://schemas.openxmlformats.org/drawingml/2006/main">
               <a:ext uri="{FF2B5EF4-FFF2-40B4-BE49-F238E27FC236}">
-                <a16:creationId xmlns:a16="http://schemas.microsoft.com/office/drawing/2014/main" id="{04EF874B-2E71-4C72-A1E2-738DA8DFA539}"/>
+                <a16:creationId xmlns:a16="http://schemas.microsoft.com/office/drawing/2014/main" id="{5E52D382-437D-45E3-8CD1-289C08634954}"/>
               </a:ext>
             </a:extLst>
           </p:cNvPr>
@@ -9163,7 +9168,7 @@
           <p:cNvPr id="15" name="s4-o2b">
             <a:extLst xmlns:a="http://schemas.openxmlformats.org/drawingml/2006/main">
               <a:ext uri="{FF2B5EF4-FFF2-40B4-BE49-F238E27FC236}">
-                <a16:creationId xmlns:a16="http://schemas.microsoft.com/office/drawing/2014/main" id="{AD2C15D4-77D7-4592-8261-D59DC9487869}"/>
+                <a16:creationId xmlns:a16="http://schemas.microsoft.com/office/drawing/2014/main" id="{BA3A926D-1290-4FE7-93E2-5F4988F7B82F}"/>
               </a:ext>
             </a:extLst>
           </p:cNvPr>
@@ -9208,7 +9213,7 @@
           <p:cNvPr id="16" name="s4-o3a">
             <a:extLst xmlns:a="http://schemas.openxmlformats.org/drawingml/2006/main">
               <a:ext uri="{FF2B5EF4-FFF2-40B4-BE49-F238E27FC236}">
-                <a16:creationId xmlns:a16="http://schemas.microsoft.com/office/drawing/2014/main" id="{94B56EFC-0A4A-4A4F-8BBF-733AECDB1E80}"/>
+                <a16:creationId xmlns:a16="http://schemas.microsoft.com/office/drawing/2014/main" id="{7C1CD88E-2C92-48ED-B55E-2C809295BE93}"/>
               </a:ext>
             </a:extLst>
           </p:cNvPr>
@@ -9253,7 +9258,7 @@
           <p:cNvPr id="17" name="s4-o3b">
             <a:extLst xmlns:a="http://schemas.openxmlformats.org/drawingml/2006/main">
               <a:ext uri="{FF2B5EF4-FFF2-40B4-BE49-F238E27FC236}">
-                <a16:creationId xmlns:a16="http://schemas.microsoft.com/office/drawing/2014/main" id="{310DF74A-6BCC-41D7-AD43-74F5FD5AB3A5}"/>
+                <a16:creationId xmlns:a16="http://schemas.microsoft.com/office/drawing/2014/main" id="{4C7959DE-A01D-4920-AD3D-7D2BE6F55F96}"/>
               </a:ext>
             </a:extLst>
           </p:cNvPr>
@@ -9298,7 +9303,7 @@
           <p:cNvPr id="18" name="s4-o4a">
             <a:extLst xmlns:a="http://schemas.openxmlformats.org/drawingml/2006/main">
               <a:ext uri="{FF2B5EF4-FFF2-40B4-BE49-F238E27FC236}">
-                <a16:creationId xmlns:a16="http://schemas.microsoft.com/office/drawing/2014/main" id="{8FFABE4F-ACA9-407D-834F-F375E79F37E6}"/>
+                <a16:creationId xmlns:a16="http://schemas.microsoft.com/office/drawing/2014/main" id="{FA71EB5F-E91E-4805-AF96-F57C25D30670}"/>
               </a:ext>
             </a:extLst>
           </p:cNvPr>
@@ -9343,7 +9348,7 @@
           <p:cNvPr id="19" name="s4-o4b">
             <a:extLst xmlns:a="http://schemas.openxmlformats.org/drawingml/2006/main">
               <a:ext uri="{FF2B5EF4-FFF2-40B4-BE49-F238E27FC236}">
-                <a16:creationId xmlns:a16="http://schemas.microsoft.com/office/drawing/2014/main" id="{16CF5A6B-3D7F-4333-BBCE-69A32093F17D}"/>
+                <a16:creationId xmlns:a16="http://schemas.microsoft.com/office/drawing/2014/main" id="{4454F99C-8A41-4A23-A576-BEDE598253AA}"/>
               </a:ext>
             </a:extLst>
           </p:cNvPr>
@@ -9389,7 +9394,7 @@
           <p:cNvPr id="20" name="s4-o5a">
             <a:extLst xmlns:a="http://schemas.openxmlformats.org/drawingml/2006/main">
               <a:ext uri="{FF2B5EF4-FFF2-40B4-BE49-F238E27FC236}">
-                <a16:creationId xmlns:a16="http://schemas.microsoft.com/office/drawing/2014/main" id="{C366C86B-0CEB-4537-9050-D6522D98E795}"/>
+                <a16:creationId xmlns:a16="http://schemas.microsoft.com/office/drawing/2014/main" id="{FDED4233-DD0F-474E-9E45-5BB3F13264B9}"/>
               </a:ext>
             </a:extLst>
           </p:cNvPr>
@@ -9434,7 +9439,7 @@
           <p:cNvPr id="21" name="s4-o5b">
             <a:extLst xmlns:a="http://schemas.openxmlformats.org/drawingml/2006/main">
               <a:ext uri="{FF2B5EF4-FFF2-40B4-BE49-F238E27FC236}">
-                <a16:creationId xmlns:a16="http://schemas.microsoft.com/office/drawing/2014/main" id="{A68220AC-DB30-4F38-8B07-2A8A8CE7A703}"/>
+                <a16:creationId xmlns:a16="http://schemas.microsoft.com/office/drawing/2014/main" id="{BEAB23FF-DFE8-42E9-9967-F5B3DF527814}"/>
               </a:ext>
             </a:extLst>
           </p:cNvPr>
@@ -9479,7 +9484,7 @@
           <p:cNvPr id="22" name="s4-output-note">
             <a:extLst xmlns:a="http://schemas.openxmlformats.org/drawingml/2006/main">
               <a:ext uri="{FF2B5EF4-FFF2-40B4-BE49-F238E27FC236}">
-                <a16:creationId xmlns:a16="http://schemas.microsoft.com/office/drawing/2014/main" id="{CA7DA214-33EE-467E-862C-265C0BD54042}"/>
+                <a16:creationId xmlns:a16="http://schemas.microsoft.com/office/drawing/2014/main" id="{AC8D8B44-AA1F-4093-88F3-C26C5EAB7EB2}"/>
               </a:ext>
             </a:extLst>
           </p:cNvPr>
@@ -9546,7 +9551,7 @@
           <p:cNvPr id="24" name="footer-source-4">
             <a:extLst xmlns:a="http://schemas.openxmlformats.org/drawingml/2006/main">
               <a:ext uri="{FF2B5EF4-FFF2-40B4-BE49-F238E27FC236}">
-                <a16:creationId xmlns:a16="http://schemas.microsoft.com/office/drawing/2014/main" id="{25F69B25-3CA0-4FC0-B547-AF351C0CC33A}"/>
+                <a16:creationId xmlns:a16="http://schemas.microsoft.com/office/drawing/2014/main" id="{8B59E73F-BA18-4D56-9638-BF07C0201803}"/>
               </a:ext>
             </a:extLst>
           </p:cNvPr>
@@ -9591,7 +9596,7 @@
           <p:cNvPr id="25" name="footer-number-4">
             <a:extLst xmlns:a="http://schemas.openxmlformats.org/drawingml/2006/main">
               <a:ext uri="{FF2B5EF4-FFF2-40B4-BE49-F238E27FC236}">
-                <a16:creationId xmlns:a16="http://schemas.microsoft.com/office/drawing/2014/main" id="{B41098A5-02E2-4250-AB80-DF673F6B8D5B}"/>
+                <a16:creationId xmlns:a16="http://schemas.microsoft.com/office/drawing/2014/main" id="{F4D6C54C-B3B7-46BB-B8A7-19D0702ECC8E}"/>
               </a:ext>
             </a:extLst>
           </p:cNvPr>
@@ -9634,7 +9639,7 @@
     </p:spTree>
     <p:extLst>
       <p:ext uri="{BB962C8B-B14F-4D97-AF65-F5344CB8AC3E}">
-        <p14:creationId xmlns:p14="http://schemas.microsoft.com/office/powerpoint/2010/main" val="1364054556"/>
+        <p14:creationId xmlns:p14="http://schemas.microsoft.com/office/powerpoint/2010/main" val="956120385"/>
       </p:ext>
     </p:extLst>
   </p:cSld>
@@ -9665,7 +9670,7 @@
           <p:cNvPr id="17" name="s5-title">
             <a:extLst xmlns:a="http://schemas.openxmlformats.org/drawingml/2006/main">
               <a:ext uri="{FF2B5EF4-FFF2-40B4-BE49-F238E27FC236}">
-                <a16:creationId xmlns:a16="http://schemas.microsoft.com/office/drawing/2014/main" id="{74DA6ED6-06FE-4224-85E7-0A91E7CFEE25}"/>
+                <a16:creationId xmlns:a16="http://schemas.microsoft.com/office/drawing/2014/main" id="{151BCC53-444B-4AD9-93DC-E01378DDFB8A}"/>
               </a:ext>
             </a:extLst>
           </p:cNvPr>
@@ -9710,7 +9715,7 @@
           <p:cNvPr id="2" name="s5-subtitle">
             <a:extLst xmlns:a="http://schemas.openxmlformats.org/drawingml/2006/main">
               <a:ext uri="{FF2B5EF4-FFF2-40B4-BE49-F238E27FC236}">
-                <a16:creationId xmlns:a16="http://schemas.microsoft.com/office/drawing/2014/main" id="{568803E9-E27E-48B5-BBFE-C5A43901D13E}"/>
+                <a16:creationId xmlns:a16="http://schemas.microsoft.com/office/drawing/2014/main" id="{5CB0B55D-89B9-4ABB-ABF6-744EA93C350E}"/>
               </a:ext>
             </a:extLst>
           </p:cNvPr>
@@ -9755,7 +9760,7 @@
           <p:cNvPr id="3" name="s5-chart-label-pack">
             <a:extLst xmlns:a="http://schemas.openxmlformats.org/drawingml/2006/main">
               <a:ext uri="{FF2B5EF4-FFF2-40B4-BE49-F238E27FC236}">
-                <a16:creationId xmlns:a16="http://schemas.microsoft.com/office/drawing/2014/main" id="{A7CEEAB7-7DB4-410E-81DD-966190CC8685}"/>
+                <a16:creationId xmlns:a16="http://schemas.microsoft.com/office/drawing/2014/main" id="{BE9AB966-5935-4470-8C8F-7019CCD93C44}"/>
               </a:ext>
             </a:extLst>
           </p:cNvPr>
@@ -9800,7 +9805,7 @@
           <p:cNvPr id="4" name="s5-chart-label-repo">
             <a:extLst xmlns:a="http://schemas.openxmlformats.org/drawingml/2006/main">
               <a:ext uri="{FF2B5EF4-FFF2-40B4-BE49-F238E27FC236}">
-                <a16:creationId xmlns:a16="http://schemas.microsoft.com/office/drawing/2014/main" id="{EF9F52B7-0006-4D85-89A7-A5D976FE12EA}"/>
+                <a16:creationId xmlns:a16="http://schemas.microsoft.com/office/drawing/2014/main" id="{3E90DBA6-E632-4D04-8F76-73A303E51C56}"/>
               </a:ext>
             </a:extLst>
           </p:cNvPr>
@@ -9845,7 +9850,7 @@
           <p:cNvPr id="5" name="s5-stat1">
             <a:extLst xmlns:a="http://schemas.openxmlformats.org/drawingml/2006/main">
               <a:ext uri="{FF2B5EF4-FFF2-40B4-BE49-F238E27FC236}">
-                <a16:creationId xmlns:a16="http://schemas.microsoft.com/office/drawing/2014/main" id="{46FCD730-E35F-4463-8F14-0165DCA2CD57}"/>
+                <a16:creationId xmlns:a16="http://schemas.microsoft.com/office/drawing/2014/main" id="{A48C06BD-0D03-4134-AC6E-E728F2C9E626}"/>
               </a:ext>
             </a:extLst>
           </p:cNvPr>
@@ -9890,7 +9895,7 @@
           <p:cNvPr id="6" name="s5-stat1-label">
             <a:extLst xmlns:a="http://schemas.openxmlformats.org/drawingml/2006/main">
               <a:ext uri="{FF2B5EF4-FFF2-40B4-BE49-F238E27FC236}">
-                <a16:creationId xmlns:a16="http://schemas.microsoft.com/office/drawing/2014/main" id="{A309F327-8DD3-4DC5-BFFA-A2DCCFC34C74}"/>
+                <a16:creationId xmlns:a16="http://schemas.microsoft.com/office/drawing/2014/main" id="{2E2E4893-3740-466A-BD9C-5FF5108BD483}"/>
               </a:ext>
             </a:extLst>
           </p:cNvPr>
@@ -9957,7 +9962,7 @@
           <p:cNvPr id="8" name="s5-stat2">
             <a:extLst xmlns:a="http://schemas.openxmlformats.org/drawingml/2006/main">
               <a:ext uri="{FF2B5EF4-FFF2-40B4-BE49-F238E27FC236}">
-                <a16:creationId xmlns:a16="http://schemas.microsoft.com/office/drawing/2014/main" id="{FCD22507-BDC5-4D38-B57C-9C4D22171D53}"/>
+                <a16:creationId xmlns:a16="http://schemas.microsoft.com/office/drawing/2014/main" id="{AB5EF88B-5DBF-44D4-AC6A-B78614E58002}"/>
               </a:ext>
             </a:extLst>
           </p:cNvPr>
@@ -10002,7 +10007,7 @@
           <p:cNvPr id="9" name="s5-stat2-label">
             <a:extLst xmlns:a="http://schemas.openxmlformats.org/drawingml/2006/main">
               <a:ext uri="{FF2B5EF4-FFF2-40B4-BE49-F238E27FC236}">
-                <a16:creationId xmlns:a16="http://schemas.microsoft.com/office/drawing/2014/main" id="{ACE7F8FC-D809-4277-818A-59B403ABD74F}"/>
+                <a16:creationId xmlns:a16="http://schemas.microsoft.com/office/drawing/2014/main" id="{27D555A5-D334-4697-81FD-354E07E3CE85}"/>
               </a:ext>
             </a:extLst>
           </p:cNvPr>
@@ -10047,7 +10052,7 @@
           <p:cNvPr id="10" name="s5-stat3">
             <a:extLst xmlns:a="http://schemas.openxmlformats.org/drawingml/2006/main">
               <a:ext uri="{FF2B5EF4-FFF2-40B4-BE49-F238E27FC236}">
-                <a16:creationId xmlns:a16="http://schemas.microsoft.com/office/drawing/2014/main" id="{8207CA7A-8A6A-4056-9E54-A69ACECB7A63}"/>
+                <a16:creationId xmlns:a16="http://schemas.microsoft.com/office/drawing/2014/main" id="{73FACFF0-BF36-422F-862E-8848539E8BA3}"/>
               </a:ext>
             </a:extLst>
           </p:cNvPr>
@@ -10092,7 +10097,7 @@
           <p:cNvPr id="11" name="s5-stat3-label">
             <a:extLst xmlns:a="http://schemas.openxmlformats.org/drawingml/2006/main">
               <a:ext uri="{FF2B5EF4-FFF2-40B4-BE49-F238E27FC236}">
-                <a16:creationId xmlns:a16="http://schemas.microsoft.com/office/drawing/2014/main" id="{66BBAA00-A630-4E58-BF85-D44F5ED01336}"/>
+                <a16:creationId xmlns:a16="http://schemas.microsoft.com/office/drawing/2014/main" id="{6CE8A7A7-A0A4-4B52-A254-0283ADA847A5}"/>
               </a:ext>
             </a:extLst>
           </p:cNvPr>
@@ -10137,7 +10142,7 @@
           <p:cNvPr id="12" name="s5-explain">
             <a:extLst xmlns:a="http://schemas.openxmlformats.org/drawingml/2006/main">
               <a:ext uri="{FF2B5EF4-FFF2-40B4-BE49-F238E27FC236}">
-                <a16:creationId xmlns:a16="http://schemas.microsoft.com/office/drawing/2014/main" id="{FD580B01-E853-44F2-867E-A4F0A1C8A795}"/>
+                <a16:creationId xmlns:a16="http://schemas.microsoft.com/office/drawing/2014/main" id="{22580F89-8C4C-46C0-B438-B853F2EB92AB}"/>
               </a:ext>
             </a:extLst>
           </p:cNvPr>
@@ -10204,7 +10209,7 @@
           <p:cNvPr id="14" name="footer-source-5">
             <a:extLst xmlns:a="http://schemas.openxmlformats.org/drawingml/2006/main">
               <a:ext uri="{FF2B5EF4-FFF2-40B4-BE49-F238E27FC236}">
-                <a16:creationId xmlns:a16="http://schemas.microsoft.com/office/drawing/2014/main" id="{B535BF3A-4BDE-4B29-B465-FD233ADA2A9E}"/>
+                <a16:creationId xmlns:a16="http://schemas.microsoft.com/office/drawing/2014/main" id="{3D094CC5-A687-4F44-8A33-99688D02D1C8}"/>
               </a:ext>
             </a:extLst>
           </p:cNvPr>
@@ -10249,7 +10254,7 @@
           <p:cNvPr id="15" name="footer-number-5">
             <a:extLst xmlns:a="http://schemas.openxmlformats.org/drawingml/2006/main">
               <a:ext uri="{FF2B5EF4-FFF2-40B4-BE49-F238E27FC236}">
-                <a16:creationId xmlns:a16="http://schemas.microsoft.com/office/drawing/2014/main" id="{58166096-9D5D-4CC5-AC8A-3B2A5DA10F2E}"/>
+                <a16:creationId xmlns:a16="http://schemas.microsoft.com/office/drawing/2014/main" id="{019D4336-2E0D-457C-B08F-E20C2E2B26BA}"/>
               </a:ext>
             </a:extLst>
           </p:cNvPr>
@@ -10301,14 +10306,14 @@
         </p:xfrm>
         <a:graphic xmlns:a="http://schemas.openxmlformats.org/drawingml/2006/main">
           <a:graphicData uri="http://schemas.openxmlformats.org/drawingml/2006/chart">
-            <c:chart xmlns:r="http://schemas.openxmlformats.org/officeDocument/2006/relationships" xmlns:c="http://schemas.openxmlformats.org/drawingml/2006/chart" r:id="R9776da1c92664094"/>
+            <c:chart xmlns:r="http://schemas.openxmlformats.org/officeDocument/2006/relationships" xmlns:c="http://schemas.openxmlformats.org/drawingml/2006/chart" r:id="R28d14ee657bf4634"/>
           </a:graphicData>
         </a:graphic>
       </p:graphicFrame>
     </p:spTree>
     <p:extLst>
       <p:ext uri="{BB962C8B-B14F-4D97-AF65-F5344CB8AC3E}">
-        <p14:creationId xmlns:p14="http://schemas.microsoft.com/office/powerpoint/2010/main" val="1555059204"/>
+        <p14:creationId xmlns:p14="http://schemas.microsoft.com/office/powerpoint/2010/main" val="694190486"/>
       </p:ext>
     </p:extLst>
   </p:cSld>
@@ -10339,7 +10344,7 @@
           <p:cNvPr id="40" name="s6-title-new">
             <a:extLst xmlns:a="http://schemas.openxmlformats.org/drawingml/2006/main">
               <a:ext uri="{FF2B5EF4-FFF2-40B4-BE49-F238E27FC236}">
-                <a16:creationId xmlns:a16="http://schemas.microsoft.com/office/drawing/2014/main" id="{0B9BBC54-A7AB-4B90-A4D8-6234D4802806}"/>
+                <a16:creationId xmlns:a16="http://schemas.microsoft.com/office/drawing/2014/main" id="{7421BD81-0679-47DE-A055-72178DD13CF3}"/>
               </a:ext>
             </a:extLst>
           </p:cNvPr>
@@ -10384,7 +10389,7 @@
           <p:cNvPr id="2" name="s6-subtitle-new">
             <a:extLst xmlns:a="http://schemas.openxmlformats.org/drawingml/2006/main">
               <a:ext uri="{FF2B5EF4-FFF2-40B4-BE49-F238E27FC236}">
-                <a16:creationId xmlns:a16="http://schemas.microsoft.com/office/drawing/2014/main" id="{70D56032-7548-4B98-B0FA-67D3FFD8C400}"/>
+                <a16:creationId xmlns:a16="http://schemas.microsoft.com/office/drawing/2014/main" id="{FFAC6B6D-D2EB-43EA-BE96-2686ED993E53}"/>
               </a:ext>
             </a:extLst>
           </p:cNvPr>
@@ -10419,7 +10424,7 @@
               </a:defRPr>
             </a:pPr>
             <a:r>
-              <a:t>The fixture, model, prompt, tests, and hidden oracle stayed fixed; only context delivery changed.</a:t>
+              <a:t>Same Codex, model, task, fixture, prompt, tests, and hidden oracle; only Palace context changed.</a:t>
             </a:r>
           </a:p>
         </p:txBody>
@@ -10429,7 +10434,7 @@
           <p:cNvPr id="3" name="s6-task-new">
             <a:extLst xmlns:a="http://schemas.openxmlformats.org/drawingml/2006/main">
               <a:ext uri="{FF2B5EF4-FFF2-40B4-BE49-F238E27FC236}">
-                <a16:creationId xmlns:a16="http://schemas.microsoft.com/office/drawing/2014/main" id="{8441CCA0-6B81-45EE-BB83-6D4181FC3202}"/>
+                <a16:creationId xmlns:a16="http://schemas.microsoft.com/office/drawing/2014/main" id="{F3B205F8-D4AA-49EE-A3F5-2A747DC14A26}"/>
               </a:ext>
             </a:extLst>
           </p:cNvPr>
@@ -10464,7 +10469,7 @@
           <p:cNvPr id="4" name="s6-task-k-new">
             <a:extLst xmlns:a="http://schemas.openxmlformats.org/drawingml/2006/main">
               <a:ext uri="{FF2B5EF4-FFF2-40B4-BE49-F238E27FC236}">
-                <a16:creationId xmlns:a16="http://schemas.microsoft.com/office/drawing/2014/main" id="{3FE37912-8D90-4D2E-9271-BF6BFF432EF9}"/>
+                <a16:creationId xmlns:a16="http://schemas.microsoft.com/office/drawing/2014/main" id="{F4B6CB0B-8D32-42E3-A0CA-108CC2032F8E}"/>
               </a:ext>
             </a:extLst>
           </p:cNvPr>
@@ -10499,7 +10504,7 @@
               </a:defRPr>
             </a:pPr>
             <a:r>
-              <a:t>SAME TASK</a:t>
+              <a:t>SAME CODEX + TASK</a:t>
             </a:r>
           </a:p>
         </p:txBody>
@@ -10509,7 +10514,7 @@
           <p:cNvPr id="5" name="s6-task-v-new">
             <a:extLst xmlns:a="http://schemas.openxmlformats.org/drawingml/2006/main">
               <a:ext uri="{FF2B5EF4-FFF2-40B4-BE49-F238E27FC236}">
-                <a16:creationId xmlns:a16="http://schemas.microsoft.com/office/drawing/2014/main" id="{7EFE2C06-CE23-4F5D-8448-4C0D3185605B}"/>
+                <a16:creationId xmlns:a16="http://schemas.microsoft.com/office/drawing/2014/main" id="{D0870969-2D92-421A-B8EF-9E50A8CBB214}"/>
               </a:ext>
             </a:extLst>
           </p:cNvPr>
@@ -10686,7 +10691,7 @@
           <p:cNvPr id="12" name="s6-control-new">
             <a:extLst xmlns:a="http://schemas.openxmlformats.org/drawingml/2006/main">
               <a:ext uri="{FF2B5EF4-FFF2-40B4-BE49-F238E27FC236}">
-                <a16:creationId xmlns:a16="http://schemas.microsoft.com/office/drawing/2014/main" id="{894D8701-6AF8-4E7C-8169-D97600CB7C7E}"/>
+                <a16:creationId xmlns:a16="http://schemas.microsoft.com/office/drawing/2014/main" id="{CF8914D1-2CD2-49E5-8F61-248EE6D448B1}"/>
               </a:ext>
             </a:extLst>
           </p:cNvPr>
@@ -10721,7 +10726,7 @@
           <p:cNvPr id="13" name="s6-route-new">
             <a:extLst xmlns:a="http://schemas.openxmlformats.org/drawingml/2006/main">
               <a:ext uri="{FF2B5EF4-FFF2-40B4-BE49-F238E27FC236}">
-                <a16:creationId xmlns:a16="http://schemas.microsoft.com/office/drawing/2014/main" id="{0277C880-7391-43B7-9908-E53C81436B26}"/>
+                <a16:creationId xmlns:a16="http://schemas.microsoft.com/office/drawing/2014/main" id="{A1770D38-1ED1-4BE8-8717-527E91C13605}"/>
               </a:ext>
             </a:extLst>
           </p:cNvPr>
@@ -10756,7 +10761,7 @@
           <p:cNvPr id="14" name="s6-full-new">
             <a:extLst xmlns:a="http://schemas.openxmlformats.org/drawingml/2006/main">
               <a:ext uri="{FF2B5EF4-FFF2-40B4-BE49-F238E27FC236}">
-                <a16:creationId xmlns:a16="http://schemas.microsoft.com/office/drawing/2014/main" id="{4F6E2568-19E8-414D-AAEE-B31C15BA3ECC}"/>
+                <a16:creationId xmlns:a16="http://schemas.microsoft.com/office/drawing/2014/main" id="{9F3E73CD-614B-41D3-AE74-4D07FA893A17}"/>
               </a:ext>
             </a:extLst>
           </p:cNvPr>
@@ -10791,7 +10796,7 @@
           <p:cNvPr id="15" name="s6-adaptive-new">
             <a:extLst xmlns:a="http://schemas.openxmlformats.org/drawingml/2006/main">
               <a:ext uri="{FF2B5EF4-FFF2-40B4-BE49-F238E27FC236}">
-                <a16:creationId xmlns:a16="http://schemas.microsoft.com/office/drawing/2014/main" id="{44DC2282-3244-4427-A43C-C48F89D888FE}"/>
+                <a16:creationId xmlns:a16="http://schemas.microsoft.com/office/drawing/2014/main" id="{F71505AB-AAFC-4FE3-A404-392A9DF5039F}"/>
               </a:ext>
             </a:extLst>
           </p:cNvPr>
@@ -10826,7 +10831,7 @@
           <p:cNvPr id="16" name="s6-control-k-new">
             <a:extLst xmlns:a="http://schemas.openxmlformats.org/drawingml/2006/main">
               <a:ext uri="{FF2B5EF4-FFF2-40B4-BE49-F238E27FC236}">
-                <a16:creationId xmlns:a16="http://schemas.microsoft.com/office/drawing/2014/main" id="{5749294E-9621-40C8-97E2-C4BA940EE341}"/>
+                <a16:creationId xmlns:a16="http://schemas.microsoft.com/office/drawing/2014/main" id="{8E6F35FB-1F2C-4925-B0A5-AAAEAC086060}"/>
               </a:ext>
             </a:extLst>
           </p:cNvPr>
@@ -10861,7 +10866,7 @@
               </a:defRPr>
             </a:pPr>
             <a:r>
-              <a:t>CONTROL</a:t>
+              <a:t>CODEX ALONE</a:t>
             </a:r>
           </a:p>
         </p:txBody>
@@ -10871,7 +10876,7 @@
           <p:cNvPr id="17" name="s6-control-v-new">
             <a:extLst xmlns:a="http://schemas.openxmlformats.org/drawingml/2006/main">
               <a:ext uri="{FF2B5EF4-FFF2-40B4-BE49-F238E27FC236}">
-                <a16:creationId xmlns:a16="http://schemas.microsoft.com/office/drawing/2014/main" id="{334ED904-0E3A-4E8E-BE0E-FC7F7E444DA0}"/>
+                <a16:creationId xmlns:a16="http://schemas.microsoft.com/office/drawing/2014/main" id="{B6C2A541-3582-4162-B865-7CCE0359561A}"/>
               </a:ext>
             </a:extLst>
           </p:cNvPr>
@@ -10916,7 +10921,7 @@
           <p:cNvPr id="18" name="s6-control-d-new">
             <a:extLst xmlns:a="http://schemas.openxmlformats.org/drawingml/2006/main">
               <a:ext uri="{FF2B5EF4-FFF2-40B4-BE49-F238E27FC236}">
-                <a16:creationId xmlns:a16="http://schemas.microsoft.com/office/drawing/2014/main" id="{3122B578-937F-455D-9503-52B57124F0A6}"/>
+                <a16:creationId xmlns:a16="http://schemas.microsoft.com/office/drawing/2014/main" id="{ED3C1272-1D4E-4076-9FE3-D9A23733300F}"/>
               </a:ext>
             </a:extLst>
           </p:cNvPr>
@@ -10951,7 +10956,7 @@
               </a:defRPr>
             </a:pPr>
             <a:r>
-              <a:t>Direct repository search</a:t>
+              <a:t>Codex searches the repo directly</a:t>
             </a:r>
           </a:p>
         </p:txBody>
@@ -10961,7 +10966,7 @@
           <p:cNvPr id="19" name="s6-route-k-new">
             <a:extLst xmlns:a="http://schemas.openxmlformats.org/drawingml/2006/main">
               <a:ext uri="{FF2B5EF4-FFF2-40B4-BE49-F238E27FC236}">
-                <a16:creationId xmlns:a16="http://schemas.microsoft.com/office/drawing/2014/main" id="{F7601BAD-5315-4DAE-AFA8-FB6BD18573B2}"/>
+                <a16:creationId xmlns:a16="http://schemas.microsoft.com/office/drawing/2014/main" id="{8770BE74-E915-4493-ABB7-0AD6A29C185F}"/>
               </a:ext>
             </a:extLst>
           </p:cNvPr>
@@ -11006,7 +11011,7 @@
           <p:cNvPr id="20" name="s6-route-v-new">
             <a:extLst xmlns:a="http://schemas.openxmlformats.org/drawingml/2006/main">
               <a:ext uri="{FF2B5EF4-FFF2-40B4-BE49-F238E27FC236}">
-                <a16:creationId xmlns:a16="http://schemas.microsoft.com/office/drawing/2014/main" id="{20BAE44E-9119-4980-9B5F-1E5E9571F841}"/>
+                <a16:creationId xmlns:a16="http://schemas.microsoft.com/office/drawing/2014/main" id="{7B911E7C-5A23-4D80-A118-A19832AF527E}"/>
               </a:ext>
             </a:extLst>
           </p:cNvPr>
@@ -11051,7 +11056,7 @@
           <p:cNvPr id="21" name="s6-route-d-new">
             <a:extLst xmlns:a="http://schemas.openxmlformats.org/drawingml/2006/main">
               <a:ext uri="{FF2B5EF4-FFF2-40B4-BE49-F238E27FC236}">
-                <a16:creationId xmlns:a16="http://schemas.microsoft.com/office/drawing/2014/main" id="{7152C733-766A-41CE-AFF6-DB743BBC0C26}"/>
+                <a16:creationId xmlns:a16="http://schemas.microsoft.com/office/drawing/2014/main" id="{88E4B44D-734B-436C-B680-0D3DC7119FDF}"/>
               </a:ext>
             </a:extLst>
           </p:cNvPr>
@@ -11096,7 +11101,7 @@
           <p:cNvPr id="22" name="s6-full-k-new">
             <a:extLst xmlns:a="http://schemas.openxmlformats.org/drawingml/2006/main">
               <a:ext uri="{FF2B5EF4-FFF2-40B4-BE49-F238E27FC236}">
-                <a16:creationId xmlns:a16="http://schemas.microsoft.com/office/drawing/2014/main" id="{09055A7B-3E1B-4AEE-BF7B-3E3E90467E37}"/>
+                <a16:creationId xmlns:a16="http://schemas.microsoft.com/office/drawing/2014/main" id="{481DD6AE-6CC7-41B8-B80C-7D518F382761}"/>
               </a:ext>
             </a:extLst>
           </p:cNvPr>
@@ -11141,7 +11146,7 @@
           <p:cNvPr id="23" name="s6-full-v-new">
             <a:extLst xmlns:a="http://schemas.openxmlformats.org/drawingml/2006/main">
               <a:ext uri="{FF2B5EF4-FFF2-40B4-BE49-F238E27FC236}">
-                <a16:creationId xmlns:a16="http://schemas.microsoft.com/office/drawing/2014/main" id="{CC9E5698-0BC1-4F14-B691-9209696D0C61}"/>
+                <a16:creationId xmlns:a16="http://schemas.microsoft.com/office/drawing/2014/main" id="{A2A01136-BA3A-44F7-B32D-F21B2399FEBA}"/>
               </a:ext>
             </a:extLst>
           </p:cNvPr>
@@ -11186,7 +11191,7 @@
           <p:cNvPr id="24" name="s6-full-d-new">
             <a:extLst xmlns:a="http://schemas.openxmlformats.org/drawingml/2006/main">
               <a:ext uri="{FF2B5EF4-FFF2-40B4-BE49-F238E27FC236}">
-                <a16:creationId xmlns:a16="http://schemas.microsoft.com/office/drawing/2014/main" id="{48626841-C427-4953-A03A-6AA7924D1B49}"/>
+                <a16:creationId xmlns:a16="http://schemas.microsoft.com/office/drawing/2014/main" id="{2D4EA5D1-38C9-4EF2-AD15-0EDF15AC9B7A}"/>
               </a:ext>
             </a:extLst>
           </p:cNvPr>
@@ -11231,7 +11236,7 @@
           <p:cNvPr id="25" name="s6-adaptive-k-new">
             <a:extLst xmlns:a="http://schemas.openxmlformats.org/drawingml/2006/main">
               <a:ext uri="{FF2B5EF4-FFF2-40B4-BE49-F238E27FC236}">
-                <a16:creationId xmlns:a16="http://schemas.microsoft.com/office/drawing/2014/main" id="{1AD2B7C2-59B5-4EAD-B962-CDB47D1DF9B1}"/>
+                <a16:creationId xmlns:a16="http://schemas.microsoft.com/office/drawing/2014/main" id="{108DC580-F130-4AC5-8A7E-28E756BBA098}"/>
               </a:ext>
             </a:extLst>
           </p:cNvPr>
@@ -11276,7 +11281,7 @@
           <p:cNvPr id="26" name="s6-adaptive-v-new">
             <a:extLst xmlns:a="http://schemas.openxmlformats.org/drawingml/2006/main">
               <a:ext uri="{FF2B5EF4-FFF2-40B4-BE49-F238E27FC236}">
-                <a16:creationId xmlns:a16="http://schemas.microsoft.com/office/drawing/2014/main" id="{1AB7BD95-8CCD-4EA3-8E7C-D4527ECFA417}"/>
+                <a16:creationId xmlns:a16="http://schemas.microsoft.com/office/drawing/2014/main" id="{A764D575-ED26-4F8E-9E8E-EAC848C43698}"/>
               </a:ext>
             </a:extLst>
           </p:cNvPr>
@@ -11321,7 +11326,7 @@
           <p:cNvPr id="27" name="s6-adaptive-d-new">
             <a:extLst xmlns:a="http://schemas.openxmlformats.org/drawingml/2006/main">
               <a:ext uri="{FF2B5EF4-FFF2-40B4-BE49-F238E27FC236}">
-                <a16:creationId xmlns:a16="http://schemas.microsoft.com/office/drawing/2014/main" id="{AC558179-DE3A-45E2-930D-6FA0B104A911}"/>
+                <a16:creationId xmlns:a16="http://schemas.microsoft.com/office/drawing/2014/main" id="{75DCA3EE-46AB-4B58-AAA6-4D788742742D}"/>
               </a:ext>
             </a:extLst>
           </p:cNvPr>
@@ -11366,7 +11371,7 @@
           <p:cNvPr id="28" name="s6-summary-new">
             <a:extLst xmlns:a="http://schemas.openxmlformats.org/drawingml/2006/main">
               <a:ext uri="{FF2B5EF4-FFF2-40B4-BE49-F238E27FC236}">
-                <a16:creationId xmlns:a16="http://schemas.microsoft.com/office/drawing/2014/main" id="{9B63C733-90F3-4E4F-8177-22F4DA6485D9}"/>
+                <a16:creationId xmlns:a16="http://schemas.microsoft.com/office/drawing/2014/main" id="{B824361F-C238-4AEA-9318-BD62C18DFE26}"/>
               </a:ext>
             </a:extLst>
           </p:cNvPr>
@@ -11401,7 +11406,7 @@
           <p:cNvPr id="29" name="s6-n-trials-new">
             <a:extLst xmlns:a="http://schemas.openxmlformats.org/drawingml/2006/main">
               <a:ext uri="{FF2B5EF4-FFF2-40B4-BE49-F238E27FC236}">
-                <a16:creationId xmlns:a16="http://schemas.microsoft.com/office/drawing/2014/main" id="{961D1829-7ACB-44CE-B8F7-395BC4F7C274}"/>
+                <a16:creationId xmlns:a16="http://schemas.microsoft.com/office/drawing/2014/main" id="{39B96ADD-4FE5-4561-B461-593E576CE3FE}"/>
               </a:ext>
             </a:extLst>
           </p:cNvPr>
@@ -11446,7 +11451,7 @@
           <p:cNvPr id="30" name="s6-l-trials-new">
             <a:extLst xmlns:a="http://schemas.openxmlformats.org/drawingml/2006/main">
               <a:ext uri="{FF2B5EF4-FFF2-40B4-BE49-F238E27FC236}">
-                <a16:creationId xmlns:a16="http://schemas.microsoft.com/office/drawing/2014/main" id="{D9F9403A-3AAE-44F1-8D88-4631E3F1A5F8}"/>
+                <a16:creationId xmlns:a16="http://schemas.microsoft.com/office/drawing/2014/main" id="{21565D55-AA93-4183-AB5B-25C689ECDADF}"/>
               </a:ext>
             </a:extLst>
           </p:cNvPr>
@@ -11491,7 +11496,7 @@
           <p:cNvPr id="31" name="s6-n-arms-new">
             <a:extLst xmlns:a="http://schemas.openxmlformats.org/drawingml/2006/main">
               <a:ext uri="{FF2B5EF4-FFF2-40B4-BE49-F238E27FC236}">
-                <a16:creationId xmlns:a16="http://schemas.microsoft.com/office/drawing/2014/main" id="{9580CB2C-71AD-434F-9A4F-F6FEC8CD4FC8}"/>
+                <a16:creationId xmlns:a16="http://schemas.microsoft.com/office/drawing/2014/main" id="{2B67E337-092E-42B9-B054-8D8B4E9D9EA9}"/>
               </a:ext>
             </a:extLst>
           </p:cNvPr>
@@ -11536,7 +11541,7 @@
           <p:cNvPr id="32" name="s6-l-arms-new">
             <a:extLst xmlns:a="http://schemas.openxmlformats.org/drawingml/2006/main">
               <a:ext uri="{FF2B5EF4-FFF2-40B4-BE49-F238E27FC236}">
-                <a16:creationId xmlns:a16="http://schemas.microsoft.com/office/drawing/2014/main" id="{C922E93C-EB09-429F-998D-03E04BE75E6A}"/>
+                <a16:creationId xmlns:a16="http://schemas.microsoft.com/office/drawing/2014/main" id="{6B393E9D-600F-44A7-B7EA-20107FAB0616}"/>
               </a:ext>
             </a:extLst>
           </p:cNvPr>
@@ -11581,7 +11586,7 @@
           <p:cNvPr id="33" name="s6-n-fixed-new">
             <a:extLst xmlns:a="http://schemas.openxmlformats.org/drawingml/2006/main">
               <a:ext uri="{FF2B5EF4-FFF2-40B4-BE49-F238E27FC236}">
-                <a16:creationId xmlns:a16="http://schemas.microsoft.com/office/drawing/2014/main" id="{19B1CEA3-0773-4161-B65E-7EDC43569515}"/>
+                <a16:creationId xmlns:a16="http://schemas.microsoft.com/office/drawing/2014/main" id="{27ECF008-9261-4E45-8598-4DB6788EF5B0}"/>
               </a:ext>
             </a:extLst>
           </p:cNvPr>
@@ -11626,7 +11631,7 @@
           <p:cNvPr id="34" name="s6-l-fixed-new">
             <a:extLst xmlns:a="http://schemas.openxmlformats.org/drawingml/2006/main">
               <a:ext uri="{FF2B5EF4-FFF2-40B4-BE49-F238E27FC236}">
-                <a16:creationId xmlns:a16="http://schemas.microsoft.com/office/drawing/2014/main" id="{CA181A73-8185-4EF0-AD72-997F785EB5DC}"/>
+                <a16:creationId xmlns:a16="http://schemas.microsoft.com/office/drawing/2014/main" id="{75CE1991-A3D5-4D5B-BE61-0D363C78F4B4}"/>
               </a:ext>
             </a:extLst>
           </p:cNvPr>
@@ -11638,20 +11643,20 @@
         <p:spPr>
           <a:xfrm xmlns:a="http://schemas.openxmlformats.org/drawingml/2006/main">
             <a:off x="4762500" y="5562600"/>
-            <a:ext cx="2857500" cy="209550"/>
-          </a:xfrm>
-          <a:prstGeom xmlns:a="http://schemas.openxmlformats.org/drawingml/2006/main" prst="rect">
-            <a:avLst/>
-          </a:prstGeom>
-        </p:spPr>
-        <p:txBody>
-          <a:bodyPr xmlns:a="http://schemas.openxmlformats.org/drawingml/2006/main" wrap="square" lIns="0" tIns="0" rIns="0" bIns="0" anchor="t">
-            <a:noAutofit/>
-          </a:bodyPr>
-          <a:lstStyle xmlns:a="http://schemas.openxmlformats.org/drawingml/2006/main"/>
-          <a:p xmlns:a="http://schemas.openxmlformats.org/drawingml/2006/main">
-            <a:pPr algn="l">
-              <a:defRPr sz="1125" b="0">
+            <a:ext cx="3143250" cy="209550"/>
+          </a:xfrm>
+          <a:prstGeom xmlns:a="http://schemas.openxmlformats.org/drawingml/2006/main" prst="rect">
+            <a:avLst/>
+          </a:prstGeom>
+        </p:spPr>
+        <p:txBody>
+          <a:bodyPr xmlns:a="http://schemas.openxmlformats.org/drawingml/2006/main" wrap="square" lIns="0" tIns="0" rIns="0" bIns="0" anchor="t">
+            <a:noAutofit/>
+          </a:bodyPr>
+          <a:lstStyle xmlns:a="http://schemas.openxmlformats.org/drawingml/2006/main"/>
+          <a:p xmlns:a="http://schemas.openxmlformats.org/drawingml/2006/main">
+            <a:pPr algn="l">
+              <a:defRPr sz="1050" b="0">
                 <a:solidFill>
                   <a:srgbClr val="FFFFFF"/>
                 </a:solidFill>
@@ -11661,7 +11666,7 @@
               </a:defRPr>
             </a:pPr>
             <a:r>
-              <a:t>task | fixture | model | tests</a:t>
+              <a:t>Codex | task | fixture | model | tests</a:t>
             </a:r>
           </a:p>
         </p:txBody>
@@ -11671,7 +11676,7 @@
           <p:cNvPr id="35" name="s6-n-variable-new">
             <a:extLst xmlns:a="http://schemas.openxmlformats.org/drawingml/2006/main">
               <a:ext uri="{FF2B5EF4-FFF2-40B4-BE49-F238E27FC236}">
-                <a16:creationId xmlns:a16="http://schemas.microsoft.com/office/drawing/2014/main" id="{765B2D8E-36E8-48FF-B693-273BD5E7256F}"/>
+                <a16:creationId xmlns:a16="http://schemas.microsoft.com/office/drawing/2014/main" id="{08F66936-C4F8-44BD-A454-F90C7A89C043}"/>
               </a:ext>
             </a:extLst>
           </p:cNvPr>
@@ -11716,7 +11721,7 @@
           <p:cNvPr id="36" name="s6-l-variable-new">
             <a:extLst xmlns:a="http://schemas.openxmlformats.org/drawingml/2006/main">
               <a:ext uri="{FF2B5EF4-FFF2-40B4-BE49-F238E27FC236}">
-                <a16:creationId xmlns:a16="http://schemas.microsoft.com/office/drawing/2014/main" id="{7ADB15E6-FDB9-403D-9747-42B5B37CF00E}"/>
+                <a16:creationId xmlns:a16="http://schemas.microsoft.com/office/drawing/2014/main" id="{60934233-58B9-4C53-8FBA-36E4C23E1ECE}"/>
               </a:ext>
             </a:extLst>
           </p:cNvPr>
@@ -11783,7 +11788,7 @@
           <p:cNvPr id="38" name="footer-source-6">
             <a:extLst xmlns:a="http://schemas.openxmlformats.org/drawingml/2006/main">
               <a:ext uri="{FF2B5EF4-FFF2-40B4-BE49-F238E27FC236}">
-                <a16:creationId xmlns:a16="http://schemas.microsoft.com/office/drawing/2014/main" id="{CE369D1D-1E0A-4FBC-BD7E-6E930E0DA0F4}"/>
+                <a16:creationId xmlns:a16="http://schemas.microsoft.com/office/drawing/2014/main" id="{FCDFC48C-75FC-4A71-9418-1FC1B5AD58C4}"/>
               </a:ext>
             </a:extLst>
           </p:cNvPr>
@@ -11828,7 +11833,7 @@
           <p:cNvPr id="39" name="footer-number-6">
             <a:extLst xmlns:a="http://schemas.openxmlformats.org/drawingml/2006/main">
               <a:ext uri="{FF2B5EF4-FFF2-40B4-BE49-F238E27FC236}">
-                <a16:creationId xmlns:a16="http://schemas.microsoft.com/office/drawing/2014/main" id="{BE2E0534-2BD3-4CE4-9789-07781AD0D9EC}"/>
+                <a16:creationId xmlns:a16="http://schemas.microsoft.com/office/drawing/2014/main" id="{75D333E8-5E0B-4DC0-913B-6BE09A02B460}"/>
               </a:ext>
             </a:extLst>
           </p:cNvPr>
@@ -11871,7 +11876,7 @@
     </p:spTree>
     <p:extLst>
       <p:ext uri="{BB962C8B-B14F-4D97-AF65-F5344CB8AC3E}">
-        <p14:creationId xmlns:p14="http://schemas.microsoft.com/office/powerpoint/2010/main" val="1067160164"/>
+        <p14:creationId xmlns:p14="http://schemas.microsoft.com/office/powerpoint/2010/main" val="1975189959"/>
       </p:ext>
     </p:extLst>
   </p:cSld>
@@ -11902,7 +11907,7 @@
           <p:cNvPr id="37" name="s7-title-new">
             <a:extLst xmlns:a="http://schemas.openxmlformats.org/drawingml/2006/main">
               <a:ext uri="{FF2B5EF4-FFF2-40B4-BE49-F238E27FC236}">
-                <a16:creationId xmlns:a16="http://schemas.microsoft.com/office/drawing/2014/main" id="{21508189-EE61-4059-B792-EA2D7757F45B}"/>
+                <a16:creationId xmlns:a16="http://schemas.microsoft.com/office/drawing/2014/main" id="{A4A4F926-B78C-4C76-A5E7-1FC3CC04CC1E}"/>
               </a:ext>
             </a:extLst>
           </p:cNvPr>
@@ -11937,7 +11942,7 @@
               </a:defRPr>
             </a:pPr>
             <a:r>
-              <a:t>The benchmark rejected an always-on Palace.</a:t>
+              <a:t>Adaptive Palace vs Codex alone</a:t>
             </a:r>
           </a:p>
         </p:txBody>
@@ -11947,32 +11952,32 @@
           <p:cNvPr id="2" name="s7-subtitle-new">
             <a:extLst xmlns:a="http://schemas.openxmlformats.org/drawingml/2006/main">
               <a:ext uri="{FF2B5EF4-FFF2-40B4-BE49-F238E27FC236}">
-                <a16:creationId xmlns:a16="http://schemas.microsoft.com/office/drawing/2014/main" id="{7E4D47A7-8282-4BD0-BCE1-1A969B5FF591}"/>
-              </a:ext>
-            </a:extLst>
-          </p:cNvPr>
-          <p:cNvSpPr>
-            <a:spLocks xmlns:a="http://schemas.openxmlformats.org/drawingml/2006/main" noGrp="1"/>
-          </p:cNvSpPr>
-          <p:nvPr/>
-        </p:nvSpPr>
-        <p:spPr>
-          <a:xfrm xmlns:a="http://schemas.openxmlformats.org/drawingml/2006/main">
-            <a:off x="400050" y="1066800"/>
-            <a:ext cx="11391900" cy="381000"/>
-          </a:xfrm>
-          <a:prstGeom xmlns:a="http://schemas.openxmlformats.org/drawingml/2006/main" prst="rect">
-            <a:avLst/>
-          </a:prstGeom>
-        </p:spPr>
-        <p:txBody>
-          <a:bodyPr xmlns:a="http://schemas.openxmlformats.org/drawingml/2006/main" wrap="square" lIns="0" tIns="0" rIns="0" bIns="0" anchor="t">
-            <a:noAutofit/>
-          </a:bodyPr>
-          <a:lstStyle xmlns:a="http://schemas.openxmlformats.org/drawingml/2006/main"/>
-          <a:p xmlns:a="http://schemas.openxmlformats.org/drawingml/2006/main">
-            <a:pPr algn="l">
-              <a:defRPr sz="1500" b="0">
+                <a16:creationId xmlns:a16="http://schemas.microsoft.com/office/drawing/2014/main" id="{990D751B-34DC-48C3-BB09-A6740E5D9630}"/>
+              </a:ext>
+            </a:extLst>
+          </p:cNvPr>
+          <p:cNvSpPr>
+            <a:spLocks xmlns:a="http://schemas.openxmlformats.org/drawingml/2006/main" noGrp="1"/>
+          </p:cNvSpPr>
+          <p:nvPr/>
+        </p:nvSpPr>
+        <p:spPr>
+          <a:xfrm xmlns:a="http://schemas.openxmlformats.org/drawingml/2006/main">
+            <a:off x="495300" y="1066800"/>
+            <a:ext cx="10953750" cy="381000"/>
+          </a:xfrm>
+          <a:prstGeom xmlns:a="http://schemas.openxmlformats.org/drawingml/2006/main" prst="rect">
+            <a:avLst/>
+          </a:prstGeom>
+        </p:spPr>
+        <p:txBody>
+          <a:bodyPr xmlns:a="http://schemas.openxmlformats.org/drawingml/2006/main" wrap="square" lIns="0" tIns="0" rIns="0" bIns="0" anchor="t">
+            <a:noAutofit/>
+          </a:bodyPr>
+          <a:lstStyle xmlns:a="http://schemas.openxmlformats.org/drawingml/2006/main"/>
+          <a:p xmlns:a="http://schemas.openxmlformats.org/drawingml/2006/main">
+            <a:pPr algn="l">
+              <a:defRPr sz="1350" b="0">
                 <a:solidFill>
                   <a:srgbClr val="526071"/>
                 </a:solidFill>
@@ -11982,7 +11987,7 @@
               </a:defRPr>
             </a:pPr>
             <a:r>
-              <a:t>On deterministic synthetic tasks, routing added calls; v0.2.3 responds with selective context modes.</a:t>
+              <a:t>Same Codex and tests; only Palace context changed. Always-on was not justified here.</a:t>
             </a:r>
           </a:p>
         </p:txBody>
@@ -11992,7 +11997,7 @@
           <p:cNvPr id="3" name="s7-result-panel">
             <a:extLst xmlns:a="http://schemas.openxmlformats.org/drawingml/2006/main">
               <a:ext uri="{FF2B5EF4-FFF2-40B4-BE49-F238E27FC236}">
-                <a16:creationId xmlns:a16="http://schemas.microsoft.com/office/drawing/2014/main" id="{413F853A-C01F-4D48-A703-A1B8B495CD55}"/>
+                <a16:creationId xmlns:a16="http://schemas.microsoft.com/office/drawing/2014/main" id="{8F68A850-2DCF-44A4-96F5-064F2121F6C3}"/>
               </a:ext>
             </a:extLst>
           </p:cNvPr>
@@ -12027,7 +12032,7 @@
           <p:cNvPr id="4" name="s7-result-k">
             <a:extLst xmlns:a="http://schemas.openxmlformats.org/drawingml/2006/main">
               <a:ext uri="{FF2B5EF4-FFF2-40B4-BE49-F238E27FC236}">
-                <a16:creationId xmlns:a16="http://schemas.microsoft.com/office/drawing/2014/main" id="{3BD0AD4F-06A9-42A3-9982-AB9684E5F117}"/>
+                <a16:creationId xmlns:a16="http://schemas.microsoft.com/office/drawing/2014/main" id="{57683290-0756-40BD-BA53-1C503A94BC65}"/>
               </a:ext>
             </a:extLst>
           </p:cNvPr>
@@ -12052,7 +12057,7 @@
           <a:lstStyle xmlns:a="http://schemas.openxmlformats.org/drawingml/2006/main"/>
           <a:p xmlns:a="http://schemas.openxmlformats.org/drawingml/2006/main">
             <a:pPr algn="l">
-              <a:defRPr sz="1125" b="1">
+              <a:defRPr sz="1050" b="1">
                 <a:solidFill>
                   <a:srgbClr val="D4515D"/>
                 </a:solidFill>
@@ -12062,7 +12067,7 @@
               </a:defRPr>
             </a:pPr>
             <a:r>
-              <a:t>FROZEN v0.2.1 RESULT</a:t>
+              <a:t>PAIRED DIFFERENCE: ADAPTIVE - CODEX ALONE</a:t>
             </a:r>
           </a:p>
         </p:txBody>
@@ -12072,7 +12077,7 @@
           <p:cNvPr id="5" name="s7-tools-stat">
             <a:extLst xmlns:a="http://schemas.openxmlformats.org/drawingml/2006/main">
               <a:ext uri="{FF2B5EF4-FFF2-40B4-BE49-F238E27FC236}">
-                <a16:creationId xmlns:a16="http://schemas.microsoft.com/office/drawing/2014/main" id="{BFD0AB1F-B840-4D99-A184-28804F0F6152}"/>
+                <a16:creationId xmlns:a16="http://schemas.microsoft.com/office/drawing/2014/main" id="{16BE07FE-4EB9-4F4B-A44C-F3C9A46EB8C1}"/>
               </a:ext>
             </a:extLst>
           </p:cNvPr>
@@ -12117,7 +12122,7 @@
           <p:cNvPr id="6" name="s7-tools-label">
             <a:extLst xmlns:a="http://schemas.openxmlformats.org/drawingml/2006/main">
               <a:ext uri="{FF2B5EF4-FFF2-40B4-BE49-F238E27FC236}">
-                <a16:creationId xmlns:a16="http://schemas.microsoft.com/office/drawing/2014/main" id="{4BA4E474-98A7-4AD2-9799-16DD3CDAF312}"/>
+                <a16:creationId xmlns:a16="http://schemas.microsoft.com/office/drawing/2014/main" id="{90E72731-2F47-415D-8BD1-5E497FBDE580}"/>
               </a:ext>
             </a:extLst>
           </p:cNvPr>
@@ -12162,7 +12167,7 @@
           <p:cNvPr id="7" name="s7-tools-ci">
             <a:extLst xmlns:a="http://schemas.openxmlformats.org/drawingml/2006/main">
               <a:ext uri="{FF2B5EF4-FFF2-40B4-BE49-F238E27FC236}">
-                <a16:creationId xmlns:a16="http://schemas.microsoft.com/office/drawing/2014/main" id="{54F65D05-45F0-42E9-97FF-D23260D7397E}"/>
+                <a16:creationId xmlns:a16="http://schemas.microsoft.com/office/drawing/2014/main" id="{68FB1825-21A8-41F4-BB82-9B3EBA1DC72A}"/>
               </a:ext>
             </a:extLst>
           </p:cNvPr>
@@ -12229,7 +12234,7 @@
           <p:cNvPr id="9" name="s7-token-stat">
             <a:extLst xmlns:a="http://schemas.openxmlformats.org/drawingml/2006/main">
               <a:ext uri="{FF2B5EF4-FFF2-40B4-BE49-F238E27FC236}">
-                <a16:creationId xmlns:a16="http://schemas.microsoft.com/office/drawing/2014/main" id="{686062B4-E426-41D6-8944-87A0CEC64E3F}"/>
+                <a16:creationId xmlns:a16="http://schemas.microsoft.com/office/drawing/2014/main" id="{3C9DC71B-9BF3-4074-AFCB-CC5A181FC205}"/>
               </a:ext>
             </a:extLst>
           </p:cNvPr>
@@ -12274,7 +12279,7 @@
           <p:cNvPr id="10" name="s7-token-label">
             <a:extLst xmlns:a="http://schemas.openxmlformats.org/drawingml/2006/main">
               <a:ext uri="{FF2B5EF4-FFF2-40B4-BE49-F238E27FC236}">
-                <a16:creationId xmlns:a16="http://schemas.microsoft.com/office/drawing/2014/main" id="{306FEAE0-3CD3-4C10-8F5F-2F4AB37A87D2}"/>
+                <a16:creationId xmlns:a16="http://schemas.microsoft.com/office/drawing/2014/main" id="{27626714-FCC5-41B9-B3FE-BCFB8D7D2528}"/>
               </a:ext>
             </a:extLst>
           </p:cNvPr>
@@ -12319,7 +12324,7 @@
           <p:cNvPr id="11" name="s7-token-note">
             <a:extLst xmlns:a="http://schemas.openxmlformats.org/drawingml/2006/main">
               <a:ext uri="{FF2B5EF4-FFF2-40B4-BE49-F238E27FC236}">
-                <a16:creationId xmlns:a16="http://schemas.microsoft.com/office/drawing/2014/main" id="{B42B31DC-9F78-41B0-A639-D3EFCAB76CC3}"/>
+                <a16:creationId xmlns:a16="http://schemas.microsoft.com/office/drawing/2014/main" id="{2343484C-8AA2-4A51-8C5C-C5ED1899E31F}"/>
               </a:ext>
             </a:extLst>
           </p:cNvPr>
@@ -12364,7 +12369,7 @@
           <p:cNvPr id="12" name="s7-time-stat">
             <a:extLst xmlns:a="http://schemas.openxmlformats.org/drawingml/2006/main">
               <a:ext uri="{FF2B5EF4-FFF2-40B4-BE49-F238E27FC236}">
-                <a16:creationId xmlns:a16="http://schemas.microsoft.com/office/drawing/2014/main" id="{5AECB523-CA05-47D3-B1DE-73ECBFB661FB}"/>
+                <a16:creationId xmlns:a16="http://schemas.microsoft.com/office/drawing/2014/main" id="{08534A30-AE99-41EF-AB76-BD01A0E77DE6}"/>
               </a:ext>
             </a:extLst>
           </p:cNvPr>
@@ -12409,7 +12414,7 @@
           <p:cNvPr id="13" name="s7-time-label">
             <a:extLst xmlns:a="http://schemas.openxmlformats.org/drawingml/2006/main">
               <a:ext uri="{FF2B5EF4-FFF2-40B4-BE49-F238E27FC236}">
-                <a16:creationId xmlns:a16="http://schemas.microsoft.com/office/drawing/2014/main" id="{1D5F6219-EF82-40BC-92D6-B05A5450E38A}"/>
+                <a16:creationId xmlns:a16="http://schemas.microsoft.com/office/drawing/2014/main" id="{FE45266C-03EE-407A-8B08-14D3C495F550}"/>
               </a:ext>
             </a:extLst>
           </p:cNvPr>
@@ -12454,7 +12459,7 @@
           <p:cNvPr id="14" name="s7-time-note">
             <a:extLst xmlns:a="http://schemas.openxmlformats.org/drawingml/2006/main">
               <a:ext uri="{FF2B5EF4-FFF2-40B4-BE49-F238E27FC236}">
-                <a16:creationId xmlns:a16="http://schemas.microsoft.com/office/drawing/2014/main" id="{73C389EF-0204-4E36-8FC4-575E2EC9993E}"/>
+                <a16:creationId xmlns:a16="http://schemas.microsoft.com/office/drawing/2014/main" id="{0DCC79DD-7D0E-4A5C-9916-6DB7453E7B4B}"/>
               </a:ext>
             </a:extLst>
           </p:cNvPr>
@@ -12499,7 +12504,7 @@
           <p:cNvPr id="15" name="s7-correct">
             <a:extLst xmlns:a="http://schemas.openxmlformats.org/drawingml/2006/main">
               <a:ext uri="{FF2B5EF4-FFF2-40B4-BE49-F238E27FC236}">
-                <a16:creationId xmlns:a16="http://schemas.microsoft.com/office/drawing/2014/main" id="{EEDE1458-9D13-4DEA-A3C5-DFF0B6B74E06}"/>
+                <a16:creationId xmlns:a16="http://schemas.microsoft.com/office/drawing/2014/main" id="{B598F663-7394-4EFB-B469-8D410790421D}"/>
               </a:ext>
             </a:extLst>
           </p:cNvPr>
@@ -12544,7 +12549,7 @@
           <p:cNvPr id="16" name="s7-policy-panel">
             <a:extLst xmlns:a="http://schemas.openxmlformats.org/drawingml/2006/main">
               <a:ext uri="{FF2B5EF4-FFF2-40B4-BE49-F238E27FC236}">
-                <a16:creationId xmlns:a16="http://schemas.microsoft.com/office/drawing/2014/main" id="{EECDA71F-36E6-43EF-A43D-6A0957BB0A0A}"/>
+                <a16:creationId xmlns:a16="http://schemas.microsoft.com/office/drawing/2014/main" id="{FA4313C7-BC75-4C60-B360-7BA91F830F39}"/>
               </a:ext>
             </a:extLst>
           </p:cNvPr>
@@ -12579,7 +12584,7 @@
           <p:cNvPr id="17" name="s7-policy-k">
             <a:extLst xmlns:a="http://schemas.openxmlformats.org/drawingml/2006/main">
               <a:ext uri="{FF2B5EF4-FFF2-40B4-BE49-F238E27FC236}">
-                <a16:creationId xmlns:a16="http://schemas.microsoft.com/office/drawing/2014/main" id="{9926438A-FA07-4755-A7DC-771024483001}"/>
+                <a16:creationId xmlns:a16="http://schemas.microsoft.com/office/drawing/2014/main" id="{A3B96636-6E59-46FB-8B42-0BB5074216B0}"/>
               </a:ext>
             </a:extLst>
           </p:cNvPr>
@@ -12624,7 +12629,7 @@
           <p:cNvPr id="18" name="s7-policy-v">
             <a:extLst xmlns:a="http://schemas.openxmlformats.org/drawingml/2006/main">
               <a:ext uri="{FF2B5EF4-FFF2-40B4-BE49-F238E27FC236}">
-                <a16:creationId xmlns:a16="http://schemas.microsoft.com/office/drawing/2014/main" id="{A70A6B99-F2C2-42A6-96D6-BB30AD398042}"/>
+                <a16:creationId xmlns:a16="http://schemas.microsoft.com/office/drawing/2014/main" id="{529A0AFB-1FAE-4F6F-8D21-EAD04C52CBF9}"/>
               </a:ext>
             </a:extLst>
           </p:cNvPr>
@@ -12669,7 +12674,7 @@
           <p:cNvPr id="19" name="s7-bypass">
             <a:extLst xmlns:a="http://schemas.openxmlformats.org/drawingml/2006/main">
               <a:ext uri="{FF2B5EF4-FFF2-40B4-BE49-F238E27FC236}">
-                <a16:creationId xmlns:a16="http://schemas.microsoft.com/office/drawing/2014/main" id="{377D3285-C9E2-49CD-8C50-518BEA500CB2}"/>
+                <a16:creationId xmlns:a16="http://schemas.microsoft.com/office/drawing/2014/main" id="{D9493279-AC4C-4F06-AB21-711444B8D06F}"/>
               </a:ext>
             </a:extLst>
           </p:cNvPr>
@@ -12704,7 +12709,7 @@
           <p:cNvPr id="20" name="s7-bypass-k">
             <a:extLst xmlns:a="http://schemas.openxmlformats.org/drawingml/2006/main">
               <a:ext uri="{FF2B5EF4-FFF2-40B4-BE49-F238E27FC236}">
-                <a16:creationId xmlns:a16="http://schemas.microsoft.com/office/drawing/2014/main" id="{1AB891D2-BF18-4B6C-8B67-940EDD451A88}"/>
+                <a16:creationId xmlns:a16="http://schemas.microsoft.com/office/drawing/2014/main" id="{345A9A35-4F4E-44AD-BA18-CAED8DCE931C}"/>
               </a:ext>
             </a:extLst>
           </p:cNvPr>
@@ -12749,7 +12754,7 @@
           <p:cNvPr id="21" name="s7-bypass-v">
             <a:extLst xmlns:a="http://schemas.openxmlformats.org/drawingml/2006/main">
               <a:ext uri="{FF2B5EF4-FFF2-40B4-BE49-F238E27FC236}">
-                <a16:creationId xmlns:a16="http://schemas.microsoft.com/office/drawing/2014/main" id="{7BACDBA1-F4BD-4D6E-8753-D50772CC550D}"/>
+                <a16:creationId xmlns:a16="http://schemas.microsoft.com/office/drawing/2014/main" id="{913815EF-D96E-4199-A540-7BEC83219DBA}"/>
               </a:ext>
             </a:extLst>
           </p:cNvPr>
@@ -12794,7 +12799,7 @@
           <p:cNvPr id="22" name="s7-bypass-d">
             <a:extLst xmlns:a="http://schemas.openxmlformats.org/drawingml/2006/main">
               <a:ext uri="{FF2B5EF4-FFF2-40B4-BE49-F238E27FC236}">
-                <a16:creationId xmlns:a16="http://schemas.microsoft.com/office/drawing/2014/main" id="{3E694FC0-CD0B-4941-8E6A-84603A512E74}"/>
+                <a16:creationId xmlns:a16="http://schemas.microsoft.com/office/drawing/2014/main" id="{FA8DAA62-F5C4-49CA-9C04-3272EB9FC765}"/>
               </a:ext>
             </a:extLst>
           </p:cNvPr>
@@ -12839,7 +12844,7 @@
           <p:cNvPr id="23" name="s7-lite">
             <a:extLst xmlns:a="http://schemas.openxmlformats.org/drawingml/2006/main">
               <a:ext uri="{FF2B5EF4-FFF2-40B4-BE49-F238E27FC236}">
-                <a16:creationId xmlns:a16="http://schemas.microsoft.com/office/drawing/2014/main" id="{D0B31634-BA94-4520-A610-8E81B222A18B}"/>
+                <a16:creationId xmlns:a16="http://schemas.microsoft.com/office/drawing/2014/main" id="{213AEA87-2DBD-402B-BB0D-37FBD6A1C7C4}"/>
               </a:ext>
             </a:extLst>
           </p:cNvPr>
@@ -12874,7 +12879,7 @@
           <p:cNvPr id="24" name="s7-lite-k">
             <a:extLst xmlns:a="http://schemas.openxmlformats.org/drawingml/2006/main">
               <a:ext uri="{FF2B5EF4-FFF2-40B4-BE49-F238E27FC236}">
-                <a16:creationId xmlns:a16="http://schemas.microsoft.com/office/drawing/2014/main" id="{25DC19EC-01D6-4BC5-8C16-4746138D7DF5}"/>
+                <a16:creationId xmlns:a16="http://schemas.microsoft.com/office/drawing/2014/main" id="{782F47AA-D0F1-46B2-9BA0-E6440F092590}"/>
               </a:ext>
             </a:extLst>
           </p:cNvPr>
@@ -12919,7 +12924,7 @@
           <p:cNvPr id="25" name="s7-lite-v">
             <a:extLst xmlns:a="http://schemas.openxmlformats.org/drawingml/2006/main">
               <a:ext uri="{FF2B5EF4-FFF2-40B4-BE49-F238E27FC236}">
-                <a16:creationId xmlns:a16="http://schemas.microsoft.com/office/drawing/2014/main" id="{034531F7-1AA4-48B3-BD6D-5CC0C4D13DB9}"/>
+                <a16:creationId xmlns:a16="http://schemas.microsoft.com/office/drawing/2014/main" id="{583F3B78-8793-4258-BDA4-91EADCAAD4FF}"/>
               </a:ext>
             </a:extLst>
           </p:cNvPr>
@@ -12964,7 +12969,7 @@
           <p:cNvPr id="26" name="s7-lite-d">
             <a:extLst xmlns:a="http://schemas.openxmlformats.org/drawingml/2006/main">
               <a:ext uri="{FF2B5EF4-FFF2-40B4-BE49-F238E27FC236}">
-                <a16:creationId xmlns:a16="http://schemas.microsoft.com/office/drawing/2014/main" id="{94A9DA78-6F8B-46E8-9B80-F1913FCAC36F}"/>
+                <a16:creationId xmlns:a16="http://schemas.microsoft.com/office/drawing/2014/main" id="{3CA05505-EAA2-48E9-9A01-389676BE7BA0}"/>
               </a:ext>
             </a:extLst>
           </p:cNvPr>
@@ -13009,7 +13014,7 @@
           <p:cNvPr id="27" name="s7-full">
             <a:extLst xmlns:a="http://schemas.openxmlformats.org/drawingml/2006/main">
               <a:ext uri="{FF2B5EF4-FFF2-40B4-BE49-F238E27FC236}">
-                <a16:creationId xmlns:a16="http://schemas.microsoft.com/office/drawing/2014/main" id="{7E9F3C5B-D207-488E-B4F6-D228CC207DB7}"/>
+                <a16:creationId xmlns:a16="http://schemas.microsoft.com/office/drawing/2014/main" id="{2F93646B-FC6D-4A75-85E6-58CE0CA79719}"/>
               </a:ext>
             </a:extLst>
           </p:cNvPr>
@@ -13044,7 +13049,7 @@
           <p:cNvPr id="28" name="s7-full-k">
             <a:extLst xmlns:a="http://schemas.openxmlformats.org/drawingml/2006/main">
               <a:ext uri="{FF2B5EF4-FFF2-40B4-BE49-F238E27FC236}">
-                <a16:creationId xmlns:a16="http://schemas.microsoft.com/office/drawing/2014/main" id="{BED98981-BFBA-40AA-AD3C-898B704BE16F}"/>
+                <a16:creationId xmlns:a16="http://schemas.microsoft.com/office/drawing/2014/main" id="{B6E93BFA-A03F-4BA4-A7EA-44FF57CC3760}"/>
               </a:ext>
             </a:extLst>
           </p:cNvPr>
@@ -13089,7 +13094,7 @@
           <p:cNvPr id="29" name="s7-full-v">
             <a:extLst xmlns:a="http://schemas.openxmlformats.org/drawingml/2006/main">
               <a:ext uri="{FF2B5EF4-FFF2-40B4-BE49-F238E27FC236}">
-                <a16:creationId xmlns:a16="http://schemas.microsoft.com/office/drawing/2014/main" id="{BE5C2050-9879-45A7-8871-445AF12E4D03}"/>
+                <a16:creationId xmlns:a16="http://schemas.microsoft.com/office/drawing/2014/main" id="{14FED87E-185F-42CE-A692-0F77E1DE4EF5}"/>
               </a:ext>
             </a:extLst>
           </p:cNvPr>
@@ -13134,7 +13139,7 @@
           <p:cNvPr id="30" name="s7-full-d">
             <a:extLst xmlns:a="http://schemas.openxmlformats.org/drawingml/2006/main">
               <a:ext uri="{FF2B5EF4-FFF2-40B4-BE49-F238E27FC236}">
-                <a16:creationId xmlns:a16="http://schemas.microsoft.com/office/drawing/2014/main" id="{D7635D5A-5271-41CB-9BC7-9BBC5976C72F}"/>
+                <a16:creationId xmlns:a16="http://schemas.microsoft.com/office/drawing/2014/main" id="{5E0B461F-A94B-402F-84E6-E676B30B95C7}"/>
               </a:ext>
             </a:extLst>
           </p:cNvPr>
@@ -13179,7 +13184,7 @@
           <p:cNvPr id="31" name="s7-next">
             <a:extLst xmlns:a="http://schemas.openxmlformats.org/drawingml/2006/main">
               <a:ext uri="{FF2B5EF4-FFF2-40B4-BE49-F238E27FC236}">
-                <a16:creationId xmlns:a16="http://schemas.microsoft.com/office/drawing/2014/main" id="{51A3D722-6235-4A8C-8FC7-6DF7B2643FF6}"/>
+                <a16:creationId xmlns:a16="http://schemas.microsoft.com/office/drawing/2014/main" id="{64D25719-69DD-4861-94A4-E8433024FF31}"/>
               </a:ext>
             </a:extLst>
           </p:cNvPr>
@@ -13214,7 +13219,7 @@
           <p:cNvPr id="32" name="s7-next-k">
             <a:extLst xmlns:a="http://schemas.openxmlformats.org/drawingml/2006/main">
               <a:ext uri="{FF2B5EF4-FFF2-40B4-BE49-F238E27FC236}">
-                <a16:creationId xmlns:a16="http://schemas.microsoft.com/office/drawing/2014/main" id="{27774AB2-3B90-48A1-8061-3C3632A8A3CE}"/>
+                <a16:creationId xmlns:a16="http://schemas.microsoft.com/office/drawing/2014/main" id="{AC00580E-ECC8-4E60-BB82-4AC0286A9CB4}"/>
               </a:ext>
             </a:extLst>
           </p:cNvPr>
@@ -13259,7 +13264,7 @@
           <p:cNvPr id="33" name="s7-next-v">
             <a:extLst xmlns:a="http://schemas.openxmlformats.org/drawingml/2006/main">
               <a:ext uri="{FF2B5EF4-FFF2-40B4-BE49-F238E27FC236}">
-                <a16:creationId xmlns:a16="http://schemas.microsoft.com/office/drawing/2014/main" id="{F096F8B7-8A40-4CAC-9CE2-8349396438D1}"/>
+                <a16:creationId xmlns:a16="http://schemas.microsoft.com/office/drawing/2014/main" id="{FA7C2138-FEE9-4CF2-8B2A-A12EBDE03575}"/>
               </a:ext>
             </a:extLst>
           </p:cNvPr>
@@ -13326,7 +13331,7 @@
           <p:cNvPr id="35" name="footer-source-7">
             <a:extLst xmlns:a="http://schemas.openxmlformats.org/drawingml/2006/main">
               <a:ext uri="{FF2B5EF4-FFF2-40B4-BE49-F238E27FC236}">
-                <a16:creationId xmlns:a16="http://schemas.microsoft.com/office/drawing/2014/main" id="{869D515A-5D1D-454F-9335-8DD8DFFCC068}"/>
+                <a16:creationId xmlns:a16="http://schemas.microsoft.com/office/drawing/2014/main" id="{9CE9EAB9-EAFD-4315-A73C-D59E00A4A6E9}"/>
               </a:ext>
             </a:extLst>
           </p:cNvPr>
@@ -13361,7 +13366,7 @@
               </a:defRPr>
             </a:pPr>
             <a:r>
-              <a:t>Control result: supported tool-call overhead; Token and time intervals crossed zero | benchmark used synthetic repositories</a:t>
+              <a:t>Codex alone = no-Palace Control | Adaptive - Codex paired differences | synthetic repositories | Vertex Palace 0.2.1</a:t>
             </a:r>
           </a:p>
         </p:txBody>
@@ -13371,7 +13376,7 @@
           <p:cNvPr id="36" name="footer-number-7">
             <a:extLst xmlns:a="http://schemas.openxmlformats.org/drawingml/2006/main">
               <a:ext uri="{FF2B5EF4-FFF2-40B4-BE49-F238E27FC236}">
-                <a16:creationId xmlns:a16="http://schemas.microsoft.com/office/drawing/2014/main" id="{FCEC97E2-7B7B-40B5-B344-FDACF536EA16}"/>
+                <a16:creationId xmlns:a16="http://schemas.microsoft.com/office/drawing/2014/main" id="{BE54CB3A-DCFD-4F5C-8F6F-98D31C896653}"/>
               </a:ext>
             </a:extLst>
           </p:cNvPr>
@@ -13414,7 +13419,7 @@
     </p:spTree>
     <p:extLst>
       <p:ext uri="{BB962C8B-B14F-4D97-AF65-F5344CB8AC3E}">
-        <p14:creationId xmlns:p14="http://schemas.microsoft.com/office/powerpoint/2010/main" val="1643005700"/>
+        <p14:creationId xmlns:p14="http://schemas.microsoft.com/office/powerpoint/2010/main" val="475093376"/>
       </p:ext>
     </p:extLst>
   </p:cSld>
@@ -13445,7 +13450,7 @@
           <p:cNvPr id="48" name="s8-title-new">
             <a:extLst xmlns:a="http://schemas.openxmlformats.org/drawingml/2006/main">
               <a:ext uri="{FF2B5EF4-FFF2-40B4-BE49-F238E27FC236}">
-                <a16:creationId xmlns:a16="http://schemas.microsoft.com/office/drawing/2014/main" id="{3802844C-F306-4B2E-8477-1515D8611E7A}"/>
+                <a16:creationId xmlns:a16="http://schemas.microsoft.com/office/drawing/2014/main" id="{76F7BBE2-BF03-450F-A92D-4AA12DA4D892}"/>
               </a:ext>
             </a:extLst>
           </p:cNvPr>
@@ -13490,7 +13495,7 @@
           <p:cNvPr id="2" name="s8-subtitle-new">
             <a:extLst xmlns:a="http://schemas.openxmlformats.org/drawingml/2006/main">
               <a:ext uri="{FF2B5EF4-FFF2-40B4-BE49-F238E27FC236}">
-                <a16:creationId xmlns:a16="http://schemas.microsoft.com/office/drawing/2014/main" id="{44B5B586-AEA3-43E3-B3C9-24A7BD1B1C3E}"/>
+                <a16:creationId xmlns:a16="http://schemas.microsoft.com/office/drawing/2014/main" id="{F4B97F8C-A4AB-49A7-8A34-4D4EF380529E}"/>
               </a:ext>
             </a:extLst>
           </p:cNvPr>
@@ -13535,7 +13540,7 @@
           <p:cNvPr id="3" name="s8-negative-new">
             <a:extLst xmlns:a="http://schemas.openxmlformats.org/drawingml/2006/main">
               <a:ext uri="{FF2B5EF4-FFF2-40B4-BE49-F238E27FC236}">
-                <a16:creationId xmlns:a16="http://schemas.microsoft.com/office/drawing/2014/main" id="{3E5F40D5-9B41-4A69-B990-C13BA643696B}"/>
+                <a16:creationId xmlns:a16="http://schemas.microsoft.com/office/drawing/2014/main" id="{7077DC7F-D42E-453A-BF69-91B12744FA76}"/>
               </a:ext>
             </a:extLst>
           </p:cNvPr>
@@ -13580,7 +13585,7 @@
           <p:cNvPr id="4" name="s8-zero-new">
             <a:extLst xmlns:a="http://schemas.openxmlformats.org/drawingml/2006/main">
               <a:ext uri="{FF2B5EF4-FFF2-40B4-BE49-F238E27FC236}">
-                <a16:creationId xmlns:a16="http://schemas.microsoft.com/office/drawing/2014/main" id="{E0CF7841-6F7A-493E-8EF0-14CCA6651759}"/>
+                <a16:creationId xmlns:a16="http://schemas.microsoft.com/office/drawing/2014/main" id="{25A2B58F-7521-45F8-8E5B-994A3734A17C}"/>
               </a:ext>
             </a:extLst>
           </p:cNvPr>
@@ -13625,7 +13630,7 @@
           <p:cNvPr id="5" name="s8-positive-new">
             <a:extLst xmlns:a="http://schemas.openxmlformats.org/drawingml/2006/main">
               <a:ext uri="{FF2B5EF4-FFF2-40B4-BE49-F238E27FC236}">
-                <a16:creationId xmlns:a16="http://schemas.microsoft.com/office/drawing/2014/main" id="{06F1D704-DD20-483B-B7B5-468A1620942B}"/>
+                <a16:creationId xmlns:a16="http://schemas.microsoft.com/office/drawing/2014/main" id="{3599FDEA-5C27-436D-B8C2-ADD94170FFE0}"/>
               </a:ext>
             </a:extLst>
           </p:cNvPr>
@@ -13670,7 +13675,7 @@
           <p:cNvPr id="6" name="s8-bytes-new-panel">
             <a:extLst xmlns:a="http://schemas.openxmlformats.org/drawingml/2006/main">
               <a:ext uri="{FF2B5EF4-FFF2-40B4-BE49-F238E27FC236}">
-                <a16:creationId xmlns:a16="http://schemas.microsoft.com/office/drawing/2014/main" id="{DFE4ED78-7995-4E1A-9488-E8CD3E4A0585}"/>
+                <a16:creationId xmlns:a16="http://schemas.microsoft.com/office/drawing/2014/main" id="{DCC214B1-F4A1-4F45-9C1D-DFCB19EB1BB5}"/>
               </a:ext>
             </a:extLst>
           </p:cNvPr>
@@ -13705,7 +13710,7 @@
           <p:cNvPr id="7" name="s8-bytes-new-label">
             <a:extLst xmlns:a="http://schemas.openxmlformats.org/drawingml/2006/main">
               <a:ext uri="{FF2B5EF4-FFF2-40B4-BE49-F238E27FC236}">
-                <a16:creationId xmlns:a16="http://schemas.microsoft.com/office/drawing/2014/main" id="{8A76280D-E9A1-4188-9C47-36D7A6D790BD}"/>
+                <a16:creationId xmlns:a16="http://schemas.microsoft.com/office/drawing/2014/main" id="{5D40EDF8-FCE6-4741-AFA7-55755276F12F}"/>
               </a:ext>
             </a:extLst>
           </p:cNvPr>
@@ -13750,7 +13755,7 @@
           <p:cNvPr id="8" name="s8-bytes-new-value">
             <a:extLst xmlns:a="http://schemas.openxmlformats.org/drawingml/2006/main">
               <a:ext uri="{FF2B5EF4-FFF2-40B4-BE49-F238E27FC236}">
-                <a16:creationId xmlns:a16="http://schemas.microsoft.com/office/drawing/2014/main" id="{2A185273-38D1-4A25-AE14-73F7FF8866E2}"/>
+                <a16:creationId xmlns:a16="http://schemas.microsoft.com/office/drawing/2014/main" id="{60DEDFE2-4361-4EF7-917C-FE84B9F3B561}"/>
               </a:ext>
             </a:extLst>
           </p:cNvPr>
@@ -13795,7 +13800,7 @@
           <p:cNvPr id="9" name="s8-bytes-new-ci">
             <a:extLst xmlns:a="http://schemas.openxmlformats.org/drawingml/2006/main">
               <a:ext uri="{FF2B5EF4-FFF2-40B4-BE49-F238E27FC236}">
-                <a16:creationId xmlns:a16="http://schemas.microsoft.com/office/drawing/2014/main" id="{D3E6BD3C-AB0F-4E0F-B805-DEDE3FD6B379}"/>
+                <a16:creationId xmlns:a16="http://schemas.microsoft.com/office/drawing/2014/main" id="{8361C750-5844-4942-91D3-7CFE82A7EEB7}"/>
               </a:ext>
             </a:extLst>
           </p:cNvPr>
@@ -13884,7 +13889,7 @@
           <p:cNvPr id="12" name="s8-bytes-new-zero-label">
             <a:extLst xmlns:a="http://schemas.openxmlformats.org/drawingml/2006/main">
               <a:ext uri="{FF2B5EF4-FFF2-40B4-BE49-F238E27FC236}">
-                <a16:creationId xmlns:a16="http://schemas.microsoft.com/office/drawing/2014/main" id="{E0876B21-A2B7-41B3-992E-59634FAE1AB9}"/>
+                <a16:creationId xmlns:a16="http://schemas.microsoft.com/office/drawing/2014/main" id="{21318D3F-7E81-4210-ACCF-4B221D1A44F3}"/>
               </a:ext>
             </a:extLst>
           </p:cNvPr>
@@ -13995,7 +14000,7 @@
           <p:cNvPr id="16" name="s8-bytes-new-median">
             <a:extLst xmlns:a="http://schemas.openxmlformats.org/drawingml/2006/main">
               <a:ext uri="{FF2B5EF4-FFF2-40B4-BE49-F238E27FC236}">
-                <a16:creationId xmlns:a16="http://schemas.microsoft.com/office/drawing/2014/main" id="{96683643-F349-4AEC-9772-119C685E4EBD}"/>
+                <a16:creationId xmlns:a16="http://schemas.microsoft.com/office/drawing/2014/main" id="{CA9EB7AD-8C98-451B-9E8E-DA58B9CAB6ED}"/>
               </a:ext>
             </a:extLst>
           </p:cNvPr>
@@ -14028,7 +14033,7 @@
           <p:cNvPr id="17" name="s8-bytes-new-status">
             <a:extLst xmlns:a="http://schemas.openxmlformats.org/drawingml/2006/main">
               <a:ext uri="{FF2B5EF4-FFF2-40B4-BE49-F238E27FC236}">
-                <a16:creationId xmlns:a16="http://schemas.microsoft.com/office/drawing/2014/main" id="{84ED7540-95AA-4774-8356-34851149F8B6}"/>
+                <a16:creationId xmlns:a16="http://schemas.microsoft.com/office/drawing/2014/main" id="{196EB9FA-0D3D-43CA-81C0-FE9C00D47312}"/>
               </a:ext>
             </a:extLst>
           </p:cNvPr>
@@ -14073,7 +14078,7 @@
           <p:cNvPr id="18" name="s8-bytes-new-interpretation">
             <a:extLst xmlns:a="http://schemas.openxmlformats.org/drawingml/2006/main">
               <a:ext uri="{FF2B5EF4-FFF2-40B4-BE49-F238E27FC236}">
-                <a16:creationId xmlns:a16="http://schemas.microsoft.com/office/drawing/2014/main" id="{BA44842E-ACE6-4482-9CE8-3F6385FA013A}"/>
+                <a16:creationId xmlns:a16="http://schemas.microsoft.com/office/drawing/2014/main" id="{C30A3B4E-C00D-4BAB-A85A-48353A004EAA}"/>
               </a:ext>
             </a:extLst>
           </p:cNvPr>
@@ -14118,7 +14123,7 @@
           <p:cNvPr id="19" name="s8-tokens-new-panel">
             <a:extLst xmlns:a="http://schemas.openxmlformats.org/drawingml/2006/main">
               <a:ext uri="{FF2B5EF4-FFF2-40B4-BE49-F238E27FC236}">
-                <a16:creationId xmlns:a16="http://schemas.microsoft.com/office/drawing/2014/main" id="{D996115E-A2E9-4C8E-A0BD-5AE4362EA43B}"/>
+                <a16:creationId xmlns:a16="http://schemas.microsoft.com/office/drawing/2014/main" id="{2806BD2C-7707-4D48-B2FC-9173C5BB2351}"/>
               </a:ext>
             </a:extLst>
           </p:cNvPr>
@@ -14153,7 +14158,7 @@
           <p:cNvPr id="20" name="s8-tokens-new-label">
             <a:extLst xmlns:a="http://schemas.openxmlformats.org/drawingml/2006/main">
               <a:ext uri="{FF2B5EF4-FFF2-40B4-BE49-F238E27FC236}">
-                <a16:creationId xmlns:a16="http://schemas.microsoft.com/office/drawing/2014/main" id="{0EFF5D4E-E430-4AAA-9A7C-069D2A29BAC8}"/>
+                <a16:creationId xmlns:a16="http://schemas.microsoft.com/office/drawing/2014/main" id="{B2640170-0707-4E73-8E54-E8FF6BFB60F0}"/>
               </a:ext>
             </a:extLst>
           </p:cNvPr>
@@ -14198,7 +14203,7 @@
           <p:cNvPr id="21" name="s8-tokens-new-value">
             <a:extLst xmlns:a="http://schemas.openxmlformats.org/drawingml/2006/main">
               <a:ext uri="{FF2B5EF4-FFF2-40B4-BE49-F238E27FC236}">
-                <a16:creationId xmlns:a16="http://schemas.microsoft.com/office/drawing/2014/main" id="{B4CF726D-C82C-4E01-9179-5D6E0285C6D8}"/>
+                <a16:creationId xmlns:a16="http://schemas.microsoft.com/office/drawing/2014/main" id="{6DF68FEF-6AAF-4E8A-A494-0831D58387BE}"/>
               </a:ext>
             </a:extLst>
           </p:cNvPr>
@@ -14243,7 +14248,7 @@
           <p:cNvPr id="22" name="s8-tokens-new-ci">
             <a:extLst xmlns:a="http://schemas.openxmlformats.org/drawingml/2006/main">
               <a:ext uri="{FF2B5EF4-FFF2-40B4-BE49-F238E27FC236}">
-                <a16:creationId xmlns:a16="http://schemas.microsoft.com/office/drawing/2014/main" id="{5CE62B2A-6285-4AE8-AF9E-0EA15A836888}"/>
+                <a16:creationId xmlns:a16="http://schemas.microsoft.com/office/drawing/2014/main" id="{82EAF919-D40E-4C6F-9784-E89013264179}"/>
               </a:ext>
             </a:extLst>
           </p:cNvPr>
@@ -14332,7 +14337,7 @@
           <p:cNvPr id="25" name="s8-tokens-new-zero-label">
             <a:extLst xmlns:a="http://schemas.openxmlformats.org/drawingml/2006/main">
               <a:ext uri="{FF2B5EF4-FFF2-40B4-BE49-F238E27FC236}">
-                <a16:creationId xmlns:a16="http://schemas.microsoft.com/office/drawing/2014/main" id="{E0279A17-5B32-496E-B6BB-44BAA3BDFEC1}"/>
+                <a16:creationId xmlns:a16="http://schemas.microsoft.com/office/drawing/2014/main" id="{39BB2021-44EE-49D5-B884-8AAA32DD15D5}"/>
               </a:ext>
             </a:extLst>
           </p:cNvPr>
@@ -14443,7 +14448,7 @@
           <p:cNvPr id="29" name="s8-tokens-new-median">
             <a:extLst xmlns:a="http://schemas.openxmlformats.org/drawingml/2006/main">
               <a:ext uri="{FF2B5EF4-FFF2-40B4-BE49-F238E27FC236}">
-                <a16:creationId xmlns:a16="http://schemas.microsoft.com/office/drawing/2014/main" id="{3E0785BF-BBE3-4770-8912-526D0C92D35E}"/>
+                <a16:creationId xmlns:a16="http://schemas.microsoft.com/office/drawing/2014/main" id="{F58D5FC7-2399-42A8-972D-F8FA1BC3C156}"/>
               </a:ext>
             </a:extLst>
           </p:cNvPr>
@@ -14476,7 +14481,7 @@
           <p:cNvPr id="30" name="s8-tokens-new-status">
             <a:extLst xmlns:a="http://schemas.openxmlformats.org/drawingml/2006/main">
               <a:ext uri="{FF2B5EF4-FFF2-40B4-BE49-F238E27FC236}">
-                <a16:creationId xmlns:a16="http://schemas.microsoft.com/office/drawing/2014/main" id="{2E152CCD-71EF-4639-9DED-39E519847F95}"/>
+                <a16:creationId xmlns:a16="http://schemas.microsoft.com/office/drawing/2014/main" id="{C6D0C5D7-48F2-4391-A4BB-1A23C9A33EFF}"/>
               </a:ext>
             </a:extLst>
           </p:cNvPr>
@@ -14521,7 +14526,7 @@
           <p:cNvPr id="31" name="s8-tokens-new-interpretation">
             <a:extLst xmlns:a="http://schemas.openxmlformats.org/drawingml/2006/main">
               <a:ext uri="{FF2B5EF4-FFF2-40B4-BE49-F238E27FC236}">
-                <a16:creationId xmlns:a16="http://schemas.microsoft.com/office/drawing/2014/main" id="{8C7860D7-F64B-4D54-A0F4-66376472B222}"/>
+                <a16:creationId xmlns:a16="http://schemas.microsoft.com/office/drawing/2014/main" id="{4E98FFD5-9E79-499C-824C-0D1EC20F37A4}"/>
               </a:ext>
             </a:extLst>
           </p:cNvPr>
@@ -14566,7 +14571,7 @@
           <p:cNvPr id="32" name="s8-time-new-panel">
             <a:extLst xmlns:a="http://schemas.openxmlformats.org/drawingml/2006/main">
               <a:ext uri="{FF2B5EF4-FFF2-40B4-BE49-F238E27FC236}">
-                <a16:creationId xmlns:a16="http://schemas.microsoft.com/office/drawing/2014/main" id="{AC08FD9B-1DFC-433C-B804-BA1411893A89}"/>
+                <a16:creationId xmlns:a16="http://schemas.microsoft.com/office/drawing/2014/main" id="{B6B49C10-9900-45A4-9CC8-5EB3AB1C9482}"/>
               </a:ext>
             </a:extLst>
           </p:cNvPr>
@@ -14601,7 +14606,7 @@
           <p:cNvPr id="33" name="s8-time-new-label">
             <a:extLst xmlns:a="http://schemas.openxmlformats.org/drawingml/2006/main">
               <a:ext uri="{FF2B5EF4-FFF2-40B4-BE49-F238E27FC236}">
-                <a16:creationId xmlns:a16="http://schemas.microsoft.com/office/drawing/2014/main" id="{E37D0F54-0F7A-459D-9896-86A4F92D6A76}"/>
+                <a16:creationId xmlns:a16="http://schemas.microsoft.com/office/drawing/2014/main" id="{82C22E32-266D-4443-AE36-1428FE033032}"/>
               </a:ext>
             </a:extLst>
           </p:cNvPr>
@@ -14646,7 +14651,7 @@
           <p:cNvPr id="34" name="s8-time-new-value">
             <a:extLst xmlns:a="http://schemas.openxmlformats.org/drawingml/2006/main">
               <a:ext uri="{FF2B5EF4-FFF2-40B4-BE49-F238E27FC236}">
-                <a16:creationId xmlns:a16="http://schemas.microsoft.com/office/drawing/2014/main" id="{5C14187E-0B92-4A01-B033-62FAE4DD9CBF}"/>
+                <a16:creationId xmlns:a16="http://schemas.microsoft.com/office/drawing/2014/main" id="{3451CE16-CC1F-4133-B876-C7D02832AD76}"/>
               </a:ext>
             </a:extLst>
           </p:cNvPr>
@@ -14691,7 +14696,7 @@
           <p:cNvPr id="35" name="s8-time-new-ci">
             <a:extLst xmlns:a="http://schemas.openxmlformats.org/drawingml/2006/main">
               <a:ext uri="{FF2B5EF4-FFF2-40B4-BE49-F238E27FC236}">
-                <a16:creationId xmlns:a16="http://schemas.microsoft.com/office/drawing/2014/main" id="{BD97211B-3DC8-4AD0-A551-6B490A017680}"/>
+                <a16:creationId xmlns:a16="http://schemas.microsoft.com/office/drawing/2014/main" id="{AEC96845-2161-4CE3-B51F-DF7CBF8E30A8}"/>
               </a:ext>
             </a:extLst>
           </p:cNvPr>
@@ -14780,7 +14785,7 @@
           <p:cNvPr id="38" name="s8-time-new-zero-label">
             <a:extLst xmlns:a="http://schemas.openxmlformats.org/drawingml/2006/main">
               <a:ext uri="{FF2B5EF4-FFF2-40B4-BE49-F238E27FC236}">
-                <a16:creationId xmlns:a16="http://schemas.microsoft.com/office/drawing/2014/main" id="{1C4DF709-0475-47C7-BCA3-C4D1D995B25B}"/>
+                <a16:creationId xmlns:a16="http://schemas.microsoft.com/office/drawing/2014/main" id="{E39E8215-79B3-4DE5-B865-2E68746F0179}"/>
               </a:ext>
             </a:extLst>
           </p:cNvPr>
@@ -14891,7 +14896,7 @@
           <p:cNvPr id="42" name="s8-time-new-median">
             <a:extLst xmlns:a="http://schemas.openxmlformats.org/drawingml/2006/main">
               <a:ext uri="{FF2B5EF4-FFF2-40B4-BE49-F238E27FC236}">
-                <a16:creationId xmlns:a16="http://schemas.microsoft.com/office/drawing/2014/main" id="{BC239EC9-9BD1-4756-A083-C8823CCEBE4D}"/>
+                <a16:creationId xmlns:a16="http://schemas.microsoft.com/office/drawing/2014/main" id="{62F149C3-0C9A-48C2-95CB-BFF34A5C9EC8}"/>
               </a:ext>
             </a:extLst>
           </p:cNvPr>
@@ -14924,7 +14929,7 @@
           <p:cNvPr id="43" name="s8-time-new-status">
             <a:extLst xmlns:a="http://schemas.openxmlformats.org/drawingml/2006/main">
               <a:ext uri="{FF2B5EF4-FFF2-40B4-BE49-F238E27FC236}">
-                <a16:creationId xmlns:a16="http://schemas.microsoft.com/office/drawing/2014/main" id="{44467451-1748-45E2-A5C9-E0DACD96D83D}"/>
+                <a16:creationId xmlns:a16="http://schemas.microsoft.com/office/drawing/2014/main" id="{0DBEDC84-19C2-43F0-90C2-B5D39B0C0B7F}"/>
               </a:ext>
             </a:extLst>
           </p:cNvPr>
@@ -14969,7 +14974,7 @@
           <p:cNvPr id="44" name="s8-time-new-interpretation">
             <a:extLst xmlns:a="http://schemas.openxmlformats.org/drawingml/2006/main">
               <a:ext uri="{FF2B5EF4-FFF2-40B4-BE49-F238E27FC236}">
-                <a16:creationId xmlns:a16="http://schemas.microsoft.com/office/drawing/2014/main" id="{12F0BFE2-F003-4533-9B36-F3D7EC4AF8B8}"/>
+                <a16:creationId xmlns:a16="http://schemas.microsoft.com/office/drawing/2014/main" id="{32B6CC1F-A56E-4564-B668-BD48C6B1F06C}"/>
               </a:ext>
             </a:extLst>
           </p:cNvPr>
@@ -15036,7 +15041,7 @@
           <p:cNvPr id="46" name="footer-source-8">
             <a:extLst xmlns:a="http://schemas.openxmlformats.org/drawingml/2006/main">
               <a:ext uri="{FF2B5EF4-FFF2-40B4-BE49-F238E27FC236}">
-                <a16:creationId xmlns:a16="http://schemas.microsoft.com/office/drawing/2014/main" id="{285FFE47-0766-4299-9254-B39F6541F250}"/>
+                <a16:creationId xmlns:a16="http://schemas.microsoft.com/office/drawing/2014/main" id="{625A131B-2A89-45AF-B9D2-68599CE6AFC0}"/>
               </a:ext>
             </a:extLst>
           </p:cNvPr>
@@ -15081,7 +15086,7 @@
           <p:cNvPr id="47" name="footer-number-8">
             <a:extLst xmlns:a="http://schemas.openxmlformats.org/drawingml/2006/main">
               <a:ext uri="{FF2B5EF4-FFF2-40B4-BE49-F238E27FC236}">
-                <a16:creationId xmlns:a16="http://schemas.microsoft.com/office/drawing/2014/main" id="{5C550171-F99C-4908-887B-A35E541AD5AE}"/>
+                <a16:creationId xmlns:a16="http://schemas.microsoft.com/office/drawing/2014/main" id="{72054452-7012-4728-84BC-AEDFF76369F4}"/>
               </a:ext>
             </a:extLst>
           </p:cNvPr>
@@ -15124,7 +15129,7 @@
     </p:spTree>
     <p:extLst>
       <p:ext uri="{BB962C8B-B14F-4D97-AF65-F5344CB8AC3E}">
-        <p14:creationId xmlns:p14="http://schemas.microsoft.com/office/powerpoint/2010/main" val="1119215672"/>
+        <p14:creationId xmlns:p14="http://schemas.microsoft.com/office/powerpoint/2010/main" val="2035780384"/>
       </p:ext>
     </p:extLst>
   </p:cSld>
@@ -15155,7 +15160,7 @@
           <p:cNvPr id="33" name="s9-title">
             <a:extLst xmlns:a="http://schemas.openxmlformats.org/drawingml/2006/main">
               <a:ext uri="{FF2B5EF4-FFF2-40B4-BE49-F238E27FC236}">
-                <a16:creationId xmlns:a16="http://schemas.microsoft.com/office/drawing/2014/main" id="{8507B362-E400-4F53-BDFD-96469BC15E1D}"/>
+                <a16:creationId xmlns:a16="http://schemas.microsoft.com/office/drawing/2014/main" id="{A8AA6248-73FF-446E-B232-B82007E291E0}"/>
               </a:ext>
             </a:extLst>
           </p:cNvPr>
@@ -15200,7 +15205,7 @@
           <p:cNvPr id="2" name="s9-subtitle">
             <a:extLst xmlns:a="http://schemas.openxmlformats.org/drawingml/2006/main">
               <a:ext uri="{FF2B5EF4-FFF2-40B4-BE49-F238E27FC236}">
-                <a16:creationId xmlns:a16="http://schemas.microsoft.com/office/drawing/2014/main" id="{DC68917B-BCA6-4BF1-A0A0-994AFDC340DA}"/>
+                <a16:creationId xmlns:a16="http://schemas.microsoft.com/office/drawing/2014/main" id="{33B94E14-7731-4155-BC42-D83A290850B0}"/>
               </a:ext>
             </a:extLst>
           </p:cNvPr>
@@ -15245,7 +15250,7 @@
           <p:cNvPr id="3" name="s9-gate-h">
             <a:extLst xmlns:a="http://schemas.openxmlformats.org/drawingml/2006/main">
               <a:ext uri="{FF2B5EF4-FFF2-40B4-BE49-F238E27FC236}">
-                <a16:creationId xmlns:a16="http://schemas.microsoft.com/office/drawing/2014/main" id="{87EB7870-1C1E-4226-99D8-B949524662AF}"/>
+                <a16:creationId xmlns:a16="http://schemas.microsoft.com/office/drawing/2014/main" id="{6D572F37-3737-4219-86C7-42C9E6714544}"/>
               </a:ext>
             </a:extLst>
           </p:cNvPr>
@@ -15290,7 +15295,7 @@
           <p:cNvPr id="4" name="s9-result-h">
             <a:extLst xmlns:a="http://schemas.openxmlformats.org/drawingml/2006/main">
               <a:ext uri="{FF2B5EF4-FFF2-40B4-BE49-F238E27FC236}">
-                <a16:creationId xmlns:a16="http://schemas.microsoft.com/office/drawing/2014/main" id="{E7F0CC50-27A8-45C7-9FF2-C0243D0C757A}"/>
+                <a16:creationId xmlns:a16="http://schemas.microsoft.com/office/drawing/2014/main" id="{557B2A54-5B53-4E38-B19A-DC7E3F8C8D58}"/>
               </a:ext>
             </a:extLst>
           </p:cNvPr>
@@ -15335,7 +15340,7 @@
           <p:cNvPr id="5" name="s9-row1">
             <a:extLst xmlns:a="http://schemas.openxmlformats.org/drawingml/2006/main">
               <a:ext uri="{FF2B5EF4-FFF2-40B4-BE49-F238E27FC236}">
-                <a16:creationId xmlns:a16="http://schemas.microsoft.com/office/drawing/2014/main" id="{BB7CA60E-7A7D-48DA-875C-A6D3040EE74A}"/>
+                <a16:creationId xmlns:a16="http://schemas.microsoft.com/office/drawing/2014/main" id="{1DF79D29-399A-4E27-9006-5F0559684CC3}"/>
               </a:ext>
             </a:extLst>
           </p:cNvPr>
@@ -15370,7 +15375,7 @@
           <p:cNvPr id="6" name="s9-row2">
             <a:extLst xmlns:a="http://schemas.openxmlformats.org/drawingml/2006/main">
               <a:ext uri="{FF2B5EF4-FFF2-40B4-BE49-F238E27FC236}">
-                <a16:creationId xmlns:a16="http://schemas.microsoft.com/office/drawing/2014/main" id="{1A3C9F18-DFCB-44B9-B4BE-5933DC3EDB53}"/>
+                <a16:creationId xmlns:a16="http://schemas.microsoft.com/office/drawing/2014/main" id="{CD212BB6-ED32-4958-B579-2E660AB398E3}"/>
               </a:ext>
             </a:extLst>
           </p:cNvPr>
@@ -15405,7 +15410,7 @@
           <p:cNvPr id="7" name="s9-row3">
             <a:extLst xmlns:a="http://schemas.openxmlformats.org/drawingml/2006/main">
               <a:ext uri="{FF2B5EF4-FFF2-40B4-BE49-F238E27FC236}">
-                <a16:creationId xmlns:a16="http://schemas.microsoft.com/office/drawing/2014/main" id="{4D4A9B8B-87AC-41FE-94A7-3CE97C277B02}"/>
+                <a16:creationId xmlns:a16="http://schemas.microsoft.com/office/drawing/2014/main" id="{6A8184AA-F492-4017-A6CF-73F498BA1BE1}"/>
               </a:ext>
             </a:extLst>
           </p:cNvPr>
@@ -15440,7 +15445,7 @@
           <p:cNvPr id="8" name="s9-row4">
             <a:extLst xmlns:a="http://schemas.openxmlformats.org/drawingml/2006/main">
               <a:ext uri="{FF2B5EF4-FFF2-40B4-BE49-F238E27FC236}">
-                <a16:creationId xmlns:a16="http://schemas.microsoft.com/office/drawing/2014/main" id="{A8A5F3D7-9BC5-4866-8118-7E5DA63BF74B}"/>
+                <a16:creationId xmlns:a16="http://schemas.microsoft.com/office/drawing/2014/main" id="{3A79A84B-2300-4965-88A1-A987E217F9F7}"/>
               </a:ext>
             </a:extLst>
           </p:cNvPr>
@@ -15475,7 +15480,7 @@
           <p:cNvPr id="9" name="s9-row5">
             <a:extLst xmlns:a="http://schemas.openxmlformats.org/drawingml/2006/main">
               <a:ext uri="{FF2B5EF4-FFF2-40B4-BE49-F238E27FC236}">
-                <a16:creationId xmlns:a16="http://schemas.microsoft.com/office/drawing/2014/main" id="{4C4A5A5D-3B52-4BB9-AE11-73AF8F319857}"/>
+                <a16:creationId xmlns:a16="http://schemas.microsoft.com/office/drawing/2014/main" id="{DD4EBD7C-9077-41FD-A142-B7247FAC1E23}"/>
               </a:ext>
             </a:extLst>
           </p:cNvPr>
@@ -15510,7 +15515,7 @@
           <p:cNvPr id="10" name="s9-row1-k">
             <a:extLst xmlns:a="http://schemas.openxmlformats.org/drawingml/2006/main">
               <a:ext uri="{FF2B5EF4-FFF2-40B4-BE49-F238E27FC236}">
-                <a16:creationId xmlns:a16="http://schemas.microsoft.com/office/drawing/2014/main" id="{6CC3C8CD-A1F6-4FA6-8B80-48FD6B24FF19}"/>
+                <a16:creationId xmlns:a16="http://schemas.microsoft.com/office/drawing/2014/main" id="{1E57BA0E-ACBD-40A4-BB20-81D5B9016ECA}"/>
               </a:ext>
             </a:extLst>
           </p:cNvPr>
@@ -15555,7 +15560,7 @@
           <p:cNvPr id="11" name="s9-row1-v">
             <a:extLst xmlns:a="http://schemas.openxmlformats.org/drawingml/2006/main">
               <a:ext uri="{FF2B5EF4-FFF2-40B4-BE49-F238E27FC236}">
-                <a16:creationId xmlns:a16="http://schemas.microsoft.com/office/drawing/2014/main" id="{6780D2EA-25AB-4691-A31A-6B7611818B11}"/>
+                <a16:creationId xmlns:a16="http://schemas.microsoft.com/office/drawing/2014/main" id="{0262DA5B-F39A-4505-A672-147D47B17F7B}"/>
               </a:ext>
             </a:extLst>
           </p:cNvPr>
@@ -15600,7 +15605,7 @@
           <p:cNvPr id="12" name="s9-row2-k">
             <a:extLst xmlns:a="http://schemas.openxmlformats.org/drawingml/2006/main">
               <a:ext uri="{FF2B5EF4-FFF2-40B4-BE49-F238E27FC236}">
-                <a16:creationId xmlns:a16="http://schemas.microsoft.com/office/drawing/2014/main" id="{04900EFB-217D-43EA-9EDC-932B20DFFB3F}"/>
+                <a16:creationId xmlns:a16="http://schemas.microsoft.com/office/drawing/2014/main" id="{DF14AA88-147E-41D4-AD01-DA95EADE2292}"/>
               </a:ext>
             </a:extLst>
           </p:cNvPr>
@@ -15645,7 +15650,7 @@
           <p:cNvPr id="13" name="s9-row2-v">
             <a:extLst xmlns:a="http://schemas.openxmlformats.org/drawingml/2006/main">
               <a:ext uri="{FF2B5EF4-FFF2-40B4-BE49-F238E27FC236}">
-                <a16:creationId xmlns:a16="http://schemas.microsoft.com/office/drawing/2014/main" id="{63A4F8A9-E596-4D61-815F-E3DF62964E92}"/>
+                <a16:creationId xmlns:a16="http://schemas.microsoft.com/office/drawing/2014/main" id="{EB7DF7FC-3446-41EB-9E52-2732AD25E7E0}"/>
               </a:ext>
             </a:extLst>
           </p:cNvPr>
@@ -15690,7 +15695,7 @@
           <p:cNvPr id="14" name="s9-row3-k">
             <a:extLst xmlns:a="http://schemas.openxmlformats.org/drawingml/2006/main">
               <a:ext uri="{FF2B5EF4-FFF2-40B4-BE49-F238E27FC236}">
-                <a16:creationId xmlns:a16="http://schemas.microsoft.com/office/drawing/2014/main" id="{2398B0AF-BC1F-4DD9-B6F0-1C9116524A59}"/>
+                <a16:creationId xmlns:a16="http://schemas.microsoft.com/office/drawing/2014/main" id="{A86D27F8-71F8-4AF1-8427-99283B761A48}"/>
               </a:ext>
             </a:extLst>
           </p:cNvPr>
@@ -15735,7 +15740,7 @@
           <p:cNvPr id="15" name="s9-row3-v">
             <a:extLst xmlns:a="http://schemas.openxmlformats.org/drawingml/2006/main">
               <a:ext uri="{FF2B5EF4-FFF2-40B4-BE49-F238E27FC236}">
-                <a16:creationId xmlns:a16="http://schemas.microsoft.com/office/drawing/2014/main" id="{C77CA989-CEDC-4BC0-B054-0381DA8FE446}"/>
+                <a16:creationId xmlns:a16="http://schemas.microsoft.com/office/drawing/2014/main" id="{B8BC9B20-75A6-4FA5-991A-C0843074D862}"/>
               </a:ext>
             </a:extLst>
           </p:cNvPr>
@@ -15780,7 +15785,7 @@
           <p:cNvPr id="16" name="s9-row4-k">
             <a:extLst xmlns:a="http://schemas.openxmlformats.org/drawingml/2006/main">
               <a:ext uri="{FF2B5EF4-FFF2-40B4-BE49-F238E27FC236}">
-                <a16:creationId xmlns:a16="http://schemas.microsoft.com/office/drawing/2014/main" id="{B59ADD52-2BD4-48CB-98FC-CC9663C79FBE}"/>
+                <a16:creationId xmlns:a16="http://schemas.microsoft.com/office/drawing/2014/main" id="{C7F2395F-6192-4AA9-A154-6EA9381C46DA}"/>
               </a:ext>
             </a:extLst>
           </p:cNvPr>
@@ -15825,7 +15830,7 @@
           <p:cNvPr id="17" name="s9-row4-v">
             <a:extLst xmlns:a="http://schemas.openxmlformats.org/drawingml/2006/main">
               <a:ext uri="{FF2B5EF4-FFF2-40B4-BE49-F238E27FC236}">
-                <a16:creationId xmlns:a16="http://schemas.microsoft.com/office/drawing/2014/main" id="{70C2E06F-3F88-4156-837F-623A0987E780}"/>
+                <a16:creationId xmlns:a16="http://schemas.microsoft.com/office/drawing/2014/main" id="{75410D81-76EE-4741-B040-D182D6210E9F}"/>
               </a:ext>
             </a:extLst>
           </p:cNvPr>
@@ -15870,7 +15875,7 @@
           <p:cNvPr id="18" name="s9-row5-k">
             <a:extLst xmlns:a="http://schemas.openxmlformats.org/drawingml/2006/main">
               <a:ext uri="{FF2B5EF4-FFF2-40B4-BE49-F238E27FC236}">
-                <a16:creationId xmlns:a16="http://schemas.microsoft.com/office/drawing/2014/main" id="{D9C8C48B-6DEA-4B89-A45C-C2BCCA9A6F41}"/>
+                <a16:creationId xmlns:a16="http://schemas.microsoft.com/office/drawing/2014/main" id="{E2545CBC-70B9-4AAE-8C9C-77C93BFFA504}"/>
               </a:ext>
             </a:extLst>
           </p:cNvPr>
@@ -15915,7 +15920,7 @@
           <p:cNvPr id="19" name="s9-row5-v">
             <a:extLst xmlns:a="http://schemas.openxmlformats.org/drawingml/2006/main">
               <a:ext uri="{FF2B5EF4-FFF2-40B4-BE49-F238E27FC236}">
-                <a16:creationId xmlns:a16="http://schemas.microsoft.com/office/drawing/2014/main" id="{B3381B8B-A695-487C-9C73-9BCF183D7629}"/>
+                <a16:creationId xmlns:a16="http://schemas.microsoft.com/office/drawing/2014/main" id="{B012CA16-48EF-4468-BE4A-C9E2527F085A}"/>
               </a:ext>
             </a:extLst>
           </p:cNvPr>
@@ -15960,7 +15965,7 @@
           <p:cNvPr id="20" name="s9-boundary">
             <a:extLst xmlns:a="http://schemas.openxmlformats.org/drawingml/2006/main">
               <a:ext uri="{FF2B5EF4-FFF2-40B4-BE49-F238E27FC236}">
-                <a16:creationId xmlns:a16="http://schemas.microsoft.com/office/drawing/2014/main" id="{7B11D2F0-2395-48D9-8761-BE95232265BF}"/>
+                <a16:creationId xmlns:a16="http://schemas.microsoft.com/office/drawing/2014/main" id="{A212F8D6-763B-4BAE-A865-6186847DB3E2}"/>
               </a:ext>
             </a:extLst>
           </p:cNvPr>
@@ -15995,7 +16000,7 @@
           <p:cNvPr id="21" name="s9-boundary-k">
             <a:extLst xmlns:a="http://schemas.openxmlformats.org/drawingml/2006/main">
               <a:ext uri="{FF2B5EF4-FFF2-40B4-BE49-F238E27FC236}">
-                <a16:creationId xmlns:a16="http://schemas.microsoft.com/office/drawing/2014/main" id="{E8C62ADF-5456-42DB-88E8-530CAF50136F}"/>
+                <a16:creationId xmlns:a16="http://schemas.microsoft.com/office/drawing/2014/main" id="{DD56A70B-F075-4BE3-9178-044C294DB9D6}"/>
               </a:ext>
             </a:extLst>
           </p:cNvPr>
@@ -16040,7 +16045,7 @@
           <p:cNvPr id="22" name="s9-boundary-stat">
             <a:extLst xmlns:a="http://schemas.openxmlformats.org/drawingml/2006/main">
               <a:ext uri="{FF2B5EF4-FFF2-40B4-BE49-F238E27FC236}">
-                <a16:creationId xmlns:a16="http://schemas.microsoft.com/office/drawing/2014/main" id="{44E4B0CC-CCEF-4B97-A3AB-6E4C30E376C6}"/>
+                <a16:creationId xmlns:a16="http://schemas.microsoft.com/office/drawing/2014/main" id="{05FC6448-9571-4E78-BCD7-869D434BA282}"/>
               </a:ext>
             </a:extLst>
           </p:cNvPr>
@@ -16085,7 +16090,7 @@
           <p:cNvPr id="23" name="s9-boundary-label">
             <a:extLst xmlns:a="http://schemas.openxmlformats.org/drawingml/2006/main">
               <a:ext uri="{FF2B5EF4-FFF2-40B4-BE49-F238E27FC236}">
-                <a16:creationId xmlns:a16="http://schemas.microsoft.com/office/drawing/2014/main" id="{67EC59DF-C884-41AC-BD45-6A51CA96ACAA}"/>
+                <a16:creationId xmlns:a16="http://schemas.microsoft.com/office/drawing/2014/main" id="{C85F6E0A-1470-4A54-B67A-F9A102680442}"/>
               </a:ext>
             </a:extLst>
           </p:cNvPr>
@@ -16152,7 +16157,7 @@
           <p:cNvPr id="25" name="s9-supported-k">
             <a:extLst xmlns:a="http://schemas.openxmlformats.org/drawingml/2006/main">
               <a:ext uri="{FF2B5EF4-FFF2-40B4-BE49-F238E27FC236}">
-                <a16:creationId xmlns:a16="http://schemas.microsoft.com/office/drawing/2014/main" id="{AD62BDE3-91D4-4EBB-B124-581F5AA8DDFA}"/>
+                <a16:creationId xmlns:a16="http://schemas.microsoft.com/office/drawing/2014/main" id="{9EB1285A-A8E4-4339-8FF5-A99425507B16}"/>
               </a:ext>
             </a:extLst>
           </p:cNvPr>
@@ -16197,7 +16202,7 @@
           <p:cNvPr id="26" name="s9-supported-v">
             <a:extLst xmlns:a="http://schemas.openxmlformats.org/drawingml/2006/main">
               <a:ext uri="{FF2B5EF4-FFF2-40B4-BE49-F238E27FC236}">
-                <a16:creationId xmlns:a16="http://schemas.microsoft.com/office/drawing/2014/main" id="{C98DC62F-32D3-4A88-9834-AC1A3A7314C2}"/>
+                <a16:creationId xmlns:a16="http://schemas.microsoft.com/office/drawing/2014/main" id="{B566BF6A-030E-4971-8375-0D76DAC1E763}"/>
               </a:ext>
             </a:extLst>
           </p:cNvPr>
@@ -16242,7 +16247,7 @@
           <p:cNvPr id="27" name="s9-limit-k">
             <a:extLst xmlns:a="http://schemas.openxmlformats.org/drawingml/2006/main">
               <a:ext uri="{FF2B5EF4-FFF2-40B4-BE49-F238E27FC236}">
-                <a16:creationId xmlns:a16="http://schemas.microsoft.com/office/drawing/2014/main" id="{4B12E671-17F5-40E6-8C38-52C22D68B9D2}"/>
+                <a16:creationId xmlns:a16="http://schemas.microsoft.com/office/drawing/2014/main" id="{2B4003F6-3B3E-4078-A8A2-EBD98C1B5492}"/>
               </a:ext>
             </a:extLst>
           </p:cNvPr>
@@ -16287,7 +16292,7 @@
           <p:cNvPr id="28" name="s9-limit-v">
             <a:extLst xmlns:a="http://schemas.openxmlformats.org/drawingml/2006/main">
               <a:ext uri="{FF2B5EF4-FFF2-40B4-BE49-F238E27FC236}">
-                <a16:creationId xmlns:a16="http://schemas.microsoft.com/office/drawing/2014/main" id="{4D336384-66DF-48FA-91AE-9C0574501B11}"/>
+                <a16:creationId xmlns:a16="http://schemas.microsoft.com/office/drawing/2014/main" id="{C3A841A7-D4B2-4F43-90FD-F6F46D3348E8}"/>
               </a:ext>
             </a:extLst>
           </p:cNvPr>
@@ -16332,7 +16337,7 @@
           <p:cNvPr id="29" name="s9-study-note">
             <a:extLst xmlns:a="http://schemas.openxmlformats.org/drawingml/2006/main">
               <a:ext uri="{FF2B5EF4-FFF2-40B4-BE49-F238E27FC236}">
-                <a16:creationId xmlns:a16="http://schemas.microsoft.com/office/drawing/2014/main" id="{786E952B-BD57-4773-A00C-659E0D494221}"/>
+                <a16:creationId xmlns:a16="http://schemas.microsoft.com/office/drawing/2014/main" id="{A59CAEC9-CE2A-4C83-B626-8C0CB8350104}"/>
               </a:ext>
             </a:extLst>
           </p:cNvPr>
@@ -16399,7 +16404,7 @@
           <p:cNvPr id="31" name="footer-source-9">
             <a:extLst xmlns:a="http://schemas.openxmlformats.org/drawingml/2006/main">
               <a:ext uri="{FF2B5EF4-FFF2-40B4-BE49-F238E27FC236}">
-                <a16:creationId xmlns:a16="http://schemas.microsoft.com/office/drawing/2014/main" id="{66E9ACD7-278A-4D97-9420-FFF767743D50}"/>
+                <a16:creationId xmlns:a16="http://schemas.microsoft.com/office/drawing/2014/main" id="{47A8D18F-F9A7-46CC-A0BA-EF7A98A2B7F2}"/>
               </a:ext>
             </a:extLst>
           </p:cNvPr>
@@ -16444,7 +16449,7 @@
           <p:cNvPr id="32" name="footer-number-9">
             <a:extLst xmlns:a="http://schemas.openxmlformats.org/drawingml/2006/main">
               <a:ext uri="{FF2B5EF4-FFF2-40B4-BE49-F238E27FC236}">
-                <a16:creationId xmlns:a16="http://schemas.microsoft.com/office/drawing/2014/main" id="{4E0DC274-D9C9-412D-BDFB-8D9B2F1F3FFB}"/>
+                <a16:creationId xmlns:a16="http://schemas.microsoft.com/office/drawing/2014/main" id="{9C0A8D66-0293-4E46-B222-B9BFA637FDD1}"/>
               </a:ext>
             </a:extLst>
           </p:cNvPr>
@@ -16487,7 +16492,7 @@
     </p:spTree>
     <p:extLst>
       <p:ext uri="{BB962C8B-B14F-4D97-AF65-F5344CB8AC3E}">
-        <p14:creationId xmlns:p14="http://schemas.microsoft.com/office/powerpoint/2010/main" val="231114333"/>
+        <p14:creationId xmlns:p14="http://schemas.microsoft.com/office/powerpoint/2010/main" val="2058972734"/>
       </p:ext>
     </p:extLst>
   </p:cSld>

--- a/outputs/vertex-palace-build-week-demo.pptx
+++ b/outputs/vertex-palace-build-week-demo.pptx
@@ -2,23 +2,23 @@
 <file path=ppt/presentation.xml><?xml version="1.0" encoding="utf-8"?>
 <p:presentation xmlns:p="http://schemas.openxmlformats.org/presentationml/2006/main">
   <p:sldMasterIdLst>
-    <p:sldMasterId xmlns:r="http://schemas.openxmlformats.org/officeDocument/2006/relationships" id="2147483648" r:id="Reb8282f83d674a10"/>
+    <p:sldMasterId xmlns:r="http://schemas.openxmlformats.org/officeDocument/2006/relationships" id="2147483648" r:id="Rdc3d18e438f444c9"/>
   </p:sldMasterIdLst>
   <p:notesMasterIdLst>
-    <p:notesMasterId xmlns:r="http://schemas.openxmlformats.org/officeDocument/2006/relationships" r:id="R9437ae9edd93452a"/>
+    <p:notesMasterId xmlns:r="http://schemas.openxmlformats.org/officeDocument/2006/relationships" r:id="R5c567fa3b76b4613"/>
   </p:notesMasterIdLst>
   <p:sldIdLst>
-    <p:sldId xmlns:r="http://schemas.openxmlformats.org/officeDocument/2006/relationships" id="256" r:id="R3c641e24d5184cad"/>
-    <p:sldId xmlns:r="http://schemas.openxmlformats.org/officeDocument/2006/relationships" id="257" r:id="Rebd87b9bfaf44cba"/>
-    <p:sldId xmlns:r="http://schemas.openxmlformats.org/officeDocument/2006/relationships" id="258" r:id="Rb75204c5f8024002"/>
-    <p:sldId xmlns:r="http://schemas.openxmlformats.org/officeDocument/2006/relationships" id="259" r:id="Rc41503c3e6964fe8"/>
-    <p:sldId xmlns:r="http://schemas.openxmlformats.org/officeDocument/2006/relationships" id="260" r:id="R79beb5a614d54157"/>
-    <p:sldId xmlns:r="http://schemas.openxmlformats.org/officeDocument/2006/relationships" id="261" r:id="R066fb8f798124868"/>
-    <p:sldId xmlns:r="http://schemas.openxmlformats.org/officeDocument/2006/relationships" id="262" r:id="R7adf4df1f03b4a8e"/>
-    <p:sldId xmlns:r="http://schemas.openxmlformats.org/officeDocument/2006/relationships" id="263" r:id="R58b7807b6abe4f62"/>
-    <p:sldId xmlns:r="http://schemas.openxmlformats.org/officeDocument/2006/relationships" id="264" r:id="R8f0180a85e65426c"/>
-    <p:sldId xmlns:r="http://schemas.openxmlformats.org/officeDocument/2006/relationships" id="265" r:id="R485edbc5a0e749db"/>
-    <p:sldId xmlns:r="http://schemas.openxmlformats.org/officeDocument/2006/relationships" id="266" r:id="R615c2b04d9174079"/>
+    <p:sldId xmlns:r="http://schemas.openxmlformats.org/officeDocument/2006/relationships" id="256" r:id="R4cb7d58b36ae415d"/>
+    <p:sldId xmlns:r="http://schemas.openxmlformats.org/officeDocument/2006/relationships" id="257" r:id="R516dd10608ba497f"/>
+    <p:sldId xmlns:r="http://schemas.openxmlformats.org/officeDocument/2006/relationships" id="258" r:id="Re4e1d18d0b4f4a1d"/>
+    <p:sldId xmlns:r="http://schemas.openxmlformats.org/officeDocument/2006/relationships" id="259" r:id="Rd18e7f70848945ae"/>
+    <p:sldId xmlns:r="http://schemas.openxmlformats.org/officeDocument/2006/relationships" id="260" r:id="R0033002c2efb4f5c"/>
+    <p:sldId xmlns:r="http://schemas.openxmlformats.org/officeDocument/2006/relationships" id="261" r:id="R010897114eb04417"/>
+    <p:sldId xmlns:r="http://schemas.openxmlformats.org/officeDocument/2006/relationships" id="262" r:id="Ra71a1223d46f4b13"/>
+    <p:sldId xmlns:r="http://schemas.openxmlformats.org/officeDocument/2006/relationships" id="263" r:id="R3dab95c33e1341e4"/>
+    <p:sldId xmlns:r="http://schemas.openxmlformats.org/officeDocument/2006/relationships" id="264" r:id="R351403c2178a441d"/>
+    <p:sldId xmlns:r="http://schemas.openxmlformats.org/officeDocument/2006/relationships" id="265" r:id="R29659f76bb3041ac"/>
+    <p:sldId xmlns:r="http://schemas.openxmlformats.org/officeDocument/2006/relationships" id="266" r:id="Rf412db8dcb9e4e94"/>
   </p:sldIdLst>
   <p:sldSz cx="12192000" cy="6858000"/>
   <p:notesSz cx="6858000" cy="9144000"/>
@@ -1097,7 +1097,7 @@
           </a:p>
           <a:p xmlns:a="http://schemas.openxmlformats.org/drawingml/2006/main">
             <a:r>
-              <a:t>The task, generated fixture, model, prompt, public tests, and hidden oracle stayed fixed. Only the repository-context strategy changed, producing 64 paired arms.</a:t>
+              <a:t>The task, generated fixture, model, prompt, public tests, and hidden oracle stayed fixed. Four scenarios ran four repetitions across four context arms, producing 64 valid and correct runs.</a:t>
             </a:r>
           </a:p>
         </p:txBody>
@@ -1167,22 +1167,17 @@
           <a:lstStyle xmlns:a="http://schemas.openxmlformats.org/drawingml/2006/main"/>
           <a:p xmlns:a="http://schemas.openxmlformats.org/drawingml/2006/main">
             <a:r>
-              <a:t>Define the comparison before reading the result: Codex alone is the no-Palace Control, not another model or agent. Everything else was held fixed. The displayed numbers are paired Adaptive-minus-Codex-alone differences.</a:t>
-            </a:r>
-          </a:p>
-          <a:p xmlns:a="http://schemas.openxmlformats.org/drawingml/2006/main">
-            <a:r>
-              <a:t>Say the uncomfortable result plainly: if Vertex Palace were forced on for every task, this benchmark would argue that it was unnecessary for these deterministic synthetic fixtures. Adaptive added 4.5 tool calls, while reported Token and time central estimates were higher but inconclusive.</a:t>
-            </a:r>
-          </a:p>
-          <a:p xmlns:a="http://schemas.openxmlformats.org/drawingml/2006/main">
-            <a:r>
-              <a:t>The product response is not to hide the result. Current v0.2.3 can bypass packed context for one explicit file, use route-lite for bounded work, and reserve Full or Guarded mode for cross-stack, contract, and memory risk. Bypass still costs one Palace decision call.</a:t>
-            </a:r>
-          </a:p>
-          <a:p xmlns:a="http://schemas.openxmlformats.org/drawingml/2006/main">
-            <a:r>
-              <a:t>This policy change is not confirmatory performance proof. The next study still needs larger real repositories, hidden memory-dependent traps, and repetitions across models, machines, and long-lived sessions.</a:t>
+              <a:t>This is the benchmark data, not a product illustration. Across all sixteen paired trials, Codex alone had the lowest median reported-token count, wall time, and tool-call count. Adaptive was lower than always-on Full Palace on wall time and calls at the raw median, but not lower than Codex alone.</a:t>
+            </a:r>
+          </a:p>
+          <a:p xmlns:a="http://schemas.openxmlformats.org/drawingml/2006/main">
+            <a:r>
+              <a:t>These are descriptive medians across heterogeneous scenarios, so do not infer significance from bar length. The next slide shows the paired Adaptive-versus-Codex intervals.</a:t>
+            </a:r>
+          </a:p>
+          <a:p xmlns:a="http://schemas.openxmlformats.org/drawingml/2006/main">
+            <a:r>
+              <a:t>Correctness was held constant: every one of the 64 arms was valid and successful, passed public tests and the hidden oracle, achieved full declared scope, and avoided forbidden files.</a:t>
             </a:r>
           </a:p>
         </p:txBody>
@@ -1252,12 +1247,17 @@
           <a:lstStyle xmlns:a="http://schemas.openxmlformats.org/drawingml/2006/main"/>
           <a:p xmlns:a="http://schemas.openxmlformats.org/drawingml/2006/main">
             <a:r>
-              <a:t>Efficiency comparisons only matter if correctness is held constant. All 64 arms were valid and successful, passed public tests and the hidden oracle, achieved full declared scope, and avoided forbidden files.</a:t>
-            </a:r>
-          </a:p>
-          <a:p xmlns:a="http://schemas.openxmlformats.org/drawingml/2006/main">
-            <a:r>
-              <a:t>All four treatments were correct, so there was no correctness winner. State the research boundary: this frozen exploratory study ran Vertex Palace 0.2.1 and does not prove universal token, time, or correctness improvement.</a:t>
+              <a:t>Now compare Adaptive directly with ordinary Codex. The paired estimate was 4.5 additional tool calls and its 95 percent interval stayed entirely above zero. This is the only Adaptive-versus-Codex efficiency difference supported by the pooled intervals, and it is an overhead result.</a:t>
+            </a:r>
+          </a:p>
+          <a:p xmlns:a="http://schemas.openxmlformats.org/drawingml/2006/main">
+            <a:r>
+              <a:t>Reported tokens were 30,147 higher at the paired median and wall time was 10.919 seconds higher, but both intervals crossed zero. The honest conclusion is that this study did not establish universal Token or time savings.</a:t>
+            </a:r>
+          </a:p>
+          <a:p xmlns:a="http://schemas.openxmlformats.org/drawingml/2006/main">
+            <a:r>
+              <a:t>All 64 arms remained correct. Separately, Adaptive generated 898.5 fewer Palace-owned bytes than always-on Full Palace and that interval stayed below zero. That is a Palace payload result, not an end-to-end Codex saving.</a:t>
             </a:r>
           </a:p>
         </p:txBody>
@@ -1405,7 +1405,7 @@
   </p:cSld>
   <p:clrMap bg1="lt1" tx1="dk1" bg2="lt2" tx2="dk2" accent1="accent1" accent2="accent2" accent3="accent3" accent4="accent4" accent5="accent5" accent6="accent6" hlink="hlink" folHlink="folHlink"/>
   <p:sldLayoutIdLst>
-    <p:sldLayoutId xmlns:r="http://schemas.openxmlformats.org/officeDocument/2006/relationships" id="2147483649" r:id="R2d484521689444e3"/>
+    <p:sldLayoutId xmlns:r="http://schemas.openxmlformats.org/officeDocument/2006/relationships" id="2147483649" r:id="R88ddd85e49ec41ff"/>
   </p:sldLayoutIdLst>
   <p:txStyles>
     <p:titleStyle>
@@ -2102,6 +2102,699 @@
 </c:chartSpace>
 </file>
 
+<file path=ppt/slides/charts/chart2.xml><?xml version="1.0" encoding="utf-8"?>
+<c:chartSpace xmlns:c="http://schemas.openxmlformats.org/drawingml/2006/chart">
+  <c:lang val="en-US"/>
+  <c:chart>
+    <c:plotArea>
+      <c:barChart>
+        <c:barDir val="bar"/>
+        <c:grouping val="clustered"/>
+        <c:varyColors val="0"/>
+        <c:ser>
+          <c:idx val="0"/>
+          <c:order val="0"/>
+          <c:tx>
+            <c:v>Reported tokens</c:v>
+          </c:tx>
+          <c:spPr>
+            <a:solidFill xmlns:a="http://schemas.openxmlformats.org/drawingml/2006/main">
+              <a:srgbClr val="1677FF"/>
+            </a:solidFill>
+          </c:spPr>
+          <c:dPt>
+            <c:idx val="0"/>
+            <c:spPr>
+              <a:solidFill xmlns:a="http://schemas.openxmlformats.org/drawingml/2006/main">
+                <a:srgbClr val="7438F5"/>
+              </a:solidFill>
+            </c:spPr>
+          </c:dPt>
+          <c:dPt>
+            <c:idx val="1"/>
+            <c:spPr>
+              <a:solidFill xmlns:a="http://schemas.openxmlformats.org/drawingml/2006/main">
+                <a:srgbClr val="1677FF"/>
+              </a:solidFill>
+            </c:spPr>
+          </c:dPt>
+          <c:dPt>
+            <c:idx val="2"/>
+            <c:spPr>
+              <a:solidFill xmlns:a="http://schemas.openxmlformats.org/drawingml/2006/main">
+                <a:srgbClr val="13B7D5"/>
+              </a:solidFill>
+            </c:spPr>
+          </c:dPt>
+          <c:dPt>
+            <c:idx val="3"/>
+            <c:spPr>
+              <a:solidFill xmlns:a="http://schemas.openxmlformats.org/drawingml/2006/main">
+                <a:srgbClr val="7D8796"/>
+              </a:solidFill>
+            </c:spPr>
+          </c:dPt>
+          <c:cat>
+            <c:strLit>
+              <c:ptCount val="4"/>
+              <c:pt idx="0">
+                <c:v>Adaptive</c:v>
+              </c:pt>
+              <c:pt idx="1">
+                <c:v>Full Palace</c:v>
+              </c:pt>
+              <c:pt idx="2">
+                <c:v>Route-only</c:v>
+              </c:pt>
+              <c:pt idx="3">
+                <c:v>Codex alone</c:v>
+              </c:pt>
+            </c:strLit>
+          </c:cat>
+          <c:val>
+            <c:numLit>
+              <c:formatCode>#,##0</c:formatCode>
+              <c:ptCount val="4"/>
+              <c:pt idx="0">
+                <c:v>147119</c:v>
+              </c:pt>
+              <c:pt idx="1">
+                <c:v>144664</c:v>
+              </c:pt>
+              <c:pt idx="2">
+                <c:v>142070</c:v>
+              </c:pt>
+              <c:pt idx="3">
+                <c:v>126703</c:v>
+              </c:pt>
+            </c:numLit>
+          </c:val>
+        </c:ser>
+        <c:dLbls>
+          <c:txPr>
+            <a:bodyPr xmlns:a="http://schemas.openxmlformats.org/drawingml/2006/main" anchorCtr="1"/>
+            <a:lstStyle xmlns:a="http://schemas.openxmlformats.org/drawingml/2006/main"/>
+            <a:p xmlns:a="http://schemas.openxmlformats.org/drawingml/2006/main">
+              <a:pPr>
+                <a:defRPr sz="863" b="1">
+                  <a:solidFill>
+                    <a:srgbClr val="0A1224"/>
+                  </a:solidFill>
+                  <a:latin typeface="Arial"/>
+                  <a:ea typeface="Arial"/>
+                  <a:cs typeface="Arial"/>
+                </a:defRPr>
+              </a:pPr>
+            </a:p>
+          </c:txPr>
+          <c:dLblPos val="outEnd"/>
+          <c:showLegendKey val="0"/>
+          <c:showVal val="1"/>
+          <c:showCatName val="0"/>
+          <c:showSerName val="0"/>
+          <c:showPercent val="0"/>
+          <c:showBubbleSize val="0"/>
+          <c:showLeaderLines val="0"/>
+        </c:dLbls>
+        <c:gapWidth val="65"/>
+        <c:axId val="48650112"/>
+        <c:axId val="48672768"/>
+      </c:barChart>
+      <c:catAx>
+        <c:axId val="48650112"/>
+        <c:scaling>
+          <c:orientation val="minMax"/>
+        </c:scaling>
+        <c:delete val="0"/>
+        <c:axPos val="l"/>
+        <c:majorGridlines>
+          <c:spPr>
+            <a:ln xmlns:a="http://schemas.openxmlformats.org/drawingml/2006/main" w="9525">
+              <a:solidFill>
+                <a:srgbClr val="EDEFF3"/>
+              </a:solidFill>
+              <a:prstDash val="solid"/>
+            </a:ln>
+          </c:spPr>
+        </c:majorGridlines>
+        <c:numFmt formatCode="0,"/>
+        <c:majorTickMark val="none"/>
+        <c:minorTickMark val="none"/>
+        <c:spPr>
+          <a:ln xmlns:a="http://schemas.openxmlformats.org/drawingml/2006/main" w="9525">
+            <a:solidFill>
+              <a:srgbClr val="B8BCC4"/>
+            </a:solidFill>
+            <a:prstDash val="solid"/>
+          </a:ln>
+        </c:spPr>
+        <c:txPr>
+          <a:bodyPr xmlns:a="http://schemas.openxmlformats.org/drawingml/2006/main" anchorCtr="1"/>
+          <a:lstStyle xmlns:a="http://schemas.openxmlformats.org/drawingml/2006/main"/>
+          <a:p xmlns:a="http://schemas.openxmlformats.org/drawingml/2006/main">
+            <a:pPr>
+              <a:defRPr sz="788">
+                <a:solidFill>
+                  <a:srgbClr val="526071"/>
+                </a:solidFill>
+                <a:latin typeface="Arial"/>
+                <a:ea typeface="Arial"/>
+                <a:cs typeface="Arial"/>
+              </a:defRPr>
+            </a:pPr>
+          </a:p>
+        </c:txPr>
+        <c:crossAx val="48672768"/>
+        <c:lblAlgn val="ctr"/>
+        <c:lblOffset val="100"/>
+        <c:noMultiLvlLbl val="0"/>
+      </c:catAx>
+      <c:valAx>
+        <c:axId val="48672768"/>
+        <c:scaling>
+          <c:orientation val="minMax"/>
+        </c:scaling>
+        <c:delete val="0"/>
+        <c:axPos val="b"/>
+        <c:numFmt formatCode="General"/>
+        <c:majorTickMark val="none"/>
+        <c:minorTickMark val="none"/>
+        <c:tickLblPos val="nextTo"/>
+        <c:spPr>
+          <a:ln xmlns:a="http://schemas.openxmlformats.org/drawingml/2006/main" w="0">
+            <a:solidFill>
+              <a:srgbClr val="FFFFFF"/>
+            </a:solidFill>
+            <a:prstDash val="solid"/>
+          </a:ln>
+        </c:spPr>
+        <c:txPr>
+          <a:bodyPr xmlns:a="http://schemas.openxmlformats.org/drawingml/2006/main" anchorCtr="1"/>
+          <a:lstStyle xmlns:a="http://schemas.openxmlformats.org/drawingml/2006/main"/>
+          <a:p xmlns:a="http://schemas.openxmlformats.org/drawingml/2006/main">
+            <a:pPr>
+              <a:defRPr sz="900">
+                <a:solidFill>
+                  <a:srgbClr val="526071"/>
+                </a:solidFill>
+                <a:latin typeface="Arial"/>
+                <a:ea typeface="Arial"/>
+                <a:cs typeface="Arial"/>
+              </a:defRPr>
+            </a:pPr>
+          </a:p>
+        </c:txPr>
+        <c:crossAx val="48650112"/>
+        <c:crossBetween val="between"/>
+      </c:valAx>
+      <c:spPr>
+        <a:noFill xmlns:a="http://schemas.openxmlformats.org/drawingml/2006/main"/>
+        <a:ln xmlns:a="http://schemas.openxmlformats.org/drawingml/2006/main" w="0">
+          <a:solidFill>
+            <a:srgbClr val="FFFFFF"/>
+          </a:solidFill>
+          <a:prstDash val="solid"/>
+        </a:ln>
+      </c:spPr>
+    </c:plotArea>
+    <c:plotVisOnly val="1"/>
+  </c:chart>
+  <c:spPr>
+    <a:solidFill xmlns:a="http://schemas.openxmlformats.org/drawingml/2006/main">
+      <a:srgbClr val="FFFFFF"/>
+    </a:solidFill>
+    <a:ln xmlns:a="http://schemas.openxmlformats.org/drawingml/2006/main" w="0">
+      <a:solidFill>
+        <a:srgbClr val="FFFFFF"/>
+      </a:solidFill>
+      <a:prstDash val="solid"/>
+    </a:ln>
+  </c:spPr>
+</c:chartSpace>
+</file>
+
+<file path=ppt/slides/charts/chart3.xml><?xml version="1.0" encoding="utf-8"?>
+<c:chartSpace xmlns:c="http://schemas.openxmlformats.org/drawingml/2006/chart">
+  <c:lang val="en-US"/>
+  <c:chart>
+    <c:plotArea>
+      <c:barChart>
+        <c:barDir val="bar"/>
+        <c:grouping val="clustered"/>
+        <c:varyColors val="0"/>
+        <c:ser>
+          <c:idx val="0"/>
+          <c:order val="0"/>
+          <c:tx>
+            <c:v>Wall time</c:v>
+          </c:tx>
+          <c:spPr>
+            <a:solidFill xmlns:a="http://schemas.openxmlformats.org/drawingml/2006/main">
+              <a:srgbClr val="1677FF"/>
+            </a:solidFill>
+          </c:spPr>
+          <c:dPt>
+            <c:idx val="0"/>
+            <c:spPr>
+              <a:solidFill xmlns:a="http://schemas.openxmlformats.org/drawingml/2006/main">
+                <a:srgbClr val="7438F5"/>
+              </a:solidFill>
+            </c:spPr>
+          </c:dPt>
+          <c:dPt>
+            <c:idx val="1"/>
+            <c:spPr>
+              <a:solidFill xmlns:a="http://schemas.openxmlformats.org/drawingml/2006/main">
+                <a:srgbClr val="1677FF"/>
+              </a:solidFill>
+            </c:spPr>
+          </c:dPt>
+          <c:dPt>
+            <c:idx val="2"/>
+            <c:spPr>
+              <a:solidFill xmlns:a="http://schemas.openxmlformats.org/drawingml/2006/main">
+                <a:srgbClr val="13B7D5"/>
+              </a:solidFill>
+            </c:spPr>
+          </c:dPt>
+          <c:dPt>
+            <c:idx val="3"/>
+            <c:spPr>
+              <a:solidFill xmlns:a="http://schemas.openxmlformats.org/drawingml/2006/main">
+                <a:srgbClr val="7D8796"/>
+              </a:solidFill>
+            </c:spPr>
+          </c:dPt>
+          <c:cat>
+            <c:strLit>
+              <c:ptCount val="4"/>
+              <c:pt idx="0">
+                <c:v>Adaptive</c:v>
+              </c:pt>
+              <c:pt idx="1">
+                <c:v>Full Palace</c:v>
+              </c:pt>
+              <c:pt idx="2">
+                <c:v>Route-only</c:v>
+              </c:pt>
+              <c:pt idx="3">
+                <c:v>Codex alone</c:v>
+              </c:pt>
+            </c:strLit>
+          </c:cat>
+          <c:val>
+            <c:numLit>
+              <c:formatCode>0.0</c:formatCode>
+              <c:ptCount val="4"/>
+              <c:pt idx="0">
+                <c:v>72.026</c:v>
+              </c:pt>
+              <c:pt idx="1">
+                <c:v>80.712</c:v>
+              </c:pt>
+              <c:pt idx="2">
+                <c:v>67.996</c:v>
+              </c:pt>
+              <c:pt idx="3">
+                <c:v>63.1195</c:v>
+              </c:pt>
+            </c:numLit>
+          </c:val>
+        </c:ser>
+        <c:dLbls>
+          <c:txPr>
+            <a:bodyPr xmlns:a="http://schemas.openxmlformats.org/drawingml/2006/main" anchorCtr="1"/>
+            <a:lstStyle xmlns:a="http://schemas.openxmlformats.org/drawingml/2006/main"/>
+            <a:p xmlns:a="http://schemas.openxmlformats.org/drawingml/2006/main">
+              <a:pPr>
+                <a:defRPr sz="863" b="1">
+                  <a:solidFill>
+                    <a:srgbClr val="0A1224"/>
+                  </a:solidFill>
+                  <a:latin typeface="Arial"/>
+                  <a:ea typeface="Arial"/>
+                  <a:cs typeface="Arial"/>
+                </a:defRPr>
+              </a:pPr>
+            </a:p>
+          </c:txPr>
+          <c:dLblPos val="outEnd"/>
+          <c:showLegendKey val="0"/>
+          <c:showVal val="1"/>
+          <c:showCatName val="0"/>
+          <c:showSerName val="0"/>
+          <c:showPercent val="0"/>
+          <c:showBubbleSize val="0"/>
+          <c:showLeaderLines val="0"/>
+        </c:dLbls>
+        <c:gapWidth val="65"/>
+        <c:axId val="48650112"/>
+        <c:axId val="48672768"/>
+      </c:barChart>
+      <c:catAx>
+        <c:axId val="48650112"/>
+        <c:scaling>
+          <c:orientation val="minMax"/>
+        </c:scaling>
+        <c:delete val="0"/>
+        <c:axPos val="l"/>
+        <c:majorGridlines>
+          <c:spPr>
+            <a:ln xmlns:a="http://schemas.openxmlformats.org/drawingml/2006/main" w="9525">
+              <a:solidFill>
+                <a:srgbClr val="EDEFF3"/>
+              </a:solidFill>
+              <a:prstDash val="solid"/>
+            </a:ln>
+          </c:spPr>
+        </c:majorGridlines>
+        <c:numFmt formatCode="0"/>
+        <c:majorTickMark val="none"/>
+        <c:minorTickMark val="none"/>
+        <c:spPr>
+          <a:ln xmlns:a="http://schemas.openxmlformats.org/drawingml/2006/main" w="9525">
+            <a:solidFill>
+              <a:srgbClr val="B8BCC4"/>
+            </a:solidFill>
+            <a:prstDash val="solid"/>
+          </a:ln>
+        </c:spPr>
+        <c:txPr>
+          <a:bodyPr xmlns:a="http://schemas.openxmlformats.org/drawingml/2006/main" anchorCtr="1"/>
+          <a:lstStyle xmlns:a="http://schemas.openxmlformats.org/drawingml/2006/main"/>
+          <a:p xmlns:a="http://schemas.openxmlformats.org/drawingml/2006/main">
+            <a:pPr>
+              <a:defRPr sz="788">
+                <a:solidFill>
+                  <a:srgbClr val="526071"/>
+                </a:solidFill>
+                <a:latin typeface="Arial"/>
+                <a:ea typeface="Arial"/>
+                <a:cs typeface="Arial"/>
+              </a:defRPr>
+            </a:pPr>
+          </a:p>
+        </c:txPr>
+        <c:crossAx val="48672768"/>
+        <c:lblAlgn val="ctr"/>
+        <c:lblOffset val="100"/>
+        <c:noMultiLvlLbl val="0"/>
+      </c:catAx>
+      <c:valAx>
+        <c:axId val="48672768"/>
+        <c:scaling>
+          <c:orientation val="minMax"/>
+        </c:scaling>
+        <c:delete val="0"/>
+        <c:axPos val="b"/>
+        <c:numFmt formatCode="General"/>
+        <c:majorTickMark val="none"/>
+        <c:minorTickMark val="none"/>
+        <c:tickLblPos val="nextTo"/>
+        <c:spPr>
+          <a:ln xmlns:a="http://schemas.openxmlformats.org/drawingml/2006/main" w="0">
+            <a:solidFill>
+              <a:srgbClr val="FFFFFF"/>
+            </a:solidFill>
+            <a:prstDash val="solid"/>
+          </a:ln>
+        </c:spPr>
+        <c:txPr>
+          <a:bodyPr xmlns:a="http://schemas.openxmlformats.org/drawingml/2006/main" anchorCtr="1"/>
+          <a:lstStyle xmlns:a="http://schemas.openxmlformats.org/drawingml/2006/main"/>
+          <a:p xmlns:a="http://schemas.openxmlformats.org/drawingml/2006/main">
+            <a:pPr>
+              <a:defRPr sz="900">
+                <a:solidFill>
+                  <a:srgbClr val="526071"/>
+                </a:solidFill>
+                <a:latin typeface="Arial"/>
+                <a:ea typeface="Arial"/>
+                <a:cs typeface="Arial"/>
+              </a:defRPr>
+            </a:pPr>
+          </a:p>
+        </c:txPr>
+        <c:crossAx val="48650112"/>
+        <c:crossBetween val="between"/>
+      </c:valAx>
+      <c:spPr>
+        <a:noFill xmlns:a="http://schemas.openxmlformats.org/drawingml/2006/main"/>
+        <a:ln xmlns:a="http://schemas.openxmlformats.org/drawingml/2006/main" w="0">
+          <a:solidFill>
+            <a:srgbClr val="FFFFFF"/>
+          </a:solidFill>
+          <a:prstDash val="solid"/>
+        </a:ln>
+      </c:spPr>
+    </c:plotArea>
+    <c:plotVisOnly val="1"/>
+  </c:chart>
+  <c:spPr>
+    <a:solidFill xmlns:a="http://schemas.openxmlformats.org/drawingml/2006/main">
+      <a:srgbClr val="FFFFFF"/>
+    </a:solidFill>
+    <a:ln xmlns:a="http://schemas.openxmlformats.org/drawingml/2006/main" w="0">
+      <a:solidFill>
+        <a:srgbClr val="FFFFFF"/>
+      </a:solidFill>
+      <a:prstDash val="solid"/>
+    </a:ln>
+  </c:spPr>
+</c:chartSpace>
+</file>
+
+<file path=ppt/slides/charts/chart4.xml><?xml version="1.0" encoding="utf-8"?>
+<c:chartSpace xmlns:c="http://schemas.openxmlformats.org/drawingml/2006/chart">
+  <c:lang val="en-US"/>
+  <c:chart>
+    <c:plotArea>
+      <c:barChart>
+        <c:barDir val="bar"/>
+        <c:grouping val="clustered"/>
+        <c:varyColors val="0"/>
+        <c:ser>
+          <c:idx val="0"/>
+          <c:order val="0"/>
+          <c:tx>
+            <c:v>Tool calls</c:v>
+          </c:tx>
+          <c:spPr>
+            <a:solidFill xmlns:a="http://schemas.openxmlformats.org/drawingml/2006/main">
+              <a:srgbClr val="1677FF"/>
+            </a:solidFill>
+          </c:spPr>
+          <c:dPt>
+            <c:idx val="0"/>
+            <c:spPr>
+              <a:solidFill xmlns:a="http://schemas.openxmlformats.org/drawingml/2006/main">
+                <a:srgbClr val="7438F5"/>
+              </a:solidFill>
+            </c:spPr>
+          </c:dPt>
+          <c:dPt>
+            <c:idx val="1"/>
+            <c:spPr>
+              <a:solidFill xmlns:a="http://schemas.openxmlformats.org/drawingml/2006/main">
+                <a:srgbClr val="1677FF"/>
+              </a:solidFill>
+            </c:spPr>
+          </c:dPt>
+          <c:dPt>
+            <c:idx val="2"/>
+            <c:spPr>
+              <a:solidFill xmlns:a="http://schemas.openxmlformats.org/drawingml/2006/main">
+                <a:srgbClr val="13B7D5"/>
+              </a:solidFill>
+            </c:spPr>
+          </c:dPt>
+          <c:dPt>
+            <c:idx val="3"/>
+            <c:spPr>
+              <a:solidFill xmlns:a="http://schemas.openxmlformats.org/drawingml/2006/main">
+                <a:srgbClr val="7D8796"/>
+              </a:solidFill>
+            </c:spPr>
+          </c:dPt>
+          <c:cat>
+            <c:strLit>
+              <c:ptCount val="4"/>
+              <c:pt idx="0">
+                <c:v>Adaptive</c:v>
+              </c:pt>
+              <c:pt idx="1">
+                <c:v>Full Palace</c:v>
+              </c:pt>
+              <c:pt idx="2">
+                <c:v>Route-only</c:v>
+              </c:pt>
+              <c:pt idx="3">
+                <c:v>Codex alone</c:v>
+              </c:pt>
+            </c:strLit>
+          </c:cat>
+          <c:val>
+            <c:numLit>
+              <c:formatCode>0.0</c:formatCode>
+              <c:ptCount val="4"/>
+              <c:pt idx="0">
+                <c:v>9.5</c:v>
+              </c:pt>
+              <c:pt idx="1">
+                <c:v>11.5</c:v>
+              </c:pt>
+              <c:pt idx="2">
+                <c:v>12.5</c:v>
+              </c:pt>
+              <c:pt idx="3">
+                <c:v>5</c:v>
+              </c:pt>
+            </c:numLit>
+          </c:val>
+        </c:ser>
+        <c:dLbls>
+          <c:txPr>
+            <a:bodyPr xmlns:a="http://schemas.openxmlformats.org/drawingml/2006/main" anchorCtr="1"/>
+            <a:lstStyle xmlns:a="http://schemas.openxmlformats.org/drawingml/2006/main"/>
+            <a:p xmlns:a="http://schemas.openxmlformats.org/drawingml/2006/main">
+              <a:pPr>
+                <a:defRPr sz="863" b="1">
+                  <a:solidFill>
+                    <a:srgbClr val="0A1224"/>
+                  </a:solidFill>
+                  <a:latin typeface="Arial"/>
+                  <a:ea typeface="Arial"/>
+                  <a:cs typeface="Arial"/>
+                </a:defRPr>
+              </a:pPr>
+            </a:p>
+          </c:txPr>
+          <c:dLblPos val="outEnd"/>
+          <c:showLegendKey val="0"/>
+          <c:showVal val="1"/>
+          <c:showCatName val="0"/>
+          <c:showSerName val="0"/>
+          <c:showPercent val="0"/>
+          <c:showBubbleSize val="0"/>
+          <c:showLeaderLines val="0"/>
+        </c:dLbls>
+        <c:gapWidth val="65"/>
+        <c:axId val="48650112"/>
+        <c:axId val="48672768"/>
+      </c:barChart>
+      <c:catAx>
+        <c:axId val="48650112"/>
+        <c:scaling>
+          <c:orientation val="minMax"/>
+        </c:scaling>
+        <c:delete val="0"/>
+        <c:axPos val="l"/>
+        <c:majorGridlines>
+          <c:spPr>
+            <a:ln xmlns:a="http://schemas.openxmlformats.org/drawingml/2006/main" w="9525">
+              <a:solidFill>
+                <a:srgbClr val="EDEFF3"/>
+              </a:solidFill>
+              <a:prstDash val="solid"/>
+            </a:ln>
+          </c:spPr>
+        </c:majorGridlines>
+        <c:numFmt formatCode="0"/>
+        <c:majorTickMark val="none"/>
+        <c:minorTickMark val="none"/>
+        <c:spPr>
+          <a:ln xmlns:a="http://schemas.openxmlformats.org/drawingml/2006/main" w="9525">
+            <a:solidFill>
+              <a:srgbClr val="B8BCC4"/>
+            </a:solidFill>
+            <a:prstDash val="solid"/>
+          </a:ln>
+        </c:spPr>
+        <c:txPr>
+          <a:bodyPr xmlns:a="http://schemas.openxmlformats.org/drawingml/2006/main" anchorCtr="1"/>
+          <a:lstStyle xmlns:a="http://schemas.openxmlformats.org/drawingml/2006/main"/>
+          <a:p xmlns:a="http://schemas.openxmlformats.org/drawingml/2006/main">
+            <a:pPr>
+              <a:defRPr sz="788">
+                <a:solidFill>
+                  <a:srgbClr val="526071"/>
+                </a:solidFill>
+                <a:latin typeface="Arial"/>
+                <a:ea typeface="Arial"/>
+                <a:cs typeface="Arial"/>
+              </a:defRPr>
+            </a:pPr>
+          </a:p>
+        </c:txPr>
+        <c:crossAx val="48672768"/>
+        <c:lblAlgn val="ctr"/>
+        <c:lblOffset val="100"/>
+        <c:noMultiLvlLbl val="0"/>
+      </c:catAx>
+      <c:valAx>
+        <c:axId val="48672768"/>
+        <c:scaling>
+          <c:orientation val="minMax"/>
+        </c:scaling>
+        <c:delete val="0"/>
+        <c:axPos val="b"/>
+        <c:numFmt formatCode="General"/>
+        <c:majorTickMark val="none"/>
+        <c:minorTickMark val="none"/>
+        <c:tickLblPos val="nextTo"/>
+        <c:spPr>
+          <a:ln xmlns:a="http://schemas.openxmlformats.org/drawingml/2006/main" w="0">
+            <a:solidFill>
+              <a:srgbClr val="FFFFFF"/>
+            </a:solidFill>
+            <a:prstDash val="solid"/>
+          </a:ln>
+        </c:spPr>
+        <c:txPr>
+          <a:bodyPr xmlns:a="http://schemas.openxmlformats.org/drawingml/2006/main" anchorCtr="1"/>
+          <a:lstStyle xmlns:a="http://schemas.openxmlformats.org/drawingml/2006/main"/>
+          <a:p xmlns:a="http://schemas.openxmlformats.org/drawingml/2006/main">
+            <a:pPr>
+              <a:defRPr sz="900">
+                <a:solidFill>
+                  <a:srgbClr val="526071"/>
+                </a:solidFill>
+                <a:latin typeface="Arial"/>
+                <a:ea typeface="Arial"/>
+                <a:cs typeface="Arial"/>
+              </a:defRPr>
+            </a:pPr>
+          </a:p>
+        </c:txPr>
+        <c:crossAx val="48650112"/>
+        <c:crossBetween val="between"/>
+      </c:valAx>
+      <c:spPr>
+        <a:noFill xmlns:a="http://schemas.openxmlformats.org/drawingml/2006/main"/>
+        <a:ln xmlns:a="http://schemas.openxmlformats.org/drawingml/2006/main" w="0">
+          <a:solidFill>
+            <a:srgbClr val="FFFFFF"/>
+          </a:solidFill>
+          <a:prstDash val="solid"/>
+        </a:ln>
+      </c:spPr>
+    </c:plotArea>
+    <c:plotVisOnly val="1"/>
+  </c:chart>
+  <c:spPr>
+    <a:solidFill xmlns:a="http://schemas.openxmlformats.org/drawingml/2006/main">
+      <a:srgbClr val="FFFFFF"/>
+    </a:solidFill>
+    <a:ln xmlns:a="http://schemas.openxmlformats.org/drawingml/2006/main" w="0">
+      <a:solidFill>
+        <a:srgbClr val="FFFFFF"/>
+      </a:solidFill>
+      <a:prstDash val="solid"/>
+    </a:ln>
+  </c:spPr>
+</c:chartSpace>
+</file>
+
 <file path=ppt/slides/slide1.xml><?xml version="1.0" encoding="utf-8"?>
 <p:sld xmlns:p="http://schemas.openxmlformats.org/presentationml/2006/main">
   <p:cSld>
@@ -2126,7 +2819,7 @@
           <p:cNvPr id="7" name="s1-eyebrow">
             <a:extLst xmlns:a="http://schemas.openxmlformats.org/drawingml/2006/main">
               <a:ext uri="{FF2B5EF4-FFF2-40B4-BE49-F238E27FC236}">
-                <a16:creationId xmlns:a16="http://schemas.microsoft.com/office/drawing/2014/main" id="{E490E303-B7EF-4E85-A832-2FFBE6DE736B}"/>
+                <a16:creationId xmlns:a16="http://schemas.microsoft.com/office/drawing/2014/main" id="{3ABEF9D6-EE93-4940-B9DB-73E5179DCB95}"/>
               </a:ext>
             </a:extLst>
           </p:cNvPr>
@@ -2171,7 +2864,7 @@
           <p:cNvPr id="2" name="s1-title">
             <a:extLst xmlns:a="http://schemas.openxmlformats.org/drawingml/2006/main">
               <a:ext uri="{FF2B5EF4-FFF2-40B4-BE49-F238E27FC236}">
-                <a16:creationId xmlns:a16="http://schemas.microsoft.com/office/drawing/2014/main" id="{10BD4AF0-4CFB-4D28-87E9-85AFC0908C0F}"/>
+                <a16:creationId xmlns:a16="http://schemas.microsoft.com/office/drawing/2014/main" id="{E17803E5-C4BB-4928-884E-41B05104B611}"/>
               </a:ext>
             </a:extLst>
           </p:cNvPr>
@@ -2239,7 +2932,7 @@
           <p:cNvPr id="4" name="s1-subtitle">
             <a:extLst xmlns:a="http://schemas.openxmlformats.org/drawingml/2006/main">
               <a:ext uri="{FF2B5EF4-FFF2-40B4-BE49-F238E27FC236}">
-                <a16:creationId xmlns:a16="http://schemas.microsoft.com/office/drawing/2014/main" id="{A1910804-F9C0-41D5-B7CC-EED56D47891B}"/>
+                <a16:creationId xmlns:a16="http://schemas.microsoft.com/office/drawing/2014/main" id="{935E71D4-5B51-4D52-9551-6F9231741053}"/>
               </a:ext>
             </a:extLst>
           </p:cNvPr>
@@ -2284,7 +2977,7 @@
           <p:cNvPr id="5" name="s1-version">
             <a:extLst xmlns:a="http://schemas.openxmlformats.org/drawingml/2006/main">
               <a:ext uri="{FF2B5EF4-FFF2-40B4-BE49-F238E27FC236}">
-                <a16:creationId xmlns:a16="http://schemas.microsoft.com/office/drawing/2014/main" id="{87C4C0D9-FFF7-44F6-847F-3D193FA68520}"/>
+                <a16:creationId xmlns:a16="http://schemas.microsoft.com/office/drawing/2014/main" id="{5EE87170-44AD-4D08-A617-F524A51C8A94}"/>
               </a:ext>
             </a:extLst>
           </p:cNvPr>
@@ -2333,7 +3026,7 @@
           <p:nvPr/>
         </p:nvPicPr>
         <p:blipFill>
-          <a:blip xmlns:r="http://schemas.openxmlformats.org/officeDocument/2006/relationships" xmlns:a="http://schemas.openxmlformats.org/drawingml/2006/main" r:embed="R17bb53440f6c4fa6"/>
+          <a:blip xmlns:r="http://schemas.openxmlformats.org/officeDocument/2006/relationships" xmlns:a="http://schemas.openxmlformats.org/drawingml/2006/main" r:embed="R6cc4c7eca8c84008"/>
           <a:stretch xmlns:a="http://schemas.openxmlformats.org/drawingml/2006/main"/>
         </p:blipFill>
         <p:spPr>
@@ -2349,7 +3042,7 @@
     </p:spTree>
     <p:extLst>
       <p:ext uri="{BB962C8B-B14F-4D97-AF65-F5344CB8AC3E}">
-        <p14:creationId xmlns:p14="http://schemas.microsoft.com/office/powerpoint/2010/main" val="1383608297"/>
+        <p14:creationId xmlns:p14="http://schemas.microsoft.com/office/powerpoint/2010/main" val="738431571"/>
       </p:ext>
     </p:extLst>
   </p:cSld>
@@ -2380,7 +3073,7 @@
           <p:cNvPr id="27" name="s11-title">
             <a:extLst xmlns:a="http://schemas.openxmlformats.org/drawingml/2006/main">
               <a:ext uri="{FF2B5EF4-FFF2-40B4-BE49-F238E27FC236}">
-                <a16:creationId xmlns:a16="http://schemas.microsoft.com/office/drawing/2014/main" id="{DD78E695-88A1-4C44-8238-73B9AA0076A6}"/>
+                <a16:creationId xmlns:a16="http://schemas.microsoft.com/office/drawing/2014/main" id="{0B47EC14-CBA0-4139-BAD4-71D1C78454C1}"/>
               </a:ext>
             </a:extLst>
           </p:cNvPr>
@@ -2425,7 +3118,7 @@
           <p:cNvPr id="2" name="s11-subtitle">
             <a:extLst xmlns:a="http://schemas.openxmlformats.org/drawingml/2006/main">
               <a:ext uri="{FF2B5EF4-FFF2-40B4-BE49-F238E27FC236}">
-                <a16:creationId xmlns:a16="http://schemas.microsoft.com/office/drawing/2014/main" id="{AC71D59C-FCA0-4FC2-BDF5-8637E57E263E}"/>
+                <a16:creationId xmlns:a16="http://schemas.microsoft.com/office/drawing/2014/main" id="{9AAFFAF1-0654-4B9B-8526-EF8B550D0AB6}"/>
               </a:ext>
             </a:extLst>
           </p:cNvPr>
@@ -2514,7 +3207,7 @@
           <p:cNvPr id="5" name="s11-arrow1">
             <a:extLst xmlns:a="http://schemas.openxmlformats.org/drawingml/2006/main">
               <a:ext uri="{FF2B5EF4-FFF2-40B4-BE49-F238E27FC236}">
-                <a16:creationId xmlns:a16="http://schemas.microsoft.com/office/drawing/2014/main" id="{4310B3BF-DA52-4D01-9619-A47E4D994D39}"/>
+                <a16:creationId xmlns:a16="http://schemas.microsoft.com/office/drawing/2014/main" id="{E04D8CE9-DF52-43CD-B4B3-74C00D367FD4}"/>
               </a:ext>
             </a:extLst>
           </p:cNvPr>
@@ -2559,7 +3252,7 @@
           <p:cNvPr id="6" name="s11-arrow2">
             <a:extLst xmlns:a="http://schemas.openxmlformats.org/drawingml/2006/main">
               <a:ext uri="{FF2B5EF4-FFF2-40B4-BE49-F238E27FC236}">
-                <a16:creationId xmlns:a16="http://schemas.microsoft.com/office/drawing/2014/main" id="{56A5B2A9-7F6B-4B15-AAC3-759A374DA368}"/>
+                <a16:creationId xmlns:a16="http://schemas.microsoft.com/office/drawing/2014/main" id="{2C086A28-2916-4BA3-872F-F04BAF44EDF6}"/>
               </a:ext>
             </a:extLst>
           </p:cNvPr>
@@ -2604,7 +3297,7 @@
           <p:cNvPr id="7" name="s11-v021">
             <a:extLst xmlns:a="http://schemas.openxmlformats.org/drawingml/2006/main">
               <a:ext uri="{FF2B5EF4-FFF2-40B4-BE49-F238E27FC236}">
-                <a16:creationId xmlns:a16="http://schemas.microsoft.com/office/drawing/2014/main" id="{6B1DC8D4-BB70-4DD9-A459-340A16BC5C44}"/>
+                <a16:creationId xmlns:a16="http://schemas.microsoft.com/office/drawing/2014/main" id="{627391B1-BD30-4385-B807-3C493C3C52F8}"/>
               </a:ext>
             </a:extLst>
           </p:cNvPr>
@@ -2639,7 +3332,7 @@
           <p:cNvPr id="8" name="s11-v021-version">
             <a:extLst xmlns:a="http://schemas.openxmlformats.org/drawingml/2006/main">
               <a:ext uri="{FF2B5EF4-FFF2-40B4-BE49-F238E27FC236}">
-                <a16:creationId xmlns:a16="http://schemas.microsoft.com/office/drawing/2014/main" id="{2BEBF6C9-F953-43B0-990C-CE2D34548F3A}"/>
+                <a16:creationId xmlns:a16="http://schemas.microsoft.com/office/drawing/2014/main" id="{E76B2D03-97DA-44B7-9F69-17B964AED64D}"/>
               </a:ext>
             </a:extLst>
           </p:cNvPr>
@@ -2684,7 +3377,7 @@
           <p:cNvPr id="9" name="s11-v021-k">
             <a:extLst xmlns:a="http://schemas.openxmlformats.org/drawingml/2006/main">
               <a:ext uri="{FF2B5EF4-FFF2-40B4-BE49-F238E27FC236}">
-                <a16:creationId xmlns:a16="http://schemas.microsoft.com/office/drawing/2014/main" id="{BA5D94C6-E97E-4B3F-A3F7-33DA3D268055}"/>
+                <a16:creationId xmlns:a16="http://schemas.microsoft.com/office/drawing/2014/main" id="{D5D37A26-A18F-4A12-B9CD-6F65FD8A3182}"/>
               </a:ext>
             </a:extLst>
           </p:cNvPr>
@@ -2729,7 +3422,7 @@
           <p:cNvPr id="10" name="s11-v021-v">
             <a:extLst xmlns:a="http://schemas.openxmlformats.org/drawingml/2006/main">
               <a:ext uri="{FF2B5EF4-FFF2-40B4-BE49-F238E27FC236}">
-                <a16:creationId xmlns:a16="http://schemas.microsoft.com/office/drawing/2014/main" id="{105B400C-BE03-42ED-BFAB-7A9E8013DCAB}"/>
+                <a16:creationId xmlns:a16="http://schemas.microsoft.com/office/drawing/2014/main" id="{FB3C4D76-BC36-474F-99F4-57E29CCF9B8D}"/>
               </a:ext>
             </a:extLst>
           </p:cNvPr>
@@ -2774,7 +3467,7 @@
           <p:cNvPr id="11" name="s11-v021-foot">
             <a:extLst xmlns:a="http://schemas.openxmlformats.org/drawingml/2006/main">
               <a:ext uri="{FF2B5EF4-FFF2-40B4-BE49-F238E27FC236}">
-                <a16:creationId xmlns:a16="http://schemas.microsoft.com/office/drawing/2014/main" id="{C017511F-CCD5-46E7-A546-9E63DBA61818}"/>
+                <a16:creationId xmlns:a16="http://schemas.microsoft.com/office/drawing/2014/main" id="{999E169E-CC96-465C-8934-DF589C4E49BE}"/>
               </a:ext>
             </a:extLst>
           </p:cNvPr>
@@ -2819,7 +3512,7 @@
           <p:cNvPr id="12" name="s11-v022">
             <a:extLst xmlns:a="http://schemas.openxmlformats.org/drawingml/2006/main">
               <a:ext uri="{FF2B5EF4-FFF2-40B4-BE49-F238E27FC236}">
-                <a16:creationId xmlns:a16="http://schemas.microsoft.com/office/drawing/2014/main" id="{F864CFD7-3C34-4704-AC3D-119A61748A35}"/>
+                <a16:creationId xmlns:a16="http://schemas.microsoft.com/office/drawing/2014/main" id="{5C17E391-8D27-47C0-842B-403AD8E3DAE2}"/>
               </a:ext>
             </a:extLst>
           </p:cNvPr>
@@ -2854,7 +3547,7 @@
           <p:cNvPr id="13" name="s11-v022-version">
             <a:extLst xmlns:a="http://schemas.openxmlformats.org/drawingml/2006/main">
               <a:ext uri="{FF2B5EF4-FFF2-40B4-BE49-F238E27FC236}">
-                <a16:creationId xmlns:a16="http://schemas.microsoft.com/office/drawing/2014/main" id="{094FC1CA-0973-48E1-AAAF-0F27628514C9}"/>
+                <a16:creationId xmlns:a16="http://schemas.microsoft.com/office/drawing/2014/main" id="{03F25EC3-C63E-484E-A1E0-613D5D71A8EC}"/>
               </a:ext>
             </a:extLst>
           </p:cNvPr>
@@ -2899,7 +3592,7 @@
           <p:cNvPr id="14" name="s11-v022-k">
             <a:extLst xmlns:a="http://schemas.openxmlformats.org/drawingml/2006/main">
               <a:ext uri="{FF2B5EF4-FFF2-40B4-BE49-F238E27FC236}">
-                <a16:creationId xmlns:a16="http://schemas.microsoft.com/office/drawing/2014/main" id="{E0218E30-BA87-442A-B1E6-82E815166101}"/>
+                <a16:creationId xmlns:a16="http://schemas.microsoft.com/office/drawing/2014/main" id="{F35E3C31-57B3-4B54-8905-4E1D63135910}"/>
               </a:ext>
             </a:extLst>
           </p:cNvPr>
@@ -2944,7 +3637,7 @@
           <p:cNvPr id="15" name="s11-v022-v">
             <a:extLst xmlns:a="http://schemas.openxmlformats.org/drawingml/2006/main">
               <a:ext uri="{FF2B5EF4-FFF2-40B4-BE49-F238E27FC236}">
-                <a16:creationId xmlns:a16="http://schemas.microsoft.com/office/drawing/2014/main" id="{2E488D7E-4325-49D0-BD81-890F8CB06FBC}"/>
+                <a16:creationId xmlns:a16="http://schemas.microsoft.com/office/drawing/2014/main" id="{BD82605D-846B-4A34-95F3-0B0656643AC4}"/>
               </a:ext>
             </a:extLst>
           </p:cNvPr>
@@ -2989,7 +3682,7 @@
           <p:cNvPr id="16" name="s11-v022-foot">
             <a:extLst xmlns:a="http://schemas.openxmlformats.org/drawingml/2006/main">
               <a:ext uri="{FF2B5EF4-FFF2-40B4-BE49-F238E27FC236}">
-                <a16:creationId xmlns:a16="http://schemas.microsoft.com/office/drawing/2014/main" id="{6C199D91-9911-4DBC-9196-841A21BFDB3B}"/>
+                <a16:creationId xmlns:a16="http://schemas.microsoft.com/office/drawing/2014/main" id="{DCFC150A-DF1E-4592-ABCF-247FCAE80E0F}"/>
               </a:ext>
             </a:extLst>
           </p:cNvPr>
@@ -3034,7 +3727,7 @@
           <p:cNvPr id="17" name="s11-v023">
             <a:extLst xmlns:a="http://schemas.openxmlformats.org/drawingml/2006/main">
               <a:ext uri="{FF2B5EF4-FFF2-40B4-BE49-F238E27FC236}">
-                <a16:creationId xmlns:a16="http://schemas.microsoft.com/office/drawing/2014/main" id="{6BFF66C1-1DEC-4BA7-8668-AF669179D572}"/>
+                <a16:creationId xmlns:a16="http://schemas.microsoft.com/office/drawing/2014/main" id="{A9CBBCD8-8AAB-420A-995A-652BF2858935}"/>
               </a:ext>
             </a:extLst>
           </p:cNvPr>
@@ -3069,7 +3762,7 @@
           <p:cNvPr id="18" name="s11-v023-version">
             <a:extLst xmlns:a="http://schemas.openxmlformats.org/drawingml/2006/main">
               <a:ext uri="{FF2B5EF4-FFF2-40B4-BE49-F238E27FC236}">
-                <a16:creationId xmlns:a16="http://schemas.microsoft.com/office/drawing/2014/main" id="{091EAF11-F1BD-4E88-91AD-E6332DB5131A}"/>
+                <a16:creationId xmlns:a16="http://schemas.microsoft.com/office/drawing/2014/main" id="{0D17D17C-51D5-4477-8932-2788EDAE89D0}"/>
               </a:ext>
             </a:extLst>
           </p:cNvPr>
@@ -3114,7 +3807,7 @@
           <p:cNvPr id="19" name="s11-v023-k">
             <a:extLst xmlns:a="http://schemas.openxmlformats.org/drawingml/2006/main">
               <a:ext uri="{FF2B5EF4-FFF2-40B4-BE49-F238E27FC236}">
-                <a16:creationId xmlns:a16="http://schemas.microsoft.com/office/drawing/2014/main" id="{CE798AF5-C697-4789-81DD-1D161117E45D}"/>
+                <a16:creationId xmlns:a16="http://schemas.microsoft.com/office/drawing/2014/main" id="{009E6424-6E3E-4286-B943-3469ADAD4FC4}"/>
               </a:ext>
             </a:extLst>
           </p:cNvPr>
@@ -3159,7 +3852,7 @@
           <p:cNvPr id="20" name="s11-v023-v">
             <a:extLst xmlns:a="http://schemas.openxmlformats.org/drawingml/2006/main">
               <a:ext uri="{FF2B5EF4-FFF2-40B4-BE49-F238E27FC236}">
-                <a16:creationId xmlns:a16="http://schemas.microsoft.com/office/drawing/2014/main" id="{36D3041C-4C08-47E9-ACFB-CB803C8141E8}"/>
+                <a16:creationId xmlns:a16="http://schemas.microsoft.com/office/drawing/2014/main" id="{DC0B24AF-DDCD-479A-8453-16DAEFE596CF}"/>
               </a:ext>
             </a:extLst>
           </p:cNvPr>
@@ -3204,7 +3897,7 @@
           <p:cNvPr id="21" name="s11-v023-foot">
             <a:extLst xmlns:a="http://schemas.openxmlformats.org/drawingml/2006/main">
               <a:ext uri="{FF2B5EF4-FFF2-40B4-BE49-F238E27FC236}">
-                <a16:creationId xmlns:a16="http://schemas.microsoft.com/office/drawing/2014/main" id="{66FDDEB4-DFFE-45CD-B464-5CCD3FAC02B8}"/>
+                <a16:creationId xmlns:a16="http://schemas.microsoft.com/office/drawing/2014/main" id="{D3F748BE-F8A4-42A3-8FE0-7E004519C5E4}"/>
               </a:ext>
             </a:extLst>
           </p:cNvPr>
@@ -3249,7 +3942,7 @@
           <p:cNvPr id="22" name="s11-takeaway">
             <a:extLst xmlns:a="http://schemas.openxmlformats.org/drawingml/2006/main">
               <a:ext uri="{FF2B5EF4-FFF2-40B4-BE49-F238E27FC236}">
-                <a16:creationId xmlns:a16="http://schemas.microsoft.com/office/drawing/2014/main" id="{044C2BE7-1CE7-41A1-90BF-8117F7E85C0C}"/>
+                <a16:creationId xmlns:a16="http://schemas.microsoft.com/office/drawing/2014/main" id="{ED63AB62-F1E3-4CF0-9979-F4D8C56BD84E}"/>
               </a:ext>
             </a:extLst>
           </p:cNvPr>
@@ -3284,7 +3977,7 @@
           <p:cNvPr id="23" name="s11-takeaway-v">
             <a:extLst xmlns:a="http://schemas.openxmlformats.org/drawingml/2006/main">
               <a:ext uri="{FF2B5EF4-FFF2-40B4-BE49-F238E27FC236}">
-                <a16:creationId xmlns:a16="http://schemas.microsoft.com/office/drawing/2014/main" id="{D017E6BC-761F-4A8F-8945-04F45324FA8F}"/>
+                <a16:creationId xmlns:a16="http://schemas.microsoft.com/office/drawing/2014/main" id="{37D65BEE-EC22-42AD-B0F2-3492424E3548}"/>
               </a:ext>
             </a:extLst>
           </p:cNvPr>
@@ -3351,7 +4044,7 @@
           <p:cNvPr id="25" name="footer-source-10">
             <a:extLst xmlns:a="http://schemas.openxmlformats.org/drawingml/2006/main">
               <a:ext uri="{FF2B5EF4-FFF2-40B4-BE49-F238E27FC236}">
-                <a16:creationId xmlns:a16="http://schemas.microsoft.com/office/drawing/2014/main" id="{FA66CF0E-C8CA-45A4-9F04-35E7B02294C2}"/>
+                <a16:creationId xmlns:a16="http://schemas.microsoft.com/office/drawing/2014/main" id="{6A474411-49BA-4A75-B4D5-0B163A680F63}"/>
               </a:ext>
             </a:extLst>
           </p:cNvPr>
@@ -3396,7 +4089,7 @@
           <p:cNvPr id="26" name="footer-number-10">
             <a:extLst xmlns:a="http://schemas.openxmlformats.org/drawingml/2006/main">
               <a:ext uri="{FF2B5EF4-FFF2-40B4-BE49-F238E27FC236}">
-                <a16:creationId xmlns:a16="http://schemas.microsoft.com/office/drawing/2014/main" id="{B655CEAC-20A2-45C4-B2A8-37D46F26CDE7}"/>
+                <a16:creationId xmlns:a16="http://schemas.microsoft.com/office/drawing/2014/main" id="{067523A6-FBEC-45B3-ABC6-4BB7BBFB82CA}"/>
               </a:ext>
             </a:extLst>
           </p:cNvPr>
@@ -3439,7 +4132,7 @@
     </p:spTree>
     <p:extLst>
       <p:ext uri="{BB962C8B-B14F-4D97-AF65-F5344CB8AC3E}">
-        <p14:creationId xmlns:p14="http://schemas.microsoft.com/office/powerpoint/2010/main" val="1221119413"/>
+        <p14:creationId xmlns:p14="http://schemas.microsoft.com/office/powerpoint/2010/main" val="45502223"/>
       </p:ext>
     </p:extLst>
   </p:cSld>
@@ -3470,7 +4163,7 @@
           <p:cNvPr id="19" name="s12-eyebrow">
             <a:extLst xmlns:a="http://schemas.openxmlformats.org/drawingml/2006/main">
               <a:ext uri="{FF2B5EF4-FFF2-40B4-BE49-F238E27FC236}">
-                <a16:creationId xmlns:a16="http://schemas.microsoft.com/office/drawing/2014/main" id="{F3924CF2-D85E-4D01-B878-CAEAA5A96774}"/>
+                <a16:creationId xmlns:a16="http://schemas.microsoft.com/office/drawing/2014/main" id="{8E8CD63C-A148-4CC2-A8B1-5EE1110C2469}"/>
               </a:ext>
             </a:extLst>
           </p:cNvPr>
@@ -3515,7 +4208,7 @@
           <p:cNvPr id="2" name="s12-title">
             <a:extLst xmlns:a="http://schemas.openxmlformats.org/drawingml/2006/main">
               <a:ext uri="{FF2B5EF4-FFF2-40B4-BE49-F238E27FC236}">
-                <a16:creationId xmlns:a16="http://schemas.microsoft.com/office/drawing/2014/main" id="{DE68DDE2-C11A-48C6-BD23-3A1B8132B7D6}"/>
+                <a16:creationId xmlns:a16="http://schemas.microsoft.com/office/drawing/2014/main" id="{5E2BF20A-1CDF-4E46-8516-0FE9CDD23EC5}"/>
               </a:ext>
             </a:extLst>
           </p:cNvPr>
@@ -3584,7 +4277,7 @@
           <p:cNvPr id="4" name="s12-close">
             <a:extLst xmlns:a="http://schemas.openxmlformats.org/drawingml/2006/main">
               <a:ext uri="{FF2B5EF4-FFF2-40B4-BE49-F238E27FC236}">
-                <a16:creationId xmlns:a16="http://schemas.microsoft.com/office/drawing/2014/main" id="{C54E56C1-7626-4157-8EDA-ED78439C20F3}"/>
+                <a16:creationId xmlns:a16="http://schemas.microsoft.com/office/drawing/2014/main" id="{BCF05DD3-D8E9-4793-9744-7A349721D016}"/>
               </a:ext>
             </a:extLst>
           </p:cNvPr>
@@ -3629,7 +4322,7 @@
           <p:cNvPr id="5" name="s12-command-box">
             <a:extLst xmlns:a="http://schemas.openxmlformats.org/drawingml/2006/main">
               <a:ext uri="{FF2B5EF4-FFF2-40B4-BE49-F238E27FC236}">
-                <a16:creationId xmlns:a16="http://schemas.microsoft.com/office/drawing/2014/main" id="{DC1F73E0-4D7C-44FE-9A45-B704A6676613}"/>
+                <a16:creationId xmlns:a16="http://schemas.microsoft.com/office/drawing/2014/main" id="{097218C2-C26A-4587-BB6A-46AD4F82F245}"/>
               </a:ext>
             </a:extLst>
           </p:cNvPr>
@@ -3664,7 +4357,7 @@
           <p:cNvPr id="6" name="s12-command">
             <a:extLst xmlns:a="http://schemas.openxmlformats.org/drawingml/2006/main">
               <a:ext uri="{FF2B5EF4-FFF2-40B4-BE49-F238E27FC236}">
-                <a16:creationId xmlns:a16="http://schemas.microsoft.com/office/drawing/2014/main" id="{65B2533F-9C4A-494D-9DBD-140EE10FC8A2}"/>
+                <a16:creationId xmlns:a16="http://schemas.microsoft.com/office/drawing/2014/main" id="{2992E9B3-BF30-4920-A752-7BB07323FB4F}"/>
               </a:ext>
             </a:extLst>
           </p:cNvPr>
@@ -3710,7 +4403,7 @@
           <p:cNvPr id="7" name="s12-github">
             <a:extLst xmlns:a="http://schemas.openxmlformats.org/drawingml/2006/main">
               <a:ext uri="{FF2B5EF4-FFF2-40B4-BE49-F238E27FC236}">
-                <a16:creationId xmlns:a16="http://schemas.microsoft.com/office/drawing/2014/main" id="{F521EEC5-49AC-45CC-B68F-C0FF22121FD9}"/>
+                <a16:creationId xmlns:a16="http://schemas.microsoft.com/office/drawing/2014/main" id="{558A031B-9900-48FB-9760-7AD6F2000755}"/>
               </a:ext>
             </a:extLst>
           </p:cNvPr>
@@ -3755,7 +4448,7 @@
           <p:cNvPr id="8" name="s12-npm">
             <a:extLst xmlns:a="http://schemas.openxmlformats.org/drawingml/2006/main">
               <a:ext uri="{FF2B5EF4-FFF2-40B4-BE49-F238E27FC236}">
-                <a16:creationId xmlns:a16="http://schemas.microsoft.com/office/drawing/2014/main" id="{7D29EF57-E1BF-46CA-BDB9-5B4686B60861}"/>
+                <a16:creationId xmlns:a16="http://schemas.microsoft.com/office/drawing/2014/main" id="{0CF7AC61-A4CF-4745-91D4-7966C2820B4E}"/>
               </a:ext>
             </a:extLst>
           </p:cNvPr>
@@ -3800,7 +4493,7 @@
           <p:cNvPr id="9" name="s12-d1">
             <a:extLst xmlns:a="http://schemas.openxmlformats.org/drawingml/2006/main">
               <a:ext uri="{FF2B5EF4-FFF2-40B4-BE49-F238E27FC236}">
-                <a16:creationId xmlns:a16="http://schemas.microsoft.com/office/drawing/2014/main" id="{E3821C63-1D46-4C97-9235-FC37B6015BB4}"/>
+                <a16:creationId xmlns:a16="http://schemas.microsoft.com/office/drawing/2014/main" id="{9B5EE6F1-CCBF-475E-A0E5-14B67582C87C}"/>
               </a:ext>
             </a:extLst>
           </p:cNvPr>
@@ -3833,7 +4526,7 @@
           <p:cNvPr id="10" name="s12-l1">
             <a:extLst xmlns:a="http://schemas.openxmlformats.org/drawingml/2006/main">
               <a:ext uri="{FF2B5EF4-FFF2-40B4-BE49-F238E27FC236}">
-                <a16:creationId xmlns:a16="http://schemas.microsoft.com/office/drawing/2014/main" id="{3DEA0273-53FE-4EA4-AA17-2313FA552EF3}"/>
+                <a16:creationId xmlns:a16="http://schemas.microsoft.com/office/drawing/2014/main" id="{6D5B43AA-3E54-4058-A4B2-FBFDF4C97200}"/>
               </a:ext>
             </a:extLst>
           </p:cNvPr>
@@ -3878,7 +4571,7 @@
           <p:cNvPr id="11" name="s12-d2">
             <a:extLst xmlns:a="http://schemas.openxmlformats.org/drawingml/2006/main">
               <a:ext uri="{FF2B5EF4-FFF2-40B4-BE49-F238E27FC236}">
-                <a16:creationId xmlns:a16="http://schemas.microsoft.com/office/drawing/2014/main" id="{86A66D9A-1E8F-46B3-956D-2FCA9B2ECDFA}"/>
+                <a16:creationId xmlns:a16="http://schemas.microsoft.com/office/drawing/2014/main" id="{F54A7C9C-4A9A-4AFA-952F-8B575A014344}"/>
               </a:ext>
             </a:extLst>
           </p:cNvPr>
@@ -3911,7 +4604,7 @@
           <p:cNvPr id="12" name="s12-l2">
             <a:extLst xmlns:a="http://schemas.openxmlformats.org/drawingml/2006/main">
               <a:ext uri="{FF2B5EF4-FFF2-40B4-BE49-F238E27FC236}">
-                <a16:creationId xmlns:a16="http://schemas.microsoft.com/office/drawing/2014/main" id="{C3983E3F-DDF7-4029-95E5-1B927F4245B5}"/>
+                <a16:creationId xmlns:a16="http://schemas.microsoft.com/office/drawing/2014/main" id="{07FA5A71-BB95-413A-8CCC-E2118A448B4D}"/>
               </a:ext>
             </a:extLst>
           </p:cNvPr>
@@ -3956,7 +4649,7 @@
           <p:cNvPr id="13" name="s12-d3">
             <a:extLst xmlns:a="http://schemas.openxmlformats.org/drawingml/2006/main">
               <a:ext uri="{FF2B5EF4-FFF2-40B4-BE49-F238E27FC236}">
-                <a16:creationId xmlns:a16="http://schemas.microsoft.com/office/drawing/2014/main" id="{E5FF976A-7B24-4ADB-88A1-51FDD6D93397}"/>
+                <a16:creationId xmlns:a16="http://schemas.microsoft.com/office/drawing/2014/main" id="{6B6F221D-491B-415F-B82B-B720F3E6209D}"/>
               </a:ext>
             </a:extLst>
           </p:cNvPr>
@@ -3989,7 +4682,7 @@
           <p:cNvPr id="14" name="s12-l3">
             <a:extLst xmlns:a="http://schemas.openxmlformats.org/drawingml/2006/main">
               <a:ext uri="{FF2B5EF4-FFF2-40B4-BE49-F238E27FC236}">
-                <a16:creationId xmlns:a16="http://schemas.microsoft.com/office/drawing/2014/main" id="{CD9E31A7-7D14-40F9-8C63-E99AD288AD8F}"/>
+                <a16:creationId xmlns:a16="http://schemas.microsoft.com/office/drawing/2014/main" id="{2545E7A3-D2E0-47A6-9B2F-0C00E1D914E6}"/>
               </a:ext>
             </a:extLst>
           </p:cNvPr>
@@ -4034,7 +4727,7 @@
           <p:cNvPr id="15" name="s12-platforms">
             <a:extLst xmlns:a="http://schemas.openxmlformats.org/drawingml/2006/main">
               <a:ext uri="{FF2B5EF4-FFF2-40B4-BE49-F238E27FC236}">
-                <a16:creationId xmlns:a16="http://schemas.microsoft.com/office/drawing/2014/main" id="{2C31C7A2-A2EC-4D41-B701-25F4025FF9CD}"/>
+                <a16:creationId xmlns:a16="http://schemas.microsoft.com/office/drawing/2014/main" id="{5287D221-D6C5-4DCC-B34E-80109E0FBF2C}"/>
               </a:ext>
             </a:extLst>
           </p:cNvPr>
@@ -4101,7 +4794,7 @@
           <p:cNvPr id="17" name="footer-source-11">
             <a:extLst xmlns:a="http://schemas.openxmlformats.org/drawingml/2006/main">
               <a:ext uri="{FF2B5EF4-FFF2-40B4-BE49-F238E27FC236}">
-                <a16:creationId xmlns:a16="http://schemas.microsoft.com/office/drawing/2014/main" id="{86484C77-2B95-4BE8-B465-85D1A474700C}"/>
+                <a16:creationId xmlns:a16="http://schemas.microsoft.com/office/drawing/2014/main" id="{B3BDE70C-A8BA-47B2-85D7-A910D54997C7}"/>
               </a:ext>
             </a:extLst>
           </p:cNvPr>
@@ -4146,7 +4839,7 @@
           <p:cNvPr id="18" name="footer-number-11">
             <a:extLst xmlns:a="http://schemas.openxmlformats.org/drawingml/2006/main">
               <a:ext uri="{FF2B5EF4-FFF2-40B4-BE49-F238E27FC236}">
-                <a16:creationId xmlns:a16="http://schemas.microsoft.com/office/drawing/2014/main" id="{C44DB6E7-9ABB-432C-B331-7137F122A0CC}"/>
+                <a16:creationId xmlns:a16="http://schemas.microsoft.com/office/drawing/2014/main" id="{68F24C3D-1298-4B10-8799-BED53CF67A62}"/>
               </a:ext>
             </a:extLst>
           </p:cNvPr>
@@ -4189,7 +4882,7 @@
     </p:spTree>
     <p:extLst>
       <p:ext uri="{BB962C8B-B14F-4D97-AF65-F5344CB8AC3E}">
-        <p14:creationId xmlns:p14="http://schemas.microsoft.com/office/powerpoint/2010/main" val="1596924013"/>
+        <p14:creationId xmlns:p14="http://schemas.microsoft.com/office/powerpoint/2010/main" val="441433314"/>
       </p:ext>
     </p:extLst>
   </p:cSld>
@@ -4220,7 +4913,7 @@
           <p:cNvPr id="33" name="s2-title">
             <a:extLst xmlns:a="http://schemas.openxmlformats.org/drawingml/2006/main">
               <a:ext uri="{FF2B5EF4-FFF2-40B4-BE49-F238E27FC236}">
-                <a16:creationId xmlns:a16="http://schemas.microsoft.com/office/drawing/2014/main" id="{35B3816E-DE17-484A-B619-BAC6F6E3CCEE}"/>
+                <a16:creationId xmlns:a16="http://schemas.microsoft.com/office/drawing/2014/main" id="{25E178D9-9ABF-410E-9156-4553DDC40D98}"/>
               </a:ext>
             </a:extLst>
           </p:cNvPr>
@@ -4265,7 +4958,7 @@
           <p:cNvPr id="2" name="s2-subtitle">
             <a:extLst xmlns:a="http://schemas.openxmlformats.org/drawingml/2006/main">
               <a:ext uri="{FF2B5EF4-FFF2-40B4-BE49-F238E27FC236}">
-                <a16:creationId xmlns:a16="http://schemas.microsoft.com/office/drawing/2014/main" id="{E201C5D7-CA41-48A6-9EF2-213F3194EE54}"/>
+                <a16:creationId xmlns:a16="http://schemas.microsoft.com/office/drawing/2014/main" id="{7AEF0829-C2E0-4AD5-AB02-304A02DA6F2A}"/>
               </a:ext>
             </a:extLst>
           </p:cNvPr>
@@ -4420,7 +5113,7 @@
           <p:cNvPr id="8" name="s2-agent">
             <a:extLst xmlns:a="http://schemas.openxmlformats.org/drawingml/2006/main">
               <a:ext uri="{FF2B5EF4-FFF2-40B4-BE49-F238E27FC236}">
-                <a16:creationId xmlns:a16="http://schemas.microsoft.com/office/drawing/2014/main" id="{EC49FD46-458A-4452-97AE-8C6FCD4A522E}"/>
+                <a16:creationId xmlns:a16="http://schemas.microsoft.com/office/drawing/2014/main" id="{CFE2330A-93C8-4214-8E10-F83293412DFF}"/>
               </a:ext>
             </a:extLst>
           </p:cNvPr>
@@ -4453,7 +5146,7 @@
           <p:cNvPr id="9" name="s2-agent-label">
             <a:extLst xmlns:a="http://schemas.openxmlformats.org/drawingml/2006/main">
               <a:ext uri="{FF2B5EF4-FFF2-40B4-BE49-F238E27FC236}">
-                <a16:creationId xmlns:a16="http://schemas.microsoft.com/office/drawing/2014/main" id="{D21B54D2-03C0-4487-AC51-7A1F5AC69C36}"/>
+                <a16:creationId xmlns:a16="http://schemas.microsoft.com/office/drawing/2014/main" id="{D85C076E-1C3F-4D0D-9F87-3313C5AEAEB1}"/>
               </a:ext>
             </a:extLst>
           </p:cNvPr>
@@ -4498,7 +5191,7 @@
           <p:cNvPr id="10" name="s2-file-a">
             <a:extLst xmlns:a="http://schemas.openxmlformats.org/drawingml/2006/main">
               <a:ext uri="{FF2B5EF4-FFF2-40B4-BE49-F238E27FC236}">
-                <a16:creationId xmlns:a16="http://schemas.microsoft.com/office/drawing/2014/main" id="{191E12C0-ECEA-436C-AA37-7C5BB21D5406}"/>
+                <a16:creationId xmlns:a16="http://schemas.microsoft.com/office/drawing/2014/main" id="{9D396A9D-8121-44DD-B186-4B6D031F44F3}"/>
               </a:ext>
             </a:extLst>
           </p:cNvPr>
@@ -4531,7 +5224,7 @@
           <p:cNvPr id="11" name="s2-file-b">
             <a:extLst xmlns:a="http://schemas.openxmlformats.org/drawingml/2006/main">
               <a:ext uri="{FF2B5EF4-FFF2-40B4-BE49-F238E27FC236}">
-                <a16:creationId xmlns:a16="http://schemas.microsoft.com/office/drawing/2014/main" id="{78939DB2-ABB9-41E3-B795-328339CC9F37}"/>
+                <a16:creationId xmlns:a16="http://schemas.microsoft.com/office/drawing/2014/main" id="{32A3B3B7-355F-4253-8100-7705C10F1444}"/>
               </a:ext>
             </a:extLst>
           </p:cNvPr>
@@ -4564,7 +5257,7 @@
           <p:cNvPr id="12" name="s2-file-c">
             <a:extLst xmlns:a="http://schemas.openxmlformats.org/drawingml/2006/main">
               <a:ext uri="{FF2B5EF4-FFF2-40B4-BE49-F238E27FC236}">
-                <a16:creationId xmlns:a16="http://schemas.microsoft.com/office/drawing/2014/main" id="{C72964A5-4A2F-4ABE-B332-0C26F1E8B17D}"/>
+                <a16:creationId xmlns:a16="http://schemas.microsoft.com/office/drawing/2014/main" id="{42642D98-1C1A-4063-ABA3-C7E642E95638}"/>
               </a:ext>
             </a:extLst>
           </p:cNvPr>
@@ -4597,7 +5290,7 @@
           <p:cNvPr id="13" name="s2-file-d">
             <a:extLst xmlns:a="http://schemas.openxmlformats.org/drawingml/2006/main">
               <a:ext uri="{FF2B5EF4-FFF2-40B4-BE49-F238E27FC236}">
-                <a16:creationId xmlns:a16="http://schemas.microsoft.com/office/drawing/2014/main" id="{436E79D1-2BA5-4836-A849-31213EFAB5DC}"/>
+                <a16:creationId xmlns:a16="http://schemas.microsoft.com/office/drawing/2014/main" id="{65AA9774-2737-4400-8316-537676C20CB1}"/>
               </a:ext>
             </a:extLst>
           </p:cNvPr>
@@ -4630,7 +5323,7 @@
           <p:cNvPr id="14" name="s2-file-e">
             <a:extLst xmlns:a="http://schemas.openxmlformats.org/drawingml/2006/main">
               <a:ext uri="{FF2B5EF4-FFF2-40B4-BE49-F238E27FC236}">
-                <a16:creationId xmlns:a16="http://schemas.microsoft.com/office/drawing/2014/main" id="{ED3E476B-22E2-46D3-83C7-BF2E751D541C}"/>
+                <a16:creationId xmlns:a16="http://schemas.microsoft.com/office/drawing/2014/main" id="{FB0B0872-FCE6-4C0A-A705-2AB2077EA1D8}"/>
               </a:ext>
             </a:extLst>
           </p:cNvPr>
@@ -4663,7 +5356,7 @@
           <p:cNvPr id="15" name="s2-file-a-label">
             <a:extLst xmlns:a="http://schemas.openxmlformats.org/drawingml/2006/main">
               <a:ext uri="{FF2B5EF4-FFF2-40B4-BE49-F238E27FC236}">
-                <a16:creationId xmlns:a16="http://schemas.microsoft.com/office/drawing/2014/main" id="{FA1AF91C-5FA5-4952-B046-3068708947E9}"/>
+                <a16:creationId xmlns:a16="http://schemas.microsoft.com/office/drawing/2014/main" id="{C373EA7C-A1DA-41BE-AC53-4D3895D5A2A7}"/>
               </a:ext>
             </a:extLst>
           </p:cNvPr>
@@ -4708,7 +5401,7 @@
           <p:cNvPr id="16" name="s2-file-b-label">
             <a:extLst xmlns:a="http://schemas.openxmlformats.org/drawingml/2006/main">
               <a:ext uri="{FF2B5EF4-FFF2-40B4-BE49-F238E27FC236}">
-                <a16:creationId xmlns:a16="http://schemas.microsoft.com/office/drawing/2014/main" id="{20988C2F-36C3-4329-A6DC-7F5BE8ABB496}"/>
+                <a16:creationId xmlns:a16="http://schemas.microsoft.com/office/drawing/2014/main" id="{C6EE6B82-B064-4576-9403-FAD4B02565F4}"/>
               </a:ext>
             </a:extLst>
           </p:cNvPr>
@@ -4753,7 +5446,7 @@
           <p:cNvPr id="17" name="s2-file-c-label">
             <a:extLst xmlns:a="http://schemas.openxmlformats.org/drawingml/2006/main">
               <a:ext uri="{FF2B5EF4-FFF2-40B4-BE49-F238E27FC236}">
-                <a16:creationId xmlns:a16="http://schemas.microsoft.com/office/drawing/2014/main" id="{74BED7AE-15E7-4F32-BAD0-46AAFBA7920B}"/>
+                <a16:creationId xmlns:a16="http://schemas.microsoft.com/office/drawing/2014/main" id="{45F0EF4A-03A8-44AD-B902-7476E4FC7CB3}"/>
               </a:ext>
             </a:extLst>
           </p:cNvPr>
@@ -4798,7 +5491,7 @@
           <p:cNvPr id="18" name="s2-file-d-label">
             <a:extLst xmlns:a="http://schemas.openxmlformats.org/drawingml/2006/main">
               <a:ext uri="{FF2B5EF4-FFF2-40B4-BE49-F238E27FC236}">
-                <a16:creationId xmlns:a16="http://schemas.microsoft.com/office/drawing/2014/main" id="{33796E4A-77C5-4C21-832D-60E5AFDDC8F7}"/>
+                <a16:creationId xmlns:a16="http://schemas.microsoft.com/office/drawing/2014/main" id="{D11A7B62-923F-4A48-B97E-74C686E75073}"/>
               </a:ext>
             </a:extLst>
           </p:cNvPr>
@@ -4843,7 +5536,7 @@
           <p:cNvPr id="19" name="s2-file-e-label">
             <a:extLst xmlns:a="http://schemas.openxmlformats.org/drawingml/2006/main">
               <a:ext uri="{FF2B5EF4-FFF2-40B4-BE49-F238E27FC236}">
-                <a16:creationId xmlns:a16="http://schemas.microsoft.com/office/drawing/2014/main" id="{FBF729C5-4D87-4E83-878C-88FBA85F77AB}"/>
+                <a16:creationId xmlns:a16="http://schemas.microsoft.com/office/drawing/2014/main" id="{9393E4CA-00CE-4993-A014-835B62F72435}"/>
               </a:ext>
             </a:extLst>
           </p:cNvPr>
@@ -4888,7 +5581,7 @@
           <p:cNvPr id="20" name="s2-n1">
             <a:extLst xmlns:a="http://schemas.openxmlformats.org/drawingml/2006/main">
               <a:ext uri="{FF2B5EF4-FFF2-40B4-BE49-F238E27FC236}">
-                <a16:creationId xmlns:a16="http://schemas.microsoft.com/office/drawing/2014/main" id="{1112A1BE-4EFB-40E9-9889-73E2BC7B1367}"/>
+                <a16:creationId xmlns:a16="http://schemas.microsoft.com/office/drawing/2014/main" id="{123C2854-97AC-445B-B1FD-5FD5D3C57380}"/>
               </a:ext>
             </a:extLst>
           </p:cNvPr>
@@ -4921,7 +5614,7 @@
           <p:cNvPr id="21" name="s2-n1-label">
             <a:extLst xmlns:a="http://schemas.openxmlformats.org/drawingml/2006/main">
               <a:ext uri="{FF2B5EF4-FFF2-40B4-BE49-F238E27FC236}">
-                <a16:creationId xmlns:a16="http://schemas.microsoft.com/office/drawing/2014/main" id="{29A3DD7A-F53A-40D5-B021-5A2A1A41709F}"/>
+                <a16:creationId xmlns:a16="http://schemas.microsoft.com/office/drawing/2014/main" id="{6E641E3C-27E5-4992-AF15-D92B6F41020D}"/>
               </a:ext>
             </a:extLst>
           </p:cNvPr>
@@ -4966,7 +5659,7 @@
           <p:cNvPr id="22" name="s2-p1">
             <a:extLst xmlns:a="http://schemas.openxmlformats.org/drawingml/2006/main">
               <a:ext uri="{FF2B5EF4-FFF2-40B4-BE49-F238E27FC236}">
-                <a16:creationId xmlns:a16="http://schemas.microsoft.com/office/drawing/2014/main" id="{BC7C5369-4341-4D53-B52E-D04C1008EC16}"/>
+                <a16:creationId xmlns:a16="http://schemas.microsoft.com/office/drawing/2014/main" id="{B55BEEAB-DE28-49F7-94DF-1B8F53FC06C6}"/>
               </a:ext>
             </a:extLst>
           </p:cNvPr>
@@ -5011,7 +5704,7 @@
           <p:cNvPr id="23" name="s2-n2">
             <a:extLst xmlns:a="http://schemas.openxmlformats.org/drawingml/2006/main">
               <a:ext uri="{FF2B5EF4-FFF2-40B4-BE49-F238E27FC236}">
-                <a16:creationId xmlns:a16="http://schemas.microsoft.com/office/drawing/2014/main" id="{D848D2B6-0E31-4622-83C2-F8AC9C07C840}"/>
+                <a16:creationId xmlns:a16="http://schemas.microsoft.com/office/drawing/2014/main" id="{A42192BF-4E07-4BAB-BDFD-3004DFAECA9B}"/>
               </a:ext>
             </a:extLst>
           </p:cNvPr>
@@ -5044,7 +5737,7 @@
           <p:cNvPr id="24" name="s2-n2-label">
             <a:extLst xmlns:a="http://schemas.openxmlformats.org/drawingml/2006/main">
               <a:ext uri="{FF2B5EF4-FFF2-40B4-BE49-F238E27FC236}">
-                <a16:creationId xmlns:a16="http://schemas.microsoft.com/office/drawing/2014/main" id="{790C64FA-3C6A-420D-8E3B-A1D8256A4F14}"/>
+                <a16:creationId xmlns:a16="http://schemas.microsoft.com/office/drawing/2014/main" id="{8E82ACAA-9C6A-4E04-8A05-33367E47A85E}"/>
               </a:ext>
             </a:extLst>
           </p:cNvPr>
@@ -5089,7 +5782,7 @@
           <p:cNvPr id="25" name="s2-p2">
             <a:extLst xmlns:a="http://schemas.openxmlformats.org/drawingml/2006/main">
               <a:ext uri="{FF2B5EF4-FFF2-40B4-BE49-F238E27FC236}">
-                <a16:creationId xmlns:a16="http://schemas.microsoft.com/office/drawing/2014/main" id="{3A8410E9-080E-4A26-AB80-478943323148}"/>
+                <a16:creationId xmlns:a16="http://schemas.microsoft.com/office/drawing/2014/main" id="{9A547D21-E7D5-4B40-A234-0630943A8A9D}"/>
               </a:ext>
             </a:extLst>
           </p:cNvPr>
@@ -5134,7 +5827,7 @@
           <p:cNvPr id="26" name="s2-n3">
             <a:extLst xmlns:a="http://schemas.openxmlformats.org/drawingml/2006/main">
               <a:ext uri="{FF2B5EF4-FFF2-40B4-BE49-F238E27FC236}">
-                <a16:creationId xmlns:a16="http://schemas.microsoft.com/office/drawing/2014/main" id="{CFF29AC1-3D11-45BD-A350-5713EF20D776}"/>
+                <a16:creationId xmlns:a16="http://schemas.microsoft.com/office/drawing/2014/main" id="{07A24BA9-EB0D-4BF8-BF2C-4A438CD4CA64}"/>
               </a:ext>
             </a:extLst>
           </p:cNvPr>
@@ -5167,7 +5860,7 @@
           <p:cNvPr id="27" name="s2-n3-label">
             <a:extLst xmlns:a="http://schemas.openxmlformats.org/drawingml/2006/main">
               <a:ext uri="{FF2B5EF4-FFF2-40B4-BE49-F238E27FC236}">
-                <a16:creationId xmlns:a16="http://schemas.microsoft.com/office/drawing/2014/main" id="{CB1C90BC-908A-4565-98A3-D790D29A50A6}"/>
+                <a16:creationId xmlns:a16="http://schemas.microsoft.com/office/drawing/2014/main" id="{0797B00E-5652-4489-B881-19A475FD3646}"/>
               </a:ext>
             </a:extLst>
           </p:cNvPr>
@@ -5212,7 +5905,7 @@
           <p:cNvPr id="28" name="s2-p3">
             <a:extLst xmlns:a="http://schemas.openxmlformats.org/drawingml/2006/main">
               <a:ext uri="{FF2B5EF4-FFF2-40B4-BE49-F238E27FC236}">
-                <a16:creationId xmlns:a16="http://schemas.microsoft.com/office/drawing/2014/main" id="{5307454C-5246-4D0D-AD0F-D2331EE8FA0A}"/>
+                <a16:creationId xmlns:a16="http://schemas.microsoft.com/office/drawing/2014/main" id="{06AA6D80-C090-440C-8494-A62006D390B4}"/>
               </a:ext>
             </a:extLst>
           </p:cNvPr>
@@ -5257,7 +5950,7 @@
           <p:cNvPr id="29" name="s2-takeaway">
             <a:extLst xmlns:a="http://schemas.openxmlformats.org/drawingml/2006/main">
               <a:ext uri="{FF2B5EF4-FFF2-40B4-BE49-F238E27FC236}">
-                <a16:creationId xmlns:a16="http://schemas.microsoft.com/office/drawing/2014/main" id="{E8106B25-830B-4084-BEFD-4426639ED14C}"/>
+                <a16:creationId xmlns:a16="http://schemas.microsoft.com/office/drawing/2014/main" id="{F69A922E-F42F-43D4-9318-669EB2EA0D68}"/>
               </a:ext>
             </a:extLst>
           </p:cNvPr>
@@ -5324,7 +6017,7 @@
           <p:cNvPr id="31" name="footer-source-2">
             <a:extLst xmlns:a="http://schemas.openxmlformats.org/drawingml/2006/main">
               <a:ext uri="{FF2B5EF4-FFF2-40B4-BE49-F238E27FC236}">
-                <a16:creationId xmlns:a16="http://schemas.microsoft.com/office/drawing/2014/main" id="{81FE535E-C730-482D-A0E1-D0B9B0AB0CFF}"/>
+                <a16:creationId xmlns:a16="http://schemas.microsoft.com/office/drawing/2014/main" id="{B04ED487-DBEB-4148-92EB-75AB956C8B5C}"/>
               </a:ext>
             </a:extLst>
           </p:cNvPr>
@@ -5369,7 +6062,7 @@
           <p:cNvPr id="32" name="footer-number-2">
             <a:extLst xmlns:a="http://schemas.openxmlformats.org/drawingml/2006/main">
               <a:ext uri="{FF2B5EF4-FFF2-40B4-BE49-F238E27FC236}">
-                <a16:creationId xmlns:a16="http://schemas.microsoft.com/office/drawing/2014/main" id="{8E576607-873C-45CC-950B-952CA54EABCD}"/>
+                <a16:creationId xmlns:a16="http://schemas.microsoft.com/office/drawing/2014/main" id="{73E315C2-57EC-430F-8DA8-A5A8715AA6F0}"/>
               </a:ext>
             </a:extLst>
           </p:cNvPr>
@@ -5412,7 +6105,7 @@
     </p:spTree>
     <p:extLst>
       <p:ext uri="{BB962C8B-B14F-4D97-AF65-F5344CB8AC3E}">
-        <p14:creationId xmlns:p14="http://schemas.microsoft.com/office/powerpoint/2010/main" val="669527695"/>
+        <p14:creationId xmlns:p14="http://schemas.microsoft.com/office/powerpoint/2010/main" val="440693211"/>
       </p:ext>
     </p:extLst>
   </p:cSld>
@@ -5443,7 +6136,7 @@
           <p:cNvPr id="38" name="s3-title">
             <a:extLst xmlns:a="http://schemas.openxmlformats.org/drawingml/2006/main">
               <a:ext uri="{FF2B5EF4-FFF2-40B4-BE49-F238E27FC236}">
-                <a16:creationId xmlns:a16="http://schemas.microsoft.com/office/drawing/2014/main" id="{8E0D4540-FBD5-4E8F-A7FD-4B5F851080FF}"/>
+                <a16:creationId xmlns:a16="http://schemas.microsoft.com/office/drawing/2014/main" id="{6402C13C-B8C6-4497-AEE4-75A0E3BD7D8B}"/>
               </a:ext>
             </a:extLst>
           </p:cNvPr>
@@ -5488,7 +6181,7 @@
           <p:cNvPr id="2" name="s3-subtitle">
             <a:extLst xmlns:a="http://schemas.openxmlformats.org/drawingml/2006/main">
               <a:ext uri="{FF2B5EF4-FFF2-40B4-BE49-F238E27FC236}">
-                <a16:creationId xmlns:a16="http://schemas.microsoft.com/office/drawing/2014/main" id="{AE4B1998-5700-42D0-B701-32A3C153F37F}"/>
+                <a16:creationId xmlns:a16="http://schemas.microsoft.com/office/drawing/2014/main" id="{78D527CC-C3E7-41B9-BD8C-6747987CBBD8}"/>
               </a:ext>
             </a:extLst>
           </p:cNvPr>
@@ -5577,7 +6270,7 @@
           <p:cNvPr id="5" name="s3-address-panel">
             <a:extLst xmlns:a="http://schemas.openxmlformats.org/drawingml/2006/main">
               <a:ext uri="{FF2B5EF4-FFF2-40B4-BE49-F238E27FC236}">
-                <a16:creationId xmlns:a16="http://schemas.microsoft.com/office/drawing/2014/main" id="{388986F0-7528-4AD0-BE15-DAFC2345ABB4}"/>
+                <a16:creationId xmlns:a16="http://schemas.microsoft.com/office/drawing/2014/main" id="{E2738676-5B5D-4474-93FA-8777C4E38697}"/>
               </a:ext>
             </a:extLst>
           </p:cNvPr>
@@ -5656,7 +6349,7 @@
           <p:cNvPr id="8" name="s3-x">
             <a:extLst xmlns:a="http://schemas.openxmlformats.org/drawingml/2006/main">
               <a:ext uri="{FF2B5EF4-FFF2-40B4-BE49-F238E27FC236}">
-                <a16:creationId xmlns:a16="http://schemas.microsoft.com/office/drawing/2014/main" id="{72146B3D-41A2-454A-AA24-FC21C8EEB635}"/>
+                <a16:creationId xmlns:a16="http://schemas.microsoft.com/office/drawing/2014/main" id="{5F431052-B7E0-4F36-9CFB-F013159F1A73}"/>
               </a:ext>
             </a:extLst>
           </p:cNvPr>
@@ -5689,7 +6382,7 @@
           <p:cNvPr id="9" name="s3-x-letter">
             <a:extLst xmlns:a="http://schemas.openxmlformats.org/drawingml/2006/main">
               <a:ext uri="{FF2B5EF4-FFF2-40B4-BE49-F238E27FC236}">
-                <a16:creationId xmlns:a16="http://schemas.microsoft.com/office/drawing/2014/main" id="{45129912-3374-4E41-A75A-E507D9504971}"/>
+                <a16:creationId xmlns:a16="http://schemas.microsoft.com/office/drawing/2014/main" id="{589E2494-6E5A-400A-B96B-F8E0C6FA448E}"/>
               </a:ext>
             </a:extLst>
           </p:cNvPr>
@@ -5734,7 +6427,7 @@
           <p:cNvPr id="10" name="s3-x-label">
             <a:extLst xmlns:a="http://schemas.openxmlformats.org/drawingml/2006/main">
               <a:ext uri="{FF2B5EF4-FFF2-40B4-BE49-F238E27FC236}">
-                <a16:creationId xmlns:a16="http://schemas.microsoft.com/office/drawing/2014/main" id="{E8EC7380-95BA-4606-A16F-B98B58E6811B}"/>
+                <a16:creationId xmlns:a16="http://schemas.microsoft.com/office/drawing/2014/main" id="{07DBCE4C-BA7F-4CEA-ACD3-4BA26FE2654C}"/>
               </a:ext>
             </a:extLst>
           </p:cNvPr>
@@ -5779,7 +6472,7 @@
           <p:cNvPr id="11" name="s3-x-main">
             <a:extLst xmlns:a="http://schemas.openxmlformats.org/drawingml/2006/main">
               <a:ext uri="{FF2B5EF4-FFF2-40B4-BE49-F238E27FC236}">
-                <a16:creationId xmlns:a16="http://schemas.microsoft.com/office/drawing/2014/main" id="{A3D1BBE5-13FA-42AC-B702-26A3C987B6BB}"/>
+                <a16:creationId xmlns:a16="http://schemas.microsoft.com/office/drawing/2014/main" id="{6DB0C774-09CC-4317-88C3-5676B2AA3BCA}"/>
               </a:ext>
             </a:extLst>
           </p:cNvPr>
@@ -5824,7 +6517,7 @@
           <p:cNvPr id="12" name="s3-x-question">
             <a:extLst xmlns:a="http://schemas.openxmlformats.org/drawingml/2006/main">
               <a:ext uri="{FF2B5EF4-FFF2-40B4-BE49-F238E27FC236}">
-                <a16:creationId xmlns:a16="http://schemas.microsoft.com/office/drawing/2014/main" id="{B71E9F80-39E2-4622-8D3D-7CDC5DEA945E}"/>
+                <a16:creationId xmlns:a16="http://schemas.microsoft.com/office/drawing/2014/main" id="{A8B775FA-FE72-42AD-92E0-8F0236599678}"/>
               </a:ext>
             </a:extLst>
           </p:cNvPr>
@@ -5869,7 +6562,7 @@
           <p:cNvPr id="13" name="s3-y">
             <a:extLst xmlns:a="http://schemas.openxmlformats.org/drawingml/2006/main">
               <a:ext uri="{FF2B5EF4-FFF2-40B4-BE49-F238E27FC236}">
-                <a16:creationId xmlns:a16="http://schemas.microsoft.com/office/drawing/2014/main" id="{EF667AED-7F0A-4F49-A9AE-2D00DF607B51}"/>
+                <a16:creationId xmlns:a16="http://schemas.microsoft.com/office/drawing/2014/main" id="{EA9BF2DE-C57B-4C82-B75C-BC5196D55EA9}"/>
               </a:ext>
             </a:extLst>
           </p:cNvPr>
@@ -5902,7 +6595,7 @@
           <p:cNvPr id="14" name="s3-y-letter">
             <a:extLst xmlns:a="http://schemas.openxmlformats.org/drawingml/2006/main">
               <a:ext uri="{FF2B5EF4-FFF2-40B4-BE49-F238E27FC236}">
-                <a16:creationId xmlns:a16="http://schemas.microsoft.com/office/drawing/2014/main" id="{84DEB8D7-954A-4FFE-8D0B-D8A7A30C97C9}"/>
+                <a16:creationId xmlns:a16="http://schemas.microsoft.com/office/drawing/2014/main" id="{2A3F9A49-BC71-4C97-83E6-BE6A8A1B81CE}"/>
               </a:ext>
             </a:extLst>
           </p:cNvPr>
@@ -5947,7 +6640,7 @@
           <p:cNvPr id="15" name="s3-y-label">
             <a:extLst xmlns:a="http://schemas.openxmlformats.org/drawingml/2006/main">
               <a:ext uri="{FF2B5EF4-FFF2-40B4-BE49-F238E27FC236}">
-                <a16:creationId xmlns:a16="http://schemas.microsoft.com/office/drawing/2014/main" id="{AA9B8DFA-58AD-41A4-AE61-F3F68AB10BEB}"/>
+                <a16:creationId xmlns:a16="http://schemas.microsoft.com/office/drawing/2014/main" id="{A5C4D952-D17C-4CF8-99FD-F89543984CE4}"/>
               </a:ext>
             </a:extLst>
           </p:cNvPr>
@@ -5992,7 +6685,7 @@
           <p:cNvPr id="16" name="s3-y-main">
             <a:extLst xmlns:a="http://schemas.openxmlformats.org/drawingml/2006/main">
               <a:ext uri="{FF2B5EF4-FFF2-40B4-BE49-F238E27FC236}">
-                <a16:creationId xmlns:a16="http://schemas.microsoft.com/office/drawing/2014/main" id="{99FBF4D7-AE7E-48CC-B056-F22307569E59}"/>
+                <a16:creationId xmlns:a16="http://schemas.microsoft.com/office/drawing/2014/main" id="{5CEFC791-D313-47A8-9EBD-91E4AAC4AEA3}"/>
               </a:ext>
             </a:extLst>
           </p:cNvPr>
@@ -6037,7 +6730,7 @@
           <p:cNvPr id="17" name="s3-y-question">
             <a:extLst xmlns:a="http://schemas.openxmlformats.org/drawingml/2006/main">
               <a:ext uri="{FF2B5EF4-FFF2-40B4-BE49-F238E27FC236}">
-                <a16:creationId xmlns:a16="http://schemas.microsoft.com/office/drawing/2014/main" id="{C8B23671-65DF-4444-93F2-CD292754FBC2}"/>
+                <a16:creationId xmlns:a16="http://schemas.microsoft.com/office/drawing/2014/main" id="{353AAE18-7E44-413B-ACEA-A45ECA7E2D84}"/>
               </a:ext>
             </a:extLst>
           </p:cNvPr>
@@ -6082,7 +6775,7 @@
           <p:cNvPr id="18" name="s3-z">
             <a:extLst xmlns:a="http://schemas.openxmlformats.org/drawingml/2006/main">
               <a:ext uri="{FF2B5EF4-FFF2-40B4-BE49-F238E27FC236}">
-                <a16:creationId xmlns:a16="http://schemas.microsoft.com/office/drawing/2014/main" id="{0A329F77-8FE5-43E9-9415-9EAAA1B3A473}"/>
+                <a16:creationId xmlns:a16="http://schemas.microsoft.com/office/drawing/2014/main" id="{2F155500-BC09-472F-B41C-001AE4696062}"/>
               </a:ext>
             </a:extLst>
           </p:cNvPr>
@@ -6115,7 +6808,7 @@
           <p:cNvPr id="19" name="s3-z-letter">
             <a:extLst xmlns:a="http://schemas.openxmlformats.org/drawingml/2006/main">
               <a:ext uri="{FF2B5EF4-FFF2-40B4-BE49-F238E27FC236}">
-                <a16:creationId xmlns:a16="http://schemas.microsoft.com/office/drawing/2014/main" id="{07351311-0120-48A1-A8BC-24D62004E43A}"/>
+                <a16:creationId xmlns:a16="http://schemas.microsoft.com/office/drawing/2014/main" id="{62ABCA8B-A29E-45F4-A2DB-3B4C7F70705A}"/>
               </a:ext>
             </a:extLst>
           </p:cNvPr>
@@ -6160,7 +6853,7 @@
           <p:cNvPr id="20" name="s3-z-label">
             <a:extLst xmlns:a="http://schemas.openxmlformats.org/drawingml/2006/main">
               <a:ext uri="{FF2B5EF4-FFF2-40B4-BE49-F238E27FC236}">
-                <a16:creationId xmlns:a16="http://schemas.microsoft.com/office/drawing/2014/main" id="{F6B4B2D7-A197-4796-9422-B490431B7037}"/>
+                <a16:creationId xmlns:a16="http://schemas.microsoft.com/office/drawing/2014/main" id="{89D09B9B-4236-4BCD-88CF-5D0EABBBF0EF}"/>
               </a:ext>
             </a:extLst>
           </p:cNvPr>
@@ -6205,7 +6898,7 @@
           <p:cNvPr id="21" name="s3-z-main">
             <a:extLst xmlns:a="http://schemas.openxmlformats.org/drawingml/2006/main">
               <a:ext uri="{FF2B5EF4-FFF2-40B4-BE49-F238E27FC236}">
-                <a16:creationId xmlns:a16="http://schemas.microsoft.com/office/drawing/2014/main" id="{9D30B6BC-CC75-4421-B4C7-51A6C724EDD5}"/>
+                <a16:creationId xmlns:a16="http://schemas.microsoft.com/office/drawing/2014/main" id="{AE29F668-7461-4F40-AF41-41BB653B81A2}"/>
               </a:ext>
             </a:extLst>
           </p:cNvPr>
@@ -6250,7 +6943,7 @@
           <p:cNvPr id="22" name="s3-z-question">
             <a:extLst xmlns:a="http://schemas.openxmlformats.org/drawingml/2006/main">
               <a:ext uri="{FF2B5EF4-FFF2-40B4-BE49-F238E27FC236}">
-                <a16:creationId xmlns:a16="http://schemas.microsoft.com/office/drawing/2014/main" id="{61B9903A-76B7-4077-B6FA-BE632692CC84}"/>
+                <a16:creationId xmlns:a16="http://schemas.microsoft.com/office/drawing/2014/main" id="{41992AA5-71EB-4FD4-BE88-8FE69356C600}"/>
               </a:ext>
             </a:extLst>
           </p:cNvPr>
@@ -6295,7 +6988,7 @@
           <p:cNvPr id="23" name="s3-address-label">
             <a:extLst xmlns:a="http://schemas.openxmlformats.org/drawingml/2006/main">
               <a:ext uri="{FF2B5EF4-FFF2-40B4-BE49-F238E27FC236}">
-                <a16:creationId xmlns:a16="http://schemas.microsoft.com/office/drawing/2014/main" id="{F2866DF9-FE2B-4D25-82E7-0F54795CDCEE}"/>
+                <a16:creationId xmlns:a16="http://schemas.microsoft.com/office/drawing/2014/main" id="{EE530103-ED72-41AA-B3D6-B88551387D7B}"/>
               </a:ext>
             </a:extLst>
           </p:cNvPr>
@@ -6340,7 +7033,7 @@
           <p:cNvPr id="24" name="s3-address-x">
             <a:extLst xmlns:a="http://schemas.openxmlformats.org/drawingml/2006/main">
               <a:ext uri="{FF2B5EF4-FFF2-40B4-BE49-F238E27FC236}">
-                <a16:creationId xmlns:a16="http://schemas.microsoft.com/office/drawing/2014/main" id="{116B2967-968B-4881-8BC6-19368E65D70D}"/>
+                <a16:creationId xmlns:a16="http://schemas.microsoft.com/office/drawing/2014/main" id="{7DACDCF1-00A4-4A0A-A68E-DFA5959ACB6E}"/>
               </a:ext>
             </a:extLst>
           </p:cNvPr>
@@ -6385,7 +7078,7 @@
           <p:cNvPr id="25" name="s3-address-x-value">
             <a:extLst xmlns:a="http://schemas.openxmlformats.org/drawingml/2006/main">
               <a:ext uri="{FF2B5EF4-FFF2-40B4-BE49-F238E27FC236}">
-                <a16:creationId xmlns:a16="http://schemas.microsoft.com/office/drawing/2014/main" id="{9ED571B3-8206-49D2-A552-E5BC7179BACE}"/>
+                <a16:creationId xmlns:a16="http://schemas.microsoft.com/office/drawing/2014/main" id="{B39937E0-2284-4873-B0ED-DDD7410AD51D}"/>
               </a:ext>
             </a:extLst>
           </p:cNvPr>
@@ -6430,7 +7123,7 @@
           <p:cNvPr id="26" name="s3-address-y">
             <a:extLst xmlns:a="http://schemas.openxmlformats.org/drawingml/2006/main">
               <a:ext uri="{FF2B5EF4-FFF2-40B4-BE49-F238E27FC236}">
-                <a16:creationId xmlns:a16="http://schemas.microsoft.com/office/drawing/2014/main" id="{78275B71-1407-4E06-9BC7-5A575CFE1C8D}"/>
+                <a16:creationId xmlns:a16="http://schemas.microsoft.com/office/drawing/2014/main" id="{9DFE95F6-9681-42E5-9AEB-B76DF7916917}"/>
               </a:ext>
             </a:extLst>
           </p:cNvPr>
@@ -6475,7 +7168,7 @@
           <p:cNvPr id="27" name="s3-address-y-value">
             <a:extLst xmlns:a="http://schemas.openxmlformats.org/drawingml/2006/main">
               <a:ext uri="{FF2B5EF4-FFF2-40B4-BE49-F238E27FC236}">
-                <a16:creationId xmlns:a16="http://schemas.microsoft.com/office/drawing/2014/main" id="{BB061B7B-5D2F-46A1-B639-537A056AE95C}"/>
+                <a16:creationId xmlns:a16="http://schemas.microsoft.com/office/drawing/2014/main" id="{FFFE90DB-7582-4CA9-9F4B-63002A7589B4}"/>
               </a:ext>
             </a:extLst>
           </p:cNvPr>
@@ -6520,7 +7213,7 @@
           <p:cNvPr id="28" name="s3-address-z">
             <a:extLst xmlns:a="http://schemas.openxmlformats.org/drawingml/2006/main">
               <a:ext uri="{FF2B5EF4-FFF2-40B4-BE49-F238E27FC236}">
-                <a16:creationId xmlns:a16="http://schemas.microsoft.com/office/drawing/2014/main" id="{76FFA276-98AE-40E6-9453-88188D84C3A3}"/>
+                <a16:creationId xmlns:a16="http://schemas.microsoft.com/office/drawing/2014/main" id="{E00AE49E-1B1B-4484-A814-E7A7187689E3}"/>
               </a:ext>
             </a:extLst>
           </p:cNvPr>
@@ -6565,7 +7258,7 @@
           <p:cNvPr id="29" name="s3-address-z-value">
             <a:extLst xmlns:a="http://schemas.openxmlformats.org/drawingml/2006/main">
               <a:ext uri="{FF2B5EF4-FFF2-40B4-BE49-F238E27FC236}">
-                <a16:creationId xmlns:a16="http://schemas.microsoft.com/office/drawing/2014/main" id="{59EF25E2-62C8-4AA7-B084-49AE3D28BED6}"/>
+                <a16:creationId xmlns:a16="http://schemas.microsoft.com/office/drawing/2014/main" id="{14146E2B-F108-4D6F-96ED-EB3C22869828}"/>
               </a:ext>
             </a:extLst>
           </p:cNvPr>
@@ -6610,7 +7303,7 @@
           <p:cNvPr id="30" name="s3-address-note">
             <a:extLst xmlns:a="http://schemas.openxmlformats.org/drawingml/2006/main">
               <a:ext uri="{FF2B5EF4-FFF2-40B4-BE49-F238E27FC236}">
-                <a16:creationId xmlns:a16="http://schemas.microsoft.com/office/drawing/2014/main" id="{EF4BE541-E6C0-4C8E-8E09-D9CAD2378ADF}"/>
+                <a16:creationId xmlns:a16="http://schemas.microsoft.com/office/drawing/2014/main" id="{D4EA7E03-E6CA-4BAB-9734-7EF2BA43DDF6}"/>
               </a:ext>
             </a:extLst>
           </p:cNvPr>
@@ -6655,7 +7348,7 @@
           <p:cNvPr id="31" name="s3-route-label">
             <a:extLst xmlns:a="http://schemas.openxmlformats.org/drawingml/2006/main">
               <a:ext uri="{FF2B5EF4-FFF2-40B4-BE49-F238E27FC236}">
-                <a16:creationId xmlns:a16="http://schemas.microsoft.com/office/drawing/2014/main" id="{EEA92D09-5F0B-4D16-9D74-613C3B009577}"/>
+                <a16:creationId xmlns:a16="http://schemas.microsoft.com/office/drawing/2014/main" id="{E86A8FED-9CAF-4461-B7B3-F7E12C6E347D}"/>
               </a:ext>
             </a:extLst>
           </p:cNvPr>
@@ -6700,7 +7393,7 @@
           <p:cNvPr id="32" name="s3-route-main">
             <a:extLst xmlns:a="http://schemas.openxmlformats.org/drawingml/2006/main">
               <a:ext uri="{FF2B5EF4-FFF2-40B4-BE49-F238E27FC236}">
-                <a16:creationId xmlns:a16="http://schemas.microsoft.com/office/drawing/2014/main" id="{583323DC-18A4-47EB-83E1-A5226FE26A09}"/>
+                <a16:creationId xmlns:a16="http://schemas.microsoft.com/office/drawing/2014/main" id="{5B1577CC-1696-4D64-923C-7F16AFDAF99E}"/>
               </a:ext>
             </a:extLst>
           </p:cNvPr>
@@ -6745,7 +7438,7 @@
           <p:cNvPr id="33" name="s3-memory-label">
             <a:extLst xmlns:a="http://schemas.openxmlformats.org/drawingml/2006/main">
               <a:ext uri="{FF2B5EF4-FFF2-40B4-BE49-F238E27FC236}">
-                <a16:creationId xmlns:a16="http://schemas.microsoft.com/office/drawing/2014/main" id="{CB76B547-C841-46CD-BC14-AEAC6BEE7009}"/>
+                <a16:creationId xmlns:a16="http://schemas.microsoft.com/office/drawing/2014/main" id="{375F7F00-DB2A-429F-A60D-B9DFCE606582}"/>
               </a:ext>
             </a:extLst>
           </p:cNvPr>
@@ -6790,7 +7483,7 @@
           <p:cNvPr id="34" name="s3-memory-main">
             <a:extLst xmlns:a="http://schemas.openxmlformats.org/drawingml/2006/main">
               <a:ext uri="{FF2B5EF4-FFF2-40B4-BE49-F238E27FC236}">
-                <a16:creationId xmlns:a16="http://schemas.microsoft.com/office/drawing/2014/main" id="{01B28B30-8FBE-4E31-84E7-A080F2B77CF2}"/>
+                <a16:creationId xmlns:a16="http://schemas.microsoft.com/office/drawing/2014/main" id="{5F81F5F1-6F23-4DAF-A6EA-96BB6DDA04EE}"/>
               </a:ext>
             </a:extLst>
           </p:cNvPr>
@@ -6857,7 +7550,7 @@
           <p:cNvPr id="36" name="footer-source-3">
             <a:extLst xmlns:a="http://schemas.openxmlformats.org/drawingml/2006/main">
               <a:ext uri="{FF2B5EF4-FFF2-40B4-BE49-F238E27FC236}">
-                <a16:creationId xmlns:a16="http://schemas.microsoft.com/office/drawing/2014/main" id="{57C6703A-8E6F-493C-A3F0-151067FECDFB}"/>
+                <a16:creationId xmlns:a16="http://schemas.microsoft.com/office/drawing/2014/main" id="{871D94E9-00B7-4681-A530-D2D6D8A7AC7C}"/>
               </a:ext>
             </a:extLst>
           </p:cNvPr>
@@ -6902,7 +7595,7 @@
           <p:cNvPr id="37" name="footer-number-3">
             <a:extLst xmlns:a="http://schemas.openxmlformats.org/drawingml/2006/main">
               <a:ext uri="{FF2B5EF4-FFF2-40B4-BE49-F238E27FC236}">
-                <a16:creationId xmlns:a16="http://schemas.microsoft.com/office/drawing/2014/main" id="{D3699DAE-C698-4381-A6C5-9282938D86E1}"/>
+                <a16:creationId xmlns:a16="http://schemas.microsoft.com/office/drawing/2014/main" id="{1790406D-1E86-4B01-A584-CCC7938D7156}"/>
               </a:ext>
             </a:extLst>
           </p:cNvPr>
@@ -6945,7 +7638,7 @@
     </p:spTree>
     <p:extLst>
       <p:ext uri="{BB962C8B-B14F-4D97-AF65-F5344CB8AC3E}">
-        <p14:creationId xmlns:p14="http://schemas.microsoft.com/office/powerpoint/2010/main" val="90408161"/>
+        <p14:creationId xmlns:p14="http://schemas.microsoft.com/office/powerpoint/2010/main" val="1168880103"/>
       </p:ext>
     </p:extLst>
   </p:cSld>
@@ -6976,7 +7669,7 @@
           <p:cNvPr id="26" name="s4-title">
             <a:extLst xmlns:a="http://schemas.openxmlformats.org/drawingml/2006/main">
               <a:ext uri="{FF2B5EF4-FFF2-40B4-BE49-F238E27FC236}">
-                <a16:creationId xmlns:a16="http://schemas.microsoft.com/office/drawing/2014/main" id="{0CA9A4B9-912A-4374-A6F5-CB6BBBF45970}"/>
+                <a16:creationId xmlns:a16="http://schemas.microsoft.com/office/drawing/2014/main" id="{0F156744-E984-45F8-B144-F88BAC49019E}"/>
               </a:ext>
             </a:extLst>
           </p:cNvPr>
@@ -7021,7 +7714,7 @@
           <p:cNvPr id="2" name="s4-subtitle">
             <a:extLst xmlns:a="http://schemas.openxmlformats.org/drawingml/2006/main">
               <a:ext uri="{FF2B5EF4-FFF2-40B4-BE49-F238E27FC236}">
-                <a16:creationId xmlns:a16="http://schemas.microsoft.com/office/drawing/2014/main" id="{974007AA-1ABC-410B-8FBC-1BD2DB2397F9}"/>
+                <a16:creationId xmlns:a16="http://schemas.microsoft.com/office/drawing/2014/main" id="{8176583E-D965-429E-8F26-10CF508B0EF8}"/>
               </a:ext>
             </a:extLst>
           </p:cNvPr>
@@ -7066,7 +7759,7 @@
           <p:cNvPr id="3" name="s4-terminal">
             <a:extLst xmlns:a="http://schemas.openxmlformats.org/drawingml/2006/main">
               <a:ext uri="{FF2B5EF4-FFF2-40B4-BE49-F238E27FC236}">
-                <a16:creationId xmlns:a16="http://schemas.microsoft.com/office/drawing/2014/main" id="{91C9A492-56BA-4EA2-90C5-3619AA1C2654}"/>
+                <a16:creationId xmlns:a16="http://schemas.microsoft.com/office/drawing/2014/main" id="{05B09A9E-0761-43A9-B1C2-0F5D6E97F0C4}"/>
               </a:ext>
             </a:extLst>
           </p:cNvPr>
@@ -7123,7 +7816,7 @@
           <p:cNvPr id="5" name="s4-dot1">
             <a:extLst xmlns:a="http://schemas.openxmlformats.org/drawingml/2006/main">
               <a:ext uri="{FF2B5EF4-FFF2-40B4-BE49-F238E27FC236}">
-                <a16:creationId xmlns:a16="http://schemas.microsoft.com/office/drawing/2014/main" id="{1B1D2CFB-99C2-4B8F-9BBB-2F5FC046AECD}"/>
+                <a16:creationId xmlns:a16="http://schemas.microsoft.com/office/drawing/2014/main" id="{C408DDB0-18A2-4D97-BCFD-106A931452A7}"/>
               </a:ext>
             </a:extLst>
           </p:cNvPr>
@@ -7156,7 +7849,7 @@
           <p:cNvPr id="6" name="s4-dot2">
             <a:extLst xmlns:a="http://schemas.openxmlformats.org/drawingml/2006/main">
               <a:ext uri="{FF2B5EF4-FFF2-40B4-BE49-F238E27FC236}">
-                <a16:creationId xmlns:a16="http://schemas.microsoft.com/office/drawing/2014/main" id="{3C929D9F-1548-477E-8321-A606D8951E46}"/>
+                <a16:creationId xmlns:a16="http://schemas.microsoft.com/office/drawing/2014/main" id="{AEEC7497-D97D-4C33-9B1E-E4E401D673F1}"/>
               </a:ext>
             </a:extLst>
           </p:cNvPr>
@@ -7189,7 +7882,7 @@
           <p:cNvPr id="7" name="s4-dot3">
             <a:extLst xmlns:a="http://schemas.openxmlformats.org/drawingml/2006/main">
               <a:ext uri="{FF2B5EF4-FFF2-40B4-BE49-F238E27FC236}">
-                <a16:creationId xmlns:a16="http://schemas.microsoft.com/office/drawing/2014/main" id="{C1C610DC-3F19-49CB-A5CB-9CFEB2D0BC5F}"/>
+                <a16:creationId xmlns:a16="http://schemas.microsoft.com/office/drawing/2014/main" id="{9AF29196-2BE8-4A2E-A37A-69C7B8018BD7}"/>
               </a:ext>
             </a:extLst>
           </p:cNvPr>
@@ -7222,7 +7915,7 @@
           <p:cNvPr id="8" name="s4-command-label">
             <a:extLst xmlns:a="http://schemas.openxmlformats.org/drawingml/2006/main">
               <a:ext uri="{FF2B5EF4-FFF2-40B4-BE49-F238E27FC236}">
-                <a16:creationId xmlns:a16="http://schemas.microsoft.com/office/drawing/2014/main" id="{EB9635B4-5B0B-4400-8635-4DEC47574CA9}"/>
+                <a16:creationId xmlns:a16="http://schemas.microsoft.com/office/drawing/2014/main" id="{67ADEA78-5DD0-4EA4-BDD1-1E7906FFBCDB}"/>
               </a:ext>
             </a:extLst>
           </p:cNvPr>
@@ -7267,7 +7960,7 @@
           <p:cNvPr id="9" name="s4-command">
             <a:extLst xmlns:a="http://schemas.openxmlformats.org/drawingml/2006/main">
               <a:ext uri="{FF2B5EF4-FFF2-40B4-BE49-F238E27FC236}">
-                <a16:creationId xmlns:a16="http://schemas.microsoft.com/office/drawing/2014/main" id="{718E0A2A-48E6-4BA3-8995-3C5C9965977A}"/>
+                <a16:creationId xmlns:a16="http://schemas.microsoft.com/office/drawing/2014/main" id="{542D7585-47CC-4F26-80DD-A37201EC6181}"/>
               </a:ext>
             </a:extLst>
           </p:cNvPr>
@@ -7316,7 +8009,7 @@
           <p:cNvPr id="10" name="s4-command-note">
             <a:extLst xmlns:a="http://schemas.openxmlformats.org/drawingml/2006/main">
               <a:ext uri="{FF2B5EF4-FFF2-40B4-BE49-F238E27FC236}">
-                <a16:creationId xmlns:a16="http://schemas.microsoft.com/office/drawing/2014/main" id="{4A41D02D-4DC9-4CFD-974C-298444F12F3F}"/>
+                <a16:creationId xmlns:a16="http://schemas.microsoft.com/office/drawing/2014/main" id="{8931EB83-2C59-4F42-BD25-73A5C94E0461}"/>
               </a:ext>
             </a:extLst>
           </p:cNvPr>
@@ -7361,7 +8054,7 @@
           <p:cNvPr id="11" name="s4-output-label">
             <a:extLst xmlns:a="http://schemas.openxmlformats.org/drawingml/2006/main">
               <a:ext uri="{FF2B5EF4-FFF2-40B4-BE49-F238E27FC236}">
-                <a16:creationId xmlns:a16="http://schemas.microsoft.com/office/drawing/2014/main" id="{99F7AD12-735A-4645-9267-09BEFCA8DF36}"/>
+                <a16:creationId xmlns:a16="http://schemas.microsoft.com/office/drawing/2014/main" id="{D0EEB57A-D3C9-45D6-9B8C-326D49F1AE9C}"/>
               </a:ext>
             </a:extLst>
           </p:cNvPr>
@@ -7406,7 +8099,7 @@
           <p:cNvPr id="12" name="s4-o1a">
             <a:extLst xmlns:a="http://schemas.openxmlformats.org/drawingml/2006/main">
               <a:ext uri="{FF2B5EF4-FFF2-40B4-BE49-F238E27FC236}">
-                <a16:creationId xmlns:a16="http://schemas.microsoft.com/office/drawing/2014/main" id="{1385C1D3-E490-43EA-AEA0-7DE9FD1593E1}"/>
+                <a16:creationId xmlns:a16="http://schemas.microsoft.com/office/drawing/2014/main" id="{A916D26D-E6E2-4D99-8551-863FF3788ACA}"/>
               </a:ext>
             </a:extLst>
           </p:cNvPr>
@@ -7451,7 +8144,7 @@
           <p:cNvPr id="13" name="s4-o1b">
             <a:extLst xmlns:a="http://schemas.openxmlformats.org/drawingml/2006/main">
               <a:ext uri="{FF2B5EF4-FFF2-40B4-BE49-F238E27FC236}">
-                <a16:creationId xmlns:a16="http://schemas.microsoft.com/office/drawing/2014/main" id="{85AC47E5-3B3B-41EB-8BC2-5DE44E3A9610}"/>
+                <a16:creationId xmlns:a16="http://schemas.microsoft.com/office/drawing/2014/main" id="{29D10F41-B6B6-40CE-893D-A813ED06542B}"/>
               </a:ext>
             </a:extLst>
           </p:cNvPr>
@@ -7496,7 +8189,7 @@
           <p:cNvPr id="14" name="s4-o2a">
             <a:extLst xmlns:a="http://schemas.openxmlformats.org/drawingml/2006/main">
               <a:ext uri="{FF2B5EF4-FFF2-40B4-BE49-F238E27FC236}">
-                <a16:creationId xmlns:a16="http://schemas.microsoft.com/office/drawing/2014/main" id="{44BD9DDC-2AA9-43E4-BD6D-98FBBAC3FDED}"/>
+                <a16:creationId xmlns:a16="http://schemas.microsoft.com/office/drawing/2014/main" id="{E4DC2FBE-4051-495B-B9EA-5B896AA673DE}"/>
               </a:ext>
             </a:extLst>
           </p:cNvPr>
@@ -7541,7 +8234,7 @@
           <p:cNvPr id="15" name="s4-o2b">
             <a:extLst xmlns:a="http://schemas.openxmlformats.org/drawingml/2006/main">
               <a:ext uri="{FF2B5EF4-FFF2-40B4-BE49-F238E27FC236}">
-                <a16:creationId xmlns:a16="http://schemas.microsoft.com/office/drawing/2014/main" id="{8A4D0A83-2CB0-4C45-9107-82B8CE8CD8E0}"/>
+                <a16:creationId xmlns:a16="http://schemas.microsoft.com/office/drawing/2014/main" id="{DB3D4021-0020-4C22-9F02-563FCC9A7CFA}"/>
               </a:ext>
             </a:extLst>
           </p:cNvPr>
@@ -7586,7 +8279,7 @@
           <p:cNvPr id="16" name="s4-o3a">
             <a:extLst xmlns:a="http://schemas.openxmlformats.org/drawingml/2006/main">
               <a:ext uri="{FF2B5EF4-FFF2-40B4-BE49-F238E27FC236}">
-                <a16:creationId xmlns:a16="http://schemas.microsoft.com/office/drawing/2014/main" id="{E16EF2AE-E733-407F-88FC-D62EE7F6EB21}"/>
+                <a16:creationId xmlns:a16="http://schemas.microsoft.com/office/drawing/2014/main" id="{8E70176C-66FA-4CFB-8572-ACF4F7EC2CC6}"/>
               </a:ext>
             </a:extLst>
           </p:cNvPr>
@@ -7631,7 +8324,7 @@
           <p:cNvPr id="17" name="s4-o3b">
             <a:extLst xmlns:a="http://schemas.openxmlformats.org/drawingml/2006/main">
               <a:ext uri="{FF2B5EF4-FFF2-40B4-BE49-F238E27FC236}">
-                <a16:creationId xmlns:a16="http://schemas.microsoft.com/office/drawing/2014/main" id="{0C31E9F3-F904-4BD6-89FC-3F40E6744496}"/>
+                <a16:creationId xmlns:a16="http://schemas.microsoft.com/office/drawing/2014/main" id="{0C5F3109-5779-4612-94DA-8FCAC98205AB}"/>
               </a:ext>
             </a:extLst>
           </p:cNvPr>
@@ -7676,7 +8369,7 @@
           <p:cNvPr id="18" name="s4-o4a">
             <a:extLst xmlns:a="http://schemas.openxmlformats.org/drawingml/2006/main">
               <a:ext uri="{FF2B5EF4-FFF2-40B4-BE49-F238E27FC236}">
-                <a16:creationId xmlns:a16="http://schemas.microsoft.com/office/drawing/2014/main" id="{734D0D96-11CC-47A8-96FA-210E0F66263D}"/>
+                <a16:creationId xmlns:a16="http://schemas.microsoft.com/office/drawing/2014/main" id="{A455D853-0557-4C68-8B2D-CBCBFC87CF0D}"/>
               </a:ext>
             </a:extLst>
           </p:cNvPr>
@@ -7721,7 +8414,7 @@
           <p:cNvPr id="19" name="s4-o4b">
             <a:extLst xmlns:a="http://schemas.openxmlformats.org/drawingml/2006/main">
               <a:ext uri="{FF2B5EF4-FFF2-40B4-BE49-F238E27FC236}">
-                <a16:creationId xmlns:a16="http://schemas.microsoft.com/office/drawing/2014/main" id="{29994985-6320-408F-AC1F-C759353A8CFA}"/>
+                <a16:creationId xmlns:a16="http://schemas.microsoft.com/office/drawing/2014/main" id="{9FA0AD0F-0781-438C-BEA0-0AC8ADB78F13}"/>
               </a:ext>
             </a:extLst>
           </p:cNvPr>
@@ -7767,7 +8460,7 @@
           <p:cNvPr id="20" name="s4-o5a">
             <a:extLst xmlns:a="http://schemas.openxmlformats.org/drawingml/2006/main">
               <a:ext uri="{FF2B5EF4-FFF2-40B4-BE49-F238E27FC236}">
-                <a16:creationId xmlns:a16="http://schemas.microsoft.com/office/drawing/2014/main" id="{45D8A118-892D-42D3-B8D4-523258F4034D}"/>
+                <a16:creationId xmlns:a16="http://schemas.microsoft.com/office/drawing/2014/main" id="{8D787DBC-835B-4793-A997-E5A552D4FEC8}"/>
               </a:ext>
             </a:extLst>
           </p:cNvPr>
@@ -7812,7 +8505,7 @@
           <p:cNvPr id="21" name="s4-o5b">
             <a:extLst xmlns:a="http://schemas.openxmlformats.org/drawingml/2006/main">
               <a:ext uri="{FF2B5EF4-FFF2-40B4-BE49-F238E27FC236}">
-                <a16:creationId xmlns:a16="http://schemas.microsoft.com/office/drawing/2014/main" id="{270D17C8-1A63-4673-AD39-F4AE6F4E3869}"/>
+                <a16:creationId xmlns:a16="http://schemas.microsoft.com/office/drawing/2014/main" id="{82F1658C-BCEA-4D1C-AD52-3851E0FF6BEC}"/>
               </a:ext>
             </a:extLst>
           </p:cNvPr>
@@ -7857,7 +8550,7 @@
           <p:cNvPr id="22" name="s4-output-note">
             <a:extLst xmlns:a="http://schemas.openxmlformats.org/drawingml/2006/main">
               <a:ext uri="{FF2B5EF4-FFF2-40B4-BE49-F238E27FC236}">
-                <a16:creationId xmlns:a16="http://schemas.microsoft.com/office/drawing/2014/main" id="{5A824738-1AD0-4517-B049-052F681A2B40}"/>
+                <a16:creationId xmlns:a16="http://schemas.microsoft.com/office/drawing/2014/main" id="{8DBCE6A5-F9A9-43C0-962A-5C4C8096454F}"/>
               </a:ext>
             </a:extLst>
           </p:cNvPr>
@@ -7924,7 +8617,7 @@
           <p:cNvPr id="24" name="footer-source-4">
             <a:extLst xmlns:a="http://schemas.openxmlformats.org/drawingml/2006/main">
               <a:ext uri="{FF2B5EF4-FFF2-40B4-BE49-F238E27FC236}">
-                <a16:creationId xmlns:a16="http://schemas.microsoft.com/office/drawing/2014/main" id="{16F12731-7955-4646-85C7-1CFD67C3DBC3}"/>
+                <a16:creationId xmlns:a16="http://schemas.microsoft.com/office/drawing/2014/main" id="{3FC3B97C-6BFA-40BF-A75D-4513DC5BDCD1}"/>
               </a:ext>
             </a:extLst>
           </p:cNvPr>
@@ -7969,7 +8662,7 @@
           <p:cNvPr id="25" name="footer-number-4">
             <a:extLst xmlns:a="http://schemas.openxmlformats.org/drawingml/2006/main">
               <a:ext uri="{FF2B5EF4-FFF2-40B4-BE49-F238E27FC236}">
-                <a16:creationId xmlns:a16="http://schemas.microsoft.com/office/drawing/2014/main" id="{0FB358B4-BE03-4C81-83C8-92E4882AE7D7}"/>
+                <a16:creationId xmlns:a16="http://schemas.microsoft.com/office/drawing/2014/main" id="{08167C3A-0780-43B6-9765-38FA09E09786}"/>
               </a:ext>
             </a:extLst>
           </p:cNvPr>
@@ -8012,7 +8705,7 @@
     </p:spTree>
     <p:extLst>
       <p:ext uri="{BB962C8B-B14F-4D97-AF65-F5344CB8AC3E}">
-        <p14:creationId xmlns:p14="http://schemas.microsoft.com/office/powerpoint/2010/main" val="382803048"/>
+        <p14:creationId xmlns:p14="http://schemas.microsoft.com/office/powerpoint/2010/main" val="318698649"/>
       </p:ext>
     </p:extLst>
   </p:cSld>
@@ -8043,7 +8736,7 @@
           <p:cNvPr id="17" name="s5-title">
             <a:extLst xmlns:a="http://schemas.openxmlformats.org/drawingml/2006/main">
               <a:ext uri="{FF2B5EF4-FFF2-40B4-BE49-F238E27FC236}">
-                <a16:creationId xmlns:a16="http://schemas.microsoft.com/office/drawing/2014/main" id="{FC90FF64-333B-404C-A899-3D3C9DF0F3A3}"/>
+                <a16:creationId xmlns:a16="http://schemas.microsoft.com/office/drawing/2014/main" id="{E4B8EC3F-5269-40BF-B8E8-4987E191A922}"/>
               </a:ext>
             </a:extLst>
           </p:cNvPr>
@@ -8088,7 +8781,7 @@
           <p:cNvPr id="2" name="s5-subtitle">
             <a:extLst xmlns:a="http://schemas.openxmlformats.org/drawingml/2006/main">
               <a:ext uri="{FF2B5EF4-FFF2-40B4-BE49-F238E27FC236}">
-                <a16:creationId xmlns:a16="http://schemas.microsoft.com/office/drawing/2014/main" id="{BD67343F-F2EE-4348-B228-0E582867DC6C}"/>
+                <a16:creationId xmlns:a16="http://schemas.microsoft.com/office/drawing/2014/main" id="{D45F5800-59D1-489C-8442-018CD728C3E9}"/>
               </a:ext>
             </a:extLst>
           </p:cNvPr>
@@ -8133,7 +8826,7 @@
           <p:cNvPr id="3" name="s5-chart-label-pack">
             <a:extLst xmlns:a="http://schemas.openxmlformats.org/drawingml/2006/main">
               <a:ext uri="{FF2B5EF4-FFF2-40B4-BE49-F238E27FC236}">
-                <a16:creationId xmlns:a16="http://schemas.microsoft.com/office/drawing/2014/main" id="{A8864722-3E51-47FC-BD30-6F461ACD4CE7}"/>
+                <a16:creationId xmlns:a16="http://schemas.microsoft.com/office/drawing/2014/main" id="{2359AB99-AAF7-4864-A4C8-EDE645D9DCA4}"/>
               </a:ext>
             </a:extLst>
           </p:cNvPr>
@@ -8178,7 +8871,7 @@
           <p:cNvPr id="4" name="s5-chart-label-repo">
             <a:extLst xmlns:a="http://schemas.openxmlformats.org/drawingml/2006/main">
               <a:ext uri="{FF2B5EF4-FFF2-40B4-BE49-F238E27FC236}">
-                <a16:creationId xmlns:a16="http://schemas.microsoft.com/office/drawing/2014/main" id="{90F2706A-6467-475F-8CEC-56F86D7779EF}"/>
+                <a16:creationId xmlns:a16="http://schemas.microsoft.com/office/drawing/2014/main" id="{E43480B0-C468-4A4F-BB8F-52951E666507}"/>
               </a:ext>
             </a:extLst>
           </p:cNvPr>
@@ -8223,7 +8916,7 @@
           <p:cNvPr id="5" name="s5-stat1">
             <a:extLst xmlns:a="http://schemas.openxmlformats.org/drawingml/2006/main">
               <a:ext uri="{FF2B5EF4-FFF2-40B4-BE49-F238E27FC236}">
-                <a16:creationId xmlns:a16="http://schemas.microsoft.com/office/drawing/2014/main" id="{970E3FEB-9EA9-4778-870B-7C9A39CFC4E2}"/>
+                <a16:creationId xmlns:a16="http://schemas.microsoft.com/office/drawing/2014/main" id="{FC28C22C-D85B-4DAD-B2B8-683A87DAE2A9}"/>
               </a:ext>
             </a:extLst>
           </p:cNvPr>
@@ -8268,7 +8961,7 @@
           <p:cNvPr id="6" name="s5-stat1-label">
             <a:extLst xmlns:a="http://schemas.openxmlformats.org/drawingml/2006/main">
               <a:ext uri="{FF2B5EF4-FFF2-40B4-BE49-F238E27FC236}">
-                <a16:creationId xmlns:a16="http://schemas.microsoft.com/office/drawing/2014/main" id="{59E322EE-D8EA-41FC-B105-272328AED5D6}"/>
+                <a16:creationId xmlns:a16="http://schemas.microsoft.com/office/drawing/2014/main" id="{707BE5B9-9548-496D-9DA6-4FB946BB62C6}"/>
               </a:ext>
             </a:extLst>
           </p:cNvPr>
@@ -8335,7 +9028,7 @@
           <p:cNvPr id="8" name="s5-stat2">
             <a:extLst xmlns:a="http://schemas.openxmlformats.org/drawingml/2006/main">
               <a:ext uri="{FF2B5EF4-FFF2-40B4-BE49-F238E27FC236}">
-                <a16:creationId xmlns:a16="http://schemas.microsoft.com/office/drawing/2014/main" id="{806AA556-4981-4576-A392-2482C562CDEB}"/>
+                <a16:creationId xmlns:a16="http://schemas.microsoft.com/office/drawing/2014/main" id="{CA80D513-3393-4B4E-AF5B-447273542075}"/>
               </a:ext>
             </a:extLst>
           </p:cNvPr>
@@ -8380,7 +9073,7 @@
           <p:cNvPr id="9" name="s5-stat2-label">
             <a:extLst xmlns:a="http://schemas.openxmlformats.org/drawingml/2006/main">
               <a:ext uri="{FF2B5EF4-FFF2-40B4-BE49-F238E27FC236}">
-                <a16:creationId xmlns:a16="http://schemas.microsoft.com/office/drawing/2014/main" id="{C00C417F-814A-4314-9788-B0EAEC6D46FC}"/>
+                <a16:creationId xmlns:a16="http://schemas.microsoft.com/office/drawing/2014/main" id="{9DD56DB5-10E7-4A3C-A28E-773B843C277A}"/>
               </a:ext>
             </a:extLst>
           </p:cNvPr>
@@ -8425,7 +9118,7 @@
           <p:cNvPr id="10" name="s5-stat3">
             <a:extLst xmlns:a="http://schemas.openxmlformats.org/drawingml/2006/main">
               <a:ext uri="{FF2B5EF4-FFF2-40B4-BE49-F238E27FC236}">
-                <a16:creationId xmlns:a16="http://schemas.microsoft.com/office/drawing/2014/main" id="{F8999C0B-A282-453A-85C0-3E8C9BB8A318}"/>
+                <a16:creationId xmlns:a16="http://schemas.microsoft.com/office/drawing/2014/main" id="{BC2BB05A-071D-4ABA-88FB-C81D3AA22D80}"/>
               </a:ext>
             </a:extLst>
           </p:cNvPr>
@@ -8470,7 +9163,7 @@
           <p:cNvPr id="11" name="s5-stat3-label">
             <a:extLst xmlns:a="http://schemas.openxmlformats.org/drawingml/2006/main">
               <a:ext uri="{FF2B5EF4-FFF2-40B4-BE49-F238E27FC236}">
-                <a16:creationId xmlns:a16="http://schemas.microsoft.com/office/drawing/2014/main" id="{295EF636-869E-45E8-BDDE-3967E09F7B24}"/>
+                <a16:creationId xmlns:a16="http://schemas.microsoft.com/office/drawing/2014/main" id="{6D5ADBAE-A496-4EB7-A35F-0B8BD21CC38C}"/>
               </a:ext>
             </a:extLst>
           </p:cNvPr>
@@ -8515,7 +9208,7 @@
           <p:cNvPr id="12" name="s5-explain">
             <a:extLst xmlns:a="http://schemas.openxmlformats.org/drawingml/2006/main">
               <a:ext uri="{FF2B5EF4-FFF2-40B4-BE49-F238E27FC236}">
-                <a16:creationId xmlns:a16="http://schemas.microsoft.com/office/drawing/2014/main" id="{561991B1-4460-4C7D-A761-E1F93D48F4FC}"/>
+                <a16:creationId xmlns:a16="http://schemas.microsoft.com/office/drawing/2014/main" id="{20A20B24-E133-4810-A8D9-A31008BFC301}"/>
               </a:ext>
             </a:extLst>
           </p:cNvPr>
@@ -8582,7 +9275,7 @@
           <p:cNvPr id="14" name="footer-source-5">
             <a:extLst xmlns:a="http://schemas.openxmlformats.org/drawingml/2006/main">
               <a:ext uri="{FF2B5EF4-FFF2-40B4-BE49-F238E27FC236}">
-                <a16:creationId xmlns:a16="http://schemas.microsoft.com/office/drawing/2014/main" id="{A81A8E01-8924-433A-AC37-CC90878FC689}"/>
+                <a16:creationId xmlns:a16="http://schemas.microsoft.com/office/drawing/2014/main" id="{2B5E3A62-30DD-4710-B331-27280841CBE2}"/>
               </a:ext>
             </a:extLst>
           </p:cNvPr>
@@ -8627,7 +9320,7 @@
           <p:cNvPr id="15" name="footer-number-5">
             <a:extLst xmlns:a="http://schemas.openxmlformats.org/drawingml/2006/main">
               <a:ext uri="{FF2B5EF4-FFF2-40B4-BE49-F238E27FC236}">
-                <a16:creationId xmlns:a16="http://schemas.microsoft.com/office/drawing/2014/main" id="{490BC097-E67D-471D-AD8B-4CFFD8E05D92}"/>
+                <a16:creationId xmlns:a16="http://schemas.microsoft.com/office/drawing/2014/main" id="{8176D3D8-7737-40A4-A0AB-4F5112FBF07F}"/>
               </a:ext>
             </a:extLst>
           </p:cNvPr>
@@ -8679,14 +9372,14 @@
         </p:xfrm>
         <a:graphic xmlns:a="http://schemas.openxmlformats.org/drawingml/2006/main">
           <a:graphicData uri="http://schemas.openxmlformats.org/drawingml/2006/chart">
-            <c:chart xmlns:r="http://schemas.openxmlformats.org/officeDocument/2006/relationships" xmlns:c="http://schemas.openxmlformats.org/drawingml/2006/chart" r:id="R7e18edf85e6c44ed"/>
+            <c:chart xmlns:r="http://schemas.openxmlformats.org/officeDocument/2006/relationships" xmlns:c="http://schemas.openxmlformats.org/drawingml/2006/chart" r:id="R6e6e3ab1268a42e9"/>
           </a:graphicData>
         </a:graphic>
       </p:graphicFrame>
     </p:spTree>
     <p:extLst>
       <p:ext uri="{BB962C8B-B14F-4D97-AF65-F5344CB8AC3E}">
-        <p14:creationId xmlns:p14="http://schemas.microsoft.com/office/powerpoint/2010/main" val="1234599859"/>
+        <p14:creationId xmlns:p14="http://schemas.microsoft.com/office/powerpoint/2010/main" val="203191990"/>
       </p:ext>
     </p:extLst>
   </p:cSld>
@@ -8717,7 +9410,7 @@
           <p:cNvPr id="40" name="s6-title-new">
             <a:extLst xmlns:a="http://schemas.openxmlformats.org/drawingml/2006/main">
               <a:ext uri="{FF2B5EF4-FFF2-40B4-BE49-F238E27FC236}">
-                <a16:creationId xmlns:a16="http://schemas.microsoft.com/office/drawing/2014/main" id="{2E4A6261-3D4E-47C6-ADDB-A78534CFFB59}"/>
+                <a16:creationId xmlns:a16="http://schemas.microsoft.com/office/drawing/2014/main" id="{52C04D36-E6EF-4AF1-B011-60AB98581017}"/>
               </a:ext>
             </a:extLst>
           </p:cNvPr>
@@ -8762,7 +9455,7 @@
           <p:cNvPr id="2" name="s6-subtitle-new">
             <a:extLst xmlns:a="http://schemas.openxmlformats.org/drawingml/2006/main">
               <a:ext uri="{FF2B5EF4-FFF2-40B4-BE49-F238E27FC236}">
-                <a16:creationId xmlns:a16="http://schemas.microsoft.com/office/drawing/2014/main" id="{AC6A6EA7-68D9-4461-A6DC-A4BB08E60C6B}"/>
+                <a16:creationId xmlns:a16="http://schemas.microsoft.com/office/drawing/2014/main" id="{8DB915FE-169F-4B3D-B7A8-9527917873F0}"/>
               </a:ext>
             </a:extLst>
           </p:cNvPr>
@@ -8807,7 +9500,7 @@
           <p:cNvPr id="3" name="s6-task-new">
             <a:extLst xmlns:a="http://schemas.openxmlformats.org/drawingml/2006/main">
               <a:ext uri="{FF2B5EF4-FFF2-40B4-BE49-F238E27FC236}">
-                <a16:creationId xmlns:a16="http://schemas.microsoft.com/office/drawing/2014/main" id="{4DB216DC-78A9-48FA-A165-F17FB2E9C46A}"/>
+                <a16:creationId xmlns:a16="http://schemas.microsoft.com/office/drawing/2014/main" id="{EAF8F918-4C29-43D2-B5FD-FA9BD599B32E}"/>
               </a:ext>
             </a:extLst>
           </p:cNvPr>
@@ -8842,7 +9535,7 @@
           <p:cNvPr id="4" name="s6-task-k-new">
             <a:extLst xmlns:a="http://schemas.openxmlformats.org/drawingml/2006/main">
               <a:ext uri="{FF2B5EF4-FFF2-40B4-BE49-F238E27FC236}">
-                <a16:creationId xmlns:a16="http://schemas.microsoft.com/office/drawing/2014/main" id="{F33B085B-FB47-4737-820B-27A8D2488536}"/>
+                <a16:creationId xmlns:a16="http://schemas.microsoft.com/office/drawing/2014/main" id="{9A8F05B6-22CF-4AC5-BC50-A0639F85B3B6}"/>
               </a:ext>
             </a:extLst>
           </p:cNvPr>
@@ -8887,7 +9580,7 @@
           <p:cNvPr id="5" name="s6-task-v-new">
             <a:extLst xmlns:a="http://schemas.openxmlformats.org/drawingml/2006/main">
               <a:ext uri="{FF2B5EF4-FFF2-40B4-BE49-F238E27FC236}">
-                <a16:creationId xmlns:a16="http://schemas.microsoft.com/office/drawing/2014/main" id="{A977FFCF-027F-4CF4-8794-57363BBF9DDA}"/>
+                <a16:creationId xmlns:a16="http://schemas.microsoft.com/office/drawing/2014/main" id="{5924F962-BFF4-4C47-A77D-D9528ADF7CEA}"/>
               </a:ext>
             </a:extLst>
           </p:cNvPr>
@@ -9064,7 +9757,7 @@
           <p:cNvPr id="12" name="s6-control-new">
             <a:extLst xmlns:a="http://schemas.openxmlformats.org/drawingml/2006/main">
               <a:ext uri="{FF2B5EF4-FFF2-40B4-BE49-F238E27FC236}">
-                <a16:creationId xmlns:a16="http://schemas.microsoft.com/office/drawing/2014/main" id="{A517B6A7-3621-401C-A9B9-8097119DE603}"/>
+                <a16:creationId xmlns:a16="http://schemas.microsoft.com/office/drawing/2014/main" id="{13CCC492-31D8-4828-9719-09990730DE3A}"/>
               </a:ext>
             </a:extLst>
           </p:cNvPr>
@@ -9099,7 +9792,7 @@
           <p:cNvPr id="13" name="s6-route-new">
             <a:extLst xmlns:a="http://schemas.openxmlformats.org/drawingml/2006/main">
               <a:ext uri="{FF2B5EF4-FFF2-40B4-BE49-F238E27FC236}">
-                <a16:creationId xmlns:a16="http://schemas.microsoft.com/office/drawing/2014/main" id="{752E5BCA-FAE6-4D19-973B-20CCFB2D0D85}"/>
+                <a16:creationId xmlns:a16="http://schemas.microsoft.com/office/drawing/2014/main" id="{FC270A77-8DA3-4DAF-A8A4-9A895ECE41EE}"/>
               </a:ext>
             </a:extLst>
           </p:cNvPr>
@@ -9134,7 +9827,7 @@
           <p:cNvPr id="14" name="s6-full-new">
             <a:extLst xmlns:a="http://schemas.openxmlformats.org/drawingml/2006/main">
               <a:ext uri="{FF2B5EF4-FFF2-40B4-BE49-F238E27FC236}">
-                <a16:creationId xmlns:a16="http://schemas.microsoft.com/office/drawing/2014/main" id="{104BEF20-D88A-4429-AD08-989C9B01990A}"/>
+                <a16:creationId xmlns:a16="http://schemas.microsoft.com/office/drawing/2014/main" id="{CCE8F17E-11BE-4315-BA3E-BD9C3516FF2E}"/>
               </a:ext>
             </a:extLst>
           </p:cNvPr>
@@ -9169,7 +9862,7 @@
           <p:cNvPr id="15" name="s6-adaptive-new">
             <a:extLst xmlns:a="http://schemas.openxmlformats.org/drawingml/2006/main">
               <a:ext uri="{FF2B5EF4-FFF2-40B4-BE49-F238E27FC236}">
-                <a16:creationId xmlns:a16="http://schemas.microsoft.com/office/drawing/2014/main" id="{0D18A00F-8FC6-4E2C-AD7C-D60FAFFF9D2D}"/>
+                <a16:creationId xmlns:a16="http://schemas.microsoft.com/office/drawing/2014/main" id="{267A9DDB-7A9E-4840-BB5E-006676BE4665}"/>
               </a:ext>
             </a:extLst>
           </p:cNvPr>
@@ -9204,7 +9897,7 @@
           <p:cNvPr id="16" name="s6-control-k-new">
             <a:extLst xmlns:a="http://schemas.openxmlformats.org/drawingml/2006/main">
               <a:ext uri="{FF2B5EF4-FFF2-40B4-BE49-F238E27FC236}">
-                <a16:creationId xmlns:a16="http://schemas.microsoft.com/office/drawing/2014/main" id="{5652324D-CEA2-41FB-93B1-D8F67E439B9F}"/>
+                <a16:creationId xmlns:a16="http://schemas.microsoft.com/office/drawing/2014/main" id="{2FF4A08C-FB43-4F34-8CDF-1719BA3CEFBD}"/>
               </a:ext>
             </a:extLst>
           </p:cNvPr>
@@ -9249,7 +9942,7 @@
           <p:cNvPr id="17" name="s6-control-v-new">
             <a:extLst xmlns:a="http://schemas.openxmlformats.org/drawingml/2006/main">
               <a:ext uri="{FF2B5EF4-FFF2-40B4-BE49-F238E27FC236}">
-                <a16:creationId xmlns:a16="http://schemas.microsoft.com/office/drawing/2014/main" id="{A6BB4466-6958-4E8C-B859-EFD83D3A9053}"/>
+                <a16:creationId xmlns:a16="http://schemas.microsoft.com/office/drawing/2014/main" id="{9A4ACBA8-DA72-4A1A-B9F6-56DC7E0B5694}"/>
               </a:ext>
             </a:extLst>
           </p:cNvPr>
@@ -9294,7 +9987,7 @@
           <p:cNvPr id="18" name="s6-control-d-new">
             <a:extLst xmlns:a="http://schemas.openxmlformats.org/drawingml/2006/main">
               <a:ext uri="{FF2B5EF4-FFF2-40B4-BE49-F238E27FC236}">
-                <a16:creationId xmlns:a16="http://schemas.microsoft.com/office/drawing/2014/main" id="{3426D113-22AE-417C-9E3F-CC5421FF5BC3}"/>
+                <a16:creationId xmlns:a16="http://schemas.microsoft.com/office/drawing/2014/main" id="{DEB37354-E023-4EDA-8121-B46FAC3D6FD6}"/>
               </a:ext>
             </a:extLst>
           </p:cNvPr>
@@ -9339,7 +10032,7 @@
           <p:cNvPr id="19" name="s6-route-k-new">
             <a:extLst xmlns:a="http://schemas.openxmlformats.org/drawingml/2006/main">
               <a:ext uri="{FF2B5EF4-FFF2-40B4-BE49-F238E27FC236}">
-                <a16:creationId xmlns:a16="http://schemas.microsoft.com/office/drawing/2014/main" id="{40E39F9D-6035-4904-837B-510AAB2364EC}"/>
+                <a16:creationId xmlns:a16="http://schemas.microsoft.com/office/drawing/2014/main" id="{C3BF203D-1089-4B24-BEBD-CB436AC7F1DF}"/>
               </a:ext>
             </a:extLst>
           </p:cNvPr>
@@ -9384,7 +10077,7 @@
           <p:cNvPr id="20" name="s6-route-v-new">
             <a:extLst xmlns:a="http://schemas.openxmlformats.org/drawingml/2006/main">
               <a:ext uri="{FF2B5EF4-FFF2-40B4-BE49-F238E27FC236}">
-                <a16:creationId xmlns:a16="http://schemas.microsoft.com/office/drawing/2014/main" id="{AE3A329C-A6AC-418F-9A79-44BDFE07E35D}"/>
+                <a16:creationId xmlns:a16="http://schemas.microsoft.com/office/drawing/2014/main" id="{550FF98C-089F-454E-A67B-CE142E0D8CC1}"/>
               </a:ext>
             </a:extLst>
           </p:cNvPr>
@@ -9429,7 +10122,7 @@
           <p:cNvPr id="21" name="s6-route-d-new">
             <a:extLst xmlns:a="http://schemas.openxmlformats.org/drawingml/2006/main">
               <a:ext uri="{FF2B5EF4-FFF2-40B4-BE49-F238E27FC236}">
-                <a16:creationId xmlns:a16="http://schemas.microsoft.com/office/drawing/2014/main" id="{48F45A76-8494-4AC8-AF6A-598F26827CA5}"/>
+                <a16:creationId xmlns:a16="http://schemas.microsoft.com/office/drawing/2014/main" id="{948042F0-1966-4F84-B10A-6DA8C3D9E6D2}"/>
               </a:ext>
             </a:extLst>
           </p:cNvPr>
@@ -9474,7 +10167,7 @@
           <p:cNvPr id="22" name="s6-full-k-new">
             <a:extLst xmlns:a="http://schemas.openxmlformats.org/drawingml/2006/main">
               <a:ext uri="{FF2B5EF4-FFF2-40B4-BE49-F238E27FC236}">
-                <a16:creationId xmlns:a16="http://schemas.microsoft.com/office/drawing/2014/main" id="{6090E55D-CF56-45A9-B565-DA106EE1B944}"/>
+                <a16:creationId xmlns:a16="http://schemas.microsoft.com/office/drawing/2014/main" id="{0077FAE7-6BAE-43BF-AED6-F3312CCF70FC}"/>
               </a:ext>
             </a:extLst>
           </p:cNvPr>
@@ -9519,7 +10212,7 @@
           <p:cNvPr id="23" name="s6-full-v-new">
             <a:extLst xmlns:a="http://schemas.openxmlformats.org/drawingml/2006/main">
               <a:ext uri="{FF2B5EF4-FFF2-40B4-BE49-F238E27FC236}">
-                <a16:creationId xmlns:a16="http://schemas.microsoft.com/office/drawing/2014/main" id="{5E27BE0D-E876-43D9-AC75-05E3E2FBC0AC}"/>
+                <a16:creationId xmlns:a16="http://schemas.microsoft.com/office/drawing/2014/main" id="{9299D685-DE74-487B-810C-340621F23F2A}"/>
               </a:ext>
             </a:extLst>
           </p:cNvPr>
@@ -9564,7 +10257,7 @@
           <p:cNvPr id="24" name="s6-full-d-new">
             <a:extLst xmlns:a="http://schemas.openxmlformats.org/drawingml/2006/main">
               <a:ext uri="{FF2B5EF4-FFF2-40B4-BE49-F238E27FC236}">
-                <a16:creationId xmlns:a16="http://schemas.microsoft.com/office/drawing/2014/main" id="{C17E23C0-CABC-4962-BBBE-50D837FC10EC}"/>
+                <a16:creationId xmlns:a16="http://schemas.microsoft.com/office/drawing/2014/main" id="{6CB4B971-8AEA-4FE3-BCB1-37424406BBF7}"/>
               </a:ext>
             </a:extLst>
           </p:cNvPr>
@@ -9609,7 +10302,7 @@
           <p:cNvPr id="25" name="s6-adaptive-k-new">
             <a:extLst xmlns:a="http://schemas.openxmlformats.org/drawingml/2006/main">
               <a:ext uri="{FF2B5EF4-FFF2-40B4-BE49-F238E27FC236}">
-                <a16:creationId xmlns:a16="http://schemas.microsoft.com/office/drawing/2014/main" id="{AC893686-8058-484F-BA85-68D7F9251879}"/>
+                <a16:creationId xmlns:a16="http://schemas.microsoft.com/office/drawing/2014/main" id="{5AA60F2C-0952-4CCE-A767-9AC1FD134B62}"/>
               </a:ext>
             </a:extLst>
           </p:cNvPr>
@@ -9654,7 +10347,7 @@
           <p:cNvPr id="26" name="s6-adaptive-v-new">
             <a:extLst xmlns:a="http://schemas.openxmlformats.org/drawingml/2006/main">
               <a:ext uri="{FF2B5EF4-FFF2-40B4-BE49-F238E27FC236}">
-                <a16:creationId xmlns:a16="http://schemas.microsoft.com/office/drawing/2014/main" id="{9191295F-5AB1-4877-8F9F-28A580B760B8}"/>
+                <a16:creationId xmlns:a16="http://schemas.microsoft.com/office/drawing/2014/main" id="{CD23FCAF-4174-4F46-A594-11FCA5FAC4FA}"/>
               </a:ext>
             </a:extLst>
           </p:cNvPr>
@@ -9699,7 +10392,7 @@
           <p:cNvPr id="27" name="s6-adaptive-d-new">
             <a:extLst xmlns:a="http://schemas.openxmlformats.org/drawingml/2006/main">
               <a:ext uri="{FF2B5EF4-FFF2-40B4-BE49-F238E27FC236}">
-                <a16:creationId xmlns:a16="http://schemas.microsoft.com/office/drawing/2014/main" id="{899502A0-6ADD-428C-AD8A-17289F3B0A9D}"/>
+                <a16:creationId xmlns:a16="http://schemas.microsoft.com/office/drawing/2014/main" id="{533FB2DF-8D60-45BE-AA25-1AAD73559D09}"/>
               </a:ext>
             </a:extLst>
           </p:cNvPr>
@@ -9744,7 +10437,7 @@
           <p:cNvPr id="28" name="s6-summary-new">
             <a:extLst xmlns:a="http://schemas.openxmlformats.org/drawingml/2006/main">
               <a:ext uri="{FF2B5EF4-FFF2-40B4-BE49-F238E27FC236}">
-                <a16:creationId xmlns:a16="http://schemas.microsoft.com/office/drawing/2014/main" id="{3A825044-FA23-417D-9D16-7BC2829D4CEF}"/>
+                <a16:creationId xmlns:a16="http://schemas.microsoft.com/office/drawing/2014/main" id="{B149ADC8-65D4-4DC4-97BC-F20E001DEE55}"/>
               </a:ext>
             </a:extLst>
           </p:cNvPr>
@@ -9779,7 +10472,7 @@
           <p:cNvPr id="29" name="s6-n-trials-new">
             <a:extLst xmlns:a="http://schemas.openxmlformats.org/drawingml/2006/main">
               <a:ext uri="{FF2B5EF4-FFF2-40B4-BE49-F238E27FC236}">
-                <a16:creationId xmlns:a16="http://schemas.microsoft.com/office/drawing/2014/main" id="{F4DC0782-D935-450E-84E9-FDB82D02FB16}"/>
+                <a16:creationId xmlns:a16="http://schemas.microsoft.com/office/drawing/2014/main" id="{AB0B5BCB-7824-45B0-BD80-6193CD6E67A7}"/>
               </a:ext>
             </a:extLst>
           </p:cNvPr>
@@ -9814,7 +10507,7 @@
               </a:defRPr>
             </a:pPr>
             <a:r>
-              <a:t>16</a:t>
+              <a:t>4</a:t>
             </a:r>
           </a:p>
         </p:txBody>
@@ -9824,7 +10517,7 @@
           <p:cNvPr id="30" name="s6-l-trials-new">
             <a:extLst xmlns:a="http://schemas.openxmlformats.org/drawingml/2006/main">
               <a:ext uri="{FF2B5EF4-FFF2-40B4-BE49-F238E27FC236}">
-                <a16:creationId xmlns:a16="http://schemas.microsoft.com/office/drawing/2014/main" id="{31EDC964-316A-458F-82DD-483E36D0EAC0}"/>
+                <a16:creationId xmlns:a16="http://schemas.microsoft.com/office/drawing/2014/main" id="{AF8A7B0A-A62B-4E1A-8335-B523BAED00DF}"/>
               </a:ext>
             </a:extLst>
           </p:cNvPr>
@@ -9859,7 +10552,7 @@
               </a:defRPr>
             </a:pPr>
             <a:r>
-              <a:t>paired trials</a:t>
+              <a:t>scenarios</a:t>
             </a:r>
           </a:p>
         </p:txBody>
@@ -9869,7 +10562,7 @@
           <p:cNvPr id="31" name="s6-n-arms-new">
             <a:extLst xmlns:a="http://schemas.openxmlformats.org/drawingml/2006/main">
               <a:ext uri="{FF2B5EF4-FFF2-40B4-BE49-F238E27FC236}">
-                <a16:creationId xmlns:a16="http://schemas.microsoft.com/office/drawing/2014/main" id="{EEFA84F6-D4FF-4EAD-AE71-42D13865513B}"/>
+                <a16:creationId xmlns:a16="http://schemas.microsoft.com/office/drawing/2014/main" id="{38CCA05F-1543-4467-84F6-00149FAF984C}"/>
               </a:ext>
             </a:extLst>
           </p:cNvPr>
@@ -9904,7 +10597,7 @@
               </a:defRPr>
             </a:pPr>
             <a:r>
-              <a:t>64</a:t>
+              <a:t>4</a:t>
             </a:r>
           </a:p>
         </p:txBody>
@@ -9914,7 +10607,7 @@
           <p:cNvPr id="32" name="s6-l-arms-new">
             <a:extLst xmlns:a="http://schemas.openxmlformats.org/drawingml/2006/main">
               <a:ext uri="{FF2B5EF4-FFF2-40B4-BE49-F238E27FC236}">
-                <a16:creationId xmlns:a16="http://schemas.microsoft.com/office/drawing/2014/main" id="{7A3BC64F-45ED-463E-A331-CA28B23EB1FA}"/>
+                <a16:creationId xmlns:a16="http://schemas.microsoft.com/office/drawing/2014/main" id="{FBB019EF-5763-4A9F-88B0-BDB0225B582B}"/>
               </a:ext>
             </a:extLst>
           </p:cNvPr>
@@ -9926,7 +10619,7 @@
         <p:spPr>
           <a:xfrm xmlns:a="http://schemas.openxmlformats.org/drawingml/2006/main">
             <a:off x="2667000" y="5562600"/>
-            <a:ext cx="1428750" cy="209550"/>
+            <a:ext cx="1619250" cy="209550"/>
           </a:xfrm>
           <a:prstGeom xmlns:a="http://schemas.openxmlformats.org/drawingml/2006/main" prst="rect">
             <a:avLst/>
@@ -9949,7 +10642,7 @@
               </a:defRPr>
             </a:pPr>
             <a:r>
-              <a:t>total arms</a:t>
+              <a:t>repetitions each</a:t>
             </a:r>
           </a:p>
         </p:txBody>
@@ -9959,32 +10652,32 @@
           <p:cNvPr id="33" name="s6-n-fixed-new">
             <a:extLst xmlns:a="http://schemas.openxmlformats.org/drawingml/2006/main">
               <a:ext uri="{FF2B5EF4-FFF2-40B4-BE49-F238E27FC236}">
-                <a16:creationId xmlns:a16="http://schemas.microsoft.com/office/drawing/2014/main" id="{2E2576A7-2ADF-427A-8F43-21830738A800}"/>
-              </a:ext>
-            </a:extLst>
-          </p:cNvPr>
-          <p:cNvSpPr>
-            <a:spLocks xmlns:a="http://schemas.openxmlformats.org/drawingml/2006/main" noGrp="1"/>
-          </p:cNvSpPr>
-          <p:nvPr/>
-        </p:nvSpPr>
-        <p:spPr>
-          <a:xfrm xmlns:a="http://schemas.openxmlformats.org/drawingml/2006/main">
-            <a:off x="4762500" y="5229225"/>
-            <a:ext cx="1143000" cy="323850"/>
-          </a:xfrm>
-          <a:prstGeom xmlns:a="http://schemas.openxmlformats.org/drawingml/2006/main" prst="rect">
-            <a:avLst/>
-          </a:prstGeom>
-        </p:spPr>
-        <p:txBody>
-          <a:bodyPr xmlns:a="http://schemas.openxmlformats.org/drawingml/2006/main" wrap="square" lIns="0" tIns="0" rIns="0" bIns="0" anchor="t">
-            <a:noAutofit/>
-          </a:bodyPr>
-          <a:lstStyle xmlns:a="http://schemas.openxmlformats.org/drawingml/2006/main"/>
-          <a:p xmlns:a="http://schemas.openxmlformats.org/drawingml/2006/main">
-            <a:pPr algn="l">
-              <a:defRPr sz="1800" b="1">
+                <a16:creationId xmlns:a16="http://schemas.microsoft.com/office/drawing/2014/main" id="{2FE96F7D-355C-441C-9B7E-E41D4DF2D082}"/>
+              </a:ext>
+            </a:extLst>
+          </p:cNvPr>
+          <p:cNvSpPr>
+            <a:spLocks xmlns:a="http://schemas.openxmlformats.org/drawingml/2006/main" noGrp="1"/>
+          </p:cNvSpPr>
+          <p:nvPr/>
+        </p:nvSpPr>
+        <p:spPr>
+          <a:xfrm xmlns:a="http://schemas.openxmlformats.org/drawingml/2006/main">
+            <a:off x="4762500" y="5181600"/>
+            <a:ext cx="762000" cy="438150"/>
+          </a:xfrm>
+          <a:prstGeom xmlns:a="http://schemas.openxmlformats.org/drawingml/2006/main" prst="rect">
+            <a:avLst/>
+          </a:prstGeom>
+        </p:spPr>
+        <p:txBody>
+          <a:bodyPr xmlns:a="http://schemas.openxmlformats.org/drawingml/2006/main" wrap="square" lIns="0" tIns="0" rIns="0" bIns="0" anchor="t">
+            <a:noAutofit/>
+          </a:bodyPr>
+          <a:lstStyle xmlns:a="http://schemas.openxmlformats.org/drawingml/2006/main"/>
+          <a:p xmlns:a="http://schemas.openxmlformats.org/drawingml/2006/main">
+            <a:pPr algn="l">
+              <a:defRPr sz="2550" b="1">
                 <a:solidFill>
                   <a:srgbClr val="15A777"/>
                 </a:solidFill>
@@ -9994,7 +10687,7 @@
               </a:defRPr>
             </a:pPr>
             <a:r>
-              <a:t>FIXED</a:t>
+              <a:t>4</a:t>
             </a:r>
           </a:p>
         </p:txBody>
@@ -10004,7 +10697,7 @@
           <p:cNvPr id="34" name="s6-l-fixed-new">
             <a:extLst xmlns:a="http://schemas.openxmlformats.org/drawingml/2006/main">
               <a:ext uri="{FF2B5EF4-FFF2-40B4-BE49-F238E27FC236}">
-                <a16:creationId xmlns:a16="http://schemas.microsoft.com/office/drawing/2014/main" id="{C813F437-C4E7-40B4-B120-F5BC7D469CA5}"/>
+                <a16:creationId xmlns:a16="http://schemas.microsoft.com/office/drawing/2014/main" id="{C450B591-42CB-422D-85B6-5757D6F4F1EE}"/>
               </a:ext>
             </a:extLst>
           </p:cNvPr>
@@ -10016,30 +10709,30 @@
         <p:spPr>
           <a:xfrm xmlns:a="http://schemas.openxmlformats.org/drawingml/2006/main">
             <a:off x="4762500" y="5562600"/>
-            <a:ext cx="3143250" cy="209550"/>
-          </a:xfrm>
-          <a:prstGeom xmlns:a="http://schemas.openxmlformats.org/drawingml/2006/main" prst="rect">
-            <a:avLst/>
-          </a:prstGeom>
-        </p:spPr>
-        <p:txBody>
-          <a:bodyPr xmlns:a="http://schemas.openxmlformats.org/drawingml/2006/main" wrap="square" lIns="0" tIns="0" rIns="0" bIns="0" anchor="t">
-            <a:noAutofit/>
-          </a:bodyPr>
-          <a:lstStyle xmlns:a="http://schemas.openxmlformats.org/drawingml/2006/main"/>
-          <a:p xmlns:a="http://schemas.openxmlformats.org/drawingml/2006/main">
-            <a:pPr algn="l">
-              <a:defRPr sz="1050" b="0">
+            <a:ext cx="1714500" cy="209550"/>
+          </a:xfrm>
+          <a:prstGeom xmlns:a="http://schemas.openxmlformats.org/drawingml/2006/main" prst="rect">
+            <a:avLst/>
+          </a:prstGeom>
+        </p:spPr>
+        <p:txBody>
+          <a:bodyPr xmlns:a="http://schemas.openxmlformats.org/drawingml/2006/main" wrap="square" lIns="0" tIns="0" rIns="0" bIns="0" anchor="t">
+            <a:noAutofit/>
+          </a:bodyPr>
+          <a:lstStyle xmlns:a="http://schemas.openxmlformats.org/drawingml/2006/main"/>
+          <a:p xmlns:a="http://schemas.openxmlformats.org/drawingml/2006/main">
+            <a:pPr algn="l">
+              <a:defRPr sz="1125" b="0">
                 <a:solidFill>
                   <a:srgbClr val="FFFFFF"/>
                 </a:solidFill>
-                <a:latin typeface="Consolas"/>
-                <a:ea typeface="Consolas"/>
-                <a:cs typeface="Consolas"/>
-              </a:defRPr>
-            </a:pPr>
-            <a:r>
-              <a:t>Codex | task | fixture | model | tests</a:t>
+                <a:latin typeface="Arial"/>
+                <a:ea typeface="Arial"/>
+                <a:cs typeface="Arial"/>
+              </a:defRPr>
+            </a:pPr>
+            <a:r>
+              <a:t>context arms</a:t>
             </a:r>
           </a:p>
         </p:txBody>
@@ -10049,32 +10742,32 @@
           <p:cNvPr id="35" name="s6-n-variable-new">
             <a:extLst xmlns:a="http://schemas.openxmlformats.org/drawingml/2006/main">
               <a:ext uri="{FF2B5EF4-FFF2-40B4-BE49-F238E27FC236}">
-                <a16:creationId xmlns:a16="http://schemas.microsoft.com/office/drawing/2014/main" id="{9E72BBBE-329A-48C6-8B9E-97AD0B36374C}"/>
-              </a:ext>
-            </a:extLst>
-          </p:cNvPr>
-          <p:cNvSpPr>
-            <a:spLocks xmlns:a="http://schemas.openxmlformats.org/drawingml/2006/main" noGrp="1"/>
-          </p:cNvSpPr>
-          <p:nvPr/>
-        </p:nvSpPr>
-        <p:spPr>
-          <a:xfrm xmlns:a="http://schemas.openxmlformats.org/drawingml/2006/main">
-            <a:off x="8382000" y="5229225"/>
-            <a:ext cx="2095500" cy="323850"/>
-          </a:xfrm>
-          <a:prstGeom xmlns:a="http://schemas.openxmlformats.org/drawingml/2006/main" prst="rect">
-            <a:avLst/>
-          </a:prstGeom>
-        </p:spPr>
-        <p:txBody>
-          <a:bodyPr xmlns:a="http://schemas.openxmlformats.org/drawingml/2006/main" wrap="square" lIns="0" tIns="0" rIns="0" bIns="0" anchor="t">
-            <a:noAutofit/>
-          </a:bodyPr>
-          <a:lstStyle xmlns:a="http://schemas.openxmlformats.org/drawingml/2006/main"/>
-          <a:p xmlns:a="http://schemas.openxmlformats.org/drawingml/2006/main">
-            <a:pPr algn="l">
-              <a:defRPr sz="1800" b="1">
+                <a16:creationId xmlns:a16="http://schemas.microsoft.com/office/drawing/2014/main" id="{D133E05E-368A-4435-980E-925AE887F94F}"/>
+              </a:ext>
+            </a:extLst>
+          </p:cNvPr>
+          <p:cNvSpPr>
+            <a:spLocks xmlns:a="http://schemas.openxmlformats.org/drawingml/2006/main" noGrp="1"/>
+          </p:cNvSpPr>
+          <p:nvPr/>
+        </p:nvSpPr>
+        <p:spPr>
+          <a:xfrm xmlns:a="http://schemas.openxmlformats.org/drawingml/2006/main">
+            <a:off x="8382000" y="5181600"/>
+            <a:ext cx="2095500" cy="438150"/>
+          </a:xfrm>
+          <a:prstGeom xmlns:a="http://schemas.openxmlformats.org/drawingml/2006/main" prst="rect">
+            <a:avLst/>
+          </a:prstGeom>
+        </p:spPr>
+        <p:txBody>
+          <a:bodyPr xmlns:a="http://schemas.openxmlformats.org/drawingml/2006/main" wrap="square" lIns="0" tIns="0" rIns="0" bIns="0" anchor="t">
+            <a:noAutofit/>
+          </a:bodyPr>
+          <a:lstStyle xmlns:a="http://schemas.openxmlformats.org/drawingml/2006/main"/>
+          <a:p xmlns:a="http://schemas.openxmlformats.org/drawingml/2006/main">
+            <a:pPr algn="l">
+              <a:defRPr sz="2550" b="1">
                 <a:solidFill>
                   <a:srgbClr val="7438F5"/>
                 </a:solidFill>
@@ -10084,7 +10777,7 @@
               </a:defRPr>
             </a:pPr>
             <a:r>
-              <a:t>ONE VARIABLE</a:t>
+              <a:t>64/64</a:t>
             </a:r>
           </a:p>
         </p:txBody>
@@ -10094,7 +10787,7 @@
           <p:cNvPr id="36" name="s6-l-variable-new">
             <a:extLst xmlns:a="http://schemas.openxmlformats.org/drawingml/2006/main">
               <a:ext uri="{FF2B5EF4-FFF2-40B4-BE49-F238E27FC236}">
-                <a16:creationId xmlns:a16="http://schemas.microsoft.com/office/drawing/2014/main" id="{8B726AE8-27ED-4F86-9C29-4C99BB5E0FA5}"/>
+                <a16:creationId xmlns:a16="http://schemas.microsoft.com/office/drawing/2014/main" id="{F8702F65-3940-41EF-A2E9-3DB78B7603A3}"/>
               </a:ext>
             </a:extLst>
           </p:cNvPr>
@@ -10129,7 +10822,7 @@
               </a:defRPr>
             </a:pPr>
             <a:r>
-              <a:t>repository-context strategy</a:t>
+              <a:t>valid + correct runs</a:t>
             </a:r>
           </a:p>
         </p:txBody>
@@ -10161,7 +10854,7 @@
           <p:cNvPr id="38" name="footer-source-6">
             <a:extLst xmlns:a="http://schemas.openxmlformats.org/drawingml/2006/main">
               <a:ext uri="{FF2B5EF4-FFF2-40B4-BE49-F238E27FC236}">
-                <a16:creationId xmlns:a16="http://schemas.microsoft.com/office/drawing/2014/main" id="{3788549A-885A-4789-A7A4-1C9E82ED1EBE}"/>
+                <a16:creationId xmlns:a16="http://schemas.microsoft.com/office/drawing/2014/main" id="{6223330D-692E-457B-BCB4-74F6D0292418}"/>
               </a:ext>
             </a:extLst>
           </p:cNvPr>
@@ -10196,7 +10889,7 @@
               </a:defRPr>
             </a:pPr>
             <a:r>
-              <a:t>Frozen preregistered exploratory design | 16 trials x 4 arms | github.com/lohchanhin/benchmarks-ab-demo</a:t>
+              <a:t>Frozen protocol v2.2 | local bug | cross-stack | useful memory | stale memory | github.com/lohchanhin/benchmarks-demo</a:t>
             </a:r>
           </a:p>
         </p:txBody>
@@ -10206,7 +10899,7 @@
           <p:cNvPr id="39" name="footer-number-6">
             <a:extLst xmlns:a="http://schemas.openxmlformats.org/drawingml/2006/main">
               <a:ext uri="{FF2B5EF4-FFF2-40B4-BE49-F238E27FC236}">
-                <a16:creationId xmlns:a16="http://schemas.microsoft.com/office/drawing/2014/main" id="{23C1093C-EF06-4BC6-BB34-022287368125}"/>
+                <a16:creationId xmlns:a16="http://schemas.microsoft.com/office/drawing/2014/main" id="{28EF3F8D-C3F2-4847-8F5A-75AAC4659188}"/>
               </a:ext>
             </a:extLst>
           </p:cNvPr>
@@ -10249,7 +10942,7 @@
     </p:spTree>
     <p:extLst>
       <p:ext uri="{BB962C8B-B14F-4D97-AF65-F5344CB8AC3E}">
-        <p14:creationId xmlns:p14="http://schemas.microsoft.com/office/powerpoint/2010/main" val="1802228071"/>
+        <p14:creationId xmlns:p14="http://schemas.microsoft.com/office/powerpoint/2010/main" val="366941974"/>
       </p:ext>
     </p:extLst>
   </p:cSld>
@@ -10277,10 +10970,10 @@
       </p:grpSpPr>
       <p:sp>
         <p:nvSpPr>
-          <p:cNvPr id="37" name="s7-title-new">
-            <a:extLst xmlns:a="http://schemas.openxmlformats.org/drawingml/2006/main">
-              <a:ext uri="{FF2B5EF4-FFF2-40B4-BE49-F238E27FC236}">
-                <a16:creationId xmlns:a16="http://schemas.microsoft.com/office/drawing/2014/main" id="{7009CBCD-C94C-4CE0-ACD0-3A490BF9F551}"/>
+          <p:cNvPr id="23" name="s7-title-chart">
+            <a:extLst xmlns:a="http://schemas.openxmlformats.org/drawingml/2006/main">
+              <a:ext uri="{FF2B5EF4-FFF2-40B4-BE49-F238E27FC236}">
+                <a16:creationId xmlns:a16="http://schemas.microsoft.com/office/drawing/2014/main" id="{12255841-5D79-455C-A0D7-94FD2B3D4572}"/>
               </a:ext>
             </a:extLst>
           </p:cNvPr>
@@ -10292,20 +10985,20 @@
         <p:spPr>
           <a:xfrm xmlns:a="http://schemas.openxmlformats.org/drawingml/2006/main">
             <a:off x="400050" y="323850"/>
-            <a:ext cx="11391900" cy="723900"/>
-          </a:xfrm>
-          <a:prstGeom xmlns:a="http://schemas.openxmlformats.org/drawingml/2006/main" prst="rect">
-            <a:avLst/>
-          </a:prstGeom>
-        </p:spPr>
-        <p:txBody>
-          <a:bodyPr xmlns:a="http://schemas.openxmlformats.org/drawingml/2006/main" wrap="square" lIns="0" tIns="0" rIns="0" bIns="0" anchor="t">
-            <a:noAutofit/>
-          </a:bodyPr>
-          <a:lstStyle xmlns:a="http://schemas.openxmlformats.org/drawingml/2006/main"/>
-          <a:p xmlns:a="http://schemas.openxmlformats.org/drawingml/2006/main">
-            <a:pPr algn="l">
-              <a:defRPr sz="3000" b="1">
+            <a:ext cx="11391900" cy="666750"/>
+          </a:xfrm>
+          <a:prstGeom xmlns:a="http://schemas.openxmlformats.org/drawingml/2006/main" prst="rect">
+            <a:avLst/>
+          </a:prstGeom>
+        </p:spPr>
+        <p:txBody>
+          <a:bodyPr xmlns:a="http://schemas.openxmlformats.org/drawingml/2006/main" wrap="square" lIns="0" tIns="0" rIns="0" bIns="0" anchor="t">
+            <a:noAutofit/>
+          </a:bodyPr>
+          <a:lstStyle xmlns:a="http://schemas.openxmlformats.org/drawingml/2006/main"/>
+          <a:p xmlns:a="http://schemas.openxmlformats.org/drawingml/2006/main">
+            <a:pPr algn="l">
+              <a:defRPr sz="2925" b="1">
                 <a:solidFill>
                   <a:srgbClr val="0A1224"/>
                 </a:solidFill>
@@ -10315,29 +11008,29 @@
               </a:defRPr>
             </a:pPr>
             <a:r>
-              <a:t>Adaptive Palace vs Codex alone</a:t>
-            </a:r>
-          </a:p>
-        </p:txBody>
-      </p:sp>
-      <p:sp>
-        <p:nvSpPr>
-          <p:cNvPr id="2" name="s7-subtitle-new">
-            <a:extLst xmlns:a="http://schemas.openxmlformats.org/drawingml/2006/main">
-              <a:ext uri="{FF2B5EF4-FFF2-40B4-BE49-F238E27FC236}">
-                <a16:creationId xmlns:a16="http://schemas.microsoft.com/office/drawing/2014/main" id="{2B34F348-92A3-45A4-AF0F-280781B6BA93}"/>
-              </a:ext>
-            </a:extLst>
-          </p:cNvPr>
-          <p:cNvSpPr>
-            <a:spLocks xmlns:a="http://schemas.openxmlformats.org/drawingml/2006/main" noGrp="1"/>
-          </p:cNvSpPr>
-          <p:nvPr/>
-        </p:nvSpPr>
-        <p:spPr>
-          <a:xfrm xmlns:a="http://schemas.openxmlformats.org/drawingml/2006/main">
-            <a:off x="495300" y="1066800"/>
-            <a:ext cx="10953750" cy="381000"/>
+              <a:t>The four-arm medians did not show an efficiency win.</a:t>
+            </a:r>
+          </a:p>
+        </p:txBody>
+      </p:sp>
+      <p:sp>
+        <p:nvSpPr>
+          <p:cNvPr id="2" name="s7-subtitle-chart">
+            <a:extLst xmlns:a="http://schemas.openxmlformats.org/drawingml/2006/main">
+              <a:ext uri="{FF2B5EF4-FFF2-40B4-BE49-F238E27FC236}">
+                <a16:creationId xmlns:a16="http://schemas.microsoft.com/office/drawing/2014/main" id="{44CF6EB6-A743-4964-8D1F-EABEA1BC87F7}"/>
+              </a:ext>
+            </a:extLst>
+          </p:cNvPr>
+          <p:cNvSpPr>
+            <a:spLocks xmlns:a="http://schemas.openxmlformats.org/drawingml/2006/main" noGrp="1"/>
+          </p:cNvSpPr>
+          <p:nvPr/>
+        </p:nvSpPr>
+        <p:spPr>
+          <a:xfrm xmlns:a="http://schemas.openxmlformats.org/drawingml/2006/main">
+            <a:off x="400050" y="1028700"/>
+            <a:ext cx="11239500" cy="381000"/>
           </a:xfrm>
           <a:prstGeom xmlns:a="http://schemas.openxmlformats.org/drawingml/2006/main" prst="rect">
             <a:avLst/>
@@ -10360,63 +11053,28 @@
               </a:defRPr>
             </a:pPr>
             <a:r>
-              <a:t>Same Codex and tests; only Palace context changed. Always-on was not justified here.</a:t>
-            </a:r>
-          </a:p>
-        </p:txBody>
-      </p:sp>
-      <p:sp>
-        <p:nvSpPr>
-          <p:cNvPr id="3" name="s7-result-panel">
-            <a:extLst xmlns:a="http://schemas.openxmlformats.org/drawingml/2006/main">
-              <a:ext uri="{FF2B5EF4-FFF2-40B4-BE49-F238E27FC236}">
-                <a16:creationId xmlns:a16="http://schemas.microsoft.com/office/drawing/2014/main" id="{244C1CCA-D366-42C9-83AE-C762E26019DB}"/>
-              </a:ext>
-            </a:extLst>
-          </p:cNvPr>
-          <p:cNvSpPr>
-            <a:spLocks xmlns:a="http://schemas.openxmlformats.org/drawingml/2006/main" noGrp="1"/>
-          </p:cNvSpPr>
-          <p:nvPr/>
-        </p:nvSpPr>
-        <p:spPr>
-          <a:xfrm xmlns:a="http://schemas.openxmlformats.org/drawingml/2006/main">
-            <a:off x="552450" y="1752600"/>
-            <a:ext cx="4248150" cy="3562350"/>
-          </a:xfrm>
-          <a:prstGeom xmlns:a="http://schemas.openxmlformats.org/drawingml/2006/main" prst="roundRect">
-            <a:avLst>
-              <a:gd name="adj" fmla="val 2139"/>
-            </a:avLst>
-          </a:prstGeom>
-          <a:solidFill xmlns:a="http://schemas.openxmlformats.org/drawingml/2006/main">
-            <a:srgbClr val="FFF1F3"/>
-          </a:solidFill>
-          <a:ln xmlns:a="http://schemas.openxmlformats.org/drawingml/2006/main" w="0">
-            <a:solidFill>
-              <a:srgbClr val="FFF1F3"/>
-            </a:solidFill>
-            <a:prstDash val="solid"/>
-          </a:ln>
-        </p:spPr>
-      </p:sp>
-      <p:sp>
-        <p:nvSpPr>
-          <p:cNvPr id="4" name="s7-result-k">
-            <a:extLst xmlns:a="http://schemas.openxmlformats.org/drawingml/2006/main">
-              <a:ext uri="{FF2B5EF4-FFF2-40B4-BE49-F238E27FC236}">
-                <a16:creationId xmlns:a16="http://schemas.microsoft.com/office/drawing/2014/main" id="{A941D6C4-FF81-4741-B630-BACAB6E6C7B2}"/>
-              </a:ext>
-            </a:extLst>
-          </p:cNvPr>
-          <p:cNvSpPr>
-            <a:spLocks xmlns:a="http://schemas.openxmlformats.org/drawingml/2006/main" noGrp="1"/>
-          </p:cNvSpPr>
-          <p:nvPr/>
-        </p:nvSpPr>
-        <p:spPr>
-          <a:xfrm xmlns:a="http://schemas.openxmlformats.org/drawingml/2006/main">
-            <a:off x="819150" y="2019300"/>
+              <a:t>Overall medians across 16 paired trials; lower is better. These bars are descriptive, not confidence intervals.</a:t>
+            </a:r>
+          </a:p>
+        </p:txBody>
+      </p:sp>
+      <p:sp>
+        <p:nvSpPr>
+          <p:cNvPr id="3" name="s7-token-heading">
+            <a:extLst xmlns:a="http://schemas.openxmlformats.org/drawingml/2006/main">
+              <a:ext uri="{FF2B5EF4-FFF2-40B4-BE49-F238E27FC236}">
+                <a16:creationId xmlns:a16="http://schemas.microsoft.com/office/drawing/2014/main" id="{F6C6516A-7BFE-460B-B9D3-7403570156A5}"/>
+              </a:ext>
+            </a:extLst>
+          </p:cNvPr>
+          <p:cNvSpPr>
+            <a:spLocks xmlns:a="http://schemas.openxmlformats.org/drawingml/2006/main" noGrp="1"/>
+          </p:cNvSpPr>
+          <p:nvPr/>
+        </p:nvSpPr>
+        <p:spPr>
+          <a:xfrm xmlns:a="http://schemas.openxmlformats.org/drawingml/2006/main">
+            <a:off x="400050" y="1524000"/>
             <a:ext cx="3524250" cy="228600"/>
           </a:xfrm>
           <a:prstGeom xmlns:a="http://schemas.openxmlformats.org/drawingml/2006/main" prst="rect">
@@ -10429,1151 +11087,178 @@
           </a:bodyPr>
           <a:lstStyle xmlns:a="http://schemas.openxmlformats.org/drawingml/2006/main"/>
           <a:p xmlns:a="http://schemas.openxmlformats.org/drawingml/2006/main">
-            <a:pPr algn="l">
-              <a:defRPr sz="1050" b="1">
-                <a:solidFill>
-                  <a:srgbClr val="D4515D"/>
-                </a:solidFill>
-                <a:latin typeface="Arial"/>
-                <a:ea typeface="Arial"/>
-                <a:cs typeface="Arial"/>
-              </a:defRPr>
-            </a:pPr>
-            <a:r>
-              <a:t>PAIRED DIFFERENCE: ADAPTIVE - CODEX ALONE</a:t>
-            </a:r>
-          </a:p>
-        </p:txBody>
-      </p:sp>
-      <p:sp>
-        <p:nvSpPr>
-          <p:cNvPr id="5" name="s7-tools-stat">
-            <a:extLst xmlns:a="http://schemas.openxmlformats.org/drawingml/2006/main">
-              <a:ext uri="{FF2B5EF4-FFF2-40B4-BE49-F238E27FC236}">
-                <a16:creationId xmlns:a16="http://schemas.microsoft.com/office/drawing/2014/main" id="{FEF1624A-D7BD-4291-853C-6356ACF50672}"/>
-              </a:ext>
-            </a:extLst>
-          </p:cNvPr>
-          <p:cNvSpPr>
-            <a:spLocks xmlns:a="http://schemas.openxmlformats.org/drawingml/2006/main" noGrp="1"/>
-          </p:cNvSpPr>
-          <p:nvPr/>
-        </p:nvSpPr>
-        <p:spPr>
-          <a:xfrm xmlns:a="http://schemas.openxmlformats.org/drawingml/2006/main">
-            <a:off x="819150" y="2400300"/>
-            <a:ext cx="1619250" cy="609600"/>
-          </a:xfrm>
-          <a:prstGeom xmlns:a="http://schemas.openxmlformats.org/drawingml/2006/main" prst="rect">
-            <a:avLst/>
-          </a:prstGeom>
-        </p:spPr>
-        <p:txBody>
-          <a:bodyPr xmlns:a="http://schemas.openxmlformats.org/drawingml/2006/main" wrap="square" lIns="0" tIns="0" rIns="0" bIns="0" anchor="t">
-            <a:noAutofit/>
-          </a:bodyPr>
-          <a:lstStyle xmlns:a="http://schemas.openxmlformats.org/drawingml/2006/main"/>
-          <a:p xmlns:a="http://schemas.openxmlformats.org/drawingml/2006/main">
-            <a:pPr algn="l">
-              <a:defRPr sz="3600" b="1">
-                <a:solidFill>
-                  <a:srgbClr val="D4515D"/>
-                </a:solidFill>
-                <a:latin typeface="Arial"/>
-                <a:ea typeface="Arial"/>
-                <a:cs typeface="Arial"/>
-              </a:defRPr>
-            </a:pPr>
-            <a:r>
-              <a:t>+4.5</a:t>
-            </a:r>
-          </a:p>
-        </p:txBody>
-      </p:sp>
-      <p:sp>
-        <p:nvSpPr>
-          <p:cNvPr id="6" name="s7-tools-label">
-            <a:extLst xmlns:a="http://schemas.openxmlformats.org/drawingml/2006/main">
-              <a:ext uri="{FF2B5EF4-FFF2-40B4-BE49-F238E27FC236}">
-                <a16:creationId xmlns:a16="http://schemas.microsoft.com/office/drawing/2014/main" id="{251397A4-0DA9-44E4-ADD1-156EAF0CEC6C}"/>
-              </a:ext>
-            </a:extLst>
-          </p:cNvPr>
-          <p:cNvSpPr>
-            <a:spLocks xmlns:a="http://schemas.openxmlformats.org/drawingml/2006/main" noGrp="1"/>
-          </p:cNvSpPr>
-          <p:nvPr/>
-        </p:nvSpPr>
-        <p:spPr>
-          <a:xfrm xmlns:a="http://schemas.openxmlformats.org/drawingml/2006/main">
-            <a:off x="2095500" y="2600325"/>
-            <a:ext cx="1714500" cy="304800"/>
-          </a:xfrm>
-          <a:prstGeom xmlns:a="http://schemas.openxmlformats.org/drawingml/2006/main" prst="rect">
-            <a:avLst/>
-          </a:prstGeom>
-        </p:spPr>
-        <p:txBody>
-          <a:bodyPr xmlns:a="http://schemas.openxmlformats.org/drawingml/2006/main" wrap="square" lIns="0" tIns="0" rIns="0" bIns="0" anchor="t">
-            <a:noAutofit/>
-          </a:bodyPr>
-          <a:lstStyle xmlns:a="http://schemas.openxmlformats.org/drawingml/2006/main"/>
-          <a:p xmlns:a="http://schemas.openxmlformats.org/drawingml/2006/main">
-            <a:pPr algn="l">
-              <a:defRPr sz="1500" b="1">
-                <a:solidFill>
-                  <a:srgbClr val="0A1224"/>
-                </a:solidFill>
-                <a:latin typeface="Arial"/>
-                <a:ea typeface="Arial"/>
-                <a:cs typeface="Arial"/>
-              </a:defRPr>
-            </a:pPr>
-            <a:r>
-              <a:t>tool calls</a:t>
-            </a:r>
-          </a:p>
-        </p:txBody>
-      </p:sp>
-      <p:sp>
-        <p:nvSpPr>
-          <p:cNvPr id="7" name="s7-tools-ci">
-            <a:extLst xmlns:a="http://schemas.openxmlformats.org/drawingml/2006/main">
-              <a:ext uri="{FF2B5EF4-FFF2-40B4-BE49-F238E27FC236}">
-                <a16:creationId xmlns:a16="http://schemas.microsoft.com/office/drawing/2014/main" id="{70CC89A8-0F17-4800-8D10-D7759327B3A6}"/>
-              </a:ext>
-            </a:extLst>
-          </p:cNvPr>
-          <p:cNvSpPr>
-            <a:spLocks xmlns:a="http://schemas.openxmlformats.org/drawingml/2006/main" noGrp="1"/>
-          </p:cNvSpPr>
-          <p:nvPr/>
-        </p:nvSpPr>
-        <p:spPr>
-          <a:xfrm xmlns:a="http://schemas.openxmlformats.org/drawingml/2006/main">
-            <a:off x="819150" y="3028950"/>
-            <a:ext cx="3143250" cy="228600"/>
-          </a:xfrm>
-          <a:prstGeom xmlns:a="http://schemas.openxmlformats.org/drawingml/2006/main" prst="rect">
-            <a:avLst/>
-          </a:prstGeom>
-        </p:spPr>
-        <p:txBody>
-          <a:bodyPr xmlns:a="http://schemas.openxmlformats.org/drawingml/2006/main" wrap="square" lIns="0" tIns="0" rIns="0" bIns="0" anchor="t">
-            <a:noAutofit/>
-          </a:bodyPr>
-          <a:lstStyle xmlns:a="http://schemas.openxmlformats.org/drawingml/2006/main"/>
-          <a:p xmlns:a="http://schemas.openxmlformats.org/drawingml/2006/main">
-            <a:pPr algn="l">
-              <a:defRPr sz="1200" b="0">
-                <a:solidFill>
-                  <a:srgbClr val="526071"/>
-                </a:solidFill>
-                <a:latin typeface="Arial"/>
-                <a:ea typeface="Arial"/>
-                <a:cs typeface="Arial"/>
-              </a:defRPr>
-            </a:pPr>
-            <a:r>
-              <a:t>95% CI: +2.5 to +6.5</a:t>
+            <a:pPr algn="ctr">
+              <a:defRPr sz="1125" b="1">
+                <a:solidFill>
+                  <a:srgbClr val="1677FF"/>
+                </a:solidFill>
+                <a:latin typeface="Arial"/>
+                <a:ea typeface="Arial"/>
+                <a:cs typeface="Arial"/>
+              </a:defRPr>
+            </a:pPr>
+            <a:r>
+              <a:t>REPORTED TOKENS</a:t>
+            </a:r>
+          </a:p>
+        </p:txBody>
+      </p:sp>
+      <p:sp>
+        <p:nvSpPr>
+          <p:cNvPr id="4" name="s7-time-heading">
+            <a:extLst xmlns:a="http://schemas.openxmlformats.org/drawingml/2006/main">
+              <a:ext uri="{FF2B5EF4-FFF2-40B4-BE49-F238E27FC236}">
+                <a16:creationId xmlns:a16="http://schemas.microsoft.com/office/drawing/2014/main" id="{32718EDA-252C-4872-97C8-E83592650037}"/>
+              </a:ext>
+            </a:extLst>
+          </p:cNvPr>
+          <p:cNvSpPr>
+            <a:spLocks xmlns:a="http://schemas.openxmlformats.org/drawingml/2006/main" noGrp="1"/>
+          </p:cNvSpPr>
+          <p:nvPr/>
+        </p:nvSpPr>
+        <p:spPr>
+          <a:xfrm xmlns:a="http://schemas.openxmlformats.org/drawingml/2006/main">
+            <a:off x="4324350" y="1524000"/>
+            <a:ext cx="3524250" cy="228600"/>
+          </a:xfrm>
+          <a:prstGeom xmlns:a="http://schemas.openxmlformats.org/drawingml/2006/main" prst="rect">
+            <a:avLst/>
+          </a:prstGeom>
+        </p:spPr>
+        <p:txBody>
+          <a:bodyPr xmlns:a="http://schemas.openxmlformats.org/drawingml/2006/main" wrap="square" lIns="0" tIns="0" rIns="0" bIns="0" anchor="t">
+            <a:noAutofit/>
+          </a:bodyPr>
+          <a:lstStyle xmlns:a="http://schemas.openxmlformats.org/drawingml/2006/main"/>
+          <a:p xmlns:a="http://schemas.openxmlformats.org/drawingml/2006/main">
+            <a:pPr algn="ctr">
+              <a:defRPr sz="1125" b="1">
+                <a:solidFill>
+                  <a:srgbClr val="1677FF"/>
+                </a:solidFill>
+                <a:latin typeface="Arial"/>
+                <a:ea typeface="Arial"/>
+                <a:cs typeface="Arial"/>
+              </a:defRPr>
+            </a:pPr>
+            <a:r>
+              <a:t>WALL TIME (SECONDS)</a:t>
+            </a:r>
+          </a:p>
+        </p:txBody>
+      </p:sp>
+      <p:sp>
+        <p:nvSpPr>
+          <p:cNvPr id="5" name="s7-calls-heading">
+            <a:extLst xmlns:a="http://schemas.openxmlformats.org/drawingml/2006/main">
+              <a:ext uri="{FF2B5EF4-FFF2-40B4-BE49-F238E27FC236}">
+                <a16:creationId xmlns:a16="http://schemas.microsoft.com/office/drawing/2014/main" id="{BAE7E904-5AE2-44FA-B430-F47A58C42170}"/>
+              </a:ext>
+            </a:extLst>
+          </p:cNvPr>
+          <p:cNvSpPr>
+            <a:spLocks xmlns:a="http://schemas.openxmlformats.org/drawingml/2006/main" noGrp="1"/>
+          </p:cNvSpPr>
+          <p:nvPr/>
+        </p:nvSpPr>
+        <p:spPr>
+          <a:xfrm xmlns:a="http://schemas.openxmlformats.org/drawingml/2006/main">
+            <a:off x="8248650" y="1524000"/>
+            <a:ext cx="3524250" cy="228600"/>
+          </a:xfrm>
+          <a:prstGeom xmlns:a="http://schemas.openxmlformats.org/drawingml/2006/main" prst="rect">
+            <a:avLst/>
+          </a:prstGeom>
+        </p:spPr>
+        <p:txBody>
+          <a:bodyPr xmlns:a="http://schemas.openxmlformats.org/drawingml/2006/main" wrap="square" lIns="0" tIns="0" rIns="0" bIns="0" anchor="t">
+            <a:noAutofit/>
+          </a:bodyPr>
+          <a:lstStyle xmlns:a="http://schemas.openxmlformats.org/drawingml/2006/main"/>
+          <a:p xmlns:a="http://schemas.openxmlformats.org/drawingml/2006/main">
+            <a:pPr algn="ctr">
+              <a:defRPr sz="1125" b="1">
+                <a:solidFill>
+                  <a:srgbClr val="1677FF"/>
+                </a:solidFill>
+                <a:latin typeface="Arial"/>
+                <a:ea typeface="Arial"/>
+                <a:cs typeface="Arial"/>
+              </a:defRPr>
+            </a:pPr>
+            <a:r>
+              <a:t>TOOL CALLS</a:t>
             </a:r>
           </a:p>
         </p:txBody>
       </p:sp>
       <p:cxnSp>
         <p:nvCxnSpPr>
-          <p:cNvPr id="44" name="s7-result-rule"/>
+          <p:cNvPr id="28" name="s7-chart-separator-1"/>
           <p:cNvCxnSpPr/>
           <p:nvPr/>
         </p:nvCxnSpPr>
         <p:spPr>
           <a:xfrm xmlns:a="http://schemas.openxmlformats.org/drawingml/2006/main">
-            <a:off x="819150" y="3409950"/>
-            <a:ext cx="3524250" cy="953"/>
+            <a:off x="4133850" y="1695450"/>
+            <a:ext cx="953" cy="3295650"/>
           </a:xfrm>
           <a:prstGeom xmlns:a="http://schemas.openxmlformats.org/drawingml/2006/main" prst="straightConnector1">
             <a:avLst/>
           </a:prstGeom>
-          <a:ln xmlns:a="http://schemas.openxmlformats.org/drawingml/2006/main" w="9525">
-            <a:solidFill>
-              <a:srgbClr val="E8BCC2"/>
-            </a:solidFill>
-            <a:prstDash val="solid"/>
-          </a:ln>
-        </p:spPr>
-      </p:cxnSp>
-      <p:sp>
-        <p:nvSpPr>
-          <p:cNvPr id="9" name="s7-token-stat">
-            <a:extLst xmlns:a="http://schemas.openxmlformats.org/drawingml/2006/main">
-              <a:ext uri="{FF2B5EF4-FFF2-40B4-BE49-F238E27FC236}">
-                <a16:creationId xmlns:a16="http://schemas.microsoft.com/office/drawing/2014/main" id="{65CF77C1-3110-459D-85AA-496E53D31642}"/>
-              </a:ext>
-            </a:extLst>
-          </p:cNvPr>
-          <p:cNvSpPr>
-            <a:spLocks xmlns:a="http://schemas.openxmlformats.org/drawingml/2006/main" noGrp="1"/>
-          </p:cNvSpPr>
-          <p:nvPr/>
-        </p:nvSpPr>
-        <p:spPr>
-          <a:xfrm xmlns:a="http://schemas.openxmlformats.org/drawingml/2006/main">
-            <a:off x="819150" y="3638550"/>
-            <a:ext cx="1619250" cy="361950"/>
-          </a:xfrm>
-          <a:prstGeom xmlns:a="http://schemas.openxmlformats.org/drawingml/2006/main" prst="rect">
-            <a:avLst/>
-          </a:prstGeom>
-        </p:spPr>
-        <p:txBody>
-          <a:bodyPr xmlns:a="http://schemas.openxmlformats.org/drawingml/2006/main" wrap="square" lIns="0" tIns="0" rIns="0" bIns="0" anchor="t">
-            <a:noAutofit/>
-          </a:bodyPr>
-          <a:lstStyle xmlns:a="http://schemas.openxmlformats.org/drawingml/2006/main"/>
-          <a:p xmlns:a="http://schemas.openxmlformats.org/drawingml/2006/main">
-            <a:pPr algn="l">
-              <a:defRPr sz="2100" b="1">
-                <a:solidFill>
-                  <a:srgbClr val="B87712"/>
-                </a:solidFill>
-                <a:latin typeface="Arial"/>
-                <a:ea typeface="Arial"/>
-                <a:cs typeface="Arial"/>
-              </a:defRPr>
-            </a:pPr>
-            <a:r>
-              <a:t>+30,147</a:t>
-            </a:r>
-          </a:p>
-        </p:txBody>
-      </p:sp>
-      <p:sp>
-        <p:nvSpPr>
-          <p:cNvPr id="10" name="s7-token-label">
-            <a:extLst xmlns:a="http://schemas.openxmlformats.org/drawingml/2006/main">
-              <a:ext uri="{FF2B5EF4-FFF2-40B4-BE49-F238E27FC236}">
-                <a16:creationId xmlns:a16="http://schemas.microsoft.com/office/drawing/2014/main" id="{83101176-E715-407D-B156-8DB57BB27F29}"/>
-              </a:ext>
-            </a:extLst>
-          </p:cNvPr>
-          <p:cNvSpPr>
-            <a:spLocks xmlns:a="http://schemas.openxmlformats.org/drawingml/2006/main" noGrp="1"/>
-          </p:cNvSpPr>
-          <p:nvPr/>
-        </p:nvSpPr>
-        <p:spPr>
-          <a:xfrm xmlns:a="http://schemas.openxmlformats.org/drawingml/2006/main">
-            <a:off x="2381250" y="3676650"/>
-            <a:ext cx="1714500" cy="228600"/>
-          </a:xfrm>
-          <a:prstGeom xmlns:a="http://schemas.openxmlformats.org/drawingml/2006/main" prst="rect">
-            <a:avLst/>
-          </a:prstGeom>
-        </p:spPr>
-        <p:txBody>
-          <a:bodyPr xmlns:a="http://schemas.openxmlformats.org/drawingml/2006/main" wrap="square" lIns="0" tIns="0" rIns="0" bIns="0" anchor="t">
-            <a:noAutofit/>
-          </a:bodyPr>
-          <a:lstStyle xmlns:a="http://schemas.openxmlformats.org/drawingml/2006/main"/>
-          <a:p xmlns:a="http://schemas.openxmlformats.org/drawingml/2006/main">
-            <a:pPr algn="l">
-              <a:defRPr sz="1275" b="1">
-                <a:solidFill>
-                  <a:srgbClr val="0A1224"/>
-                </a:solidFill>
-                <a:latin typeface="Arial"/>
-                <a:ea typeface="Arial"/>
-                <a:cs typeface="Arial"/>
-              </a:defRPr>
-            </a:pPr>
-            <a:r>
-              <a:t>reported tokens</a:t>
-            </a:r>
-          </a:p>
-        </p:txBody>
-      </p:sp>
-      <p:sp>
-        <p:nvSpPr>
-          <p:cNvPr id="11" name="s7-token-note">
-            <a:extLst xmlns:a="http://schemas.openxmlformats.org/drawingml/2006/main">
-              <a:ext uri="{FF2B5EF4-FFF2-40B4-BE49-F238E27FC236}">
-                <a16:creationId xmlns:a16="http://schemas.microsoft.com/office/drawing/2014/main" id="{759BCA31-F516-483F-B4A1-0CB71C23001A}"/>
-              </a:ext>
-            </a:extLst>
-          </p:cNvPr>
-          <p:cNvSpPr>
-            <a:spLocks xmlns:a="http://schemas.openxmlformats.org/drawingml/2006/main" noGrp="1"/>
-          </p:cNvSpPr>
-          <p:nvPr/>
-        </p:nvSpPr>
-        <p:spPr>
-          <a:xfrm xmlns:a="http://schemas.openxmlformats.org/drawingml/2006/main">
-            <a:off x="2381250" y="3943350"/>
-            <a:ext cx="1714500" cy="190500"/>
-          </a:xfrm>
-          <a:prstGeom xmlns:a="http://schemas.openxmlformats.org/drawingml/2006/main" prst="rect">
-            <a:avLst/>
-          </a:prstGeom>
-        </p:spPr>
-        <p:txBody>
-          <a:bodyPr xmlns:a="http://schemas.openxmlformats.org/drawingml/2006/main" wrap="square" lIns="0" tIns="0" rIns="0" bIns="0" anchor="t">
-            <a:noAutofit/>
-          </a:bodyPr>
-          <a:lstStyle xmlns:a="http://schemas.openxmlformats.org/drawingml/2006/main"/>
-          <a:p xmlns:a="http://schemas.openxmlformats.org/drawingml/2006/main">
-            <a:pPr algn="l">
-              <a:defRPr sz="1050" b="1">
-                <a:solidFill>
-                  <a:srgbClr val="B87712"/>
-                </a:solidFill>
-                <a:latin typeface="Arial"/>
-                <a:ea typeface="Arial"/>
-                <a:cs typeface="Arial"/>
-              </a:defRPr>
-            </a:pPr>
-            <a:r>
-              <a:t>interval crosses zero</a:t>
-            </a:r>
-          </a:p>
-        </p:txBody>
-      </p:sp>
-      <p:sp>
-        <p:nvSpPr>
-          <p:cNvPr id="12" name="s7-time-stat">
-            <a:extLst xmlns:a="http://schemas.openxmlformats.org/drawingml/2006/main">
-              <a:ext uri="{FF2B5EF4-FFF2-40B4-BE49-F238E27FC236}">
-                <a16:creationId xmlns:a16="http://schemas.microsoft.com/office/drawing/2014/main" id="{2D2E95E8-E2E1-4C13-B982-4F0130610A5F}"/>
-              </a:ext>
-            </a:extLst>
-          </p:cNvPr>
-          <p:cNvSpPr>
-            <a:spLocks xmlns:a="http://schemas.openxmlformats.org/drawingml/2006/main" noGrp="1"/>
-          </p:cNvSpPr>
-          <p:nvPr/>
-        </p:nvSpPr>
-        <p:spPr>
-          <a:xfrm xmlns:a="http://schemas.openxmlformats.org/drawingml/2006/main">
-            <a:off x="819150" y="4305300"/>
-            <a:ext cx="1619250" cy="361950"/>
-          </a:xfrm>
-          <a:prstGeom xmlns:a="http://schemas.openxmlformats.org/drawingml/2006/main" prst="rect">
-            <a:avLst/>
-          </a:prstGeom>
-        </p:spPr>
-        <p:txBody>
-          <a:bodyPr xmlns:a="http://schemas.openxmlformats.org/drawingml/2006/main" wrap="square" lIns="0" tIns="0" rIns="0" bIns="0" anchor="t">
-            <a:noAutofit/>
-          </a:bodyPr>
-          <a:lstStyle xmlns:a="http://schemas.openxmlformats.org/drawingml/2006/main"/>
-          <a:p xmlns:a="http://schemas.openxmlformats.org/drawingml/2006/main">
-            <a:pPr algn="l">
-              <a:defRPr sz="2100" b="1">
-                <a:solidFill>
-                  <a:srgbClr val="B87712"/>
-                </a:solidFill>
-                <a:latin typeface="Arial"/>
-                <a:ea typeface="Arial"/>
-                <a:cs typeface="Arial"/>
-              </a:defRPr>
-            </a:pPr>
-            <a:r>
-              <a:t>+10.919s</a:t>
-            </a:r>
-          </a:p>
-        </p:txBody>
-      </p:sp>
-      <p:sp>
-        <p:nvSpPr>
-          <p:cNvPr id="13" name="s7-time-label">
-            <a:extLst xmlns:a="http://schemas.openxmlformats.org/drawingml/2006/main">
-              <a:ext uri="{FF2B5EF4-FFF2-40B4-BE49-F238E27FC236}">
-                <a16:creationId xmlns:a16="http://schemas.microsoft.com/office/drawing/2014/main" id="{6F08ED04-DA5E-4F3C-8A34-193C88957A74}"/>
-              </a:ext>
-            </a:extLst>
-          </p:cNvPr>
-          <p:cNvSpPr>
-            <a:spLocks xmlns:a="http://schemas.openxmlformats.org/drawingml/2006/main" noGrp="1"/>
-          </p:cNvSpPr>
-          <p:nvPr/>
-        </p:nvSpPr>
-        <p:spPr>
-          <a:xfrm xmlns:a="http://schemas.openxmlformats.org/drawingml/2006/main">
-            <a:off x="2381250" y="4343400"/>
-            <a:ext cx="1714500" cy="228600"/>
-          </a:xfrm>
-          <a:prstGeom xmlns:a="http://schemas.openxmlformats.org/drawingml/2006/main" prst="rect">
-            <a:avLst/>
-          </a:prstGeom>
-        </p:spPr>
-        <p:txBody>
-          <a:bodyPr xmlns:a="http://schemas.openxmlformats.org/drawingml/2006/main" wrap="square" lIns="0" tIns="0" rIns="0" bIns="0" anchor="t">
-            <a:noAutofit/>
-          </a:bodyPr>
-          <a:lstStyle xmlns:a="http://schemas.openxmlformats.org/drawingml/2006/main"/>
-          <a:p xmlns:a="http://schemas.openxmlformats.org/drawingml/2006/main">
-            <a:pPr algn="l">
-              <a:defRPr sz="1275" b="1">
-                <a:solidFill>
-                  <a:srgbClr val="0A1224"/>
-                </a:solidFill>
-                <a:latin typeface="Arial"/>
-                <a:ea typeface="Arial"/>
-                <a:cs typeface="Arial"/>
-              </a:defRPr>
-            </a:pPr>
-            <a:r>
-              <a:t>wall time</a:t>
-            </a:r>
-          </a:p>
-        </p:txBody>
-      </p:sp>
-      <p:sp>
-        <p:nvSpPr>
-          <p:cNvPr id="14" name="s7-time-note">
-            <a:extLst xmlns:a="http://schemas.openxmlformats.org/drawingml/2006/main">
-              <a:ext uri="{FF2B5EF4-FFF2-40B4-BE49-F238E27FC236}">
-                <a16:creationId xmlns:a16="http://schemas.microsoft.com/office/drawing/2014/main" id="{9196A887-CE3A-412E-A784-C87DBB017692}"/>
-              </a:ext>
-            </a:extLst>
-          </p:cNvPr>
-          <p:cNvSpPr>
-            <a:spLocks xmlns:a="http://schemas.openxmlformats.org/drawingml/2006/main" noGrp="1"/>
-          </p:cNvSpPr>
-          <p:nvPr/>
-        </p:nvSpPr>
-        <p:spPr>
-          <a:xfrm xmlns:a="http://schemas.openxmlformats.org/drawingml/2006/main">
-            <a:off x="2381250" y="4610100"/>
-            <a:ext cx="1714500" cy="190500"/>
-          </a:xfrm>
-          <a:prstGeom xmlns:a="http://schemas.openxmlformats.org/drawingml/2006/main" prst="rect">
-            <a:avLst/>
-          </a:prstGeom>
-        </p:spPr>
-        <p:txBody>
-          <a:bodyPr xmlns:a="http://schemas.openxmlformats.org/drawingml/2006/main" wrap="square" lIns="0" tIns="0" rIns="0" bIns="0" anchor="t">
-            <a:noAutofit/>
-          </a:bodyPr>
-          <a:lstStyle xmlns:a="http://schemas.openxmlformats.org/drawingml/2006/main"/>
-          <a:p xmlns:a="http://schemas.openxmlformats.org/drawingml/2006/main">
-            <a:pPr algn="l">
-              <a:defRPr sz="1050" b="1">
-                <a:solidFill>
-                  <a:srgbClr val="B87712"/>
-                </a:solidFill>
-                <a:latin typeface="Arial"/>
-                <a:ea typeface="Arial"/>
-                <a:cs typeface="Arial"/>
-              </a:defRPr>
-            </a:pPr>
-            <a:r>
-              <a:t>interval crosses zero</a:t>
-            </a:r>
-          </a:p>
-        </p:txBody>
-      </p:sp>
-      <p:sp>
-        <p:nvSpPr>
-          <p:cNvPr id="15" name="s7-correct">
-            <a:extLst xmlns:a="http://schemas.openxmlformats.org/drawingml/2006/main">
-              <a:ext uri="{FF2B5EF4-FFF2-40B4-BE49-F238E27FC236}">
-                <a16:creationId xmlns:a16="http://schemas.microsoft.com/office/drawing/2014/main" id="{914FDEA7-5649-47C6-BE0B-A1C448CE4F82}"/>
-              </a:ext>
-            </a:extLst>
-          </p:cNvPr>
-          <p:cNvSpPr>
-            <a:spLocks xmlns:a="http://schemas.openxmlformats.org/drawingml/2006/main" noGrp="1"/>
-          </p:cNvSpPr>
-          <p:nvPr/>
-        </p:nvSpPr>
-        <p:spPr>
-          <a:xfrm xmlns:a="http://schemas.openxmlformats.org/drawingml/2006/main">
-            <a:off x="819150" y="4991100"/>
-            <a:ext cx="3524250" cy="228600"/>
-          </a:xfrm>
-          <a:prstGeom xmlns:a="http://schemas.openxmlformats.org/drawingml/2006/main" prst="rect">
-            <a:avLst/>
-          </a:prstGeom>
-        </p:spPr>
-        <p:txBody>
-          <a:bodyPr xmlns:a="http://schemas.openxmlformats.org/drawingml/2006/main" wrap="square" lIns="0" tIns="0" rIns="0" bIns="0" anchor="t">
-            <a:noAutofit/>
-          </a:bodyPr>
-          <a:lstStyle xmlns:a="http://schemas.openxmlformats.org/drawingml/2006/main"/>
-          <a:p xmlns:a="http://schemas.openxmlformats.org/drawingml/2006/main">
-            <a:pPr algn="l">
-              <a:defRPr sz="1200" b="1">
-                <a:solidFill>
-                  <a:srgbClr val="15A777"/>
-                </a:solidFill>
-                <a:latin typeface="Arial"/>
-                <a:ea typeface="Arial"/>
-                <a:cs typeface="Arial"/>
-              </a:defRPr>
-            </a:pPr>
-            <a:r>
-              <a:t>64/64 correct | no correctness winner</a:t>
-            </a:r>
-          </a:p>
-        </p:txBody>
-      </p:sp>
-      <p:sp>
-        <p:nvSpPr>
-          <p:cNvPr id="16" name="s7-policy-panel">
-            <a:extLst xmlns:a="http://schemas.openxmlformats.org/drawingml/2006/main">
-              <a:ext uri="{FF2B5EF4-FFF2-40B4-BE49-F238E27FC236}">
-                <a16:creationId xmlns:a16="http://schemas.microsoft.com/office/drawing/2014/main" id="{627E387B-5358-416A-A68C-1209B70212B2}"/>
-              </a:ext>
-            </a:extLst>
-          </p:cNvPr>
-          <p:cNvSpPr>
-            <a:spLocks xmlns:a="http://schemas.openxmlformats.org/drawingml/2006/main" noGrp="1"/>
-          </p:cNvSpPr>
-          <p:nvPr/>
-        </p:nvSpPr>
-        <p:spPr>
-          <a:xfrm xmlns:a="http://schemas.openxmlformats.org/drawingml/2006/main">
-            <a:off x="5143500" y="1752600"/>
-            <a:ext cx="6496050" cy="3562350"/>
-          </a:xfrm>
-          <a:prstGeom xmlns:a="http://schemas.openxmlformats.org/drawingml/2006/main" prst="roundRect">
-            <a:avLst>
-              <a:gd name="adj" fmla="val 2139"/>
-            </a:avLst>
-          </a:prstGeom>
-          <a:solidFill xmlns:a="http://schemas.openxmlformats.org/drawingml/2006/main">
-            <a:srgbClr val="F7F9FC"/>
-          </a:solidFill>
-          <a:ln xmlns:a="http://schemas.openxmlformats.org/drawingml/2006/main" w="9525">
-            <a:solidFill>
-              <a:srgbClr val="B8BCC4"/>
-            </a:solidFill>
-            <a:prstDash val="solid"/>
-          </a:ln>
-        </p:spPr>
-      </p:sp>
-      <p:sp>
-        <p:nvSpPr>
-          <p:cNvPr id="17" name="s7-policy-k">
-            <a:extLst xmlns:a="http://schemas.openxmlformats.org/drawingml/2006/main">
-              <a:ext uri="{FF2B5EF4-FFF2-40B4-BE49-F238E27FC236}">
-                <a16:creationId xmlns:a16="http://schemas.microsoft.com/office/drawing/2014/main" id="{A7E720BC-40B3-42F7-956D-5216202AD51C}"/>
-              </a:ext>
-            </a:extLst>
-          </p:cNvPr>
-          <p:cNvSpPr>
-            <a:spLocks xmlns:a="http://schemas.openxmlformats.org/drawingml/2006/main" noGrp="1"/>
-          </p:cNvSpPr>
-          <p:nvPr/>
-        </p:nvSpPr>
-        <p:spPr>
-          <a:xfrm xmlns:a="http://schemas.openxmlformats.org/drawingml/2006/main">
-            <a:off x="5429250" y="2019300"/>
-            <a:ext cx="5715000" cy="228600"/>
-          </a:xfrm>
-          <a:prstGeom xmlns:a="http://schemas.openxmlformats.org/drawingml/2006/main" prst="rect">
-            <a:avLst/>
-          </a:prstGeom>
-        </p:spPr>
-        <p:txBody>
-          <a:bodyPr xmlns:a="http://schemas.openxmlformats.org/drawingml/2006/main" wrap="square" lIns="0" tIns="0" rIns="0" bIns="0" anchor="t">
-            <a:noAutofit/>
-          </a:bodyPr>
-          <a:lstStyle xmlns:a="http://schemas.openxmlformats.org/drawingml/2006/main"/>
-          <a:p xmlns:a="http://schemas.openxmlformats.org/drawingml/2006/main">
-            <a:pPr algn="l">
-              <a:defRPr sz="1125" b="1">
-                <a:solidFill>
-                  <a:srgbClr val="1677FF"/>
-                </a:solidFill>
-                <a:latin typeface="Arial"/>
-                <a:ea typeface="Arial"/>
-                <a:cs typeface="Arial"/>
-              </a:defRPr>
-            </a:pPr>
-            <a:r>
-              <a:t>CURRENT v0.2.3 MODE POLICY</a:t>
-            </a:r>
-          </a:p>
-        </p:txBody>
-      </p:sp>
-      <p:sp>
-        <p:nvSpPr>
-          <p:cNvPr id="18" name="s7-policy-v">
-            <a:extLst xmlns:a="http://schemas.openxmlformats.org/drawingml/2006/main">
-              <a:ext uri="{FF2B5EF4-FFF2-40B4-BE49-F238E27FC236}">
-                <a16:creationId xmlns:a16="http://schemas.microsoft.com/office/drawing/2014/main" id="{4B68F582-FD5A-4C8D-A0C7-C5292CE61AFA}"/>
-              </a:ext>
-            </a:extLst>
-          </p:cNvPr>
-          <p:cNvSpPr>
-            <a:spLocks xmlns:a="http://schemas.openxmlformats.org/drawingml/2006/main" noGrp="1"/>
-          </p:cNvSpPr>
-          <p:nvPr/>
-        </p:nvSpPr>
-        <p:spPr>
-          <a:xfrm xmlns:a="http://schemas.openxmlformats.org/drawingml/2006/main">
-            <a:off x="5429250" y="2324100"/>
-            <a:ext cx="5715000" cy="285750"/>
-          </a:xfrm>
-          <a:prstGeom xmlns:a="http://schemas.openxmlformats.org/drawingml/2006/main" prst="rect">
-            <a:avLst/>
-          </a:prstGeom>
-        </p:spPr>
-        <p:txBody>
-          <a:bodyPr xmlns:a="http://schemas.openxmlformats.org/drawingml/2006/main" wrap="square" lIns="0" tIns="0" rIns="0" bIns="0" anchor="t">
-            <a:noAutofit/>
-          </a:bodyPr>
-          <a:lstStyle xmlns:a="http://schemas.openxmlformats.org/drawingml/2006/main"/>
-          <a:p xmlns:a="http://schemas.openxmlformats.org/drawingml/2006/main">
-            <a:pPr algn="l">
-              <a:defRPr sz="1575" b="1">
-                <a:solidFill>
-                  <a:srgbClr val="0A1224"/>
-                </a:solidFill>
-                <a:latin typeface="Arial"/>
-                <a:ea typeface="Arial"/>
-                <a:cs typeface="Arial"/>
-              </a:defRPr>
-            </a:pPr>
-            <a:r>
-              <a:t>Use less Palace unless risk justifies more.</a:t>
-            </a:r>
-          </a:p>
-        </p:txBody>
-      </p:sp>
-      <p:sp>
-        <p:nvSpPr>
-          <p:cNvPr id="19" name="s7-bypass">
-            <a:extLst xmlns:a="http://schemas.openxmlformats.org/drawingml/2006/main">
-              <a:ext uri="{FF2B5EF4-FFF2-40B4-BE49-F238E27FC236}">
-                <a16:creationId xmlns:a16="http://schemas.microsoft.com/office/drawing/2014/main" id="{34676390-83FA-495F-8DA3-800EC0BD16BE}"/>
-              </a:ext>
-            </a:extLst>
-          </p:cNvPr>
-          <p:cNvSpPr>
-            <a:spLocks xmlns:a="http://schemas.openxmlformats.org/drawingml/2006/main" noGrp="1"/>
-          </p:cNvSpPr>
-          <p:nvPr/>
-        </p:nvSpPr>
-        <p:spPr>
-          <a:xfrm xmlns:a="http://schemas.openxmlformats.org/drawingml/2006/main">
-            <a:off x="5429250" y="2743200"/>
-            <a:ext cx="5924550" cy="666750"/>
-          </a:xfrm>
-          <a:prstGeom xmlns:a="http://schemas.openxmlformats.org/drawingml/2006/main" prst="roundRect">
-            <a:avLst>
-              <a:gd name="adj" fmla="val 11429"/>
-            </a:avLst>
-          </a:prstGeom>
-          <a:solidFill xmlns:a="http://schemas.openxmlformats.org/drawingml/2006/main">
-            <a:srgbClr val="EDEFF3"/>
-          </a:solidFill>
-          <a:ln xmlns:a="http://schemas.openxmlformats.org/drawingml/2006/main" w="0">
+          <a:ln xmlns:a="http://schemas.openxmlformats.org/drawingml/2006/main" w="19050">
             <a:solidFill>
               <a:srgbClr val="EDEFF3"/>
             </a:solidFill>
             <a:prstDash val="solid"/>
           </a:ln>
         </p:spPr>
-      </p:sp>
-      <p:sp>
-        <p:nvSpPr>
-          <p:cNvPr id="20" name="s7-bypass-k">
-            <a:extLst xmlns:a="http://schemas.openxmlformats.org/drawingml/2006/main">
-              <a:ext uri="{FF2B5EF4-FFF2-40B4-BE49-F238E27FC236}">
-                <a16:creationId xmlns:a16="http://schemas.microsoft.com/office/drawing/2014/main" id="{7FA98A56-4507-414A-8F2E-17AF3CA17D6E}"/>
-              </a:ext>
-            </a:extLst>
-          </p:cNvPr>
-          <p:cNvSpPr>
-            <a:spLocks xmlns:a="http://schemas.openxmlformats.org/drawingml/2006/main" noGrp="1"/>
-          </p:cNvSpPr>
-          <p:nvPr/>
-        </p:nvSpPr>
-        <p:spPr>
-          <a:xfrm xmlns:a="http://schemas.openxmlformats.org/drawingml/2006/main">
-            <a:off x="5619750" y="2895600"/>
-            <a:ext cx="1162050" cy="209550"/>
-          </a:xfrm>
-          <a:prstGeom xmlns:a="http://schemas.openxmlformats.org/drawingml/2006/main" prst="rect">
-            <a:avLst/>
-          </a:prstGeom>
-        </p:spPr>
-        <p:txBody>
-          <a:bodyPr xmlns:a="http://schemas.openxmlformats.org/drawingml/2006/main" wrap="square" lIns="0" tIns="0" rIns="0" bIns="0" anchor="t">
-            <a:noAutofit/>
-          </a:bodyPr>
-          <a:lstStyle xmlns:a="http://schemas.openxmlformats.org/drawingml/2006/main"/>
-          <a:p xmlns:a="http://schemas.openxmlformats.org/drawingml/2006/main">
-            <a:pPr algn="l">
-              <a:defRPr sz="1125" b="1">
-                <a:solidFill>
-                  <a:srgbClr val="526071"/>
-                </a:solidFill>
-                <a:latin typeface="Arial"/>
-                <a:ea typeface="Arial"/>
-                <a:cs typeface="Arial"/>
-              </a:defRPr>
-            </a:pPr>
-            <a:r>
-              <a:t>BYPASS</a:t>
-            </a:r>
-          </a:p>
-        </p:txBody>
-      </p:sp>
-      <p:sp>
-        <p:nvSpPr>
-          <p:cNvPr id="21" name="s7-bypass-v">
-            <a:extLst xmlns:a="http://schemas.openxmlformats.org/drawingml/2006/main">
-              <a:ext uri="{FF2B5EF4-FFF2-40B4-BE49-F238E27FC236}">
-                <a16:creationId xmlns:a16="http://schemas.microsoft.com/office/drawing/2014/main" id="{BA3EB9A1-49AE-4B9E-9FE0-BC4468D63EB6}"/>
-              </a:ext>
-            </a:extLst>
-          </p:cNvPr>
-          <p:cNvSpPr>
-            <a:spLocks xmlns:a="http://schemas.openxmlformats.org/drawingml/2006/main" noGrp="1"/>
-          </p:cNvSpPr>
-          <p:nvPr/>
-        </p:nvSpPr>
-        <p:spPr>
-          <a:xfrm xmlns:a="http://schemas.openxmlformats.org/drawingml/2006/main">
-            <a:off x="6858000" y="2857500"/>
-            <a:ext cx="4171950" cy="228600"/>
-          </a:xfrm>
-          <a:prstGeom xmlns:a="http://schemas.openxmlformats.org/drawingml/2006/main" prst="rect">
-            <a:avLst/>
-          </a:prstGeom>
-        </p:spPr>
-        <p:txBody>
-          <a:bodyPr xmlns:a="http://schemas.openxmlformats.org/drawingml/2006/main" wrap="square" lIns="0" tIns="0" rIns="0" bIns="0" anchor="t">
-            <a:noAutofit/>
-          </a:bodyPr>
-          <a:lstStyle xmlns:a="http://schemas.openxmlformats.org/drawingml/2006/main"/>
-          <a:p xmlns:a="http://schemas.openxmlformats.org/drawingml/2006/main">
-            <a:pPr algn="l">
-              <a:defRPr sz="1350" b="1">
-                <a:solidFill>
-                  <a:srgbClr val="0A1224"/>
-                </a:solidFill>
-                <a:latin typeface="Arial"/>
-                <a:ea typeface="Arial"/>
-                <a:cs typeface="Arial"/>
-              </a:defRPr>
-            </a:pPr>
-            <a:r>
-              <a:t>one explicit file in a small repo</a:t>
-            </a:r>
-          </a:p>
-        </p:txBody>
-      </p:sp>
-      <p:sp>
-        <p:nvSpPr>
-          <p:cNvPr id="22" name="s7-bypass-d">
-            <a:extLst xmlns:a="http://schemas.openxmlformats.org/drawingml/2006/main">
-              <a:ext uri="{FF2B5EF4-FFF2-40B4-BE49-F238E27FC236}">
-                <a16:creationId xmlns:a16="http://schemas.microsoft.com/office/drawing/2014/main" id="{5E4BF952-B4EA-4D34-AB73-7F9F0190EF4E}"/>
-              </a:ext>
-            </a:extLst>
-          </p:cNvPr>
-          <p:cNvSpPr>
-            <a:spLocks xmlns:a="http://schemas.openxmlformats.org/drawingml/2006/main" noGrp="1"/>
-          </p:cNvSpPr>
-          <p:nvPr/>
-        </p:nvSpPr>
-        <p:spPr>
-          <a:xfrm xmlns:a="http://schemas.openxmlformats.org/drawingml/2006/main">
-            <a:off x="6858000" y="3133725"/>
-            <a:ext cx="4171950" cy="190500"/>
-          </a:xfrm>
-          <a:prstGeom xmlns:a="http://schemas.openxmlformats.org/drawingml/2006/main" prst="rect">
-            <a:avLst/>
-          </a:prstGeom>
-        </p:spPr>
-        <p:txBody>
-          <a:bodyPr xmlns:a="http://schemas.openxmlformats.org/drawingml/2006/main" wrap="square" lIns="0" tIns="0" rIns="0" bIns="0" anchor="t">
-            <a:noAutofit/>
-          </a:bodyPr>
-          <a:lstStyle xmlns:a="http://schemas.openxmlformats.org/drawingml/2006/main"/>
-          <a:p xmlns:a="http://schemas.openxmlformats.org/drawingml/2006/main">
-            <a:pPr algn="l">
-              <a:defRPr sz="1050" b="0">
-                <a:solidFill>
-                  <a:srgbClr val="526071"/>
-                </a:solidFill>
-                <a:latin typeface="Arial"/>
-                <a:ea typeface="Arial"/>
-                <a:cs typeface="Arial"/>
-              </a:defRPr>
-            </a:pPr>
-            <a:r>
-              <a:t>no packed source; one decision call remains</a:t>
-            </a:r>
-          </a:p>
-        </p:txBody>
-      </p:sp>
-      <p:sp>
-        <p:nvSpPr>
-          <p:cNvPr id="23" name="s7-lite">
-            <a:extLst xmlns:a="http://schemas.openxmlformats.org/drawingml/2006/main">
-              <a:ext uri="{FF2B5EF4-FFF2-40B4-BE49-F238E27FC236}">
-                <a16:creationId xmlns:a16="http://schemas.microsoft.com/office/drawing/2014/main" id="{618A3DE2-1C5A-4EAC-A6FC-8E0F3FB7092F}"/>
-              </a:ext>
-            </a:extLst>
-          </p:cNvPr>
-          <p:cNvSpPr>
-            <a:spLocks xmlns:a="http://schemas.openxmlformats.org/drawingml/2006/main" noGrp="1"/>
-          </p:cNvSpPr>
-          <p:nvPr/>
-        </p:nvSpPr>
-        <p:spPr>
-          <a:xfrm xmlns:a="http://schemas.openxmlformats.org/drawingml/2006/main">
-            <a:off x="5429250" y="3505200"/>
-            <a:ext cx="5924550" cy="666750"/>
-          </a:xfrm>
-          <a:prstGeom xmlns:a="http://schemas.openxmlformats.org/drawingml/2006/main" prst="roundRect">
-            <a:avLst>
-              <a:gd name="adj" fmla="val 11429"/>
-            </a:avLst>
-          </a:prstGeom>
-          <a:solidFill xmlns:a="http://schemas.openxmlformats.org/drawingml/2006/main">
-            <a:srgbClr val="E8F7FB"/>
-          </a:solidFill>
-          <a:ln xmlns:a="http://schemas.openxmlformats.org/drawingml/2006/main" w="0">
+      </p:cxnSp>
+      <p:cxnSp>
+        <p:nvCxnSpPr>
+          <p:cNvPr id="29" name="s7-chart-separator-2"/>
+          <p:cNvCxnSpPr/>
+          <p:nvPr/>
+        </p:nvCxnSpPr>
+        <p:spPr>
+          <a:xfrm xmlns:a="http://schemas.openxmlformats.org/drawingml/2006/main">
+            <a:off x="8058150" y="1695450"/>
+            <a:ext cx="953" cy="3295650"/>
+          </a:xfrm>
+          <a:prstGeom xmlns:a="http://schemas.openxmlformats.org/drawingml/2006/main" prst="straightConnector1">
+            <a:avLst/>
+          </a:prstGeom>
+          <a:ln xmlns:a="http://schemas.openxmlformats.org/drawingml/2006/main" w="19050">
             <a:solidFill>
-              <a:srgbClr val="E8F7FB"/>
+              <a:srgbClr val="EDEFF3"/>
             </a:solidFill>
             <a:prstDash val="solid"/>
           </a:ln>
         </p:spPr>
-      </p:sp>
-      <p:sp>
-        <p:nvSpPr>
-          <p:cNvPr id="24" name="s7-lite-k">
-            <a:extLst xmlns:a="http://schemas.openxmlformats.org/drawingml/2006/main">
-              <a:ext uri="{FF2B5EF4-FFF2-40B4-BE49-F238E27FC236}">
-                <a16:creationId xmlns:a16="http://schemas.microsoft.com/office/drawing/2014/main" id="{09D52010-C4A1-41E1-B841-4D07C2C90FE5}"/>
-              </a:ext>
-            </a:extLst>
-          </p:cNvPr>
-          <p:cNvSpPr>
-            <a:spLocks xmlns:a="http://schemas.openxmlformats.org/drawingml/2006/main" noGrp="1"/>
-          </p:cNvSpPr>
-          <p:nvPr/>
-        </p:nvSpPr>
-        <p:spPr>
-          <a:xfrm xmlns:a="http://schemas.openxmlformats.org/drawingml/2006/main">
-            <a:off x="5619750" y="3657600"/>
-            <a:ext cx="1162050" cy="209550"/>
-          </a:xfrm>
-          <a:prstGeom xmlns:a="http://schemas.openxmlformats.org/drawingml/2006/main" prst="rect">
-            <a:avLst/>
-          </a:prstGeom>
-        </p:spPr>
-        <p:txBody>
-          <a:bodyPr xmlns:a="http://schemas.openxmlformats.org/drawingml/2006/main" wrap="square" lIns="0" tIns="0" rIns="0" bIns="0" anchor="t">
-            <a:noAutofit/>
-          </a:bodyPr>
-          <a:lstStyle xmlns:a="http://schemas.openxmlformats.org/drawingml/2006/main"/>
-          <a:p xmlns:a="http://schemas.openxmlformats.org/drawingml/2006/main">
-            <a:pPr algn="l">
-              <a:defRPr sz="1125" b="1">
-                <a:solidFill>
-                  <a:srgbClr val="13B7D5"/>
-                </a:solidFill>
-                <a:latin typeface="Arial"/>
-                <a:ea typeface="Arial"/>
-                <a:cs typeface="Arial"/>
-              </a:defRPr>
-            </a:pPr>
-            <a:r>
-              <a:t>ROUTE-LITE</a:t>
-            </a:r>
-          </a:p>
-        </p:txBody>
-      </p:sp>
-      <p:sp>
-        <p:nvSpPr>
-          <p:cNvPr id="25" name="s7-lite-v">
-            <a:extLst xmlns:a="http://schemas.openxmlformats.org/drawingml/2006/main">
-              <a:ext uri="{FF2B5EF4-FFF2-40B4-BE49-F238E27FC236}">
-                <a16:creationId xmlns:a16="http://schemas.microsoft.com/office/drawing/2014/main" id="{89AE73F9-6D53-4DD0-9CE1-D05F86596830}"/>
-              </a:ext>
-            </a:extLst>
-          </p:cNvPr>
-          <p:cNvSpPr>
-            <a:spLocks xmlns:a="http://schemas.openxmlformats.org/drawingml/2006/main" noGrp="1"/>
-          </p:cNvSpPr>
-          <p:nvPr/>
-        </p:nvSpPr>
-        <p:spPr>
-          <a:xfrm xmlns:a="http://schemas.openxmlformats.org/drawingml/2006/main">
-            <a:off x="6858000" y="3619500"/>
-            <a:ext cx="4171950" cy="228600"/>
-          </a:xfrm>
-          <a:prstGeom xmlns:a="http://schemas.openxmlformats.org/drawingml/2006/main" prst="rect">
-            <a:avLst/>
-          </a:prstGeom>
-        </p:spPr>
-        <p:txBody>
-          <a:bodyPr xmlns:a="http://schemas.openxmlformats.org/drawingml/2006/main" wrap="square" lIns="0" tIns="0" rIns="0" bIns="0" anchor="t">
-            <a:noAutofit/>
-          </a:bodyPr>
-          <a:lstStyle xmlns:a="http://schemas.openxmlformats.org/drawingml/2006/main"/>
-          <a:p xmlns:a="http://schemas.openxmlformats.org/drawingml/2006/main">
-            <a:pPr algn="l">
-              <a:defRPr sz="1350" b="1">
-                <a:solidFill>
-                  <a:srgbClr val="0A1224"/>
-                </a:solidFill>
-                <a:latin typeface="Arial"/>
-                <a:ea typeface="Arial"/>
-                <a:cs typeface="Arial"/>
-              </a:defRPr>
-            </a:pPr>
-            <a:r>
-              <a:t>bounded task + focused route</a:t>
-            </a:r>
-          </a:p>
-        </p:txBody>
-      </p:sp>
-      <p:sp>
-        <p:nvSpPr>
-          <p:cNvPr id="26" name="s7-lite-d">
-            <a:extLst xmlns:a="http://schemas.openxmlformats.org/drawingml/2006/main">
-              <a:ext uri="{FF2B5EF4-FFF2-40B4-BE49-F238E27FC236}">
-                <a16:creationId xmlns:a16="http://schemas.microsoft.com/office/drawing/2014/main" id="{F0DB716F-36B6-419E-95EA-1692086E36EC}"/>
-              </a:ext>
-            </a:extLst>
-          </p:cNvPr>
-          <p:cNvSpPr>
-            <a:spLocks xmlns:a="http://schemas.openxmlformats.org/drawingml/2006/main" noGrp="1"/>
-          </p:cNvSpPr>
-          <p:nvPr/>
-        </p:nvSpPr>
-        <p:spPr>
-          <a:xfrm xmlns:a="http://schemas.openxmlformats.org/drawingml/2006/main">
-            <a:off x="6858000" y="3895725"/>
-            <a:ext cx="4171950" cy="190500"/>
-          </a:xfrm>
-          <a:prstGeom xmlns:a="http://schemas.openxmlformats.org/drawingml/2006/main" prst="rect">
-            <a:avLst/>
-          </a:prstGeom>
-        </p:spPr>
-        <p:txBody>
-          <a:bodyPr xmlns:a="http://schemas.openxmlformats.org/drawingml/2006/main" wrap="square" lIns="0" tIns="0" rIns="0" bIns="0" anchor="t">
-            <a:noAutofit/>
-          </a:bodyPr>
-          <a:lstStyle xmlns:a="http://schemas.openxmlformats.org/drawingml/2006/main"/>
-          <a:p xmlns:a="http://schemas.openxmlformats.org/drawingml/2006/main">
-            <a:pPr algn="l">
-              <a:defRPr sz="1050" b="0">
-                <a:solidFill>
-                  <a:srgbClr val="526071"/>
-                </a:solidFill>
-                <a:latin typeface="Arial"/>
-                <a:ea typeface="Arial"/>
-                <a:cs typeface="Arial"/>
-              </a:defRPr>
-            </a:pPr>
-            <a:r>
-              <a:t>primary route only</a:t>
-            </a:r>
-          </a:p>
-        </p:txBody>
-      </p:sp>
-      <p:sp>
-        <p:nvSpPr>
-          <p:cNvPr id="27" name="s7-full">
-            <a:extLst xmlns:a="http://schemas.openxmlformats.org/drawingml/2006/main">
-              <a:ext uri="{FF2B5EF4-FFF2-40B4-BE49-F238E27FC236}">
-                <a16:creationId xmlns:a16="http://schemas.microsoft.com/office/drawing/2014/main" id="{0E464BCE-497B-4CCD-950F-083CDA2B9CB3}"/>
-              </a:ext>
-            </a:extLst>
-          </p:cNvPr>
-          <p:cNvSpPr>
-            <a:spLocks xmlns:a="http://schemas.openxmlformats.org/drawingml/2006/main" noGrp="1"/>
-          </p:cNvSpPr>
-          <p:nvPr/>
-        </p:nvSpPr>
-        <p:spPr>
-          <a:xfrm xmlns:a="http://schemas.openxmlformats.org/drawingml/2006/main">
-            <a:off x="5429250" y="4267200"/>
-            <a:ext cx="5924550" cy="838200"/>
+      </p:cxnSp>
+      <p:sp>
+        <p:nvSpPr>
+          <p:cNvPr id="8" name="s7-integrity-band">
+            <a:extLst xmlns:a="http://schemas.openxmlformats.org/drawingml/2006/main">
+              <a:ext uri="{FF2B5EF4-FFF2-40B4-BE49-F238E27FC236}">
+                <a16:creationId xmlns:a16="http://schemas.microsoft.com/office/drawing/2014/main" id="{9E784DD5-FEFE-4F3C-B8C5-01B4EE9EDE4A}"/>
+              </a:ext>
+            </a:extLst>
+          </p:cNvPr>
+          <p:cNvSpPr>
+            <a:spLocks xmlns:a="http://schemas.openxmlformats.org/drawingml/2006/main" noGrp="1"/>
+          </p:cNvSpPr>
+          <p:nvPr/>
+        </p:nvSpPr>
+        <p:spPr>
+          <a:xfrm xmlns:a="http://schemas.openxmlformats.org/drawingml/2006/main">
+            <a:off x="552450" y="5219700"/>
+            <a:ext cx="11087100" cy="781050"/>
           </a:xfrm>
           <a:prstGeom xmlns:a="http://schemas.openxmlformats.org/drawingml/2006/main" prst="roundRect">
             <a:avLst>
-              <a:gd name="adj" fmla="val 9091"/>
-            </a:avLst>
-          </a:prstGeom>
-          <a:solidFill xmlns:a="http://schemas.openxmlformats.org/drawingml/2006/main">
-            <a:srgbClr val="E9F7F2"/>
-          </a:solidFill>
-          <a:ln xmlns:a="http://schemas.openxmlformats.org/drawingml/2006/main" w="0">
-            <a:solidFill>
-              <a:srgbClr val="E9F7F2"/>
-            </a:solidFill>
-            <a:prstDash val="solid"/>
-          </a:ln>
-        </p:spPr>
-      </p:sp>
-      <p:sp>
-        <p:nvSpPr>
-          <p:cNvPr id="28" name="s7-full-k">
-            <a:extLst xmlns:a="http://schemas.openxmlformats.org/drawingml/2006/main">
-              <a:ext uri="{FF2B5EF4-FFF2-40B4-BE49-F238E27FC236}">
-                <a16:creationId xmlns:a16="http://schemas.microsoft.com/office/drawing/2014/main" id="{C585D106-264A-4686-B52D-61F4F4E57441}"/>
-              </a:ext>
-            </a:extLst>
-          </p:cNvPr>
-          <p:cNvSpPr>
-            <a:spLocks xmlns:a="http://schemas.openxmlformats.org/drawingml/2006/main" noGrp="1"/>
-          </p:cNvSpPr>
-          <p:nvPr/>
-        </p:nvSpPr>
-        <p:spPr>
-          <a:xfrm xmlns:a="http://schemas.openxmlformats.org/drawingml/2006/main">
-            <a:off x="5619750" y="4438650"/>
-            <a:ext cx="1333500" cy="209550"/>
-          </a:xfrm>
-          <a:prstGeom xmlns:a="http://schemas.openxmlformats.org/drawingml/2006/main" prst="rect">
-            <a:avLst/>
-          </a:prstGeom>
-        </p:spPr>
-        <p:txBody>
-          <a:bodyPr xmlns:a="http://schemas.openxmlformats.org/drawingml/2006/main" wrap="square" lIns="0" tIns="0" rIns="0" bIns="0" anchor="t">
-            <a:noAutofit/>
-          </a:bodyPr>
-          <a:lstStyle xmlns:a="http://schemas.openxmlformats.org/drawingml/2006/main"/>
-          <a:p xmlns:a="http://schemas.openxmlformats.org/drawingml/2006/main">
-            <a:pPr algn="l">
-              <a:defRPr sz="1125" b="1">
-                <a:solidFill>
-                  <a:srgbClr val="15A777"/>
-                </a:solidFill>
-                <a:latin typeface="Arial"/>
-                <a:ea typeface="Arial"/>
-                <a:cs typeface="Arial"/>
-              </a:defRPr>
-            </a:pPr>
-            <a:r>
-              <a:t>FULL / GUARDED</a:t>
-            </a:r>
-          </a:p>
-        </p:txBody>
-      </p:sp>
-      <p:sp>
-        <p:nvSpPr>
-          <p:cNvPr id="29" name="s7-full-v">
-            <a:extLst xmlns:a="http://schemas.openxmlformats.org/drawingml/2006/main">
-              <a:ext uri="{FF2B5EF4-FFF2-40B4-BE49-F238E27FC236}">
-                <a16:creationId xmlns:a16="http://schemas.microsoft.com/office/drawing/2014/main" id="{3757FB6D-DAB2-447E-9791-5D80B080F98A}"/>
-              </a:ext>
-            </a:extLst>
-          </p:cNvPr>
-          <p:cNvSpPr>
-            <a:spLocks xmlns:a="http://schemas.openxmlformats.org/drawingml/2006/main" noGrp="1"/>
-          </p:cNvSpPr>
-          <p:nvPr/>
-        </p:nvSpPr>
-        <p:spPr>
-          <a:xfrm xmlns:a="http://schemas.openxmlformats.org/drawingml/2006/main">
-            <a:off x="7048500" y="4400550"/>
-            <a:ext cx="3981450" cy="228600"/>
-          </a:xfrm>
-          <a:prstGeom xmlns:a="http://schemas.openxmlformats.org/drawingml/2006/main" prst="rect">
-            <a:avLst/>
-          </a:prstGeom>
-        </p:spPr>
-        <p:txBody>
-          <a:bodyPr xmlns:a="http://schemas.openxmlformats.org/drawingml/2006/main" wrap="square" lIns="0" tIns="0" rIns="0" bIns="0" anchor="t">
-            <a:noAutofit/>
-          </a:bodyPr>
-          <a:lstStyle xmlns:a="http://schemas.openxmlformats.org/drawingml/2006/main"/>
-          <a:p xmlns:a="http://schemas.openxmlformats.org/drawingml/2006/main">
-            <a:pPr algn="l">
-              <a:defRPr sz="1350" b="1">
-                <a:solidFill>
-                  <a:srgbClr val="0A1224"/>
-                </a:solidFill>
-                <a:latin typeface="Arial"/>
-                <a:ea typeface="Arial"/>
-                <a:cs typeface="Arial"/>
-              </a:defRPr>
-            </a:pPr>
-            <a:r>
-              <a:t>cross-stack, contract, or memory risk</a:t>
-            </a:r>
-          </a:p>
-        </p:txBody>
-      </p:sp>
-      <p:sp>
-        <p:nvSpPr>
-          <p:cNvPr id="30" name="s7-full-d">
-            <a:extLst xmlns:a="http://schemas.openxmlformats.org/drawingml/2006/main">
-              <a:ext uri="{FF2B5EF4-FFF2-40B4-BE49-F238E27FC236}">
-                <a16:creationId xmlns:a16="http://schemas.microsoft.com/office/drawing/2014/main" id="{BC1958D9-2501-47C2-903E-BADDDF58F281}"/>
-              </a:ext>
-            </a:extLst>
-          </p:cNvPr>
-          <p:cNvSpPr>
-            <a:spLocks xmlns:a="http://schemas.openxmlformats.org/drawingml/2006/main" noGrp="1"/>
-          </p:cNvSpPr>
-          <p:nvPr/>
-        </p:nvSpPr>
-        <p:spPr>
-          <a:xfrm xmlns:a="http://schemas.openxmlformats.org/drawingml/2006/main">
-            <a:off x="7048500" y="4695825"/>
-            <a:ext cx="3981450" cy="209550"/>
-          </a:xfrm>
-          <a:prstGeom xmlns:a="http://schemas.openxmlformats.org/drawingml/2006/main" prst="rect">
-            <a:avLst/>
-          </a:prstGeom>
-        </p:spPr>
-        <p:txBody>
-          <a:bodyPr xmlns:a="http://schemas.openxmlformats.org/drawingml/2006/main" wrap="square" lIns="0" tIns="0" rIns="0" bIns="0" anchor="t">
-            <a:noAutofit/>
-          </a:bodyPr>
-          <a:lstStyle xmlns:a="http://schemas.openxmlformats.org/drawingml/2006/main"/>
-          <a:p xmlns:a="http://schemas.openxmlformats.org/drawingml/2006/main">
-            <a:pPr algn="l">
-              <a:defRPr sz="1050" b="0">
-                <a:solidFill>
-                  <a:srgbClr val="526071"/>
-                </a:solidFill>
-                <a:latin typeface="Arial"/>
-                <a:ea typeface="Arial"/>
-                <a:cs typeface="Arial"/>
-              </a:defRPr>
-            </a:pPr>
-            <a:r>
-              <a:t>source + scoped memory + guardrails</a:t>
-            </a:r>
-          </a:p>
-        </p:txBody>
-      </p:sp>
-      <p:sp>
-        <p:nvSpPr>
-          <p:cNvPr id="31" name="s7-next">
-            <a:extLst xmlns:a="http://schemas.openxmlformats.org/drawingml/2006/main">
-              <a:ext uri="{FF2B5EF4-FFF2-40B4-BE49-F238E27FC236}">
-                <a16:creationId xmlns:a16="http://schemas.microsoft.com/office/drawing/2014/main" id="{01F586C4-A9E9-45AC-B61B-61E3BAA0AF45}"/>
-              </a:ext>
-            </a:extLst>
-          </p:cNvPr>
-          <p:cNvSpPr>
-            <a:spLocks xmlns:a="http://schemas.openxmlformats.org/drawingml/2006/main" noGrp="1"/>
-          </p:cNvSpPr>
-          <p:nvPr/>
-        </p:nvSpPr>
-        <p:spPr>
-          <a:xfrm xmlns:a="http://schemas.openxmlformats.org/drawingml/2006/main">
-            <a:off x="552450" y="5524500"/>
-            <a:ext cx="11087100" cy="533400"/>
-          </a:xfrm>
-          <a:prstGeom xmlns:a="http://schemas.openxmlformats.org/drawingml/2006/main" prst="roundRect">
-            <a:avLst>
-              <a:gd name="adj" fmla="val 14286"/>
+              <a:gd name="adj" fmla="val 9756"/>
             </a:avLst>
           </a:prstGeom>
           <a:solidFill xmlns:a="http://schemas.openxmlformats.org/drawingml/2006/main">
@@ -11589,21 +11274,246 @@
       </p:sp>
       <p:sp>
         <p:nvSpPr>
-          <p:cNvPr id="32" name="s7-next-k">
-            <a:extLst xmlns:a="http://schemas.openxmlformats.org/drawingml/2006/main">
-              <a:ext uri="{FF2B5EF4-FFF2-40B4-BE49-F238E27FC236}">
-                <a16:creationId xmlns:a16="http://schemas.microsoft.com/office/drawing/2014/main" id="{52AE6A7A-2E6D-4605-91B0-8A3E7993D6F4}"/>
-              </a:ext>
-            </a:extLst>
-          </p:cNvPr>
-          <p:cNvSpPr>
-            <a:spLocks xmlns:a="http://schemas.openxmlformats.org/drawingml/2006/main" noGrp="1"/>
-          </p:cNvSpPr>
-          <p:nvPr/>
-        </p:nvSpPr>
-        <p:spPr>
-          <a:xfrm xmlns:a="http://schemas.openxmlformats.org/drawingml/2006/main">
-            <a:off x="781050" y="5676900"/>
+          <p:cNvPr id="9" name="s7-trials-value">
+            <a:extLst xmlns:a="http://schemas.openxmlformats.org/drawingml/2006/main">
+              <a:ext uri="{FF2B5EF4-FFF2-40B4-BE49-F238E27FC236}">
+                <a16:creationId xmlns:a16="http://schemas.microsoft.com/office/drawing/2014/main" id="{443777D9-D651-472A-BDFA-267DDD668D70}"/>
+              </a:ext>
+            </a:extLst>
+          </p:cNvPr>
+          <p:cNvSpPr>
+            <a:spLocks xmlns:a="http://schemas.openxmlformats.org/drawingml/2006/main" noGrp="1"/>
+          </p:cNvSpPr>
+          <p:nvPr/>
+        </p:nvSpPr>
+        <p:spPr>
+          <a:xfrm xmlns:a="http://schemas.openxmlformats.org/drawingml/2006/main">
+            <a:off x="781050" y="5353050"/>
+            <a:ext cx="952500" cy="361950"/>
+          </a:xfrm>
+          <a:prstGeom xmlns:a="http://schemas.openxmlformats.org/drawingml/2006/main" prst="rect">
+            <a:avLst/>
+          </a:prstGeom>
+        </p:spPr>
+        <p:txBody>
+          <a:bodyPr xmlns:a="http://schemas.openxmlformats.org/drawingml/2006/main" wrap="square" lIns="0" tIns="0" rIns="0" bIns="0" anchor="t">
+            <a:noAutofit/>
+          </a:bodyPr>
+          <a:lstStyle xmlns:a="http://schemas.openxmlformats.org/drawingml/2006/main"/>
+          <a:p xmlns:a="http://schemas.openxmlformats.org/drawingml/2006/main">
+            <a:pPr algn="l">
+              <a:defRPr sz="2100" b="1">
+                <a:solidFill>
+                  <a:srgbClr val="13B7D5"/>
+                </a:solidFill>
+                <a:latin typeface="Arial"/>
+                <a:ea typeface="Arial"/>
+                <a:cs typeface="Arial"/>
+              </a:defRPr>
+            </a:pPr>
+            <a:r>
+              <a:t>16</a:t>
+            </a:r>
+          </a:p>
+        </p:txBody>
+      </p:sp>
+      <p:sp>
+        <p:nvSpPr>
+          <p:cNvPr id="10" name="s7-trials-label">
+            <a:extLst xmlns:a="http://schemas.openxmlformats.org/drawingml/2006/main">
+              <a:ext uri="{FF2B5EF4-FFF2-40B4-BE49-F238E27FC236}">
+                <a16:creationId xmlns:a16="http://schemas.microsoft.com/office/drawing/2014/main" id="{2DF71835-CBEC-4562-B233-A3CB203FE255}"/>
+              </a:ext>
+            </a:extLst>
+          </p:cNvPr>
+          <p:cNvSpPr>
+            <a:spLocks xmlns:a="http://schemas.openxmlformats.org/drawingml/2006/main" noGrp="1"/>
+          </p:cNvSpPr>
+          <p:nvPr/>
+        </p:nvSpPr>
+        <p:spPr>
+          <a:xfrm xmlns:a="http://schemas.openxmlformats.org/drawingml/2006/main">
+            <a:off x="781050" y="5695950"/>
+            <a:ext cx="1714500" cy="209550"/>
+          </a:xfrm>
+          <a:prstGeom xmlns:a="http://schemas.openxmlformats.org/drawingml/2006/main" prst="rect">
+            <a:avLst/>
+          </a:prstGeom>
+        </p:spPr>
+        <p:txBody>
+          <a:bodyPr xmlns:a="http://schemas.openxmlformats.org/drawingml/2006/main" wrap="square" lIns="0" tIns="0" rIns="0" bIns="0" anchor="t">
+            <a:noAutofit/>
+          </a:bodyPr>
+          <a:lstStyle xmlns:a="http://schemas.openxmlformats.org/drawingml/2006/main"/>
+          <a:p xmlns:a="http://schemas.openxmlformats.org/drawingml/2006/main">
+            <a:pPr algn="l">
+              <a:defRPr sz="1050" b="0">
+                <a:solidFill>
+                  <a:srgbClr val="FFFFFF"/>
+                </a:solidFill>
+                <a:latin typeface="Arial"/>
+                <a:ea typeface="Arial"/>
+                <a:cs typeface="Arial"/>
+              </a:defRPr>
+            </a:pPr>
+            <a:r>
+              <a:t>paired trials</a:t>
+            </a:r>
+          </a:p>
+        </p:txBody>
+      </p:sp>
+      <p:sp>
+        <p:nvSpPr>
+          <p:cNvPr id="11" name="s7-valid-value">
+            <a:extLst xmlns:a="http://schemas.openxmlformats.org/drawingml/2006/main">
+              <a:ext uri="{FF2B5EF4-FFF2-40B4-BE49-F238E27FC236}">
+                <a16:creationId xmlns:a16="http://schemas.microsoft.com/office/drawing/2014/main" id="{7BBA2535-9073-4A79-8497-AEC6FCD5FF57}"/>
+              </a:ext>
+            </a:extLst>
+          </p:cNvPr>
+          <p:cNvSpPr>
+            <a:spLocks xmlns:a="http://schemas.openxmlformats.org/drawingml/2006/main" noGrp="1"/>
+          </p:cNvSpPr>
+          <p:nvPr/>
+        </p:nvSpPr>
+        <p:spPr>
+          <a:xfrm xmlns:a="http://schemas.openxmlformats.org/drawingml/2006/main">
+            <a:off x="3028950" y="5353050"/>
+            <a:ext cx="1333500" cy="361950"/>
+          </a:xfrm>
+          <a:prstGeom xmlns:a="http://schemas.openxmlformats.org/drawingml/2006/main" prst="rect">
+            <a:avLst/>
+          </a:prstGeom>
+        </p:spPr>
+        <p:txBody>
+          <a:bodyPr xmlns:a="http://schemas.openxmlformats.org/drawingml/2006/main" wrap="square" lIns="0" tIns="0" rIns="0" bIns="0" anchor="t">
+            <a:noAutofit/>
+          </a:bodyPr>
+          <a:lstStyle xmlns:a="http://schemas.openxmlformats.org/drawingml/2006/main"/>
+          <a:p xmlns:a="http://schemas.openxmlformats.org/drawingml/2006/main">
+            <a:pPr algn="l">
+              <a:defRPr sz="2100" b="1">
+                <a:solidFill>
+                  <a:srgbClr val="15A777"/>
+                </a:solidFill>
+                <a:latin typeface="Arial"/>
+                <a:ea typeface="Arial"/>
+                <a:cs typeface="Arial"/>
+              </a:defRPr>
+            </a:pPr>
+            <a:r>
+              <a:t>64/64</a:t>
+            </a:r>
+          </a:p>
+        </p:txBody>
+      </p:sp>
+      <p:sp>
+        <p:nvSpPr>
+          <p:cNvPr id="12" name="s7-valid-label">
+            <a:extLst xmlns:a="http://schemas.openxmlformats.org/drawingml/2006/main">
+              <a:ext uri="{FF2B5EF4-FFF2-40B4-BE49-F238E27FC236}">
+                <a16:creationId xmlns:a16="http://schemas.microsoft.com/office/drawing/2014/main" id="{259E0AF5-5BBF-4C86-BFFB-D72143D8FEC9}"/>
+              </a:ext>
+            </a:extLst>
+          </p:cNvPr>
+          <p:cNvSpPr>
+            <a:spLocks xmlns:a="http://schemas.openxmlformats.org/drawingml/2006/main" noGrp="1"/>
+          </p:cNvSpPr>
+          <p:nvPr/>
+        </p:nvSpPr>
+        <p:spPr>
+          <a:xfrm xmlns:a="http://schemas.openxmlformats.org/drawingml/2006/main">
+            <a:off x="3028950" y="5695950"/>
+            <a:ext cx="2000250" cy="209550"/>
+          </a:xfrm>
+          <a:prstGeom xmlns:a="http://schemas.openxmlformats.org/drawingml/2006/main" prst="rect">
+            <a:avLst/>
+          </a:prstGeom>
+        </p:spPr>
+        <p:txBody>
+          <a:bodyPr xmlns:a="http://schemas.openxmlformats.org/drawingml/2006/main" wrap="square" lIns="0" tIns="0" rIns="0" bIns="0" anchor="t">
+            <a:noAutofit/>
+          </a:bodyPr>
+          <a:lstStyle xmlns:a="http://schemas.openxmlformats.org/drawingml/2006/main"/>
+          <a:p xmlns:a="http://schemas.openxmlformats.org/drawingml/2006/main">
+            <a:pPr algn="l">
+              <a:defRPr sz="1050" b="0">
+                <a:solidFill>
+                  <a:srgbClr val="FFFFFF"/>
+                </a:solidFill>
+                <a:latin typeface="Arial"/>
+                <a:ea typeface="Arial"/>
+                <a:cs typeface="Arial"/>
+              </a:defRPr>
+            </a:pPr>
+            <a:r>
+              <a:t>valid + successful</a:t>
+            </a:r>
+          </a:p>
+        </p:txBody>
+      </p:sp>
+      <p:sp>
+        <p:nvSpPr>
+          <p:cNvPr id="13" name="s7-oracle-value">
+            <a:extLst xmlns:a="http://schemas.openxmlformats.org/drawingml/2006/main">
+              <a:ext uri="{FF2B5EF4-FFF2-40B4-BE49-F238E27FC236}">
+                <a16:creationId xmlns:a16="http://schemas.microsoft.com/office/drawing/2014/main" id="{EDF855AB-325B-4DF9-88D8-B869B90BC2E4}"/>
+              </a:ext>
+            </a:extLst>
+          </p:cNvPr>
+          <p:cNvSpPr>
+            <a:spLocks xmlns:a="http://schemas.openxmlformats.org/drawingml/2006/main" noGrp="1"/>
+          </p:cNvSpPr>
+          <p:nvPr/>
+        </p:nvSpPr>
+        <p:spPr>
+          <a:xfrm xmlns:a="http://schemas.openxmlformats.org/drawingml/2006/main">
+            <a:off x="5695950" y="5353050"/>
+            <a:ext cx="1333500" cy="361950"/>
+          </a:xfrm>
+          <a:prstGeom xmlns:a="http://schemas.openxmlformats.org/drawingml/2006/main" prst="rect">
+            <a:avLst/>
+          </a:prstGeom>
+        </p:spPr>
+        <p:txBody>
+          <a:bodyPr xmlns:a="http://schemas.openxmlformats.org/drawingml/2006/main" wrap="square" lIns="0" tIns="0" rIns="0" bIns="0" anchor="t">
+            <a:noAutofit/>
+          </a:bodyPr>
+          <a:lstStyle xmlns:a="http://schemas.openxmlformats.org/drawingml/2006/main"/>
+          <a:p xmlns:a="http://schemas.openxmlformats.org/drawingml/2006/main">
+            <a:pPr algn="l">
+              <a:defRPr sz="2100" b="1">
+                <a:solidFill>
+                  <a:srgbClr val="15A777"/>
+                </a:solidFill>
+                <a:latin typeface="Arial"/>
+                <a:ea typeface="Arial"/>
+                <a:cs typeface="Arial"/>
+              </a:defRPr>
+            </a:pPr>
+            <a:r>
+              <a:t>64/64</a:t>
+            </a:r>
+          </a:p>
+        </p:txBody>
+      </p:sp>
+      <p:sp>
+        <p:nvSpPr>
+          <p:cNvPr id="14" name="s7-oracle-label">
+            <a:extLst xmlns:a="http://schemas.openxmlformats.org/drawingml/2006/main">
+              <a:ext uri="{FF2B5EF4-FFF2-40B4-BE49-F238E27FC236}">
+                <a16:creationId xmlns:a16="http://schemas.microsoft.com/office/drawing/2014/main" id="{645537D7-9E4D-459F-B4ED-99796785A8A1}"/>
+              </a:ext>
+            </a:extLst>
+          </p:cNvPr>
+          <p:cNvSpPr>
+            <a:spLocks xmlns:a="http://schemas.openxmlformats.org/drawingml/2006/main" noGrp="1"/>
+          </p:cNvSpPr>
+          <p:nvPr/>
+        </p:nvSpPr>
+        <p:spPr>
+          <a:xfrm xmlns:a="http://schemas.openxmlformats.org/drawingml/2006/main">
+            <a:off x="5695950" y="5695950"/>
             <a:ext cx="2095500" cy="209550"/>
           </a:xfrm>
           <a:prstGeom xmlns:a="http://schemas.openxmlformats.org/drawingml/2006/main" prst="rect">
@@ -11617,52 +11527,7 @@
           <a:lstStyle xmlns:a="http://schemas.openxmlformats.org/drawingml/2006/main"/>
           <a:p xmlns:a="http://schemas.openxmlformats.org/drawingml/2006/main">
             <a:pPr algn="l">
-              <a:defRPr sz="975" b="1">
-                <a:solidFill>
-                  <a:srgbClr val="13B7D5"/>
-                </a:solidFill>
-                <a:latin typeface="Arial"/>
-                <a:ea typeface="Arial"/>
-                <a:cs typeface="Arial"/>
-              </a:defRPr>
-            </a:pPr>
-            <a:r>
-              <a:t>NEXT v0.2.3 TEST</a:t>
-            </a:r>
-          </a:p>
-        </p:txBody>
-      </p:sp>
-      <p:sp>
-        <p:nvSpPr>
-          <p:cNvPr id="33" name="s7-next-v">
-            <a:extLst xmlns:a="http://schemas.openxmlformats.org/drawingml/2006/main">
-              <a:ext uri="{FF2B5EF4-FFF2-40B4-BE49-F238E27FC236}">
-                <a16:creationId xmlns:a16="http://schemas.microsoft.com/office/drawing/2014/main" id="{A9C04524-5C74-4103-9F81-D293978F0FE7}"/>
-              </a:ext>
-            </a:extLst>
-          </p:cNvPr>
-          <p:cNvSpPr>
-            <a:spLocks xmlns:a="http://schemas.openxmlformats.org/drawingml/2006/main" noGrp="1"/>
-          </p:cNvSpPr>
-          <p:nvPr/>
-        </p:nvSpPr>
-        <p:spPr>
-          <a:xfrm xmlns:a="http://schemas.openxmlformats.org/drawingml/2006/main">
-            <a:off x="2857500" y="5657850"/>
-            <a:ext cx="8477250" cy="247650"/>
-          </a:xfrm>
-          <a:prstGeom xmlns:a="http://schemas.openxmlformats.org/drawingml/2006/main" prst="rect">
-            <a:avLst/>
-          </a:prstGeom>
-        </p:spPr>
-        <p:txBody>
-          <a:bodyPr xmlns:a="http://schemas.openxmlformats.org/drawingml/2006/main" wrap="square" lIns="0" tIns="0" rIns="0" bIns="0" anchor="t">
-            <a:noAutofit/>
-          </a:bodyPr>
-          <a:lstStyle xmlns:a="http://schemas.openxmlformats.org/drawingml/2006/main"/>
-          <a:p xmlns:a="http://schemas.openxmlformats.org/drawingml/2006/main">
-            <a:pPr algn="l">
-              <a:defRPr sz="1200" b="0">
+              <a:defRPr sz="1050" b="0">
                 <a:solidFill>
                   <a:srgbClr val="FFFFFF"/>
                 </a:solidFill>
@@ -11672,14 +11537,104 @@
               </a:defRPr>
             </a:pPr>
             <a:r>
-              <a:t>larger real repos | hidden memory-dependent traps | repeated models, machines, and long-lived sessions</a:t>
+              <a:t>public + hidden tests</a:t>
+            </a:r>
+          </a:p>
+        </p:txBody>
+      </p:sp>
+      <p:sp>
+        <p:nvSpPr>
+          <p:cNvPr id="15" name="s7-scope-value">
+            <a:extLst xmlns:a="http://schemas.openxmlformats.org/drawingml/2006/main">
+              <a:ext uri="{FF2B5EF4-FFF2-40B4-BE49-F238E27FC236}">
+                <a16:creationId xmlns:a16="http://schemas.microsoft.com/office/drawing/2014/main" id="{C5FE38AC-BA82-4019-AD3C-10FBD1AADF3B}"/>
+              </a:ext>
+            </a:extLst>
+          </p:cNvPr>
+          <p:cNvSpPr>
+            <a:spLocks xmlns:a="http://schemas.openxmlformats.org/drawingml/2006/main" noGrp="1"/>
+          </p:cNvSpPr>
+          <p:nvPr/>
+        </p:nvSpPr>
+        <p:spPr>
+          <a:xfrm xmlns:a="http://schemas.openxmlformats.org/drawingml/2006/main">
+            <a:off x="8496300" y="5372100"/>
+            <a:ext cx="2476500" cy="323850"/>
+          </a:xfrm>
+          <a:prstGeom xmlns:a="http://schemas.openxmlformats.org/drawingml/2006/main" prst="rect">
+            <a:avLst/>
+          </a:prstGeom>
+        </p:spPr>
+        <p:txBody>
+          <a:bodyPr xmlns:a="http://schemas.openxmlformats.org/drawingml/2006/main" wrap="square" lIns="0" tIns="0" rIns="0" bIns="0" anchor="t">
+            <a:noAutofit/>
+          </a:bodyPr>
+          <a:lstStyle xmlns:a="http://schemas.openxmlformats.org/drawingml/2006/main"/>
+          <a:p xmlns:a="http://schemas.openxmlformats.org/drawingml/2006/main">
+            <a:pPr algn="l">
+              <a:defRPr sz="1800" b="1">
+                <a:solidFill>
+                  <a:srgbClr val="7438F5"/>
+                </a:solidFill>
+                <a:latin typeface="Arial"/>
+                <a:ea typeface="Arial"/>
+                <a:cs typeface="Arial"/>
+              </a:defRPr>
+            </a:pPr>
+            <a:r>
+              <a:t>100/100  |  0</a:t>
+            </a:r>
+          </a:p>
+        </p:txBody>
+      </p:sp>
+      <p:sp>
+        <p:nvSpPr>
+          <p:cNvPr id="16" name="s7-scope-label">
+            <a:extLst xmlns:a="http://schemas.openxmlformats.org/drawingml/2006/main">
+              <a:ext uri="{FF2B5EF4-FFF2-40B4-BE49-F238E27FC236}">
+                <a16:creationId xmlns:a16="http://schemas.microsoft.com/office/drawing/2014/main" id="{174652C7-AAE1-4863-BD86-0A74BA8029B4}"/>
+              </a:ext>
+            </a:extLst>
+          </p:cNvPr>
+          <p:cNvSpPr>
+            <a:spLocks xmlns:a="http://schemas.openxmlformats.org/drawingml/2006/main" noGrp="1"/>
+          </p:cNvSpPr>
+          <p:nvPr/>
+        </p:nvSpPr>
+        <p:spPr>
+          <a:xfrm xmlns:a="http://schemas.openxmlformats.org/drawingml/2006/main">
+            <a:off x="8496300" y="5695950"/>
+            <a:ext cx="2724150" cy="209550"/>
+          </a:xfrm>
+          <a:prstGeom xmlns:a="http://schemas.openxmlformats.org/drawingml/2006/main" prst="rect">
+            <a:avLst/>
+          </a:prstGeom>
+        </p:spPr>
+        <p:txBody>
+          <a:bodyPr xmlns:a="http://schemas.openxmlformats.org/drawingml/2006/main" wrap="square" lIns="0" tIns="0" rIns="0" bIns="0" anchor="t">
+            <a:noAutofit/>
+          </a:bodyPr>
+          <a:lstStyle xmlns:a="http://schemas.openxmlformats.org/drawingml/2006/main"/>
+          <a:p xmlns:a="http://schemas.openxmlformats.org/drawingml/2006/main">
+            <a:pPr algn="l">
+              <a:defRPr sz="1050" b="0">
+                <a:solidFill>
+                  <a:srgbClr val="FFFFFF"/>
+                </a:solidFill>
+                <a:latin typeface="Arial"/>
+                <a:ea typeface="Arial"/>
+                <a:cs typeface="Arial"/>
+              </a:defRPr>
+            </a:pPr>
+            <a:r>
+              <a:t>scope score  |  forbidden files</a:t>
             </a:r>
           </a:p>
         </p:txBody>
       </p:sp>
       <p:cxnSp>
         <p:nvCxnSpPr>
-          <p:cNvPr id="70" name="footer-rule-7"/>
+          <p:cNvPr id="39" name="footer-rule-7"/>
           <p:cNvCxnSpPr/>
           <p:nvPr/>
         </p:nvCxnSpPr>
@@ -11701,10 +11656,10 @@
       </p:cxnSp>
       <p:sp>
         <p:nvSpPr>
-          <p:cNvPr id="35" name="footer-source-7">
-            <a:extLst xmlns:a="http://schemas.openxmlformats.org/drawingml/2006/main">
-              <a:ext uri="{FF2B5EF4-FFF2-40B4-BE49-F238E27FC236}">
-                <a16:creationId xmlns:a16="http://schemas.microsoft.com/office/drawing/2014/main" id="{E1F073E0-8D3F-4691-A296-136380F07518}"/>
+          <p:cNvPr id="18" name="footer-source-7">
+            <a:extLst xmlns:a="http://schemas.openxmlformats.org/drawingml/2006/main">
+              <a:ext uri="{FF2B5EF4-FFF2-40B4-BE49-F238E27FC236}">
+                <a16:creationId xmlns:a16="http://schemas.microsoft.com/office/drawing/2014/main" id="{FF30E29D-8AC5-4B2E-B240-A50DFA41E1A4}"/>
               </a:ext>
             </a:extLst>
           </p:cNvPr>
@@ -11739,17 +11694,17 @@
               </a:defRPr>
             </a:pPr>
             <a:r>
-              <a:t>Codex alone = no-Palace Control | Adaptive - Codex paired differences | synthetic repositories | Vertex Palace 0.2.1</a:t>
-            </a:r>
-          </a:p>
-        </p:txBody>
-      </p:sp>
-      <p:sp>
-        <p:nvSpPr>
-          <p:cNvPr id="36" name="footer-number-7">
-            <a:extLst xmlns:a="http://schemas.openxmlformats.org/drawingml/2006/main">
-              <a:ext uri="{FF2B5EF4-FFF2-40B4-BE49-F238E27FC236}">
-                <a16:creationId xmlns:a16="http://schemas.microsoft.com/office/drawing/2014/main" id="{DAB0B09A-D16B-40D6-9753-1FF46C3D1254}"/>
+              <a:t>Source: benchmarks-demo/results/adaptive-pilot-v2.2/analysis.json | protocol v2.2 | Vertex Palace 0.2.1</a:t>
+            </a:r>
+          </a:p>
+        </p:txBody>
+      </p:sp>
+      <p:sp>
+        <p:nvSpPr>
+          <p:cNvPr id="19" name="footer-number-7">
+            <a:extLst xmlns:a="http://schemas.openxmlformats.org/drawingml/2006/main">
+              <a:ext uri="{FF2B5EF4-FFF2-40B4-BE49-F238E27FC236}">
+                <a16:creationId xmlns:a16="http://schemas.microsoft.com/office/drawing/2014/main" id="{9C82D6D0-1E57-4581-BD39-4EF9978DE21F}"/>
               </a:ext>
             </a:extLst>
           </p:cNvPr>
@@ -11789,10 +11744,58 @@
           </a:p>
         </p:txBody>
       </p:sp>
+      <p:graphicFrame>
+        <p:nvGraphicFramePr>
+          <p:cNvPr id="42" name="Chart"/>
+          <p:cNvGraphicFramePr/>
+          <p:nvPr/>
+        </p:nvGraphicFramePr>
+        <p:xfrm>
+          <a:off xmlns:a="http://schemas.openxmlformats.org/drawingml/2006/main" x="400050" y="1790700"/>
+          <a:ext xmlns:a="http://schemas.openxmlformats.org/drawingml/2006/main" cx="3524250" cy="3257550"/>
+        </p:xfrm>
+        <a:graphic xmlns:a="http://schemas.openxmlformats.org/drawingml/2006/main">
+          <a:graphicData uri="http://schemas.openxmlformats.org/drawingml/2006/chart">
+            <c:chart xmlns:r="http://schemas.openxmlformats.org/officeDocument/2006/relationships" xmlns:c="http://schemas.openxmlformats.org/drawingml/2006/chart" r:id="R97557cef05934714"/>
+          </a:graphicData>
+        </a:graphic>
+      </p:graphicFrame>
+      <p:graphicFrame>
+        <p:nvGraphicFramePr>
+          <p:cNvPr id="43" name="Chart"/>
+          <p:cNvGraphicFramePr/>
+          <p:nvPr/>
+        </p:nvGraphicFramePr>
+        <p:xfrm>
+          <a:off xmlns:a="http://schemas.openxmlformats.org/drawingml/2006/main" x="4324350" y="1790700"/>
+          <a:ext xmlns:a="http://schemas.openxmlformats.org/drawingml/2006/main" cx="3524250" cy="3257550"/>
+        </p:xfrm>
+        <a:graphic xmlns:a="http://schemas.openxmlformats.org/drawingml/2006/main">
+          <a:graphicData uri="http://schemas.openxmlformats.org/drawingml/2006/chart">
+            <c:chart xmlns:r="http://schemas.openxmlformats.org/officeDocument/2006/relationships" xmlns:c="http://schemas.openxmlformats.org/drawingml/2006/chart" r:id="R81a4578012ed46a1"/>
+          </a:graphicData>
+        </a:graphic>
+      </p:graphicFrame>
+      <p:graphicFrame>
+        <p:nvGraphicFramePr>
+          <p:cNvPr id="44" name="Chart"/>
+          <p:cNvGraphicFramePr/>
+          <p:nvPr/>
+        </p:nvGraphicFramePr>
+        <p:xfrm>
+          <a:off xmlns:a="http://schemas.openxmlformats.org/drawingml/2006/main" x="8248650" y="1790700"/>
+          <a:ext xmlns:a="http://schemas.openxmlformats.org/drawingml/2006/main" cx="3524250" cy="3257550"/>
+        </p:xfrm>
+        <a:graphic xmlns:a="http://schemas.openxmlformats.org/drawingml/2006/main">
+          <a:graphicData uri="http://schemas.openxmlformats.org/drawingml/2006/chart">
+            <c:chart xmlns:r="http://schemas.openxmlformats.org/officeDocument/2006/relationships" xmlns:c="http://schemas.openxmlformats.org/drawingml/2006/chart" r:id="R0505eec2270642c9"/>
+          </a:graphicData>
+        </a:graphic>
+      </p:graphicFrame>
     </p:spTree>
     <p:extLst>
       <p:ext uri="{BB962C8B-B14F-4D97-AF65-F5344CB8AC3E}">
-        <p14:creationId xmlns:p14="http://schemas.microsoft.com/office/powerpoint/2010/main" val="411809908"/>
+        <p14:creationId xmlns:p14="http://schemas.microsoft.com/office/powerpoint/2010/main" val="1498020992"/>
       </p:ext>
     </p:extLst>
   </p:cSld>
@@ -11820,10 +11823,10 @@
       </p:grpSpPr>
       <p:sp>
         <p:nvSpPr>
-          <p:cNvPr id="33" name="s9-title">
-            <a:extLst xmlns:a="http://schemas.openxmlformats.org/drawingml/2006/main">
-              <a:ext uri="{FF2B5EF4-FFF2-40B4-BE49-F238E27FC236}">
-                <a16:creationId xmlns:a16="http://schemas.microsoft.com/office/drawing/2014/main" id="{3F6A80DB-3BA3-43F9-A774-EE16B5AEA619}"/>
+          <p:cNvPr id="55" name="s8-title-chart">
+            <a:extLst xmlns:a="http://schemas.openxmlformats.org/drawingml/2006/main">
+              <a:ext uri="{FF2B5EF4-FFF2-40B4-BE49-F238E27FC236}">
+                <a16:creationId xmlns:a16="http://schemas.microsoft.com/office/drawing/2014/main" id="{9166E73C-9D03-4640-8AE6-F2BD23B333F1}"/>
               </a:ext>
             </a:extLst>
           </p:cNvPr>
@@ -11835,20 +11838,20 @@
         <p:spPr>
           <a:xfrm xmlns:a="http://schemas.openxmlformats.org/drawingml/2006/main">
             <a:off x="400050" y="323850"/>
-            <a:ext cx="11391900" cy="723900"/>
-          </a:xfrm>
-          <a:prstGeom xmlns:a="http://schemas.openxmlformats.org/drawingml/2006/main" prst="rect">
-            <a:avLst/>
-          </a:prstGeom>
-        </p:spPr>
-        <p:txBody>
-          <a:bodyPr xmlns:a="http://schemas.openxmlformats.org/drawingml/2006/main" wrap="square" lIns="0" tIns="0" rIns="0" bIns="0" anchor="t">
-            <a:noAutofit/>
-          </a:bodyPr>
-          <a:lstStyle xmlns:a="http://schemas.openxmlformats.org/drawingml/2006/main"/>
-          <a:p xmlns:a="http://schemas.openxmlformats.org/drawingml/2006/main">
-            <a:pPr algn="l">
-              <a:defRPr sz="3000" b="1">
+            <a:ext cx="11391900" cy="666750"/>
+          </a:xfrm>
+          <a:prstGeom xmlns:a="http://schemas.openxmlformats.org/drawingml/2006/main" prst="rect">
+            <a:avLst/>
+          </a:prstGeom>
+        </p:spPr>
+        <p:txBody>
+          <a:bodyPr xmlns:a="http://schemas.openxmlformats.org/drawingml/2006/main" wrap="square" lIns="0" tIns="0" rIns="0" bIns="0" anchor="t">
+            <a:noAutofit/>
+          </a:bodyPr>
+          <a:lstStyle xmlns:a="http://schemas.openxmlformats.org/drawingml/2006/main"/>
+          <a:p xmlns:a="http://schemas.openxmlformats.org/drawingml/2006/main">
+            <a:pPr algn="l">
+              <a:defRPr sz="2925" b="1">
                 <a:solidFill>
                   <a:srgbClr val="0A1224"/>
                 </a:solidFill>
@@ -11858,42 +11861,42 @@
               </a:defRPr>
             </a:pPr>
             <a:r>
-              <a:t>Correctness was held constant before efficiency.</a:t>
-            </a:r>
-          </a:p>
-        </p:txBody>
-      </p:sp>
-      <p:sp>
-        <p:nvSpPr>
-          <p:cNvPr id="2" name="s9-subtitle">
-            <a:extLst xmlns:a="http://schemas.openxmlformats.org/drawingml/2006/main">
-              <a:ext uri="{FF2B5EF4-FFF2-40B4-BE49-F238E27FC236}">
-                <a16:creationId xmlns:a16="http://schemas.microsoft.com/office/drawing/2014/main" id="{7A477C61-ECC1-4AFC-A3BD-F8328130C7FF}"/>
-              </a:ext>
-            </a:extLst>
-          </p:cNvPr>
-          <p:cNvSpPr>
-            <a:spLocks xmlns:a="http://schemas.openxmlformats.org/drawingml/2006/main" noGrp="1"/>
-          </p:cNvSpPr>
-          <p:nvPr/>
-        </p:nvSpPr>
-        <p:spPr>
-          <a:xfrm xmlns:a="http://schemas.openxmlformats.org/drawingml/2006/main">
-            <a:off x="400050" y="1066800"/>
-            <a:ext cx="10668000" cy="381000"/>
-          </a:xfrm>
-          <a:prstGeom xmlns:a="http://schemas.openxmlformats.org/drawingml/2006/main" prst="rect">
-            <a:avLst/>
-          </a:prstGeom>
-        </p:spPr>
-        <p:txBody>
-          <a:bodyPr xmlns:a="http://schemas.openxmlformats.org/drawingml/2006/main" wrap="square" lIns="0" tIns="0" rIns="0" bIns="0" anchor="t">
-            <a:noAutofit/>
-          </a:bodyPr>
-          <a:lstStyle xmlns:a="http://schemas.openxmlformats.org/drawingml/2006/main"/>
-          <a:p xmlns:a="http://schemas.openxmlformats.org/drawingml/2006/main">
-            <a:pPr algn="l">
-              <a:defRPr sz="1500" b="0">
+              <a:t>Adaptive vs Codex alone: only extra tool calls cleared zero.</a:t>
+            </a:r>
+          </a:p>
+        </p:txBody>
+      </p:sp>
+      <p:sp>
+        <p:nvSpPr>
+          <p:cNvPr id="2" name="s8-subtitle-chart">
+            <a:extLst xmlns:a="http://schemas.openxmlformats.org/drawingml/2006/main">
+              <a:ext uri="{FF2B5EF4-FFF2-40B4-BE49-F238E27FC236}">
+                <a16:creationId xmlns:a16="http://schemas.microsoft.com/office/drawing/2014/main" id="{1A9B4094-E05E-41D7-BAC4-D450E3C2CE47}"/>
+              </a:ext>
+            </a:extLst>
+          </p:cNvPr>
+          <p:cNvSpPr>
+            <a:spLocks xmlns:a="http://schemas.openxmlformats.org/drawingml/2006/main" noGrp="1"/>
+          </p:cNvSpPr>
+          <p:nvPr/>
+        </p:nvSpPr>
+        <p:spPr>
+          <a:xfrm xmlns:a="http://schemas.openxmlformats.org/drawingml/2006/main">
+            <a:off x="400050" y="1028700"/>
+            <a:ext cx="11239500" cy="419100"/>
+          </a:xfrm>
+          <a:prstGeom xmlns:a="http://schemas.openxmlformats.org/drawingml/2006/main" prst="rect">
+            <a:avLst/>
+          </a:prstGeom>
+        </p:spPr>
+        <p:txBody>
+          <a:bodyPr xmlns:a="http://schemas.openxmlformats.org/drawingml/2006/main" wrap="square" lIns="0" tIns="0" rIns="0" bIns="0" anchor="t">
+            <a:noAutofit/>
+          </a:bodyPr>
+          <a:lstStyle xmlns:a="http://schemas.openxmlformats.org/drawingml/2006/main"/>
+          <a:p xmlns:a="http://schemas.openxmlformats.org/drawingml/2006/main">
+            <a:pPr algn="l">
+              <a:defRPr sz="1313" b="0">
                 <a:solidFill>
                   <a:srgbClr val="526071"/>
                 </a:solidFill>
@@ -11903,42 +11906,42 @@
               </a:defRPr>
             </a:pPr>
             <a:r>
-              <a:t>Every arm had to clear the same validity, oracle, and scope gates.</a:t>
-            </a:r>
-          </a:p>
-        </p:txBody>
-      </p:sp>
-      <p:sp>
-        <p:nvSpPr>
-          <p:cNvPr id="3" name="s9-gate-h">
-            <a:extLst xmlns:a="http://schemas.openxmlformats.org/drawingml/2006/main">
-              <a:ext uri="{FF2B5EF4-FFF2-40B4-BE49-F238E27FC236}">
-                <a16:creationId xmlns:a16="http://schemas.microsoft.com/office/drawing/2014/main" id="{69656CF1-5088-4DED-9B69-DC1AC9EB1EC2}"/>
-              </a:ext>
-            </a:extLst>
-          </p:cNvPr>
-          <p:cNvSpPr>
-            <a:spLocks xmlns:a="http://schemas.openxmlformats.org/drawingml/2006/main" noGrp="1"/>
-          </p:cNvSpPr>
-          <p:nvPr/>
-        </p:nvSpPr>
-        <p:spPr>
-          <a:xfrm xmlns:a="http://schemas.openxmlformats.org/drawingml/2006/main">
-            <a:off x="685800" y="1714500"/>
-            <a:ext cx="3429000" cy="209550"/>
-          </a:xfrm>
-          <a:prstGeom xmlns:a="http://schemas.openxmlformats.org/drawingml/2006/main" prst="rect">
-            <a:avLst/>
-          </a:prstGeom>
-        </p:spPr>
-        <p:txBody>
-          <a:bodyPr xmlns:a="http://schemas.openxmlformats.org/drawingml/2006/main" wrap="square" lIns="0" tIns="0" rIns="0" bIns="0" anchor="t">
-            <a:noAutofit/>
-          </a:bodyPr>
-          <a:lstStyle xmlns:a="http://schemas.openxmlformats.org/drawingml/2006/main"/>
-          <a:p xmlns:a="http://schemas.openxmlformats.org/drawingml/2006/main">
-            <a:pPr algn="l">
-              <a:defRPr sz="1050" b="1">
+              <a:t>Adaptive - Codex paired medians and 95% bootstrap intervals. Positive means Adaptive used more; each row has its own unit and scale.</a:t>
+            </a:r>
+          </a:p>
+        </p:txBody>
+      </p:sp>
+      <p:sp>
+        <p:nvSpPr>
+          <p:cNvPr id="3" name="s8-negative-label">
+            <a:extLst xmlns:a="http://schemas.openxmlformats.org/drawingml/2006/main">
+              <a:ext uri="{FF2B5EF4-FFF2-40B4-BE49-F238E27FC236}">
+                <a16:creationId xmlns:a16="http://schemas.microsoft.com/office/drawing/2014/main" id="{188B3FDD-7AD1-403D-BE29-84EB7298E782}"/>
+              </a:ext>
+            </a:extLst>
+          </p:cNvPr>
+          <p:cNvSpPr>
+            <a:spLocks xmlns:a="http://schemas.openxmlformats.org/drawingml/2006/main" noGrp="1"/>
+          </p:cNvSpPr>
+          <p:nvPr/>
+        </p:nvSpPr>
+        <p:spPr>
+          <a:xfrm xmlns:a="http://schemas.openxmlformats.org/drawingml/2006/main">
+            <a:off x="5334000" y="1524000"/>
+            <a:ext cx="1524000" cy="209550"/>
+          </a:xfrm>
+          <a:prstGeom xmlns:a="http://schemas.openxmlformats.org/drawingml/2006/main" prst="rect">
+            <a:avLst/>
+          </a:prstGeom>
+        </p:spPr>
+        <p:txBody>
+          <a:bodyPr xmlns:a="http://schemas.openxmlformats.org/drawingml/2006/main" wrap="square" lIns="0" tIns="0" rIns="0" bIns="0" anchor="t">
+            <a:noAutofit/>
+          </a:bodyPr>
+          <a:lstStyle xmlns:a="http://schemas.openxmlformats.org/drawingml/2006/main"/>
+          <a:p xmlns:a="http://schemas.openxmlformats.org/drawingml/2006/main">
+            <a:pPr algn="l">
+              <a:defRPr sz="975" b="0">
                 <a:solidFill>
                   <a:srgbClr val="526071"/>
                 </a:solidFill>
@@ -11948,29 +11951,442 @@
               </a:defRPr>
             </a:pPr>
             <a:r>
-              <a:t>GATE</a:t>
-            </a:r>
-          </a:p>
-        </p:txBody>
-      </p:sp>
-      <p:sp>
-        <p:nvSpPr>
-          <p:cNvPr id="4" name="s9-result-h">
-            <a:extLst xmlns:a="http://schemas.openxmlformats.org/drawingml/2006/main">
-              <a:ext uri="{FF2B5EF4-FFF2-40B4-BE49-F238E27FC236}">
-                <a16:creationId xmlns:a16="http://schemas.microsoft.com/office/drawing/2014/main" id="{AA115A8F-8DF3-41E8-BC7D-18282885308D}"/>
-              </a:ext>
-            </a:extLst>
-          </p:cNvPr>
-          <p:cNvSpPr>
-            <a:spLocks xmlns:a="http://schemas.openxmlformats.org/drawingml/2006/main" noGrp="1"/>
-          </p:cNvSpPr>
-          <p:nvPr/>
-        </p:nvSpPr>
-        <p:spPr>
-          <a:xfrm xmlns:a="http://schemas.openxmlformats.org/drawingml/2006/main">
-            <a:off x="5619750" y="1714500"/>
+              <a:t>FAVORS ADAPTIVE</a:t>
+            </a:r>
+          </a:p>
+        </p:txBody>
+      </p:sp>
+      <p:sp>
+        <p:nvSpPr>
+          <p:cNvPr id="4" name="s8-zero-heading">
+            <a:extLst xmlns:a="http://schemas.openxmlformats.org/drawingml/2006/main">
+              <a:ext uri="{FF2B5EF4-FFF2-40B4-BE49-F238E27FC236}">
+                <a16:creationId xmlns:a16="http://schemas.microsoft.com/office/drawing/2014/main" id="{AB66A113-19AE-47B4-89EB-7C32ADB90B6E}"/>
+              </a:ext>
+            </a:extLst>
+          </p:cNvPr>
+          <p:cNvSpPr>
+            <a:spLocks xmlns:a="http://schemas.openxmlformats.org/drawingml/2006/main" noGrp="1"/>
+          </p:cNvSpPr>
+          <p:nvPr/>
+        </p:nvSpPr>
+        <p:spPr>
+          <a:xfrm xmlns:a="http://schemas.openxmlformats.org/drawingml/2006/main">
+            <a:off x="7410450" y="1524000"/>
+            <a:ext cx="609600" cy="209550"/>
+          </a:xfrm>
+          <a:prstGeom xmlns:a="http://schemas.openxmlformats.org/drawingml/2006/main" prst="rect">
+            <a:avLst/>
+          </a:prstGeom>
+        </p:spPr>
+        <p:txBody>
+          <a:bodyPr xmlns:a="http://schemas.openxmlformats.org/drawingml/2006/main" wrap="square" lIns="0" tIns="0" rIns="0" bIns="0" anchor="t">
+            <a:noAutofit/>
+          </a:bodyPr>
+          <a:lstStyle xmlns:a="http://schemas.openxmlformats.org/drawingml/2006/main"/>
+          <a:p xmlns:a="http://schemas.openxmlformats.org/drawingml/2006/main">
+            <a:pPr algn="ctr">
+              <a:defRPr sz="975" b="1">
+                <a:solidFill>
+                  <a:srgbClr val="0A1224"/>
+                </a:solidFill>
+                <a:latin typeface="Arial"/>
+                <a:ea typeface="Arial"/>
+                <a:cs typeface="Arial"/>
+              </a:defRPr>
+            </a:pPr>
+            <a:r>
+              <a:t>ZERO</a:t>
+            </a:r>
+          </a:p>
+        </p:txBody>
+      </p:sp>
+      <p:sp>
+        <p:nvSpPr>
+          <p:cNvPr id="5" name="s8-positive-label">
+            <a:extLst xmlns:a="http://schemas.openxmlformats.org/drawingml/2006/main">
+              <a:ext uri="{FF2B5EF4-FFF2-40B4-BE49-F238E27FC236}">
+                <a16:creationId xmlns:a16="http://schemas.microsoft.com/office/drawing/2014/main" id="{4119E917-B66E-4A8B-9784-0A3B07873B65}"/>
+              </a:ext>
+            </a:extLst>
+          </p:cNvPr>
+          <p:cNvSpPr>
+            <a:spLocks xmlns:a="http://schemas.openxmlformats.org/drawingml/2006/main" noGrp="1"/>
+          </p:cNvSpPr>
+          <p:nvPr/>
+        </p:nvSpPr>
+        <p:spPr>
+          <a:xfrm xmlns:a="http://schemas.openxmlformats.org/drawingml/2006/main">
+            <a:off x="8382000" y="1524000"/>
             <a:ext cx="1428750" cy="209550"/>
+          </a:xfrm>
+          <a:prstGeom xmlns:a="http://schemas.openxmlformats.org/drawingml/2006/main" prst="rect">
+            <a:avLst/>
+          </a:prstGeom>
+        </p:spPr>
+        <p:txBody>
+          <a:bodyPr xmlns:a="http://schemas.openxmlformats.org/drawingml/2006/main" wrap="square" lIns="0" tIns="0" rIns="0" bIns="0" anchor="t">
+            <a:noAutofit/>
+          </a:bodyPr>
+          <a:lstStyle xmlns:a="http://schemas.openxmlformats.org/drawingml/2006/main"/>
+          <a:p xmlns:a="http://schemas.openxmlformats.org/drawingml/2006/main">
+            <a:pPr algn="r">
+              <a:defRPr sz="975" b="0">
+                <a:solidFill>
+                  <a:srgbClr val="526071"/>
+                </a:solidFill>
+                <a:latin typeface="Arial"/>
+                <a:ea typeface="Arial"/>
+                <a:cs typeface="Arial"/>
+              </a:defRPr>
+            </a:pPr>
+            <a:r>
+              <a:t>ADAPTIVE USES MORE</a:t>
+            </a:r>
+          </a:p>
+        </p:txBody>
+      </p:sp>
+      <p:sp>
+        <p:nvSpPr>
+          <p:cNvPr id="6" name="s8-calls-label">
+            <a:extLst xmlns:a="http://schemas.openxmlformats.org/drawingml/2006/main">
+              <a:ext uri="{FF2B5EF4-FFF2-40B4-BE49-F238E27FC236}">
+                <a16:creationId xmlns:a16="http://schemas.microsoft.com/office/drawing/2014/main" id="{EC812F7C-100E-4934-8458-FD858F6361C8}"/>
+              </a:ext>
+            </a:extLst>
+          </p:cNvPr>
+          <p:cNvSpPr>
+            <a:spLocks xmlns:a="http://schemas.openxmlformats.org/drawingml/2006/main" noGrp="1"/>
+          </p:cNvSpPr>
+          <p:nvPr/>
+        </p:nvSpPr>
+        <p:spPr>
+          <a:xfrm xmlns:a="http://schemas.openxmlformats.org/drawingml/2006/main">
+            <a:off x="685800" y="1809750"/>
+            <a:ext cx="1714500" cy="209550"/>
+          </a:xfrm>
+          <a:prstGeom xmlns:a="http://schemas.openxmlformats.org/drawingml/2006/main" prst="rect">
+            <a:avLst/>
+          </a:prstGeom>
+        </p:spPr>
+        <p:txBody>
+          <a:bodyPr xmlns:a="http://schemas.openxmlformats.org/drawingml/2006/main" wrap="square" lIns="0" tIns="0" rIns="0" bIns="0" anchor="t">
+            <a:noAutofit/>
+          </a:bodyPr>
+          <a:lstStyle xmlns:a="http://schemas.openxmlformats.org/drawingml/2006/main"/>
+          <a:p xmlns:a="http://schemas.openxmlformats.org/drawingml/2006/main">
+            <a:pPr algn="l">
+              <a:defRPr sz="1125" b="1">
+                <a:solidFill>
+                  <a:srgbClr val="526071"/>
+                </a:solidFill>
+                <a:latin typeface="Arial"/>
+                <a:ea typeface="Arial"/>
+                <a:cs typeface="Arial"/>
+              </a:defRPr>
+            </a:pPr>
+            <a:r>
+              <a:t>TOOL CALLS</a:t>
+            </a:r>
+          </a:p>
+        </p:txBody>
+      </p:sp>
+      <p:sp>
+        <p:nvSpPr>
+          <p:cNvPr id="7" name="s8-calls-value">
+            <a:extLst xmlns:a="http://schemas.openxmlformats.org/drawingml/2006/main">
+              <a:ext uri="{FF2B5EF4-FFF2-40B4-BE49-F238E27FC236}">
+                <a16:creationId xmlns:a16="http://schemas.microsoft.com/office/drawing/2014/main" id="{846CEA3C-EBBA-46E6-BCC6-2BF12C8E10ED}"/>
+              </a:ext>
+            </a:extLst>
+          </p:cNvPr>
+          <p:cNvSpPr>
+            <a:spLocks xmlns:a="http://schemas.openxmlformats.org/drawingml/2006/main" noGrp="1"/>
+          </p:cNvSpPr>
+          <p:nvPr/>
+        </p:nvSpPr>
+        <p:spPr>
+          <a:xfrm xmlns:a="http://schemas.openxmlformats.org/drawingml/2006/main">
+            <a:off x="685800" y="2057400"/>
+            <a:ext cx="1809750" cy="381000"/>
+          </a:xfrm>
+          <a:prstGeom xmlns:a="http://schemas.openxmlformats.org/drawingml/2006/main" prst="rect">
+            <a:avLst/>
+          </a:prstGeom>
+        </p:spPr>
+        <p:txBody>
+          <a:bodyPr xmlns:a="http://schemas.openxmlformats.org/drawingml/2006/main" wrap="square" lIns="0" tIns="0" rIns="0" bIns="0" anchor="t">
+            <a:noAutofit/>
+          </a:bodyPr>
+          <a:lstStyle xmlns:a="http://schemas.openxmlformats.org/drawingml/2006/main"/>
+          <a:p xmlns:a="http://schemas.openxmlformats.org/drawingml/2006/main">
+            <a:pPr algn="l">
+              <a:defRPr sz="2250" b="1">
+                <a:solidFill>
+                  <a:srgbClr val="D4515D"/>
+                </a:solidFill>
+                <a:latin typeface="Arial"/>
+                <a:ea typeface="Arial"/>
+                <a:cs typeface="Arial"/>
+              </a:defRPr>
+            </a:pPr>
+            <a:r>
+              <a:t>+4.5 calls</a:t>
+            </a:r>
+          </a:p>
+        </p:txBody>
+      </p:sp>
+      <p:sp>
+        <p:nvSpPr>
+          <p:cNvPr id="8" name="s8-calls-ci">
+            <a:extLst xmlns:a="http://schemas.openxmlformats.org/drawingml/2006/main">
+              <a:ext uri="{FF2B5EF4-FFF2-40B4-BE49-F238E27FC236}">
+                <a16:creationId xmlns:a16="http://schemas.microsoft.com/office/drawing/2014/main" id="{185D4B14-9850-468E-9225-95B3CA62EDA3}"/>
+              </a:ext>
+            </a:extLst>
+          </p:cNvPr>
+          <p:cNvSpPr>
+            <a:spLocks xmlns:a="http://schemas.openxmlformats.org/drawingml/2006/main" noGrp="1"/>
+          </p:cNvSpPr>
+          <p:nvPr/>
+        </p:nvSpPr>
+        <p:spPr>
+          <a:xfrm xmlns:a="http://schemas.openxmlformats.org/drawingml/2006/main">
+            <a:off x="2571750" y="2124075"/>
+            <a:ext cx="2476500" cy="247650"/>
+          </a:xfrm>
+          <a:prstGeom xmlns:a="http://schemas.openxmlformats.org/drawingml/2006/main" prst="rect">
+            <a:avLst/>
+          </a:prstGeom>
+        </p:spPr>
+        <p:txBody>
+          <a:bodyPr xmlns:a="http://schemas.openxmlformats.org/drawingml/2006/main" wrap="square" lIns="0" tIns="0" rIns="0" bIns="0" anchor="t">
+            <a:noAutofit/>
+          </a:bodyPr>
+          <a:lstStyle xmlns:a="http://schemas.openxmlformats.org/drawingml/2006/main"/>
+          <a:p xmlns:a="http://schemas.openxmlformats.org/drawingml/2006/main">
+            <a:pPr algn="l">
+              <a:defRPr sz="1200" b="0">
+                <a:solidFill>
+                  <a:srgbClr val="526071"/>
+                </a:solidFill>
+                <a:latin typeface="Arial"/>
+                <a:ea typeface="Arial"/>
+                <a:cs typeface="Arial"/>
+              </a:defRPr>
+            </a:pPr>
+            <a:r>
+              <a:t>95% CI  +2.5 to +6.5</a:t>
+            </a:r>
+          </a:p>
+        </p:txBody>
+      </p:sp>
+      <p:cxnSp>
+        <p:nvCxnSpPr>
+          <p:cNvPr id="63" name="s8-calls-axis"/>
+          <p:cNvCxnSpPr/>
+          <p:nvPr/>
+        </p:nvCxnSpPr>
+        <p:spPr>
+          <a:xfrm xmlns:a="http://schemas.openxmlformats.org/drawingml/2006/main">
+            <a:off x="5334000" y="2266950"/>
+            <a:ext cx="4476750" cy="953"/>
+          </a:xfrm>
+          <a:prstGeom xmlns:a="http://schemas.openxmlformats.org/drawingml/2006/main" prst="straightConnector1">
+            <a:avLst/>
+          </a:prstGeom>
+          <a:ln xmlns:a="http://schemas.openxmlformats.org/drawingml/2006/main" w="19050">
+            <a:solidFill>
+              <a:srgbClr val="B8BCC4"/>
+            </a:solidFill>
+            <a:prstDash val="solid"/>
+          </a:ln>
+        </p:spPr>
+      </p:cxnSp>
+      <p:cxnSp>
+        <p:nvCxnSpPr>
+          <p:cNvPr id="64" name="s8-calls-zero"/>
+          <p:cNvCxnSpPr/>
+          <p:nvPr/>
+        </p:nvCxnSpPr>
+        <p:spPr>
+          <a:xfrm xmlns:a="http://schemas.openxmlformats.org/drawingml/2006/main">
+            <a:off x="7572375" y="2000250"/>
+            <a:ext cx="953" cy="533400"/>
+          </a:xfrm>
+          <a:prstGeom xmlns:a="http://schemas.openxmlformats.org/drawingml/2006/main" prst="straightConnector1">
+            <a:avLst/>
+          </a:prstGeom>
+          <a:ln xmlns:a="http://schemas.openxmlformats.org/drawingml/2006/main" w="19050">
+            <a:solidFill>
+              <a:srgbClr val="0A1224"/>
+            </a:solidFill>
+            <a:prstDash val="solid"/>
+          </a:ln>
+        </p:spPr>
+      </p:cxnSp>
+      <p:sp>
+        <p:nvSpPr>
+          <p:cNvPr id="11" name="s8-calls-zero-label">
+            <a:extLst xmlns:a="http://schemas.openxmlformats.org/drawingml/2006/main">
+              <a:ext uri="{FF2B5EF4-FFF2-40B4-BE49-F238E27FC236}">
+                <a16:creationId xmlns:a16="http://schemas.microsoft.com/office/drawing/2014/main" id="{D79A1636-32C2-403D-A603-7D1BC27277E4}"/>
+              </a:ext>
+            </a:extLst>
+          </p:cNvPr>
+          <p:cNvSpPr>
+            <a:spLocks xmlns:a="http://schemas.openxmlformats.org/drawingml/2006/main" noGrp="1"/>
+          </p:cNvSpPr>
+          <p:nvPr/>
+        </p:nvSpPr>
+        <p:spPr>
+          <a:xfrm xmlns:a="http://schemas.openxmlformats.org/drawingml/2006/main">
+            <a:off x="7458075" y="2438400"/>
+            <a:ext cx="228600" cy="171450"/>
+          </a:xfrm>
+          <a:prstGeom xmlns:a="http://schemas.openxmlformats.org/drawingml/2006/main" prst="rect">
+            <a:avLst/>
+          </a:prstGeom>
+        </p:spPr>
+        <p:txBody>
+          <a:bodyPr xmlns:a="http://schemas.openxmlformats.org/drawingml/2006/main" wrap="square" lIns="0" tIns="0" rIns="0" bIns="0" anchor="t">
+            <a:noAutofit/>
+          </a:bodyPr>
+          <a:lstStyle xmlns:a="http://schemas.openxmlformats.org/drawingml/2006/main"/>
+          <a:p xmlns:a="http://schemas.openxmlformats.org/drawingml/2006/main">
+            <a:pPr algn="ctr">
+              <a:defRPr sz="900" b="0">
+                <a:solidFill>
+                  <a:srgbClr val="526071"/>
+                </a:solidFill>
+                <a:latin typeface="Arial"/>
+                <a:ea typeface="Arial"/>
+                <a:cs typeface="Arial"/>
+              </a:defRPr>
+            </a:pPr>
+            <a:r>
+              <a:t>0</a:t>
+            </a:r>
+          </a:p>
+        </p:txBody>
+      </p:sp>
+      <p:cxnSp>
+        <p:nvCxnSpPr>
+          <p:cNvPr id="66" name="s8-calls-interval"/>
+          <p:cNvCxnSpPr/>
+          <p:nvPr/>
+        </p:nvCxnSpPr>
+        <p:spPr>
+          <a:xfrm xmlns:a="http://schemas.openxmlformats.org/drawingml/2006/main">
+            <a:off x="8271867" y="2266950"/>
+            <a:ext cx="1119188" cy="953"/>
+          </a:xfrm>
+          <a:prstGeom xmlns:a="http://schemas.openxmlformats.org/drawingml/2006/main" prst="straightConnector1">
+            <a:avLst/>
+          </a:prstGeom>
+          <a:ln xmlns:a="http://schemas.openxmlformats.org/drawingml/2006/main" w="57150">
+            <a:solidFill>
+              <a:srgbClr val="D4515D"/>
+            </a:solidFill>
+            <a:prstDash val="solid"/>
+          </a:ln>
+        </p:spPr>
+      </p:cxnSp>
+      <p:cxnSp>
+        <p:nvCxnSpPr>
+          <p:cNvPr id="67" name="s8-calls-low-cap"/>
+          <p:cNvCxnSpPr/>
+          <p:nvPr/>
+        </p:nvCxnSpPr>
+        <p:spPr>
+          <a:xfrm xmlns:a="http://schemas.openxmlformats.org/drawingml/2006/main">
+            <a:off x="8271867" y="2171700"/>
+            <a:ext cx="953" cy="190500"/>
+          </a:xfrm>
+          <a:prstGeom xmlns:a="http://schemas.openxmlformats.org/drawingml/2006/main" prst="straightConnector1">
+            <a:avLst/>
+          </a:prstGeom>
+          <a:ln xmlns:a="http://schemas.openxmlformats.org/drawingml/2006/main" w="28575">
+            <a:solidFill>
+              <a:srgbClr val="D4515D"/>
+            </a:solidFill>
+            <a:prstDash val="solid"/>
+          </a:ln>
+        </p:spPr>
+      </p:cxnSp>
+      <p:cxnSp>
+        <p:nvCxnSpPr>
+          <p:cNvPr id="68" name="s8-calls-high-cap"/>
+          <p:cNvCxnSpPr/>
+          <p:nvPr/>
+        </p:nvCxnSpPr>
+        <p:spPr>
+          <a:xfrm xmlns:a="http://schemas.openxmlformats.org/drawingml/2006/main">
+            <a:off x="9391055" y="2171700"/>
+            <a:ext cx="953" cy="190500"/>
+          </a:xfrm>
+          <a:prstGeom xmlns:a="http://schemas.openxmlformats.org/drawingml/2006/main" prst="straightConnector1">
+            <a:avLst/>
+          </a:prstGeom>
+          <a:ln xmlns:a="http://schemas.openxmlformats.org/drawingml/2006/main" w="28575">
+            <a:solidFill>
+              <a:srgbClr val="D4515D"/>
+            </a:solidFill>
+            <a:prstDash val="solid"/>
+          </a:ln>
+        </p:spPr>
+      </p:cxnSp>
+      <p:sp>
+        <p:nvSpPr>
+          <p:cNvPr id="15" name="s8-calls-estimate">
+            <a:extLst xmlns:a="http://schemas.openxmlformats.org/drawingml/2006/main">
+              <a:ext uri="{FF2B5EF4-FFF2-40B4-BE49-F238E27FC236}">
+                <a16:creationId xmlns:a16="http://schemas.microsoft.com/office/drawing/2014/main" id="{DDE9F207-A863-4F8A-AF25-B51150313FEE}"/>
+              </a:ext>
+            </a:extLst>
+          </p:cNvPr>
+          <p:cNvSpPr>
+            <a:spLocks xmlns:a="http://schemas.openxmlformats.org/drawingml/2006/main" noGrp="1"/>
+          </p:cNvSpPr>
+          <p:nvPr/>
+        </p:nvSpPr>
+        <p:spPr>
+          <a:xfrm xmlns:a="http://schemas.openxmlformats.org/drawingml/2006/main">
+            <a:off x="8764786" y="2200275"/>
+            <a:ext cx="133350" cy="133350"/>
+          </a:xfrm>
+          <a:prstGeom xmlns:a="http://schemas.openxmlformats.org/drawingml/2006/main" prst="ellipse">
+            <a:avLst/>
+          </a:prstGeom>
+          <a:solidFill xmlns:a="http://schemas.openxmlformats.org/drawingml/2006/main">
+            <a:srgbClr val="D4515D"/>
+          </a:solidFill>
+          <a:ln xmlns:a="http://schemas.openxmlformats.org/drawingml/2006/main" w="0">
+            <a:solidFill>
+              <a:srgbClr val="D4515D"/>
+            </a:solidFill>
+            <a:prstDash val="solid"/>
+          </a:ln>
+        </p:spPr>
+      </p:sp>
+      <p:sp>
+        <p:nvSpPr>
+          <p:cNvPr id="16" name="s8-calls-status">
+            <a:extLst xmlns:a="http://schemas.openxmlformats.org/drawingml/2006/main">
+              <a:ext uri="{FF2B5EF4-FFF2-40B4-BE49-F238E27FC236}">
+                <a16:creationId xmlns:a16="http://schemas.microsoft.com/office/drawing/2014/main" id="{EA6F47F0-275E-4E0D-BB28-ABC075B5D978}"/>
+              </a:ext>
+            </a:extLst>
+          </p:cNvPr>
+          <p:cNvSpPr>
+            <a:spLocks xmlns:a="http://schemas.openxmlformats.org/drawingml/2006/main" noGrp="1"/>
+          </p:cNvSpPr>
+          <p:nvPr/>
+        </p:nvSpPr>
+        <p:spPr>
+          <a:xfrm xmlns:a="http://schemas.openxmlformats.org/drawingml/2006/main">
+            <a:off x="10020300" y="1924050"/>
+            <a:ext cx="1581150" cy="209550"/>
           </a:xfrm>
           <a:prstGeom xmlns:a="http://schemas.openxmlformats.org/drawingml/2006/main" prst="rect">
             <a:avLst/>
@@ -11985,6 +12401,51 @@
             <a:pPr algn="r">
               <a:defRPr sz="1050" b="1">
                 <a:solidFill>
+                  <a:srgbClr val="D4515D"/>
+                </a:solidFill>
+                <a:latin typeface="Arial"/>
+                <a:ea typeface="Arial"/>
+                <a:cs typeface="Arial"/>
+              </a:defRPr>
+            </a:pPr>
+            <a:r>
+              <a:t>SUPPORTED</a:t>
+            </a:r>
+          </a:p>
+        </p:txBody>
+      </p:sp>
+      <p:sp>
+        <p:nvSpPr>
+          <p:cNvPr id="17" name="s8-calls-interpretation">
+            <a:extLst xmlns:a="http://schemas.openxmlformats.org/drawingml/2006/main">
+              <a:ext uri="{FF2B5EF4-FFF2-40B4-BE49-F238E27FC236}">
+                <a16:creationId xmlns:a16="http://schemas.microsoft.com/office/drawing/2014/main" id="{D6CCDE39-A163-4CB8-8D1B-6B0E96C39AB2}"/>
+              </a:ext>
+            </a:extLst>
+          </p:cNvPr>
+          <p:cNvSpPr>
+            <a:spLocks xmlns:a="http://schemas.openxmlformats.org/drawingml/2006/main" noGrp="1"/>
+          </p:cNvSpPr>
+          <p:nvPr/>
+        </p:nvSpPr>
+        <p:spPr>
+          <a:xfrm xmlns:a="http://schemas.openxmlformats.org/drawingml/2006/main">
+            <a:off x="10020300" y="2190750"/>
+            <a:ext cx="1581150" cy="361950"/>
+          </a:xfrm>
+          <a:prstGeom xmlns:a="http://schemas.openxmlformats.org/drawingml/2006/main" prst="rect">
+            <a:avLst/>
+          </a:prstGeom>
+        </p:spPr>
+        <p:txBody>
+          <a:bodyPr xmlns:a="http://schemas.openxmlformats.org/drawingml/2006/main" wrap="square" lIns="0" tIns="0" rIns="0" bIns="0" anchor="t">
+            <a:noAutofit/>
+          </a:bodyPr>
+          <a:lstStyle xmlns:a="http://schemas.openxmlformats.org/drawingml/2006/main"/>
+          <a:p xmlns:a="http://schemas.openxmlformats.org/drawingml/2006/main">
+            <a:pPr algn="r">
+              <a:defRPr sz="1125" b="0">
+                <a:solidFill>
                   <a:srgbClr val="526071"/>
                 </a:solidFill>
                 <a:latin typeface="Arial"/>
@@ -11993,658 +12454,925 @@
               </a:defRPr>
             </a:pPr>
             <a:r>
-              <a:t>RESULT</a:t>
-            </a:r>
-          </a:p>
-        </p:txBody>
-      </p:sp>
-      <p:sp>
-        <p:nvSpPr>
-          <p:cNvPr id="5" name="s9-row1">
-            <a:extLst xmlns:a="http://schemas.openxmlformats.org/drawingml/2006/main">
-              <a:ext uri="{FF2B5EF4-FFF2-40B4-BE49-F238E27FC236}">
-                <a16:creationId xmlns:a16="http://schemas.microsoft.com/office/drawing/2014/main" id="{C66966DA-90F5-43E8-84AA-4DF2F997B195}"/>
-              </a:ext>
-            </a:extLst>
-          </p:cNvPr>
-          <p:cNvSpPr>
-            <a:spLocks xmlns:a="http://schemas.openxmlformats.org/drawingml/2006/main" noGrp="1"/>
-          </p:cNvSpPr>
-          <p:nvPr/>
-        </p:nvSpPr>
-        <p:spPr>
-          <a:xfrm xmlns:a="http://schemas.openxmlformats.org/drawingml/2006/main">
-            <a:off x="552450" y="2000250"/>
-            <a:ext cx="6667500" cy="571500"/>
-          </a:xfrm>
-          <a:prstGeom xmlns:a="http://schemas.openxmlformats.org/drawingml/2006/main" prst="roundRect">
-            <a:avLst>
-              <a:gd name="adj" fmla="val 13333"/>
-            </a:avLst>
-          </a:prstGeom>
-          <a:solidFill xmlns:a="http://schemas.openxmlformats.org/drawingml/2006/main">
-            <a:srgbClr val="EDEFF3"/>
-          </a:solidFill>
-          <a:ln xmlns:a="http://schemas.openxmlformats.org/drawingml/2006/main" w="0">
+              <a:t>extra calls</a:t>
+            </a:r>
+          </a:p>
+        </p:txBody>
+      </p:sp>
+      <p:cxnSp>
+        <p:nvCxnSpPr>
+          <p:cNvPr id="72" name="s8-calls-rule"/>
+          <p:cNvCxnSpPr/>
+          <p:nvPr/>
+        </p:nvCxnSpPr>
+        <p:spPr>
+          <a:xfrm xmlns:a="http://schemas.openxmlformats.org/drawingml/2006/main">
+            <a:off x="552450" y="2724150"/>
+            <a:ext cx="11087100" cy="953"/>
+          </a:xfrm>
+          <a:prstGeom xmlns:a="http://schemas.openxmlformats.org/drawingml/2006/main" prst="straightConnector1">
+            <a:avLst/>
+          </a:prstGeom>
+          <a:ln xmlns:a="http://schemas.openxmlformats.org/drawingml/2006/main" w="9525">
             <a:solidFill>
               <a:srgbClr val="EDEFF3"/>
             </a:solidFill>
             <a:prstDash val="solid"/>
           </a:ln>
         </p:spPr>
-      </p:sp>
-      <p:sp>
-        <p:nvSpPr>
-          <p:cNvPr id="6" name="s9-row2">
-            <a:extLst xmlns:a="http://schemas.openxmlformats.org/drawingml/2006/main">
-              <a:ext uri="{FF2B5EF4-FFF2-40B4-BE49-F238E27FC236}">
-                <a16:creationId xmlns:a16="http://schemas.microsoft.com/office/drawing/2014/main" id="{6B35B86A-2BA0-4E84-9742-1C55EB99FB07}"/>
-              </a:ext>
-            </a:extLst>
-          </p:cNvPr>
-          <p:cNvSpPr>
-            <a:spLocks xmlns:a="http://schemas.openxmlformats.org/drawingml/2006/main" noGrp="1"/>
-          </p:cNvSpPr>
-          <p:nvPr/>
-        </p:nvSpPr>
-        <p:spPr>
-          <a:xfrm xmlns:a="http://schemas.openxmlformats.org/drawingml/2006/main">
-            <a:off x="552450" y="2647950"/>
-            <a:ext cx="6667500" cy="571500"/>
-          </a:xfrm>
-          <a:prstGeom xmlns:a="http://schemas.openxmlformats.org/drawingml/2006/main" prst="roundRect">
-            <a:avLst>
-              <a:gd name="adj" fmla="val 13333"/>
-            </a:avLst>
-          </a:prstGeom>
-          <a:solidFill xmlns:a="http://schemas.openxmlformats.org/drawingml/2006/main">
-            <a:srgbClr val="FFFFFF"/>
-          </a:solidFill>
-          <a:ln xmlns:a="http://schemas.openxmlformats.org/drawingml/2006/main" w="9525">
+      </p:cxnSp>
+      <p:sp>
+        <p:nvSpPr>
+          <p:cNvPr id="19" name="s8-tokens-label">
+            <a:extLst xmlns:a="http://schemas.openxmlformats.org/drawingml/2006/main">
+              <a:ext uri="{FF2B5EF4-FFF2-40B4-BE49-F238E27FC236}">
+                <a16:creationId xmlns:a16="http://schemas.microsoft.com/office/drawing/2014/main" id="{A269BE29-8E2A-4F7B-BFF9-535EDE264A66}"/>
+              </a:ext>
+            </a:extLst>
+          </p:cNvPr>
+          <p:cNvSpPr>
+            <a:spLocks xmlns:a="http://schemas.openxmlformats.org/drawingml/2006/main" noGrp="1"/>
+          </p:cNvSpPr>
+          <p:nvPr/>
+        </p:nvSpPr>
+        <p:spPr>
+          <a:xfrm xmlns:a="http://schemas.openxmlformats.org/drawingml/2006/main">
+            <a:off x="685800" y="2895600"/>
+            <a:ext cx="1714500" cy="209550"/>
+          </a:xfrm>
+          <a:prstGeom xmlns:a="http://schemas.openxmlformats.org/drawingml/2006/main" prst="rect">
+            <a:avLst/>
+          </a:prstGeom>
+        </p:spPr>
+        <p:txBody>
+          <a:bodyPr xmlns:a="http://schemas.openxmlformats.org/drawingml/2006/main" wrap="square" lIns="0" tIns="0" rIns="0" bIns="0" anchor="t">
+            <a:noAutofit/>
+          </a:bodyPr>
+          <a:lstStyle xmlns:a="http://schemas.openxmlformats.org/drawingml/2006/main"/>
+          <a:p xmlns:a="http://schemas.openxmlformats.org/drawingml/2006/main">
+            <a:pPr algn="l">
+              <a:defRPr sz="1125" b="1">
+                <a:solidFill>
+                  <a:srgbClr val="526071"/>
+                </a:solidFill>
+                <a:latin typeface="Arial"/>
+                <a:ea typeface="Arial"/>
+                <a:cs typeface="Arial"/>
+              </a:defRPr>
+            </a:pPr>
+            <a:r>
+              <a:t>REPORTED TOKENS</a:t>
+            </a:r>
+          </a:p>
+        </p:txBody>
+      </p:sp>
+      <p:sp>
+        <p:nvSpPr>
+          <p:cNvPr id="20" name="s8-tokens-value">
+            <a:extLst xmlns:a="http://schemas.openxmlformats.org/drawingml/2006/main">
+              <a:ext uri="{FF2B5EF4-FFF2-40B4-BE49-F238E27FC236}">
+                <a16:creationId xmlns:a16="http://schemas.microsoft.com/office/drawing/2014/main" id="{C3ECF410-4EF8-4EC1-A0A6-069DA716E3C3}"/>
+              </a:ext>
+            </a:extLst>
+          </p:cNvPr>
+          <p:cNvSpPr>
+            <a:spLocks xmlns:a="http://schemas.openxmlformats.org/drawingml/2006/main" noGrp="1"/>
+          </p:cNvSpPr>
+          <p:nvPr/>
+        </p:nvSpPr>
+        <p:spPr>
+          <a:xfrm xmlns:a="http://schemas.openxmlformats.org/drawingml/2006/main">
+            <a:off x="685800" y="3143250"/>
+            <a:ext cx="1809750" cy="381000"/>
+          </a:xfrm>
+          <a:prstGeom xmlns:a="http://schemas.openxmlformats.org/drawingml/2006/main" prst="rect">
+            <a:avLst/>
+          </a:prstGeom>
+        </p:spPr>
+        <p:txBody>
+          <a:bodyPr xmlns:a="http://schemas.openxmlformats.org/drawingml/2006/main" wrap="square" lIns="0" tIns="0" rIns="0" bIns="0" anchor="t">
+            <a:noAutofit/>
+          </a:bodyPr>
+          <a:lstStyle xmlns:a="http://schemas.openxmlformats.org/drawingml/2006/main"/>
+          <a:p xmlns:a="http://schemas.openxmlformats.org/drawingml/2006/main">
+            <a:pPr algn="l">
+              <a:defRPr sz="2250" b="1">
+                <a:solidFill>
+                  <a:srgbClr val="B87712"/>
+                </a:solidFill>
+                <a:latin typeface="Arial"/>
+                <a:ea typeface="Arial"/>
+                <a:cs typeface="Arial"/>
+              </a:defRPr>
+            </a:pPr>
+            <a:r>
+              <a:t>+30,147</a:t>
+            </a:r>
+          </a:p>
+        </p:txBody>
+      </p:sp>
+      <p:sp>
+        <p:nvSpPr>
+          <p:cNvPr id="21" name="s8-tokens-ci">
+            <a:extLst xmlns:a="http://schemas.openxmlformats.org/drawingml/2006/main">
+              <a:ext uri="{FF2B5EF4-FFF2-40B4-BE49-F238E27FC236}">
+                <a16:creationId xmlns:a16="http://schemas.microsoft.com/office/drawing/2014/main" id="{6CE1F735-8BBD-4184-8BD3-DB8FA19EA785}"/>
+              </a:ext>
+            </a:extLst>
+          </p:cNvPr>
+          <p:cNvSpPr>
+            <a:spLocks xmlns:a="http://schemas.openxmlformats.org/drawingml/2006/main" noGrp="1"/>
+          </p:cNvSpPr>
+          <p:nvPr/>
+        </p:nvSpPr>
+        <p:spPr>
+          <a:xfrm xmlns:a="http://schemas.openxmlformats.org/drawingml/2006/main">
+            <a:off x="2571750" y="3209925"/>
+            <a:ext cx="2476500" cy="247650"/>
+          </a:xfrm>
+          <a:prstGeom xmlns:a="http://schemas.openxmlformats.org/drawingml/2006/main" prst="rect">
+            <a:avLst/>
+          </a:prstGeom>
+        </p:spPr>
+        <p:txBody>
+          <a:bodyPr xmlns:a="http://schemas.openxmlformats.org/drawingml/2006/main" wrap="square" lIns="0" tIns="0" rIns="0" bIns="0" anchor="t">
+            <a:noAutofit/>
+          </a:bodyPr>
+          <a:lstStyle xmlns:a="http://schemas.openxmlformats.org/drawingml/2006/main"/>
+          <a:p xmlns:a="http://schemas.openxmlformats.org/drawingml/2006/main">
+            <a:pPr algn="l">
+              <a:defRPr sz="1200" b="0">
+                <a:solidFill>
+                  <a:srgbClr val="526071"/>
+                </a:solidFill>
+                <a:latin typeface="Arial"/>
+                <a:ea typeface="Arial"/>
+                <a:cs typeface="Arial"/>
+              </a:defRPr>
+            </a:pPr>
+            <a:r>
+              <a:t>95% CI  -1,518.5 to +39,219</a:t>
+            </a:r>
+          </a:p>
+        </p:txBody>
+      </p:sp>
+      <p:cxnSp>
+        <p:nvCxnSpPr>
+          <p:cNvPr id="76" name="s8-tokens-axis"/>
+          <p:cNvCxnSpPr/>
+          <p:nvPr/>
+        </p:nvCxnSpPr>
+        <p:spPr>
+          <a:xfrm xmlns:a="http://schemas.openxmlformats.org/drawingml/2006/main">
+            <a:off x="5334000" y="3352800"/>
+            <a:ext cx="4476750" cy="953"/>
+          </a:xfrm>
+          <a:prstGeom xmlns:a="http://schemas.openxmlformats.org/drawingml/2006/main" prst="straightConnector1">
+            <a:avLst/>
+          </a:prstGeom>
+          <a:ln xmlns:a="http://schemas.openxmlformats.org/drawingml/2006/main" w="19050">
             <a:solidFill>
               <a:srgbClr val="B8BCC4"/>
             </a:solidFill>
             <a:prstDash val="solid"/>
           </a:ln>
         </p:spPr>
-      </p:sp>
-      <p:sp>
-        <p:nvSpPr>
-          <p:cNvPr id="7" name="s9-row3">
-            <a:extLst xmlns:a="http://schemas.openxmlformats.org/drawingml/2006/main">
-              <a:ext uri="{FF2B5EF4-FFF2-40B4-BE49-F238E27FC236}">
-                <a16:creationId xmlns:a16="http://schemas.microsoft.com/office/drawing/2014/main" id="{8824FA46-41E8-4B3D-9FBC-CFB958FF536C}"/>
-              </a:ext>
-            </a:extLst>
-          </p:cNvPr>
-          <p:cNvSpPr>
-            <a:spLocks xmlns:a="http://schemas.openxmlformats.org/drawingml/2006/main" noGrp="1"/>
-          </p:cNvSpPr>
-          <p:nvPr/>
-        </p:nvSpPr>
-        <p:spPr>
-          <a:xfrm xmlns:a="http://schemas.openxmlformats.org/drawingml/2006/main">
-            <a:off x="552450" y="3295650"/>
-            <a:ext cx="6667500" cy="571500"/>
-          </a:xfrm>
-          <a:prstGeom xmlns:a="http://schemas.openxmlformats.org/drawingml/2006/main" prst="roundRect">
-            <a:avLst>
-              <a:gd name="adj" fmla="val 13333"/>
-            </a:avLst>
+      </p:cxnSp>
+      <p:cxnSp>
+        <p:nvCxnSpPr>
+          <p:cNvPr id="77" name="s8-tokens-zero"/>
+          <p:cNvCxnSpPr/>
+          <p:nvPr/>
+        </p:nvCxnSpPr>
+        <p:spPr>
+          <a:xfrm xmlns:a="http://schemas.openxmlformats.org/drawingml/2006/main">
+            <a:off x="7572375" y="3086100"/>
+            <a:ext cx="953" cy="533400"/>
+          </a:xfrm>
+          <a:prstGeom xmlns:a="http://schemas.openxmlformats.org/drawingml/2006/main" prst="straightConnector1">
+            <a:avLst/>
+          </a:prstGeom>
+          <a:ln xmlns:a="http://schemas.openxmlformats.org/drawingml/2006/main" w="19050">
+            <a:solidFill>
+              <a:srgbClr val="0A1224"/>
+            </a:solidFill>
+            <a:prstDash val="solid"/>
+          </a:ln>
+        </p:spPr>
+      </p:cxnSp>
+      <p:sp>
+        <p:nvSpPr>
+          <p:cNvPr id="24" name="s8-tokens-zero-label">
+            <a:extLst xmlns:a="http://schemas.openxmlformats.org/drawingml/2006/main">
+              <a:ext uri="{FF2B5EF4-FFF2-40B4-BE49-F238E27FC236}">
+                <a16:creationId xmlns:a16="http://schemas.microsoft.com/office/drawing/2014/main" id="{377D91D5-87ED-48C0-B742-4BB806105C6F}"/>
+              </a:ext>
+            </a:extLst>
+          </p:cNvPr>
+          <p:cNvSpPr>
+            <a:spLocks xmlns:a="http://schemas.openxmlformats.org/drawingml/2006/main" noGrp="1"/>
+          </p:cNvSpPr>
+          <p:nvPr/>
+        </p:nvSpPr>
+        <p:spPr>
+          <a:xfrm xmlns:a="http://schemas.openxmlformats.org/drawingml/2006/main">
+            <a:off x="7458075" y="3524250"/>
+            <a:ext cx="228600" cy="171450"/>
+          </a:xfrm>
+          <a:prstGeom xmlns:a="http://schemas.openxmlformats.org/drawingml/2006/main" prst="rect">
+            <a:avLst/>
+          </a:prstGeom>
+        </p:spPr>
+        <p:txBody>
+          <a:bodyPr xmlns:a="http://schemas.openxmlformats.org/drawingml/2006/main" wrap="square" lIns="0" tIns="0" rIns="0" bIns="0" anchor="t">
+            <a:noAutofit/>
+          </a:bodyPr>
+          <a:lstStyle xmlns:a="http://schemas.openxmlformats.org/drawingml/2006/main"/>
+          <a:p xmlns:a="http://schemas.openxmlformats.org/drawingml/2006/main">
+            <a:pPr algn="ctr">
+              <a:defRPr sz="900" b="0">
+                <a:solidFill>
+                  <a:srgbClr val="526071"/>
+                </a:solidFill>
+                <a:latin typeface="Arial"/>
+                <a:ea typeface="Arial"/>
+                <a:cs typeface="Arial"/>
+              </a:defRPr>
+            </a:pPr>
+            <a:r>
+              <a:t>0</a:t>
+            </a:r>
+          </a:p>
+        </p:txBody>
+      </p:sp>
+      <p:cxnSp>
+        <p:nvCxnSpPr>
+          <p:cNvPr id="79" name="s8-tokens-interval"/>
+          <p:cNvCxnSpPr/>
+          <p:nvPr/>
+        </p:nvCxnSpPr>
+        <p:spPr>
+          <a:xfrm xmlns:a="http://schemas.openxmlformats.org/drawingml/2006/main">
+            <a:off x="7496842" y="3352800"/>
+            <a:ext cx="2026351" cy="953"/>
+          </a:xfrm>
+          <a:prstGeom xmlns:a="http://schemas.openxmlformats.org/drawingml/2006/main" prst="straightConnector1">
+            <a:avLst/>
+          </a:prstGeom>
+          <a:ln xmlns:a="http://schemas.openxmlformats.org/drawingml/2006/main" w="57150">
+            <a:solidFill>
+              <a:srgbClr val="B87712"/>
+            </a:solidFill>
+            <a:prstDash val="solid"/>
+          </a:ln>
+        </p:spPr>
+      </p:cxnSp>
+      <p:cxnSp>
+        <p:nvCxnSpPr>
+          <p:cNvPr id="80" name="s8-tokens-low-cap"/>
+          <p:cNvCxnSpPr/>
+          <p:nvPr/>
+        </p:nvCxnSpPr>
+        <p:spPr>
+          <a:xfrm xmlns:a="http://schemas.openxmlformats.org/drawingml/2006/main">
+            <a:off x="7496842" y="3257550"/>
+            <a:ext cx="953" cy="190500"/>
+          </a:xfrm>
+          <a:prstGeom xmlns:a="http://schemas.openxmlformats.org/drawingml/2006/main" prst="straightConnector1">
+            <a:avLst/>
+          </a:prstGeom>
+          <a:ln xmlns:a="http://schemas.openxmlformats.org/drawingml/2006/main" w="28575">
+            <a:solidFill>
+              <a:srgbClr val="B87712"/>
+            </a:solidFill>
+            <a:prstDash val="solid"/>
+          </a:ln>
+        </p:spPr>
+      </p:cxnSp>
+      <p:cxnSp>
+        <p:nvCxnSpPr>
+          <p:cNvPr id="81" name="s8-tokens-high-cap"/>
+          <p:cNvCxnSpPr/>
+          <p:nvPr/>
+        </p:nvCxnSpPr>
+        <p:spPr>
+          <a:xfrm xmlns:a="http://schemas.openxmlformats.org/drawingml/2006/main">
+            <a:off x="9523193" y="3257550"/>
+            <a:ext cx="953" cy="190500"/>
+          </a:xfrm>
+          <a:prstGeom xmlns:a="http://schemas.openxmlformats.org/drawingml/2006/main" prst="straightConnector1">
+            <a:avLst/>
+          </a:prstGeom>
+          <a:ln xmlns:a="http://schemas.openxmlformats.org/drawingml/2006/main" w="28575">
+            <a:solidFill>
+              <a:srgbClr val="B87712"/>
+            </a:solidFill>
+            <a:prstDash val="solid"/>
+          </a:ln>
+        </p:spPr>
+      </p:cxnSp>
+      <p:sp>
+        <p:nvSpPr>
+          <p:cNvPr id="28" name="s8-tokens-estimate">
+            <a:extLst xmlns:a="http://schemas.openxmlformats.org/drawingml/2006/main">
+              <a:ext uri="{FF2B5EF4-FFF2-40B4-BE49-F238E27FC236}">
+                <a16:creationId xmlns:a16="http://schemas.microsoft.com/office/drawing/2014/main" id="{0E201CF4-956C-4769-BEC0-A275DB4DCF5B}"/>
+              </a:ext>
+            </a:extLst>
+          </p:cNvPr>
+          <p:cNvSpPr>
+            <a:spLocks xmlns:a="http://schemas.openxmlformats.org/drawingml/2006/main" noGrp="1"/>
+          </p:cNvSpPr>
+          <p:nvPr/>
+        </p:nvSpPr>
+        <p:spPr>
+          <a:xfrm xmlns:a="http://schemas.openxmlformats.org/drawingml/2006/main">
+            <a:off x="9005262" y="3286125"/>
+            <a:ext cx="133350" cy="133350"/>
+          </a:xfrm>
+          <a:prstGeom xmlns:a="http://schemas.openxmlformats.org/drawingml/2006/main" prst="ellipse">
+            <a:avLst/>
           </a:prstGeom>
           <a:solidFill xmlns:a="http://schemas.openxmlformats.org/drawingml/2006/main">
-            <a:srgbClr val="EDEFF3"/>
+            <a:srgbClr val="B87712"/>
           </a:solidFill>
           <a:ln xmlns:a="http://schemas.openxmlformats.org/drawingml/2006/main" w="0">
+            <a:solidFill>
+              <a:srgbClr val="B87712"/>
+            </a:solidFill>
+            <a:prstDash val="solid"/>
+          </a:ln>
+        </p:spPr>
+      </p:sp>
+      <p:sp>
+        <p:nvSpPr>
+          <p:cNvPr id="29" name="s8-tokens-status">
+            <a:extLst xmlns:a="http://schemas.openxmlformats.org/drawingml/2006/main">
+              <a:ext uri="{FF2B5EF4-FFF2-40B4-BE49-F238E27FC236}">
+                <a16:creationId xmlns:a16="http://schemas.microsoft.com/office/drawing/2014/main" id="{E7535710-338A-4879-B1F5-AEC1D256AB04}"/>
+              </a:ext>
+            </a:extLst>
+          </p:cNvPr>
+          <p:cNvSpPr>
+            <a:spLocks xmlns:a="http://schemas.openxmlformats.org/drawingml/2006/main" noGrp="1"/>
+          </p:cNvSpPr>
+          <p:nvPr/>
+        </p:nvSpPr>
+        <p:spPr>
+          <a:xfrm xmlns:a="http://schemas.openxmlformats.org/drawingml/2006/main">
+            <a:off x="10020300" y="3009900"/>
+            <a:ext cx="1581150" cy="209550"/>
+          </a:xfrm>
+          <a:prstGeom xmlns:a="http://schemas.openxmlformats.org/drawingml/2006/main" prst="rect">
+            <a:avLst/>
+          </a:prstGeom>
+        </p:spPr>
+        <p:txBody>
+          <a:bodyPr xmlns:a="http://schemas.openxmlformats.org/drawingml/2006/main" wrap="square" lIns="0" tIns="0" rIns="0" bIns="0" anchor="t">
+            <a:noAutofit/>
+          </a:bodyPr>
+          <a:lstStyle xmlns:a="http://schemas.openxmlformats.org/drawingml/2006/main"/>
+          <a:p xmlns:a="http://schemas.openxmlformats.org/drawingml/2006/main">
+            <a:pPr algn="r">
+              <a:defRPr sz="1050" b="1">
+                <a:solidFill>
+                  <a:srgbClr val="B87712"/>
+                </a:solidFill>
+                <a:latin typeface="Arial"/>
+                <a:ea typeface="Arial"/>
+                <a:cs typeface="Arial"/>
+              </a:defRPr>
+            </a:pPr>
+            <a:r>
+              <a:t>CROSSES 0</a:t>
+            </a:r>
+          </a:p>
+        </p:txBody>
+      </p:sp>
+      <p:sp>
+        <p:nvSpPr>
+          <p:cNvPr id="30" name="s8-tokens-interpretation">
+            <a:extLst xmlns:a="http://schemas.openxmlformats.org/drawingml/2006/main">
+              <a:ext uri="{FF2B5EF4-FFF2-40B4-BE49-F238E27FC236}">
+                <a16:creationId xmlns:a16="http://schemas.microsoft.com/office/drawing/2014/main" id="{2506CF45-319B-414C-A1A8-BBE2F220D1AF}"/>
+              </a:ext>
+            </a:extLst>
+          </p:cNvPr>
+          <p:cNvSpPr>
+            <a:spLocks xmlns:a="http://schemas.openxmlformats.org/drawingml/2006/main" noGrp="1"/>
+          </p:cNvSpPr>
+          <p:nvPr/>
+        </p:nvSpPr>
+        <p:spPr>
+          <a:xfrm xmlns:a="http://schemas.openxmlformats.org/drawingml/2006/main">
+            <a:off x="10020300" y="3276600"/>
+            <a:ext cx="1581150" cy="361950"/>
+          </a:xfrm>
+          <a:prstGeom xmlns:a="http://schemas.openxmlformats.org/drawingml/2006/main" prst="rect">
+            <a:avLst/>
+          </a:prstGeom>
+        </p:spPr>
+        <p:txBody>
+          <a:bodyPr xmlns:a="http://schemas.openxmlformats.org/drawingml/2006/main" wrap="square" lIns="0" tIns="0" rIns="0" bIns="0" anchor="t">
+            <a:noAutofit/>
+          </a:bodyPr>
+          <a:lstStyle xmlns:a="http://schemas.openxmlformats.org/drawingml/2006/main"/>
+          <a:p xmlns:a="http://schemas.openxmlformats.org/drawingml/2006/main">
+            <a:pPr algn="r">
+              <a:defRPr sz="1125" b="0">
+                <a:solidFill>
+                  <a:srgbClr val="526071"/>
+                </a:solidFill>
+                <a:latin typeface="Arial"/>
+                <a:ea typeface="Arial"/>
+                <a:cs typeface="Arial"/>
+              </a:defRPr>
+            </a:pPr>
+            <a:r>
+              <a:t>inconclusive</a:t>
+            </a:r>
+          </a:p>
+        </p:txBody>
+      </p:sp>
+      <p:cxnSp>
+        <p:nvCxnSpPr>
+          <p:cNvPr id="85" name="s8-tokens-rule"/>
+          <p:cNvCxnSpPr/>
+          <p:nvPr/>
+        </p:nvCxnSpPr>
+        <p:spPr>
+          <a:xfrm xmlns:a="http://schemas.openxmlformats.org/drawingml/2006/main">
+            <a:off x="552450" y="3810000"/>
+            <a:ext cx="11087100" cy="953"/>
+          </a:xfrm>
+          <a:prstGeom xmlns:a="http://schemas.openxmlformats.org/drawingml/2006/main" prst="straightConnector1">
+            <a:avLst/>
+          </a:prstGeom>
+          <a:ln xmlns:a="http://schemas.openxmlformats.org/drawingml/2006/main" w="9525">
             <a:solidFill>
               <a:srgbClr val="EDEFF3"/>
             </a:solidFill>
             <a:prstDash val="solid"/>
           </a:ln>
         </p:spPr>
-      </p:sp>
-      <p:sp>
-        <p:nvSpPr>
-          <p:cNvPr id="8" name="s9-row4">
-            <a:extLst xmlns:a="http://schemas.openxmlformats.org/drawingml/2006/main">
-              <a:ext uri="{FF2B5EF4-FFF2-40B4-BE49-F238E27FC236}">
-                <a16:creationId xmlns:a16="http://schemas.microsoft.com/office/drawing/2014/main" id="{89877017-BA5D-439D-9388-B6B97F6AE57B}"/>
-              </a:ext>
-            </a:extLst>
-          </p:cNvPr>
-          <p:cNvSpPr>
-            <a:spLocks xmlns:a="http://schemas.openxmlformats.org/drawingml/2006/main" noGrp="1"/>
-          </p:cNvSpPr>
-          <p:nvPr/>
-        </p:nvSpPr>
-        <p:spPr>
-          <a:xfrm xmlns:a="http://schemas.openxmlformats.org/drawingml/2006/main">
-            <a:off x="552450" y="3943350"/>
-            <a:ext cx="6667500" cy="571500"/>
-          </a:xfrm>
-          <a:prstGeom xmlns:a="http://schemas.openxmlformats.org/drawingml/2006/main" prst="roundRect">
-            <a:avLst>
-              <a:gd name="adj" fmla="val 13333"/>
-            </a:avLst>
-          </a:prstGeom>
-          <a:solidFill xmlns:a="http://schemas.openxmlformats.org/drawingml/2006/main">
-            <a:srgbClr val="FFFFFF"/>
-          </a:solidFill>
-          <a:ln xmlns:a="http://schemas.openxmlformats.org/drawingml/2006/main" w="9525">
+      </p:cxnSp>
+      <p:sp>
+        <p:nvSpPr>
+          <p:cNvPr id="32" name="s8-time-label">
+            <a:extLst xmlns:a="http://schemas.openxmlformats.org/drawingml/2006/main">
+              <a:ext uri="{FF2B5EF4-FFF2-40B4-BE49-F238E27FC236}">
+                <a16:creationId xmlns:a16="http://schemas.microsoft.com/office/drawing/2014/main" id="{7A22CEBD-EB9B-4B77-8148-0FF1FCECA910}"/>
+              </a:ext>
+            </a:extLst>
+          </p:cNvPr>
+          <p:cNvSpPr>
+            <a:spLocks xmlns:a="http://schemas.openxmlformats.org/drawingml/2006/main" noGrp="1"/>
+          </p:cNvSpPr>
+          <p:nvPr/>
+        </p:nvSpPr>
+        <p:spPr>
+          <a:xfrm xmlns:a="http://schemas.openxmlformats.org/drawingml/2006/main">
+            <a:off x="685800" y="3981450"/>
+            <a:ext cx="1714500" cy="209550"/>
+          </a:xfrm>
+          <a:prstGeom xmlns:a="http://schemas.openxmlformats.org/drawingml/2006/main" prst="rect">
+            <a:avLst/>
+          </a:prstGeom>
+        </p:spPr>
+        <p:txBody>
+          <a:bodyPr xmlns:a="http://schemas.openxmlformats.org/drawingml/2006/main" wrap="square" lIns="0" tIns="0" rIns="0" bIns="0" anchor="t">
+            <a:noAutofit/>
+          </a:bodyPr>
+          <a:lstStyle xmlns:a="http://schemas.openxmlformats.org/drawingml/2006/main"/>
+          <a:p xmlns:a="http://schemas.openxmlformats.org/drawingml/2006/main">
+            <a:pPr algn="l">
+              <a:defRPr sz="1125" b="1">
+                <a:solidFill>
+                  <a:srgbClr val="526071"/>
+                </a:solidFill>
+                <a:latin typeface="Arial"/>
+                <a:ea typeface="Arial"/>
+                <a:cs typeface="Arial"/>
+              </a:defRPr>
+            </a:pPr>
+            <a:r>
+              <a:t>WALL TIME</a:t>
+            </a:r>
+          </a:p>
+        </p:txBody>
+      </p:sp>
+      <p:sp>
+        <p:nvSpPr>
+          <p:cNvPr id="33" name="s8-time-value">
+            <a:extLst xmlns:a="http://schemas.openxmlformats.org/drawingml/2006/main">
+              <a:ext uri="{FF2B5EF4-FFF2-40B4-BE49-F238E27FC236}">
+                <a16:creationId xmlns:a16="http://schemas.microsoft.com/office/drawing/2014/main" id="{18C51E39-9D95-4746-BA0F-2ADFF7E4C5F5}"/>
+              </a:ext>
+            </a:extLst>
+          </p:cNvPr>
+          <p:cNvSpPr>
+            <a:spLocks xmlns:a="http://schemas.openxmlformats.org/drawingml/2006/main" noGrp="1"/>
+          </p:cNvSpPr>
+          <p:nvPr/>
+        </p:nvSpPr>
+        <p:spPr>
+          <a:xfrm xmlns:a="http://schemas.openxmlformats.org/drawingml/2006/main">
+            <a:off x="685800" y="4229100"/>
+            <a:ext cx="1809750" cy="381000"/>
+          </a:xfrm>
+          <a:prstGeom xmlns:a="http://schemas.openxmlformats.org/drawingml/2006/main" prst="rect">
+            <a:avLst/>
+          </a:prstGeom>
+        </p:spPr>
+        <p:txBody>
+          <a:bodyPr xmlns:a="http://schemas.openxmlformats.org/drawingml/2006/main" wrap="square" lIns="0" tIns="0" rIns="0" bIns="0" anchor="t">
+            <a:noAutofit/>
+          </a:bodyPr>
+          <a:lstStyle xmlns:a="http://schemas.openxmlformats.org/drawingml/2006/main"/>
+          <a:p xmlns:a="http://schemas.openxmlformats.org/drawingml/2006/main">
+            <a:pPr algn="l">
+              <a:defRPr sz="2250" b="1">
+                <a:solidFill>
+                  <a:srgbClr val="B87712"/>
+                </a:solidFill>
+                <a:latin typeface="Arial"/>
+                <a:ea typeface="Arial"/>
+                <a:cs typeface="Arial"/>
+              </a:defRPr>
+            </a:pPr>
+            <a:r>
+              <a:t>+10.919s</a:t>
+            </a:r>
+          </a:p>
+        </p:txBody>
+      </p:sp>
+      <p:sp>
+        <p:nvSpPr>
+          <p:cNvPr id="34" name="s8-time-ci">
+            <a:extLst xmlns:a="http://schemas.openxmlformats.org/drawingml/2006/main">
+              <a:ext uri="{FF2B5EF4-FFF2-40B4-BE49-F238E27FC236}">
+                <a16:creationId xmlns:a16="http://schemas.microsoft.com/office/drawing/2014/main" id="{4472C1A6-98C1-4EAB-8849-D525A8C1D856}"/>
+              </a:ext>
+            </a:extLst>
+          </p:cNvPr>
+          <p:cNvSpPr>
+            <a:spLocks xmlns:a="http://schemas.openxmlformats.org/drawingml/2006/main" noGrp="1"/>
+          </p:cNvSpPr>
+          <p:nvPr/>
+        </p:nvSpPr>
+        <p:spPr>
+          <a:xfrm xmlns:a="http://schemas.openxmlformats.org/drawingml/2006/main">
+            <a:off x="2571750" y="4295775"/>
+            <a:ext cx="2476500" cy="247650"/>
+          </a:xfrm>
+          <a:prstGeom xmlns:a="http://schemas.openxmlformats.org/drawingml/2006/main" prst="rect">
+            <a:avLst/>
+          </a:prstGeom>
+        </p:spPr>
+        <p:txBody>
+          <a:bodyPr xmlns:a="http://schemas.openxmlformats.org/drawingml/2006/main" wrap="square" lIns="0" tIns="0" rIns="0" bIns="0" anchor="t">
+            <a:noAutofit/>
+          </a:bodyPr>
+          <a:lstStyle xmlns:a="http://schemas.openxmlformats.org/drawingml/2006/main"/>
+          <a:p xmlns:a="http://schemas.openxmlformats.org/drawingml/2006/main">
+            <a:pPr algn="l">
+              <a:defRPr sz="1200" b="0">
+                <a:solidFill>
+                  <a:srgbClr val="526071"/>
+                </a:solidFill>
+                <a:latin typeface="Arial"/>
+                <a:ea typeface="Arial"/>
+                <a:cs typeface="Arial"/>
+              </a:defRPr>
+            </a:pPr>
+            <a:r>
+              <a:t>95% CI  -1.433s to +31.043s</a:t>
+            </a:r>
+          </a:p>
+        </p:txBody>
+      </p:sp>
+      <p:cxnSp>
+        <p:nvCxnSpPr>
+          <p:cNvPr id="89" name="s8-time-axis"/>
+          <p:cNvCxnSpPr/>
+          <p:nvPr/>
+        </p:nvCxnSpPr>
+        <p:spPr>
+          <a:xfrm xmlns:a="http://schemas.openxmlformats.org/drawingml/2006/main">
+            <a:off x="5334000" y="4438650"/>
+            <a:ext cx="4476750" cy="953"/>
+          </a:xfrm>
+          <a:prstGeom xmlns:a="http://schemas.openxmlformats.org/drawingml/2006/main" prst="straightConnector1">
+            <a:avLst/>
+          </a:prstGeom>
+          <a:ln xmlns:a="http://schemas.openxmlformats.org/drawingml/2006/main" w="19050">
             <a:solidFill>
               <a:srgbClr val="B8BCC4"/>
             </a:solidFill>
             <a:prstDash val="solid"/>
           </a:ln>
         </p:spPr>
-      </p:sp>
-      <p:sp>
-        <p:nvSpPr>
-          <p:cNvPr id="9" name="s9-row5">
-            <a:extLst xmlns:a="http://schemas.openxmlformats.org/drawingml/2006/main">
-              <a:ext uri="{FF2B5EF4-FFF2-40B4-BE49-F238E27FC236}">
-                <a16:creationId xmlns:a16="http://schemas.microsoft.com/office/drawing/2014/main" id="{8DA0763B-5092-4329-9968-2D2587151C85}"/>
-              </a:ext>
-            </a:extLst>
-          </p:cNvPr>
-          <p:cNvSpPr>
-            <a:spLocks xmlns:a="http://schemas.openxmlformats.org/drawingml/2006/main" noGrp="1"/>
-          </p:cNvSpPr>
-          <p:nvPr/>
-        </p:nvSpPr>
-        <p:spPr>
-          <a:xfrm xmlns:a="http://schemas.openxmlformats.org/drawingml/2006/main">
-            <a:off x="552450" y="4591050"/>
-            <a:ext cx="6667500" cy="571500"/>
-          </a:xfrm>
-          <a:prstGeom xmlns:a="http://schemas.openxmlformats.org/drawingml/2006/main" prst="roundRect">
-            <a:avLst>
-              <a:gd name="adj" fmla="val 13333"/>
-            </a:avLst>
+      </p:cxnSp>
+      <p:cxnSp>
+        <p:nvCxnSpPr>
+          <p:cNvPr id="90" name="s8-time-zero"/>
+          <p:cNvCxnSpPr/>
+          <p:nvPr/>
+        </p:nvCxnSpPr>
+        <p:spPr>
+          <a:xfrm xmlns:a="http://schemas.openxmlformats.org/drawingml/2006/main">
+            <a:off x="7572375" y="4171950"/>
+            <a:ext cx="953" cy="533400"/>
+          </a:xfrm>
+          <a:prstGeom xmlns:a="http://schemas.openxmlformats.org/drawingml/2006/main" prst="straightConnector1">
+            <a:avLst/>
+          </a:prstGeom>
+          <a:ln xmlns:a="http://schemas.openxmlformats.org/drawingml/2006/main" w="19050">
+            <a:solidFill>
+              <a:srgbClr val="0A1224"/>
+            </a:solidFill>
+            <a:prstDash val="solid"/>
+          </a:ln>
+        </p:spPr>
+      </p:cxnSp>
+      <p:sp>
+        <p:nvSpPr>
+          <p:cNvPr id="37" name="s8-time-zero-label">
+            <a:extLst xmlns:a="http://schemas.openxmlformats.org/drawingml/2006/main">
+              <a:ext uri="{FF2B5EF4-FFF2-40B4-BE49-F238E27FC236}">
+                <a16:creationId xmlns:a16="http://schemas.microsoft.com/office/drawing/2014/main" id="{DADF4151-176B-48D3-847D-2269311F7BD0}"/>
+              </a:ext>
+            </a:extLst>
+          </p:cNvPr>
+          <p:cNvSpPr>
+            <a:spLocks xmlns:a="http://schemas.openxmlformats.org/drawingml/2006/main" noGrp="1"/>
+          </p:cNvSpPr>
+          <p:nvPr/>
+        </p:nvSpPr>
+        <p:spPr>
+          <a:xfrm xmlns:a="http://schemas.openxmlformats.org/drawingml/2006/main">
+            <a:off x="7458075" y="4610100"/>
+            <a:ext cx="228600" cy="171450"/>
+          </a:xfrm>
+          <a:prstGeom xmlns:a="http://schemas.openxmlformats.org/drawingml/2006/main" prst="rect">
+            <a:avLst/>
+          </a:prstGeom>
+        </p:spPr>
+        <p:txBody>
+          <a:bodyPr xmlns:a="http://schemas.openxmlformats.org/drawingml/2006/main" wrap="square" lIns="0" tIns="0" rIns="0" bIns="0" anchor="t">
+            <a:noAutofit/>
+          </a:bodyPr>
+          <a:lstStyle xmlns:a="http://schemas.openxmlformats.org/drawingml/2006/main"/>
+          <a:p xmlns:a="http://schemas.openxmlformats.org/drawingml/2006/main">
+            <a:pPr algn="ctr">
+              <a:defRPr sz="900" b="0">
+                <a:solidFill>
+                  <a:srgbClr val="526071"/>
+                </a:solidFill>
+                <a:latin typeface="Arial"/>
+                <a:ea typeface="Arial"/>
+                <a:cs typeface="Arial"/>
+              </a:defRPr>
+            </a:pPr>
+            <a:r>
+              <a:t>0</a:t>
+            </a:r>
+          </a:p>
+        </p:txBody>
+      </p:sp>
+      <p:cxnSp>
+        <p:nvCxnSpPr>
+          <p:cNvPr id="92" name="s8-time-interval"/>
+          <p:cNvCxnSpPr/>
+          <p:nvPr/>
+        </p:nvCxnSpPr>
+        <p:spPr>
+          <a:xfrm xmlns:a="http://schemas.openxmlformats.org/drawingml/2006/main">
+            <a:off x="7480730" y="4438650"/>
+            <a:ext cx="2076956" cy="953"/>
+          </a:xfrm>
+          <a:prstGeom xmlns:a="http://schemas.openxmlformats.org/drawingml/2006/main" prst="straightConnector1">
+            <a:avLst/>
+          </a:prstGeom>
+          <a:ln xmlns:a="http://schemas.openxmlformats.org/drawingml/2006/main" w="57150">
+            <a:solidFill>
+              <a:srgbClr val="B87712"/>
+            </a:solidFill>
+            <a:prstDash val="solid"/>
+          </a:ln>
+        </p:spPr>
+      </p:cxnSp>
+      <p:cxnSp>
+        <p:nvCxnSpPr>
+          <p:cNvPr id="93" name="s8-time-low-cap"/>
+          <p:cNvCxnSpPr/>
+          <p:nvPr/>
+        </p:nvCxnSpPr>
+        <p:spPr>
+          <a:xfrm xmlns:a="http://schemas.openxmlformats.org/drawingml/2006/main">
+            <a:off x="7480730" y="4343400"/>
+            <a:ext cx="953" cy="190500"/>
+          </a:xfrm>
+          <a:prstGeom xmlns:a="http://schemas.openxmlformats.org/drawingml/2006/main" prst="straightConnector1">
+            <a:avLst/>
+          </a:prstGeom>
+          <a:ln xmlns:a="http://schemas.openxmlformats.org/drawingml/2006/main" w="28575">
+            <a:solidFill>
+              <a:srgbClr val="B87712"/>
+            </a:solidFill>
+            <a:prstDash val="solid"/>
+          </a:ln>
+        </p:spPr>
+      </p:cxnSp>
+      <p:cxnSp>
+        <p:nvCxnSpPr>
+          <p:cNvPr id="94" name="s8-time-high-cap"/>
+          <p:cNvCxnSpPr/>
+          <p:nvPr/>
+        </p:nvCxnSpPr>
+        <p:spPr>
+          <a:xfrm xmlns:a="http://schemas.openxmlformats.org/drawingml/2006/main">
+            <a:off x="9557686" y="4343400"/>
+            <a:ext cx="953" cy="190500"/>
+          </a:xfrm>
+          <a:prstGeom xmlns:a="http://schemas.openxmlformats.org/drawingml/2006/main" prst="straightConnector1">
+            <a:avLst/>
+          </a:prstGeom>
+          <a:ln xmlns:a="http://schemas.openxmlformats.org/drawingml/2006/main" w="28575">
+            <a:solidFill>
+              <a:srgbClr val="B87712"/>
+            </a:solidFill>
+            <a:prstDash val="solid"/>
+          </a:ln>
+        </p:spPr>
+      </p:cxnSp>
+      <p:sp>
+        <p:nvSpPr>
+          <p:cNvPr id="41" name="s8-time-estimate">
+            <a:extLst xmlns:a="http://schemas.openxmlformats.org/drawingml/2006/main">
+              <a:ext uri="{FF2B5EF4-FFF2-40B4-BE49-F238E27FC236}">
+                <a16:creationId xmlns:a16="http://schemas.microsoft.com/office/drawing/2014/main" id="{E534639A-D656-48F0-91B5-0DA5253A5701}"/>
+              </a:ext>
+            </a:extLst>
+          </p:cNvPr>
+          <p:cNvSpPr>
+            <a:spLocks xmlns:a="http://schemas.openxmlformats.org/drawingml/2006/main" noGrp="1"/>
+          </p:cNvSpPr>
+          <p:nvPr/>
+        </p:nvSpPr>
+        <p:spPr>
+          <a:xfrm xmlns:a="http://schemas.openxmlformats.org/drawingml/2006/main">
+            <a:off x="8204009" y="4371975"/>
+            <a:ext cx="133350" cy="133350"/>
+          </a:xfrm>
+          <a:prstGeom xmlns:a="http://schemas.openxmlformats.org/drawingml/2006/main" prst="ellipse">
+            <a:avLst/>
           </a:prstGeom>
           <a:solidFill xmlns:a="http://schemas.openxmlformats.org/drawingml/2006/main">
-            <a:srgbClr val="EDEFF3"/>
+            <a:srgbClr val="B87712"/>
           </a:solidFill>
           <a:ln xmlns:a="http://schemas.openxmlformats.org/drawingml/2006/main" w="0">
+            <a:solidFill>
+              <a:srgbClr val="B87712"/>
+            </a:solidFill>
+            <a:prstDash val="solid"/>
+          </a:ln>
+        </p:spPr>
+      </p:sp>
+      <p:sp>
+        <p:nvSpPr>
+          <p:cNvPr id="42" name="s8-time-status">
+            <a:extLst xmlns:a="http://schemas.openxmlformats.org/drawingml/2006/main">
+              <a:ext uri="{FF2B5EF4-FFF2-40B4-BE49-F238E27FC236}">
+                <a16:creationId xmlns:a16="http://schemas.microsoft.com/office/drawing/2014/main" id="{B0EA3AE0-6B60-4B88-9FE7-1E32E7DC95A5}"/>
+              </a:ext>
+            </a:extLst>
+          </p:cNvPr>
+          <p:cNvSpPr>
+            <a:spLocks xmlns:a="http://schemas.openxmlformats.org/drawingml/2006/main" noGrp="1"/>
+          </p:cNvSpPr>
+          <p:nvPr/>
+        </p:nvSpPr>
+        <p:spPr>
+          <a:xfrm xmlns:a="http://schemas.openxmlformats.org/drawingml/2006/main">
+            <a:off x="10020300" y="4095750"/>
+            <a:ext cx="1581150" cy="209550"/>
+          </a:xfrm>
+          <a:prstGeom xmlns:a="http://schemas.openxmlformats.org/drawingml/2006/main" prst="rect">
+            <a:avLst/>
+          </a:prstGeom>
+        </p:spPr>
+        <p:txBody>
+          <a:bodyPr xmlns:a="http://schemas.openxmlformats.org/drawingml/2006/main" wrap="square" lIns="0" tIns="0" rIns="0" bIns="0" anchor="t">
+            <a:noAutofit/>
+          </a:bodyPr>
+          <a:lstStyle xmlns:a="http://schemas.openxmlformats.org/drawingml/2006/main"/>
+          <a:p xmlns:a="http://schemas.openxmlformats.org/drawingml/2006/main">
+            <a:pPr algn="r">
+              <a:defRPr sz="1050" b="1">
+                <a:solidFill>
+                  <a:srgbClr val="B87712"/>
+                </a:solidFill>
+                <a:latin typeface="Arial"/>
+                <a:ea typeface="Arial"/>
+                <a:cs typeface="Arial"/>
+              </a:defRPr>
+            </a:pPr>
+            <a:r>
+              <a:t>CROSSES 0</a:t>
+            </a:r>
+          </a:p>
+        </p:txBody>
+      </p:sp>
+      <p:sp>
+        <p:nvSpPr>
+          <p:cNvPr id="43" name="s8-time-interpretation">
+            <a:extLst xmlns:a="http://schemas.openxmlformats.org/drawingml/2006/main">
+              <a:ext uri="{FF2B5EF4-FFF2-40B4-BE49-F238E27FC236}">
+                <a16:creationId xmlns:a16="http://schemas.microsoft.com/office/drawing/2014/main" id="{B22F5506-4E65-4297-80B8-26A4ECFAF501}"/>
+              </a:ext>
+            </a:extLst>
+          </p:cNvPr>
+          <p:cNvSpPr>
+            <a:spLocks xmlns:a="http://schemas.openxmlformats.org/drawingml/2006/main" noGrp="1"/>
+          </p:cNvSpPr>
+          <p:nvPr/>
+        </p:nvSpPr>
+        <p:spPr>
+          <a:xfrm xmlns:a="http://schemas.openxmlformats.org/drawingml/2006/main">
+            <a:off x="10020300" y="4362450"/>
+            <a:ext cx="1581150" cy="361950"/>
+          </a:xfrm>
+          <a:prstGeom xmlns:a="http://schemas.openxmlformats.org/drawingml/2006/main" prst="rect">
+            <a:avLst/>
+          </a:prstGeom>
+        </p:spPr>
+        <p:txBody>
+          <a:bodyPr xmlns:a="http://schemas.openxmlformats.org/drawingml/2006/main" wrap="square" lIns="0" tIns="0" rIns="0" bIns="0" anchor="t">
+            <a:noAutofit/>
+          </a:bodyPr>
+          <a:lstStyle xmlns:a="http://schemas.openxmlformats.org/drawingml/2006/main"/>
+          <a:p xmlns:a="http://schemas.openxmlformats.org/drawingml/2006/main">
+            <a:pPr algn="r">
+              <a:defRPr sz="1125" b="0">
+                <a:solidFill>
+                  <a:srgbClr val="526071"/>
+                </a:solidFill>
+                <a:latin typeface="Arial"/>
+                <a:ea typeface="Arial"/>
+                <a:cs typeface="Arial"/>
+              </a:defRPr>
+            </a:pPr>
+            <a:r>
+              <a:t>inconclusive</a:t>
+            </a:r>
+          </a:p>
+        </p:txBody>
+      </p:sp>
+      <p:cxnSp>
+        <p:nvCxnSpPr>
+          <p:cNvPr id="98" name="s8-time-rule"/>
+          <p:cNvCxnSpPr/>
+          <p:nvPr/>
+        </p:nvCxnSpPr>
+        <p:spPr>
+          <a:xfrm xmlns:a="http://schemas.openxmlformats.org/drawingml/2006/main">
+            <a:off x="552450" y="4895850"/>
+            <a:ext cx="11087100" cy="953"/>
+          </a:xfrm>
+          <a:prstGeom xmlns:a="http://schemas.openxmlformats.org/drawingml/2006/main" prst="straightConnector1">
+            <a:avLst/>
+          </a:prstGeom>
+          <a:ln xmlns:a="http://schemas.openxmlformats.org/drawingml/2006/main" w="9525">
             <a:solidFill>
               <a:srgbClr val="EDEFF3"/>
             </a:solidFill>
             <a:prstDash val="solid"/>
           </a:ln>
         </p:spPr>
-      </p:sp>
-      <p:sp>
-        <p:nvSpPr>
-          <p:cNvPr id="10" name="s9-row1-k">
-            <a:extLst xmlns:a="http://schemas.openxmlformats.org/drawingml/2006/main">
-              <a:ext uri="{FF2B5EF4-FFF2-40B4-BE49-F238E27FC236}">
-                <a16:creationId xmlns:a16="http://schemas.microsoft.com/office/drawing/2014/main" id="{C4092B44-912C-4EB6-B7F2-CBBA4F18F89B}"/>
-              </a:ext>
-            </a:extLst>
-          </p:cNvPr>
-          <p:cNvSpPr>
-            <a:spLocks xmlns:a="http://schemas.openxmlformats.org/drawingml/2006/main" noGrp="1"/>
-          </p:cNvSpPr>
-          <p:nvPr/>
-        </p:nvSpPr>
-        <p:spPr>
-          <a:xfrm xmlns:a="http://schemas.openxmlformats.org/drawingml/2006/main">
-            <a:off x="781050" y="2171700"/>
-            <a:ext cx="4095750" cy="247650"/>
-          </a:xfrm>
-          <a:prstGeom xmlns:a="http://schemas.openxmlformats.org/drawingml/2006/main" prst="rect">
-            <a:avLst/>
-          </a:prstGeom>
-        </p:spPr>
-        <p:txBody>
-          <a:bodyPr xmlns:a="http://schemas.openxmlformats.org/drawingml/2006/main" wrap="square" lIns="0" tIns="0" rIns="0" bIns="0" anchor="t">
-            <a:noAutofit/>
-          </a:bodyPr>
-          <a:lstStyle xmlns:a="http://schemas.openxmlformats.org/drawingml/2006/main"/>
-          <a:p xmlns:a="http://schemas.openxmlformats.org/drawingml/2006/main">
-            <a:pPr algn="l">
-              <a:defRPr sz="1425" b="1">
-                <a:solidFill>
-                  <a:srgbClr val="0A1224"/>
-                </a:solidFill>
-                <a:latin typeface="Arial"/>
-                <a:ea typeface="Arial"/>
-                <a:cs typeface="Arial"/>
-              </a:defRPr>
-            </a:pPr>
-            <a:r>
-              <a:t>Valid and successful arms</a:t>
-            </a:r>
-          </a:p>
-        </p:txBody>
-      </p:sp>
-      <p:sp>
-        <p:nvSpPr>
-          <p:cNvPr id="11" name="s9-row1-v">
-            <a:extLst xmlns:a="http://schemas.openxmlformats.org/drawingml/2006/main">
-              <a:ext uri="{FF2B5EF4-FFF2-40B4-BE49-F238E27FC236}">
-                <a16:creationId xmlns:a16="http://schemas.microsoft.com/office/drawing/2014/main" id="{74B86EAF-FD21-435D-B9FA-0099137109AD}"/>
-              </a:ext>
-            </a:extLst>
-          </p:cNvPr>
-          <p:cNvSpPr>
-            <a:spLocks xmlns:a="http://schemas.openxmlformats.org/drawingml/2006/main" noGrp="1"/>
-          </p:cNvSpPr>
-          <p:nvPr/>
-        </p:nvSpPr>
-        <p:spPr>
-          <a:xfrm xmlns:a="http://schemas.openxmlformats.org/drawingml/2006/main">
-            <a:off x="5619750" y="2114550"/>
-            <a:ext cx="1238250" cy="323850"/>
-          </a:xfrm>
-          <a:prstGeom xmlns:a="http://schemas.openxmlformats.org/drawingml/2006/main" prst="rect">
-            <a:avLst/>
-          </a:prstGeom>
-        </p:spPr>
-        <p:txBody>
-          <a:bodyPr xmlns:a="http://schemas.openxmlformats.org/drawingml/2006/main" wrap="square" lIns="0" tIns="0" rIns="0" bIns="0" anchor="t">
-            <a:noAutofit/>
-          </a:bodyPr>
-          <a:lstStyle xmlns:a="http://schemas.openxmlformats.org/drawingml/2006/main"/>
-          <a:p xmlns:a="http://schemas.openxmlformats.org/drawingml/2006/main">
-            <a:pPr algn="r">
-              <a:defRPr sz="1875" b="1">
-                <a:solidFill>
-                  <a:srgbClr val="15A777"/>
-                </a:solidFill>
-                <a:latin typeface="Arial"/>
-                <a:ea typeface="Arial"/>
-                <a:cs typeface="Arial"/>
-              </a:defRPr>
-            </a:pPr>
-            <a:r>
-              <a:t>64/64</a:t>
-            </a:r>
-          </a:p>
-        </p:txBody>
-      </p:sp>
-      <p:sp>
-        <p:nvSpPr>
-          <p:cNvPr id="12" name="s9-row2-k">
-            <a:extLst xmlns:a="http://schemas.openxmlformats.org/drawingml/2006/main">
-              <a:ext uri="{FF2B5EF4-FFF2-40B4-BE49-F238E27FC236}">
-                <a16:creationId xmlns:a16="http://schemas.microsoft.com/office/drawing/2014/main" id="{DFBF44CE-E3B7-4FF5-A02E-E8AAEDBA22A4}"/>
-              </a:ext>
-            </a:extLst>
-          </p:cNvPr>
-          <p:cNvSpPr>
-            <a:spLocks xmlns:a="http://schemas.openxmlformats.org/drawingml/2006/main" noGrp="1"/>
-          </p:cNvSpPr>
-          <p:nvPr/>
-        </p:nvSpPr>
-        <p:spPr>
-          <a:xfrm xmlns:a="http://schemas.openxmlformats.org/drawingml/2006/main">
-            <a:off x="781050" y="2819400"/>
-            <a:ext cx="4095750" cy="247650"/>
-          </a:xfrm>
-          <a:prstGeom xmlns:a="http://schemas.openxmlformats.org/drawingml/2006/main" prst="rect">
-            <a:avLst/>
-          </a:prstGeom>
-        </p:spPr>
-        <p:txBody>
-          <a:bodyPr xmlns:a="http://schemas.openxmlformats.org/drawingml/2006/main" wrap="square" lIns="0" tIns="0" rIns="0" bIns="0" anchor="t">
-            <a:noAutofit/>
-          </a:bodyPr>
-          <a:lstStyle xmlns:a="http://schemas.openxmlformats.org/drawingml/2006/main"/>
-          <a:p xmlns:a="http://schemas.openxmlformats.org/drawingml/2006/main">
-            <a:pPr algn="l">
-              <a:defRPr sz="1425" b="1">
-                <a:solidFill>
-                  <a:srgbClr val="0A1224"/>
-                </a:solidFill>
-                <a:latin typeface="Arial"/>
-                <a:ea typeface="Arial"/>
-                <a:cs typeface="Arial"/>
-              </a:defRPr>
-            </a:pPr>
-            <a:r>
-              <a:t>Public tests</a:t>
-            </a:r>
-          </a:p>
-        </p:txBody>
-      </p:sp>
-      <p:sp>
-        <p:nvSpPr>
-          <p:cNvPr id="13" name="s9-row2-v">
-            <a:extLst xmlns:a="http://schemas.openxmlformats.org/drawingml/2006/main">
-              <a:ext uri="{FF2B5EF4-FFF2-40B4-BE49-F238E27FC236}">
-                <a16:creationId xmlns:a16="http://schemas.microsoft.com/office/drawing/2014/main" id="{D77B0055-AF80-442B-98C1-1B4549799408}"/>
-              </a:ext>
-            </a:extLst>
-          </p:cNvPr>
-          <p:cNvSpPr>
-            <a:spLocks xmlns:a="http://schemas.openxmlformats.org/drawingml/2006/main" noGrp="1"/>
-          </p:cNvSpPr>
-          <p:nvPr/>
-        </p:nvSpPr>
-        <p:spPr>
-          <a:xfrm xmlns:a="http://schemas.openxmlformats.org/drawingml/2006/main">
-            <a:off x="5619750" y="2762250"/>
-            <a:ext cx="1238250" cy="323850"/>
-          </a:xfrm>
-          <a:prstGeom xmlns:a="http://schemas.openxmlformats.org/drawingml/2006/main" prst="rect">
-            <a:avLst/>
-          </a:prstGeom>
-        </p:spPr>
-        <p:txBody>
-          <a:bodyPr xmlns:a="http://schemas.openxmlformats.org/drawingml/2006/main" wrap="square" lIns="0" tIns="0" rIns="0" bIns="0" anchor="t">
-            <a:noAutofit/>
-          </a:bodyPr>
-          <a:lstStyle xmlns:a="http://schemas.openxmlformats.org/drawingml/2006/main"/>
-          <a:p xmlns:a="http://schemas.openxmlformats.org/drawingml/2006/main">
-            <a:pPr algn="r">
-              <a:defRPr sz="1875" b="1">
-                <a:solidFill>
-                  <a:srgbClr val="15A777"/>
-                </a:solidFill>
-                <a:latin typeface="Arial"/>
-                <a:ea typeface="Arial"/>
-                <a:cs typeface="Arial"/>
-              </a:defRPr>
-            </a:pPr>
-            <a:r>
-              <a:t>64/64</a:t>
-            </a:r>
-          </a:p>
-        </p:txBody>
-      </p:sp>
-      <p:sp>
-        <p:nvSpPr>
-          <p:cNvPr id="14" name="s9-row3-k">
-            <a:extLst xmlns:a="http://schemas.openxmlformats.org/drawingml/2006/main">
-              <a:ext uri="{FF2B5EF4-FFF2-40B4-BE49-F238E27FC236}">
-                <a16:creationId xmlns:a16="http://schemas.microsoft.com/office/drawing/2014/main" id="{AD16C852-4627-45AB-8AEE-23DDDEC6C675}"/>
-              </a:ext>
-            </a:extLst>
-          </p:cNvPr>
-          <p:cNvSpPr>
-            <a:spLocks xmlns:a="http://schemas.openxmlformats.org/drawingml/2006/main" noGrp="1"/>
-          </p:cNvSpPr>
-          <p:nvPr/>
-        </p:nvSpPr>
-        <p:spPr>
-          <a:xfrm xmlns:a="http://schemas.openxmlformats.org/drawingml/2006/main">
-            <a:off x="781050" y="3467100"/>
-            <a:ext cx="4095750" cy="247650"/>
-          </a:xfrm>
-          <a:prstGeom xmlns:a="http://schemas.openxmlformats.org/drawingml/2006/main" prst="rect">
-            <a:avLst/>
-          </a:prstGeom>
-        </p:spPr>
-        <p:txBody>
-          <a:bodyPr xmlns:a="http://schemas.openxmlformats.org/drawingml/2006/main" wrap="square" lIns="0" tIns="0" rIns="0" bIns="0" anchor="t">
-            <a:noAutofit/>
-          </a:bodyPr>
-          <a:lstStyle xmlns:a="http://schemas.openxmlformats.org/drawingml/2006/main"/>
-          <a:p xmlns:a="http://schemas.openxmlformats.org/drawingml/2006/main">
-            <a:pPr algn="l">
-              <a:defRPr sz="1425" b="1">
-                <a:solidFill>
-                  <a:srgbClr val="0A1224"/>
-                </a:solidFill>
-                <a:latin typeface="Arial"/>
-                <a:ea typeface="Arial"/>
-                <a:cs typeface="Arial"/>
-              </a:defRPr>
-            </a:pPr>
-            <a:r>
-              <a:t>Hidden oracle</a:t>
-            </a:r>
-          </a:p>
-        </p:txBody>
-      </p:sp>
-      <p:sp>
-        <p:nvSpPr>
-          <p:cNvPr id="15" name="s9-row3-v">
-            <a:extLst xmlns:a="http://schemas.openxmlformats.org/drawingml/2006/main">
-              <a:ext uri="{FF2B5EF4-FFF2-40B4-BE49-F238E27FC236}">
-                <a16:creationId xmlns:a16="http://schemas.microsoft.com/office/drawing/2014/main" id="{3CF4A2F1-B849-4A4D-A7C8-B636B52B019F}"/>
-              </a:ext>
-            </a:extLst>
-          </p:cNvPr>
-          <p:cNvSpPr>
-            <a:spLocks xmlns:a="http://schemas.openxmlformats.org/drawingml/2006/main" noGrp="1"/>
-          </p:cNvSpPr>
-          <p:nvPr/>
-        </p:nvSpPr>
-        <p:spPr>
-          <a:xfrm xmlns:a="http://schemas.openxmlformats.org/drawingml/2006/main">
-            <a:off x="5619750" y="3409950"/>
-            <a:ext cx="1238250" cy="323850"/>
-          </a:xfrm>
-          <a:prstGeom xmlns:a="http://schemas.openxmlformats.org/drawingml/2006/main" prst="rect">
-            <a:avLst/>
-          </a:prstGeom>
-        </p:spPr>
-        <p:txBody>
-          <a:bodyPr xmlns:a="http://schemas.openxmlformats.org/drawingml/2006/main" wrap="square" lIns="0" tIns="0" rIns="0" bIns="0" anchor="t">
-            <a:noAutofit/>
-          </a:bodyPr>
-          <a:lstStyle xmlns:a="http://schemas.openxmlformats.org/drawingml/2006/main"/>
-          <a:p xmlns:a="http://schemas.openxmlformats.org/drawingml/2006/main">
-            <a:pPr algn="r">
-              <a:defRPr sz="1875" b="1">
-                <a:solidFill>
-                  <a:srgbClr val="15A777"/>
-                </a:solidFill>
-                <a:latin typeface="Arial"/>
-                <a:ea typeface="Arial"/>
-                <a:cs typeface="Arial"/>
-              </a:defRPr>
-            </a:pPr>
-            <a:r>
-              <a:t>64/64</a:t>
-            </a:r>
-          </a:p>
-        </p:txBody>
-      </p:sp>
-      <p:sp>
-        <p:nvSpPr>
-          <p:cNvPr id="16" name="s9-row4-k">
-            <a:extLst xmlns:a="http://schemas.openxmlformats.org/drawingml/2006/main">
-              <a:ext uri="{FF2B5EF4-FFF2-40B4-BE49-F238E27FC236}">
-                <a16:creationId xmlns:a16="http://schemas.microsoft.com/office/drawing/2014/main" id="{4D3653E7-B0BB-4462-A17E-7015CC7A63A7}"/>
-              </a:ext>
-            </a:extLst>
-          </p:cNvPr>
-          <p:cNvSpPr>
-            <a:spLocks xmlns:a="http://schemas.openxmlformats.org/drawingml/2006/main" noGrp="1"/>
-          </p:cNvSpPr>
-          <p:nvPr/>
-        </p:nvSpPr>
-        <p:spPr>
-          <a:xfrm xmlns:a="http://schemas.openxmlformats.org/drawingml/2006/main">
-            <a:off x="781050" y="4114800"/>
-            <a:ext cx="4095750" cy="247650"/>
-          </a:xfrm>
-          <a:prstGeom xmlns:a="http://schemas.openxmlformats.org/drawingml/2006/main" prst="rect">
-            <a:avLst/>
-          </a:prstGeom>
-        </p:spPr>
-        <p:txBody>
-          <a:bodyPr xmlns:a="http://schemas.openxmlformats.org/drawingml/2006/main" wrap="square" lIns="0" tIns="0" rIns="0" bIns="0" anchor="t">
-            <a:noAutofit/>
-          </a:bodyPr>
-          <a:lstStyle xmlns:a="http://schemas.openxmlformats.org/drawingml/2006/main"/>
-          <a:p xmlns:a="http://schemas.openxmlformats.org/drawingml/2006/main">
-            <a:pPr algn="l">
-              <a:defRPr sz="1425" b="1">
-                <a:solidFill>
-                  <a:srgbClr val="0A1224"/>
-                </a:solidFill>
-                <a:latin typeface="Arial"/>
-                <a:ea typeface="Arial"/>
-                <a:cs typeface="Arial"/>
-              </a:defRPr>
-            </a:pPr>
-            <a:r>
-              <a:t>Declared scope score</a:t>
-            </a:r>
-          </a:p>
-        </p:txBody>
-      </p:sp>
-      <p:sp>
-        <p:nvSpPr>
-          <p:cNvPr id="17" name="s9-row4-v">
-            <a:extLst xmlns:a="http://schemas.openxmlformats.org/drawingml/2006/main">
-              <a:ext uri="{FF2B5EF4-FFF2-40B4-BE49-F238E27FC236}">
-                <a16:creationId xmlns:a16="http://schemas.microsoft.com/office/drawing/2014/main" id="{553D62FE-9EB0-4A46-B262-5E5B19D8449F}"/>
-              </a:ext>
-            </a:extLst>
-          </p:cNvPr>
-          <p:cNvSpPr>
-            <a:spLocks xmlns:a="http://schemas.openxmlformats.org/drawingml/2006/main" noGrp="1"/>
-          </p:cNvSpPr>
-          <p:nvPr/>
-        </p:nvSpPr>
-        <p:spPr>
-          <a:xfrm xmlns:a="http://schemas.openxmlformats.org/drawingml/2006/main">
-            <a:off x="5334000" y="4057650"/>
-            <a:ext cx="1524000" cy="323850"/>
-          </a:xfrm>
-          <a:prstGeom xmlns:a="http://schemas.openxmlformats.org/drawingml/2006/main" prst="rect">
-            <a:avLst/>
-          </a:prstGeom>
-        </p:spPr>
-        <p:txBody>
-          <a:bodyPr xmlns:a="http://schemas.openxmlformats.org/drawingml/2006/main" wrap="square" lIns="0" tIns="0" rIns="0" bIns="0" anchor="t">
-            <a:noAutofit/>
-          </a:bodyPr>
-          <a:lstStyle xmlns:a="http://schemas.openxmlformats.org/drawingml/2006/main"/>
-          <a:p xmlns:a="http://schemas.openxmlformats.org/drawingml/2006/main">
-            <a:pPr algn="r">
-              <a:defRPr sz="1875" b="1">
-                <a:solidFill>
-                  <a:srgbClr val="15A777"/>
-                </a:solidFill>
-                <a:latin typeface="Arial"/>
-                <a:ea typeface="Arial"/>
-                <a:cs typeface="Arial"/>
-              </a:defRPr>
-            </a:pPr>
-            <a:r>
-              <a:t>100/100</a:t>
-            </a:r>
-          </a:p>
-        </p:txBody>
-      </p:sp>
-      <p:sp>
-        <p:nvSpPr>
-          <p:cNvPr id="18" name="s9-row5-k">
-            <a:extLst xmlns:a="http://schemas.openxmlformats.org/drawingml/2006/main">
-              <a:ext uri="{FF2B5EF4-FFF2-40B4-BE49-F238E27FC236}">
-                <a16:creationId xmlns:a16="http://schemas.microsoft.com/office/drawing/2014/main" id="{390962D8-B81A-47E5-97E5-3D4CEFAB133C}"/>
-              </a:ext>
-            </a:extLst>
-          </p:cNvPr>
-          <p:cNvSpPr>
-            <a:spLocks xmlns:a="http://schemas.openxmlformats.org/drawingml/2006/main" noGrp="1"/>
-          </p:cNvSpPr>
-          <p:nvPr/>
-        </p:nvSpPr>
-        <p:spPr>
-          <a:xfrm xmlns:a="http://schemas.openxmlformats.org/drawingml/2006/main">
-            <a:off x="781050" y="4762500"/>
-            <a:ext cx="4095750" cy="247650"/>
-          </a:xfrm>
-          <a:prstGeom xmlns:a="http://schemas.openxmlformats.org/drawingml/2006/main" prst="rect">
-            <a:avLst/>
-          </a:prstGeom>
-        </p:spPr>
-        <p:txBody>
-          <a:bodyPr xmlns:a="http://schemas.openxmlformats.org/drawingml/2006/main" wrap="square" lIns="0" tIns="0" rIns="0" bIns="0" anchor="t">
-            <a:noAutofit/>
-          </a:bodyPr>
-          <a:lstStyle xmlns:a="http://schemas.openxmlformats.org/drawingml/2006/main"/>
-          <a:p xmlns:a="http://schemas.openxmlformats.org/drawingml/2006/main">
-            <a:pPr algn="l">
-              <a:defRPr sz="1425" b="1">
-                <a:solidFill>
-                  <a:srgbClr val="0A1224"/>
-                </a:solidFill>
-                <a:latin typeface="Arial"/>
-                <a:ea typeface="Arial"/>
-                <a:cs typeface="Arial"/>
-              </a:defRPr>
-            </a:pPr>
-            <a:r>
-              <a:t>Forbidden-file violations</a:t>
-            </a:r>
-          </a:p>
-        </p:txBody>
-      </p:sp>
-      <p:sp>
-        <p:nvSpPr>
-          <p:cNvPr id="19" name="s9-row5-v">
-            <a:extLst xmlns:a="http://schemas.openxmlformats.org/drawingml/2006/main">
-              <a:ext uri="{FF2B5EF4-FFF2-40B4-BE49-F238E27FC236}">
-                <a16:creationId xmlns:a16="http://schemas.microsoft.com/office/drawing/2014/main" id="{DE6E6035-A6BB-4C79-AF11-612BAC637D3F}"/>
-              </a:ext>
-            </a:extLst>
-          </p:cNvPr>
-          <p:cNvSpPr>
-            <a:spLocks xmlns:a="http://schemas.openxmlformats.org/drawingml/2006/main" noGrp="1"/>
-          </p:cNvSpPr>
-          <p:nvPr/>
-        </p:nvSpPr>
-        <p:spPr>
-          <a:xfrm xmlns:a="http://schemas.openxmlformats.org/drawingml/2006/main">
-            <a:off x="5619750" y="4705350"/>
-            <a:ext cx="1238250" cy="323850"/>
-          </a:xfrm>
-          <a:prstGeom xmlns:a="http://schemas.openxmlformats.org/drawingml/2006/main" prst="rect">
-            <a:avLst/>
-          </a:prstGeom>
-        </p:spPr>
-        <p:txBody>
-          <a:bodyPr xmlns:a="http://schemas.openxmlformats.org/drawingml/2006/main" wrap="square" lIns="0" tIns="0" rIns="0" bIns="0" anchor="t">
-            <a:noAutofit/>
-          </a:bodyPr>
-          <a:lstStyle xmlns:a="http://schemas.openxmlformats.org/drawingml/2006/main"/>
-          <a:p xmlns:a="http://schemas.openxmlformats.org/drawingml/2006/main">
-            <a:pPr algn="r">
-              <a:defRPr sz="1875" b="1">
-                <a:solidFill>
-                  <a:srgbClr val="15A777"/>
-                </a:solidFill>
-                <a:latin typeface="Arial"/>
-                <a:ea typeface="Arial"/>
-                <a:cs typeface="Arial"/>
-              </a:defRPr>
-            </a:pPr>
-            <a:r>
-              <a:t>0</a:t>
-            </a:r>
-          </a:p>
-        </p:txBody>
-      </p:sp>
-      <p:sp>
-        <p:nvSpPr>
-          <p:cNvPr id="20" name="s9-boundary">
-            <a:extLst xmlns:a="http://schemas.openxmlformats.org/drawingml/2006/main">
-              <a:ext uri="{FF2B5EF4-FFF2-40B4-BE49-F238E27FC236}">
-                <a16:creationId xmlns:a16="http://schemas.microsoft.com/office/drawing/2014/main" id="{24C8E19D-1CA2-4195-B599-CBCECA8835C6}"/>
-              </a:ext>
-            </a:extLst>
-          </p:cNvPr>
-          <p:cNvSpPr>
-            <a:spLocks xmlns:a="http://schemas.openxmlformats.org/drawingml/2006/main" noGrp="1"/>
-          </p:cNvSpPr>
-          <p:nvPr/>
-        </p:nvSpPr>
-        <p:spPr>
-          <a:xfrm xmlns:a="http://schemas.openxmlformats.org/drawingml/2006/main">
-            <a:off x="7677150" y="1695450"/>
-            <a:ext cx="3962400" cy="3467100"/>
+      </p:cxnSp>
+      <p:sp>
+        <p:nvSpPr>
+          <p:cNvPr id="45" name="s8-boundary-band">
+            <a:extLst xmlns:a="http://schemas.openxmlformats.org/drawingml/2006/main">
+              <a:ext uri="{FF2B5EF4-FFF2-40B4-BE49-F238E27FC236}">
+                <a16:creationId xmlns:a16="http://schemas.microsoft.com/office/drawing/2014/main" id="{667ABC08-0ED9-4F2E-95C5-1AB7EFDEE572}"/>
+              </a:ext>
+            </a:extLst>
+          </p:cNvPr>
+          <p:cNvSpPr>
+            <a:spLocks xmlns:a="http://schemas.openxmlformats.org/drawingml/2006/main" noGrp="1"/>
+          </p:cNvSpPr>
+          <p:nvPr/>
+        </p:nvSpPr>
+        <p:spPr>
+          <a:xfrm xmlns:a="http://schemas.openxmlformats.org/drawingml/2006/main">
+            <a:off x="552450" y="5086350"/>
+            <a:ext cx="11087100" cy="914400"/>
           </a:xfrm>
           <a:prstGeom xmlns:a="http://schemas.openxmlformats.org/drawingml/2006/main" prst="roundRect">
             <a:avLst>
-              <a:gd name="adj" fmla="val 2198"/>
+              <a:gd name="adj" fmla="val 8333"/>
             </a:avLst>
           </a:prstGeom>
           <a:solidFill xmlns:a="http://schemas.openxmlformats.org/drawingml/2006/main">
@@ -12660,35 +13388,35 @@
       </p:sp>
       <p:sp>
         <p:nvSpPr>
-          <p:cNvPr id="21" name="s9-boundary-k">
-            <a:extLst xmlns:a="http://schemas.openxmlformats.org/drawingml/2006/main">
-              <a:ext uri="{FF2B5EF4-FFF2-40B4-BE49-F238E27FC236}">
-                <a16:creationId xmlns:a16="http://schemas.microsoft.com/office/drawing/2014/main" id="{75D60422-5BBB-423A-A400-2E43C654607D}"/>
-              </a:ext>
-            </a:extLst>
-          </p:cNvPr>
-          <p:cNvSpPr>
-            <a:spLocks xmlns:a="http://schemas.openxmlformats.org/drawingml/2006/main" noGrp="1"/>
-          </p:cNvSpPr>
-          <p:nvPr/>
-        </p:nvSpPr>
-        <p:spPr>
-          <a:xfrm xmlns:a="http://schemas.openxmlformats.org/drawingml/2006/main">
-            <a:off x="7981950" y="2000250"/>
-            <a:ext cx="3352800" cy="285750"/>
-          </a:xfrm>
-          <a:prstGeom xmlns:a="http://schemas.openxmlformats.org/drawingml/2006/main" prst="rect">
-            <a:avLst/>
-          </a:prstGeom>
-        </p:spPr>
-        <p:txBody>
-          <a:bodyPr xmlns:a="http://schemas.openxmlformats.org/drawingml/2006/main" wrap="square" lIns="0" tIns="0" rIns="0" bIns="0" anchor="t">
-            <a:noAutofit/>
-          </a:bodyPr>
-          <a:lstStyle xmlns:a="http://schemas.openxmlformats.org/drawingml/2006/main"/>
-          <a:p xmlns:a="http://schemas.openxmlformats.org/drawingml/2006/main">
-            <a:pPr algn="l">
-              <a:defRPr sz="1200" b="1">
+          <p:cNvPr id="46" name="s8-correct-value">
+            <a:extLst xmlns:a="http://schemas.openxmlformats.org/drawingml/2006/main">
+              <a:ext uri="{FF2B5EF4-FFF2-40B4-BE49-F238E27FC236}">
+                <a16:creationId xmlns:a16="http://schemas.microsoft.com/office/drawing/2014/main" id="{6EBBE5F6-96EA-4986-8804-6C5B0CCF9EF6}"/>
+              </a:ext>
+            </a:extLst>
+          </p:cNvPr>
+          <p:cNvSpPr>
+            <a:spLocks xmlns:a="http://schemas.openxmlformats.org/drawingml/2006/main" noGrp="1"/>
+          </p:cNvSpPr>
+          <p:nvPr/>
+        </p:nvSpPr>
+        <p:spPr>
+          <a:xfrm xmlns:a="http://schemas.openxmlformats.org/drawingml/2006/main">
+            <a:off x="781050" y="5238750"/>
+            <a:ext cx="1428750" cy="361950"/>
+          </a:xfrm>
+          <a:prstGeom xmlns:a="http://schemas.openxmlformats.org/drawingml/2006/main" prst="rect">
+            <a:avLst/>
+          </a:prstGeom>
+        </p:spPr>
+        <p:txBody>
+          <a:bodyPr xmlns:a="http://schemas.openxmlformats.org/drawingml/2006/main" wrap="square" lIns="0" tIns="0" rIns="0" bIns="0" anchor="t">
+            <a:noAutofit/>
+          </a:bodyPr>
+          <a:lstStyle xmlns:a="http://schemas.openxmlformats.org/drawingml/2006/main"/>
+          <a:p xmlns:a="http://schemas.openxmlformats.org/drawingml/2006/main">
+            <a:pPr algn="l">
+              <a:defRPr sz="2175" b="1">
                 <a:solidFill>
                   <a:srgbClr val="13B7D5"/>
                 </a:solidFill>
@@ -12698,42 +13426,42 @@
               </a:defRPr>
             </a:pPr>
             <a:r>
-              <a:t>NO CORRECTNESS WINNER</a:t>
-            </a:r>
-          </a:p>
-        </p:txBody>
-      </p:sp>
-      <p:sp>
-        <p:nvSpPr>
-          <p:cNvPr id="22" name="s9-boundary-stat">
-            <a:extLst xmlns:a="http://schemas.openxmlformats.org/drawingml/2006/main">
-              <a:ext uri="{FF2B5EF4-FFF2-40B4-BE49-F238E27FC236}">
-                <a16:creationId xmlns:a16="http://schemas.microsoft.com/office/drawing/2014/main" id="{F083B957-5FFD-4DC6-9395-D6E099EF9F60}"/>
-              </a:ext>
-            </a:extLst>
-          </p:cNvPr>
-          <p:cNvSpPr>
-            <a:spLocks xmlns:a="http://schemas.openxmlformats.org/drawingml/2006/main" noGrp="1"/>
-          </p:cNvSpPr>
-          <p:nvPr/>
-        </p:nvSpPr>
-        <p:spPr>
-          <a:xfrm xmlns:a="http://schemas.openxmlformats.org/drawingml/2006/main">
-            <a:off x="7981950" y="2400300"/>
-            <a:ext cx="1714500" cy="685800"/>
-          </a:xfrm>
-          <a:prstGeom xmlns:a="http://schemas.openxmlformats.org/drawingml/2006/main" prst="rect">
-            <a:avLst/>
-          </a:prstGeom>
-        </p:spPr>
-        <p:txBody>
-          <a:bodyPr xmlns:a="http://schemas.openxmlformats.org/drawingml/2006/main" wrap="square" lIns="0" tIns="0" rIns="0" bIns="0" anchor="t">
-            <a:noAutofit/>
-          </a:bodyPr>
-          <a:lstStyle xmlns:a="http://schemas.openxmlformats.org/drawingml/2006/main"/>
-          <a:p xmlns:a="http://schemas.openxmlformats.org/drawingml/2006/main">
-            <a:pPr algn="l">
-              <a:defRPr sz="4050" b="1">
+              <a:t>64/64</a:t>
+            </a:r>
+          </a:p>
+        </p:txBody>
+      </p:sp>
+      <p:sp>
+        <p:nvSpPr>
+          <p:cNvPr id="47" name="s8-correct-label">
+            <a:extLst xmlns:a="http://schemas.openxmlformats.org/drawingml/2006/main">
+              <a:ext uri="{FF2B5EF4-FFF2-40B4-BE49-F238E27FC236}">
+                <a16:creationId xmlns:a16="http://schemas.microsoft.com/office/drawing/2014/main" id="{BB1E3C8D-993F-4F65-BA02-A300CFCDBA19}"/>
+              </a:ext>
+            </a:extLst>
+          </p:cNvPr>
+          <p:cNvSpPr>
+            <a:spLocks xmlns:a="http://schemas.openxmlformats.org/drawingml/2006/main" noGrp="1"/>
+          </p:cNvSpPr>
+          <p:nvPr/>
+        </p:nvSpPr>
+        <p:spPr>
+          <a:xfrm xmlns:a="http://schemas.openxmlformats.org/drawingml/2006/main">
+            <a:off x="781050" y="5619750"/>
+            <a:ext cx="2000250" cy="209550"/>
+          </a:xfrm>
+          <a:prstGeom xmlns:a="http://schemas.openxmlformats.org/drawingml/2006/main" prst="rect">
+            <a:avLst/>
+          </a:prstGeom>
+        </p:spPr>
+        <p:txBody>
+          <a:bodyPr xmlns:a="http://schemas.openxmlformats.org/drawingml/2006/main" wrap="square" lIns="0" tIns="0" rIns="0" bIns="0" anchor="t">
+            <a:noAutofit/>
+          </a:bodyPr>
+          <a:lstStyle xmlns:a="http://schemas.openxmlformats.org/drawingml/2006/main"/>
+          <a:p xmlns:a="http://schemas.openxmlformats.org/drawingml/2006/main">
+            <a:pPr algn="l">
+              <a:defRPr sz="1050" b="0">
                 <a:solidFill>
                   <a:srgbClr val="FFFFFF"/>
                 </a:solidFill>
@@ -12743,42 +13471,87 @@
               </a:defRPr>
             </a:pPr>
             <a:r>
-              <a:t>4/4</a:t>
-            </a:r>
-          </a:p>
-        </p:txBody>
-      </p:sp>
-      <p:sp>
-        <p:nvSpPr>
-          <p:cNvPr id="23" name="s9-boundary-label">
-            <a:extLst xmlns:a="http://schemas.openxmlformats.org/drawingml/2006/main">
-              <a:ext uri="{FF2B5EF4-FFF2-40B4-BE49-F238E27FC236}">
-                <a16:creationId xmlns:a16="http://schemas.microsoft.com/office/drawing/2014/main" id="{42D9EB00-D4A1-400A-8CE5-0B7ABD0099E6}"/>
-              </a:ext>
-            </a:extLst>
-          </p:cNvPr>
-          <p:cNvSpPr>
-            <a:spLocks xmlns:a="http://schemas.openxmlformats.org/drawingml/2006/main" noGrp="1"/>
-          </p:cNvSpPr>
-          <p:nvPr/>
-        </p:nvSpPr>
-        <p:spPr>
-          <a:xfrm xmlns:a="http://schemas.openxmlformats.org/drawingml/2006/main">
-            <a:off x="7981950" y="3009900"/>
-            <a:ext cx="2952750" cy="285750"/>
-          </a:xfrm>
-          <a:prstGeom xmlns:a="http://schemas.openxmlformats.org/drawingml/2006/main" prst="rect">
-            <a:avLst/>
-          </a:prstGeom>
-        </p:spPr>
-        <p:txBody>
-          <a:bodyPr xmlns:a="http://schemas.openxmlformats.org/drawingml/2006/main" wrap="square" lIns="0" tIns="0" rIns="0" bIns="0" anchor="t">
-            <a:noAutofit/>
-          </a:bodyPr>
-          <a:lstStyle xmlns:a="http://schemas.openxmlformats.org/drawingml/2006/main"/>
-          <a:p xmlns:a="http://schemas.openxmlformats.org/drawingml/2006/main">
-            <a:pPr algn="l">
-              <a:defRPr sz="1575" b="1">
+              <a:t>all arms correct</a:t>
+            </a:r>
+          </a:p>
+        </p:txBody>
+      </p:sp>
+      <p:sp>
+        <p:nvSpPr>
+          <p:cNvPr id="48" name="s8-full-value">
+            <a:extLst xmlns:a="http://schemas.openxmlformats.org/drawingml/2006/main">
+              <a:ext uri="{FF2B5EF4-FFF2-40B4-BE49-F238E27FC236}">
+                <a16:creationId xmlns:a16="http://schemas.microsoft.com/office/drawing/2014/main" id="{42AA28FF-2A2A-4CE8-90C7-81A03EF548C4}"/>
+              </a:ext>
+            </a:extLst>
+          </p:cNvPr>
+          <p:cNvSpPr>
+            <a:spLocks xmlns:a="http://schemas.openxmlformats.org/drawingml/2006/main" noGrp="1"/>
+          </p:cNvSpPr>
+          <p:nvPr/>
+        </p:nvSpPr>
+        <p:spPr>
+          <a:xfrm xmlns:a="http://schemas.openxmlformats.org/drawingml/2006/main">
+            <a:off x="3505200" y="5238750"/>
+            <a:ext cx="2095500" cy="361950"/>
+          </a:xfrm>
+          <a:prstGeom xmlns:a="http://schemas.openxmlformats.org/drawingml/2006/main" prst="rect">
+            <a:avLst/>
+          </a:prstGeom>
+        </p:spPr>
+        <p:txBody>
+          <a:bodyPr xmlns:a="http://schemas.openxmlformats.org/drawingml/2006/main" wrap="square" lIns="0" tIns="0" rIns="0" bIns="0" anchor="t">
+            <a:noAutofit/>
+          </a:bodyPr>
+          <a:lstStyle xmlns:a="http://schemas.openxmlformats.org/drawingml/2006/main"/>
+          <a:p xmlns:a="http://schemas.openxmlformats.org/drawingml/2006/main">
+            <a:pPr algn="l">
+              <a:defRPr sz="2025" b="1">
+                <a:solidFill>
+                  <a:srgbClr val="15A777"/>
+                </a:solidFill>
+                <a:latin typeface="Arial"/>
+                <a:ea typeface="Arial"/>
+                <a:cs typeface="Arial"/>
+              </a:defRPr>
+            </a:pPr>
+            <a:r>
+              <a:t>-898.5 bytes</a:t>
+            </a:r>
+          </a:p>
+        </p:txBody>
+      </p:sp>
+      <p:sp>
+        <p:nvSpPr>
+          <p:cNvPr id="49" name="s8-full-label">
+            <a:extLst xmlns:a="http://schemas.openxmlformats.org/drawingml/2006/main">
+              <a:ext uri="{FF2B5EF4-FFF2-40B4-BE49-F238E27FC236}">
+                <a16:creationId xmlns:a16="http://schemas.microsoft.com/office/drawing/2014/main" id="{5987B22A-23BE-436A-A0E2-7A5F67C94C44}"/>
+              </a:ext>
+            </a:extLst>
+          </p:cNvPr>
+          <p:cNvSpPr>
+            <a:spLocks xmlns:a="http://schemas.openxmlformats.org/drawingml/2006/main" noGrp="1"/>
+          </p:cNvSpPr>
+          <p:nvPr/>
+        </p:nvSpPr>
+        <p:spPr>
+          <a:xfrm xmlns:a="http://schemas.openxmlformats.org/drawingml/2006/main">
+            <a:off x="3505200" y="5619750"/>
+            <a:ext cx="3714750" cy="209550"/>
+          </a:xfrm>
+          <a:prstGeom xmlns:a="http://schemas.openxmlformats.org/drawingml/2006/main" prst="rect">
+            <a:avLst/>
+          </a:prstGeom>
+        </p:spPr>
+        <p:txBody>
+          <a:bodyPr xmlns:a="http://schemas.openxmlformats.org/drawingml/2006/main" wrap="square" lIns="0" tIns="0" rIns="0" bIns="0" anchor="t">
+            <a:noAutofit/>
+          </a:bodyPr>
+          <a:lstStyle xmlns:a="http://schemas.openxmlformats.org/drawingml/2006/main"/>
+          <a:p xmlns:a="http://schemas.openxmlformats.org/drawingml/2006/main">
+            <a:pPr algn="l">
+              <a:defRPr sz="1013" b="0">
                 <a:solidFill>
                   <a:srgbClr val="FFFFFF"/>
                 </a:solidFill>
@@ -12788,261 +13561,104 @@
               </a:defRPr>
             </a:pPr>
             <a:r>
-              <a:t>treatments correct</a:t>
+              <a:t>Adaptive vs Full Palace output | CI -1,972 to -550.5</a:t>
+            </a:r>
+          </a:p>
+        </p:txBody>
+      </p:sp>
+      <p:sp>
+        <p:nvSpPr>
+          <p:cNvPr id="50" name="s8-limit-value">
+            <a:extLst xmlns:a="http://schemas.openxmlformats.org/drawingml/2006/main">
+              <a:ext uri="{FF2B5EF4-FFF2-40B4-BE49-F238E27FC236}">
+                <a16:creationId xmlns:a16="http://schemas.microsoft.com/office/drawing/2014/main" id="{9D2D6973-490F-467A-9707-3E50A27F2FDA}"/>
+              </a:ext>
+            </a:extLst>
+          </p:cNvPr>
+          <p:cNvSpPr>
+            <a:spLocks xmlns:a="http://schemas.openxmlformats.org/drawingml/2006/main" noGrp="1"/>
+          </p:cNvSpPr>
+          <p:nvPr/>
+        </p:nvSpPr>
+        <p:spPr>
+          <a:xfrm xmlns:a="http://schemas.openxmlformats.org/drawingml/2006/main">
+            <a:off x="8172450" y="5276850"/>
+            <a:ext cx="1714500" cy="266700"/>
+          </a:xfrm>
+          <a:prstGeom xmlns:a="http://schemas.openxmlformats.org/drawingml/2006/main" prst="rect">
+            <a:avLst/>
+          </a:prstGeom>
+        </p:spPr>
+        <p:txBody>
+          <a:bodyPr xmlns:a="http://schemas.openxmlformats.org/drawingml/2006/main" wrap="square" lIns="0" tIns="0" rIns="0" bIns="0" anchor="t">
+            <a:noAutofit/>
+          </a:bodyPr>
+          <a:lstStyle xmlns:a="http://schemas.openxmlformats.org/drawingml/2006/main"/>
+          <a:p xmlns:a="http://schemas.openxmlformats.org/drawingml/2006/main">
+            <a:pPr algn="l">
+              <a:defRPr sz="1275" b="1">
+                <a:solidFill>
+                  <a:srgbClr val="D4515D"/>
+                </a:solidFill>
+                <a:latin typeface="Arial"/>
+                <a:ea typeface="Arial"/>
+                <a:cs typeface="Arial"/>
+              </a:defRPr>
+            </a:pPr>
+            <a:r>
+              <a:t>NOT PROVEN</a:t>
+            </a:r>
+          </a:p>
+        </p:txBody>
+      </p:sp>
+      <p:sp>
+        <p:nvSpPr>
+          <p:cNvPr id="51" name="s8-limit-label">
+            <a:extLst xmlns:a="http://schemas.openxmlformats.org/drawingml/2006/main">
+              <a:ext uri="{FF2B5EF4-FFF2-40B4-BE49-F238E27FC236}">
+                <a16:creationId xmlns:a16="http://schemas.microsoft.com/office/drawing/2014/main" id="{09468687-B26F-4278-9018-6DB255AD1ADC}"/>
+              </a:ext>
+            </a:extLst>
+          </p:cNvPr>
+          <p:cNvSpPr>
+            <a:spLocks xmlns:a="http://schemas.openxmlformats.org/drawingml/2006/main" noGrp="1"/>
+          </p:cNvSpPr>
+          <p:nvPr/>
+        </p:nvSpPr>
+        <p:spPr>
+          <a:xfrm xmlns:a="http://schemas.openxmlformats.org/drawingml/2006/main">
+            <a:off x="8172450" y="5600700"/>
+            <a:ext cx="2952750" cy="228600"/>
+          </a:xfrm>
+          <a:prstGeom xmlns:a="http://schemas.openxmlformats.org/drawingml/2006/main" prst="rect">
+            <a:avLst/>
+          </a:prstGeom>
+        </p:spPr>
+        <p:txBody>
+          <a:bodyPr xmlns:a="http://schemas.openxmlformats.org/drawingml/2006/main" wrap="square" lIns="0" tIns="0" rIns="0" bIns="0" anchor="t">
+            <a:noAutofit/>
+          </a:bodyPr>
+          <a:lstStyle xmlns:a="http://schemas.openxmlformats.org/drawingml/2006/main"/>
+          <a:p xmlns:a="http://schemas.openxmlformats.org/drawingml/2006/main">
+            <a:pPr algn="l">
+              <a:defRPr sz="1125" b="0">
+                <a:solidFill>
+                  <a:srgbClr val="FFFFFF"/>
+                </a:solidFill>
+                <a:latin typeface="Arial"/>
+                <a:ea typeface="Arial"/>
+                <a:cs typeface="Arial"/>
+              </a:defRPr>
+            </a:pPr>
+            <a:r>
+              <a:t>universal Token or time savings</a:t>
             </a:r>
           </a:p>
         </p:txBody>
       </p:sp>
       <p:cxnSp>
         <p:nvCxnSpPr>
-          <p:cNvPr id="56" name="s9-boundary-rule"/>
-          <p:cNvCxnSpPr/>
-          <p:nvPr/>
-        </p:nvCxnSpPr>
-        <p:spPr>
-          <a:xfrm xmlns:a="http://schemas.openxmlformats.org/drawingml/2006/main">
-            <a:off x="7981950" y="3486150"/>
-            <a:ext cx="3352800" cy="953"/>
-          </a:xfrm>
-          <a:prstGeom xmlns:a="http://schemas.openxmlformats.org/drawingml/2006/main" prst="straightConnector1">
-            <a:avLst/>
-          </a:prstGeom>
-          <a:ln xmlns:a="http://schemas.openxmlformats.org/drawingml/2006/main" w="19050">
-            <a:solidFill>
-              <a:srgbClr val="0B2B56"/>
-            </a:solidFill>
-            <a:prstDash val="solid"/>
-          </a:ln>
-        </p:spPr>
-      </p:cxnSp>
-      <p:sp>
-        <p:nvSpPr>
-          <p:cNvPr id="25" name="s9-supported-k">
-            <a:extLst xmlns:a="http://schemas.openxmlformats.org/drawingml/2006/main">
-              <a:ext uri="{FF2B5EF4-FFF2-40B4-BE49-F238E27FC236}">
-                <a16:creationId xmlns:a16="http://schemas.microsoft.com/office/drawing/2014/main" id="{2292CAC9-F3C4-4A53-8FBB-BD6E9D5F2565}"/>
-              </a:ext>
-            </a:extLst>
-          </p:cNvPr>
-          <p:cNvSpPr>
-            <a:spLocks xmlns:a="http://schemas.openxmlformats.org/drawingml/2006/main" noGrp="1"/>
-          </p:cNvSpPr>
-          <p:nvPr/>
-        </p:nvSpPr>
-        <p:spPr>
-          <a:xfrm xmlns:a="http://schemas.openxmlformats.org/drawingml/2006/main">
-            <a:off x="7981950" y="3714750"/>
-            <a:ext cx="1333500" cy="209550"/>
-          </a:xfrm>
-          <a:prstGeom xmlns:a="http://schemas.openxmlformats.org/drawingml/2006/main" prst="rect">
-            <a:avLst/>
-          </a:prstGeom>
-        </p:spPr>
-        <p:txBody>
-          <a:bodyPr xmlns:a="http://schemas.openxmlformats.org/drawingml/2006/main" wrap="square" lIns="0" tIns="0" rIns="0" bIns="0" anchor="t">
-            <a:noAutofit/>
-          </a:bodyPr>
-          <a:lstStyle xmlns:a="http://schemas.openxmlformats.org/drawingml/2006/main"/>
-          <a:p xmlns:a="http://schemas.openxmlformats.org/drawingml/2006/main">
-            <a:pPr algn="l">
-              <a:defRPr sz="1050" b="1">
-                <a:solidFill>
-                  <a:srgbClr val="15A777"/>
-                </a:solidFill>
-                <a:latin typeface="Arial"/>
-                <a:ea typeface="Arial"/>
-                <a:cs typeface="Arial"/>
-              </a:defRPr>
-            </a:pPr>
-            <a:r>
-              <a:t>SUPPORTED</a:t>
-            </a:r>
-          </a:p>
-        </p:txBody>
-      </p:sp>
-      <p:sp>
-        <p:nvSpPr>
-          <p:cNvPr id="26" name="s9-supported-v">
-            <a:extLst xmlns:a="http://schemas.openxmlformats.org/drawingml/2006/main">
-              <a:ext uri="{FF2B5EF4-FFF2-40B4-BE49-F238E27FC236}">
-                <a16:creationId xmlns:a16="http://schemas.microsoft.com/office/drawing/2014/main" id="{D3A1E56E-206C-42B4-B0E2-AC63152DC81A}"/>
-              </a:ext>
-            </a:extLst>
-          </p:cNvPr>
-          <p:cNvSpPr>
-            <a:spLocks xmlns:a="http://schemas.openxmlformats.org/drawingml/2006/main" noGrp="1"/>
-          </p:cNvSpPr>
-          <p:nvPr/>
-        </p:nvSpPr>
-        <p:spPr>
-          <a:xfrm xmlns:a="http://schemas.openxmlformats.org/drawingml/2006/main">
-            <a:off x="7981950" y="3981450"/>
-            <a:ext cx="3352800" cy="495300"/>
-          </a:xfrm>
-          <a:prstGeom xmlns:a="http://schemas.openxmlformats.org/drawingml/2006/main" prst="rect">
-            <a:avLst/>
-          </a:prstGeom>
-        </p:spPr>
-        <p:txBody>
-          <a:bodyPr xmlns:a="http://schemas.openxmlformats.org/drawingml/2006/main" wrap="square" lIns="0" tIns="0" rIns="0" bIns="0" anchor="t">
-            <a:noAutofit/>
-          </a:bodyPr>
-          <a:lstStyle xmlns:a="http://schemas.openxmlformats.org/drawingml/2006/main"/>
-          <a:p xmlns:a="http://schemas.openxmlformats.org/drawingml/2006/main">
-            <a:pPr algn="l">
-              <a:defRPr sz="1350" b="0">
-                <a:solidFill>
-                  <a:srgbClr val="FFFFFF"/>
-                </a:solidFill>
-                <a:latin typeface="Arial"/>
-                <a:ea typeface="Arial"/>
-                <a:cs typeface="Arial"/>
-              </a:defRPr>
-            </a:pPr>
-            <a:r>
-              <a:t>Adaptive reduces Palace-owned payload versus Full.</a:t>
-            </a:r>
-          </a:p>
-        </p:txBody>
-      </p:sp>
-      <p:sp>
-        <p:nvSpPr>
-          <p:cNvPr id="27" name="s9-limit-k">
-            <a:extLst xmlns:a="http://schemas.openxmlformats.org/drawingml/2006/main">
-              <a:ext uri="{FF2B5EF4-FFF2-40B4-BE49-F238E27FC236}">
-                <a16:creationId xmlns:a16="http://schemas.microsoft.com/office/drawing/2014/main" id="{5A06B989-8A7A-4130-9C57-28A5FF05B64E}"/>
-              </a:ext>
-            </a:extLst>
-          </p:cNvPr>
-          <p:cNvSpPr>
-            <a:spLocks xmlns:a="http://schemas.openxmlformats.org/drawingml/2006/main" noGrp="1"/>
-          </p:cNvSpPr>
-          <p:nvPr/>
-        </p:nvSpPr>
-        <p:spPr>
-          <a:xfrm xmlns:a="http://schemas.openxmlformats.org/drawingml/2006/main">
-            <a:off x="7981950" y="4610100"/>
-            <a:ext cx="1333500" cy="209550"/>
-          </a:xfrm>
-          <a:prstGeom xmlns:a="http://schemas.openxmlformats.org/drawingml/2006/main" prst="rect">
-            <a:avLst/>
-          </a:prstGeom>
-        </p:spPr>
-        <p:txBody>
-          <a:bodyPr xmlns:a="http://schemas.openxmlformats.org/drawingml/2006/main" wrap="square" lIns="0" tIns="0" rIns="0" bIns="0" anchor="t">
-            <a:noAutofit/>
-          </a:bodyPr>
-          <a:lstStyle xmlns:a="http://schemas.openxmlformats.org/drawingml/2006/main"/>
-          <a:p xmlns:a="http://schemas.openxmlformats.org/drawingml/2006/main">
-            <a:pPr algn="l">
-              <a:defRPr sz="1050" b="1">
-                <a:solidFill>
-                  <a:srgbClr val="D4515D"/>
-                </a:solidFill>
-                <a:latin typeface="Arial"/>
-                <a:ea typeface="Arial"/>
-                <a:cs typeface="Arial"/>
-              </a:defRPr>
-            </a:pPr>
-            <a:r>
-              <a:t>NOT PROVEN</a:t>
-            </a:r>
-          </a:p>
-        </p:txBody>
-      </p:sp>
-      <p:sp>
-        <p:nvSpPr>
-          <p:cNvPr id="28" name="s9-limit-v">
-            <a:extLst xmlns:a="http://schemas.openxmlformats.org/drawingml/2006/main">
-              <a:ext uri="{FF2B5EF4-FFF2-40B4-BE49-F238E27FC236}">
-                <a16:creationId xmlns:a16="http://schemas.microsoft.com/office/drawing/2014/main" id="{0F1A54A2-77B0-4748-AE35-E495BBD757B1}"/>
-              </a:ext>
-            </a:extLst>
-          </p:cNvPr>
-          <p:cNvSpPr>
-            <a:spLocks xmlns:a="http://schemas.openxmlformats.org/drawingml/2006/main" noGrp="1"/>
-          </p:cNvSpPr>
-          <p:nvPr/>
-        </p:nvSpPr>
-        <p:spPr>
-          <a:xfrm xmlns:a="http://schemas.openxmlformats.org/drawingml/2006/main">
-            <a:off x="7981950" y="4857750"/>
-            <a:ext cx="3352800" cy="476250"/>
-          </a:xfrm>
-          <a:prstGeom xmlns:a="http://schemas.openxmlformats.org/drawingml/2006/main" prst="rect">
-            <a:avLst/>
-          </a:prstGeom>
-        </p:spPr>
-        <p:txBody>
-          <a:bodyPr xmlns:a="http://schemas.openxmlformats.org/drawingml/2006/main" wrap="square" lIns="0" tIns="0" rIns="0" bIns="0" anchor="t">
-            <a:noAutofit/>
-          </a:bodyPr>
-          <a:lstStyle xmlns:a="http://schemas.openxmlformats.org/drawingml/2006/main"/>
-          <a:p xmlns:a="http://schemas.openxmlformats.org/drawingml/2006/main">
-            <a:pPr algn="l">
-              <a:defRPr sz="1350" b="0">
-                <a:solidFill>
-                  <a:srgbClr val="FFFFFF"/>
-                </a:solidFill>
-                <a:latin typeface="Arial"/>
-                <a:ea typeface="Arial"/>
-                <a:cs typeface="Arial"/>
-              </a:defRPr>
-            </a:pPr>
-            <a:r>
-              <a:t>Universal token, time, or correctness gains.</a:t>
-            </a:r>
-          </a:p>
-        </p:txBody>
-      </p:sp>
-      <p:sp>
-        <p:nvSpPr>
-          <p:cNvPr id="29" name="s9-study-note">
-            <a:extLst xmlns:a="http://schemas.openxmlformats.org/drawingml/2006/main">
-              <a:ext uri="{FF2B5EF4-FFF2-40B4-BE49-F238E27FC236}">
-                <a16:creationId xmlns:a16="http://schemas.microsoft.com/office/drawing/2014/main" id="{4FC15107-7626-4E8A-A0EA-7E76A9A9505F}"/>
-              </a:ext>
-            </a:extLst>
-          </p:cNvPr>
-          <p:cNvSpPr>
-            <a:spLocks xmlns:a="http://schemas.openxmlformats.org/drawingml/2006/main" noGrp="1"/>
-          </p:cNvSpPr>
-          <p:nvPr/>
-        </p:nvSpPr>
-        <p:spPr>
-          <a:xfrm xmlns:a="http://schemas.openxmlformats.org/drawingml/2006/main">
-            <a:off x="552450" y="5448300"/>
-            <a:ext cx="6667500" cy="266700"/>
-          </a:xfrm>
-          <a:prstGeom xmlns:a="http://schemas.openxmlformats.org/drawingml/2006/main" prst="rect">
-            <a:avLst/>
-          </a:prstGeom>
-        </p:spPr>
-        <p:txBody>
-          <a:bodyPr xmlns:a="http://schemas.openxmlformats.org/drawingml/2006/main" wrap="square" lIns="0" tIns="0" rIns="0" bIns="0" anchor="t">
-            <a:noAutofit/>
-          </a:bodyPr>
-          <a:lstStyle xmlns:a="http://schemas.openxmlformats.org/drawingml/2006/main"/>
-          <a:p xmlns:a="http://schemas.openxmlformats.org/drawingml/2006/main">
-            <a:pPr algn="l">
-              <a:defRPr sz="1275" b="0">
-                <a:solidFill>
-                  <a:srgbClr val="526071"/>
-                </a:solidFill>
-                <a:latin typeface="Consolas"/>
-                <a:ea typeface="Consolas"/>
-                <a:cs typeface="Consolas"/>
-              </a:defRPr>
-            </a:pPr>
-            <a:r>
-              <a:t>Frozen exploratory study | Vertex Palace 0.2.1</a:t>
-            </a:r>
-          </a:p>
-        </p:txBody>
-      </p:sp>
-      <p:cxnSp>
-        <p:nvCxnSpPr>
-          <p:cNvPr id="62" name="footer-rule-8"/>
+          <p:cNvPr id="106" name="footer-rule-8"/>
           <p:cNvCxnSpPr/>
           <p:nvPr/>
         </p:nvCxnSpPr>
@@ -13064,10 +13680,10 @@
       </p:cxnSp>
       <p:sp>
         <p:nvSpPr>
-          <p:cNvPr id="31" name="footer-source-8">
-            <a:extLst xmlns:a="http://schemas.openxmlformats.org/drawingml/2006/main">
-              <a:ext uri="{FF2B5EF4-FFF2-40B4-BE49-F238E27FC236}">
-                <a16:creationId xmlns:a16="http://schemas.microsoft.com/office/drawing/2014/main" id="{7DA01D05-4D04-4E73-9A9B-D876788E60EC}"/>
+          <p:cNvPr id="53" name="footer-source-8">
+            <a:extLst xmlns:a="http://schemas.openxmlformats.org/drawingml/2006/main">
+              <a:ext uri="{FF2B5EF4-FFF2-40B4-BE49-F238E27FC236}">
+                <a16:creationId xmlns:a16="http://schemas.microsoft.com/office/drawing/2014/main" id="{4DD6485E-06C3-4F77-8C3B-9258BEC337CE}"/>
               </a:ext>
             </a:extLst>
           </p:cNvPr>
@@ -13102,17 +13718,17 @@
               </a:defRPr>
             </a:pPr>
             <a:r>
-              <a:t>Public benchmark final report: docs/research/ADAPTIVE_V2_2_FINAL.md in benchmarks-ab-demo</a:t>
-            </a:r>
-          </a:p>
-        </p:txBody>
-      </p:sp>
-      <p:sp>
-        <p:nvSpPr>
-          <p:cNvPr id="32" name="footer-number-8">
-            <a:extLst xmlns:a="http://schemas.openxmlformats.org/drawingml/2006/main">
-              <a:ext uri="{FF2B5EF4-FFF2-40B4-BE49-F238E27FC236}">
-                <a16:creationId xmlns:a16="http://schemas.microsoft.com/office/drawing/2014/main" id="{EF470030-DDD1-4544-967E-C184E2578270}"/>
+              <a:t>benchmarks-demo | adaptive-pilot-v2.2/analysis.json | n=16 | paired 95% bootstrap intervals</a:t>
+            </a:r>
+          </a:p>
+        </p:txBody>
+      </p:sp>
+      <p:sp>
+        <p:nvSpPr>
+          <p:cNvPr id="54" name="footer-number-8">
+            <a:extLst xmlns:a="http://schemas.openxmlformats.org/drawingml/2006/main">
+              <a:ext uri="{FF2B5EF4-FFF2-40B4-BE49-F238E27FC236}">
+                <a16:creationId xmlns:a16="http://schemas.microsoft.com/office/drawing/2014/main" id="{1858CE35-9522-4BBC-9F32-7AD251D9493B}"/>
               </a:ext>
             </a:extLst>
           </p:cNvPr>
@@ -13155,7 +13771,7 @@
     </p:spTree>
     <p:extLst>
       <p:ext uri="{BB962C8B-B14F-4D97-AF65-F5344CB8AC3E}">
-        <p14:creationId xmlns:p14="http://schemas.microsoft.com/office/powerpoint/2010/main" val="852191105"/>
+        <p14:creationId xmlns:p14="http://schemas.microsoft.com/office/powerpoint/2010/main" val="1814072128"/>
       </p:ext>
     </p:extLst>
   </p:cSld>
@@ -13186,7 +13802,7 @@
           <p:cNvPr id="39" name="s10-title">
             <a:extLst xmlns:a="http://schemas.openxmlformats.org/drawingml/2006/main">
               <a:ext uri="{FF2B5EF4-FFF2-40B4-BE49-F238E27FC236}">
-                <a16:creationId xmlns:a16="http://schemas.microsoft.com/office/drawing/2014/main" id="{4388A738-8025-4E47-94A0-BD6BC43A9B48}"/>
+                <a16:creationId xmlns:a16="http://schemas.microsoft.com/office/drawing/2014/main" id="{465F720F-4C27-4A44-9FAA-DD3A9B6E3BBF}"/>
               </a:ext>
             </a:extLst>
           </p:cNvPr>
@@ -13231,7 +13847,7 @@
           <p:cNvPr id="2" name="s10-subtitle">
             <a:extLst xmlns:a="http://schemas.openxmlformats.org/drawingml/2006/main">
               <a:ext uri="{FF2B5EF4-FFF2-40B4-BE49-F238E27FC236}">
-                <a16:creationId xmlns:a16="http://schemas.microsoft.com/office/drawing/2014/main" id="{8299B9CB-8B86-4435-BBC5-5F8BB8B0C548}"/>
+                <a16:creationId xmlns:a16="http://schemas.microsoft.com/office/drawing/2014/main" id="{EFE57826-8108-413E-B530-3B6662E28B67}"/>
               </a:ext>
             </a:extLst>
           </p:cNvPr>
@@ -13276,7 +13892,7 @@
           <p:cNvPr id="3" name="s10-tests">
             <a:extLst xmlns:a="http://schemas.openxmlformats.org/drawingml/2006/main">
               <a:ext uri="{FF2B5EF4-FFF2-40B4-BE49-F238E27FC236}">
-                <a16:creationId xmlns:a16="http://schemas.microsoft.com/office/drawing/2014/main" id="{57CCB5A4-94F9-4D82-BC98-7AF4762BDF01}"/>
+                <a16:creationId xmlns:a16="http://schemas.microsoft.com/office/drawing/2014/main" id="{536B2531-E94A-4CAF-90E8-819731A168C8}"/>
               </a:ext>
             </a:extLst>
           </p:cNvPr>
@@ -13311,7 +13927,7 @@
           <p:cNvPr id="4" name="s10-tests-k">
             <a:extLst xmlns:a="http://schemas.openxmlformats.org/drawingml/2006/main">
               <a:ext uri="{FF2B5EF4-FFF2-40B4-BE49-F238E27FC236}">
-                <a16:creationId xmlns:a16="http://schemas.microsoft.com/office/drawing/2014/main" id="{B270F319-9BD2-4A13-BB9C-C1F7E82F4159}"/>
+                <a16:creationId xmlns:a16="http://schemas.microsoft.com/office/drawing/2014/main" id="{BBB08101-AB41-4029-BC89-345D3818BCC7}"/>
               </a:ext>
             </a:extLst>
           </p:cNvPr>
@@ -13356,7 +13972,7 @@
           <p:cNvPr id="5" name="s10-tests-stat">
             <a:extLst xmlns:a="http://schemas.openxmlformats.org/drawingml/2006/main">
               <a:ext uri="{FF2B5EF4-FFF2-40B4-BE49-F238E27FC236}">
-                <a16:creationId xmlns:a16="http://schemas.microsoft.com/office/drawing/2014/main" id="{597CEC35-B32A-4070-9860-3023075DBC92}"/>
+                <a16:creationId xmlns:a16="http://schemas.microsoft.com/office/drawing/2014/main" id="{F6F41FEE-FC87-4F29-A315-7F1E83DE3AAA}"/>
               </a:ext>
             </a:extLst>
           </p:cNvPr>
@@ -13401,7 +14017,7 @@
           <p:cNvPr id="6" name="s10-tests-label">
             <a:extLst xmlns:a="http://schemas.openxmlformats.org/drawingml/2006/main">
               <a:ext uri="{FF2B5EF4-FFF2-40B4-BE49-F238E27FC236}">
-                <a16:creationId xmlns:a16="http://schemas.microsoft.com/office/drawing/2014/main" id="{7AFA9665-DE21-4184-90AC-C100D511CEEE}"/>
+                <a16:creationId xmlns:a16="http://schemas.microsoft.com/office/drawing/2014/main" id="{0FDD2325-9861-4BE4-83A0-CC5ECD9E6AFC}"/>
               </a:ext>
             </a:extLst>
           </p:cNvPr>
@@ -13468,7 +14084,7 @@
           <p:cNvPr id="8" name="s10-tests-body">
             <a:extLst xmlns:a="http://schemas.openxmlformats.org/drawingml/2006/main">
               <a:ext uri="{FF2B5EF4-FFF2-40B4-BE49-F238E27FC236}">
-                <a16:creationId xmlns:a16="http://schemas.microsoft.com/office/drawing/2014/main" id="{AEA8F7A9-6320-4C0F-823D-E401C3A9CD99}"/>
+                <a16:creationId xmlns:a16="http://schemas.microsoft.com/office/drawing/2014/main" id="{CA42AB97-FF74-469C-A374-03AB5F51B63E}"/>
               </a:ext>
             </a:extLst>
           </p:cNvPr>
@@ -13515,7 +14131,7 @@
           <p:cNvPr id="9" name="s10-test-d1">
             <a:extLst xmlns:a="http://schemas.openxmlformats.org/drawingml/2006/main">
               <a:ext uri="{FF2B5EF4-FFF2-40B4-BE49-F238E27FC236}">
-                <a16:creationId xmlns:a16="http://schemas.microsoft.com/office/drawing/2014/main" id="{ED9FB193-9E08-4041-8078-F932AB1AB46E}"/>
+                <a16:creationId xmlns:a16="http://schemas.microsoft.com/office/drawing/2014/main" id="{F8BCB956-ECE1-4215-B5EB-287D79444276}"/>
               </a:ext>
             </a:extLst>
           </p:cNvPr>
@@ -13548,7 +14164,7 @@
           <p:cNvPr id="10" name="s10-test-d2">
             <a:extLst xmlns:a="http://schemas.openxmlformats.org/drawingml/2006/main">
               <a:ext uri="{FF2B5EF4-FFF2-40B4-BE49-F238E27FC236}">
-                <a16:creationId xmlns:a16="http://schemas.microsoft.com/office/drawing/2014/main" id="{C122B02F-2372-407F-BAF3-50556E515FCB}"/>
+                <a16:creationId xmlns:a16="http://schemas.microsoft.com/office/drawing/2014/main" id="{14DCB556-A5AB-4FEB-89A0-51D5C4991923}"/>
               </a:ext>
             </a:extLst>
           </p:cNvPr>
@@ -13581,7 +14197,7 @@
           <p:cNvPr id="11" name="s10-test-d3">
             <a:extLst xmlns:a="http://schemas.openxmlformats.org/drawingml/2006/main">
               <a:ext uri="{FF2B5EF4-FFF2-40B4-BE49-F238E27FC236}">
-                <a16:creationId xmlns:a16="http://schemas.microsoft.com/office/drawing/2014/main" id="{E06BABE4-FC26-4D49-A665-1E7B9898AF11}"/>
+                <a16:creationId xmlns:a16="http://schemas.microsoft.com/office/drawing/2014/main" id="{FE9827F3-71D8-41F6-8F7C-A60011714569}"/>
               </a:ext>
             </a:extLst>
           </p:cNvPr>
@@ -13614,7 +14230,7 @@
           <p:cNvPr id="12" name="s10-test-g1">
             <a:extLst xmlns:a="http://schemas.openxmlformats.org/drawingml/2006/main">
               <a:ext uri="{FF2B5EF4-FFF2-40B4-BE49-F238E27FC236}">
-                <a16:creationId xmlns:a16="http://schemas.microsoft.com/office/drawing/2014/main" id="{04D091E8-BA5D-4CC6-89C9-2E65531F1799}"/>
+                <a16:creationId xmlns:a16="http://schemas.microsoft.com/office/drawing/2014/main" id="{92515F6E-64F4-46AA-9570-C38F584087DA}"/>
               </a:ext>
             </a:extLst>
           </p:cNvPr>
@@ -13659,7 +14275,7 @@
           <p:cNvPr id="13" name="s10-test-g2">
             <a:extLst xmlns:a="http://schemas.openxmlformats.org/drawingml/2006/main">
               <a:ext uri="{FF2B5EF4-FFF2-40B4-BE49-F238E27FC236}">
-                <a16:creationId xmlns:a16="http://schemas.microsoft.com/office/drawing/2014/main" id="{5AB2D51D-6490-4028-A25B-5D08A743AD01}"/>
+                <a16:creationId xmlns:a16="http://schemas.microsoft.com/office/drawing/2014/main" id="{2BB8EABA-AA3A-46FD-9E00-4BFE31712A59}"/>
               </a:ext>
             </a:extLst>
           </p:cNvPr>
@@ -13704,7 +14320,7 @@
           <p:cNvPr id="14" name="s10-test-g3">
             <a:extLst xmlns:a="http://schemas.openxmlformats.org/drawingml/2006/main">
               <a:ext uri="{FF2B5EF4-FFF2-40B4-BE49-F238E27FC236}">
-                <a16:creationId xmlns:a16="http://schemas.microsoft.com/office/drawing/2014/main" id="{EC31A1A9-BE35-4B94-8FDF-7F27A374E6E4}"/>
+                <a16:creationId xmlns:a16="http://schemas.microsoft.com/office/drawing/2014/main" id="{72739A07-604D-42A9-BD9C-CB56DB84AE28}"/>
               </a:ext>
             </a:extLst>
           </p:cNvPr>
@@ -13749,7 +14365,7 @@
           <p:cNvPr id="15" name="s10-tests-foot">
             <a:extLst xmlns:a="http://schemas.openxmlformats.org/drawingml/2006/main">
               <a:ext uri="{FF2B5EF4-FFF2-40B4-BE49-F238E27FC236}">
-                <a16:creationId xmlns:a16="http://schemas.microsoft.com/office/drawing/2014/main" id="{48EC62D2-8E95-4636-9937-7322181452C3}"/>
+                <a16:creationId xmlns:a16="http://schemas.microsoft.com/office/drawing/2014/main" id="{52C094A7-996A-49C1-BF89-9BAEAE756436}"/>
               </a:ext>
             </a:extLst>
           </p:cNvPr>
@@ -13794,7 +14410,7 @@
           <p:cNvPr id="16" name="s10-ci">
             <a:extLst xmlns:a="http://schemas.openxmlformats.org/drawingml/2006/main">
               <a:ext uri="{FF2B5EF4-FFF2-40B4-BE49-F238E27FC236}">
-                <a16:creationId xmlns:a16="http://schemas.microsoft.com/office/drawing/2014/main" id="{03F71229-53C4-4B6B-A2DD-4C2938639270}"/>
+                <a16:creationId xmlns:a16="http://schemas.microsoft.com/office/drawing/2014/main" id="{AF425BCD-C7B2-4D99-91DB-68A71392E2DF}"/>
               </a:ext>
             </a:extLst>
           </p:cNvPr>
@@ -13829,7 +14445,7 @@
           <p:cNvPr id="17" name="s10-ci-k">
             <a:extLst xmlns:a="http://schemas.openxmlformats.org/drawingml/2006/main">
               <a:ext uri="{FF2B5EF4-FFF2-40B4-BE49-F238E27FC236}">
-                <a16:creationId xmlns:a16="http://schemas.microsoft.com/office/drawing/2014/main" id="{2E2BE53D-EFFA-42CB-A161-8AAB6A0EADA2}"/>
+                <a16:creationId xmlns:a16="http://schemas.microsoft.com/office/drawing/2014/main" id="{2C2DC9B0-86D5-4EBF-8CFF-B6D0B684BCEA}"/>
               </a:ext>
             </a:extLst>
           </p:cNvPr>
@@ -13874,7 +14490,7 @@
           <p:cNvPr id="18" name="s10-ci-stat">
             <a:extLst xmlns:a="http://schemas.openxmlformats.org/drawingml/2006/main">
               <a:ext uri="{FF2B5EF4-FFF2-40B4-BE49-F238E27FC236}">
-                <a16:creationId xmlns:a16="http://schemas.microsoft.com/office/drawing/2014/main" id="{B8126291-850C-41D3-8CBC-F9216C865621}"/>
+                <a16:creationId xmlns:a16="http://schemas.microsoft.com/office/drawing/2014/main" id="{7D487BF7-2410-44BF-A2DE-D2114F94A0E3}"/>
               </a:ext>
             </a:extLst>
           </p:cNvPr>
@@ -13919,7 +14535,7 @@
           <p:cNvPr id="19" name="s10-ci-label">
             <a:extLst xmlns:a="http://schemas.openxmlformats.org/drawingml/2006/main">
               <a:ext uri="{FF2B5EF4-FFF2-40B4-BE49-F238E27FC236}">
-                <a16:creationId xmlns:a16="http://schemas.microsoft.com/office/drawing/2014/main" id="{BC19E259-80F8-46D8-83E6-41DCAA4BB566}"/>
+                <a16:creationId xmlns:a16="http://schemas.microsoft.com/office/drawing/2014/main" id="{07F990B7-2ED8-48F5-B22A-25B4208A47C5}"/>
               </a:ext>
             </a:extLst>
           </p:cNvPr>
@@ -13986,7 +14602,7 @@
           <p:cNvPr id="21" name="s10-ci-d1">
             <a:extLst xmlns:a="http://schemas.openxmlformats.org/drawingml/2006/main">
               <a:ext uri="{FF2B5EF4-FFF2-40B4-BE49-F238E27FC236}">
-                <a16:creationId xmlns:a16="http://schemas.microsoft.com/office/drawing/2014/main" id="{B583FD30-6F3D-470C-8D23-16066D1A61B3}"/>
+                <a16:creationId xmlns:a16="http://schemas.microsoft.com/office/drawing/2014/main" id="{CF74F625-9387-4B0F-8AA8-D69939552A17}"/>
               </a:ext>
             </a:extLst>
           </p:cNvPr>
@@ -14019,7 +14635,7 @@
           <p:cNvPr id="22" name="s10-ci-d2">
             <a:extLst xmlns:a="http://schemas.openxmlformats.org/drawingml/2006/main">
               <a:ext uri="{FF2B5EF4-FFF2-40B4-BE49-F238E27FC236}">
-                <a16:creationId xmlns:a16="http://schemas.microsoft.com/office/drawing/2014/main" id="{9926152C-E07E-4CF0-A432-8CC06B547698}"/>
+                <a16:creationId xmlns:a16="http://schemas.microsoft.com/office/drawing/2014/main" id="{3C63F99D-2348-4626-955E-44619C904430}"/>
               </a:ext>
             </a:extLst>
           </p:cNvPr>
@@ -14052,7 +14668,7 @@
           <p:cNvPr id="23" name="s10-ci-d3">
             <a:extLst xmlns:a="http://schemas.openxmlformats.org/drawingml/2006/main">
               <a:ext uri="{FF2B5EF4-FFF2-40B4-BE49-F238E27FC236}">
-                <a16:creationId xmlns:a16="http://schemas.microsoft.com/office/drawing/2014/main" id="{4491E4F0-35EE-4558-9503-8A9CBFE4B92B}"/>
+                <a16:creationId xmlns:a16="http://schemas.microsoft.com/office/drawing/2014/main" id="{BF5F53D7-B6AA-4CDC-B256-EDD324187AB2}"/>
               </a:ext>
             </a:extLst>
           </p:cNvPr>
@@ -14085,7 +14701,7 @@
           <p:cNvPr id="24" name="s10-ci-d4">
             <a:extLst xmlns:a="http://schemas.openxmlformats.org/drawingml/2006/main">
               <a:ext uri="{FF2B5EF4-FFF2-40B4-BE49-F238E27FC236}">
-                <a16:creationId xmlns:a16="http://schemas.microsoft.com/office/drawing/2014/main" id="{16EC0B64-EDD0-4849-964C-BAF155480881}"/>
+                <a16:creationId xmlns:a16="http://schemas.microsoft.com/office/drawing/2014/main" id="{53145CD7-1131-4A1D-BFD1-B6077EDB0493}"/>
               </a:ext>
             </a:extLst>
           </p:cNvPr>
@@ -14118,7 +14734,7 @@
           <p:cNvPr id="25" name="s10-ci-d5">
             <a:extLst xmlns:a="http://schemas.openxmlformats.org/drawingml/2006/main">
               <a:ext uri="{FF2B5EF4-FFF2-40B4-BE49-F238E27FC236}">
-                <a16:creationId xmlns:a16="http://schemas.microsoft.com/office/drawing/2014/main" id="{50F031A8-5B11-4799-9148-2451CAE9A0EF}"/>
+                <a16:creationId xmlns:a16="http://schemas.microsoft.com/office/drawing/2014/main" id="{E855F5B5-28E7-4FD1-B5EC-C652F46ED03D}"/>
               </a:ext>
             </a:extLst>
           </p:cNvPr>
@@ -14151,7 +14767,7 @@
           <p:cNvPr id="26" name="s10-ci-r1">
             <a:extLst xmlns:a="http://schemas.openxmlformats.org/drawingml/2006/main">
               <a:ext uri="{FF2B5EF4-FFF2-40B4-BE49-F238E27FC236}">
-                <a16:creationId xmlns:a16="http://schemas.microsoft.com/office/drawing/2014/main" id="{4EDF8FE1-C0F9-4ABE-90DD-4ABAD38150FE}"/>
+                <a16:creationId xmlns:a16="http://schemas.microsoft.com/office/drawing/2014/main" id="{F2CBFFF7-97E5-4679-B04E-CC810C536C8A}"/>
               </a:ext>
             </a:extLst>
           </p:cNvPr>
@@ -14196,7 +14812,7 @@
           <p:cNvPr id="27" name="s10-ci-r2">
             <a:extLst xmlns:a="http://schemas.openxmlformats.org/drawingml/2006/main">
               <a:ext uri="{FF2B5EF4-FFF2-40B4-BE49-F238E27FC236}">
-                <a16:creationId xmlns:a16="http://schemas.microsoft.com/office/drawing/2014/main" id="{4A714FE7-A40A-48EE-A473-9BDC462919CA}"/>
+                <a16:creationId xmlns:a16="http://schemas.microsoft.com/office/drawing/2014/main" id="{8015FCE7-0C65-4F03-90C5-4B87011337C1}"/>
               </a:ext>
             </a:extLst>
           </p:cNvPr>
@@ -14241,7 +14857,7 @@
           <p:cNvPr id="28" name="s10-ci-r3">
             <a:extLst xmlns:a="http://schemas.openxmlformats.org/drawingml/2006/main">
               <a:ext uri="{FF2B5EF4-FFF2-40B4-BE49-F238E27FC236}">
-                <a16:creationId xmlns:a16="http://schemas.microsoft.com/office/drawing/2014/main" id="{765F4633-E853-4945-9D25-1363250B9FA2}"/>
+                <a16:creationId xmlns:a16="http://schemas.microsoft.com/office/drawing/2014/main" id="{A536BE37-C243-4C38-8704-85C24BE7ABC1}"/>
               </a:ext>
             </a:extLst>
           </p:cNvPr>
@@ -14286,7 +14902,7 @@
           <p:cNvPr id="29" name="s10-ci-r4">
             <a:extLst xmlns:a="http://schemas.openxmlformats.org/drawingml/2006/main">
               <a:ext uri="{FF2B5EF4-FFF2-40B4-BE49-F238E27FC236}">
-                <a16:creationId xmlns:a16="http://schemas.microsoft.com/office/drawing/2014/main" id="{F75B6211-AD4A-43C8-A5E3-F1374B95996A}"/>
+                <a16:creationId xmlns:a16="http://schemas.microsoft.com/office/drawing/2014/main" id="{87C31F31-80C2-4E36-A877-CEA834DBCF9B}"/>
               </a:ext>
             </a:extLst>
           </p:cNvPr>
@@ -14331,7 +14947,7 @@
           <p:cNvPr id="30" name="s10-ci-r5">
             <a:extLst xmlns:a="http://schemas.openxmlformats.org/drawingml/2006/main">
               <a:ext uri="{FF2B5EF4-FFF2-40B4-BE49-F238E27FC236}">
-                <a16:creationId xmlns:a16="http://schemas.microsoft.com/office/drawing/2014/main" id="{510A6884-D316-42ED-B069-BDB4CD38FDC1}"/>
+                <a16:creationId xmlns:a16="http://schemas.microsoft.com/office/drawing/2014/main" id="{E1CA3675-6B20-4608-8363-E29E306F82B9}"/>
               </a:ext>
             </a:extLst>
           </p:cNvPr>
@@ -14376,7 +14992,7 @@
           <p:cNvPr id="31" name="s10-release">
             <a:extLst xmlns:a="http://schemas.openxmlformats.org/drawingml/2006/main">
               <a:ext uri="{FF2B5EF4-FFF2-40B4-BE49-F238E27FC236}">
-                <a16:creationId xmlns:a16="http://schemas.microsoft.com/office/drawing/2014/main" id="{470C1F90-71B3-4DB7-95CA-733F6DDD16CE}"/>
+                <a16:creationId xmlns:a16="http://schemas.microsoft.com/office/drawing/2014/main" id="{64142208-C5D0-453D-ACB5-20858A4CCCD2}"/>
               </a:ext>
             </a:extLst>
           </p:cNvPr>
@@ -14411,7 +15027,7 @@
           <p:cNvPr id="32" name="s10-release-k">
             <a:extLst xmlns:a="http://schemas.openxmlformats.org/drawingml/2006/main">
               <a:ext uri="{FF2B5EF4-FFF2-40B4-BE49-F238E27FC236}">
-                <a16:creationId xmlns:a16="http://schemas.microsoft.com/office/drawing/2014/main" id="{6A27AFA7-96B1-43E8-9488-2007762E9A95}"/>
+                <a16:creationId xmlns:a16="http://schemas.microsoft.com/office/drawing/2014/main" id="{682E11E6-24DB-4EC4-BA7B-EEF1DA1A7E3C}"/>
               </a:ext>
             </a:extLst>
           </p:cNvPr>
@@ -14456,7 +15072,7 @@
           <p:cNvPr id="33" name="s10-release-stat">
             <a:extLst xmlns:a="http://schemas.openxmlformats.org/drawingml/2006/main">
               <a:ext uri="{FF2B5EF4-FFF2-40B4-BE49-F238E27FC236}">
-                <a16:creationId xmlns:a16="http://schemas.microsoft.com/office/drawing/2014/main" id="{37062D6A-F18A-48AF-9476-91902F3DC497}"/>
+                <a16:creationId xmlns:a16="http://schemas.microsoft.com/office/drawing/2014/main" id="{929BFFDB-0F55-4EED-8EE5-0ED35F744B6E}"/>
               </a:ext>
             </a:extLst>
           </p:cNvPr>
@@ -14501,7 +15117,7 @@
           <p:cNvPr id="34" name="s10-release-list">
             <a:extLst xmlns:a="http://schemas.openxmlformats.org/drawingml/2006/main">
               <a:ext uri="{FF2B5EF4-FFF2-40B4-BE49-F238E27FC236}">
-                <a16:creationId xmlns:a16="http://schemas.microsoft.com/office/drawing/2014/main" id="{0E3D3247-CA8C-47BB-8C1B-3284E3401485}"/>
+                <a16:creationId xmlns:a16="http://schemas.microsoft.com/office/drawing/2014/main" id="{66129534-E150-49D6-A6A3-15BCBB556D02}"/>
               </a:ext>
             </a:extLst>
           </p:cNvPr>
@@ -14551,7 +15167,7 @@
           <p:cNvPr id="35" name="s10-release-platforms">
             <a:extLst xmlns:a="http://schemas.openxmlformats.org/drawingml/2006/main">
               <a:ext uri="{FF2B5EF4-FFF2-40B4-BE49-F238E27FC236}">
-                <a16:creationId xmlns:a16="http://schemas.microsoft.com/office/drawing/2014/main" id="{7112D68D-8453-4585-A528-0749F3342D2A}"/>
+                <a16:creationId xmlns:a16="http://schemas.microsoft.com/office/drawing/2014/main" id="{9D419C57-4AAB-4121-B1FD-48D9C18D9A46}"/>
               </a:ext>
             </a:extLst>
           </p:cNvPr>
@@ -14618,7 +15234,7 @@
           <p:cNvPr id="37" name="footer-source-9">
             <a:extLst xmlns:a="http://schemas.openxmlformats.org/drawingml/2006/main">
               <a:ext uri="{FF2B5EF4-FFF2-40B4-BE49-F238E27FC236}">
-                <a16:creationId xmlns:a16="http://schemas.microsoft.com/office/drawing/2014/main" id="{C7C007B4-AB11-449C-983F-418D3AD3055C}"/>
+                <a16:creationId xmlns:a16="http://schemas.microsoft.com/office/drawing/2014/main" id="{F2884D1A-7FBA-4BE2-B510-EE6331FF47E0}"/>
               </a:ext>
             </a:extLst>
           </p:cNvPr>
@@ -14663,7 +15279,7 @@
           <p:cNvPr id="38" name="footer-number-9">
             <a:extLst xmlns:a="http://schemas.openxmlformats.org/drawingml/2006/main">
               <a:ext uri="{FF2B5EF4-FFF2-40B4-BE49-F238E27FC236}">
-                <a16:creationId xmlns:a16="http://schemas.microsoft.com/office/drawing/2014/main" id="{4258EF4E-67C4-4423-B3F9-8D472F37D4F3}"/>
+                <a16:creationId xmlns:a16="http://schemas.microsoft.com/office/drawing/2014/main" id="{6E9A9B83-FB44-4B84-B22C-6FFDECC49E87}"/>
               </a:ext>
             </a:extLst>
           </p:cNvPr>
@@ -14706,7 +15322,7 @@
     </p:spTree>
     <p:extLst>
       <p:ext uri="{BB962C8B-B14F-4D97-AF65-F5344CB8AC3E}">
-        <p14:creationId xmlns:p14="http://schemas.microsoft.com/office/powerpoint/2010/main" val="551673877"/>
+        <p14:creationId xmlns:p14="http://schemas.microsoft.com/office/powerpoint/2010/main" val="1769926839"/>
       </p:ext>
     </p:extLst>
   </p:cSld>

--- a/outputs/vertex-palace-build-week-demo.pptx
+++ b/outputs/vertex-palace-build-week-demo.pptx
@@ -2,23 +2,24 @@
 <file path=ppt/presentation.xml><?xml version="1.0" encoding="utf-8"?>
 <p:presentation xmlns:p="http://schemas.openxmlformats.org/presentationml/2006/main">
   <p:sldMasterIdLst>
-    <p:sldMasterId xmlns:r="http://schemas.openxmlformats.org/officeDocument/2006/relationships" id="2147483648" r:id="Rdc3d18e438f444c9"/>
+    <p:sldMasterId xmlns:r="http://schemas.openxmlformats.org/officeDocument/2006/relationships" id="2147483648" r:id="Rb3074ee97c3d486e"/>
   </p:sldMasterIdLst>
   <p:notesMasterIdLst>
-    <p:notesMasterId xmlns:r="http://schemas.openxmlformats.org/officeDocument/2006/relationships" r:id="R5c567fa3b76b4613"/>
+    <p:notesMasterId xmlns:r="http://schemas.openxmlformats.org/officeDocument/2006/relationships" r:id="Rf3e254ff4b3d4ad9"/>
   </p:notesMasterIdLst>
   <p:sldIdLst>
-    <p:sldId xmlns:r="http://schemas.openxmlformats.org/officeDocument/2006/relationships" id="256" r:id="R4cb7d58b36ae415d"/>
-    <p:sldId xmlns:r="http://schemas.openxmlformats.org/officeDocument/2006/relationships" id="257" r:id="R516dd10608ba497f"/>
-    <p:sldId xmlns:r="http://schemas.openxmlformats.org/officeDocument/2006/relationships" id="258" r:id="Re4e1d18d0b4f4a1d"/>
-    <p:sldId xmlns:r="http://schemas.openxmlformats.org/officeDocument/2006/relationships" id="259" r:id="Rd18e7f70848945ae"/>
-    <p:sldId xmlns:r="http://schemas.openxmlformats.org/officeDocument/2006/relationships" id="260" r:id="R0033002c2efb4f5c"/>
-    <p:sldId xmlns:r="http://schemas.openxmlformats.org/officeDocument/2006/relationships" id="261" r:id="R010897114eb04417"/>
-    <p:sldId xmlns:r="http://schemas.openxmlformats.org/officeDocument/2006/relationships" id="262" r:id="Ra71a1223d46f4b13"/>
-    <p:sldId xmlns:r="http://schemas.openxmlformats.org/officeDocument/2006/relationships" id="263" r:id="R3dab95c33e1341e4"/>
-    <p:sldId xmlns:r="http://schemas.openxmlformats.org/officeDocument/2006/relationships" id="264" r:id="R351403c2178a441d"/>
-    <p:sldId xmlns:r="http://schemas.openxmlformats.org/officeDocument/2006/relationships" id="265" r:id="R29659f76bb3041ac"/>
-    <p:sldId xmlns:r="http://schemas.openxmlformats.org/officeDocument/2006/relationships" id="266" r:id="Rf412db8dcb9e4e94"/>
+    <p:sldId xmlns:r="http://schemas.openxmlformats.org/officeDocument/2006/relationships" id="256" r:id="R61c31b5601db4ab3"/>
+    <p:sldId xmlns:r="http://schemas.openxmlformats.org/officeDocument/2006/relationships" id="257" r:id="R50a94fb990614689"/>
+    <p:sldId xmlns:r="http://schemas.openxmlformats.org/officeDocument/2006/relationships" id="258" r:id="R61aca79214524e9a"/>
+    <p:sldId xmlns:r="http://schemas.openxmlformats.org/officeDocument/2006/relationships" id="259" r:id="Rbef1632c2609415e"/>
+    <p:sldId xmlns:r="http://schemas.openxmlformats.org/officeDocument/2006/relationships" id="260" r:id="Ra76038a5ba374ba2"/>
+    <p:sldId xmlns:r="http://schemas.openxmlformats.org/officeDocument/2006/relationships" id="261" r:id="R679a1d8d4b594bcc"/>
+    <p:sldId xmlns:r="http://schemas.openxmlformats.org/officeDocument/2006/relationships" id="262" r:id="R6a835c835423449b"/>
+    <p:sldId xmlns:r="http://schemas.openxmlformats.org/officeDocument/2006/relationships" id="263" r:id="Rb53de02a38d641f6"/>
+    <p:sldId xmlns:r="http://schemas.openxmlformats.org/officeDocument/2006/relationships" id="264" r:id="R8c91010254da4fa0"/>
+    <p:sldId xmlns:r="http://schemas.openxmlformats.org/officeDocument/2006/relationships" id="265" r:id="R4b208a65c3e3424a"/>
+    <p:sldId xmlns:r="http://schemas.openxmlformats.org/officeDocument/2006/relationships" id="266" r:id="R83192979daf047fc"/>
+    <p:sldId xmlns:r="http://schemas.openxmlformats.org/officeDocument/2006/relationships" id="267" r:id="R4146ab5f93aa47de"/>
   </p:sldIdLst>
   <p:sldSz cx="12192000" cy="6858000"/>
   <p:notesSz cx="6858000" cy="9144000"/>
@@ -622,17 +623,17 @@
           <a:lstStyle xmlns:a="http://schemas.openxmlformats.org/drawingml/2006/main"/>
           <a:p xmlns:a="http://schemas.openxmlformats.org/drawingml/2006/main">
             <a:r>
-              <a:t>The benchmark exposed a deterministic memory omission in version 0.2.1: Adaptive selected Full Palace but delivered zero memory in every useful-memory trial.</a:t>
-            </a:r>
-          </a:p>
-          <a:p xmlns:a="http://schemas.openxmlformats.org/drawingml/2006/main">
-            <a:r>
-              <a:t>Version 0.2.2 fixed the memory level, added JSON delivery and guardrails, and turned the bug into a regression contract verified on clean and registry fixtures.</a:t>
-            </a:r>
-          </a:p>
-          <a:p xmlns:a="http://schemas.openxmlformats.org/drawingml/2006/main">
-            <a:r>
-              <a:t>Version 0.2.3 generalized the lesson with a release-routing matrix across npm, Codex plugins, PyPI, Chinese intent, negative controls, CI, and public distribution. The research became a product feedback loop.</a:t>
+              <a:t>Separate product engineering from the exploratory benchmark. The current repository passes 55 automated tests: 51 Core, two CLI, and two MCP, plus build, TypeScript lint, and a ten-tool MCP smoke test.</a:t>
+            </a:r>
+          </a:p>
+          <a:p xmlns:a="http://schemas.openxmlformats.org/drawingml/2006/main">
+            <a:r>
+              <a:t>The verified GitHub Actions run passed five jobs across Ubuntu, Windows, macOS, Node 20, Node 24, and the package dry run.</a:t>
+            </a:r>
+          </a:p>
+          <a:p xmlns:a="http://schemas.openxmlformats.org/drawingml/2006/main">
+            <a:r>
+              <a:t>Release verification also covered clean tarball and public npm installs, the CLI release route, MCP initialization, registry hash equality, and tag, plugin, marketplace, and MCP version pins.</a:t>
             </a:r>
           </a:p>
         </p:txBody>
@@ -702,6 +703,86 @@
           <a:lstStyle xmlns:a="http://schemas.openxmlformats.org/drawingml/2006/main"/>
           <a:p xmlns:a="http://schemas.openxmlformats.org/drawingml/2006/main">
             <a:r>
+              <a:t>The benchmark exposed a deterministic memory omission in version 0.2.1: Adaptive selected Full Palace but delivered zero memory in every useful-memory trial.</a:t>
+            </a:r>
+          </a:p>
+          <a:p xmlns:a="http://schemas.openxmlformats.org/drawingml/2006/main">
+            <a:r>
+              <a:t>Version 0.2.2 fixed the memory level, added JSON delivery and guardrails, and turned the bug into a regression contract verified on clean and registry fixtures.</a:t>
+            </a:r>
+          </a:p>
+          <a:p xmlns:a="http://schemas.openxmlformats.org/drawingml/2006/main">
+            <a:r>
+              <a:t>Version 0.2.3 generalized the lesson with a release-routing matrix across npm, Codex plugins, PyPI, Chinese intent, negative controls, CI, and public distribution. The research became a product feedback loop.</a:t>
+            </a:r>
+          </a:p>
+        </p:txBody>
+      </p:sp>
+      <p:sp>
+        <p:nvSpPr>
+          <p:cNvPr id="4" name="Slide Number Placeholder 3"/>
+          <p:cNvSpPr>
+            <a:spLocks xmlns:a="http://schemas.openxmlformats.org/drawingml/2006/main" noGrp="1"/>
+          </p:cNvSpPr>
+          <p:nvPr>
+            <p:ph type="sldNum" idx="5"/>
+          </p:nvPr>
+        </p:nvSpPr>
+        <p:spPr/>
+        <p:txBody>
+          <a:bodyPr xmlns:a="http://schemas.openxmlformats.org/drawingml/2006/main"/>
+          <a:lstStyle xmlns:a="http://schemas.openxmlformats.org/drawingml/2006/main"/>
+          <a:p xmlns:a="http://schemas.openxmlformats.org/drawingml/2006/main"/>
+        </p:txBody>
+      </p:sp>
+    </p:spTree>
+  </p:cSld>
+  <p:clrMapOvr>
+    <a:masterClrMapping xmlns:a="http://schemas.openxmlformats.org/drawingml/2006/main"/>
+  </p:clrMapOvr>
+</p:notes>
+</file>
+
+<file path=ppt/notesSlides/notesSlide12.xml><?xml version="1.0" encoding="utf-8"?>
+<p:notes xmlns:p="http://schemas.openxmlformats.org/presentationml/2006/main">
+  <p:cSld>
+    <p:spTree>
+      <p:nvGrpSpPr>
+        <p:cNvPr id="1" name=""/>
+        <p:cNvGrpSpPr/>
+        <p:nvPr/>
+      </p:nvGrpSpPr>
+      <p:grpSpPr>
+        <a:xfrm xmlns:a="http://schemas.openxmlformats.org/drawingml/2006/main"/>
+      </p:grpSpPr>
+      <p:sp>
+        <p:nvSpPr>
+          <p:cNvPr id="2" name="Slide Image Placeholder 1"/>
+          <p:cNvSpPr>
+            <a:spLocks xmlns:a="http://schemas.openxmlformats.org/drawingml/2006/main" noGrp="1"/>
+          </p:cNvSpPr>
+          <p:nvPr>
+            <p:ph type="sldImg" idx="0"/>
+          </p:nvPr>
+        </p:nvSpPr>
+        <p:spPr/>
+      </p:sp>
+      <p:sp>
+        <p:nvSpPr>
+          <p:cNvPr id="3" name="Notes Placeholder 2"/>
+          <p:cNvSpPr>
+            <a:spLocks xmlns:a="http://schemas.openxmlformats.org/drawingml/2006/main" noGrp="1"/>
+          </p:cNvSpPr>
+          <p:nvPr>
+            <p:ph type="body" idx="1"/>
+          </p:nvPr>
+        </p:nvSpPr>
+        <p:spPr/>
+        <p:txBody>
+          <a:bodyPr xmlns:a="http://schemas.openxmlformats.org/drawingml/2006/main"/>
+          <a:lstStyle xmlns:a="http://schemas.openxmlformats.org/drawingml/2006/main"/>
+          <a:p xmlns:a="http://schemas.openxmlformats.org/drawingml/2006/main">
+            <a:r>
               <a:t>Close with the judge path: install the public package, run palace context with auto mode, then evaluate the route after the task.</a:t>
             </a:r>
           </a:p>
@@ -1327,17 +1408,17 @@
           <a:lstStyle xmlns:a="http://schemas.openxmlformats.org/drawingml/2006/main"/>
           <a:p xmlns:a="http://schemas.openxmlformats.org/drawingml/2006/main">
             <a:r>
-              <a:t>Separate product engineering from the exploratory benchmark. The current repository passes 55 automated tests: 51 Core, two CLI, and two MCP, plus build, TypeScript lint, and a ten-tool MCP smoke test.</a:t>
-            </a:r>
-          </a:p>
-          <a:p xmlns:a="http://schemas.openxmlformats.org/drawingml/2006/main">
-            <a:r>
-              <a:t>The verified GitHub Actions run passed five jobs across Ubuntu, Windows, macOS, Node 20, Node 24, and the package dry run.</a:t>
-            </a:r>
-          </a:p>
-          <a:p xmlns:a="http://schemas.openxmlformats.org/drawingml/2006/main">
-            <a:r>
-              <a:t>Release verification also covered clean tarball and public npm installs, the CLI release route, MCP initialization, registry hash equality, and tag, plugin, marketplace, and MCP version pins.</a:t>
+              <a:t>These scenarios are different complexity and risk profiles, not a validated difficulty ladder. Small local is a one-file task, cross-stack crosses frontend and backend, useful memory tests relevant project history, and stale memory tests adversarial history with current-code-first guardrails.</a:t>
+            </a:r>
+          </a:p>
+          <a:p xmlns:a="http://schemas.openxmlformats.org/drawingml/2006/main">
+            <a:r>
+              <a:t>Against Codex alone, every scenario had a positive central estimate for reported tokens, wall time, and tool calls. In the small-local profile, the reported-token interval stayed above zero. In cross-stack, both wall time and tool-call intervals stayed above zero.</a:t>
+            </a:r>
+          </a:p>
+          <a:p xmlns:a="http://schemas.openxmlformats.org/drawingml/2006/main">
+            <a:r>
+              <a:t>The useful-memory and stale-memory intervals were wide and crossed zero. The useful-memory result also carries a version 0.2.1 fidelity defect: Adaptive selected Full Palace but omitted the seeded memory. Do not read these four profiles as proof that more difficult tasks benefit more.</a:t>
             </a:r>
           </a:p>
         </p:txBody>
@@ -1405,7 +1486,7 @@
   </p:cSld>
   <p:clrMap bg1="lt1" tx1="dk1" bg2="lt2" tx2="dk2" accent1="accent1" accent2="accent2" accent3="accent3" accent4="accent4" accent5="accent5" accent6="accent6" hlink="hlink" folHlink="folHlink"/>
   <p:sldLayoutIdLst>
-    <p:sldLayoutId xmlns:r="http://schemas.openxmlformats.org/officeDocument/2006/relationships" id="2147483649" r:id="R88ddd85e49ec41ff"/>
+    <p:sldLayoutId xmlns:r="http://schemas.openxmlformats.org/officeDocument/2006/relationships" id="2147483649" r:id="R0d3b47c83ac549f0"/>
   </p:sldLayoutIdLst>
   <p:txStyles>
     <p:titleStyle>
@@ -2795,6 +2876,699 @@
 </c:chartSpace>
 </file>
 
+<file path=ppt/slides/charts/chart5.xml><?xml version="1.0" encoding="utf-8"?>
+<c:chartSpace xmlns:c="http://schemas.openxmlformats.org/drawingml/2006/chart">
+  <c:lang val="en-US"/>
+  <c:chart>
+    <c:plotArea>
+      <c:barChart>
+        <c:barDir val="bar"/>
+        <c:grouping val="clustered"/>
+        <c:varyColors val="0"/>
+        <c:ser>
+          <c:idx val="0"/>
+          <c:order val="0"/>
+          <c:tx>
+            <c:v>Token delta</c:v>
+          </c:tx>
+          <c:spPr>
+            <a:solidFill xmlns:a="http://schemas.openxmlformats.org/drawingml/2006/main">
+              <a:srgbClr val="1677FF"/>
+            </a:solidFill>
+          </c:spPr>
+          <c:dPt>
+            <c:idx val="0"/>
+            <c:spPr>
+              <a:solidFill xmlns:a="http://schemas.openxmlformats.org/drawingml/2006/main">
+                <a:srgbClr val="B87712"/>
+              </a:solidFill>
+            </c:spPr>
+          </c:dPt>
+          <c:dPt>
+            <c:idx val="1"/>
+            <c:spPr>
+              <a:solidFill xmlns:a="http://schemas.openxmlformats.org/drawingml/2006/main">
+                <a:srgbClr val="7438F5"/>
+              </a:solidFill>
+            </c:spPr>
+          </c:dPt>
+          <c:dPt>
+            <c:idx val="2"/>
+            <c:spPr>
+              <a:solidFill xmlns:a="http://schemas.openxmlformats.org/drawingml/2006/main">
+                <a:srgbClr val="1677FF"/>
+              </a:solidFill>
+            </c:spPr>
+          </c:dPt>
+          <c:dPt>
+            <c:idx val="3"/>
+            <c:spPr>
+              <a:solidFill xmlns:a="http://schemas.openxmlformats.org/drawingml/2006/main">
+                <a:srgbClr val="13B7D5"/>
+              </a:solidFill>
+            </c:spPr>
+          </c:dPt>
+          <c:cat>
+            <c:strLit>
+              <c:ptCount val="4"/>
+              <c:pt idx="0">
+                <c:v>Stale mem.</c:v>
+              </c:pt>
+              <c:pt idx="1">
+                <c:v>Useful mem.</c:v>
+              </c:pt>
+              <c:pt idx="2">
+                <c:v>Cross-stack</c:v>
+              </c:pt>
+              <c:pt idx="3">
+                <c:v>Small local</c:v>
+              </c:pt>
+            </c:strLit>
+          </c:cat>
+          <c:val>
+            <c:numLit>
+              <c:formatCode>#,##0</c:formatCode>
+              <c:ptCount val="4"/>
+              <c:pt idx="0">
+                <c:v>10801</c:v>
+              </c:pt>
+              <c:pt idx="1">
+                <c:v>35850.5</c:v>
+              </c:pt>
+              <c:pt idx="2">
+                <c:v>51917</c:v>
+              </c:pt>
+              <c:pt idx="3">
+                <c:v>17078.5</c:v>
+              </c:pt>
+            </c:numLit>
+          </c:val>
+        </c:ser>
+        <c:dLbls>
+          <c:txPr>
+            <a:bodyPr xmlns:a="http://schemas.openxmlformats.org/drawingml/2006/main" anchorCtr="1"/>
+            <a:lstStyle xmlns:a="http://schemas.openxmlformats.org/drawingml/2006/main"/>
+            <a:p xmlns:a="http://schemas.openxmlformats.org/drawingml/2006/main">
+              <a:pPr>
+                <a:defRPr sz="863" b="1">
+                  <a:solidFill>
+                    <a:srgbClr val="0A1224"/>
+                  </a:solidFill>
+                  <a:latin typeface="Arial"/>
+                  <a:ea typeface="Arial"/>
+                  <a:cs typeface="Arial"/>
+                </a:defRPr>
+              </a:pPr>
+            </a:p>
+          </c:txPr>
+          <c:dLblPos val="outEnd"/>
+          <c:showLegendKey val="0"/>
+          <c:showVal val="1"/>
+          <c:showCatName val="0"/>
+          <c:showSerName val="0"/>
+          <c:showPercent val="0"/>
+          <c:showBubbleSize val="0"/>
+          <c:showLeaderLines val="0"/>
+        </c:dLbls>
+        <c:gapWidth val="65"/>
+        <c:axId val="48650112"/>
+        <c:axId val="48672768"/>
+      </c:barChart>
+      <c:catAx>
+        <c:axId val="48650112"/>
+        <c:scaling>
+          <c:orientation val="minMax"/>
+        </c:scaling>
+        <c:delete val="0"/>
+        <c:axPos val="l"/>
+        <c:majorGridlines>
+          <c:spPr>
+            <a:ln xmlns:a="http://schemas.openxmlformats.org/drawingml/2006/main" w="9525">
+              <a:solidFill>
+                <a:srgbClr val="EDEFF3"/>
+              </a:solidFill>
+              <a:prstDash val="solid"/>
+            </a:ln>
+          </c:spPr>
+        </c:majorGridlines>
+        <c:numFmt formatCode="0,"/>
+        <c:majorTickMark val="none"/>
+        <c:minorTickMark val="none"/>
+        <c:spPr>
+          <a:ln xmlns:a="http://schemas.openxmlformats.org/drawingml/2006/main" w="9525">
+            <a:solidFill>
+              <a:srgbClr val="B8BCC4"/>
+            </a:solidFill>
+            <a:prstDash val="solid"/>
+          </a:ln>
+        </c:spPr>
+        <c:txPr>
+          <a:bodyPr xmlns:a="http://schemas.openxmlformats.org/drawingml/2006/main" anchorCtr="1"/>
+          <a:lstStyle xmlns:a="http://schemas.openxmlformats.org/drawingml/2006/main"/>
+          <a:p xmlns:a="http://schemas.openxmlformats.org/drawingml/2006/main">
+            <a:pPr>
+              <a:defRPr sz="788">
+                <a:solidFill>
+                  <a:srgbClr val="526071"/>
+                </a:solidFill>
+                <a:latin typeface="Arial"/>
+                <a:ea typeface="Arial"/>
+                <a:cs typeface="Arial"/>
+              </a:defRPr>
+            </a:pPr>
+          </a:p>
+        </c:txPr>
+        <c:crossAx val="48672768"/>
+        <c:lblAlgn val="ctr"/>
+        <c:lblOffset val="100"/>
+        <c:noMultiLvlLbl val="0"/>
+      </c:catAx>
+      <c:valAx>
+        <c:axId val="48672768"/>
+        <c:scaling>
+          <c:orientation val="minMax"/>
+        </c:scaling>
+        <c:delete val="0"/>
+        <c:axPos val="b"/>
+        <c:numFmt formatCode="General"/>
+        <c:majorTickMark val="none"/>
+        <c:minorTickMark val="none"/>
+        <c:tickLblPos val="nextTo"/>
+        <c:spPr>
+          <a:ln xmlns:a="http://schemas.openxmlformats.org/drawingml/2006/main" w="0">
+            <a:solidFill>
+              <a:srgbClr val="FFFFFF"/>
+            </a:solidFill>
+            <a:prstDash val="solid"/>
+          </a:ln>
+        </c:spPr>
+        <c:txPr>
+          <a:bodyPr xmlns:a="http://schemas.openxmlformats.org/drawingml/2006/main" anchorCtr="1"/>
+          <a:lstStyle xmlns:a="http://schemas.openxmlformats.org/drawingml/2006/main"/>
+          <a:p xmlns:a="http://schemas.openxmlformats.org/drawingml/2006/main">
+            <a:pPr>
+              <a:defRPr sz="863">
+                <a:solidFill>
+                  <a:srgbClr val="526071"/>
+                </a:solidFill>
+                <a:latin typeface="Arial"/>
+                <a:ea typeface="Arial"/>
+                <a:cs typeface="Arial"/>
+              </a:defRPr>
+            </a:pPr>
+          </a:p>
+        </c:txPr>
+        <c:crossAx val="48650112"/>
+        <c:crossBetween val="between"/>
+      </c:valAx>
+      <c:spPr>
+        <a:noFill xmlns:a="http://schemas.openxmlformats.org/drawingml/2006/main"/>
+        <a:ln xmlns:a="http://schemas.openxmlformats.org/drawingml/2006/main" w="0">
+          <a:solidFill>
+            <a:srgbClr val="FFFFFF"/>
+          </a:solidFill>
+          <a:prstDash val="solid"/>
+        </a:ln>
+      </c:spPr>
+    </c:plotArea>
+    <c:plotVisOnly val="1"/>
+  </c:chart>
+  <c:spPr>
+    <a:solidFill xmlns:a="http://schemas.openxmlformats.org/drawingml/2006/main">
+      <a:srgbClr val="FFFFFF"/>
+    </a:solidFill>
+    <a:ln xmlns:a="http://schemas.openxmlformats.org/drawingml/2006/main" w="0">
+      <a:solidFill>
+        <a:srgbClr val="FFFFFF"/>
+      </a:solidFill>
+      <a:prstDash val="solid"/>
+    </a:ln>
+  </c:spPr>
+</c:chartSpace>
+</file>
+
+<file path=ppt/slides/charts/chart6.xml><?xml version="1.0" encoding="utf-8"?>
+<c:chartSpace xmlns:c="http://schemas.openxmlformats.org/drawingml/2006/chart">
+  <c:lang val="en-US"/>
+  <c:chart>
+    <c:plotArea>
+      <c:barChart>
+        <c:barDir val="bar"/>
+        <c:grouping val="clustered"/>
+        <c:varyColors val="0"/>
+        <c:ser>
+          <c:idx val="0"/>
+          <c:order val="0"/>
+          <c:tx>
+            <c:v>Time delta</c:v>
+          </c:tx>
+          <c:spPr>
+            <a:solidFill xmlns:a="http://schemas.openxmlformats.org/drawingml/2006/main">
+              <a:srgbClr val="1677FF"/>
+            </a:solidFill>
+          </c:spPr>
+          <c:dPt>
+            <c:idx val="0"/>
+            <c:spPr>
+              <a:solidFill xmlns:a="http://schemas.openxmlformats.org/drawingml/2006/main">
+                <a:srgbClr val="B87712"/>
+              </a:solidFill>
+            </c:spPr>
+          </c:dPt>
+          <c:dPt>
+            <c:idx val="1"/>
+            <c:spPr>
+              <a:solidFill xmlns:a="http://schemas.openxmlformats.org/drawingml/2006/main">
+                <a:srgbClr val="7438F5"/>
+              </a:solidFill>
+            </c:spPr>
+          </c:dPt>
+          <c:dPt>
+            <c:idx val="2"/>
+            <c:spPr>
+              <a:solidFill xmlns:a="http://schemas.openxmlformats.org/drawingml/2006/main">
+                <a:srgbClr val="1677FF"/>
+              </a:solidFill>
+            </c:spPr>
+          </c:dPt>
+          <c:dPt>
+            <c:idx val="3"/>
+            <c:spPr>
+              <a:solidFill xmlns:a="http://schemas.openxmlformats.org/drawingml/2006/main">
+                <a:srgbClr val="13B7D5"/>
+              </a:solidFill>
+            </c:spPr>
+          </c:dPt>
+          <c:cat>
+            <c:strLit>
+              <c:ptCount val="4"/>
+              <c:pt idx="0">
+                <c:v>Stale mem.</c:v>
+              </c:pt>
+              <c:pt idx="1">
+                <c:v>Useful mem.</c:v>
+              </c:pt>
+              <c:pt idx="2">
+                <c:v>Cross-stack</c:v>
+              </c:pt>
+              <c:pt idx="3">
+                <c:v>Small local</c:v>
+              </c:pt>
+            </c:strLit>
+          </c:cat>
+          <c:val>
+            <c:numLit>
+              <c:formatCode>0.0</c:formatCode>
+              <c:ptCount val="4"/>
+              <c:pt idx="0">
+                <c:v>9.594</c:v>
+              </c:pt>
+              <c:pt idx="1">
+                <c:v>16.361</c:v>
+              </c:pt>
+              <c:pt idx="2">
+                <c:v>20.228</c:v>
+              </c:pt>
+              <c:pt idx="3">
+                <c:v>6.012</c:v>
+              </c:pt>
+            </c:numLit>
+          </c:val>
+        </c:ser>
+        <c:dLbls>
+          <c:txPr>
+            <a:bodyPr xmlns:a="http://schemas.openxmlformats.org/drawingml/2006/main" anchorCtr="1"/>
+            <a:lstStyle xmlns:a="http://schemas.openxmlformats.org/drawingml/2006/main"/>
+            <a:p xmlns:a="http://schemas.openxmlformats.org/drawingml/2006/main">
+              <a:pPr>
+                <a:defRPr sz="863" b="1">
+                  <a:solidFill>
+                    <a:srgbClr val="0A1224"/>
+                  </a:solidFill>
+                  <a:latin typeface="Arial"/>
+                  <a:ea typeface="Arial"/>
+                  <a:cs typeface="Arial"/>
+                </a:defRPr>
+              </a:pPr>
+            </a:p>
+          </c:txPr>
+          <c:dLblPos val="outEnd"/>
+          <c:showLegendKey val="0"/>
+          <c:showVal val="1"/>
+          <c:showCatName val="0"/>
+          <c:showSerName val="0"/>
+          <c:showPercent val="0"/>
+          <c:showBubbleSize val="0"/>
+          <c:showLeaderLines val="0"/>
+        </c:dLbls>
+        <c:gapWidth val="65"/>
+        <c:axId val="48650112"/>
+        <c:axId val="48672768"/>
+      </c:barChart>
+      <c:catAx>
+        <c:axId val="48650112"/>
+        <c:scaling>
+          <c:orientation val="minMax"/>
+        </c:scaling>
+        <c:delete val="0"/>
+        <c:axPos val="l"/>
+        <c:majorGridlines>
+          <c:spPr>
+            <a:ln xmlns:a="http://schemas.openxmlformats.org/drawingml/2006/main" w="9525">
+              <a:solidFill>
+                <a:srgbClr val="EDEFF3"/>
+              </a:solidFill>
+              <a:prstDash val="solid"/>
+            </a:ln>
+          </c:spPr>
+        </c:majorGridlines>
+        <c:numFmt formatCode="0"/>
+        <c:majorTickMark val="none"/>
+        <c:minorTickMark val="none"/>
+        <c:spPr>
+          <a:ln xmlns:a="http://schemas.openxmlformats.org/drawingml/2006/main" w="9525">
+            <a:solidFill>
+              <a:srgbClr val="B8BCC4"/>
+            </a:solidFill>
+            <a:prstDash val="solid"/>
+          </a:ln>
+        </c:spPr>
+        <c:txPr>
+          <a:bodyPr xmlns:a="http://schemas.openxmlformats.org/drawingml/2006/main" anchorCtr="1"/>
+          <a:lstStyle xmlns:a="http://schemas.openxmlformats.org/drawingml/2006/main"/>
+          <a:p xmlns:a="http://schemas.openxmlformats.org/drawingml/2006/main">
+            <a:pPr>
+              <a:defRPr sz="788">
+                <a:solidFill>
+                  <a:srgbClr val="526071"/>
+                </a:solidFill>
+                <a:latin typeface="Arial"/>
+                <a:ea typeface="Arial"/>
+                <a:cs typeface="Arial"/>
+              </a:defRPr>
+            </a:pPr>
+          </a:p>
+        </c:txPr>
+        <c:crossAx val="48672768"/>
+        <c:lblAlgn val="ctr"/>
+        <c:lblOffset val="100"/>
+        <c:noMultiLvlLbl val="0"/>
+      </c:catAx>
+      <c:valAx>
+        <c:axId val="48672768"/>
+        <c:scaling>
+          <c:orientation val="minMax"/>
+        </c:scaling>
+        <c:delete val="0"/>
+        <c:axPos val="b"/>
+        <c:numFmt formatCode="General"/>
+        <c:majorTickMark val="none"/>
+        <c:minorTickMark val="none"/>
+        <c:tickLblPos val="nextTo"/>
+        <c:spPr>
+          <a:ln xmlns:a="http://schemas.openxmlformats.org/drawingml/2006/main" w="0">
+            <a:solidFill>
+              <a:srgbClr val="FFFFFF"/>
+            </a:solidFill>
+            <a:prstDash val="solid"/>
+          </a:ln>
+        </c:spPr>
+        <c:txPr>
+          <a:bodyPr xmlns:a="http://schemas.openxmlformats.org/drawingml/2006/main" anchorCtr="1"/>
+          <a:lstStyle xmlns:a="http://schemas.openxmlformats.org/drawingml/2006/main"/>
+          <a:p xmlns:a="http://schemas.openxmlformats.org/drawingml/2006/main">
+            <a:pPr>
+              <a:defRPr sz="863">
+                <a:solidFill>
+                  <a:srgbClr val="526071"/>
+                </a:solidFill>
+                <a:latin typeface="Arial"/>
+                <a:ea typeface="Arial"/>
+                <a:cs typeface="Arial"/>
+              </a:defRPr>
+            </a:pPr>
+          </a:p>
+        </c:txPr>
+        <c:crossAx val="48650112"/>
+        <c:crossBetween val="between"/>
+      </c:valAx>
+      <c:spPr>
+        <a:noFill xmlns:a="http://schemas.openxmlformats.org/drawingml/2006/main"/>
+        <a:ln xmlns:a="http://schemas.openxmlformats.org/drawingml/2006/main" w="0">
+          <a:solidFill>
+            <a:srgbClr val="FFFFFF"/>
+          </a:solidFill>
+          <a:prstDash val="solid"/>
+        </a:ln>
+      </c:spPr>
+    </c:plotArea>
+    <c:plotVisOnly val="1"/>
+  </c:chart>
+  <c:spPr>
+    <a:solidFill xmlns:a="http://schemas.openxmlformats.org/drawingml/2006/main">
+      <a:srgbClr val="FFFFFF"/>
+    </a:solidFill>
+    <a:ln xmlns:a="http://schemas.openxmlformats.org/drawingml/2006/main" w="0">
+      <a:solidFill>
+        <a:srgbClr val="FFFFFF"/>
+      </a:solidFill>
+      <a:prstDash val="solid"/>
+    </a:ln>
+  </c:spPr>
+</c:chartSpace>
+</file>
+
+<file path=ppt/slides/charts/chart7.xml><?xml version="1.0" encoding="utf-8"?>
+<c:chartSpace xmlns:c="http://schemas.openxmlformats.org/drawingml/2006/chart">
+  <c:lang val="en-US"/>
+  <c:chart>
+    <c:plotArea>
+      <c:barChart>
+        <c:barDir val="bar"/>
+        <c:grouping val="clustered"/>
+        <c:varyColors val="0"/>
+        <c:ser>
+          <c:idx val="0"/>
+          <c:order val="0"/>
+          <c:tx>
+            <c:v>Call delta</c:v>
+          </c:tx>
+          <c:spPr>
+            <a:solidFill xmlns:a="http://schemas.openxmlformats.org/drawingml/2006/main">
+              <a:srgbClr val="1677FF"/>
+            </a:solidFill>
+          </c:spPr>
+          <c:dPt>
+            <c:idx val="0"/>
+            <c:spPr>
+              <a:solidFill xmlns:a="http://schemas.openxmlformats.org/drawingml/2006/main">
+                <a:srgbClr val="B87712"/>
+              </a:solidFill>
+            </c:spPr>
+          </c:dPt>
+          <c:dPt>
+            <c:idx val="1"/>
+            <c:spPr>
+              <a:solidFill xmlns:a="http://schemas.openxmlformats.org/drawingml/2006/main">
+                <a:srgbClr val="7438F5"/>
+              </a:solidFill>
+            </c:spPr>
+          </c:dPt>
+          <c:dPt>
+            <c:idx val="2"/>
+            <c:spPr>
+              <a:solidFill xmlns:a="http://schemas.openxmlformats.org/drawingml/2006/main">
+                <a:srgbClr val="1677FF"/>
+              </a:solidFill>
+            </c:spPr>
+          </c:dPt>
+          <c:dPt>
+            <c:idx val="3"/>
+            <c:spPr>
+              <a:solidFill xmlns:a="http://schemas.openxmlformats.org/drawingml/2006/main">
+                <a:srgbClr val="13B7D5"/>
+              </a:solidFill>
+            </c:spPr>
+          </c:dPt>
+          <c:cat>
+            <c:strLit>
+              <c:ptCount val="4"/>
+              <c:pt idx="0">
+                <c:v>Stale mem.</c:v>
+              </c:pt>
+              <c:pt idx="1">
+                <c:v>Useful mem.</c:v>
+              </c:pt>
+              <c:pt idx="2">
+                <c:v>Cross-stack</c:v>
+              </c:pt>
+              <c:pt idx="3">
+                <c:v>Small local</c:v>
+              </c:pt>
+            </c:strLit>
+          </c:cat>
+          <c:val>
+            <c:numLit>
+              <c:formatCode>0.0</c:formatCode>
+              <c:ptCount val="4"/>
+              <c:pt idx="0">
+                <c:v>6.5</c:v>
+              </c:pt>
+              <c:pt idx="1">
+                <c:v>4.5</c:v>
+              </c:pt>
+              <c:pt idx="2">
+                <c:v>5.5</c:v>
+              </c:pt>
+              <c:pt idx="3">
+                <c:v>3.5</c:v>
+              </c:pt>
+            </c:numLit>
+          </c:val>
+        </c:ser>
+        <c:dLbls>
+          <c:txPr>
+            <a:bodyPr xmlns:a="http://schemas.openxmlformats.org/drawingml/2006/main" anchorCtr="1"/>
+            <a:lstStyle xmlns:a="http://schemas.openxmlformats.org/drawingml/2006/main"/>
+            <a:p xmlns:a="http://schemas.openxmlformats.org/drawingml/2006/main">
+              <a:pPr>
+                <a:defRPr sz="863" b="1">
+                  <a:solidFill>
+                    <a:srgbClr val="0A1224"/>
+                  </a:solidFill>
+                  <a:latin typeface="Arial"/>
+                  <a:ea typeface="Arial"/>
+                  <a:cs typeface="Arial"/>
+                </a:defRPr>
+              </a:pPr>
+            </a:p>
+          </c:txPr>
+          <c:dLblPos val="outEnd"/>
+          <c:showLegendKey val="0"/>
+          <c:showVal val="1"/>
+          <c:showCatName val="0"/>
+          <c:showSerName val="0"/>
+          <c:showPercent val="0"/>
+          <c:showBubbleSize val="0"/>
+          <c:showLeaderLines val="0"/>
+        </c:dLbls>
+        <c:gapWidth val="65"/>
+        <c:axId val="48650112"/>
+        <c:axId val="48672768"/>
+      </c:barChart>
+      <c:catAx>
+        <c:axId val="48650112"/>
+        <c:scaling>
+          <c:orientation val="minMax"/>
+        </c:scaling>
+        <c:delete val="0"/>
+        <c:axPos val="l"/>
+        <c:majorGridlines>
+          <c:spPr>
+            <a:ln xmlns:a="http://schemas.openxmlformats.org/drawingml/2006/main" w="9525">
+              <a:solidFill>
+                <a:srgbClr val="EDEFF3"/>
+              </a:solidFill>
+              <a:prstDash val="solid"/>
+            </a:ln>
+          </c:spPr>
+        </c:majorGridlines>
+        <c:numFmt formatCode="0"/>
+        <c:majorTickMark val="none"/>
+        <c:minorTickMark val="none"/>
+        <c:spPr>
+          <a:ln xmlns:a="http://schemas.openxmlformats.org/drawingml/2006/main" w="9525">
+            <a:solidFill>
+              <a:srgbClr val="B8BCC4"/>
+            </a:solidFill>
+            <a:prstDash val="solid"/>
+          </a:ln>
+        </c:spPr>
+        <c:txPr>
+          <a:bodyPr xmlns:a="http://schemas.openxmlformats.org/drawingml/2006/main" anchorCtr="1"/>
+          <a:lstStyle xmlns:a="http://schemas.openxmlformats.org/drawingml/2006/main"/>
+          <a:p xmlns:a="http://schemas.openxmlformats.org/drawingml/2006/main">
+            <a:pPr>
+              <a:defRPr sz="788">
+                <a:solidFill>
+                  <a:srgbClr val="526071"/>
+                </a:solidFill>
+                <a:latin typeface="Arial"/>
+                <a:ea typeface="Arial"/>
+                <a:cs typeface="Arial"/>
+              </a:defRPr>
+            </a:pPr>
+          </a:p>
+        </c:txPr>
+        <c:crossAx val="48672768"/>
+        <c:lblAlgn val="ctr"/>
+        <c:lblOffset val="100"/>
+        <c:noMultiLvlLbl val="0"/>
+      </c:catAx>
+      <c:valAx>
+        <c:axId val="48672768"/>
+        <c:scaling>
+          <c:orientation val="minMax"/>
+        </c:scaling>
+        <c:delete val="0"/>
+        <c:axPos val="b"/>
+        <c:numFmt formatCode="General"/>
+        <c:majorTickMark val="none"/>
+        <c:minorTickMark val="none"/>
+        <c:tickLblPos val="nextTo"/>
+        <c:spPr>
+          <a:ln xmlns:a="http://schemas.openxmlformats.org/drawingml/2006/main" w="0">
+            <a:solidFill>
+              <a:srgbClr val="FFFFFF"/>
+            </a:solidFill>
+            <a:prstDash val="solid"/>
+          </a:ln>
+        </c:spPr>
+        <c:txPr>
+          <a:bodyPr xmlns:a="http://schemas.openxmlformats.org/drawingml/2006/main" anchorCtr="1"/>
+          <a:lstStyle xmlns:a="http://schemas.openxmlformats.org/drawingml/2006/main"/>
+          <a:p xmlns:a="http://schemas.openxmlformats.org/drawingml/2006/main">
+            <a:pPr>
+              <a:defRPr sz="863">
+                <a:solidFill>
+                  <a:srgbClr val="526071"/>
+                </a:solidFill>
+                <a:latin typeface="Arial"/>
+                <a:ea typeface="Arial"/>
+                <a:cs typeface="Arial"/>
+              </a:defRPr>
+            </a:pPr>
+          </a:p>
+        </c:txPr>
+        <c:crossAx val="48650112"/>
+        <c:crossBetween val="between"/>
+      </c:valAx>
+      <c:spPr>
+        <a:noFill xmlns:a="http://schemas.openxmlformats.org/drawingml/2006/main"/>
+        <a:ln xmlns:a="http://schemas.openxmlformats.org/drawingml/2006/main" w="0">
+          <a:solidFill>
+            <a:srgbClr val="FFFFFF"/>
+          </a:solidFill>
+          <a:prstDash val="solid"/>
+        </a:ln>
+      </c:spPr>
+    </c:plotArea>
+    <c:plotVisOnly val="1"/>
+  </c:chart>
+  <c:spPr>
+    <a:solidFill xmlns:a="http://schemas.openxmlformats.org/drawingml/2006/main">
+      <a:srgbClr val="FFFFFF"/>
+    </a:solidFill>
+    <a:ln xmlns:a="http://schemas.openxmlformats.org/drawingml/2006/main" w="0">
+      <a:solidFill>
+        <a:srgbClr val="FFFFFF"/>
+      </a:solidFill>
+      <a:prstDash val="solid"/>
+    </a:ln>
+  </c:spPr>
+</c:chartSpace>
+</file>
+
 <file path=ppt/slides/slide1.xml><?xml version="1.0" encoding="utf-8"?>
 <p:sld xmlns:p="http://schemas.openxmlformats.org/presentationml/2006/main">
   <p:cSld>
@@ -2819,7 +3593,7 @@
           <p:cNvPr id="7" name="s1-eyebrow">
             <a:extLst xmlns:a="http://schemas.openxmlformats.org/drawingml/2006/main">
               <a:ext uri="{FF2B5EF4-FFF2-40B4-BE49-F238E27FC236}">
-                <a16:creationId xmlns:a16="http://schemas.microsoft.com/office/drawing/2014/main" id="{3ABEF9D6-EE93-4940-B9DB-73E5179DCB95}"/>
+                <a16:creationId xmlns:a16="http://schemas.microsoft.com/office/drawing/2014/main" id="{A6E54242-2712-46F4-B7BA-53D9ED162615}"/>
               </a:ext>
             </a:extLst>
           </p:cNvPr>
@@ -2864,7 +3638,7 @@
           <p:cNvPr id="2" name="s1-title">
             <a:extLst xmlns:a="http://schemas.openxmlformats.org/drawingml/2006/main">
               <a:ext uri="{FF2B5EF4-FFF2-40B4-BE49-F238E27FC236}">
-                <a16:creationId xmlns:a16="http://schemas.microsoft.com/office/drawing/2014/main" id="{E17803E5-C4BB-4928-884E-41B05104B611}"/>
+                <a16:creationId xmlns:a16="http://schemas.microsoft.com/office/drawing/2014/main" id="{48DBCD1E-BDFD-421A-8964-94D04BBB6493}"/>
               </a:ext>
             </a:extLst>
           </p:cNvPr>
@@ -2932,7 +3706,7 @@
           <p:cNvPr id="4" name="s1-subtitle">
             <a:extLst xmlns:a="http://schemas.openxmlformats.org/drawingml/2006/main">
               <a:ext uri="{FF2B5EF4-FFF2-40B4-BE49-F238E27FC236}">
-                <a16:creationId xmlns:a16="http://schemas.microsoft.com/office/drawing/2014/main" id="{935E71D4-5B51-4D52-9551-6F9231741053}"/>
+                <a16:creationId xmlns:a16="http://schemas.microsoft.com/office/drawing/2014/main" id="{4F12F1BB-CDC7-46F3-A8C2-DD284DC7B32D}"/>
               </a:ext>
             </a:extLst>
           </p:cNvPr>
@@ -2977,7 +3751,7 @@
           <p:cNvPr id="5" name="s1-version">
             <a:extLst xmlns:a="http://schemas.openxmlformats.org/drawingml/2006/main">
               <a:ext uri="{FF2B5EF4-FFF2-40B4-BE49-F238E27FC236}">
-                <a16:creationId xmlns:a16="http://schemas.microsoft.com/office/drawing/2014/main" id="{5EE87170-44AD-4D08-A617-F524A51C8A94}"/>
+                <a16:creationId xmlns:a16="http://schemas.microsoft.com/office/drawing/2014/main" id="{D1FED55C-4B14-42E4-9BEB-9489556A8EC9}"/>
               </a:ext>
             </a:extLst>
           </p:cNvPr>
@@ -3026,7 +3800,7 @@
           <p:nvPr/>
         </p:nvPicPr>
         <p:blipFill>
-          <a:blip xmlns:r="http://schemas.openxmlformats.org/officeDocument/2006/relationships" xmlns:a="http://schemas.openxmlformats.org/drawingml/2006/main" r:embed="R6cc4c7eca8c84008"/>
+          <a:blip xmlns:r="http://schemas.openxmlformats.org/officeDocument/2006/relationships" xmlns:a="http://schemas.openxmlformats.org/drawingml/2006/main" r:embed="R7e3df121610a484c"/>
           <a:stretch xmlns:a="http://schemas.openxmlformats.org/drawingml/2006/main"/>
         </p:blipFill>
         <p:spPr>
@@ -3042,7 +3816,7 @@
     </p:spTree>
     <p:extLst>
       <p:ext uri="{BB962C8B-B14F-4D97-AF65-F5344CB8AC3E}">
-        <p14:creationId xmlns:p14="http://schemas.microsoft.com/office/powerpoint/2010/main" val="738431571"/>
+        <p14:creationId xmlns:p14="http://schemas.microsoft.com/office/powerpoint/2010/main" val="195370646"/>
       </p:ext>
     </p:extLst>
   </p:cSld>
@@ -3070,35 +3844,35 @@
       </p:grpSpPr>
       <p:sp>
         <p:nvSpPr>
-          <p:cNvPr id="27" name="s11-title">
-            <a:extLst xmlns:a="http://schemas.openxmlformats.org/drawingml/2006/main">
-              <a:ext uri="{FF2B5EF4-FFF2-40B4-BE49-F238E27FC236}">
-                <a16:creationId xmlns:a16="http://schemas.microsoft.com/office/drawing/2014/main" id="{0B47EC14-CBA0-4139-BAD4-71D1C78454C1}"/>
-              </a:ext>
-            </a:extLst>
-          </p:cNvPr>
-          <p:cNvSpPr>
-            <a:spLocks xmlns:a="http://schemas.openxmlformats.org/drawingml/2006/main" noGrp="1"/>
-          </p:cNvSpPr>
-          <p:nvPr/>
-        </p:nvSpPr>
-        <p:spPr>
-          <a:xfrm xmlns:a="http://schemas.openxmlformats.org/drawingml/2006/main">
-            <a:off x="400050" y="323850"/>
-            <a:ext cx="11391900" cy="723900"/>
-          </a:xfrm>
-          <a:prstGeom xmlns:a="http://schemas.openxmlformats.org/drawingml/2006/main" prst="rect">
-            <a:avLst/>
-          </a:prstGeom>
-        </p:spPr>
-        <p:txBody>
-          <a:bodyPr xmlns:a="http://schemas.openxmlformats.org/drawingml/2006/main" wrap="square" lIns="0" tIns="0" rIns="0" bIns="0" anchor="t">
-            <a:noAutofit/>
-          </a:bodyPr>
-          <a:lstStyle xmlns:a="http://schemas.openxmlformats.org/drawingml/2006/main"/>
-          <a:p xmlns:a="http://schemas.openxmlformats.org/drawingml/2006/main">
-            <a:pPr algn="l">
-              <a:defRPr sz="3000" b="1">
+          <p:cNvPr id="39" name="s10-title">
+            <a:extLst xmlns:a="http://schemas.openxmlformats.org/drawingml/2006/main">
+              <a:ext uri="{FF2B5EF4-FFF2-40B4-BE49-F238E27FC236}">
+                <a16:creationId xmlns:a16="http://schemas.microsoft.com/office/drawing/2014/main" id="{9295A2C7-9612-4377-BD3E-808BB53E7F81}"/>
+              </a:ext>
+            </a:extLst>
+          </p:cNvPr>
+          <p:cNvSpPr>
+            <a:spLocks xmlns:a="http://schemas.openxmlformats.org/drawingml/2006/main" noGrp="1"/>
+          </p:cNvSpPr>
+          <p:nvPr/>
+        </p:nvSpPr>
+        <p:spPr>
+          <a:xfrm xmlns:a="http://schemas.openxmlformats.org/drawingml/2006/main">
+            <a:off x="495300" y="323850"/>
+            <a:ext cx="10953750" cy="723900"/>
+          </a:xfrm>
+          <a:prstGeom xmlns:a="http://schemas.openxmlformats.org/drawingml/2006/main" prst="rect">
+            <a:avLst/>
+          </a:prstGeom>
+        </p:spPr>
+        <p:txBody>
+          <a:bodyPr xmlns:a="http://schemas.openxmlformats.org/drawingml/2006/main" wrap="square" lIns="0" tIns="0" rIns="0" bIns="0" anchor="t">
+            <a:noAutofit/>
+          </a:bodyPr>
+          <a:lstStyle xmlns:a="http://schemas.openxmlformats.org/drawingml/2006/main"/>
+          <a:p xmlns:a="http://schemas.openxmlformats.org/drawingml/2006/main">
+            <a:pPr algn="l">
+              <a:defRPr sz="2850" b="1">
                 <a:solidFill>
                   <a:srgbClr val="0A1224"/>
                 </a:solidFill>
@@ -3108,17 +3882,17 @@
               </a:defRPr>
             </a:pPr>
             <a:r>
-              <a:t>Failures became versioned regression gates.</a:t>
-            </a:r>
-          </a:p>
-        </p:txBody>
-      </p:sp>
-      <p:sp>
-        <p:nvSpPr>
-          <p:cNvPr id="2" name="s11-subtitle">
-            <a:extLst xmlns:a="http://schemas.openxmlformats.org/drawingml/2006/main">
-              <a:ext uri="{FF2B5EF4-FFF2-40B4-BE49-F238E27FC236}">
-                <a16:creationId xmlns:a16="http://schemas.microsoft.com/office/drawing/2014/main" id="{9AAFFAF1-0654-4B9B-8526-EF8B550D0AB6}"/>
+              <a:t>Independent gates verify the product.</a:t>
+            </a:r>
+          </a:p>
+        </p:txBody>
+      </p:sp>
+      <p:sp>
+        <p:nvSpPr>
+          <p:cNvPr id="2" name="s10-subtitle">
+            <a:extLst xmlns:a="http://schemas.openxmlformats.org/drawingml/2006/main">
+              <a:ext uri="{FF2B5EF4-FFF2-40B4-BE49-F238E27FC236}">
+                <a16:creationId xmlns:a16="http://schemas.microsoft.com/office/drawing/2014/main" id="{8E934428-8B34-4047-A04A-298F5C1A1C61}"/>
               </a:ext>
             </a:extLst>
           </p:cNvPr>
@@ -3153,382 +3927,33 @@
               </a:defRPr>
             </a:pPr>
             <a:r>
-              <a:t>The benchmark did not just score Vertex Palace; it changed the implementation and release process.</a:t>
-            </a:r>
-          </a:p>
-        </p:txBody>
-      </p:sp>
-      <p:cxnSp>
-        <p:nvCxnSpPr>
-          <p:cNvPr id="29" name="s11-link1"/>
-          <p:cNvCxnSpPr/>
-          <p:nvPr/>
-        </p:nvCxnSpPr>
-        <p:spPr>
-          <a:xfrm xmlns:a="http://schemas.openxmlformats.org/drawingml/2006/main">
-            <a:off x="3714750" y="3333750"/>
-            <a:ext cx="762000" cy="953"/>
-          </a:xfrm>
-          <a:prstGeom xmlns:a="http://schemas.openxmlformats.org/drawingml/2006/main" prst="straightConnector1">
-            <a:avLst/>
-          </a:prstGeom>
-          <a:ln xmlns:a="http://schemas.openxmlformats.org/drawingml/2006/main" w="38100">
-            <a:solidFill>
-              <a:srgbClr val="B8BCC4"/>
-            </a:solidFill>
-            <a:prstDash val="solid"/>
-          </a:ln>
-        </p:spPr>
-      </p:cxnSp>
-      <p:cxnSp>
-        <p:nvCxnSpPr>
-          <p:cNvPr id="30" name="s11-link2"/>
-          <p:cNvCxnSpPr/>
-          <p:nvPr/>
-        </p:nvCxnSpPr>
-        <p:spPr>
-          <a:xfrm xmlns:a="http://schemas.openxmlformats.org/drawingml/2006/main">
-            <a:off x="7715250" y="3333750"/>
-            <a:ext cx="762000" cy="953"/>
-          </a:xfrm>
-          <a:prstGeom xmlns:a="http://schemas.openxmlformats.org/drawingml/2006/main" prst="straightConnector1">
-            <a:avLst/>
-          </a:prstGeom>
-          <a:ln xmlns:a="http://schemas.openxmlformats.org/drawingml/2006/main" w="38100">
-            <a:solidFill>
-              <a:srgbClr val="B8BCC4"/>
-            </a:solidFill>
-            <a:prstDash val="solid"/>
-          </a:ln>
-        </p:spPr>
-      </p:cxnSp>
-      <p:sp>
-        <p:nvSpPr>
-          <p:cNvPr id="5" name="s11-arrow1">
-            <a:extLst xmlns:a="http://schemas.openxmlformats.org/drawingml/2006/main">
-              <a:ext uri="{FF2B5EF4-FFF2-40B4-BE49-F238E27FC236}">
-                <a16:creationId xmlns:a16="http://schemas.microsoft.com/office/drawing/2014/main" id="{E04D8CE9-DF52-43CD-B4B3-74C00D367FD4}"/>
-              </a:ext>
-            </a:extLst>
-          </p:cNvPr>
-          <p:cNvSpPr>
-            <a:spLocks xmlns:a="http://schemas.openxmlformats.org/drawingml/2006/main" noGrp="1"/>
-          </p:cNvSpPr>
-          <p:nvPr/>
-        </p:nvSpPr>
-        <p:spPr>
-          <a:xfrm xmlns:a="http://schemas.openxmlformats.org/drawingml/2006/main">
-            <a:off x="4095750" y="3152775"/>
-            <a:ext cx="342900" cy="342900"/>
-          </a:xfrm>
-          <a:prstGeom xmlns:a="http://schemas.openxmlformats.org/drawingml/2006/main" prst="rect">
-            <a:avLst/>
-          </a:prstGeom>
-        </p:spPr>
-        <p:txBody>
-          <a:bodyPr xmlns:a="http://schemas.openxmlformats.org/drawingml/2006/main" wrap="square" lIns="0" tIns="0" rIns="0" bIns="0" anchor="t">
-            <a:noAutofit/>
-          </a:bodyPr>
-          <a:lstStyle xmlns:a="http://schemas.openxmlformats.org/drawingml/2006/main"/>
-          <a:p xmlns:a="http://schemas.openxmlformats.org/drawingml/2006/main">
-            <a:pPr algn="ctr">
-              <a:defRPr sz="2100" b="1">
-                <a:solidFill>
-                  <a:srgbClr val="B8BCC4"/>
-                </a:solidFill>
-                <a:latin typeface="Arial"/>
-                <a:ea typeface="Arial"/>
-                <a:cs typeface="Arial"/>
-              </a:defRPr>
-            </a:pPr>
-            <a:r>
-              <a:t>&gt;</a:t>
-            </a:r>
-          </a:p>
-        </p:txBody>
-      </p:sp>
-      <p:sp>
-        <p:nvSpPr>
-          <p:cNvPr id="6" name="s11-arrow2">
-            <a:extLst xmlns:a="http://schemas.openxmlformats.org/drawingml/2006/main">
-              <a:ext uri="{FF2B5EF4-FFF2-40B4-BE49-F238E27FC236}">
-                <a16:creationId xmlns:a16="http://schemas.microsoft.com/office/drawing/2014/main" id="{2C086A28-2916-4BA3-872F-F04BAF44EDF6}"/>
-              </a:ext>
-            </a:extLst>
-          </p:cNvPr>
-          <p:cNvSpPr>
-            <a:spLocks xmlns:a="http://schemas.openxmlformats.org/drawingml/2006/main" noGrp="1"/>
-          </p:cNvSpPr>
-          <p:nvPr/>
-        </p:nvSpPr>
-        <p:spPr>
-          <a:xfrm xmlns:a="http://schemas.openxmlformats.org/drawingml/2006/main">
-            <a:off x="8096250" y="3152775"/>
-            <a:ext cx="342900" cy="342900"/>
-          </a:xfrm>
-          <a:prstGeom xmlns:a="http://schemas.openxmlformats.org/drawingml/2006/main" prst="rect">
-            <a:avLst/>
-          </a:prstGeom>
-        </p:spPr>
-        <p:txBody>
-          <a:bodyPr xmlns:a="http://schemas.openxmlformats.org/drawingml/2006/main" wrap="square" lIns="0" tIns="0" rIns="0" bIns="0" anchor="t">
-            <a:noAutofit/>
-          </a:bodyPr>
-          <a:lstStyle xmlns:a="http://schemas.openxmlformats.org/drawingml/2006/main"/>
-          <a:p xmlns:a="http://schemas.openxmlformats.org/drawingml/2006/main">
-            <a:pPr algn="ctr">
-              <a:defRPr sz="2100" b="1">
-                <a:solidFill>
-                  <a:srgbClr val="B8BCC4"/>
-                </a:solidFill>
-                <a:latin typeface="Arial"/>
-                <a:ea typeface="Arial"/>
-                <a:cs typeface="Arial"/>
-              </a:defRPr>
-            </a:pPr>
-            <a:r>
-              <a:t>&gt;</a:t>
-            </a:r>
-          </a:p>
-        </p:txBody>
-      </p:sp>
-      <p:sp>
-        <p:nvSpPr>
-          <p:cNvPr id="7" name="s11-v021">
-            <a:extLst xmlns:a="http://schemas.openxmlformats.org/drawingml/2006/main">
-              <a:ext uri="{FF2B5EF4-FFF2-40B4-BE49-F238E27FC236}">
-                <a16:creationId xmlns:a16="http://schemas.microsoft.com/office/drawing/2014/main" id="{627391B1-BD30-4385-B807-3C493C3C52F8}"/>
-              </a:ext>
-            </a:extLst>
-          </p:cNvPr>
-          <p:cNvSpPr>
-            <a:spLocks xmlns:a="http://schemas.openxmlformats.org/drawingml/2006/main" noGrp="1"/>
-          </p:cNvSpPr>
-          <p:nvPr/>
-        </p:nvSpPr>
-        <p:spPr>
-          <a:xfrm xmlns:a="http://schemas.openxmlformats.org/drawingml/2006/main">
-            <a:off x="552450" y="1885950"/>
-            <a:ext cx="3162300" cy="3028950"/>
+              <a:t>Repository tests, cross-platform CI, and public-distribution checks verify different failure modes.</a:t>
+            </a:r>
+          </a:p>
+        </p:txBody>
+      </p:sp>
+      <p:sp>
+        <p:nvSpPr>
+          <p:cNvPr id="3" name="s10-tests">
+            <a:extLst xmlns:a="http://schemas.openxmlformats.org/drawingml/2006/main">
+              <a:ext uri="{FF2B5EF4-FFF2-40B4-BE49-F238E27FC236}">
+                <a16:creationId xmlns:a16="http://schemas.microsoft.com/office/drawing/2014/main" id="{97156060-2591-41DA-83BC-BC53BD6AD916}"/>
+              </a:ext>
+            </a:extLst>
+          </p:cNvPr>
+          <p:cNvSpPr>
+            <a:spLocks xmlns:a="http://schemas.openxmlformats.org/drawingml/2006/main" noGrp="1"/>
+          </p:cNvSpPr>
+          <p:nvPr/>
+        </p:nvSpPr>
+        <p:spPr>
+          <a:xfrm xmlns:a="http://schemas.openxmlformats.org/drawingml/2006/main">
+            <a:off x="552450" y="1695450"/>
+            <a:ext cx="3295650" cy="3771900"/>
           </a:xfrm>
           <a:prstGeom xmlns:a="http://schemas.openxmlformats.org/drawingml/2006/main" prst="roundRect">
             <a:avLst>
-              <a:gd name="adj" fmla="val 2516"/>
-            </a:avLst>
-          </a:prstGeom>
-          <a:solidFill xmlns:a="http://schemas.openxmlformats.org/drawingml/2006/main">
-            <a:srgbClr val="FFF1F3"/>
-          </a:solidFill>
-          <a:ln xmlns:a="http://schemas.openxmlformats.org/drawingml/2006/main" w="0">
-            <a:solidFill>
-              <a:srgbClr val="FFF1F3"/>
-            </a:solidFill>
-            <a:prstDash val="solid"/>
-          </a:ln>
-        </p:spPr>
-      </p:sp>
-      <p:sp>
-        <p:nvSpPr>
-          <p:cNvPr id="8" name="s11-v021-version">
-            <a:extLst xmlns:a="http://schemas.openxmlformats.org/drawingml/2006/main">
-              <a:ext uri="{FF2B5EF4-FFF2-40B4-BE49-F238E27FC236}">
-                <a16:creationId xmlns:a16="http://schemas.microsoft.com/office/drawing/2014/main" id="{E76B2D03-97DA-44B7-9F69-17B964AED64D}"/>
-              </a:ext>
-            </a:extLst>
-          </p:cNvPr>
-          <p:cNvSpPr>
-            <a:spLocks xmlns:a="http://schemas.openxmlformats.org/drawingml/2006/main" noGrp="1"/>
-          </p:cNvSpPr>
-          <p:nvPr/>
-        </p:nvSpPr>
-        <p:spPr>
-          <a:xfrm xmlns:a="http://schemas.openxmlformats.org/drawingml/2006/main">
-            <a:off x="819150" y="2133600"/>
-            <a:ext cx="2628900" cy="342900"/>
-          </a:xfrm>
-          <a:prstGeom xmlns:a="http://schemas.openxmlformats.org/drawingml/2006/main" prst="rect">
-            <a:avLst/>
-          </a:prstGeom>
-        </p:spPr>
-        <p:txBody>
-          <a:bodyPr xmlns:a="http://schemas.openxmlformats.org/drawingml/2006/main" wrap="square" lIns="0" tIns="0" rIns="0" bIns="0" anchor="t">
-            <a:noAutofit/>
-          </a:bodyPr>
-          <a:lstStyle xmlns:a="http://schemas.openxmlformats.org/drawingml/2006/main"/>
-          <a:p xmlns:a="http://schemas.openxmlformats.org/drawingml/2006/main">
-            <a:pPr algn="l">
-              <a:defRPr sz="1800" b="1">
-                <a:solidFill>
-                  <a:srgbClr val="D4515D"/>
-                </a:solidFill>
-                <a:latin typeface="Consolas"/>
-                <a:ea typeface="Consolas"/>
-                <a:cs typeface="Consolas"/>
-              </a:defRPr>
-            </a:pPr>
-            <a:r>
-              <a:t>v0.2.1</a:t>
-            </a:r>
-          </a:p>
-        </p:txBody>
-      </p:sp>
-      <p:sp>
-        <p:nvSpPr>
-          <p:cNvPr id="9" name="s11-v021-k">
-            <a:extLst xmlns:a="http://schemas.openxmlformats.org/drawingml/2006/main">
-              <a:ext uri="{FF2B5EF4-FFF2-40B4-BE49-F238E27FC236}">
-                <a16:creationId xmlns:a16="http://schemas.microsoft.com/office/drawing/2014/main" id="{D5D37A26-A18F-4A12-B9CD-6F65FD8A3182}"/>
-              </a:ext>
-            </a:extLst>
-          </p:cNvPr>
-          <p:cNvSpPr>
-            <a:spLocks xmlns:a="http://schemas.openxmlformats.org/drawingml/2006/main" noGrp="1"/>
-          </p:cNvSpPr>
-          <p:nvPr/>
-        </p:nvSpPr>
-        <p:spPr>
-          <a:xfrm xmlns:a="http://schemas.openxmlformats.org/drawingml/2006/main">
-            <a:off x="819150" y="2628900"/>
-            <a:ext cx="2628900" cy="209550"/>
-          </a:xfrm>
-          <a:prstGeom xmlns:a="http://schemas.openxmlformats.org/drawingml/2006/main" prst="rect">
-            <a:avLst/>
-          </a:prstGeom>
-        </p:spPr>
-        <p:txBody>
-          <a:bodyPr xmlns:a="http://schemas.openxmlformats.org/drawingml/2006/main" wrap="square" lIns="0" tIns="0" rIns="0" bIns="0" anchor="t">
-            <a:noAutofit/>
-          </a:bodyPr>
-          <a:lstStyle xmlns:a="http://schemas.openxmlformats.org/drawingml/2006/main"/>
-          <a:p xmlns:a="http://schemas.openxmlformats.org/drawingml/2006/main">
-            <a:pPr algn="l">
-              <a:defRPr sz="1050" b="1">
-                <a:solidFill>
-                  <a:srgbClr val="D4515D"/>
-                </a:solidFill>
-                <a:latin typeface="Arial"/>
-                <a:ea typeface="Arial"/>
-                <a:cs typeface="Arial"/>
-              </a:defRPr>
-            </a:pPr>
-            <a:r>
-              <a:t>OBSERVED</a:t>
-            </a:r>
-          </a:p>
-        </p:txBody>
-      </p:sp>
-      <p:sp>
-        <p:nvSpPr>
-          <p:cNvPr id="10" name="s11-v021-v">
-            <a:extLst xmlns:a="http://schemas.openxmlformats.org/drawingml/2006/main">
-              <a:ext uri="{FF2B5EF4-FFF2-40B4-BE49-F238E27FC236}">
-                <a16:creationId xmlns:a16="http://schemas.microsoft.com/office/drawing/2014/main" id="{FB3C4D76-BC36-474F-99F4-57E29CCF9B8D}"/>
-              </a:ext>
-            </a:extLst>
-          </p:cNvPr>
-          <p:cNvSpPr>
-            <a:spLocks xmlns:a="http://schemas.openxmlformats.org/drawingml/2006/main" noGrp="1"/>
-          </p:cNvSpPr>
-          <p:nvPr/>
-        </p:nvSpPr>
-        <p:spPr>
-          <a:xfrm xmlns:a="http://schemas.openxmlformats.org/drawingml/2006/main">
-            <a:off x="819150" y="2990850"/>
-            <a:ext cx="2628900" cy="1123950"/>
-          </a:xfrm>
-          <a:prstGeom xmlns:a="http://schemas.openxmlformats.org/drawingml/2006/main" prst="rect">
-            <a:avLst/>
-          </a:prstGeom>
-        </p:spPr>
-        <p:txBody>
-          <a:bodyPr xmlns:a="http://schemas.openxmlformats.org/drawingml/2006/main" wrap="square" lIns="0" tIns="0" rIns="0" bIns="0" anchor="t">
-            <a:noAutofit/>
-          </a:bodyPr>
-          <a:lstStyle xmlns:a="http://schemas.openxmlformats.org/drawingml/2006/main"/>
-          <a:p xmlns:a="http://schemas.openxmlformats.org/drawingml/2006/main">
-            <a:pPr algn="l">
-              <a:defRPr sz="1500" b="0">
-                <a:solidFill>
-                  <a:srgbClr val="0A1224"/>
-                </a:solidFill>
-                <a:latin typeface="Arial"/>
-                <a:ea typeface="Arial"/>
-                <a:cs typeface="Arial"/>
-              </a:defRPr>
-            </a:pPr>
-            <a:r>
-              <a:t>Adaptive selected Full Palace but returned zero memory items in all four useful-memory trials.</a:t>
-            </a:r>
-          </a:p>
-        </p:txBody>
-      </p:sp>
-      <p:sp>
-        <p:nvSpPr>
-          <p:cNvPr id="11" name="s11-v021-foot">
-            <a:extLst xmlns:a="http://schemas.openxmlformats.org/drawingml/2006/main">
-              <a:ext uri="{FF2B5EF4-FFF2-40B4-BE49-F238E27FC236}">
-                <a16:creationId xmlns:a16="http://schemas.microsoft.com/office/drawing/2014/main" id="{999E169E-CC96-465C-8934-DF589C4E49BE}"/>
-              </a:ext>
-            </a:extLst>
-          </p:cNvPr>
-          <p:cNvSpPr>
-            <a:spLocks xmlns:a="http://schemas.openxmlformats.org/drawingml/2006/main" noGrp="1"/>
-          </p:cNvSpPr>
-          <p:nvPr/>
-        </p:nvSpPr>
-        <p:spPr>
-          <a:xfrm xmlns:a="http://schemas.openxmlformats.org/drawingml/2006/main">
-            <a:off x="819150" y="4400550"/>
-            <a:ext cx="2628900" cy="266700"/>
-          </a:xfrm>
-          <a:prstGeom xmlns:a="http://schemas.openxmlformats.org/drawingml/2006/main" prst="rect">
-            <a:avLst/>
-          </a:prstGeom>
-        </p:spPr>
-        <p:txBody>
-          <a:bodyPr xmlns:a="http://schemas.openxmlformats.org/drawingml/2006/main" wrap="square" lIns="0" tIns="0" rIns="0" bIns="0" anchor="t">
-            <a:noAutofit/>
-          </a:bodyPr>
-          <a:lstStyle xmlns:a="http://schemas.openxmlformats.org/drawingml/2006/main"/>
-          <a:p xmlns:a="http://schemas.openxmlformats.org/drawingml/2006/main">
-            <a:pPr algn="l">
-              <a:defRPr sz="1275" b="1">
-                <a:solidFill>
-                  <a:srgbClr val="526071"/>
-                </a:solidFill>
-                <a:latin typeface="Arial"/>
-                <a:ea typeface="Arial"/>
-                <a:cs typeface="Arial"/>
-              </a:defRPr>
-            </a:pPr>
-            <a:r>
-              <a:t>Deterministic omission</a:t>
-            </a:r>
-          </a:p>
-        </p:txBody>
-      </p:sp>
-      <p:sp>
-        <p:nvSpPr>
-          <p:cNvPr id="12" name="s11-v022">
-            <a:extLst xmlns:a="http://schemas.openxmlformats.org/drawingml/2006/main">
-              <a:ext uri="{FF2B5EF4-FFF2-40B4-BE49-F238E27FC236}">
-                <a16:creationId xmlns:a16="http://schemas.microsoft.com/office/drawing/2014/main" id="{5C17E391-8D27-47C0-842B-403AD8E3DAE2}"/>
-              </a:ext>
-            </a:extLst>
-          </p:cNvPr>
-          <p:cNvSpPr>
-            <a:spLocks xmlns:a="http://schemas.openxmlformats.org/drawingml/2006/main" noGrp="1"/>
-          </p:cNvSpPr>
-          <p:nvPr/>
-        </p:nvSpPr>
-        <p:spPr>
-          <a:xfrm xmlns:a="http://schemas.openxmlformats.org/drawingml/2006/main">
-            <a:off x="4514850" y="1885950"/>
-            <a:ext cx="3162300" cy="3028950"/>
-          </a:xfrm>
-          <a:prstGeom xmlns:a="http://schemas.openxmlformats.org/drawingml/2006/main" prst="roundRect">
-            <a:avLst>
-              <a:gd name="adj" fmla="val 2516"/>
+              <a:gd name="adj" fmla="val 2312"/>
             </a:avLst>
           </a:prstGeom>
           <a:solidFill xmlns:a="http://schemas.openxmlformats.org/drawingml/2006/main">
@@ -3544,37 +3969,194 @@
       </p:sp>
       <p:sp>
         <p:nvSpPr>
-          <p:cNvPr id="13" name="s11-v022-version">
-            <a:extLst xmlns:a="http://schemas.openxmlformats.org/drawingml/2006/main">
-              <a:ext uri="{FF2B5EF4-FFF2-40B4-BE49-F238E27FC236}">
-                <a16:creationId xmlns:a16="http://schemas.microsoft.com/office/drawing/2014/main" id="{03F25EC3-C63E-484E-A1E0-613D5D71A8EC}"/>
-              </a:ext>
-            </a:extLst>
-          </p:cNvPr>
-          <p:cNvSpPr>
-            <a:spLocks xmlns:a="http://schemas.openxmlformats.org/drawingml/2006/main" noGrp="1"/>
-          </p:cNvSpPr>
-          <p:nvPr/>
-        </p:nvSpPr>
-        <p:spPr>
-          <a:xfrm xmlns:a="http://schemas.openxmlformats.org/drawingml/2006/main">
-            <a:off x="4781550" y="2133600"/>
-            <a:ext cx="2628900" cy="342900"/>
-          </a:xfrm>
-          <a:prstGeom xmlns:a="http://schemas.openxmlformats.org/drawingml/2006/main" prst="rect">
-            <a:avLst/>
-          </a:prstGeom>
-        </p:spPr>
-        <p:txBody>
-          <a:bodyPr xmlns:a="http://schemas.openxmlformats.org/drawingml/2006/main" wrap="square" lIns="0" tIns="0" rIns="0" bIns="0" anchor="t">
-            <a:noAutofit/>
-          </a:bodyPr>
-          <a:lstStyle xmlns:a="http://schemas.openxmlformats.org/drawingml/2006/main"/>
-          <a:p xmlns:a="http://schemas.openxmlformats.org/drawingml/2006/main">
-            <a:pPr algn="l">
-              <a:defRPr sz="1800" b="1">
+          <p:cNvPr id="4" name="s10-tests-k">
+            <a:extLst xmlns:a="http://schemas.openxmlformats.org/drawingml/2006/main">
+              <a:ext uri="{FF2B5EF4-FFF2-40B4-BE49-F238E27FC236}">
+                <a16:creationId xmlns:a16="http://schemas.microsoft.com/office/drawing/2014/main" id="{7E95E554-A937-4772-A756-F8A3888B0645}"/>
+              </a:ext>
+            </a:extLst>
+          </p:cNvPr>
+          <p:cNvSpPr>
+            <a:spLocks xmlns:a="http://schemas.openxmlformats.org/drawingml/2006/main" noGrp="1"/>
+          </p:cNvSpPr>
+          <p:nvPr/>
+        </p:nvSpPr>
+        <p:spPr>
+          <a:xfrm xmlns:a="http://schemas.openxmlformats.org/drawingml/2006/main">
+            <a:off x="819150" y="1981200"/>
+            <a:ext cx="2762250" cy="228600"/>
+          </a:xfrm>
+          <a:prstGeom xmlns:a="http://schemas.openxmlformats.org/drawingml/2006/main" prst="rect">
+            <a:avLst/>
+          </a:prstGeom>
+        </p:spPr>
+        <p:txBody>
+          <a:bodyPr xmlns:a="http://schemas.openxmlformats.org/drawingml/2006/main" wrap="square" lIns="0" tIns="0" rIns="0" bIns="0" anchor="t">
+            <a:noAutofit/>
+          </a:bodyPr>
+          <a:lstStyle xmlns:a="http://schemas.openxmlformats.org/drawingml/2006/main"/>
+          <a:p xmlns:a="http://schemas.openxmlformats.org/drawingml/2006/main">
+            <a:pPr algn="l">
+              <a:defRPr sz="1125" b="1">
                 <a:solidFill>
                   <a:srgbClr val="1677FF"/>
+                </a:solidFill>
+                <a:latin typeface="Arial"/>
+                <a:ea typeface="Arial"/>
+                <a:cs typeface="Arial"/>
+              </a:defRPr>
+            </a:pPr>
+            <a:r>
+              <a:t>PRODUCT TESTS</a:t>
+            </a:r>
+          </a:p>
+        </p:txBody>
+      </p:sp>
+      <p:sp>
+        <p:nvSpPr>
+          <p:cNvPr id="5" name="s10-tests-stat">
+            <a:extLst xmlns:a="http://schemas.openxmlformats.org/drawingml/2006/main">
+              <a:ext uri="{FF2B5EF4-FFF2-40B4-BE49-F238E27FC236}">
+                <a16:creationId xmlns:a16="http://schemas.microsoft.com/office/drawing/2014/main" id="{0B09D993-449E-4AA7-AA80-D0755874AF33}"/>
+              </a:ext>
+            </a:extLst>
+          </p:cNvPr>
+          <p:cNvSpPr>
+            <a:spLocks xmlns:a="http://schemas.openxmlformats.org/drawingml/2006/main" noGrp="1"/>
+          </p:cNvSpPr>
+          <p:nvPr/>
+        </p:nvSpPr>
+        <p:spPr>
+          <a:xfrm xmlns:a="http://schemas.openxmlformats.org/drawingml/2006/main">
+            <a:off x="819150" y="2324100"/>
+            <a:ext cx="1714500" cy="685800"/>
+          </a:xfrm>
+          <a:prstGeom xmlns:a="http://schemas.openxmlformats.org/drawingml/2006/main" prst="rect">
+            <a:avLst/>
+          </a:prstGeom>
+        </p:spPr>
+        <p:txBody>
+          <a:bodyPr xmlns:a="http://schemas.openxmlformats.org/drawingml/2006/main" wrap="square" lIns="0" tIns="0" rIns="0" bIns="0" anchor="t">
+            <a:noAutofit/>
+          </a:bodyPr>
+          <a:lstStyle xmlns:a="http://schemas.openxmlformats.org/drawingml/2006/main"/>
+          <a:p xmlns:a="http://schemas.openxmlformats.org/drawingml/2006/main">
+            <a:pPr algn="l">
+              <a:defRPr sz="4200" b="1">
+                <a:solidFill>
+                  <a:srgbClr val="1677FF"/>
+                </a:solidFill>
+                <a:latin typeface="Arial"/>
+                <a:ea typeface="Arial"/>
+                <a:cs typeface="Arial"/>
+              </a:defRPr>
+            </a:pPr>
+            <a:r>
+              <a:t>55</a:t>
+            </a:r>
+          </a:p>
+        </p:txBody>
+      </p:sp>
+      <p:sp>
+        <p:nvSpPr>
+          <p:cNvPr id="6" name="s10-tests-label">
+            <a:extLst xmlns:a="http://schemas.openxmlformats.org/drawingml/2006/main">
+              <a:ext uri="{FF2B5EF4-FFF2-40B4-BE49-F238E27FC236}">
+                <a16:creationId xmlns:a16="http://schemas.microsoft.com/office/drawing/2014/main" id="{21C31A19-182A-491A-B90E-CA3CF3AE1F78}"/>
+              </a:ext>
+            </a:extLst>
+          </p:cNvPr>
+          <p:cNvSpPr>
+            <a:spLocks xmlns:a="http://schemas.openxmlformats.org/drawingml/2006/main" noGrp="1"/>
+          </p:cNvSpPr>
+          <p:nvPr/>
+        </p:nvSpPr>
+        <p:spPr>
+          <a:xfrm xmlns:a="http://schemas.openxmlformats.org/drawingml/2006/main">
+            <a:off x="819150" y="2990850"/>
+            <a:ext cx="2476500" cy="285750"/>
+          </a:xfrm>
+          <a:prstGeom xmlns:a="http://schemas.openxmlformats.org/drawingml/2006/main" prst="rect">
+            <a:avLst/>
+          </a:prstGeom>
+        </p:spPr>
+        <p:txBody>
+          <a:bodyPr xmlns:a="http://schemas.openxmlformats.org/drawingml/2006/main" wrap="square" lIns="0" tIns="0" rIns="0" bIns="0" anchor="t">
+            <a:noAutofit/>
+          </a:bodyPr>
+          <a:lstStyle xmlns:a="http://schemas.openxmlformats.org/drawingml/2006/main"/>
+          <a:p xmlns:a="http://schemas.openxmlformats.org/drawingml/2006/main">
+            <a:pPr algn="l">
+              <a:defRPr sz="1575" b="1">
+                <a:solidFill>
+                  <a:srgbClr val="0A1224"/>
+                </a:solidFill>
+                <a:latin typeface="Arial"/>
+                <a:ea typeface="Arial"/>
+                <a:cs typeface="Arial"/>
+              </a:defRPr>
+            </a:pPr>
+            <a:r>
+              <a:t>automated tests</a:t>
+            </a:r>
+          </a:p>
+        </p:txBody>
+      </p:sp>
+      <p:cxnSp>
+        <p:nvCxnSpPr>
+          <p:cNvPr id="45" name="s10-tests-rule"/>
+          <p:cNvCxnSpPr/>
+          <p:nvPr/>
+        </p:nvCxnSpPr>
+        <p:spPr>
+          <a:xfrm xmlns:a="http://schemas.openxmlformats.org/drawingml/2006/main">
+            <a:off x="819150" y="3429000"/>
+            <a:ext cx="2762250" cy="953"/>
+          </a:xfrm>
+          <a:prstGeom xmlns:a="http://schemas.openxmlformats.org/drawingml/2006/main" prst="straightConnector1">
+            <a:avLst/>
+          </a:prstGeom>
+          <a:ln xmlns:a="http://schemas.openxmlformats.org/drawingml/2006/main" w="9525">
+            <a:solidFill>
+              <a:srgbClr val="B8BCC4"/>
+            </a:solidFill>
+            <a:prstDash val="solid"/>
+          </a:ln>
+        </p:spPr>
+      </p:cxnSp>
+      <p:sp>
+        <p:nvSpPr>
+          <p:cNvPr id="8" name="s10-tests-body">
+            <a:extLst xmlns:a="http://schemas.openxmlformats.org/drawingml/2006/main">
+              <a:ext uri="{FF2B5EF4-FFF2-40B4-BE49-F238E27FC236}">
+                <a16:creationId xmlns:a16="http://schemas.microsoft.com/office/drawing/2014/main" id="{F622A6A6-9B40-484F-B825-067352E3A2A0}"/>
+              </a:ext>
+            </a:extLst>
+          </p:cNvPr>
+          <p:cNvSpPr>
+            <a:spLocks xmlns:a="http://schemas.openxmlformats.org/drawingml/2006/main" noGrp="1"/>
+          </p:cNvSpPr>
+          <p:nvPr/>
+        </p:nvSpPr>
+        <p:spPr>
+          <a:xfrm xmlns:a="http://schemas.openxmlformats.org/drawingml/2006/main">
+            <a:off x="819150" y="3638550"/>
+            <a:ext cx="1200150" cy="990600"/>
+          </a:xfrm>
+          <a:prstGeom xmlns:a="http://schemas.openxmlformats.org/drawingml/2006/main" prst="rect">
+            <a:avLst/>
+          </a:prstGeom>
+        </p:spPr>
+        <p:txBody>
+          <a:bodyPr xmlns:a="http://schemas.openxmlformats.org/drawingml/2006/main" wrap="square" lIns="0" tIns="0" rIns="0" bIns="0" anchor="t">
+            <a:noAutofit/>
+          </a:bodyPr>
+          <a:lstStyle xmlns:a="http://schemas.openxmlformats.org/drawingml/2006/main"/>
+          <a:p xmlns:a="http://schemas.openxmlformats.org/drawingml/2006/main">
+            <a:pPr algn="l">
+              <a:defRPr sz="1500" b="0">
+                <a:solidFill>
+                  <a:srgbClr val="0A1224"/>
                 </a:solidFill>
                 <a:latin typeface="Consolas"/>
                 <a:ea typeface="Consolas"/>
@@ -3582,29 +4164,220 @@
               </a:defRPr>
             </a:pPr>
             <a:r>
-              <a:t>v0.2.2</a:t>
-            </a:r>
-          </a:p>
-        </p:txBody>
-      </p:sp>
-      <p:sp>
-        <p:nvSpPr>
-          <p:cNvPr id="14" name="s11-v022-k">
-            <a:extLst xmlns:a="http://schemas.openxmlformats.org/drawingml/2006/main">
-              <a:ext uri="{FF2B5EF4-FFF2-40B4-BE49-F238E27FC236}">
-                <a16:creationId xmlns:a16="http://schemas.microsoft.com/office/drawing/2014/main" id="{F35E3C31-57B3-4B54-8905-4E1D63135910}"/>
-              </a:ext>
-            </a:extLst>
-          </p:cNvPr>
-          <p:cNvSpPr>
-            <a:spLocks xmlns:a="http://schemas.openxmlformats.org/drawingml/2006/main" noGrp="1"/>
-          </p:cNvSpPr>
-          <p:nvPr/>
-        </p:nvSpPr>
-        <p:spPr>
-          <a:xfrm xmlns:a="http://schemas.openxmlformats.org/drawingml/2006/main">
-            <a:off x="4781550" y="2628900"/>
-            <a:ext cx="2628900" cy="209550"/>
+              <a:t>51  Core
+ 2  CLI
+ 2  MCP</a:t>
+            </a:r>
+          </a:p>
+        </p:txBody>
+      </p:sp>
+      <p:sp>
+        <p:nvSpPr>
+          <p:cNvPr id="9" name="s10-test-d1">
+            <a:extLst xmlns:a="http://schemas.openxmlformats.org/drawingml/2006/main">
+              <a:ext uri="{FF2B5EF4-FFF2-40B4-BE49-F238E27FC236}">
+                <a16:creationId xmlns:a16="http://schemas.microsoft.com/office/drawing/2014/main" id="{E264709C-9A71-48E4-91C8-BC333D65814B}"/>
+              </a:ext>
+            </a:extLst>
+          </p:cNvPr>
+          <p:cNvSpPr>
+            <a:spLocks xmlns:a="http://schemas.openxmlformats.org/drawingml/2006/main" noGrp="1"/>
+          </p:cNvSpPr>
+          <p:nvPr/>
+        </p:nvSpPr>
+        <p:spPr>
+          <a:xfrm xmlns:a="http://schemas.openxmlformats.org/drawingml/2006/main">
+            <a:off x="2152650" y="3705225"/>
+            <a:ext cx="95250" cy="95250"/>
+          </a:xfrm>
+          <a:prstGeom xmlns:a="http://schemas.openxmlformats.org/drawingml/2006/main" prst="ellipse">
+            <a:avLst/>
+          </a:prstGeom>
+          <a:solidFill xmlns:a="http://schemas.openxmlformats.org/drawingml/2006/main">
+            <a:srgbClr val="15A777"/>
+          </a:solidFill>
+          <a:ln xmlns:a="http://schemas.openxmlformats.org/drawingml/2006/main" w="0">
+            <a:solidFill>
+              <a:srgbClr val="15A777"/>
+            </a:solidFill>
+            <a:prstDash val="solid"/>
+          </a:ln>
+        </p:spPr>
+      </p:sp>
+      <p:sp>
+        <p:nvSpPr>
+          <p:cNvPr id="10" name="s10-test-d2">
+            <a:extLst xmlns:a="http://schemas.openxmlformats.org/drawingml/2006/main">
+              <a:ext uri="{FF2B5EF4-FFF2-40B4-BE49-F238E27FC236}">
+                <a16:creationId xmlns:a16="http://schemas.microsoft.com/office/drawing/2014/main" id="{1C7D8972-A350-452D-86C2-21A33172161B}"/>
+              </a:ext>
+            </a:extLst>
+          </p:cNvPr>
+          <p:cNvSpPr>
+            <a:spLocks xmlns:a="http://schemas.openxmlformats.org/drawingml/2006/main" noGrp="1"/>
+          </p:cNvSpPr>
+          <p:nvPr/>
+        </p:nvSpPr>
+        <p:spPr>
+          <a:xfrm xmlns:a="http://schemas.openxmlformats.org/drawingml/2006/main">
+            <a:off x="2152650" y="4067175"/>
+            <a:ext cx="95250" cy="95250"/>
+          </a:xfrm>
+          <a:prstGeom xmlns:a="http://schemas.openxmlformats.org/drawingml/2006/main" prst="ellipse">
+            <a:avLst/>
+          </a:prstGeom>
+          <a:solidFill xmlns:a="http://schemas.openxmlformats.org/drawingml/2006/main">
+            <a:srgbClr val="15A777"/>
+          </a:solidFill>
+          <a:ln xmlns:a="http://schemas.openxmlformats.org/drawingml/2006/main" w="0">
+            <a:solidFill>
+              <a:srgbClr val="15A777"/>
+            </a:solidFill>
+            <a:prstDash val="solid"/>
+          </a:ln>
+        </p:spPr>
+      </p:sp>
+      <p:sp>
+        <p:nvSpPr>
+          <p:cNvPr id="11" name="s10-test-d3">
+            <a:extLst xmlns:a="http://schemas.openxmlformats.org/drawingml/2006/main">
+              <a:ext uri="{FF2B5EF4-FFF2-40B4-BE49-F238E27FC236}">
+                <a16:creationId xmlns:a16="http://schemas.microsoft.com/office/drawing/2014/main" id="{F76AEB62-512A-4274-B7CA-986950780A95}"/>
+              </a:ext>
+            </a:extLst>
+          </p:cNvPr>
+          <p:cNvSpPr>
+            <a:spLocks xmlns:a="http://schemas.openxmlformats.org/drawingml/2006/main" noGrp="1"/>
+          </p:cNvSpPr>
+          <p:nvPr/>
+        </p:nvSpPr>
+        <p:spPr>
+          <a:xfrm xmlns:a="http://schemas.openxmlformats.org/drawingml/2006/main">
+            <a:off x="2152650" y="4429125"/>
+            <a:ext cx="95250" cy="95250"/>
+          </a:xfrm>
+          <a:prstGeom xmlns:a="http://schemas.openxmlformats.org/drawingml/2006/main" prst="ellipse">
+            <a:avLst/>
+          </a:prstGeom>
+          <a:solidFill xmlns:a="http://schemas.openxmlformats.org/drawingml/2006/main">
+            <a:srgbClr val="15A777"/>
+          </a:solidFill>
+          <a:ln xmlns:a="http://schemas.openxmlformats.org/drawingml/2006/main" w="0">
+            <a:solidFill>
+              <a:srgbClr val="15A777"/>
+            </a:solidFill>
+            <a:prstDash val="solid"/>
+          </a:ln>
+        </p:spPr>
+      </p:sp>
+      <p:sp>
+        <p:nvSpPr>
+          <p:cNvPr id="12" name="s10-test-g1">
+            <a:extLst xmlns:a="http://schemas.openxmlformats.org/drawingml/2006/main">
+              <a:ext uri="{FF2B5EF4-FFF2-40B4-BE49-F238E27FC236}">
+                <a16:creationId xmlns:a16="http://schemas.microsoft.com/office/drawing/2014/main" id="{9B81072B-29A9-4D1F-848D-4C121ECB3CCF}"/>
+              </a:ext>
+            </a:extLst>
+          </p:cNvPr>
+          <p:cNvSpPr>
+            <a:spLocks xmlns:a="http://schemas.openxmlformats.org/drawingml/2006/main" noGrp="1"/>
+          </p:cNvSpPr>
+          <p:nvPr/>
+        </p:nvSpPr>
+        <p:spPr>
+          <a:xfrm xmlns:a="http://schemas.openxmlformats.org/drawingml/2006/main">
+            <a:off x="2343150" y="3648075"/>
+            <a:ext cx="1238250" cy="247650"/>
+          </a:xfrm>
+          <a:prstGeom xmlns:a="http://schemas.openxmlformats.org/drawingml/2006/main" prst="rect">
+            <a:avLst/>
+          </a:prstGeom>
+        </p:spPr>
+        <p:txBody>
+          <a:bodyPr xmlns:a="http://schemas.openxmlformats.org/drawingml/2006/main" wrap="square" lIns="0" tIns="0" rIns="0" bIns="0" anchor="t">
+            <a:noAutofit/>
+          </a:bodyPr>
+          <a:lstStyle xmlns:a="http://schemas.openxmlformats.org/drawingml/2006/main"/>
+          <a:p xmlns:a="http://schemas.openxmlformats.org/drawingml/2006/main">
+            <a:pPr algn="l">
+              <a:defRPr sz="1200" b="1">
+                <a:solidFill>
+                  <a:srgbClr val="15A777"/>
+                </a:solidFill>
+                <a:latin typeface="Consolas"/>
+                <a:ea typeface="Consolas"/>
+                <a:cs typeface="Consolas"/>
+              </a:defRPr>
+            </a:pPr>
+            <a:r>
+              <a:t>Build</a:t>
+            </a:r>
+          </a:p>
+        </p:txBody>
+      </p:sp>
+      <p:sp>
+        <p:nvSpPr>
+          <p:cNvPr id="13" name="s10-test-g2">
+            <a:extLst xmlns:a="http://schemas.openxmlformats.org/drawingml/2006/main">
+              <a:ext uri="{FF2B5EF4-FFF2-40B4-BE49-F238E27FC236}">
+                <a16:creationId xmlns:a16="http://schemas.microsoft.com/office/drawing/2014/main" id="{E90638CF-BD48-4DB8-B126-C1AB1E1AFB62}"/>
+              </a:ext>
+            </a:extLst>
+          </p:cNvPr>
+          <p:cNvSpPr>
+            <a:spLocks xmlns:a="http://schemas.openxmlformats.org/drawingml/2006/main" noGrp="1"/>
+          </p:cNvSpPr>
+          <p:nvPr/>
+        </p:nvSpPr>
+        <p:spPr>
+          <a:xfrm xmlns:a="http://schemas.openxmlformats.org/drawingml/2006/main">
+            <a:off x="2343150" y="4010025"/>
+            <a:ext cx="1238250" cy="247650"/>
+          </a:xfrm>
+          <a:prstGeom xmlns:a="http://schemas.openxmlformats.org/drawingml/2006/main" prst="rect">
+            <a:avLst/>
+          </a:prstGeom>
+        </p:spPr>
+        <p:txBody>
+          <a:bodyPr xmlns:a="http://schemas.openxmlformats.org/drawingml/2006/main" wrap="square" lIns="0" tIns="0" rIns="0" bIns="0" anchor="t">
+            <a:noAutofit/>
+          </a:bodyPr>
+          <a:lstStyle xmlns:a="http://schemas.openxmlformats.org/drawingml/2006/main"/>
+          <a:p xmlns:a="http://schemas.openxmlformats.org/drawingml/2006/main">
+            <a:pPr algn="l">
+              <a:defRPr sz="1200" b="1">
+                <a:solidFill>
+                  <a:srgbClr val="15A777"/>
+                </a:solidFill>
+                <a:latin typeface="Consolas"/>
+                <a:ea typeface="Consolas"/>
+                <a:cs typeface="Consolas"/>
+              </a:defRPr>
+            </a:pPr>
+            <a:r>
+              <a:t>TS lint</a:t>
+            </a:r>
+          </a:p>
+        </p:txBody>
+      </p:sp>
+      <p:sp>
+        <p:nvSpPr>
+          <p:cNvPr id="14" name="s10-test-g3">
+            <a:extLst xmlns:a="http://schemas.openxmlformats.org/drawingml/2006/main">
+              <a:ext uri="{FF2B5EF4-FFF2-40B4-BE49-F238E27FC236}">
+                <a16:creationId xmlns:a16="http://schemas.microsoft.com/office/drawing/2014/main" id="{0F5083F7-75C3-43B9-B8DF-2DB27217A3C5}"/>
+              </a:ext>
+            </a:extLst>
+          </p:cNvPr>
+          <p:cNvSpPr>
+            <a:spLocks xmlns:a="http://schemas.openxmlformats.org/drawingml/2006/main" noGrp="1"/>
+          </p:cNvSpPr>
+          <p:nvPr/>
+        </p:nvSpPr>
+        <p:spPr>
+          <a:xfrm xmlns:a="http://schemas.openxmlformats.org/drawingml/2006/main">
+            <a:off x="2343150" y="4371975"/>
+            <a:ext cx="1409700" cy="247650"/>
           </a:xfrm>
           <a:prstGeom xmlns:a="http://schemas.openxmlformats.org/drawingml/2006/main" prst="rect">
             <a:avLst/>
@@ -3619,50 +4392,50 @@
             <a:pPr algn="l">
               <a:defRPr sz="1050" b="1">
                 <a:solidFill>
-                  <a:srgbClr val="1677FF"/>
-                </a:solidFill>
-                <a:latin typeface="Arial"/>
-                <a:ea typeface="Arial"/>
-                <a:cs typeface="Arial"/>
-              </a:defRPr>
-            </a:pPr>
-            <a:r>
-              <a:t>FIXED</a:t>
-            </a:r>
-          </a:p>
-        </p:txBody>
-      </p:sp>
-      <p:sp>
-        <p:nvSpPr>
-          <p:cNvPr id="15" name="s11-v022-v">
-            <a:extLst xmlns:a="http://schemas.openxmlformats.org/drawingml/2006/main">
-              <a:ext uri="{FF2B5EF4-FFF2-40B4-BE49-F238E27FC236}">
-                <a16:creationId xmlns:a16="http://schemas.microsoft.com/office/drawing/2014/main" id="{BD82605D-846B-4A34-95F3-0B0656643AC4}"/>
-              </a:ext>
-            </a:extLst>
-          </p:cNvPr>
-          <p:cNvSpPr>
-            <a:spLocks xmlns:a="http://schemas.openxmlformats.org/drawingml/2006/main" noGrp="1"/>
-          </p:cNvSpPr>
-          <p:nvPr/>
-        </p:nvSpPr>
-        <p:spPr>
-          <a:xfrm xmlns:a="http://schemas.openxmlformats.org/drawingml/2006/main">
-            <a:off x="4781550" y="2990850"/>
-            <a:ext cx="2628900" cy="1123950"/>
-          </a:xfrm>
-          <a:prstGeom xmlns:a="http://schemas.openxmlformats.org/drawingml/2006/main" prst="rect">
-            <a:avLst/>
-          </a:prstGeom>
-        </p:spPr>
-        <p:txBody>
-          <a:bodyPr xmlns:a="http://schemas.openxmlformats.org/drawingml/2006/main" wrap="square" lIns="0" tIns="0" rIns="0" bIns="0" anchor="t">
-            <a:noAutofit/>
-          </a:bodyPr>
-          <a:lstStyle xmlns:a="http://schemas.openxmlformats.org/drawingml/2006/main"/>
-          <a:p xmlns:a="http://schemas.openxmlformats.org/drawingml/2006/main">
-            <a:pPr algn="l">
-              <a:defRPr sz="1500" b="0">
+                  <a:srgbClr val="15A777"/>
+                </a:solidFill>
+                <a:latin typeface="Consolas"/>
+                <a:ea typeface="Consolas"/>
+                <a:cs typeface="Consolas"/>
+              </a:defRPr>
+            </a:pPr>
+            <a:r>
+              <a:t>MCP smoke: 10 tools</a:t>
+            </a:r>
+          </a:p>
+        </p:txBody>
+      </p:sp>
+      <p:sp>
+        <p:nvSpPr>
+          <p:cNvPr id="15" name="s10-tests-foot">
+            <a:extLst xmlns:a="http://schemas.openxmlformats.org/drawingml/2006/main">
+              <a:ext uri="{FF2B5EF4-FFF2-40B4-BE49-F238E27FC236}">
+                <a16:creationId xmlns:a16="http://schemas.microsoft.com/office/drawing/2014/main" id="{7814B0AD-03E7-45B8-85E9-C82C93012FFF}"/>
+              </a:ext>
+            </a:extLst>
+          </p:cNvPr>
+          <p:cNvSpPr>
+            <a:spLocks xmlns:a="http://schemas.openxmlformats.org/drawingml/2006/main" noGrp="1"/>
+          </p:cNvSpPr>
+          <p:nvPr/>
+        </p:nvSpPr>
+        <p:spPr>
+          <a:xfrm xmlns:a="http://schemas.openxmlformats.org/drawingml/2006/main">
+            <a:off x="819150" y="4914900"/>
+            <a:ext cx="2762250" cy="285750"/>
+          </a:xfrm>
+          <a:prstGeom xmlns:a="http://schemas.openxmlformats.org/drawingml/2006/main" prst="rect">
+            <a:avLst/>
+          </a:prstGeom>
+        </p:spPr>
+        <p:txBody>
+          <a:bodyPr xmlns:a="http://schemas.openxmlformats.org/drawingml/2006/main" wrap="square" lIns="0" tIns="0" rIns="0" bIns="0" anchor="t">
+            <a:noAutofit/>
+          </a:bodyPr>
+          <a:lstStyle xmlns:a="http://schemas.openxmlformats.org/drawingml/2006/main"/>
+          <a:p xmlns:a="http://schemas.openxmlformats.org/drawingml/2006/main">
+            <a:pPr algn="l">
+              <a:defRPr sz="1275" b="1">
                 <a:solidFill>
                   <a:srgbClr val="0A1224"/>
                 </a:solidFill>
@@ -3672,78 +4445,615 @@
               </a:defRPr>
             </a:pPr>
             <a:r>
-              <a:t>Full Palace gained scoped-summary memory, JSON delivery, guardrails, and a regression contract.</a:t>
-            </a:r>
-          </a:p>
-        </p:txBody>
-      </p:sp>
-      <p:sp>
-        <p:nvSpPr>
-          <p:cNvPr id="16" name="s11-v022-foot">
-            <a:extLst xmlns:a="http://schemas.openxmlformats.org/drawingml/2006/main">
-              <a:ext uri="{FF2B5EF4-FFF2-40B4-BE49-F238E27FC236}">
-                <a16:creationId xmlns:a16="http://schemas.microsoft.com/office/drawing/2014/main" id="{DCFC150A-DF1E-4592-ABCF-247FCAE80E0F}"/>
-              </a:ext>
-            </a:extLst>
-          </p:cNvPr>
-          <p:cNvSpPr>
-            <a:spLocks xmlns:a="http://schemas.openxmlformats.org/drawingml/2006/main" noGrp="1"/>
-          </p:cNvSpPr>
-          <p:nvPr/>
-        </p:nvSpPr>
-        <p:spPr>
-          <a:xfrm xmlns:a="http://schemas.openxmlformats.org/drawingml/2006/main">
-            <a:off x="4781550" y="4400550"/>
-            <a:ext cx="2628900" cy="400050"/>
-          </a:xfrm>
-          <a:prstGeom xmlns:a="http://schemas.openxmlformats.org/drawingml/2006/main" prst="rect">
-            <a:avLst/>
-          </a:prstGeom>
-        </p:spPr>
-        <p:txBody>
-          <a:bodyPr xmlns:a="http://schemas.openxmlformats.org/drawingml/2006/main" wrap="square" lIns="0" tIns="0" rIns="0" bIns="0" anchor="t">
-            <a:noAutofit/>
-          </a:bodyPr>
-          <a:lstStyle xmlns:a="http://schemas.openxmlformats.org/drawingml/2006/main"/>
-          <a:p xmlns:a="http://schemas.openxmlformats.org/drawingml/2006/main">
-            <a:pPr algn="l">
-              <a:defRPr sz="1275" b="1">
-                <a:solidFill>
-                  <a:srgbClr val="526071"/>
-                </a:solidFill>
-                <a:latin typeface="Arial"/>
-                <a:ea typeface="Arial"/>
-                <a:cs typeface="Arial"/>
-              </a:defRPr>
-            </a:pPr>
-            <a:r>
-              <a:t>Clean + registry fixtures passed</a:t>
-            </a:r>
-          </a:p>
-        </p:txBody>
-      </p:sp>
-      <p:sp>
-        <p:nvSpPr>
-          <p:cNvPr id="17" name="s11-v023">
-            <a:extLst xmlns:a="http://schemas.openxmlformats.org/drawingml/2006/main">
-              <a:ext uri="{FF2B5EF4-FFF2-40B4-BE49-F238E27FC236}">
-                <a16:creationId xmlns:a16="http://schemas.microsoft.com/office/drawing/2014/main" id="{A9CBBCD8-8AAB-420A-995A-652BF2858935}"/>
-              </a:ext>
-            </a:extLst>
-          </p:cNvPr>
-          <p:cNvSpPr>
-            <a:spLocks xmlns:a="http://schemas.openxmlformats.org/drawingml/2006/main" noGrp="1"/>
-          </p:cNvSpPr>
-          <p:nvPr/>
-        </p:nvSpPr>
-        <p:spPr>
-          <a:xfrm xmlns:a="http://schemas.openxmlformats.org/drawingml/2006/main">
-            <a:off x="8477250" y="1885950"/>
-            <a:ext cx="3162300" cy="3028950"/>
+              <a:t>Release-routing matrix passed</a:t>
+            </a:r>
+          </a:p>
+        </p:txBody>
+      </p:sp>
+      <p:sp>
+        <p:nvSpPr>
+          <p:cNvPr id="16" name="s10-ci">
+            <a:extLst xmlns:a="http://schemas.openxmlformats.org/drawingml/2006/main">
+              <a:ext uri="{FF2B5EF4-FFF2-40B4-BE49-F238E27FC236}">
+                <a16:creationId xmlns:a16="http://schemas.microsoft.com/office/drawing/2014/main" id="{8739A1BB-5ACE-48E3-865A-6B88BCDB1D04}"/>
+              </a:ext>
+            </a:extLst>
+          </p:cNvPr>
+          <p:cNvSpPr>
+            <a:spLocks xmlns:a="http://schemas.openxmlformats.org/drawingml/2006/main" noGrp="1"/>
+          </p:cNvSpPr>
+          <p:nvPr/>
+        </p:nvSpPr>
+        <p:spPr>
+          <a:xfrm xmlns:a="http://schemas.openxmlformats.org/drawingml/2006/main">
+            <a:off x="4114800" y="1695450"/>
+            <a:ext cx="3543300" cy="3771900"/>
           </a:xfrm>
           <a:prstGeom xmlns:a="http://schemas.openxmlformats.org/drawingml/2006/main" prst="roundRect">
             <a:avLst>
-              <a:gd name="adj" fmla="val 2516"/>
+              <a:gd name="adj" fmla="val 2151"/>
+            </a:avLst>
+          </a:prstGeom>
+          <a:solidFill xmlns:a="http://schemas.openxmlformats.org/drawingml/2006/main">
+            <a:srgbClr val="EDEFF3"/>
+          </a:solidFill>
+          <a:ln xmlns:a="http://schemas.openxmlformats.org/drawingml/2006/main" w="0">
+            <a:solidFill>
+              <a:srgbClr val="EDEFF3"/>
+            </a:solidFill>
+            <a:prstDash val="solid"/>
+          </a:ln>
+        </p:spPr>
+      </p:sp>
+      <p:sp>
+        <p:nvSpPr>
+          <p:cNvPr id="17" name="s10-ci-k">
+            <a:extLst xmlns:a="http://schemas.openxmlformats.org/drawingml/2006/main">
+              <a:ext uri="{FF2B5EF4-FFF2-40B4-BE49-F238E27FC236}">
+                <a16:creationId xmlns:a16="http://schemas.microsoft.com/office/drawing/2014/main" id="{C76B521E-F4D1-485E-A6FE-D916ED100E56}"/>
+              </a:ext>
+            </a:extLst>
+          </p:cNvPr>
+          <p:cNvSpPr>
+            <a:spLocks xmlns:a="http://schemas.openxmlformats.org/drawingml/2006/main" noGrp="1"/>
+          </p:cNvSpPr>
+          <p:nvPr/>
+        </p:nvSpPr>
+        <p:spPr>
+          <a:xfrm xmlns:a="http://schemas.openxmlformats.org/drawingml/2006/main">
+            <a:off x="4381500" y="1981200"/>
+            <a:ext cx="3009900" cy="228600"/>
+          </a:xfrm>
+          <a:prstGeom xmlns:a="http://schemas.openxmlformats.org/drawingml/2006/main" prst="rect">
+            <a:avLst/>
+          </a:prstGeom>
+        </p:spPr>
+        <p:txBody>
+          <a:bodyPr xmlns:a="http://schemas.openxmlformats.org/drawingml/2006/main" wrap="square" lIns="0" tIns="0" rIns="0" bIns="0" anchor="t">
+            <a:noAutofit/>
+          </a:bodyPr>
+          <a:lstStyle xmlns:a="http://schemas.openxmlformats.org/drawingml/2006/main"/>
+          <a:p xmlns:a="http://schemas.openxmlformats.org/drawingml/2006/main">
+            <a:pPr algn="l">
+              <a:defRPr sz="1125" b="1">
+                <a:solidFill>
+                  <a:srgbClr val="526071"/>
+                </a:solidFill>
+                <a:latin typeface="Arial"/>
+                <a:ea typeface="Arial"/>
+                <a:cs typeface="Arial"/>
+              </a:defRPr>
+            </a:pPr>
+            <a:r>
+              <a:t>GITHUB ACTIONS</a:t>
+            </a:r>
+          </a:p>
+        </p:txBody>
+      </p:sp>
+      <p:sp>
+        <p:nvSpPr>
+          <p:cNvPr id="18" name="s10-ci-stat">
+            <a:extLst xmlns:a="http://schemas.openxmlformats.org/drawingml/2006/main">
+              <a:ext uri="{FF2B5EF4-FFF2-40B4-BE49-F238E27FC236}">
+                <a16:creationId xmlns:a16="http://schemas.microsoft.com/office/drawing/2014/main" id="{634DA6D8-DCB5-4808-8ED3-79E075881CD6}"/>
+              </a:ext>
+            </a:extLst>
+          </p:cNvPr>
+          <p:cNvSpPr>
+            <a:spLocks xmlns:a="http://schemas.openxmlformats.org/drawingml/2006/main" noGrp="1"/>
+          </p:cNvSpPr>
+          <p:nvPr/>
+        </p:nvSpPr>
+        <p:spPr>
+          <a:xfrm xmlns:a="http://schemas.openxmlformats.org/drawingml/2006/main">
+            <a:off x="4381500" y="2324100"/>
+            <a:ext cx="1714500" cy="685800"/>
+          </a:xfrm>
+          <a:prstGeom xmlns:a="http://schemas.openxmlformats.org/drawingml/2006/main" prst="rect">
+            <a:avLst/>
+          </a:prstGeom>
+        </p:spPr>
+        <p:txBody>
+          <a:bodyPr xmlns:a="http://schemas.openxmlformats.org/drawingml/2006/main" wrap="square" lIns="0" tIns="0" rIns="0" bIns="0" anchor="t">
+            <a:noAutofit/>
+          </a:bodyPr>
+          <a:lstStyle xmlns:a="http://schemas.openxmlformats.org/drawingml/2006/main"/>
+          <a:p xmlns:a="http://schemas.openxmlformats.org/drawingml/2006/main">
+            <a:pPr algn="l">
+              <a:defRPr sz="4200" b="1">
+                <a:solidFill>
+                  <a:srgbClr val="15A777"/>
+                </a:solidFill>
+                <a:latin typeface="Arial"/>
+                <a:ea typeface="Arial"/>
+                <a:cs typeface="Arial"/>
+              </a:defRPr>
+            </a:pPr>
+            <a:r>
+              <a:t>5/5</a:t>
+            </a:r>
+          </a:p>
+        </p:txBody>
+      </p:sp>
+      <p:sp>
+        <p:nvSpPr>
+          <p:cNvPr id="19" name="s10-ci-label">
+            <a:extLst xmlns:a="http://schemas.openxmlformats.org/drawingml/2006/main">
+              <a:ext uri="{FF2B5EF4-FFF2-40B4-BE49-F238E27FC236}">
+                <a16:creationId xmlns:a16="http://schemas.microsoft.com/office/drawing/2014/main" id="{E17B4D3D-1BAD-4578-AB82-015EA4B1C930}"/>
+              </a:ext>
+            </a:extLst>
+          </p:cNvPr>
+          <p:cNvSpPr>
+            <a:spLocks xmlns:a="http://schemas.openxmlformats.org/drawingml/2006/main" noGrp="1"/>
+          </p:cNvSpPr>
+          <p:nvPr/>
+        </p:nvSpPr>
+        <p:spPr>
+          <a:xfrm xmlns:a="http://schemas.openxmlformats.org/drawingml/2006/main">
+            <a:off x="4381500" y="2990850"/>
+            <a:ext cx="2476500" cy="285750"/>
+          </a:xfrm>
+          <a:prstGeom xmlns:a="http://schemas.openxmlformats.org/drawingml/2006/main" prst="rect">
+            <a:avLst/>
+          </a:prstGeom>
+        </p:spPr>
+        <p:txBody>
+          <a:bodyPr xmlns:a="http://schemas.openxmlformats.org/drawingml/2006/main" wrap="square" lIns="0" tIns="0" rIns="0" bIns="0" anchor="t">
+            <a:noAutofit/>
+          </a:bodyPr>
+          <a:lstStyle xmlns:a="http://schemas.openxmlformats.org/drawingml/2006/main"/>
+          <a:p xmlns:a="http://schemas.openxmlformats.org/drawingml/2006/main">
+            <a:pPr algn="l">
+              <a:defRPr sz="1575" b="1">
+                <a:solidFill>
+                  <a:srgbClr val="0A1224"/>
+                </a:solidFill>
+                <a:latin typeface="Arial"/>
+                <a:ea typeface="Arial"/>
+                <a:cs typeface="Arial"/>
+              </a:defRPr>
+            </a:pPr>
+            <a:r>
+              <a:t>jobs passed</a:t>
+            </a:r>
+          </a:p>
+        </p:txBody>
+      </p:sp>
+      <p:cxnSp>
+        <p:nvCxnSpPr>
+          <p:cNvPr id="58" name="s10-ci-rule"/>
+          <p:cNvCxnSpPr/>
+          <p:nvPr/>
+        </p:nvCxnSpPr>
+        <p:spPr>
+          <a:xfrm xmlns:a="http://schemas.openxmlformats.org/drawingml/2006/main">
+            <a:off x="4381500" y="3429000"/>
+            <a:ext cx="3009900" cy="953"/>
+          </a:xfrm>
+          <a:prstGeom xmlns:a="http://schemas.openxmlformats.org/drawingml/2006/main" prst="straightConnector1">
+            <a:avLst/>
+          </a:prstGeom>
+          <a:ln xmlns:a="http://schemas.openxmlformats.org/drawingml/2006/main" w="9525">
+            <a:solidFill>
+              <a:srgbClr val="B8BCC4"/>
+            </a:solidFill>
+            <a:prstDash val="solid"/>
+          </a:ln>
+        </p:spPr>
+      </p:cxnSp>
+      <p:sp>
+        <p:nvSpPr>
+          <p:cNvPr id="21" name="s10-ci-d1">
+            <a:extLst xmlns:a="http://schemas.openxmlformats.org/drawingml/2006/main">
+              <a:ext uri="{FF2B5EF4-FFF2-40B4-BE49-F238E27FC236}">
+                <a16:creationId xmlns:a16="http://schemas.microsoft.com/office/drawing/2014/main" id="{75774EDD-4A52-40EB-952F-4C589BB184FC}"/>
+              </a:ext>
+            </a:extLst>
+          </p:cNvPr>
+          <p:cNvSpPr>
+            <a:spLocks xmlns:a="http://schemas.openxmlformats.org/drawingml/2006/main" noGrp="1"/>
+          </p:cNvSpPr>
+          <p:nvPr/>
+        </p:nvSpPr>
+        <p:spPr>
+          <a:xfrm xmlns:a="http://schemas.openxmlformats.org/drawingml/2006/main">
+            <a:off x="4400550" y="3714750"/>
+            <a:ext cx="114300" cy="114300"/>
+          </a:xfrm>
+          <a:prstGeom xmlns:a="http://schemas.openxmlformats.org/drawingml/2006/main" prst="ellipse">
+            <a:avLst/>
+          </a:prstGeom>
+          <a:solidFill xmlns:a="http://schemas.openxmlformats.org/drawingml/2006/main">
+            <a:srgbClr val="15A777"/>
+          </a:solidFill>
+          <a:ln xmlns:a="http://schemas.openxmlformats.org/drawingml/2006/main" w="0">
+            <a:solidFill>
+              <a:srgbClr val="15A777"/>
+            </a:solidFill>
+            <a:prstDash val="solid"/>
+          </a:ln>
+        </p:spPr>
+      </p:sp>
+      <p:sp>
+        <p:nvSpPr>
+          <p:cNvPr id="22" name="s10-ci-d2">
+            <a:extLst xmlns:a="http://schemas.openxmlformats.org/drawingml/2006/main">
+              <a:ext uri="{FF2B5EF4-FFF2-40B4-BE49-F238E27FC236}">
+                <a16:creationId xmlns:a16="http://schemas.microsoft.com/office/drawing/2014/main" id="{E14AA9E3-2538-439B-A8D0-B0278B8B8413}"/>
+              </a:ext>
+            </a:extLst>
+          </p:cNvPr>
+          <p:cNvSpPr>
+            <a:spLocks xmlns:a="http://schemas.openxmlformats.org/drawingml/2006/main" noGrp="1"/>
+          </p:cNvSpPr>
+          <p:nvPr/>
+        </p:nvSpPr>
+        <p:spPr>
+          <a:xfrm xmlns:a="http://schemas.openxmlformats.org/drawingml/2006/main">
+            <a:off x="4400550" y="4057650"/>
+            <a:ext cx="114300" cy="114300"/>
+          </a:xfrm>
+          <a:prstGeom xmlns:a="http://schemas.openxmlformats.org/drawingml/2006/main" prst="ellipse">
+            <a:avLst/>
+          </a:prstGeom>
+          <a:solidFill xmlns:a="http://schemas.openxmlformats.org/drawingml/2006/main">
+            <a:srgbClr val="15A777"/>
+          </a:solidFill>
+          <a:ln xmlns:a="http://schemas.openxmlformats.org/drawingml/2006/main" w="0">
+            <a:solidFill>
+              <a:srgbClr val="15A777"/>
+            </a:solidFill>
+            <a:prstDash val="solid"/>
+          </a:ln>
+        </p:spPr>
+      </p:sp>
+      <p:sp>
+        <p:nvSpPr>
+          <p:cNvPr id="23" name="s10-ci-d3">
+            <a:extLst xmlns:a="http://schemas.openxmlformats.org/drawingml/2006/main">
+              <a:ext uri="{FF2B5EF4-FFF2-40B4-BE49-F238E27FC236}">
+                <a16:creationId xmlns:a16="http://schemas.microsoft.com/office/drawing/2014/main" id="{AF9A3A30-51B0-4627-BBD7-AF3A617D378E}"/>
+              </a:ext>
+            </a:extLst>
+          </p:cNvPr>
+          <p:cNvSpPr>
+            <a:spLocks xmlns:a="http://schemas.openxmlformats.org/drawingml/2006/main" noGrp="1"/>
+          </p:cNvSpPr>
+          <p:nvPr/>
+        </p:nvSpPr>
+        <p:spPr>
+          <a:xfrm xmlns:a="http://schemas.openxmlformats.org/drawingml/2006/main">
+            <a:off x="4400550" y="4400550"/>
+            <a:ext cx="114300" cy="114300"/>
+          </a:xfrm>
+          <a:prstGeom xmlns:a="http://schemas.openxmlformats.org/drawingml/2006/main" prst="ellipse">
+            <a:avLst/>
+          </a:prstGeom>
+          <a:solidFill xmlns:a="http://schemas.openxmlformats.org/drawingml/2006/main">
+            <a:srgbClr val="15A777"/>
+          </a:solidFill>
+          <a:ln xmlns:a="http://schemas.openxmlformats.org/drawingml/2006/main" w="0">
+            <a:solidFill>
+              <a:srgbClr val="15A777"/>
+            </a:solidFill>
+            <a:prstDash val="solid"/>
+          </a:ln>
+        </p:spPr>
+      </p:sp>
+      <p:sp>
+        <p:nvSpPr>
+          <p:cNvPr id="24" name="s10-ci-d4">
+            <a:extLst xmlns:a="http://schemas.openxmlformats.org/drawingml/2006/main">
+              <a:ext uri="{FF2B5EF4-FFF2-40B4-BE49-F238E27FC236}">
+                <a16:creationId xmlns:a16="http://schemas.microsoft.com/office/drawing/2014/main" id="{7DA83AFE-CD12-4FBA-A0B9-EA2576267CF9}"/>
+              </a:ext>
+            </a:extLst>
+          </p:cNvPr>
+          <p:cNvSpPr>
+            <a:spLocks xmlns:a="http://schemas.openxmlformats.org/drawingml/2006/main" noGrp="1"/>
+          </p:cNvSpPr>
+          <p:nvPr/>
+        </p:nvSpPr>
+        <p:spPr>
+          <a:xfrm xmlns:a="http://schemas.openxmlformats.org/drawingml/2006/main">
+            <a:off x="4400550" y="4743450"/>
+            <a:ext cx="114300" cy="114300"/>
+          </a:xfrm>
+          <a:prstGeom xmlns:a="http://schemas.openxmlformats.org/drawingml/2006/main" prst="ellipse">
+            <a:avLst/>
+          </a:prstGeom>
+          <a:solidFill xmlns:a="http://schemas.openxmlformats.org/drawingml/2006/main">
+            <a:srgbClr val="15A777"/>
+          </a:solidFill>
+          <a:ln xmlns:a="http://schemas.openxmlformats.org/drawingml/2006/main" w="0">
+            <a:solidFill>
+              <a:srgbClr val="15A777"/>
+            </a:solidFill>
+            <a:prstDash val="solid"/>
+          </a:ln>
+        </p:spPr>
+      </p:sp>
+      <p:sp>
+        <p:nvSpPr>
+          <p:cNvPr id="25" name="s10-ci-d5">
+            <a:extLst xmlns:a="http://schemas.openxmlformats.org/drawingml/2006/main">
+              <a:ext uri="{FF2B5EF4-FFF2-40B4-BE49-F238E27FC236}">
+                <a16:creationId xmlns:a16="http://schemas.microsoft.com/office/drawing/2014/main" id="{35EE5F96-3334-448B-A0EA-156E13DB0377}"/>
+              </a:ext>
+            </a:extLst>
+          </p:cNvPr>
+          <p:cNvSpPr>
+            <a:spLocks xmlns:a="http://schemas.openxmlformats.org/drawingml/2006/main" noGrp="1"/>
+          </p:cNvSpPr>
+          <p:nvPr/>
+        </p:nvSpPr>
+        <p:spPr>
+          <a:xfrm xmlns:a="http://schemas.openxmlformats.org/drawingml/2006/main">
+            <a:off x="4400550" y="5086350"/>
+            <a:ext cx="114300" cy="114300"/>
+          </a:xfrm>
+          <a:prstGeom xmlns:a="http://schemas.openxmlformats.org/drawingml/2006/main" prst="ellipse">
+            <a:avLst/>
+          </a:prstGeom>
+          <a:solidFill xmlns:a="http://schemas.openxmlformats.org/drawingml/2006/main">
+            <a:srgbClr val="15A777"/>
+          </a:solidFill>
+          <a:ln xmlns:a="http://schemas.openxmlformats.org/drawingml/2006/main" w="0">
+            <a:solidFill>
+              <a:srgbClr val="15A777"/>
+            </a:solidFill>
+            <a:prstDash val="solid"/>
+          </a:ln>
+        </p:spPr>
+      </p:sp>
+      <p:sp>
+        <p:nvSpPr>
+          <p:cNvPr id="26" name="s10-ci-r1">
+            <a:extLst xmlns:a="http://schemas.openxmlformats.org/drawingml/2006/main">
+              <a:ext uri="{FF2B5EF4-FFF2-40B4-BE49-F238E27FC236}">
+                <a16:creationId xmlns:a16="http://schemas.microsoft.com/office/drawing/2014/main" id="{2F2375E3-29DC-4720-968F-C3DB17248BBA}"/>
+              </a:ext>
+            </a:extLst>
+          </p:cNvPr>
+          <p:cNvSpPr>
+            <a:spLocks xmlns:a="http://schemas.openxmlformats.org/drawingml/2006/main" noGrp="1"/>
+          </p:cNvSpPr>
+          <p:nvPr/>
+        </p:nvSpPr>
+        <p:spPr>
+          <a:xfrm xmlns:a="http://schemas.openxmlformats.org/drawingml/2006/main">
+            <a:off x="4629150" y="3648075"/>
+            <a:ext cx="2724150" cy="266700"/>
+          </a:xfrm>
+          <a:prstGeom xmlns:a="http://schemas.openxmlformats.org/drawingml/2006/main" prst="rect">
+            <a:avLst/>
+          </a:prstGeom>
+        </p:spPr>
+        <p:txBody>
+          <a:bodyPr xmlns:a="http://schemas.openxmlformats.org/drawingml/2006/main" wrap="square" lIns="0" tIns="0" rIns="0" bIns="0" anchor="t">
+            <a:noAutofit/>
+          </a:bodyPr>
+          <a:lstStyle xmlns:a="http://schemas.openxmlformats.org/drawingml/2006/main"/>
+          <a:p xmlns:a="http://schemas.openxmlformats.org/drawingml/2006/main">
+            <a:pPr algn="l">
+              <a:defRPr sz="1275" b="0">
+                <a:solidFill>
+                  <a:srgbClr val="0A1224"/>
+                </a:solidFill>
+                <a:latin typeface="Consolas"/>
+                <a:ea typeface="Consolas"/>
+                <a:cs typeface="Consolas"/>
+              </a:defRPr>
+            </a:pPr>
+            <a:r>
+              <a:t>Ubuntu / Node 20</a:t>
+            </a:r>
+          </a:p>
+        </p:txBody>
+      </p:sp>
+      <p:sp>
+        <p:nvSpPr>
+          <p:cNvPr id="27" name="s10-ci-r2">
+            <a:extLst xmlns:a="http://schemas.openxmlformats.org/drawingml/2006/main">
+              <a:ext uri="{FF2B5EF4-FFF2-40B4-BE49-F238E27FC236}">
+                <a16:creationId xmlns:a16="http://schemas.microsoft.com/office/drawing/2014/main" id="{64FCF775-F8CF-4633-9438-E6AD868B5525}"/>
+              </a:ext>
+            </a:extLst>
+          </p:cNvPr>
+          <p:cNvSpPr>
+            <a:spLocks xmlns:a="http://schemas.openxmlformats.org/drawingml/2006/main" noGrp="1"/>
+          </p:cNvSpPr>
+          <p:nvPr/>
+        </p:nvSpPr>
+        <p:spPr>
+          <a:xfrm xmlns:a="http://schemas.openxmlformats.org/drawingml/2006/main">
+            <a:off x="4629150" y="3990975"/>
+            <a:ext cx="2724150" cy="266700"/>
+          </a:xfrm>
+          <a:prstGeom xmlns:a="http://schemas.openxmlformats.org/drawingml/2006/main" prst="rect">
+            <a:avLst/>
+          </a:prstGeom>
+        </p:spPr>
+        <p:txBody>
+          <a:bodyPr xmlns:a="http://schemas.openxmlformats.org/drawingml/2006/main" wrap="square" lIns="0" tIns="0" rIns="0" bIns="0" anchor="t">
+            <a:noAutofit/>
+          </a:bodyPr>
+          <a:lstStyle xmlns:a="http://schemas.openxmlformats.org/drawingml/2006/main"/>
+          <a:p xmlns:a="http://schemas.openxmlformats.org/drawingml/2006/main">
+            <a:pPr algn="l">
+              <a:defRPr sz="1275" b="0">
+                <a:solidFill>
+                  <a:srgbClr val="0A1224"/>
+                </a:solidFill>
+                <a:latin typeface="Consolas"/>
+                <a:ea typeface="Consolas"/>
+                <a:cs typeface="Consolas"/>
+              </a:defRPr>
+            </a:pPr>
+            <a:r>
+              <a:t>Windows / Node 20</a:t>
+            </a:r>
+          </a:p>
+        </p:txBody>
+      </p:sp>
+      <p:sp>
+        <p:nvSpPr>
+          <p:cNvPr id="28" name="s10-ci-r3">
+            <a:extLst xmlns:a="http://schemas.openxmlformats.org/drawingml/2006/main">
+              <a:ext uri="{FF2B5EF4-FFF2-40B4-BE49-F238E27FC236}">
+                <a16:creationId xmlns:a16="http://schemas.microsoft.com/office/drawing/2014/main" id="{A047DB39-58AD-4216-9CA2-B87E037B5543}"/>
+              </a:ext>
+            </a:extLst>
+          </p:cNvPr>
+          <p:cNvSpPr>
+            <a:spLocks xmlns:a="http://schemas.openxmlformats.org/drawingml/2006/main" noGrp="1"/>
+          </p:cNvSpPr>
+          <p:nvPr/>
+        </p:nvSpPr>
+        <p:spPr>
+          <a:xfrm xmlns:a="http://schemas.openxmlformats.org/drawingml/2006/main">
+            <a:off x="4629150" y="4333875"/>
+            <a:ext cx="2724150" cy="266700"/>
+          </a:xfrm>
+          <a:prstGeom xmlns:a="http://schemas.openxmlformats.org/drawingml/2006/main" prst="rect">
+            <a:avLst/>
+          </a:prstGeom>
+        </p:spPr>
+        <p:txBody>
+          <a:bodyPr xmlns:a="http://schemas.openxmlformats.org/drawingml/2006/main" wrap="square" lIns="0" tIns="0" rIns="0" bIns="0" anchor="t">
+            <a:noAutofit/>
+          </a:bodyPr>
+          <a:lstStyle xmlns:a="http://schemas.openxmlformats.org/drawingml/2006/main"/>
+          <a:p xmlns:a="http://schemas.openxmlformats.org/drawingml/2006/main">
+            <a:pPr algn="l">
+              <a:defRPr sz="1275" b="0">
+                <a:solidFill>
+                  <a:srgbClr val="0A1224"/>
+                </a:solidFill>
+                <a:latin typeface="Consolas"/>
+                <a:ea typeface="Consolas"/>
+                <a:cs typeface="Consolas"/>
+              </a:defRPr>
+            </a:pPr>
+            <a:r>
+              <a:t>macOS / Node 20</a:t>
+            </a:r>
+          </a:p>
+        </p:txBody>
+      </p:sp>
+      <p:sp>
+        <p:nvSpPr>
+          <p:cNvPr id="29" name="s10-ci-r4">
+            <a:extLst xmlns:a="http://schemas.openxmlformats.org/drawingml/2006/main">
+              <a:ext uri="{FF2B5EF4-FFF2-40B4-BE49-F238E27FC236}">
+                <a16:creationId xmlns:a16="http://schemas.microsoft.com/office/drawing/2014/main" id="{AB204966-0A06-43D8-AEA2-50377407B173}"/>
+              </a:ext>
+            </a:extLst>
+          </p:cNvPr>
+          <p:cNvSpPr>
+            <a:spLocks xmlns:a="http://schemas.openxmlformats.org/drawingml/2006/main" noGrp="1"/>
+          </p:cNvSpPr>
+          <p:nvPr/>
+        </p:nvSpPr>
+        <p:spPr>
+          <a:xfrm xmlns:a="http://schemas.openxmlformats.org/drawingml/2006/main">
+            <a:off x="4629150" y="4676775"/>
+            <a:ext cx="2724150" cy="266700"/>
+          </a:xfrm>
+          <a:prstGeom xmlns:a="http://schemas.openxmlformats.org/drawingml/2006/main" prst="rect">
+            <a:avLst/>
+          </a:prstGeom>
+        </p:spPr>
+        <p:txBody>
+          <a:bodyPr xmlns:a="http://schemas.openxmlformats.org/drawingml/2006/main" wrap="square" lIns="0" tIns="0" rIns="0" bIns="0" anchor="t">
+            <a:noAutofit/>
+          </a:bodyPr>
+          <a:lstStyle xmlns:a="http://schemas.openxmlformats.org/drawingml/2006/main"/>
+          <a:p xmlns:a="http://schemas.openxmlformats.org/drawingml/2006/main">
+            <a:pPr algn="l">
+              <a:defRPr sz="1275" b="0">
+                <a:solidFill>
+                  <a:srgbClr val="0A1224"/>
+                </a:solidFill>
+                <a:latin typeface="Consolas"/>
+                <a:ea typeface="Consolas"/>
+                <a:cs typeface="Consolas"/>
+              </a:defRPr>
+            </a:pPr>
+            <a:r>
+              <a:t>Ubuntu / Node 24</a:t>
+            </a:r>
+          </a:p>
+        </p:txBody>
+      </p:sp>
+      <p:sp>
+        <p:nvSpPr>
+          <p:cNvPr id="30" name="s10-ci-r5">
+            <a:extLst xmlns:a="http://schemas.openxmlformats.org/drawingml/2006/main">
+              <a:ext uri="{FF2B5EF4-FFF2-40B4-BE49-F238E27FC236}">
+                <a16:creationId xmlns:a16="http://schemas.microsoft.com/office/drawing/2014/main" id="{A33D7C9B-34E8-469D-9E78-396C13F069FD}"/>
+              </a:ext>
+            </a:extLst>
+          </p:cNvPr>
+          <p:cNvSpPr>
+            <a:spLocks xmlns:a="http://schemas.openxmlformats.org/drawingml/2006/main" noGrp="1"/>
+          </p:cNvSpPr>
+          <p:nvPr/>
+        </p:nvSpPr>
+        <p:spPr>
+          <a:xfrm xmlns:a="http://schemas.openxmlformats.org/drawingml/2006/main">
+            <a:off x="4629150" y="5019675"/>
+            <a:ext cx="2724150" cy="266700"/>
+          </a:xfrm>
+          <a:prstGeom xmlns:a="http://schemas.openxmlformats.org/drawingml/2006/main" prst="rect">
+            <a:avLst/>
+          </a:prstGeom>
+        </p:spPr>
+        <p:txBody>
+          <a:bodyPr xmlns:a="http://schemas.openxmlformats.org/drawingml/2006/main" wrap="square" lIns="0" tIns="0" rIns="0" bIns="0" anchor="t">
+            <a:noAutofit/>
+          </a:bodyPr>
+          <a:lstStyle xmlns:a="http://schemas.openxmlformats.org/drawingml/2006/main"/>
+          <a:p xmlns:a="http://schemas.openxmlformats.org/drawingml/2006/main">
+            <a:pPr algn="l">
+              <a:defRPr sz="1275" b="0">
+                <a:solidFill>
+                  <a:srgbClr val="0A1224"/>
+                </a:solidFill>
+                <a:latin typeface="Consolas"/>
+                <a:ea typeface="Consolas"/>
+                <a:cs typeface="Consolas"/>
+              </a:defRPr>
+            </a:pPr>
+            <a:r>
+              <a:t>npm package dry run</a:t>
+            </a:r>
+          </a:p>
+        </p:txBody>
+      </p:sp>
+      <p:sp>
+        <p:nvSpPr>
+          <p:cNvPr id="31" name="s10-release">
+            <a:extLst xmlns:a="http://schemas.openxmlformats.org/drawingml/2006/main">
+              <a:ext uri="{FF2B5EF4-FFF2-40B4-BE49-F238E27FC236}">
+                <a16:creationId xmlns:a16="http://schemas.microsoft.com/office/drawing/2014/main" id="{9EAD4805-1C12-4904-B36F-BFA7AEC96FFF}"/>
+              </a:ext>
+            </a:extLst>
+          </p:cNvPr>
+          <p:cNvSpPr>
+            <a:spLocks xmlns:a="http://schemas.openxmlformats.org/drawingml/2006/main" noGrp="1"/>
+          </p:cNvSpPr>
+          <p:nvPr/>
+        </p:nvSpPr>
+        <p:spPr>
+          <a:xfrm xmlns:a="http://schemas.openxmlformats.org/drawingml/2006/main">
+            <a:off x="7924800" y="1695450"/>
+            <a:ext cx="3714750" cy="3771900"/>
+          </a:xfrm>
+          <a:prstGeom xmlns:a="http://schemas.openxmlformats.org/drawingml/2006/main" prst="roundRect">
+            <a:avLst>
+              <a:gd name="adj" fmla="val 2051"/>
             </a:avLst>
           </a:prstGeom>
           <a:solidFill xmlns:a="http://schemas.openxmlformats.org/drawingml/2006/main">
@@ -3759,37 +5069,127 @@
       </p:sp>
       <p:sp>
         <p:nvSpPr>
-          <p:cNvPr id="18" name="s11-v023-version">
-            <a:extLst xmlns:a="http://schemas.openxmlformats.org/drawingml/2006/main">
-              <a:ext uri="{FF2B5EF4-FFF2-40B4-BE49-F238E27FC236}">
-                <a16:creationId xmlns:a16="http://schemas.microsoft.com/office/drawing/2014/main" id="{0D17D17C-51D5-4477-8932-2788EDAE89D0}"/>
-              </a:ext>
-            </a:extLst>
-          </p:cNvPr>
-          <p:cNvSpPr>
-            <a:spLocks xmlns:a="http://schemas.openxmlformats.org/drawingml/2006/main" noGrp="1"/>
-          </p:cNvSpPr>
-          <p:nvPr/>
-        </p:nvSpPr>
-        <p:spPr>
-          <a:xfrm xmlns:a="http://schemas.openxmlformats.org/drawingml/2006/main">
-            <a:off x="8743950" y="2133600"/>
-            <a:ext cx="2628900" cy="342900"/>
-          </a:xfrm>
-          <a:prstGeom xmlns:a="http://schemas.openxmlformats.org/drawingml/2006/main" prst="rect">
-            <a:avLst/>
-          </a:prstGeom>
-        </p:spPr>
-        <p:txBody>
-          <a:bodyPr xmlns:a="http://schemas.openxmlformats.org/drawingml/2006/main" wrap="square" lIns="0" tIns="0" rIns="0" bIns="0" anchor="t">
-            <a:noAutofit/>
-          </a:bodyPr>
-          <a:lstStyle xmlns:a="http://schemas.openxmlformats.org/drawingml/2006/main"/>
-          <a:p xmlns:a="http://schemas.openxmlformats.org/drawingml/2006/main">
-            <a:pPr algn="l">
-              <a:defRPr sz="1800" b="1">
+          <p:cNvPr id="32" name="s10-release-k">
+            <a:extLst xmlns:a="http://schemas.openxmlformats.org/drawingml/2006/main">
+              <a:ext uri="{FF2B5EF4-FFF2-40B4-BE49-F238E27FC236}">
+                <a16:creationId xmlns:a16="http://schemas.microsoft.com/office/drawing/2014/main" id="{02DB65BF-3944-4EEE-AF63-69016EB177E6}"/>
+              </a:ext>
+            </a:extLst>
+          </p:cNvPr>
+          <p:cNvSpPr>
+            <a:spLocks xmlns:a="http://schemas.openxmlformats.org/drawingml/2006/main" noGrp="1"/>
+          </p:cNvSpPr>
+          <p:nvPr/>
+        </p:nvSpPr>
+        <p:spPr>
+          <a:xfrm xmlns:a="http://schemas.openxmlformats.org/drawingml/2006/main">
+            <a:off x="8191500" y="1981200"/>
+            <a:ext cx="3181350" cy="228600"/>
+          </a:xfrm>
+          <a:prstGeom xmlns:a="http://schemas.openxmlformats.org/drawingml/2006/main" prst="rect">
+            <a:avLst/>
+          </a:prstGeom>
+        </p:spPr>
+        <p:txBody>
+          <a:bodyPr xmlns:a="http://schemas.openxmlformats.org/drawingml/2006/main" wrap="square" lIns="0" tIns="0" rIns="0" bIns="0" anchor="t">
+            <a:noAutofit/>
+          </a:bodyPr>
+          <a:lstStyle xmlns:a="http://schemas.openxmlformats.org/drawingml/2006/main"/>
+          <a:p xmlns:a="http://schemas.openxmlformats.org/drawingml/2006/main">
+            <a:pPr algn="l">
+              <a:defRPr sz="1125" b="1">
                 <a:solidFill>
                   <a:srgbClr val="15A777"/>
+                </a:solidFill>
+                <a:latin typeface="Arial"/>
+                <a:ea typeface="Arial"/>
+                <a:cs typeface="Arial"/>
+              </a:defRPr>
+            </a:pPr>
+            <a:r>
+              <a:t>PUBLIC DISTRIBUTION</a:t>
+            </a:r>
+          </a:p>
+        </p:txBody>
+      </p:sp>
+      <p:sp>
+        <p:nvSpPr>
+          <p:cNvPr id="33" name="s10-release-stat">
+            <a:extLst xmlns:a="http://schemas.openxmlformats.org/drawingml/2006/main">
+              <a:ext uri="{FF2B5EF4-FFF2-40B4-BE49-F238E27FC236}">
+                <a16:creationId xmlns:a16="http://schemas.microsoft.com/office/drawing/2014/main" id="{94FE3E03-65EA-4A49-8865-8B5EB7BEB3FE}"/>
+              </a:ext>
+            </a:extLst>
+          </p:cNvPr>
+          <p:cNvSpPr>
+            <a:spLocks xmlns:a="http://schemas.openxmlformats.org/drawingml/2006/main" noGrp="1"/>
+          </p:cNvSpPr>
+          <p:nvPr/>
+        </p:nvSpPr>
+        <p:spPr>
+          <a:xfrm xmlns:a="http://schemas.openxmlformats.org/drawingml/2006/main">
+            <a:off x="8191500" y="2400300"/>
+            <a:ext cx="3181350" cy="514350"/>
+          </a:xfrm>
+          <a:prstGeom xmlns:a="http://schemas.openxmlformats.org/drawingml/2006/main" prst="rect">
+            <a:avLst/>
+          </a:prstGeom>
+        </p:spPr>
+        <p:txBody>
+          <a:bodyPr xmlns:a="http://schemas.openxmlformats.org/drawingml/2006/main" wrap="square" lIns="0" tIns="0" rIns="0" bIns="0" anchor="t">
+            <a:noAutofit/>
+          </a:bodyPr>
+          <a:lstStyle xmlns:a="http://schemas.openxmlformats.org/drawingml/2006/main"/>
+          <a:p xmlns:a="http://schemas.openxmlformats.org/drawingml/2006/main">
+            <a:pPr algn="l">
+              <a:defRPr sz="2700" b="1">
+                <a:solidFill>
+                  <a:srgbClr val="15A777"/>
+                </a:solidFill>
+                <a:latin typeface="Arial"/>
+                <a:ea typeface="Arial"/>
+                <a:cs typeface="Arial"/>
+              </a:defRPr>
+            </a:pPr>
+            <a:r>
+              <a:t>VERIFIED</a:t>
+            </a:r>
+          </a:p>
+        </p:txBody>
+      </p:sp>
+      <p:sp>
+        <p:nvSpPr>
+          <p:cNvPr id="34" name="s10-release-list">
+            <a:extLst xmlns:a="http://schemas.openxmlformats.org/drawingml/2006/main">
+              <a:ext uri="{FF2B5EF4-FFF2-40B4-BE49-F238E27FC236}">
+                <a16:creationId xmlns:a16="http://schemas.microsoft.com/office/drawing/2014/main" id="{C4A40CA1-A2BC-4036-939C-6DACFFB8A435}"/>
+              </a:ext>
+            </a:extLst>
+          </p:cNvPr>
+          <p:cNvSpPr>
+            <a:spLocks xmlns:a="http://schemas.openxmlformats.org/drawingml/2006/main" noGrp="1"/>
+          </p:cNvSpPr>
+          <p:nvPr/>
+        </p:nvSpPr>
+        <p:spPr>
+          <a:xfrm xmlns:a="http://schemas.openxmlformats.org/drawingml/2006/main">
+            <a:off x="8191500" y="3181350"/>
+            <a:ext cx="3181350" cy="1752600"/>
+          </a:xfrm>
+          <a:prstGeom xmlns:a="http://schemas.openxmlformats.org/drawingml/2006/main" prst="rect">
+            <a:avLst/>
+          </a:prstGeom>
+        </p:spPr>
+        <p:txBody>
+          <a:bodyPr xmlns:a="http://schemas.openxmlformats.org/drawingml/2006/main" wrap="square" lIns="0" tIns="0" rIns="0" bIns="0" anchor="t">
+            <a:noAutofit/>
+          </a:bodyPr>
+          <a:lstStyle xmlns:a="http://schemas.openxmlformats.org/drawingml/2006/main"/>
+          <a:p xmlns:a="http://schemas.openxmlformats.org/drawingml/2006/main">
+            <a:pPr algn="l">
+              <a:defRPr sz="1350" b="0">
+                <a:solidFill>
+                  <a:srgbClr val="0A1224"/>
                 </a:solidFill>
                 <a:latin typeface="Consolas"/>
                 <a:ea typeface="Consolas"/>
@@ -3797,119 +5197,34 @@
               </a:defRPr>
             </a:pPr>
             <a:r>
-              <a:t>v0.2.3</a:t>
-            </a:r>
-          </a:p>
-        </p:txBody>
-      </p:sp>
-      <p:sp>
-        <p:nvSpPr>
-          <p:cNvPr id="19" name="s11-v023-k">
-            <a:extLst xmlns:a="http://schemas.openxmlformats.org/drawingml/2006/main">
-              <a:ext uri="{FF2B5EF4-FFF2-40B4-BE49-F238E27FC236}">
-                <a16:creationId xmlns:a16="http://schemas.microsoft.com/office/drawing/2014/main" id="{009E6424-6E3E-4286-B943-3469ADAD4FC4}"/>
-              </a:ext>
-            </a:extLst>
-          </p:cNvPr>
-          <p:cNvSpPr>
-            <a:spLocks xmlns:a="http://schemas.openxmlformats.org/drawingml/2006/main" noGrp="1"/>
-          </p:cNvSpPr>
-          <p:nvPr/>
-        </p:nvSpPr>
-        <p:spPr>
-          <a:xfrm xmlns:a="http://schemas.openxmlformats.org/drawingml/2006/main">
-            <a:off x="8743950" y="2628900"/>
-            <a:ext cx="2628900" cy="209550"/>
-          </a:xfrm>
-          <a:prstGeom xmlns:a="http://schemas.openxmlformats.org/drawingml/2006/main" prst="rect">
-            <a:avLst/>
-          </a:prstGeom>
-        </p:spPr>
-        <p:txBody>
-          <a:bodyPr xmlns:a="http://schemas.openxmlformats.org/drawingml/2006/main" wrap="square" lIns="0" tIns="0" rIns="0" bIns="0" anchor="t">
-            <a:noAutofit/>
-          </a:bodyPr>
-          <a:lstStyle xmlns:a="http://schemas.openxmlformats.org/drawingml/2006/main"/>
-          <a:p xmlns:a="http://schemas.openxmlformats.org/drawingml/2006/main">
-            <a:pPr algn="l">
-              <a:defRPr sz="1050" b="1">
-                <a:solidFill>
-                  <a:srgbClr val="15A777"/>
-                </a:solidFill>
-                <a:latin typeface="Arial"/>
-                <a:ea typeface="Arial"/>
-                <a:cs typeface="Arial"/>
-              </a:defRPr>
-            </a:pPr>
-            <a:r>
-              <a:t>GENERALIZED</a:t>
-            </a:r>
-          </a:p>
-        </p:txBody>
-      </p:sp>
-      <p:sp>
-        <p:nvSpPr>
-          <p:cNvPr id="20" name="s11-v023-v">
-            <a:extLst xmlns:a="http://schemas.openxmlformats.org/drawingml/2006/main">
-              <a:ext uri="{FF2B5EF4-FFF2-40B4-BE49-F238E27FC236}">
-                <a16:creationId xmlns:a16="http://schemas.microsoft.com/office/drawing/2014/main" id="{DC0B24AF-DDCD-479A-8453-16DAEFE596CF}"/>
-              </a:ext>
-            </a:extLst>
-          </p:cNvPr>
-          <p:cNvSpPr>
-            <a:spLocks xmlns:a="http://schemas.openxmlformats.org/drawingml/2006/main" noGrp="1"/>
-          </p:cNvSpPr>
-          <p:nvPr/>
-        </p:nvSpPr>
-        <p:spPr>
-          <a:xfrm xmlns:a="http://schemas.openxmlformats.org/drawingml/2006/main">
-            <a:off x="8743950" y="2990850"/>
-            <a:ext cx="2628900" cy="1123950"/>
-          </a:xfrm>
-          <a:prstGeom xmlns:a="http://schemas.openxmlformats.org/drawingml/2006/main" prst="rect">
-            <a:avLst/>
-          </a:prstGeom>
-        </p:spPr>
-        <p:txBody>
-          <a:bodyPr xmlns:a="http://schemas.openxmlformats.org/drawingml/2006/main" wrap="square" lIns="0" tIns="0" rIns="0" bIns="0" anchor="t">
-            <a:noAutofit/>
-          </a:bodyPr>
-          <a:lstStyle xmlns:a="http://schemas.openxmlformats.org/drawingml/2006/main"/>
-          <a:p xmlns:a="http://schemas.openxmlformats.org/drawingml/2006/main">
-            <a:pPr algn="l">
-              <a:defRPr sz="1500" b="0">
-                <a:solidFill>
-                  <a:srgbClr val="0A1224"/>
-                </a:solidFill>
-                <a:latin typeface="Arial"/>
-                <a:ea typeface="Arial"/>
-                <a:cs typeface="Arial"/>
-              </a:defRPr>
-            </a:pPr>
-            <a:r>
-              <a:t>Release routing now covers npm, Codex plugins, PyPI, Chinese intent, negative controls, and CI.</a:t>
-            </a:r>
-          </a:p>
-        </p:txBody>
-      </p:sp>
-      <p:sp>
-        <p:nvSpPr>
-          <p:cNvPr id="21" name="s11-v023-foot">
-            <a:extLst xmlns:a="http://schemas.openxmlformats.org/drawingml/2006/main">
-              <a:ext uri="{FF2B5EF4-FFF2-40B4-BE49-F238E27FC236}">
-                <a16:creationId xmlns:a16="http://schemas.microsoft.com/office/drawing/2014/main" id="{D3F748BE-F8A4-42A3-8FE0-7E004519C5E4}"/>
-              </a:ext>
-            </a:extLst>
-          </p:cNvPr>
-          <p:cNvSpPr>
-            <a:spLocks xmlns:a="http://schemas.openxmlformats.org/drawingml/2006/main" noGrp="1"/>
-          </p:cNvSpPr>
-          <p:nvPr/>
-        </p:nvSpPr>
-        <p:spPr>
-          <a:xfrm xmlns:a="http://schemas.openxmlformats.org/drawingml/2006/main">
-            <a:off x="8743950" y="4400550"/>
-            <a:ext cx="2628900" cy="400050"/>
+              <a:t>clean tarball install
+public npm install
+CLI release route
+MCP init + 10 tools
+candidate SHA = registry
+tag / version / ref / pin</a:t>
+            </a:r>
+          </a:p>
+        </p:txBody>
+      </p:sp>
+      <p:sp>
+        <p:nvSpPr>
+          <p:cNvPr id="35" name="s10-release-platforms">
+            <a:extLst xmlns:a="http://schemas.openxmlformats.org/drawingml/2006/main">
+              <a:ext uri="{FF2B5EF4-FFF2-40B4-BE49-F238E27FC236}">
+                <a16:creationId xmlns:a16="http://schemas.microsoft.com/office/drawing/2014/main" id="{ECDAE574-1312-4528-9E85-30FDFF6EE455}"/>
+              </a:ext>
+            </a:extLst>
+          </p:cNvPr>
+          <p:cNvSpPr>
+            <a:spLocks xmlns:a="http://schemas.openxmlformats.org/drawingml/2006/main" noGrp="1"/>
+          </p:cNvSpPr>
+          <p:nvPr/>
+        </p:nvSpPr>
+        <p:spPr>
+          <a:xfrm xmlns:a="http://schemas.openxmlformats.org/drawingml/2006/main">
+            <a:off x="8191500" y="5010150"/>
+            <a:ext cx="3181350" cy="266700"/>
           </a:xfrm>
           <a:prstGeom xmlns:a="http://schemas.openxmlformats.org/drawingml/2006/main" prst="rect">
             <a:avLst/>
@@ -3932,94 +5247,14 @@
               </a:defRPr>
             </a:pPr>
             <a:r>
-              <a:t>Matrix + distribution gates</a:t>
-            </a:r>
-          </a:p>
-        </p:txBody>
-      </p:sp>
-      <p:sp>
-        <p:nvSpPr>
-          <p:cNvPr id="22" name="s11-takeaway">
-            <a:extLst xmlns:a="http://schemas.openxmlformats.org/drawingml/2006/main">
-              <a:ext uri="{FF2B5EF4-FFF2-40B4-BE49-F238E27FC236}">
-                <a16:creationId xmlns:a16="http://schemas.microsoft.com/office/drawing/2014/main" id="{ED63AB62-F1E3-4CF0-9979-F4D8C56BD84E}"/>
-              </a:ext>
-            </a:extLst>
-          </p:cNvPr>
-          <p:cNvSpPr>
-            <a:spLocks xmlns:a="http://schemas.openxmlformats.org/drawingml/2006/main" noGrp="1"/>
-          </p:cNvSpPr>
-          <p:nvPr/>
-        </p:nvSpPr>
-        <p:spPr>
-          <a:xfrm xmlns:a="http://schemas.openxmlformats.org/drawingml/2006/main">
-            <a:off x="552450" y="5181600"/>
-            <a:ext cx="11087100" cy="704850"/>
-          </a:xfrm>
-          <a:prstGeom xmlns:a="http://schemas.openxmlformats.org/drawingml/2006/main" prst="roundRect">
-            <a:avLst>
-              <a:gd name="adj" fmla="val 10811"/>
-            </a:avLst>
-          </a:prstGeom>
-          <a:solidFill xmlns:a="http://schemas.openxmlformats.org/drawingml/2006/main">
-            <a:srgbClr val="061B3D"/>
-          </a:solidFill>
-          <a:ln xmlns:a="http://schemas.openxmlformats.org/drawingml/2006/main" w="0">
-            <a:solidFill>
-              <a:srgbClr val="061B3D"/>
-            </a:solidFill>
-            <a:prstDash val="solid"/>
-          </a:ln>
-        </p:spPr>
-      </p:sp>
-      <p:sp>
-        <p:nvSpPr>
-          <p:cNvPr id="23" name="s11-takeaway-v">
-            <a:extLst xmlns:a="http://schemas.openxmlformats.org/drawingml/2006/main">
-              <a:ext uri="{FF2B5EF4-FFF2-40B4-BE49-F238E27FC236}">
-                <a16:creationId xmlns:a16="http://schemas.microsoft.com/office/drawing/2014/main" id="{37D65BEE-EC22-42AD-B0F2-3492424E3548}"/>
-              </a:ext>
-            </a:extLst>
-          </p:cNvPr>
-          <p:cNvSpPr>
-            <a:spLocks xmlns:a="http://schemas.openxmlformats.org/drawingml/2006/main" noGrp="1"/>
-          </p:cNvSpPr>
-          <p:nvPr/>
-        </p:nvSpPr>
-        <p:spPr>
-          <a:xfrm xmlns:a="http://schemas.openxmlformats.org/drawingml/2006/main">
-            <a:off x="819150" y="5372100"/>
-            <a:ext cx="10553700" cy="323850"/>
-          </a:xfrm>
-          <a:prstGeom xmlns:a="http://schemas.openxmlformats.org/drawingml/2006/main" prst="rect">
-            <a:avLst/>
-          </a:prstGeom>
-        </p:spPr>
-        <p:txBody>
-          <a:bodyPr xmlns:a="http://schemas.openxmlformats.org/drawingml/2006/main" wrap="square" lIns="0" tIns="0" rIns="0" bIns="0" anchor="t">
-            <a:noAutofit/>
-          </a:bodyPr>
-          <a:lstStyle xmlns:a="http://schemas.openxmlformats.org/drawingml/2006/main"/>
-          <a:p xmlns:a="http://schemas.openxmlformats.org/drawingml/2006/main">
-            <a:pPr algn="ctr">
-              <a:defRPr sz="1725" b="1">
-                <a:solidFill>
-                  <a:srgbClr val="FFFFFF"/>
-                </a:solidFill>
-                <a:latin typeface="Consolas"/>
-                <a:ea typeface="Consolas"/>
-                <a:cs typeface="Consolas"/>
-              </a:defRPr>
-            </a:pPr>
-            <a:r>
-              <a:t>OBSERVE  -&gt;  FIX  -&gt;  REGRESSION TEST  -&gt;  RELEASE GATE</a:t>
+              <a:t>Windows | macOS | Linux</a:t>
             </a:r>
           </a:p>
         </p:txBody>
       </p:sp>
       <p:cxnSp>
         <p:nvCxnSpPr>
-          <p:cNvPr id="50" name="footer-rule-10"/>
+          <p:cNvPr id="74" name="footer-rule-10"/>
           <p:cNvCxnSpPr/>
           <p:nvPr/>
         </p:nvCxnSpPr>
@@ -4041,10 +5276,10 @@
       </p:cxnSp>
       <p:sp>
         <p:nvSpPr>
-          <p:cNvPr id="25" name="footer-source-10">
-            <a:extLst xmlns:a="http://schemas.openxmlformats.org/drawingml/2006/main">
-              <a:ext uri="{FF2B5EF4-FFF2-40B4-BE49-F238E27FC236}">
-                <a16:creationId xmlns:a16="http://schemas.microsoft.com/office/drawing/2014/main" id="{6A474411-49BA-4A75-B4D5-0B163A680F63}"/>
+          <p:cNvPr id="37" name="footer-source-10">
+            <a:extLst xmlns:a="http://schemas.openxmlformats.org/drawingml/2006/main">
+              <a:ext uri="{FF2B5EF4-FFF2-40B4-BE49-F238E27FC236}">
+                <a16:creationId xmlns:a16="http://schemas.microsoft.com/office/drawing/2014/main" id="{CF8BABC7-FF1A-4DF5-965D-87C950B67596}"/>
               </a:ext>
             </a:extLst>
           </p:cNvPr>
@@ -4079,17 +5314,17 @@
               </a:defRPr>
             </a:pPr>
             <a:r>
-              <a:t>ADAPTIVE_MEMORY_FIX_0_2_2.md | RELEASE_ROUTING_MATRIX_RESULT_0_2_3.md</a:t>
-            </a:r>
-          </a:p>
-        </p:txBody>
-      </p:sp>
-      <p:sp>
-        <p:nvSpPr>
-          <p:cNvPr id="26" name="footer-number-10">
-            <a:extLst xmlns:a="http://schemas.openxmlformats.org/drawingml/2006/main">
-              <a:ext uri="{FF2B5EF4-FFF2-40B4-BE49-F238E27FC236}">
-                <a16:creationId xmlns:a16="http://schemas.microsoft.com/office/drawing/2014/main" id="{067523A6-FBEC-45B3-ABC6-4BB7BBFB82CA}"/>
+              <a:t>CI run 29687844288 | Vertex Palace 0.2.3 release verification | all listed gates passed</a:t>
+            </a:r>
+          </a:p>
+        </p:txBody>
+      </p:sp>
+      <p:sp>
+        <p:nvSpPr>
+          <p:cNvPr id="38" name="footer-number-10">
+            <a:extLst xmlns:a="http://schemas.openxmlformats.org/drawingml/2006/main">
+              <a:ext uri="{FF2B5EF4-FFF2-40B4-BE49-F238E27FC236}">
+                <a16:creationId xmlns:a16="http://schemas.microsoft.com/office/drawing/2014/main" id="{90570A6F-F88D-494B-B571-40EA00B0FA8C}"/>
               </a:ext>
             </a:extLst>
           </p:cNvPr>
@@ -4132,7 +5367,7 @@
     </p:spTree>
     <p:extLst>
       <p:ext uri="{BB962C8B-B14F-4D97-AF65-F5344CB8AC3E}">
-        <p14:creationId xmlns:p14="http://schemas.microsoft.com/office/powerpoint/2010/main" val="45502223"/>
+        <p14:creationId xmlns:p14="http://schemas.microsoft.com/office/powerpoint/2010/main" val="1383521084"/>
       </p:ext>
     </p:extLst>
   </p:cSld>
@@ -4160,80 +5395,35 @@
       </p:grpSpPr>
       <p:sp>
         <p:nvSpPr>
-          <p:cNvPr id="19" name="s12-eyebrow">
-            <a:extLst xmlns:a="http://schemas.openxmlformats.org/drawingml/2006/main">
-              <a:ext uri="{FF2B5EF4-FFF2-40B4-BE49-F238E27FC236}">
-                <a16:creationId xmlns:a16="http://schemas.microsoft.com/office/drawing/2014/main" id="{8E8CD63C-A148-4CC2-A8B1-5EE1110C2469}"/>
-              </a:ext>
-            </a:extLst>
-          </p:cNvPr>
-          <p:cNvSpPr>
-            <a:spLocks xmlns:a="http://schemas.openxmlformats.org/drawingml/2006/main" noGrp="1"/>
-          </p:cNvSpPr>
-          <p:nvPr/>
-        </p:nvSpPr>
-        <p:spPr>
-          <a:xfrm xmlns:a="http://schemas.openxmlformats.org/drawingml/2006/main">
-            <a:off x="457200" y="419100"/>
-            <a:ext cx="2476500" cy="285750"/>
-          </a:xfrm>
-          <a:prstGeom xmlns:a="http://schemas.openxmlformats.org/drawingml/2006/main" prst="rect">
-            <a:avLst/>
-          </a:prstGeom>
-        </p:spPr>
-        <p:txBody>
-          <a:bodyPr xmlns:a="http://schemas.openxmlformats.org/drawingml/2006/main" wrap="square" lIns="0" tIns="0" rIns="0" bIns="0" anchor="t">
-            <a:noAutofit/>
-          </a:bodyPr>
-          <a:lstStyle xmlns:a="http://schemas.openxmlformats.org/drawingml/2006/main"/>
-          <a:p xmlns:a="http://schemas.openxmlformats.org/drawingml/2006/main">
-            <a:pPr algn="l">
-              <a:defRPr sz="1200" b="1">
-                <a:solidFill>
-                  <a:srgbClr val="1677FF"/>
-                </a:solidFill>
-                <a:latin typeface="Arial"/>
-                <a:ea typeface="Arial"/>
-                <a:cs typeface="Arial"/>
-              </a:defRPr>
-            </a:pPr>
-            <a:r>
-              <a:t>READY TO TEST</a:t>
-            </a:r>
-          </a:p>
-        </p:txBody>
-      </p:sp>
-      <p:sp>
-        <p:nvSpPr>
-          <p:cNvPr id="2" name="s12-title">
-            <a:extLst xmlns:a="http://schemas.openxmlformats.org/drawingml/2006/main">
-              <a:ext uri="{FF2B5EF4-FFF2-40B4-BE49-F238E27FC236}">
-                <a16:creationId xmlns:a16="http://schemas.microsoft.com/office/drawing/2014/main" id="{5E2BF20A-1CDF-4E46-8516-0FE9CDD23EC5}"/>
-              </a:ext>
-            </a:extLst>
-          </p:cNvPr>
-          <p:cNvSpPr>
-            <a:spLocks xmlns:a="http://schemas.openxmlformats.org/drawingml/2006/main" noGrp="1"/>
-          </p:cNvSpPr>
-          <p:nvPr/>
-        </p:nvSpPr>
-        <p:spPr>
-          <a:xfrm xmlns:a="http://schemas.openxmlformats.org/drawingml/2006/main">
-            <a:off x="457200" y="1257300"/>
-            <a:ext cx="5143500" cy="2857500"/>
-          </a:xfrm>
-          <a:prstGeom xmlns:a="http://schemas.openxmlformats.org/drawingml/2006/main" prst="rect">
-            <a:avLst/>
-          </a:prstGeom>
-        </p:spPr>
-        <p:txBody>
-          <a:bodyPr xmlns:a="http://schemas.openxmlformats.org/drawingml/2006/main" wrap="square" lIns="0" tIns="0" rIns="0" bIns="0" anchor="t">
-            <a:noAutofit/>
-          </a:bodyPr>
-          <a:lstStyle xmlns:a="http://schemas.openxmlformats.org/drawingml/2006/main"/>
-          <a:p xmlns:a="http://schemas.openxmlformats.org/drawingml/2006/main">
-            <a:pPr algn="l">
-              <a:defRPr sz="5400" b="1">
+          <p:cNvPr id="27" name="s11-title">
+            <a:extLst xmlns:a="http://schemas.openxmlformats.org/drawingml/2006/main">
+              <a:ext uri="{FF2B5EF4-FFF2-40B4-BE49-F238E27FC236}">
+                <a16:creationId xmlns:a16="http://schemas.microsoft.com/office/drawing/2014/main" id="{A2153BDD-786F-4C2D-A08E-F3D49D8353B1}"/>
+              </a:ext>
+            </a:extLst>
+          </p:cNvPr>
+          <p:cNvSpPr>
+            <a:spLocks xmlns:a="http://schemas.openxmlformats.org/drawingml/2006/main" noGrp="1"/>
+          </p:cNvSpPr>
+          <p:nvPr/>
+        </p:nvSpPr>
+        <p:spPr>
+          <a:xfrm xmlns:a="http://schemas.openxmlformats.org/drawingml/2006/main">
+            <a:off x="400050" y="323850"/>
+            <a:ext cx="11391900" cy="723900"/>
+          </a:xfrm>
+          <a:prstGeom xmlns:a="http://schemas.openxmlformats.org/drawingml/2006/main" prst="rect">
+            <a:avLst/>
+          </a:prstGeom>
+        </p:spPr>
+        <p:txBody>
+          <a:bodyPr xmlns:a="http://schemas.openxmlformats.org/drawingml/2006/main" wrap="square" lIns="0" tIns="0" rIns="0" bIns="0" anchor="t">
+            <a:noAutofit/>
+          </a:bodyPr>
+          <a:lstStyle xmlns:a="http://schemas.openxmlformats.org/drawingml/2006/main"/>
+          <a:p xmlns:a="http://schemas.openxmlformats.org/drawingml/2006/main">
+            <a:pPr algn="l">
+              <a:defRPr sz="3000" b="1">
                 <a:solidFill>
                   <a:srgbClr val="0A1224"/>
                 </a:solidFill>
@@ -4243,102 +5433,857 @@
               </a:defRPr>
             </a:pPr>
             <a:r>
-              <a:t>Install.
-Route.
-Verify.</a:t>
+              <a:t>Failures became versioned regression gates.</a:t>
+            </a:r>
+          </a:p>
+        </p:txBody>
+      </p:sp>
+      <p:sp>
+        <p:nvSpPr>
+          <p:cNvPr id="2" name="s11-subtitle">
+            <a:extLst xmlns:a="http://schemas.openxmlformats.org/drawingml/2006/main">
+              <a:ext uri="{FF2B5EF4-FFF2-40B4-BE49-F238E27FC236}">
+                <a16:creationId xmlns:a16="http://schemas.microsoft.com/office/drawing/2014/main" id="{9F9C9D11-4C5D-41FE-B049-B5C315600040}"/>
+              </a:ext>
+            </a:extLst>
+          </p:cNvPr>
+          <p:cNvSpPr>
+            <a:spLocks xmlns:a="http://schemas.openxmlformats.org/drawingml/2006/main" noGrp="1"/>
+          </p:cNvSpPr>
+          <p:nvPr/>
+        </p:nvSpPr>
+        <p:spPr>
+          <a:xfrm xmlns:a="http://schemas.openxmlformats.org/drawingml/2006/main">
+            <a:off x="400050" y="1066800"/>
+            <a:ext cx="11049000" cy="381000"/>
+          </a:xfrm>
+          <a:prstGeom xmlns:a="http://schemas.openxmlformats.org/drawingml/2006/main" prst="rect">
+            <a:avLst/>
+          </a:prstGeom>
+        </p:spPr>
+        <p:txBody>
+          <a:bodyPr xmlns:a="http://schemas.openxmlformats.org/drawingml/2006/main" wrap="square" lIns="0" tIns="0" rIns="0" bIns="0" anchor="t">
+            <a:noAutofit/>
+          </a:bodyPr>
+          <a:lstStyle xmlns:a="http://schemas.openxmlformats.org/drawingml/2006/main"/>
+          <a:p xmlns:a="http://schemas.openxmlformats.org/drawingml/2006/main">
+            <a:pPr algn="l">
+              <a:defRPr sz="1500" b="0">
+                <a:solidFill>
+                  <a:srgbClr val="526071"/>
+                </a:solidFill>
+                <a:latin typeface="Arial"/>
+                <a:ea typeface="Arial"/>
+                <a:cs typeface="Arial"/>
+              </a:defRPr>
+            </a:pPr>
+            <a:r>
+              <a:t>The benchmark did not just score Vertex Palace; it changed the implementation and release process.</a:t>
             </a:r>
           </a:p>
         </p:txBody>
       </p:sp>
       <p:cxnSp>
         <p:nvCxnSpPr>
-          <p:cNvPr id="21" name="s12-accent"/>
+          <p:cNvPr id="29" name="s11-link1"/>
           <p:cNvCxnSpPr/>
           <p:nvPr/>
         </p:nvCxnSpPr>
         <p:spPr>
           <a:xfrm xmlns:a="http://schemas.openxmlformats.org/drawingml/2006/main">
-            <a:off x="495300" y="4438650"/>
-            <a:ext cx="1238250" cy="953"/>
+            <a:off x="3714750" y="3333750"/>
+            <a:ext cx="762000" cy="953"/>
           </a:xfrm>
           <a:prstGeom xmlns:a="http://schemas.openxmlformats.org/drawingml/2006/main" prst="straightConnector1">
             <a:avLst/>
           </a:prstGeom>
-          <a:ln xmlns:a="http://schemas.openxmlformats.org/drawingml/2006/main" w="57150">
+          <a:ln xmlns:a="http://schemas.openxmlformats.org/drawingml/2006/main" w="38100">
             <a:solidFill>
-              <a:srgbClr val="13B7D5"/>
+              <a:srgbClr val="B8BCC4"/>
             </a:solidFill>
             <a:prstDash val="solid"/>
           </a:ln>
         </p:spPr>
       </p:cxnSp>
-      <p:sp>
-        <p:nvSpPr>
-          <p:cNvPr id="4" name="s12-close">
-            <a:extLst xmlns:a="http://schemas.openxmlformats.org/drawingml/2006/main">
-              <a:ext uri="{FF2B5EF4-FFF2-40B4-BE49-F238E27FC236}">
-                <a16:creationId xmlns:a16="http://schemas.microsoft.com/office/drawing/2014/main" id="{BCF05DD3-D8E9-4793-9744-7A349721D016}"/>
-              </a:ext>
-            </a:extLst>
-          </p:cNvPr>
-          <p:cNvSpPr>
-            <a:spLocks xmlns:a="http://schemas.openxmlformats.org/drawingml/2006/main" noGrp="1"/>
-          </p:cNvSpPr>
-          <p:nvPr/>
-        </p:nvSpPr>
-        <p:spPr>
-          <a:xfrm xmlns:a="http://schemas.openxmlformats.org/drawingml/2006/main">
-            <a:off x="457200" y="4819650"/>
-            <a:ext cx="5238750" cy="857250"/>
-          </a:xfrm>
-          <a:prstGeom xmlns:a="http://schemas.openxmlformats.org/drawingml/2006/main" prst="rect">
-            <a:avLst/>
-          </a:prstGeom>
-        </p:spPr>
-        <p:txBody>
-          <a:bodyPr xmlns:a="http://schemas.openxmlformats.org/drawingml/2006/main" wrap="square" lIns="0" tIns="0" rIns="0" bIns="0" anchor="t">
-            <a:noAutofit/>
-          </a:bodyPr>
-          <a:lstStyle xmlns:a="http://schemas.openxmlformats.org/drawingml/2006/main"/>
-          <a:p xmlns:a="http://schemas.openxmlformats.org/drawingml/2006/main">
-            <a:pPr algn="l">
-              <a:defRPr sz="1800" b="0">
-                <a:solidFill>
-                  <a:srgbClr val="526071"/>
-                </a:solidFill>
-                <a:latin typeface="Arial"/>
-                <a:ea typeface="Arial"/>
-                <a:cs typeface="Arial"/>
-              </a:defRPr>
-            </a:pPr>
-            <a:r>
-              <a:t>A map, a route, a memory, and evidence that the selected context was useful.</a:t>
-            </a:r>
-          </a:p>
-        </p:txBody>
-      </p:sp>
-      <p:sp>
-        <p:nvSpPr>
-          <p:cNvPr id="5" name="s12-command-box">
-            <a:extLst xmlns:a="http://schemas.openxmlformats.org/drawingml/2006/main">
-              <a:ext uri="{FF2B5EF4-FFF2-40B4-BE49-F238E27FC236}">
-                <a16:creationId xmlns:a16="http://schemas.microsoft.com/office/drawing/2014/main" id="{097218C2-C26A-4587-BB6A-46AD4F82F245}"/>
-              </a:ext>
-            </a:extLst>
-          </p:cNvPr>
-          <p:cNvSpPr>
-            <a:spLocks xmlns:a="http://schemas.openxmlformats.org/drawingml/2006/main" noGrp="1"/>
-          </p:cNvSpPr>
-          <p:nvPr/>
-        </p:nvSpPr>
-        <p:spPr>
-          <a:xfrm xmlns:a="http://schemas.openxmlformats.org/drawingml/2006/main">
-            <a:off x="6477000" y="1352550"/>
-            <a:ext cx="4857750" cy="1485900"/>
+      <p:cxnSp>
+        <p:nvCxnSpPr>
+          <p:cNvPr id="30" name="s11-link2"/>
+          <p:cNvCxnSpPr/>
+          <p:nvPr/>
+        </p:nvCxnSpPr>
+        <p:spPr>
+          <a:xfrm xmlns:a="http://schemas.openxmlformats.org/drawingml/2006/main">
+            <a:off x="7715250" y="3333750"/>
+            <a:ext cx="762000" cy="953"/>
+          </a:xfrm>
+          <a:prstGeom xmlns:a="http://schemas.openxmlformats.org/drawingml/2006/main" prst="straightConnector1">
+            <a:avLst/>
+          </a:prstGeom>
+          <a:ln xmlns:a="http://schemas.openxmlformats.org/drawingml/2006/main" w="38100">
+            <a:solidFill>
+              <a:srgbClr val="B8BCC4"/>
+            </a:solidFill>
+            <a:prstDash val="solid"/>
+          </a:ln>
+        </p:spPr>
+      </p:cxnSp>
+      <p:sp>
+        <p:nvSpPr>
+          <p:cNvPr id="5" name="s11-arrow1">
+            <a:extLst xmlns:a="http://schemas.openxmlformats.org/drawingml/2006/main">
+              <a:ext uri="{FF2B5EF4-FFF2-40B4-BE49-F238E27FC236}">
+                <a16:creationId xmlns:a16="http://schemas.microsoft.com/office/drawing/2014/main" id="{97523596-A03B-406B-A342-002A8C61ED10}"/>
+              </a:ext>
+            </a:extLst>
+          </p:cNvPr>
+          <p:cNvSpPr>
+            <a:spLocks xmlns:a="http://schemas.openxmlformats.org/drawingml/2006/main" noGrp="1"/>
+          </p:cNvSpPr>
+          <p:nvPr/>
+        </p:nvSpPr>
+        <p:spPr>
+          <a:xfrm xmlns:a="http://schemas.openxmlformats.org/drawingml/2006/main">
+            <a:off x="4095750" y="3152775"/>
+            <a:ext cx="342900" cy="342900"/>
+          </a:xfrm>
+          <a:prstGeom xmlns:a="http://schemas.openxmlformats.org/drawingml/2006/main" prst="rect">
+            <a:avLst/>
+          </a:prstGeom>
+        </p:spPr>
+        <p:txBody>
+          <a:bodyPr xmlns:a="http://schemas.openxmlformats.org/drawingml/2006/main" wrap="square" lIns="0" tIns="0" rIns="0" bIns="0" anchor="t">
+            <a:noAutofit/>
+          </a:bodyPr>
+          <a:lstStyle xmlns:a="http://schemas.openxmlformats.org/drawingml/2006/main"/>
+          <a:p xmlns:a="http://schemas.openxmlformats.org/drawingml/2006/main">
+            <a:pPr algn="ctr">
+              <a:defRPr sz="2100" b="1">
+                <a:solidFill>
+                  <a:srgbClr val="B8BCC4"/>
+                </a:solidFill>
+                <a:latin typeface="Arial"/>
+                <a:ea typeface="Arial"/>
+                <a:cs typeface="Arial"/>
+              </a:defRPr>
+            </a:pPr>
+            <a:r>
+              <a:t>&gt;</a:t>
+            </a:r>
+          </a:p>
+        </p:txBody>
+      </p:sp>
+      <p:sp>
+        <p:nvSpPr>
+          <p:cNvPr id="6" name="s11-arrow2">
+            <a:extLst xmlns:a="http://schemas.openxmlformats.org/drawingml/2006/main">
+              <a:ext uri="{FF2B5EF4-FFF2-40B4-BE49-F238E27FC236}">
+                <a16:creationId xmlns:a16="http://schemas.microsoft.com/office/drawing/2014/main" id="{CEDEA46E-5AA7-46DB-80B4-8B524C8F44A1}"/>
+              </a:ext>
+            </a:extLst>
+          </p:cNvPr>
+          <p:cNvSpPr>
+            <a:spLocks xmlns:a="http://schemas.openxmlformats.org/drawingml/2006/main" noGrp="1"/>
+          </p:cNvSpPr>
+          <p:nvPr/>
+        </p:nvSpPr>
+        <p:spPr>
+          <a:xfrm xmlns:a="http://schemas.openxmlformats.org/drawingml/2006/main">
+            <a:off x="8096250" y="3152775"/>
+            <a:ext cx="342900" cy="342900"/>
+          </a:xfrm>
+          <a:prstGeom xmlns:a="http://schemas.openxmlformats.org/drawingml/2006/main" prst="rect">
+            <a:avLst/>
+          </a:prstGeom>
+        </p:spPr>
+        <p:txBody>
+          <a:bodyPr xmlns:a="http://schemas.openxmlformats.org/drawingml/2006/main" wrap="square" lIns="0" tIns="0" rIns="0" bIns="0" anchor="t">
+            <a:noAutofit/>
+          </a:bodyPr>
+          <a:lstStyle xmlns:a="http://schemas.openxmlformats.org/drawingml/2006/main"/>
+          <a:p xmlns:a="http://schemas.openxmlformats.org/drawingml/2006/main">
+            <a:pPr algn="ctr">
+              <a:defRPr sz="2100" b="1">
+                <a:solidFill>
+                  <a:srgbClr val="B8BCC4"/>
+                </a:solidFill>
+                <a:latin typeface="Arial"/>
+                <a:ea typeface="Arial"/>
+                <a:cs typeface="Arial"/>
+              </a:defRPr>
+            </a:pPr>
+            <a:r>
+              <a:t>&gt;</a:t>
+            </a:r>
+          </a:p>
+        </p:txBody>
+      </p:sp>
+      <p:sp>
+        <p:nvSpPr>
+          <p:cNvPr id="7" name="s11-v021">
+            <a:extLst xmlns:a="http://schemas.openxmlformats.org/drawingml/2006/main">
+              <a:ext uri="{FF2B5EF4-FFF2-40B4-BE49-F238E27FC236}">
+                <a16:creationId xmlns:a16="http://schemas.microsoft.com/office/drawing/2014/main" id="{63C4B926-9A70-4335-B6C7-E5608B09317F}"/>
+              </a:ext>
+            </a:extLst>
+          </p:cNvPr>
+          <p:cNvSpPr>
+            <a:spLocks xmlns:a="http://schemas.openxmlformats.org/drawingml/2006/main" noGrp="1"/>
+          </p:cNvSpPr>
+          <p:nvPr/>
+        </p:nvSpPr>
+        <p:spPr>
+          <a:xfrm xmlns:a="http://schemas.openxmlformats.org/drawingml/2006/main">
+            <a:off x="552450" y="1885950"/>
+            <a:ext cx="3162300" cy="3028950"/>
           </a:xfrm>
           <a:prstGeom xmlns:a="http://schemas.openxmlformats.org/drawingml/2006/main" prst="roundRect">
             <a:avLst>
-              <a:gd name="adj" fmla="val 5128"/>
+              <a:gd name="adj" fmla="val 2516"/>
+            </a:avLst>
+          </a:prstGeom>
+          <a:solidFill xmlns:a="http://schemas.openxmlformats.org/drawingml/2006/main">
+            <a:srgbClr val="FFF1F3"/>
+          </a:solidFill>
+          <a:ln xmlns:a="http://schemas.openxmlformats.org/drawingml/2006/main" w="0">
+            <a:solidFill>
+              <a:srgbClr val="FFF1F3"/>
+            </a:solidFill>
+            <a:prstDash val="solid"/>
+          </a:ln>
+        </p:spPr>
+      </p:sp>
+      <p:sp>
+        <p:nvSpPr>
+          <p:cNvPr id="8" name="s11-v021-version">
+            <a:extLst xmlns:a="http://schemas.openxmlformats.org/drawingml/2006/main">
+              <a:ext uri="{FF2B5EF4-FFF2-40B4-BE49-F238E27FC236}">
+                <a16:creationId xmlns:a16="http://schemas.microsoft.com/office/drawing/2014/main" id="{016E0051-D58C-423B-ADC8-969322FFAB56}"/>
+              </a:ext>
+            </a:extLst>
+          </p:cNvPr>
+          <p:cNvSpPr>
+            <a:spLocks xmlns:a="http://schemas.openxmlformats.org/drawingml/2006/main" noGrp="1"/>
+          </p:cNvSpPr>
+          <p:nvPr/>
+        </p:nvSpPr>
+        <p:spPr>
+          <a:xfrm xmlns:a="http://schemas.openxmlformats.org/drawingml/2006/main">
+            <a:off x="819150" y="2133600"/>
+            <a:ext cx="2628900" cy="342900"/>
+          </a:xfrm>
+          <a:prstGeom xmlns:a="http://schemas.openxmlformats.org/drawingml/2006/main" prst="rect">
+            <a:avLst/>
+          </a:prstGeom>
+        </p:spPr>
+        <p:txBody>
+          <a:bodyPr xmlns:a="http://schemas.openxmlformats.org/drawingml/2006/main" wrap="square" lIns="0" tIns="0" rIns="0" bIns="0" anchor="t">
+            <a:noAutofit/>
+          </a:bodyPr>
+          <a:lstStyle xmlns:a="http://schemas.openxmlformats.org/drawingml/2006/main"/>
+          <a:p xmlns:a="http://schemas.openxmlformats.org/drawingml/2006/main">
+            <a:pPr algn="l">
+              <a:defRPr sz="1800" b="1">
+                <a:solidFill>
+                  <a:srgbClr val="D4515D"/>
+                </a:solidFill>
+                <a:latin typeface="Consolas"/>
+                <a:ea typeface="Consolas"/>
+                <a:cs typeface="Consolas"/>
+              </a:defRPr>
+            </a:pPr>
+            <a:r>
+              <a:t>v0.2.1</a:t>
+            </a:r>
+          </a:p>
+        </p:txBody>
+      </p:sp>
+      <p:sp>
+        <p:nvSpPr>
+          <p:cNvPr id="9" name="s11-v021-k">
+            <a:extLst xmlns:a="http://schemas.openxmlformats.org/drawingml/2006/main">
+              <a:ext uri="{FF2B5EF4-FFF2-40B4-BE49-F238E27FC236}">
+                <a16:creationId xmlns:a16="http://schemas.microsoft.com/office/drawing/2014/main" id="{769D4808-93E3-45FD-ACC6-DFAC96AC5BE4}"/>
+              </a:ext>
+            </a:extLst>
+          </p:cNvPr>
+          <p:cNvSpPr>
+            <a:spLocks xmlns:a="http://schemas.openxmlformats.org/drawingml/2006/main" noGrp="1"/>
+          </p:cNvSpPr>
+          <p:nvPr/>
+        </p:nvSpPr>
+        <p:spPr>
+          <a:xfrm xmlns:a="http://schemas.openxmlformats.org/drawingml/2006/main">
+            <a:off x="819150" y="2628900"/>
+            <a:ext cx="2628900" cy="209550"/>
+          </a:xfrm>
+          <a:prstGeom xmlns:a="http://schemas.openxmlformats.org/drawingml/2006/main" prst="rect">
+            <a:avLst/>
+          </a:prstGeom>
+        </p:spPr>
+        <p:txBody>
+          <a:bodyPr xmlns:a="http://schemas.openxmlformats.org/drawingml/2006/main" wrap="square" lIns="0" tIns="0" rIns="0" bIns="0" anchor="t">
+            <a:noAutofit/>
+          </a:bodyPr>
+          <a:lstStyle xmlns:a="http://schemas.openxmlformats.org/drawingml/2006/main"/>
+          <a:p xmlns:a="http://schemas.openxmlformats.org/drawingml/2006/main">
+            <a:pPr algn="l">
+              <a:defRPr sz="1050" b="1">
+                <a:solidFill>
+                  <a:srgbClr val="D4515D"/>
+                </a:solidFill>
+                <a:latin typeface="Arial"/>
+                <a:ea typeface="Arial"/>
+                <a:cs typeface="Arial"/>
+              </a:defRPr>
+            </a:pPr>
+            <a:r>
+              <a:t>OBSERVED</a:t>
+            </a:r>
+          </a:p>
+        </p:txBody>
+      </p:sp>
+      <p:sp>
+        <p:nvSpPr>
+          <p:cNvPr id="10" name="s11-v021-v">
+            <a:extLst xmlns:a="http://schemas.openxmlformats.org/drawingml/2006/main">
+              <a:ext uri="{FF2B5EF4-FFF2-40B4-BE49-F238E27FC236}">
+                <a16:creationId xmlns:a16="http://schemas.microsoft.com/office/drawing/2014/main" id="{54E92467-F678-457C-9126-17FE84A2D4B1}"/>
+              </a:ext>
+            </a:extLst>
+          </p:cNvPr>
+          <p:cNvSpPr>
+            <a:spLocks xmlns:a="http://schemas.openxmlformats.org/drawingml/2006/main" noGrp="1"/>
+          </p:cNvSpPr>
+          <p:nvPr/>
+        </p:nvSpPr>
+        <p:spPr>
+          <a:xfrm xmlns:a="http://schemas.openxmlformats.org/drawingml/2006/main">
+            <a:off x="819150" y="2990850"/>
+            <a:ext cx="2628900" cy="1123950"/>
+          </a:xfrm>
+          <a:prstGeom xmlns:a="http://schemas.openxmlformats.org/drawingml/2006/main" prst="rect">
+            <a:avLst/>
+          </a:prstGeom>
+        </p:spPr>
+        <p:txBody>
+          <a:bodyPr xmlns:a="http://schemas.openxmlformats.org/drawingml/2006/main" wrap="square" lIns="0" tIns="0" rIns="0" bIns="0" anchor="t">
+            <a:noAutofit/>
+          </a:bodyPr>
+          <a:lstStyle xmlns:a="http://schemas.openxmlformats.org/drawingml/2006/main"/>
+          <a:p xmlns:a="http://schemas.openxmlformats.org/drawingml/2006/main">
+            <a:pPr algn="l">
+              <a:defRPr sz="1500" b="0">
+                <a:solidFill>
+                  <a:srgbClr val="0A1224"/>
+                </a:solidFill>
+                <a:latin typeface="Arial"/>
+                <a:ea typeface="Arial"/>
+                <a:cs typeface="Arial"/>
+              </a:defRPr>
+            </a:pPr>
+            <a:r>
+              <a:t>Adaptive selected Full Palace but returned zero memory items in all four useful-memory trials.</a:t>
+            </a:r>
+          </a:p>
+        </p:txBody>
+      </p:sp>
+      <p:sp>
+        <p:nvSpPr>
+          <p:cNvPr id="11" name="s11-v021-foot">
+            <a:extLst xmlns:a="http://schemas.openxmlformats.org/drawingml/2006/main">
+              <a:ext uri="{FF2B5EF4-FFF2-40B4-BE49-F238E27FC236}">
+                <a16:creationId xmlns:a16="http://schemas.microsoft.com/office/drawing/2014/main" id="{0EBD8997-0292-4ADB-A6BA-E182AF1678A9}"/>
+              </a:ext>
+            </a:extLst>
+          </p:cNvPr>
+          <p:cNvSpPr>
+            <a:spLocks xmlns:a="http://schemas.openxmlformats.org/drawingml/2006/main" noGrp="1"/>
+          </p:cNvSpPr>
+          <p:nvPr/>
+        </p:nvSpPr>
+        <p:spPr>
+          <a:xfrm xmlns:a="http://schemas.openxmlformats.org/drawingml/2006/main">
+            <a:off x="819150" y="4400550"/>
+            <a:ext cx="2628900" cy="266700"/>
+          </a:xfrm>
+          <a:prstGeom xmlns:a="http://schemas.openxmlformats.org/drawingml/2006/main" prst="rect">
+            <a:avLst/>
+          </a:prstGeom>
+        </p:spPr>
+        <p:txBody>
+          <a:bodyPr xmlns:a="http://schemas.openxmlformats.org/drawingml/2006/main" wrap="square" lIns="0" tIns="0" rIns="0" bIns="0" anchor="t">
+            <a:noAutofit/>
+          </a:bodyPr>
+          <a:lstStyle xmlns:a="http://schemas.openxmlformats.org/drawingml/2006/main"/>
+          <a:p xmlns:a="http://schemas.openxmlformats.org/drawingml/2006/main">
+            <a:pPr algn="l">
+              <a:defRPr sz="1275" b="1">
+                <a:solidFill>
+                  <a:srgbClr val="526071"/>
+                </a:solidFill>
+                <a:latin typeface="Arial"/>
+                <a:ea typeface="Arial"/>
+                <a:cs typeface="Arial"/>
+              </a:defRPr>
+            </a:pPr>
+            <a:r>
+              <a:t>Deterministic omission</a:t>
+            </a:r>
+          </a:p>
+        </p:txBody>
+      </p:sp>
+      <p:sp>
+        <p:nvSpPr>
+          <p:cNvPr id="12" name="s11-v022">
+            <a:extLst xmlns:a="http://schemas.openxmlformats.org/drawingml/2006/main">
+              <a:ext uri="{FF2B5EF4-FFF2-40B4-BE49-F238E27FC236}">
+                <a16:creationId xmlns:a16="http://schemas.microsoft.com/office/drawing/2014/main" id="{F7128CA6-8297-422D-A72D-11C09FCAF2D4}"/>
+              </a:ext>
+            </a:extLst>
+          </p:cNvPr>
+          <p:cNvSpPr>
+            <a:spLocks xmlns:a="http://schemas.openxmlformats.org/drawingml/2006/main" noGrp="1"/>
+          </p:cNvSpPr>
+          <p:nvPr/>
+        </p:nvSpPr>
+        <p:spPr>
+          <a:xfrm xmlns:a="http://schemas.openxmlformats.org/drawingml/2006/main">
+            <a:off x="4514850" y="1885950"/>
+            <a:ext cx="3162300" cy="3028950"/>
+          </a:xfrm>
+          <a:prstGeom xmlns:a="http://schemas.openxmlformats.org/drawingml/2006/main" prst="roundRect">
+            <a:avLst>
+              <a:gd name="adj" fmla="val 2516"/>
+            </a:avLst>
+          </a:prstGeom>
+          <a:solidFill xmlns:a="http://schemas.openxmlformats.org/drawingml/2006/main">
+            <a:srgbClr val="EAF1FF"/>
+          </a:solidFill>
+          <a:ln xmlns:a="http://schemas.openxmlformats.org/drawingml/2006/main" w="0">
+            <a:solidFill>
+              <a:srgbClr val="EAF1FF"/>
+            </a:solidFill>
+            <a:prstDash val="solid"/>
+          </a:ln>
+        </p:spPr>
+      </p:sp>
+      <p:sp>
+        <p:nvSpPr>
+          <p:cNvPr id="13" name="s11-v022-version">
+            <a:extLst xmlns:a="http://schemas.openxmlformats.org/drawingml/2006/main">
+              <a:ext uri="{FF2B5EF4-FFF2-40B4-BE49-F238E27FC236}">
+                <a16:creationId xmlns:a16="http://schemas.microsoft.com/office/drawing/2014/main" id="{7F20BEBC-2622-4786-AB9A-554564C38E95}"/>
+              </a:ext>
+            </a:extLst>
+          </p:cNvPr>
+          <p:cNvSpPr>
+            <a:spLocks xmlns:a="http://schemas.openxmlformats.org/drawingml/2006/main" noGrp="1"/>
+          </p:cNvSpPr>
+          <p:nvPr/>
+        </p:nvSpPr>
+        <p:spPr>
+          <a:xfrm xmlns:a="http://schemas.openxmlformats.org/drawingml/2006/main">
+            <a:off x="4781550" y="2133600"/>
+            <a:ext cx="2628900" cy="342900"/>
+          </a:xfrm>
+          <a:prstGeom xmlns:a="http://schemas.openxmlformats.org/drawingml/2006/main" prst="rect">
+            <a:avLst/>
+          </a:prstGeom>
+        </p:spPr>
+        <p:txBody>
+          <a:bodyPr xmlns:a="http://schemas.openxmlformats.org/drawingml/2006/main" wrap="square" lIns="0" tIns="0" rIns="0" bIns="0" anchor="t">
+            <a:noAutofit/>
+          </a:bodyPr>
+          <a:lstStyle xmlns:a="http://schemas.openxmlformats.org/drawingml/2006/main"/>
+          <a:p xmlns:a="http://schemas.openxmlformats.org/drawingml/2006/main">
+            <a:pPr algn="l">
+              <a:defRPr sz="1800" b="1">
+                <a:solidFill>
+                  <a:srgbClr val="1677FF"/>
+                </a:solidFill>
+                <a:latin typeface="Consolas"/>
+                <a:ea typeface="Consolas"/>
+                <a:cs typeface="Consolas"/>
+              </a:defRPr>
+            </a:pPr>
+            <a:r>
+              <a:t>v0.2.2</a:t>
+            </a:r>
+          </a:p>
+        </p:txBody>
+      </p:sp>
+      <p:sp>
+        <p:nvSpPr>
+          <p:cNvPr id="14" name="s11-v022-k">
+            <a:extLst xmlns:a="http://schemas.openxmlformats.org/drawingml/2006/main">
+              <a:ext uri="{FF2B5EF4-FFF2-40B4-BE49-F238E27FC236}">
+                <a16:creationId xmlns:a16="http://schemas.microsoft.com/office/drawing/2014/main" id="{11FFB495-AB85-4C43-A30E-C52F075E1796}"/>
+              </a:ext>
+            </a:extLst>
+          </p:cNvPr>
+          <p:cNvSpPr>
+            <a:spLocks xmlns:a="http://schemas.openxmlformats.org/drawingml/2006/main" noGrp="1"/>
+          </p:cNvSpPr>
+          <p:nvPr/>
+        </p:nvSpPr>
+        <p:spPr>
+          <a:xfrm xmlns:a="http://schemas.openxmlformats.org/drawingml/2006/main">
+            <a:off x="4781550" y="2628900"/>
+            <a:ext cx="2628900" cy="209550"/>
+          </a:xfrm>
+          <a:prstGeom xmlns:a="http://schemas.openxmlformats.org/drawingml/2006/main" prst="rect">
+            <a:avLst/>
+          </a:prstGeom>
+        </p:spPr>
+        <p:txBody>
+          <a:bodyPr xmlns:a="http://schemas.openxmlformats.org/drawingml/2006/main" wrap="square" lIns="0" tIns="0" rIns="0" bIns="0" anchor="t">
+            <a:noAutofit/>
+          </a:bodyPr>
+          <a:lstStyle xmlns:a="http://schemas.openxmlformats.org/drawingml/2006/main"/>
+          <a:p xmlns:a="http://schemas.openxmlformats.org/drawingml/2006/main">
+            <a:pPr algn="l">
+              <a:defRPr sz="1050" b="1">
+                <a:solidFill>
+                  <a:srgbClr val="1677FF"/>
+                </a:solidFill>
+                <a:latin typeface="Arial"/>
+                <a:ea typeface="Arial"/>
+                <a:cs typeface="Arial"/>
+              </a:defRPr>
+            </a:pPr>
+            <a:r>
+              <a:t>FIXED</a:t>
+            </a:r>
+          </a:p>
+        </p:txBody>
+      </p:sp>
+      <p:sp>
+        <p:nvSpPr>
+          <p:cNvPr id="15" name="s11-v022-v">
+            <a:extLst xmlns:a="http://schemas.openxmlformats.org/drawingml/2006/main">
+              <a:ext uri="{FF2B5EF4-FFF2-40B4-BE49-F238E27FC236}">
+                <a16:creationId xmlns:a16="http://schemas.microsoft.com/office/drawing/2014/main" id="{A85BD346-5662-4797-BE51-A1A4265AB6B3}"/>
+              </a:ext>
+            </a:extLst>
+          </p:cNvPr>
+          <p:cNvSpPr>
+            <a:spLocks xmlns:a="http://schemas.openxmlformats.org/drawingml/2006/main" noGrp="1"/>
+          </p:cNvSpPr>
+          <p:nvPr/>
+        </p:nvSpPr>
+        <p:spPr>
+          <a:xfrm xmlns:a="http://schemas.openxmlformats.org/drawingml/2006/main">
+            <a:off x="4781550" y="2990850"/>
+            <a:ext cx="2628900" cy="1123950"/>
+          </a:xfrm>
+          <a:prstGeom xmlns:a="http://schemas.openxmlformats.org/drawingml/2006/main" prst="rect">
+            <a:avLst/>
+          </a:prstGeom>
+        </p:spPr>
+        <p:txBody>
+          <a:bodyPr xmlns:a="http://schemas.openxmlformats.org/drawingml/2006/main" wrap="square" lIns="0" tIns="0" rIns="0" bIns="0" anchor="t">
+            <a:noAutofit/>
+          </a:bodyPr>
+          <a:lstStyle xmlns:a="http://schemas.openxmlformats.org/drawingml/2006/main"/>
+          <a:p xmlns:a="http://schemas.openxmlformats.org/drawingml/2006/main">
+            <a:pPr algn="l">
+              <a:defRPr sz="1500" b="0">
+                <a:solidFill>
+                  <a:srgbClr val="0A1224"/>
+                </a:solidFill>
+                <a:latin typeface="Arial"/>
+                <a:ea typeface="Arial"/>
+                <a:cs typeface="Arial"/>
+              </a:defRPr>
+            </a:pPr>
+            <a:r>
+              <a:t>Full Palace gained scoped-summary memory, JSON delivery, guardrails, and a regression contract.</a:t>
+            </a:r>
+          </a:p>
+        </p:txBody>
+      </p:sp>
+      <p:sp>
+        <p:nvSpPr>
+          <p:cNvPr id="16" name="s11-v022-foot">
+            <a:extLst xmlns:a="http://schemas.openxmlformats.org/drawingml/2006/main">
+              <a:ext uri="{FF2B5EF4-FFF2-40B4-BE49-F238E27FC236}">
+                <a16:creationId xmlns:a16="http://schemas.microsoft.com/office/drawing/2014/main" id="{A4FB5D8E-EE16-42BE-A2F4-755A55C425BA}"/>
+              </a:ext>
+            </a:extLst>
+          </p:cNvPr>
+          <p:cNvSpPr>
+            <a:spLocks xmlns:a="http://schemas.openxmlformats.org/drawingml/2006/main" noGrp="1"/>
+          </p:cNvSpPr>
+          <p:nvPr/>
+        </p:nvSpPr>
+        <p:spPr>
+          <a:xfrm xmlns:a="http://schemas.openxmlformats.org/drawingml/2006/main">
+            <a:off x="4781550" y="4400550"/>
+            <a:ext cx="2628900" cy="400050"/>
+          </a:xfrm>
+          <a:prstGeom xmlns:a="http://schemas.openxmlformats.org/drawingml/2006/main" prst="rect">
+            <a:avLst/>
+          </a:prstGeom>
+        </p:spPr>
+        <p:txBody>
+          <a:bodyPr xmlns:a="http://schemas.openxmlformats.org/drawingml/2006/main" wrap="square" lIns="0" tIns="0" rIns="0" bIns="0" anchor="t">
+            <a:noAutofit/>
+          </a:bodyPr>
+          <a:lstStyle xmlns:a="http://schemas.openxmlformats.org/drawingml/2006/main"/>
+          <a:p xmlns:a="http://schemas.openxmlformats.org/drawingml/2006/main">
+            <a:pPr algn="l">
+              <a:defRPr sz="1275" b="1">
+                <a:solidFill>
+                  <a:srgbClr val="526071"/>
+                </a:solidFill>
+                <a:latin typeface="Arial"/>
+                <a:ea typeface="Arial"/>
+                <a:cs typeface="Arial"/>
+              </a:defRPr>
+            </a:pPr>
+            <a:r>
+              <a:t>Clean + registry fixtures passed</a:t>
+            </a:r>
+          </a:p>
+        </p:txBody>
+      </p:sp>
+      <p:sp>
+        <p:nvSpPr>
+          <p:cNvPr id="17" name="s11-v023">
+            <a:extLst xmlns:a="http://schemas.openxmlformats.org/drawingml/2006/main">
+              <a:ext uri="{FF2B5EF4-FFF2-40B4-BE49-F238E27FC236}">
+                <a16:creationId xmlns:a16="http://schemas.microsoft.com/office/drawing/2014/main" id="{5BC670E5-D560-47C6-A324-23B136F71441}"/>
+              </a:ext>
+            </a:extLst>
+          </p:cNvPr>
+          <p:cNvSpPr>
+            <a:spLocks xmlns:a="http://schemas.openxmlformats.org/drawingml/2006/main" noGrp="1"/>
+          </p:cNvSpPr>
+          <p:nvPr/>
+        </p:nvSpPr>
+        <p:spPr>
+          <a:xfrm xmlns:a="http://schemas.openxmlformats.org/drawingml/2006/main">
+            <a:off x="8477250" y="1885950"/>
+            <a:ext cx="3162300" cy="3028950"/>
+          </a:xfrm>
+          <a:prstGeom xmlns:a="http://schemas.openxmlformats.org/drawingml/2006/main" prst="roundRect">
+            <a:avLst>
+              <a:gd name="adj" fmla="val 2516"/>
+            </a:avLst>
+          </a:prstGeom>
+          <a:solidFill xmlns:a="http://schemas.openxmlformats.org/drawingml/2006/main">
+            <a:srgbClr val="E9F7F2"/>
+          </a:solidFill>
+          <a:ln xmlns:a="http://schemas.openxmlformats.org/drawingml/2006/main" w="0">
+            <a:solidFill>
+              <a:srgbClr val="E9F7F2"/>
+            </a:solidFill>
+            <a:prstDash val="solid"/>
+          </a:ln>
+        </p:spPr>
+      </p:sp>
+      <p:sp>
+        <p:nvSpPr>
+          <p:cNvPr id="18" name="s11-v023-version">
+            <a:extLst xmlns:a="http://schemas.openxmlformats.org/drawingml/2006/main">
+              <a:ext uri="{FF2B5EF4-FFF2-40B4-BE49-F238E27FC236}">
+                <a16:creationId xmlns:a16="http://schemas.microsoft.com/office/drawing/2014/main" id="{16D8B433-F53F-443F-A568-5350E38BCEB0}"/>
+              </a:ext>
+            </a:extLst>
+          </p:cNvPr>
+          <p:cNvSpPr>
+            <a:spLocks xmlns:a="http://schemas.openxmlformats.org/drawingml/2006/main" noGrp="1"/>
+          </p:cNvSpPr>
+          <p:nvPr/>
+        </p:nvSpPr>
+        <p:spPr>
+          <a:xfrm xmlns:a="http://schemas.openxmlformats.org/drawingml/2006/main">
+            <a:off x="8743950" y="2133600"/>
+            <a:ext cx="2628900" cy="342900"/>
+          </a:xfrm>
+          <a:prstGeom xmlns:a="http://schemas.openxmlformats.org/drawingml/2006/main" prst="rect">
+            <a:avLst/>
+          </a:prstGeom>
+        </p:spPr>
+        <p:txBody>
+          <a:bodyPr xmlns:a="http://schemas.openxmlformats.org/drawingml/2006/main" wrap="square" lIns="0" tIns="0" rIns="0" bIns="0" anchor="t">
+            <a:noAutofit/>
+          </a:bodyPr>
+          <a:lstStyle xmlns:a="http://schemas.openxmlformats.org/drawingml/2006/main"/>
+          <a:p xmlns:a="http://schemas.openxmlformats.org/drawingml/2006/main">
+            <a:pPr algn="l">
+              <a:defRPr sz="1800" b="1">
+                <a:solidFill>
+                  <a:srgbClr val="15A777"/>
+                </a:solidFill>
+                <a:latin typeface="Consolas"/>
+                <a:ea typeface="Consolas"/>
+                <a:cs typeface="Consolas"/>
+              </a:defRPr>
+            </a:pPr>
+            <a:r>
+              <a:t>v0.2.3</a:t>
+            </a:r>
+          </a:p>
+        </p:txBody>
+      </p:sp>
+      <p:sp>
+        <p:nvSpPr>
+          <p:cNvPr id="19" name="s11-v023-k">
+            <a:extLst xmlns:a="http://schemas.openxmlformats.org/drawingml/2006/main">
+              <a:ext uri="{FF2B5EF4-FFF2-40B4-BE49-F238E27FC236}">
+                <a16:creationId xmlns:a16="http://schemas.microsoft.com/office/drawing/2014/main" id="{CE18DF38-FC56-44A1-BF95-3D3B09E0D9B6}"/>
+              </a:ext>
+            </a:extLst>
+          </p:cNvPr>
+          <p:cNvSpPr>
+            <a:spLocks xmlns:a="http://schemas.openxmlformats.org/drawingml/2006/main" noGrp="1"/>
+          </p:cNvSpPr>
+          <p:nvPr/>
+        </p:nvSpPr>
+        <p:spPr>
+          <a:xfrm xmlns:a="http://schemas.openxmlformats.org/drawingml/2006/main">
+            <a:off x="8743950" y="2628900"/>
+            <a:ext cx="2628900" cy="209550"/>
+          </a:xfrm>
+          <a:prstGeom xmlns:a="http://schemas.openxmlformats.org/drawingml/2006/main" prst="rect">
+            <a:avLst/>
+          </a:prstGeom>
+        </p:spPr>
+        <p:txBody>
+          <a:bodyPr xmlns:a="http://schemas.openxmlformats.org/drawingml/2006/main" wrap="square" lIns="0" tIns="0" rIns="0" bIns="0" anchor="t">
+            <a:noAutofit/>
+          </a:bodyPr>
+          <a:lstStyle xmlns:a="http://schemas.openxmlformats.org/drawingml/2006/main"/>
+          <a:p xmlns:a="http://schemas.openxmlformats.org/drawingml/2006/main">
+            <a:pPr algn="l">
+              <a:defRPr sz="1050" b="1">
+                <a:solidFill>
+                  <a:srgbClr val="15A777"/>
+                </a:solidFill>
+                <a:latin typeface="Arial"/>
+                <a:ea typeface="Arial"/>
+                <a:cs typeface="Arial"/>
+              </a:defRPr>
+            </a:pPr>
+            <a:r>
+              <a:t>GENERALIZED</a:t>
+            </a:r>
+          </a:p>
+        </p:txBody>
+      </p:sp>
+      <p:sp>
+        <p:nvSpPr>
+          <p:cNvPr id="20" name="s11-v023-v">
+            <a:extLst xmlns:a="http://schemas.openxmlformats.org/drawingml/2006/main">
+              <a:ext uri="{FF2B5EF4-FFF2-40B4-BE49-F238E27FC236}">
+                <a16:creationId xmlns:a16="http://schemas.microsoft.com/office/drawing/2014/main" id="{7D5B8906-F7A2-45A0-BAF6-81DBCA9905D1}"/>
+              </a:ext>
+            </a:extLst>
+          </p:cNvPr>
+          <p:cNvSpPr>
+            <a:spLocks xmlns:a="http://schemas.openxmlformats.org/drawingml/2006/main" noGrp="1"/>
+          </p:cNvSpPr>
+          <p:nvPr/>
+        </p:nvSpPr>
+        <p:spPr>
+          <a:xfrm xmlns:a="http://schemas.openxmlformats.org/drawingml/2006/main">
+            <a:off x="8743950" y="2990850"/>
+            <a:ext cx="2628900" cy="1123950"/>
+          </a:xfrm>
+          <a:prstGeom xmlns:a="http://schemas.openxmlformats.org/drawingml/2006/main" prst="rect">
+            <a:avLst/>
+          </a:prstGeom>
+        </p:spPr>
+        <p:txBody>
+          <a:bodyPr xmlns:a="http://schemas.openxmlformats.org/drawingml/2006/main" wrap="square" lIns="0" tIns="0" rIns="0" bIns="0" anchor="t">
+            <a:noAutofit/>
+          </a:bodyPr>
+          <a:lstStyle xmlns:a="http://schemas.openxmlformats.org/drawingml/2006/main"/>
+          <a:p xmlns:a="http://schemas.openxmlformats.org/drawingml/2006/main">
+            <a:pPr algn="l">
+              <a:defRPr sz="1500" b="0">
+                <a:solidFill>
+                  <a:srgbClr val="0A1224"/>
+                </a:solidFill>
+                <a:latin typeface="Arial"/>
+                <a:ea typeface="Arial"/>
+                <a:cs typeface="Arial"/>
+              </a:defRPr>
+            </a:pPr>
+            <a:r>
+              <a:t>Release routing now covers npm, Codex plugins, PyPI, Chinese intent, negative controls, and CI.</a:t>
+            </a:r>
+          </a:p>
+        </p:txBody>
+      </p:sp>
+      <p:sp>
+        <p:nvSpPr>
+          <p:cNvPr id="21" name="s11-v023-foot">
+            <a:extLst xmlns:a="http://schemas.openxmlformats.org/drawingml/2006/main">
+              <a:ext uri="{FF2B5EF4-FFF2-40B4-BE49-F238E27FC236}">
+                <a16:creationId xmlns:a16="http://schemas.microsoft.com/office/drawing/2014/main" id="{FF7F3158-1467-40B9-AB4E-C33913EA61CA}"/>
+              </a:ext>
+            </a:extLst>
+          </p:cNvPr>
+          <p:cNvSpPr>
+            <a:spLocks xmlns:a="http://schemas.openxmlformats.org/drawingml/2006/main" noGrp="1"/>
+          </p:cNvSpPr>
+          <p:nvPr/>
+        </p:nvSpPr>
+        <p:spPr>
+          <a:xfrm xmlns:a="http://schemas.openxmlformats.org/drawingml/2006/main">
+            <a:off x="8743950" y="4400550"/>
+            <a:ext cx="2628900" cy="400050"/>
+          </a:xfrm>
+          <a:prstGeom xmlns:a="http://schemas.openxmlformats.org/drawingml/2006/main" prst="rect">
+            <a:avLst/>
+          </a:prstGeom>
+        </p:spPr>
+        <p:txBody>
+          <a:bodyPr xmlns:a="http://schemas.openxmlformats.org/drawingml/2006/main" wrap="square" lIns="0" tIns="0" rIns="0" bIns="0" anchor="t">
+            <a:noAutofit/>
+          </a:bodyPr>
+          <a:lstStyle xmlns:a="http://schemas.openxmlformats.org/drawingml/2006/main"/>
+          <a:p xmlns:a="http://schemas.openxmlformats.org/drawingml/2006/main">
+            <a:pPr algn="l">
+              <a:defRPr sz="1275" b="1">
+                <a:solidFill>
+                  <a:srgbClr val="526071"/>
+                </a:solidFill>
+                <a:latin typeface="Arial"/>
+                <a:ea typeface="Arial"/>
+                <a:cs typeface="Arial"/>
+              </a:defRPr>
+            </a:pPr>
+            <a:r>
+              <a:t>Matrix + distribution gates</a:t>
+            </a:r>
+          </a:p>
+        </p:txBody>
+      </p:sp>
+      <p:sp>
+        <p:nvSpPr>
+          <p:cNvPr id="22" name="s11-takeaway">
+            <a:extLst xmlns:a="http://schemas.openxmlformats.org/drawingml/2006/main">
+              <a:ext uri="{FF2B5EF4-FFF2-40B4-BE49-F238E27FC236}">
+                <a16:creationId xmlns:a16="http://schemas.microsoft.com/office/drawing/2014/main" id="{1C4ED290-D53C-48DE-99E8-9A848A78F878}"/>
+              </a:ext>
+            </a:extLst>
+          </p:cNvPr>
+          <p:cNvSpPr>
+            <a:spLocks xmlns:a="http://schemas.openxmlformats.org/drawingml/2006/main" noGrp="1"/>
+          </p:cNvSpPr>
+          <p:nvPr/>
+        </p:nvSpPr>
+        <p:spPr>
+          <a:xfrm xmlns:a="http://schemas.openxmlformats.org/drawingml/2006/main">
+            <a:off x="552450" y="5181600"/>
+            <a:ext cx="11087100" cy="704850"/>
+          </a:xfrm>
+          <a:prstGeom xmlns:a="http://schemas.openxmlformats.org/drawingml/2006/main" prst="roundRect">
+            <a:avLst>
+              <a:gd name="adj" fmla="val 10811"/>
             </a:avLst>
           </a:prstGeom>
           <a:solidFill xmlns:a="http://schemas.openxmlformats.org/drawingml/2006/main">
@@ -4354,35 +6299,35 @@
       </p:sp>
       <p:sp>
         <p:nvSpPr>
-          <p:cNvPr id="6" name="s12-command">
-            <a:extLst xmlns:a="http://schemas.openxmlformats.org/drawingml/2006/main">
-              <a:ext uri="{FF2B5EF4-FFF2-40B4-BE49-F238E27FC236}">
-                <a16:creationId xmlns:a16="http://schemas.microsoft.com/office/drawing/2014/main" id="{2992E9B3-BF30-4920-A752-7BB07323FB4F}"/>
-              </a:ext>
-            </a:extLst>
-          </p:cNvPr>
-          <p:cNvSpPr>
-            <a:spLocks xmlns:a="http://schemas.openxmlformats.org/drawingml/2006/main" noGrp="1"/>
-          </p:cNvSpPr>
-          <p:nvPr/>
-        </p:nvSpPr>
-        <p:spPr>
-          <a:xfrm xmlns:a="http://schemas.openxmlformats.org/drawingml/2006/main">
-            <a:off x="6819900" y="1714500"/>
-            <a:ext cx="4171950" cy="819150"/>
-          </a:xfrm>
-          <a:prstGeom xmlns:a="http://schemas.openxmlformats.org/drawingml/2006/main" prst="rect">
-            <a:avLst/>
-          </a:prstGeom>
-        </p:spPr>
-        <p:txBody>
-          <a:bodyPr xmlns:a="http://schemas.openxmlformats.org/drawingml/2006/main" wrap="square" lIns="0" tIns="0" rIns="0" bIns="0" anchor="t">
-            <a:noAutofit/>
-          </a:bodyPr>
-          <a:lstStyle xmlns:a="http://schemas.openxmlformats.org/drawingml/2006/main"/>
-          <a:p xmlns:a="http://schemas.openxmlformats.org/drawingml/2006/main">
-            <a:pPr algn="l">
-              <a:defRPr sz="1800" b="1">
+          <p:cNvPr id="23" name="s11-takeaway-v">
+            <a:extLst xmlns:a="http://schemas.openxmlformats.org/drawingml/2006/main">
+              <a:ext uri="{FF2B5EF4-FFF2-40B4-BE49-F238E27FC236}">
+                <a16:creationId xmlns:a16="http://schemas.microsoft.com/office/drawing/2014/main" id="{ADAB4E87-6473-42CD-B34E-6559AE70B770}"/>
+              </a:ext>
+            </a:extLst>
+          </p:cNvPr>
+          <p:cNvSpPr>
+            <a:spLocks xmlns:a="http://schemas.openxmlformats.org/drawingml/2006/main" noGrp="1"/>
+          </p:cNvSpPr>
+          <p:nvPr/>
+        </p:nvSpPr>
+        <p:spPr>
+          <a:xfrm xmlns:a="http://schemas.openxmlformats.org/drawingml/2006/main">
+            <a:off x="819150" y="5372100"/>
+            <a:ext cx="10553700" cy="323850"/>
+          </a:xfrm>
+          <a:prstGeom xmlns:a="http://schemas.openxmlformats.org/drawingml/2006/main" prst="rect">
+            <a:avLst/>
+          </a:prstGeom>
+        </p:spPr>
+        <p:txBody>
+          <a:bodyPr xmlns:a="http://schemas.openxmlformats.org/drawingml/2006/main" wrap="square" lIns="0" tIns="0" rIns="0" bIns="0" anchor="t">
+            <a:noAutofit/>
+          </a:bodyPr>
+          <a:lstStyle xmlns:a="http://schemas.openxmlformats.org/drawingml/2006/main"/>
+          <a:p xmlns:a="http://schemas.openxmlformats.org/drawingml/2006/main">
+            <a:pPr algn="ctr">
+              <a:defRPr sz="1725" b="1">
                 <a:solidFill>
                   <a:srgbClr val="FFFFFF"/>
                 </a:solidFill>
@@ -4392,45 +6337,379 @@
               </a:defRPr>
             </a:pPr>
             <a:r>
-              <a:t>npm install -g
-vertex-palace@0.2.3</a:t>
-            </a:r>
-          </a:p>
-        </p:txBody>
-      </p:sp>
-      <p:sp>
-        <p:nvSpPr>
-          <p:cNvPr id="7" name="s12-github">
-            <a:extLst xmlns:a="http://schemas.openxmlformats.org/drawingml/2006/main">
-              <a:ext uri="{FF2B5EF4-FFF2-40B4-BE49-F238E27FC236}">
-                <a16:creationId xmlns:a16="http://schemas.microsoft.com/office/drawing/2014/main" id="{558A031B-9900-48FB-9760-7AD6F2000755}"/>
-              </a:ext>
-            </a:extLst>
-          </p:cNvPr>
-          <p:cNvSpPr>
-            <a:spLocks xmlns:a="http://schemas.openxmlformats.org/drawingml/2006/main" noGrp="1"/>
-          </p:cNvSpPr>
-          <p:nvPr/>
-        </p:nvSpPr>
-        <p:spPr>
-          <a:xfrm xmlns:a="http://schemas.openxmlformats.org/drawingml/2006/main">
-            <a:off x="6477000" y="3352800"/>
-            <a:ext cx="4857750" cy="342900"/>
-          </a:xfrm>
-          <a:prstGeom xmlns:a="http://schemas.openxmlformats.org/drawingml/2006/main" prst="rect">
-            <a:avLst/>
-          </a:prstGeom>
-        </p:spPr>
-        <p:txBody>
-          <a:bodyPr xmlns:a="http://schemas.openxmlformats.org/drawingml/2006/main" wrap="square" lIns="0" tIns="0" rIns="0" bIns="0" anchor="t">
-            <a:noAutofit/>
-          </a:bodyPr>
-          <a:lstStyle xmlns:a="http://schemas.openxmlformats.org/drawingml/2006/main"/>
-          <a:p xmlns:a="http://schemas.openxmlformats.org/drawingml/2006/main">
-            <a:pPr algn="l">
-              <a:defRPr sz="1575" b="1">
+              <a:t>OBSERVE  -&gt;  FIX  -&gt;  REGRESSION TEST  -&gt;  RELEASE GATE</a:t>
+            </a:r>
+          </a:p>
+        </p:txBody>
+      </p:sp>
+      <p:cxnSp>
+        <p:nvCxnSpPr>
+          <p:cNvPr id="50" name="footer-rule-11"/>
+          <p:cNvCxnSpPr/>
+          <p:nvPr/>
+        </p:nvCxnSpPr>
+        <p:spPr>
+          <a:xfrm xmlns:a="http://schemas.openxmlformats.org/drawingml/2006/main">
+            <a:off x="400050" y="6162675"/>
+            <a:ext cx="11391900" cy="953"/>
+          </a:xfrm>
+          <a:prstGeom xmlns:a="http://schemas.openxmlformats.org/drawingml/2006/main" prst="straightConnector1">
+            <a:avLst/>
+          </a:prstGeom>
+          <a:ln xmlns:a="http://schemas.openxmlformats.org/drawingml/2006/main" w="9525">
+            <a:solidFill>
+              <a:srgbClr val="B8BCC4"/>
+            </a:solidFill>
+            <a:prstDash val="solid"/>
+          </a:ln>
+        </p:spPr>
+      </p:cxnSp>
+      <p:sp>
+        <p:nvSpPr>
+          <p:cNvPr id="25" name="footer-source-11">
+            <a:extLst xmlns:a="http://schemas.openxmlformats.org/drawingml/2006/main">
+              <a:ext uri="{FF2B5EF4-FFF2-40B4-BE49-F238E27FC236}">
+                <a16:creationId xmlns:a16="http://schemas.microsoft.com/office/drawing/2014/main" id="{96B4C671-562D-4C17-AA35-944604EFF3FF}"/>
+              </a:ext>
+            </a:extLst>
+          </p:cNvPr>
+          <p:cNvSpPr>
+            <a:spLocks xmlns:a="http://schemas.openxmlformats.org/drawingml/2006/main" noGrp="1"/>
+          </p:cNvSpPr>
+          <p:nvPr/>
+        </p:nvSpPr>
+        <p:spPr>
+          <a:xfrm xmlns:a="http://schemas.openxmlformats.org/drawingml/2006/main">
+            <a:off x="400050" y="6238875"/>
+            <a:ext cx="10001250" cy="228600"/>
+          </a:xfrm>
+          <a:prstGeom xmlns:a="http://schemas.openxmlformats.org/drawingml/2006/main" prst="rect">
+            <a:avLst/>
+          </a:prstGeom>
+        </p:spPr>
+        <p:txBody>
+          <a:bodyPr xmlns:a="http://schemas.openxmlformats.org/drawingml/2006/main" wrap="square" lIns="0" tIns="0" rIns="0" bIns="0" anchor="t">
+            <a:noAutofit/>
+          </a:bodyPr>
+          <a:lstStyle xmlns:a="http://schemas.openxmlformats.org/drawingml/2006/main"/>
+          <a:p xmlns:a="http://schemas.openxmlformats.org/drawingml/2006/main">
+            <a:pPr algn="l">
+              <a:defRPr sz="863" b="0">
+                <a:solidFill>
+                  <a:srgbClr val="526071"/>
+                </a:solidFill>
+                <a:latin typeface="Arial"/>
+                <a:ea typeface="Arial"/>
+                <a:cs typeface="Arial"/>
+              </a:defRPr>
+            </a:pPr>
+            <a:r>
+              <a:t>ADAPTIVE_MEMORY_FIX_0_2_2.md | RELEASE_ROUTING_MATRIX_RESULT_0_2_3.md</a:t>
+            </a:r>
+          </a:p>
+        </p:txBody>
+      </p:sp>
+      <p:sp>
+        <p:nvSpPr>
+          <p:cNvPr id="26" name="footer-number-11">
+            <a:extLst xmlns:a="http://schemas.openxmlformats.org/drawingml/2006/main">
+              <a:ext uri="{FF2B5EF4-FFF2-40B4-BE49-F238E27FC236}">
+                <a16:creationId xmlns:a16="http://schemas.microsoft.com/office/drawing/2014/main" id="{DA8EE6E4-666D-4AEB-AC48-81BC332492FA}"/>
+              </a:ext>
+            </a:extLst>
+          </p:cNvPr>
+          <p:cNvSpPr>
+            <a:spLocks xmlns:a="http://schemas.openxmlformats.org/drawingml/2006/main" noGrp="1"/>
+          </p:cNvSpPr>
+          <p:nvPr/>
+        </p:nvSpPr>
+        <p:spPr>
+          <a:xfrm xmlns:a="http://schemas.openxmlformats.org/drawingml/2006/main">
+            <a:off x="11258550" y="6238875"/>
+            <a:ext cx="533400" cy="228600"/>
+          </a:xfrm>
+          <a:prstGeom xmlns:a="http://schemas.openxmlformats.org/drawingml/2006/main" prst="rect">
+            <a:avLst/>
+          </a:prstGeom>
+        </p:spPr>
+        <p:txBody>
+          <a:bodyPr xmlns:a="http://schemas.openxmlformats.org/drawingml/2006/main" wrap="square" lIns="0" tIns="0" rIns="0" bIns="0" anchor="t">
+            <a:noAutofit/>
+          </a:bodyPr>
+          <a:lstStyle xmlns:a="http://schemas.openxmlformats.org/drawingml/2006/main"/>
+          <a:p xmlns:a="http://schemas.openxmlformats.org/drawingml/2006/main">
+            <a:pPr algn="r">
+              <a:defRPr sz="900" b="0">
+                <a:solidFill>
+                  <a:srgbClr val="526071"/>
+                </a:solidFill>
+                <a:latin typeface="Arial"/>
+                <a:ea typeface="Arial"/>
+                <a:cs typeface="Arial"/>
+              </a:defRPr>
+            </a:pPr>
+            <a:r>
+              <a:t>11</a:t>
+            </a:r>
+          </a:p>
+        </p:txBody>
+      </p:sp>
+    </p:spTree>
+    <p:extLst>
+      <p:ext uri="{BB962C8B-B14F-4D97-AF65-F5344CB8AC3E}">
+        <p14:creationId xmlns:p14="http://schemas.microsoft.com/office/powerpoint/2010/main" val="517276760"/>
+      </p:ext>
+    </p:extLst>
+  </p:cSld>
+</p:sld>
+</file>
+
+<file path=ppt/slides/slide12.xml><?xml version="1.0" encoding="utf-8"?>
+<p:sld xmlns:p="http://schemas.openxmlformats.org/presentationml/2006/main">
+  <p:cSld>
+    <p:bg>
+      <p:bgPr>
+        <a:solidFill xmlns:a="http://schemas.openxmlformats.org/drawingml/2006/main">
+          <a:srgbClr val="FFFFFF"/>
+        </a:solidFill>
+      </p:bgPr>
+    </p:bg>
+    <p:spTree>
+      <p:nvGrpSpPr>
+        <p:cNvPr id="1" name=""/>
+        <p:cNvGrpSpPr/>
+        <p:nvPr/>
+      </p:nvGrpSpPr>
+      <p:grpSpPr>
+        <a:xfrm xmlns:a="http://schemas.openxmlformats.org/drawingml/2006/main"/>
+      </p:grpSpPr>
+      <p:sp>
+        <p:nvSpPr>
+          <p:cNvPr id="19" name="s12-eyebrow">
+            <a:extLst xmlns:a="http://schemas.openxmlformats.org/drawingml/2006/main">
+              <a:ext uri="{FF2B5EF4-FFF2-40B4-BE49-F238E27FC236}">
+                <a16:creationId xmlns:a16="http://schemas.microsoft.com/office/drawing/2014/main" id="{7DA8B013-D14A-4FA0-9C07-73572A08D8FB}"/>
+              </a:ext>
+            </a:extLst>
+          </p:cNvPr>
+          <p:cNvSpPr>
+            <a:spLocks xmlns:a="http://schemas.openxmlformats.org/drawingml/2006/main" noGrp="1"/>
+          </p:cNvSpPr>
+          <p:nvPr/>
+        </p:nvSpPr>
+        <p:spPr>
+          <a:xfrm xmlns:a="http://schemas.openxmlformats.org/drawingml/2006/main">
+            <a:off x="457200" y="419100"/>
+            <a:ext cx="2476500" cy="285750"/>
+          </a:xfrm>
+          <a:prstGeom xmlns:a="http://schemas.openxmlformats.org/drawingml/2006/main" prst="rect">
+            <a:avLst/>
+          </a:prstGeom>
+        </p:spPr>
+        <p:txBody>
+          <a:bodyPr xmlns:a="http://schemas.openxmlformats.org/drawingml/2006/main" wrap="square" lIns="0" tIns="0" rIns="0" bIns="0" anchor="t">
+            <a:noAutofit/>
+          </a:bodyPr>
+          <a:lstStyle xmlns:a="http://schemas.openxmlformats.org/drawingml/2006/main"/>
+          <a:p xmlns:a="http://schemas.openxmlformats.org/drawingml/2006/main">
+            <a:pPr algn="l">
+              <a:defRPr sz="1200" b="1">
+                <a:solidFill>
+                  <a:srgbClr val="1677FF"/>
+                </a:solidFill>
+                <a:latin typeface="Arial"/>
+                <a:ea typeface="Arial"/>
+                <a:cs typeface="Arial"/>
+              </a:defRPr>
+            </a:pPr>
+            <a:r>
+              <a:t>READY TO TEST</a:t>
+            </a:r>
+          </a:p>
+        </p:txBody>
+      </p:sp>
+      <p:sp>
+        <p:nvSpPr>
+          <p:cNvPr id="2" name="s12-title">
+            <a:extLst xmlns:a="http://schemas.openxmlformats.org/drawingml/2006/main">
+              <a:ext uri="{FF2B5EF4-FFF2-40B4-BE49-F238E27FC236}">
+                <a16:creationId xmlns:a16="http://schemas.microsoft.com/office/drawing/2014/main" id="{B89486D8-77DF-4786-BEE5-8D60B4A50439}"/>
+              </a:ext>
+            </a:extLst>
+          </p:cNvPr>
+          <p:cNvSpPr>
+            <a:spLocks xmlns:a="http://schemas.openxmlformats.org/drawingml/2006/main" noGrp="1"/>
+          </p:cNvSpPr>
+          <p:nvPr/>
+        </p:nvSpPr>
+        <p:spPr>
+          <a:xfrm xmlns:a="http://schemas.openxmlformats.org/drawingml/2006/main">
+            <a:off x="457200" y="1257300"/>
+            <a:ext cx="5143500" cy="2857500"/>
+          </a:xfrm>
+          <a:prstGeom xmlns:a="http://schemas.openxmlformats.org/drawingml/2006/main" prst="rect">
+            <a:avLst/>
+          </a:prstGeom>
+        </p:spPr>
+        <p:txBody>
+          <a:bodyPr xmlns:a="http://schemas.openxmlformats.org/drawingml/2006/main" wrap="square" lIns="0" tIns="0" rIns="0" bIns="0" anchor="t">
+            <a:noAutofit/>
+          </a:bodyPr>
+          <a:lstStyle xmlns:a="http://schemas.openxmlformats.org/drawingml/2006/main"/>
+          <a:p xmlns:a="http://schemas.openxmlformats.org/drawingml/2006/main">
+            <a:pPr algn="l">
+              <a:defRPr sz="5400" b="1">
                 <a:solidFill>
                   <a:srgbClr val="0A1224"/>
+                </a:solidFill>
+                <a:latin typeface="Arial"/>
+                <a:ea typeface="Arial"/>
+                <a:cs typeface="Arial"/>
+              </a:defRPr>
+            </a:pPr>
+            <a:r>
+              <a:t>Install.
+Route.
+Verify.</a:t>
+            </a:r>
+          </a:p>
+        </p:txBody>
+      </p:sp>
+      <p:cxnSp>
+        <p:nvCxnSpPr>
+          <p:cNvPr id="21" name="s12-accent"/>
+          <p:cNvCxnSpPr/>
+          <p:nvPr/>
+        </p:nvCxnSpPr>
+        <p:spPr>
+          <a:xfrm xmlns:a="http://schemas.openxmlformats.org/drawingml/2006/main">
+            <a:off x="495300" y="4438650"/>
+            <a:ext cx="1238250" cy="953"/>
+          </a:xfrm>
+          <a:prstGeom xmlns:a="http://schemas.openxmlformats.org/drawingml/2006/main" prst="straightConnector1">
+            <a:avLst/>
+          </a:prstGeom>
+          <a:ln xmlns:a="http://schemas.openxmlformats.org/drawingml/2006/main" w="57150">
+            <a:solidFill>
+              <a:srgbClr val="13B7D5"/>
+            </a:solidFill>
+            <a:prstDash val="solid"/>
+          </a:ln>
+        </p:spPr>
+      </p:cxnSp>
+      <p:sp>
+        <p:nvSpPr>
+          <p:cNvPr id="4" name="s12-close">
+            <a:extLst xmlns:a="http://schemas.openxmlformats.org/drawingml/2006/main">
+              <a:ext uri="{FF2B5EF4-FFF2-40B4-BE49-F238E27FC236}">
+                <a16:creationId xmlns:a16="http://schemas.microsoft.com/office/drawing/2014/main" id="{CAE08839-3D38-4AC3-9236-40052E097A7B}"/>
+              </a:ext>
+            </a:extLst>
+          </p:cNvPr>
+          <p:cNvSpPr>
+            <a:spLocks xmlns:a="http://schemas.openxmlformats.org/drawingml/2006/main" noGrp="1"/>
+          </p:cNvSpPr>
+          <p:nvPr/>
+        </p:nvSpPr>
+        <p:spPr>
+          <a:xfrm xmlns:a="http://schemas.openxmlformats.org/drawingml/2006/main">
+            <a:off x="457200" y="4819650"/>
+            <a:ext cx="5238750" cy="857250"/>
+          </a:xfrm>
+          <a:prstGeom xmlns:a="http://schemas.openxmlformats.org/drawingml/2006/main" prst="rect">
+            <a:avLst/>
+          </a:prstGeom>
+        </p:spPr>
+        <p:txBody>
+          <a:bodyPr xmlns:a="http://schemas.openxmlformats.org/drawingml/2006/main" wrap="square" lIns="0" tIns="0" rIns="0" bIns="0" anchor="t">
+            <a:noAutofit/>
+          </a:bodyPr>
+          <a:lstStyle xmlns:a="http://schemas.openxmlformats.org/drawingml/2006/main"/>
+          <a:p xmlns:a="http://schemas.openxmlformats.org/drawingml/2006/main">
+            <a:pPr algn="l">
+              <a:defRPr sz="1800" b="0">
+                <a:solidFill>
+                  <a:srgbClr val="526071"/>
+                </a:solidFill>
+                <a:latin typeface="Arial"/>
+                <a:ea typeface="Arial"/>
+                <a:cs typeface="Arial"/>
+              </a:defRPr>
+            </a:pPr>
+            <a:r>
+              <a:t>A map, a route, a memory, and evidence that the selected context was useful.</a:t>
+            </a:r>
+          </a:p>
+        </p:txBody>
+      </p:sp>
+      <p:sp>
+        <p:nvSpPr>
+          <p:cNvPr id="5" name="s12-command-box">
+            <a:extLst xmlns:a="http://schemas.openxmlformats.org/drawingml/2006/main">
+              <a:ext uri="{FF2B5EF4-FFF2-40B4-BE49-F238E27FC236}">
+                <a16:creationId xmlns:a16="http://schemas.microsoft.com/office/drawing/2014/main" id="{AEBF9EEE-50F0-47BA-9EF7-CB1F93255F31}"/>
+              </a:ext>
+            </a:extLst>
+          </p:cNvPr>
+          <p:cNvSpPr>
+            <a:spLocks xmlns:a="http://schemas.openxmlformats.org/drawingml/2006/main" noGrp="1"/>
+          </p:cNvSpPr>
+          <p:nvPr/>
+        </p:nvSpPr>
+        <p:spPr>
+          <a:xfrm xmlns:a="http://schemas.openxmlformats.org/drawingml/2006/main">
+            <a:off x="6477000" y="1352550"/>
+            <a:ext cx="4857750" cy="1485900"/>
+          </a:xfrm>
+          <a:prstGeom xmlns:a="http://schemas.openxmlformats.org/drawingml/2006/main" prst="roundRect">
+            <a:avLst>
+              <a:gd name="adj" fmla="val 5128"/>
+            </a:avLst>
+          </a:prstGeom>
+          <a:solidFill xmlns:a="http://schemas.openxmlformats.org/drawingml/2006/main">
+            <a:srgbClr val="061B3D"/>
+          </a:solidFill>
+          <a:ln xmlns:a="http://schemas.openxmlformats.org/drawingml/2006/main" w="0">
+            <a:solidFill>
+              <a:srgbClr val="061B3D"/>
+            </a:solidFill>
+            <a:prstDash val="solid"/>
+          </a:ln>
+        </p:spPr>
+      </p:sp>
+      <p:sp>
+        <p:nvSpPr>
+          <p:cNvPr id="6" name="s12-command">
+            <a:extLst xmlns:a="http://schemas.openxmlformats.org/drawingml/2006/main">
+              <a:ext uri="{FF2B5EF4-FFF2-40B4-BE49-F238E27FC236}">
+                <a16:creationId xmlns:a16="http://schemas.microsoft.com/office/drawing/2014/main" id="{6DED9F2C-D957-4290-BE1E-3A48B826EEA6}"/>
+              </a:ext>
+            </a:extLst>
+          </p:cNvPr>
+          <p:cNvSpPr>
+            <a:spLocks xmlns:a="http://schemas.openxmlformats.org/drawingml/2006/main" noGrp="1"/>
+          </p:cNvSpPr>
+          <p:nvPr/>
+        </p:nvSpPr>
+        <p:spPr>
+          <a:xfrm xmlns:a="http://schemas.openxmlformats.org/drawingml/2006/main">
+            <a:off x="6819900" y="1714500"/>
+            <a:ext cx="4171950" cy="819150"/>
+          </a:xfrm>
+          <a:prstGeom xmlns:a="http://schemas.openxmlformats.org/drawingml/2006/main" prst="rect">
+            <a:avLst/>
+          </a:prstGeom>
+        </p:spPr>
+        <p:txBody>
+          <a:bodyPr xmlns:a="http://schemas.openxmlformats.org/drawingml/2006/main" wrap="square" lIns="0" tIns="0" rIns="0" bIns="0" anchor="t">
+            <a:noAutofit/>
+          </a:bodyPr>
+          <a:lstStyle xmlns:a="http://schemas.openxmlformats.org/drawingml/2006/main"/>
+          <a:p xmlns:a="http://schemas.openxmlformats.org/drawingml/2006/main">
+            <a:pPr algn="l">
+              <a:defRPr sz="1800" b="1">
+                <a:solidFill>
+                  <a:srgbClr val="FFFFFF"/>
                 </a:solidFill>
                 <a:latin typeface="Consolas"/>
                 <a:ea typeface="Consolas"/>
@@ -4438,28 +6717,29 @@
               </a:defRPr>
             </a:pPr>
             <a:r>
-              <a:t>github.com/lohchanhin/vertex-palace</a:t>
-            </a:r>
-          </a:p>
-        </p:txBody>
-      </p:sp>
-      <p:sp>
-        <p:nvSpPr>
-          <p:cNvPr id="8" name="s12-npm">
-            <a:extLst xmlns:a="http://schemas.openxmlformats.org/drawingml/2006/main">
-              <a:ext uri="{FF2B5EF4-FFF2-40B4-BE49-F238E27FC236}">
-                <a16:creationId xmlns:a16="http://schemas.microsoft.com/office/drawing/2014/main" id="{0CF7AC61-A4CF-4745-91D4-7966C2820B4E}"/>
-              </a:ext>
-            </a:extLst>
-          </p:cNvPr>
-          <p:cNvSpPr>
-            <a:spLocks xmlns:a="http://schemas.openxmlformats.org/drawingml/2006/main" noGrp="1"/>
-          </p:cNvSpPr>
-          <p:nvPr/>
-        </p:nvSpPr>
-        <p:spPr>
-          <a:xfrm xmlns:a="http://schemas.openxmlformats.org/drawingml/2006/main">
-            <a:off x="6477000" y="3848100"/>
+              <a:t>npm install -g
+vertex-palace@0.2.3</a:t>
+            </a:r>
+          </a:p>
+        </p:txBody>
+      </p:sp>
+      <p:sp>
+        <p:nvSpPr>
+          <p:cNvPr id="7" name="s12-github">
+            <a:extLst xmlns:a="http://schemas.openxmlformats.org/drawingml/2006/main">
+              <a:ext uri="{FF2B5EF4-FFF2-40B4-BE49-F238E27FC236}">
+                <a16:creationId xmlns:a16="http://schemas.microsoft.com/office/drawing/2014/main" id="{8A703FC2-B41B-40F4-8A5D-2470F29C3872}"/>
+              </a:ext>
+            </a:extLst>
+          </p:cNvPr>
+          <p:cNvSpPr>
+            <a:spLocks xmlns:a="http://schemas.openxmlformats.org/drawingml/2006/main" noGrp="1"/>
+          </p:cNvSpPr>
+          <p:nvPr/>
+        </p:nvSpPr>
+        <p:spPr>
+          <a:xfrm xmlns:a="http://schemas.openxmlformats.org/drawingml/2006/main">
+            <a:off x="6477000" y="3352800"/>
             <a:ext cx="4857750" cy="342900"/>
           </a:xfrm>
           <a:prstGeom xmlns:a="http://schemas.openxmlformats.org/drawingml/2006/main" prst="rect">
@@ -4473,9 +6753,9 @@
           <a:lstStyle xmlns:a="http://schemas.openxmlformats.org/drawingml/2006/main"/>
           <a:p xmlns:a="http://schemas.openxmlformats.org/drawingml/2006/main">
             <a:pPr algn="l">
-              <a:defRPr sz="1500" b="0">
-                <a:solidFill>
-                  <a:srgbClr val="526071"/>
+              <a:defRPr sz="1575" b="1">
+                <a:solidFill>
+                  <a:srgbClr val="0A1224"/>
                 </a:solidFill>
                 <a:latin typeface="Consolas"/>
                 <a:ea typeface="Consolas"/>
@@ -4483,6 +6763,51 @@
               </a:defRPr>
             </a:pPr>
             <a:r>
+              <a:t>github.com/lohchanhin/vertex-palace</a:t>
+            </a:r>
+          </a:p>
+        </p:txBody>
+      </p:sp>
+      <p:sp>
+        <p:nvSpPr>
+          <p:cNvPr id="8" name="s12-npm">
+            <a:extLst xmlns:a="http://schemas.openxmlformats.org/drawingml/2006/main">
+              <a:ext uri="{FF2B5EF4-FFF2-40B4-BE49-F238E27FC236}">
+                <a16:creationId xmlns:a16="http://schemas.microsoft.com/office/drawing/2014/main" id="{22AB239A-18E9-4AB1-8ADB-264DDB0FE85B}"/>
+              </a:ext>
+            </a:extLst>
+          </p:cNvPr>
+          <p:cNvSpPr>
+            <a:spLocks xmlns:a="http://schemas.openxmlformats.org/drawingml/2006/main" noGrp="1"/>
+          </p:cNvSpPr>
+          <p:nvPr/>
+        </p:nvSpPr>
+        <p:spPr>
+          <a:xfrm xmlns:a="http://schemas.openxmlformats.org/drawingml/2006/main">
+            <a:off x="6477000" y="3848100"/>
+            <a:ext cx="4857750" cy="342900"/>
+          </a:xfrm>
+          <a:prstGeom xmlns:a="http://schemas.openxmlformats.org/drawingml/2006/main" prst="rect">
+            <a:avLst/>
+          </a:prstGeom>
+        </p:spPr>
+        <p:txBody>
+          <a:bodyPr xmlns:a="http://schemas.openxmlformats.org/drawingml/2006/main" wrap="square" lIns="0" tIns="0" rIns="0" bIns="0" anchor="t">
+            <a:noAutofit/>
+          </a:bodyPr>
+          <a:lstStyle xmlns:a="http://schemas.openxmlformats.org/drawingml/2006/main"/>
+          <a:p xmlns:a="http://schemas.openxmlformats.org/drawingml/2006/main">
+            <a:pPr algn="l">
+              <a:defRPr sz="1500" b="0">
+                <a:solidFill>
+                  <a:srgbClr val="526071"/>
+                </a:solidFill>
+                <a:latin typeface="Consolas"/>
+                <a:ea typeface="Consolas"/>
+                <a:cs typeface="Consolas"/>
+              </a:defRPr>
+            </a:pPr>
+            <a:r>
               <a:t>npmjs.com/package/vertex-palace</a:t>
             </a:r>
           </a:p>
@@ -4493,7 +6818,7 @@
           <p:cNvPr id="9" name="s12-d1">
             <a:extLst xmlns:a="http://schemas.openxmlformats.org/drawingml/2006/main">
               <a:ext uri="{FF2B5EF4-FFF2-40B4-BE49-F238E27FC236}">
-                <a16:creationId xmlns:a16="http://schemas.microsoft.com/office/drawing/2014/main" id="{9B5EE6F1-CCBF-475E-A0E5-14B67582C87C}"/>
+                <a16:creationId xmlns:a16="http://schemas.microsoft.com/office/drawing/2014/main" id="{4D31DA0D-D8BC-40B1-9B97-3977E1604D18}"/>
               </a:ext>
             </a:extLst>
           </p:cNvPr>
@@ -4526,7 +6851,7 @@
           <p:cNvPr id="10" name="s12-l1">
             <a:extLst xmlns:a="http://schemas.openxmlformats.org/drawingml/2006/main">
               <a:ext uri="{FF2B5EF4-FFF2-40B4-BE49-F238E27FC236}">
-                <a16:creationId xmlns:a16="http://schemas.microsoft.com/office/drawing/2014/main" id="{6D5B43AA-3E54-4058-A4B2-FBFDF4C97200}"/>
+                <a16:creationId xmlns:a16="http://schemas.microsoft.com/office/drawing/2014/main" id="{2F5EA824-6A48-4F95-9FC7-6C3080228BB3}"/>
               </a:ext>
             </a:extLst>
           </p:cNvPr>
@@ -4571,7 +6896,7 @@
           <p:cNvPr id="11" name="s12-d2">
             <a:extLst xmlns:a="http://schemas.openxmlformats.org/drawingml/2006/main">
               <a:ext uri="{FF2B5EF4-FFF2-40B4-BE49-F238E27FC236}">
-                <a16:creationId xmlns:a16="http://schemas.microsoft.com/office/drawing/2014/main" id="{F54A7C9C-4A9A-4AFA-952F-8B575A014344}"/>
+                <a16:creationId xmlns:a16="http://schemas.microsoft.com/office/drawing/2014/main" id="{16560C42-599C-4BAA-B469-E3181E0EF294}"/>
               </a:ext>
             </a:extLst>
           </p:cNvPr>
@@ -4604,7 +6929,7 @@
           <p:cNvPr id="12" name="s12-l2">
             <a:extLst xmlns:a="http://schemas.openxmlformats.org/drawingml/2006/main">
               <a:ext uri="{FF2B5EF4-FFF2-40B4-BE49-F238E27FC236}">
-                <a16:creationId xmlns:a16="http://schemas.microsoft.com/office/drawing/2014/main" id="{07FA5A71-BB95-413A-8CCC-E2118A448B4D}"/>
+                <a16:creationId xmlns:a16="http://schemas.microsoft.com/office/drawing/2014/main" id="{EE912D6C-0C30-48DC-9ABB-FC6CD31BF39A}"/>
               </a:ext>
             </a:extLst>
           </p:cNvPr>
@@ -4649,7 +6974,7 @@
           <p:cNvPr id="13" name="s12-d3">
             <a:extLst xmlns:a="http://schemas.openxmlformats.org/drawingml/2006/main">
               <a:ext uri="{FF2B5EF4-FFF2-40B4-BE49-F238E27FC236}">
-                <a16:creationId xmlns:a16="http://schemas.microsoft.com/office/drawing/2014/main" id="{6B6F221D-491B-415F-B82B-B720F3E6209D}"/>
+                <a16:creationId xmlns:a16="http://schemas.microsoft.com/office/drawing/2014/main" id="{00C418A2-D55F-47BA-9AB3-C0530D6A613D}"/>
               </a:ext>
             </a:extLst>
           </p:cNvPr>
@@ -4682,7 +7007,7 @@
           <p:cNvPr id="14" name="s12-l3">
             <a:extLst xmlns:a="http://schemas.openxmlformats.org/drawingml/2006/main">
               <a:ext uri="{FF2B5EF4-FFF2-40B4-BE49-F238E27FC236}">
-                <a16:creationId xmlns:a16="http://schemas.microsoft.com/office/drawing/2014/main" id="{2545E7A3-D2E0-47A6-9B2F-0C00E1D914E6}"/>
+                <a16:creationId xmlns:a16="http://schemas.microsoft.com/office/drawing/2014/main" id="{B5A9C6A3-C631-4215-91E3-B0C59D2A7F7B}"/>
               </a:ext>
             </a:extLst>
           </p:cNvPr>
@@ -4727,7 +7052,7 @@
           <p:cNvPr id="15" name="s12-platforms">
             <a:extLst xmlns:a="http://schemas.openxmlformats.org/drawingml/2006/main">
               <a:ext uri="{FF2B5EF4-FFF2-40B4-BE49-F238E27FC236}">
-                <a16:creationId xmlns:a16="http://schemas.microsoft.com/office/drawing/2014/main" id="{5287D221-D6C5-4DCC-B34E-80109E0FBF2C}"/>
+                <a16:creationId xmlns:a16="http://schemas.microsoft.com/office/drawing/2014/main" id="{6B935740-05D5-4B3C-B845-DC4297E56029}"/>
               </a:ext>
             </a:extLst>
           </p:cNvPr>
@@ -4769,7 +7094,7 @@
       </p:sp>
       <p:cxnSp>
         <p:nvCxnSpPr>
-          <p:cNvPr id="34" name="footer-rule-11"/>
+          <p:cNvPr id="34" name="footer-rule-12"/>
           <p:cNvCxnSpPr/>
           <p:nvPr/>
         </p:nvCxnSpPr>
@@ -4791,10 +7116,10 @@
       </p:cxnSp>
       <p:sp>
         <p:nvSpPr>
-          <p:cNvPr id="17" name="footer-source-11">
-            <a:extLst xmlns:a="http://schemas.openxmlformats.org/drawingml/2006/main">
-              <a:ext uri="{FF2B5EF4-FFF2-40B4-BE49-F238E27FC236}">
-                <a16:creationId xmlns:a16="http://schemas.microsoft.com/office/drawing/2014/main" id="{B3BDE70C-A8BA-47B2-85D7-A910D54997C7}"/>
+          <p:cNvPr id="17" name="footer-source-12">
+            <a:extLst xmlns:a="http://schemas.openxmlformats.org/drawingml/2006/main">
+              <a:ext uri="{FF2B5EF4-FFF2-40B4-BE49-F238E27FC236}">
+                <a16:creationId xmlns:a16="http://schemas.microsoft.com/office/drawing/2014/main" id="{B40217AA-9C09-4910-8958-0D56A2D23326}"/>
               </a:ext>
             </a:extLst>
           </p:cNvPr>
@@ -4836,10 +7161,10 @@
       </p:sp>
       <p:sp>
         <p:nvSpPr>
-          <p:cNvPr id="18" name="footer-number-11">
-            <a:extLst xmlns:a="http://schemas.openxmlformats.org/drawingml/2006/main">
-              <a:ext uri="{FF2B5EF4-FFF2-40B4-BE49-F238E27FC236}">
-                <a16:creationId xmlns:a16="http://schemas.microsoft.com/office/drawing/2014/main" id="{68F24C3D-1298-4B10-8799-BED53CF67A62}"/>
+          <p:cNvPr id="18" name="footer-number-12">
+            <a:extLst xmlns:a="http://schemas.openxmlformats.org/drawingml/2006/main">
+              <a:ext uri="{FF2B5EF4-FFF2-40B4-BE49-F238E27FC236}">
+                <a16:creationId xmlns:a16="http://schemas.microsoft.com/office/drawing/2014/main" id="{B8AC7C03-F29C-41C8-B40B-C264E89A6561}"/>
               </a:ext>
             </a:extLst>
           </p:cNvPr>
@@ -4874,7 +7199,7 @@
               </a:defRPr>
             </a:pPr>
             <a:r>
-              <a:t>11</a:t>
+              <a:t>12</a:t>
             </a:r>
           </a:p>
         </p:txBody>
@@ -4882,7 +7207,7 @@
     </p:spTree>
     <p:extLst>
       <p:ext uri="{BB962C8B-B14F-4D97-AF65-F5344CB8AC3E}">
-        <p14:creationId xmlns:p14="http://schemas.microsoft.com/office/powerpoint/2010/main" val="441433314"/>
+        <p14:creationId xmlns:p14="http://schemas.microsoft.com/office/powerpoint/2010/main" val="947347433"/>
       </p:ext>
     </p:extLst>
   </p:cSld>
@@ -4913,7 +7238,7 @@
           <p:cNvPr id="33" name="s2-title">
             <a:extLst xmlns:a="http://schemas.openxmlformats.org/drawingml/2006/main">
               <a:ext uri="{FF2B5EF4-FFF2-40B4-BE49-F238E27FC236}">
-                <a16:creationId xmlns:a16="http://schemas.microsoft.com/office/drawing/2014/main" id="{25E178D9-9ABF-410E-9156-4553DDC40D98}"/>
+                <a16:creationId xmlns:a16="http://schemas.microsoft.com/office/drawing/2014/main" id="{37925695-1D89-4C16-8CBA-F9CA623039BD}"/>
               </a:ext>
             </a:extLst>
           </p:cNvPr>
@@ -4958,7 +7283,7 @@
           <p:cNvPr id="2" name="s2-subtitle">
             <a:extLst xmlns:a="http://schemas.openxmlformats.org/drawingml/2006/main">
               <a:ext uri="{FF2B5EF4-FFF2-40B4-BE49-F238E27FC236}">
-                <a16:creationId xmlns:a16="http://schemas.microsoft.com/office/drawing/2014/main" id="{7AEF0829-C2E0-4AD5-AB02-304A02DA6F2A}"/>
+                <a16:creationId xmlns:a16="http://schemas.microsoft.com/office/drawing/2014/main" id="{C509FB0D-A4C2-4255-93B6-58CDC791ED73}"/>
               </a:ext>
             </a:extLst>
           </p:cNvPr>
@@ -5113,7 +7438,7 @@
           <p:cNvPr id="8" name="s2-agent">
             <a:extLst xmlns:a="http://schemas.openxmlformats.org/drawingml/2006/main">
               <a:ext uri="{FF2B5EF4-FFF2-40B4-BE49-F238E27FC236}">
-                <a16:creationId xmlns:a16="http://schemas.microsoft.com/office/drawing/2014/main" id="{CFE2330A-93C8-4214-8E10-F83293412DFF}"/>
+                <a16:creationId xmlns:a16="http://schemas.microsoft.com/office/drawing/2014/main" id="{2724AF70-5B30-4C88-B6E6-A59F36061B2E}"/>
               </a:ext>
             </a:extLst>
           </p:cNvPr>
@@ -5146,7 +7471,7 @@
           <p:cNvPr id="9" name="s2-agent-label">
             <a:extLst xmlns:a="http://schemas.openxmlformats.org/drawingml/2006/main">
               <a:ext uri="{FF2B5EF4-FFF2-40B4-BE49-F238E27FC236}">
-                <a16:creationId xmlns:a16="http://schemas.microsoft.com/office/drawing/2014/main" id="{D85C076E-1C3F-4D0D-9F87-3313C5AEAEB1}"/>
+                <a16:creationId xmlns:a16="http://schemas.microsoft.com/office/drawing/2014/main" id="{16919747-E0B8-4185-A379-33A743E45225}"/>
               </a:ext>
             </a:extLst>
           </p:cNvPr>
@@ -5191,7 +7516,7 @@
           <p:cNvPr id="10" name="s2-file-a">
             <a:extLst xmlns:a="http://schemas.openxmlformats.org/drawingml/2006/main">
               <a:ext uri="{FF2B5EF4-FFF2-40B4-BE49-F238E27FC236}">
-                <a16:creationId xmlns:a16="http://schemas.microsoft.com/office/drawing/2014/main" id="{9D396A9D-8121-44DD-B186-4B6D031F44F3}"/>
+                <a16:creationId xmlns:a16="http://schemas.microsoft.com/office/drawing/2014/main" id="{D1ACF16D-B2D3-47AB-B108-ED7F3FBE386E}"/>
               </a:ext>
             </a:extLst>
           </p:cNvPr>
@@ -5224,7 +7549,7 @@
           <p:cNvPr id="11" name="s2-file-b">
             <a:extLst xmlns:a="http://schemas.openxmlformats.org/drawingml/2006/main">
               <a:ext uri="{FF2B5EF4-FFF2-40B4-BE49-F238E27FC236}">
-                <a16:creationId xmlns:a16="http://schemas.microsoft.com/office/drawing/2014/main" id="{32A3B3B7-355F-4253-8100-7705C10F1444}"/>
+                <a16:creationId xmlns:a16="http://schemas.microsoft.com/office/drawing/2014/main" id="{8ED84566-DAAB-479A-8ED3-357A66D3B928}"/>
               </a:ext>
             </a:extLst>
           </p:cNvPr>
@@ -5257,7 +7582,7 @@
           <p:cNvPr id="12" name="s2-file-c">
             <a:extLst xmlns:a="http://schemas.openxmlformats.org/drawingml/2006/main">
               <a:ext uri="{FF2B5EF4-FFF2-40B4-BE49-F238E27FC236}">
-                <a16:creationId xmlns:a16="http://schemas.microsoft.com/office/drawing/2014/main" id="{42642D98-1C1A-4063-ABA3-C7E642E95638}"/>
+                <a16:creationId xmlns:a16="http://schemas.microsoft.com/office/drawing/2014/main" id="{7E8C9E7C-DEB2-4C47-A941-451379A99BEB}"/>
               </a:ext>
             </a:extLst>
           </p:cNvPr>
@@ -5290,7 +7615,7 @@
           <p:cNvPr id="13" name="s2-file-d">
             <a:extLst xmlns:a="http://schemas.openxmlformats.org/drawingml/2006/main">
               <a:ext uri="{FF2B5EF4-FFF2-40B4-BE49-F238E27FC236}">
-                <a16:creationId xmlns:a16="http://schemas.microsoft.com/office/drawing/2014/main" id="{65AA9774-2737-4400-8316-537676C20CB1}"/>
+                <a16:creationId xmlns:a16="http://schemas.microsoft.com/office/drawing/2014/main" id="{5CBB1284-FBAB-4A3F-ADD8-6F899B1DBDCA}"/>
               </a:ext>
             </a:extLst>
           </p:cNvPr>
@@ -5323,7 +7648,7 @@
           <p:cNvPr id="14" name="s2-file-e">
             <a:extLst xmlns:a="http://schemas.openxmlformats.org/drawingml/2006/main">
               <a:ext uri="{FF2B5EF4-FFF2-40B4-BE49-F238E27FC236}">
-                <a16:creationId xmlns:a16="http://schemas.microsoft.com/office/drawing/2014/main" id="{FB0B0872-FCE6-4C0A-A705-2AB2077EA1D8}"/>
+                <a16:creationId xmlns:a16="http://schemas.microsoft.com/office/drawing/2014/main" id="{D4350F1D-B81C-49B0-93D7-D750A9F7454C}"/>
               </a:ext>
             </a:extLst>
           </p:cNvPr>
@@ -5356,7 +7681,7 @@
           <p:cNvPr id="15" name="s2-file-a-label">
             <a:extLst xmlns:a="http://schemas.openxmlformats.org/drawingml/2006/main">
               <a:ext uri="{FF2B5EF4-FFF2-40B4-BE49-F238E27FC236}">
-                <a16:creationId xmlns:a16="http://schemas.microsoft.com/office/drawing/2014/main" id="{C373EA7C-A1DA-41BE-AC53-4D3895D5A2A7}"/>
+                <a16:creationId xmlns:a16="http://schemas.microsoft.com/office/drawing/2014/main" id="{BF5D5787-C091-4A86-B8FC-88146A1C5251}"/>
               </a:ext>
             </a:extLst>
           </p:cNvPr>
@@ -5401,7 +7726,7 @@
           <p:cNvPr id="16" name="s2-file-b-label">
             <a:extLst xmlns:a="http://schemas.openxmlformats.org/drawingml/2006/main">
               <a:ext uri="{FF2B5EF4-FFF2-40B4-BE49-F238E27FC236}">
-                <a16:creationId xmlns:a16="http://schemas.microsoft.com/office/drawing/2014/main" id="{C6EE6B82-B064-4576-9403-FAD4B02565F4}"/>
+                <a16:creationId xmlns:a16="http://schemas.microsoft.com/office/drawing/2014/main" id="{6CD3B942-F368-4FF3-8C6E-6DD1EA55070B}"/>
               </a:ext>
             </a:extLst>
           </p:cNvPr>
@@ -5446,7 +7771,7 @@
           <p:cNvPr id="17" name="s2-file-c-label">
             <a:extLst xmlns:a="http://schemas.openxmlformats.org/drawingml/2006/main">
               <a:ext uri="{FF2B5EF4-FFF2-40B4-BE49-F238E27FC236}">
-                <a16:creationId xmlns:a16="http://schemas.microsoft.com/office/drawing/2014/main" id="{45F0EF4A-03A8-44AD-B902-7476E4FC7CB3}"/>
+                <a16:creationId xmlns:a16="http://schemas.microsoft.com/office/drawing/2014/main" id="{60D013FC-B029-4E21-8797-E553B2F4B688}"/>
               </a:ext>
             </a:extLst>
           </p:cNvPr>
@@ -5491,7 +7816,7 @@
           <p:cNvPr id="18" name="s2-file-d-label">
             <a:extLst xmlns:a="http://schemas.openxmlformats.org/drawingml/2006/main">
               <a:ext uri="{FF2B5EF4-FFF2-40B4-BE49-F238E27FC236}">
-                <a16:creationId xmlns:a16="http://schemas.microsoft.com/office/drawing/2014/main" id="{D11A7B62-923F-4A48-B97E-74C686E75073}"/>
+                <a16:creationId xmlns:a16="http://schemas.microsoft.com/office/drawing/2014/main" id="{68620F5F-ED12-47AF-8473-3C3E16278E73}"/>
               </a:ext>
             </a:extLst>
           </p:cNvPr>
@@ -5536,7 +7861,7 @@
           <p:cNvPr id="19" name="s2-file-e-label">
             <a:extLst xmlns:a="http://schemas.openxmlformats.org/drawingml/2006/main">
               <a:ext uri="{FF2B5EF4-FFF2-40B4-BE49-F238E27FC236}">
-                <a16:creationId xmlns:a16="http://schemas.microsoft.com/office/drawing/2014/main" id="{9393E4CA-00CE-4993-A014-835B62F72435}"/>
+                <a16:creationId xmlns:a16="http://schemas.microsoft.com/office/drawing/2014/main" id="{ACEE495F-A790-49CF-8A65-8682F02D45C9}"/>
               </a:ext>
             </a:extLst>
           </p:cNvPr>
@@ -5581,7 +7906,7 @@
           <p:cNvPr id="20" name="s2-n1">
             <a:extLst xmlns:a="http://schemas.openxmlformats.org/drawingml/2006/main">
               <a:ext uri="{FF2B5EF4-FFF2-40B4-BE49-F238E27FC236}">
-                <a16:creationId xmlns:a16="http://schemas.microsoft.com/office/drawing/2014/main" id="{123C2854-97AC-445B-B1FD-5FD5D3C57380}"/>
+                <a16:creationId xmlns:a16="http://schemas.microsoft.com/office/drawing/2014/main" id="{0D6A8C9D-7A63-4136-B3F4-2F143467C2E9}"/>
               </a:ext>
             </a:extLst>
           </p:cNvPr>
@@ -5614,7 +7939,7 @@
           <p:cNvPr id="21" name="s2-n1-label">
             <a:extLst xmlns:a="http://schemas.openxmlformats.org/drawingml/2006/main">
               <a:ext uri="{FF2B5EF4-FFF2-40B4-BE49-F238E27FC236}">
-                <a16:creationId xmlns:a16="http://schemas.microsoft.com/office/drawing/2014/main" id="{6E641E3C-27E5-4992-AF15-D92B6F41020D}"/>
+                <a16:creationId xmlns:a16="http://schemas.microsoft.com/office/drawing/2014/main" id="{31737924-13A9-48A8-B402-FD9998B8ABB5}"/>
               </a:ext>
             </a:extLst>
           </p:cNvPr>
@@ -5659,7 +7984,7 @@
           <p:cNvPr id="22" name="s2-p1">
             <a:extLst xmlns:a="http://schemas.openxmlformats.org/drawingml/2006/main">
               <a:ext uri="{FF2B5EF4-FFF2-40B4-BE49-F238E27FC236}">
-                <a16:creationId xmlns:a16="http://schemas.microsoft.com/office/drawing/2014/main" id="{B55BEEAB-DE28-49F7-94DF-1B8F53FC06C6}"/>
+                <a16:creationId xmlns:a16="http://schemas.microsoft.com/office/drawing/2014/main" id="{A72B1AC0-002C-478D-9064-B1FEEAC6FA6F}"/>
               </a:ext>
             </a:extLst>
           </p:cNvPr>
@@ -5704,7 +8029,7 @@
           <p:cNvPr id="23" name="s2-n2">
             <a:extLst xmlns:a="http://schemas.openxmlformats.org/drawingml/2006/main">
               <a:ext uri="{FF2B5EF4-FFF2-40B4-BE49-F238E27FC236}">
-                <a16:creationId xmlns:a16="http://schemas.microsoft.com/office/drawing/2014/main" id="{A42192BF-4E07-4BAB-BDFD-3004DFAECA9B}"/>
+                <a16:creationId xmlns:a16="http://schemas.microsoft.com/office/drawing/2014/main" id="{21D5BE7A-EEC8-4881-9FB4-EB995EAB08B5}"/>
               </a:ext>
             </a:extLst>
           </p:cNvPr>
@@ -5737,7 +8062,7 @@
           <p:cNvPr id="24" name="s2-n2-label">
             <a:extLst xmlns:a="http://schemas.openxmlformats.org/drawingml/2006/main">
               <a:ext uri="{FF2B5EF4-FFF2-40B4-BE49-F238E27FC236}">
-                <a16:creationId xmlns:a16="http://schemas.microsoft.com/office/drawing/2014/main" id="{8E82ACAA-9C6A-4E04-8A05-33367E47A85E}"/>
+                <a16:creationId xmlns:a16="http://schemas.microsoft.com/office/drawing/2014/main" id="{C4D65EF5-6B65-4F72-87D2-1E13D70884E5}"/>
               </a:ext>
             </a:extLst>
           </p:cNvPr>
@@ -5782,7 +8107,7 @@
           <p:cNvPr id="25" name="s2-p2">
             <a:extLst xmlns:a="http://schemas.openxmlformats.org/drawingml/2006/main">
               <a:ext uri="{FF2B5EF4-FFF2-40B4-BE49-F238E27FC236}">
-                <a16:creationId xmlns:a16="http://schemas.microsoft.com/office/drawing/2014/main" id="{9A547D21-E7D5-4B40-A234-0630943A8A9D}"/>
+                <a16:creationId xmlns:a16="http://schemas.microsoft.com/office/drawing/2014/main" id="{45AE221B-33FC-4340-B532-F2281B43CC27}"/>
               </a:ext>
             </a:extLst>
           </p:cNvPr>
@@ -5827,7 +8152,7 @@
           <p:cNvPr id="26" name="s2-n3">
             <a:extLst xmlns:a="http://schemas.openxmlformats.org/drawingml/2006/main">
               <a:ext uri="{FF2B5EF4-FFF2-40B4-BE49-F238E27FC236}">
-                <a16:creationId xmlns:a16="http://schemas.microsoft.com/office/drawing/2014/main" id="{07A24BA9-EB0D-4BF8-BF2C-4A438CD4CA64}"/>
+                <a16:creationId xmlns:a16="http://schemas.microsoft.com/office/drawing/2014/main" id="{F910B2EC-B75D-42DF-9A8B-C9B9FAE31F35}"/>
               </a:ext>
             </a:extLst>
           </p:cNvPr>
@@ -5860,7 +8185,7 @@
           <p:cNvPr id="27" name="s2-n3-label">
             <a:extLst xmlns:a="http://schemas.openxmlformats.org/drawingml/2006/main">
               <a:ext uri="{FF2B5EF4-FFF2-40B4-BE49-F238E27FC236}">
-                <a16:creationId xmlns:a16="http://schemas.microsoft.com/office/drawing/2014/main" id="{0797B00E-5652-4489-B881-19A475FD3646}"/>
+                <a16:creationId xmlns:a16="http://schemas.microsoft.com/office/drawing/2014/main" id="{0CDAED38-881C-4919-BA6F-94F3A44B9303}"/>
               </a:ext>
             </a:extLst>
           </p:cNvPr>
@@ -5905,7 +8230,7 @@
           <p:cNvPr id="28" name="s2-p3">
             <a:extLst xmlns:a="http://schemas.openxmlformats.org/drawingml/2006/main">
               <a:ext uri="{FF2B5EF4-FFF2-40B4-BE49-F238E27FC236}">
-                <a16:creationId xmlns:a16="http://schemas.microsoft.com/office/drawing/2014/main" id="{06AA6D80-C090-440C-8494-A62006D390B4}"/>
+                <a16:creationId xmlns:a16="http://schemas.microsoft.com/office/drawing/2014/main" id="{0B28246D-189A-4544-ABCA-03BB6A0F3813}"/>
               </a:ext>
             </a:extLst>
           </p:cNvPr>
@@ -5950,7 +8275,7 @@
           <p:cNvPr id="29" name="s2-takeaway">
             <a:extLst xmlns:a="http://schemas.openxmlformats.org/drawingml/2006/main">
               <a:ext uri="{FF2B5EF4-FFF2-40B4-BE49-F238E27FC236}">
-                <a16:creationId xmlns:a16="http://schemas.microsoft.com/office/drawing/2014/main" id="{F69A922E-F42F-43D4-9318-669EB2EA0D68}"/>
+                <a16:creationId xmlns:a16="http://schemas.microsoft.com/office/drawing/2014/main" id="{4CBEF5FE-8DC2-4D6F-867F-DB3AEF719BFD}"/>
               </a:ext>
             </a:extLst>
           </p:cNvPr>
@@ -6017,7 +8342,7 @@
           <p:cNvPr id="31" name="footer-source-2">
             <a:extLst xmlns:a="http://schemas.openxmlformats.org/drawingml/2006/main">
               <a:ext uri="{FF2B5EF4-FFF2-40B4-BE49-F238E27FC236}">
-                <a16:creationId xmlns:a16="http://schemas.microsoft.com/office/drawing/2014/main" id="{B04ED487-DBEB-4148-92EB-75AB956C8B5C}"/>
+                <a16:creationId xmlns:a16="http://schemas.microsoft.com/office/drawing/2014/main" id="{93F94256-4E97-4D83-81D6-0268A0E5485E}"/>
               </a:ext>
             </a:extLst>
           </p:cNvPr>
@@ -6062,7 +8387,7 @@
           <p:cNvPr id="32" name="footer-number-2">
             <a:extLst xmlns:a="http://schemas.openxmlformats.org/drawingml/2006/main">
               <a:ext uri="{FF2B5EF4-FFF2-40B4-BE49-F238E27FC236}">
-                <a16:creationId xmlns:a16="http://schemas.microsoft.com/office/drawing/2014/main" id="{73E315C2-57EC-430F-8DA8-A5A8715AA6F0}"/>
+                <a16:creationId xmlns:a16="http://schemas.microsoft.com/office/drawing/2014/main" id="{BDA5D208-D368-4D04-AF60-B9F34918C62B}"/>
               </a:ext>
             </a:extLst>
           </p:cNvPr>
@@ -6105,7 +8430,7 @@
     </p:spTree>
     <p:extLst>
       <p:ext uri="{BB962C8B-B14F-4D97-AF65-F5344CB8AC3E}">
-        <p14:creationId xmlns:p14="http://schemas.microsoft.com/office/powerpoint/2010/main" val="440693211"/>
+        <p14:creationId xmlns:p14="http://schemas.microsoft.com/office/powerpoint/2010/main" val="268071389"/>
       </p:ext>
     </p:extLst>
   </p:cSld>
@@ -6136,7 +8461,7 @@
           <p:cNvPr id="38" name="s3-title">
             <a:extLst xmlns:a="http://schemas.openxmlformats.org/drawingml/2006/main">
               <a:ext uri="{FF2B5EF4-FFF2-40B4-BE49-F238E27FC236}">
-                <a16:creationId xmlns:a16="http://schemas.microsoft.com/office/drawing/2014/main" id="{6402C13C-B8C6-4497-AEE4-75A0E3BD7D8B}"/>
+                <a16:creationId xmlns:a16="http://schemas.microsoft.com/office/drawing/2014/main" id="{3BE159F1-7F1E-4E5C-A590-4FB348431D67}"/>
               </a:ext>
             </a:extLst>
           </p:cNvPr>
@@ -6181,7 +8506,7 @@
           <p:cNvPr id="2" name="s3-subtitle">
             <a:extLst xmlns:a="http://schemas.openxmlformats.org/drawingml/2006/main">
               <a:ext uri="{FF2B5EF4-FFF2-40B4-BE49-F238E27FC236}">
-                <a16:creationId xmlns:a16="http://schemas.microsoft.com/office/drawing/2014/main" id="{78D527CC-C3E7-41B9-BD8C-6747987CBBD8}"/>
+                <a16:creationId xmlns:a16="http://schemas.microsoft.com/office/drawing/2014/main" id="{777B3E03-6A48-4F36-BDB6-C500EF2A0578}"/>
               </a:ext>
             </a:extLst>
           </p:cNvPr>
@@ -6270,7 +8595,7 @@
           <p:cNvPr id="5" name="s3-address-panel">
             <a:extLst xmlns:a="http://schemas.openxmlformats.org/drawingml/2006/main">
               <a:ext uri="{FF2B5EF4-FFF2-40B4-BE49-F238E27FC236}">
-                <a16:creationId xmlns:a16="http://schemas.microsoft.com/office/drawing/2014/main" id="{E2738676-5B5D-4474-93FA-8777C4E38697}"/>
+                <a16:creationId xmlns:a16="http://schemas.microsoft.com/office/drawing/2014/main" id="{A151444C-85B7-451C-914C-CE9D76892E95}"/>
               </a:ext>
             </a:extLst>
           </p:cNvPr>
@@ -6349,7 +8674,7 @@
           <p:cNvPr id="8" name="s3-x">
             <a:extLst xmlns:a="http://schemas.openxmlformats.org/drawingml/2006/main">
               <a:ext uri="{FF2B5EF4-FFF2-40B4-BE49-F238E27FC236}">
-                <a16:creationId xmlns:a16="http://schemas.microsoft.com/office/drawing/2014/main" id="{5F431052-B7E0-4F36-9CFB-F013159F1A73}"/>
+                <a16:creationId xmlns:a16="http://schemas.microsoft.com/office/drawing/2014/main" id="{1AF3DDE5-8602-43A4-A81F-6EF5285CD8C3}"/>
               </a:ext>
             </a:extLst>
           </p:cNvPr>
@@ -6382,7 +8707,7 @@
           <p:cNvPr id="9" name="s3-x-letter">
             <a:extLst xmlns:a="http://schemas.openxmlformats.org/drawingml/2006/main">
               <a:ext uri="{FF2B5EF4-FFF2-40B4-BE49-F238E27FC236}">
-                <a16:creationId xmlns:a16="http://schemas.microsoft.com/office/drawing/2014/main" id="{589E2494-6E5A-400A-B96B-F8E0C6FA448E}"/>
+                <a16:creationId xmlns:a16="http://schemas.microsoft.com/office/drawing/2014/main" id="{0606A9E7-FE41-48B1-ABF4-4CCC7BE6105A}"/>
               </a:ext>
             </a:extLst>
           </p:cNvPr>
@@ -6427,7 +8752,7 @@
           <p:cNvPr id="10" name="s3-x-label">
             <a:extLst xmlns:a="http://schemas.openxmlformats.org/drawingml/2006/main">
               <a:ext uri="{FF2B5EF4-FFF2-40B4-BE49-F238E27FC236}">
-                <a16:creationId xmlns:a16="http://schemas.microsoft.com/office/drawing/2014/main" id="{07DBCE4C-BA7F-4CEA-ACD3-4BA26FE2654C}"/>
+                <a16:creationId xmlns:a16="http://schemas.microsoft.com/office/drawing/2014/main" id="{6420BB52-2132-4963-8E83-56AE8921134E}"/>
               </a:ext>
             </a:extLst>
           </p:cNvPr>
@@ -6472,7 +8797,7 @@
           <p:cNvPr id="11" name="s3-x-main">
             <a:extLst xmlns:a="http://schemas.openxmlformats.org/drawingml/2006/main">
               <a:ext uri="{FF2B5EF4-FFF2-40B4-BE49-F238E27FC236}">
-                <a16:creationId xmlns:a16="http://schemas.microsoft.com/office/drawing/2014/main" id="{6DB0C774-09CC-4317-88C3-5676B2AA3BCA}"/>
+                <a16:creationId xmlns:a16="http://schemas.microsoft.com/office/drawing/2014/main" id="{38E20B9E-5C9B-4392-82E1-605FE1058DD4}"/>
               </a:ext>
             </a:extLst>
           </p:cNvPr>
@@ -6517,7 +8842,7 @@
           <p:cNvPr id="12" name="s3-x-question">
             <a:extLst xmlns:a="http://schemas.openxmlformats.org/drawingml/2006/main">
               <a:ext uri="{FF2B5EF4-FFF2-40B4-BE49-F238E27FC236}">
-                <a16:creationId xmlns:a16="http://schemas.microsoft.com/office/drawing/2014/main" id="{A8B775FA-FE72-42AD-92E0-8F0236599678}"/>
+                <a16:creationId xmlns:a16="http://schemas.microsoft.com/office/drawing/2014/main" id="{E9F12295-6AF7-4FA9-A4B6-41683A578444}"/>
               </a:ext>
             </a:extLst>
           </p:cNvPr>
@@ -6562,7 +8887,7 @@
           <p:cNvPr id="13" name="s3-y">
             <a:extLst xmlns:a="http://schemas.openxmlformats.org/drawingml/2006/main">
               <a:ext uri="{FF2B5EF4-FFF2-40B4-BE49-F238E27FC236}">
-                <a16:creationId xmlns:a16="http://schemas.microsoft.com/office/drawing/2014/main" id="{EA9BF2DE-C57B-4C82-B75C-BC5196D55EA9}"/>
+                <a16:creationId xmlns:a16="http://schemas.microsoft.com/office/drawing/2014/main" id="{A465AEDC-B16F-4795-A59A-14421467D5CE}"/>
               </a:ext>
             </a:extLst>
           </p:cNvPr>
@@ -6595,7 +8920,7 @@
           <p:cNvPr id="14" name="s3-y-letter">
             <a:extLst xmlns:a="http://schemas.openxmlformats.org/drawingml/2006/main">
               <a:ext uri="{FF2B5EF4-FFF2-40B4-BE49-F238E27FC236}">
-                <a16:creationId xmlns:a16="http://schemas.microsoft.com/office/drawing/2014/main" id="{2A3F9A49-BC71-4C97-83E6-BE6A8A1B81CE}"/>
+                <a16:creationId xmlns:a16="http://schemas.microsoft.com/office/drawing/2014/main" id="{62286CE6-CAF8-408F-BFD1-DE3AB89340D6}"/>
               </a:ext>
             </a:extLst>
           </p:cNvPr>
@@ -6640,7 +8965,7 @@
           <p:cNvPr id="15" name="s3-y-label">
             <a:extLst xmlns:a="http://schemas.openxmlformats.org/drawingml/2006/main">
               <a:ext uri="{FF2B5EF4-FFF2-40B4-BE49-F238E27FC236}">
-                <a16:creationId xmlns:a16="http://schemas.microsoft.com/office/drawing/2014/main" id="{A5C4D952-D17C-4CF8-99FD-F89543984CE4}"/>
+                <a16:creationId xmlns:a16="http://schemas.microsoft.com/office/drawing/2014/main" id="{FF272A93-8DE5-4F56-A248-C29613E94165}"/>
               </a:ext>
             </a:extLst>
           </p:cNvPr>
@@ -6685,7 +9010,7 @@
           <p:cNvPr id="16" name="s3-y-main">
             <a:extLst xmlns:a="http://schemas.openxmlformats.org/drawingml/2006/main">
               <a:ext uri="{FF2B5EF4-FFF2-40B4-BE49-F238E27FC236}">
-                <a16:creationId xmlns:a16="http://schemas.microsoft.com/office/drawing/2014/main" id="{5CEFC791-D313-47A8-9EBD-91E4AAC4AEA3}"/>
+                <a16:creationId xmlns:a16="http://schemas.microsoft.com/office/drawing/2014/main" id="{30D28EFC-0648-4F80-89B3-2FD11A681927}"/>
               </a:ext>
             </a:extLst>
           </p:cNvPr>
@@ -6730,7 +9055,7 @@
           <p:cNvPr id="17" name="s3-y-question">
             <a:extLst xmlns:a="http://schemas.openxmlformats.org/drawingml/2006/main">
               <a:ext uri="{FF2B5EF4-FFF2-40B4-BE49-F238E27FC236}">
-                <a16:creationId xmlns:a16="http://schemas.microsoft.com/office/drawing/2014/main" id="{353AAE18-7E44-413B-ACEA-A45ECA7E2D84}"/>
+                <a16:creationId xmlns:a16="http://schemas.microsoft.com/office/drawing/2014/main" id="{C365CE28-8C5D-4C0E-BCE2-D108C5EEECD9}"/>
               </a:ext>
             </a:extLst>
           </p:cNvPr>
@@ -6775,7 +9100,7 @@
           <p:cNvPr id="18" name="s3-z">
             <a:extLst xmlns:a="http://schemas.openxmlformats.org/drawingml/2006/main">
               <a:ext uri="{FF2B5EF4-FFF2-40B4-BE49-F238E27FC236}">
-                <a16:creationId xmlns:a16="http://schemas.microsoft.com/office/drawing/2014/main" id="{2F155500-BC09-472F-B41C-001AE4696062}"/>
+                <a16:creationId xmlns:a16="http://schemas.microsoft.com/office/drawing/2014/main" id="{DA12248D-8F46-4E21-9B95-5602C60859A1}"/>
               </a:ext>
             </a:extLst>
           </p:cNvPr>
@@ -6808,7 +9133,7 @@
           <p:cNvPr id="19" name="s3-z-letter">
             <a:extLst xmlns:a="http://schemas.openxmlformats.org/drawingml/2006/main">
               <a:ext uri="{FF2B5EF4-FFF2-40B4-BE49-F238E27FC236}">
-                <a16:creationId xmlns:a16="http://schemas.microsoft.com/office/drawing/2014/main" id="{62ABCA8B-A29E-45F4-A2DB-3B4C7F70705A}"/>
+                <a16:creationId xmlns:a16="http://schemas.microsoft.com/office/drawing/2014/main" id="{F803801D-88F9-454E-92B2-0CC38124F188}"/>
               </a:ext>
             </a:extLst>
           </p:cNvPr>
@@ -6853,7 +9178,7 @@
           <p:cNvPr id="20" name="s3-z-label">
             <a:extLst xmlns:a="http://schemas.openxmlformats.org/drawingml/2006/main">
               <a:ext uri="{FF2B5EF4-FFF2-40B4-BE49-F238E27FC236}">
-                <a16:creationId xmlns:a16="http://schemas.microsoft.com/office/drawing/2014/main" id="{89D09B9B-4236-4BCD-88CF-5D0EABBBF0EF}"/>
+                <a16:creationId xmlns:a16="http://schemas.microsoft.com/office/drawing/2014/main" id="{14549DAE-0B90-48C1-80AE-BA381B4D34BF}"/>
               </a:ext>
             </a:extLst>
           </p:cNvPr>
@@ -6898,7 +9223,7 @@
           <p:cNvPr id="21" name="s3-z-main">
             <a:extLst xmlns:a="http://schemas.openxmlformats.org/drawingml/2006/main">
               <a:ext uri="{FF2B5EF4-FFF2-40B4-BE49-F238E27FC236}">
-                <a16:creationId xmlns:a16="http://schemas.microsoft.com/office/drawing/2014/main" id="{AE29F668-7461-4F40-AF41-41BB653B81A2}"/>
+                <a16:creationId xmlns:a16="http://schemas.microsoft.com/office/drawing/2014/main" id="{F2E88F77-C085-4F1A-A200-65132D9C5FC3}"/>
               </a:ext>
             </a:extLst>
           </p:cNvPr>
@@ -6943,7 +9268,7 @@
           <p:cNvPr id="22" name="s3-z-question">
             <a:extLst xmlns:a="http://schemas.openxmlformats.org/drawingml/2006/main">
               <a:ext uri="{FF2B5EF4-FFF2-40B4-BE49-F238E27FC236}">
-                <a16:creationId xmlns:a16="http://schemas.microsoft.com/office/drawing/2014/main" id="{41992AA5-71EB-4FD4-BE88-8FE69356C600}"/>
+                <a16:creationId xmlns:a16="http://schemas.microsoft.com/office/drawing/2014/main" id="{0E02F835-5538-4AAA-A3F4-C70AC4087B32}"/>
               </a:ext>
             </a:extLst>
           </p:cNvPr>
@@ -6988,7 +9313,7 @@
           <p:cNvPr id="23" name="s3-address-label">
             <a:extLst xmlns:a="http://schemas.openxmlformats.org/drawingml/2006/main">
               <a:ext uri="{FF2B5EF4-FFF2-40B4-BE49-F238E27FC236}">
-                <a16:creationId xmlns:a16="http://schemas.microsoft.com/office/drawing/2014/main" id="{EE530103-ED72-41AA-B3D6-B88551387D7B}"/>
+                <a16:creationId xmlns:a16="http://schemas.microsoft.com/office/drawing/2014/main" id="{8E0DC33B-9298-4F4E-9CE9-8F622C76E832}"/>
               </a:ext>
             </a:extLst>
           </p:cNvPr>
@@ -7033,7 +9358,7 @@
           <p:cNvPr id="24" name="s3-address-x">
             <a:extLst xmlns:a="http://schemas.openxmlformats.org/drawingml/2006/main">
               <a:ext uri="{FF2B5EF4-FFF2-40B4-BE49-F238E27FC236}">
-                <a16:creationId xmlns:a16="http://schemas.microsoft.com/office/drawing/2014/main" id="{7DACDCF1-00A4-4A0A-A68E-DFA5959ACB6E}"/>
+                <a16:creationId xmlns:a16="http://schemas.microsoft.com/office/drawing/2014/main" id="{947D0D04-CC82-4680-8399-9742026D4D9D}"/>
               </a:ext>
             </a:extLst>
           </p:cNvPr>
@@ -7078,7 +9403,7 @@
           <p:cNvPr id="25" name="s3-address-x-value">
             <a:extLst xmlns:a="http://schemas.openxmlformats.org/drawingml/2006/main">
               <a:ext uri="{FF2B5EF4-FFF2-40B4-BE49-F238E27FC236}">
-                <a16:creationId xmlns:a16="http://schemas.microsoft.com/office/drawing/2014/main" id="{B39937E0-2284-4873-B0ED-DDD7410AD51D}"/>
+                <a16:creationId xmlns:a16="http://schemas.microsoft.com/office/drawing/2014/main" id="{73839940-08A1-466B-A1AE-9CD81AE30431}"/>
               </a:ext>
             </a:extLst>
           </p:cNvPr>
@@ -7123,7 +9448,7 @@
           <p:cNvPr id="26" name="s3-address-y">
             <a:extLst xmlns:a="http://schemas.openxmlformats.org/drawingml/2006/main">
               <a:ext uri="{FF2B5EF4-FFF2-40B4-BE49-F238E27FC236}">
-                <a16:creationId xmlns:a16="http://schemas.microsoft.com/office/drawing/2014/main" id="{9DFE95F6-9681-42E5-9AEB-B76DF7916917}"/>
+                <a16:creationId xmlns:a16="http://schemas.microsoft.com/office/drawing/2014/main" id="{299C7539-B635-49D1-8801-09CE31297314}"/>
               </a:ext>
             </a:extLst>
           </p:cNvPr>
@@ -7168,7 +9493,7 @@
           <p:cNvPr id="27" name="s3-address-y-value">
             <a:extLst xmlns:a="http://schemas.openxmlformats.org/drawingml/2006/main">
               <a:ext uri="{FF2B5EF4-FFF2-40B4-BE49-F238E27FC236}">
-                <a16:creationId xmlns:a16="http://schemas.microsoft.com/office/drawing/2014/main" id="{FFFE90DB-7582-4CA9-9F4B-63002A7589B4}"/>
+                <a16:creationId xmlns:a16="http://schemas.microsoft.com/office/drawing/2014/main" id="{3F280781-ADF4-465F-A34B-CCED81D592F3}"/>
               </a:ext>
             </a:extLst>
           </p:cNvPr>
@@ -7213,7 +9538,7 @@
           <p:cNvPr id="28" name="s3-address-z">
             <a:extLst xmlns:a="http://schemas.openxmlformats.org/drawingml/2006/main">
               <a:ext uri="{FF2B5EF4-FFF2-40B4-BE49-F238E27FC236}">
-                <a16:creationId xmlns:a16="http://schemas.microsoft.com/office/drawing/2014/main" id="{E00AE49E-1B1B-4484-A814-E7A7187689E3}"/>
+                <a16:creationId xmlns:a16="http://schemas.microsoft.com/office/drawing/2014/main" id="{3A4457AE-F040-4B1C-AAE8-62DBAFC29D2C}"/>
               </a:ext>
             </a:extLst>
           </p:cNvPr>
@@ -7258,7 +9583,7 @@
           <p:cNvPr id="29" name="s3-address-z-value">
             <a:extLst xmlns:a="http://schemas.openxmlformats.org/drawingml/2006/main">
               <a:ext uri="{FF2B5EF4-FFF2-40B4-BE49-F238E27FC236}">
-                <a16:creationId xmlns:a16="http://schemas.microsoft.com/office/drawing/2014/main" id="{14146E2B-F108-4D6F-96ED-EB3C22869828}"/>
+                <a16:creationId xmlns:a16="http://schemas.microsoft.com/office/drawing/2014/main" id="{DF240550-3D5D-4EE6-B3B1-0EFE808D26F0}"/>
               </a:ext>
             </a:extLst>
           </p:cNvPr>
@@ -7303,7 +9628,7 @@
           <p:cNvPr id="30" name="s3-address-note">
             <a:extLst xmlns:a="http://schemas.openxmlformats.org/drawingml/2006/main">
               <a:ext uri="{FF2B5EF4-FFF2-40B4-BE49-F238E27FC236}">
-                <a16:creationId xmlns:a16="http://schemas.microsoft.com/office/drawing/2014/main" id="{D4EA7E03-E6CA-4BAB-9734-7EF2BA43DDF6}"/>
+                <a16:creationId xmlns:a16="http://schemas.microsoft.com/office/drawing/2014/main" id="{B74B06B9-05B5-43C9-BCE6-66FA2CE17367}"/>
               </a:ext>
             </a:extLst>
           </p:cNvPr>
@@ -7348,7 +9673,7 @@
           <p:cNvPr id="31" name="s3-route-label">
             <a:extLst xmlns:a="http://schemas.openxmlformats.org/drawingml/2006/main">
               <a:ext uri="{FF2B5EF4-FFF2-40B4-BE49-F238E27FC236}">
-                <a16:creationId xmlns:a16="http://schemas.microsoft.com/office/drawing/2014/main" id="{E86A8FED-9CAF-4461-B7B3-F7E12C6E347D}"/>
+                <a16:creationId xmlns:a16="http://schemas.microsoft.com/office/drawing/2014/main" id="{B9F25159-5E71-440F-92BC-E19D9134C1BD}"/>
               </a:ext>
             </a:extLst>
           </p:cNvPr>
@@ -7393,7 +9718,7 @@
           <p:cNvPr id="32" name="s3-route-main">
             <a:extLst xmlns:a="http://schemas.openxmlformats.org/drawingml/2006/main">
               <a:ext uri="{FF2B5EF4-FFF2-40B4-BE49-F238E27FC236}">
-                <a16:creationId xmlns:a16="http://schemas.microsoft.com/office/drawing/2014/main" id="{5B1577CC-1696-4D64-923C-7F16AFDAF99E}"/>
+                <a16:creationId xmlns:a16="http://schemas.microsoft.com/office/drawing/2014/main" id="{A18C438A-35EC-4658-ACD5-44D4C5E06652}"/>
               </a:ext>
             </a:extLst>
           </p:cNvPr>
@@ -7438,7 +9763,7 @@
           <p:cNvPr id="33" name="s3-memory-label">
             <a:extLst xmlns:a="http://schemas.openxmlformats.org/drawingml/2006/main">
               <a:ext uri="{FF2B5EF4-FFF2-40B4-BE49-F238E27FC236}">
-                <a16:creationId xmlns:a16="http://schemas.microsoft.com/office/drawing/2014/main" id="{375F7F00-DB2A-429F-A60D-B9DFCE606582}"/>
+                <a16:creationId xmlns:a16="http://schemas.microsoft.com/office/drawing/2014/main" id="{006A5C4C-BF7C-44B7-ACC4-73838D5A0F58}"/>
               </a:ext>
             </a:extLst>
           </p:cNvPr>
@@ -7483,7 +9808,7 @@
           <p:cNvPr id="34" name="s3-memory-main">
             <a:extLst xmlns:a="http://schemas.openxmlformats.org/drawingml/2006/main">
               <a:ext uri="{FF2B5EF4-FFF2-40B4-BE49-F238E27FC236}">
-                <a16:creationId xmlns:a16="http://schemas.microsoft.com/office/drawing/2014/main" id="{5F81F5F1-6F23-4DAF-A6EA-96BB6DDA04EE}"/>
+                <a16:creationId xmlns:a16="http://schemas.microsoft.com/office/drawing/2014/main" id="{450F624A-405F-4A72-8651-1E6B5108D9D6}"/>
               </a:ext>
             </a:extLst>
           </p:cNvPr>
@@ -7550,7 +9875,7 @@
           <p:cNvPr id="36" name="footer-source-3">
             <a:extLst xmlns:a="http://schemas.openxmlformats.org/drawingml/2006/main">
               <a:ext uri="{FF2B5EF4-FFF2-40B4-BE49-F238E27FC236}">
-                <a16:creationId xmlns:a16="http://schemas.microsoft.com/office/drawing/2014/main" id="{871D94E9-00B7-4681-A530-D2D6D8A7AC7C}"/>
+                <a16:creationId xmlns:a16="http://schemas.microsoft.com/office/drawing/2014/main" id="{F352C301-97F8-4E1B-96D3-03FB3BDC6798}"/>
               </a:ext>
             </a:extLst>
           </p:cNvPr>
@@ -7595,7 +9920,7 @@
           <p:cNvPr id="37" name="footer-number-3">
             <a:extLst xmlns:a="http://schemas.openxmlformats.org/drawingml/2006/main">
               <a:ext uri="{FF2B5EF4-FFF2-40B4-BE49-F238E27FC236}">
-                <a16:creationId xmlns:a16="http://schemas.microsoft.com/office/drawing/2014/main" id="{1790406D-1E86-4B01-A584-CCC7938D7156}"/>
+                <a16:creationId xmlns:a16="http://schemas.microsoft.com/office/drawing/2014/main" id="{228DE4FC-3284-4BA1-840C-FDBF0CFBF95D}"/>
               </a:ext>
             </a:extLst>
           </p:cNvPr>
@@ -7638,7 +9963,7 @@
     </p:spTree>
     <p:extLst>
       <p:ext uri="{BB962C8B-B14F-4D97-AF65-F5344CB8AC3E}">
-        <p14:creationId xmlns:p14="http://schemas.microsoft.com/office/powerpoint/2010/main" val="1168880103"/>
+        <p14:creationId xmlns:p14="http://schemas.microsoft.com/office/powerpoint/2010/main" val="1926669292"/>
       </p:ext>
     </p:extLst>
   </p:cSld>
@@ -7669,7 +9994,7 @@
           <p:cNvPr id="26" name="s4-title">
             <a:extLst xmlns:a="http://schemas.openxmlformats.org/drawingml/2006/main">
               <a:ext uri="{FF2B5EF4-FFF2-40B4-BE49-F238E27FC236}">
-                <a16:creationId xmlns:a16="http://schemas.microsoft.com/office/drawing/2014/main" id="{0F156744-E984-45F8-B144-F88BAC49019E}"/>
+                <a16:creationId xmlns:a16="http://schemas.microsoft.com/office/drawing/2014/main" id="{68947B46-CA88-4333-B0E8-E8DC8B26BC80}"/>
               </a:ext>
             </a:extLst>
           </p:cNvPr>
@@ -7714,7 +10039,7 @@
           <p:cNvPr id="2" name="s4-subtitle">
             <a:extLst xmlns:a="http://schemas.openxmlformats.org/drawingml/2006/main">
               <a:ext uri="{FF2B5EF4-FFF2-40B4-BE49-F238E27FC236}">
-                <a16:creationId xmlns:a16="http://schemas.microsoft.com/office/drawing/2014/main" id="{8176583E-D965-429E-8F26-10CF508B0EF8}"/>
+                <a16:creationId xmlns:a16="http://schemas.microsoft.com/office/drawing/2014/main" id="{F5D47C00-12EB-4D54-ADD0-45E7308C3153}"/>
               </a:ext>
             </a:extLst>
           </p:cNvPr>
@@ -7759,7 +10084,7 @@
           <p:cNvPr id="3" name="s4-terminal">
             <a:extLst xmlns:a="http://schemas.openxmlformats.org/drawingml/2006/main">
               <a:ext uri="{FF2B5EF4-FFF2-40B4-BE49-F238E27FC236}">
-                <a16:creationId xmlns:a16="http://schemas.microsoft.com/office/drawing/2014/main" id="{05B09A9E-0761-43A9-B1C2-0F5D6E97F0C4}"/>
+                <a16:creationId xmlns:a16="http://schemas.microsoft.com/office/drawing/2014/main" id="{B17B1D51-FA65-49C1-87E2-786B1A88A251}"/>
               </a:ext>
             </a:extLst>
           </p:cNvPr>
@@ -7816,7 +10141,7 @@
           <p:cNvPr id="5" name="s4-dot1">
             <a:extLst xmlns:a="http://schemas.openxmlformats.org/drawingml/2006/main">
               <a:ext uri="{FF2B5EF4-FFF2-40B4-BE49-F238E27FC236}">
-                <a16:creationId xmlns:a16="http://schemas.microsoft.com/office/drawing/2014/main" id="{C408DDB0-18A2-4D97-BCFD-106A931452A7}"/>
+                <a16:creationId xmlns:a16="http://schemas.microsoft.com/office/drawing/2014/main" id="{EF5AB9D9-9AE4-4D7F-B875-0784E85C0A4B}"/>
               </a:ext>
             </a:extLst>
           </p:cNvPr>
@@ -7849,7 +10174,7 @@
           <p:cNvPr id="6" name="s4-dot2">
             <a:extLst xmlns:a="http://schemas.openxmlformats.org/drawingml/2006/main">
               <a:ext uri="{FF2B5EF4-FFF2-40B4-BE49-F238E27FC236}">
-                <a16:creationId xmlns:a16="http://schemas.microsoft.com/office/drawing/2014/main" id="{AEEC7497-D97D-4C33-9B1E-E4E401D673F1}"/>
+                <a16:creationId xmlns:a16="http://schemas.microsoft.com/office/drawing/2014/main" id="{62772511-3C0A-4C09-A1E8-29428A74CA39}"/>
               </a:ext>
             </a:extLst>
           </p:cNvPr>
@@ -7882,7 +10207,7 @@
           <p:cNvPr id="7" name="s4-dot3">
             <a:extLst xmlns:a="http://schemas.openxmlformats.org/drawingml/2006/main">
               <a:ext uri="{FF2B5EF4-FFF2-40B4-BE49-F238E27FC236}">
-                <a16:creationId xmlns:a16="http://schemas.microsoft.com/office/drawing/2014/main" id="{9AF29196-2BE8-4A2E-A37A-69C7B8018BD7}"/>
+                <a16:creationId xmlns:a16="http://schemas.microsoft.com/office/drawing/2014/main" id="{8E62892F-82D1-4046-A0B2-68F463001BC9}"/>
               </a:ext>
             </a:extLst>
           </p:cNvPr>
@@ -7915,7 +10240,7 @@
           <p:cNvPr id="8" name="s4-command-label">
             <a:extLst xmlns:a="http://schemas.openxmlformats.org/drawingml/2006/main">
               <a:ext uri="{FF2B5EF4-FFF2-40B4-BE49-F238E27FC236}">
-                <a16:creationId xmlns:a16="http://schemas.microsoft.com/office/drawing/2014/main" id="{67ADEA78-5DD0-4EA4-BDD1-1E7906FFBCDB}"/>
+                <a16:creationId xmlns:a16="http://schemas.microsoft.com/office/drawing/2014/main" id="{4E386AB5-3A36-4E36-81FA-F21D747D6FC5}"/>
               </a:ext>
             </a:extLst>
           </p:cNvPr>
@@ -7960,7 +10285,7 @@
           <p:cNvPr id="9" name="s4-command">
             <a:extLst xmlns:a="http://schemas.openxmlformats.org/drawingml/2006/main">
               <a:ext uri="{FF2B5EF4-FFF2-40B4-BE49-F238E27FC236}">
-                <a16:creationId xmlns:a16="http://schemas.microsoft.com/office/drawing/2014/main" id="{542D7585-47CC-4F26-80DD-A37201EC6181}"/>
+                <a16:creationId xmlns:a16="http://schemas.microsoft.com/office/drawing/2014/main" id="{AD022F4D-6F1D-4AC8-9461-1C5368CFE63E}"/>
               </a:ext>
             </a:extLst>
           </p:cNvPr>
@@ -8009,7 +10334,7 @@
           <p:cNvPr id="10" name="s4-command-note">
             <a:extLst xmlns:a="http://schemas.openxmlformats.org/drawingml/2006/main">
               <a:ext uri="{FF2B5EF4-FFF2-40B4-BE49-F238E27FC236}">
-                <a16:creationId xmlns:a16="http://schemas.microsoft.com/office/drawing/2014/main" id="{8931EB83-2C59-4F42-BD25-73A5C94E0461}"/>
+                <a16:creationId xmlns:a16="http://schemas.microsoft.com/office/drawing/2014/main" id="{C87D7EDC-9C8F-4F68-A0B0-71FDD185E610}"/>
               </a:ext>
             </a:extLst>
           </p:cNvPr>
@@ -8054,7 +10379,7 @@
           <p:cNvPr id="11" name="s4-output-label">
             <a:extLst xmlns:a="http://schemas.openxmlformats.org/drawingml/2006/main">
               <a:ext uri="{FF2B5EF4-FFF2-40B4-BE49-F238E27FC236}">
-                <a16:creationId xmlns:a16="http://schemas.microsoft.com/office/drawing/2014/main" id="{D0EEB57A-D3C9-45D6-9B8C-326D49F1AE9C}"/>
+                <a16:creationId xmlns:a16="http://schemas.microsoft.com/office/drawing/2014/main" id="{07B95809-A1D5-4C48-B540-07E2E7BC4127}"/>
               </a:ext>
             </a:extLst>
           </p:cNvPr>
@@ -8099,7 +10424,7 @@
           <p:cNvPr id="12" name="s4-o1a">
             <a:extLst xmlns:a="http://schemas.openxmlformats.org/drawingml/2006/main">
               <a:ext uri="{FF2B5EF4-FFF2-40B4-BE49-F238E27FC236}">
-                <a16:creationId xmlns:a16="http://schemas.microsoft.com/office/drawing/2014/main" id="{A916D26D-E6E2-4D99-8551-863FF3788ACA}"/>
+                <a16:creationId xmlns:a16="http://schemas.microsoft.com/office/drawing/2014/main" id="{CE432883-07CA-45E5-85F4-4433322D763B}"/>
               </a:ext>
             </a:extLst>
           </p:cNvPr>
@@ -8144,7 +10469,7 @@
           <p:cNvPr id="13" name="s4-o1b">
             <a:extLst xmlns:a="http://schemas.openxmlformats.org/drawingml/2006/main">
               <a:ext uri="{FF2B5EF4-FFF2-40B4-BE49-F238E27FC236}">
-                <a16:creationId xmlns:a16="http://schemas.microsoft.com/office/drawing/2014/main" id="{29D10F41-B6B6-40CE-893D-A813ED06542B}"/>
+                <a16:creationId xmlns:a16="http://schemas.microsoft.com/office/drawing/2014/main" id="{3D1F0CD6-38B6-431D-829F-1612DCC58D8C}"/>
               </a:ext>
             </a:extLst>
           </p:cNvPr>
@@ -8189,7 +10514,7 @@
           <p:cNvPr id="14" name="s4-o2a">
             <a:extLst xmlns:a="http://schemas.openxmlformats.org/drawingml/2006/main">
               <a:ext uri="{FF2B5EF4-FFF2-40B4-BE49-F238E27FC236}">
-                <a16:creationId xmlns:a16="http://schemas.microsoft.com/office/drawing/2014/main" id="{E4DC2FBE-4051-495B-B9EA-5B896AA673DE}"/>
+                <a16:creationId xmlns:a16="http://schemas.microsoft.com/office/drawing/2014/main" id="{FFF71812-1510-4987-8D65-D9D50011BE93}"/>
               </a:ext>
             </a:extLst>
           </p:cNvPr>
@@ -8234,7 +10559,7 @@
           <p:cNvPr id="15" name="s4-o2b">
             <a:extLst xmlns:a="http://schemas.openxmlformats.org/drawingml/2006/main">
               <a:ext uri="{FF2B5EF4-FFF2-40B4-BE49-F238E27FC236}">
-                <a16:creationId xmlns:a16="http://schemas.microsoft.com/office/drawing/2014/main" id="{DB3D4021-0020-4C22-9F02-563FCC9A7CFA}"/>
+                <a16:creationId xmlns:a16="http://schemas.microsoft.com/office/drawing/2014/main" id="{84990F9D-EAD6-4FCE-A1A1-981C45486D6C}"/>
               </a:ext>
             </a:extLst>
           </p:cNvPr>
@@ -8279,7 +10604,7 @@
           <p:cNvPr id="16" name="s4-o3a">
             <a:extLst xmlns:a="http://schemas.openxmlformats.org/drawingml/2006/main">
               <a:ext uri="{FF2B5EF4-FFF2-40B4-BE49-F238E27FC236}">
-                <a16:creationId xmlns:a16="http://schemas.microsoft.com/office/drawing/2014/main" id="{8E70176C-66FA-4CFB-8572-ACF4F7EC2CC6}"/>
+                <a16:creationId xmlns:a16="http://schemas.microsoft.com/office/drawing/2014/main" id="{EA6160D8-1024-4147-A456-EE97D14AF5BF}"/>
               </a:ext>
             </a:extLst>
           </p:cNvPr>
@@ -8324,7 +10649,7 @@
           <p:cNvPr id="17" name="s4-o3b">
             <a:extLst xmlns:a="http://schemas.openxmlformats.org/drawingml/2006/main">
               <a:ext uri="{FF2B5EF4-FFF2-40B4-BE49-F238E27FC236}">
-                <a16:creationId xmlns:a16="http://schemas.microsoft.com/office/drawing/2014/main" id="{0C5F3109-5779-4612-94DA-8FCAC98205AB}"/>
+                <a16:creationId xmlns:a16="http://schemas.microsoft.com/office/drawing/2014/main" id="{E292196D-5574-47AD-A618-929A2E94ACCC}"/>
               </a:ext>
             </a:extLst>
           </p:cNvPr>
@@ -8369,7 +10694,7 @@
           <p:cNvPr id="18" name="s4-o4a">
             <a:extLst xmlns:a="http://schemas.openxmlformats.org/drawingml/2006/main">
               <a:ext uri="{FF2B5EF4-FFF2-40B4-BE49-F238E27FC236}">
-                <a16:creationId xmlns:a16="http://schemas.microsoft.com/office/drawing/2014/main" id="{A455D853-0557-4C68-8B2D-CBCBFC87CF0D}"/>
+                <a16:creationId xmlns:a16="http://schemas.microsoft.com/office/drawing/2014/main" id="{47674375-6A84-4B32-8314-DD76B5C9BE8F}"/>
               </a:ext>
             </a:extLst>
           </p:cNvPr>
@@ -8414,7 +10739,7 @@
           <p:cNvPr id="19" name="s4-o4b">
             <a:extLst xmlns:a="http://schemas.openxmlformats.org/drawingml/2006/main">
               <a:ext uri="{FF2B5EF4-FFF2-40B4-BE49-F238E27FC236}">
-                <a16:creationId xmlns:a16="http://schemas.microsoft.com/office/drawing/2014/main" id="{9FA0AD0F-0781-438C-BEA0-0AC8ADB78F13}"/>
+                <a16:creationId xmlns:a16="http://schemas.microsoft.com/office/drawing/2014/main" id="{F03B970C-1D32-4D5E-8847-F34CB360197B}"/>
               </a:ext>
             </a:extLst>
           </p:cNvPr>
@@ -8460,7 +10785,7 @@
           <p:cNvPr id="20" name="s4-o5a">
             <a:extLst xmlns:a="http://schemas.openxmlformats.org/drawingml/2006/main">
               <a:ext uri="{FF2B5EF4-FFF2-40B4-BE49-F238E27FC236}">
-                <a16:creationId xmlns:a16="http://schemas.microsoft.com/office/drawing/2014/main" id="{8D787DBC-835B-4793-A997-E5A552D4FEC8}"/>
+                <a16:creationId xmlns:a16="http://schemas.microsoft.com/office/drawing/2014/main" id="{C68AF140-FA37-4686-B150-7E1142DB73BC}"/>
               </a:ext>
             </a:extLst>
           </p:cNvPr>
@@ -8505,7 +10830,7 @@
           <p:cNvPr id="21" name="s4-o5b">
             <a:extLst xmlns:a="http://schemas.openxmlformats.org/drawingml/2006/main">
               <a:ext uri="{FF2B5EF4-FFF2-40B4-BE49-F238E27FC236}">
-                <a16:creationId xmlns:a16="http://schemas.microsoft.com/office/drawing/2014/main" id="{82F1658C-BCEA-4D1C-AD52-3851E0FF6BEC}"/>
+                <a16:creationId xmlns:a16="http://schemas.microsoft.com/office/drawing/2014/main" id="{97AD47E5-8B5D-4751-96F7-4EF1C97A2D2B}"/>
               </a:ext>
             </a:extLst>
           </p:cNvPr>
@@ -8550,7 +10875,7 @@
           <p:cNvPr id="22" name="s4-output-note">
             <a:extLst xmlns:a="http://schemas.openxmlformats.org/drawingml/2006/main">
               <a:ext uri="{FF2B5EF4-FFF2-40B4-BE49-F238E27FC236}">
-                <a16:creationId xmlns:a16="http://schemas.microsoft.com/office/drawing/2014/main" id="{8DBCE6A5-F9A9-43C0-962A-5C4C8096454F}"/>
+                <a16:creationId xmlns:a16="http://schemas.microsoft.com/office/drawing/2014/main" id="{FC7C752A-4E85-40F1-B4BA-F6321CD9D843}"/>
               </a:ext>
             </a:extLst>
           </p:cNvPr>
@@ -8617,7 +10942,7 @@
           <p:cNvPr id="24" name="footer-source-4">
             <a:extLst xmlns:a="http://schemas.openxmlformats.org/drawingml/2006/main">
               <a:ext uri="{FF2B5EF4-FFF2-40B4-BE49-F238E27FC236}">
-                <a16:creationId xmlns:a16="http://schemas.microsoft.com/office/drawing/2014/main" id="{3FC3B97C-6BFA-40BF-A75D-4513DC5BDCD1}"/>
+                <a16:creationId xmlns:a16="http://schemas.microsoft.com/office/drawing/2014/main" id="{787AF04D-4DBE-4D84-A613-0E411DAA8316}"/>
               </a:ext>
             </a:extLst>
           </p:cNvPr>
@@ -8662,7 +10987,7 @@
           <p:cNvPr id="25" name="footer-number-4">
             <a:extLst xmlns:a="http://schemas.openxmlformats.org/drawingml/2006/main">
               <a:ext uri="{FF2B5EF4-FFF2-40B4-BE49-F238E27FC236}">
-                <a16:creationId xmlns:a16="http://schemas.microsoft.com/office/drawing/2014/main" id="{08167C3A-0780-43B6-9765-38FA09E09786}"/>
+                <a16:creationId xmlns:a16="http://schemas.microsoft.com/office/drawing/2014/main" id="{13AB61EF-09CF-4D2E-BEA4-1B2A4CA6D510}"/>
               </a:ext>
             </a:extLst>
           </p:cNvPr>
@@ -8705,7 +11030,7 @@
     </p:spTree>
     <p:extLst>
       <p:ext uri="{BB962C8B-B14F-4D97-AF65-F5344CB8AC3E}">
-        <p14:creationId xmlns:p14="http://schemas.microsoft.com/office/powerpoint/2010/main" val="318698649"/>
+        <p14:creationId xmlns:p14="http://schemas.microsoft.com/office/powerpoint/2010/main" val="601857213"/>
       </p:ext>
     </p:extLst>
   </p:cSld>
@@ -8736,7 +11061,7 @@
           <p:cNvPr id="17" name="s5-title">
             <a:extLst xmlns:a="http://schemas.openxmlformats.org/drawingml/2006/main">
               <a:ext uri="{FF2B5EF4-FFF2-40B4-BE49-F238E27FC236}">
-                <a16:creationId xmlns:a16="http://schemas.microsoft.com/office/drawing/2014/main" id="{E4B8EC3F-5269-40BF-B8E8-4987E191A922}"/>
+                <a16:creationId xmlns:a16="http://schemas.microsoft.com/office/drawing/2014/main" id="{41051C81-89BF-4A71-B68E-8555DC675E7B}"/>
               </a:ext>
             </a:extLst>
           </p:cNvPr>
@@ -8781,7 +11106,7 @@
           <p:cNvPr id="2" name="s5-subtitle">
             <a:extLst xmlns:a="http://schemas.openxmlformats.org/drawingml/2006/main">
               <a:ext uri="{FF2B5EF4-FFF2-40B4-BE49-F238E27FC236}">
-                <a16:creationId xmlns:a16="http://schemas.microsoft.com/office/drawing/2014/main" id="{D45F5800-59D1-489C-8442-018CD728C3E9}"/>
+                <a16:creationId xmlns:a16="http://schemas.microsoft.com/office/drawing/2014/main" id="{74325C60-FFDD-449C-A670-2CBDE13365D1}"/>
               </a:ext>
             </a:extLst>
           </p:cNvPr>
@@ -8826,7 +11151,7 @@
           <p:cNvPr id="3" name="s5-chart-label-pack">
             <a:extLst xmlns:a="http://schemas.openxmlformats.org/drawingml/2006/main">
               <a:ext uri="{FF2B5EF4-FFF2-40B4-BE49-F238E27FC236}">
-                <a16:creationId xmlns:a16="http://schemas.microsoft.com/office/drawing/2014/main" id="{2359AB99-AAF7-4864-A4C8-EDE645D9DCA4}"/>
+                <a16:creationId xmlns:a16="http://schemas.microsoft.com/office/drawing/2014/main" id="{A8B961C7-6D25-4AC3-968F-F62E9F13384A}"/>
               </a:ext>
             </a:extLst>
           </p:cNvPr>
@@ -8871,7 +11196,7 @@
           <p:cNvPr id="4" name="s5-chart-label-repo">
             <a:extLst xmlns:a="http://schemas.openxmlformats.org/drawingml/2006/main">
               <a:ext uri="{FF2B5EF4-FFF2-40B4-BE49-F238E27FC236}">
-                <a16:creationId xmlns:a16="http://schemas.microsoft.com/office/drawing/2014/main" id="{E43480B0-C468-4A4F-BB8F-52951E666507}"/>
+                <a16:creationId xmlns:a16="http://schemas.microsoft.com/office/drawing/2014/main" id="{A66276FE-6802-4506-9B50-21B35938E877}"/>
               </a:ext>
             </a:extLst>
           </p:cNvPr>
@@ -8916,7 +11241,7 @@
           <p:cNvPr id="5" name="s5-stat1">
             <a:extLst xmlns:a="http://schemas.openxmlformats.org/drawingml/2006/main">
               <a:ext uri="{FF2B5EF4-FFF2-40B4-BE49-F238E27FC236}">
-                <a16:creationId xmlns:a16="http://schemas.microsoft.com/office/drawing/2014/main" id="{FC28C22C-D85B-4DAD-B2B8-683A87DAE2A9}"/>
+                <a16:creationId xmlns:a16="http://schemas.microsoft.com/office/drawing/2014/main" id="{3E000B3B-2B63-4B86-8024-21AE97DF8C4C}"/>
               </a:ext>
             </a:extLst>
           </p:cNvPr>
@@ -8961,7 +11286,7 @@
           <p:cNvPr id="6" name="s5-stat1-label">
             <a:extLst xmlns:a="http://schemas.openxmlformats.org/drawingml/2006/main">
               <a:ext uri="{FF2B5EF4-FFF2-40B4-BE49-F238E27FC236}">
-                <a16:creationId xmlns:a16="http://schemas.microsoft.com/office/drawing/2014/main" id="{707BE5B9-9548-496D-9DA6-4FB946BB62C6}"/>
+                <a16:creationId xmlns:a16="http://schemas.microsoft.com/office/drawing/2014/main" id="{3A43A1D8-B683-49B4-9457-B8C1DCDCDD78}"/>
               </a:ext>
             </a:extLst>
           </p:cNvPr>
@@ -9028,7 +11353,7 @@
           <p:cNvPr id="8" name="s5-stat2">
             <a:extLst xmlns:a="http://schemas.openxmlformats.org/drawingml/2006/main">
               <a:ext uri="{FF2B5EF4-FFF2-40B4-BE49-F238E27FC236}">
-                <a16:creationId xmlns:a16="http://schemas.microsoft.com/office/drawing/2014/main" id="{CA80D513-3393-4B4E-AF5B-447273542075}"/>
+                <a16:creationId xmlns:a16="http://schemas.microsoft.com/office/drawing/2014/main" id="{D867EC70-714A-40B3-BEE3-E3ED8F2DAA6A}"/>
               </a:ext>
             </a:extLst>
           </p:cNvPr>
@@ -9073,7 +11398,7 @@
           <p:cNvPr id="9" name="s5-stat2-label">
             <a:extLst xmlns:a="http://schemas.openxmlformats.org/drawingml/2006/main">
               <a:ext uri="{FF2B5EF4-FFF2-40B4-BE49-F238E27FC236}">
-                <a16:creationId xmlns:a16="http://schemas.microsoft.com/office/drawing/2014/main" id="{9DD56DB5-10E7-4A3C-A28E-773B843C277A}"/>
+                <a16:creationId xmlns:a16="http://schemas.microsoft.com/office/drawing/2014/main" id="{6E80D942-71A2-4E9D-91BF-4362D96C0668}"/>
               </a:ext>
             </a:extLst>
           </p:cNvPr>
@@ -9118,7 +11443,7 @@
           <p:cNvPr id="10" name="s5-stat3">
             <a:extLst xmlns:a="http://schemas.openxmlformats.org/drawingml/2006/main">
               <a:ext uri="{FF2B5EF4-FFF2-40B4-BE49-F238E27FC236}">
-                <a16:creationId xmlns:a16="http://schemas.microsoft.com/office/drawing/2014/main" id="{BC2BB05A-071D-4ABA-88FB-C81D3AA22D80}"/>
+                <a16:creationId xmlns:a16="http://schemas.microsoft.com/office/drawing/2014/main" id="{2945527D-87AF-487F-ABCC-E2A99F83F053}"/>
               </a:ext>
             </a:extLst>
           </p:cNvPr>
@@ -9163,7 +11488,7 @@
           <p:cNvPr id="11" name="s5-stat3-label">
             <a:extLst xmlns:a="http://schemas.openxmlformats.org/drawingml/2006/main">
               <a:ext uri="{FF2B5EF4-FFF2-40B4-BE49-F238E27FC236}">
-                <a16:creationId xmlns:a16="http://schemas.microsoft.com/office/drawing/2014/main" id="{6D5ADBAE-A496-4EB7-A35F-0B8BD21CC38C}"/>
+                <a16:creationId xmlns:a16="http://schemas.microsoft.com/office/drawing/2014/main" id="{6D36FFF3-D2D4-4B5D-9486-AEFD6E9AE947}"/>
               </a:ext>
             </a:extLst>
           </p:cNvPr>
@@ -9208,7 +11533,7 @@
           <p:cNvPr id="12" name="s5-explain">
             <a:extLst xmlns:a="http://schemas.openxmlformats.org/drawingml/2006/main">
               <a:ext uri="{FF2B5EF4-FFF2-40B4-BE49-F238E27FC236}">
-                <a16:creationId xmlns:a16="http://schemas.microsoft.com/office/drawing/2014/main" id="{20A20B24-E133-4810-A8D9-A31008BFC301}"/>
+                <a16:creationId xmlns:a16="http://schemas.microsoft.com/office/drawing/2014/main" id="{1DDAF607-7646-4E32-B76B-0013E8466883}"/>
               </a:ext>
             </a:extLst>
           </p:cNvPr>
@@ -9275,7 +11600,7 @@
           <p:cNvPr id="14" name="footer-source-5">
             <a:extLst xmlns:a="http://schemas.openxmlformats.org/drawingml/2006/main">
               <a:ext uri="{FF2B5EF4-FFF2-40B4-BE49-F238E27FC236}">
-                <a16:creationId xmlns:a16="http://schemas.microsoft.com/office/drawing/2014/main" id="{2B5E3A62-30DD-4710-B331-27280841CBE2}"/>
+                <a16:creationId xmlns:a16="http://schemas.microsoft.com/office/drawing/2014/main" id="{3333BE9F-05A1-4E2A-BC9A-A60E31564088}"/>
               </a:ext>
             </a:extLst>
           </p:cNvPr>
@@ -9320,7 +11645,7 @@
           <p:cNvPr id="15" name="footer-number-5">
             <a:extLst xmlns:a="http://schemas.openxmlformats.org/drawingml/2006/main">
               <a:ext uri="{FF2B5EF4-FFF2-40B4-BE49-F238E27FC236}">
-                <a16:creationId xmlns:a16="http://schemas.microsoft.com/office/drawing/2014/main" id="{8176D3D8-7737-40A4-A0AB-4F5112FBF07F}"/>
+                <a16:creationId xmlns:a16="http://schemas.microsoft.com/office/drawing/2014/main" id="{28B13A79-062F-4F07-A991-9215128F4F5E}"/>
               </a:ext>
             </a:extLst>
           </p:cNvPr>
@@ -9372,14 +11697,14 @@
         </p:xfrm>
         <a:graphic xmlns:a="http://schemas.openxmlformats.org/drawingml/2006/main">
           <a:graphicData uri="http://schemas.openxmlformats.org/drawingml/2006/chart">
-            <c:chart xmlns:r="http://schemas.openxmlformats.org/officeDocument/2006/relationships" xmlns:c="http://schemas.openxmlformats.org/drawingml/2006/chart" r:id="R6e6e3ab1268a42e9"/>
+            <c:chart xmlns:r="http://schemas.openxmlformats.org/officeDocument/2006/relationships" xmlns:c="http://schemas.openxmlformats.org/drawingml/2006/chart" r:id="R0d6694a56ddd497d"/>
           </a:graphicData>
         </a:graphic>
       </p:graphicFrame>
     </p:spTree>
     <p:extLst>
       <p:ext uri="{BB962C8B-B14F-4D97-AF65-F5344CB8AC3E}">
-        <p14:creationId xmlns:p14="http://schemas.microsoft.com/office/powerpoint/2010/main" val="203191990"/>
+        <p14:creationId xmlns:p14="http://schemas.microsoft.com/office/powerpoint/2010/main" val="589835747"/>
       </p:ext>
     </p:extLst>
   </p:cSld>
@@ -9410,7 +11735,7 @@
           <p:cNvPr id="40" name="s6-title-new">
             <a:extLst xmlns:a="http://schemas.openxmlformats.org/drawingml/2006/main">
               <a:ext uri="{FF2B5EF4-FFF2-40B4-BE49-F238E27FC236}">
-                <a16:creationId xmlns:a16="http://schemas.microsoft.com/office/drawing/2014/main" id="{52C04D36-E6EF-4AF1-B011-60AB98581017}"/>
+                <a16:creationId xmlns:a16="http://schemas.microsoft.com/office/drawing/2014/main" id="{E30623DC-3B66-430A-91E0-E524240FDE3E}"/>
               </a:ext>
             </a:extLst>
           </p:cNvPr>
@@ -9455,7 +11780,7 @@
           <p:cNvPr id="2" name="s6-subtitle-new">
             <a:extLst xmlns:a="http://schemas.openxmlformats.org/drawingml/2006/main">
               <a:ext uri="{FF2B5EF4-FFF2-40B4-BE49-F238E27FC236}">
-                <a16:creationId xmlns:a16="http://schemas.microsoft.com/office/drawing/2014/main" id="{8DB915FE-169F-4B3D-B7A8-9527917873F0}"/>
+                <a16:creationId xmlns:a16="http://schemas.microsoft.com/office/drawing/2014/main" id="{B145D6E7-AEA7-4CF7-A544-1514375213AE}"/>
               </a:ext>
             </a:extLst>
           </p:cNvPr>
@@ -9500,7 +11825,7 @@
           <p:cNvPr id="3" name="s6-task-new">
             <a:extLst xmlns:a="http://schemas.openxmlformats.org/drawingml/2006/main">
               <a:ext uri="{FF2B5EF4-FFF2-40B4-BE49-F238E27FC236}">
-                <a16:creationId xmlns:a16="http://schemas.microsoft.com/office/drawing/2014/main" id="{EAF8F918-4C29-43D2-B5FD-FA9BD599B32E}"/>
+                <a16:creationId xmlns:a16="http://schemas.microsoft.com/office/drawing/2014/main" id="{777B3680-8782-46D4-B112-0C8A27AF27B2}"/>
               </a:ext>
             </a:extLst>
           </p:cNvPr>
@@ -9535,7 +11860,7 @@
           <p:cNvPr id="4" name="s6-task-k-new">
             <a:extLst xmlns:a="http://schemas.openxmlformats.org/drawingml/2006/main">
               <a:ext uri="{FF2B5EF4-FFF2-40B4-BE49-F238E27FC236}">
-                <a16:creationId xmlns:a16="http://schemas.microsoft.com/office/drawing/2014/main" id="{9A8F05B6-22CF-4AC5-BC50-A0639F85B3B6}"/>
+                <a16:creationId xmlns:a16="http://schemas.microsoft.com/office/drawing/2014/main" id="{0BDE0F82-3423-466B-BA65-CA01AAC0E0BE}"/>
               </a:ext>
             </a:extLst>
           </p:cNvPr>
@@ -9580,7 +11905,7 @@
           <p:cNvPr id="5" name="s6-task-v-new">
             <a:extLst xmlns:a="http://schemas.openxmlformats.org/drawingml/2006/main">
               <a:ext uri="{FF2B5EF4-FFF2-40B4-BE49-F238E27FC236}">
-                <a16:creationId xmlns:a16="http://schemas.microsoft.com/office/drawing/2014/main" id="{5924F962-BFF4-4C47-A77D-D9528ADF7CEA}"/>
+                <a16:creationId xmlns:a16="http://schemas.microsoft.com/office/drawing/2014/main" id="{438C6815-3B5A-4D0E-99CA-1D1D93E95076}"/>
               </a:ext>
             </a:extLst>
           </p:cNvPr>
@@ -9757,7 +12082,7 @@
           <p:cNvPr id="12" name="s6-control-new">
             <a:extLst xmlns:a="http://schemas.openxmlformats.org/drawingml/2006/main">
               <a:ext uri="{FF2B5EF4-FFF2-40B4-BE49-F238E27FC236}">
-                <a16:creationId xmlns:a16="http://schemas.microsoft.com/office/drawing/2014/main" id="{13CCC492-31D8-4828-9719-09990730DE3A}"/>
+                <a16:creationId xmlns:a16="http://schemas.microsoft.com/office/drawing/2014/main" id="{6EA1DB71-0226-40CF-A611-7C9D70E16E30}"/>
               </a:ext>
             </a:extLst>
           </p:cNvPr>
@@ -9792,7 +12117,7 @@
           <p:cNvPr id="13" name="s6-route-new">
             <a:extLst xmlns:a="http://schemas.openxmlformats.org/drawingml/2006/main">
               <a:ext uri="{FF2B5EF4-FFF2-40B4-BE49-F238E27FC236}">
-                <a16:creationId xmlns:a16="http://schemas.microsoft.com/office/drawing/2014/main" id="{FC270A77-8DA3-4DAF-A8A4-9A895ECE41EE}"/>
+                <a16:creationId xmlns:a16="http://schemas.microsoft.com/office/drawing/2014/main" id="{11603119-C7BD-4D9E-A84F-31A184EC9C51}"/>
               </a:ext>
             </a:extLst>
           </p:cNvPr>
@@ -9827,7 +12152,7 @@
           <p:cNvPr id="14" name="s6-full-new">
             <a:extLst xmlns:a="http://schemas.openxmlformats.org/drawingml/2006/main">
               <a:ext uri="{FF2B5EF4-FFF2-40B4-BE49-F238E27FC236}">
-                <a16:creationId xmlns:a16="http://schemas.microsoft.com/office/drawing/2014/main" id="{CCE8F17E-11BE-4315-BA3E-BD9C3516FF2E}"/>
+                <a16:creationId xmlns:a16="http://schemas.microsoft.com/office/drawing/2014/main" id="{914CFF43-7531-4300-98DC-793713BC5554}"/>
               </a:ext>
             </a:extLst>
           </p:cNvPr>
@@ -9862,7 +12187,7 @@
           <p:cNvPr id="15" name="s6-adaptive-new">
             <a:extLst xmlns:a="http://schemas.openxmlformats.org/drawingml/2006/main">
               <a:ext uri="{FF2B5EF4-FFF2-40B4-BE49-F238E27FC236}">
-                <a16:creationId xmlns:a16="http://schemas.microsoft.com/office/drawing/2014/main" id="{267A9DDB-7A9E-4840-BB5E-006676BE4665}"/>
+                <a16:creationId xmlns:a16="http://schemas.microsoft.com/office/drawing/2014/main" id="{B7C61E8B-8D38-4A08-B797-0B3E13970F9E}"/>
               </a:ext>
             </a:extLst>
           </p:cNvPr>
@@ -9897,7 +12222,7 @@
           <p:cNvPr id="16" name="s6-control-k-new">
             <a:extLst xmlns:a="http://schemas.openxmlformats.org/drawingml/2006/main">
               <a:ext uri="{FF2B5EF4-FFF2-40B4-BE49-F238E27FC236}">
-                <a16:creationId xmlns:a16="http://schemas.microsoft.com/office/drawing/2014/main" id="{2FF4A08C-FB43-4F34-8CDF-1719BA3CEFBD}"/>
+                <a16:creationId xmlns:a16="http://schemas.microsoft.com/office/drawing/2014/main" id="{8FCF225E-00F6-436D-8D9C-FB011CEF830C}"/>
               </a:ext>
             </a:extLst>
           </p:cNvPr>
@@ -9942,7 +12267,7 @@
           <p:cNvPr id="17" name="s6-control-v-new">
             <a:extLst xmlns:a="http://schemas.openxmlformats.org/drawingml/2006/main">
               <a:ext uri="{FF2B5EF4-FFF2-40B4-BE49-F238E27FC236}">
-                <a16:creationId xmlns:a16="http://schemas.microsoft.com/office/drawing/2014/main" id="{9A4ACBA8-DA72-4A1A-B9F6-56DC7E0B5694}"/>
+                <a16:creationId xmlns:a16="http://schemas.microsoft.com/office/drawing/2014/main" id="{EBE250EB-7313-40AC-A470-B285261F7C97}"/>
               </a:ext>
             </a:extLst>
           </p:cNvPr>
@@ -9987,7 +12312,7 @@
           <p:cNvPr id="18" name="s6-control-d-new">
             <a:extLst xmlns:a="http://schemas.openxmlformats.org/drawingml/2006/main">
               <a:ext uri="{FF2B5EF4-FFF2-40B4-BE49-F238E27FC236}">
-                <a16:creationId xmlns:a16="http://schemas.microsoft.com/office/drawing/2014/main" id="{DEB37354-E023-4EDA-8121-B46FAC3D6FD6}"/>
+                <a16:creationId xmlns:a16="http://schemas.microsoft.com/office/drawing/2014/main" id="{FFC7726C-06D2-4D97-9996-B5981EBDD8EB}"/>
               </a:ext>
             </a:extLst>
           </p:cNvPr>
@@ -10032,7 +12357,7 @@
           <p:cNvPr id="19" name="s6-route-k-new">
             <a:extLst xmlns:a="http://schemas.openxmlformats.org/drawingml/2006/main">
               <a:ext uri="{FF2B5EF4-FFF2-40B4-BE49-F238E27FC236}">
-                <a16:creationId xmlns:a16="http://schemas.microsoft.com/office/drawing/2014/main" id="{C3BF203D-1089-4B24-BEBD-CB436AC7F1DF}"/>
+                <a16:creationId xmlns:a16="http://schemas.microsoft.com/office/drawing/2014/main" id="{81CFA5C4-76CA-4D1D-8CDD-3B6F00B7C3A8}"/>
               </a:ext>
             </a:extLst>
           </p:cNvPr>
@@ -10077,7 +12402,7 @@
           <p:cNvPr id="20" name="s6-route-v-new">
             <a:extLst xmlns:a="http://schemas.openxmlformats.org/drawingml/2006/main">
               <a:ext uri="{FF2B5EF4-FFF2-40B4-BE49-F238E27FC236}">
-                <a16:creationId xmlns:a16="http://schemas.microsoft.com/office/drawing/2014/main" id="{550FF98C-089F-454E-A67B-CE142E0D8CC1}"/>
+                <a16:creationId xmlns:a16="http://schemas.microsoft.com/office/drawing/2014/main" id="{9DA9A541-9CC0-41E3-AA42-76B943B6F219}"/>
               </a:ext>
             </a:extLst>
           </p:cNvPr>
@@ -10122,7 +12447,7 @@
           <p:cNvPr id="21" name="s6-route-d-new">
             <a:extLst xmlns:a="http://schemas.openxmlformats.org/drawingml/2006/main">
               <a:ext uri="{FF2B5EF4-FFF2-40B4-BE49-F238E27FC236}">
-                <a16:creationId xmlns:a16="http://schemas.microsoft.com/office/drawing/2014/main" id="{948042F0-1966-4F84-B10A-6DA8C3D9E6D2}"/>
+                <a16:creationId xmlns:a16="http://schemas.microsoft.com/office/drawing/2014/main" id="{270D21D5-0B3A-4958-9632-D80A3B1FD573}"/>
               </a:ext>
             </a:extLst>
           </p:cNvPr>
@@ -10167,7 +12492,7 @@
           <p:cNvPr id="22" name="s6-full-k-new">
             <a:extLst xmlns:a="http://schemas.openxmlformats.org/drawingml/2006/main">
               <a:ext uri="{FF2B5EF4-FFF2-40B4-BE49-F238E27FC236}">
-                <a16:creationId xmlns:a16="http://schemas.microsoft.com/office/drawing/2014/main" id="{0077FAE7-6BAE-43BF-AED6-F3312CCF70FC}"/>
+                <a16:creationId xmlns:a16="http://schemas.microsoft.com/office/drawing/2014/main" id="{43156A24-E674-490A-8877-1659F3F3D46D}"/>
               </a:ext>
             </a:extLst>
           </p:cNvPr>
@@ -10212,7 +12537,7 @@
           <p:cNvPr id="23" name="s6-full-v-new">
             <a:extLst xmlns:a="http://schemas.openxmlformats.org/drawingml/2006/main">
               <a:ext uri="{FF2B5EF4-FFF2-40B4-BE49-F238E27FC236}">
-                <a16:creationId xmlns:a16="http://schemas.microsoft.com/office/drawing/2014/main" id="{9299D685-DE74-487B-810C-340621F23F2A}"/>
+                <a16:creationId xmlns:a16="http://schemas.microsoft.com/office/drawing/2014/main" id="{1964946F-10DB-453A-BF9C-47334D08C609}"/>
               </a:ext>
             </a:extLst>
           </p:cNvPr>
@@ -10257,7 +12582,7 @@
           <p:cNvPr id="24" name="s6-full-d-new">
             <a:extLst xmlns:a="http://schemas.openxmlformats.org/drawingml/2006/main">
               <a:ext uri="{FF2B5EF4-FFF2-40B4-BE49-F238E27FC236}">
-                <a16:creationId xmlns:a16="http://schemas.microsoft.com/office/drawing/2014/main" id="{6CB4B971-8AEA-4FE3-BCB1-37424406BBF7}"/>
+                <a16:creationId xmlns:a16="http://schemas.microsoft.com/office/drawing/2014/main" id="{4A7B5A91-34FA-4D20-9C0A-C6BFBB116B5A}"/>
               </a:ext>
             </a:extLst>
           </p:cNvPr>
@@ -10302,7 +12627,7 @@
           <p:cNvPr id="25" name="s6-adaptive-k-new">
             <a:extLst xmlns:a="http://schemas.openxmlformats.org/drawingml/2006/main">
               <a:ext uri="{FF2B5EF4-FFF2-40B4-BE49-F238E27FC236}">
-                <a16:creationId xmlns:a16="http://schemas.microsoft.com/office/drawing/2014/main" id="{5AA60F2C-0952-4CCE-A767-9AC1FD134B62}"/>
+                <a16:creationId xmlns:a16="http://schemas.microsoft.com/office/drawing/2014/main" id="{22990ED3-D9B7-468E-944F-D8FB3FD0A269}"/>
               </a:ext>
             </a:extLst>
           </p:cNvPr>
@@ -10347,7 +12672,7 @@
           <p:cNvPr id="26" name="s6-adaptive-v-new">
             <a:extLst xmlns:a="http://schemas.openxmlformats.org/drawingml/2006/main">
               <a:ext uri="{FF2B5EF4-FFF2-40B4-BE49-F238E27FC236}">
-                <a16:creationId xmlns:a16="http://schemas.microsoft.com/office/drawing/2014/main" id="{CD23FCAF-4174-4F46-A594-11FCA5FAC4FA}"/>
+                <a16:creationId xmlns:a16="http://schemas.microsoft.com/office/drawing/2014/main" id="{1FB4874A-909E-40A7-B273-E2F04DFCA365}"/>
               </a:ext>
             </a:extLst>
           </p:cNvPr>
@@ -10392,7 +12717,7 @@
           <p:cNvPr id="27" name="s6-adaptive-d-new">
             <a:extLst xmlns:a="http://schemas.openxmlformats.org/drawingml/2006/main">
               <a:ext uri="{FF2B5EF4-FFF2-40B4-BE49-F238E27FC236}">
-                <a16:creationId xmlns:a16="http://schemas.microsoft.com/office/drawing/2014/main" id="{533FB2DF-8D60-45BE-AA25-1AAD73559D09}"/>
+                <a16:creationId xmlns:a16="http://schemas.microsoft.com/office/drawing/2014/main" id="{75717F5D-878B-4A59-BA89-5B9A47D56876}"/>
               </a:ext>
             </a:extLst>
           </p:cNvPr>
@@ -10437,7 +12762,7 @@
           <p:cNvPr id="28" name="s6-summary-new">
             <a:extLst xmlns:a="http://schemas.openxmlformats.org/drawingml/2006/main">
               <a:ext uri="{FF2B5EF4-FFF2-40B4-BE49-F238E27FC236}">
-                <a16:creationId xmlns:a16="http://schemas.microsoft.com/office/drawing/2014/main" id="{B149ADC8-65D4-4DC4-97BC-F20E001DEE55}"/>
+                <a16:creationId xmlns:a16="http://schemas.microsoft.com/office/drawing/2014/main" id="{8CC647F0-5EA9-4AEC-A7CD-E52E8C8B383C}"/>
               </a:ext>
             </a:extLst>
           </p:cNvPr>
@@ -10472,7 +12797,7 @@
           <p:cNvPr id="29" name="s6-n-trials-new">
             <a:extLst xmlns:a="http://schemas.openxmlformats.org/drawingml/2006/main">
               <a:ext uri="{FF2B5EF4-FFF2-40B4-BE49-F238E27FC236}">
-                <a16:creationId xmlns:a16="http://schemas.microsoft.com/office/drawing/2014/main" id="{AB0B5BCB-7824-45B0-BD80-6193CD6E67A7}"/>
+                <a16:creationId xmlns:a16="http://schemas.microsoft.com/office/drawing/2014/main" id="{9ACD68EC-E27F-40E5-9F62-BBB6D4798D7B}"/>
               </a:ext>
             </a:extLst>
           </p:cNvPr>
@@ -10517,7 +12842,7 @@
           <p:cNvPr id="30" name="s6-l-trials-new">
             <a:extLst xmlns:a="http://schemas.openxmlformats.org/drawingml/2006/main">
               <a:ext uri="{FF2B5EF4-FFF2-40B4-BE49-F238E27FC236}">
-                <a16:creationId xmlns:a16="http://schemas.microsoft.com/office/drawing/2014/main" id="{AF8A7B0A-A62B-4E1A-8335-B523BAED00DF}"/>
+                <a16:creationId xmlns:a16="http://schemas.microsoft.com/office/drawing/2014/main" id="{7C3413C0-9426-4F72-B63E-1AFF5A3135F2}"/>
               </a:ext>
             </a:extLst>
           </p:cNvPr>
@@ -10562,7 +12887,7 @@
           <p:cNvPr id="31" name="s6-n-arms-new">
             <a:extLst xmlns:a="http://schemas.openxmlformats.org/drawingml/2006/main">
               <a:ext uri="{FF2B5EF4-FFF2-40B4-BE49-F238E27FC236}">
-                <a16:creationId xmlns:a16="http://schemas.microsoft.com/office/drawing/2014/main" id="{38CCA05F-1543-4467-84F6-00149FAF984C}"/>
+                <a16:creationId xmlns:a16="http://schemas.microsoft.com/office/drawing/2014/main" id="{F1B27F63-07F3-48C0-A55A-E7E583DE8F87}"/>
               </a:ext>
             </a:extLst>
           </p:cNvPr>
@@ -10607,7 +12932,7 @@
           <p:cNvPr id="32" name="s6-l-arms-new">
             <a:extLst xmlns:a="http://schemas.openxmlformats.org/drawingml/2006/main">
               <a:ext uri="{FF2B5EF4-FFF2-40B4-BE49-F238E27FC236}">
-                <a16:creationId xmlns:a16="http://schemas.microsoft.com/office/drawing/2014/main" id="{FBB019EF-5763-4A9F-88B0-BDB0225B582B}"/>
+                <a16:creationId xmlns:a16="http://schemas.microsoft.com/office/drawing/2014/main" id="{7985CF82-BD7F-4203-BAD2-55425F69FBDD}"/>
               </a:ext>
             </a:extLst>
           </p:cNvPr>
@@ -10652,7 +12977,7 @@
           <p:cNvPr id="33" name="s6-n-fixed-new">
             <a:extLst xmlns:a="http://schemas.openxmlformats.org/drawingml/2006/main">
               <a:ext uri="{FF2B5EF4-FFF2-40B4-BE49-F238E27FC236}">
-                <a16:creationId xmlns:a16="http://schemas.microsoft.com/office/drawing/2014/main" id="{2FE96F7D-355C-441C-9B7E-E41D4DF2D082}"/>
+                <a16:creationId xmlns:a16="http://schemas.microsoft.com/office/drawing/2014/main" id="{1D5ACF0B-383E-4F63-8930-EA52971C3106}"/>
               </a:ext>
             </a:extLst>
           </p:cNvPr>
@@ -10697,7 +13022,7 @@
           <p:cNvPr id="34" name="s6-l-fixed-new">
             <a:extLst xmlns:a="http://schemas.openxmlformats.org/drawingml/2006/main">
               <a:ext uri="{FF2B5EF4-FFF2-40B4-BE49-F238E27FC236}">
-                <a16:creationId xmlns:a16="http://schemas.microsoft.com/office/drawing/2014/main" id="{C450B591-42CB-422D-85B6-5757D6F4F1EE}"/>
+                <a16:creationId xmlns:a16="http://schemas.microsoft.com/office/drawing/2014/main" id="{D1AFD129-4BBF-4649-8952-11768672E886}"/>
               </a:ext>
             </a:extLst>
           </p:cNvPr>
@@ -10742,7 +13067,7 @@
           <p:cNvPr id="35" name="s6-n-variable-new">
             <a:extLst xmlns:a="http://schemas.openxmlformats.org/drawingml/2006/main">
               <a:ext uri="{FF2B5EF4-FFF2-40B4-BE49-F238E27FC236}">
-                <a16:creationId xmlns:a16="http://schemas.microsoft.com/office/drawing/2014/main" id="{D133E05E-368A-4435-980E-925AE887F94F}"/>
+                <a16:creationId xmlns:a16="http://schemas.microsoft.com/office/drawing/2014/main" id="{D954E3D5-41EE-4EAD-9FBE-AD1E39F622A6}"/>
               </a:ext>
             </a:extLst>
           </p:cNvPr>
@@ -10787,7 +13112,7 @@
           <p:cNvPr id="36" name="s6-l-variable-new">
             <a:extLst xmlns:a="http://schemas.openxmlformats.org/drawingml/2006/main">
               <a:ext uri="{FF2B5EF4-FFF2-40B4-BE49-F238E27FC236}">
-                <a16:creationId xmlns:a16="http://schemas.microsoft.com/office/drawing/2014/main" id="{F8702F65-3940-41EF-A2E9-3DB78B7603A3}"/>
+                <a16:creationId xmlns:a16="http://schemas.microsoft.com/office/drawing/2014/main" id="{F51DF41E-F2AB-4D02-B86A-90E35217DE21}"/>
               </a:ext>
             </a:extLst>
           </p:cNvPr>
@@ -10854,7 +13179,7 @@
           <p:cNvPr id="38" name="footer-source-6">
             <a:extLst xmlns:a="http://schemas.openxmlformats.org/drawingml/2006/main">
               <a:ext uri="{FF2B5EF4-FFF2-40B4-BE49-F238E27FC236}">
-                <a16:creationId xmlns:a16="http://schemas.microsoft.com/office/drawing/2014/main" id="{6223330D-692E-457B-BCB4-74F6D0292418}"/>
+                <a16:creationId xmlns:a16="http://schemas.microsoft.com/office/drawing/2014/main" id="{7BE60EB4-EC4D-47ED-8714-9BA086A6A007}"/>
               </a:ext>
             </a:extLst>
           </p:cNvPr>
@@ -10899,7 +13224,7 @@
           <p:cNvPr id="39" name="footer-number-6">
             <a:extLst xmlns:a="http://schemas.openxmlformats.org/drawingml/2006/main">
               <a:ext uri="{FF2B5EF4-FFF2-40B4-BE49-F238E27FC236}">
-                <a16:creationId xmlns:a16="http://schemas.microsoft.com/office/drawing/2014/main" id="{28EF3F8D-C3F2-4847-8F5A-75AAC4659188}"/>
+                <a16:creationId xmlns:a16="http://schemas.microsoft.com/office/drawing/2014/main" id="{9EF11E0F-2CBB-4AEE-BC15-78D6ABE8841B}"/>
               </a:ext>
             </a:extLst>
           </p:cNvPr>
@@ -10942,7 +13267,7 @@
     </p:spTree>
     <p:extLst>
       <p:ext uri="{BB962C8B-B14F-4D97-AF65-F5344CB8AC3E}">
-        <p14:creationId xmlns:p14="http://schemas.microsoft.com/office/powerpoint/2010/main" val="366941974"/>
+        <p14:creationId xmlns:p14="http://schemas.microsoft.com/office/powerpoint/2010/main" val="42202116"/>
       </p:ext>
     </p:extLst>
   </p:cSld>
@@ -10973,7 +13298,7 @@
           <p:cNvPr id="23" name="s7-title-chart">
             <a:extLst xmlns:a="http://schemas.openxmlformats.org/drawingml/2006/main">
               <a:ext uri="{FF2B5EF4-FFF2-40B4-BE49-F238E27FC236}">
-                <a16:creationId xmlns:a16="http://schemas.microsoft.com/office/drawing/2014/main" id="{12255841-5D79-455C-A0D7-94FD2B3D4572}"/>
+                <a16:creationId xmlns:a16="http://schemas.microsoft.com/office/drawing/2014/main" id="{509314B9-BC2B-4866-9C96-2ED3EF640C8A}"/>
               </a:ext>
             </a:extLst>
           </p:cNvPr>
@@ -11018,7 +13343,7 @@
           <p:cNvPr id="2" name="s7-subtitle-chart">
             <a:extLst xmlns:a="http://schemas.openxmlformats.org/drawingml/2006/main">
               <a:ext uri="{FF2B5EF4-FFF2-40B4-BE49-F238E27FC236}">
-                <a16:creationId xmlns:a16="http://schemas.microsoft.com/office/drawing/2014/main" id="{44CF6EB6-A743-4964-8D1F-EABEA1BC87F7}"/>
+                <a16:creationId xmlns:a16="http://schemas.microsoft.com/office/drawing/2014/main" id="{DEAE448B-C22F-47C6-B796-5466C9CD13C4}"/>
               </a:ext>
             </a:extLst>
           </p:cNvPr>
@@ -11063,7 +13388,7 @@
           <p:cNvPr id="3" name="s7-token-heading">
             <a:extLst xmlns:a="http://schemas.openxmlformats.org/drawingml/2006/main">
               <a:ext uri="{FF2B5EF4-FFF2-40B4-BE49-F238E27FC236}">
-                <a16:creationId xmlns:a16="http://schemas.microsoft.com/office/drawing/2014/main" id="{F6C6516A-7BFE-460B-B9D3-7403570156A5}"/>
+                <a16:creationId xmlns:a16="http://schemas.microsoft.com/office/drawing/2014/main" id="{25B71E30-8C75-48BF-B255-F228F8FA9992}"/>
               </a:ext>
             </a:extLst>
           </p:cNvPr>
@@ -11108,7 +13433,7 @@
           <p:cNvPr id="4" name="s7-time-heading">
             <a:extLst xmlns:a="http://schemas.openxmlformats.org/drawingml/2006/main">
               <a:ext uri="{FF2B5EF4-FFF2-40B4-BE49-F238E27FC236}">
-                <a16:creationId xmlns:a16="http://schemas.microsoft.com/office/drawing/2014/main" id="{32718EDA-252C-4872-97C8-E83592650037}"/>
+                <a16:creationId xmlns:a16="http://schemas.microsoft.com/office/drawing/2014/main" id="{FEFC86E6-18D3-4B70-894A-F3181F5651DF}"/>
               </a:ext>
             </a:extLst>
           </p:cNvPr>
@@ -11153,7 +13478,7 @@
           <p:cNvPr id="5" name="s7-calls-heading">
             <a:extLst xmlns:a="http://schemas.openxmlformats.org/drawingml/2006/main">
               <a:ext uri="{FF2B5EF4-FFF2-40B4-BE49-F238E27FC236}">
-                <a16:creationId xmlns:a16="http://schemas.microsoft.com/office/drawing/2014/main" id="{BAE7E904-5AE2-44FA-B430-F47A58C42170}"/>
+                <a16:creationId xmlns:a16="http://schemas.microsoft.com/office/drawing/2014/main" id="{F4D88939-287E-4AD1-871C-C7A15CF7A60A}"/>
               </a:ext>
             </a:extLst>
           </p:cNvPr>
@@ -11242,7 +13567,7 @@
           <p:cNvPr id="8" name="s7-integrity-band">
             <a:extLst xmlns:a="http://schemas.openxmlformats.org/drawingml/2006/main">
               <a:ext uri="{FF2B5EF4-FFF2-40B4-BE49-F238E27FC236}">
-                <a16:creationId xmlns:a16="http://schemas.microsoft.com/office/drawing/2014/main" id="{9E784DD5-FEFE-4F3C-B8C5-01B4EE9EDE4A}"/>
+                <a16:creationId xmlns:a16="http://schemas.microsoft.com/office/drawing/2014/main" id="{7C176B43-21FA-40FD-BED0-10690431EE3C}"/>
               </a:ext>
             </a:extLst>
           </p:cNvPr>
@@ -11277,7 +13602,7 @@
           <p:cNvPr id="9" name="s7-trials-value">
             <a:extLst xmlns:a="http://schemas.openxmlformats.org/drawingml/2006/main">
               <a:ext uri="{FF2B5EF4-FFF2-40B4-BE49-F238E27FC236}">
-                <a16:creationId xmlns:a16="http://schemas.microsoft.com/office/drawing/2014/main" id="{443777D9-D651-472A-BDFA-267DDD668D70}"/>
+                <a16:creationId xmlns:a16="http://schemas.microsoft.com/office/drawing/2014/main" id="{44EF1E04-4717-4285-A956-0B8D87E12A33}"/>
               </a:ext>
             </a:extLst>
           </p:cNvPr>
@@ -11322,7 +13647,7 @@
           <p:cNvPr id="10" name="s7-trials-label">
             <a:extLst xmlns:a="http://schemas.openxmlformats.org/drawingml/2006/main">
               <a:ext uri="{FF2B5EF4-FFF2-40B4-BE49-F238E27FC236}">
-                <a16:creationId xmlns:a16="http://schemas.microsoft.com/office/drawing/2014/main" id="{2DF71835-CBEC-4562-B233-A3CB203FE255}"/>
+                <a16:creationId xmlns:a16="http://schemas.microsoft.com/office/drawing/2014/main" id="{20753A04-3C5E-4736-B49E-46A9E36F240B}"/>
               </a:ext>
             </a:extLst>
           </p:cNvPr>
@@ -11367,7 +13692,7 @@
           <p:cNvPr id="11" name="s7-valid-value">
             <a:extLst xmlns:a="http://schemas.openxmlformats.org/drawingml/2006/main">
               <a:ext uri="{FF2B5EF4-FFF2-40B4-BE49-F238E27FC236}">
-                <a16:creationId xmlns:a16="http://schemas.microsoft.com/office/drawing/2014/main" id="{7BBA2535-9073-4A79-8497-AEC6FCD5FF57}"/>
+                <a16:creationId xmlns:a16="http://schemas.microsoft.com/office/drawing/2014/main" id="{29084841-BB42-4A9E-B101-4979E5966B45}"/>
               </a:ext>
             </a:extLst>
           </p:cNvPr>
@@ -11412,7 +13737,7 @@
           <p:cNvPr id="12" name="s7-valid-label">
             <a:extLst xmlns:a="http://schemas.openxmlformats.org/drawingml/2006/main">
               <a:ext uri="{FF2B5EF4-FFF2-40B4-BE49-F238E27FC236}">
-                <a16:creationId xmlns:a16="http://schemas.microsoft.com/office/drawing/2014/main" id="{259E0AF5-5BBF-4C86-BFFB-D72143D8FEC9}"/>
+                <a16:creationId xmlns:a16="http://schemas.microsoft.com/office/drawing/2014/main" id="{FEE7AAEC-4EDE-4579-91FA-7887D4339DB5}"/>
               </a:ext>
             </a:extLst>
           </p:cNvPr>
@@ -11457,7 +13782,7 @@
           <p:cNvPr id="13" name="s7-oracle-value">
             <a:extLst xmlns:a="http://schemas.openxmlformats.org/drawingml/2006/main">
               <a:ext uri="{FF2B5EF4-FFF2-40B4-BE49-F238E27FC236}">
-                <a16:creationId xmlns:a16="http://schemas.microsoft.com/office/drawing/2014/main" id="{EDF855AB-325B-4DF9-88D8-B869B90BC2E4}"/>
+                <a16:creationId xmlns:a16="http://schemas.microsoft.com/office/drawing/2014/main" id="{3E322E48-8B1D-4B29-AA17-9A1C07438B55}"/>
               </a:ext>
             </a:extLst>
           </p:cNvPr>
@@ -11502,7 +13827,7 @@
           <p:cNvPr id="14" name="s7-oracle-label">
             <a:extLst xmlns:a="http://schemas.openxmlformats.org/drawingml/2006/main">
               <a:ext uri="{FF2B5EF4-FFF2-40B4-BE49-F238E27FC236}">
-                <a16:creationId xmlns:a16="http://schemas.microsoft.com/office/drawing/2014/main" id="{645537D7-9E4D-459F-B4ED-99796785A8A1}"/>
+                <a16:creationId xmlns:a16="http://schemas.microsoft.com/office/drawing/2014/main" id="{4183BA9B-AFA9-40B6-B9BF-F0CEE24DCA26}"/>
               </a:ext>
             </a:extLst>
           </p:cNvPr>
@@ -11547,7 +13872,7 @@
           <p:cNvPr id="15" name="s7-scope-value">
             <a:extLst xmlns:a="http://schemas.openxmlformats.org/drawingml/2006/main">
               <a:ext uri="{FF2B5EF4-FFF2-40B4-BE49-F238E27FC236}">
-                <a16:creationId xmlns:a16="http://schemas.microsoft.com/office/drawing/2014/main" id="{C5FE38AC-BA82-4019-AD3C-10FBD1AADF3B}"/>
+                <a16:creationId xmlns:a16="http://schemas.microsoft.com/office/drawing/2014/main" id="{232F85B0-C2C3-47DB-A7C3-9D2C87B0E4D9}"/>
               </a:ext>
             </a:extLst>
           </p:cNvPr>
@@ -11592,7 +13917,7 @@
           <p:cNvPr id="16" name="s7-scope-label">
             <a:extLst xmlns:a="http://schemas.openxmlformats.org/drawingml/2006/main">
               <a:ext uri="{FF2B5EF4-FFF2-40B4-BE49-F238E27FC236}">
-                <a16:creationId xmlns:a16="http://schemas.microsoft.com/office/drawing/2014/main" id="{174652C7-AAE1-4863-BD86-0A74BA8029B4}"/>
+                <a16:creationId xmlns:a16="http://schemas.microsoft.com/office/drawing/2014/main" id="{4D5CAE2B-7F59-4E71-85AF-F49411D5FB82}"/>
               </a:ext>
             </a:extLst>
           </p:cNvPr>
@@ -11659,7 +13984,7 @@
           <p:cNvPr id="18" name="footer-source-7">
             <a:extLst xmlns:a="http://schemas.openxmlformats.org/drawingml/2006/main">
               <a:ext uri="{FF2B5EF4-FFF2-40B4-BE49-F238E27FC236}">
-                <a16:creationId xmlns:a16="http://schemas.microsoft.com/office/drawing/2014/main" id="{FF30E29D-8AC5-4B2E-B240-A50DFA41E1A4}"/>
+                <a16:creationId xmlns:a16="http://schemas.microsoft.com/office/drawing/2014/main" id="{A3C71BDA-8AAE-428D-A2DA-E287815FBD80}"/>
               </a:ext>
             </a:extLst>
           </p:cNvPr>
@@ -11704,7 +14029,7 @@
           <p:cNvPr id="19" name="footer-number-7">
             <a:extLst xmlns:a="http://schemas.openxmlformats.org/drawingml/2006/main">
               <a:ext uri="{FF2B5EF4-FFF2-40B4-BE49-F238E27FC236}">
-                <a16:creationId xmlns:a16="http://schemas.microsoft.com/office/drawing/2014/main" id="{9C82D6D0-1E57-4581-BD39-4EF9978DE21F}"/>
+                <a16:creationId xmlns:a16="http://schemas.microsoft.com/office/drawing/2014/main" id="{FCA38E91-0596-4690-B061-1A67CC1B9FFB}"/>
               </a:ext>
             </a:extLst>
           </p:cNvPr>
@@ -11756,7 +14081,7 @@
         </p:xfrm>
         <a:graphic xmlns:a="http://schemas.openxmlformats.org/drawingml/2006/main">
           <a:graphicData uri="http://schemas.openxmlformats.org/drawingml/2006/chart">
-            <c:chart xmlns:r="http://schemas.openxmlformats.org/officeDocument/2006/relationships" xmlns:c="http://schemas.openxmlformats.org/drawingml/2006/chart" r:id="R97557cef05934714"/>
+            <c:chart xmlns:r="http://schemas.openxmlformats.org/officeDocument/2006/relationships" xmlns:c="http://schemas.openxmlformats.org/drawingml/2006/chart" r:id="R0e3ee75df98e4d79"/>
           </a:graphicData>
         </a:graphic>
       </p:graphicFrame>
@@ -11772,7 +14097,7 @@
         </p:xfrm>
         <a:graphic xmlns:a="http://schemas.openxmlformats.org/drawingml/2006/main">
           <a:graphicData uri="http://schemas.openxmlformats.org/drawingml/2006/chart">
-            <c:chart xmlns:r="http://schemas.openxmlformats.org/officeDocument/2006/relationships" xmlns:c="http://schemas.openxmlformats.org/drawingml/2006/chart" r:id="R81a4578012ed46a1"/>
+            <c:chart xmlns:r="http://schemas.openxmlformats.org/officeDocument/2006/relationships" xmlns:c="http://schemas.openxmlformats.org/drawingml/2006/chart" r:id="R3217916352d843c7"/>
           </a:graphicData>
         </a:graphic>
       </p:graphicFrame>
@@ -11788,14 +14113,14 @@
         </p:xfrm>
         <a:graphic xmlns:a="http://schemas.openxmlformats.org/drawingml/2006/main">
           <a:graphicData uri="http://schemas.openxmlformats.org/drawingml/2006/chart">
-            <c:chart xmlns:r="http://schemas.openxmlformats.org/officeDocument/2006/relationships" xmlns:c="http://schemas.openxmlformats.org/drawingml/2006/chart" r:id="R0505eec2270642c9"/>
+            <c:chart xmlns:r="http://schemas.openxmlformats.org/officeDocument/2006/relationships" xmlns:c="http://schemas.openxmlformats.org/drawingml/2006/chart" r:id="Rb898bcfdd8f54916"/>
           </a:graphicData>
         </a:graphic>
       </p:graphicFrame>
     </p:spTree>
     <p:extLst>
       <p:ext uri="{BB962C8B-B14F-4D97-AF65-F5344CB8AC3E}">
-        <p14:creationId xmlns:p14="http://schemas.microsoft.com/office/powerpoint/2010/main" val="1498020992"/>
+        <p14:creationId xmlns:p14="http://schemas.microsoft.com/office/powerpoint/2010/main" val="1301013975"/>
       </p:ext>
     </p:extLst>
   </p:cSld>
@@ -11826,7 +14151,7 @@
           <p:cNvPr id="55" name="s8-title-chart">
             <a:extLst xmlns:a="http://schemas.openxmlformats.org/drawingml/2006/main">
               <a:ext uri="{FF2B5EF4-FFF2-40B4-BE49-F238E27FC236}">
-                <a16:creationId xmlns:a16="http://schemas.microsoft.com/office/drawing/2014/main" id="{9166E73C-9D03-4640-8AE6-F2BD23B333F1}"/>
+                <a16:creationId xmlns:a16="http://schemas.microsoft.com/office/drawing/2014/main" id="{B58F6419-01A0-4E0F-A0A0-57094B9FF752}"/>
               </a:ext>
             </a:extLst>
           </p:cNvPr>
@@ -11871,7 +14196,7 @@
           <p:cNvPr id="2" name="s8-subtitle-chart">
             <a:extLst xmlns:a="http://schemas.openxmlformats.org/drawingml/2006/main">
               <a:ext uri="{FF2B5EF4-FFF2-40B4-BE49-F238E27FC236}">
-                <a16:creationId xmlns:a16="http://schemas.microsoft.com/office/drawing/2014/main" id="{1A9B4094-E05E-41D7-BAC4-D450E3C2CE47}"/>
+                <a16:creationId xmlns:a16="http://schemas.microsoft.com/office/drawing/2014/main" id="{6B253956-91AD-40FA-AD5D-4B5DB4916153}"/>
               </a:ext>
             </a:extLst>
           </p:cNvPr>
@@ -11916,7 +14241,7 @@
           <p:cNvPr id="3" name="s8-negative-label">
             <a:extLst xmlns:a="http://schemas.openxmlformats.org/drawingml/2006/main">
               <a:ext uri="{FF2B5EF4-FFF2-40B4-BE49-F238E27FC236}">
-                <a16:creationId xmlns:a16="http://schemas.microsoft.com/office/drawing/2014/main" id="{188B3FDD-7AD1-403D-BE29-84EB7298E782}"/>
+                <a16:creationId xmlns:a16="http://schemas.microsoft.com/office/drawing/2014/main" id="{C0A73AEB-3A3D-48F4-AB27-33E8197685A9}"/>
               </a:ext>
             </a:extLst>
           </p:cNvPr>
@@ -11961,7 +14286,7 @@
           <p:cNvPr id="4" name="s8-zero-heading">
             <a:extLst xmlns:a="http://schemas.openxmlformats.org/drawingml/2006/main">
               <a:ext uri="{FF2B5EF4-FFF2-40B4-BE49-F238E27FC236}">
-                <a16:creationId xmlns:a16="http://schemas.microsoft.com/office/drawing/2014/main" id="{AB66A113-19AE-47B4-89EB-7C32ADB90B6E}"/>
+                <a16:creationId xmlns:a16="http://schemas.microsoft.com/office/drawing/2014/main" id="{27F6ECE2-0576-4F4D-8E5B-76CF5A9CE2CD}"/>
               </a:ext>
             </a:extLst>
           </p:cNvPr>
@@ -12006,7 +14331,7 @@
           <p:cNvPr id="5" name="s8-positive-label">
             <a:extLst xmlns:a="http://schemas.openxmlformats.org/drawingml/2006/main">
               <a:ext uri="{FF2B5EF4-FFF2-40B4-BE49-F238E27FC236}">
-                <a16:creationId xmlns:a16="http://schemas.microsoft.com/office/drawing/2014/main" id="{4119E917-B66E-4A8B-9784-0A3B07873B65}"/>
+                <a16:creationId xmlns:a16="http://schemas.microsoft.com/office/drawing/2014/main" id="{CA6FB648-8513-4190-B3B3-9F1AEE2201D0}"/>
               </a:ext>
             </a:extLst>
           </p:cNvPr>
@@ -12051,7 +14376,7 @@
           <p:cNvPr id="6" name="s8-calls-label">
             <a:extLst xmlns:a="http://schemas.openxmlformats.org/drawingml/2006/main">
               <a:ext uri="{FF2B5EF4-FFF2-40B4-BE49-F238E27FC236}">
-                <a16:creationId xmlns:a16="http://schemas.microsoft.com/office/drawing/2014/main" id="{EC812F7C-100E-4934-8458-FD858F6361C8}"/>
+                <a16:creationId xmlns:a16="http://schemas.microsoft.com/office/drawing/2014/main" id="{026F2F3E-BAE8-41DC-87C5-7FB3A6239D09}"/>
               </a:ext>
             </a:extLst>
           </p:cNvPr>
@@ -12096,7 +14421,7 @@
           <p:cNvPr id="7" name="s8-calls-value">
             <a:extLst xmlns:a="http://schemas.openxmlformats.org/drawingml/2006/main">
               <a:ext uri="{FF2B5EF4-FFF2-40B4-BE49-F238E27FC236}">
-                <a16:creationId xmlns:a16="http://schemas.microsoft.com/office/drawing/2014/main" id="{846CEA3C-EBBA-46E6-BCC6-2BF12C8E10ED}"/>
+                <a16:creationId xmlns:a16="http://schemas.microsoft.com/office/drawing/2014/main" id="{2E8C0DA7-1B7C-4B8C-A565-38885DEF32E8}"/>
               </a:ext>
             </a:extLst>
           </p:cNvPr>
@@ -12141,7 +14466,7 @@
           <p:cNvPr id="8" name="s8-calls-ci">
             <a:extLst xmlns:a="http://schemas.openxmlformats.org/drawingml/2006/main">
               <a:ext uri="{FF2B5EF4-FFF2-40B4-BE49-F238E27FC236}">
-                <a16:creationId xmlns:a16="http://schemas.microsoft.com/office/drawing/2014/main" id="{185D4B14-9850-468E-9225-95B3CA62EDA3}"/>
+                <a16:creationId xmlns:a16="http://schemas.microsoft.com/office/drawing/2014/main" id="{55B5CA34-FB3D-40C3-8508-4FB97E0D0F09}"/>
               </a:ext>
             </a:extLst>
           </p:cNvPr>
@@ -12230,7 +14555,7 @@
           <p:cNvPr id="11" name="s8-calls-zero-label">
             <a:extLst xmlns:a="http://schemas.openxmlformats.org/drawingml/2006/main">
               <a:ext uri="{FF2B5EF4-FFF2-40B4-BE49-F238E27FC236}">
-                <a16:creationId xmlns:a16="http://schemas.microsoft.com/office/drawing/2014/main" id="{D79A1636-32C2-403D-A603-7D1BC27277E4}"/>
+                <a16:creationId xmlns:a16="http://schemas.microsoft.com/office/drawing/2014/main" id="{D3F12A52-22B6-4B49-B67E-DDF433A670CE}"/>
               </a:ext>
             </a:extLst>
           </p:cNvPr>
@@ -12341,7 +14666,7 @@
           <p:cNvPr id="15" name="s8-calls-estimate">
             <a:extLst xmlns:a="http://schemas.openxmlformats.org/drawingml/2006/main">
               <a:ext uri="{FF2B5EF4-FFF2-40B4-BE49-F238E27FC236}">
-                <a16:creationId xmlns:a16="http://schemas.microsoft.com/office/drawing/2014/main" id="{DDE9F207-A863-4F8A-AF25-B51150313FEE}"/>
+                <a16:creationId xmlns:a16="http://schemas.microsoft.com/office/drawing/2014/main" id="{CD5FBA29-CE2A-48D4-BC25-4A02631C7250}"/>
               </a:ext>
             </a:extLst>
           </p:cNvPr>
@@ -12374,7 +14699,7 @@
           <p:cNvPr id="16" name="s8-calls-status">
             <a:extLst xmlns:a="http://schemas.openxmlformats.org/drawingml/2006/main">
               <a:ext uri="{FF2B5EF4-FFF2-40B4-BE49-F238E27FC236}">
-                <a16:creationId xmlns:a16="http://schemas.microsoft.com/office/drawing/2014/main" id="{EA6F47F0-275E-4E0D-BB28-ABC075B5D978}"/>
+                <a16:creationId xmlns:a16="http://schemas.microsoft.com/office/drawing/2014/main" id="{47B9E745-039B-4041-887A-1BBF5FB3AD1D}"/>
               </a:ext>
             </a:extLst>
           </p:cNvPr>
@@ -12419,7 +14744,7 @@
           <p:cNvPr id="17" name="s8-calls-interpretation">
             <a:extLst xmlns:a="http://schemas.openxmlformats.org/drawingml/2006/main">
               <a:ext uri="{FF2B5EF4-FFF2-40B4-BE49-F238E27FC236}">
-                <a16:creationId xmlns:a16="http://schemas.microsoft.com/office/drawing/2014/main" id="{D6CCDE39-A163-4CB8-8D1B-6B0E96C39AB2}"/>
+                <a16:creationId xmlns:a16="http://schemas.microsoft.com/office/drawing/2014/main" id="{1ABD2FEB-22E0-4A54-B24C-81E8F12E3683}"/>
               </a:ext>
             </a:extLst>
           </p:cNvPr>
@@ -12486,7 +14811,7 @@
           <p:cNvPr id="19" name="s8-tokens-label">
             <a:extLst xmlns:a="http://schemas.openxmlformats.org/drawingml/2006/main">
               <a:ext uri="{FF2B5EF4-FFF2-40B4-BE49-F238E27FC236}">
-                <a16:creationId xmlns:a16="http://schemas.microsoft.com/office/drawing/2014/main" id="{A269BE29-8E2A-4F7B-BFF9-535EDE264A66}"/>
+                <a16:creationId xmlns:a16="http://schemas.microsoft.com/office/drawing/2014/main" id="{DFF7DE36-9F48-4C41-A169-E2C7F188E481}"/>
               </a:ext>
             </a:extLst>
           </p:cNvPr>
@@ -12531,7 +14856,7 @@
           <p:cNvPr id="20" name="s8-tokens-value">
             <a:extLst xmlns:a="http://schemas.openxmlformats.org/drawingml/2006/main">
               <a:ext uri="{FF2B5EF4-FFF2-40B4-BE49-F238E27FC236}">
-                <a16:creationId xmlns:a16="http://schemas.microsoft.com/office/drawing/2014/main" id="{C3ECF410-4EF8-4EC1-A0A6-069DA716E3C3}"/>
+                <a16:creationId xmlns:a16="http://schemas.microsoft.com/office/drawing/2014/main" id="{954338E4-93AD-4AB2-878F-5258E2B5E24D}"/>
               </a:ext>
             </a:extLst>
           </p:cNvPr>
@@ -12576,7 +14901,7 @@
           <p:cNvPr id="21" name="s8-tokens-ci">
             <a:extLst xmlns:a="http://schemas.openxmlformats.org/drawingml/2006/main">
               <a:ext uri="{FF2B5EF4-FFF2-40B4-BE49-F238E27FC236}">
-                <a16:creationId xmlns:a16="http://schemas.microsoft.com/office/drawing/2014/main" id="{6CE1F735-8BBD-4184-8BD3-DB8FA19EA785}"/>
+                <a16:creationId xmlns:a16="http://schemas.microsoft.com/office/drawing/2014/main" id="{6782B67C-FFFD-4896-B182-4E12F732E25D}"/>
               </a:ext>
             </a:extLst>
           </p:cNvPr>
@@ -12665,7 +14990,7 @@
           <p:cNvPr id="24" name="s8-tokens-zero-label">
             <a:extLst xmlns:a="http://schemas.openxmlformats.org/drawingml/2006/main">
               <a:ext uri="{FF2B5EF4-FFF2-40B4-BE49-F238E27FC236}">
-                <a16:creationId xmlns:a16="http://schemas.microsoft.com/office/drawing/2014/main" id="{377D91D5-87ED-48C0-B742-4BB806105C6F}"/>
+                <a16:creationId xmlns:a16="http://schemas.microsoft.com/office/drawing/2014/main" id="{EDDDC2ED-0308-4E64-B113-35B88E8662D4}"/>
               </a:ext>
             </a:extLst>
           </p:cNvPr>
@@ -12776,7 +15101,7 @@
           <p:cNvPr id="28" name="s8-tokens-estimate">
             <a:extLst xmlns:a="http://schemas.openxmlformats.org/drawingml/2006/main">
               <a:ext uri="{FF2B5EF4-FFF2-40B4-BE49-F238E27FC236}">
-                <a16:creationId xmlns:a16="http://schemas.microsoft.com/office/drawing/2014/main" id="{0E201CF4-956C-4769-BEC0-A275DB4DCF5B}"/>
+                <a16:creationId xmlns:a16="http://schemas.microsoft.com/office/drawing/2014/main" id="{47E445A6-8C09-49CD-AB49-981C05055D86}"/>
               </a:ext>
             </a:extLst>
           </p:cNvPr>
@@ -12809,7 +15134,7 @@
           <p:cNvPr id="29" name="s8-tokens-status">
             <a:extLst xmlns:a="http://schemas.openxmlformats.org/drawingml/2006/main">
               <a:ext uri="{FF2B5EF4-FFF2-40B4-BE49-F238E27FC236}">
-                <a16:creationId xmlns:a16="http://schemas.microsoft.com/office/drawing/2014/main" id="{E7535710-338A-4879-B1F5-AEC1D256AB04}"/>
+                <a16:creationId xmlns:a16="http://schemas.microsoft.com/office/drawing/2014/main" id="{9260E229-B5E7-4C70-B323-613B87081FB5}"/>
               </a:ext>
             </a:extLst>
           </p:cNvPr>
@@ -12854,7 +15179,7 @@
           <p:cNvPr id="30" name="s8-tokens-interpretation">
             <a:extLst xmlns:a="http://schemas.openxmlformats.org/drawingml/2006/main">
               <a:ext uri="{FF2B5EF4-FFF2-40B4-BE49-F238E27FC236}">
-                <a16:creationId xmlns:a16="http://schemas.microsoft.com/office/drawing/2014/main" id="{2506CF45-319B-414C-A1A8-BBE2F220D1AF}"/>
+                <a16:creationId xmlns:a16="http://schemas.microsoft.com/office/drawing/2014/main" id="{0EC3D06C-5B30-45CF-9307-5F6156B441E7}"/>
               </a:ext>
             </a:extLst>
           </p:cNvPr>
@@ -12921,7 +15246,7 @@
           <p:cNvPr id="32" name="s8-time-label">
             <a:extLst xmlns:a="http://schemas.openxmlformats.org/drawingml/2006/main">
               <a:ext uri="{FF2B5EF4-FFF2-40B4-BE49-F238E27FC236}">
-                <a16:creationId xmlns:a16="http://schemas.microsoft.com/office/drawing/2014/main" id="{7A22CEBD-EB9B-4B77-8148-0FF1FCECA910}"/>
+                <a16:creationId xmlns:a16="http://schemas.microsoft.com/office/drawing/2014/main" id="{BEAD1BC1-7EB2-4E8F-9991-D00C8CD821CB}"/>
               </a:ext>
             </a:extLst>
           </p:cNvPr>
@@ -12966,7 +15291,7 @@
           <p:cNvPr id="33" name="s8-time-value">
             <a:extLst xmlns:a="http://schemas.openxmlformats.org/drawingml/2006/main">
               <a:ext uri="{FF2B5EF4-FFF2-40B4-BE49-F238E27FC236}">
-                <a16:creationId xmlns:a16="http://schemas.microsoft.com/office/drawing/2014/main" id="{18C51E39-9D95-4746-BA0F-2ADFF7E4C5F5}"/>
+                <a16:creationId xmlns:a16="http://schemas.microsoft.com/office/drawing/2014/main" id="{82DE9E47-7CB6-4475-9D7F-75A5A66FD02F}"/>
               </a:ext>
             </a:extLst>
           </p:cNvPr>
@@ -13011,7 +15336,7 @@
           <p:cNvPr id="34" name="s8-time-ci">
             <a:extLst xmlns:a="http://schemas.openxmlformats.org/drawingml/2006/main">
               <a:ext uri="{FF2B5EF4-FFF2-40B4-BE49-F238E27FC236}">
-                <a16:creationId xmlns:a16="http://schemas.microsoft.com/office/drawing/2014/main" id="{4472C1A6-98C1-4EAB-8849-D525A8C1D856}"/>
+                <a16:creationId xmlns:a16="http://schemas.microsoft.com/office/drawing/2014/main" id="{A540E1F4-AE61-413F-958B-46D7BDCBD54A}"/>
               </a:ext>
             </a:extLst>
           </p:cNvPr>
@@ -13100,7 +15425,7 @@
           <p:cNvPr id="37" name="s8-time-zero-label">
             <a:extLst xmlns:a="http://schemas.openxmlformats.org/drawingml/2006/main">
               <a:ext uri="{FF2B5EF4-FFF2-40B4-BE49-F238E27FC236}">
-                <a16:creationId xmlns:a16="http://schemas.microsoft.com/office/drawing/2014/main" id="{DADF4151-176B-48D3-847D-2269311F7BD0}"/>
+                <a16:creationId xmlns:a16="http://schemas.microsoft.com/office/drawing/2014/main" id="{F6EF5526-CD5F-4E50-9A19-9490DF33BD24}"/>
               </a:ext>
             </a:extLst>
           </p:cNvPr>
@@ -13211,7 +15536,7 @@
           <p:cNvPr id="41" name="s8-time-estimate">
             <a:extLst xmlns:a="http://schemas.openxmlformats.org/drawingml/2006/main">
               <a:ext uri="{FF2B5EF4-FFF2-40B4-BE49-F238E27FC236}">
-                <a16:creationId xmlns:a16="http://schemas.microsoft.com/office/drawing/2014/main" id="{E534639A-D656-48F0-91B5-0DA5253A5701}"/>
+                <a16:creationId xmlns:a16="http://schemas.microsoft.com/office/drawing/2014/main" id="{1DF8469F-4498-4E26-934E-A3E7EBD563EC}"/>
               </a:ext>
             </a:extLst>
           </p:cNvPr>
@@ -13244,7 +15569,7 @@
           <p:cNvPr id="42" name="s8-time-status">
             <a:extLst xmlns:a="http://schemas.openxmlformats.org/drawingml/2006/main">
               <a:ext uri="{FF2B5EF4-FFF2-40B4-BE49-F238E27FC236}">
-                <a16:creationId xmlns:a16="http://schemas.microsoft.com/office/drawing/2014/main" id="{B0EA3AE0-6B60-4B88-9FE7-1E32E7DC95A5}"/>
+                <a16:creationId xmlns:a16="http://schemas.microsoft.com/office/drawing/2014/main" id="{DF292A31-4C70-4B05-B39B-D7B452C1A10D}"/>
               </a:ext>
             </a:extLst>
           </p:cNvPr>
@@ -13289,7 +15614,7 @@
           <p:cNvPr id="43" name="s8-time-interpretation">
             <a:extLst xmlns:a="http://schemas.openxmlformats.org/drawingml/2006/main">
               <a:ext uri="{FF2B5EF4-FFF2-40B4-BE49-F238E27FC236}">
-                <a16:creationId xmlns:a16="http://schemas.microsoft.com/office/drawing/2014/main" id="{B22F5506-4E65-4297-80B8-26A4ECFAF501}"/>
+                <a16:creationId xmlns:a16="http://schemas.microsoft.com/office/drawing/2014/main" id="{43494067-76C4-4504-BF36-B2C57F49D367}"/>
               </a:ext>
             </a:extLst>
           </p:cNvPr>
@@ -13356,7 +15681,7 @@
           <p:cNvPr id="45" name="s8-boundary-band">
             <a:extLst xmlns:a="http://schemas.openxmlformats.org/drawingml/2006/main">
               <a:ext uri="{FF2B5EF4-FFF2-40B4-BE49-F238E27FC236}">
-                <a16:creationId xmlns:a16="http://schemas.microsoft.com/office/drawing/2014/main" id="{667ABC08-0ED9-4F2E-95C5-1AB7EFDEE572}"/>
+                <a16:creationId xmlns:a16="http://schemas.microsoft.com/office/drawing/2014/main" id="{EEF3D3C6-F975-49D2-ADF8-83413BDD9BC7}"/>
               </a:ext>
             </a:extLst>
           </p:cNvPr>
@@ -13391,7 +15716,7 @@
           <p:cNvPr id="46" name="s8-correct-value">
             <a:extLst xmlns:a="http://schemas.openxmlformats.org/drawingml/2006/main">
               <a:ext uri="{FF2B5EF4-FFF2-40B4-BE49-F238E27FC236}">
-                <a16:creationId xmlns:a16="http://schemas.microsoft.com/office/drawing/2014/main" id="{6EBBE5F6-96EA-4986-8804-6C5B0CCF9EF6}"/>
+                <a16:creationId xmlns:a16="http://schemas.microsoft.com/office/drawing/2014/main" id="{C2F09178-BE1E-464E-92F6-EC4DDDC55EE0}"/>
               </a:ext>
             </a:extLst>
           </p:cNvPr>
@@ -13436,7 +15761,7 @@
           <p:cNvPr id="47" name="s8-correct-label">
             <a:extLst xmlns:a="http://schemas.openxmlformats.org/drawingml/2006/main">
               <a:ext uri="{FF2B5EF4-FFF2-40B4-BE49-F238E27FC236}">
-                <a16:creationId xmlns:a16="http://schemas.microsoft.com/office/drawing/2014/main" id="{BB1E3C8D-993F-4F65-BA02-A300CFCDBA19}"/>
+                <a16:creationId xmlns:a16="http://schemas.microsoft.com/office/drawing/2014/main" id="{AB8F5723-7CF4-479C-8717-9125B0E0E179}"/>
               </a:ext>
             </a:extLst>
           </p:cNvPr>
@@ -13481,7 +15806,7 @@
           <p:cNvPr id="48" name="s8-full-value">
             <a:extLst xmlns:a="http://schemas.openxmlformats.org/drawingml/2006/main">
               <a:ext uri="{FF2B5EF4-FFF2-40B4-BE49-F238E27FC236}">
-                <a16:creationId xmlns:a16="http://schemas.microsoft.com/office/drawing/2014/main" id="{42AA28FF-2A2A-4CE8-90C7-81A03EF548C4}"/>
+                <a16:creationId xmlns:a16="http://schemas.microsoft.com/office/drawing/2014/main" id="{7D5CF725-7F46-4ECA-B446-87208B28333D}"/>
               </a:ext>
             </a:extLst>
           </p:cNvPr>
@@ -13526,7 +15851,7 @@
           <p:cNvPr id="49" name="s8-full-label">
             <a:extLst xmlns:a="http://schemas.openxmlformats.org/drawingml/2006/main">
               <a:ext uri="{FF2B5EF4-FFF2-40B4-BE49-F238E27FC236}">
-                <a16:creationId xmlns:a16="http://schemas.microsoft.com/office/drawing/2014/main" id="{5987B22A-23BE-436A-A0E2-7A5F67C94C44}"/>
+                <a16:creationId xmlns:a16="http://schemas.microsoft.com/office/drawing/2014/main" id="{338920AF-767A-4F6B-A286-F2259C17E761}"/>
               </a:ext>
             </a:extLst>
           </p:cNvPr>
@@ -13571,7 +15896,7 @@
           <p:cNvPr id="50" name="s8-limit-value">
             <a:extLst xmlns:a="http://schemas.openxmlformats.org/drawingml/2006/main">
               <a:ext uri="{FF2B5EF4-FFF2-40B4-BE49-F238E27FC236}">
-                <a16:creationId xmlns:a16="http://schemas.microsoft.com/office/drawing/2014/main" id="{9D2D6973-490F-467A-9707-3E50A27F2FDA}"/>
+                <a16:creationId xmlns:a16="http://schemas.microsoft.com/office/drawing/2014/main" id="{F3FABE92-2F3C-4066-8BA8-26248C394D0D}"/>
               </a:ext>
             </a:extLst>
           </p:cNvPr>
@@ -13616,7 +15941,7 @@
           <p:cNvPr id="51" name="s8-limit-label">
             <a:extLst xmlns:a="http://schemas.openxmlformats.org/drawingml/2006/main">
               <a:ext uri="{FF2B5EF4-FFF2-40B4-BE49-F238E27FC236}">
-                <a16:creationId xmlns:a16="http://schemas.microsoft.com/office/drawing/2014/main" id="{09468687-B26F-4278-9018-6DB255AD1ADC}"/>
+                <a16:creationId xmlns:a16="http://schemas.microsoft.com/office/drawing/2014/main" id="{8DFD5E03-719E-4E39-BD8F-4D0446514A9A}"/>
               </a:ext>
             </a:extLst>
           </p:cNvPr>
@@ -13683,7 +16008,7 @@
           <p:cNvPr id="53" name="footer-source-8">
             <a:extLst xmlns:a="http://schemas.openxmlformats.org/drawingml/2006/main">
               <a:ext uri="{FF2B5EF4-FFF2-40B4-BE49-F238E27FC236}">
-                <a16:creationId xmlns:a16="http://schemas.microsoft.com/office/drawing/2014/main" id="{4DD6485E-06C3-4F77-8C3B-9258BEC337CE}"/>
+                <a16:creationId xmlns:a16="http://schemas.microsoft.com/office/drawing/2014/main" id="{1C219620-DA4E-496C-9C87-81AD9C836F63}"/>
               </a:ext>
             </a:extLst>
           </p:cNvPr>
@@ -13728,7 +16053,7 @@
           <p:cNvPr id="54" name="footer-number-8">
             <a:extLst xmlns:a="http://schemas.openxmlformats.org/drawingml/2006/main">
               <a:ext uri="{FF2B5EF4-FFF2-40B4-BE49-F238E27FC236}">
-                <a16:creationId xmlns:a16="http://schemas.microsoft.com/office/drawing/2014/main" id="{1858CE35-9522-4BBC-9F32-7AD251D9493B}"/>
+                <a16:creationId xmlns:a16="http://schemas.microsoft.com/office/drawing/2014/main" id="{DCB19FF1-7B75-4041-8414-BC6E7C6D39DD}"/>
               </a:ext>
             </a:extLst>
           </p:cNvPr>
@@ -13771,7 +16096,7 @@
     </p:spTree>
     <p:extLst>
       <p:ext uri="{BB962C8B-B14F-4D97-AF65-F5344CB8AC3E}">
-        <p14:creationId xmlns:p14="http://schemas.microsoft.com/office/powerpoint/2010/main" val="1814072128"/>
+        <p14:creationId xmlns:p14="http://schemas.microsoft.com/office/powerpoint/2010/main" val="750612935"/>
       </p:ext>
     </p:extLst>
   </p:cSld>
@@ -13799,35 +16124,35 @@
       </p:grpSpPr>
       <p:sp>
         <p:nvSpPr>
-          <p:cNvPr id="39" name="s10-title">
-            <a:extLst xmlns:a="http://schemas.openxmlformats.org/drawingml/2006/main">
-              <a:ext uri="{FF2B5EF4-FFF2-40B4-BE49-F238E27FC236}">
-                <a16:creationId xmlns:a16="http://schemas.microsoft.com/office/drawing/2014/main" id="{465F720F-4C27-4A44-9FAA-DD3A9B6E3BBF}"/>
-              </a:ext>
-            </a:extLst>
-          </p:cNvPr>
-          <p:cNvSpPr>
-            <a:spLocks xmlns:a="http://schemas.openxmlformats.org/drawingml/2006/main" noGrp="1"/>
-          </p:cNvSpPr>
-          <p:nvPr/>
-        </p:nvSpPr>
-        <p:spPr>
-          <a:xfrm xmlns:a="http://schemas.openxmlformats.org/drawingml/2006/main">
-            <a:off x="495300" y="323850"/>
-            <a:ext cx="10953750" cy="723900"/>
-          </a:xfrm>
-          <a:prstGeom xmlns:a="http://schemas.openxmlformats.org/drawingml/2006/main" prst="rect">
-            <a:avLst/>
-          </a:prstGeom>
-        </p:spPr>
-        <p:txBody>
-          <a:bodyPr xmlns:a="http://schemas.openxmlformats.org/drawingml/2006/main" wrap="square" lIns="0" tIns="0" rIns="0" bIns="0" anchor="t">
-            <a:noAutofit/>
-          </a:bodyPr>
-          <a:lstStyle xmlns:a="http://schemas.openxmlformats.org/drawingml/2006/main"/>
-          <a:p xmlns:a="http://schemas.openxmlformats.org/drawingml/2006/main">
-            <a:pPr algn="l">
-              <a:defRPr sz="2850" b="1">
+          <p:cNvPr id="26" name="s9-title-scenarios">
+            <a:extLst xmlns:a="http://schemas.openxmlformats.org/drawingml/2006/main">
+              <a:ext uri="{FF2B5EF4-FFF2-40B4-BE49-F238E27FC236}">
+                <a16:creationId xmlns:a16="http://schemas.microsoft.com/office/drawing/2014/main" id="{5F4F2DB1-F3E2-4DDB-89E5-3E6D27ADE42B}"/>
+              </a:ext>
+            </a:extLst>
+          </p:cNvPr>
+          <p:cNvSpPr>
+            <a:spLocks xmlns:a="http://schemas.openxmlformats.org/drawingml/2006/main" noGrp="1"/>
+          </p:cNvSpPr>
+          <p:nvPr/>
+        </p:nvSpPr>
+        <p:spPr>
+          <a:xfrm xmlns:a="http://schemas.openxmlformats.org/drawingml/2006/main">
+            <a:off x="400050" y="323850"/>
+            <a:ext cx="11391900" cy="666750"/>
+          </a:xfrm>
+          <a:prstGeom xmlns:a="http://schemas.openxmlformats.org/drawingml/2006/main" prst="rect">
+            <a:avLst/>
+          </a:prstGeom>
+        </p:spPr>
+        <p:txBody>
+          <a:bodyPr xmlns:a="http://schemas.openxmlformats.org/drawingml/2006/main" wrap="square" lIns="0" tIns="0" rIns="0" bIns="0" anchor="t">
+            <a:noAutofit/>
+          </a:bodyPr>
+          <a:lstStyle xmlns:a="http://schemas.openxmlformats.org/drawingml/2006/main"/>
+          <a:p xmlns:a="http://schemas.openxmlformats.org/drawingml/2006/main">
+            <a:pPr algn="l">
+              <a:defRPr sz="2925" b="1">
                 <a:solidFill>
                   <a:srgbClr val="0A1224"/>
                 </a:solidFill>
@@ -13837,42 +16162,42 @@
               </a:defRPr>
             </a:pPr>
             <a:r>
-              <a:t>Independent gates verify the product.</a:t>
-            </a:r>
-          </a:p>
-        </p:txBody>
-      </p:sp>
-      <p:sp>
-        <p:nvSpPr>
-          <p:cNvPr id="2" name="s10-subtitle">
-            <a:extLst xmlns:a="http://schemas.openxmlformats.org/drawingml/2006/main">
-              <a:ext uri="{FF2B5EF4-FFF2-40B4-BE49-F238E27FC236}">
-                <a16:creationId xmlns:a16="http://schemas.microsoft.com/office/drawing/2014/main" id="{EFE57826-8108-413E-B530-3B6662E28B67}"/>
-              </a:ext>
-            </a:extLst>
-          </p:cNvPr>
-          <p:cNvSpPr>
-            <a:spLocks xmlns:a="http://schemas.openxmlformats.org/drawingml/2006/main" noGrp="1"/>
-          </p:cNvSpPr>
-          <p:nvPr/>
-        </p:nvSpPr>
-        <p:spPr>
-          <a:xfrm xmlns:a="http://schemas.openxmlformats.org/drawingml/2006/main">
-            <a:off x="400050" y="1066800"/>
-            <a:ext cx="11049000" cy="381000"/>
-          </a:xfrm>
-          <a:prstGeom xmlns:a="http://schemas.openxmlformats.org/drawingml/2006/main" prst="rect">
-            <a:avLst/>
-          </a:prstGeom>
-        </p:spPr>
-        <p:txBody>
-          <a:bodyPr xmlns:a="http://schemas.openxmlformats.org/drawingml/2006/main" wrap="square" lIns="0" tIns="0" rIns="0" bIns="0" anchor="t">
-            <a:noAutofit/>
-          </a:bodyPr>
-          <a:lstStyle xmlns:a="http://schemas.openxmlformats.org/drawingml/2006/main"/>
-          <a:p xmlns:a="http://schemas.openxmlformats.org/drawingml/2006/main">
-            <a:pPr algn="l">
-              <a:defRPr sz="1500" b="0">
+              <a:t>Task profile changed the overhead, not its direction.</a:t>
+            </a:r>
+          </a:p>
+        </p:txBody>
+      </p:sp>
+      <p:sp>
+        <p:nvSpPr>
+          <p:cNvPr id="2" name="s9-subtitle-scenarios">
+            <a:extLst xmlns:a="http://schemas.openxmlformats.org/drawingml/2006/main">
+              <a:ext uri="{FF2B5EF4-FFF2-40B4-BE49-F238E27FC236}">
+                <a16:creationId xmlns:a16="http://schemas.microsoft.com/office/drawing/2014/main" id="{CC4E420A-C85F-456A-8A86-AD8E6EB5D07A}"/>
+              </a:ext>
+            </a:extLst>
+          </p:cNvPr>
+          <p:cNvSpPr>
+            <a:spLocks xmlns:a="http://schemas.openxmlformats.org/drawingml/2006/main" noGrp="1"/>
+          </p:cNvSpPr>
+          <p:nvPr/>
+        </p:nvSpPr>
+        <p:spPr>
+          <a:xfrm xmlns:a="http://schemas.openxmlformats.org/drawingml/2006/main">
+            <a:off x="400050" y="1028700"/>
+            <a:ext cx="11239500" cy="400050"/>
+          </a:xfrm>
+          <a:prstGeom xmlns:a="http://schemas.openxmlformats.org/drawingml/2006/main" prst="rect">
+            <a:avLst/>
+          </a:prstGeom>
+        </p:spPr>
+        <p:txBody>
+          <a:bodyPr xmlns:a="http://schemas.openxmlformats.org/drawingml/2006/main" wrap="square" lIns="0" tIns="0" rIns="0" bIns="0" anchor="t">
+            <a:noAutofit/>
+          </a:bodyPr>
+          <a:lstStyle xmlns:a="http://schemas.openxmlformats.org/drawingml/2006/main"/>
+          <a:p xmlns:a="http://schemas.openxmlformats.org/drawingml/2006/main">
+            <a:pPr algn="l">
+              <a:defRPr sz="1350" b="0">
                 <a:solidFill>
                   <a:srgbClr val="526071"/>
                 </a:solidFill>
@@ -13882,41 +16207,355 @@
               </a:defRPr>
             </a:pPr>
             <a:r>
-              <a:t>Repository tests, cross-platform CI, and public-distribution checks verify different failure modes.</a:t>
-            </a:r>
-          </a:p>
-        </p:txBody>
-      </p:sp>
-      <p:sp>
-        <p:nvSpPr>
-          <p:cNvPr id="3" name="s10-tests">
-            <a:extLst xmlns:a="http://schemas.openxmlformats.org/drawingml/2006/main">
-              <a:ext uri="{FF2B5EF4-FFF2-40B4-BE49-F238E27FC236}">
-                <a16:creationId xmlns:a16="http://schemas.microsoft.com/office/drawing/2014/main" id="{536B2531-E94A-4CAF-90E8-819731A168C8}"/>
-              </a:ext>
-            </a:extLst>
-          </p:cNvPr>
-          <p:cNvSpPr>
-            <a:spLocks xmlns:a="http://schemas.openxmlformats.org/drawingml/2006/main" noGrp="1"/>
-          </p:cNvSpPr>
-          <p:nvPr/>
-        </p:nvSpPr>
-        <p:spPr>
-          <a:xfrm xmlns:a="http://schemas.openxmlformats.org/drawingml/2006/main">
-            <a:off x="552450" y="1695450"/>
-            <a:ext cx="3295650" cy="3771900"/>
+              <a:t>Adaptive - Codex paired medians; positive means more. These are complexity and risk profiles, not calibrated difficulty levels.</a:t>
+            </a:r>
+          </a:p>
+        </p:txBody>
+      </p:sp>
+      <p:sp>
+        <p:nvSpPr>
+          <p:cNvPr id="3" name="s9-token-heading">
+            <a:extLst xmlns:a="http://schemas.openxmlformats.org/drawingml/2006/main">
+              <a:ext uri="{FF2B5EF4-FFF2-40B4-BE49-F238E27FC236}">
+                <a16:creationId xmlns:a16="http://schemas.microsoft.com/office/drawing/2014/main" id="{43B55344-4D20-4713-8173-D4D8BFFC4305}"/>
+              </a:ext>
+            </a:extLst>
+          </p:cNvPr>
+          <p:cNvSpPr>
+            <a:spLocks xmlns:a="http://schemas.openxmlformats.org/drawingml/2006/main" noGrp="1"/>
+          </p:cNvSpPr>
+          <p:nvPr/>
+        </p:nvSpPr>
+        <p:spPr>
+          <a:xfrm xmlns:a="http://schemas.openxmlformats.org/drawingml/2006/main">
+            <a:off x="400050" y="1466850"/>
+            <a:ext cx="3524250" cy="228600"/>
+          </a:xfrm>
+          <a:prstGeom xmlns:a="http://schemas.openxmlformats.org/drawingml/2006/main" prst="rect">
+            <a:avLst/>
+          </a:prstGeom>
+        </p:spPr>
+        <p:txBody>
+          <a:bodyPr xmlns:a="http://schemas.openxmlformats.org/drawingml/2006/main" wrap="square" lIns="0" tIns="0" rIns="0" bIns="0" anchor="t">
+            <a:noAutofit/>
+          </a:bodyPr>
+          <a:lstStyle xmlns:a="http://schemas.openxmlformats.org/drawingml/2006/main"/>
+          <a:p xmlns:a="http://schemas.openxmlformats.org/drawingml/2006/main">
+            <a:pPr algn="ctr">
+              <a:defRPr sz="1125" b="1">
+                <a:solidFill>
+                  <a:srgbClr val="1677FF"/>
+                </a:solidFill>
+                <a:latin typeface="Arial"/>
+                <a:ea typeface="Arial"/>
+                <a:cs typeface="Arial"/>
+              </a:defRPr>
+            </a:pPr>
+            <a:r>
+              <a:t>DELTA REPORTED TOKENS</a:t>
+            </a:r>
+          </a:p>
+        </p:txBody>
+      </p:sp>
+      <p:sp>
+        <p:nvSpPr>
+          <p:cNvPr id="4" name="s9-token-supported">
+            <a:extLst xmlns:a="http://schemas.openxmlformats.org/drawingml/2006/main">
+              <a:ext uri="{FF2B5EF4-FFF2-40B4-BE49-F238E27FC236}">
+                <a16:creationId xmlns:a16="http://schemas.microsoft.com/office/drawing/2014/main" id="{380825EA-ED05-4D81-9867-EC7D99ADD2D1}"/>
+              </a:ext>
+            </a:extLst>
+          </p:cNvPr>
+          <p:cNvSpPr>
+            <a:spLocks xmlns:a="http://schemas.openxmlformats.org/drawingml/2006/main" noGrp="1"/>
+          </p:cNvSpPr>
+          <p:nvPr/>
+        </p:nvSpPr>
+        <p:spPr>
+          <a:xfrm xmlns:a="http://schemas.openxmlformats.org/drawingml/2006/main">
+            <a:off x="400050" y="1695450"/>
+            <a:ext cx="3524250" cy="209550"/>
+          </a:xfrm>
+          <a:prstGeom xmlns:a="http://schemas.openxmlformats.org/drawingml/2006/main" prst="rect">
+            <a:avLst/>
+          </a:prstGeom>
+        </p:spPr>
+        <p:txBody>
+          <a:bodyPr xmlns:a="http://schemas.openxmlformats.org/drawingml/2006/main" wrap="square" lIns="0" tIns="0" rIns="0" bIns="0" anchor="t">
+            <a:noAutofit/>
+          </a:bodyPr>
+          <a:lstStyle xmlns:a="http://schemas.openxmlformats.org/drawingml/2006/main"/>
+          <a:p xmlns:a="http://schemas.openxmlformats.org/drawingml/2006/main">
+            <a:pPr algn="ctr">
+              <a:defRPr sz="938" b="1">
+                <a:solidFill>
+                  <a:srgbClr val="D4515D"/>
+                </a:solidFill>
+                <a:latin typeface="Arial"/>
+                <a:ea typeface="Arial"/>
+                <a:cs typeface="Arial"/>
+              </a:defRPr>
+            </a:pPr>
+            <a:r>
+              <a:t>95% CI above zero: SMALL LOCAL</a:t>
+            </a:r>
+          </a:p>
+        </p:txBody>
+      </p:sp>
+      <p:sp>
+        <p:nvSpPr>
+          <p:cNvPr id="5" name="s9-time-heading">
+            <a:extLst xmlns:a="http://schemas.openxmlformats.org/drawingml/2006/main">
+              <a:ext uri="{FF2B5EF4-FFF2-40B4-BE49-F238E27FC236}">
+                <a16:creationId xmlns:a16="http://schemas.microsoft.com/office/drawing/2014/main" id="{5831CA84-9B44-4DF5-9E1F-2098491647A9}"/>
+              </a:ext>
+            </a:extLst>
+          </p:cNvPr>
+          <p:cNvSpPr>
+            <a:spLocks xmlns:a="http://schemas.openxmlformats.org/drawingml/2006/main" noGrp="1"/>
+          </p:cNvSpPr>
+          <p:nvPr/>
+        </p:nvSpPr>
+        <p:spPr>
+          <a:xfrm xmlns:a="http://schemas.openxmlformats.org/drawingml/2006/main">
+            <a:off x="4324350" y="1466850"/>
+            <a:ext cx="3524250" cy="228600"/>
+          </a:xfrm>
+          <a:prstGeom xmlns:a="http://schemas.openxmlformats.org/drawingml/2006/main" prst="rect">
+            <a:avLst/>
+          </a:prstGeom>
+        </p:spPr>
+        <p:txBody>
+          <a:bodyPr xmlns:a="http://schemas.openxmlformats.org/drawingml/2006/main" wrap="square" lIns="0" tIns="0" rIns="0" bIns="0" anchor="t">
+            <a:noAutofit/>
+          </a:bodyPr>
+          <a:lstStyle xmlns:a="http://schemas.openxmlformats.org/drawingml/2006/main"/>
+          <a:p xmlns:a="http://schemas.openxmlformats.org/drawingml/2006/main">
+            <a:pPr algn="ctr">
+              <a:defRPr sz="1125" b="1">
+                <a:solidFill>
+                  <a:srgbClr val="1677FF"/>
+                </a:solidFill>
+                <a:latin typeface="Arial"/>
+                <a:ea typeface="Arial"/>
+                <a:cs typeface="Arial"/>
+              </a:defRPr>
+            </a:pPr>
+            <a:r>
+              <a:t>DELTA WALL TIME (SECONDS)</a:t>
+            </a:r>
+          </a:p>
+        </p:txBody>
+      </p:sp>
+      <p:sp>
+        <p:nvSpPr>
+          <p:cNvPr id="6" name="s9-time-supported">
+            <a:extLst xmlns:a="http://schemas.openxmlformats.org/drawingml/2006/main">
+              <a:ext uri="{FF2B5EF4-FFF2-40B4-BE49-F238E27FC236}">
+                <a16:creationId xmlns:a16="http://schemas.microsoft.com/office/drawing/2014/main" id="{9682C4D2-5593-4873-AC78-A85C0ABB2338}"/>
+              </a:ext>
+            </a:extLst>
+          </p:cNvPr>
+          <p:cNvSpPr>
+            <a:spLocks xmlns:a="http://schemas.openxmlformats.org/drawingml/2006/main" noGrp="1"/>
+          </p:cNvSpPr>
+          <p:nvPr/>
+        </p:nvSpPr>
+        <p:spPr>
+          <a:xfrm xmlns:a="http://schemas.openxmlformats.org/drawingml/2006/main">
+            <a:off x="4324350" y="1695450"/>
+            <a:ext cx="3524250" cy="209550"/>
+          </a:xfrm>
+          <a:prstGeom xmlns:a="http://schemas.openxmlformats.org/drawingml/2006/main" prst="rect">
+            <a:avLst/>
+          </a:prstGeom>
+        </p:spPr>
+        <p:txBody>
+          <a:bodyPr xmlns:a="http://schemas.openxmlformats.org/drawingml/2006/main" wrap="square" lIns="0" tIns="0" rIns="0" bIns="0" anchor="t">
+            <a:noAutofit/>
+          </a:bodyPr>
+          <a:lstStyle xmlns:a="http://schemas.openxmlformats.org/drawingml/2006/main"/>
+          <a:p xmlns:a="http://schemas.openxmlformats.org/drawingml/2006/main">
+            <a:pPr algn="ctr">
+              <a:defRPr sz="938" b="1">
+                <a:solidFill>
+                  <a:srgbClr val="D4515D"/>
+                </a:solidFill>
+                <a:latin typeface="Arial"/>
+                <a:ea typeface="Arial"/>
+                <a:cs typeface="Arial"/>
+              </a:defRPr>
+            </a:pPr>
+            <a:r>
+              <a:t>95% CI above zero: CROSS-STACK</a:t>
+            </a:r>
+          </a:p>
+        </p:txBody>
+      </p:sp>
+      <p:sp>
+        <p:nvSpPr>
+          <p:cNvPr id="7" name="s9-calls-heading">
+            <a:extLst xmlns:a="http://schemas.openxmlformats.org/drawingml/2006/main">
+              <a:ext uri="{FF2B5EF4-FFF2-40B4-BE49-F238E27FC236}">
+                <a16:creationId xmlns:a16="http://schemas.microsoft.com/office/drawing/2014/main" id="{E0359AB6-B453-4571-B8BB-C149C7642B87}"/>
+              </a:ext>
+            </a:extLst>
+          </p:cNvPr>
+          <p:cNvSpPr>
+            <a:spLocks xmlns:a="http://schemas.openxmlformats.org/drawingml/2006/main" noGrp="1"/>
+          </p:cNvSpPr>
+          <p:nvPr/>
+        </p:nvSpPr>
+        <p:spPr>
+          <a:xfrm xmlns:a="http://schemas.openxmlformats.org/drawingml/2006/main">
+            <a:off x="8248650" y="1466850"/>
+            <a:ext cx="3524250" cy="228600"/>
+          </a:xfrm>
+          <a:prstGeom xmlns:a="http://schemas.openxmlformats.org/drawingml/2006/main" prst="rect">
+            <a:avLst/>
+          </a:prstGeom>
+        </p:spPr>
+        <p:txBody>
+          <a:bodyPr xmlns:a="http://schemas.openxmlformats.org/drawingml/2006/main" wrap="square" lIns="0" tIns="0" rIns="0" bIns="0" anchor="t">
+            <a:noAutofit/>
+          </a:bodyPr>
+          <a:lstStyle xmlns:a="http://schemas.openxmlformats.org/drawingml/2006/main"/>
+          <a:p xmlns:a="http://schemas.openxmlformats.org/drawingml/2006/main">
+            <a:pPr algn="ctr">
+              <a:defRPr sz="1125" b="1">
+                <a:solidFill>
+                  <a:srgbClr val="1677FF"/>
+                </a:solidFill>
+                <a:latin typeface="Arial"/>
+                <a:ea typeface="Arial"/>
+                <a:cs typeface="Arial"/>
+              </a:defRPr>
+            </a:pPr>
+            <a:r>
+              <a:t>DELTA TOOL CALLS</a:t>
+            </a:r>
+          </a:p>
+        </p:txBody>
+      </p:sp>
+      <p:sp>
+        <p:nvSpPr>
+          <p:cNvPr id="8" name="s9-calls-supported">
+            <a:extLst xmlns:a="http://schemas.openxmlformats.org/drawingml/2006/main">
+              <a:ext uri="{FF2B5EF4-FFF2-40B4-BE49-F238E27FC236}">
+                <a16:creationId xmlns:a16="http://schemas.microsoft.com/office/drawing/2014/main" id="{B0CC2EA6-40D6-4E23-A818-B6B41B9C7744}"/>
+              </a:ext>
+            </a:extLst>
+          </p:cNvPr>
+          <p:cNvSpPr>
+            <a:spLocks xmlns:a="http://schemas.openxmlformats.org/drawingml/2006/main" noGrp="1"/>
+          </p:cNvSpPr>
+          <p:nvPr/>
+        </p:nvSpPr>
+        <p:spPr>
+          <a:xfrm xmlns:a="http://schemas.openxmlformats.org/drawingml/2006/main">
+            <a:off x="8248650" y="1695450"/>
+            <a:ext cx="3524250" cy="209550"/>
+          </a:xfrm>
+          <a:prstGeom xmlns:a="http://schemas.openxmlformats.org/drawingml/2006/main" prst="rect">
+            <a:avLst/>
+          </a:prstGeom>
+        </p:spPr>
+        <p:txBody>
+          <a:bodyPr xmlns:a="http://schemas.openxmlformats.org/drawingml/2006/main" wrap="square" lIns="0" tIns="0" rIns="0" bIns="0" anchor="t">
+            <a:noAutofit/>
+          </a:bodyPr>
+          <a:lstStyle xmlns:a="http://schemas.openxmlformats.org/drawingml/2006/main"/>
+          <a:p xmlns:a="http://schemas.openxmlformats.org/drawingml/2006/main">
+            <a:pPr algn="ctr">
+              <a:defRPr sz="938" b="1">
+                <a:solidFill>
+                  <a:srgbClr val="D4515D"/>
+                </a:solidFill>
+                <a:latin typeface="Arial"/>
+                <a:ea typeface="Arial"/>
+                <a:cs typeface="Arial"/>
+              </a:defRPr>
+            </a:pPr>
+            <a:r>
+              <a:t>95% CI above zero: CROSS-STACK</a:t>
+            </a:r>
+          </a:p>
+        </p:txBody>
+      </p:sp>
+      <p:cxnSp>
+        <p:nvCxnSpPr>
+          <p:cNvPr id="34" name="s9-chart-separator-1"/>
+          <p:cNvCxnSpPr/>
+          <p:nvPr/>
+        </p:nvCxnSpPr>
+        <p:spPr>
+          <a:xfrm xmlns:a="http://schemas.openxmlformats.org/drawingml/2006/main">
+            <a:off x="4133850" y="1866900"/>
+            <a:ext cx="953" cy="3143250"/>
+          </a:xfrm>
+          <a:prstGeom xmlns:a="http://schemas.openxmlformats.org/drawingml/2006/main" prst="straightConnector1">
+            <a:avLst/>
+          </a:prstGeom>
+          <a:ln xmlns:a="http://schemas.openxmlformats.org/drawingml/2006/main" w="19050">
+            <a:solidFill>
+              <a:srgbClr val="EDEFF3"/>
+            </a:solidFill>
+            <a:prstDash val="solid"/>
+          </a:ln>
+        </p:spPr>
+      </p:cxnSp>
+      <p:cxnSp>
+        <p:nvCxnSpPr>
+          <p:cNvPr id="35" name="s9-chart-separator-2"/>
+          <p:cNvCxnSpPr/>
+          <p:nvPr/>
+        </p:nvCxnSpPr>
+        <p:spPr>
+          <a:xfrm xmlns:a="http://schemas.openxmlformats.org/drawingml/2006/main">
+            <a:off x="8058150" y="1866900"/>
+            <a:ext cx="953" cy="3143250"/>
+          </a:xfrm>
+          <a:prstGeom xmlns:a="http://schemas.openxmlformats.org/drawingml/2006/main" prst="straightConnector1">
+            <a:avLst/>
+          </a:prstGeom>
+          <a:ln xmlns:a="http://schemas.openxmlformats.org/drawingml/2006/main" w="19050">
+            <a:solidFill>
+              <a:srgbClr val="EDEFF3"/>
+            </a:solidFill>
+            <a:prstDash val="solid"/>
+          </a:ln>
+        </p:spPr>
+      </p:cxnSp>
+      <p:sp>
+        <p:nvSpPr>
+          <p:cNvPr id="11" name="s9-modes-band">
+            <a:extLst xmlns:a="http://schemas.openxmlformats.org/drawingml/2006/main">
+              <a:ext uri="{FF2B5EF4-FFF2-40B4-BE49-F238E27FC236}">
+                <a16:creationId xmlns:a16="http://schemas.microsoft.com/office/drawing/2014/main" id="{C221DFD1-511B-4914-8193-A106F47AFAD0}"/>
+              </a:ext>
+            </a:extLst>
+          </p:cNvPr>
+          <p:cNvSpPr>
+            <a:spLocks xmlns:a="http://schemas.openxmlformats.org/drawingml/2006/main" noGrp="1"/>
+          </p:cNvSpPr>
+          <p:nvPr/>
+        </p:nvSpPr>
+        <p:spPr>
+          <a:xfrm xmlns:a="http://schemas.openxmlformats.org/drawingml/2006/main">
+            <a:off x="552450" y="5219700"/>
+            <a:ext cx="11087100" cy="781050"/>
           </a:xfrm>
           <a:prstGeom xmlns:a="http://schemas.openxmlformats.org/drawingml/2006/main" prst="roundRect">
             <a:avLst>
-              <a:gd name="adj" fmla="val 2312"/>
+              <a:gd name="adj" fmla="val 9756"/>
             </a:avLst>
           </a:prstGeom>
           <a:solidFill xmlns:a="http://schemas.openxmlformats.org/drawingml/2006/main">
-            <a:srgbClr val="EAF1FF"/>
+            <a:srgbClr val="061B3D"/>
           </a:solidFill>
           <a:ln xmlns:a="http://schemas.openxmlformats.org/drawingml/2006/main" w="0">
             <a:solidFill>
-              <a:srgbClr val="EAF1FF"/>
+              <a:srgbClr val="061B3D"/>
             </a:solidFill>
             <a:prstDash val="solid"/>
           </a:ln>
@@ -13924,35 +16563,125 @@
       </p:sp>
       <p:sp>
         <p:nvSpPr>
-          <p:cNvPr id="4" name="s10-tests-k">
-            <a:extLst xmlns:a="http://schemas.openxmlformats.org/drawingml/2006/main">
-              <a:ext uri="{FF2B5EF4-FFF2-40B4-BE49-F238E27FC236}">
-                <a16:creationId xmlns:a16="http://schemas.microsoft.com/office/drawing/2014/main" id="{BBB08101-AB41-4029-BC89-345D3818BCC7}"/>
-              </a:ext>
-            </a:extLst>
-          </p:cNvPr>
-          <p:cNvSpPr>
-            <a:spLocks xmlns:a="http://schemas.openxmlformats.org/drawingml/2006/main" noGrp="1"/>
-          </p:cNvSpPr>
-          <p:nvPr/>
-        </p:nvSpPr>
-        <p:spPr>
-          <a:xfrm xmlns:a="http://schemas.openxmlformats.org/drawingml/2006/main">
-            <a:off x="819150" y="1981200"/>
-            <a:ext cx="2762250" cy="228600"/>
-          </a:xfrm>
-          <a:prstGeom xmlns:a="http://schemas.openxmlformats.org/drawingml/2006/main" prst="rect">
-            <a:avLst/>
-          </a:prstGeom>
-        </p:spPr>
-        <p:txBody>
-          <a:bodyPr xmlns:a="http://schemas.openxmlformats.org/drawingml/2006/main" wrap="square" lIns="0" tIns="0" rIns="0" bIns="0" anchor="t">
-            <a:noAutofit/>
-          </a:bodyPr>
-          <a:lstStyle xmlns:a="http://schemas.openxmlformats.org/drawingml/2006/main"/>
-          <a:p xmlns:a="http://schemas.openxmlformats.org/drawingml/2006/main">
-            <a:pPr algn="l">
-              <a:defRPr sz="1125" b="1">
+          <p:cNvPr id="12" name="s9-mode-local-k">
+            <a:extLst xmlns:a="http://schemas.openxmlformats.org/drawingml/2006/main">
+              <a:ext uri="{FF2B5EF4-FFF2-40B4-BE49-F238E27FC236}">
+                <a16:creationId xmlns:a16="http://schemas.microsoft.com/office/drawing/2014/main" id="{DB0A733C-9901-42F3-97E6-CECEDB5A05A1}"/>
+              </a:ext>
+            </a:extLst>
+          </p:cNvPr>
+          <p:cNvSpPr>
+            <a:spLocks xmlns:a="http://schemas.openxmlformats.org/drawingml/2006/main" noGrp="1"/>
+          </p:cNvSpPr>
+          <p:nvPr/>
+        </p:nvSpPr>
+        <p:spPr>
+          <a:xfrm xmlns:a="http://schemas.openxmlformats.org/drawingml/2006/main">
+            <a:off x="781050" y="5353050"/>
+            <a:ext cx="1809750" cy="209550"/>
+          </a:xfrm>
+          <a:prstGeom xmlns:a="http://schemas.openxmlformats.org/drawingml/2006/main" prst="rect">
+            <a:avLst/>
+          </a:prstGeom>
+        </p:spPr>
+        <p:txBody>
+          <a:bodyPr xmlns:a="http://schemas.openxmlformats.org/drawingml/2006/main" wrap="square" lIns="0" tIns="0" rIns="0" bIns="0" anchor="t">
+            <a:noAutofit/>
+          </a:bodyPr>
+          <a:lstStyle xmlns:a="http://schemas.openxmlformats.org/drawingml/2006/main"/>
+          <a:p xmlns:a="http://schemas.openxmlformats.org/drawingml/2006/main">
+            <a:pPr algn="l">
+              <a:defRPr sz="975" b="1">
+                <a:solidFill>
+                  <a:srgbClr val="13B7D5"/>
+                </a:solidFill>
+                <a:latin typeface="Arial"/>
+                <a:ea typeface="Arial"/>
+                <a:cs typeface="Arial"/>
+              </a:defRPr>
+            </a:pPr>
+            <a:r>
+              <a:t>SMALL LOCAL</a:t>
+            </a:r>
+          </a:p>
+        </p:txBody>
+      </p:sp>
+      <p:sp>
+        <p:nvSpPr>
+          <p:cNvPr id="13" name="s9-mode-local-v">
+            <a:extLst xmlns:a="http://schemas.openxmlformats.org/drawingml/2006/main">
+              <a:ext uri="{FF2B5EF4-FFF2-40B4-BE49-F238E27FC236}">
+                <a16:creationId xmlns:a16="http://schemas.microsoft.com/office/drawing/2014/main" id="{418A70FB-FD66-4A95-913B-1548D71B449D}"/>
+              </a:ext>
+            </a:extLst>
+          </p:cNvPr>
+          <p:cNvSpPr>
+            <a:spLocks xmlns:a="http://schemas.openxmlformats.org/drawingml/2006/main" noGrp="1"/>
+          </p:cNvSpPr>
+          <p:nvPr/>
+        </p:nvSpPr>
+        <p:spPr>
+          <a:xfrm xmlns:a="http://schemas.openxmlformats.org/drawingml/2006/main">
+            <a:off x="781050" y="5619750"/>
+            <a:ext cx="1809750" cy="228600"/>
+          </a:xfrm>
+          <a:prstGeom xmlns:a="http://schemas.openxmlformats.org/drawingml/2006/main" prst="rect">
+            <a:avLst/>
+          </a:prstGeom>
+        </p:spPr>
+        <p:txBody>
+          <a:bodyPr xmlns:a="http://schemas.openxmlformats.org/drawingml/2006/main" wrap="square" lIns="0" tIns="0" rIns="0" bIns="0" anchor="t">
+            <a:noAutofit/>
+          </a:bodyPr>
+          <a:lstStyle xmlns:a="http://schemas.openxmlformats.org/drawingml/2006/main"/>
+          <a:p xmlns:a="http://schemas.openxmlformats.org/drawingml/2006/main">
+            <a:pPr algn="l">
+              <a:defRPr sz="1275" b="1">
+                <a:solidFill>
+                  <a:srgbClr val="FFFFFF"/>
+                </a:solidFill>
+                <a:latin typeface="Consolas"/>
+                <a:ea typeface="Consolas"/>
+                <a:cs typeface="Consolas"/>
+              </a:defRPr>
+            </a:pPr>
+            <a:r>
+              <a:t>route-lite</a:t>
+            </a:r>
+          </a:p>
+        </p:txBody>
+      </p:sp>
+      <p:sp>
+        <p:nvSpPr>
+          <p:cNvPr id="14" name="s9-mode-cross-k">
+            <a:extLst xmlns:a="http://schemas.openxmlformats.org/drawingml/2006/main">
+              <a:ext uri="{FF2B5EF4-FFF2-40B4-BE49-F238E27FC236}">
+                <a16:creationId xmlns:a16="http://schemas.microsoft.com/office/drawing/2014/main" id="{985FCF29-A4A2-45B3-8CEB-2D67B19C7CE9}"/>
+              </a:ext>
+            </a:extLst>
+          </p:cNvPr>
+          <p:cNvSpPr>
+            <a:spLocks xmlns:a="http://schemas.openxmlformats.org/drawingml/2006/main" noGrp="1"/>
+          </p:cNvSpPr>
+          <p:nvPr/>
+        </p:nvSpPr>
+        <p:spPr>
+          <a:xfrm xmlns:a="http://schemas.openxmlformats.org/drawingml/2006/main">
+            <a:off x="3219450" y="5353050"/>
+            <a:ext cx="1905000" cy="209550"/>
+          </a:xfrm>
+          <a:prstGeom xmlns:a="http://schemas.openxmlformats.org/drawingml/2006/main" prst="rect">
+            <a:avLst/>
+          </a:prstGeom>
+        </p:spPr>
+        <p:txBody>
+          <a:bodyPr xmlns:a="http://schemas.openxmlformats.org/drawingml/2006/main" wrap="square" lIns="0" tIns="0" rIns="0" bIns="0" anchor="t">
+            <a:noAutofit/>
+          </a:bodyPr>
+          <a:lstStyle xmlns:a="http://schemas.openxmlformats.org/drawingml/2006/main"/>
+          <a:p xmlns:a="http://schemas.openxmlformats.org/drawingml/2006/main">
+            <a:pPr algn="l">
+              <a:defRPr sz="975" b="1">
                 <a:solidFill>
                   <a:srgbClr val="1677FF"/>
                 </a:solidFill>
@@ -13962,111 +16691,246 @@
               </a:defRPr>
             </a:pPr>
             <a:r>
-              <a:t>PRODUCT TESTS</a:t>
-            </a:r>
-          </a:p>
-        </p:txBody>
-      </p:sp>
-      <p:sp>
-        <p:nvSpPr>
-          <p:cNvPr id="5" name="s10-tests-stat">
-            <a:extLst xmlns:a="http://schemas.openxmlformats.org/drawingml/2006/main">
-              <a:ext uri="{FF2B5EF4-FFF2-40B4-BE49-F238E27FC236}">
-                <a16:creationId xmlns:a16="http://schemas.microsoft.com/office/drawing/2014/main" id="{F6F41FEE-FC87-4F29-A315-7F1E83DE3AAA}"/>
-              </a:ext>
-            </a:extLst>
-          </p:cNvPr>
-          <p:cNvSpPr>
-            <a:spLocks xmlns:a="http://schemas.openxmlformats.org/drawingml/2006/main" noGrp="1"/>
-          </p:cNvSpPr>
-          <p:nvPr/>
-        </p:nvSpPr>
-        <p:spPr>
-          <a:xfrm xmlns:a="http://schemas.openxmlformats.org/drawingml/2006/main">
-            <a:off x="819150" y="2324100"/>
-            <a:ext cx="1714500" cy="685800"/>
-          </a:xfrm>
-          <a:prstGeom xmlns:a="http://schemas.openxmlformats.org/drawingml/2006/main" prst="rect">
-            <a:avLst/>
-          </a:prstGeom>
-        </p:spPr>
-        <p:txBody>
-          <a:bodyPr xmlns:a="http://schemas.openxmlformats.org/drawingml/2006/main" wrap="square" lIns="0" tIns="0" rIns="0" bIns="0" anchor="t">
-            <a:noAutofit/>
-          </a:bodyPr>
-          <a:lstStyle xmlns:a="http://schemas.openxmlformats.org/drawingml/2006/main"/>
-          <a:p xmlns:a="http://schemas.openxmlformats.org/drawingml/2006/main">
-            <a:pPr algn="l">
-              <a:defRPr sz="4200" b="1">
-                <a:solidFill>
-                  <a:srgbClr val="1677FF"/>
-                </a:solidFill>
-                <a:latin typeface="Arial"/>
-                <a:ea typeface="Arial"/>
-                <a:cs typeface="Arial"/>
-              </a:defRPr>
-            </a:pPr>
-            <a:r>
-              <a:t>55</a:t>
-            </a:r>
-          </a:p>
-        </p:txBody>
-      </p:sp>
-      <p:sp>
-        <p:nvSpPr>
-          <p:cNvPr id="6" name="s10-tests-label">
-            <a:extLst xmlns:a="http://schemas.openxmlformats.org/drawingml/2006/main">
-              <a:ext uri="{FF2B5EF4-FFF2-40B4-BE49-F238E27FC236}">
-                <a16:creationId xmlns:a16="http://schemas.microsoft.com/office/drawing/2014/main" id="{0FDD2325-9861-4BE4-83A0-CC5ECD9E6AFC}"/>
-              </a:ext>
-            </a:extLst>
-          </p:cNvPr>
-          <p:cNvSpPr>
-            <a:spLocks xmlns:a="http://schemas.openxmlformats.org/drawingml/2006/main" noGrp="1"/>
-          </p:cNvSpPr>
-          <p:nvPr/>
-        </p:nvSpPr>
-        <p:spPr>
-          <a:xfrm xmlns:a="http://schemas.openxmlformats.org/drawingml/2006/main">
-            <a:off x="819150" y="2990850"/>
-            <a:ext cx="2476500" cy="285750"/>
-          </a:xfrm>
-          <a:prstGeom xmlns:a="http://schemas.openxmlformats.org/drawingml/2006/main" prst="rect">
-            <a:avLst/>
-          </a:prstGeom>
-        </p:spPr>
-        <p:txBody>
-          <a:bodyPr xmlns:a="http://schemas.openxmlformats.org/drawingml/2006/main" wrap="square" lIns="0" tIns="0" rIns="0" bIns="0" anchor="t">
-            <a:noAutofit/>
-          </a:bodyPr>
-          <a:lstStyle xmlns:a="http://schemas.openxmlformats.org/drawingml/2006/main"/>
-          <a:p xmlns:a="http://schemas.openxmlformats.org/drawingml/2006/main">
-            <a:pPr algn="l">
-              <a:defRPr sz="1575" b="1">
-                <a:solidFill>
-                  <a:srgbClr val="0A1224"/>
-                </a:solidFill>
-                <a:latin typeface="Arial"/>
-                <a:ea typeface="Arial"/>
-                <a:cs typeface="Arial"/>
-              </a:defRPr>
-            </a:pPr>
-            <a:r>
-              <a:t>automated tests</a:t>
+              <a:t>CROSS-STACK</a:t>
+            </a:r>
+          </a:p>
+        </p:txBody>
+      </p:sp>
+      <p:sp>
+        <p:nvSpPr>
+          <p:cNvPr id="15" name="s9-mode-cross-v">
+            <a:extLst xmlns:a="http://schemas.openxmlformats.org/drawingml/2006/main">
+              <a:ext uri="{FF2B5EF4-FFF2-40B4-BE49-F238E27FC236}">
+                <a16:creationId xmlns:a16="http://schemas.microsoft.com/office/drawing/2014/main" id="{B9C9D85D-F41A-44B0-BB47-B2CA199866EF}"/>
+              </a:ext>
+            </a:extLst>
+          </p:cNvPr>
+          <p:cNvSpPr>
+            <a:spLocks xmlns:a="http://schemas.openxmlformats.org/drawingml/2006/main" noGrp="1"/>
+          </p:cNvSpPr>
+          <p:nvPr/>
+        </p:nvSpPr>
+        <p:spPr>
+          <a:xfrm xmlns:a="http://schemas.openxmlformats.org/drawingml/2006/main">
+            <a:off x="3219450" y="5619750"/>
+            <a:ext cx="1905000" cy="228600"/>
+          </a:xfrm>
+          <a:prstGeom xmlns:a="http://schemas.openxmlformats.org/drawingml/2006/main" prst="rect">
+            <a:avLst/>
+          </a:prstGeom>
+        </p:spPr>
+        <p:txBody>
+          <a:bodyPr xmlns:a="http://schemas.openxmlformats.org/drawingml/2006/main" wrap="square" lIns="0" tIns="0" rIns="0" bIns="0" anchor="t">
+            <a:noAutofit/>
+          </a:bodyPr>
+          <a:lstStyle xmlns:a="http://schemas.openxmlformats.org/drawingml/2006/main"/>
+          <a:p xmlns:a="http://schemas.openxmlformats.org/drawingml/2006/main">
+            <a:pPr algn="l">
+              <a:defRPr sz="1275" b="1">
+                <a:solidFill>
+                  <a:srgbClr val="FFFFFF"/>
+                </a:solidFill>
+                <a:latin typeface="Consolas"/>
+                <a:ea typeface="Consolas"/>
+                <a:cs typeface="Consolas"/>
+              </a:defRPr>
+            </a:pPr>
+            <a:r>
+              <a:t>full-palace</a:t>
+            </a:r>
+          </a:p>
+        </p:txBody>
+      </p:sp>
+      <p:sp>
+        <p:nvSpPr>
+          <p:cNvPr id="16" name="s9-mode-useful-k">
+            <a:extLst xmlns:a="http://schemas.openxmlformats.org/drawingml/2006/main">
+              <a:ext uri="{FF2B5EF4-FFF2-40B4-BE49-F238E27FC236}">
+                <a16:creationId xmlns:a16="http://schemas.microsoft.com/office/drawing/2014/main" id="{79531E16-751D-4634-B1A4-36AE4BBC955A}"/>
+              </a:ext>
+            </a:extLst>
+          </p:cNvPr>
+          <p:cNvSpPr>
+            <a:spLocks xmlns:a="http://schemas.openxmlformats.org/drawingml/2006/main" noGrp="1"/>
+          </p:cNvSpPr>
+          <p:nvPr/>
+        </p:nvSpPr>
+        <p:spPr>
+          <a:xfrm xmlns:a="http://schemas.openxmlformats.org/drawingml/2006/main">
+            <a:off x="5924550" y="5353050"/>
+            <a:ext cx="2000250" cy="209550"/>
+          </a:xfrm>
+          <a:prstGeom xmlns:a="http://schemas.openxmlformats.org/drawingml/2006/main" prst="rect">
+            <a:avLst/>
+          </a:prstGeom>
+        </p:spPr>
+        <p:txBody>
+          <a:bodyPr xmlns:a="http://schemas.openxmlformats.org/drawingml/2006/main" wrap="square" lIns="0" tIns="0" rIns="0" bIns="0" anchor="t">
+            <a:noAutofit/>
+          </a:bodyPr>
+          <a:lstStyle xmlns:a="http://schemas.openxmlformats.org/drawingml/2006/main"/>
+          <a:p xmlns:a="http://schemas.openxmlformats.org/drawingml/2006/main">
+            <a:pPr algn="l">
+              <a:defRPr sz="975" b="1">
+                <a:solidFill>
+                  <a:srgbClr val="7438F5"/>
+                </a:solidFill>
+                <a:latin typeface="Arial"/>
+                <a:ea typeface="Arial"/>
+                <a:cs typeface="Arial"/>
+              </a:defRPr>
+            </a:pPr>
+            <a:r>
+              <a:t>USEFUL MEMORY</a:t>
+            </a:r>
+          </a:p>
+        </p:txBody>
+      </p:sp>
+      <p:sp>
+        <p:nvSpPr>
+          <p:cNvPr id="17" name="s9-mode-useful-v">
+            <a:extLst xmlns:a="http://schemas.openxmlformats.org/drawingml/2006/main">
+              <a:ext uri="{FF2B5EF4-FFF2-40B4-BE49-F238E27FC236}">
+                <a16:creationId xmlns:a16="http://schemas.microsoft.com/office/drawing/2014/main" id="{4CCE0FEB-4AAA-4B62-83D6-0BA20B85DB9B}"/>
+              </a:ext>
+            </a:extLst>
+          </p:cNvPr>
+          <p:cNvSpPr>
+            <a:spLocks xmlns:a="http://schemas.openxmlformats.org/drawingml/2006/main" noGrp="1"/>
+          </p:cNvSpPr>
+          <p:nvPr/>
+        </p:nvSpPr>
+        <p:spPr>
+          <a:xfrm xmlns:a="http://schemas.openxmlformats.org/drawingml/2006/main">
+            <a:off x="5924550" y="5619750"/>
+            <a:ext cx="2000250" cy="228600"/>
+          </a:xfrm>
+          <a:prstGeom xmlns:a="http://schemas.openxmlformats.org/drawingml/2006/main" prst="rect">
+            <a:avLst/>
+          </a:prstGeom>
+        </p:spPr>
+        <p:txBody>
+          <a:bodyPr xmlns:a="http://schemas.openxmlformats.org/drawingml/2006/main" wrap="square" lIns="0" tIns="0" rIns="0" bIns="0" anchor="t">
+            <a:noAutofit/>
+          </a:bodyPr>
+          <a:lstStyle xmlns:a="http://schemas.openxmlformats.org/drawingml/2006/main"/>
+          <a:p xmlns:a="http://schemas.openxmlformats.org/drawingml/2006/main">
+            <a:pPr algn="l">
+              <a:defRPr sz="1275" b="1">
+                <a:solidFill>
+                  <a:srgbClr val="FFFFFF"/>
+                </a:solidFill>
+                <a:latin typeface="Consolas"/>
+                <a:ea typeface="Consolas"/>
+                <a:cs typeface="Consolas"/>
+              </a:defRPr>
+            </a:pPr>
+            <a:r>
+              <a:t>full-palace*</a:t>
+            </a:r>
+          </a:p>
+        </p:txBody>
+      </p:sp>
+      <p:sp>
+        <p:nvSpPr>
+          <p:cNvPr id="18" name="s9-mode-stale-k">
+            <a:extLst xmlns:a="http://schemas.openxmlformats.org/drawingml/2006/main">
+              <a:ext uri="{FF2B5EF4-FFF2-40B4-BE49-F238E27FC236}">
+                <a16:creationId xmlns:a16="http://schemas.microsoft.com/office/drawing/2014/main" id="{5324F18A-3386-45C6-8F47-81B57F1C9B8B}"/>
+              </a:ext>
+            </a:extLst>
+          </p:cNvPr>
+          <p:cNvSpPr>
+            <a:spLocks xmlns:a="http://schemas.openxmlformats.org/drawingml/2006/main" noGrp="1"/>
+          </p:cNvSpPr>
+          <p:nvPr/>
+        </p:nvSpPr>
+        <p:spPr>
+          <a:xfrm xmlns:a="http://schemas.openxmlformats.org/drawingml/2006/main">
+            <a:off x="8820150" y="5353050"/>
+            <a:ext cx="2000250" cy="209550"/>
+          </a:xfrm>
+          <a:prstGeom xmlns:a="http://schemas.openxmlformats.org/drawingml/2006/main" prst="rect">
+            <a:avLst/>
+          </a:prstGeom>
+        </p:spPr>
+        <p:txBody>
+          <a:bodyPr xmlns:a="http://schemas.openxmlformats.org/drawingml/2006/main" wrap="square" lIns="0" tIns="0" rIns="0" bIns="0" anchor="t">
+            <a:noAutofit/>
+          </a:bodyPr>
+          <a:lstStyle xmlns:a="http://schemas.openxmlformats.org/drawingml/2006/main"/>
+          <a:p xmlns:a="http://schemas.openxmlformats.org/drawingml/2006/main">
+            <a:pPr algn="l">
+              <a:defRPr sz="975" b="1">
+                <a:solidFill>
+                  <a:srgbClr val="B87712"/>
+                </a:solidFill>
+                <a:latin typeface="Arial"/>
+                <a:ea typeface="Arial"/>
+                <a:cs typeface="Arial"/>
+              </a:defRPr>
+            </a:pPr>
+            <a:r>
+              <a:t>STALE MEMORY</a:t>
+            </a:r>
+          </a:p>
+        </p:txBody>
+      </p:sp>
+      <p:sp>
+        <p:nvSpPr>
+          <p:cNvPr id="19" name="s9-mode-stale-v">
+            <a:extLst xmlns:a="http://schemas.openxmlformats.org/drawingml/2006/main">
+              <a:ext uri="{FF2B5EF4-FFF2-40B4-BE49-F238E27FC236}">
+                <a16:creationId xmlns:a16="http://schemas.microsoft.com/office/drawing/2014/main" id="{DC41B0FD-FADD-4871-94F5-6288EBFC1BBB}"/>
+              </a:ext>
+            </a:extLst>
+          </p:cNvPr>
+          <p:cNvSpPr>
+            <a:spLocks xmlns:a="http://schemas.openxmlformats.org/drawingml/2006/main" noGrp="1"/>
+          </p:cNvSpPr>
+          <p:nvPr/>
+        </p:nvSpPr>
+        <p:spPr>
+          <a:xfrm xmlns:a="http://schemas.openxmlformats.org/drawingml/2006/main">
+            <a:off x="8820150" y="5619750"/>
+            <a:ext cx="2190750" cy="228600"/>
+          </a:xfrm>
+          <a:prstGeom xmlns:a="http://schemas.openxmlformats.org/drawingml/2006/main" prst="rect">
+            <a:avLst/>
+          </a:prstGeom>
+        </p:spPr>
+        <p:txBody>
+          <a:bodyPr xmlns:a="http://schemas.openxmlformats.org/drawingml/2006/main" wrap="square" lIns="0" tIns="0" rIns="0" bIns="0" anchor="t">
+            <a:noAutofit/>
+          </a:bodyPr>
+          <a:lstStyle xmlns:a="http://schemas.openxmlformats.org/drawingml/2006/main"/>
+          <a:p xmlns:a="http://schemas.openxmlformats.org/drawingml/2006/main">
+            <a:pPr algn="l">
+              <a:defRPr sz="1275" b="1">
+                <a:solidFill>
+                  <a:srgbClr val="FFFFFF"/>
+                </a:solidFill>
+                <a:latin typeface="Consolas"/>
+                <a:ea typeface="Consolas"/>
+                <a:cs typeface="Consolas"/>
+              </a:defRPr>
+            </a:pPr>
+            <a:r>
+              <a:t>guarded-memory</a:t>
             </a:r>
           </a:p>
         </p:txBody>
       </p:sp>
       <p:cxnSp>
         <p:nvCxnSpPr>
-          <p:cNvPr id="45" name="s10-tests-rule"/>
+          <p:cNvPr id="45" name="footer-rule-9"/>
           <p:cNvCxnSpPr/>
           <p:nvPr/>
         </p:nvCxnSpPr>
         <p:spPr>
           <a:xfrm xmlns:a="http://schemas.openxmlformats.org/drawingml/2006/main">
-            <a:off x="819150" y="3429000"/>
-            <a:ext cx="2762250" cy="953"/>
+            <a:off x="400050" y="6162675"/>
+            <a:ext cx="11391900" cy="953"/>
           </a:xfrm>
           <a:prstGeom xmlns:a="http://schemas.openxmlformats.org/drawingml/2006/main" prst="straightConnector1">
             <a:avLst/>
@@ -14081,1160 +16945,10 @@
       </p:cxnSp>
       <p:sp>
         <p:nvSpPr>
-          <p:cNvPr id="8" name="s10-tests-body">
-            <a:extLst xmlns:a="http://schemas.openxmlformats.org/drawingml/2006/main">
-              <a:ext uri="{FF2B5EF4-FFF2-40B4-BE49-F238E27FC236}">
-                <a16:creationId xmlns:a16="http://schemas.microsoft.com/office/drawing/2014/main" id="{CA42AB97-FF74-469C-A374-03AB5F51B63E}"/>
-              </a:ext>
-            </a:extLst>
-          </p:cNvPr>
-          <p:cNvSpPr>
-            <a:spLocks xmlns:a="http://schemas.openxmlformats.org/drawingml/2006/main" noGrp="1"/>
-          </p:cNvSpPr>
-          <p:nvPr/>
-        </p:nvSpPr>
-        <p:spPr>
-          <a:xfrm xmlns:a="http://schemas.openxmlformats.org/drawingml/2006/main">
-            <a:off x="819150" y="3638550"/>
-            <a:ext cx="1200150" cy="990600"/>
-          </a:xfrm>
-          <a:prstGeom xmlns:a="http://schemas.openxmlformats.org/drawingml/2006/main" prst="rect">
-            <a:avLst/>
-          </a:prstGeom>
-        </p:spPr>
-        <p:txBody>
-          <a:bodyPr xmlns:a="http://schemas.openxmlformats.org/drawingml/2006/main" wrap="square" lIns="0" tIns="0" rIns="0" bIns="0" anchor="t">
-            <a:noAutofit/>
-          </a:bodyPr>
-          <a:lstStyle xmlns:a="http://schemas.openxmlformats.org/drawingml/2006/main"/>
-          <a:p xmlns:a="http://schemas.openxmlformats.org/drawingml/2006/main">
-            <a:pPr algn="l">
-              <a:defRPr sz="1500" b="0">
-                <a:solidFill>
-                  <a:srgbClr val="0A1224"/>
-                </a:solidFill>
-                <a:latin typeface="Consolas"/>
-                <a:ea typeface="Consolas"/>
-                <a:cs typeface="Consolas"/>
-              </a:defRPr>
-            </a:pPr>
-            <a:r>
-              <a:t>51  Core
- 2  CLI
- 2  MCP</a:t>
-            </a:r>
-          </a:p>
-        </p:txBody>
-      </p:sp>
-      <p:sp>
-        <p:nvSpPr>
-          <p:cNvPr id="9" name="s10-test-d1">
-            <a:extLst xmlns:a="http://schemas.openxmlformats.org/drawingml/2006/main">
-              <a:ext uri="{FF2B5EF4-FFF2-40B4-BE49-F238E27FC236}">
-                <a16:creationId xmlns:a16="http://schemas.microsoft.com/office/drawing/2014/main" id="{F8BCB956-ECE1-4215-B5EB-287D79444276}"/>
-              </a:ext>
-            </a:extLst>
-          </p:cNvPr>
-          <p:cNvSpPr>
-            <a:spLocks xmlns:a="http://schemas.openxmlformats.org/drawingml/2006/main" noGrp="1"/>
-          </p:cNvSpPr>
-          <p:nvPr/>
-        </p:nvSpPr>
-        <p:spPr>
-          <a:xfrm xmlns:a="http://schemas.openxmlformats.org/drawingml/2006/main">
-            <a:off x="2152650" y="3705225"/>
-            <a:ext cx="95250" cy="95250"/>
-          </a:xfrm>
-          <a:prstGeom xmlns:a="http://schemas.openxmlformats.org/drawingml/2006/main" prst="ellipse">
-            <a:avLst/>
-          </a:prstGeom>
-          <a:solidFill xmlns:a="http://schemas.openxmlformats.org/drawingml/2006/main">
-            <a:srgbClr val="15A777"/>
-          </a:solidFill>
-          <a:ln xmlns:a="http://schemas.openxmlformats.org/drawingml/2006/main" w="0">
-            <a:solidFill>
-              <a:srgbClr val="15A777"/>
-            </a:solidFill>
-            <a:prstDash val="solid"/>
-          </a:ln>
-        </p:spPr>
-      </p:sp>
-      <p:sp>
-        <p:nvSpPr>
-          <p:cNvPr id="10" name="s10-test-d2">
-            <a:extLst xmlns:a="http://schemas.openxmlformats.org/drawingml/2006/main">
-              <a:ext uri="{FF2B5EF4-FFF2-40B4-BE49-F238E27FC236}">
-                <a16:creationId xmlns:a16="http://schemas.microsoft.com/office/drawing/2014/main" id="{14DCB556-A5AB-4FEB-89A0-51D5C4991923}"/>
-              </a:ext>
-            </a:extLst>
-          </p:cNvPr>
-          <p:cNvSpPr>
-            <a:spLocks xmlns:a="http://schemas.openxmlformats.org/drawingml/2006/main" noGrp="1"/>
-          </p:cNvSpPr>
-          <p:nvPr/>
-        </p:nvSpPr>
-        <p:spPr>
-          <a:xfrm xmlns:a="http://schemas.openxmlformats.org/drawingml/2006/main">
-            <a:off x="2152650" y="4067175"/>
-            <a:ext cx="95250" cy="95250"/>
-          </a:xfrm>
-          <a:prstGeom xmlns:a="http://schemas.openxmlformats.org/drawingml/2006/main" prst="ellipse">
-            <a:avLst/>
-          </a:prstGeom>
-          <a:solidFill xmlns:a="http://schemas.openxmlformats.org/drawingml/2006/main">
-            <a:srgbClr val="15A777"/>
-          </a:solidFill>
-          <a:ln xmlns:a="http://schemas.openxmlformats.org/drawingml/2006/main" w="0">
-            <a:solidFill>
-              <a:srgbClr val="15A777"/>
-            </a:solidFill>
-            <a:prstDash val="solid"/>
-          </a:ln>
-        </p:spPr>
-      </p:sp>
-      <p:sp>
-        <p:nvSpPr>
-          <p:cNvPr id="11" name="s10-test-d3">
-            <a:extLst xmlns:a="http://schemas.openxmlformats.org/drawingml/2006/main">
-              <a:ext uri="{FF2B5EF4-FFF2-40B4-BE49-F238E27FC236}">
-                <a16:creationId xmlns:a16="http://schemas.microsoft.com/office/drawing/2014/main" id="{FE9827F3-71D8-41F6-8F7C-A60011714569}"/>
-              </a:ext>
-            </a:extLst>
-          </p:cNvPr>
-          <p:cNvSpPr>
-            <a:spLocks xmlns:a="http://schemas.openxmlformats.org/drawingml/2006/main" noGrp="1"/>
-          </p:cNvSpPr>
-          <p:nvPr/>
-        </p:nvSpPr>
-        <p:spPr>
-          <a:xfrm xmlns:a="http://schemas.openxmlformats.org/drawingml/2006/main">
-            <a:off x="2152650" y="4429125"/>
-            <a:ext cx="95250" cy="95250"/>
-          </a:xfrm>
-          <a:prstGeom xmlns:a="http://schemas.openxmlformats.org/drawingml/2006/main" prst="ellipse">
-            <a:avLst/>
-          </a:prstGeom>
-          <a:solidFill xmlns:a="http://schemas.openxmlformats.org/drawingml/2006/main">
-            <a:srgbClr val="15A777"/>
-          </a:solidFill>
-          <a:ln xmlns:a="http://schemas.openxmlformats.org/drawingml/2006/main" w="0">
-            <a:solidFill>
-              <a:srgbClr val="15A777"/>
-            </a:solidFill>
-            <a:prstDash val="solid"/>
-          </a:ln>
-        </p:spPr>
-      </p:sp>
-      <p:sp>
-        <p:nvSpPr>
-          <p:cNvPr id="12" name="s10-test-g1">
-            <a:extLst xmlns:a="http://schemas.openxmlformats.org/drawingml/2006/main">
-              <a:ext uri="{FF2B5EF4-FFF2-40B4-BE49-F238E27FC236}">
-                <a16:creationId xmlns:a16="http://schemas.microsoft.com/office/drawing/2014/main" id="{92515F6E-64F4-46AA-9570-C38F584087DA}"/>
-              </a:ext>
-            </a:extLst>
-          </p:cNvPr>
-          <p:cNvSpPr>
-            <a:spLocks xmlns:a="http://schemas.openxmlformats.org/drawingml/2006/main" noGrp="1"/>
-          </p:cNvSpPr>
-          <p:nvPr/>
-        </p:nvSpPr>
-        <p:spPr>
-          <a:xfrm xmlns:a="http://schemas.openxmlformats.org/drawingml/2006/main">
-            <a:off x="2343150" y="3648075"/>
-            <a:ext cx="1238250" cy="247650"/>
-          </a:xfrm>
-          <a:prstGeom xmlns:a="http://schemas.openxmlformats.org/drawingml/2006/main" prst="rect">
-            <a:avLst/>
-          </a:prstGeom>
-        </p:spPr>
-        <p:txBody>
-          <a:bodyPr xmlns:a="http://schemas.openxmlformats.org/drawingml/2006/main" wrap="square" lIns="0" tIns="0" rIns="0" bIns="0" anchor="t">
-            <a:noAutofit/>
-          </a:bodyPr>
-          <a:lstStyle xmlns:a="http://schemas.openxmlformats.org/drawingml/2006/main"/>
-          <a:p xmlns:a="http://schemas.openxmlformats.org/drawingml/2006/main">
-            <a:pPr algn="l">
-              <a:defRPr sz="1200" b="1">
-                <a:solidFill>
-                  <a:srgbClr val="15A777"/>
-                </a:solidFill>
-                <a:latin typeface="Consolas"/>
-                <a:ea typeface="Consolas"/>
-                <a:cs typeface="Consolas"/>
-              </a:defRPr>
-            </a:pPr>
-            <a:r>
-              <a:t>Build</a:t>
-            </a:r>
-          </a:p>
-        </p:txBody>
-      </p:sp>
-      <p:sp>
-        <p:nvSpPr>
-          <p:cNvPr id="13" name="s10-test-g2">
-            <a:extLst xmlns:a="http://schemas.openxmlformats.org/drawingml/2006/main">
-              <a:ext uri="{FF2B5EF4-FFF2-40B4-BE49-F238E27FC236}">
-                <a16:creationId xmlns:a16="http://schemas.microsoft.com/office/drawing/2014/main" id="{2BB8EABA-AA3A-46FD-9E00-4BFE31712A59}"/>
-              </a:ext>
-            </a:extLst>
-          </p:cNvPr>
-          <p:cNvSpPr>
-            <a:spLocks xmlns:a="http://schemas.openxmlformats.org/drawingml/2006/main" noGrp="1"/>
-          </p:cNvSpPr>
-          <p:nvPr/>
-        </p:nvSpPr>
-        <p:spPr>
-          <a:xfrm xmlns:a="http://schemas.openxmlformats.org/drawingml/2006/main">
-            <a:off x="2343150" y="4010025"/>
-            <a:ext cx="1238250" cy="247650"/>
-          </a:xfrm>
-          <a:prstGeom xmlns:a="http://schemas.openxmlformats.org/drawingml/2006/main" prst="rect">
-            <a:avLst/>
-          </a:prstGeom>
-        </p:spPr>
-        <p:txBody>
-          <a:bodyPr xmlns:a="http://schemas.openxmlformats.org/drawingml/2006/main" wrap="square" lIns="0" tIns="0" rIns="0" bIns="0" anchor="t">
-            <a:noAutofit/>
-          </a:bodyPr>
-          <a:lstStyle xmlns:a="http://schemas.openxmlformats.org/drawingml/2006/main"/>
-          <a:p xmlns:a="http://schemas.openxmlformats.org/drawingml/2006/main">
-            <a:pPr algn="l">
-              <a:defRPr sz="1200" b="1">
-                <a:solidFill>
-                  <a:srgbClr val="15A777"/>
-                </a:solidFill>
-                <a:latin typeface="Consolas"/>
-                <a:ea typeface="Consolas"/>
-                <a:cs typeface="Consolas"/>
-              </a:defRPr>
-            </a:pPr>
-            <a:r>
-              <a:t>TS lint</a:t>
-            </a:r>
-          </a:p>
-        </p:txBody>
-      </p:sp>
-      <p:sp>
-        <p:nvSpPr>
-          <p:cNvPr id="14" name="s10-test-g3">
-            <a:extLst xmlns:a="http://schemas.openxmlformats.org/drawingml/2006/main">
-              <a:ext uri="{FF2B5EF4-FFF2-40B4-BE49-F238E27FC236}">
-                <a16:creationId xmlns:a16="http://schemas.microsoft.com/office/drawing/2014/main" id="{72739A07-604D-42A9-BD9C-CB56DB84AE28}"/>
-              </a:ext>
-            </a:extLst>
-          </p:cNvPr>
-          <p:cNvSpPr>
-            <a:spLocks xmlns:a="http://schemas.openxmlformats.org/drawingml/2006/main" noGrp="1"/>
-          </p:cNvSpPr>
-          <p:nvPr/>
-        </p:nvSpPr>
-        <p:spPr>
-          <a:xfrm xmlns:a="http://schemas.openxmlformats.org/drawingml/2006/main">
-            <a:off x="2343150" y="4371975"/>
-            <a:ext cx="1409700" cy="247650"/>
-          </a:xfrm>
-          <a:prstGeom xmlns:a="http://schemas.openxmlformats.org/drawingml/2006/main" prst="rect">
-            <a:avLst/>
-          </a:prstGeom>
-        </p:spPr>
-        <p:txBody>
-          <a:bodyPr xmlns:a="http://schemas.openxmlformats.org/drawingml/2006/main" wrap="square" lIns="0" tIns="0" rIns="0" bIns="0" anchor="t">
-            <a:noAutofit/>
-          </a:bodyPr>
-          <a:lstStyle xmlns:a="http://schemas.openxmlformats.org/drawingml/2006/main"/>
-          <a:p xmlns:a="http://schemas.openxmlformats.org/drawingml/2006/main">
-            <a:pPr algn="l">
-              <a:defRPr sz="1050" b="1">
-                <a:solidFill>
-                  <a:srgbClr val="15A777"/>
-                </a:solidFill>
-                <a:latin typeface="Consolas"/>
-                <a:ea typeface="Consolas"/>
-                <a:cs typeface="Consolas"/>
-              </a:defRPr>
-            </a:pPr>
-            <a:r>
-              <a:t>MCP smoke: 10 tools</a:t>
-            </a:r>
-          </a:p>
-        </p:txBody>
-      </p:sp>
-      <p:sp>
-        <p:nvSpPr>
-          <p:cNvPr id="15" name="s10-tests-foot">
-            <a:extLst xmlns:a="http://schemas.openxmlformats.org/drawingml/2006/main">
-              <a:ext uri="{FF2B5EF4-FFF2-40B4-BE49-F238E27FC236}">
-                <a16:creationId xmlns:a16="http://schemas.microsoft.com/office/drawing/2014/main" id="{52C094A7-996A-49C1-BF89-9BAEAE756436}"/>
-              </a:ext>
-            </a:extLst>
-          </p:cNvPr>
-          <p:cNvSpPr>
-            <a:spLocks xmlns:a="http://schemas.openxmlformats.org/drawingml/2006/main" noGrp="1"/>
-          </p:cNvSpPr>
-          <p:nvPr/>
-        </p:nvSpPr>
-        <p:spPr>
-          <a:xfrm xmlns:a="http://schemas.openxmlformats.org/drawingml/2006/main">
-            <a:off x="819150" y="4914900"/>
-            <a:ext cx="2762250" cy="285750"/>
-          </a:xfrm>
-          <a:prstGeom xmlns:a="http://schemas.openxmlformats.org/drawingml/2006/main" prst="rect">
-            <a:avLst/>
-          </a:prstGeom>
-        </p:spPr>
-        <p:txBody>
-          <a:bodyPr xmlns:a="http://schemas.openxmlformats.org/drawingml/2006/main" wrap="square" lIns="0" tIns="0" rIns="0" bIns="0" anchor="t">
-            <a:noAutofit/>
-          </a:bodyPr>
-          <a:lstStyle xmlns:a="http://schemas.openxmlformats.org/drawingml/2006/main"/>
-          <a:p xmlns:a="http://schemas.openxmlformats.org/drawingml/2006/main">
-            <a:pPr algn="l">
-              <a:defRPr sz="1275" b="1">
-                <a:solidFill>
-                  <a:srgbClr val="0A1224"/>
-                </a:solidFill>
-                <a:latin typeface="Arial"/>
-                <a:ea typeface="Arial"/>
-                <a:cs typeface="Arial"/>
-              </a:defRPr>
-            </a:pPr>
-            <a:r>
-              <a:t>Release-routing matrix passed</a:t>
-            </a:r>
-          </a:p>
-        </p:txBody>
-      </p:sp>
-      <p:sp>
-        <p:nvSpPr>
-          <p:cNvPr id="16" name="s10-ci">
-            <a:extLst xmlns:a="http://schemas.openxmlformats.org/drawingml/2006/main">
-              <a:ext uri="{FF2B5EF4-FFF2-40B4-BE49-F238E27FC236}">
-                <a16:creationId xmlns:a16="http://schemas.microsoft.com/office/drawing/2014/main" id="{AF425BCD-C7B2-4D99-91DB-68A71392E2DF}"/>
-              </a:ext>
-            </a:extLst>
-          </p:cNvPr>
-          <p:cNvSpPr>
-            <a:spLocks xmlns:a="http://schemas.openxmlformats.org/drawingml/2006/main" noGrp="1"/>
-          </p:cNvSpPr>
-          <p:nvPr/>
-        </p:nvSpPr>
-        <p:spPr>
-          <a:xfrm xmlns:a="http://schemas.openxmlformats.org/drawingml/2006/main">
-            <a:off x="4114800" y="1695450"/>
-            <a:ext cx="3543300" cy="3771900"/>
-          </a:xfrm>
-          <a:prstGeom xmlns:a="http://schemas.openxmlformats.org/drawingml/2006/main" prst="roundRect">
-            <a:avLst>
-              <a:gd name="adj" fmla="val 2151"/>
-            </a:avLst>
-          </a:prstGeom>
-          <a:solidFill xmlns:a="http://schemas.openxmlformats.org/drawingml/2006/main">
-            <a:srgbClr val="EDEFF3"/>
-          </a:solidFill>
-          <a:ln xmlns:a="http://schemas.openxmlformats.org/drawingml/2006/main" w="0">
-            <a:solidFill>
-              <a:srgbClr val="EDEFF3"/>
-            </a:solidFill>
-            <a:prstDash val="solid"/>
-          </a:ln>
-        </p:spPr>
-      </p:sp>
-      <p:sp>
-        <p:nvSpPr>
-          <p:cNvPr id="17" name="s10-ci-k">
-            <a:extLst xmlns:a="http://schemas.openxmlformats.org/drawingml/2006/main">
-              <a:ext uri="{FF2B5EF4-FFF2-40B4-BE49-F238E27FC236}">
-                <a16:creationId xmlns:a16="http://schemas.microsoft.com/office/drawing/2014/main" id="{2C2DC9B0-86D5-4EBF-8CFF-B6D0B684BCEA}"/>
-              </a:ext>
-            </a:extLst>
-          </p:cNvPr>
-          <p:cNvSpPr>
-            <a:spLocks xmlns:a="http://schemas.openxmlformats.org/drawingml/2006/main" noGrp="1"/>
-          </p:cNvSpPr>
-          <p:nvPr/>
-        </p:nvSpPr>
-        <p:spPr>
-          <a:xfrm xmlns:a="http://schemas.openxmlformats.org/drawingml/2006/main">
-            <a:off x="4381500" y="1981200"/>
-            <a:ext cx="3009900" cy="228600"/>
-          </a:xfrm>
-          <a:prstGeom xmlns:a="http://schemas.openxmlformats.org/drawingml/2006/main" prst="rect">
-            <a:avLst/>
-          </a:prstGeom>
-        </p:spPr>
-        <p:txBody>
-          <a:bodyPr xmlns:a="http://schemas.openxmlformats.org/drawingml/2006/main" wrap="square" lIns="0" tIns="0" rIns="0" bIns="0" anchor="t">
-            <a:noAutofit/>
-          </a:bodyPr>
-          <a:lstStyle xmlns:a="http://schemas.openxmlformats.org/drawingml/2006/main"/>
-          <a:p xmlns:a="http://schemas.openxmlformats.org/drawingml/2006/main">
-            <a:pPr algn="l">
-              <a:defRPr sz="1125" b="1">
-                <a:solidFill>
-                  <a:srgbClr val="526071"/>
-                </a:solidFill>
-                <a:latin typeface="Arial"/>
-                <a:ea typeface="Arial"/>
-                <a:cs typeface="Arial"/>
-              </a:defRPr>
-            </a:pPr>
-            <a:r>
-              <a:t>GITHUB ACTIONS</a:t>
-            </a:r>
-          </a:p>
-        </p:txBody>
-      </p:sp>
-      <p:sp>
-        <p:nvSpPr>
-          <p:cNvPr id="18" name="s10-ci-stat">
-            <a:extLst xmlns:a="http://schemas.openxmlformats.org/drawingml/2006/main">
-              <a:ext uri="{FF2B5EF4-FFF2-40B4-BE49-F238E27FC236}">
-                <a16:creationId xmlns:a16="http://schemas.microsoft.com/office/drawing/2014/main" id="{7D487BF7-2410-44BF-A2DE-D2114F94A0E3}"/>
-              </a:ext>
-            </a:extLst>
-          </p:cNvPr>
-          <p:cNvSpPr>
-            <a:spLocks xmlns:a="http://schemas.openxmlformats.org/drawingml/2006/main" noGrp="1"/>
-          </p:cNvSpPr>
-          <p:nvPr/>
-        </p:nvSpPr>
-        <p:spPr>
-          <a:xfrm xmlns:a="http://schemas.openxmlformats.org/drawingml/2006/main">
-            <a:off x="4381500" y="2324100"/>
-            <a:ext cx="1714500" cy="685800"/>
-          </a:xfrm>
-          <a:prstGeom xmlns:a="http://schemas.openxmlformats.org/drawingml/2006/main" prst="rect">
-            <a:avLst/>
-          </a:prstGeom>
-        </p:spPr>
-        <p:txBody>
-          <a:bodyPr xmlns:a="http://schemas.openxmlformats.org/drawingml/2006/main" wrap="square" lIns="0" tIns="0" rIns="0" bIns="0" anchor="t">
-            <a:noAutofit/>
-          </a:bodyPr>
-          <a:lstStyle xmlns:a="http://schemas.openxmlformats.org/drawingml/2006/main"/>
-          <a:p xmlns:a="http://schemas.openxmlformats.org/drawingml/2006/main">
-            <a:pPr algn="l">
-              <a:defRPr sz="4200" b="1">
-                <a:solidFill>
-                  <a:srgbClr val="15A777"/>
-                </a:solidFill>
-                <a:latin typeface="Arial"/>
-                <a:ea typeface="Arial"/>
-                <a:cs typeface="Arial"/>
-              </a:defRPr>
-            </a:pPr>
-            <a:r>
-              <a:t>5/5</a:t>
-            </a:r>
-          </a:p>
-        </p:txBody>
-      </p:sp>
-      <p:sp>
-        <p:nvSpPr>
-          <p:cNvPr id="19" name="s10-ci-label">
-            <a:extLst xmlns:a="http://schemas.openxmlformats.org/drawingml/2006/main">
-              <a:ext uri="{FF2B5EF4-FFF2-40B4-BE49-F238E27FC236}">
-                <a16:creationId xmlns:a16="http://schemas.microsoft.com/office/drawing/2014/main" id="{07F990B7-2ED8-48F5-B22A-25B4208A47C5}"/>
-              </a:ext>
-            </a:extLst>
-          </p:cNvPr>
-          <p:cNvSpPr>
-            <a:spLocks xmlns:a="http://schemas.openxmlformats.org/drawingml/2006/main" noGrp="1"/>
-          </p:cNvSpPr>
-          <p:nvPr/>
-        </p:nvSpPr>
-        <p:spPr>
-          <a:xfrm xmlns:a="http://schemas.openxmlformats.org/drawingml/2006/main">
-            <a:off x="4381500" y="2990850"/>
-            <a:ext cx="2476500" cy="285750"/>
-          </a:xfrm>
-          <a:prstGeom xmlns:a="http://schemas.openxmlformats.org/drawingml/2006/main" prst="rect">
-            <a:avLst/>
-          </a:prstGeom>
-        </p:spPr>
-        <p:txBody>
-          <a:bodyPr xmlns:a="http://schemas.openxmlformats.org/drawingml/2006/main" wrap="square" lIns="0" tIns="0" rIns="0" bIns="0" anchor="t">
-            <a:noAutofit/>
-          </a:bodyPr>
-          <a:lstStyle xmlns:a="http://schemas.openxmlformats.org/drawingml/2006/main"/>
-          <a:p xmlns:a="http://schemas.openxmlformats.org/drawingml/2006/main">
-            <a:pPr algn="l">
-              <a:defRPr sz="1575" b="1">
-                <a:solidFill>
-                  <a:srgbClr val="0A1224"/>
-                </a:solidFill>
-                <a:latin typeface="Arial"/>
-                <a:ea typeface="Arial"/>
-                <a:cs typeface="Arial"/>
-              </a:defRPr>
-            </a:pPr>
-            <a:r>
-              <a:t>jobs passed</a:t>
-            </a:r>
-          </a:p>
-        </p:txBody>
-      </p:sp>
-      <p:cxnSp>
-        <p:nvCxnSpPr>
-          <p:cNvPr id="58" name="s10-ci-rule"/>
-          <p:cNvCxnSpPr/>
-          <p:nvPr/>
-        </p:nvCxnSpPr>
-        <p:spPr>
-          <a:xfrm xmlns:a="http://schemas.openxmlformats.org/drawingml/2006/main">
-            <a:off x="4381500" y="3429000"/>
-            <a:ext cx="3009900" cy="953"/>
-          </a:xfrm>
-          <a:prstGeom xmlns:a="http://schemas.openxmlformats.org/drawingml/2006/main" prst="straightConnector1">
-            <a:avLst/>
-          </a:prstGeom>
-          <a:ln xmlns:a="http://schemas.openxmlformats.org/drawingml/2006/main" w="9525">
-            <a:solidFill>
-              <a:srgbClr val="B8BCC4"/>
-            </a:solidFill>
-            <a:prstDash val="solid"/>
-          </a:ln>
-        </p:spPr>
-      </p:cxnSp>
-      <p:sp>
-        <p:nvSpPr>
-          <p:cNvPr id="21" name="s10-ci-d1">
-            <a:extLst xmlns:a="http://schemas.openxmlformats.org/drawingml/2006/main">
-              <a:ext uri="{FF2B5EF4-FFF2-40B4-BE49-F238E27FC236}">
-                <a16:creationId xmlns:a16="http://schemas.microsoft.com/office/drawing/2014/main" id="{CF74F625-9387-4B0F-8AA8-D69939552A17}"/>
-              </a:ext>
-            </a:extLst>
-          </p:cNvPr>
-          <p:cNvSpPr>
-            <a:spLocks xmlns:a="http://schemas.openxmlformats.org/drawingml/2006/main" noGrp="1"/>
-          </p:cNvSpPr>
-          <p:nvPr/>
-        </p:nvSpPr>
-        <p:spPr>
-          <a:xfrm xmlns:a="http://schemas.openxmlformats.org/drawingml/2006/main">
-            <a:off x="4400550" y="3714750"/>
-            <a:ext cx="114300" cy="114300"/>
-          </a:xfrm>
-          <a:prstGeom xmlns:a="http://schemas.openxmlformats.org/drawingml/2006/main" prst="ellipse">
-            <a:avLst/>
-          </a:prstGeom>
-          <a:solidFill xmlns:a="http://schemas.openxmlformats.org/drawingml/2006/main">
-            <a:srgbClr val="15A777"/>
-          </a:solidFill>
-          <a:ln xmlns:a="http://schemas.openxmlformats.org/drawingml/2006/main" w="0">
-            <a:solidFill>
-              <a:srgbClr val="15A777"/>
-            </a:solidFill>
-            <a:prstDash val="solid"/>
-          </a:ln>
-        </p:spPr>
-      </p:sp>
-      <p:sp>
-        <p:nvSpPr>
-          <p:cNvPr id="22" name="s10-ci-d2">
-            <a:extLst xmlns:a="http://schemas.openxmlformats.org/drawingml/2006/main">
-              <a:ext uri="{FF2B5EF4-FFF2-40B4-BE49-F238E27FC236}">
-                <a16:creationId xmlns:a16="http://schemas.microsoft.com/office/drawing/2014/main" id="{3C63F99D-2348-4626-955E-44619C904430}"/>
-              </a:ext>
-            </a:extLst>
-          </p:cNvPr>
-          <p:cNvSpPr>
-            <a:spLocks xmlns:a="http://schemas.openxmlformats.org/drawingml/2006/main" noGrp="1"/>
-          </p:cNvSpPr>
-          <p:nvPr/>
-        </p:nvSpPr>
-        <p:spPr>
-          <a:xfrm xmlns:a="http://schemas.openxmlformats.org/drawingml/2006/main">
-            <a:off x="4400550" y="4057650"/>
-            <a:ext cx="114300" cy="114300"/>
-          </a:xfrm>
-          <a:prstGeom xmlns:a="http://schemas.openxmlformats.org/drawingml/2006/main" prst="ellipse">
-            <a:avLst/>
-          </a:prstGeom>
-          <a:solidFill xmlns:a="http://schemas.openxmlformats.org/drawingml/2006/main">
-            <a:srgbClr val="15A777"/>
-          </a:solidFill>
-          <a:ln xmlns:a="http://schemas.openxmlformats.org/drawingml/2006/main" w="0">
-            <a:solidFill>
-              <a:srgbClr val="15A777"/>
-            </a:solidFill>
-            <a:prstDash val="solid"/>
-          </a:ln>
-        </p:spPr>
-      </p:sp>
-      <p:sp>
-        <p:nvSpPr>
-          <p:cNvPr id="23" name="s10-ci-d3">
-            <a:extLst xmlns:a="http://schemas.openxmlformats.org/drawingml/2006/main">
-              <a:ext uri="{FF2B5EF4-FFF2-40B4-BE49-F238E27FC236}">
-                <a16:creationId xmlns:a16="http://schemas.microsoft.com/office/drawing/2014/main" id="{BF5F53D7-B6AA-4CDC-B256-EDD324187AB2}"/>
-              </a:ext>
-            </a:extLst>
-          </p:cNvPr>
-          <p:cNvSpPr>
-            <a:spLocks xmlns:a="http://schemas.openxmlformats.org/drawingml/2006/main" noGrp="1"/>
-          </p:cNvSpPr>
-          <p:nvPr/>
-        </p:nvSpPr>
-        <p:spPr>
-          <a:xfrm xmlns:a="http://schemas.openxmlformats.org/drawingml/2006/main">
-            <a:off x="4400550" y="4400550"/>
-            <a:ext cx="114300" cy="114300"/>
-          </a:xfrm>
-          <a:prstGeom xmlns:a="http://schemas.openxmlformats.org/drawingml/2006/main" prst="ellipse">
-            <a:avLst/>
-          </a:prstGeom>
-          <a:solidFill xmlns:a="http://schemas.openxmlformats.org/drawingml/2006/main">
-            <a:srgbClr val="15A777"/>
-          </a:solidFill>
-          <a:ln xmlns:a="http://schemas.openxmlformats.org/drawingml/2006/main" w="0">
-            <a:solidFill>
-              <a:srgbClr val="15A777"/>
-            </a:solidFill>
-            <a:prstDash val="solid"/>
-          </a:ln>
-        </p:spPr>
-      </p:sp>
-      <p:sp>
-        <p:nvSpPr>
-          <p:cNvPr id="24" name="s10-ci-d4">
-            <a:extLst xmlns:a="http://schemas.openxmlformats.org/drawingml/2006/main">
-              <a:ext uri="{FF2B5EF4-FFF2-40B4-BE49-F238E27FC236}">
-                <a16:creationId xmlns:a16="http://schemas.microsoft.com/office/drawing/2014/main" id="{53145CD7-1131-4A1D-BFD1-B6077EDB0493}"/>
-              </a:ext>
-            </a:extLst>
-          </p:cNvPr>
-          <p:cNvSpPr>
-            <a:spLocks xmlns:a="http://schemas.openxmlformats.org/drawingml/2006/main" noGrp="1"/>
-          </p:cNvSpPr>
-          <p:nvPr/>
-        </p:nvSpPr>
-        <p:spPr>
-          <a:xfrm xmlns:a="http://schemas.openxmlformats.org/drawingml/2006/main">
-            <a:off x="4400550" y="4743450"/>
-            <a:ext cx="114300" cy="114300"/>
-          </a:xfrm>
-          <a:prstGeom xmlns:a="http://schemas.openxmlformats.org/drawingml/2006/main" prst="ellipse">
-            <a:avLst/>
-          </a:prstGeom>
-          <a:solidFill xmlns:a="http://schemas.openxmlformats.org/drawingml/2006/main">
-            <a:srgbClr val="15A777"/>
-          </a:solidFill>
-          <a:ln xmlns:a="http://schemas.openxmlformats.org/drawingml/2006/main" w="0">
-            <a:solidFill>
-              <a:srgbClr val="15A777"/>
-            </a:solidFill>
-            <a:prstDash val="solid"/>
-          </a:ln>
-        </p:spPr>
-      </p:sp>
-      <p:sp>
-        <p:nvSpPr>
-          <p:cNvPr id="25" name="s10-ci-d5">
-            <a:extLst xmlns:a="http://schemas.openxmlformats.org/drawingml/2006/main">
-              <a:ext uri="{FF2B5EF4-FFF2-40B4-BE49-F238E27FC236}">
-                <a16:creationId xmlns:a16="http://schemas.microsoft.com/office/drawing/2014/main" id="{E855F5B5-28E7-4FD1-B5EC-C652F46ED03D}"/>
-              </a:ext>
-            </a:extLst>
-          </p:cNvPr>
-          <p:cNvSpPr>
-            <a:spLocks xmlns:a="http://schemas.openxmlformats.org/drawingml/2006/main" noGrp="1"/>
-          </p:cNvSpPr>
-          <p:nvPr/>
-        </p:nvSpPr>
-        <p:spPr>
-          <a:xfrm xmlns:a="http://schemas.openxmlformats.org/drawingml/2006/main">
-            <a:off x="4400550" y="5086350"/>
-            <a:ext cx="114300" cy="114300"/>
-          </a:xfrm>
-          <a:prstGeom xmlns:a="http://schemas.openxmlformats.org/drawingml/2006/main" prst="ellipse">
-            <a:avLst/>
-          </a:prstGeom>
-          <a:solidFill xmlns:a="http://schemas.openxmlformats.org/drawingml/2006/main">
-            <a:srgbClr val="15A777"/>
-          </a:solidFill>
-          <a:ln xmlns:a="http://schemas.openxmlformats.org/drawingml/2006/main" w="0">
-            <a:solidFill>
-              <a:srgbClr val="15A777"/>
-            </a:solidFill>
-            <a:prstDash val="solid"/>
-          </a:ln>
-        </p:spPr>
-      </p:sp>
-      <p:sp>
-        <p:nvSpPr>
-          <p:cNvPr id="26" name="s10-ci-r1">
-            <a:extLst xmlns:a="http://schemas.openxmlformats.org/drawingml/2006/main">
-              <a:ext uri="{FF2B5EF4-FFF2-40B4-BE49-F238E27FC236}">
-                <a16:creationId xmlns:a16="http://schemas.microsoft.com/office/drawing/2014/main" id="{F2CBFFF7-97E5-4679-B04E-CC810C536C8A}"/>
-              </a:ext>
-            </a:extLst>
-          </p:cNvPr>
-          <p:cNvSpPr>
-            <a:spLocks xmlns:a="http://schemas.openxmlformats.org/drawingml/2006/main" noGrp="1"/>
-          </p:cNvSpPr>
-          <p:nvPr/>
-        </p:nvSpPr>
-        <p:spPr>
-          <a:xfrm xmlns:a="http://schemas.openxmlformats.org/drawingml/2006/main">
-            <a:off x="4629150" y="3648075"/>
-            <a:ext cx="2724150" cy="266700"/>
-          </a:xfrm>
-          <a:prstGeom xmlns:a="http://schemas.openxmlformats.org/drawingml/2006/main" prst="rect">
-            <a:avLst/>
-          </a:prstGeom>
-        </p:spPr>
-        <p:txBody>
-          <a:bodyPr xmlns:a="http://schemas.openxmlformats.org/drawingml/2006/main" wrap="square" lIns="0" tIns="0" rIns="0" bIns="0" anchor="t">
-            <a:noAutofit/>
-          </a:bodyPr>
-          <a:lstStyle xmlns:a="http://schemas.openxmlformats.org/drawingml/2006/main"/>
-          <a:p xmlns:a="http://schemas.openxmlformats.org/drawingml/2006/main">
-            <a:pPr algn="l">
-              <a:defRPr sz="1275" b="0">
-                <a:solidFill>
-                  <a:srgbClr val="0A1224"/>
-                </a:solidFill>
-                <a:latin typeface="Consolas"/>
-                <a:ea typeface="Consolas"/>
-                <a:cs typeface="Consolas"/>
-              </a:defRPr>
-            </a:pPr>
-            <a:r>
-              <a:t>Ubuntu / Node 20</a:t>
-            </a:r>
-          </a:p>
-        </p:txBody>
-      </p:sp>
-      <p:sp>
-        <p:nvSpPr>
-          <p:cNvPr id="27" name="s10-ci-r2">
-            <a:extLst xmlns:a="http://schemas.openxmlformats.org/drawingml/2006/main">
-              <a:ext uri="{FF2B5EF4-FFF2-40B4-BE49-F238E27FC236}">
-                <a16:creationId xmlns:a16="http://schemas.microsoft.com/office/drawing/2014/main" id="{8015FCE7-0C65-4F03-90C5-4B87011337C1}"/>
-              </a:ext>
-            </a:extLst>
-          </p:cNvPr>
-          <p:cNvSpPr>
-            <a:spLocks xmlns:a="http://schemas.openxmlformats.org/drawingml/2006/main" noGrp="1"/>
-          </p:cNvSpPr>
-          <p:nvPr/>
-        </p:nvSpPr>
-        <p:spPr>
-          <a:xfrm xmlns:a="http://schemas.openxmlformats.org/drawingml/2006/main">
-            <a:off x="4629150" y="3990975"/>
-            <a:ext cx="2724150" cy="266700"/>
-          </a:xfrm>
-          <a:prstGeom xmlns:a="http://schemas.openxmlformats.org/drawingml/2006/main" prst="rect">
-            <a:avLst/>
-          </a:prstGeom>
-        </p:spPr>
-        <p:txBody>
-          <a:bodyPr xmlns:a="http://schemas.openxmlformats.org/drawingml/2006/main" wrap="square" lIns="0" tIns="0" rIns="0" bIns="0" anchor="t">
-            <a:noAutofit/>
-          </a:bodyPr>
-          <a:lstStyle xmlns:a="http://schemas.openxmlformats.org/drawingml/2006/main"/>
-          <a:p xmlns:a="http://schemas.openxmlformats.org/drawingml/2006/main">
-            <a:pPr algn="l">
-              <a:defRPr sz="1275" b="0">
-                <a:solidFill>
-                  <a:srgbClr val="0A1224"/>
-                </a:solidFill>
-                <a:latin typeface="Consolas"/>
-                <a:ea typeface="Consolas"/>
-                <a:cs typeface="Consolas"/>
-              </a:defRPr>
-            </a:pPr>
-            <a:r>
-              <a:t>Windows / Node 20</a:t>
-            </a:r>
-          </a:p>
-        </p:txBody>
-      </p:sp>
-      <p:sp>
-        <p:nvSpPr>
-          <p:cNvPr id="28" name="s10-ci-r3">
-            <a:extLst xmlns:a="http://schemas.openxmlformats.org/drawingml/2006/main">
-              <a:ext uri="{FF2B5EF4-FFF2-40B4-BE49-F238E27FC236}">
-                <a16:creationId xmlns:a16="http://schemas.microsoft.com/office/drawing/2014/main" id="{A536BE37-C243-4C38-8704-85C24BE7ABC1}"/>
-              </a:ext>
-            </a:extLst>
-          </p:cNvPr>
-          <p:cNvSpPr>
-            <a:spLocks xmlns:a="http://schemas.openxmlformats.org/drawingml/2006/main" noGrp="1"/>
-          </p:cNvSpPr>
-          <p:nvPr/>
-        </p:nvSpPr>
-        <p:spPr>
-          <a:xfrm xmlns:a="http://schemas.openxmlformats.org/drawingml/2006/main">
-            <a:off x="4629150" y="4333875"/>
-            <a:ext cx="2724150" cy="266700"/>
-          </a:xfrm>
-          <a:prstGeom xmlns:a="http://schemas.openxmlformats.org/drawingml/2006/main" prst="rect">
-            <a:avLst/>
-          </a:prstGeom>
-        </p:spPr>
-        <p:txBody>
-          <a:bodyPr xmlns:a="http://schemas.openxmlformats.org/drawingml/2006/main" wrap="square" lIns="0" tIns="0" rIns="0" bIns="0" anchor="t">
-            <a:noAutofit/>
-          </a:bodyPr>
-          <a:lstStyle xmlns:a="http://schemas.openxmlformats.org/drawingml/2006/main"/>
-          <a:p xmlns:a="http://schemas.openxmlformats.org/drawingml/2006/main">
-            <a:pPr algn="l">
-              <a:defRPr sz="1275" b="0">
-                <a:solidFill>
-                  <a:srgbClr val="0A1224"/>
-                </a:solidFill>
-                <a:latin typeface="Consolas"/>
-                <a:ea typeface="Consolas"/>
-                <a:cs typeface="Consolas"/>
-              </a:defRPr>
-            </a:pPr>
-            <a:r>
-              <a:t>macOS / Node 20</a:t>
-            </a:r>
-          </a:p>
-        </p:txBody>
-      </p:sp>
-      <p:sp>
-        <p:nvSpPr>
-          <p:cNvPr id="29" name="s10-ci-r4">
-            <a:extLst xmlns:a="http://schemas.openxmlformats.org/drawingml/2006/main">
-              <a:ext uri="{FF2B5EF4-FFF2-40B4-BE49-F238E27FC236}">
-                <a16:creationId xmlns:a16="http://schemas.microsoft.com/office/drawing/2014/main" id="{87C31F31-80C2-4E36-A877-CEA834DBCF9B}"/>
-              </a:ext>
-            </a:extLst>
-          </p:cNvPr>
-          <p:cNvSpPr>
-            <a:spLocks xmlns:a="http://schemas.openxmlformats.org/drawingml/2006/main" noGrp="1"/>
-          </p:cNvSpPr>
-          <p:nvPr/>
-        </p:nvSpPr>
-        <p:spPr>
-          <a:xfrm xmlns:a="http://schemas.openxmlformats.org/drawingml/2006/main">
-            <a:off x="4629150" y="4676775"/>
-            <a:ext cx="2724150" cy="266700"/>
-          </a:xfrm>
-          <a:prstGeom xmlns:a="http://schemas.openxmlformats.org/drawingml/2006/main" prst="rect">
-            <a:avLst/>
-          </a:prstGeom>
-        </p:spPr>
-        <p:txBody>
-          <a:bodyPr xmlns:a="http://schemas.openxmlformats.org/drawingml/2006/main" wrap="square" lIns="0" tIns="0" rIns="0" bIns="0" anchor="t">
-            <a:noAutofit/>
-          </a:bodyPr>
-          <a:lstStyle xmlns:a="http://schemas.openxmlformats.org/drawingml/2006/main"/>
-          <a:p xmlns:a="http://schemas.openxmlformats.org/drawingml/2006/main">
-            <a:pPr algn="l">
-              <a:defRPr sz="1275" b="0">
-                <a:solidFill>
-                  <a:srgbClr val="0A1224"/>
-                </a:solidFill>
-                <a:latin typeface="Consolas"/>
-                <a:ea typeface="Consolas"/>
-                <a:cs typeface="Consolas"/>
-              </a:defRPr>
-            </a:pPr>
-            <a:r>
-              <a:t>Ubuntu / Node 24</a:t>
-            </a:r>
-          </a:p>
-        </p:txBody>
-      </p:sp>
-      <p:sp>
-        <p:nvSpPr>
-          <p:cNvPr id="30" name="s10-ci-r5">
-            <a:extLst xmlns:a="http://schemas.openxmlformats.org/drawingml/2006/main">
-              <a:ext uri="{FF2B5EF4-FFF2-40B4-BE49-F238E27FC236}">
-                <a16:creationId xmlns:a16="http://schemas.microsoft.com/office/drawing/2014/main" id="{E1CA3675-6B20-4608-8363-E29E306F82B9}"/>
-              </a:ext>
-            </a:extLst>
-          </p:cNvPr>
-          <p:cNvSpPr>
-            <a:spLocks xmlns:a="http://schemas.openxmlformats.org/drawingml/2006/main" noGrp="1"/>
-          </p:cNvSpPr>
-          <p:nvPr/>
-        </p:nvSpPr>
-        <p:spPr>
-          <a:xfrm xmlns:a="http://schemas.openxmlformats.org/drawingml/2006/main">
-            <a:off x="4629150" y="5019675"/>
-            <a:ext cx="2724150" cy="266700"/>
-          </a:xfrm>
-          <a:prstGeom xmlns:a="http://schemas.openxmlformats.org/drawingml/2006/main" prst="rect">
-            <a:avLst/>
-          </a:prstGeom>
-        </p:spPr>
-        <p:txBody>
-          <a:bodyPr xmlns:a="http://schemas.openxmlformats.org/drawingml/2006/main" wrap="square" lIns="0" tIns="0" rIns="0" bIns="0" anchor="t">
-            <a:noAutofit/>
-          </a:bodyPr>
-          <a:lstStyle xmlns:a="http://schemas.openxmlformats.org/drawingml/2006/main"/>
-          <a:p xmlns:a="http://schemas.openxmlformats.org/drawingml/2006/main">
-            <a:pPr algn="l">
-              <a:defRPr sz="1275" b="0">
-                <a:solidFill>
-                  <a:srgbClr val="0A1224"/>
-                </a:solidFill>
-                <a:latin typeface="Consolas"/>
-                <a:ea typeface="Consolas"/>
-                <a:cs typeface="Consolas"/>
-              </a:defRPr>
-            </a:pPr>
-            <a:r>
-              <a:t>npm package dry run</a:t>
-            </a:r>
-          </a:p>
-        </p:txBody>
-      </p:sp>
-      <p:sp>
-        <p:nvSpPr>
-          <p:cNvPr id="31" name="s10-release">
-            <a:extLst xmlns:a="http://schemas.openxmlformats.org/drawingml/2006/main">
-              <a:ext uri="{FF2B5EF4-FFF2-40B4-BE49-F238E27FC236}">
-                <a16:creationId xmlns:a16="http://schemas.microsoft.com/office/drawing/2014/main" id="{64142208-C5D0-453D-ACB5-20858A4CCCD2}"/>
-              </a:ext>
-            </a:extLst>
-          </p:cNvPr>
-          <p:cNvSpPr>
-            <a:spLocks xmlns:a="http://schemas.openxmlformats.org/drawingml/2006/main" noGrp="1"/>
-          </p:cNvSpPr>
-          <p:nvPr/>
-        </p:nvSpPr>
-        <p:spPr>
-          <a:xfrm xmlns:a="http://schemas.openxmlformats.org/drawingml/2006/main">
-            <a:off x="7924800" y="1695450"/>
-            <a:ext cx="3714750" cy="3771900"/>
-          </a:xfrm>
-          <a:prstGeom xmlns:a="http://schemas.openxmlformats.org/drawingml/2006/main" prst="roundRect">
-            <a:avLst>
-              <a:gd name="adj" fmla="val 2051"/>
-            </a:avLst>
-          </a:prstGeom>
-          <a:solidFill xmlns:a="http://schemas.openxmlformats.org/drawingml/2006/main">
-            <a:srgbClr val="E9F7F2"/>
-          </a:solidFill>
-          <a:ln xmlns:a="http://schemas.openxmlformats.org/drawingml/2006/main" w="0">
-            <a:solidFill>
-              <a:srgbClr val="E9F7F2"/>
-            </a:solidFill>
-            <a:prstDash val="solid"/>
-          </a:ln>
-        </p:spPr>
-      </p:sp>
-      <p:sp>
-        <p:nvSpPr>
-          <p:cNvPr id="32" name="s10-release-k">
-            <a:extLst xmlns:a="http://schemas.openxmlformats.org/drawingml/2006/main">
-              <a:ext uri="{FF2B5EF4-FFF2-40B4-BE49-F238E27FC236}">
-                <a16:creationId xmlns:a16="http://schemas.microsoft.com/office/drawing/2014/main" id="{682E11E6-24DB-4EC4-BA7B-EEF1DA1A7E3C}"/>
-              </a:ext>
-            </a:extLst>
-          </p:cNvPr>
-          <p:cNvSpPr>
-            <a:spLocks xmlns:a="http://schemas.openxmlformats.org/drawingml/2006/main" noGrp="1"/>
-          </p:cNvSpPr>
-          <p:nvPr/>
-        </p:nvSpPr>
-        <p:spPr>
-          <a:xfrm xmlns:a="http://schemas.openxmlformats.org/drawingml/2006/main">
-            <a:off x="8191500" y="1981200"/>
-            <a:ext cx="3181350" cy="228600"/>
-          </a:xfrm>
-          <a:prstGeom xmlns:a="http://schemas.openxmlformats.org/drawingml/2006/main" prst="rect">
-            <a:avLst/>
-          </a:prstGeom>
-        </p:spPr>
-        <p:txBody>
-          <a:bodyPr xmlns:a="http://schemas.openxmlformats.org/drawingml/2006/main" wrap="square" lIns="0" tIns="0" rIns="0" bIns="0" anchor="t">
-            <a:noAutofit/>
-          </a:bodyPr>
-          <a:lstStyle xmlns:a="http://schemas.openxmlformats.org/drawingml/2006/main"/>
-          <a:p xmlns:a="http://schemas.openxmlformats.org/drawingml/2006/main">
-            <a:pPr algn="l">
-              <a:defRPr sz="1125" b="1">
-                <a:solidFill>
-                  <a:srgbClr val="15A777"/>
-                </a:solidFill>
-                <a:latin typeface="Arial"/>
-                <a:ea typeface="Arial"/>
-                <a:cs typeface="Arial"/>
-              </a:defRPr>
-            </a:pPr>
-            <a:r>
-              <a:t>PUBLIC DISTRIBUTION</a:t>
-            </a:r>
-          </a:p>
-        </p:txBody>
-      </p:sp>
-      <p:sp>
-        <p:nvSpPr>
-          <p:cNvPr id="33" name="s10-release-stat">
-            <a:extLst xmlns:a="http://schemas.openxmlformats.org/drawingml/2006/main">
-              <a:ext uri="{FF2B5EF4-FFF2-40B4-BE49-F238E27FC236}">
-                <a16:creationId xmlns:a16="http://schemas.microsoft.com/office/drawing/2014/main" id="{929BFFDB-0F55-4EED-8EE5-0ED35F744B6E}"/>
-              </a:ext>
-            </a:extLst>
-          </p:cNvPr>
-          <p:cNvSpPr>
-            <a:spLocks xmlns:a="http://schemas.openxmlformats.org/drawingml/2006/main" noGrp="1"/>
-          </p:cNvSpPr>
-          <p:nvPr/>
-        </p:nvSpPr>
-        <p:spPr>
-          <a:xfrm xmlns:a="http://schemas.openxmlformats.org/drawingml/2006/main">
-            <a:off x="8191500" y="2400300"/>
-            <a:ext cx="3181350" cy="514350"/>
-          </a:xfrm>
-          <a:prstGeom xmlns:a="http://schemas.openxmlformats.org/drawingml/2006/main" prst="rect">
-            <a:avLst/>
-          </a:prstGeom>
-        </p:spPr>
-        <p:txBody>
-          <a:bodyPr xmlns:a="http://schemas.openxmlformats.org/drawingml/2006/main" wrap="square" lIns="0" tIns="0" rIns="0" bIns="0" anchor="t">
-            <a:noAutofit/>
-          </a:bodyPr>
-          <a:lstStyle xmlns:a="http://schemas.openxmlformats.org/drawingml/2006/main"/>
-          <a:p xmlns:a="http://schemas.openxmlformats.org/drawingml/2006/main">
-            <a:pPr algn="l">
-              <a:defRPr sz="2700" b="1">
-                <a:solidFill>
-                  <a:srgbClr val="15A777"/>
-                </a:solidFill>
-                <a:latin typeface="Arial"/>
-                <a:ea typeface="Arial"/>
-                <a:cs typeface="Arial"/>
-              </a:defRPr>
-            </a:pPr>
-            <a:r>
-              <a:t>VERIFIED</a:t>
-            </a:r>
-          </a:p>
-        </p:txBody>
-      </p:sp>
-      <p:sp>
-        <p:nvSpPr>
-          <p:cNvPr id="34" name="s10-release-list">
-            <a:extLst xmlns:a="http://schemas.openxmlformats.org/drawingml/2006/main">
-              <a:ext uri="{FF2B5EF4-FFF2-40B4-BE49-F238E27FC236}">
-                <a16:creationId xmlns:a16="http://schemas.microsoft.com/office/drawing/2014/main" id="{66129534-E150-49D6-A6A3-15BCBB556D02}"/>
-              </a:ext>
-            </a:extLst>
-          </p:cNvPr>
-          <p:cNvSpPr>
-            <a:spLocks xmlns:a="http://schemas.openxmlformats.org/drawingml/2006/main" noGrp="1"/>
-          </p:cNvSpPr>
-          <p:nvPr/>
-        </p:nvSpPr>
-        <p:spPr>
-          <a:xfrm xmlns:a="http://schemas.openxmlformats.org/drawingml/2006/main">
-            <a:off x="8191500" y="3181350"/>
-            <a:ext cx="3181350" cy="1752600"/>
-          </a:xfrm>
-          <a:prstGeom xmlns:a="http://schemas.openxmlformats.org/drawingml/2006/main" prst="rect">
-            <a:avLst/>
-          </a:prstGeom>
-        </p:spPr>
-        <p:txBody>
-          <a:bodyPr xmlns:a="http://schemas.openxmlformats.org/drawingml/2006/main" wrap="square" lIns="0" tIns="0" rIns="0" bIns="0" anchor="t">
-            <a:noAutofit/>
-          </a:bodyPr>
-          <a:lstStyle xmlns:a="http://schemas.openxmlformats.org/drawingml/2006/main"/>
-          <a:p xmlns:a="http://schemas.openxmlformats.org/drawingml/2006/main">
-            <a:pPr algn="l">
-              <a:defRPr sz="1350" b="0">
-                <a:solidFill>
-                  <a:srgbClr val="0A1224"/>
-                </a:solidFill>
-                <a:latin typeface="Consolas"/>
-                <a:ea typeface="Consolas"/>
-                <a:cs typeface="Consolas"/>
-              </a:defRPr>
-            </a:pPr>
-            <a:r>
-              <a:t>clean tarball install
-public npm install
-CLI release route
-MCP init + 10 tools
-candidate SHA = registry
-tag / version / ref / pin</a:t>
-            </a:r>
-          </a:p>
-        </p:txBody>
-      </p:sp>
-      <p:sp>
-        <p:nvSpPr>
-          <p:cNvPr id="35" name="s10-release-platforms">
-            <a:extLst xmlns:a="http://schemas.openxmlformats.org/drawingml/2006/main">
-              <a:ext uri="{FF2B5EF4-FFF2-40B4-BE49-F238E27FC236}">
-                <a16:creationId xmlns:a16="http://schemas.microsoft.com/office/drawing/2014/main" id="{9D419C57-4AAB-4121-B1FD-48D9C18D9A46}"/>
-              </a:ext>
-            </a:extLst>
-          </p:cNvPr>
-          <p:cNvSpPr>
-            <a:spLocks xmlns:a="http://schemas.openxmlformats.org/drawingml/2006/main" noGrp="1"/>
-          </p:cNvSpPr>
-          <p:nvPr/>
-        </p:nvSpPr>
-        <p:spPr>
-          <a:xfrm xmlns:a="http://schemas.openxmlformats.org/drawingml/2006/main">
-            <a:off x="8191500" y="5010150"/>
-            <a:ext cx="3181350" cy="266700"/>
-          </a:xfrm>
-          <a:prstGeom xmlns:a="http://schemas.openxmlformats.org/drawingml/2006/main" prst="rect">
-            <a:avLst/>
-          </a:prstGeom>
-        </p:spPr>
-        <p:txBody>
-          <a:bodyPr xmlns:a="http://schemas.openxmlformats.org/drawingml/2006/main" wrap="square" lIns="0" tIns="0" rIns="0" bIns="0" anchor="t">
-            <a:noAutofit/>
-          </a:bodyPr>
-          <a:lstStyle xmlns:a="http://schemas.openxmlformats.org/drawingml/2006/main"/>
-          <a:p xmlns:a="http://schemas.openxmlformats.org/drawingml/2006/main">
-            <a:pPr algn="l">
-              <a:defRPr sz="1275" b="1">
-                <a:solidFill>
-                  <a:srgbClr val="526071"/>
-                </a:solidFill>
-                <a:latin typeface="Arial"/>
-                <a:ea typeface="Arial"/>
-                <a:cs typeface="Arial"/>
-              </a:defRPr>
-            </a:pPr>
-            <a:r>
-              <a:t>Windows | macOS | Linux</a:t>
-            </a:r>
-          </a:p>
-        </p:txBody>
-      </p:sp>
-      <p:cxnSp>
-        <p:nvCxnSpPr>
-          <p:cNvPr id="74" name="footer-rule-9"/>
-          <p:cNvCxnSpPr/>
-          <p:nvPr/>
-        </p:nvCxnSpPr>
-        <p:spPr>
-          <a:xfrm xmlns:a="http://schemas.openxmlformats.org/drawingml/2006/main">
-            <a:off x="400050" y="6162675"/>
-            <a:ext cx="11391900" cy="953"/>
-          </a:xfrm>
-          <a:prstGeom xmlns:a="http://schemas.openxmlformats.org/drawingml/2006/main" prst="straightConnector1">
-            <a:avLst/>
-          </a:prstGeom>
-          <a:ln xmlns:a="http://schemas.openxmlformats.org/drawingml/2006/main" w="9525">
-            <a:solidFill>
-              <a:srgbClr val="B8BCC4"/>
-            </a:solidFill>
-            <a:prstDash val="solid"/>
-          </a:ln>
-        </p:spPr>
-      </p:cxnSp>
-      <p:sp>
-        <p:nvSpPr>
-          <p:cNvPr id="37" name="footer-source-9">
-            <a:extLst xmlns:a="http://schemas.openxmlformats.org/drawingml/2006/main">
-              <a:ext uri="{FF2B5EF4-FFF2-40B4-BE49-F238E27FC236}">
-                <a16:creationId xmlns:a16="http://schemas.microsoft.com/office/drawing/2014/main" id="{F2884D1A-7FBA-4BE2-B510-EE6331FF47E0}"/>
+          <p:cNvPr id="21" name="footer-source-9">
+            <a:extLst xmlns:a="http://schemas.openxmlformats.org/drawingml/2006/main">
+              <a:ext uri="{FF2B5EF4-FFF2-40B4-BE49-F238E27FC236}">
+                <a16:creationId xmlns:a16="http://schemas.microsoft.com/office/drawing/2014/main" id="{5E2D473C-B54D-4F0C-8B1A-ABB4C8FABE77}"/>
               </a:ext>
             </a:extLst>
           </p:cNvPr>
@@ -15269,17 +16983,17 @@
               </a:defRPr>
             </a:pPr>
             <a:r>
-              <a:t>CI run 29687844288 | Vertex Palace 0.2.3 release verification | all listed gates passed</a:t>
-            </a:r>
-          </a:p>
-        </p:txBody>
-      </p:sp>
-      <p:sp>
-        <p:nvSpPr>
-          <p:cNvPr id="38" name="footer-number-9">
-            <a:extLst xmlns:a="http://schemas.openxmlformats.org/drawingml/2006/main">
-              <a:ext uri="{FF2B5EF4-FFF2-40B4-BE49-F238E27FC236}">
-                <a16:creationId xmlns:a16="http://schemas.microsoft.com/office/drawing/2014/main" id="{6E9A9B83-FB44-4B84-B22C-6FFDECC49E87}"/>
+              <a:t>Each profile n=4 paired trials | *v0.2.1 omitted seeded useful memory | benchmarks-demo adaptive-pilot-v2.2</a:t>
+            </a:r>
+          </a:p>
+        </p:txBody>
+      </p:sp>
+      <p:sp>
+        <p:nvSpPr>
+          <p:cNvPr id="22" name="footer-number-9">
+            <a:extLst xmlns:a="http://schemas.openxmlformats.org/drawingml/2006/main">
+              <a:ext uri="{FF2B5EF4-FFF2-40B4-BE49-F238E27FC236}">
+                <a16:creationId xmlns:a16="http://schemas.microsoft.com/office/drawing/2014/main" id="{BEF58151-64C7-4D79-A49F-873CD8DF218B}"/>
               </a:ext>
             </a:extLst>
           </p:cNvPr>
@@ -15319,10 +17033,58 @@
           </a:p>
         </p:txBody>
       </p:sp>
+      <p:graphicFrame>
+        <p:nvGraphicFramePr>
+          <p:cNvPr id="48" name="Chart"/>
+          <p:cNvGraphicFramePr/>
+          <p:nvPr/>
+        </p:nvGraphicFramePr>
+        <p:xfrm>
+          <a:off xmlns:a="http://schemas.openxmlformats.org/drawingml/2006/main" x="400050" y="1924050"/>
+          <a:ext xmlns:a="http://schemas.openxmlformats.org/drawingml/2006/main" cx="3524250" cy="3124200"/>
+        </p:xfrm>
+        <a:graphic xmlns:a="http://schemas.openxmlformats.org/drawingml/2006/main">
+          <a:graphicData uri="http://schemas.openxmlformats.org/drawingml/2006/chart">
+            <c:chart xmlns:r="http://schemas.openxmlformats.org/officeDocument/2006/relationships" xmlns:c="http://schemas.openxmlformats.org/drawingml/2006/chart" r:id="Rf02af0270f3149cb"/>
+          </a:graphicData>
+        </a:graphic>
+      </p:graphicFrame>
+      <p:graphicFrame>
+        <p:nvGraphicFramePr>
+          <p:cNvPr id="49" name="Chart"/>
+          <p:cNvGraphicFramePr/>
+          <p:nvPr/>
+        </p:nvGraphicFramePr>
+        <p:xfrm>
+          <a:off xmlns:a="http://schemas.openxmlformats.org/drawingml/2006/main" x="4324350" y="1924050"/>
+          <a:ext xmlns:a="http://schemas.openxmlformats.org/drawingml/2006/main" cx="3524250" cy="3124200"/>
+        </p:xfrm>
+        <a:graphic xmlns:a="http://schemas.openxmlformats.org/drawingml/2006/main">
+          <a:graphicData uri="http://schemas.openxmlformats.org/drawingml/2006/chart">
+            <c:chart xmlns:r="http://schemas.openxmlformats.org/officeDocument/2006/relationships" xmlns:c="http://schemas.openxmlformats.org/drawingml/2006/chart" r:id="R6bec13dff3884e5f"/>
+          </a:graphicData>
+        </a:graphic>
+      </p:graphicFrame>
+      <p:graphicFrame>
+        <p:nvGraphicFramePr>
+          <p:cNvPr id="50" name="Chart"/>
+          <p:cNvGraphicFramePr/>
+          <p:nvPr/>
+        </p:nvGraphicFramePr>
+        <p:xfrm>
+          <a:off xmlns:a="http://schemas.openxmlformats.org/drawingml/2006/main" x="8248650" y="1924050"/>
+          <a:ext xmlns:a="http://schemas.openxmlformats.org/drawingml/2006/main" cx="3524250" cy="3124200"/>
+        </p:xfrm>
+        <a:graphic xmlns:a="http://schemas.openxmlformats.org/drawingml/2006/main">
+          <a:graphicData uri="http://schemas.openxmlformats.org/drawingml/2006/chart">
+            <c:chart xmlns:r="http://schemas.openxmlformats.org/officeDocument/2006/relationships" xmlns:c="http://schemas.openxmlformats.org/drawingml/2006/chart" r:id="R81507b522d9a4325"/>
+          </a:graphicData>
+        </a:graphic>
+      </p:graphicFrame>
     </p:spTree>
     <p:extLst>
       <p:ext uri="{BB962C8B-B14F-4D97-AF65-F5344CB8AC3E}">
-        <p14:creationId xmlns:p14="http://schemas.microsoft.com/office/powerpoint/2010/main" val="1769926839"/>
+        <p14:creationId xmlns:p14="http://schemas.microsoft.com/office/powerpoint/2010/main" val="1620632066"/>
       </p:ext>
     </p:extLst>
   </p:cSld>
